--- a/RCI_Besoins_Tresorerie_Comptes_Paiement_30-09-2026.pptx
+++ b/RCI_Besoins_Tresorerie_Comptes_Paiement_30-09-2026.pptx
@@ -8,9 +8,11 @@
     <p:sldId id="256" r:id="rId2"/>
     <p:sldId id="257" r:id="rId3"/>
     <p:sldId id="258" r:id="rId4"/>
+    <p:sldId id="259" r:id="rId5"/>
+    <p:sldId id="260" r:id="rId6"/>
   </p:sldIdLst>
   <p:notesMasterIdLst>
-    <p:notesMasterId r:id="rId5"/>
+    <p:notesMasterId r:id="rId7"/>
   </p:notesMasterIdLst>
   <p:sldSz cx="12192000" cy="6858000"/>
   <p:notesSz cx="6858000" cy="12192000"/>
@@ -504,7 +506,7 @@
           <a:p>
             <a:r>
               <a:rPr lang="en-US" dirty="0"/>
-              <a:t>Source : Reporting_Hebdo_CIV_30-09-2026.xlsx. Fonctionnement = balance âgée de l'audit au 30/09 (hors intragroupe), impôts, cotisations, salaires et flux SCO AO du reporting du 21/09. Projets = cash plans des bilans financiers du 02/10 (montants non réglés) ; octobre placé dans la semaine connue de PICI Projets, sinon en S2. Comptes payeurs : comptes « Dédié besoin de fonctionnement » des sociétés (y compris BNI-RIVIERA courant), comptes « Dédié paiement CPI » des projets, compte Debt Service de FIRST. Déficits mesurés en fin S5, entité par entité, sans compensation.</a:t>
+              <a:t>Couverture. Position de trésorerie CI au 30/09/2026 ; audit des décaissements fournisseurs du 30/09/2026 ; cash plans des bilans financiers du 02/10/2026 (Riviera Park, Village Notre Père) ; reporting cash hebdomadaire CIV.</a:t>
             </a:r>
             <a:endParaRPr lang="en-US" dirty="0"/>
           </a:p>
@@ -592,7 +594,7 @@
           <a:p>
             <a:r>
               <a:rPr lang="en-US" dirty="0"/>
-              <a:t>Trésorerie 30/09 = comptes de l'entité dans la position CI. SCO AO : fournisseurs projet payés depuis les comptes « Dédié paiement Projet SCO » (BACI-Projet 22,6 et BACI-AGORA 0,2) ; le reste (salaires 24,3, cotisations 16,6, fournisseurs 21,7, protocole Thulium 15,0, impôts 9,5, moins 3,6 d'encaissement client) depuis BACI courant 5,4, BOA 0,9 et Ecobank 0,1. FIRST : la redevance Diaby a exactement le montant du compte STANBIC-FIRST_LL (42,5) ; à confirmer avant de l'y imputer. Village Notre Père, autres : foncier 3,8 et autres dépenses 13,1. Riviera Park, autres : autres dépenses 37,5 et foncier 26,6.</a:t>
+              <a:t/>
             </a:r>
             <a:endParaRPr lang="en-US" dirty="0"/>
           </a:p>
@@ -680,6 +682,182 @@
           <a:p>
             <a:r>
               <a:rPr lang="en-US" dirty="0"/>
+              <a:t>Source : Reporting_Hebdo_CIV_30-09-2026.xlsx. Fonctionnement = balance âgée de l'audit au 30/09 (hors intragroupe), impôts, cotisations, salaires et flux SCO AO du reporting du 21/09. Projets = cash plans des bilans financiers du 02/10 (montants non réglés) ; octobre placé dans la semaine connue de PICI Projets, sinon en S2. Comptes payeurs : comptes « Dédié besoin de fonctionnement » des sociétés (y compris BNI-RIVIERA courant), comptes « Dédié paiement CPI » des projets, compte Debt Service de FIRST. Déficits mesurés en fin S5, entité par entité, sans compensation.</a:t>
+            </a:r>
+            <a:endParaRPr lang="en-US" dirty="0"/>
+          </a:p>
+        </p:txBody>
+      </p:sp>
+      <p:sp>
+        <p:nvSpPr>
+          <p:cNvPr id="4" name="Slide Number Placeholder 3"/>
+          <p:cNvSpPr>
+            <a:spLocks noGrp="1"/>
+          </p:cNvSpPr>
+          <p:nvPr>
+            <p:ph type="sldNum" sz="quarter" idx="10"/>
+          </p:nvPr>
+        </p:nvSpPr>
+        <p:spPr/>
+        <p:txBody>
+          <a:bodyPr/>
+          <a:lstStyle/>
+          <a:p>
+            <a:fld id="{F7021451-1387-4CA6-816F-3879F97B5CBC}" type="slidenum">
+              <a:rPr lang="en-US"/>
+              <a:t>3</a:t>
+            </a:fld>
+            <a:endParaRPr lang="en-US"/>
+          </a:p>
+        </p:txBody>
+      </p:sp>
+    </p:spTree>
+    <p:extLst>
+      <p:ext uri="{BB962C8B-B14F-4D97-AF65-F5344CB8AC3E}">
+        <p14:creationId xmlns:p14="http://schemas.microsoft.com/office/powerpoint/2010/main" val="1024086991"/>
+      </p:ext>
+    </p:extLst>
+  </p:cSld>
+  <p:clrMapOvr>
+    <a:masterClrMapping/>
+  </p:clrMapOvr>
+</p:notes>
+</file>
+
+<file path=ppt/notesSlides/notesSlide4.xml><?xml version="1.0" encoding="utf-8"?>
+<p:notes xmlns:a="http://schemas.openxmlformats.org/drawingml/2006/main" xmlns:r="http://schemas.openxmlformats.org/officeDocument/2006/relationships" xmlns:p="http://schemas.openxmlformats.org/presentationml/2006/main">
+  <p:cSld>
+    <p:spTree>
+      <p:nvGrpSpPr>
+        <p:cNvPr id="1" name=""/>
+        <p:cNvGrpSpPr/>
+        <p:nvPr/>
+      </p:nvGrpSpPr>
+      <p:grpSpPr>
+        <a:xfrm>
+          <a:off x="0" y="0"/>
+          <a:ext cx="0" cy="0"/>
+          <a:chOff x="0" y="0"/>
+          <a:chExt cx="0" cy="0"/>
+        </a:xfrm>
+      </p:grpSpPr>
+      <p:sp>
+        <p:nvSpPr>
+          <p:cNvPr id="2" name="Slide Image Placeholder 1"/>
+          <p:cNvSpPr>
+            <a:spLocks noGrp="1" noRot="1" noChangeAspect="1"/>
+          </p:cNvSpPr>
+          <p:nvPr>
+            <p:ph type="sldImg"/>
+          </p:nvPr>
+        </p:nvSpPr>
+        <p:spPr/>
+      </p:sp>
+      <p:sp>
+        <p:nvSpPr>
+          <p:cNvPr id="3" name="Notes Placeholder 2"/>
+          <p:cNvSpPr>
+            <a:spLocks noGrp="1"/>
+          </p:cNvSpPr>
+          <p:nvPr>
+            <p:ph type="body" idx="1"/>
+          </p:nvPr>
+        </p:nvSpPr>
+        <p:spPr/>
+        <p:txBody>
+          <a:bodyPr/>
+          <a:lstStyle/>
+          <a:p>
+            <a:r>
+              <a:rPr lang="en-US" dirty="0"/>
+              <a:t>Trésorerie 30/09 = comptes de l'entité dans la position CI. SCO AO : fournisseurs projet payés depuis les comptes « Dédié paiement Projet SCO » (BACI-Projet 22,6 et BACI-AGORA 0,2) ; le reste (salaires 24,3, cotisations 16,6, fournisseurs 21,7, protocole Thulium 15,0, impôts 9,5, moins 3,6 d'encaissement client) depuis BACI courant 5,4, BOA 0,9 et Ecobank 0,1. FIRST : la redevance Diaby a exactement le montant du compte STANBIC-FIRST_LL (42,5) ; à confirmer avant de l'y imputer. Village Notre Père, autres : foncier 3,8 et autres dépenses 13,1. Riviera Park, autres : autres dépenses 37,5 et foncier 26,6.</a:t>
+            </a:r>
+            <a:endParaRPr lang="en-US" dirty="0"/>
+          </a:p>
+        </p:txBody>
+      </p:sp>
+      <p:sp>
+        <p:nvSpPr>
+          <p:cNvPr id="4" name="Slide Number Placeholder 3"/>
+          <p:cNvSpPr>
+            <a:spLocks noGrp="1"/>
+          </p:cNvSpPr>
+          <p:nvPr>
+            <p:ph type="sldNum" sz="quarter" idx="10"/>
+          </p:nvPr>
+        </p:nvSpPr>
+        <p:spPr/>
+        <p:txBody>
+          <a:bodyPr/>
+          <a:lstStyle/>
+          <a:p>
+            <a:fld id="{F7021451-1387-4CA6-816F-3879F97B5CBC}" type="slidenum">
+              <a:rPr lang="en-US"/>
+              <a:t>4</a:t>
+            </a:fld>
+            <a:endParaRPr lang="en-US"/>
+          </a:p>
+        </p:txBody>
+      </p:sp>
+    </p:spTree>
+    <p:extLst>
+      <p:ext uri="{BB962C8B-B14F-4D97-AF65-F5344CB8AC3E}">
+        <p14:creationId xmlns:p14="http://schemas.microsoft.com/office/powerpoint/2010/main" val="1024086991"/>
+      </p:ext>
+    </p:extLst>
+  </p:cSld>
+  <p:clrMapOvr>
+    <a:masterClrMapping/>
+  </p:clrMapOvr>
+</p:notes>
+</file>
+
+<file path=ppt/notesSlides/notesSlide5.xml><?xml version="1.0" encoding="utf-8"?>
+<p:notes xmlns:a="http://schemas.openxmlformats.org/drawingml/2006/main" xmlns:r="http://schemas.openxmlformats.org/officeDocument/2006/relationships" xmlns:p="http://schemas.openxmlformats.org/presentationml/2006/main">
+  <p:cSld>
+    <p:spTree>
+      <p:nvGrpSpPr>
+        <p:cNvPr id="1" name=""/>
+        <p:cNvGrpSpPr/>
+        <p:nvPr/>
+      </p:nvGrpSpPr>
+      <p:grpSpPr>
+        <a:xfrm>
+          <a:off x="0" y="0"/>
+          <a:ext cx="0" cy="0"/>
+          <a:chOff x="0" y="0"/>
+          <a:chExt cx="0" cy="0"/>
+        </a:xfrm>
+      </p:grpSpPr>
+      <p:sp>
+        <p:nvSpPr>
+          <p:cNvPr id="2" name="Slide Image Placeholder 1"/>
+          <p:cNvSpPr>
+            <a:spLocks noGrp="1" noRot="1" noChangeAspect="1"/>
+          </p:cNvSpPr>
+          <p:nvPr>
+            <p:ph type="sldImg"/>
+          </p:nvPr>
+        </p:nvSpPr>
+        <p:spPr/>
+      </p:sp>
+      <p:sp>
+        <p:nvSpPr>
+          <p:cNvPr id="3" name="Notes Placeholder 2"/>
+          <p:cNvSpPr>
+            <a:spLocks noGrp="1"/>
+          </p:cNvSpPr>
+          <p:nvPr>
+            <p:ph type="body" idx="1"/>
+          </p:nvPr>
+        </p:nvSpPr>
+        <p:spPr/>
+        <p:txBody>
+          <a:bodyPr/>
+          <a:lstStyle/>
+          <a:p>
+            <a:r>
+              <a:rPr lang="en-US" dirty="0"/>
               <a:t>BNI-RIVIERA courant (1 772,0 M) : 10,9 M pour le fonctionnement Riviera, 601,4 M pour le fonds projet RP, 1 157,4 M avancés à TERASSON ; reste 2,3 M. La position CI le marque « Affectation placement ? Ou besoin de fonctionnement ». SG-PICI porte la destination « Dédié besoin de fonctionnement et Netting autres compagnies CIV » : compte naturel des avances intragroupe, à alimenter d'abord depuis ECOBANK-PICI (368,2 M). L'encaissement PICI de 656,0 M n'est compté dans aucune option.</a:t>
             </a:r>
             <a:endParaRPr lang="en-US" dirty="0"/>
@@ -703,7 +881,7 @@
           <a:p>
             <a:fld id="{F7021451-1387-4CA6-816F-3879F97B5CBC}" type="slidenum">
               <a:rPr lang="en-US"/>
-              <a:t>3</a:t>
+              <a:t>5</a:t>
             </a:fld>
             <a:endParaRPr lang="en-US"/>
           </a:p>
@@ -1035,6 +1213,218 @@
     <p:bg>
       <p:bgPr>
         <a:solidFill>
+          <a:srgbClr val="002C50"/>
+        </a:solidFill>
+      </p:bgPr>
+    </p:bg>
+    <p:spTree>
+      <p:nvGrpSpPr>
+        <p:cNvPr id="1" name=""/>
+        <p:cNvGrpSpPr/>
+        <p:nvPr/>
+      </p:nvGrpSpPr>
+      <p:grpSpPr>
+        <a:xfrm>
+          <a:off x="0" y="0"/>
+          <a:ext cx="0" cy="0"/>
+          <a:chOff x="0" y="0"/>
+          <a:chExt cx="0" cy="0"/>
+        </a:xfrm>
+      </p:grpSpPr>
+      <p:pic>
+        <p:nvPicPr>
+          <p:cNvPr id="2" name="Image 0" descr="preencoded.png">    </p:cNvPr>
+          <p:cNvPicPr>
+            <a:picLocks noChangeAspect="1"/>
+          </p:cNvPicPr>
+          <p:nvPr/>
+        </p:nvPicPr>
+        <p:blipFill>
+          <a:blip r:embed="rId1"/>
+          <a:stretch>
+            <a:fillRect/>
+          </a:stretch>
+        </p:blipFill>
+        <p:spPr>
+          <a:xfrm>
+            <a:off x="7315200" y="0"/>
+            <a:ext cx="4873752" cy="6858000"/>
+          </a:xfrm>
+          <a:prstGeom prst="rect">
+            <a:avLst/>
+          </a:prstGeom>
+        </p:spPr>
+      </p:pic>
+      <p:sp>
+        <p:nvSpPr>
+          <p:cNvPr id="3" name="Text 0"/>
+          <p:cNvSpPr txBox="1"/>
+          <p:nvPr/>
+        </p:nvSpPr>
+        <p:spPr>
+          <a:xfrm>
+            <a:off x="731520" y="1371600"/>
+            <a:ext cx="6309360" cy="365760"/>
+          </a:xfrm>
+          <a:prstGeom prst="rect">
+            <a:avLst/>
+          </a:prstGeom>
+          <a:noFill/>
+          <a:ln/>
+        </p:spPr>
+        <p:txBody>
+          <a:bodyPr wrap="square" lIns="0" tIns="0" rIns="0" bIns="0" rtlCol="0" anchor="ctr"/>
+          <a:lstStyle/>
+          <a:p>
+            <a:pPr indent="0" marL="0">
+              <a:buNone/>
+            </a:pPr>
+            <a:r>
+              <a:rPr lang="en-US" sz="1400" b="1" spc="200" kern="0" dirty="0">
+                <a:solidFill>
+                  <a:srgbClr val="D4B483"/>
+                </a:solidFill>
+                <a:latin typeface="Calibri" pitchFamily="34" charset="0"/>
+                <a:ea typeface="Calibri" pitchFamily="34" charset="-122"/>
+                <a:cs typeface="Calibri" pitchFamily="34" charset="-120"/>
+              </a:rPr>
+              <a:t>SOCIÉTÉS RCI – TRÉSORERIE</a:t>
+            </a:r>
+            <a:endParaRPr lang="en-US" sz="1400" dirty="0"/>
+          </a:p>
+        </p:txBody>
+      </p:sp>
+      <p:sp>
+        <p:nvSpPr>
+          <p:cNvPr id="4" name="Text 1"/>
+          <p:cNvSpPr txBox="1"/>
+          <p:nvPr/>
+        </p:nvSpPr>
+        <p:spPr>
+          <a:xfrm>
+            <a:off x="731520" y="1828800"/>
+            <a:ext cx="6309360" cy="1828800"/>
+          </a:xfrm>
+          <a:prstGeom prst="rect">
+            <a:avLst/>
+          </a:prstGeom>
+          <a:noFill/>
+          <a:ln/>
+        </p:spPr>
+        <p:txBody>
+          <a:bodyPr wrap="square" lIns="0" tIns="0" rIns="0" bIns="0" rtlCol="0" anchor="t"/>
+          <a:lstStyle/>
+          <a:p>
+            <a:pPr indent="0" marL="0">
+              <a:buNone/>
+            </a:pPr>
+            <a:r>
+              <a:rPr lang="en-US" sz="3400" b="1" dirty="0">
+                <a:solidFill>
+                  <a:srgbClr val="FFFFFF"/>
+                </a:solidFill>
+                <a:latin typeface="Calibri" pitchFamily="34" charset="0"/>
+                <a:ea typeface="Calibri" pitchFamily="34" charset="-122"/>
+                <a:cs typeface="Calibri" pitchFamily="34" charset="-120"/>
+              </a:rPr>
+              <a:t>Besoins de trésorerie et comptes de paiement</a:t>
+            </a:r>
+            <a:endParaRPr lang="en-US" sz="3400" dirty="0"/>
+          </a:p>
+        </p:txBody>
+      </p:sp>
+      <p:sp>
+        <p:nvSpPr>
+          <p:cNvPr id="5" name="Text 2"/>
+          <p:cNvSpPr txBox="1"/>
+          <p:nvPr/>
+        </p:nvSpPr>
+        <p:spPr>
+          <a:xfrm>
+            <a:off x="731520" y="3840480"/>
+            <a:ext cx="6309360" cy="457200"/>
+          </a:xfrm>
+          <a:prstGeom prst="rect">
+            <a:avLst/>
+          </a:prstGeom>
+          <a:noFill/>
+          <a:ln/>
+        </p:spPr>
+        <p:txBody>
+          <a:bodyPr wrap="square" lIns="0" tIns="0" rIns="0" bIns="0" rtlCol="0" anchor="ctr"/>
+          <a:lstStyle/>
+          <a:p>
+            <a:pPr indent="0" marL="0">
+              <a:buNone/>
+            </a:pPr>
+            <a:r>
+              <a:rPr lang="en-US" sz="1500" dirty="0">
+                <a:solidFill>
+                  <a:srgbClr val="D4B483"/>
+                </a:solidFill>
+                <a:latin typeface="Calibri" pitchFamily="34" charset="0"/>
+                <a:ea typeface="Calibri" pitchFamily="34" charset="-122"/>
+                <a:cs typeface="Calibri" pitchFamily="34" charset="-120"/>
+              </a:rPr>
+              <a:t>Situation au 30/09/2026 – échéancier S1 à S5 (05/10 → 08/11/2026)</a:t>
+            </a:r>
+            <a:endParaRPr lang="en-US" sz="1500" dirty="0"/>
+          </a:p>
+        </p:txBody>
+      </p:sp>
+      <p:sp>
+        <p:nvSpPr>
+          <p:cNvPr id="6" name="Text 3"/>
+          <p:cNvSpPr txBox="1"/>
+          <p:nvPr/>
+        </p:nvSpPr>
+        <p:spPr>
+          <a:xfrm>
+            <a:off x="731520" y="5943600"/>
+            <a:ext cx="6309360" cy="365760"/>
+          </a:xfrm>
+          <a:prstGeom prst="rect">
+            <a:avLst/>
+          </a:prstGeom>
+          <a:noFill/>
+          <a:ln/>
+        </p:spPr>
+        <p:txBody>
+          <a:bodyPr wrap="square" lIns="0" tIns="0" rIns="0" bIns="0" rtlCol="0" anchor="ctr"/>
+          <a:lstStyle/>
+          <a:p>
+            <a:pPr indent="0" marL="0">
+              <a:buNone/>
+            </a:pPr>
+            <a:r>
+              <a:rPr lang="en-US" sz="1100" dirty="0">
+                <a:solidFill>
+                  <a:srgbClr val="FFFFFF"/>
+                </a:solidFill>
+                <a:latin typeface="Calibri" pitchFamily="34" charset="0"/>
+                <a:ea typeface="Calibri" pitchFamily="34" charset="-122"/>
+                <a:cs typeface="Calibri" pitchFamily="34" charset="-120"/>
+              </a:rPr>
+              <a:t>Direction Trésorerie &amp; Financement – Groupe Duval Afrique  |  Octobre 2026</a:t>
+            </a:r>
+            <a:endParaRPr lang="en-US" sz="1100" dirty="0"/>
+          </a:p>
+        </p:txBody>
+      </p:sp>
+    </p:spTree>
+  </p:cSld>
+  <p:clrMapOvr>
+    <a:masterClrMapping/>
+  </p:clrMapOvr>
+</p:sld>
+</file>
+
+<file path=ppt/slides/slide2.xml><?xml version="1.0" encoding="utf-8"?>
+<p:sld xmlns:a="http://schemas.openxmlformats.org/drawingml/2006/main" xmlns:r="http://schemas.openxmlformats.org/officeDocument/2006/relationships" xmlns:p="http://schemas.openxmlformats.org/presentationml/2006/main">
+  <p:cSld name="Slide 2">
+    <p:bg>
+      <p:bgPr>
+        <a:solidFill>
           <a:srgbClr val="FFFFFF"/>
         </a:solidFill>
       </p:bgPr>
@@ -1086,7 +1476,855 @@
                 <a:ea typeface="Calibri" pitchFamily="34" charset="-122"/>
                 <a:cs typeface="Calibri" pitchFamily="34" charset="-120"/>
               </a:rPr>
-              <a:t>Besoin de trésorerie – 1. Besoin par semaine</a:t>
+              <a:t>Sommaire</a:t>
+            </a:r>
+            <a:endParaRPr lang="en-US" sz="2600" dirty="0"/>
+          </a:p>
+        </p:txBody>
+      </p:sp>
+      <p:sp>
+        <p:nvSpPr>
+          <p:cNvPr id="3" name="Text 1"/>
+          <p:cNvSpPr txBox="1"/>
+          <p:nvPr/>
+        </p:nvSpPr>
+        <p:spPr>
+          <a:xfrm>
+            <a:off x="457200" y="822960"/>
+            <a:ext cx="11247120" cy="320040"/>
+          </a:xfrm>
+          <a:prstGeom prst="rect">
+            <a:avLst/>
+          </a:prstGeom>
+          <a:noFill/>
+          <a:ln/>
+        </p:spPr>
+        <p:txBody>
+          <a:bodyPr wrap="square" lIns="0" tIns="0" rIns="0" bIns="0" rtlCol="0" anchor="ctr"/>
+          <a:lstStyle/>
+          <a:p>
+            <a:pPr indent="0" marL="0">
+              <a:buNone/>
+            </a:pPr>
+            <a:r>
+              <a:rPr lang="en-US" sz="1300" dirty="0">
+                <a:solidFill>
+                  <a:srgbClr val="9D8C74"/>
+                </a:solidFill>
+                <a:latin typeface="Calibri" pitchFamily="34" charset="0"/>
+                <a:ea typeface="Calibri" pitchFamily="34" charset="-122"/>
+                <a:cs typeface="Calibri" pitchFamily="34" charset="-120"/>
+              </a:rPr>
+              <a:t>Position de trésorerie au 30/09/2026 – échéancier S1 à S5 (05/10 → 08/11/2026), antériorités en S1 – montants en MFCFA</a:t>
+            </a:r>
+            <a:endParaRPr lang="en-US" sz="1300" dirty="0"/>
+          </a:p>
+        </p:txBody>
+      </p:sp>
+      <p:sp>
+        <p:nvSpPr>
+          <p:cNvPr id="4" name="Shape 2"/>
+          <p:cNvSpPr/>
+          <p:nvPr/>
+        </p:nvSpPr>
+        <p:spPr>
+          <a:xfrm>
+            <a:off x="457200" y="1463040"/>
+            <a:ext cx="5468112" cy="4480560"/>
+          </a:xfrm>
+          <a:prstGeom prst="roundRect">
+            <a:avLst>
+              <a:gd name="adj" fmla="val 2041"/>
+            </a:avLst>
+          </a:prstGeom>
+          <a:solidFill>
+            <a:srgbClr val="EEF2F6"/>
+          </a:solidFill>
+          <a:ln w="12700">
+            <a:solidFill>
+              <a:srgbClr val="EEF2F6"/>
+            </a:solidFill>
+            <a:prstDash val="solid"/>
+          </a:ln>
+        </p:spPr>
+      </p:sp>
+      <p:sp>
+        <p:nvSpPr>
+          <p:cNvPr id="5" name="Text 3"/>
+          <p:cNvSpPr txBox="1"/>
+          <p:nvPr/>
+        </p:nvSpPr>
+        <p:spPr>
+          <a:xfrm>
+            <a:off x="777240" y="1691640"/>
+            <a:ext cx="4846320" cy="457200"/>
+          </a:xfrm>
+          <a:prstGeom prst="rect">
+            <a:avLst/>
+          </a:prstGeom>
+          <a:noFill/>
+          <a:ln/>
+        </p:spPr>
+        <p:txBody>
+          <a:bodyPr wrap="square" lIns="0" tIns="0" rIns="0" bIns="0" rtlCol="0" anchor="ctr"/>
+          <a:lstStyle/>
+          <a:p>
+            <a:pPr indent="0" marL="0">
+              <a:buNone/>
+            </a:pPr>
+            <a:r>
+              <a:rPr lang="en-US" sz="2200" b="1" dirty="0">
+                <a:solidFill>
+                  <a:srgbClr val="002C50"/>
+                </a:solidFill>
+                <a:latin typeface="Calibri" pitchFamily="34" charset="0"/>
+                <a:ea typeface="Calibri" pitchFamily="34" charset="-122"/>
+                <a:cs typeface="Calibri" pitchFamily="34" charset="-120"/>
+              </a:rPr>
+              <a:t>A. Besoin de trésorerie</a:t>
+            </a:r>
+            <a:endParaRPr lang="en-US" sz="2200" dirty="0"/>
+          </a:p>
+        </p:txBody>
+      </p:sp>
+      <p:sp>
+        <p:nvSpPr>
+          <p:cNvPr id="6" name="Text 4"/>
+          <p:cNvSpPr txBox="1"/>
+          <p:nvPr/>
+        </p:nvSpPr>
+        <p:spPr>
+          <a:xfrm>
+            <a:off x="777240" y="2176272"/>
+            <a:ext cx="4846320" cy="320040"/>
+          </a:xfrm>
+          <a:prstGeom prst="rect">
+            <a:avLst/>
+          </a:prstGeom>
+          <a:noFill/>
+          <a:ln/>
+        </p:spPr>
+        <p:txBody>
+          <a:bodyPr wrap="square" lIns="0" tIns="0" rIns="0" bIns="0" rtlCol="0" anchor="ctr"/>
+          <a:lstStyle/>
+          <a:p>
+            <a:pPr indent="0" marL="0">
+              <a:buNone/>
+            </a:pPr>
+            <a:r>
+              <a:rPr lang="en-US" sz="1250" dirty="0">
+                <a:solidFill>
+                  <a:srgbClr val="9D8C74"/>
+                </a:solidFill>
+                <a:latin typeface="Calibri" pitchFamily="34" charset="0"/>
+                <a:ea typeface="Calibri" pitchFamily="34" charset="-122"/>
+                <a:cs typeface="Calibri" pitchFamily="34" charset="-120"/>
+              </a:rPr>
+              <a:t>Fonctionnement, projets et dette, par semaine</a:t>
+            </a:r>
+            <a:endParaRPr lang="en-US" sz="1250" dirty="0"/>
+          </a:p>
+        </p:txBody>
+      </p:sp>
+      <p:sp>
+        <p:nvSpPr>
+          <p:cNvPr id="7" name="Shape 5"/>
+          <p:cNvSpPr/>
+          <p:nvPr/>
+        </p:nvSpPr>
+        <p:spPr>
+          <a:xfrm>
+            <a:off x="777240" y="2788920"/>
+            <a:ext cx="420624" cy="420624"/>
+          </a:xfrm>
+          <a:prstGeom prst="ellipse">
+            <a:avLst/>
+          </a:prstGeom>
+          <a:solidFill>
+            <a:srgbClr val="002C50"/>
+          </a:solidFill>
+          <a:ln w="12700">
+            <a:solidFill>
+              <a:srgbClr val="002C50"/>
+            </a:solidFill>
+            <a:prstDash val="solid"/>
+          </a:ln>
+        </p:spPr>
+      </p:sp>
+      <p:sp>
+        <p:nvSpPr>
+          <p:cNvPr id="8" name="Text 6"/>
+          <p:cNvSpPr txBox="1"/>
+          <p:nvPr/>
+        </p:nvSpPr>
+        <p:spPr>
+          <a:xfrm>
+            <a:off x="777240" y="2788920"/>
+            <a:ext cx="420624" cy="420624"/>
+          </a:xfrm>
+          <a:prstGeom prst="rect">
+            <a:avLst/>
+          </a:prstGeom>
+          <a:noFill/>
+          <a:ln/>
+        </p:spPr>
+        <p:txBody>
+          <a:bodyPr wrap="square" lIns="0" tIns="0" rIns="0" bIns="0" rtlCol="0" anchor="ctr"/>
+          <a:lstStyle/>
+          <a:p>
+            <a:pPr algn="ctr" indent="0" marL="0">
+              <a:buNone/>
+            </a:pPr>
+            <a:r>
+              <a:rPr lang="en-US" sz="1300" b="1" dirty="0">
+                <a:solidFill>
+                  <a:srgbClr val="FFFFFF"/>
+                </a:solidFill>
+                <a:latin typeface="Calibri" pitchFamily="34" charset="0"/>
+                <a:ea typeface="Calibri" pitchFamily="34" charset="-122"/>
+                <a:cs typeface="Calibri" pitchFamily="34" charset="-120"/>
+              </a:rPr>
+              <a:t>3</a:t>
+            </a:r>
+            <a:endParaRPr lang="en-US" sz="1300" dirty="0"/>
+          </a:p>
+        </p:txBody>
+      </p:sp>
+      <p:sp>
+        <p:nvSpPr>
+          <p:cNvPr id="9" name="Text 7"/>
+          <p:cNvSpPr txBox="1"/>
+          <p:nvPr/>
+        </p:nvSpPr>
+        <p:spPr>
+          <a:xfrm>
+            <a:off x="1371600" y="2788920"/>
+            <a:ext cx="4297680" cy="420624"/>
+          </a:xfrm>
+          <a:prstGeom prst="rect">
+            <a:avLst/>
+          </a:prstGeom>
+          <a:noFill/>
+          <a:ln/>
+        </p:spPr>
+        <p:txBody>
+          <a:bodyPr wrap="square" lIns="0" tIns="0" rIns="0" bIns="0" rtlCol="0" anchor="ctr"/>
+          <a:lstStyle/>
+          <a:p>
+            <a:pPr indent="0" marL="0">
+              <a:buNone/>
+            </a:pPr>
+            <a:r>
+              <a:rPr lang="en-US" sz="1500" dirty="0">
+                <a:solidFill>
+                  <a:srgbClr val="1F2933"/>
+                </a:solidFill>
+                <a:latin typeface="Calibri" pitchFamily="34" charset="0"/>
+                <a:ea typeface="Calibri" pitchFamily="34" charset="-122"/>
+                <a:cs typeface="Calibri" pitchFamily="34" charset="-120"/>
+              </a:rPr>
+              <a:t>Besoin par semaine et déficits à couvrir</a:t>
+            </a:r>
+            <a:endParaRPr lang="en-US" sz="1500" dirty="0"/>
+          </a:p>
+        </p:txBody>
+      </p:sp>
+      <p:sp>
+        <p:nvSpPr>
+          <p:cNvPr id="10" name="Text 8"/>
+          <p:cNvSpPr txBox="1"/>
+          <p:nvPr/>
+        </p:nvSpPr>
+        <p:spPr>
+          <a:xfrm>
+            <a:off x="777240" y="4206240"/>
+            <a:ext cx="4846320" cy="731520"/>
+          </a:xfrm>
+          <a:prstGeom prst="rect">
+            <a:avLst/>
+          </a:prstGeom>
+          <a:noFill/>
+          <a:ln/>
+        </p:spPr>
+        <p:txBody>
+          <a:bodyPr wrap="square" lIns="0" tIns="0" rIns="0" bIns="0" rtlCol="0" anchor="t"/>
+          <a:lstStyle/>
+          <a:p>
+            <a:pPr indent="0" marL="0">
+              <a:buNone/>
+            </a:pPr>
+            <a:r>
+              <a:rPr lang="en-US" sz="1400" b="1" dirty="0">
+                <a:solidFill>
+                  <a:srgbClr val="002C50"/>
+                </a:solidFill>
+                <a:latin typeface="Calibri" pitchFamily="34" charset="0"/>
+                <a:ea typeface="Calibri" pitchFamily="34" charset="-122"/>
+                <a:cs typeface="Calibri" pitchFamily="34" charset="-120"/>
+              </a:rPr>
+              <a:t>6 665,6 M à payer de S1 à S5, dont 4 895,0 M dès S1 ; 1 937,3 M de déficits</a:t>
+            </a:r>
+            <a:endParaRPr lang="en-US" sz="1400" dirty="0"/>
+          </a:p>
+        </p:txBody>
+      </p:sp>
+      <p:sp>
+        <p:nvSpPr>
+          <p:cNvPr id="11" name="Text 9"/>
+          <p:cNvSpPr txBox="1"/>
+          <p:nvPr/>
+        </p:nvSpPr>
+        <p:spPr>
+          <a:xfrm>
+            <a:off x="777240" y="5349240"/>
+            <a:ext cx="4846320" cy="457200"/>
+          </a:xfrm>
+          <a:prstGeom prst="rect">
+            <a:avLst/>
+          </a:prstGeom>
+          <a:noFill/>
+          <a:ln/>
+        </p:spPr>
+        <p:txBody>
+          <a:bodyPr wrap="square" lIns="0" tIns="0" rIns="0" bIns="0" rtlCol="0" anchor="t"/>
+          <a:lstStyle/>
+          <a:p>
+            <a:pPr indent="0" marL="0">
+              <a:buNone/>
+            </a:pPr>
+            <a:r>
+              <a:rPr lang="en-US" sz="1050" dirty="0">
+                <a:solidFill>
+                  <a:srgbClr val="6B7280"/>
+                </a:solidFill>
+                <a:latin typeface="Calibri" pitchFamily="34" charset="0"/>
+                <a:ea typeface="Calibri" pitchFamily="34" charset="-122"/>
+                <a:cs typeface="Calibri" pitchFamily="34" charset="-120"/>
+              </a:rPr>
+              <a:t>Fournisseurs, impôts, cotisations et salaires des sociétés ; cash plans de Village Notre Père et Riviera Park ; échéance Stanbic de FIRST</a:t>
+            </a:r>
+            <a:endParaRPr lang="en-US" sz="1050" dirty="0"/>
+          </a:p>
+        </p:txBody>
+      </p:sp>
+      <p:sp>
+        <p:nvSpPr>
+          <p:cNvPr id="12" name="Shape 10"/>
+          <p:cNvSpPr/>
+          <p:nvPr/>
+        </p:nvSpPr>
+        <p:spPr>
+          <a:xfrm>
+            <a:off x="6263640" y="1463040"/>
+            <a:ext cx="5468112" cy="4480560"/>
+          </a:xfrm>
+          <a:prstGeom prst="roundRect">
+            <a:avLst>
+              <a:gd name="adj" fmla="val 2041"/>
+            </a:avLst>
+          </a:prstGeom>
+          <a:solidFill>
+            <a:srgbClr val="EEF2F6"/>
+          </a:solidFill>
+          <a:ln w="12700">
+            <a:solidFill>
+              <a:srgbClr val="EEF2F6"/>
+            </a:solidFill>
+            <a:prstDash val="solid"/>
+          </a:ln>
+        </p:spPr>
+      </p:sp>
+      <p:sp>
+        <p:nvSpPr>
+          <p:cNvPr id="13" name="Text 11"/>
+          <p:cNvSpPr txBox="1"/>
+          <p:nvPr/>
+        </p:nvSpPr>
+        <p:spPr>
+          <a:xfrm>
+            <a:off x="6583680" y="1691640"/>
+            <a:ext cx="4846320" cy="457200"/>
+          </a:xfrm>
+          <a:prstGeom prst="rect">
+            <a:avLst/>
+          </a:prstGeom>
+          <a:noFill/>
+          <a:ln/>
+        </p:spPr>
+        <p:txBody>
+          <a:bodyPr wrap="square" lIns="0" tIns="0" rIns="0" bIns="0" rtlCol="0" anchor="ctr"/>
+          <a:lstStyle/>
+          <a:p>
+            <a:pPr indent="0" marL="0">
+              <a:buNone/>
+            </a:pPr>
+            <a:r>
+              <a:rPr lang="en-US" sz="2200" b="1" dirty="0">
+                <a:solidFill>
+                  <a:srgbClr val="002C50"/>
+                </a:solidFill>
+                <a:latin typeface="Calibri" pitchFamily="34" charset="0"/>
+                <a:ea typeface="Calibri" pitchFamily="34" charset="-122"/>
+                <a:cs typeface="Calibri" pitchFamily="34" charset="-120"/>
+              </a:rPr>
+              <a:t>B. Paiement</a:t>
+            </a:r>
+            <a:endParaRPr lang="en-US" sz="2200" dirty="0"/>
+          </a:p>
+        </p:txBody>
+      </p:sp>
+      <p:sp>
+        <p:nvSpPr>
+          <p:cNvPr id="14" name="Text 12"/>
+          <p:cNvSpPr txBox="1"/>
+          <p:nvPr/>
+        </p:nvSpPr>
+        <p:spPr>
+          <a:xfrm>
+            <a:off x="6583680" y="2176272"/>
+            <a:ext cx="4846320" cy="320040"/>
+          </a:xfrm>
+          <a:prstGeom prst="rect">
+            <a:avLst/>
+          </a:prstGeom>
+          <a:noFill/>
+          <a:ln/>
+        </p:spPr>
+        <p:txBody>
+          <a:bodyPr wrap="square" lIns="0" tIns="0" rIns="0" bIns="0" rtlCol="0" anchor="ctr"/>
+          <a:lstStyle/>
+          <a:p>
+            <a:pPr indent="0" marL="0">
+              <a:buNone/>
+            </a:pPr>
+            <a:r>
+              <a:rPr lang="en-US" sz="1250" dirty="0">
+                <a:solidFill>
+                  <a:srgbClr val="9D8C74"/>
+                </a:solidFill>
+                <a:latin typeface="Calibri" pitchFamily="34" charset="0"/>
+                <a:ea typeface="Calibri" pitchFamily="34" charset="-122"/>
+                <a:cs typeface="Calibri" pitchFamily="34" charset="-120"/>
+              </a:rPr>
+              <a:t>Comptes bancaires mobilisables au 30/09/2026</a:t>
+            </a:r>
+            <a:endParaRPr lang="en-US" sz="1250" dirty="0"/>
+          </a:p>
+        </p:txBody>
+      </p:sp>
+      <p:sp>
+        <p:nvSpPr>
+          <p:cNvPr id="15" name="Shape 13"/>
+          <p:cNvSpPr/>
+          <p:nvPr/>
+        </p:nvSpPr>
+        <p:spPr>
+          <a:xfrm>
+            <a:off x="6583680" y="2788920"/>
+            <a:ext cx="420624" cy="420624"/>
+          </a:xfrm>
+          <a:prstGeom prst="ellipse">
+            <a:avLst/>
+          </a:prstGeom>
+          <a:solidFill>
+            <a:srgbClr val="002C50"/>
+          </a:solidFill>
+          <a:ln w="12700">
+            <a:solidFill>
+              <a:srgbClr val="002C50"/>
+            </a:solidFill>
+            <a:prstDash val="solid"/>
+          </a:ln>
+        </p:spPr>
+      </p:sp>
+      <p:sp>
+        <p:nvSpPr>
+          <p:cNvPr id="16" name="Text 14"/>
+          <p:cNvSpPr txBox="1"/>
+          <p:nvPr/>
+        </p:nvSpPr>
+        <p:spPr>
+          <a:xfrm>
+            <a:off x="6583680" y="2788920"/>
+            <a:ext cx="420624" cy="420624"/>
+          </a:xfrm>
+          <a:prstGeom prst="rect">
+            <a:avLst/>
+          </a:prstGeom>
+          <a:noFill/>
+          <a:ln/>
+        </p:spPr>
+        <p:txBody>
+          <a:bodyPr wrap="square" lIns="0" tIns="0" rIns="0" bIns="0" rtlCol="0" anchor="ctr"/>
+          <a:lstStyle/>
+          <a:p>
+            <a:pPr algn="ctr" indent="0" marL="0">
+              <a:buNone/>
+            </a:pPr>
+            <a:r>
+              <a:rPr lang="en-US" sz="1300" b="1" dirty="0">
+                <a:solidFill>
+                  <a:srgbClr val="FFFFFF"/>
+                </a:solidFill>
+                <a:latin typeface="Calibri" pitchFamily="34" charset="0"/>
+                <a:ea typeface="Calibri" pitchFamily="34" charset="-122"/>
+                <a:cs typeface="Calibri" pitchFamily="34" charset="-120"/>
+              </a:rPr>
+              <a:t>4</a:t>
+            </a:r>
+            <a:endParaRPr lang="en-US" sz="1300" dirty="0"/>
+          </a:p>
+        </p:txBody>
+      </p:sp>
+      <p:sp>
+        <p:nvSpPr>
+          <p:cNvPr id="17" name="Text 15"/>
+          <p:cNvSpPr txBox="1"/>
+          <p:nvPr/>
+        </p:nvSpPr>
+        <p:spPr>
+          <a:xfrm>
+            <a:off x="7178040" y="2788920"/>
+            <a:ext cx="4297680" cy="420624"/>
+          </a:xfrm>
+          <a:prstGeom prst="rect">
+            <a:avLst/>
+          </a:prstGeom>
+          <a:noFill/>
+          <a:ln/>
+        </p:spPr>
+        <p:txBody>
+          <a:bodyPr wrap="square" lIns="0" tIns="0" rIns="0" bIns="0" rtlCol="0" anchor="ctr"/>
+          <a:lstStyle/>
+          <a:p>
+            <a:pPr indent="0" marL="0">
+              <a:buNone/>
+            </a:pPr>
+            <a:r>
+              <a:rPr lang="en-US" sz="1500" dirty="0">
+                <a:solidFill>
+                  <a:srgbClr val="1F2933"/>
+                </a:solidFill>
+                <a:latin typeface="Calibri" pitchFamily="34" charset="0"/>
+                <a:ea typeface="Calibri" pitchFamily="34" charset="-122"/>
+                <a:cs typeface="Calibri" pitchFamily="34" charset="-120"/>
+              </a:rPr>
+              <a:t>Comptes de paiement par entité et nature</a:t>
+            </a:r>
+            <a:endParaRPr lang="en-US" sz="1500" dirty="0"/>
+          </a:p>
+        </p:txBody>
+      </p:sp>
+      <p:sp>
+        <p:nvSpPr>
+          <p:cNvPr id="18" name="Shape 16"/>
+          <p:cNvSpPr/>
+          <p:nvPr/>
+        </p:nvSpPr>
+        <p:spPr>
+          <a:xfrm>
+            <a:off x="6583680" y="3410712"/>
+            <a:ext cx="420624" cy="420624"/>
+          </a:xfrm>
+          <a:prstGeom prst="ellipse">
+            <a:avLst/>
+          </a:prstGeom>
+          <a:solidFill>
+            <a:srgbClr val="002C50"/>
+          </a:solidFill>
+          <a:ln w="12700">
+            <a:solidFill>
+              <a:srgbClr val="002C50"/>
+            </a:solidFill>
+            <a:prstDash val="solid"/>
+          </a:ln>
+        </p:spPr>
+      </p:sp>
+      <p:sp>
+        <p:nvSpPr>
+          <p:cNvPr id="19" name="Text 17"/>
+          <p:cNvSpPr txBox="1"/>
+          <p:nvPr/>
+        </p:nvSpPr>
+        <p:spPr>
+          <a:xfrm>
+            <a:off x="6583680" y="3410712"/>
+            <a:ext cx="420624" cy="420624"/>
+          </a:xfrm>
+          <a:prstGeom prst="rect">
+            <a:avLst/>
+          </a:prstGeom>
+          <a:noFill/>
+          <a:ln/>
+        </p:spPr>
+        <p:txBody>
+          <a:bodyPr wrap="square" lIns="0" tIns="0" rIns="0" bIns="0" rtlCol="0" anchor="ctr"/>
+          <a:lstStyle/>
+          <a:p>
+            <a:pPr algn="ctr" indent="0" marL="0">
+              <a:buNone/>
+            </a:pPr>
+            <a:r>
+              <a:rPr lang="en-US" sz="1300" b="1" dirty="0">
+                <a:solidFill>
+                  <a:srgbClr val="FFFFFF"/>
+                </a:solidFill>
+                <a:latin typeface="Calibri" pitchFamily="34" charset="0"/>
+                <a:ea typeface="Calibri" pitchFamily="34" charset="-122"/>
+                <a:cs typeface="Calibri" pitchFamily="34" charset="-120"/>
+              </a:rPr>
+              <a:t>5</a:t>
+            </a:r>
+            <a:endParaRPr lang="en-US" sz="1300" dirty="0"/>
+          </a:p>
+        </p:txBody>
+      </p:sp>
+      <p:sp>
+        <p:nvSpPr>
+          <p:cNvPr id="20" name="Text 18"/>
+          <p:cNvSpPr txBox="1"/>
+          <p:nvPr/>
+        </p:nvSpPr>
+        <p:spPr>
+          <a:xfrm>
+            <a:off x="7178040" y="3410712"/>
+            <a:ext cx="4297680" cy="420624"/>
+          </a:xfrm>
+          <a:prstGeom prst="rect">
+            <a:avLst/>
+          </a:prstGeom>
+          <a:noFill/>
+          <a:ln/>
+        </p:spPr>
+        <p:txBody>
+          <a:bodyPr wrap="square" lIns="0" tIns="0" rIns="0" bIns="0" rtlCol="0" anchor="ctr"/>
+          <a:lstStyle/>
+          <a:p>
+            <a:pPr indent="0" marL="0">
+              <a:buNone/>
+            </a:pPr>
+            <a:r>
+              <a:rPr lang="en-US" sz="1500" dirty="0">
+                <a:solidFill>
+                  <a:srgbClr val="1F2933"/>
+                </a:solidFill>
+                <a:latin typeface="Calibri" pitchFamily="34" charset="0"/>
+                <a:ea typeface="Calibri" pitchFamily="34" charset="-122"/>
+                <a:cs typeface="Calibri" pitchFamily="34" charset="-120"/>
+              </a:rPr>
+              <a:t>Options de couverture et décisions</a:t>
+            </a:r>
+            <a:endParaRPr lang="en-US" sz="1500" dirty="0"/>
+          </a:p>
+        </p:txBody>
+      </p:sp>
+      <p:sp>
+        <p:nvSpPr>
+          <p:cNvPr id="21" name="Text 19"/>
+          <p:cNvSpPr txBox="1"/>
+          <p:nvPr/>
+        </p:nvSpPr>
+        <p:spPr>
+          <a:xfrm>
+            <a:off x="6583680" y="4206240"/>
+            <a:ext cx="4846320" cy="731520"/>
+          </a:xfrm>
+          <a:prstGeom prst="rect">
+            <a:avLst/>
+          </a:prstGeom>
+          <a:noFill/>
+          <a:ln/>
+        </p:spPr>
+        <p:txBody>
+          <a:bodyPr wrap="square" lIns="0" tIns="0" rIns="0" bIns="0" rtlCol="0" anchor="t"/>
+          <a:lstStyle/>
+          <a:p>
+            <a:pPr indent="0" marL="0">
+              <a:buNone/>
+            </a:pPr>
+            <a:r>
+              <a:rPr lang="en-US" sz="1400" b="1" dirty="0">
+                <a:solidFill>
+                  <a:srgbClr val="002C50"/>
+                </a:solidFill>
+                <a:latin typeface="Calibri" pitchFamily="34" charset="0"/>
+                <a:ea typeface="Calibri" pitchFamily="34" charset="-122"/>
+                <a:cs typeface="Calibri" pitchFamily="34" charset="-120"/>
+              </a:rPr>
+              <a:t>Trois avances intragroupe couvrent les déficits, sous réserve de l'affectation de BNI-RIVIERA courant</a:t>
+            </a:r>
+            <a:endParaRPr lang="en-US" sz="1400" dirty="0"/>
+          </a:p>
+        </p:txBody>
+      </p:sp>
+      <p:sp>
+        <p:nvSpPr>
+          <p:cNvPr id="22" name="Text 20"/>
+          <p:cNvSpPr txBox="1"/>
+          <p:nvPr/>
+        </p:nvSpPr>
+        <p:spPr>
+          <a:xfrm>
+            <a:off x="6583680" y="5349240"/>
+            <a:ext cx="4846320" cy="457200"/>
+          </a:xfrm>
+          <a:prstGeom prst="rect">
+            <a:avLst/>
+          </a:prstGeom>
+          <a:noFill/>
+          <a:ln/>
+        </p:spPr>
+        <p:txBody>
+          <a:bodyPr wrap="square" lIns="0" tIns="0" rIns="0" bIns="0" rtlCol="0" anchor="t"/>
+          <a:lstStyle/>
+          <a:p>
+            <a:pPr indent="0" marL="0">
+              <a:buNone/>
+            </a:pPr>
+            <a:r>
+              <a:rPr lang="en-US" sz="1050" dirty="0">
+                <a:solidFill>
+                  <a:srgbClr val="6B7280"/>
+                </a:solidFill>
+                <a:latin typeface="Calibri" pitchFamily="34" charset="0"/>
+                <a:ea typeface="Calibri" pitchFamily="34" charset="-122"/>
+                <a:cs typeface="Calibri" pitchFamily="34" charset="-120"/>
+              </a:rPr>
+              <a:t>Comptes « Dédié besoin de fonctionnement » des sociétés, comptes « Dédié paiement CPI » des projets, avances intragroupe</a:t>
+            </a:r>
+            <a:endParaRPr lang="en-US" sz="1050" dirty="0"/>
+          </a:p>
+        </p:txBody>
+      </p:sp>
+      <p:pic>
+        <p:nvPicPr>
+          <p:cNvPr id="23" name="Image 0" descr="preencoded.png">    </p:cNvPr>
+          <p:cNvPicPr>
+            <a:picLocks noChangeAspect="1"/>
+          </p:cNvPicPr>
+          <p:nvPr/>
+        </p:nvPicPr>
+        <p:blipFill>
+          <a:blip r:embed="rId1"/>
+          <a:stretch>
+            <a:fillRect/>
+          </a:stretch>
+        </p:blipFill>
+        <p:spPr>
+          <a:xfrm>
+            <a:off x="11018520" y="6382512"/>
+            <a:ext cx="530352" cy="329184"/>
+          </a:xfrm>
+          <a:prstGeom prst="rect">
+            <a:avLst/>
+          </a:prstGeom>
+        </p:spPr>
+      </p:pic>
+      <p:sp>
+        <p:nvSpPr>
+          <p:cNvPr id="24" name="Text 21"/>
+          <p:cNvSpPr txBox="1"/>
+          <p:nvPr/>
+        </p:nvSpPr>
+        <p:spPr>
+          <a:xfrm>
+            <a:off x="11612880" y="6400800"/>
+            <a:ext cx="365760" cy="274320"/>
+          </a:xfrm>
+          <a:prstGeom prst="rect">
+            <a:avLst/>
+          </a:prstGeom>
+          <a:noFill/>
+          <a:ln/>
+        </p:spPr>
+        <p:txBody>
+          <a:bodyPr wrap="square" lIns="0" tIns="0" rIns="0" bIns="0" rtlCol="0" anchor="ctr"/>
+          <a:lstStyle/>
+          <a:p>
+            <a:pPr indent="0" marL="0">
+              <a:buNone/>
+            </a:pPr>
+            <a:r>
+              <a:rPr lang="en-US" sz="900" dirty="0">
+                <a:solidFill>
+                  <a:srgbClr val="6B7280"/>
+                </a:solidFill>
+                <a:latin typeface="Calibri" pitchFamily="34" charset="0"/>
+                <a:ea typeface="Calibri" pitchFamily="34" charset="-122"/>
+                <a:cs typeface="Calibri" pitchFamily="34" charset="-120"/>
+              </a:rPr>
+              <a:t>2</a:t>
+            </a:r>
+            <a:endParaRPr lang="en-US" sz="900" dirty="0"/>
+          </a:p>
+        </p:txBody>
+      </p:sp>
+    </p:spTree>
+  </p:cSld>
+  <p:clrMapOvr>
+    <a:masterClrMapping/>
+  </p:clrMapOvr>
+</p:sld>
+</file>
+
+<file path=ppt/slides/slide3.xml><?xml version="1.0" encoding="utf-8"?>
+<p:sld xmlns:a="http://schemas.openxmlformats.org/drawingml/2006/main" xmlns:r="http://schemas.openxmlformats.org/officeDocument/2006/relationships" xmlns:p="http://schemas.openxmlformats.org/presentationml/2006/main">
+  <p:cSld name="Slide 3">
+    <p:bg>
+      <p:bgPr>
+        <a:solidFill>
+          <a:srgbClr val="FFFFFF"/>
+        </a:solidFill>
+      </p:bgPr>
+    </p:bg>
+    <p:spTree>
+      <p:nvGrpSpPr>
+        <p:cNvPr id="1" name=""/>
+        <p:cNvGrpSpPr/>
+        <p:nvPr/>
+      </p:nvGrpSpPr>
+      <p:grpSpPr>
+        <a:xfrm>
+          <a:off x="0" y="0"/>
+          <a:ext cx="0" cy="0"/>
+          <a:chOff x="0" y="0"/>
+          <a:chExt cx="0" cy="0"/>
+        </a:xfrm>
+      </p:grpSpPr>
+      <p:sp>
+        <p:nvSpPr>
+          <p:cNvPr id="2" name="Text 0"/>
+          <p:cNvSpPr txBox="1"/>
+          <p:nvPr/>
+        </p:nvSpPr>
+        <p:spPr>
+          <a:xfrm>
+            <a:off x="457200" y="274320"/>
+            <a:ext cx="11247120" cy="548640"/>
+          </a:xfrm>
+          <a:prstGeom prst="rect">
+            <a:avLst/>
+          </a:prstGeom>
+          <a:noFill/>
+          <a:ln/>
+        </p:spPr>
+        <p:txBody>
+          <a:bodyPr wrap="square" lIns="0" tIns="0" rIns="0" bIns="0" rtlCol="0" anchor="ctr"/>
+          <a:lstStyle/>
+          <a:p>
+            <a:pPr indent="0" marL="0">
+              <a:buNone/>
+            </a:pPr>
+            <a:r>
+              <a:rPr lang="en-US" sz="2600" b="1" dirty="0">
+                <a:solidFill>
+                  <a:srgbClr val="002C50"/>
+                </a:solidFill>
+                <a:latin typeface="Calibri" pitchFamily="34" charset="0"/>
+                <a:ea typeface="Calibri" pitchFamily="34" charset="-122"/>
+                <a:cs typeface="Calibri" pitchFamily="34" charset="-120"/>
+              </a:rPr>
+              <a:t>A. Besoin de trésorerie – Besoin par semaine</a:t>
             </a:r>
             <a:endParaRPr lang="en-US" sz="2600" dirty="0"/>
           </a:p>
@@ -1553,7 +2791,7 @@
       </p:sp>
       <p:graphicFrame>
         <p:nvGraphicFramePr>
-          <p:cNvPr id="2" name="Table 0"/>
+          <p:cNvPr id="4" name="Table 0"/>
           <p:cNvGraphicFramePr>
             <a:graphicFrameLocks noGrp="1"/>
           </p:cNvGraphicFramePr>
@@ -5973,7 +7211,7 @@
                 <a:ea typeface="Calibri" pitchFamily="34" charset="-122"/>
                 <a:cs typeface="Calibri" pitchFamily="34" charset="-120"/>
               </a:rPr>
-              <a:t>1</a:t>
+              <a:t>3</a:t>
             </a:r>
             <a:endParaRPr lang="en-US" sz="900" dirty="0"/>
           </a:p>
@@ -5987,9 +7225,9 @@
 </p:sld>
 </file>
 
-<file path=ppt/slides/slide2.xml><?xml version="1.0" encoding="utf-8"?>
+<file path=ppt/slides/slide4.xml><?xml version="1.0" encoding="utf-8"?>
 <p:sld xmlns:a="http://schemas.openxmlformats.org/drawingml/2006/main" xmlns:r="http://schemas.openxmlformats.org/officeDocument/2006/relationships" xmlns:p="http://schemas.openxmlformats.org/presentationml/2006/main">
-  <p:cSld name="Slide 2">
+  <p:cSld name="Slide 4">
     <p:bg>
       <p:bgPr>
         <a:solidFill>
@@ -6044,7 +7282,7 @@
                 <a:ea typeface="Calibri" pitchFamily="34" charset="-122"/>
                 <a:cs typeface="Calibri" pitchFamily="34" charset="-120"/>
               </a:rPr>
-              <a:t>Besoin de trésorerie – 2. Comptes de paiement</a:t>
+              <a:t>B. Paiement – 1. Comptes de paiement</a:t>
             </a:r>
             <a:endParaRPr lang="en-US" sz="2600" dirty="0"/>
           </a:p>
@@ -6091,7 +7329,7 @@
       </p:sp>
       <p:graphicFrame>
         <p:nvGraphicFramePr>
-          <p:cNvPr id="3" name="Table 0"/>
+          <p:cNvPr id="5" name="Table 0"/>
           <p:cNvGraphicFramePr>
             <a:graphicFrameLocks noGrp="1"/>
           </p:cNvGraphicFramePr>
@@ -12432,7 +13670,7 @@
                 <a:ea typeface="Calibri" pitchFamily="34" charset="-122"/>
                 <a:cs typeface="Calibri" pitchFamily="34" charset="-120"/>
               </a:rPr>
-              <a:t>2</a:t>
+              <a:t>4</a:t>
             </a:r>
             <a:endParaRPr lang="en-US" sz="900" dirty="0"/>
           </a:p>
@@ -12446,9 +13684,9 @@
 </p:sld>
 </file>
 
-<file path=ppt/slides/slide3.xml><?xml version="1.0" encoding="utf-8"?>
+<file path=ppt/slides/slide5.xml><?xml version="1.0" encoding="utf-8"?>
 <p:sld xmlns:a="http://schemas.openxmlformats.org/drawingml/2006/main" xmlns:r="http://schemas.openxmlformats.org/officeDocument/2006/relationships" xmlns:p="http://schemas.openxmlformats.org/presentationml/2006/main">
-  <p:cSld name="Slide 3">
+  <p:cSld name="Slide 5">
     <p:bg>
       <p:bgPr>
         <a:solidFill>
@@ -12503,7 +13741,7 @@
                 <a:ea typeface="Calibri" pitchFamily="34" charset="-122"/>
                 <a:cs typeface="Calibri" pitchFamily="34" charset="-120"/>
               </a:rPr>
-              <a:t>Besoin de trésorerie – 3. Options de couverture</a:t>
+              <a:t>B. Paiement – 2. Options de couverture</a:t>
             </a:r>
             <a:endParaRPr lang="en-US" sz="2600" dirty="0"/>
           </a:p>
@@ -12550,7 +13788,7 @@
       </p:sp>
       <p:graphicFrame>
         <p:nvGraphicFramePr>
-          <p:cNvPr id="4" name="Table 0"/>
+          <p:cNvPr id="6" name="Table 0"/>
           <p:cNvGraphicFramePr>
             <a:graphicFrameLocks noGrp="1"/>
           </p:cNvGraphicFramePr>
@@ -15616,7 +16854,7 @@
                 <a:ea typeface="Calibri" pitchFamily="34" charset="-122"/>
                 <a:cs typeface="Calibri" pitchFamily="34" charset="-120"/>
               </a:rPr>
-              <a:t>3</a:t>
+              <a:t>5</a:t>
             </a:r>
             <a:endParaRPr lang="en-US" sz="900" dirty="0"/>
           </a:p>

--- a/RCI_Besoins_Tresorerie_Comptes_Paiement_30-09-2026.pptx
+++ b/RCI_Besoins_Tresorerie_Comptes_Paiement_30-09-2026.pptx
@@ -506,7 +506,7 @@
           <a:p>
             <a:r>
               <a:rPr lang="en-US" dirty="0"/>
-              <a:t>Couverture. Position de trésorerie CI au 30/09/2026 ; audit des décaissements fournisseurs du 30/09/2026 ; cash plans des bilans financiers du 02/10/2026 (Riviera Park, Village Notre Père) ; reporting cash hebdomadaire CIV.</a:t>
+              <a:t/>
             </a:r>
             <a:endParaRPr lang="en-US" dirty="0"/>
           </a:p>
@@ -682,7 +682,7 @@
           <a:p>
             <a:r>
               <a:rPr lang="en-US" dirty="0"/>
-              <a:t>Source : Reporting_Hebdo_CIV_30-09-2026.xlsx. Fonctionnement = balance âgée de l'audit au 30/09 (hors intragroupe), impôts, cotisations, salaires et flux SCO AO du reporting du 21/09. Projets = cash plans des bilans financiers du 02/10 (montants non réglés) ; octobre placé dans la semaine connue de PICI Projets, sinon en S2. Comptes payeurs : comptes « Dédié besoin de fonctionnement » des sociétés (y compris BNI-RIVIERA courant), comptes « Dédié paiement CPI » des projets, compte Debt Service de FIRST. Déficits mesurés en fin S5, entité par entité, sans compensation.</a:t>
+              <a:t/>
             </a:r>
             <a:endParaRPr lang="en-US" dirty="0"/>
           </a:p>
@@ -770,7 +770,7 @@
           <a:p>
             <a:r>
               <a:rPr lang="en-US" dirty="0"/>
-              <a:t>Trésorerie 30/09 = comptes de l'entité dans la position CI. SCO AO : fournisseurs projet payés depuis les comptes « Dédié paiement Projet SCO » (BACI-Projet 22,6 et BACI-AGORA 0,2) ; le reste (salaires 24,3, cotisations 16,6, fournisseurs 21,7, protocole Thulium 15,0, impôts 9,5, moins 3,6 d'encaissement client) depuis BACI courant 5,4, BOA 0,9 et Ecobank 0,1. FIRST : la redevance Diaby a exactement le montant du compte STANBIC-FIRST_LL (42,5) ; à confirmer avant de l'y imputer. Village Notre Père, autres : foncier 3,8 et autres dépenses 13,1. Riviera Park, autres : autres dépenses 37,5 et foncier 26,6.</a:t>
+              <a:t/>
             </a:r>
             <a:endParaRPr lang="en-US" dirty="0"/>
           </a:p>
@@ -858,7 +858,7 @@
           <a:p>
             <a:r>
               <a:rPr lang="en-US" dirty="0"/>
-              <a:t>BNI-RIVIERA courant (1 772,0 M) : 10,9 M pour le fonctionnement Riviera, 601,4 M pour le fonds projet RP, 1 157,4 M avancés à TERASSON ; reste 2,3 M. La position CI le marque « Affectation placement ? Ou besoin de fonctionnement ». SG-PICI porte la destination « Dédié besoin de fonctionnement et Netting autres compagnies CIV » : compte naturel des avances intragroupe, à alimenter d'abord depuis ECOBANK-PICI (368,2 M). L'encaissement PICI de 656,0 M n'est compté dans aucune option.</a:t>
+              <a:t/>
             </a:r>
             <a:endParaRPr lang="en-US" dirty="0"/>
           </a:p>
@@ -1762,7 +1762,7 @@
                 <a:ea typeface="Calibri" pitchFamily="34" charset="-122"/>
                 <a:cs typeface="Calibri" pitchFamily="34" charset="-120"/>
               </a:rPr>
-              <a:t>6 665,6 M à payer de S1 à S5, dont 4 895,0 M dès S1 ; 1 937,3 M de déficits</a:t>
+              <a:t>7 709,5 M à payer de S1 à S5, dont 5 696,7 M dès S1 ; 2 601,5 M de déficits</a:t>
             </a:r>
             <a:endParaRPr lang="en-US" sz="1400" dirty="0"/>
           </a:p>
@@ -1801,7 +1801,7 @@
                 <a:ea typeface="Calibri" pitchFamily="34" charset="-122"/>
                 <a:cs typeface="Calibri" pitchFamily="34" charset="-120"/>
               </a:rPr>
-              <a:t>Fournisseurs, impôts, cotisations et salaires des sociétés ; cash plans de Village Notre Père et Riviera Park ; échéance Stanbic de FIRST</a:t>
+              <a:t>Fournisseurs, impôts, cotisations et salaires des sociétés ; cash plans des projets ; service de la dette</a:t>
             </a:r>
             <a:endParaRPr lang="en-US" sz="1050" dirty="0"/>
           </a:p>
@@ -2151,7 +2151,7 @@
                 <a:ea typeface="Calibri" pitchFamily="34" charset="-122"/>
                 <a:cs typeface="Calibri" pitchFamily="34" charset="-120"/>
               </a:rPr>
-              <a:t>Trois avances intragroupe couvrent les déficits, sous réserve de l'affectation de BNI-RIVIERA courant</a:t>
+              <a:t>Couverture des déficits : crédit spot, avances intragroupe ou comptes à arbitrer</a:t>
             </a:r>
             <a:endParaRPr lang="en-US" sz="1400" dirty="0"/>
           </a:p>
@@ -2190,7 +2190,7 @@
                 <a:ea typeface="Calibri" pitchFamily="34" charset="-122"/>
                 <a:cs typeface="Calibri" pitchFamily="34" charset="-120"/>
               </a:rPr>
-              <a:t>Comptes « Dédié besoin de fonctionnement » des sociétés, comptes « Dédié paiement CPI » des projets, avances intragroupe</a:t>
+              <a:t>Comptes « Dédié besoin de fonctionnement » des sociétés, comptes « Dédié paiement CPI » des projets, service de la dette</a:t>
             </a:r>
             <a:endParaRPr lang="en-US" sz="1050" dirty="0"/>
           </a:p>
@@ -2429,7 +2429,7 @@
                 <a:ea typeface="Calibri" pitchFamily="34" charset="-122"/>
                 <a:cs typeface="Calibri" pitchFamily="34" charset="-120"/>
               </a:rPr>
-              <a:t>6 665,6 M</a:t>
+              <a:t>7 709,5 M</a:t>
             </a:r>
             <a:endParaRPr lang="en-US" sz="2200" dirty="0"/>
           </a:p>
@@ -2468,7 +2468,7 @@
                 <a:ea typeface="Calibri" pitchFamily="34" charset="-122"/>
                 <a:cs typeface="Calibri" pitchFamily="34" charset="-120"/>
               </a:rPr>
-              <a:t>Besoin S1 à S5 (10,2 M€) : fonctionnement, projets et dette</a:t>
+              <a:t>Besoin S1 à S5 (11,8 M€) : fonctionnement, projets et dette</a:t>
             </a:r>
             <a:endParaRPr lang="en-US" sz="1050" dirty="0"/>
           </a:p>
@@ -2534,7 +2534,7 @@
                 <a:ea typeface="Calibri" pitchFamily="34" charset="-122"/>
                 <a:cs typeface="Calibri" pitchFamily="34" charset="-120"/>
               </a:rPr>
-              <a:t>4 895,0 M</a:t>
+              <a:t>5 696,7 M</a:t>
             </a:r>
             <a:endParaRPr lang="en-US" sz="2200" dirty="0"/>
           </a:p>
@@ -2573,7 +2573,7 @@
                 <a:ea typeface="Calibri" pitchFamily="34" charset="-122"/>
                 <a:cs typeface="Calibri" pitchFamily="34" charset="-120"/>
               </a:rPr>
-              <a:t>À régler dès S1 (antériorités incluses), 73 % du besoin</a:t>
+              <a:t>À régler dès S1 (antériorités incluses), 74 % du besoin</a:t>
             </a:r>
             <a:endParaRPr lang="en-US" sz="1050" dirty="0"/>
           </a:p>
@@ -2678,7 +2678,7 @@
                 <a:ea typeface="Calibri" pitchFamily="34" charset="-122"/>
                 <a:cs typeface="Calibri" pitchFamily="34" charset="-120"/>
               </a:rPr>
-              <a:t>Trésorerie au 30/09, dont 921,2 M non mobilisables</a:t>
+              <a:t>Trésorerie au 30/09 ; 921,2 M bloqués, 1 772,0 M à arbitrer</a:t>
             </a:r>
             <a:endParaRPr lang="en-US" sz="1050" dirty="0"/>
           </a:p>
@@ -2744,7 +2744,7 @@
                 <a:ea typeface="Calibri" pitchFamily="34" charset="-122"/>
                 <a:cs typeface="Calibri" pitchFamily="34" charset="-120"/>
               </a:rPr>
-              <a:t>1 937,3 M</a:t>
+              <a:t>2 601,5 M</a:t>
             </a:r>
             <a:endParaRPr lang="en-US" sz="2200" dirty="0"/>
           </a:p>
@@ -2783,7 +2783,7 @@
                 <a:ea typeface="Calibri" pitchFamily="34" charset="-122"/>
                 <a:cs typeface="Calibri" pitchFamily="34" charset="-120"/>
               </a:rPr>
-              <a:t>Déficits à couvrir : 2 projets et 5 sociétés</a:t>
+              <a:t>Déficits à couvrir : 2 projet(s) et 8 société(s)</a:t>
             </a:r>
             <a:endParaRPr lang="en-US" sz="1050" dirty="0"/>
           </a:p>
@@ -3519,7 +3519,7 @@
                           <a:ea typeface="Calibri" pitchFamily="34" charset="-122"/>
                           <a:cs typeface="Calibri" pitchFamily="34" charset="-120"/>
                         </a:rPr>
-                        <a:t>360,6</a:t>
+                        <a:t>1 162,2</a:t>
                       </a:r>
                       <a:endParaRPr lang="en-US" sz="950" dirty="0">
                         <a:latin typeface="Calibri" charset="0"/>
@@ -3584,7 +3584,7 @@
                           <a:ea typeface="Calibri" pitchFamily="34" charset="-122"/>
                           <a:cs typeface="Calibri" pitchFamily="34" charset="-120"/>
                         </a:rPr>
-                        <a:t>28,8</a:t>
+                        <a:t>69,6</a:t>
                       </a:r>
                       <a:endParaRPr lang="en-US" sz="950" dirty="0">
                         <a:latin typeface="Calibri" charset="0"/>
@@ -3649,6 +3649,71 @@
                           <a:ea typeface="Calibri" pitchFamily="34" charset="-122"/>
                           <a:cs typeface="Calibri" pitchFamily="34" charset="-120"/>
                         </a:rPr>
+                        <a:t>97,2</a:t>
+                      </a:r>
+                      <a:endParaRPr lang="en-US" sz="950" dirty="0">
+                        <a:latin typeface="Calibri" charset="0"/>
+                        <a:ea typeface="Calibri" charset="0"/>
+                        <a:cs typeface="Calibri" charset="0"/>
+                      </a:endParaRPr>
+                    </a:p>
+                  </a:txBody>
+                  <a:tcPr marL="64008" marR="64008" marT="0" marB="0" anchor="ctr">
+                    <a:lnL w="6350" cap="flat" cmpd="sng" algn="ctr">
+                      <a:solidFill>
+                        <a:srgbClr val="D5DBE3"/>
+                      </a:solidFill>
+                      <a:prstDash val="solid"/>
+                      <a:round/>
+                      <a:headEnd type="none" w="med" len="med"/>
+                      <a:tailEnd type="none" w="med" len="med"/>
+                    </a:lnL>
+                    <a:lnR w="6350" cap="flat" cmpd="sng" algn="ctr">
+                      <a:solidFill>
+                        <a:srgbClr val="D5DBE3"/>
+                      </a:solidFill>
+                      <a:prstDash val="solid"/>
+                      <a:round/>
+                      <a:headEnd type="none" w="med" len="med"/>
+                      <a:tailEnd type="none" w="med" len="med"/>
+                    </a:lnR>
+                    <a:lnT w="6350" cap="flat" cmpd="sng" algn="ctr">
+                      <a:solidFill>
+                        <a:srgbClr val="D5DBE3"/>
+                      </a:solidFill>
+                      <a:prstDash val="solid"/>
+                      <a:round/>
+                      <a:headEnd type="none" w="med" len="med"/>
+                      <a:tailEnd type="none" w="med" len="med"/>
+                    </a:lnT>
+                    <a:lnB w="6350" cap="flat" cmpd="sng" algn="ctr">
+                      <a:solidFill>
+                        <a:srgbClr val="D5DBE3"/>
+                      </a:solidFill>
+                      <a:prstDash val="solid"/>
+                      <a:round/>
+                      <a:headEnd type="none" w="med" len="med"/>
+                      <a:tailEnd type="none" w="med" len="med"/>
+                    </a:lnB>
+                  </a:tcPr>
+                </a:tc>
+                <a:tc>
+                  <a:txBody>
+                    <a:bodyPr/>
+                    <a:lstStyle/>
+                    <a:p>
+                      <a:pPr algn="r" indent="0" marL="0">
+                        <a:buNone/>
+                      </a:pPr>
+                      <a:r>
+                        <a:rPr lang="en-US" sz="950" dirty="0">
+                          <a:solidFill>
+                            <a:srgbClr val="1F2933"/>
+                          </a:solidFill>
+                          <a:latin typeface="Calibri" pitchFamily="34" charset="0"/>
+                          <a:ea typeface="Calibri" pitchFamily="34" charset="-122"/>
+                          <a:cs typeface="Calibri" pitchFamily="34" charset="-120"/>
+                        </a:rPr>
                         <a:t>–</a:t>
                       </a:r>
                       <a:endParaRPr lang="en-US" sz="950" dirty="0">
@@ -3771,7 +3836,7 @@
                         <a:buNone/>
                       </a:pPr>
                       <a:r>
-                        <a:rPr lang="en-US" sz="950" dirty="0">
+                        <a:rPr lang="en-US" sz="950" b="1" dirty="0">
                           <a:solidFill>
                             <a:srgbClr val="1F2933"/>
                           </a:solidFill>
@@ -3779,72 +3844,7 @@
                           <a:ea typeface="Calibri" pitchFamily="34" charset="-122"/>
                           <a:cs typeface="Calibri" pitchFamily="34" charset="-120"/>
                         </a:rPr>
-                        <a:t>–</a:t>
-                      </a:r>
-                      <a:endParaRPr lang="en-US" sz="950" dirty="0">
-                        <a:latin typeface="Calibri" charset="0"/>
-                        <a:ea typeface="Calibri" charset="0"/>
-                        <a:cs typeface="Calibri" charset="0"/>
-                      </a:endParaRPr>
-                    </a:p>
-                  </a:txBody>
-                  <a:tcPr marL="64008" marR="64008" marT="0" marB="0" anchor="ctr">
-                    <a:lnL w="6350" cap="flat" cmpd="sng" algn="ctr">
-                      <a:solidFill>
-                        <a:srgbClr val="D5DBE3"/>
-                      </a:solidFill>
-                      <a:prstDash val="solid"/>
-                      <a:round/>
-                      <a:headEnd type="none" w="med" len="med"/>
-                      <a:tailEnd type="none" w="med" len="med"/>
-                    </a:lnL>
-                    <a:lnR w="6350" cap="flat" cmpd="sng" algn="ctr">
-                      <a:solidFill>
-                        <a:srgbClr val="D5DBE3"/>
-                      </a:solidFill>
-                      <a:prstDash val="solid"/>
-                      <a:round/>
-                      <a:headEnd type="none" w="med" len="med"/>
-                      <a:tailEnd type="none" w="med" len="med"/>
-                    </a:lnR>
-                    <a:lnT w="6350" cap="flat" cmpd="sng" algn="ctr">
-                      <a:solidFill>
-                        <a:srgbClr val="D5DBE3"/>
-                      </a:solidFill>
-                      <a:prstDash val="solid"/>
-                      <a:round/>
-                      <a:headEnd type="none" w="med" len="med"/>
-                      <a:tailEnd type="none" w="med" len="med"/>
-                    </a:lnT>
-                    <a:lnB w="6350" cap="flat" cmpd="sng" algn="ctr">
-                      <a:solidFill>
-                        <a:srgbClr val="D5DBE3"/>
-                      </a:solidFill>
-                      <a:prstDash val="solid"/>
-                      <a:round/>
-                      <a:headEnd type="none" w="med" len="med"/>
-                      <a:tailEnd type="none" w="med" len="med"/>
-                    </a:lnB>
-                  </a:tcPr>
-                </a:tc>
-                <a:tc>
-                  <a:txBody>
-                    <a:bodyPr/>
-                    <a:lstStyle/>
-                    <a:p>
-                      <a:pPr algn="r" indent="0" marL="0">
-                        <a:buNone/>
-                      </a:pPr>
-                      <a:r>
-                        <a:rPr lang="en-US" sz="950" b="1" dirty="0">
-                          <a:solidFill>
-                            <a:srgbClr val="1F2933"/>
-                          </a:solidFill>
-                          <a:latin typeface="Calibri" pitchFamily="34" charset="0"/>
-                          <a:ea typeface="Calibri" pitchFamily="34" charset="-122"/>
-                          <a:cs typeface="Calibri" pitchFamily="34" charset="-120"/>
-                        </a:rPr>
-                        <a:t>389,4</a:t>
+                        <a:t>1 329,0</a:t>
                       </a:r>
                       <a:endParaRPr lang="en-US" sz="950" dirty="0">
                         <a:latin typeface="Calibri" charset="0"/>
@@ -3912,7 +3912,7 @@
                           <a:ea typeface="Calibri" pitchFamily="34" charset="-122"/>
                           <a:cs typeface="Calibri" pitchFamily="34" charset="-120"/>
                         </a:rPr>
-                        <a:t>2 549,2</a:t>
+                        <a:t>777,2</a:t>
                       </a:r>
                       <a:endParaRPr lang="en-US" sz="950" dirty="0">
                         <a:latin typeface="Calibri" charset="0"/>
@@ -3977,7 +3977,7 @@
                           <a:ea typeface="Calibri" pitchFamily="34" charset="-122"/>
                           <a:cs typeface="Calibri" pitchFamily="34" charset="-120"/>
                         </a:rPr>
-                        <a:t>130,0</a:t>
+                        <a:t>794,2</a:t>
                       </a:r>
                       <a:endParaRPr lang="en-US" sz="950" dirty="0">
                         <a:latin typeface="Calibri" charset="0"/>
@@ -4047,7 +4047,7 @@
                           <a:ea typeface="Calibri" pitchFamily="34" charset="-122"/>
                           <a:cs typeface="Calibri" pitchFamily="34" charset="-120"/>
                         </a:rPr>
-                        <a:t>Projet Village Notre Père (TERASSON)</a:t>
+                        <a:t>Projet RIVIERA (cash plan)</a:t>
                       </a:r>
                       <a:endParaRPr lang="en-US" sz="950" dirty="0">
                         <a:latin typeface="Calibri" charset="0"/>
@@ -4112,7 +4112,7 @@
                           <a:ea typeface="Calibri" pitchFamily="34" charset="-122"/>
                           <a:cs typeface="Calibri" pitchFamily="34" charset="-120"/>
                         </a:rPr>
-                        <a:t>2 202,1</a:t>
+                        <a:t>1 988,4</a:t>
                       </a:r>
                       <a:endParaRPr lang="en-US" sz="950" dirty="0">
                         <a:latin typeface="Calibri" charset="0"/>
@@ -4177,7 +4177,7 @@
                           <a:ea typeface="Calibri" pitchFamily="34" charset="-122"/>
                           <a:cs typeface="Calibri" pitchFamily="34" charset="-120"/>
                         </a:rPr>
-                        <a:t>472,2</a:t>
+                        <a:t>1 242,5</a:t>
                       </a:r>
                       <a:endParaRPr lang="en-US" sz="950" dirty="0">
                         <a:latin typeface="Calibri" charset="0"/>
@@ -4307,7 +4307,7 @@
                           <a:ea typeface="Calibri" pitchFamily="34" charset="-122"/>
                           <a:cs typeface="Calibri" pitchFamily="34" charset="-120"/>
                         </a:rPr>
-                        <a:t>13,5</a:t>
+                        <a:t>13,6</a:t>
                       </a:r>
                       <a:endParaRPr lang="en-US" sz="950" dirty="0">
                         <a:latin typeface="Calibri" charset="0"/>
@@ -4437,7 +4437,7 @@
                           <a:ea typeface="Calibri" pitchFamily="34" charset="-122"/>
                           <a:cs typeface="Calibri" pitchFamily="34" charset="-120"/>
                         </a:rPr>
-                        <a:t>2 687,8</a:t>
+                        <a:t>3 244,5</a:t>
                       </a:r>
                       <a:endParaRPr lang="en-US" sz="950" dirty="0">
                         <a:latin typeface="Calibri" charset="0"/>
@@ -4505,7 +4505,7 @@
                           <a:ea typeface="Calibri" pitchFamily="34" charset="-122"/>
                           <a:cs typeface="Calibri" pitchFamily="34" charset="-120"/>
                         </a:rPr>
-                        <a:t>1 481,9</a:t>
+                        <a:t>2 643,1</a:t>
                       </a:r>
                       <a:endParaRPr lang="en-US" sz="950" dirty="0">
                         <a:latin typeface="Calibri" charset="0"/>
@@ -4570,7 +4570,7 @@
                           <a:ea typeface="Calibri" pitchFamily="34" charset="-122"/>
                           <a:cs typeface="Calibri" pitchFamily="34" charset="-120"/>
                         </a:rPr>
-                        <a:t>1 205,9</a:t>
+                        <a:t>601,4</a:t>
                       </a:r>
                       <a:endParaRPr lang="en-US" sz="950" dirty="0">
                         <a:latin typeface="Calibri" charset="0"/>
@@ -4640,7 +4640,7 @@
                           <a:ea typeface="Calibri" pitchFamily="34" charset="-122"/>
                           <a:cs typeface="Calibri" pitchFamily="34" charset="-120"/>
                         </a:rPr>
-                        <a:t>Projet Riviera Park (RIVIERA)</a:t>
+                        <a:t>Projet TERASSON (cash plan)</a:t>
                       </a:r>
                       <a:endParaRPr lang="en-US" sz="950" dirty="0">
                         <a:latin typeface="Calibri" charset="0"/>
@@ -4705,7 +4705,7 @@
                           <a:ea typeface="Calibri" pitchFamily="34" charset="-122"/>
                           <a:cs typeface="Calibri" pitchFamily="34" charset="-120"/>
                         </a:rPr>
-                        <a:t>1 988,4</a:t>
+                        <a:t>2 202,1</a:t>
                       </a:r>
                       <a:endParaRPr lang="en-US" sz="950" dirty="0">
                         <a:latin typeface="Calibri" charset="0"/>
@@ -4770,7 +4770,7 @@
                           <a:ea typeface="Calibri" pitchFamily="34" charset="-122"/>
                           <a:cs typeface="Calibri" pitchFamily="34" charset="-120"/>
                         </a:rPr>
-                        <a:t>1 242,5</a:t>
+                        <a:t>472,2</a:t>
                       </a:r>
                       <a:endParaRPr lang="en-US" sz="950" dirty="0">
                         <a:latin typeface="Calibri" charset="0"/>
@@ -4900,7 +4900,7 @@
                           <a:ea typeface="Calibri" pitchFamily="34" charset="-122"/>
                           <a:cs typeface="Calibri" pitchFamily="34" charset="-120"/>
                         </a:rPr>
-                        <a:t>13,6</a:t>
+                        <a:t>13,5</a:t>
                       </a:r>
                       <a:endParaRPr lang="en-US" sz="950" dirty="0">
                         <a:latin typeface="Calibri" charset="0"/>
@@ -5030,7 +5030,7 @@
                           <a:ea typeface="Calibri" pitchFamily="34" charset="-122"/>
                           <a:cs typeface="Calibri" pitchFamily="34" charset="-120"/>
                         </a:rPr>
-                        <a:t>3 244,5</a:t>
+                        <a:t>2 687,8</a:t>
                       </a:r>
                       <a:endParaRPr lang="en-US" sz="950" dirty="0">
                         <a:latin typeface="Calibri" charset="0"/>
@@ -5098,7 +5098,7 @@
                           <a:ea typeface="Calibri" pitchFamily="34" charset="-122"/>
                           <a:cs typeface="Calibri" pitchFamily="34" charset="-120"/>
                         </a:rPr>
-                        <a:t>2 643,1</a:t>
+                        <a:t>1 481,9</a:t>
                       </a:r>
                       <a:endParaRPr lang="en-US" sz="950" dirty="0">
                         <a:latin typeface="Calibri" charset="0"/>
@@ -5163,7 +5163,7 @@
                           <a:ea typeface="Calibri" pitchFamily="34" charset="-122"/>
                           <a:cs typeface="Calibri" pitchFamily="34" charset="-120"/>
                         </a:rPr>
-                        <a:t>601,4</a:t>
+                        <a:t>1 205,9</a:t>
                       </a:r>
                       <a:endParaRPr lang="en-US" sz="950" dirty="0">
                         <a:latin typeface="Calibri" charset="0"/>
@@ -5233,7 +5233,7 @@
                           <a:ea typeface="Calibri" pitchFamily="34" charset="-122"/>
                           <a:cs typeface="Calibri" pitchFamily="34" charset="-120"/>
                         </a:rPr>
-                        <a:t>Dette SCI FIRST (Stanbic)</a:t>
+                        <a:t>Dette FIRST (service de la dette)</a:t>
                       </a:r>
                       <a:endParaRPr lang="en-US" sz="950" dirty="0">
                         <a:latin typeface="Calibri" charset="0"/>
@@ -5428,6 +5428,71 @@
                           <a:ea typeface="Calibri" pitchFamily="34" charset="-122"/>
                           <a:cs typeface="Calibri" pitchFamily="34" charset="-120"/>
                         </a:rPr>
+                        <a:t>104,2</a:t>
+                      </a:r>
+                      <a:endParaRPr lang="en-US" sz="950" dirty="0">
+                        <a:latin typeface="Calibri" charset="0"/>
+                        <a:ea typeface="Calibri" charset="0"/>
+                        <a:cs typeface="Calibri" charset="0"/>
+                      </a:endParaRPr>
+                    </a:p>
+                  </a:txBody>
+                  <a:tcPr marL="64008" marR="64008" marT="0" marB="0" anchor="ctr">
+                    <a:lnL w="6350" cap="flat" cmpd="sng" algn="ctr">
+                      <a:solidFill>
+                        <a:srgbClr val="D5DBE3"/>
+                      </a:solidFill>
+                      <a:prstDash val="solid"/>
+                      <a:round/>
+                      <a:headEnd type="none" w="med" len="med"/>
+                      <a:tailEnd type="none" w="med" len="med"/>
+                    </a:lnL>
+                    <a:lnR w="6350" cap="flat" cmpd="sng" algn="ctr">
+                      <a:solidFill>
+                        <a:srgbClr val="D5DBE3"/>
+                      </a:solidFill>
+                      <a:prstDash val="solid"/>
+                      <a:round/>
+                      <a:headEnd type="none" w="med" len="med"/>
+                      <a:tailEnd type="none" w="med" len="med"/>
+                    </a:lnR>
+                    <a:lnT w="6350" cap="flat" cmpd="sng" algn="ctr">
+                      <a:solidFill>
+                        <a:srgbClr val="D5DBE3"/>
+                      </a:solidFill>
+                      <a:prstDash val="solid"/>
+                      <a:round/>
+                      <a:headEnd type="none" w="med" len="med"/>
+                      <a:tailEnd type="none" w="med" len="med"/>
+                    </a:lnT>
+                    <a:lnB w="6350" cap="flat" cmpd="sng" algn="ctr">
+                      <a:solidFill>
+                        <a:srgbClr val="D5DBE3"/>
+                      </a:solidFill>
+                      <a:prstDash val="solid"/>
+                      <a:round/>
+                      <a:headEnd type="none" w="med" len="med"/>
+                      <a:tailEnd type="none" w="med" len="med"/>
+                    </a:lnB>
+                  </a:tcPr>
+                </a:tc>
+                <a:tc>
+                  <a:txBody>
+                    <a:bodyPr/>
+                    <a:lstStyle/>
+                    <a:p>
+                      <a:pPr algn="r" indent="0" marL="0">
+                        <a:buNone/>
+                      </a:pPr>
+                      <a:r>
+                        <a:rPr lang="en-US" sz="950" dirty="0">
+                          <a:solidFill>
+                            <a:srgbClr val="1F2933"/>
+                          </a:solidFill>
+                          <a:latin typeface="Calibri" pitchFamily="34" charset="0"/>
+                          <a:ea typeface="Calibri" pitchFamily="34" charset="-122"/>
+                          <a:cs typeface="Calibri" pitchFamily="34" charset="-120"/>
+                        </a:rPr>
                         <a:t>–</a:t>
                       </a:r>
                       <a:endParaRPr lang="en-US" sz="950" dirty="0">
@@ -5550,7 +5615,7 @@
                         <a:buNone/>
                       </a:pPr>
                       <a:r>
-                        <a:rPr lang="en-US" sz="950" dirty="0">
+                        <a:rPr lang="en-US" sz="950" b="1" dirty="0">
                           <a:solidFill>
                             <a:srgbClr val="1F2933"/>
                           </a:solidFill>
@@ -5558,72 +5623,7 @@
                           <a:ea typeface="Calibri" pitchFamily="34" charset="-122"/>
                           <a:cs typeface="Calibri" pitchFamily="34" charset="-120"/>
                         </a:rPr>
-                        <a:t>–</a:t>
-                      </a:r>
-                      <a:endParaRPr lang="en-US" sz="950" dirty="0">
-                        <a:latin typeface="Calibri" charset="0"/>
-                        <a:ea typeface="Calibri" charset="0"/>
-                        <a:cs typeface="Calibri" charset="0"/>
-                      </a:endParaRPr>
-                    </a:p>
-                  </a:txBody>
-                  <a:tcPr marL="64008" marR="64008" marT="0" marB="0" anchor="ctr">
-                    <a:lnL w="6350" cap="flat" cmpd="sng" algn="ctr">
-                      <a:solidFill>
-                        <a:srgbClr val="D5DBE3"/>
-                      </a:solidFill>
-                      <a:prstDash val="solid"/>
-                      <a:round/>
-                      <a:headEnd type="none" w="med" len="med"/>
-                      <a:tailEnd type="none" w="med" len="med"/>
-                    </a:lnL>
-                    <a:lnR w="6350" cap="flat" cmpd="sng" algn="ctr">
-                      <a:solidFill>
-                        <a:srgbClr val="D5DBE3"/>
-                      </a:solidFill>
-                      <a:prstDash val="solid"/>
-                      <a:round/>
-                      <a:headEnd type="none" w="med" len="med"/>
-                      <a:tailEnd type="none" w="med" len="med"/>
-                    </a:lnR>
-                    <a:lnT w="6350" cap="flat" cmpd="sng" algn="ctr">
-                      <a:solidFill>
-                        <a:srgbClr val="D5DBE3"/>
-                      </a:solidFill>
-                      <a:prstDash val="solid"/>
-                      <a:round/>
-                      <a:headEnd type="none" w="med" len="med"/>
-                      <a:tailEnd type="none" w="med" len="med"/>
-                    </a:lnT>
-                    <a:lnB w="6350" cap="flat" cmpd="sng" algn="ctr">
-                      <a:solidFill>
-                        <a:srgbClr val="D5DBE3"/>
-                      </a:solidFill>
-                      <a:prstDash val="solid"/>
-                      <a:round/>
-                      <a:headEnd type="none" w="med" len="med"/>
-                      <a:tailEnd type="none" w="med" len="med"/>
-                    </a:lnB>
-                  </a:tcPr>
-                </a:tc>
-                <a:tc>
-                  <a:txBody>
-                    <a:bodyPr/>
-                    <a:lstStyle/>
-                    <a:p>
-                      <a:pPr algn="r" indent="0" marL="0">
-                        <a:buNone/>
-                      </a:pPr>
-                      <a:r>
-                        <a:rPr lang="en-US" sz="950" b="1" dirty="0">
-                          <a:solidFill>
-                            <a:srgbClr val="1F2933"/>
-                          </a:solidFill>
-                          <a:latin typeface="Calibri" pitchFamily="34" charset="0"/>
-                          <a:ea typeface="Calibri" pitchFamily="34" charset="-122"/>
-                          <a:cs typeface="Calibri" pitchFamily="34" charset="-120"/>
-                        </a:rPr>
-                        <a:t>343,9</a:t>
+                        <a:t>448,1</a:t>
                       </a:r>
                       <a:endParaRPr lang="en-US" sz="950" dirty="0">
                         <a:latin typeface="Calibri" charset="0"/>
@@ -5891,7 +5891,7 @@
                           <a:ea typeface="Calibri" pitchFamily="34" charset="-122"/>
                           <a:cs typeface="Calibri" pitchFamily="34" charset="-120"/>
                         </a:rPr>
-                        <a:t>4 895,0</a:t>
+                        <a:t>5 696,7</a:t>
                       </a:r>
                       <a:endParaRPr lang="en-US" sz="950" dirty="0">
                         <a:latin typeface="Calibri" charset="0"/>
@@ -5959,7 +5959,7 @@
                           <a:ea typeface="Calibri" pitchFamily="34" charset="-122"/>
                           <a:cs typeface="Calibri" pitchFamily="34" charset="-120"/>
                         </a:rPr>
-                        <a:t>1 743,5</a:t>
+                        <a:t>1 784,3</a:t>
                       </a:r>
                       <a:endParaRPr lang="en-US" sz="950" dirty="0">
                         <a:latin typeface="Calibri" charset="0"/>
@@ -6027,7 +6027,7 @@
                           <a:ea typeface="Calibri" pitchFamily="34" charset="-122"/>
                           <a:cs typeface="Calibri" pitchFamily="34" charset="-120"/>
                         </a:rPr>
-                        <a:t>–</a:t>
+                        <a:t>201,4</a:t>
                       </a:r>
                       <a:endParaRPr lang="en-US" sz="950" dirty="0">
                         <a:latin typeface="Calibri" charset="0"/>
@@ -6231,7 +6231,7 @@
                           <a:ea typeface="Calibri" pitchFamily="34" charset="-122"/>
                           <a:cs typeface="Calibri" pitchFamily="34" charset="-120"/>
                         </a:rPr>
-                        <a:t>6 665,6</a:t>
+                        <a:t>7 709,5</a:t>
                       </a:r>
                       <a:endParaRPr lang="en-US" sz="950" dirty="0">
                         <a:latin typeface="Calibri" charset="0"/>
@@ -6299,7 +6299,7 @@
                           <a:ea typeface="Calibri" pitchFamily="34" charset="-122"/>
                           <a:cs typeface="Calibri" pitchFamily="34" charset="-120"/>
                         </a:rPr>
-                        <a:t>7 024,9</a:t>
+                        <a:t>5 253,0</a:t>
                       </a:r>
                       <a:endParaRPr lang="en-US" sz="950" dirty="0">
                         <a:latin typeface="Calibri" charset="0"/>
@@ -6367,7 +6367,7 @@
                           <a:ea typeface="Calibri" pitchFamily="34" charset="-122"/>
                           <a:cs typeface="Calibri" pitchFamily="34" charset="-120"/>
                         </a:rPr>
-                        <a:t>1 937,3</a:t>
+                        <a:t>2 601,5</a:t>
                       </a:r>
                       <a:endParaRPr lang="en-US" sz="950" dirty="0">
                         <a:latin typeface="Calibri" charset="0"/>
@@ -6502,7 +6502,7 @@
                           <a:ea typeface="Calibri" pitchFamily="34" charset="-122"/>
                           <a:cs typeface="Calibri" pitchFamily="34" charset="-120"/>
                         </a:rPr>
-                        <a:t>659,6</a:t>
+                        <a:t>3,6</a:t>
                       </a:r>
                       <a:endParaRPr lang="en-US" sz="950" dirty="0">
                         <a:latin typeface="Calibri" charset="0"/>
@@ -6567,6 +6567,71 @@
                           <a:ea typeface="Calibri" pitchFamily="34" charset="-122"/>
                           <a:cs typeface="Calibri" pitchFamily="34" charset="-120"/>
                         </a:rPr>
+                        <a:t>129,6</a:t>
+                      </a:r>
+                      <a:endParaRPr lang="en-US" sz="950" dirty="0">
+                        <a:latin typeface="Calibri" charset="0"/>
+                        <a:ea typeface="Calibri" charset="0"/>
+                        <a:cs typeface="Calibri" charset="0"/>
+                      </a:endParaRPr>
+                    </a:p>
+                  </a:txBody>
+                  <a:tcPr marL="64008" marR="64008" marT="0" marB="0" anchor="ctr">
+                    <a:lnL w="6350" cap="flat" cmpd="sng" algn="ctr">
+                      <a:solidFill>
+                        <a:srgbClr val="D5DBE3"/>
+                      </a:solidFill>
+                      <a:prstDash val="solid"/>
+                      <a:round/>
+                      <a:headEnd type="none" w="med" len="med"/>
+                      <a:tailEnd type="none" w="med" len="med"/>
+                    </a:lnL>
+                    <a:lnR w="6350" cap="flat" cmpd="sng" algn="ctr">
+                      <a:solidFill>
+                        <a:srgbClr val="D5DBE3"/>
+                      </a:solidFill>
+                      <a:prstDash val="solid"/>
+                      <a:round/>
+                      <a:headEnd type="none" w="med" len="med"/>
+                      <a:tailEnd type="none" w="med" len="med"/>
+                    </a:lnR>
+                    <a:lnT w="6350" cap="flat" cmpd="sng" algn="ctr">
+                      <a:solidFill>
+                        <a:srgbClr val="D5DBE3"/>
+                      </a:solidFill>
+                      <a:prstDash val="solid"/>
+                      <a:round/>
+                      <a:headEnd type="none" w="med" len="med"/>
+                      <a:tailEnd type="none" w="med" len="med"/>
+                    </a:lnT>
+                    <a:lnB w="6350" cap="flat" cmpd="sng" algn="ctr">
+                      <a:solidFill>
+                        <a:srgbClr val="D5DBE3"/>
+                      </a:solidFill>
+                      <a:prstDash val="solid"/>
+                      <a:round/>
+                      <a:headEnd type="none" w="med" len="med"/>
+                      <a:tailEnd type="none" w="med" len="med"/>
+                    </a:lnB>
+                  </a:tcPr>
+                </a:tc>
+                <a:tc>
+                  <a:txBody>
+                    <a:bodyPr/>
+                    <a:lstStyle/>
+                    <a:p>
+                      <a:pPr algn="r" indent="0" marL="0">
+                        <a:buNone/>
+                      </a:pPr>
+                      <a:r>
+                        <a:rPr lang="en-US" sz="950" i="1" dirty="0">
+                          <a:solidFill>
+                            <a:srgbClr val="6B7280"/>
+                          </a:solidFill>
+                          <a:latin typeface="Calibri" pitchFamily="34" charset="0"/>
+                          <a:ea typeface="Calibri" pitchFamily="34" charset="-122"/>
+                          <a:cs typeface="Calibri" pitchFamily="34" charset="-120"/>
+                        </a:rPr>
                         <a:t>–</a:t>
                       </a:r>
                       <a:endParaRPr lang="en-US" sz="950" dirty="0">
@@ -6762,72 +6827,7 @@
                           <a:ea typeface="Calibri" pitchFamily="34" charset="-122"/>
                           <a:cs typeface="Calibri" pitchFamily="34" charset="-120"/>
                         </a:rPr>
-                        <a:t>–</a:t>
-                      </a:r>
-                      <a:endParaRPr lang="en-US" sz="950" dirty="0">
-                        <a:latin typeface="Calibri" charset="0"/>
-                        <a:ea typeface="Calibri" charset="0"/>
-                        <a:cs typeface="Calibri" charset="0"/>
-                      </a:endParaRPr>
-                    </a:p>
-                  </a:txBody>
-                  <a:tcPr marL="64008" marR="64008" marT="0" marB="0" anchor="ctr">
-                    <a:lnL w="6350" cap="flat" cmpd="sng" algn="ctr">
-                      <a:solidFill>
-                        <a:srgbClr val="D5DBE3"/>
-                      </a:solidFill>
-                      <a:prstDash val="solid"/>
-                      <a:round/>
-                      <a:headEnd type="none" w="med" len="med"/>
-                      <a:tailEnd type="none" w="med" len="med"/>
-                    </a:lnL>
-                    <a:lnR w="6350" cap="flat" cmpd="sng" algn="ctr">
-                      <a:solidFill>
-                        <a:srgbClr val="D5DBE3"/>
-                      </a:solidFill>
-                      <a:prstDash val="solid"/>
-                      <a:round/>
-                      <a:headEnd type="none" w="med" len="med"/>
-                      <a:tailEnd type="none" w="med" len="med"/>
-                    </a:lnR>
-                    <a:lnT w="6350" cap="flat" cmpd="sng" algn="ctr">
-                      <a:solidFill>
-                        <a:srgbClr val="D5DBE3"/>
-                      </a:solidFill>
-                      <a:prstDash val="solid"/>
-                      <a:round/>
-                      <a:headEnd type="none" w="med" len="med"/>
-                      <a:tailEnd type="none" w="med" len="med"/>
-                    </a:lnT>
-                    <a:lnB w="6350" cap="flat" cmpd="sng" algn="ctr">
-                      <a:solidFill>
-                        <a:srgbClr val="D5DBE3"/>
-                      </a:solidFill>
-                      <a:prstDash val="solid"/>
-                      <a:round/>
-                      <a:headEnd type="none" w="med" len="med"/>
-                      <a:tailEnd type="none" w="med" len="med"/>
-                    </a:lnB>
-                  </a:tcPr>
-                </a:tc>
-                <a:tc>
-                  <a:txBody>
-                    <a:bodyPr/>
-                    <a:lstStyle/>
-                    <a:p>
-                      <a:pPr algn="r" indent="0" marL="0">
-                        <a:buNone/>
-                      </a:pPr>
-                      <a:r>
-                        <a:rPr lang="en-US" sz="950" i="1" dirty="0">
-                          <a:solidFill>
-                            <a:srgbClr val="6B7280"/>
-                          </a:solidFill>
-                          <a:latin typeface="Calibri" pitchFamily="34" charset="0"/>
-                          <a:ea typeface="Calibri" pitchFamily="34" charset="-122"/>
-                          <a:cs typeface="Calibri" pitchFamily="34" charset="-120"/>
-                        </a:rPr>
-                        <a:t>659,6</a:t>
+                        <a:t>133,2</a:t>
                       </a:r>
                       <a:endParaRPr lang="en-US" sz="950" dirty="0">
                         <a:latin typeface="Calibri" charset="0"/>
@@ -7025,7 +7025,7 @@
                 <a:ea typeface="Calibri" pitchFamily="34" charset="-122"/>
                 <a:cs typeface="Calibri" pitchFamily="34" charset="-120"/>
               </a:rPr>
-              <a:t>S1 concentre 73 % du besoin : </a:t>
+              <a:t>S1 concentre 74 % du besoin : </a:t>
             </a:r>
             <a:pPr indent="0" marL="0">
               <a:buNone/>
@@ -7039,7 +7039,7 @@
                 <a:ea typeface="Calibri" pitchFamily="34" charset="-122"/>
                 <a:cs typeface="Calibri" pitchFamily="34" charset="-120"/>
               </a:rPr>
-              <a:t>fournisseurs échus au 30/09 et semaine du 28/09 au 04/10, montants des cash plans non réglés jusqu'à septembre, échéance Stanbic de FIRST.</a:t>
+              <a:t>factures échues et arriérés d'impôts et de cotisations de l'audit, semaine en cours, cash plans non réglés jusqu'au mois de la situation, échéance de la dette.</a:t>
             </a:r>
             <a:endParaRPr lang="en-US" sz="1150" dirty="0"/>
           </a:p>
@@ -7074,7 +7074,7 @@
                 <a:ea typeface="Calibri" pitchFamily="34" charset="-122"/>
                 <a:cs typeface="Calibri" pitchFamily="34" charset="-120"/>
               </a:rPr>
-              <a:t>5 932,3 M, dont 3 881,4 M de travaux. Village Notre Père est en déficit dès S1 (-720,2 M), Riviera Park à partir de S2.</a:t>
+              <a:t>5 932,3 M. RIVIERA en déficit de 601,4 M dès S2 ; TERASSON en déficit de 1 205,9 M dès S1.</a:t>
             </a:r>
             <a:endParaRPr lang="en-US" sz="1150" dirty="0"/>
           </a:p>
@@ -7109,7 +7109,7 @@
                 <a:ea typeface="Calibri" pitchFamily="34" charset="-122"/>
                 <a:cs typeface="Calibri" pitchFamily="34" charset="-120"/>
               </a:rPr>
-              <a:t>déficits SCO AO 80,9 M, FINAFRICA 40,2 M, RHD CI 4,0 M, AB CENTER 2,6 M, IMMONEUF 2,3 M ; excédents PICI 330,5 M et FIRST 144,8 M.</a:t>
+              <a:t>déficits TERASSON 206,4 M, FINAFRICA 198,7 M, SCO AO 176,0 M, RIVIERA 87,3 M, IMMONEUF 66,0 M, RHD CI 50,0 M ; excédents FIRST 143,3 M, PICI 100,0 M, INFI SOFT 2,8 M.</a:t>
             </a:r>
             <a:endParaRPr lang="en-US" sz="1150" dirty="0"/>
           </a:p>
@@ -7148,7 +7148,7 @@
                 <a:ea typeface="Calibri" pitchFamily="34" charset="-122"/>
                 <a:cs typeface="Calibri" pitchFamily="34" charset="-120"/>
               </a:rPr>
-              <a:t>Non mobilisables : DSRA 776,1 M, TVA bloquée 76,3 M, FIRST LL 42,5 M et décaissement 26,3 M. Encaissements dont 656,0 M à confirmer. Projets en € HT.</a:t>
+              <a:t>Non mobilisables : STANBIC-FIRST_LL 42,5, STANBIC-FIRST_Disbursement 26,3, BNI-RIVIERA(DSRA) / Placement 776,1, BACI-AGORA/COMPTE BLOQU. TVA 76,3. À arbitrer : BNI-RIVIERA(Courant) 1 772,0. Projets en € HT à 655,957.</a:t>
             </a:r>
             <a:endParaRPr lang="en-US" sz="950" dirty="0"/>
           </a:p>
@@ -7350,10 +7350,10 @@
             <a:tbl>
               <a:tblPr/>
               <a:tblGrid>
-                <a:gridCol w="1417320"/>
-                <a:gridCol w="3840480"/>
-                <a:gridCol w="1005840"/>
-                <a:gridCol w="3108960"/>
+                <a:gridCol w="1600200"/>
+                <a:gridCol w="3886200"/>
+                <a:gridCol w="960120"/>
+                <a:gridCol w="2926080"/>
                 <a:gridCol w="960120"/>
                 <a:gridCol w="941832"/>
               </a:tblGrid>
@@ -7853,7 +7853,7 @@
                           <a:ea typeface="Calibri" pitchFamily="34" charset="-122"/>
                           <a:cs typeface="Calibri" pitchFamily="34" charset="-120"/>
                         </a:rPr>
-                        <a:t>Fournisseurs, impôts et cotisations</a:t>
+                        <a:t>Fournisseurs 56,8 · impôts 167,4 · cotisations 51,1 · salaires 21,3</a:t>
                       </a:r>
                       <a:endParaRPr lang="en-US" sz="950" dirty="0">
                         <a:latin typeface="Calibri" charset="0"/>
@@ -7918,7 +7918,7 @@
                           <a:ea typeface="Calibri" pitchFamily="34" charset="-122"/>
                           <a:cs typeface="Calibri" pitchFamily="34" charset="-120"/>
                         </a:rPr>
-                        <a:t>66,1</a:t>
+                        <a:t>296,6</a:t>
                       </a:r>
                       <a:endParaRPr lang="en-US" sz="950" dirty="0">
                         <a:latin typeface="Calibri" charset="0"/>
@@ -7983,7 +7983,7 @@
                           <a:ea typeface="Calibri" pitchFamily="34" charset="-122"/>
                           <a:cs typeface="Calibri" pitchFamily="34" charset="-120"/>
                         </a:rPr>
-                        <a:t>ECOBANK-PICI (appoint STANBIC-PICI)</a:t>
+                        <a:t>ECOBANK-PICI, puis STANBIC-PICI</a:t>
                       </a:r>
                       <a:endParaRPr lang="en-US" sz="950" dirty="0">
                         <a:latin typeface="Calibri" charset="0"/>
@@ -8113,7 +8113,7 @@
                           <a:ea typeface="Calibri" pitchFamily="34" charset="-122"/>
                           <a:cs typeface="Calibri" pitchFamily="34" charset="-120"/>
                         </a:rPr>
-                        <a:t>+330,5</a:t>
+                        <a:t>+100,0</a:t>
                       </a:r>
                       <a:endParaRPr lang="en-US" sz="950" dirty="0">
                         <a:latin typeface="Calibri" charset="0"/>
@@ -8180,7 +8180,7 @@
                           <a:ea typeface="Calibri" pitchFamily="34" charset="-122"/>
                           <a:cs typeface="Calibri" pitchFamily="34" charset="-120"/>
                         </a:rPr>
-                        <a:t>SCI FIRST</a:t>
+                        <a:t>FIRST</a:t>
                       </a:r>
                       <a:endParaRPr lang="en-US" sz="950" dirty="0">
                         <a:latin typeface="Calibri" charset="0"/>
@@ -8248,7 +8248,7 @@
                           <a:ea typeface="Calibri" pitchFamily="34" charset="-122"/>
                           <a:cs typeface="Calibri" pitchFamily="34" charset="-120"/>
                         </a:rPr>
-                        <a:t>Fournisseurs, dont redevance Diaby 42,5</a:t>
+                        <a:t>Fournisseurs 91,3 · impôts 1,6</a:t>
                       </a:r>
                       <a:endParaRPr lang="en-US" sz="950" dirty="0">
                         <a:latin typeface="Calibri" charset="0"/>
@@ -8313,7 +8313,7 @@
                           <a:ea typeface="Calibri" pitchFamily="34" charset="-122"/>
                           <a:cs typeface="Calibri" pitchFamily="34" charset="-120"/>
                         </a:rPr>
-                        <a:t>91,3</a:t>
+                        <a:t>92,8</a:t>
                       </a:r>
                       <a:endParaRPr lang="en-US" sz="950" dirty="0">
                         <a:latin typeface="Calibri" charset="0"/>
@@ -8378,7 +8378,7 @@
                           <a:ea typeface="Calibri" pitchFamily="34" charset="-122"/>
                           <a:cs typeface="Calibri" pitchFamily="34" charset="-120"/>
                         </a:rPr>
-                        <a:t>STANBIC-FIRST ; Diaby : STANBIC-FIRST_LL (à confirmer)</a:t>
+                        <a:t>STANBIC-FIRST, puis SOCIETE GENERALE-FIRST</a:t>
                       </a:r>
                       <a:endParaRPr lang="en-US" sz="950" dirty="0">
                         <a:latin typeface="Calibri" charset="0"/>
@@ -8508,7 +8508,7 @@
                           <a:ea typeface="Calibri" pitchFamily="34" charset="-122"/>
                           <a:cs typeface="Calibri" pitchFamily="34" charset="-120"/>
                         </a:rPr>
-                        <a:t>+144,8</a:t>
+                        <a:t>+143,3</a:t>
                       </a:r>
                       <a:endParaRPr lang="en-US" sz="950" dirty="0">
                         <a:latin typeface="Calibri" charset="0"/>
@@ -8576,1191 +8576,6 @@
                           <a:cs typeface="Calibri" pitchFamily="34" charset="-120"/>
                         </a:rPr>
                         <a:t>TERASSON</a:t>
-                      </a:r>
-                      <a:endParaRPr lang="en-US" sz="950" dirty="0">
-                        <a:latin typeface="Calibri" charset="0"/>
-                        <a:ea typeface="Calibri" charset="0"/>
-                        <a:cs typeface="Calibri" charset="0"/>
-                      </a:endParaRPr>
-                    </a:p>
-                  </a:txBody>
-                  <a:tcPr marL="64008" marR="64008" marT="0" marB="0" anchor="ctr">
-                    <a:lnL w="6350" cap="flat" cmpd="sng" algn="ctr">
-                      <a:solidFill>
-                        <a:srgbClr val="D5DBE3"/>
-                      </a:solidFill>
-                      <a:prstDash val="solid"/>
-                      <a:round/>
-                      <a:headEnd type="none" w="med" len="med"/>
-                      <a:tailEnd type="none" w="med" len="med"/>
-                    </a:lnL>
-                    <a:lnR w="6350" cap="flat" cmpd="sng" algn="ctr">
-                      <a:solidFill>
-                        <a:srgbClr val="D5DBE3"/>
-                      </a:solidFill>
-                      <a:prstDash val="solid"/>
-                      <a:round/>
-                      <a:headEnd type="none" w="med" len="med"/>
-                      <a:tailEnd type="none" w="med" len="med"/>
-                    </a:lnR>
-                    <a:lnT w="6350" cap="flat" cmpd="sng" algn="ctr">
-                      <a:solidFill>
-                        <a:srgbClr val="D5DBE3"/>
-                      </a:solidFill>
-                      <a:prstDash val="solid"/>
-                      <a:round/>
-                      <a:headEnd type="none" w="med" len="med"/>
-                      <a:tailEnd type="none" w="med" len="med"/>
-                    </a:lnT>
-                    <a:lnB w="6350" cap="flat" cmpd="sng" algn="ctr">
-                      <a:solidFill>
-                        <a:srgbClr val="D5DBE3"/>
-                      </a:solidFill>
-                      <a:prstDash val="solid"/>
-                      <a:round/>
-                      <a:headEnd type="none" w="med" len="med"/>
-                      <a:tailEnd type="none" w="med" len="med"/>
-                    </a:lnB>
-                    <a:solidFill>
-                      <a:srgbClr val="E6F0EA"/>
-                    </a:solidFill>
-                  </a:tcPr>
-                </a:tc>
-                <a:tc>
-                  <a:txBody>
-                    <a:bodyPr/>
-                    <a:lstStyle/>
-                    <a:p>
-                      <a:pPr algn="l" indent="0" marL="0">
-                        <a:buNone/>
-                      </a:pPr>
-                      <a:r>
-                        <a:rPr lang="en-US" sz="950" dirty="0">
-                          <a:solidFill>
-                            <a:srgbClr val="1F2933"/>
-                          </a:solidFill>
-                          <a:latin typeface="Calibri" pitchFamily="34" charset="0"/>
-                          <a:ea typeface="Calibri" pitchFamily="34" charset="-122"/>
-                          <a:cs typeface="Calibri" pitchFamily="34" charset="-120"/>
-                        </a:rPr>
-                        <a:t>Fournisseurs</a:t>
-                      </a:r>
-                      <a:endParaRPr lang="en-US" sz="950" dirty="0">
-                        <a:latin typeface="Calibri" charset="0"/>
-                        <a:ea typeface="Calibri" charset="0"/>
-                        <a:cs typeface="Calibri" charset="0"/>
-                      </a:endParaRPr>
-                    </a:p>
-                  </a:txBody>
-                  <a:tcPr marL="64008" marR="64008" marT="0" marB="0" anchor="ctr">
-                    <a:lnL w="6350" cap="flat" cmpd="sng" algn="ctr">
-                      <a:solidFill>
-                        <a:srgbClr val="D5DBE3"/>
-                      </a:solidFill>
-                      <a:prstDash val="solid"/>
-                      <a:round/>
-                      <a:headEnd type="none" w="med" len="med"/>
-                      <a:tailEnd type="none" w="med" len="med"/>
-                    </a:lnL>
-                    <a:lnR w="6350" cap="flat" cmpd="sng" algn="ctr">
-                      <a:solidFill>
-                        <a:srgbClr val="D5DBE3"/>
-                      </a:solidFill>
-                      <a:prstDash val="solid"/>
-                      <a:round/>
-                      <a:headEnd type="none" w="med" len="med"/>
-                      <a:tailEnd type="none" w="med" len="med"/>
-                    </a:lnR>
-                    <a:lnT w="6350" cap="flat" cmpd="sng" algn="ctr">
-                      <a:solidFill>
-                        <a:srgbClr val="D5DBE3"/>
-                      </a:solidFill>
-                      <a:prstDash val="solid"/>
-                      <a:round/>
-                      <a:headEnd type="none" w="med" len="med"/>
-                      <a:tailEnd type="none" w="med" len="med"/>
-                    </a:lnT>
-                    <a:lnB w="6350" cap="flat" cmpd="sng" algn="ctr">
-                      <a:solidFill>
-                        <a:srgbClr val="D5DBE3"/>
-                      </a:solidFill>
-                      <a:prstDash val="solid"/>
-                      <a:round/>
-                      <a:headEnd type="none" w="med" len="med"/>
-                      <a:tailEnd type="none" w="med" len="med"/>
-                    </a:lnB>
-                  </a:tcPr>
-                </a:tc>
-                <a:tc>
-                  <a:txBody>
-                    <a:bodyPr/>
-                    <a:lstStyle/>
-                    <a:p>
-                      <a:pPr algn="r" indent="0" marL="0">
-                        <a:buNone/>
-                      </a:pPr>
-                      <a:r>
-                        <a:rPr lang="en-US" sz="950" dirty="0">
-                          <a:solidFill>
-                            <a:srgbClr val="1F2933"/>
-                          </a:solidFill>
-                          <a:latin typeface="Calibri" pitchFamily="34" charset="0"/>
-                          <a:ea typeface="Calibri" pitchFamily="34" charset="-122"/>
-                          <a:cs typeface="Calibri" pitchFamily="34" charset="-120"/>
-                        </a:rPr>
-                        <a:t>9,7</a:t>
-                      </a:r>
-                      <a:endParaRPr lang="en-US" sz="950" dirty="0">
-                        <a:latin typeface="Calibri" charset="0"/>
-                        <a:ea typeface="Calibri" charset="0"/>
-                        <a:cs typeface="Calibri" charset="0"/>
-                      </a:endParaRPr>
-                    </a:p>
-                  </a:txBody>
-                  <a:tcPr marL="64008" marR="64008" marT="0" marB="0" anchor="ctr">
-                    <a:lnL w="6350" cap="flat" cmpd="sng" algn="ctr">
-                      <a:solidFill>
-                        <a:srgbClr val="D5DBE3"/>
-                      </a:solidFill>
-                      <a:prstDash val="solid"/>
-                      <a:round/>
-                      <a:headEnd type="none" w="med" len="med"/>
-                      <a:tailEnd type="none" w="med" len="med"/>
-                    </a:lnL>
-                    <a:lnR w="6350" cap="flat" cmpd="sng" algn="ctr">
-                      <a:solidFill>
-                        <a:srgbClr val="D5DBE3"/>
-                      </a:solidFill>
-                      <a:prstDash val="solid"/>
-                      <a:round/>
-                      <a:headEnd type="none" w="med" len="med"/>
-                      <a:tailEnd type="none" w="med" len="med"/>
-                    </a:lnR>
-                    <a:lnT w="6350" cap="flat" cmpd="sng" algn="ctr">
-                      <a:solidFill>
-                        <a:srgbClr val="D5DBE3"/>
-                      </a:solidFill>
-                      <a:prstDash val="solid"/>
-                      <a:round/>
-                      <a:headEnd type="none" w="med" len="med"/>
-                      <a:tailEnd type="none" w="med" len="med"/>
-                    </a:lnT>
-                    <a:lnB w="6350" cap="flat" cmpd="sng" algn="ctr">
-                      <a:solidFill>
-                        <a:srgbClr val="D5DBE3"/>
-                      </a:solidFill>
-                      <a:prstDash val="solid"/>
-                      <a:round/>
-                      <a:headEnd type="none" w="med" len="med"/>
-                      <a:tailEnd type="none" w="med" len="med"/>
-                    </a:lnB>
-                  </a:tcPr>
-                </a:tc>
-                <a:tc>
-                  <a:txBody>
-                    <a:bodyPr/>
-                    <a:lstStyle/>
-                    <a:p>
-                      <a:pPr algn="l" indent="0" marL="0">
-                        <a:buNone/>
-                      </a:pPr>
-                      <a:r>
-                        <a:rPr lang="en-US" sz="950" dirty="0">
-                          <a:solidFill>
-                            <a:srgbClr val="1F2933"/>
-                          </a:solidFill>
-                          <a:latin typeface="Calibri" pitchFamily="34" charset="0"/>
-                          <a:ea typeface="Calibri" pitchFamily="34" charset="-122"/>
-                          <a:cs typeface="Calibri" pitchFamily="34" charset="-120"/>
-                        </a:rPr>
-                        <a:t>SOCIETE GENERALE-TERASSON</a:t>
-                      </a:r>
-                      <a:endParaRPr lang="en-US" sz="950" dirty="0">
-                        <a:latin typeface="Calibri" charset="0"/>
-                        <a:ea typeface="Calibri" charset="0"/>
-                        <a:cs typeface="Calibri" charset="0"/>
-                      </a:endParaRPr>
-                    </a:p>
-                  </a:txBody>
-                  <a:tcPr marL="64008" marR="64008" marT="0" marB="0" anchor="ctr">
-                    <a:lnL w="6350" cap="flat" cmpd="sng" algn="ctr">
-                      <a:solidFill>
-                        <a:srgbClr val="D5DBE3"/>
-                      </a:solidFill>
-                      <a:prstDash val="solid"/>
-                      <a:round/>
-                      <a:headEnd type="none" w="med" len="med"/>
-                      <a:tailEnd type="none" w="med" len="med"/>
-                    </a:lnL>
-                    <a:lnR w="6350" cap="flat" cmpd="sng" algn="ctr">
-                      <a:solidFill>
-                        <a:srgbClr val="D5DBE3"/>
-                      </a:solidFill>
-                      <a:prstDash val="solid"/>
-                      <a:round/>
-                      <a:headEnd type="none" w="med" len="med"/>
-                      <a:tailEnd type="none" w="med" len="med"/>
-                    </a:lnR>
-                    <a:lnT w="6350" cap="flat" cmpd="sng" algn="ctr">
-                      <a:solidFill>
-                        <a:srgbClr val="D5DBE3"/>
-                      </a:solidFill>
-                      <a:prstDash val="solid"/>
-                      <a:round/>
-                      <a:headEnd type="none" w="med" len="med"/>
-                      <a:tailEnd type="none" w="med" len="med"/>
-                    </a:lnT>
-                    <a:lnB w="6350" cap="flat" cmpd="sng" algn="ctr">
-                      <a:solidFill>
-                        <a:srgbClr val="D5DBE3"/>
-                      </a:solidFill>
-                      <a:prstDash val="solid"/>
-                      <a:round/>
-                      <a:headEnd type="none" w="med" len="med"/>
-                      <a:tailEnd type="none" w="med" len="med"/>
-                    </a:lnB>
-                  </a:tcPr>
-                </a:tc>
-                <a:tc>
-                  <a:txBody>
-                    <a:bodyPr/>
-                    <a:lstStyle/>
-                    <a:p>
-                      <a:pPr algn="r" indent="0" marL="0">
-                        <a:buNone/>
-                      </a:pPr>
-                      <a:r>
-                        <a:rPr lang="en-US" sz="950" dirty="0">
-                          <a:solidFill>
-                            <a:srgbClr val="1F2933"/>
-                          </a:solidFill>
-                          <a:latin typeface="Calibri" pitchFamily="34" charset="0"/>
-                          <a:ea typeface="Calibri" pitchFamily="34" charset="-122"/>
-                          <a:cs typeface="Calibri" pitchFamily="34" charset="-120"/>
-                        </a:rPr>
-                        <a:t>58,3</a:t>
-                      </a:r>
-                      <a:endParaRPr lang="en-US" sz="950" dirty="0">
-                        <a:latin typeface="Calibri" charset="0"/>
-                        <a:ea typeface="Calibri" charset="0"/>
-                        <a:cs typeface="Calibri" charset="0"/>
-                      </a:endParaRPr>
-                    </a:p>
-                  </a:txBody>
-                  <a:tcPr marL="64008" marR="64008" marT="0" marB="0" anchor="ctr">
-                    <a:lnL w="6350" cap="flat" cmpd="sng" algn="ctr">
-                      <a:solidFill>
-                        <a:srgbClr val="D5DBE3"/>
-                      </a:solidFill>
-                      <a:prstDash val="solid"/>
-                      <a:round/>
-                      <a:headEnd type="none" w="med" len="med"/>
-                      <a:tailEnd type="none" w="med" len="med"/>
-                    </a:lnL>
-                    <a:lnR w="6350" cap="flat" cmpd="sng" algn="ctr">
-                      <a:solidFill>
-                        <a:srgbClr val="D5DBE3"/>
-                      </a:solidFill>
-                      <a:prstDash val="solid"/>
-                      <a:round/>
-                      <a:headEnd type="none" w="med" len="med"/>
-                      <a:tailEnd type="none" w="med" len="med"/>
-                    </a:lnR>
-                    <a:lnT w="6350" cap="flat" cmpd="sng" algn="ctr">
-                      <a:solidFill>
-                        <a:srgbClr val="D5DBE3"/>
-                      </a:solidFill>
-                      <a:prstDash val="solid"/>
-                      <a:round/>
-                      <a:headEnd type="none" w="med" len="med"/>
-                      <a:tailEnd type="none" w="med" len="med"/>
-                    </a:lnT>
-                    <a:lnB w="6350" cap="flat" cmpd="sng" algn="ctr">
-                      <a:solidFill>
-                        <a:srgbClr val="D5DBE3"/>
-                      </a:solidFill>
-                      <a:prstDash val="solid"/>
-                      <a:round/>
-                      <a:headEnd type="none" w="med" len="med"/>
-                      <a:tailEnd type="none" w="med" len="med"/>
-                    </a:lnB>
-                  </a:tcPr>
-                </a:tc>
-                <a:tc>
-                  <a:txBody>
-                    <a:bodyPr/>
-                    <a:lstStyle/>
-                    <a:p>
-                      <a:pPr algn="r" indent="0" marL="0">
-                        <a:buNone/>
-                      </a:pPr>
-                      <a:r>
-                        <a:rPr lang="en-US" sz="950" b="1" dirty="0">
-                          <a:solidFill>
-                            <a:srgbClr val="5E9B7E"/>
-                          </a:solidFill>
-                          <a:latin typeface="Calibri" pitchFamily="34" charset="0"/>
-                          <a:ea typeface="Calibri" pitchFamily="34" charset="-122"/>
-                          <a:cs typeface="Calibri" pitchFamily="34" charset="-120"/>
-                        </a:rPr>
-                        <a:t>+48,5</a:t>
-                      </a:r>
-                      <a:endParaRPr lang="en-US" sz="950" dirty="0">
-                        <a:latin typeface="Calibri" charset="0"/>
-                        <a:ea typeface="Calibri" charset="0"/>
-                        <a:cs typeface="Calibri" charset="0"/>
-                      </a:endParaRPr>
-                    </a:p>
-                  </a:txBody>
-                  <a:tcPr marL="64008" marR="64008" marT="0" marB="0" anchor="ctr">
-                    <a:lnL w="6350" cap="flat" cmpd="sng" algn="ctr">
-                      <a:solidFill>
-                        <a:srgbClr val="D5DBE3"/>
-                      </a:solidFill>
-                      <a:prstDash val="solid"/>
-                      <a:round/>
-                      <a:headEnd type="none" w="med" len="med"/>
-                      <a:tailEnd type="none" w="med" len="med"/>
-                    </a:lnL>
-                    <a:lnR w="6350" cap="flat" cmpd="sng" algn="ctr">
-                      <a:solidFill>
-                        <a:srgbClr val="D5DBE3"/>
-                      </a:solidFill>
-                      <a:prstDash val="solid"/>
-                      <a:round/>
-                      <a:headEnd type="none" w="med" len="med"/>
-                      <a:tailEnd type="none" w="med" len="med"/>
-                    </a:lnR>
-                    <a:lnT w="6350" cap="flat" cmpd="sng" algn="ctr">
-                      <a:solidFill>
-                        <a:srgbClr val="D5DBE3"/>
-                      </a:solidFill>
-                      <a:prstDash val="solid"/>
-                      <a:round/>
-                      <a:headEnd type="none" w="med" len="med"/>
-                      <a:tailEnd type="none" w="med" len="med"/>
-                    </a:lnT>
-                    <a:lnB w="6350" cap="flat" cmpd="sng" algn="ctr">
-                      <a:solidFill>
-                        <a:srgbClr val="D5DBE3"/>
-                      </a:solidFill>
-                      <a:prstDash val="solid"/>
-                      <a:round/>
-                      <a:headEnd type="none" w="med" len="med"/>
-                      <a:tailEnd type="none" w="med" len="med"/>
-                    </a:lnB>
-                  </a:tcPr>
-                </a:tc>
-              </a:tr>
-              <a:tr h="274320">
-                <a:tc>
-                  <a:txBody>
-                    <a:bodyPr/>
-                    <a:lstStyle/>
-                    <a:p>
-                      <a:pPr algn="l" indent="0" marL="0">
-                        <a:buNone/>
-                      </a:pPr>
-                      <a:r>
-                        <a:rPr lang="en-US" sz="950" b="1" dirty="0">
-                          <a:solidFill>
-                            <a:srgbClr val="1F2933"/>
-                          </a:solidFill>
-                          <a:latin typeface="Calibri" pitchFamily="34" charset="0"/>
-                          <a:ea typeface="Calibri" pitchFamily="34" charset="-122"/>
-                          <a:cs typeface="Calibri" pitchFamily="34" charset="-120"/>
-                        </a:rPr>
-                        <a:t>RIVIERA</a:t>
-                      </a:r>
-                      <a:endParaRPr lang="en-US" sz="950" dirty="0">
-                        <a:latin typeface="Calibri" charset="0"/>
-                        <a:ea typeface="Calibri" charset="0"/>
-                        <a:cs typeface="Calibri" charset="0"/>
-                      </a:endParaRPr>
-                    </a:p>
-                  </a:txBody>
-                  <a:tcPr marL="64008" marR="64008" marT="0" marB="0" anchor="ctr">
-                    <a:lnL w="6350" cap="flat" cmpd="sng" algn="ctr">
-                      <a:solidFill>
-                        <a:srgbClr val="D5DBE3"/>
-                      </a:solidFill>
-                      <a:prstDash val="solid"/>
-                      <a:round/>
-                      <a:headEnd type="none" w="med" len="med"/>
-                      <a:tailEnd type="none" w="med" len="med"/>
-                    </a:lnL>
-                    <a:lnR w="6350" cap="flat" cmpd="sng" algn="ctr">
-                      <a:solidFill>
-                        <a:srgbClr val="D5DBE3"/>
-                      </a:solidFill>
-                      <a:prstDash val="solid"/>
-                      <a:round/>
-                      <a:headEnd type="none" w="med" len="med"/>
-                      <a:tailEnd type="none" w="med" len="med"/>
-                    </a:lnR>
-                    <a:lnT w="6350" cap="flat" cmpd="sng" algn="ctr">
-                      <a:solidFill>
-                        <a:srgbClr val="D5DBE3"/>
-                      </a:solidFill>
-                      <a:prstDash val="solid"/>
-                      <a:round/>
-                      <a:headEnd type="none" w="med" len="med"/>
-                      <a:tailEnd type="none" w="med" len="med"/>
-                    </a:lnT>
-                    <a:lnB w="6350" cap="flat" cmpd="sng" algn="ctr">
-                      <a:solidFill>
-                        <a:srgbClr val="D5DBE3"/>
-                      </a:solidFill>
-                      <a:prstDash val="solid"/>
-                      <a:round/>
-                      <a:headEnd type="none" w="med" len="med"/>
-                      <a:tailEnd type="none" w="med" len="med"/>
-                    </a:lnB>
-                    <a:solidFill>
-                      <a:srgbClr val="E6F0EA"/>
-                    </a:solidFill>
-                  </a:tcPr>
-                </a:tc>
-                <a:tc>
-                  <a:txBody>
-                    <a:bodyPr/>
-                    <a:lstStyle/>
-                    <a:p>
-                      <a:pPr algn="l" indent="0" marL="0">
-                        <a:buNone/>
-                      </a:pPr>
-                      <a:r>
-                        <a:rPr lang="en-US" sz="950" dirty="0">
-                          <a:solidFill>
-                            <a:srgbClr val="1F2933"/>
-                          </a:solidFill>
-                          <a:latin typeface="Calibri" pitchFamily="34" charset="0"/>
-                          <a:ea typeface="Calibri" pitchFamily="34" charset="-122"/>
-                          <a:cs typeface="Calibri" pitchFamily="34" charset="-120"/>
-                        </a:rPr>
-                        <a:t>Fournisseurs, impôts et cotisations</a:t>
-                      </a:r>
-                      <a:endParaRPr lang="en-US" sz="950" dirty="0">
-                        <a:latin typeface="Calibri" charset="0"/>
-                        <a:ea typeface="Calibri" charset="0"/>
-                        <a:cs typeface="Calibri" charset="0"/>
-                      </a:endParaRPr>
-                    </a:p>
-                  </a:txBody>
-                  <a:tcPr marL="64008" marR="64008" marT="0" marB="0" anchor="ctr">
-                    <a:lnL w="6350" cap="flat" cmpd="sng" algn="ctr">
-                      <a:solidFill>
-                        <a:srgbClr val="D5DBE3"/>
-                      </a:solidFill>
-                      <a:prstDash val="solid"/>
-                      <a:round/>
-                      <a:headEnd type="none" w="med" len="med"/>
-                      <a:tailEnd type="none" w="med" len="med"/>
-                    </a:lnL>
-                    <a:lnR w="6350" cap="flat" cmpd="sng" algn="ctr">
-                      <a:solidFill>
-                        <a:srgbClr val="D5DBE3"/>
-                      </a:solidFill>
-                      <a:prstDash val="solid"/>
-                      <a:round/>
-                      <a:headEnd type="none" w="med" len="med"/>
-                      <a:tailEnd type="none" w="med" len="med"/>
-                    </a:lnR>
-                    <a:lnT w="6350" cap="flat" cmpd="sng" algn="ctr">
-                      <a:solidFill>
-                        <a:srgbClr val="D5DBE3"/>
-                      </a:solidFill>
-                      <a:prstDash val="solid"/>
-                      <a:round/>
-                      <a:headEnd type="none" w="med" len="med"/>
-                      <a:tailEnd type="none" w="med" len="med"/>
-                    </a:lnT>
-                    <a:lnB w="6350" cap="flat" cmpd="sng" algn="ctr">
-                      <a:solidFill>
-                        <a:srgbClr val="D5DBE3"/>
-                      </a:solidFill>
-                      <a:prstDash val="solid"/>
-                      <a:round/>
-                      <a:headEnd type="none" w="med" len="med"/>
-                      <a:tailEnd type="none" w="med" len="med"/>
-                    </a:lnB>
-                  </a:tcPr>
-                </a:tc>
-                <a:tc>
-                  <a:txBody>
-                    <a:bodyPr/>
-                    <a:lstStyle/>
-                    <a:p>
-                      <a:pPr algn="r" indent="0" marL="0">
-                        <a:buNone/>
-                      </a:pPr>
-                      <a:r>
-                        <a:rPr lang="en-US" sz="950" dirty="0">
-                          <a:solidFill>
-                            <a:srgbClr val="1F2933"/>
-                          </a:solidFill>
-                          <a:latin typeface="Calibri" pitchFamily="34" charset="0"/>
-                          <a:ea typeface="Calibri" pitchFamily="34" charset="-122"/>
-                          <a:cs typeface="Calibri" pitchFamily="34" charset="-120"/>
-                        </a:rPr>
-                        <a:t>12,4</a:t>
-                      </a:r>
-                      <a:endParaRPr lang="en-US" sz="950" dirty="0">
-                        <a:latin typeface="Calibri" charset="0"/>
-                        <a:ea typeface="Calibri" charset="0"/>
-                        <a:cs typeface="Calibri" charset="0"/>
-                      </a:endParaRPr>
-                    </a:p>
-                  </a:txBody>
-                  <a:tcPr marL="64008" marR="64008" marT="0" marB="0" anchor="ctr">
-                    <a:lnL w="6350" cap="flat" cmpd="sng" algn="ctr">
-                      <a:solidFill>
-                        <a:srgbClr val="D5DBE3"/>
-                      </a:solidFill>
-                      <a:prstDash val="solid"/>
-                      <a:round/>
-                      <a:headEnd type="none" w="med" len="med"/>
-                      <a:tailEnd type="none" w="med" len="med"/>
-                    </a:lnL>
-                    <a:lnR w="6350" cap="flat" cmpd="sng" algn="ctr">
-                      <a:solidFill>
-                        <a:srgbClr val="D5DBE3"/>
-                      </a:solidFill>
-                      <a:prstDash val="solid"/>
-                      <a:round/>
-                      <a:headEnd type="none" w="med" len="med"/>
-                      <a:tailEnd type="none" w="med" len="med"/>
-                    </a:lnR>
-                    <a:lnT w="6350" cap="flat" cmpd="sng" algn="ctr">
-                      <a:solidFill>
-                        <a:srgbClr val="D5DBE3"/>
-                      </a:solidFill>
-                      <a:prstDash val="solid"/>
-                      <a:round/>
-                      <a:headEnd type="none" w="med" len="med"/>
-                      <a:tailEnd type="none" w="med" len="med"/>
-                    </a:lnT>
-                    <a:lnB w="6350" cap="flat" cmpd="sng" algn="ctr">
-                      <a:solidFill>
-                        <a:srgbClr val="D5DBE3"/>
-                      </a:solidFill>
-                      <a:prstDash val="solid"/>
-                      <a:round/>
-                      <a:headEnd type="none" w="med" len="med"/>
-                      <a:tailEnd type="none" w="med" len="med"/>
-                    </a:lnB>
-                  </a:tcPr>
-                </a:tc>
-                <a:tc>
-                  <a:txBody>
-                    <a:bodyPr/>
-                    <a:lstStyle/>
-                    <a:p>
-                      <a:pPr algn="l" indent="0" marL="0">
-                        <a:buNone/>
-                      </a:pPr>
-                      <a:r>
-                        <a:rPr lang="en-US" sz="950" dirty="0">
-                          <a:solidFill>
-                            <a:srgbClr val="1F2933"/>
-                          </a:solidFill>
-                          <a:latin typeface="Calibri" pitchFamily="34" charset="0"/>
-                          <a:ea typeface="Calibri" pitchFamily="34" charset="-122"/>
-                          <a:cs typeface="Calibri" pitchFamily="34" charset="-120"/>
-                        </a:rPr>
-                        <a:t>SG-RIVIERA, puis BNI-RIVIERA courant</a:t>
-                      </a:r>
-                      <a:endParaRPr lang="en-US" sz="950" dirty="0">
-                        <a:latin typeface="Calibri" charset="0"/>
-                        <a:ea typeface="Calibri" charset="0"/>
-                        <a:cs typeface="Calibri" charset="0"/>
-                      </a:endParaRPr>
-                    </a:p>
-                  </a:txBody>
-                  <a:tcPr marL="64008" marR="64008" marT="0" marB="0" anchor="ctr">
-                    <a:lnL w="6350" cap="flat" cmpd="sng" algn="ctr">
-                      <a:solidFill>
-                        <a:srgbClr val="D5DBE3"/>
-                      </a:solidFill>
-                      <a:prstDash val="solid"/>
-                      <a:round/>
-                      <a:headEnd type="none" w="med" len="med"/>
-                      <a:tailEnd type="none" w="med" len="med"/>
-                    </a:lnL>
-                    <a:lnR w="6350" cap="flat" cmpd="sng" algn="ctr">
-                      <a:solidFill>
-                        <a:srgbClr val="D5DBE3"/>
-                      </a:solidFill>
-                      <a:prstDash val="solid"/>
-                      <a:round/>
-                      <a:headEnd type="none" w="med" len="med"/>
-                      <a:tailEnd type="none" w="med" len="med"/>
-                    </a:lnR>
-                    <a:lnT w="6350" cap="flat" cmpd="sng" algn="ctr">
-                      <a:solidFill>
-                        <a:srgbClr val="D5DBE3"/>
-                      </a:solidFill>
-                      <a:prstDash val="solid"/>
-                      <a:round/>
-                      <a:headEnd type="none" w="med" len="med"/>
-                      <a:tailEnd type="none" w="med" len="med"/>
-                    </a:lnT>
-                    <a:lnB w="6350" cap="flat" cmpd="sng" algn="ctr">
-                      <a:solidFill>
-                        <a:srgbClr val="D5DBE3"/>
-                      </a:solidFill>
-                      <a:prstDash val="solid"/>
-                      <a:round/>
-                      <a:headEnd type="none" w="med" len="med"/>
-                      <a:tailEnd type="none" w="med" len="med"/>
-                    </a:lnB>
-                  </a:tcPr>
-                </a:tc>
-                <a:tc>
-                  <a:txBody>
-                    <a:bodyPr/>
-                    <a:lstStyle/>
-                    <a:p>
-                      <a:pPr algn="r" indent="0" marL="0">
-                        <a:buNone/>
-                      </a:pPr>
-                      <a:r>
-                        <a:rPr lang="en-US" sz="950" dirty="0">
-                          <a:solidFill>
-                            <a:srgbClr val="1F2933"/>
-                          </a:solidFill>
-                          <a:latin typeface="Calibri" pitchFamily="34" charset="0"/>
-                          <a:ea typeface="Calibri" pitchFamily="34" charset="-122"/>
-                          <a:cs typeface="Calibri" pitchFamily="34" charset="-120"/>
-                        </a:rPr>
-                        <a:t>1 773,5</a:t>
-                      </a:r>
-                      <a:endParaRPr lang="en-US" sz="950" dirty="0">
-                        <a:latin typeface="Calibri" charset="0"/>
-                        <a:ea typeface="Calibri" charset="0"/>
-                        <a:cs typeface="Calibri" charset="0"/>
-                      </a:endParaRPr>
-                    </a:p>
-                  </a:txBody>
-                  <a:tcPr marL="64008" marR="64008" marT="0" marB="0" anchor="ctr">
-                    <a:lnL w="6350" cap="flat" cmpd="sng" algn="ctr">
-                      <a:solidFill>
-                        <a:srgbClr val="D5DBE3"/>
-                      </a:solidFill>
-                      <a:prstDash val="solid"/>
-                      <a:round/>
-                      <a:headEnd type="none" w="med" len="med"/>
-                      <a:tailEnd type="none" w="med" len="med"/>
-                    </a:lnL>
-                    <a:lnR w="6350" cap="flat" cmpd="sng" algn="ctr">
-                      <a:solidFill>
-                        <a:srgbClr val="D5DBE3"/>
-                      </a:solidFill>
-                      <a:prstDash val="solid"/>
-                      <a:round/>
-                      <a:headEnd type="none" w="med" len="med"/>
-                      <a:tailEnd type="none" w="med" len="med"/>
-                    </a:lnR>
-                    <a:lnT w="6350" cap="flat" cmpd="sng" algn="ctr">
-                      <a:solidFill>
-                        <a:srgbClr val="D5DBE3"/>
-                      </a:solidFill>
-                      <a:prstDash val="solid"/>
-                      <a:round/>
-                      <a:headEnd type="none" w="med" len="med"/>
-                      <a:tailEnd type="none" w="med" len="med"/>
-                    </a:lnT>
-                    <a:lnB w="6350" cap="flat" cmpd="sng" algn="ctr">
-                      <a:solidFill>
-                        <a:srgbClr val="D5DBE3"/>
-                      </a:solidFill>
-                      <a:prstDash val="solid"/>
-                      <a:round/>
-                      <a:headEnd type="none" w="med" len="med"/>
-                      <a:tailEnd type="none" w="med" len="med"/>
-                    </a:lnB>
-                  </a:tcPr>
-                </a:tc>
-                <a:tc>
-                  <a:txBody>
-                    <a:bodyPr/>
-                    <a:lstStyle/>
-                    <a:p>
-                      <a:pPr algn="r" indent="0" marL="0">
-                        <a:buNone/>
-                      </a:pPr>
-                      <a:r>
-                        <a:rPr lang="en-US" sz="950" b="1" dirty="0">
-                          <a:solidFill>
-                            <a:srgbClr val="5E9B7E"/>
-                          </a:solidFill>
-                          <a:latin typeface="Calibri" pitchFamily="34" charset="0"/>
-                          <a:ea typeface="Calibri" pitchFamily="34" charset="-122"/>
-                          <a:cs typeface="Calibri" pitchFamily="34" charset="-120"/>
-                        </a:rPr>
-                        <a:t>+1 761,1</a:t>
-                      </a:r>
-                      <a:endParaRPr lang="en-US" sz="950" dirty="0">
-                        <a:latin typeface="Calibri" charset="0"/>
-                        <a:ea typeface="Calibri" charset="0"/>
-                        <a:cs typeface="Calibri" charset="0"/>
-                      </a:endParaRPr>
-                    </a:p>
-                  </a:txBody>
-                  <a:tcPr marL="64008" marR="64008" marT="0" marB="0" anchor="ctr">
-                    <a:lnL w="6350" cap="flat" cmpd="sng" algn="ctr">
-                      <a:solidFill>
-                        <a:srgbClr val="D5DBE3"/>
-                      </a:solidFill>
-                      <a:prstDash val="solid"/>
-                      <a:round/>
-                      <a:headEnd type="none" w="med" len="med"/>
-                      <a:tailEnd type="none" w="med" len="med"/>
-                    </a:lnL>
-                    <a:lnR w="6350" cap="flat" cmpd="sng" algn="ctr">
-                      <a:solidFill>
-                        <a:srgbClr val="D5DBE3"/>
-                      </a:solidFill>
-                      <a:prstDash val="solid"/>
-                      <a:round/>
-                      <a:headEnd type="none" w="med" len="med"/>
-                      <a:tailEnd type="none" w="med" len="med"/>
-                    </a:lnR>
-                    <a:lnT w="6350" cap="flat" cmpd="sng" algn="ctr">
-                      <a:solidFill>
-                        <a:srgbClr val="D5DBE3"/>
-                      </a:solidFill>
-                      <a:prstDash val="solid"/>
-                      <a:round/>
-                      <a:headEnd type="none" w="med" len="med"/>
-                      <a:tailEnd type="none" w="med" len="med"/>
-                    </a:lnT>
-                    <a:lnB w="6350" cap="flat" cmpd="sng" algn="ctr">
-                      <a:solidFill>
-                        <a:srgbClr val="D5DBE3"/>
-                      </a:solidFill>
-                      <a:prstDash val="solid"/>
-                      <a:round/>
-                      <a:headEnd type="none" w="med" len="med"/>
-                      <a:tailEnd type="none" w="med" len="med"/>
-                    </a:lnB>
-                  </a:tcPr>
-                </a:tc>
-              </a:tr>
-              <a:tr h="274320">
-                <a:tc>
-                  <a:txBody>
-                    <a:bodyPr/>
-                    <a:lstStyle/>
-                    <a:p>
-                      <a:pPr algn="l" indent="0" marL="0">
-                        <a:buNone/>
-                      </a:pPr>
-                      <a:r>
-                        <a:rPr lang="en-US" sz="950" b="1" dirty="0">
-                          <a:solidFill>
-                            <a:srgbClr val="1F2933"/>
-                          </a:solidFill>
-                          <a:latin typeface="Calibri" pitchFamily="34" charset="0"/>
-                          <a:ea typeface="Calibri" pitchFamily="34" charset="-122"/>
-                          <a:cs typeface="Calibri" pitchFamily="34" charset="-120"/>
-                        </a:rPr>
-                        <a:t>ODALYS CI</a:t>
-                      </a:r>
-                      <a:endParaRPr lang="en-US" sz="950" dirty="0">
-                        <a:latin typeface="Calibri" charset="0"/>
-                        <a:ea typeface="Calibri" charset="0"/>
-                        <a:cs typeface="Calibri" charset="0"/>
-                      </a:endParaRPr>
-                    </a:p>
-                  </a:txBody>
-                  <a:tcPr marL="64008" marR="64008" marT="0" marB="0" anchor="ctr">
-                    <a:lnL w="6350" cap="flat" cmpd="sng" algn="ctr">
-                      <a:solidFill>
-                        <a:srgbClr val="D5DBE3"/>
-                      </a:solidFill>
-                      <a:prstDash val="solid"/>
-                      <a:round/>
-                      <a:headEnd type="none" w="med" len="med"/>
-                      <a:tailEnd type="none" w="med" len="med"/>
-                    </a:lnL>
-                    <a:lnR w="6350" cap="flat" cmpd="sng" algn="ctr">
-                      <a:solidFill>
-                        <a:srgbClr val="D5DBE3"/>
-                      </a:solidFill>
-                      <a:prstDash val="solid"/>
-                      <a:round/>
-                      <a:headEnd type="none" w="med" len="med"/>
-                      <a:tailEnd type="none" w="med" len="med"/>
-                    </a:lnR>
-                    <a:lnT w="6350" cap="flat" cmpd="sng" algn="ctr">
-                      <a:solidFill>
-                        <a:srgbClr val="D5DBE3"/>
-                      </a:solidFill>
-                      <a:prstDash val="solid"/>
-                      <a:round/>
-                      <a:headEnd type="none" w="med" len="med"/>
-                      <a:tailEnd type="none" w="med" len="med"/>
-                    </a:lnT>
-                    <a:lnB w="6350" cap="flat" cmpd="sng" algn="ctr">
-                      <a:solidFill>
-                        <a:srgbClr val="D5DBE3"/>
-                      </a:solidFill>
-                      <a:prstDash val="solid"/>
-                      <a:round/>
-                      <a:headEnd type="none" w="med" len="med"/>
-                      <a:tailEnd type="none" w="med" len="med"/>
-                    </a:lnB>
-                    <a:solidFill>
-                      <a:srgbClr val="E6F0EA"/>
-                    </a:solidFill>
-                  </a:tcPr>
-                </a:tc>
-                <a:tc>
-                  <a:txBody>
-                    <a:bodyPr/>
-                    <a:lstStyle/>
-                    <a:p>
-                      <a:pPr algn="l" indent="0" marL="0">
-                        <a:buNone/>
-                      </a:pPr>
-                      <a:r>
-                        <a:rPr lang="en-US" sz="950" dirty="0">
-                          <a:solidFill>
-                            <a:srgbClr val="1F2933"/>
-                          </a:solidFill>
-                          <a:latin typeface="Calibri" pitchFamily="34" charset="0"/>
-                          <a:ea typeface="Calibri" pitchFamily="34" charset="-122"/>
-                          <a:cs typeface="Calibri" pitchFamily="34" charset="-120"/>
-                        </a:rPr>
-                        <a:t>Fournisseurs</a:t>
-                      </a:r>
-                      <a:endParaRPr lang="en-US" sz="950" dirty="0">
-                        <a:latin typeface="Calibri" charset="0"/>
-                        <a:ea typeface="Calibri" charset="0"/>
-                        <a:cs typeface="Calibri" charset="0"/>
-                      </a:endParaRPr>
-                    </a:p>
-                  </a:txBody>
-                  <a:tcPr marL="64008" marR="64008" marT="0" marB="0" anchor="ctr">
-                    <a:lnL w="6350" cap="flat" cmpd="sng" algn="ctr">
-                      <a:solidFill>
-                        <a:srgbClr val="D5DBE3"/>
-                      </a:solidFill>
-                      <a:prstDash val="solid"/>
-                      <a:round/>
-                      <a:headEnd type="none" w="med" len="med"/>
-                      <a:tailEnd type="none" w="med" len="med"/>
-                    </a:lnL>
-                    <a:lnR w="6350" cap="flat" cmpd="sng" algn="ctr">
-                      <a:solidFill>
-                        <a:srgbClr val="D5DBE3"/>
-                      </a:solidFill>
-                      <a:prstDash val="solid"/>
-                      <a:round/>
-                      <a:headEnd type="none" w="med" len="med"/>
-                      <a:tailEnd type="none" w="med" len="med"/>
-                    </a:lnR>
-                    <a:lnT w="6350" cap="flat" cmpd="sng" algn="ctr">
-                      <a:solidFill>
-                        <a:srgbClr val="D5DBE3"/>
-                      </a:solidFill>
-                      <a:prstDash val="solid"/>
-                      <a:round/>
-                      <a:headEnd type="none" w="med" len="med"/>
-                      <a:tailEnd type="none" w="med" len="med"/>
-                    </a:lnT>
-                    <a:lnB w="6350" cap="flat" cmpd="sng" algn="ctr">
-                      <a:solidFill>
-                        <a:srgbClr val="D5DBE3"/>
-                      </a:solidFill>
-                      <a:prstDash val="solid"/>
-                      <a:round/>
-                      <a:headEnd type="none" w="med" len="med"/>
-                      <a:tailEnd type="none" w="med" len="med"/>
-                    </a:lnB>
-                  </a:tcPr>
-                </a:tc>
-                <a:tc>
-                  <a:txBody>
-                    <a:bodyPr/>
-                    <a:lstStyle/>
-                    <a:p>
-                      <a:pPr algn="r" indent="0" marL="0">
-                        <a:buNone/>
-                      </a:pPr>
-                      <a:r>
-                        <a:rPr lang="en-US" sz="950" dirty="0">
-                          <a:solidFill>
-                            <a:srgbClr val="1F2933"/>
-                          </a:solidFill>
-                          <a:latin typeface="Calibri" pitchFamily="34" charset="0"/>
-                          <a:ea typeface="Calibri" pitchFamily="34" charset="-122"/>
-                          <a:cs typeface="Calibri" pitchFamily="34" charset="-120"/>
-                        </a:rPr>
-                        <a:t>0,3</a:t>
-                      </a:r>
-                      <a:endParaRPr lang="en-US" sz="950" dirty="0">
-                        <a:latin typeface="Calibri" charset="0"/>
-                        <a:ea typeface="Calibri" charset="0"/>
-                        <a:cs typeface="Calibri" charset="0"/>
-                      </a:endParaRPr>
-                    </a:p>
-                  </a:txBody>
-                  <a:tcPr marL="64008" marR="64008" marT="0" marB="0" anchor="ctr">
-                    <a:lnL w="6350" cap="flat" cmpd="sng" algn="ctr">
-                      <a:solidFill>
-                        <a:srgbClr val="D5DBE3"/>
-                      </a:solidFill>
-                      <a:prstDash val="solid"/>
-                      <a:round/>
-                      <a:headEnd type="none" w="med" len="med"/>
-                      <a:tailEnd type="none" w="med" len="med"/>
-                    </a:lnL>
-                    <a:lnR w="6350" cap="flat" cmpd="sng" algn="ctr">
-                      <a:solidFill>
-                        <a:srgbClr val="D5DBE3"/>
-                      </a:solidFill>
-                      <a:prstDash val="solid"/>
-                      <a:round/>
-                      <a:headEnd type="none" w="med" len="med"/>
-                      <a:tailEnd type="none" w="med" len="med"/>
-                    </a:lnR>
-                    <a:lnT w="6350" cap="flat" cmpd="sng" algn="ctr">
-                      <a:solidFill>
-                        <a:srgbClr val="D5DBE3"/>
-                      </a:solidFill>
-                      <a:prstDash val="solid"/>
-                      <a:round/>
-                      <a:headEnd type="none" w="med" len="med"/>
-                      <a:tailEnd type="none" w="med" len="med"/>
-                    </a:lnT>
-                    <a:lnB w="6350" cap="flat" cmpd="sng" algn="ctr">
-                      <a:solidFill>
-                        <a:srgbClr val="D5DBE3"/>
-                      </a:solidFill>
-                      <a:prstDash val="solid"/>
-                      <a:round/>
-                      <a:headEnd type="none" w="med" len="med"/>
-                      <a:tailEnd type="none" w="med" len="med"/>
-                    </a:lnB>
-                  </a:tcPr>
-                </a:tc>
-                <a:tc>
-                  <a:txBody>
-                    <a:bodyPr/>
-                    <a:lstStyle/>
-                    <a:p>
-                      <a:pPr algn="l" indent="0" marL="0">
-                        <a:buNone/>
-                      </a:pPr>
-                      <a:r>
-                        <a:rPr lang="en-US" sz="950" dirty="0">
-                          <a:solidFill>
-                            <a:srgbClr val="1F2933"/>
-                          </a:solidFill>
-                          <a:latin typeface="Calibri" pitchFamily="34" charset="0"/>
-                          <a:ea typeface="Calibri" pitchFamily="34" charset="-122"/>
-                          <a:cs typeface="Calibri" pitchFamily="34" charset="-120"/>
-                        </a:rPr>
-                        <a:t>SOCIETE GENERALE-ODALYS</a:t>
-                      </a:r>
-                      <a:endParaRPr lang="en-US" sz="950" dirty="0">
-                        <a:latin typeface="Calibri" charset="0"/>
-                        <a:ea typeface="Calibri" charset="0"/>
-                        <a:cs typeface="Calibri" charset="0"/>
-                      </a:endParaRPr>
-                    </a:p>
-                  </a:txBody>
-                  <a:tcPr marL="64008" marR="64008" marT="0" marB="0" anchor="ctr">
-                    <a:lnL w="6350" cap="flat" cmpd="sng" algn="ctr">
-                      <a:solidFill>
-                        <a:srgbClr val="D5DBE3"/>
-                      </a:solidFill>
-                      <a:prstDash val="solid"/>
-                      <a:round/>
-                      <a:headEnd type="none" w="med" len="med"/>
-                      <a:tailEnd type="none" w="med" len="med"/>
-                    </a:lnL>
-                    <a:lnR w="6350" cap="flat" cmpd="sng" algn="ctr">
-                      <a:solidFill>
-                        <a:srgbClr val="D5DBE3"/>
-                      </a:solidFill>
-                      <a:prstDash val="solid"/>
-                      <a:round/>
-                      <a:headEnd type="none" w="med" len="med"/>
-                      <a:tailEnd type="none" w="med" len="med"/>
-                    </a:lnR>
-                    <a:lnT w="6350" cap="flat" cmpd="sng" algn="ctr">
-                      <a:solidFill>
-                        <a:srgbClr val="D5DBE3"/>
-                      </a:solidFill>
-                      <a:prstDash val="solid"/>
-                      <a:round/>
-                      <a:headEnd type="none" w="med" len="med"/>
-                      <a:tailEnd type="none" w="med" len="med"/>
-                    </a:lnT>
-                    <a:lnB w="6350" cap="flat" cmpd="sng" algn="ctr">
-                      <a:solidFill>
-                        <a:srgbClr val="D5DBE3"/>
-                      </a:solidFill>
-                      <a:prstDash val="solid"/>
-                      <a:round/>
-                      <a:headEnd type="none" w="med" len="med"/>
-                      <a:tailEnd type="none" w="med" len="med"/>
-                    </a:lnB>
-                  </a:tcPr>
-                </a:tc>
-                <a:tc>
-                  <a:txBody>
-                    <a:bodyPr/>
-                    <a:lstStyle/>
-                    <a:p>
-                      <a:pPr algn="r" indent="0" marL="0">
-                        <a:buNone/>
-                      </a:pPr>
-                      <a:r>
-                        <a:rPr lang="en-US" sz="950" dirty="0">
-                          <a:solidFill>
-                            <a:srgbClr val="1F2933"/>
-                          </a:solidFill>
-                          <a:latin typeface="Calibri" pitchFamily="34" charset="0"/>
-                          <a:ea typeface="Calibri" pitchFamily="34" charset="-122"/>
-                          <a:cs typeface="Calibri" pitchFamily="34" charset="-120"/>
-                        </a:rPr>
-                        <a:t>6,1</a:t>
-                      </a:r>
-                      <a:endParaRPr lang="en-US" sz="950" dirty="0">
-                        <a:latin typeface="Calibri" charset="0"/>
-                        <a:ea typeface="Calibri" charset="0"/>
-                        <a:cs typeface="Calibri" charset="0"/>
-                      </a:endParaRPr>
-                    </a:p>
-                  </a:txBody>
-                  <a:tcPr marL="64008" marR="64008" marT="0" marB="0" anchor="ctr">
-                    <a:lnL w="6350" cap="flat" cmpd="sng" algn="ctr">
-                      <a:solidFill>
-                        <a:srgbClr val="D5DBE3"/>
-                      </a:solidFill>
-                      <a:prstDash val="solid"/>
-                      <a:round/>
-                      <a:headEnd type="none" w="med" len="med"/>
-                      <a:tailEnd type="none" w="med" len="med"/>
-                    </a:lnL>
-                    <a:lnR w="6350" cap="flat" cmpd="sng" algn="ctr">
-                      <a:solidFill>
-                        <a:srgbClr val="D5DBE3"/>
-                      </a:solidFill>
-                      <a:prstDash val="solid"/>
-                      <a:round/>
-                      <a:headEnd type="none" w="med" len="med"/>
-                      <a:tailEnd type="none" w="med" len="med"/>
-                    </a:lnR>
-                    <a:lnT w="6350" cap="flat" cmpd="sng" algn="ctr">
-                      <a:solidFill>
-                        <a:srgbClr val="D5DBE3"/>
-                      </a:solidFill>
-                      <a:prstDash val="solid"/>
-                      <a:round/>
-                      <a:headEnd type="none" w="med" len="med"/>
-                      <a:tailEnd type="none" w="med" len="med"/>
-                    </a:lnT>
-                    <a:lnB w="6350" cap="flat" cmpd="sng" algn="ctr">
-                      <a:solidFill>
-                        <a:srgbClr val="D5DBE3"/>
-                      </a:solidFill>
-                      <a:prstDash val="solid"/>
-                      <a:round/>
-                      <a:headEnd type="none" w="med" len="med"/>
-                      <a:tailEnd type="none" w="med" len="med"/>
-                    </a:lnB>
-                  </a:tcPr>
-                </a:tc>
-                <a:tc>
-                  <a:txBody>
-                    <a:bodyPr/>
-                    <a:lstStyle/>
-                    <a:p>
-                      <a:pPr algn="r" indent="0" marL="0">
-                        <a:buNone/>
-                      </a:pPr>
-                      <a:r>
-                        <a:rPr lang="en-US" sz="950" b="1" dirty="0">
-                          <a:solidFill>
-                            <a:srgbClr val="5E9B7E"/>
-                          </a:solidFill>
-                          <a:latin typeface="Calibri" pitchFamily="34" charset="0"/>
-                          <a:ea typeface="Calibri" pitchFamily="34" charset="-122"/>
-                          <a:cs typeface="Calibri" pitchFamily="34" charset="-120"/>
-                        </a:rPr>
-                        <a:t>+5,7</a:t>
-                      </a:r>
-                      <a:endParaRPr lang="en-US" sz="950" dirty="0">
-                        <a:latin typeface="Calibri" charset="0"/>
-                        <a:ea typeface="Calibri" charset="0"/>
-                        <a:cs typeface="Calibri" charset="0"/>
-                      </a:endParaRPr>
-                    </a:p>
-                  </a:txBody>
-                  <a:tcPr marL="64008" marR="64008" marT="0" marB="0" anchor="ctr">
-                    <a:lnL w="6350" cap="flat" cmpd="sng" algn="ctr">
-                      <a:solidFill>
-                        <a:srgbClr val="D5DBE3"/>
-                      </a:solidFill>
-                      <a:prstDash val="solid"/>
-                      <a:round/>
-                      <a:headEnd type="none" w="med" len="med"/>
-                      <a:tailEnd type="none" w="med" len="med"/>
-                    </a:lnL>
-                    <a:lnR w="6350" cap="flat" cmpd="sng" algn="ctr">
-                      <a:solidFill>
-                        <a:srgbClr val="D5DBE3"/>
-                      </a:solidFill>
-                      <a:prstDash val="solid"/>
-                      <a:round/>
-                      <a:headEnd type="none" w="med" len="med"/>
-                      <a:tailEnd type="none" w="med" len="med"/>
-                    </a:lnR>
-                    <a:lnT w="6350" cap="flat" cmpd="sng" algn="ctr">
-                      <a:solidFill>
-                        <a:srgbClr val="D5DBE3"/>
-                      </a:solidFill>
-                      <a:prstDash val="solid"/>
-                      <a:round/>
-                      <a:headEnd type="none" w="med" len="med"/>
-                      <a:tailEnd type="none" w="med" len="med"/>
-                    </a:lnT>
-                    <a:lnB w="6350" cap="flat" cmpd="sng" algn="ctr">
-                      <a:solidFill>
-                        <a:srgbClr val="D5DBE3"/>
-                      </a:solidFill>
-                      <a:prstDash val="solid"/>
-                      <a:round/>
-                      <a:headEnd type="none" w="med" len="med"/>
-                      <a:tailEnd type="none" w="med" len="med"/>
-                    </a:lnB>
-                  </a:tcPr>
-                </a:tc>
-              </a:tr>
-              <a:tr h="274320">
-                <a:tc>
-                  <a:txBody>
-                    <a:bodyPr/>
-                    <a:lstStyle/>
-                    <a:p>
-                      <a:pPr algn="l" indent="0" marL="0">
-                        <a:buNone/>
-                      </a:pPr>
-                      <a:r>
-                        <a:rPr lang="en-US" sz="950" b="1" dirty="0">
-                          <a:solidFill>
-                            <a:srgbClr val="1F2933"/>
-                          </a:solidFill>
-                          <a:latin typeface="Calibri" pitchFamily="34" charset="0"/>
-                          <a:ea typeface="Calibri" pitchFamily="34" charset="-122"/>
-                          <a:cs typeface="Calibri" pitchFamily="34" charset="-120"/>
-                        </a:rPr>
-                        <a:t>SCO AO</a:t>
                       </a:r>
                       <a:endParaRPr lang="en-US" sz="950" dirty="0">
                         <a:latin typeface="Calibri" charset="0"/>
@@ -9828,7 +8643,7 @@
                           <a:ea typeface="Calibri" pitchFamily="34" charset="-122"/>
                           <a:cs typeface="Calibri" pitchFamily="34" charset="-120"/>
                         </a:rPr>
-                        <a:t>Fournisseurs projet</a:t>
+                        <a:t>Fournisseurs 9,7 · impôts 254,9</a:t>
                       </a:r>
                       <a:endParaRPr lang="en-US" sz="950" dirty="0">
                         <a:latin typeface="Calibri" charset="0"/>
@@ -9893,7 +8708,7 @@
                           <a:ea typeface="Calibri" pitchFamily="34" charset="-122"/>
                           <a:cs typeface="Calibri" pitchFamily="34" charset="-120"/>
                         </a:rPr>
-                        <a:t>26,6</a:t>
+                        <a:t>264,6</a:t>
                       </a:r>
                       <a:endParaRPr lang="en-US" sz="950" dirty="0">
                         <a:latin typeface="Calibri" charset="0"/>
@@ -9958,7 +8773,7 @@
                           <a:ea typeface="Calibri" pitchFamily="34" charset="-122"/>
                           <a:cs typeface="Calibri" pitchFamily="34" charset="-120"/>
                         </a:rPr>
-                        <a:t>BACI-Projet, BACI-AGORA</a:t>
+                        <a:t>SOCIETE GENERALE-TERASSON, puis ECOBANK -TERASSON</a:t>
                       </a:r>
                       <a:endParaRPr lang="en-US" sz="950" dirty="0">
                         <a:latin typeface="Calibri" charset="0"/>
@@ -10023,7 +8838,7 @@
                           <a:ea typeface="Calibri" pitchFamily="34" charset="-122"/>
                           <a:cs typeface="Calibri" pitchFamily="34" charset="-120"/>
                         </a:rPr>
-                        <a:t>22,8</a:t>
+                        <a:t>58,3</a:t>
                       </a:r>
                       <a:endParaRPr lang="en-US" sz="950" dirty="0">
                         <a:latin typeface="Calibri" charset="0"/>
@@ -10088,7 +8903,7 @@
                           <a:ea typeface="Calibri" pitchFamily="34" charset="-122"/>
                           <a:cs typeface="Calibri" pitchFamily="34" charset="-120"/>
                         </a:rPr>
-                        <a:t>-3,8</a:t>
+                        <a:t>-206,4</a:t>
                       </a:r>
                       <a:endParaRPr lang="en-US" sz="950" dirty="0">
                         <a:latin typeface="Calibri" charset="0"/>
@@ -10158,7 +8973,7 @@
                           <a:ea typeface="Calibri" pitchFamily="34" charset="-122"/>
                           <a:cs typeface="Calibri" pitchFamily="34" charset="-120"/>
                         </a:rPr>
-                        <a:t>SCO AO</a:t>
+                        <a:t>FINAFRICA</a:t>
                       </a:r>
                       <a:endParaRPr lang="en-US" sz="950" dirty="0">
                         <a:latin typeface="Calibri" charset="0"/>
@@ -10226,7 +9041,7 @@
                           <a:ea typeface="Calibri" pitchFamily="34" charset="-122"/>
                           <a:cs typeface="Calibri" pitchFamily="34" charset="-120"/>
                         </a:rPr>
-                        <a:t>Salaires, cotisations, impôts, fournisseurs, Thulium (net du client)</a:t>
+                        <a:t>Fournisseurs 59,2 · impôts 75,0 · cotisations 61,1 · salaires 38,5</a:t>
                       </a:r>
                       <a:endParaRPr lang="en-US" sz="950" dirty="0">
                         <a:latin typeface="Calibri" charset="0"/>
@@ -10291,7 +9106,7 @@
                           <a:ea typeface="Calibri" pitchFamily="34" charset="-122"/>
                           <a:cs typeface="Calibri" pitchFamily="34" charset="-120"/>
                         </a:rPr>
-                        <a:t>83,5</a:t>
+                        <a:t>233,8</a:t>
                       </a:r>
                       <a:endParaRPr lang="en-US" sz="950" dirty="0">
                         <a:latin typeface="Calibri" charset="0"/>
@@ -10356,7 +9171,7 @@
                           <a:ea typeface="Calibri" pitchFamily="34" charset="-122"/>
                           <a:cs typeface="Calibri" pitchFamily="34" charset="-120"/>
                         </a:rPr>
-                        <a:t>BACI-Compte courant, BANK OF AFRICA, ECOBANK</a:t>
+                        <a:t>SOCIETE GENERALE-FINAFRICA, puis ECOBANK-FINAFRICA</a:t>
                       </a:r>
                       <a:endParaRPr lang="en-US" sz="950" dirty="0">
                         <a:latin typeface="Calibri" charset="0"/>
@@ -10421,7 +9236,7 @@
                           <a:ea typeface="Calibri" pitchFamily="34" charset="-122"/>
                           <a:cs typeface="Calibri" pitchFamily="34" charset="-120"/>
                         </a:rPr>
-                        <a:t>6,3</a:t>
+                        <a:t>35,1</a:t>
                       </a:r>
                       <a:endParaRPr lang="en-US" sz="950" dirty="0">
                         <a:latin typeface="Calibri" charset="0"/>
@@ -10486,7 +9301,7 @@
                           <a:ea typeface="Calibri" pitchFamily="34" charset="-122"/>
                           <a:cs typeface="Calibri" pitchFamily="34" charset="-120"/>
                         </a:rPr>
-                        <a:t>-77,1</a:t>
+                        <a:t>-198,7</a:t>
                       </a:r>
                       <a:endParaRPr lang="en-US" sz="950" dirty="0">
                         <a:latin typeface="Calibri" charset="0"/>
@@ -10556,7 +9371,7 @@
                           <a:ea typeface="Calibri" pitchFamily="34" charset="-122"/>
                           <a:cs typeface="Calibri" pitchFamily="34" charset="-120"/>
                         </a:rPr>
-                        <a:t>FINAFRICA</a:t>
+                        <a:t>SCO AO</a:t>
                       </a:r>
                       <a:endParaRPr lang="en-US" sz="950" dirty="0">
                         <a:latin typeface="Calibri" charset="0"/>
@@ -10624,7 +9439,7 @@
                           <a:ea typeface="Calibri" pitchFamily="34" charset="-122"/>
                           <a:cs typeface="Calibri" pitchFamily="34" charset="-120"/>
                         </a:rPr>
-                        <a:t>Cotisations et impôts en priorité, puis fournisseurs</a:t>
+                        <a:t>Fournisseurs 131,2 · impôts 21,7 · cotisations 16,6 · salaires 24,3 · autres 15,0 · encaissements −3,6</a:t>
                       </a:r>
                       <a:endParaRPr lang="en-US" sz="950" dirty="0">
                         <a:latin typeface="Calibri" charset="0"/>
@@ -10689,7 +9504,7 @@
                           <a:ea typeface="Calibri" pitchFamily="34" charset="-122"/>
                           <a:cs typeface="Calibri" pitchFamily="34" charset="-120"/>
                         </a:rPr>
-                        <a:t>75,3</a:t>
+                        <a:t>208,7</a:t>
                       </a:r>
                       <a:endParaRPr lang="en-US" sz="950" dirty="0">
                         <a:latin typeface="Calibri" charset="0"/>
@@ -10754,7 +9569,7 @@
                           <a:ea typeface="Calibri" pitchFamily="34" charset="-122"/>
                           <a:cs typeface="Calibri" pitchFamily="34" charset="-120"/>
                         </a:rPr>
-                        <a:t>SOCIETE GENERALE-FINAFRICA</a:t>
+                        <a:t>BACI-Projet, puis BACI-CompteCourant</a:t>
                       </a:r>
                       <a:endParaRPr lang="en-US" sz="950" dirty="0">
                         <a:latin typeface="Calibri" charset="0"/>
@@ -10819,7 +9634,7 @@
                           <a:ea typeface="Calibri" pitchFamily="34" charset="-122"/>
                           <a:cs typeface="Calibri" pitchFamily="34" charset="-120"/>
                         </a:rPr>
-                        <a:t>35,1</a:t>
+                        <a:t>29,1</a:t>
                       </a:r>
                       <a:endParaRPr lang="en-US" sz="950" dirty="0">
                         <a:latin typeface="Calibri" charset="0"/>
@@ -10884,7 +9699,7 @@
                           <a:ea typeface="Calibri" pitchFamily="34" charset="-122"/>
                           <a:cs typeface="Calibri" pitchFamily="34" charset="-120"/>
                         </a:rPr>
-                        <a:t>-40,2</a:t>
+                        <a:t>-176,0</a:t>
                       </a:r>
                       <a:endParaRPr lang="en-US" sz="950" dirty="0">
                         <a:latin typeface="Calibri" charset="0"/>
@@ -10954,7 +9769,7 @@
                           <a:ea typeface="Calibri" pitchFamily="34" charset="-122"/>
                           <a:cs typeface="Calibri" pitchFamily="34" charset="-120"/>
                         </a:rPr>
-                        <a:t>IMMONEUF</a:t>
+                        <a:t>RIVIERA</a:t>
                       </a:r>
                       <a:endParaRPr lang="en-US" sz="950" dirty="0">
                         <a:latin typeface="Calibri" charset="0"/>
@@ -11022,7 +9837,7 @@
                           <a:ea typeface="Calibri" pitchFamily="34" charset="-122"/>
                           <a:cs typeface="Calibri" pitchFamily="34" charset="-120"/>
                         </a:rPr>
-                        <a:t>Impôts et cotisations en priorité, puis fournisseurs</a:t>
+                        <a:t>Fournisseurs 17,6 · impôts 70,8 · cotisations 0,3</a:t>
                       </a:r>
                       <a:endParaRPr lang="en-US" sz="950" dirty="0">
                         <a:latin typeface="Calibri" charset="0"/>
@@ -11087,7 +9902,7 @@
                           <a:ea typeface="Calibri" pitchFamily="34" charset="-122"/>
                           <a:cs typeface="Calibri" pitchFamily="34" charset="-120"/>
                         </a:rPr>
-                        <a:t>14,1</a:t>
+                        <a:t>88,8</a:t>
                       </a:r>
                       <a:endParaRPr lang="en-US" sz="950" dirty="0">
                         <a:latin typeface="Calibri" charset="0"/>
@@ -11152,7 +9967,7 @@
                           <a:ea typeface="Calibri" pitchFamily="34" charset="-122"/>
                           <a:cs typeface="Calibri" pitchFamily="34" charset="-120"/>
                         </a:rPr>
-                        <a:t>SOCIETE GENERALE-IMMONEUF</a:t>
+                        <a:t>SOCIETE GENERALE-RIVIERA</a:t>
                       </a:r>
                       <a:endParaRPr lang="en-US" sz="950" dirty="0">
                         <a:latin typeface="Calibri" charset="0"/>
@@ -11217,7 +10032,7 @@
                           <a:ea typeface="Calibri" pitchFamily="34" charset="-122"/>
                           <a:cs typeface="Calibri" pitchFamily="34" charset="-120"/>
                         </a:rPr>
-                        <a:t>11,8</a:t>
+                        <a:t>1,5</a:t>
                       </a:r>
                       <a:endParaRPr lang="en-US" sz="950" dirty="0">
                         <a:latin typeface="Calibri" charset="0"/>
@@ -11282,7 +10097,7 @@
                           <a:ea typeface="Calibri" pitchFamily="34" charset="-122"/>
                           <a:cs typeface="Calibri" pitchFamily="34" charset="-120"/>
                         </a:rPr>
-                        <a:t>-2,3</a:t>
+                        <a:t>-87,3</a:t>
                       </a:r>
                       <a:endParaRPr lang="en-US" sz="950" dirty="0">
                         <a:latin typeface="Calibri" charset="0"/>
@@ -11352,7 +10167,7 @@
                           <a:ea typeface="Calibri" pitchFamily="34" charset="-122"/>
                           <a:cs typeface="Calibri" pitchFamily="34" charset="-120"/>
                         </a:rPr>
-                        <a:t>AB CENTER</a:t>
+                        <a:t>IMMONEUF</a:t>
                       </a:r>
                       <a:endParaRPr lang="en-US" sz="950" dirty="0">
                         <a:latin typeface="Calibri" charset="0"/>
@@ -11420,7 +10235,7 @@
                           <a:ea typeface="Calibri" pitchFamily="34" charset="-122"/>
                           <a:cs typeface="Calibri" pitchFamily="34" charset="-120"/>
                         </a:rPr>
-                        <a:t>Fournisseurs</a:t>
+                        <a:t>Fournisseurs 6,2 · impôts 17,1 · cotisations 28,4 · salaires 26,0</a:t>
                       </a:r>
                       <a:endParaRPr lang="en-US" sz="950" dirty="0">
                         <a:latin typeface="Calibri" charset="0"/>
@@ -11485,7 +10300,7 @@
                           <a:ea typeface="Calibri" pitchFamily="34" charset="-122"/>
                           <a:cs typeface="Calibri" pitchFamily="34" charset="-120"/>
                         </a:rPr>
-                        <a:t>2,5</a:t>
+                        <a:t>77,8</a:t>
                       </a:r>
                       <a:endParaRPr lang="en-US" sz="950" dirty="0">
                         <a:latin typeface="Calibri" charset="0"/>
@@ -11550,7 +10365,7 @@
                           <a:ea typeface="Calibri" pitchFamily="34" charset="-122"/>
                           <a:cs typeface="Calibri" pitchFamily="34" charset="-120"/>
                         </a:rPr>
-                        <a:t>SOCIETE GENERALE-AB CENTER</a:t>
+                        <a:t>SOCIETE GENERALE-IMMONEUF, puis BACI - IMMONEUF</a:t>
                       </a:r>
                       <a:endParaRPr lang="en-US" sz="950" dirty="0">
                         <a:latin typeface="Calibri" charset="0"/>
@@ -11615,7 +10430,7 @@
                           <a:ea typeface="Calibri" pitchFamily="34" charset="-122"/>
                           <a:cs typeface="Calibri" pitchFamily="34" charset="-120"/>
                         </a:rPr>
-                        <a:t>–</a:t>
+                        <a:t>11,8</a:t>
                       </a:r>
                       <a:endParaRPr lang="en-US" sz="950" dirty="0">
                         <a:latin typeface="Calibri" charset="0"/>
@@ -11680,7 +10495,7 @@
                           <a:ea typeface="Calibri" pitchFamily="34" charset="-122"/>
                           <a:cs typeface="Calibri" pitchFamily="34" charset="-120"/>
                         </a:rPr>
-                        <a:t>-2,6</a:t>
+                        <a:t>-66,0</a:t>
                       </a:r>
                       <a:endParaRPr lang="en-US" sz="950" dirty="0">
                         <a:latin typeface="Calibri" charset="0"/>
@@ -11818,7 +10633,7 @@
                           <a:ea typeface="Calibri" pitchFamily="34" charset="-122"/>
                           <a:cs typeface="Calibri" pitchFamily="34" charset="-120"/>
                         </a:rPr>
-                        <a:t>Impôts et cotisations</a:t>
+                        <a:t>Impôts 38,9 · cotisations 11,1</a:t>
                       </a:r>
                       <a:endParaRPr lang="en-US" sz="950" dirty="0">
                         <a:latin typeface="Calibri" charset="0"/>
@@ -11883,7 +10698,7 @@
                           <a:ea typeface="Calibri" pitchFamily="34" charset="-122"/>
                           <a:cs typeface="Calibri" pitchFamily="34" charset="-120"/>
                         </a:rPr>
-                        <a:t>4,0</a:t>
+                        <a:t>50,0</a:t>
                       </a:r>
                       <a:endParaRPr lang="en-US" sz="950" dirty="0">
                         <a:latin typeface="Calibri" charset="0"/>
@@ -11948,7 +10763,7 @@
                           <a:ea typeface="Calibri" pitchFamily="34" charset="-122"/>
                           <a:cs typeface="Calibri" pitchFamily="34" charset="-120"/>
                         </a:rPr>
-                        <a:t>Aucun compte : paiement par PICI pour son compte</a:t>
+                        <a:t>Aucun compte : paiement pour son compte par une autre société</a:t>
                       </a:r>
                       <a:endParaRPr lang="en-US" sz="950" dirty="0">
                         <a:latin typeface="Calibri" charset="0"/>
@@ -12078,7 +10893,7 @@
                           <a:ea typeface="Calibri" pitchFamily="34" charset="-122"/>
                           <a:cs typeface="Calibri" pitchFamily="34" charset="-120"/>
                         </a:rPr>
-                        <a:t>-4,0</a:t>
+                        <a:t>-50,0</a:t>
                       </a:r>
                       <a:endParaRPr lang="en-US" sz="950" dirty="0">
                         <a:latin typeface="Calibri" charset="0"/>
@@ -12148,7 +10963,803 @@
                           <a:ea typeface="Calibri" pitchFamily="34" charset="-122"/>
                           <a:cs typeface="Calibri" pitchFamily="34" charset="-120"/>
                         </a:rPr>
-                        <a:t>Village Notre Père</a:t>
+                        <a:t>AB CENTER</a:t>
+                      </a:r>
+                      <a:endParaRPr lang="en-US" sz="950" dirty="0">
+                        <a:latin typeface="Calibri" charset="0"/>
+                        <a:ea typeface="Calibri" charset="0"/>
+                        <a:cs typeface="Calibri" charset="0"/>
+                      </a:endParaRPr>
+                    </a:p>
+                  </a:txBody>
+                  <a:tcPr marL="64008" marR="64008" marT="0" marB="0" anchor="ctr">
+                    <a:lnL w="6350" cap="flat" cmpd="sng" algn="ctr">
+                      <a:solidFill>
+                        <a:srgbClr val="D5DBE3"/>
+                      </a:solidFill>
+                      <a:prstDash val="solid"/>
+                      <a:round/>
+                      <a:headEnd type="none" w="med" len="med"/>
+                      <a:tailEnd type="none" w="med" len="med"/>
+                    </a:lnL>
+                    <a:lnR w="6350" cap="flat" cmpd="sng" algn="ctr">
+                      <a:solidFill>
+                        <a:srgbClr val="D5DBE3"/>
+                      </a:solidFill>
+                      <a:prstDash val="solid"/>
+                      <a:round/>
+                      <a:headEnd type="none" w="med" len="med"/>
+                      <a:tailEnd type="none" w="med" len="med"/>
+                    </a:lnR>
+                    <a:lnT w="6350" cap="flat" cmpd="sng" algn="ctr">
+                      <a:solidFill>
+                        <a:srgbClr val="D5DBE3"/>
+                      </a:solidFill>
+                      <a:prstDash val="solid"/>
+                      <a:round/>
+                      <a:headEnd type="none" w="med" len="med"/>
+                      <a:tailEnd type="none" w="med" len="med"/>
+                    </a:lnT>
+                    <a:lnB w="6350" cap="flat" cmpd="sng" algn="ctr">
+                      <a:solidFill>
+                        <a:srgbClr val="D5DBE3"/>
+                      </a:solidFill>
+                      <a:prstDash val="solid"/>
+                      <a:round/>
+                      <a:headEnd type="none" w="med" len="med"/>
+                      <a:tailEnd type="none" w="med" len="med"/>
+                    </a:lnB>
+                    <a:solidFill>
+                      <a:srgbClr val="F7E7E5"/>
+                    </a:solidFill>
+                  </a:tcPr>
+                </a:tc>
+                <a:tc>
+                  <a:txBody>
+                    <a:bodyPr/>
+                    <a:lstStyle/>
+                    <a:p>
+                      <a:pPr algn="l" indent="0" marL="0">
+                        <a:buNone/>
+                      </a:pPr>
+                      <a:r>
+                        <a:rPr lang="en-US" sz="950" dirty="0">
+                          <a:solidFill>
+                            <a:srgbClr val="1F2933"/>
+                          </a:solidFill>
+                          <a:latin typeface="Calibri" pitchFamily="34" charset="0"/>
+                          <a:ea typeface="Calibri" pitchFamily="34" charset="-122"/>
+                          <a:cs typeface="Calibri" pitchFamily="34" charset="-120"/>
+                        </a:rPr>
+                        <a:t>Fournisseurs 2,5 · impôts 3,8</a:t>
+                      </a:r>
+                      <a:endParaRPr lang="en-US" sz="950" dirty="0">
+                        <a:latin typeface="Calibri" charset="0"/>
+                        <a:ea typeface="Calibri" charset="0"/>
+                        <a:cs typeface="Calibri" charset="0"/>
+                      </a:endParaRPr>
+                    </a:p>
+                  </a:txBody>
+                  <a:tcPr marL="64008" marR="64008" marT="0" marB="0" anchor="ctr">
+                    <a:lnL w="6350" cap="flat" cmpd="sng" algn="ctr">
+                      <a:solidFill>
+                        <a:srgbClr val="D5DBE3"/>
+                      </a:solidFill>
+                      <a:prstDash val="solid"/>
+                      <a:round/>
+                      <a:headEnd type="none" w="med" len="med"/>
+                      <a:tailEnd type="none" w="med" len="med"/>
+                    </a:lnL>
+                    <a:lnR w="6350" cap="flat" cmpd="sng" algn="ctr">
+                      <a:solidFill>
+                        <a:srgbClr val="D5DBE3"/>
+                      </a:solidFill>
+                      <a:prstDash val="solid"/>
+                      <a:round/>
+                      <a:headEnd type="none" w="med" len="med"/>
+                      <a:tailEnd type="none" w="med" len="med"/>
+                    </a:lnR>
+                    <a:lnT w="6350" cap="flat" cmpd="sng" algn="ctr">
+                      <a:solidFill>
+                        <a:srgbClr val="D5DBE3"/>
+                      </a:solidFill>
+                      <a:prstDash val="solid"/>
+                      <a:round/>
+                      <a:headEnd type="none" w="med" len="med"/>
+                      <a:tailEnd type="none" w="med" len="med"/>
+                    </a:lnT>
+                    <a:lnB w="6350" cap="flat" cmpd="sng" algn="ctr">
+                      <a:solidFill>
+                        <a:srgbClr val="D5DBE3"/>
+                      </a:solidFill>
+                      <a:prstDash val="solid"/>
+                      <a:round/>
+                      <a:headEnd type="none" w="med" len="med"/>
+                      <a:tailEnd type="none" w="med" len="med"/>
+                    </a:lnB>
+                  </a:tcPr>
+                </a:tc>
+                <a:tc>
+                  <a:txBody>
+                    <a:bodyPr/>
+                    <a:lstStyle/>
+                    <a:p>
+                      <a:pPr algn="r" indent="0" marL="0">
+                        <a:buNone/>
+                      </a:pPr>
+                      <a:r>
+                        <a:rPr lang="en-US" sz="950" dirty="0">
+                          <a:solidFill>
+                            <a:srgbClr val="1F2933"/>
+                          </a:solidFill>
+                          <a:latin typeface="Calibri" pitchFamily="34" charset="0"/>
+                          <a:ea typeface="Calibri" pitchFamily="34" charset="-122"/>
+                          <a:cs typeface="Calibri" pitchFamily="34" charset="-120"/>
+                        </a:rPr>
+                        <a:t>6,3</a:t>
+                      </a:r>
+                      <a:endParaRPr lang="en-US" sz="950" dirty="0">
+                        <a:latin typeface="Calibri" charset="0"/>
+                        <a:ea typeface="Calibri" charset="0"/>
+                        <a:cs typeface="Calibri" charset="0"/>
+                      </a:endParaRPr>
+                    </a:p>
+                  </a:txBody>
+                  <a:tcPr marL="64008" marR="64008" marT="0" marB="0" anchor="ctr">
+                    <a:lnL w="6350" cap="flat" cmpd="sng" algn="ctr">
+                      <a:solidFill>
+                        <a:srgbClr val="D5DBE3"/>
+                      </a:solidFill>
+                      <a:prstDash val="solid"/>
+                      <a:round/>
+                      <a:headEnd type="none" w="med" len="med"/>
+                      <a:tailEnd type="none" w="med" len="med"/>
+                    </a:lnL>
+                    <a:lnR w="6350" cap="flat" cmpd="sng" algn="ctr">
+                      <a:solidFill>
+                        <a:srgbClr val="D5DBE3"/>
+                      </a:solidFill>
+                      <a:prstDash val="solid"/>
+                      <a:round/>
+                      <a:headEnd type="none" w="med" len="med"/>
+                      <a:tailEnd type="none" w="med" len="med"/>
+                    </a:lnR>
+                    <a:lnT w="6350" cap="flat" cmpd="sng" algn="ctr">
+                      <a:solidFill>
+                        <a:srgbClr val="D5DBE3"/>
+                      </a:solidFill>
+                      <a:prstDash val="solid"/>
+                      <a:round/>
+                      <a:headEnd type="none" w="med" len="med"/>
+                      <a:tailEnd type="none" w="med" len="med"/>
+                    </a:lnT>
+                    <a:lnB w="6350" cap="flat" cmpd="sng" algn="ctr">
+                      <a:solidFill>
+                        <a:srgbClr val="D5DBE3"/>
+                      </a:solidFill>
+                      <a:prstDash val="solid"/>
+                      <a:round/>
+                      <a:headEnd type="none" w="med" len="med"/>
+                      <a:tailEnd type="none" w="med" len="med"/>
+                    </a:lnB>
+                  </a:tcPr>
+                </a:tc>
+                <a:tc>
+                  <a:txBody>
+                    <a:bodyPr/>
+                    <a:lstStyle/>
+                    <a:p>
+                      <a:pPr algn="l" indent="0" marL="0">
+                        <a:buNone/>
+                      </a:pPr>
+                      <a:r>
+                        <a:rPr lang="en-US" sz="950" dirty="0">
+                          <a:solidFill>
+                            <a:srgbClr val="1F2933"/>
+                          </a:solidFill>
+                          <a:latin typeface="Calibri" pitchFamily="34" charset="0"/>
+                          <a:ea typeface="Calibri" pitchFamily="34" charset="-122"/>
+                          <a:cs typeface="Calibri" pitchFamily="34" charset="-120"/>
+                        </a:rPr>
+                        <a:t>ECOBANK- AB CENTER</a:t>
+                      </a:r>
+                      <a:endParaRPr lang="en-US" sz="950" dirty="0">
+                        <a:latin typeface="Calibri" charset="0"/>
+                        <a:ea typeface="Calibri" charset="0"/>
+                        <a:cs typeface="Calibri" charset="0"/>
+                      </a:endParaRPr>
+                    </a:p>
+                  </a:txBody>
+                  <a:tcPr marL="64008" marR="64008" marT="0" marB="0" anchor="ctr">
+                    <a:lnL w="6350" cap="flat" cmpd="sng" algn="ctr">
+                      <a:solidFill>
+                        <a:srgbClr val="D5DBE3"/>
+                      </a:solidFill>
+                      <a:prstDash val="solid"/>
+                      <a:round/>
+                      <a:headEnd type="none" w="med" len="med"/>
+                      <a:tailEnd type="none" w="med" len="med"/>
+                    </a:lnL>
+                    <a:lnR w="6350" cap="flat" cmpd="sng" algn="ctr">
+                      <a:solidFill>
+                        <a:srgbClr val="D5DBE3"/>
+                      </a:solidFill>
+                      <a:prstDash val="solid"/>
+                      <a:round/>
+                      <a:headEnd type="none" w="med" len="med"/>
+                      <a:tailEnd type="none" w="med" len="med"/>
+                    </a:lnR>
+                    <a:lnT w="6350" cap="flat" cmpd="sng" algn="ctr">
+                      <a:solidFill>
+                        <a:srgbClr val="D5DBE3"/>
+                      </a:solidFill>
+                      <a:prstDash val="solid"/>
+                      <a:round/>
+                      <a:headEnd type="none" w="med" len="med"/>
+                      <a:tailEnd type="none" w="med" len="med"/>
+                    </a:lnT>
+                    <a:lnB w="6350" cap="flat" cmpd="sng" algn="ctr">
+                      <a:solidFill>
+                        <a:srgbClr val="D5DBE3"/>
+                      </a:solidFill>
+                      <a:prstDash val="solid"/>
+                      <a:round/>
+                      <a:headEnd type="none" w="med" len="med"/>
+                      <a:tailEnd type="none" w="med" len="med"/>
+                    </a:lnB>
+                  </a:tcPr>
+                </a:tc>
+                <a:tc>
+                  <a:txBody>
+                    <a:bodyPr/>
+                    <a:lstStyle/>
+                    <a:p>
+                      <a:pPr algn="r" indent="0" marL="0">
+                        <a:buNone/>
+                      </a:pPr>
+                      <a:r>
+                        <a:rPr lang="en-US" sz="950" dirty="0">
+                          <a:solidFill>
+                            <a:srgbClr val="1F2933"/>
+                          </a:solidFill>
+                          <a:latin typeface="Calibri" pitchFamily="34" charset="0"/>
+                          <a:ea typeface="Calibri" pitchFamily="34" charset="-122"/>
+                          <a:cs typeface="Calibri" pitchFamily="34" charset="-120"/>
+                        </a:rPr>
+                        <a:t>–</a:t>
+                      </a:r>
+                      <a:endParaRPr lang="en-US" sz="950" dirty="0">
+                        <a:latin typeface="Calibri" charset="0"/>
+                        <a:ea typeface="Calibri" charset="0"/>
+                        <a:cs typeface="Calibri" charset="0"/>
+                      </a:endParaRPr>
+                    </a:p>
+                  </a:txBody>
+                  <a:tcPr marL="64008" marR="64008" marT="0" marB="0" anchor="ctr">
+                    <a:lnL w="6350" cap="flat" cmpd="sng" algn="ctr">
+                      <a:solidFill>
+                        <a:srgbClr val="D5DBE3"/>
+                      </a:solidFill>
+                      <a:prstDash val="solid"/>
+                      <a:round/>
+                      <a:headEnd type="none" w="med" len="med"/>
+                      <a:tailEnd type="none" w="med" len="med"/>
+                    </a:lnL>
+                    <a:lnR w="6350" cap="flat" cmpd="sng" algn="ctr">
+                      <a:solidFill>
+                        <a:srgbClr val="D5DBE3"/>
+                      </a:solidFill>
+                      <a:prstDash val="solid"/>
+                      <a:round/>
+                      <a:headEnd type="none" w="med" len="med"/>
+                      <a:tailEnd type="none" w="med" len="med"/>
+                    </a:lnR>
+                    <a:lnT w="6350" cap="flat" cmpd="sng" algn="ctr">
+                      <a:solidFill>
+                        <a:srgbClr val="D5DBE3"/>
+                      </a:solidFill>
+                      <a:prstDash val="solid"/>
+                      <a:round/>
+                      <a:headEnd type="none" w="med" len="med"/>
+                      <a:tailEnd type="none" w="med" len="med"/>
+                    </a:lnT>
+                    <a:lnB w="6350" cap="flat" cmpd="sng" algn="ctr">
+                      <a:solidFill>
+                        <a:srgbClr val="D5DBE3"/>
+                      </a:solidFill>
+                      <a:prstDash val="solid"/>
+                      <a:round/>
+                      <a:headEnd type="none" w="med" len="med"/>
+                      <a:tailEnd type="none" w="med" len="med"/>
+                    </a:lnB>
+                  </a:tcPr>
+                </a:tc>
+                <a:tc>
+                  <a:txBody>
+                    <a:bodyPr/>
+                    <a:lstStyle/>
+                    <a:p>
+                      <a:pPr algn="r" indent="0" marL="0">
+                        <a:buNone/>
+                      </a:pPr>
+                      <a:r>
+                        <a:rPr lang="en-US" sz="950" b="1" dirty="0">
+                          <a:solidFill>
+                            <a:srgbClr val="B3261E"/>
+                          </a:solidFill>
+                          <a:latin typeface="Calibri" pitchFamily="34" charset="0"/>
+                          <a:ea typeface="Calibri" pitchFamily="34" charset="-122"/>
+                          <a:cs typeface="Calibri" pitchFamily="34" charset="-120"/>
+                        </a:rPr>
+                        <a:t>-6,3</a:t>
+                      </a:r>
+                      <a:endParaRPr lang="en-US" sz="950" dirty="0">
+                        <a:latin typeface="Calibri" charset="0"/>
+                        <a:ea typeface="Calibri" charset="0"/>
+                        <a:cs typeface="Calibri" charset="0"/>
+                      </a:endParaRPr>
+                    </a:p>
+                  </a:txBody>
+                  <a:tcPr marL="64008" marR="64008" marT="0" marB="0" anchor="ctr">
+                    <a:lnL w="6350" cap="flat" cmpd="sng" algn="ctr">
+                      <a:solidFill>
+                        <a:srgbClr val="D5DBE3"/>
+                      </a:solidFill>
+                      <a:prstDash val="solid"/>
+                      <a:round/>
+                      <a:headEnd type="none" w="med" len="med"/>
+                      <a:tailEnd type="none" w="med" len="med"/>
+                    </a:lnL>
+                    <a:lnR w="6350" cap="flat" cmpd="sng" algn="ctr">
+                      <a:solidFill>
+                        <a:srgbClr val="D5DBE3"/>
+                      </a:solidFill>
+                      <a:prstDash val="solid"/>
+                      <a:round/>
+                      <a:headEnd type="none" w="med" len="med"/>
+                      <a:tailEnd type="none" w="med" len="med"/>
+                    </a:lnR>
+                    <a:lnT w="6350" cap="flat" cmpd="sng" algn="ctr">
+                      <a:solidFill>
+                        <a:srgbClr val="D5DBE3"/>
+                      </a:solidFill>
+                      <a:prstDash val="solid"/>
+                      <a:round/>
+                      <a:headEnd type="none" w="med" len="med"/>
+                      <a:tailEnd type="none" w="med" len="med"/>
+                    </a:lnT>
+                    <a:lnB w="6350" cap="flat" cmpd="sng" algn="ctr">
+                      <a:solidFill>
+                        <a:srgbClr val="D5DBE3"/>
+                      </a:solidFill>
+                      <a:prstDash val="solid"/>
+                      <a:round/>
+                      <a:headEnd type="none" w="med" len="med"/>
+                      <a:tailEnd type="none" w="med" len="med"/>
+                    </a:lnB>
+                    <a:solidFill>
+                      <a:srgbClr val="F7E7E5"/>
+                    </a:solidFill>
+                  </a:tcPr>
+                </a:tc>
+              </a:tr>
+              <a:tr h="274320">
+                <a:tc>
+                  <a:txBody>
+                    <a:bodyPr/>
+                    <a:lstStyle/>
+                    <a:p>
+                      <a:pPr algn="l" indent="0" marL="0">
+                        <a:buNone/>
+                      </a:pPr>
+                      <a:r>
+                        <a:rPr lang="en-US" sz="950" b="1" dirty="0">
+                          <a:solidFill>
+                            <a:srgbClr val="1F2933"/>
+                          </a:solidFill>
+                          <a:latin typeface="Calibri" pitchFamily="34" charset="0"/>
+                          <a:ea typeface="Calibri" pitchFamily="34" charset="-122"/>
+                          <a:cs typeface="Calibri" pitchFamily="34" charset="-120"/>
+                        </a:rPr>
+                        <a:t>ODALYS CI</a:t>
+                      </a:r>
+                      <a:endParaRPr lang="en-US" sz="950" dirty="0">
+                        <a:latin typeface="Calibri" charset="0"/>
+                        <a:ea typeface="Calibri" charset="0"/>
+                        <a:cs typeface="Calibri" charset="0"/>
+                      </a:endParaRPr>
+                    </a:p>
+                  </a:txBody>
+                  <a:tcPr marL="64008" marR="64008" marT="0" marB="0" anchor="ctr">
+                    <a:lnL w="6350" cap="flat" cmpd="sng" algn="ctr">
+                      <a:solidFill>
+                        <a:srgbClr val="D5DBE3"/>
+                      </a:solidFill>
+                      <a:prstDash val="solid"/>
+                      <a:round/>
+                      <a:headEnd type="none" w="med" len="med"/>
+                      <a:tailEnd type="none" w="med" len="med"/>
+                    </a:lnL>
+                    <a:lnR w="6350" cap="flat" cmpd="sng" algn="ctr">
+                      <a:solidFill>
+                        <a:srgbClr val="D5DBE3"/>
+                      </a:solidFill>
+                      <a:prstDash val="solid"/>
+                      <a:round/>
+                      <a:headEnd type="none" w="med" len="med"/>
+                      <a:tailEnd type="none" w="med" len="med"/>
+                    </a:lnR>
+                    <a:lnT w="6350" cap="flat" cmpd="sng" algn="ctr">
+                      <a:solidFill>
+                        <a:srgbClr val="D5DBE3"/>
+                      </a:solidFill>
+                      <a:prstDash val="solid"/>
+                      <a:round/>
+                      <a:headEnd type="none" w="med" len="med"/>
+                      <a:tailEnd type="none" w="med" len="med"/>
+                    </a:lnT>
+                    <a:lnB w="6350" cap="flat" cmpd="sng" algn="ctr">
+                      <a:solidFill>
+                        <a:srgbClr val="D5DBE3"/>
+                      </a:solidFill>
+                      <a:prstDash val="solid"/>
+                      <a:round/>
+                      <a:headEnd type="none" w="med" len="med"/>
+                      <a:tailEnd type="none" w="med" len="med"/>
+                    </a:lnB>
+                    <a:solidFill>
+                      <a:srgbClr val="F7E7E5"/>
+                    </a:solidFill>
+                  </a:tcPr>
+                </a:tc>
+                <a:tc>
+                  <a:txBody>
+                    <a:bodyPr/>
+                    <a:lstStyle/>
+                    <a:p>
+                      <a:pPr algn="l" indent="0" marL="0">
+                        <a:buNone/>
+                      </a:pPr>
+                      <a:r>
+                        <a:rPr lang="en-US" sz="950" dirty="0">
+                          <a:solidFill>
+                            <a:srgbClr val="1F2933"/>
+                          </a:solidFill>
+                          <a:latin typeface="Calibri" pitchFamily="34" charset="0"/>
+                          <a:ea typeface="Calibri" pitchFamily="34" charset="-122"/>
+                          <a:cs typeface="Calibri" pitchFamily="34" charset="-120"/>
+                        </a:rPr>
+                        <a:t>Fournisseurs 1,6 · impôts 8,0</a:t>
+                      </a:r>
+                      <a:endParaRPr lang="en-US" sz="950" dirty="0">
+                        <a:latin typeface="Calibri" charset="0"/>
+                        <a:ea typeface="Calibri" charset="0"/>
+                        <a:cs typeface="Calibri" charset="0"/>
+                      </a:endParaRPr>
+                    </a:p>
+                  </a:txBody>
+                  <a:tcPr marL="64008" marR="64008" marT="0" marB="0" anchor="ctr">
+                    <a:lnL w="6350" cap="flat" cmpd="sng" algn="ctr">
+                      <a:solidFill>
+                        <a:srgbClr val="D5DBE3"/>
+                      </a:solidFill>
+                      <a:prstDash val="solid"/>
+                      <a:round/>
+                      <a:headEnd type="none" w="med" len="med"/>
+                      <a:tailEnd type="none" w="med" len="med"/>
+                    </a:lnL>
+                    <a:lnR w="6350" cap="flat" cmpd="sng" algn="ctr">
+                      <a:solidFill>
+                        <a:srgbClr val="D5DBE3"/>
+                      </a:solidFill>
+                      <a:prstDash val="solid"/>
+                      <a:round/>
+                      <a:headEnd type="none" w="med" len="med"/>
+                      <a:tailEnd type="none" w="med" len="med"/>
+                    </a:lnR>
+                    <a:lnT w="6350" cap="flat" cmpd="sng" algn="ctr">
+                      <a:solidFill>
+                        <a:srgbClr val="D5DBE3"/>
+                      </a:solidFill>
+                      <a:prstDash val="solid"/>
+                      <a:round/>
+                      <a:headEnd type="none" w="med" len="med"/>
+                      <a:tailEnd type="none" w="med" len="med"/>
+                    </a:lnT>
+                    <a:lnB w="6350" cap="flat" cmpd="sng" algn="ctr">
+                      <a:solidFill>
+                        <a:srgbClr val="D5DBE3"/>
+                      </a:solidFill>
+                      <a:prstDash val="solid"/>
+                      <a:round/>
+                      <a:headEnd type="none" w="med" len="med"/>
+                      <a:tailEnd type="none" w="med" len="med"/>
+                    </a:lnB>
+                  </a:tcPr>
+                </a:tc>
+                <a:tc>
+                  <a:txBody>
+                    <a:bodyPr/>
+                    <a:lstStyle/>
+                    <a:p>
+                      <a:pPr algn="r" indent="0" marL="0">
+                        <a:buNone/>
+                      </a:pPr>
+                      <a:r>
+                        <a:rPr lang="en-US" sz="950" dirty="0">
+                          <a:solidFill>
+                            <a:srgbClr val="1F2933"/>
+                          </a:solidFill>
+                          <a:latin typeface="Calibri" pitchFamily="34" charset="0"/>
+                          <a:ea typeface="Calibri" pitchFamily="34" charset="-122"/>
+                          <a:cs typeface="Calibri" pitchFamily="34" charset="-120"/>
+                        </a:rPr>
+                        <a:t>9,6</a:t>
+                      </a:r>
+                      <a:endParaRPr lang="en-US" sz="950" dirty="0">
+                        <a:latin typeface="Calibri" charset="0"/>
+                        <a:ea typeface="Calibri" charset="0"/>
+                        <a:cs typeface="Calibri" charset="0"/>
+                      </a:endParaRPr>
+                    </a:p>
+                  </a:txBody>
+                  <a:tcPr marL="64008" marR="64008" marT="0" marB="0" anchor="ctr">
+                    <a:lnL w="6350" cap="flat" cmpd="sng" algn="ctr">
+                      <a:solidFill>
+                        <a:srgbClr val="D5DBE3"/>
+                      </a:solidFill>
+                      <a:prstDash val="solid"/>
+                      <a:round/>
+                      <a:headEnd type="none" w="med" len="med"/>
+                      <a:tailEnd type="none" w="med" len="med"/>
+                    </a:lnL>
+                    <a:lnR w="6350" cap="flat" cmpd="sng" algn="ctr">
+                      <a:solidFill>
+                        <a:srgbClr val="D5DBE3"/>
+                      </a:solidFill>
+                      <a:prstDash val="solid"/>
+                      <a:round/>
+                      <a:headEnd type="none" w="med" len="med"/>
+                      <a:tailEnd type="none" w="med" len="med"/>
+                    </a:lnR>
+                    <a:lnT w="6350" cap="flat" cmpd="sng" algn="ctr">
+                      <a:solidFill>
+                        <a:srgbClr val="D5DBE3"/>
+                      </a:solidFill>
+                      <a:prstDash val="solid"/>
+                      <a:round/>
+                      <a:headEnd type="none" w="med" len="med"/>
+                      <a:tailEnd type="none" w="med" len="med"/>
+                    </a:lnT>
+                    <a:lnB w="6350" cap="flat" cmpd="sng" algn="ctr">
+                      <a:solidFill>
+                        <a:srgbClr val="D5DBE3"/>
+                      </a:solidFill>
+                      <a:prstDash val="solid"/>
+                      <a:round/>
+                      <a:headEnd type="none" w="med" len="med"/>
+                      <a:tailEnd type="none" w="med" len="med"/>
+                    </a:lnB>
+                  </a:tcPr>
+                </a:tc>
+                <a:tc>
+                  <a:txBody>
+                    <a:bodyPr/>
+                    <a:lstStyle/>
+                    <a:p>
+                      <a:pPr algn="l" indent="0" marL="0">
+                        <a:buNone/>
+                      </a:pPr>
+                      <a:r>
+                        <a:rPr lang="en-US" sz="950" dirty="0">
+                          <a:solidFill>
+                            <a:srgbClr val="1F2933"/>
+                          </a:solidFill>
+                          <a:latin typeface="Calibri" pitchFamily="34" charset="0"/>
+                          <a:ea typeface="Calibri" pitchFamily="34" charset="-122"/>
+                          <a:cs typeface="Calibri" pitchFamily="34" charset="-120"/>
+                        </a:rPr>
+                        <a:t>SOCIETE GENERALE-ODALYS</a:t>
+                      </a:r>
+                      <a:endParaRPr lang="en-US" sz="950" dirty="0">
+                        <a:latin typeface="Calibri" charset="0"/>
+                        <a:ea typeface="Calibri" charset="0"/>
+                        <a:cs typeface="Calibri" charset="0"/>
+                      </a:endParaRPr>
+                    </a:p>
+                  </a:txBody>
+                  <a:tcPr marL="64008" marR="64008" marT="0" marB="0" anchor="ctr">
+                    <a:lnL w="6350" cap="flat" cmpd="sng" algn="ctr">
+                      <a:solidFill>
+                        <a:srgbClr val="D5DBE3"/>
+                      </a:solidFill>
+                      <a:prstDash val="solid"/>
+                      <a:round/>
+                      <a:headEnd type="none" w="med" len="med"/>
+                      <a:tailEnd type="none" w="med" len="med"/>
+                    </a:lnL>
+                    <a:lnR w="6350" cap="flat" cmpd="sng" algn="ctr">
+                      <a:solidFill>
+                        <a:srgbClr val="D5DBE3"/>
+                      </a:solidFill>
+                      <a:prstDash val="solid"/>
+                      <a:round/>
+                      <a:headEnd type="none" w="med" len="med"/>
+                      <a:tailEnd type="none" w="med" len="med"/>
+                    </a:lnR>
+                    <a:lnT w="6350" cap="flat" cmpd="sng" algn="ctr">
+                      <a:solidFill>
+                        <a:srgbClr val="D5DBE3"/>
+                      </a:solidFill>
+                      <a:prstDash val="solid"/>
+                      <a:round/>
+                      <a:headEnd type="none" w="med" len="med"/>
+                      <a:tailEnd type="none" w="med" len="med"/>
+                    </a:lnT>
+                    <a:lnB w="6350" cap="flat" cmpd="sng" algn="ctr">
+                      <a:solidFill>
+                        <a:srgbClr val="D5DBE3"/>
+                      </a:solidFill>
+                      <a:prstDash val="solid"/>
+                      <a:round/>
+                      <a:headEnd type="none" w="med" len="med"/>
+                      <a:tailEnd type="none" w="med" len="med"/>
+                    </a:lnB>
+                  </a:tcPr>
+                </a:tc>
+                <a:tc>
+                  <a:txBody>
+                    <a:bodyPr/>
+                    <a:lstStyle/>
+                    <a:p>
+                      <a:pPr algn="r" indent="0" marL="0">
+                        <a:buNone/>
+                      </a:pPr>
+                      <a:r>
+                        <a:rPr lang="en-US" sz="950" dirty="0">
+                          <a:solidFill>
+                            <a:srgbClr val="1F2933"/>
+                          </a:solidFill>
+                          <a:latin typeface="Calibri" pitchFamily="34" charset="0"/>
+                          <a:ea typeface="Calibri" pitchFamily="34" charset="-122"/>
+                          <a:cs typeface="Calibri" pitchFamily="34" charset="-120"/>
+                        </a:rPr>
+                        <a:t>6,1</a:t>
+                      </a:r>
+                      <a:endParaRPr lang="en-US" sz="950" dirty="0">
+                        <a:latin typeface="Calibri" charset="0"/>
+                        <a:ea typeface="Calibri" charset="0"/>
+                        <a:cs typeface="Calibri" charset="0"/>
+                      </a:endParaRPr>
+                    </a:p>
+                  </a:txBody>
+                  <a:tcPr marL="64008" marR="64008" marT="0" marB="0" anchor="ctr">
+                    <a:lnL w="6350" cap="flat" cmpd="sng" algn="ctr">
+                      <a:solidFill>
+                        <a:srgbClr val="D5DBE3"/>
+                      </a:solidFill>
+                      <a:prstDash val="solid"/>
+                      <a:round/>
+                      <a:headEnd type="none" w="med" len="med"/>
+                      <a:tailEnd type="none" w="med" len="med"/>
+                    </a:lnL>
+                    <a:lnR w="6350" cap="flat" cmpd="sng" algn="ctr">
+                      <a:solidFill>
+                        <a:srgbClr val="D5DBE3"/>
+                      </a:solidFill>
+                      <a:prstDash val="solid"/>
+                      <a:round/>
+                      <a:headEnd type="none" w="med" len="med"/>
+                      <a:tailEnd type="none" w="med" len="med"/>
+                    </a:lnR>
+                    <a:lnT w="6350" cap="flat" cmpd="sng" algn="ctr">
+                      <a:solidFill>
+                        <a:srgbClr val="D5DBE3"/>
+                      </a:solidFill>
+                      <a:prstDash val="solid"/>
+                      <a:round/>
+                      <a:headEnd type="none" w="med" len="med"/>
+                      <a:tailEnd type="none" w="med" len="med"/>
+                    </a:lnT>
+                    <a:lnB w="6350" cap="flat" cmpd="sng" algn="ctr">
+                      <a:solidFill>
+                        <a:srgbClr val="D5DBE3"/>
+                      </a:solidFill>
+                      <a:prstDash val="solid"/>
+                      <a:round/>
+                      <a:headEnd type="none" w="med" len="med"/>
+                      <a:tailEnd type="none" w="med" len="med"/>
+                    </a:lnB>
+                  </a:tcPr>
+                </a:tc>
+                <a:tc>
+                  <a:txBody>
+                    <a:bodyPr/>
+                    <a:lstStyle/>
+                    <a:p>
+                      <a:pPr algn="r" indent="0" marL="0">
+                        <a:buNone/>
+                      </a:pPr>
+                      <a:r>
+                        <a:rPr lang="en-US" sz="950" b="1" dirty="0">
+                          <a:solidFill>
+                            <a:srgbClr val="B3261E"/>
+                          </a:solidFill>
+                          <a:latin typeface="Calibri" pitchFamily="34" charset="0"/>
+                          <a:ea typeface="Calibri" pitchFamily="34" charset="-122"/>
+                          <a:cs typeface="Calibri" pitchFamily="34" charset="-120"/>
+                        </a:rPr>
+                        <a:t>-3,5</a:t>
+                      </a:r>
+                      <a:endParaRPr lang="en-US" sz="950" dirty="0">
+                        <a:latin typeface="Calibri" charset="0"/>
+                        <a:ea typeface="Calibri" charset="0"/>
+                        <a:cs typeface="Calibri" charset="0"/>
+                      </a:endParaRPr>
+                    </a:p>
+                  </a:txBody>
+                  <a:tcPr marL="64008" marR="64008" marT="0" marB="0" anchor="ctr">
+                    <a:lnL w="6350" cap="flat" cmpd="sng" algn="ctr">
+                      <a:solidFill>
+                        <a:srgbClr val="D5DBE3"/>
+                      </a:solidFill>
+                      <a:prstDash val="solid"/>
+                      <a:round/>
+                      <a:headEnd type="none" w="med" len="med"/>
+                      <a:tailEnd type="none" w="med" len="med"/>
+                    </a:lnL>
+                    <a:lnR w="6350" cap="flat" cmpd="sng" algn="ctr">
+                      <a:solidFill>
+                        <a:srgbClr val="D5DBE3"/>
+                      </a:solidFill>
+                      <a:prstDash val="solid"/>
+                      <a:round/>
+                      <a:headEnd type="none" w="med" len="med"/>
+                      <a:tailEnd type="none" w="med" len="med"/>
+                    </a:lnR>
+                    <a:lnT w="6350" cap="flat" cmpd="sng" algn="ctr">
+                      <a:solidFill>
+                        <a:srgbClr val="D5DBE3"/>
+                      </a:solidFill>
+                      <a:prstDash val="solid"/>
+                      <a:round/>
+                      <a:headEnd type="none" w="med" len="med"/>
+                      <a:tailEnd type="none" w="med" len="med"/>
+                    </a:lnT>
+                    <a:lnB w="6350" cap="flat" cmpd="sng" algn="ctr">
+                      <a:solidFill>
+                        <a:srgbClr val="D5DBE3"/>
+                      </a:solidFill>
+                      <a:prstDash val="solid"/>
+                      <a:round/>
+                      <a:headEnd type="none" w="med" len="med"/>
+                      <a:tailEnd type="none" w="med" len="med"/>
+                    </a:lnB>
+                    <a:solidFill>
+                      <a:srgbClr val="F7E7E5"/>
+                    </a:solidFill>
+                  </a:tcPr>
+                </a:tc>
+              </a:tr>
+              <a:tr h="274320">
+                <a:tc>
+                  <a:txBody>
+                    <a:bodyPr/>
+                    <a:lstStyle/>
+                    <a:p>
+                      <a:pPr algn="l" indent="0" marL="0">
+                        <a:buNone/>
+                      </a:pPr>
+                      <a:r>
+                        <a:rPr lang="en-US" sz="950" b="1" dirty="0">
+                          <a:solidFill>
+                            <a:srgbClr val="1F2933"/>
+                          </a:solidFill>
+                          <a:latin typeface="Calibri" pitchFamily="34" charset="0"/>
+                          <a:ea typeface="Calibri" pitchFamily="34" charset="-122"/>
+                          <a:cs typeface="Calibri" pitchFamily="34" charset="-120"/>
+                        </a:rPr>
+                        <a:t>RIVIERA – projet</a:t>
                       </a:r>
                       <a:endParaRPr lang="en-US" sz="950" dirty="0">
                         <a:latin typeface="Calibri" charset="0"/>
@@ -12216,7 +11827,7 @@
                           <a:ea typeface="Calibri" pitchFamily="34" charset="-122"/>
                           <a:cs typeface="Calibri" pitchFamily="34" charset="-120"/>
                         </a:rPr>
-                        <a:t>Travaux 1 388,7, due diligence 823,6, honoraires 235,0, frais financiers 223,6, autres</a:t>
+                        <a:t>Travaux 2 492,7 · Frais financiers 524,1 · Honoraires 163,6</a:t>
                       </a:r>
                       <a:endParaRPr lang="en-US" sz="950" dirty="0">
                         <a:latin typeface="Calibri" charset="0"/>
@@ -12281,7 +11892,7 @@
                           <a:ea typeface="Calibri" pitchFamily="34" charset="-122"/>
                           <a:cs typeface="Calibri" pitchFamily="34" charset="-120"/>
                         </a:rPr>
-                        <a:t>2 687,8</a:t>
+                        <a:t>3 244,5</a:t>
                       </a:r>
                       <a:endParaRPr lang="en-US" sz="950" dirty="0">
                         <a:latin typeface="Calibri" charset="0"/>
@@ -12346,7 +11957,7 @@
                           <a:ea typeface="Calibri" pitchFamily="34" charset="-122"/>
                           <a:cs typeface="Calibri" pitchFamily="34" charset="-120"/>
                         </a:rPr>
-                        <a:t>BNI-TERASSON / Fonds projet NP</a:t>
+                        <a:t>BNI-PICI / Fonds projet RP</a:t>
                       </a:r>
                       <a:endParaRPr lang="en-US" sz="950" dirty="0">
                         <a:latin typeface="Calibri" charset="0"/>
@@ -12411,7 +12022,7 @@
                           <a:ea typeface="Calibri" pitchFamily="34" charset="-122"/>
                           <a:cs typeface="Calibri" pitchFamily="34" charset="-120"/>
                         </a:rPr>
-                        <a:t>1 481,9</a:t>
+                        <a:t>2 643,1</a:t>
                       </a:r>
                       <a:endParaRPr lang="en-US" sz="950" dirty="0">
                         <a:latin typeface="Calibri" charset="0"/>
@@ -12476,7 +12087,7 @@
                           <a:ea typeface="Calibri" pitchFamily="34" charset="-122"/>
                           <a:cs typeface="Calibri" pitchFamily="34" charset="-120"/>
                         </a:rPr>
-                        <a:t>-1 205,9</a:t>
+                        <a:t>-601,4</a:t>
                       </a:r>
                       <a:endParaRPr lang="en-US" sz="950" dirty="0">
                         <a:latin typeface="Calibri" charset="0"/>
@@ -12546,7 +12157,7 @@
                           <a:ea typeface="Calibri" pitchFamily="34" charset="-122"/>
                           <a:cs typeface="Calibri" pitchFamily="34" charset="-120"/>
                         </a:rPr>
-                        <a:t>Riviera Park</a:t>
+                        <a:t>TERASSON – projet</a:t>
                       </a:r>
                       <a:endParaRPr lang="en-US" sz="950" dirty="0">
                         <a:latin typeface="Calibri" charset="0"/>
@@ -12614,7 +12225,7 @@
                           <a:ea typeface="Calibri" pitchFamily="34" charset="-122"/>
                           <a:cs typeface="Calibri" pitchFamily="34" charset="-120"/>
                         </a:rPr>
-                        <a:t>Travaux 2 492,7, frais financiers 524,1, honoraires 163,6, autres</a:t>
+                        <a:t>Travaux 1 388,7 · Autres dépenses 836,7 · Honoraires 235,0</a:t>
                       </a:r>
                       <a:endParaRPr lang="en-US" sz="950" dirty="0">
                         <a:latin typeface="Calibri" charset="0"/>
@@ -12679,7 +12290,7 @@
                           <a:ea typeface="Calibri" pitchFamily="34" charset="-122"/>
                           <a:cs typeface="Calibri" pitchFamily="34" charset="-120"/>
                         </a:rPr>
-                        <a:t>3 244,5</a:t>
+                        <a:t>2 687,8</a:t>
                       </a:r>
                       <a:endParaRPr lang="en-US" sz="950" dirty="0">
                         <a:latin typeface="Calibri" charset="0"/>
@@ -12744,7 +12355,7 @@
                           <a:ea typeface="Calibri" pitchFamily="34" charset="-122"/>
                           <a:cs typeface="Calibri" pitchFamily="34" charset="-120"/>
                         </a:rPr>
-                        <a:t>BNI-PICI / Fonds projet RP</a:t>
+                        <a:t>BNI-TERASSON / Fonds projet NP</a:t>
                       </a:r>
                       <a:endParaRPr lang="en-US" sz="950" dirty="0">
                         <a:latin typeface="Calibri" charset="0"/>
@@ -12809,7 +12420,7 @@
                           <a:ea typeface="Calibri" pitchFamily="34" charset="-122"/>
                           <a:cs typeface="Calibri" pitchFamily="34" charset="-120"/>
                         </a:rPr>
-                        <a:t>2 643,1</a:t>
+                        <a:t>1 481,9</a:t>
                       </a:r>
                       <a:endParaRPr lang="en-US" sz="950" dirty="0">
                         <a:latin typeface="Calibri" charset="0"/>
@@ -12874,7 +12485,7 @@
                           <a:ea typeface="Calibri" pitchFamily="34" charset="-122"/>
                           <a:cs typeface="Calibri" pitchFamily="34" charset="-120"/>
                         </a:rPr>
-                        <a:t>-601,4</a:t>
+                        <a:t>-1 205,9</a:t>
                       </a:r>
                       <a:endParaRPr lang="en-US" sz="950" dirty="0">
                         <a:latin typeface="Calibri" charset="0"/>
@@ -13012,7 +12623,7 @@
                           <a:ea typeface="Calibri" pitchFamily="34" charset="-122"/>
                           <a:cs typeface="Calibri" pitchFamily="34" charset="-120"/>
                         </a:rPr>
-                        <a:t>Échéance Stanbic, intérêts et capital</a:t>
+                        <a:t>Échéances 448,1 · loyers +129,6</a:t>
                       </a:r>
                       <a:endParaRPr lang="en-US" sz="950" dirty="0">
                         <a:latin typeface="Calibri" charset="0"/>
@@ -13077,7 +12688,7 @@
                           <a:ea typeface="Calibri" pitchFamily="34" charset="-122"/>
                           <a:cs typeface="Calibri" pitchFamily="34" charset="-120"/>
                         </a:rPr>
-                        <a:t>343,9</a:t>
+                        <a:t>448,1</a:t>
                       </a:r>
                       <a:endParaRPr lang="en-US" sz="950" dirty="0">
                         <a:latin typeface="Calibri" charset="0"/>
@@ -13142,7 +12753,7 @@
                           <a:ea typeface="Calibri" pitchFamily="34" charset="-122"/>
                           <a:cs typeface="Calibri" pitchFamily="34" charset="-120"/>
                         </a:rPr>
-                        <a:t>STANBIC-FIRST Debt Service</a:t>
+                        <a:t>STANBIC-FIRST _ Debt Service</a:t>
                       </a:r>
                       <a:endParaRPr lang="en-US" sz="950" dirty="0">
                         <a:latin typeface="Calibri" charset="0"/>
@@ -13272,7 +12883,7 @@
                           <a:ea typeface="Calibri" pitchFamily="34" charset="-122"/>
                           <a:cs typeface="Calibri" pitchFamily="34" charset="-120"/>
                         </a:rPr>
-                        <a:t>+6,8</a:t>
+                        <a:t>+32,2</a:t>
                       </a:r>
                       <a:endParaRPr lang="en-US" sz="950" dirty="0">
                         <a:latin typeface="Calibri" charset="0"/>
@@ -13333,7 +12944,7 @@
         </p:nvSpPr>
         <p:spPr>
           <a:xfrm>
-            <a:off x="457200" y="5586984"/>
+            <a:off x="457200" y="5303520"/>
             <a:ext cx="201168" cy="146304"/>
           </a:xfrm>
           <a:prstGeom prst="rect">
@@ -13358,7 +12969,7 @@
         </p:nvSpPr>
         <p:spPr>
           <a:xfrm>
-            <a:off x="731520" y="5559552"/>
+            <a:off x="731520" y="5276088"/>
             <a:ext cx="2011680" cy="201168"/>
           </a:xfrm>
           <a:prstGeom prst="rect">
@@ -13397,7 +13008,7 @@
         </p:nvSpPr>
         <p:spPr>
           <a:xfrm>
-            <a:off x="2834640" y="5586984"/>
+            <a:off x="2834640" y="5303520"/>
             <a:ext cx="201168" cy="146304"/>
           </a:xfrm>
           <a:prstGeom prst="rect">
@@ -13422,7 +13033,7 @@
         </p:nvSpPr>
         <p:spPr>
           <a:xfrm>
-            <a:off x="3108960" y="5559552"/>
+            <a:off x="3108960" y="5276088"/>
             <a:ext cx="2011680" cy="201168"/>
           </a:xfrm>
           <a:prstGeom prst="rect">
@@ -13461,7 +13072,7 @@
         </p:nvSpPr>
         <p:spPr>
           <a:xfrm>
-            <a:off x="5212080" y="5586984"/>
+            <a:off x="5212080" y="5303520"/>
             <a:ext cx="201168" cy="146304"/>
           </a:xfrm>
           <a:prstGeom prst="rect">
@@ -13486,7 +13097,7 @@
         </p:nvSpPr>
         <p:spPr>
           <a:xfrm>
-            <a:off x="5486400" y="5559552"/>
+            <a:off x="5486400" y="5276088"/>
             <a:ext cx="2011680" cy="201168"/>
           </a:xfrm>
           <a:prstGeom prst="rect">
@@ -13525,7 +13136,7 @@
         </p:nvSpPr>
         <p:spPr>
           <a:xfrm>
-            <a:off x="457200" y="5779008"/>
+            <a:off x="457200" y="5513832"/>
             <a:ext cx="11247120" cy="384048"/>
           </a:xfrm>
           <a:prstGeom prst="rect">
@@ -13568,7 +13179,7 @@
                 <a:ea typeface="Calibri" pitchFamily="34" charset="-122"/>
                 <a:cs typeface="Calibri" pitchFamily="34" charset="-120"/>
               </a:rPr>
-              <a:t>chaque société paie depuis ses comptes « Dédié besoin de fonctionnement », impôts et cotisations en premier ; chaque projet paie toutes ses natures, frais financiers compris, depuis son compte « Dédié paiement CPI ».</a:t>
+              <a:t>chaque société paie depuis ses comptes « Dédié besoin de fonctionnement », impôts et cotisations en premier ; chaque projet paie depuis son compte « Dédié paiement CPI » ; les échéances de prêts passent par le compte de service de la dette.</a:t>
             </a:r>
             <a:endParaRPr lang="en-US" sz="1100" dirty="0"/>
           </a:p>
@@ -13607,7 +13218,7 @@
                 <a:ea typeface="Calibri" pitchFamily="34" charset="-122"/>
                 <a:cs typeface="Calibri" pitchFamily="34" charset="-120"/>
               </a:rPr>
-              <a:t>Non mobilisables : DSRA Riviera (776,1 M) et TVA bloquée AGORA (76,3 M). Solde fin S5 = trésorerie au 30/09 – montant, hors encaissement PICI de 656,0 M à confirmer.</a:t>
+              <a:t>Solde fin S5 = trésorerie au 30/09 + flux prévus de S1 à S5 (encaissements compris).</a:t>
             </a:r>
             <a:endParaRPr lang="en-US" sz="950" dirty="0"/>
           </a:p>
@@ -13780,7 +13391,7 @@
                 <a:ea typeface="Calibri" pitchFamily="34" charset="-122"/>
                 <a:cs typeface="Calibri" pitchFamily="34" charset="-120"/>
               </a:rPr>
-              <a:t>Trois avances intragroupe couvrent les 1 937,3 M de déficits – MFCFA</a:t>
+              <a:t>Déficits à couvrir d'ici S5 : 2 601,5 M – MFCFA</a:t>
             </a:r>
             <a:endParaRPr lang="en-US" sz="1300" dirty="0"/>
           </a:p>
@@ -13809,12 +13420,12 @@
             <a:tbl>
               <a:tblPr/>
               <a:tblGrid>
-                <a:gridCol w="1920240"/>
-                <a:gridCol w="822960"/>
-                <a:gridCol w="2423160"/>
+                <a:gridCol w="2103120"/>
+                <a:gridCol w="868680"/>
+                <a:gridCol w="2194560"/>
                 <a:gridCol w="594360"/>
               </a:tblGrid>
-              <a:tr h="274320">
+              <a:tr h="237744">
                 <a:tc>
                   <a:txBody>
                     <a:bodyPr/>
@@ -13968,7 +13579,7 @@
                           <a:ea typeface="Calibri" pitchFamily="34" charset="-122"/>
                           <a:cs typeface="Calibri" pitchFamily="34" charset="-120"/>
                         </a:rPr>
-                        <a:t>Financement</a:t>
+                        <a:t>Options</a:t>
                       </a:r>
                       <a:endParaRPr lang="en-US" sz="950" dirty="0">
                         <a:latin typeface="Calibri" charset="0"/>
@@ -14036,7 +13647,7 @@
                           <a:ea typeface="Calibri" pitchFamily="34" charset="-122"/>
                           <a:cs typeface="Calibri" pitchFamily="34" charset="-120"/>
                         </a:rPr>
-                        <a:t>Avant</a:t>
+                        <a:t>Dès</a:t>
                       </a:r>
                       <a:endParaRPr lang="en-US" sz="950" dirty="0">
                         <a:latin typeface="Calibri" charset="0"/>
@@ -14088,7 +13699,7 @@
                   </a:tcPr>
                 </a:tc>
               </a:tr>
-              <a:tr h="274320">
+              <a:tr h="237744">
                 <a:tc>
                   <a:txBody>
                     <a:bodyPr/>
@@ -14106,7 +13717,7 @@
                           <a:ea typeface="Calibri" pitchFamily="34" charset="-122"/>
                           <a:cs typeface="Calibri" pitchFamily="34" charset="-120"/>
                         </a:rPr>
-                        <a:t>SCO AO</a:t>
+                        <a:t>TERASSON</a:t>
                       </a:r>
                       <a:endParaRPr lang="en-US" sz="950" dirty="0">
                         <a:latin typeface="Calibri" charset="0"/>
@@ -14171,7 +13782,7 @@
                           <a:ea typeface="Calibri" pitchFamily="34" charset="-122"/>
                           <a:cs typeface="Calibri" pitchFamily="34" charset="-120"/>
                         </a:rPr>
-                        <a:t>80,9</a:t>
+                        <a:t>206,4</a:t>
                       </a:r>
                       <a:endParaRPr lang="en-US" sz="950" dirty="0">
                         <a:latin typeface="Calibri" charset="0"/>
@@ -14239,7 +13850,7 @@
                           <a:ea typeface="Calibri" pitchFamily="34" charset="-122"/>
                           <a:cs typeface="Calibri" pitchFamily="34" charset="-120"/>
                         </a:rPr>
-                        <a:t>Avance PICI via SG-PICI</a:t>
+                        <a:t>Spot (A) ou avance (B)</a:t>
                       </a:r>
                       <a:endParaRPr lang="en-US" sz="950" dirty="0">
                         <a:latin typeface="Calibri" charset="0"/>
@@ -14353,7 +13964,7 @@
                   </a:tcPr>
                 </a:tc>
               </a:tr>
-              <a:tr h="274320">
+              <a:tr h="237744">
                 <a:tc>
                   <a:txBody>
                     <a:bodyPr/>
@@ -14436,7 +14047,7 @@
                           <a:ea typeface="Calibri" pitchFamily="34" charset="-122"/>
                           <a:cs typeface="Calibri" pitchFamily="34" charset="-120"/>
                         </a:rPr>
-                        <a:t>40,2</a:t>
+                        <a:t>198,7</a:t>
                       </a:r>
                       <a:endParaRPr lang="en-US" sz="950" dirty="0">
                         <a:latin typeface="Calibri" charset="0"/>
@@ -14504,7 +14115,7 @@
                           <a:ea typeface="Calibri" pitchFamily="34" charset="-122"/>
                           <a:cs typeface="Calibri" pitchFamily="34" charset="-120"/>
                         </a:rPr>
-                        <a:t>Avance PICI via SG-PICI</a:t>
+                        <a:t>Spot (A) ou avance (B)</a:t>
                       </a:r>
                       <a:endParaRPr lang="en-US" sz="950" dirty="0">
                         <a:latin typeface="Calibri" charset="0"/>
@@ -14618,7 +14229,7 @@
                   </a:tcPr>
                 </a:tc>
               </a:tr>
-              <a:tr h="274320">
+              <a:tr h="237744">
                 <a:tc>
                   <a:txBody>
                     <a:bodyPr/>
@@ -14636,7 +14247,7 @@
                           <a:ea typeface="Calibri" pitchFamily="34" charset="-122"/>
                           <a:cs typeface="Calibri" pitchFamily="34" charset="-120"/>
                         </a:rPr>
-                        <a:t>RHD CI</a:t>
+                        <a:t>SCO AO</a:t>
                       </a:r>
                       <a:endParaRPr lang="en-US" sz="950" dirty="0">
                         <a:latin typeface="Calibri" charset="0"/>
@@ -14701,7 +14312,7 @@
                           <a:ea typeface="Calibri" pitchFamily="34" charset="-122"/>
                           <a:cs typeface="Calibri" pitchFamily="34" charset="-120"/>
                         </a:rPr>
-                        <a:t>4,0</a:t>
+                        <a:t>176,0</a:t>
                       </a:r>
                       <a:endParaRPr lang="en-US" sz="950" dirty="0">
                         <a:latin typeface="Calibri" charset="0"/>
@@ -14769,7 +14380,7 @@
                           <a:ea typeface="Calibri" pitchFamily="34" charset="-122"/>
                           <a:cs typeface="Calibri" pitchFamily="34" charset="-120"/>
                         </a:rPr>
-                        <a:t>Paiement par PICI pour son compte</a:t>
+                        <a:t>Spot (A) ou avance (B)</a:t>
                       </a:r>
                       <a:endParaRPr lang="en-US" sz="950" dirty="0">
                         <a:latin typeface="Calibri" charset="0"/>
@@ -14883,7 +14494,7 @@
                   </a:tcPr>
                 </a:tc>
               </a:tr>
-              <a:tr h="274320">
+              <a:tr h="237744">
                 <a:tc>
                   <a:txBody>
                     <a:bodyPr/>
@@ -14901,7 +14512,7 @@
                           <a:ea typeface="Calibri" pitchFamily="34" charset="-122"/>
                           <a:cs typeface="Calibri" pitchFamily="34" charset="-120"/>
                         </a:rPr>
-                        <a:t>AB CENTER</a:t>
+                        <a:t>RIVIERA</a:t>
                       </a:r>
                       <a:endParaRPr lang="en-US" sz="950" dirty="0">
                         <a:latin typeface="Calibri" charset="0"/>
@@ -14966,7 +14577,7 @@
                           <a:ea typeface="Calibri" pitchFamily="34" charset="-122"/>
                           <a:cs typeface="Calibri" pitchFamily="34" charset="-120"/>
                         </a:rPr>
-                        <a:t>2,6</a:t>
+                        <a:t>87,3</a:t>
                       </a:r>
                       <a:endParaRPr lang="en-US" sz="950" dirty="0">
                         <a:latin typeface="Calibri" charset="0"/>
@@ -15034,7 +14645,7 @@
                           <a:ea typeface="Calibri" pitchFamily="34" charset="-122"/>
                           <a:cs typeface="Calibri" pitchFamily="34" charset="-120"/>
                         </a:rPr>
-                        <a:t>Avance PICI via SG-PICI</a:t>
+                        <a:t>Spot (A) ou avance (B)</a:t>
                       </a:r>
                       <a:endParaRPr lang="en-US" sz="950" dirty="0">
                         <a:latin typeface="Calibri" charset="0"/>
@@ -15148,7 +14759,7 @@
                   </a:tcPr>
                 </a:tc>
               </a:tr>
-              <a:tr h="274320">
+              <a:tr h="237744">
                 <a:tc>
                   <a:txBody>
                     <a:bodyPr/>
@@ -15231,7 +14842,7 @@
                           <a:ea typeface="Calibri" pitchFamily="34" charset="-122"/>
                           <a:cs typeface="Calibri" pitchFamily="34" charset="-120"/>
                         </a:rPr>
-                        <a:t>2,3</a:t>
+                        <a:t>66,0</a:t>
                       </a:r>
                       <a:endParaRPr lang="en-US" sz="950" dirty="0">
                         <a:latin typeface="Calibri" charset="0"/>
@@ -15299,7 +14910,7 @@
                           <a:ea typeface="Calibri" pitchFamily="34" charset="-122"/>
                           <a:cs typeface="Calibri" pitchFamily="34" charset="-120"/>
                         </a:rPr>
-                        <a:t>Avance PICI via SG-PICI</a:t>
+                        <a:t>Spot (A) ou avance (B)</a:t>
                       </a:r>
                       <a:endParaRPr lang="en-US" sz="950" dirty="0">
                         <a:latin typeface="Calibri" charset="0"/>
@@ -15413,7 +15024,7 @@
                   </a:tcPr>
                 </a:tc>
               </a:tr>
-              <a:tr h="274320">
+              <a:tr h="237744">
                 <a:tc>
                   <a:txBody>
                     <a:bodyPr/>
@@ -15431,7 +15042,7 @@
                           <a:ea typeface="Calibri" pitchFamily="34" charset="-122"/>
                           <a:cs typeface="Calibri" pitchFamily="34" charset="-120"/>
                         </a:rPr>
-                        <a:t>Riviera Park – fonds RP</a:t>
+                        <a:t>RHD CI</a:t>
                       </a:r>
                       <a:endParaRPr lang="en-US" sz="950" dirty="0">
                         <a:latin typeface="Calibri" charset="0"/>
@@ -15496,7 +15107,7 @@
                           <a:ea typeface="Calibri" pitchFamily="34" charset="-122"/>
                           <a:cs typeface="Calibri" pitchFamily="34" charset="-120"/>
                         </a:rPr>
-                        <a:t>601,4</a:t>
+                        <a:t>50,0</a:t>
                       </a:r>
                       <a:endParaRPr lang="en-US" sz="950" dirty="0">
                         <a:latin typeface="Calibri" charset="0"/>
@@ -15564,7 +15175,7 @@
                           <a:ea typeface="Calibri" pitchFamily="34" charset="-122"/>
                           <a:cs typeface="Calibri" pitchFamily="34" charset="-120"/>
                         </a:rPr>
-                        <a:t>BNI-RIVIERA courant</a:t>
+                        <a:t>Spot (A) ou avance (B)</a:t>
                       </a:r>
                       <a:endParaRPr lang="en-US" sz="950" dirty="0">
                         <a:latin typeface="Calibri" charset="0"/>
@@ -15629,7 +15240,7 @@
                           <a:ea typeface="Calibri" pitchFamily="34" charset="-122"/>
                           <a:cs typeface="Calibri" pitchFamily="34" charset="-120"/>
                         </a:rPr>
-                        <a:t>S2</a:t>
+                        <a:t>S1</a:t>
                       </a:r>
                       <a:endParaRPr lang="en-US" sz="950" dirty="0">
                         <a:latin typeface="Calibri" charset="0"/>
@@ -15678,7 +15289,7 @@
                   </a:tcPr>
                 </a:tc>
               </a:tr>
-              <a:tr h="274320">
+              <a:tr h="237744">
                 <a:tc>
                   <a:txBody>
                     <a:bodyPr/>
@@ -15696,7 +15307,7 @@
                           <a:ea typeface="Calibri" pitchFamily="34" charset="-122"/>
                           <a:cs typeface="Calibri" pitchFamily="34" charset="-120"/>
                         </a:rPr>
-                        <a:t>Village Notre Père – fonds NP</a:t>
+                        <a:t>AB CENTER</a:t>
                       </a:r>
                       <a:endParaRPr lang="en-US" sz="950" dirty="0">
                         <a:latin typeface="Calibri" charset="0"/>
@@ -15761,7 +15372,7 @@
                           <a:ea typeface="Calibri" pitchFamily="34" charset="-122"/>
                           <a:cs typeface="Calibri" pitchFamily="34" charset="-120"/>
                         </a:rPr>
-                        <a:t>1 205,9</a:t>
+                        <a:t>6,3</a:t>
                       </a:r>
                       <a:endParaRPr lang="en-US" sz="950" dirty="0">
                         <a:latin typeface="Calibri" charset="0"/>
@@ -15829,7 +15440,7 @@
                           <a:ea typeface="Calibri" pitchFamily="34" charset="-122"/>
                           <a:cs typeface="Calibri" pitchFamily="34" charset="-120"/>
                         </a:rPr>
-                        <a:t>Avance RIVIERA 1 157,4 + SG-TERASSON 48,5</a:t>
+                        <a:t>Spot (A) ou avance (B)</a:t>
                       </a:r>
                       <a:endParaRPr lang="en-US" sz="950" dirty="0">
                         <a:latin typeface="Calibri" charset="0"/>
@@ -15943,7 +15554,802 @@
                   </a:tcPr>
                 </a:tc>
               </a:tr>
-              <a:tr h="274320">
+              <a:tr h="237744">
+                <a:tc>
+                  <a:txBody>
+                    <a:bodyPr/>
+                    <a:lstStyle/>
+                    <a:p>
+                      <a:pPr algn="l" indent="0" marL="0">
+                        <a:buNone/>
+                      </a:pPr>
+                      <a:r>
+                        <a:rPr lang="en-US" sz="950" b="1" dirty="0">
+                          <a:solidFill>
+                            <a:srgbClr val="1F2933"/>
+                          </a:solidFill>
+                          <a:latin typeface="Calibri" pitchFamily="34" charset="0"/>
+                          <a:ea typeface="Calibri" pitchFamily="34" charset="-122"/>
+                          <a:cs typeface="Calibri" pitchFamily="34" charset="-120"/>
+                        </a:rPr>
+                        <a:t>ODALYS CI</a:t>
+                      </a:r>
+                      <a:endParaRPr lang="en-US" sz="950" dirty="0">
+                        <a:latin typeface="Calibri" charset="0"/>
+                        <a:ea typeface="Calibri" charset="0"/>
+                        <a:cs typeface="Calibri" charset="0"/>
+                      </a:endParaRPr>
+                    </a:p>
+                  </a:txBody>
+                  <a:tcPr marL="64008" marR="64008" marT="0" marB="0" anchor="ctr">
+                    <a:lnL w="6350" cap="flat" cmpd="sng" algn="ctr">
+                      <a:solidFill>
+                        <a:srgbClr val="D5DBE3"/>
+                      </a:solidFill>
+                      <a:prstDash val="solid"/>
+                      <a:round/>
+                      <a:headEnd type="none" w="med" len="med"/>
+                      <a:tailEnd type="none" w="med" len="med"/>
+                    </a:lnL>
+                    <a:lnR w="6350" cap="flat" cmpd="sng" algn="ctr">
+                      <a:solidFill>
+                        <a:srgbClr val="D5DBE3"/>
+                      </a:solidFill>
+                      <a:prstDash val="solid"/>
+                      <a:round/>
+                      <a:headEnd type="none" w="med" len="med"/>
+                      <a:tailEnd type="none" w="med" len="med"/>
+                    </a:lnR>
+                    <a:lnT w="6350" cap="flat" cmpd="sng" algn="ctr">
+                      <a:solidFill>
+                        <a:srgbClr val="D5DBE3"/>
+                      </a:solidFill>
+                      <a:prstDash val="solid"/>
+                      <a:round/>
+                      <a:headEnd type="none" w="med" len="med"/>
+                      <a:tailEnd type="none" w="med" len="med"/>
+                    </a:lnT>
+                    <a:lnB w="6350" cap="flat" cmpd="sng" algn="ctr">
+                      <a:solidFill>
+                        <a:srgbClr val="D5DBE3"/>
+                      </a:solidFill>
+                      <a:prstDash val="solid"/>
+                      <a:round/>
+                      <a:headEnd type="none" w="med" len="med"/>
+                      <a:tailEnd type="none" w="med" len="med"/>
+                    </a:lnB>
+                  </a:tcPr>
+                </a:tc>
+                <a:tc>
+                  <a:txBody>
+                    <a:bodyPr/>
+                    <a:lstStyle/>
+                    <a:p>
+                      <a:pPr algn="r" indent="0" marL="0">
+                        <a:buNone/>
+                      </a:pPr>
+                      <a:r>
+                        <a:rPr lang="en-US" sz="950" b="1" dirty="0">
+                          <a:solidFill>
+                            <a:srgbClr val="B3261E"/>
+                          </a:solidFill>
+                          <a:latin typeface="Calibri" pitchFamily="34" charset="0"/>
+                          <a:ea typeface="Calibri" pitchFamily="34" charset="-122"/>
+                          <a:cs typeface="Calibri" pitchFamily="34" charset="-120"/>
+                        </a:rPr>
+                        <a:t>3,5</a:t>
+                      </a:r>
+                      <a:endParaRPr lang="en-US" sz="950" dirty="0">
+                        <a:latin typeface="Calibri" charset="0"/>
+                        <a:ea typeface="Calibri" charset="0"/>
+                        <a:cs typeface="Calibri" charset="0"/>
+                      </a:endParaRPr>
+                    </a:p>
+                  </a:txBody>
+                  <a:tcPr marL="64008" marR="64008" marT="0" marB="0" anchor="ctr">
+                    <a:lnL w="6350" cap="flat" cmpd="sng" algn="ctr">
+                      <a:solidFill>
+                        <a:srgbClr val="D5DBE3"/>
+                      </a:solidFill>
+                      <a:prstDash val="solid"/>
+                      <a:round/>
+                      <a:headEnd type="none" w="med" len="med"/>
+                      <a:tailEnd type="none" w="med" len="med"/>
+                    </a:lnL>
+                    <a:lnR w="6350" cap="flat" cmpd="sng" algn="ctr">
+                      <a:solidFill>
+                        <a:srgbClr val="D5DBE3"/>
+                      </a:solidFill>
+                      <a:prstDash val="solid"/>
+                      <a:round/>
+                      <a:headEnd type="none" w="med" len="med"/>
+                      <a:tailEnd type="none" w="med" len="med"/>
+                    </a:lnR>
+                    <a:lnT w="6350" cap="flat" cmpd="sng" algn="ctr">
+                      <a:solidFill>
+                        <a:srgbClr val="D5DBE3"/>
+                      </a:solidFill>
+                      <a:prstDash val="solid"/>
+                      <a:round/>
+                      <a:headEnd type="none" w="med" len="med"/>
+                      <a:tailEnd type="none" w="med" len="med"/>
+                    </a:lnT>
+                    <a:lnB w="6350" cap="flat" cmpd="sng" algn="ctr">
+                      <a:solidFill>
+                        <a:srgbClr val="D5DBE3"/>
+                      </a:solidFill>
+                      <a:prstDash val="solid"/>
+                      <a:round/>
+                      <a:headEnd type="none" w="med" len="med"/>
+                      <a:tailEnd type="none" w="med" len="med"/>
+                    </a:lnB>
+                    <a:solidFill>
+                      <a:srgbClr val="F7E7E5"/>
+                    </a:solidFill>
+                  </a:tcPr>
+                </a:tc>
+                <a:tc>
+                  <a:txBody>
+                    <a:bodyPr/>
+                    <a:lstStyle/>
+                    <a:p>
+                      <a:pPr algn="l" indent="0" marL="0">
+                        <a:buNone/>
+                      </a:pPr>
+                      <a:r>
+                        <a:rPr lang="en-US" sz="950" dirty="0">
+                          <a:solidFill>
+                            <a:srgbClr val="1F2933"/>
+                          </a:solidFill>
+                          <a:latin typeface="Calibri" pitchFamily="34" charset="0"/>
+                          <a:ea typeface="Calibri" pitchFamily="34" charset="-122"/>
+                          <a:cs typeface="Calibri" pitchFamily="34" charset="-120"/>
+                        </a:rPr>
+                        <a:t>Spot (A) ou avance (B)</a:t>
+                      </a:r>
+                      <a:endParaRPr lang="en-US" sz="950" dirty="0">
+                        <a:latin typeface="Calibri" charset="0"/>
+                        <a:ea typeface="Calibri" charset="0"/>
+                        <a:cs typeface="Calibri" charset="0"/>
+                      </a:endParaRPr>
+                    </a:p>
+                  </a:txBody>
+                  <a:tcPr marL="64008" marR="64008" marT="0" marB="0" anchor="ctr">
+                    <a:lnL w="6350" cap="flat" cmpd="sng" algn="ctr">
+                      <a:solidFill>
+                        <a:srgbClr val="D5DBE3"/>
+                      </a:solidFill>
+                      <a:prstDash val="solid"/>
+                      <a:round/>
+                      <a:headEnd type="none" w="med" len="med"/>
+                      <a:tailEnd type="none" w="med" len="med"/>
+                    </a:lnL>
+                    <a:lnR w="6350" cap="flat" cmpd="sng" algn="ctr">
+                      <a:solidFill>
+                        <a:srgbClr val="D5DBE3"/>
+                      </a:solidFill>
+                      <a:prstDash val="solid"/>
+                      <a:round/>
+                      <a:headEnd type="none" w="med" len="med"/>
+                      <a:tailEnd type="none" w="med" len="med"/>
+                    </a:lnR>
+                    <a:lnT w="6350" cap="flat" cmpd="sng" algn="ctr">
+                      <a:solidFill>
+                        <a:srgbClr val="D5DBE3"/>
+                      </a:solidFill>
+                      <a:prstDash val="solid"/>
+                      <a:round/>
+                      <a:headEnd type="none" w="med" len="med"/>
+                      <a:tailEnd type="none" w="med" len="med"/>
+                    </a:lnT>
+                    <a:lnB w="6350" cap="flat" cmpd="sng" algn="ctr">
+                      <a:solidFill>
+                        <a:srgbClr val="D5DBE3"/>
+                      </a:solidFill>
+                      <a:prstDash val="solid"/>
+                      <a:round/>
+                      <a:headEnd type="none" w="med" len="med"/>
+                      <a:tailEnd type="none" w="med" len="med"/>
+                    </a:lnB>
+                  </a:tcPr>
+                </a:tc>
+                <a:tc>
+                  <a:txBody>
+                    <a:bodyPr/>
+                    <a:lstStyle/>
+                    <a:p>
+                      <a:pPr algn="ctr" indent="0" marL="0">
+                        <a:buNone/>
+                      </a:pPr>
+                      <a:r>
+                        <a:rPr lang="en-US" sz="950" dirty="0">
+                          <a:solidFill>
+                            <a:srgbClr val="1F2933"/>
+                          </a:solidFill>
+                          <a:latin typeface="Calibri" pitchFamily="34" charset="0"/>
+                          <a:ea typeface="Calibri" pitchFamily="34" charset="-122"/>
+                          <a:cs typeface="Calibri" pitchFamily="34" charset="-120"/>
+                        </a:rPr>
+                        <a:t>S1</a:t>
+                      </a:r>
+                      <a:endParaRPr lang="en-US" sz="950" dirty="0">
+                        <a:latin typeface="Calibri" charset="0"/>
+                        <a:ea typeface="Calibri" charset="0"/>
+                        <a:cs typeface="Calibri" charset="0"/>
+                      </a:endParaRPr>
+                    </a:p>
+                  </a:txBody>
+                  <a:tcPr marL="64008" marR="64008" marT="0" marB="0" anchor="ctr">
+                    <a:lnL w="6350" cap="flat" cmpd="sng" algn="ctr">
+                      <a:solidFill>
+                        <a:srgbClr val="D5DBE3"/>
+                      </a:solidFill>
+                      <a:prstDash val="solid"/>
+                      <a:round/>
+                      <a:headEnd type="none" w="med" len="med"/>
+                      <a:tailEnd type="none" w="med" len="med"/>
+                    </a:lnL>
+                    <a:lnR w="6350" cap="flat" cmpd="sng" algn="ctr">
+                      <a:solidFill>
+                        <a:srgbClr val="D5DBE3"/>
+                      </a:solidFill>
+                      <a:prstDash val="solid"/>
+                      <a:round/>
+                      <a:headEnd type="none" w="med" len="med"/>
+                      <a:tailEnd type="none" w="med" len="med"/>
+                    </a:lnR>
+                    <a:lnT w="6350" cap="flat" cmpd="sng" algn="ctr">
+                      <a:solidFill>
+                        <a:srgbClr val="D5DBE3"/>
+                      </a:solidFill>
+                      <a:prstDash val="solid"/>
+                      <a:round/>
+                      <a:headEnd type="none" w="med" len="med"/>
+                      <a:tailEnd type="none" w="med" len="med"/>
+                    </a:lnT>
+                    <a:lnB w="6350" cap="flat" cmpd="sng" algn="ctr">
+                      <a:solidFill>
+                        <a:srgbClr val="D5DBE3"/>
+                      </a:solidFill>
+                      <a:prstDash val="solid"/>
+                      <a:round/>
+                      <a:headEnd type="none" w="med" len="med"/>
+                      <a:tailEnd type="none" w="med" len="med"/>
+                    </a:lnB>
+                  </a:tcPr>
+                </a:tc>
+              </a:tr>
+              <a:tr h="237744">
+                <a:tc>
+                  <a:txBody>
+                    <a:bodyPr/>
+                    <a:lstStyle/>
+                    <a:p>
+                      <a:pPr algn="l" indent="0" marL="0">
+                        <a:buNone/>
+                      </a:pPr>
+                      <a:r>
+                        <a:rPr lang="en-US" sz="950" b="1" dirty="0">
+                          <a:solidFill>
+                            <a:srgbClr val="1F2933"/>
+                          </a:solidFill>
+                          <a:latin typeface="Calibri" pitchFamily="34" charset="0"/>
+                          <a:ea typeface="Calibri" pitchFamily="34" charset="-122"/>
+                          <a:cs typeface="Calibri" pitchFamily="34" charset="-120"/>
+                        </a:rPr>
+                        <a:t>RIVIERA – fonds projet</a:t>
+                      </a:r>
+                      <a:endParaRPr lang="en-US" sz="950" dirty="0">
+                        <a:latin typeface="Calibri" charset="0"/>
+                        <a:ea typeface="Calibri" charset="0"/>
+                        <a:cs typeface="Calibri" charset="0"/>
+                      </a:endParaRPr>
+                    </a:p>
+                  </a:txBody>
+                  <a:tcPr marL="64008" marR="64008" marT="0" marB="0" anchor="ctr">
+                    <a:lnL w="6350" cap="flat" cmpd="sng" algn="ctr">
+                      <a:solidFill>
+                        <a:srgbClr val="D5DBE3"/>
+                      </a:solidFill>
+                      <a:prstDash val="solid"/>
+                      <a:round/>
+                      <a:headEnd type="none" w="med" len="med"/>
+                      <a:tailEnd type="none" w="med" len="med"/>
+                    </a:lnL>
+                    <a:lnR w="6350" cap="flat" cmpd="sng" algn="ctr">
+                      <a:solidFill>
+                        <a:srgbClr val="D5DBE3"/>
+                      </a:solidFill>
+                      <a:prstDash val="solid"/>
+                      <a:round/>
+                      <a:headEnd type="none" w="med" len="med"/>
+                      <a:tailEnd type="none" w="med" len="med"/>
+                    </a:lnR>
+                    <a:lnT w="6350" cap="flat" cmpd="sng" algn="ctr">
+                      <a:solidFill>
+                        <a:srgbClr val="D5DBE3"/>
+                      </a:solidFill>
+                      <a:prstDash val="solid"/>
+                      <a:round/>
+                      <a:headEnd type="none" w="med" len="med"/>
+                      <a:tailEnd type="none" w="med" len="med"/>
+                    </a:lnT>
+                    <a:lnB w="6350" cap="flat" cmpd="sng" algn="ctr">
+                      <a:solidFill>
+                        <a:srgbClr val="D5DBE3"/>
+                      </a:solidFill>
+                      <a:prstDash val="solid"/>
+                      <a:round/>
+                      <a:headEnd type="none" w="med" len="med"/>
+                      <a:tailEnd type="none" w="med" len="med"/>
+                    </a:lnB>
+                  </a:tcPr>
+                </a:tc>
+                <a:tc>
+                  <a:txBody>
+                    <a:bodyPr/>
+                    <a:lstStyle/>
+                    <a:p>
+                      <a:pPr algn="r" indent="0" marL="0">
+                        <a:buNone/>
+                      </a:pPr>
+                      <a:r>
+                        <a:rPr lang="en-US" sz="950" b="1" dirty="0">
+                          <a:solidFill>
+                            <a:srgbClr val="B3261E"/>
+                          </a:solidFill>
+                          <a:latin typeface="Calibri" pitchFamily="34" charset="0"/>
+                          <a:ea typeface="Calibri" pitchFamily="34" charset="-122"/>
+                          <a:cs typeface="Calibri" pitchFamily="34" charset="-120"/>
+                        </a:rPr>
+                        <a:t>601,4</a:t>
+                      </a:r>
+                      <a:endParaRPr lang="en-US" sz="950" dirty="0">
+                        <a:latin typeface="Calibri" charset="0"/>
+                        <a:ea typeface="Calibri" charset="0"/>
+                        <a:cs typeface="Calibri" charset="0"/>
+                      </a:endParaRPr>
+                    </a:p>
+                  </a:txBody>
+                  <a:tcPr marL="64008" marR="64008" marT="0" marB="0" anchor="ctr">
+                    <a:lnL w="6350" cap="flat" cmpd="sng" algn="ctr">
+                      <a:solidFill>
+                        <a:srgbClr val="D5DBE3"/>
+                      </a:solidFill>
+                      <a:prstDash val="solid"/>
+                      <a:round/>
+                      <a:headEnd type="none" w="med" len="med"/>
+                      <a:tailEnd type="none" w="med" len="med"/>
+                    </a:lnL>
+                    <a:lnR w="6350" cap="flat" cmpd="sng" algn="ctr">
+                      <a:solidFill>
+                        <a:srgbClr val="D5DBE3"/>
+                      </a:solidFill>
+                      <a:prstDash val="solid"/>
+                      <a:round/>
+                      <a:headEnd type="none" w="med" len="med"/>
+                      <a:tailEnd type="none" w="med" len="med"/>
+                    </a:lnR>
+                    <a:lnT w="6350" cap="flat" cmpd="sng" algn="ctr">
+                      <a:solidFill>
+                        <a:srgbClr val="D5DBE3"/>
+                      </a:solidFill>
+                      <a:prstDash val="solid"/>
+                      <a:round/>
+                      <a:headEnd type="none" w="med" len="med"/>
+                      <a:tailEnd type="none" w="med" len="med"/>
+                    </a:lnT>
+                    <a:lnB w="6350" cap="flat" cmpd="sng" algn="ctr">
+                      <a:solidFill>
+                        <a:srgbClr val="D5DBE3"/>
+                      </a:solidFill>
+                      <a:prstDash val="solid"/>
+                      <a:round/>
+                      <a:headEnd type="none" w="med" len="med"/>
+                      <a:tailEnd type="none" w="med" len="med"/>
+                    </a:lnB>
+                    <a:solidFill>
+                      <a:srgbClr val="F7E7E5"/>
+                    </a:solidFill>
+                  </a:tcPr>
+                </a:tc>
+                <a:tc>
+                  <a:txBody>
+                    <a:bodyPr/>
+                    <a:lstStyle/>
+                    <a:p>
+                      <a:pPr algn="l" indent="0" marL="0">
+                        <a:buNone/>
+                      </a:pPr>
+                      <a:r>
+                        <a:rPr lang="en-US" sz="950" dirty="0">
+                          <a:solidFill>
+                            <a:srgbClr val="1F2933"/>
+                          </a:solidFill>
+                          <a:latin typeface="Calibri" pitchFamily="34" charset="0"/>
+                          <a:ea typeface="Calibri" pitchFamily="34" charset="-122"/>
+                          <a:cs typeface="Calibri" pitchFamily="34" charset="-120"/>
+                        </a:rPr>
+                        <a:t>Compte à arbitrer (C) ou prêts</a:t>
+                      </a:r>
+                      <a:endParaRPr lang="en-US" sz="950" dirty="0">
+                        <a:latin typeface="Calibri" charset="0"/>
+                        <a:ea typeface="Calibri" charset="0"/>
+                        <a:cs typeface="Calibri" charset="0"/>
+                      </a:endParaRPr>
+                    </a:p>
+                  </a:txBody>
+                  <a:tcPr marL="64008" marR="64008" marT="0" marB="0" anchor="ctr">
+                    <a:lnL w="6350" cap="flat" cmpd="sng" algn="ctr">
+                      <a:solidFill>
+                        <a:srgbClr val="D5DBE3"/>
+                      </a:solidFill>
+                      <a:prstDash val="solid"/>
+                      <a:round/>
+                      <a:headEnd type="none" w="med" len="med"/>
+                      <a:tailEnd type="none" w="med" len="med"/>
+                    </a:lnL>
+                    <a:lnR w="6350" cap="flat" cmpd="sng" algn="ctr">
+                      <a:solidFill>
+                        <a:srgbClr val="D5DBE3"/>
+                      </a:solidFill>
+                      <a:prstDash val="solid"/>
+                      <a:round/>
+                      <a:headEnd type="none" w="med" len="med"/>
+                      <a:tailEnd type="none" w="med" len="med"/>
+                    </a:lnR>
+                    <a:lnT w="6350" cap="flat" cmpd="sng" algn="ctr">
+                      <a:solidFill>
+                        <a:srgbClr val="D5DBE3"/>
+                      </a:solidFill>
+                      <a:prstDash val="solid"/>
+                      <a:round/>
+                      <a:headEnd type="none" w="med" len="med"/>
+                      <a:tailEnd type="none" w="med" len="med"/>
+                    </a:lnT>
+                    <a:lnB w="6350" cap="flat" cmpd="sng" algn="ctr">
+                      <a:solidFill>
+                        <a:srgbClr val="D5DBE3"/>
+                      </a:solidFill>
+                      <a:prstDash val="solid"/>
+                      <a:round/>
+                      <a:headEnd type="none" w="med" len="med"/>
+                      <a:tailEnd type="none" w="med" len="med"/>
+                    </a:lnB>
+                  </a:tcPr>
+                </a:tc>
+                <a:tc>
+                  <a:txBody>
+                    <a:bodyPr/>
+                    <a:lstStyle/>
+                    <a:p>
+                      <a:pPr algn="ctr" indent="0" marL="0">
+                        <a:buNone/>
+                      </a:pPr>
+                      <a:r>
+                        <a:rPr lang="en-US" sz="950" dirty="0">
+                          <a:solidFill>
+                            <a:srgbClr val="1F2933"/>
+                          </a:solidFill>
+                          <a:latin typeface="Calibri" pitchFamily="34" charset="0"/>
+                          <a:ea typeface="Calibri" pitchFamily="34" charset="-122"/>
+                          <a:cs typeface="Calibri" pitchFamily="34" charset="-120"/>
+                        </a:rPr>
+                        <a:t>S2</a:t>
+                      </a:r>
+                      <a:endParaRPr lang="en-US" sz="950" dirty="0">
+                        <a:latin typeface="Calibri" charset="0"/>
+                        <a:ea typeface="Calibri" charset="0"/>
+                        <a:cs typeface="Calibri" charset="0"/>
+                      </a:endParaRPr>
+                    </a:p>
+                  </a:txBody>
+                  <a:tcPr marL="64008" marR="64008" marT="0" marB="0" anchor="ctr">
+                    <a:lnL w="6350" cap="flat" cmpd="sng" algn="ctr">
+                      <a:solidFill>
+                        <a:srgbClr val="D5DBE3"/>
+                      </a:solidFill>
+                      <a:prstDash val="solid"/>
+                      <a:round/>
+                      <a:headEnd type="none" w="med" len="med"/>
+                      <a:tailEnd type="none" w="med" len="med"/>
+                    </a:lnL>
+                    <a:lnR w="6350" cap="flat" cmpd="sng" algn="ctr">
+                      <a:solidFill>
+                        <a:srgbClr val="D5DBE3"/>
+                      </a:solidFill>
+                      <a:prstDash val="solid"/>
+                      <a:round/>
+                      <a:headEnd type="none" w="med" len="med"/>
+                      <a:tailEnd type="none" w="med" len="med"/>
+                    </a:lnR>
+                    <a:lnT w="6350" cap="flat" cmpd="sng" algn="ctr">
+                      <a:solidFill>
+                        <a:srgbClr val="D5DBE3"/>
+                      </a:solidFill>
+                      <a:prstDash val="solid"/>
+                      <a:round/>
+                      <a:headEnd type="none" w="med" len="med"/>
+                      <a:tailEnd type="none" w="med" len="med"/>
+                    </a:lnT>
+                    <a:lnB w="6350" cap="flat" cmpd="sng" algn="ctr">
+                      <a:solidFill>
+                        <a:srgbClr val="D5DBE3"/>
+                      </a:solidFill>
+                      <a:prstDash val="solid"/>
+                      <a:round/>
+                      <a:headEnd type="none" w="med" len="med"/>
+                      <a:tailEnd type="none" w="med" len="med"/>
+                    </a:lnB>
+                  </a:tcPr>
+                </a:tc>
+              </a:tr>
+              <a:tr h="237744">
+                <a:tc>
+                  <a:txBody>
+                    <a:bodyPr/>
+                    <a:lstStyle/>
+                    <a:p>
+                      <a:pPr algn="l" indent="0" marL="0">
+                        <a:buNone/>
+                      </a:pPr>
+                      <a:r>
+                        <a:rPr lang="en-US" sz="950" b="1" dirty="0">
+                          <a:solidFill>
+                            <a:srgbClr val="1F2933"/>
+                          </a:solidFill>
+                          <a:latin typeface="Calibri" pitchFamily="34" charset="0"/>
+                          <a:ea typeface="Calibri" pitchFamily="34" charset="-122"/>
+                          <a:cs typeface="Calibri" pitchFamily="34" charset="-120"/>
+                        </a:rPr>
+                        <a:t>TERASSON – fonds projet</a:t>
+                      </a:r>
+                      <a:endParaRPr lang="en-US" sz="950" dirty="0">
+                        <a:latin typeface="Calibri" charset="0"/>
+                        <a:ea typeface="Calibri" charset="0"/>
+                        <a:cs typeface="Calibri" charset="0"/>
+                      </a:endParaRPr>
+                    </a:p>
+                  </a:txBody>
+                  <a:tcPr marL="64008" marR="64008" marT="0" marB="0" anchor="ctr">
+                    <a:lnL w="6350" cap="flat" cmpd="sng" algn="ctr">
+                      <a:solidFill>
+                        <a:srgbClr val="D5DBE3"/>
+                      </a:solidFill>
+                      <a:prstDash val="solid"/>
+                      <a:round/>
+                      <a:headEnd type="none" w="med" len="med"/>
+                      <a:tailEnd type="none" w="med" len="med"/>
+                    </a:lnL>
+                    <a:lnR w="6350" cap="flat" cmpd="sng" algn="ctr">
+                      <a:solidFill>
+                        <a:srgbClr val="D5DBE3"/>
+                      </a:solidFill>
+                      <a:prstDash val="solid"/>
+                      <a:round/>
+                      <a:headEnd type="none" w="med" len="med"/>
+                      <a:tailEnd type="none" w="med" len="med"/>
+                    </a:lnR>
+                    <a:lnT w="6350" cap="flat" cmpd="sng" algn="ctr">
+                      <a:solidFill>
+                        <a:srgbClr val="D5DBE3"/>
+                      </a:solidFill>
+                      <a:prstDash val="solid"/>
+                      <a:round/>
+                      <a:headEnd type="none" w="med" len="med"/>
+                      <a:tailEnd type="none" w="med" len="med"/>
+                    </a:lnT>
+                    <a:lnB w="6350" cap="flat" cmpd="sng" algn="ctr">
+                      <a:solidFill>
+                        <a:srgbClr val="D5DBE3"/>
+                      </a:solidFill>
+                      <a:prstDash val="solid"/>
+                      <a:round/>
+                      <a:headEnd type="none" w="med" len="med"/>
+                      <a:tailEnd type="none" w="med" len="med"/>
+                    </a:lnB>
+                  </a:tcPr>
+                </a:tc>
+                <a:tc>
+                  <a:txBody>
+                    <a:bodyPr/>
+                    <a:lstStyle/>
+                    <a:p>
+                      <a:pPr algn="r" indent="0" marL="0">
+                        <a:buNone/>
+                      </a:pPr>
+                      <a:r>
+                        <a:rPr lang="en-US" sz="950" b="1" dirty="0">
+                          <a:solidFill>
+                            <a:srgbClr val="B3261E"/>
+                          </a:solidFill>
+                          <a:latin typeface="Calibri" pitchFamily="34" charset="0"/>
+                          <a:ea typeface="Calibri" pitchFamily="34" charset="-122"/>
+                          <a:cs typeface="Calibri" pitchFamily="34" charset="-120"/>
+                        </a:rPr>
+                        <a:t>1 205,9</a:t>
+                      </a:r>
+                      <a:endParaRPr lang="en-US" sz="950" dirty="0">
+                        <a:latin typeface="Calibri" charset="0"/>
+                        <a:ea typeface="Calibri" charset="0"/>
+                        <a:cs typeface="Calibri" charset="0"/>
+                      </a:endParaRPr>
+                    </a:p>
+                  </a:txBody>
+                  <a:tcPr marL="64008" marR="64008" marT="0" marB="0" anchor="ctr">
+                    <a:lnL w="6350" cap="flat" cmpd="sng" algn="ctr">
+                      <a:solidFill>
+                        <a:srgbClr val="D5DBE3"/>
+                      </a:solidFill>
+                      <a:prstDash val="solid"/>
+                      <a:round/>
+                      <a:headEnd type="none" w="med" len="med"/>
+                      <a:tailEnd type="none" w="med" len="med"/>
+                    </a:lnL>
+                    <a:lnR w="6350" cap="flat" cmpd="sng" algn="ctr">
+                      <a:solidFill>
+                        <a:srgbClr val="D5DBE3"/>
+                      </a:solidFill>
+                      <a:prstDash val="solid"/>
+                      <a:round/>
+                      <a:headEnd type="none" w="med" len="med"/>
+                      <a:tailEnd type="none" w="med" len="med"/>
+                    </a:lnR>
+                    <a:lnT w="6350" cap="flat" cmpd="sng" algn="ctr">
+                      <a:solidFill>
+                        <a:srgbClr val="D5DBE3"/>
+                      </a:solidFill>
+                      <a:prstDash val="solid"/>
+                      <a:round/>
+                      <a:headEnd type="none" w="med" len="med"/>
+                      <a:tailEnd type="none" w="med" len="med"/>
+                    </a:lnT>
+                    <a:lnB w="6350" cap="flat" cmpd="sng" algn="ctr">
+                      <a:solidFill>
+                        <a:srgbClr val="D5DBE3"/>
+                      </a:solidFill>
+                      <a:prstDash val="solid"/>
+                      <a:round/>
+                      <a:headEnd type="none" w="med" len="med"/>
+                      <a:tailEnd type="none" w="med" len="med"/>
+                    </a:lnB>
+                    <a:solidFill>
+                      <a:srgbClr val="F7E7E5"/>
+                    </a:solidFill>
+                  </a:tcPr>
+                </a:tc>
+                <a:tc>
+                  <a:txBody>
+                    <a:bodyPr/>
+                    <a:lstStyle/>
+                    <a:p>
+                      <a:pPr algn="l" indent="0" marL="0">
+                        <a:buNone/>
+                      </a:pPr>
+                      <a:r>
+                        <a:rPr lang="en-US" sz="950" dirty="0">
+                          <a:solidFill>
+                            <a:srgbClr val="1F2933"/>
+                          </a:solidFill>
+                          <a:latin typeface="Calibri" pitchFamily="34" charset="0"/>
+                          <a:ea typeface="Calibri" pitchFamily="34" charset="-122"/>
+                          <a:cs typeface="Calibri" pitchFamily="34" charset="-120"/>
+                        </a:rPr>
+                        <a:t>Compte à arbitrer (C) ou prêts</a:t>
+                      </a:r>
+                      <a:endParaRPr lang="en-US" sz="950" dirty="0">
+                        <a:latin typeface="Calibri" charset="0"/>
+                        <a:ea typeface="Calibri" charset="0"/>
+                        <a:cs typeface="Calibri" charset="0"/>
+                      </a:endParaRPr>
+                    </a:p>
+                  </a:txBody>
+                  <a:tcPr marL="64008" marR="64008" marT="0" marB="0" anchor="ctr">
+                    <a:lnL w="6350" cap="flat" cmpd="sng" algn="ctr">
+                      <a:solidFill>
+                        <a:srgbClr val="D5DBE3"/>
+                      </a:solidFill>
+                      <a:prstDash val="solid"/>
+                      <a:round/>
+                      <a:headEnd type="none" w="med" len="med"/>
+                      <a:tailEnd type="none" w="med" len="med"/>
+                    </a:lnL>
+                    <a:lnR w="6350" cap="flat" cmpd="sng" algn="ctr">
+                      <a:solidFill>
+                        <a:srgbClr val="D5DBE3"/>
+                      </a:solidFill>
+                      <a:prstDash val="solid"/>
+                      <a:round/>
+                      <a:headEnd type="none" w="med" len="med"/>
+                      <a:tailEnd type="none" w="med" len="med"/>
+                    </a:lnR>
+                    <a:lnT w="6350" cap="flat" cmpd="sng" algn="ctr">
+                      <a:solidFill>
+                        <a:srgbClr val="D5DBE3"/>
+                      </a:solidFill>
+                      <a:prstDash val="solid"/>
+                      <a:round/>
+                      <a:headEnd type="none" w="med" len="med"/>
+                      <a:tailEnd type="none" w="med" len="med"/>
+                    </a:lnT>
+                    <a:lnB w="6350" cap="flat" cmpd="sng" algn="ctr">
+                      <a:solidFill>
+                        <a:srgbClr val="D5DBE3"/>
+                      </a:solidFill>
+                      <a:prstDash val="solid"/>
+                      <a:round/>
+                      <a:headEnd type="none" w="med" len="med"/>
+                      <a:tailEnd type="none" w="med" len="med"/>
+                    </a:lnB>
+                  </a:tcPr>
+                </a:tc>
+                <a:tc>
+                  <a:txBody>
+                    <a:bodyPr/>
+                    <a:lstStyle/>
+                    <a:p>
+                      <a:pPr algn="ctr" indent="0" marL="0">
+                        <a:buNone/>
+                      </a:pPr>
+                      <a:r>
+                        <a:rPr lang="en-US" sz="950" dirty="0">
+                          <a:solidFill>
+                            <a:srgbClr val="1F2933"/>
+                          </a:solidFill>
+                          <a:latin typeface="Calibri" pitchFamily="34" charset="0"/>
+                          <a:ea typeface="Calibri" pitchFamily="34" charset="-122"/>
+                          <a:cs typeface="Calibri" pitchFamily="34" charset="-120"/>
+                        </a:rPr>
+                        <a:t>S1</a:t>
+                      </a:r>
+                      <a:endParaRPr lang="en-US" sz="950" dirty="0">
+                        <a:latin typeface="Calibri" charset="0"/>
+                        <a:ea typeface="Calibri" charset="0"/>
+                        <a:cs typeface="Calibri" charset="0"/>
+                      </a:endParaRPr>
+                    </a:p>
+                  </a:txBody>
+                  <a:tcPr marL="64008" marR="64008" marT="0" marB="0" anchor="ctr">
+                    <a:lnL w="6350" cap="flat" cmpd="sng" algn="ctr">
+                      <a:solidFill>
+                        <a:srgbClr val="D5DBE3"/>
+                      </a:solidFill>
+                      <a:prstDash val="solid"/>
+                      <a:round/>
+                      <a:headEnd type="none" w="med" len="med"/>
+                      <a:tailEnd type="none" w="med" len="med"/>
+                    </a:lnL>
+                    <a:lnR w="6350" cap="flat" cmpd="sng" algn="ctr">
+                      <a:solidFill>
+                        <a:srgbClr val="D5DBE3"/>
+                      </a:solidFill>
+                      <a:prstDash val="solid"/>
+                      <a:round/>
+                      <a:headEnd type="none" w="med" len="med"/>
+                      <a:tailEnd type="none" w="med" len="med"/>
+                    </a:lnR>
+                    <a:lnT w="6350" cap="flat" cmpd="sng" algn="ctr">
+                      <a:solidFill>
+                        <a:srgbClr val="D5DBE3"/>
+                      </a:solidFill>
+                      <a:prstDash val="solid"/>
+                      <a:round/>
+                      <a:headEnd type="none" w="med" len="med"/>
+                      <a:tailEnd type="none" w="med" len="med"/>
+                    </a:lnT>
+                    <a:lnB w="6350" cap="flat" cmpd="sng" algn="ctr">
+                      <a:solidFill>
+                        <a:srgbClr val="D5DBE3"/>
+                      </a:solidFill>
+                      <a:prstDash val="solid"/>
+                      <a:round/>
+                      <a:headEnd type="none" w="med" len="med"/>
+                      <a:tailEnd type="none" w="med" len="med"/>
+                    </a:lnB>
+                  </a:tcPr>
+                </a:tc>
+              </a:tr>
+              <a:tr h="237744">
                 <a:tc>
                   <a:txBody>
                     <a:bodyPr/>
@@ -16029,7 +16435,7 @@
                           <a:ea typeface="Calibri" pitchFamily="34" charset="-122"/>
                           <a:cs typeface="Calibri" pitchFamily="34" charset="-120"/>
                         </a:rPr>
-                        <a:t>1 937,3</a:t>
+                        <a:t>2 601,5</a:t>
                       </a:r>
                       <a:endParaRPr lang="en-US" sz="950" dirty="0">
                         <a:latin typeface="Calibri" charset="0"/>
@@ -16207,8 +16613,434 @@
         </p:nvSpPr>
         <p:spPr>
           <a:xfrm>
-            <a:off x="457200" y="3977640"/>
-            <a:ext cx="5760720" cy="2286000"/>
+            <a:off x="6446520" y="1325880"/>
+            <a:ext cx="5285232" cy="1508760"/>
+          </a:xfrm>
+          <a:prstGeom prst="rect">
+            <a:avLst/>
+          </a:prstGeom>
+          <a:solidFill>
+            <a:srgbClr val="E6F0EA"/>
+          </a:solidFill>
+          <a:ln w="12700">
+            <a:solidFill>
+              <a:srgbClr val="E6F0EA"/>
+            </a:solidFill>
+            <a:prstDash val="solid"/>
+          </a:ln>
+        </p:spPr>
+      </p:sp>
+      <p:sp>
+        <p:nvSpPr>
+          <p:cNvPr id="6" name="Text 3"/>
+          <p:cNvSpPr txBox="1"/>
+          <p:nvPr/>
+        </p:nvSpPr>
+        <p:spPr>
+          <a:xfrm>
+            <a:off x="6629400" y="1417320"/>
+            <a:ext cx="3566160" cy="292608"/>
+          </a:xfrm>
+          <a:prstGeom prst="rect">
+            <a:avLst/>
+          </a:prstGeom>
+          <a:noFill/>
+          <a:ln/>
+        </p:spPr>
+        <p:txBody>
+          <a:bodyPr wrap="square" lIns="0" tIns="0" rIns="0" bIns="0" rtlCol="0" anchor="ctr"/>
+          <a:lstStyle/>
+          <a:p>
+            <a:pPr indent="0" marL="0">
+              <a:buNone/>
+            </a:pPr>
+            <a:r>
+              <a:rPr lang="en-US" sz="1200" b="1" dirty="0">
+                <a:solidFill>
+                  <a:srgbClr val="5E9B7E"/>
+                </a:solidFill>
+                <a:latin typeface="Calibri" pitchFamily="34" charset="0"/>
+                <a:ea typeface="Calibri" pitchFamily="34" charset="-122"/>
+                <a:cs typeface="Calibri" pitchFamily="34" charset="-120"/>
+              </a:rPr>
+              <a:t>A – Crédit spot bancaire, par société</a:t>
+            </a:r>
+            <a:endParaRPr lang="en-US" sz="1200" dirty="0"/>
+          </a:p>
+        </p:txBody>
+      </p:sp>
+      <p:sp>
+        <p:nvSpPr>
+          <p:cNvPr id="7" name="Text 4"/>
+          <p:cNvSpPr txBox="1"/>
+          <p:nvPr/>
+        </p:nvSpPr>
+        <p:spPr>
+          <a:xfrm>
+            <a:off x="10058400" y="1399032"/>
+            <a:ext cx="1508760" cy="329184"/>
+          </a:xfrm>
+          <a:prstGeom prst="rect">
+            <a:avLst/>
+          </a:prstGeom>
+          <a:noFill/>
+          <a:ln/>
+        </p:spPr>
+        <p:txBody>
+          <a:bodyPr wrap="square" lIns="0" tIns="0" rIns="0" bIns="0" rtlCol="0" anchor="ctr"/>
+          <a:lstStyle/>
+          <a:p>
+            <a:pPr algn="r" indent="0" marL="0">
+              <a:buNone/>
+            </a:pPr>
+            <a:r>
+              <a:rPr lang="en-US" sz="1400" b="1" dirty="0">
+                <a:solidFill>
+                  <a:srgbClr val="5E9B7E"/>
+                </a:solidFill>
+                <a:latin typeface="Calibri" pitchFamily="34" charset="0"/>
+                <a:ea typeface="Calibri" pitchFamily="34" charset="-122"/>
+                <a:cs typeface="Calibri" pitchFamily="34" charset="-120"/>
+              </a:rPr>
+              <a:t>794,2 M</a:t>
+            </a:r>
+            <a:endParaRPr lang="en-US" sz="1400" dirty="0"/>
+          </a:p>
+        </p:txBody>
+      </p:sp>
+      <p:sp>
+        <p:nvSpPr>
+          <p:cNvPr id="8" name="Text 5"/>
+          <p:cNvSpPr txBox="1"/>
+          <p:nvPr/>
+        </p:nvSpPr>
+        <p:spPr>
+          <a:xfrm>
+            <a:off x="6629400" y="1764792"/>
+            <a:ext cx="4937760" cy="978408"/>
+          </a:xfrm>
+          <a:prstGeom prst="rect">
+            <a:avLst/>
+          </a:prstGeom>
+          <a:noFill/>
+          <a:ln/>
+        </p:spPr>
+        <p:txBody>
+          <a:bodyPr wrap="square" lIns="0" tIns="0" rIns="0" bIns="0" rtlCol="0" anchor="t"/>
+          <a:lstStyle/>
+          <a:p>
+            <a:pPr indent="0" marL="0">
+              <a:buNone/>
+            </a:pPr>
+            <a:r>
+              <a:rPr lang="en-US" sz="1100" dirty="0">
+                <a:solidFill>
+                  <a:srgbClr val="1F2933"/>
+                </a:solidFill>
+                <a:latin typeface="Calibri" pitchFamily="34" charset="0"/>
+                <a:ea typeface="Calibri" pitchFamily="34" charset="-122"/>
+                <a:cs typeface="Calibri" pitchFamily="34" charset="-120"/>
+              </a:rPr>
+              <a:t>Un dossier par société en déficit (8), tiré par tranche : 690,0 M pour S1, le solde à l'échéance. Remboursement à la mise en place des financements.</a:t>
+            </a:r>
+            <a:endParaRPr lang="en-US" sz="1100" dirty="0"/>
+          </a:p>
+        </p:txBody>
+      </p:sp>
+      <p:sp>
+        <p:nvSpPr>
+          <p:cNvPr id="9" name="Shape 6"/>
+          <p:cNvSpPr/>
+          <p:nvPr/>
+        </p:nvSpPr>
+        <p:spPr>
+          <a:xfrm>
+            <a:off x="6446520" y="2971800"/>
+            <a:ext cx="5285232" cy="1463040"/>
+          </a:xfrm>
+          <a:prstGeom prst="rect">
+            <a:avLst/>
+          </a:prstGeom>
+          <a:solidFill>
+            <a:srgbClr val="EEF2F6"/>
+          </a:solidFill>
+          <a:ln w="12700">
+            <a:solidFill>
+              <a:srgbClr val="EEF2F6"/>
+            </a:solidFill>
+            <a:prstDash val="solid"/>
+          </a:ln>
+        </p:spPr>
+      </p:sp>
+      <p:sp>
+        <p:nvSpPr>
+          <p:cNvPr id="10" name="Text 7"/>
+          <p:cNvSpPr txBox="1"/>
+          <p:nvPr/>
+        </p:nvSpPr>
+        <p:spPr>
+          <a:xfrm>
+            <a:off x="6629400" y="3063240"/>
+            <a:ext cx="3566160" cy="292608"/>
+          </a:xfrm>
+          <a:prstGeom prst="rect">
+            <a:avLst/>
+          </a:prstGeom>
+          <a:noFill/>
+          <a:ln/>
+        </p:spPr>
+        <p:txBody>
+          <a:bodyPr wrap="square" lIns="0" tIns="0" rIns="0" bIns="0" rtlCol="0" anchor="ctr"/>
+          <a:lstStyle/>
+          <a:p>
+            <a:pPr indent="0" marL="0">
+              <a:buNone/>
+            </a:pPr>
+            <a:r>
+              <a:rPr lang="en-US" sz="1200" b="1" dirty="0">
+                <a:solidFill>
+                  <a:srgbClr val="002C50"/>
+                </a:solidFill>
+                <a:latin typeface="Calibri" pitchFamily="34" charset="0"/>
+                <a:ea typeface="Calibri" pitchFamily="34" charset="-122"/>
+                <a:cs typeface="Calibri" pitchFamily="34" charset="-120"/>
+              </a:rPr>
+              <a:t>B – Avances intragroupe</a:t>
+            </a:r>
+            <a:endParaRPr lang="en-US" sz="1200" dirty="0"/>
+          </a:p>
+        </p:txBody>
+      </p:sp>
+      <p:sp>
+        <p:nvSpPr>
+          <p:cNvPr id="11" name="Text 8"/>
+          <p:cNvSpPr txBox="1"/>
+          <p:nvPr/>
+        </p:nvSpPr>
+        <p:spPr>
+          <a:xfrm>
+            <a:off x="10058400" y="3044952"/>
+            <a:ext cx="1508760" cy="329184"/>
+          </a:xfrm>
+          <a:prstGeom prst="rect">
+            <a:avLst/>
+          </a:prstGeom>
+          <a:noFill/>
+          <a:ln/>
+        </p:spPr>
+        <p:txBody>
+          <a:bodyPr wrap="square" lIns="0" tIns="0" rIns="0" bIns="0" rtlCol="0" anchor="ctr"/>
+          <a:lstStyle/>
+          <a:p>
+            <a:pPr algn="r" indent="0" marL="0">
+              <a:buNone/>
+            </a:pPr>
+            <a:r>
+              <a:rPr lang="en-US" sz="1400" b="1" dirty="0">
+                <a:solidFill>
+                  <a:srgbClr val="002C50"/>
+                </a:solidFill>
+                <a:latin typeface="Calibri" pitchFamily="34" charset="0"/>
+                <a:ea typeface="Calibri" pitchFamily="34" charset="-122"/>
+                <a:cs typeface="Calibri" pitchFamily="34" charset="-120"/>
+              </a:rPr>
+              <a:t>246,0 M</a:t>
+            </a:r>
+            <a:endParaRPr lang="en-US" sz="1400" dirty="0"/>
+          </a:p>
+        </p:txBody>
+      </p:sp>
+      <p:sp>
+        <p:nvSpPr>
+          <p:cNvPr id="12" name="Text 9"/>
+          <p:cNvSpPr txBox="1"/>
+          <p:nvPr/>
+        </p:nvSpPr>
+        <p:spPr>
+          <a:xfrm>
+            <a:off x="6629400" y="3410712"/>
+            <a:ext cx="4937760" cy="932688"/>
+          </a:xfrm>
+          <a:prstGeom prst="rect">
+            <a:avLst/>
+          </a:prstGeom>
+          <a:noFill/>
+          <a:ln/>
+        </p:spPr>
+        <p:txBody>
+          <a:bodyPr wrap="square" lIns="0" tIns="0" rIns="0" bIns="0" rtlCol="0" anchor="t"/>
+          <a:lstStyle/>
+          <a:p>
+            <a:pPr indent="0" marL="0">
+              <a:buNone/>
+            </a:pPr>
+            <a:r>
+              <a:rPr lang="en-US" sz="1100" dirty="0">
+                <a:solidFill>
+                  <a:srgbClr val="1F2933"/>
+                </a:solidFill>
+                <a:latin typeface="Calibri" pitchFamily="34" charset="0"/>
+                <a:ea typeface="Calibri" pitchFamily="34" charset="-122"/>
+                <a:cs typeface="Calibri" pitchFamily="34" charset="-120"/>
+              </a:rPr>
+              <a:t>Excédents en fin S5 : FIRST 143,3 M, PICI 100,0 M, INFI SOFT 2,8 M. Ils couvriraient 31 % des déficits des sociétés, avec conventions de compte courant.</a:t>
+            </a:r>
+            <a:endParaRPr lang="en-US" sz="1100" dirty="0"/>
+          </a:p>
+        </p:txBody>
+      </p:sp>
+      <p:sp>
+        <p:nvSpPr>
+          <p:cNvPr id="13" name="Shape 10"/>
+          <p:cNvSpPr/>
+          <p:nvPr/>
+        </p:nvSpPr>
+        <p:spPr>
+          <a:xfrm>
+            <a:off x="6446520" y="4572000"/>
+            <a:ext cx="5285232" cy="1691640"/>
+          </a:xfrm>
+          <a:prstGeom prst="rect">
+            <a:avLst/>
+          </a:prstGeom>
+          <a:solidFill>
+            <a:srgbClr val="EEF2F6"/>
+          </a:solidFill>
+          <a:ln w="12700">
+            <a:solidFill>
+              <a:srgbClr val="EEF2F6"/>
+            </a:solidFill>
+            <a:prstDash val="solid"/>
+          </a:ln>
+        </p:spPr>
+      </p:sp>
+      <p:sp>
+        <p:nvSpPr>
+          <p:cNvPr id="14" name="Text 11"/>
+          <p:cNvSpPr txBox="1"/>
+          <p:nvPr/>
+        </p:nvSpPr>
+        <p:spPr>
+          <a:xfrm>
+            <a:off x="6629400" y="4663440"/>
+            <a:ext cx="3566160" cy="292608"/>
+          </a:xfrm>
+          <a:prstGeom prst="rect">
+            <a:avLst/>
+          </a:prstGeom>
+          <a:noFill/>
+          <a:ln/>
+        </p:spPr>
+        <p:txBody>
+          <a:bodyPr wrap="square" lIns="0" tIns="0" rIns="0" bIns="0" rtlCol="0" anchor="ctr"/>
+          <a:lstStyle/>
+          <a:p>
+            <a:pPr indent="0" marL="0">
+              <a:buNone/>
+            </a:pPr>
+            <a:r>
+              <a:rPr lang="en-US" sz="1200" b="1" dirty="0">
+                <a:solidFill>
+                  <a:srgbClr val="002C50"/>
+                </a:solidFill>
+                <a:latin typeface="Calibri" pitchFamily="34" charset="0"/>
+                <a:ea typeface="Calibri" pitchFamily="34" charset="-122"/>
+                <a:cs typeface="Calibri" pitchFamily="34" charset="-120"/>
+              </a:rPr>
+              <a:t>C – Projets</a:t>
+            </a:r>
+            <a:endParaRPr lang="en-US" sz="1200" dirty="0"/>
+          </a:p>
+        </p:txBody>
+      </p:sp>
+      <p:sp>
+        <p:nvSpPr>
+          <p:cNvPr id="15" name="Text 12"/>
+          <p:cNvSpPr txBox="1"/>
+          <p:nvPr/>
+        </p:nvSpPr>
+        <p:spPr>
+          <a:xfrm>
+            <a:off x="10058400" y="4645152"/>
+            <a:ext cx="1508760" cy="329184"/>
+          </a:xfrm>
+          <a:prstGeom prst="rect">
+            <a:avLst/>
+          </a:prstGeom>
+          <a:noFill/>
+          <a:ln/>
+        </p:spPr>
+        <p:txBody>
+          <a:bodyPr wrap="square" lIns="0" tIns="0" rIns="0" bIns="0" rtlCol="0" anchor="ctr"/>
+          <a:lstStyle/>
+          <a:p>
+            <a:pPr algn="r" indent="0" marL="0">
+              <a:buNone/>
+            </a:pPr>
+            <a:r>
+              <a:rPr lang="en-US" sz="1400" b="1" dirty="0">
+                <a:solidFill>
+                  <a:srgbClr val="002C50"/>
+                </a:solidFill>
+                <a:latin typeface="Calibri" pitchFamily="34" charset="0"/>
+                <a:ea typeface="Calibri" pitchFamily="34" charset="-122"/>
+                <a:cs typeface="Calibri" pitchFamily="34" charset="-120"/>
+              </a:rPr>
+              <a:t>1 807,3 M</a:t>
+            </a:r>
+            <a:endParaRPr lang="en-US" sz="1400" dirty="0"/>
+          </a:p>
+        </p:txBody>
+      </p:sp>
+      <p:sp>
+        <p:nvSpPr>
+          <p:cNvPr id="16" name="Text 13"/>
+          <p:cNvSpPr txBox="1"/>
+          <p:nvPr/>
+        </p:nvSpPr>
+        <p:spPr>
+          <a:xfrm>
+            <a:off x="6629400" y="5010912"/>
+            <a:ext cx="4937760" cy="1161288"/>
+          </a:xfrm>
+          <a:prstGeom prst="rect">
+            <a:avLst/>
+          </a:prstGeom>
+          <a:noFill/>
+          <a:ln/>
+        </p:spPr>
+        <p:txBody>
+          <a:bodyPr wrap="square" lIns="0" tIns="0" rIns="0" bIns="0" rtlCol="0" anchor="t"/>
+          <a:lstStyle/>
+          <a:p>
+            <a:pPr indent="0" marL="0">
+              <a:buNone/>
+            </a:pPr>
+            <a:r>
+              <a:rPr lang="en-US" sz="1100" dirty="0">
+                <a:solidFill>
+                  <a:srgbClr val="1F2933"/>
+                </a:solidFill>
+                <a:latin typeface="Calibri" pitchFamily="34" charset="0"/>
+                <a:ea typeface="Calibri" pitchFamily="34" charset="-122"/>
+                <a:cs typeface="Calibri" pitchFamily="34" charset="-120"/>
+              </a:rPr>
+              <a:t>Comptes à arbitrer : BNI-RIVIERA(Courant) 1 772,0 M ; affectés aux projets, ils couvriraient 98 % du déficit. À défaut : tirage des prêts des projets ou apport des actionnaires.</a:t>
+            </a:r>
+            <a:endParaRPr lang="en-US" sz="1100" dirty="0"/>
+          </a:p>
+        </p:txBody>
+      </p:sp>
+      <p:sp>
+        <p:nvSpPr>
+          <p:cNvPr id="17" name="Shape 14"/>
+          <p:cNvSpPr/>
+          <p:nvPr/>
+        </p:nvSpPr>
+        <p:spPr>
+          <a:xfrm>
+            <a:off x="457200" y="4590288"/>
+            <a:ext cx="5760720" cy="1719072"/>
           </a:xfrm>
           <a:prstGeom prst="rect">
             <a:avLst/>
@@ -16226,14 +17058,14 @@
       </p:sp>
       <p:sp>
         <p:nvSpPr>
-          <p:cNvPr id="6" name="Text 3"/>
+          <p:cNvPr id="18" name="Text 15"/>
           <p:cNvSpPr txBox="1"/>
           <p:nvPr/>
         </p:nvSpPr>
         <p:spPr>
           <a:xfrm>
-            <a:off x="640080" y="4069080"/>
-            <a:ext cx="5394960" cy="2121408"/>
+            <a:off x="640080" y="4681728"/>
+            <a:ext cx="5394960" cy="1554480"/>
           </a:xfrm>
           <a:prstGeom prst="rect">
             <a:avLst/>
@@ -16267,13 +17099,13 @@
           <a:p>
             <a:pPr marL="152400" indent="-152400">
               <a:spcAft>
-                <a:spcPts val="400"/>
+                <a:spcPts val="300"/>
               </a:spcAft>
               <a:buSzPct val="100000"/>
               <a:buChar char="•"/>
             </a:pPr>
             <a:r>
-              <a:rPr lang="en-US" sz="1050" dirty="0">
+              <a:rPr lang="en-US" sz="900" dirty="0">
                 <a:solidFill>
                   <a:srgbClr val="FFFFFF"/>
                 </a:solidFill>
@@ -16281,20 +17113,20 @@
                 <a:ea typeface="Calibri" pitchFamily="34" charset="-122"/>
                 <a:cs typeface="Calibri" pitchFamily="34" charset="-120"/>
               </a:rPr>
-              <a:t>Trancher l'affectation de BNI-RIVIERA courant (1 772,0 M, « placement ou fonctionnement ») : elle conditionne B et C.</a:t>
+              <a:t>Choisir la solution des sociétés en déficit (794,2 M) : crédit spot, avances intragroupe ou combinaison.</a:t>
             </a:r>
             <a:endParaRPr lang="en-US" sz="1300" dirty="0"/>
           </a:p>
           <a:p>
             <a:pPr marL="152400" indent="-152400">
               <a:spcAft>
-                <a:spcPts val="400"/>
+                <a:spcPts val="300"/>
               </a:spcAft>
               <a:buSzPct val="100000"/>
               <a:buChar char="•"/>
             </a:pPr>
             <a:r>
-              <a:rPr lang="en-US" sz="1050" dirty="0">
+              <a:rPr lang="en-US" sz="900" dirty="0">
                 <a:solidFill>
                   <a:srgbClr val="FFFFFF"/>
                 </a:solidFill>
@@ -16302,20 +17134,20 @@
                 <a:ea typeface="Calibri" pitchFamily="34" charset="-122"/>
                 <a:cs typeface="Calibri" pitchFamily="34" charset="-120"/>
               </a:rPr>
-              <a:t>Valider les avances PICI (130,0 M) via SG-PICI, avec conventions de compte courant et refacturation à RHD CI.</a:t>
+              <a:t>Trancher l'affectation de BNI-RIVIERA(Courant) (1 772,0 M) : elle conditionne l'option C.</a:t>
             </a:r>
             <a:endParaRPr lang="en-US" sz="1300" dirty="0"/>
           </a:p>
           <a:p>
             <a:pPr marL="152400" indent="-152400">
               <a:spcAft>
-                <a:spcPts val="400"/>
+                <a:spcPts val="300"/>
               </a:spcAft>
               <a:buSzPct val="100000"/>
               <a:buChar char="•"/>
             </a:pPr>
             <a:r>
-              <a:rPr lang="en-US" sz="1050" dirty="0">
+              <a:rPr lang="en-US" sz="900" dirty="0">
                 <a:solidFill>
                   <a:srgbClr val="FFFFFF"/>
                 </a:solidFill>
@@ -16323,20 +17155,20 @@
                 <a:ea typeface="Calibri" pitchFamily="34" charset="-122"/>
                 <a:cs typeface="Calibri" pitchFamily="34" charset="-120"/>
               </a:rPr>
-              <a:t>Payer ou reporter les frais de due diligence DWF/IFC de Village Notre Père (823,6 M).</a:t>
+              <a:t>Confirmer les encaissements prévus (3,6 M), dont CLIENT.</a:t>
             </a:r>
             <a:endParaRPr lang="en-US" sz="1300" dirty="0"/>
           </a:p>
           <a:p>
             <a:pPr marL="152400" indent="-152400">
               <a:spcAft>
-                <a:spcPts val="400"/>
+                <a:spcPts val="300"/>
               </a:spcAft>
               <a:buSzPct val="100000"/>
               <a:buChar char="•"/>
             </a:pPr>
             <a:r>
-              <a:rPr lang="en-US" sz="1050" dirty="0">
+              <a:rPr lang="en-US" sz="900" dirty="0">
                 <a:solidFill>
                   <a:srgbClr val="FFFFFF"/>
                 </a:solidFill>
@@ -16344,20 +17176,20 @@
                 <a:ea typeface="Calibri" pitchFamily="34" charset="-122"/>
                 <a:cs typeface="Calibri" pitchFamily="34" charset="-120"/>
               </a:rPr>
-              <a:t>Confirmer l'encaissement PICI de 656,0 M (remboursement d'avance FINAFRICA), non compté ici.</a:t>
+              <a:t>Affecter les loyers de octobre 2026 (129,6 M) au service de la dette.</a:t>
             </a:r>
             <a:endParaRPr lang="en-US" sz="1300" dirty="0"/>
           </a:p>
           <a:p>
             <a:pPr marL="152400" indent="-152400">
               <a:spcAft>
-                <a:spcPts val="400"/>
+                <a:spcPts val="300"/>
               </a:spcAft>
               <a:buSzPct val="100000"/>
               <a:buChar char="•"/>
             </a:pPr>
             <a:r>
-              <a:rPr lang="en-US" sz="1050" dirty="0">
+              <a:rPr lang="en-US" sz="900" dirty="0">
                 <a:solidFill>
                   <a:srgbClr val="FFFFFF"/>
                 </a:solidFill>
@@ -16365,435 +17197,9 @@
                 <a:ea typeface="Calibri" pitchFamily="34" charset="-122"/>
                 <a:cs typeface="Calibri" pitchFamily="34" charset="-120"/>
               </a:rPr>
-              <a:t>Confirmer que les paiements du 21/09 (enregistrements 811 M RIVIERA, 861 M TERASSON) sont réglés.</a:t>
+              <a:t>Revoir les 25 lignes non retenues du reporting (intragroupe, droits d'enregistrement, loyers encaissés).</a:t>
             </a:r>
             <a:endParaRPr lang="en-US" sz="1300" dirty="0"/>
-          </a:p>
-        </p:txBody>
-      </p:sp>
-      <p:sp>
-        <p:nvSpPr>
-          <p:cNvPr id="7" name="Shape 4"/>
-          <p:cNvSpPr/>
-          <p:nvPr/>
-        </p:nvSpPr>
-        <p:spPr>
-          <a:xfrm>
-            <a:off x="6446520" y="1325880"/>
-            <a:ext cx="5285232" cy="1508760"/>
-          </a:xfrm>
-          <a:prstGeom prst="rect">
-            <a:avLst/>
-          </a:prstGeom>
-          <a:solidFill>
-            <a:srgbClr val="E6F0EA"/>
-          </a:solidFill>
-          <a:ln w="12700">
-            <a:solidFill>
-              <a:srgbClr val="E6F0EA"/>
-            </a:solidFill>
-            <a:prstDash val="solid"/>
-          </a:ln>
-        </p:spPr>
-      </p:sp>
-      <p:sp>
-        <p:nvSpPr>
-          <p:cNvPr id="8" name="Text 5"/>
-          <p:cNvSpPr txBox="1"/>
-          <p:nvPr/>
-        </p:nvSpPr>
-        <p:spPr>
-          <a:xfrm>
-            <a:off x="6629400" y="1417320"/>
-            <a:ext cx="3566160" cy="292608"/>
-          </a:xfrm>
-          <a:prstGeom prst="rect">
-            <a:avLst/>
-          </a:prstGeom>
-          <a:noFill/>
-          <a:ln/>
-        </p:spPr>
-        <p:txBody>
-          <a:bodyPr wrap="square" lIns="0" tIns="0" rIns="0" bIns="0" rtlCol="0" anchor="ctr"/>
-          <a:lstStyle/>
-          <a:p>
-            <a:pPr indent="0" marL="0">
-              <a:buNone/>
-            </a:pPr>
-            <a:r>
-              <a:rPr lang="en-US" sz="1200" b="1" dirty="0">
-                <a:solidFill>
-                  <a:srgbClr val="5E9B7E"/>
-                </a:solidFill>
-                <a:latin typeface="Calibri" pitchFamily="34" charset="0"/>
-                <a:ea typeface="Calibri" pitchFamily="34" charset="-122"/>
-                <a:cs typeface="Calibri" pitchFamily="34" charset="-120"/>
-              </a:rPr>
-              <a:t>A – Avances PICI aux sociétés</a:t>
-            </a:r>
-            <a:endParaRPr lang="en-US" sz="1200" dirty="0"/>
-          </a:p>
-        </p:txBody>
-      </p:sp>
-      <p:sp>
-        <p:nvSpPr>
-          <p:cNvPr id="9" name="Text 6"/>
-          <p:cNvSpPr txBox="1"/>
-          <p:nvPr/>
-        </p:nvSpPr>
-        <p:spPr>
-          <a:xfrm>
-            <a:off x="10058400" y="1399032"/>
-            <a:ext cx="1508760" cy="329184"/>
-          </a:xfrm>
-          <a:prstGeom prst="rect">
-            <a:avLst/>
-          </a:prstGeom>
-          <a:noFill/>
-          <a:ln/>
-        </p:spPr>
-        <p:txBody>
-          <a:bodyPr wrap="square" lIns="0" tIns="0" rIns="0" bIns="0" rtlCol="0" anchor="ctr"/>
-          <a:lstStyle/>
-          <a:p>
-            <a:pPr algn="r" indent="0" marL="0">
-              <a:buNone/>
-            </a:pPr>
-            <a:r>
-              <a:rPr lang="en-US" sz="1400" b="1" dirty="0">
-                <a:solidFill>
-                  <a:srgbClr val="5E9B7E"/>
-                </a:solidFill>
-                <a:latin typeface="Calibri" pitchFamily="34" charset="0"/>
-                <a:ea typeface="Calibri" pitchFamily="34" charset="-122"/>
-                <a:cs typeface="Calibri" pitchFamily="34" charset="-120"/>
-              </a:rPr>
-              <a:t>130,0 M</a:t>
-            </a:r>
-            <a:endParaRPr lang="en-US" sz="1400" dirty="0"/>
-          </a:p>
-        </p:txBody>
-      </p:sp>
-      <p:sp>
-        <p:nvSpPr>
-          <p:cNvPr id="10" name="Text 7"/>
-          <p:cNvSpPr txBox="1"/>
-          <p:nvPr/>
-        </p:nvSpPr>
-        <p:spPr>
-          <a:xfrm>
-            <a:off x="6629400" y="1764792"/>
-            <a:ext cx="4937760" cy="978408"/>
-          </a:xfrm>
-          <a:prstGeom prst="rect">
-            <a:avLst/>
-          </a:prstGeom>
-          <a:noFill/>
-          <a:ln/>
-        </p:spPr>
-        <p:txBody>
-          <a:bodyPr wrap="square" lIns="0" tIns="0" rIns="0" bIns="0" rtlCol="0" anchor="t"/>
-          <a:lstStyle/>
-          <a:p>
-            <a:pPr indent="0" marL="0">
-              <a:buNone/>
-            </a:pPr>
-            <a:r>
-              <a:rPr lang="en-US" sz="1100" dirty="0">
-                <a:solidFill>
-                  <a:srgbClr val="1F2933"/>
-                </a:solidFill>
-                <a:latin typeface="Calibri" pitchFamily="34" charset="0"/>
-                <a:ea typeface="Calibri" pitchFamily="34" charset="-122"/>
-                <a:cs typeface="Calibri" pitchFamily="34" charset="-120"/>
-              </a:rPr>
-              <a:t>ECOBANK-PICI alimente SG-PICI, compte de netting des sociétés CIV, qui verse à SCO AO, FINAFRICA, AB CENTER et IMMONEUF ; RHD CI, sans compte, est payée pour son compte. PICI conserve 200,5 M.</a:t>
-            </a:r>
-            <a:endParaRPr lang="en-US" sz="1100" dirty="0"/>
-          </a:p>
-        </p:txBody>
-      </p:sp>
-      <p:sp>
-        <p:nvSpPr>
-          <p:cNvPr id="11" name="Shape 8"/>
-          <p:cNvSpPr/>
-          <p:nvPr/>
-        </p:nvSpPr>
-        <p:spPr>
-          <a:xfrm>
-            <a:off x="6446520" y="2971800"/>
-            <a:ext cx="5285232" cy="1463040"/>
-          </a:xfrm>
-          <a:prstGeom prst="rect">
-            <a:avLst/>
-          </a:prstGeom>
-          <a:solidFill>
-            <a:srgbClr val="E6F0EA"/>
-          </a:solidFill>
-          <a:ln w="12700">
-            <a:solidFill>
-              <a:srgbClr val="E6F0EA"/>
-            </a:solidFill>
-            <a:prstDash val="solid"/>
-          </a:ln>
-        </p:spPr>
-      </p:sp>
-      <p:sp>
-        <p:nvSpPr>
-          <p:cNvPr id="12" name="Text 9"/>
-          <p:cNvSpPr txBox="1"/>
-          <p:nvPr/>
-        </p:nvSpPr>
-        <p:spPr>
-          <a:xfrm>
-            <a:off x="6629400" y="3063240"/>
-            <a:ext cx="3566160" cy="292608"/>
-          </a:xfrm>
-          <a:prstGeom prst="rect">
-            <a:avLst/>
-          </a:prstGeom>
-          <a:noFill/>
-          <a:ln/>
-        </p:spPr>
-        <p:txBody>
-          <a:bodyPr wrap="square" lIns="0" tIns="0" rIns="0" bIns="0" rtlCol="0" anchor="ctr"/>
-          <a:lstStyle/>
-          <a:p>
-            <a:pPr indent="0" marL="0">
-              <a:buNone/>
-            </a:pPr>
-            <a:r>
-              <a:rPr lang="en-US" sz="1200" b="1" dirty="0">
-                <a:solidFill>
-                  <a:srgbClr val="5E9B7E"/>
-                </a:solidFill>
-                <a:latin typeface="Calibri" pitchFamily="34" charset="0"/>
-                <a:ea typeface="Calibri" pitchFamily="34" charset="-122"/>
-                <a:cs typeface="Calibri" pitchFamily="34" charset="-120"/>
-              </a:rPr>
-              <a:t>B – Riviera Park, fonds projet RP</a:t>
-            </a:r>
-            <a:endParaRPr lang="en-US" sz="1200" dirty="0"/>
-          </a:p>
-        </p:txBody>
-      </p:sp>
-      <p:sp>
-        <p:nvSpPr>
-          <p:cNvPr id="13" name="Text 10"/>
-          <p:cNvSpPr txBox="1"/>
-          <p:nvPr/>
-        </p:nvSpPr>
-        <p:spPr>
-          <a:xfrm>
-            <a:off x="10058400" y="3044952"/>
-            <a:ext cx="1508760" cy="329184"/>
-          </a:xfrm>
-          <a:prstGeom prst="rect">
-            <a:avLst/>
-          </a:prstGeom>
-          <a:noFill/>
-          <a:ln/>
-        </p:spPr>
-        <p:txBody>
-          <a:bodyPr wrap="square" lIns="0" tIns="0" rIns="0" bIns="0" rtlCol="0" anchor="ctr"/>
-          <a:lstStyle/>
-          <a:p>
-            <a:pPr algn="r" indent="0" marL="0">
-              <a:buNone/>
-            </a:pPr>
-            <a:r>
-              <a:rPr lang="en-US" sz="1400" b="1" dirty="0">
-                <a:solidFill>
-                  <a:srgbClr val="5E9B7E"/>
-                </a:solidFill>
-                <a:latin typeface="Calibri" pitchFamily="34" charset="0"/>
-                <a:ea typeface="Calibri" pitchFamily="34" charset="-122"/>
-                <a:cs typeface="Calibri" pitchFamily="34" charset="-120"/>
-              </a:rPr>
-              <a:t>601,4 M</a:t>
-            </a:r>
-            <a:endParaRPr lang="en-US" sz="1400" dirty="0"/>
-          </a:p>
-        </p:txBody>
-      </p:sp>
-      <p:sp>
-        <p:nvSpPr>
-          <p:cNvPr id="14" name="Text 11"/>
-          <p:cNvSpPr txBox="1"/>
-          <p:nvPr/>
-        </p:nvSpPr>
-        <p:spPr>
-          <a:xfrm>
-            <a:off x="6629400" y="3410712"/>
-            <a:ext cx="4937760" cy="932688"/>
-          </a:xfrm>
-          <a:prstGeom prst="rect">
-            <a:avLst/>
-          </a:prstGeom>
-          <a:noFill/>
-          <a:ln/>
-        </p:spPr>
-        <p:txBody>
-          <a:bodyPr wrap="square" lIns="0" tIns="0" rIns="0" bIns="0" rtlCol="0" anchor="t"/>
-          <a:lstStyle/>
-          <a:p>
-            <a:pPr indent="0" marL="0">
-              <a:buNone/>
-            </a:pPr>
-            <a:r>
-              <a:rPr lang="en-US" sz="1100" dirty="0">
-                <a:solidFill>
-                  <a:srgbClr val="1F2933"/>
-                </a:solidFill>
-                <a:latin typeface="Calibri" pitchFamily="34" charset="0"/>
-                <a:ea typeface="Calibri" pitchFamily="34" charset="-122"/>
-                <a:cs typeface="Calibri" pitchFamily="34" charset="-120"/>
-              </a:rPr>
-              <a:t>BNI-RIVIERA courant vers BNI-PICI / Fonds projet RP avant S2. Après le fonctionnement Riviera (10,9 M), il reste 1 159,7 M sur BNI-RIVIERA courant.</a:t>
-            </a:r>
-            <a:endParaRPr lang="en-US" sz="1100" dirty="0"/>
-          </a:p>
-        </p:txBody>
-      </p:sp>
-      <p:sp>
-        <p:nvSpPr>
-          <p:cNvPr id="15" name="Shape 12"/>
-          <p:cNvSpPr/>
-          <p:nvPr/>
-        </p:nvSpPr>
-        <p:spPr>
-          <a:xfrm>
-            <a:off x="6446520" y="4572000"/>
-            <a:ext cx="5285232" cy="1691640"/>
-          </a:xfrm>
-          <a:prstGeom prst="rect">
-            <a:avLst/>
-          </a:prstGeom>
-          <a:solidFill>
-            <a:srgbClr val="EEF2F6"/>
-          </a:solidFill>
-          <a:ln w="12700">
-            <a:solidFill>
-              <a:srgbClr val="EEF2F6"/>
-            </a:solidFill>
-            <a:prstDash val="solid"/>
-          </a:ln>
-        </p:spPr>
-      </p:sp>
-      <p:sp>
-        <p:nvSpPr>
-          <p:cNvPr id="16" name="Text 13"/>
-          <p:cNvSpPr txBox="1"/>
-          <p:nvPr/>
-        </p:nvSpPr>
-        <p:spPr>
-          <a:xfrm>
-            <a:off x="6629400" y="4663440"/>
-            <a:ext cx="3566160" cy="292608"/>
-          </a:xfrm>
-          <a:prstGeom prst="rect">
-            <a:avLst/>
-          </a:prstGeom>
-          <a:noFill/>
-          <a:ln/>
-        </p:spPr>
-        <p:txBody>
-          <a:bodyPr wrap="square" lIns="0" tIns="0" rIns="0" bIns="0" rtlCol="0" anchor="ctr"/>
-          <a:lstStyle/>
-          <a:p>
-            <a:pPr indent="0" marL="0">
-              <a:buNone/>
-            </a:pPr>
-            <a:r>
-              <a:rPr lang="en-US" sz="1200" b="1" dirty="0">
-                <a:solidFill>
-                  <a:srgbClr val="002C50"/>
-                </a:solidFill>
-                <a:latin typeface="Calibri" pitchFamily="34" charset="0"/>
-                <a:ea typeface="Calibri" pitchFamily="34" charset="-122"/>
-                <a:cs typeface="Calibri" pitchFamily="34" charset="-120"/>
-              </a:rPr>
-              <a:t>C – Village Notre Père, fonds projet NP</a:t>
-            </a:r>
-            <a:endParaRPr lang="en-US" sz="1200" dirty="0"/>
-          </a:p>
-        </p:txBody>
-      </p:sp>
-      <p:sp>
-        <p:nvSpPr>
-          <p:cNvPr id="17" name="Text 14"/>
-          <p:cNvSpPr txBox="1"/>
-          <p:nvPr/>
-        </p:nvSpPr>
-        <p:spPr>
-          <a:xfrm>
-            <a:off x="10058400" y="4645152"/>
-            <a:ext cx="1508760" cy="329184"/>
-          </a:xfrm>
-          <a:prstGeom prst="rect">
-            <a:avLst/>
-          </a:prstGeom>
-          <a:noFill/>
-          <a:ln/>
-        </p:spPr>
-        <p:txBody>
-          <a:bodyPr wrap="square" lIns="0" tIns="0" rIns="0" bIns="0" rtlCol="0" anchor="ctr"/>
-          <a:lstStyle/>
-          <a:p>
-            <a:pPr algn="r" indent="0" marL="0">
-              <a:buNone/>
-            </a:pPr>
-            <a:r>
-              <a:rPr lang="en-US" sz="1400" b="1" dirty="0">
-                <a:solidFill>
-                  <a:srgbClr val="002C50"/>
-                </a:solidFill>
-                <a:latin typeface="Calibri" pitchFamily="34" charset="0"/>
-                <a:ea typeface="Calibri" pitchFamily="34" charset="-122"/>
-                <a:cs typeface="Calibri" pitchFamily="34" charset="-120"/>
-              </a:rPr>
-              <a:t>1 205,9 M</a:t>
-            </a:r>
-            <a:endParaRPr lang="en-US" sz="1400" dirty="0"/>
-          </a:p>
-        </p:txBody>
-      </p:sp>
-      <p:sp>
-        <p:nvSpPr>
-          <p:cNvPr id="18" name="Text 15"/>
-          <p:cNvSpPr txBox="1"/>
-          <p:nvPr/>
-        </p:nvSpPr>
-        <p:spPr>
-          <a:xfrm>
-            <a:off x="6629400" y="5010912"/>
-            <a:ext cx="4937760" cy="1161288"/>
-          </a:xfrm>
-          <a:prstGeom prst="rect">
-            <a:avLst/>
-          </a:prstGeom>
-          <a:noFill/>
-          <a:ln/>
-        </p:spPr>
-        <p:txBody>
-          <a:bodyPr wrap="square" lIns="0" tIns="0" rIns="0" bIns="0" rtlCol="0" anchor="t"/>
-          <a:lstStyle/>
-          <a:p>
-            <a:pPr indent="0" marL="0">
-              <a:buNone/>
-            </a:pPr>
-            <a:r>
-              <a:rPr lang="en-US" sz="1100" dirty="0">
-                <a:solidFill>
-                  <a:srgbClr val="1F2933"/>
-                </a:solidFill>
-                <a:latin typeface="Calibri" pitchFamily="34" charset="0"/>
-                <a:ea typeface="Calibri" pitchFamily="34" charset="-122"/>
-                <a:cs typeface="Calibri" pitchFamily="34" charset="-120"/>
-              </a:rPr>
-              <a:t>Avance RIVIERA de 1 157,4 M depuis BNI-RIVIERA courant et 48,5 M de SG-TERASSON vers BNI-TERASSON / Fonds projet NP, dont 720,2 M avant S1. Reste 2,3 M sur BNI courant. Repli : tirage IFC / Proparco ou report de la due diligence (déficit ramené à 382,3 M).</a:t>
-            </a:r>
-            <a:endParaRPr lang="en-US" sz="1100" dirty="0"/>
           </a:p>
         </p:txBody>
       </p:sp>

--- a/RCI_Besoins_Tresorerie_Comptes_Paiement_30-09-2026.pptx
+++ b/RCI_Besoins_Tresorerie_Comptes_Paiement_30-09-2026.pptx
@@ -10,9 +10,10 @@
     <p:sldId id="258" r:id="rId4"/>
     <p:sldId id="259" r:id="rId5"/>
     <p:sldId id="260" r:id="rId6"/>
+    <p:sldId id="261" r:id="rId7"/>
   </p:sldIdLst>
   <p:notesMasterIdLst>
-    <p:notesMasterId r:id="rId7"/>
+    <p:notesMasterId r:id="rId8"/>
   </p:notesMasterIdLst>
   <p:sldSz cx="12192000" cy="6858000"/>
   <p:notesSz cx="6858000" cy="12192000"/>
@@ -900,6 +901,94 @@
 </p:notes>
 </file>
 
+<file path=ppt/notesSlides/notesSlide6.xml><?xml version="1.0" encoding="utf-8"?>
+<p:notes xmlns:a="http://schemas.openxmlformats.org/drawingml/2006/main" xmlns:r="http://schemas.openxmlformats.org/officeDocument/2006/relationships" xmlns:p="http://schemas.openxmlformats.org/presentationml/2006/main">
+  <p:cSld>
+    <p:spTree>
+      <p:nvGrpSpPr>
+        <p:cNvPr id="1" name=""/>
+        <p:cNvGrpSpPr/>
+        <p:nvPr/>
+      </p:nvGrpSpPr>
+      <p:grpSpPr>
+        <a:xfrm>
+          <a:off x="0" y="0"/>
+          <a:ext cx="0" cy="0"/>
+          <a:chOff x="0" y="0"/>
+          <a:chExt cx="0" cy="0"/>
+        </a:xfrm>
+      </p:grpSpPr>
+      <p:sp>
+        <p:nvSpPr>
+          <p:cNvPr id="2" name="Slide Image Placeholder 1"/>
+          <p:cNvSpPr>
+            <a:spLocks noGrp="1" noRot="1" noChangeAspect="1"/>
+          </p:cNvSpPr>
+          <p:nvPr>
+            <p:ph type="sldImg"/>
+          </p:nvPr>
+        </p:nvSpPr>
+        <p:spPr/>
+      </p:sp>
+      <p:sp>
+        <p:nvSpPr>
+          <p:cNvPr id="3" name="Notes Placeholder 2"/>
+          <p:cNvSpPr>
+            <a:spLocks noGrp="1"/>
+          </p:cNvSpPr>
+          <p:nvPr>
+            <p:ph type="body" idx="1"/>
+          </p:nvPr>
+        </p:nvSpPr>
+        <p:spPr/>
+        <p:txBody>
+          <a:bodyPr/>
+          <a:lstStyle/>
+          <a:p>
+            <a:r>
+              <a:rPr lang="en-US" dirty="0"/>
+              <a:t/>
+            </a:r>
+            <a:endParaRPr lang="en-US" dirty="0"/>
+          </a:p>
+        </p:txBody>
+      </p:sp>
+      <p:sp>
+        <p:nvSpPr>
+          <p:cNvPr id="4" name="Slide Number Placeholder 3"/>
+          <p:cNvSpPr>
+            <a:spLocks noGrp="1"/>
+          </p:cNvSpPr>
+          <p:nvPr>
+            <p:ph type="sldNum" sz="quarter" idx="10"/>
+          </p:nvPr>
+        </p:nvSpPr>
+        <p:spPr/>
+        <p:txBody>
+          <a:bodyPr/>
+          <a:lstStyle/>
+          <a:p>
+            <a:fld id="{F7021451-1387-4CA6-816F-3879F97B5CBC}" type="slidenum">
+              <a:rPr lang="en-US"/>
+              <a:t>6</a:t>
+            </a:fld>
+            <a:endParaRPr lang="en-US"/>
+          </a:p>
+        </p:txBody>
+      </p:sp>
+    </p:spTree>
+    <p:extLst>
+      <p:ext uri="{BB962C8B-B14F-4D97-AF65-F5344CB8AC3E}">
+        <p14:creationId xmlns:p14="http://schemas.microsoft.com/office/powerpoint/2010/main" val="1024086991"/>
+      </p:ext>
+    </p:extLst>
+  </p:cSld>
+  <p:clrMapOvr>
+    <a:masterClrMapping/>
+  </p:clrMapOvr>
+</p:notes>
+</file>
+
 <file path=ppt/slideLayouts/slideLayout1.xml><?xml version="1.0" encoding="utf-8"?>
 <p:sldLayout xmlns:a="http://schemas.openxmlformats.org/drawingml/2006/main" xmlns:r="http://schemas.openxmlformats.org/officeDocument/2006/relationships" xmlns:p="http://schemas.openxmlformats.org/presentationml/2006/main" preserve="1">
   <p:cSld name="DEFAULT">
@@ -1737,8 +1826,8 @@
         </p:nvSpPr>
         <p:spPr>
           <a:xfrm>
-            <a:off x="777240" y="4206240"/>
-            <a:ext cx="4846320" cy="731520"/>
+            <a:off x="777240" y="4700016"/>
+            <a:ext cx="4846320" cy="685800"/>
           </a:xfrm>
           <a:prstGeom prst="rect">
             <a:avLst/>
@@ -1762,7 +1851,7 @@
                 <a:ea typeface="Calibri" pitchFamily="34" charset="-122"/>
                 <a:cs typeface="Calibri" pitchFamily="34" charset="-120"/>
               </a:rPr>
-              <a:t>7 709,5 M à payer de S1 à S5, dont 5 696,7 M dès S1 ; 2 601,5 M de déficits</a:t>
+              <a:t>7 709,5 M à payer de S1 à S5, dont 5 672,4 M dès S1 ; 2 601,5 M de déficits</a:t>
             </a:r>
             <a:endParaRPr lang="en-US" sz="1400" dirty="0"/>
           </a:p>
@@ -1776,7 +1865,7 @@
         </p:nvSpPr>
         <p:spPr>
           <a:xfrm>
-            <a:off x="777240" y="5349240"/>
+            <a:off x="777240" y="5431536"/>
             <a:ext cx="4846320" cy="457200"/>
           </a:xfrm>
           <a:prstGeom prst="rect">
@@ -2120,14 +2209,117 @@
       </p:sp>
       <p:sp>
         <p:nvSpPr>
-          <p:cNvPr id="21" name="Text 19"/>
+          <p:cNvPr id="21" name="Shape 19"/>
+          <p:cNvSpPr/>
+          <p:nvPr/>
+        </p:nvSpPr>
+        <p:spPr>
+          <a:xfrm>
+            <a:off x="6583680" y="4032504"/>
+            <a:ext cx="420624" cy="420624"/>
+          </a:xfrm>
+          <a:prstGeom prst="ellipse">
+            <a:avLst/>
+          </a:prstGeom>
+          <a:solidFill>
+            <a:srgbClr val="002C50"/>
+          </a:solidFill>
+          <a:ln w="12700">
+            <a:solidFill>
+              <a:srgbClr val="002C50"/>
+            </a:solidFill>
+            <a:prstDash val="solid"/>
+          </a:ln>
+        </p:spPr>
+      </p:sp>
+      <p:sp>
+        <p:nvSpPr>
+          <p:cNvPr id="22" name="Text 20"/>
           <p:cNvSpPr txBox="1"/>
           <p:nvPr/>
         </p:nvSpPr>
         <p:spPr>
           <a:xfrm>
-            <a:off x="6583680" y="4206240"/>
-            <a:ext cx="4846320" cy="731520"/>
+            <a:off x="6583680" y="4032504"/>
+            <a:ext cx="420624" cy="420624"/>
+          </a:xfrm>
+          <a:prstGeom prst="rect">
+            <a:avLst/>
+          </a:prstGeom>
+          <a:noFill/>
+          <a:ln/>
+        </p:spPr>
+        <p:txBody>
+          <a:bodyPr wrap="square" lIns="0" tIns="0" rIns="0" bIns="0" rtlCol="0" anchor="ctr"/>
+          <a:lstStyle/>
+          <a:p>
+            <a:pPr algn="ctr" indent="0" marL="0">
+              <a:buNone/>
+            </a:pPr>
+            <a:r>
+              <a:rPr lang="en-US" sz="1300" b="1" dirty="0">
+                <a:solidFill>
+                  <a:srgbClr val="FFFFFF"/>
+                </a:solidFill>
+                <a:latin typeface="Calibri" pitchFamily="34" charset="0"/>
+                <a:ea typeface="Calibri" pitchFamily="34" charset="-122"/>
+                <a:cs typeface="Calibri" pitchFamily="34" charset="-120"/>
+              </a:rPr>
+              <a:t>6</a:t>
+            </a:r>
+            <a:endParaRPr lang="en-US" sz="1300" dirty="0"/>
+          </a:p>
+        </p:txBody>
+      </p:sp>
+      <p:sp>
+        <p:nvSpPr>
+          <p:cNvPr id="23" name="Text 21"/>
+          <p:cNvSpPr txBox="1"/>
+          <p:nvPr/>
+        </p:nvSpPr>
+        <p:spPr>
+          <a:xfrm>
+            <a:off x="7178040" y="4032504"/>
+            <a:ext cx="4297680" cy="420624"/>
+          </a:xfrm>
+          <a:prstGeom prst="rect">
+            <a:avLst/>
+          </a:prstGeom>
+          <a:noFill/>
+          <a:ln/>
+        </p:spPr>
+        <p:txBody>
+          <a:bodyPr wrap="square" lIns="0" tIns="0" rIns="0" bIns="0" rtlCol="0" anchor="ctr"/>
+          <a:lstStyle/>
+          <a:p>
+            <a:pPr indent="0" marL="0">
+              <a:buNone/>
+            </a:pPr>
+            <a:r>
+              <a:rPr lang="en-US" sz="1500" dirty="0">
+                <a:solidFill>
+                  <a:srgbClr val="1F2933"/>
+                </a:solidFill>
+                <a:latin typeface="Calibri" pitchFamily="34" charset="0"/>
+                <a:ea typeface="Calibri" pitchFamily="34" charset="-122"/>
+                <a:cs typeface="Calibri" pitchFamily="34" charset="-120"/>
+              </a:rPr>
+              <a:t>Équilibrage S1 : virements et reste à financer</a:t>
+            </a:r>
+            <a:endParaRPr lang="en-US" sz="1500" dirty="0"/>
+          </a:p>
+        </p:txBody>
+      </p:sp>
+      <p:sp>
+        <p:nvSpPr>
+          <p:cNvPr id="24" name="Text 22"/>
+          <p:cNvSpPr txBox="1"/>
+          <p:nvPr/>
+        </p:nvSpPr>
+        <p:spPr>
+          <a:xfrm>
+            <a:off x="6583680" y="4700016"/>
+            <a:ext cx="4846320" cy="685800"/>
           </a:xfrm>
           <a:prstGeom prst="rect">
             <a:avLst/>
@@ -2159,13 +2351,13 @@
       </p:sp>
       <p:sp>
         <p:nvSpPr>
-          <p:cNvPr id="22" name="Text 20"/>
+          <p:cNvPr id="25" name="Text 23"/>
           <p:cNvSpPr txBox="1"/>
           <p:nvPr/>
         </p:nvSpPr>
         <p:spPr>
           <a:xfrm>
-            <a:off x="6583680" y="5349240"/>
+            <a:off x="6583680" y="5431536"/>
             <a:ext cx="4846320" cy="457200"/>
           </a:xfrm>
           <a:prstGeom prst="rect">
@@ -2198,7 +2390,7 @@
       </p:sp>
       <p:pic>
         <p:nvPicPr>
-          <p:cNvPr id="23" name="Image 0" descr="preencoded.png">    </p:cNvPr>
+          <p:cNvPr id="26" name="Image 0" descr="preencoded.png">    </p:cNvPr>
           <p:cNvPicPr>
             <a:picLocks noChangeAspect="1"/>
           </p:cNvPicPr>
@@ -2222,7 +2414,7 @@
       </p:pic>
       <p:sp>
         <p:nvSpPr>
-          <p:cNvPr id="24" name="Text 21"/>
+          <p:cNvPr id="27" name="Text 24"/>
           <p:cNvSpPr txBox="1"/>
           <p:nvPr/>
         </p:nvSpPr>
@@ -2534,7 +2726,7 @@
                 <a:ea typeface="Calibri" pitchFamily="34" charset="-122"/>
                 <a:cs typeface="Calibri" pitchFamily="34" charset="-120"/>
               </a:rPr>
-              <a:t>5 696,7 M</a:t>
+              <a:t>5 672,4 M</a:t>
             </a:r>
             <a:endParaRPr lang="en-US" sz="2200" dirty="0"/>
           </a:p>
@@ -3519,7 +3711,7 @@
                           <a:ea typeface="Calibri" pitchFamily="34" charset="-122"/>
                           <a:cs typeface="Calibri" pitchFamily="34" charset="-120"/>
                         </a:rPr>
-                        <a:t>1 162,2</a:t>
+                        <a:t>1 137,9</a:t>
                       </a:r>
                       <a:endParaRPr lang="en-US" sz="950" dirty="0">
                         <a:latin typeface="Calibri" charset="0"/>
@@ -3649,7 +3841,7 @@
                           <a:ea typeface="Calibri" pitchFamily="34" charset="-122"/>
                           <a:cs typeface="Calibri" pitchFamily="34" charset="-120"/>
                         </a:rPr>
-                        <a:t>97,2</a:t>
+                        <a:t>121,5</a:t>
                       </a:r>
                       <a:endParaRPr lang="en-US" sz="950" dirty="0">
                         <a:latin typeface="Calibri" charset="0"/>
@@ -5891,7 +6083,7 @@
                           <a:ea typeface="Calibri" pitchFamily="34" charset="-122"/>
                           <a:cs typeface="Calibri" pitchFamily="34" charset="-120"/>
                         </a:rPr>
-                        <a:t>5 696,7</a:t>
+                        <a:t>5 672,4</a:t>
                       </a:r>
                       <a:endParaRPr lang="en-US" sz="950" dirty="0">
                         <a:latin typeface="Calibri" charset="0"/>
@@ -6027,7 +6219,7 @@
                           <a:ea typeface="Calibri" pitchFamily="34" charset="-122"/>
                           <a:cs typeface="Calibri" pitchFamily="34" charset="-120"/>
                         </a:rPr>
-                        <a:t>201,4</a:t>
+                        <a:t>225,7</a:t>
                       </a:r>
                       <a:endParaRPr lang="en-US" sz="950" dirty="0">
                         <a:latin typeface="Calibri" charset="0"/>
@@ -16741,7 +16933,7 @@
                 <a:ea typeface="Calibri" pitchFamily="34" charset="-122"/>
                 <a:cs typeface="Calibri" pitchFamily="34" charset="-120"/>
               </a:rPr>
-              <a:t>Un dossier par société en déficit (8), tiré par tranche : 690,0 M pour S1, le solde à l'échéance. Remboursement à la mise en place des financements.</a:t>
+              <a:t>Un dossier par société en déficit (8), tiré par tranche : 665,7 M pour S1, le solde à l'échéance. Remboursement à la mise en place des financements.</a:t>
             </a:r>
             <a:endParaRPr lang="en-US" sz="1100" dirty="0"/>
           </a:p>
@@ -17274,6 +17466,7752 @@
 </p:sld>
 </file>
 
+<file path=ppt/slides/slide6.xml><?xml version="1.0" encoding="utf-8"?>
+<p:sld xmlns:a="http://schemas.openxmlformats.org/drawingml/2006/main" xmlns:r="http://schemas.openxmlformats.org/officeDocument/2006/relationships" xmlns:p="http://schemas.openxmlformats.org/presentationml/2006/main">
+  <p:cSld name="Slide 6">
+    <p:bg>
+      <p:bgPr>
+        <a:solidFill>
+          <a:srgbClr val="FFFFFF"/>
+        </a:solidFill>
+      </p:bgPr>
+    </p:bg>
+    <p:spTree>
+      <p:nvGrpSpPr>
+        <p:cNvPr id="1" name=""/>
+        <p:cNvGrpSpPr/>
+        <p:nvPr/>
+      </p:nvGrpSpPr>
+      <p:grpSpPr>
+        <a:xfrm>
+          <a:off x="0" y="0"/>
+          <a:ext cx="0" cy="0"/>
+          <a:chOff x="0" y="0"/>
+          <a:chExt cx="0" cy="0"/>
+        </a:xfrm>
+      </p:grpSpPr>
+      <p:sp>
+        <p:nvSpPr>
+          <p:cNvPr id="2" name="Text 0"/>
+          <p:cNvSpPr txBox="1"/>
+          <p:nvPr/>
+        </p:nvSpPr>
+        <p:spPr>
+          <a:xfrm>
+            <a:off x="457200" y="274320"/>
+            <a:ext cx="11247120" cy="548640"/>
+          </a:xfrm>
+          <a:prstGeom prst="rect">
+            <a:avLst/>
+          </a:prstGeom>
+          <a:noFill/>
+          <a:ln/>
+        </p:spPr>
+        <p:txBody>
+          <a:bodyPr wrap="square" lIns="0" tIns="0" rIns="0" bIns="0" rtlCol="0" anchor="ctr"/>
+          <a:lstStyle/>
+          <a:p>
+            <a:pPr indent="0" marL="0">
+              <a:buNone/>
+            </a:pPr>
+            <a:r>
+              <a:rPr lang="en-US" sz="2600" b="1" dirty="0">
+                <a:solidFill>
+                  <a:srgbClr val="002C50"/>
+                </a:solidFill>
+                <a:latin typeface="Calibri" pitchFamily="34" charset="0"/>
+                <a:ea typeface="Calibri" pitchFamily="34" charset="-122"/>
+                <a:cs typeface="Calibri" pitchFamily="34" charset="-120"/>
+              </a:rPr>
+              <a:t>B. Paiement – 3. Équilibrage S1</a:t>
+            </a:r>
+            <a:endParaRPr lang="en-US" sz="2600" dirty="0"/>
+          </a:p>
+        </p:txBody>
+      </p:sp>
+      <p:sp>
+        <p:nvSpPr>
+          <p:cNvPr id="3" name="Text 1"/>
+          <p:cNvSpPr txBox="1"/>
+          <p:nvPr/>
+        </p:nvSpPr>
+        <p:spPr>
+          <a:xfrm>
+            <a:off x="457200" y="822960"/>
+            <a:ext cx="11247120" cy="320040"/>
+          </a:xfrm>
+          <a:prstGeom prst="rect">
+            <a:avLst/>
+          </a:prstGeom>
+          <a:noFill/>
+          <a:ln/>
+        </p:spPr>
+        <p:txBody>
+          <a:bodyPr wrap="square" lIns="0" tIns="0" rIns="0" bIns="0" rtlCol="0" anchor="ctr"/>
+          <a:lstStyle/>
+          <a:p>
+            <a:pPr indent="0" marL="0">
+              <a:buNone/>
+            </a:pPr>
+            <a:r>
+              <a:rPr lang="en-US" sz="1300" dirty="0">
+                <a:solidFill>
+                  <a:srgbClr val="9D8C74"/>
+                </a:solidFill>
+                <a:latin typeface="Calibri" pitchFamily="34" charset="0"/>
+                <a:ea typeface="Calibri" pitchFamily="34" charset="-122"/>
+                <a:cs typeface="Calibri" pitchFamily="34" charset="-120"/>
+              </a:rPr>
+              <a:t>Semaine du 05/10 au 11/10/2026 : flux à payer, virements et reste à financer par compte – MFCFA</a:t>
+            </a:r>
+            <a:endParaRPr lang="en-US" sz="1300" dirty="0"/>
+          </a:p>
+        </p:txBody>
+      </p:sp>
+      <p:sp>
+        <p:nvSpPr>
+          <p:cNvPr id="4" name="Shape 2"/>
+          <p:cNvSpPr/>
+          <p:nvPr/>
+        </p:nvSpPr>
+        <p:spPr>
+          <a:xfrm>
+            <a:off x="457200" y="1234440"/>
+            <a:ext cx="2679192" cy="822960"/>
+          </a:xfrm>
+          <a:prstGeom prst="roundRect">
+            <a:avLst>
+              <a:gd name="adj" fmla="val 8889"/>
+            </a:avLst>
+          </a:prstGeom>
+          <a:solidFill>
+            <a:srgbClr val="EEF2F6"/>
+          </a:solidFill>
+          <a:ln w="12700">
+            <a:solidFill>
+              <a:srgbClr val="EEF2F6"/>
+            </a:solidFill>
+            <a:prstDash val="solid"/>
+          </a:ln>
+        </p:spPr>
+      </p:sp>
+      <p:sp>
+        <p:nvSpPr>
+          <p:cNvPr id="5" name="Text 3"/>
+          <p:cNvSpPr txBox="1"/>
+          <p:nvPr/>
+        </p:nvSpPr>
+        <p:spPr>
+          <a:xfrm>
+            <a:off x="594360" y="1307592"/>
+            <a:ext cx="2404872" cy="457200"/>
+          </a:xfrm>
+          <a:prstGeom prst="rect">
+            <a:avLst/>
+          </a:prstGeom>
+          <a:noFill/>
+          <a:ln/>
+        </p:spPr>
+        <p:txBody>
+          <a:bodyPr wrap="square" lIns="0" tIns="0" rIns="0" bIns="0" rtlCol="0" anchor="ctr"/>
+          <a:lstStyle/>
+          <a:p>
+            <a:pPr indent="0" marL="0">
+              <a:buNone/>
+            </a:pPr>
+            <a:r>
+              <a:rPr lang="en-US" sz="2200" b="1" dirty="0">
+                <a:solidFill>
+                  <a:srgbClr val="B3261E"/>
+                </a:solidFill>
+                <a:latin typeface="Calibri" pitchFamily="34" charset="0"/>
+                <a:ea typeface="Calibri" pitchFamily="34" charset="-122"/>
+                <a:cs typeface="Calibri" pitchFamily="34" charset="-120"/>
+              </a:rPr>
+              <a:t>5 668,8 M</a:t>
+            </a:r>
+            <a:endParaRPr lang="en-US" sz="2200" dirty="0"/>
+          </a:p>
+        </p:txBody>
+      </p:sp>
+      <p:sp>
+        <p:nvSpPr>
+          <p:cNvPr id="6" name="Text 4"/>
+          <p:cNvSpPr txBox="1"/>
+          <p:nvPr/>
+        </p:nvSpPr>
+        <p:spPr>
+          <a:xfrm>
+            <a:off x="594360" y="1746504"/>
+            <a:ext cx="2404872" cy="256032"/>
+          </a:xfrm>
+          <a:prstGeom prst="rect">
+            <a:avLst/>
+          </a:prstGeom>
+          <a:noFill/>
+          <a:ln/>
+        </p:spPr>
+        <p:txBody>
+          <a:bodyPr wrap="square" lIns="0" tIns="0" rIns="0" bIns="0" rtlCol="0" anchor="t"/>
+          <a:lstStyle/>
+          <a:p>
+            <a:pPr indent="0" marL="0">
+              <a:buNone/>
+            </a:pPr>
+            <a:r>
+              <a:rPr lang="en-US" sz="1050" dirty="0">
+                <a:solidFill>
+                  <a:srgbClr val="6B7280"/>
+                </a:solidFill>
+                <a:latin typeface="Calibri" pitchFamily="34" charset="0"/>
+                <a:ea typeface="Calibri" pitchFamily="34" charset="-122"/>
+                <a:cs typeface="Calibri" pitchFamily="34" charset="-120"/>
+              </a:rPr>
+              <a:t>À payer en S1 (fonctionnement, projets, échéances)</a:t>
+            </a:r>
+            <a:endParaRPr lang="en-US" sz="1050" dirty="0"/>
+          </a:p>
+        </p:txBody>
+      </p:sp>
+      <p:sp>
+        <p:nvSpPr>
+          <p:cNvPr id="7" name="Shape 5"/>
+          <p:cNvSpPr/>
+          <p:nvPr/>
+        </p:nvSpPr>
+        <p:spPr>
+          <a:xfrm>
+            <a:off x="3319272" y="1234440"/>
+            <a:ext cx="2679192" cy="822960"/>
+          </a:xfrm>
+          <a:prstGeom prst="roundRect">
+            <a:avLst>
+              <a:gd name="adj" fmla="val 8889"/>
+            </a:avLst>
+          </a:prstGeom>
+          <a:solidFill>
+            <a:srgbClr val="EEF2F6"/>
+          </a:solidFill>
+          <a:ln w="12700">
+            <a:solidFill>
+              <a:srgbClr val="EEF2F6"/>
+            </a:solidFill>
+            <a:prstDash val="solid"/>
+          </a:ln>
+        </p:spPr>
+      </p:sp>
+      <p:sp>
+        <p:nvSpPr>
+          <p:cNvPr id="8" name="Text 6"/>
+          <p:cNvSpPr txBox="1"/>
+          <p:nvPr/>
+        </p:nvSpPr>
+        <p:spPr>
+          <a:xfrm>
+            <a:off x="3456432" y="1307592"/>
+            <a:ext cx="2404872" cy="457200"/>
+          </a:xfrm>
+          <a:prstGeom prst="rect">
+            <a:avLst/>
+          </a:prstGeom>
+          <a:noFill/>
+          <a:ln/>
+        </p:spPr>
+        <p:txBody>
+          <a:bodyPr wrap="square" lIns="0" tIns="0" rIns="0" bIns="0" rtlCol="0" anchor="ctr"/>
+          <a:lstStyle/>
+          <a:p>
+            <a:pPr indent="0" marL="0">
+              <a:buNone/>
+            </a:pPr>
+            <a:r>
+              <a:rPr lang="en-US" sz="2200" b="1" dirty="0">
+                <a:solidFill>
+                  <a:srgbClr val="002C50"/>
+                </a:solidFill>
+                <a:latin typeface="Calibri" pitchFamily="34" charset="0"/>
+                <a:ea typeface="Calibri" pitchFamily="34" charset="-122"/>
+                <a:cs typeface="Calibri" pitchFamily="34" charset="-120"/>
+              </a:rPr>
+              <a:t>7 024,9 M</a:t>
+            </a:r>
+            <a:endParaRPr lang="en-US" sz="2200" dirty="0"/>
+          </a:p>
+        </p:txBody>
+      </p:sp>
+      <p:sp>
+        <p:nvSpPr>
+          <p:cNvPr id="9" name="Text 7"/>
+          <p:cNvSpPr txBox="1"/>
+          <p:nvPr/>
+        </p:nvSpPr>
+        <p:spPr>
+          <a:xfrm>
+            <a:off x="3456432" y="1746504"/>
+            <a:ext cx="2404872" cy="256032"/>
+          </a:xfrm>
+          <a:prstGeom prst="rect">
+            <a:avLst/>
+          </a:prstGeom>
+          <a:noFill/>
+          <a:ln/>
+        </p:spPr>
+        <p:txBody>
+          <a:bodyPr wrap="square" lIns="0" tIns="0" rIns="0" bIns="0" rtlCol="0" anchor="t"/>
+          <a:lstStyle/>
+          <a:p>
+            <a:pPr indent="0" marL="0">
+              <a:buNone/>
+            </a:pPr>
+            <a:r>
+              <a:rPr lang="en-US" sz="1050" dirty="0">
+                <a:solidFill>
+                  <a:srgbClr val="6B7280"/>
+                </a:solidFill>
+                <a:latin typeface="Calibri" pitchFamily="34" charset="0"/>
+                <a:ea typeface="Calibri" pitchFamily="34" charset="-122"/>
+                <a:cs typeface="Calibri" pitchFamily="34" charset="-120"/>
+              </a:rPr>
+              <a:t>Soldes au 30/09 des comptes payeurs</a:t>
+            </a:r>
+            <a:endParaRPr lang="en-US" sz="1050" dirty="0"/>
+          </a:p>
+        </p:txBody>
+      </p:sp>
+      <p:sp>
+        <p:nvSpPr>
+          <p:cNvPr id="10" name="Shape 8"/>
+          <p:cNvSpPr/>
+          <p:nvPr/>
+        </p:nvSpPr>
+        <p:spPr>
+          <a:xfrm>
+            <a:off x="6181344" y="1234440"/>
+            <a:ext cx="2679192" cy="822960"/>
+          </a:xfrm>
+          <a:prstGeom prst="roundRect">
+            <a:avLst>
+              <a:gd name="adj" fmla="val 8889"/>
+            </a:avLst>
+          </a:prstGeom>
+          <a:solidFill>
+            <a:srgbClr val="EEF2F6"/>
+          </a:solidFill>
+          <a:ln w="12700">
+            <a:solidFill>
+              <a:srgbClr val="EEF2F6"/>
+            </a:solidFill>
+            <a:prstDash val="solid"/>
+          </a:ln>
+        </p:spPr>
+      </p:sp>
+      <p:sp>
+        <p:nvSpPr>
+          <p:cNvPr id="11" name="Text 9"/>
+          <p:cNvSpPr txBox="1"/>
+          <p:nvPr/>
+        </p:nvSpPr>
+        <p:spPr>
+          <a:xfrm>
+            <a:off x="6318504" y="1307592"/>
+            <a:ext cx="2404872" cy="457200"/>
+          </a:xfrm>
+          <a:prstGeom prst="rect">
+            <a:avLst/>
+          </a:prstGeom>
+          <a:noFill/>
+          <a:ln/>
+        </p:spPr>
+        <p:txBody>
+          <a:bodyPr wrap="square" lIns="0" tIns="0" rIns="0" bIns="0" rtlCol="0" anchor="ctr"/>
+          <a:lstStyle/>
+          <a:p>
+            <a:pPr indent="0" marL="0">
+              <a:buNone/>
+            </a:pPr>
+            <a:r>
+              <a:rPr lang="en-US" sz="2200" b="1" dirty="0">
+                <a:solidFill>
+                  <a:srgbClr val="002C50"/>
+                </a:solidFill>
+                <a:latin typeface="Calibri" pitchFamily="34" charset="0"/>
+                <a:ea typeface="Calibri" pitchFamily="34" charset="-122"/>
+                <a:cs typeface="Calibri" pitchFamily="34" charset="-120"/>
+              </a:rPr>
+              <a:t>À décider</a:t>
+            </a:r>
+            <a:endParaRPr lang="en-US" sz="2200" dirty="0"/>
+          </a:p>
+        </p:txBody>
+      </p:sp>
+      <p:sp>
+        <p:nvSpPr>
+          <p:cNvPr id="12" name="Text 10"/>
+          <p:cNvSpPr txBox="1"/>
+          <p:nvPr/>
+        </p:nvSpPr>
+        <p:spPr>
+          <a:xfrm>
+            <a:off x="6318504" y="1746504"/>
+            <a:ext cx="2404872" cy="256032"/>
+          </a:xfrm>
+          <a:prstGeom prst="rect">
+            <a:avLst/>
+          </a:prstGeom>
+          <a:noFill/>
+          <a:ln/>
+        </p:spPr>
+        <p:txBody>
+          <a:bodyPr wrap="square" lIns="0" tIns="0" rIns="0" bIns="0" rtlCol="0" anchor="t"/>
+          <a:lstStyle/>
+          <a:p>
+            <a:pPr indent="0" marL="0">
+              <a:buNone/>
+            </a:pPr>
+            <a:r>
+              <a:rPr lang="en-US" sz="1050" dirty="0">
+                <a:solidFill>
+                  <a:srgbClr val="6B7280"/>
+                </a:solidFill>
+                <a:latin typeface="Calibri" pitchFamily="34" charset="0"/>
+                <a:ea typeface="Calibri" pitchFamily="34" charset="-122"/>
+                <a:cs typeface="Calibri" pitchFamily="34" charset="-120"/>
+              </a:rPr>
+              <a:t>Aucun virement de nivellement saisi</a:t>
+            </a:r>
+            <a:endParaRPr lang="en-US" sz="1050" dirty="0"/>
+          </a:p>
+        </p:txBody>
+      </p:sp>
+      <p:sp>
+        <p:nvSpPr>
+          <p:cNvPr id="13" name="Shape 11"/>
+          <p:cNvSpPr/>
+          <p:nvPr/>
+        </p:nvSpPr>
+        <p:spPr>
+          <a:xfrm>
+            <a:off x="9043416" y="1234440"/>
+            <a:ext cx="2679192" cy="822960"/>
+          </a:xfrm>
+          <a:prstGeom prst="roundRect">
+            <a:avLst>
+              <a:gd name="adj" fmla="val 8889"/>
+            </a:avLst>
+          </a:prstGeom>
+          <a:solidFill>
+            <a:srgbClr val="EEF2F6"/>
+          </a:solidFill>
+          <a:ln w="12700">
+            <a:solidFill>
+              <a:srgbClr val="EEF2F6"/>
+            </a:solidFill>
+            <a:prstDash val="solid"/>
+          </a:ln>
+        </p:spPr>
+      </p:sp>
+      <p:sp>
+        <p:nvSpPr>
+          <p:cNvPr id="14" name="Text 12"/>
+          <p:cNvSpPr txBox="1"/>
+          <p:nvPr/>
+        </p:nvSpPr>
+        <p:spPr>
+          <a:xfrm>
+            <a:off x="9180576" y="1307592"/>
+            <a:ext cx="2404872" cy="457200"/>
+          </a:xfrm>
+          <a:prstGeom prst="rect">
+            <a:avLst/>
+          </a:prstGeom>
+          <a:noFill/>
+          <a:ln/>
+        </p:spPr>
+        <p:txBody>
+          <a:bodyPr wrap="square" lIns="0" tIns="0" rIns="0" bIns="0" rtlCol="0" anchor="ctr"/>
+          <a:lstStyle/>
+          <a:p>
+            <a:pPr indent="0" marL="0">
+              <a:buNone/>
+            </a:pPr>
+            <a:r>
+              <a:rPr lang="en-US" sz="2200" b="1" dirty="0">
+                <a:solidFill>
+                  <a:srgbClr val="B3261E"/>
+                </a:solidFill>
+                <a:latin typeface="Calibri" pitchFamily="34" charset="0"/>
+                <a:ea typeface="Calibri" pitchFamily="34" charset="-122"/>
+                <a:cs typeface="Calibri" pitchFamily="34" charset="-120"/>
+              </a:rPr>
+              <a:t>1 387,3 M</a:t>
+            </a:r>
+            <a:endParaRPr lang="en-US" sz="2200" dirty="0"/>
+          </a:p>
+        </p:txBody>
+      </p:sp>
+      <p:sp>
+        <p:nvSpPr>
+          <p:cNvPr id="15" name="Text 13"/>
+          <p:cNvSpPr txBox="1"/>
+          <p:nvPr/>
+        </p:nvSpPr>
+        <p:spPr>
+          <a:xfrm>
+            <a:off x="9180576" y="1746504"/>
+            <a:ext cx="2404872" cy="256032"/>
+          </a:xfrm>
+          <a:prstGeom prst="rect">
+            <a:avLst/>
+          </a:prstGeom>
+          <a:noFill/>
+          <a:ln/>
+        </p:spPr>
+        <p:txBody>
+          <a:bodyPr wrap="square" lIns="0" tIns="0" rIns="0" bIns="0" rtlCol="0" anchor="t"/>
+          <a:lstStyle/>
+          <a:p>
+            <a:pPr indent="0" marL="0">
+              <a:buNone/>
+            </a:pPr>
+            <a:r>
+              <a:rPr lang="en-US" sz="1050" dirty="0">
+                <a:solidFill>
+                  <a:srgbClr val="6B7280"/>
+                </a:solidFill>
+                <a:latin typeface="Calibri" pitchFamily="34" charset="0"/>
+                <a:ea typeface="Calibri" pitchFamily="34" charset="-122"/>
+                <a:cs typeface="Calibri" pitchFamily="34" charset="-120"/>
+              </a:rPr>
+              <a:t>Reste à financer en S1 avant nivellement</a:t>
+            </a:r>
+            <a:endParaRPr lang="en-US" sz="1050" dirty="0"/>
+          </a:p>
+        </p:txBody>
+      </p:sp>
+      <p:graphicFrame>
+        <p:nvGraphicFramePr>
+          <p:cNvPr id="7" name="Table 0"/>
+          <p:cNvGraphicFramePr>
+            <a:graphicFrameLocks noGrp="1"/>
+          </p:cNvGraphicFramePr>
+          <p:nvPr>
+            <p:extLst>
+              <p:ext uri="{D42A27DB-BD31-4B8C-83A1-F6EECF244321}">
+                <p14:modId xmlns:p14="http://schemas.microsoft.com/office/powerpoint/2010/main" val="1579011935"/>
+              </p:ext>
+            </p:extLst>
+          </p:nvPr>
+        </p:nvGraphicFramePr>
+        <p:xfrm>
+          <a:off x="457200" y="2212848"/>
+          <a:ext cx="6903720" cy="914400"/>
+        </p:xfrm>
+        <a:graphic>
+          <a:graphicData uri="http://schemas.openxmlformats.org/drawingml/2006/table">
+            <a:tbl>
+              <a:tblPr/>
+              <a:tblGrid>
+                <a:gridCol w="2423160"/>
+                <a:gridCol w="896112"/>
+                <a:gridCol w="896112"/>
+                <a:gridCol w="896112"/>
+                <a:gridCol w="896112"/>
+                <a:gridCol w="896112"/>
+              </a:tblGrid>
+              <a:tr h="224028">
+                <a:tc>
+                  <a:txBody>
+                    <a:bodyPr/>
+                    <a:lstStyle/>
+                    <a:p>
+                      <a:pPr algn="l" indent="0" marL="0">
+                        <a:buNone/>
+                      </a:pPr>
+                      <a:r>
+                        <a:rPr lang="en-US" sz="850" b="1" dirty="0">
+                          <a:solidFill>
+                            <a:srgbClr val="FFFFFF"/>
+                          </a:solidFill>
+                          <a:latin typeface="Calibri" pitchFamily="34" charset="0"/>
+                          <a:ea typeface="Calibri" pitchFamily="34" charset="-122"/>
+                          <a:cs typeface="Calibri" pitchFamily="34" charset="-120"/>
+                        </a:rPr>
+                        <a:t>Entité / compte</a:t>
+                      </a:r>
+                      <a:endParaRPr lang="en-US" sz="850" dirty="0">
+                        <a:latin typeface="Calibri" charset="0"/>
+                        <a:ea typeface="Calibri" charset="0"/>
+                        <a:cs typeface="Calibri" charset="0"/>
+                      </a:endParaRPr>
+                    </a:p>
+                  </a:txBody>
+                  <a:tcPr marL="64008" marR="64008" marT="0" marB="0" anchor="ctr">
+                    <a:lnL w="6350" cap="flat" cmpd="sng" algn="ctr">
+                      <a:solidFill>
+                        <a:srgbClr val="D5DBE3"/>
+                      </a:solidFill>
+                      <a:prstDash val="solid"/>
+                      <a:round/>
+                      <a:headEnd type="none" w="med" len="med"/>
+                      <a:tailEnd type="none" w="med" len="med"/>
+                    </a:lnL>
+                    <a:lnR w="6350" cap="flat" cmpd="sng" algn="ctr">
+                      <a:solidFill>
+                        <a:srgbClr val="D5DBE3"/>
+                      </a:solidFill>
+                      <a:prstDash val="solid"/>
+                      <a:round/>
+                      <a:headEnd type="none" w="med" len="med"/>
+                      <a:tailEnd type="none" w="med" len="med"/>
+                    </a:lnR>
+                    <a:lnT w="6350" cap="flat" cmpd="sng" algn="ctr">
+                      <a:solidFill>
+                        <a:srgbClr val="D5DBE3"/>
+                      </a:solidFill>
+                      <a:prstDash val="solid"/>
+                      <a:round/>
+                      <a:headEnd type="none" w="med" len="med"/>
+                      <a:tailEnd type="none" w="med" len="med"/>
+                    </a:lnT>
+                    <a:lnB w="6350" cap="flat" cmpd="sng" algn="ctr">
+                      <a:solidFill>
+                        <a:srgbClr val="D5DBE3"/>
+                      </a:solidFill>
+                      <a:prstDash val="solid"/>
+                      <a:round/>
+                      <a:headEnd type="none" w="med" len="med"/>
+                      <a:tailEnd type="none" w="med" len="med"/>
+                    </a:lnB>
+                    <a:solidFill>
+                      <a:srgbClr val="002C50"/>
+                    </a:solidFill>
+                  </a:tcPr>
+                </a:tc>
+                <a:tc>
+                  <a:txBody>
+                    <a:bodyPr/>
+                    <a:lstStyle/>
+                    <a:p>
+                      <a:pPr algn="ctr" indent="0" marL="0">
+                        <a:buNone/>
+                      </a:pPr>
+                      <a:r>
+                        <a:rPr lang="en-US" sz="850" b="1" dirty="0">
+                          <a:solidFill>
+                            <a:srgbClr val="FFFFFF"/>
+                          </a:solidFill>
+                          <a:latin typeface="Calibri" pitchFamily="34" charset="0"/>
+                          <a:ea typeface="Calibri" pitchFamily="34" charset="-122"/>
+                          <a:cs typeface="Calibri" pitchFamily="34" charset="-120"/>
+                        </a:rPr>
+                        <a:t>Solde 30/09</a:t>
+                      </a:r>
+                      <a:endParaRPr lang="en-US" sz="850" dirty="0">
+                        <a:latin typeface="Calibri" charset="0"/>
+                        <a:ea typeface="Calibri" charset="0"/>
+                        <a:cs typeface="Calibri" charset="0"/>
+                      </a:endParaRPr>
+                    </a:p>
+                  </a:txBody>
+                  <a:tcPr marL="64008" marR="64008" marT="0" marB="0" anchor="ctr">
+                    <a:lnL w="6350" cap="flat" cmpd="sng" algn="ctr">
+                      <a:solidFill>
+                        <a:srgbClr val="D5DBE3"/>
+                      </a:solidFill>
+                      <a:prstDash val="solid"/>
+                      <a:round/>
+                      <a:headEnd type="none" w="med" len="med"/>
+                      <a:tailEnd type="none" w="med" len="med"/>
+                    </a:lnL>
+                    <a:lnR w="6350" cap="flat" cmpd="sng" algn="ctr">
+                      <a:solidFill>
+                        <a:srgbClr val="D5DBE3"/>
+                      </a:solidFill>
+                      <a:prstDash val="solid"/>
+                      <a:round/>
+                      <a:headEnd type="none" w="med" len="med"/>
+                      <a:tailEnd type="none" w="med" len="med"/>
+                    </a:lnR>
+                    <a:lnT w="6350" cap="flat" cmpd="sng" algn="ctr">
+                      <a:solidFill>
+                        <a:srgbClr val="D5DBE3"/>
+                      </a:solidFill>
+                      <a:prstDash val="solid"/>
+                      <a:round/>
+                      <a:headEnd type="none" w="med" len="med"/>
+                      <a:tailEnd type="none" w="med" len="med"/>
+                    </a:lnT>
+                    <a:lnB w="6350" cap="flat" cmpd="sng" algn="ctr">
+                      <a:solidFill>
+                        <a:srgbClr val="D5DBE3"/>
+                      </a:solidFill>
+                      <a:prstDash val="solid"/>
+                      <a:round/>
+                      <a:headEnd type="none" w="med" len="med"/>
+                      <a:tailEnd type="none" w="med" len="med"/>
+                    </a:lnB>
+                    <a:solidFill>
+                      <a:srgbClr val="002C50"/>
+                    </a:solidFill>
+                  </a:tcPr>
+                </a:tc>
+                <a:tc>
+                  <a:txBody>
+                    <a:bodyPr/>
+                    <a:lstStyle/>
+                    <a:p>
+                      <a:pPr algn="ctr" indent="0" marL="0">
+                        <a:buNone/>
+                      </a:pPr>
+                      <a:r>
+                        <a:rPr lang="en-US" sz="850" b="1" dirty="0">
+                          <a:solidFill>
+                            <a:srgbClr val="FFFFFF"/>
+                          </a:solidFill>
+                          <a:latin typeface="Calibri" pitchFamily="34" charset="0"/>
+                          <a:ea typeface="Calibri" pitchFamily="34" charset="-122"/>
+                          <a:cs typeface="Calibri" pitchFamily="34" charset="-120"/>
+                        </a:rPr>
+                        <a:t>Flux S1</a:t>
+                      </a:r>
+                      <a:endParaRPr lang="en-US" sz="850" dirty="0">
+                        <a:latin typeface="Calibri" charset="0"/>
+                        <a:ea typeface="Calibri" charset="0"/>
+                        <a:cs typeface="Calibri" charset="0"/>
+                      </a:endParaRPr>
+                    </a:p>
+                  </a:txBody>
+                  <a:tcPr marL="64008" marR="64008" marT="0" marB="0" anchor="ctr">
+                    <a:lnL w="6350" cap="flat" cmpd="sng" algn="ctr">
+                      <a:solidFill>
+                        <a:srgbClr val="D5DBE3"/>
+                      </a:solidFill>
+                      <a:prstDash val="solid"/>
+                      <a:round/>
+                      <a:headEnd type="none" w="med" len="med"/>
+                      <a:tailEnd type="none" w="med" len="med"/>
+                    </a:lnL>
+                    <a:lnR w="6350" cap="flat" cmpd="sng" algn="ctr">
+                      <a:solidFill>
+                        <a:srgbClr val="D5DBE3"/>
+                      </a:solidFill>
+                      <a:prstDash val="solid"/>
+                      <a:round/>
+                      <a:headEnd type="none" w="med" len="med"/>
+                      <a:tailEnd type="none" w="med" len="med"/>
+                    </a:lnR>
+                    <a:lnT w="6350" cap="flat" cmpd="sng" algn="ctr">
+                      <a:solidFill>
+                        <a:srgbClr val="D5DBE3"/>
+                      </a:solidFill>
+                      <a:prstDash val="solid"/>
+                      <a:round/>
+                      <a:headEnd type="none" w="med" len="med"/>
+                      <a:tailEnd type="none" w="med" len="med"/>
+                    </a:lnT>
+                    <a:lnB w="6350" cap="flat" cmpd="sng" algn="ctr">
+                      <a:solidFill>
+                        <a:srgbClr val="D5DBE3"/>
+                      </a:solidFill>
+                      <a:prstDash val="solid"/>
+                      <a:round/>
+                      <a:headEnd type="none" w="med" len="med"/>
+                      <a:tailEnd type="none" w="med" len="med"/>
+                    </a:lnB>
+                    <a:solidFill>
+                      <a:srgbClr val="002C50"/>
+                    </a:solidFill>
+                  </a:tcPr>
+                </a:tc>
+                <a:tc>
+                  <a:txBody>
+                    <a:bodyPr/>
+                    <a:lstStyle/>
+                    <a:p>
+                      <a:pPr algn="ctr" indent="0" marL="0">
+                        <a:buNone/>
+                      </a:pPr>
+                      <a:r>
+                        <a:rPr lang="en-US" sz="850" b="1" dirty="0">
+                          <a:solidFill>
+                            <a:srgbClr val="FFFFFF"/>
+                          </a:solidFill>
+                          <a:latin typeface="Calibri" pitchFamily="34" charset="0"/>
+                          <a:ea typeface="Calibri" pitchFamily="34" charset="-122"/>
+                          <a:cs typeface="Calibri" pitchFamily="34" charset="-120"/>
+                        </a:rPr>
+                        <a:t>Virements</a:t>
+                      </a:r>
+                      <a:endParaRPr lang="en-US" sz="850" dirty="0">
+                        <a:latin typeface="Calibri" charset="0"/>
+                        <a:ea typeface="Calibri" charset="0"/>
+                        <a:cs typeface="Calibri" charset="0"/>
+                      </a:endParaRPr>
+                    </a:p>
+                  </a:txBody>
+                  <a:tcPr marL="64008" marR="64008" marT="0" marB="0" anchor="ctr">
+                    <a:lnL w="6350" cap="flat" cmpd="sng" algn="ctr">
+                      <a:solidFill>
+                        <a:srgbClr val="D5DBE3"/>
+                      </a:solidFill>
+                      <a:prstDash val="solid"/>
+                      <a:round/>
+                      <a:headEnd type="none" w="med" len="med"/>
+                      <a:tailEnd type="none" w="med" len="med"/>
+                    </a:lnL>
+                    <a:lnR w="6350" cap="flat" cmpd="sng" algn="ctr">
+                      <a:solidFill>
+                        <a:srgbClr val="D5DBE3"/>
+                      </a:solidFill>
+                      <a:prstDash val="solid"/>
+                      <a:round/>
+                      <a:headEnd type="none" w="med" len="med"/>
+                      <a:tailEnd type="none" w="med" len="med"/>
+                    </a:lnR>
+                    <a:lnT w="6350" cap="flat" cmpd="sng" algn="ctr">
+                      <a:solidFill>
+                        <a:srgbClr val="D5DBE3"/>
+                      </a:solidFill>
+                      <a:prstDash val="solid"/>
+                      <a:round/>
+                      <a:headEnd type="none" w="med" len="med"/>
+                      <a:tailEnd type="none" w="med" len="med"/>
+                    </a:lnT>
+                    <a:lnB w="6350" cap="flat" cmpd="sng" algn="ctr">
+                      <a:solidFill>
+                        <a:srgbClr val="D5DBE3"/>
+                      </a:solidFill>
+                      <a:prstDash val="solid"/>
+                      <a:round/>
+                      <a:headEnd type="none" w="med" len="med"/>
+                      <a:tailEnd type="none" w="med" len="med"/>
+                    </a:lnB>
+                    <a:solidFill>
+                      <a:srgbClr val="002C50"/>
+                    </a:solidFill>
+                  </a:tcPr>
+                </a:tc>
+                <a:tc>
+                  <a:txBody>
+                    <a:bodyPr/>
+                    <a:lstStyle/>
+                    <a:p>
+                      <a:pPr algn="ctr" indent="0" marL="0">
+                        <a:buNone/>
+                      </a:pPr>
+                      <a:r>
+                        <a:rPr lang="en-US" sz="850" b="1" dirty="0">
+                          <a:solidFill>
+                            <a:srgbClr val="FFFFFF"/>
+                          </a:solidFill>
+                          <a:latin typeface="Calibri" pitchFamily="34" charset="0"/>
+                          <a:ea typeface="Calibri" pitchFamily="34" charset="-122"/>
+                          <a:cs typeface="Calibri" pitchFamily="34" charset="-120"/>
+                        </a:rPr>
+                        <a:t>Solde théorique</a:t>
+                      </a:r>
+                      <a:endParaRPr lang="en-US" sz="850" dirty="0">
+                        <a:latin typeface="Calibri" charset="0"/>
+                        <a:ea typeface="Calibri" charset="0"/>
+                        <a:cs typeface="Calibri" charset="0"/>
+                      </a:endParaRPr>
+                    </a:p>
+                  </a:txBody>
+                  <a:tcPr marL="64008" marR="64008" marT="0" marB="0" anchor="ctr">
+                    <a:lnL w="6350" cap="flat" cmpd="sng" algn="ctr">
+                      <a:solidFill>
+                        <a:srgbClr val="D5DBE3"/>
+                      </a:solidFill>
+                      <a:prstDash val="solid"/>
+                      <a:round/>
+                      <a:headEnd type="none" w="med" len="med"/>
+                      <a:tailEnd type="none" w="med" len="med"/>
+                    </a:lnL>
+                    <a:lnR w="6350" cap="flat" cmpd="sng" algn="ctr">
+                      <a:solidFill>
+                        <a:srgbClr val="D5DBE3"/>
+                      </a:solidFill>
+                      <a:prstDash val="solid"/>
+                      <a:round/>
+                      <a:headEnd type="none" w="med" len="med"/>
+                      <a:tailEnd type="none" w="med" len="med"/>
+                    </a:lnR>
+                    <a:lnT w="6350" cap="flat" cmpd="sng" algn="ctr">
+                      <a:solidFill>
+                        <a:srgbClr val="D5DBE3"/>
+                      </a:solidFill>
+                      <a:prstDash val="solid"/>
+                      <a:round/>
+                      <a:headEnd type="none" w="med" len="med"/>
+                      <a:tailEnd type="none" w="med" len="med"/>
+                    </a:lnT>
+                    <a:lnB w="6350" cap="flat" cmpd="sng" algn="ctr">
+                      <a:solidFill>
+                        <a:srgbClr val="D5DBE3"/>
+                      </a:solidFill>
+                      <a:prstDash val="solid"/>
+                      <a:round/>
+                      <a:headEnd type="none" w="med" len="med"/>
+                      <a:tailEnd type="none" w="med" len="med"/>
+                    </a:lnB>
+                    <a:solidFill>
+                      <a:srgbClr val="002C50"/>
+                    </a:solidFill>
+                  </a:tcPr>
+                </a:tc>
+                <a:tc>
+                  <a:txBody>
+                    <a:bodyPr/>
+                    <a:lstStyle/>
+                    <a:p>
+                      <a:pPr algn="ctr" indent="0" marL="0">
+                        <a:buNone/>
+                      </a:pPr>
+                      <a:r>
+                        <a:rPr lang="en-US" sz="850" b="1" dirty="0">
+                          <a:solidFill>
+                            <a:srgbClr val="FFFFFF"/>
+                          </a:solidFill>
+                          <a:latin typeface="Calibri" pitchFamily="34" charset="0"/>
+                          <a:ea typeface="Calibri" pitchFamily="34" charset="-122"/>
+                          <a:cs typeface="Calibri" pitchFamily="34" charset="-120"/>
+                        </a:rPr>
+                        <a:t>Reste à financer</a:t>
+                      </a:r>
+                      <a:endParaRPr lang="en-US" sz="850" dirty="0">
+                        <a:latin typeface="Calibri" charset="0"/>
+                        <a:ea typeface="Calibri" charset="0"/>
+                        <a:cs typeface="Calibri" charset="0"/>
+                      </a:endParaRPr>
+                    </a:p>
+                  </a:txBody>
+                  <a:tcPr marL="64008" marR="64008" marT="0" marB="0" anchor="ctr">
+                    <a:lnL w="6350" cap="flat" cmpd="sng" algn="ctr">
+                      <a:solidFill>
+                        <a:srgbClr val="D5DBE3"/>
+                      </a:solidFill>
+                      <a:prstDash val="solid"/>
+                      <a:round/>
+                      <a:headEnd type="none" w="med" len="med"/>
+                      <a:tailEnd type="none" w="med" len="med"/>
+                    </a:lnL>
+                    <a:lnR w="6350" cap="flat" cmpd="sng" algn="ctr">
+                      <a:solidFill>
+                        <a:srgbClr val="D5DBE3"/>
+                      </a:solidFill>
+                      <a:prstDash val="solid"/>
+                      <a:round/>
+                      <a:headEnd type="none" w="med" len="med"/>
+                      <a:tailEnd type="none" w="med" len="med"/>
+                    </a:lnR>
+                    <a:lnT w="6350" cap="flat" cmpd="sng" algn="ctr">
+                      <a:solidFill>
+                        <a:srgbClr val="D5DBE3"/>
+                      </a:solidFill>
+                      <a:prstDash val="solid"/>
+                      <a:round/>
+                      <a:headEnd type="none" w="med" len="med"/>
+                      <a:tailEnd type="none" w="med" len="med"/>
+                    </a:lnT>
+                    <a:lnB w="6350" cap="flat" cmpd="sng" algn="ctr">
+                      <a:solidFill>
+                        <a:srgbClr val="D5DBE3"/>
+                      </a:solidFill>
+                      <a:prstDash val="solid"/>
+                      <a:round/>
+                      <a:headEnd type="none" w="med" len="med"/>
+                      <a:tailEnd type="none" w="med" len="med"/>
+                    </a:lnB>
+                    <a:solidFill>
+                      <a:srgbClr val="002C50"/>
+                    </a:solidFill>
+                  </a:tcPr>
+                </a:tc>
+              </a:tr>
+              <a:tr h="224028">
+                <a:tc>
+                  <a:txBody>
+                    <a:bodyPr/>
+                    <a:lstStyle/>
+                    <a:p>
+                      <a:pPr algn="l" indent="0" marL="0">
+                        <a:buNone/>
+                      </a:pPr>
+                      <a:r>
+                        <a:rPr lang="en-US" sz="850" b="1" dirty="0">
+                          <a:solidFill>
+                            <a:srgbClr val="1F2933"/>
+                          </a:solidFill>
+                          <a:latin typeface="Calibri" pitchFamily="34" charset="0"/>
+                          <a:ea typeface="Calibri" pitchFamily="34" charset="-122"/>
+                          <a:cs typeface="Calibri" pitchFamily="34" charset="-120"/>
+                        </a:rPr>
+                        <a:t>TERASSON – projet</a:t>
+                      </a:r>
+                      <a:endParaRPr lang="en-US" sz="850" dirty="0">
+                        <a:latin typeface="Calibri" charset="0"/>
+                        <a:ea typeface="Calibri" charset="0"/>
+                        <a:cs typeface="Calibri" charset="0"/>
+                      </a:endParaRPr>
+                    </a:p>
+                  </a:txBody>
+                  <a:tcPr marL="64008" marR="64008" marT="0" marB="0" anchor="ctr">
+                    <a:lnL w="6350" cap="flat" cmpd="sng" algn="ctr">
+                      <a:solidFill>
+                        <a:srgbClr val="D5DBE3"/>
+                      </a:solidFill>
+                      <a:prstDash val="solid"/>
+                      <a:round/>
+                      <a:headEnd type="none" w="med" len="med"/>
+                      <a:tailEnd type="none" w="med" len="med"/>
+                    </a:lnL>
+                    <a:lnR w="6350" cap="flat" cmpd="sng" algn="ctr">
+                      <a:solidFill>
+                        <a:srgbClr val="D5DBE3"/>
+                      </a:solidFill>
+                      <a:prstDash val="solid"/>
+                      <a:round/>
+                      <a:headEnd type="none" w="med" len="med"/>
+                      <a:tailEnd type="none" w="med" len="med"/>
+                    </a:lnR>
+                    <a:lnT w="6350" cap="flat" cmpd="sng" algn="ctr">
+                      <a:solidFill>
+                        <a:srgbClr val="D5DBE3"/>
+                      </a:solidFill>
+                      <a:prstDash val="solid"/>
+                      <a:round/>
+                      <a:headEnd type="none" w="med" len="med"/>
+                      <a:tailEnd type="none" w="med" len="med"/>
+                    </a:lnT>
+                    <a:lnB w="6350" cap="flat" cmpd="sng" algn="ctr">
+                      <a:solidFill>
+                        <a:srgbClr val="D5DBE3"/>
+                      </a:solidFill>
+                      <a:prstDash val="solid"/>
+                      <a:round/>
+                      <a:headEnd type="none" w="med" len="med"/>
+                      <a:tailEnd type="none" w="med" len="med"/>
+                    </a:lnB>
+                  </a:tcPr>
+                </a:tc>
+                <a:tc>
+                  <a:txBody>
+                    <a:bodyPr/>
+                    <a:lstStyle/>
+                    <a:p>
+                      <a:pPr algn="r" indent="0" marL="0">
+                        <a:buNone/>
+                      </a:pPr>
+                      <a:r>
+                        <a:rPr lang="en-US" sz="850" dirty="0">
+                          <a:solidFill>
+                            <a:srgbClr val="1F2933"/>
+                          </a:solidFill>
+                          <a:latin typeface="Calibri" pitchFamily="34" charset="0"/>
+                          <a:ea typeface="Calibri" pitchFamily="34" charset="-122"/>
+                          <a:cs typeface="Calibri" pitchFamily="34" charset="-120"/>
+                        </a:rPr>
+                        <a:t>1 481,9</a:t>
+                      </a:r>
+                      <a:endParaRPr lang="en-US" sz="850" dirty="0">
+                        <a:latin typeface="Calibri" charset="0"/>
+                        <a:ea typeface="Calibri" charset="0"/>
+                        <a:cs typeface="Calibri" charset="0"/>
+                      </a:endParaRPr>
+                    </a:p>
+                  </a:txBody>
+                  <a:tcPr marL="64008" marR="64008" marT="0" marB="0" anchor="ctr">
+                    <a:lnL w="6350" cap="flat" cmpd="sng" algn="ctr">
+                      <a:solidFill>
+                        <a:srgbClr val="D5DBE3"/>
+                      </a:solidFill>
+                      <a:prstDash val="solid"/>
+                      <a:round/>
+                      <a:headEnd type="none" w="med" len="med"/>
+                      <a:tailEnd type="none" w="med" len="med"/>
+                    </a:lnL>
+                    <a:lnR w="6350" cap="flat" cmpd="sng" algn="ctr">
+                      <a:solidFill>
+                        <a:srgbClr val="D5DBE3"/>
+                      </a:solidFill>
+                      <a:prstDash val="solid"/>
+                      <a:round/>
+                      <a:headEnd type="none" w="med" len="med"/>
+                      <a:tailEnd type="none" w="med" len="med"/>
+                    </a:lnR>
+                    <a:lnT w="6350" cap="flat" cmpd="sng" algn="ctr">
+                      <a:solidFill>
+                        <a:srgbClr val="D5DBE3"/>
+                      </a:solidFill>
+                      <a:prstDash val="solid"/>
+                      <a:round/>
+                      <a:headEnd type="none" w="med" len="med"/>
+                      <a:tailEnd type="none" w="med" len="med"/>
+                    </a:lnT>
+                    <a:lnB w="6350" cap="flat" cmpd="sng" algn="ctr">
+                      <a:solidFill>
+                        <a:srgbClr val="D5DBE3"/>
+                      </a:solidFill>
+                      <a:prstDash val="solid"/>
+                      <a:round/>
+                      <a:headEnd type="none" w="med" len="med"/>
+                      <a:tailEnd type="none" w="med" len="med"/>
+                    </a:lnB>
+                  </a:tcPr>
+                </a:tc>
+                <a:tc>
+                  <a:txBody>
+                    <a:bodyPr/>
+                    <a:lstStyle/>
+                    <a:p>
+                      <a:pPr algn="r" indent="0" marL="0">
+                        <a:buNone/>
+                      </a:pPr>
+                      <a:r>
+                        <a:rPr lang="en-US" sz="850" dirty="0">
+                          <a:solidFill>
+                            <a:srgbClr val="1F2933"/>
+                          </a:solidFill>
+                          <a:latin typeface="Calibri" pitchFamily="34" charset="0"/>
+                          <a:ea typeface="Calibri" pitchFamily="34" charset="-122"/>
+                          <a:cs typeface="Calibri" pitchFamily="34" charset="-120"/>
+                        </a:rPr>
+                        <a:t>-2 202,1</a:t>
+                      </a:r>
+                      <a:endParaRPr lang="en-US" sz="850" dirty="0">
+                        <a:latin typeface="Calibri" charset="0"/>
+                        <a:ea typeface="Calibri" charset="0"/>
+                        <a:cs typeface="Calibri" charset="0"/>
+                      </a:endParaRPr>
+                    </a:p>
+                  </a:txBody>
+                  <a:tcPr marL="64008" marR="64008" marT="0" marB="0" anchor="ctr">
+                    <a:lnL w="6350" cap="flat" cmpd="sng" algn="ctr">
+                      <a:solidFill>
+                        <a:srgbClr val="D5DBE3"/>
+                      </a:solidFill>
+                      <a:prstDash val="solid"/>
+                      <a:round/>
+                      <a:headEnd type="none" w="med" len="med"/>
+                      <a:tailEnd type="none" w="med" len="med"/>
+                    </a:lnL>
+                    <a:lnR w="6350" cap="flat" cmpd="sng" algn="ctr">
+                      <a:solidFill>
+                        <a:srgbClr val="D5DBE3"/>
+                      </a:solidFill>
+                      <a:prstDash val="solid"/>
+                      <a:round/>
+                      <a:headEnd type="none" w="med" len="med"/>
+                      <a:tailEnd type="none" w="med" len="med"/>
+                    </a:lnR>
+                    <a:lnT w="6350" cap="flat" cmpd="sng" algn="ctr">
+                      <a:solidFill>
+                        <a:srgbClr val="D5DBE3"/>
+                      </a:solidFill>
+                      <a:prstDash val="solid"/>
+                      <a:round/>
+                      <a:headEnd type="none" w="med" len="med"/>
+                      <a:tailEnd type="none" w="med" len="med"/>
+                    </a:lnT>
+                    <a:lnB w="6350" cap="flat" cmpd="sng" algn="ctr">
+                      <a:solidFill>
+                        <a:srgbClr val="D5DBE3"/>
+                      </a:solidFill>
+                      <a:prstDash val="solid"/>
+                      <a:round/>
+                      <a:headEnd type="none" w="med" len="med"/>
+                      <a:tailEnd type="none" w="med" len="med"/>
+                    </a:lnB>
+                  </a:tcPr>
+                </a:tc>
+                <a:tc>
+                  <a:txBody>
+                    <a:bodyPr/>
+                    <a:lstStyle/>
+                    <a:p>
+                      <a:pPr algn="r" indent="0" marL="0">
+                        <a:buNone/>
+                      </a:pPr>
+                      <a:r>
+                        <a:rPr lang="en-US" sz="850" dirty="0">
+                          <a:solidFill>
+                            <a:srgbClr val="1F2933"/>
+                          </a:solidFill>
+                          <a:latin typeface="Calibri" pitchFamily="34" charset="0"/>
+                          <a:ea typeface="Calibri" pitchFamily="34" charset="-122"/>
+                          <a:cs typeface="Calibri" pitchFamily="34" charset="-120"/>
+                        </a:rPr>
+                        <a:t>–</a:t>
+                      </a:r>
+                      <a:endParaRPr lang="en-US" sz="850" dirty="0">
+                        <a:latin typeface="Calibri" charset="0"/>
+                        <a:ea typeface="Calibri" charset="0"/>
+                        <a:cs typeface="Calibri" charset="0"/>
+                      </a:endParaRPr>
+                    </a:p>
+                  </a:txBody>
+                  <a:tcPr marL="64008" marR="64008" marT="0" marB="0" anchor="ctr">
+                    <a:lnL w="6350" cap="flat" cmpd="sng" algn="ctr">
+                      <a:solidFill>
+                        <a:srgbClr val="D5DBE3"/>
+                      </a:solidFill>
+                      <a:prstDash val="solid"/>
+                      <a:round/>
+                      <a:headEnd type="none" w="med" len="med"/>
+                      <a:tailEnd type="none" w="med" len="med"/>
+                    </a:lnL>
+                    <a:lnR w="6350" cap="flat" cmpd="sng" algn="ctr">
+                      <a:solidFill>
+                        <a:srgbClr val="D5DBE3"/>
+                      </a:solidFill>
+                      <a:prstDash val="solid"/>
+                      <a:round/>
+                      <a:headEnd type="none" w="med" len="med"/>
+                      <a:tailEnd type="none" w="med" len="med"/>
+                    </a:lnR>
+                    <a:lnT w="6350" cap="flat" cmpd="sng" algn="ctr">
+                      <a:solidFill>
+                        <a:srgbClr val="D5DBE3"/>
+                      </a:solidFill>
+                      <a:prstDash val="solid"/>
+                      <a:round/>
+                      <a:headEnd type="none" w="med" len="med"/>
+                      <a:tailEnd type="none" w="med" len="med"/>
+                    </a:lnT>
+                    <a:lnB w="6350" cap="flat" cmpd="sng" algn="ctr">
+                      <a:solidFill>
+                        <a:srgbClr val="D5DBE3"/>
+                      </a:solidFill>
+                      <a:prstDash val="solid"/>
+                      <a:round/>
+                      <a:headEnd type="none" w="med" len="med"/>
+                      <a:tailEnd type="none" w="med" len="med"/>
+                    </a:lnB>
+                  </a:tcPr>
+                </a:tc>
+                <a:tc>
+                  <a:txBody>
+                    <a:bodyPr/>
+                    <a:lstStyle/>
+                    <a:p>
+                      <a:pPr algn="r" indent="0" marL="0">
+                        <a:buNone/>
+                      </a:pPr>
+                      <a:r>
+                        <a:rPr lang="en-US" sz="850" b="1" dirty="0">
+                          <a:solidFill>
+                            <a:srgbClr val="B3261E"/>
+                          </a:solidFill>
+                          <a:latin typeface="Calibri" pitchFamily="34" charset="0"/>
+                          <a:ea typeface="Calibri" pitchFamily="34" charset="-122"/>
+                          <a:cs typeface="Calibri" pitchFamily="34" charset="-120"/>
+                        </a:rPr>
+                        <a:t>-720,2</a:t>
+                      </a:r>
+                      <a:endParaRPr lang="en-US" sz="850" dirty="0">
+                        <a:latin typeface="Calibri" charset="0"/>
+                        <a:ea typeface="Calibri" charset="0"/>
+                        <a:cs typeface="Calibri" charset="0"/>
+                      </a:endParaRPr>
+                    </a:p>
+                  </a:txBody>
+                  <a:tcPr marL="64008" marR="64008" marT="0" marB="0" anchor="ctr">
+                    <a:lnL w="6350" cap="flat" cmpd="sng" algn="ctr">
+                      <a:solidFill>
+                        <a:srgbClr val="D5DBE3"/>
+                      </a:solidFill>
+                      <a:prstDash val="solid"/>
+                      <a:round/>
+                      <a:headEnd type="none" w="med" len="med"/>
+                      <a:tailEnd type="none" w="med" len="med"/>
+                    </a:lnL>
+                    <a:lnR w="6350" cap="flat" cmpd="sng" algn="ctr">
+                      <a:solidFill>
+                        <a:srgbClr val="D5DBE3"/>
+                      </a:solidFill>
+                      <a:prstDash val="solid"/>
+                      <a:round/>
+                      <a:headEnd type="none" w="med" len="med"/>
+                      <a:tailEnd type="none" w="med" len="med"/>
+                    </a:lnR>
+                    <a:lnT w="6350" cap="flat" cmpd="sng" algn="ctr">
+                      <a:solidFill>
+                        <a:srgbClr val="D5DBE3"/>
+                      </a:solidFill>
+                      <a:prstDash val="solid"/>
+                      <a:round/>
+                      <a:headEnd type="none" w="med" len="med"/>
+                      <a:tailEnd type="none" w="med" len="med"/>
+                    </a:lnT>
+                    <a:lnB w="6350" cap="flat" cmpd="sng" algn="ctr">
+                      <a:solidFill>
+                        <a:srgbClr val="D5DBE3"/>
+                      </a:solidFill>
+                      <a:prstDash val="solid"/>
+                      <a:round/>
+                      <a:headEnd type="none" w="med" len="med"/>
+                      <a:tailEnd type="none" w="med" len="med"/>
+                    </a:lnB>
+                    <a:solidFill>
+                      <a:srgbClr val="F7E7E5"/>
+                    </a:solidFill>
+                  </a:tcPr>
+                </a:tc>
+                <a:tc>
+                  <a:txBody>
+                    <a:bodyPr/>
+                    <a:lstStyle/>
+                    <a:p>
+                      <a:pPr algn="r" indent="0" marL="0">
+                        <a:buNone/>
+                      </a:pPr>
+                      <a:r>
+                        <a:rPr lang="en-US" sz="850" b="1" dirty="0">
+                          <a:solidFill>
+                            <a:srgbClr val="B3261E"/>
+                          </a:solidFill>
+                          <a:latin typeface="Calibri" pitchFamily="34" charset="0"/>
+                          <a:ea typeface="Calibri" pitchFamily="34" charset="-122"/>
+                          <a:cs typeface="Calibri" pitchFamily="34" charset="-120"/>
+                        </a:rPr>
+                        <a:t>720,2</a:t>
+                      </a:r>
+                      <a:endParaRPr lang="en-US" sz="850" dirty="0">
+                        <a:latin typeface="Calibri" charset="0"/>
+                        <a:ea typeface="Calibri" charset="0"/>
+                        <a:cs typeface="Calibri" charset="0"/>
+                      </a:endParaRPr>
+                    </a:p>
+                  </a:txBody>
+                  <a:tcPr marL="64008" marR="64008" marT="0" marB="0" anchor="ctr">
+                    <a:lnL w="6350" cap="flat" cmpd="sng" algn="ctr">
+                      <a:solidFill>
+                        <a:srgbClr val="D5DBE3"/>
+                      </a:solidFill>
+                      <a:prstDash val="solid"/>
+                      <a:round/>
+                      <a:headEnd type="none" w="med" len="med"/>
+                      <a:tailEnd type="none" w="med" len="med"/>
+                    </a:lnL>
+                    <a:lnR w="6350" cap="flat" cmpd="sng" algn="ctr">
+                      <a:solidFill>
+                        <a:srgbClr val="D5DBE3"/>
+                      </a:solidFill>
+                      <a:prstDash val="solid"/>
+                      <a:round/>
+                      <a:headEnd type="none" w="med" len="med"/>
+                      <a:tailEnd type="none" w="med" len="med"/>
+                    </a:lnR>
+                    <a:lnT w="6350" cap="flat" cmpd="sng" algn="ctr">
+                      <a:solidFill>
+                        <a:srgbClr val="D5DBE3"/>
+                      </a:solidFill>
+                      <a:prstDash val="solid"/>
+                      <a:round/>
+                      <a:headEnd type="none" w="med" len="med"/>
+                      <a:tailEnd type="none" w="med" len="med"/>
+                    </a:lnT>
+                    <a:lnB w="6350" cap="flat" cmpd="sng" algn="ctr">
+                      <a:solidFill>
+                        <a:srgbClr val="D5DBE3"/>
+                      </a:solidFill>
+                      <a:prstDash val="solid"/>
+                      <a:round/>
+                      <a:headEnd type="none" w="med" len="med"/>
+                      <a:tailEnd type="none" w="med" len="med"/>
+                    </a:lnB>
+                    <a:solidFill>
+                      <a:srgbClr val="F7E7E5"/>
+                    </a:solidFill>
+                  </a:tcPr>
+                </a:tc>
+              </a:tr>
+              <a:tr h="224028">
+                <a:tc>
+                  <a:txBody>
+                    <a:bodyPr/>
+                    <a:lstStyle/>
+                    <a:p>
+                      <a:pPr algn="l" indent="0" marL="0">
+                        <a:buNone/>
+                      </a:pPr>
+                      <a:r>
+                        <a:rPr lang="en-US" sz="850" b="1" dirty="0">
+                          <a:solidFill>
+                            <a:srgbClr val="1F2933"/>
+                          </a:solidFill>
+                          <a:latin typeface="Calibri" pitchFamily="34" charset="0"/>
+                          <a:ea typeface="Calibri" pitchFamily="34" charset="-122"/>
+                          <a:cs typeface="Calibri" pitchFamily="34" charset="-120"/>
+                        </a:rPr>
+                        <a:t>TERASSON</a:t>
+                      </a:r>
+                      <a:endParaRPr lang="en-US" sz="850" dirty="0">
+                        <a:latin typeface="Calibri" charset="0"/>
+                        <a:ea typeface="Calibri" charset="0"/>
+                        <a:cs typeface="Calibri" charset="0"/>
+                      </a:endParaRPr>
+                    </a:p>
+                  </a:txBody>
+                  <a:tcPr marL="64008" marR="64008" marT="0" marB="0" anchor="ctr">
+                    <a:lnL w="6350" cap="flat" cmpd="sng" algn="ctr">
+                      <a:solidFill>
+                        <a:srgbClr val="D5DBE3"/>
+                      </a:solidFill>
+                      <a:prstDash val="solid"/>
+                      <a:round/>
+                      <a:headEnd type="none" w="med" len="med"/>
+                      <a:tailEnd type="none" w="med" len="med"/>
+                    </a:lnL>
+                    <a:lnR w="6350" cap="flat" cmpd="sng" algn="ctr">
+                      <a:solidFill>
+                        <a:srgbClr val="D5DBE3"/>
+                      </a:solidFill>
+                      <a:prstDash val="solid"/>
+                      <a:round/>
+                      <a:headEnd type="none" w="med" len="med"/>
+                      <a:tailEnd type="none" w="med" len="med"/>
+                    </a:lnR>
+                    <a:lnT w="6350" cap="flat" cmpd="sng" algn="ctr">
+                      <a:solidFill>
+                        <a:srgbClr val="D5DBE3"/>
+                      </a:solidFill>
+                      <a:prstDash val="solid"/>
+                      <a:round/>
+                      <a:headEnd type="none" w="med" len="med"/>
+                      <a:tailEnd type="none" w="med" len="med"/>
+                    </a:lnT>
+                    <a:lnB w="6350" cap="flat" cmpd="sng" algn="ctr">
+                      <a:solidFill>
+                        <a:srgbClr val="D5DBE3"/>
+                      </a:solidFill>
+                      <a:prstDash val="solid"/>
+                      <a:round/>
+                      <a:headEnd type="none" w="med" len="med"/>
+                      <a:tailEnd type="none" w="med" len="med"/>
+                    </a:lnB>
+                  </a:tcPr>
+                </a:tc>
+                <a:tc>
+                  <a:txBody>
+                    <a:bodyPr/>
+                    <a:lstStyle/>
+                    <a:p>
+                      <a:pPr algn="r" indent="0" marL="0">
+                        <a:buNone/>
+                      </a:pPr>
+                      <a:r>
+                        <a:rPr lang="en-US" sz="850" dirty="0">
+                          <a:solidFill>
+                            <a:srgbClr val="1F2933"/>
+                          </a:solidFill>
+                          <a:latin typeface="Calibri" pitchFamily="34" charset="0"/>
+                          <a:ea typeface="Calibri" pitchFamily="34" charset="-122"/>
+                          <a:cs typeface="Calibri" pitchFamily="34" charset="-120"/>
+                        </a:rPr>
+                        <a:t>58,3</a:t>
+                      </a:r>
+                      <a:endParaRPr lang="en-US" sz="850" dirty="0">
+                        <a:latin typeface="Calibri" charset="0"/>
+                        <a:ea typeface="Calibri" charset="0"/>
+                        <a:cs typeface="Calibri" charset="0"/>
+                      </a:endParaRPr>
+                    </a:p>
+                  </a:txBody>
+                  <a:tcPr marL="64008" marR="64008" marT="0" marB="0" anchor="ctr">
+                    <a:lnL w="6350" cap="flat" cmpd="sng" algn="ctr">
+                      <a:solidFill>
+                        <a:srgbClr val="D5DBE3"/>
+                      </a:solidFill>
+                      <a:prstDash val="solid"/>
+                      <a:round/>
+                      <a:headEnd type="none" w="med" len="med"/>
+                      <a:tailEnd type="none" w="med" len="med"/>
+                    </a:lnL>
+                    <a:lnR w="6350" cap="flat" cmpd="sng" algn="ctr">
+                      <a:solidFill>
+                        <a:srgbClr val="D5DBE3"/>
+                      </a:solidFill>
+                      <a:prstDash val="solid"/>
+                      <a:round/>
+                      <a:headEnd type="none" w="med" len="med"/>
+                      <a:tailEnd type="none" w="med" len="med"/>
+                    </a:lnR>
+                    <a:lnT w="6350" cap="flat" cmpd="sng" algn="ctr">
+                      <a:solidFill>
+                        <a:srgbClr val="D5DBE3"/>
+                      </a:solidFill>
+                      <a:prstDash val="solid"/>
+                      <a:round/>
+                      <a:headEnd type="none" w="med" len="med"/>
+                      <a:tailEnd type="none" w="med" len="med"/>
+                    </a:lnT>
+                    <a:lnB w="6350" cap="flat" cmpd="sng" algn="ctr">
+                      <a:solidFill>
+                        <a:srgbClr val="D5DBE3"/>
+                      </a:solidFill>
+                      <a:prstDash val="solid"/>
+                      <a:round/>
+                      <a:headEnd type="none" w="med" len="med"/>
+                      <a:tailEnd type="none" w="med" len="med"/>
+                    </a:lnB>
+                  </a:tcPr>
+                </a:tc>
+                <a:tc>
+                  <a:txBody>
+                    <a:bodyPr/>
+                    <a:lstStyle/>
+                    <a:p>
+                      <a:pPr algn="r" indent="0" marL="0">
+                        <a:buNone/>
+                      </a:pPr>
+                      <a:r>
+                        <a:rPr lang="en-US" sz="850" dirty="0">
+                          <a:solidFill>
+                            <a:srgbClr val="1F2933"/>
+                          </a:solidFill>
+                          <a:latin typeface="Calibri" pitchFamily="34" charset="0"/>
+                          <a:ea typeface="Calibri" pitchFamily="34" charset="-122"/>
+                          <a:cs typeface="Calibri" pitchFamily="34" charset="-120"/>
+                        </a:rPr>
+                        <a:t>-264,6</a:t>
+                      </a:r>
+                      <a:endParaRPr lang="en-US" sz="850" dirty="0">
+                        <a:latin typeface="Calibri" charset="0"/>
+                        <a:ea typeface="Calibri" charset="0"/>
+                        <a:cs typeface="Calibri" charset="0"/>
+                      </a:endParaRPr>
+                    </a:p>
+                  </a:txBody>
+                  <a:tcPr marL="64008" marR="64008" marT="0" marB="0" anchor="ctr">
+                    <a:lnL w="6350" cap="flat" cmpd="sng" algn="ctr">
+                      <a:solidFill>
+                        <a:srgbClr val="D5DBE3"/>
+                      </a:solidFill>
+                      <a:prstDash val="solid"/>
+                      <a:round/>
+                      <a:headEnd type="none" w="med" len="med"/>
+                      <a:tailEnd type="none" w="med" len="med"/>
+                    </a:lnL>
+                    <a:lnR w="6350" cap="flat" cmpd="sng" algn="ctr">
+                      <a:solidFill>
+                        <a:srgbClr val="D5DBE3"/>
+                      </a:solidFill>
+                      <a:prstDash val="solid"/>
+                      <a:round/>
+                      <a:headEnd type="none" w="med" len="med"/>
+                      <a:tailEnd type="none" w="med" len="med"/>
+                    </a:lnR>
+                    <a:lnT w="6350" cap="flat" cmpd="sng" algn="ctr">
+                      <a:solidFill>
+                        <a:srgbClr val="D5DBE3"/>
+                      </a:solidFill>
+                      <a:prstDash val="solid"/>
+                      <a:round/>
+                      <a:headEnd type="none" w="med" len="med"/>
+                      <a:tailEnd type="none" w="med" len="med"/>
+                    </a:lnT>
+                    <a:lnB w="6350" cap="flat" cmpd="sng" algn="ctr">
+                      <a:solidFill>
+                        <a:srgbClr val="D5DBE3"/>
+                      </a:solidFill>
+                      <a:prstDash val="solid"/>
+                      <a:round/>
+                      <a:headEnd type="none" w="med" len="med"/>
+                      <a:tailEnd type="none" w="med" len="med"/>
+                    </a:lnB>
+                  </a:tcPr>
+                </a:tc>
+                <a:tc>
+                  <a:txBody>
+                    <a:bodyPr/>
+                    <a:lstStyle/>
+                    <a:p>
+                      <a:pPr algn="r" indent="0" marL="0">
+                        <a:buNone/>
+                      </a:pPr>
+                      <a:r>
+                        <a:rPr lang="en-US" sz="850" dirty="0">
+                          <a:solidFill>
+                            <a:srgbClr val="1F2933"/>
+                          </a:solidFill>
+                          <a:latin typeface="Calibri" pitchFamily="34" charset="0"/>
+                          <a:ea typeface="Calibri" pitchFamily="34" charset="-122"/>
+                          <a:cs typeface="Calibri" pitchFamily="34" charset="-120"/>
+                        </a:rPr>
+                        <a:t>–</a:t>
+                      </a:r>
+                      <a:endParaRPr lang="en-US" sz="850" dirty="0">
+                        <a:latin typeface="Calibri" charset="0"/>
+                        <a:ea typeface="Calibri" charset="0"/>
+                        <a:cs typeface="Calibri" charset="0"/>
+                      </a:endParaRPr>
+                    </a:p>
+                  </a:txBody>
+                  <a:tcPr marL="64008" marR="64008" marT="0" marB="0" anchor="ctr">
+                    <a:lnL w="6350" cap="flat" cmpd="sng" algn="ctr">
+                      <a:solidFill>
+                        <a:srgbClr val="D5DBE3"/>
+                      </a:solidFill>
+                      <a:prstDash val="solid"/>
+                      <a:round/>
+                      <a:headEnd type="none" w="med" len="med"/>
+                      <a:tailEnd type="none" w="med" len="med"/>
+                    </a:lnL>
+                    <a:lnR w="6350" cap="flat" cmpd="sng" algn="ctr">
+                      <a:solidFill>
+                        <a:srgbClr val="D5DBE3"/>
+                      </a:solidFill>
+                      <a:prstDash val="solid"/>
+                      <a:round/>
+                      <a:headEnd type="none" w="med" len="med"/>
+                      <a:tailEnd type="none" w="med" len="med"/>
+                    </a:lnR>
+                    <a:lnT w="6350" cap="flat" cmpd="sng" algn="ctr">
+                      <a:solidFill>
+                        <a:srgbClr val="D5DBE3"/>
+                      </a:solidFill>
+                      <a:prstDash val="solid"/>
+                      <a:round/>
+                      <a:headEnd type="none" w="med" len="med"/>
+                      <a:tailEnd type="none" w="med" len="med"/>
+                    </a:lnT>
+                    <a:lnB w="6350" cap="flat" cmpd="sng" algn="ctr">
+                      <a:solidFill>
+                        <a:srgbClr val="D5DBE3"/>
+                      </a:solidFill>
+                      <a:prstDash val="solid"/>
+                      <a:round/>
+                      <a:headEnd type="none" w="med" len="med"/>
+                      <a:tailEnd type="none" w="med" len="med"/>
+                    </a:lnB>
+                  </a:tcPr>
+                </a:tc>
+                <a:tc>
+                  <a:txBody>
+                    <a:bodyPr/>
+                    <a:lstStyle/>
+                    <a:p>
+                      <a:pPr algn="r" indent="0" marL="0">
+                        <a:buNone/>
+                      </a:pPr>
+                      <a:r>
+                        <a:rPr lang="en-US" sz="850" b="1" dirty="0">
+                          <a:solidFill>
+                            <a:srgbClr val="B3261E"/>
+                          </a:solidFill>
+                          <a:latin typeface="Calibri" pitchFamily="34" charset="0"/>
+                          <a:ea typeface="Calibri" pitchFamily="34" charset="-122"/>
+                          <a:cs typeface="Calibri" pitchFamily="34" charset="-120"/>
+                        </a:rPr>
+                        <a:t>-206,4</a:t>
+                      </a:r>
+                      <a:endParaRPr lang="en-US" sz="850" dirty="0">
+                        <a:latin typeface="Calibri" charset="0"/>
+                        <a:ea typeface="Calibri" charset="0"/>
+                        <a:cs typeface="Calibri" charset="0"/>
+                      </a:endParaRPr>
+                    </a:p>
+                  </a:txBody>
+                  <a:tcPr marL="64008" marR="64008" marT="0" marB="0" anchor="ctr">
+                    <a:lnL w="6350" cap="flat" cmpd="sng" algn="ctr">
+                      <a:solidFill>
+                        <a:srgbClr val="D5DBE3"/>
+                      </a:solidFill>
+                      <a:prstDash val="solid"/>
+                      <a:round/>
+                      <a:headEnd type="none" w="med" len="med"/>
+                      <a:tailEnd type="none" w="med" len="med"/>
+                    </a:lnL>
+                    <a:lnR w="6350" cap="flat" cmpd="sng" algn="ctr">
+                      <a:solidFill>
+                        <a:srgbClr val="D5DBE3"/>
+                      </a:solidFill>
+                      <a:prstDash val="solid"/>
+                      <a:round/>
+                      <a:headEnd type="none" w="med" len="med"/>
+                      <a:tailEnd type="none" w="med" len="med"/>
+                    </a:lnR>
+                    <a:lnT w="6350" cap="flat" cmpd="sng" algn="ctr">
+                      <a:solidFill>
+                        <a:srgbClr val="D5DBE3"/>
+                      </a:solidFill>
+                      <a:prstDash val="solid"/>
+                      <a:round/>
+                      <a:headEnd type="none" w="med" len="med"/>
+                      <a:tailEnd type="none" w="med" len="med"/>
+                    </a:lnT>
+                    <a:lnB w="6350" cap="flat" cmpd="sng" algn="ctr">
+                      <a:solidFill>
+                        <a:srgbClr val="D5DBE3"/>
+                      </a:solidFill>
+                      <a:prstDash val="solid"/>
+                      <a:round/>
+                      <a:headEnd type="none" w="med" len="med"/>
+                      <a:tailEnd type="none" w="med" len="med"/>
+                    </a:lnB>
+                    <a:solidFill>
+                      <a:srgbClr val="F7E7E5"/>
+                    </a:solidFill>
+                  </a:tcPr>
+                </a:tc>
+                <a:tc>
+                  <a:txBody>
+                    <a:bodyPr/>
+                    <a:lstStyle/>
+                    <a:p>
+                      <a:pPr algn="r" indent="0" marL="0">
+                        <a:buNone/>
+                      </a:pPr>
+                      <a:r>
+                        <a:rPr lang="en-US" sz="850" b="1" dirty="0">
+                          <a:solidFill>
+                            <a:srgbClr val="B3261E"/>
+                          </a:solidFill>
+                          <a:latin typeface="Calibri" pitchFamily="34" charset="0"/>
+                          <a:ea typeface="Calibri" pitchFamily="34" charset="-122"/>
+                          <a:cs typeface="Calibri" pitchFamily="34" charset="-120"/>
+                        </a:rPr>
+                        <a:t>206,4</a:t>
+                      </a:r>
+                      <a:endParaRPr lang="en-US" sz="850" dirty="0">
+                        <a:latin typeface="Calibri" charset="0"/>
+                        <a:ea typeface="Calibri" charset="0"/>
+                        <a:cs typeface="Calibri" charset="0"/>
+                      </a:endParaRPr>
+                    </a:p>
+                  </a:txBody>
+                  <a:tcPr marL="64008" marR="64008" marT="0" marB="0" anchor="ctr">
+                    <a:lnL w="6350" cap="flat" cmpd="sng" algn="ctr">
+                      <a:solidFill>
+                        <a:srgbClr val="D5DBE3"/>
+                      </a:solidFill>
+                      <a:prstDash val="solid"/>
+                      <a:round/>
+                      <a:headEnd type="none" w="med" len="med"/>
+                      <a:tailEnd type="none" w="med" len="med"/>
+                    </a:lnL>
+                    <a:lnR w="6350" cap="flat" cmpd="sng" algn="ctr">
+                      <a:solidFill>
+                        <a:srgbClr val="D5DBE3"/>
+                      </a:solidFill>
+                      <a:prstDash val="solid"/>
+                      <a:round/>
+                      <a:headEnd type="none" w="med" len="med"/>
+                      <a:tailEnd type="none" w="med" len="med"/>
+                    </a:lnR>
+                    <a:lnT w="6350" cap="flat" cmpd="sng" algn="ctr">
+                      <a:solidFill>
+                        <a:srgbClr val="D5DBE3"/>
+                      </a:solidFill>
+                      <a:prstDash val="solid"/>
+                      <a:round/>
+                      <a:headEnd type="none" w="med" len="med"/>
+                      <a:tailEnd type="none" w="med" len="med"/>
+                    </a:lnT>
+                    <a:lnB w="6350" cap="flat" cmpd="sng" algn="ctr">
+                      <a:solidFill>
+                        <a:srgbClr val="D5DBE3"/>
+                      </a:solidFill>
+                      <a:prstDash val="solid"/>
+                      <a:round/>
+                      <a:headEnd type="none" w="med" len="med"/>
+                      <a:tailEnd type="none" w="med" len="med"/>
+                    </a:lnB>
+                    <a:solidFill>
+                      <a:srgbClr val="F7E7E5"/>
+                    </a:solidFill>
+                  </a:tcPr>
+                </a:tc>
+              </a:tr>
+              <a:tr h="224028">
+                <a:tc>
+                  <a:txBody>
+                    <a:bodyPr/>
+                    <a:lstStyle/>
+                    <a:p>
+                      <a:pPr algn="l" indent="0" marL="0">
+                        <a:buNone/>
+                      </a:pPr>
+                      <a:r>
+                        <a:rPr lang="en-US" sz="850" b="1" dirty="0">
+                          <a:solidFill>
+                            <a:srgbClr val="1F2933"/>
+                          </a:solidFill>
+                          <a:latin typeface="Calibri" pitchFamily="34" charset="0"/>
+                          <a:ea typeface="Calibri" pitchFamily="34" charset="-122"/>
+                          <a:cs typeface="Calibri" pitchFamily="34" charset="-120"/>
+                        </a:rPr>
+                        <a:t>PICI</a:t>
+                      </a:r>
+                      <a:endParaRPr lang="en-US" sz="850" dirty="0">
+                        <a:latin typeface="Calibri" charset="0"/>
+                        <a:ea typeface="Calibri" charset="0"/>
+                        <a:cs typeface="Calibri" charset="0"/>
+                      </a:endParaRPr>
+                    </a:p>
+                  </a:txBody>
+                  <a:tcPr marL="64008" marR="64008" marT="0" marB="0" anchor="ctr">
+                    <a:lnL w="6350" cap="flat" cmpd="sng" algn="ctr">
+                      <a:solidFill>
+                        <a:srgbClr val="D5DBE3"/>
+                      </a:solidFill>
+                      <a:prstDash val="solid"/>
+                      <a:round/>
+                      <a:headEnd type="none" w="med" len="med"/>
+                      <a:tailEnd type="none" w="med" len="med"/>
+                    </a:lnL>
+                    <a:lnR w="6350" cap="flat" cmpd="sng" algn="ctr">
+                      <a:solidFill>
+                        <a:srgbClr val="D5DBE3"/>
+                      </a:solidFill>
+                      <a:prstDash val="solid"/>
+                      <a:round/>
+                      <a:headEnd type="none" w="med" len="med"/>
+                      <a:tailEnd type="none" w="med" len="med"/>
+                    </a:lnR>
+                    <a:lnT w="6350" cap="flat" cmpd="sng" algn="ctr">
+                      <a:solidFill>
+                        <a:srgbClr val="D5DBE3"/>
+                      </a:solidFill>
+                      <a:prstDash val="solid"/>
+                      <a:round/>
+                      <a:headEnd type="none" w="med" len="med"/>
+                      <a:tailEnd type="none" w="med" len="med"/>
+                    </a:lnT>
+                    <a:lnB w="6350" cap="flat" cmpd="sng" algn="ctr">
+                      <a:solidFill>
+                        <a:srgbClr val="D5DBE3"/>
+                      </a:solidFill>
+                      <a:prstDash val="solid"/>
+                      <a:round/>
+                      <a:headEnd type="none" w="med" len="med"/>
+                      <a:tailEnd type="none" w="med" len="med"/>
+                    </a:lnB>
+                  </a:tcPr>
+                </a:tc>
+                <a:tc>
+                  <a:txBody>
+                    <a:bodyPr/>
+                    <a:lstStyle/>
+                    <a:p>
+                      <a:pPr algn="r" indent="0" marL="0">
+                        <a:buNone/>
+                      </a:pPr>
+                      <a:r>
+                        <a:rPr lang="en-US" sz="850" dirty="0">
+                          <a:solidFill>
+                            <a:srgbClr val="1F2933"/>
+                          </a:solidFill>
+                          <a:latin typeface="Calibri" pitchFamily="34" charset="0"/>
+                          <a:ea typeface="Calibri" pitchFamily="34" charset="-122"/>
+                          <a:cs typeface="Calibri" pitchFamily="34" charset="-120"/>
+                        </a:rPr>
+                        <a:t>396,6</a:t>
+                      </a:r>
+                      <a:endParaRPr lang="en-US" sz="850" dirty="0">
+                        <a:latin typeface="Calibri" charset="0"/>
+                        <a:ea typeface="Calibri" charset="0"/>
+                        <a:cs typeface="Calibri" charset="0"/>
+                      </a:endParaRPr>
+                    </a:p>
+                  </a:txBody>
+                  <a:tcPr marL="64008" marR="64008" marT="0" marB="0" anchor="ctr">
+                    <a:lnL w="6350" cap="flat" cmpd="sng" algn="ctr">
+                      <a:solidFill>
+                        <a:srgbClr val="D5DBE3"/>
+                      </a:solidFill>
+                      <a:prstDash val="solid"/>
+                      <a:round/>
+                      <a:headEnd type="none" w="med" len="med"/>
+                      <a:tailEnd type="none" w="med" len="med"/>
+                    </a:lnL>
+                    <a:lnR w="6350" cap="flat" cmpd="sng" algn="ctr">
+                      <a:solidFill>
+                        <a:srgbClr val="D5DBE3"/>
+                      </a:solidFill>
+                      <a:prstDash val="solid"/>
+                      <a:round/>
+                      <a:headEnd type="none" w="med" len="med"/>
+                      <a:tailEnd type="none" w="med" len="med"/>
+                    </a:lnR>
+                    <a:lnT w="6350" cap="flat" cmpd="sng" algn="ctr">
+                      <a:solidFill>
+                        <a:srgbClr val="D5DBE3"/>
+                      </a:solidFill>
+                      <a:prstDash val="solid"/>
+                      <a:round/>
+                      <a:headEnd type="none" w="med" len="med"/>
+                      <a:tailEnd type="none" w="med" len="med"/>
+                    </a:lnT>
+                    <a:lnB w="6350" cap="flat" cmpd="sng" algn="ctr">
+                      <a:solidFill>
+                        <a:srgbClr val="D5DBE3"/>
+                      </a:solidFill>
+                      <a:prstDash val="solid"/>
+                      <a:round/>
+                      <a:headEnd type="none" w="med" len="med"/>
+                      <a:tailEnd type="none" w="med" len="med"/>
+                    </a:lnB>
+                  </a:tcPr>
+                </a:tc>
+                <a:tc>
+                  <a:txBody>
+                    <a:bodyPr/>
+                    <a:lstStyle/>
+                    <a:p>
+                      <a:pPr algn="r" indent="0" marL="0">
+                        <a:buNone/>
+                      </a:pPr>
+                      <a:r>
+                        <a:rPr lang="en-US" sz="850" dirty="0">
+                          <a:solidFill>
+                            <a:srgbClr val="1F2933"/>
+                          </a:solidFill>
+                          <a:latin typeface="Calibri" pitchFamily="34" charset="0"/>
+                          <a:ea typeface="Calibri" pitchFamily="34" charset="-122"/>
+                          <a:cs typeface="Calibri" pitchFamily="34" charset="-120"/>
+                        </a:rPr>
+                        <a:t>-262,9</a:t>
+                      </a:r>
+                      <a:endParaRPr lang="en-US" sz="850" dirty="0">
+                        <a:latin typeface="Calibri" charset="0"/>
+                        <a:ea typeface="Calibri" charset="0"/>
+                        <a:cs typeface="Calibri" charset="0"/>
+                      </a:endParaRPr>
+                    </a:p>
+                  </a:txBody>
+                  <a:tcPr marL="64008" marR="64008" marT="0" marB="0" anchor="ctr">
+                    <a:lnL w="6350" cap="flat" cmpd="sng" algn="ctr">
+                      <a:solidFill>
+                        <a:srgbClr val="D5DBE3"/>
+                      </a:solidFill>
+                      <a:prstDash val="solid"/>
+                      <a:round/>
+                      <a:headEnd type="none" w="med" len="med"/>
+                      <a:tailEnd type="none" w="med" len="med"/>
+                    </a:lnL>
+                    <a:lnR w="6350" cap="flat" cmpd="sng" algn="ctr">
+                      <a:solidFill>
+                        <a:srgbClr val="D5DBE3"/>
+                      </a:solidFill>
+                      <a:prstDash val="solid"/>
+                      <a:round/>
+                      <a:headEnd type="none" w="med" len="med"/>
+                      <a:tailEnd type="none" w="med" len="med"/>
+                    </a:lnR>
+                    <a:lnT w="6350" cap="flat" cmpd="sng" algn="ctr">
+                      <a:solidFill>
+                        <a:srgbClr val="D5DBE3"/>
+                      </a:solidFill>
+                      <a:prstDash val="solid"/>
+                      <a:round/>
+                      <a:headEnd type="none" w="med" len="med"/>
+                      <a:tailEnd type="none" w="med" len="med"/>
+                    </a:lnT>
+                    <a:lnB w="6350" cap="flat" cmpd="sng" algn="ctr">
+                      <a:solidFill>
+                        <a:srgbClr val="D5DBE3"/>
+                      </a:solidFill>
+                      <a:prstDash val="solid"/>
+                      <a:round/>
+                      <a:headEnd type="none" w="med" len="med"/>
+                      <a:tailEnd type="none" w="med" len="med"/>
+                    </a:lnB>
+                  </a:tcPr>
+                </a:tc>
+                <a:tc>
+                  <a:txBody>
+                    <a:bodyPr/>
+                    <a:lstStyle/>
+                    <a:p>
+                      <a:pPr algn="r" indent="0" marL="0">
+                        <a:buNone/>
+                      </a:pPr>
+                      <a:r>
+                        <a:rPr lang="en-US" sz="850" dirty="0">
+                          <a:solidFill>
+                            <a:srgbClr val="1F2933"/>
+                          </a:solidFill>
+                          <a:latin typeface="Calibri" pitchFamily="34" charset="0"/>
+                          <a:ea typeface="Calibri" pitchFamily="34" charset="-122"/>
+                          <a:cs typeface="Calibri" pitchFamily="34" charset="-120"/>
+                        </a:rPr>
+                        <a:t>–</a:t>
+                      </a:r>
+                      <a:endParaRPr lang="en-US" sz="850" dirty="0">
+                        <a:latin typeface="Calibri" charset="0"/>
+                        <a:ea typeface="Calibri" charset="0"/>
+                        <a:cs typeface="Calibri" charset="0"/>
+                      </a:endParaRPr>
+                    </a:p>
+                  </a:txBody>
+                  <a:tcPr marL="64008" marR="64008" marT="0" marB="0" anchor="ctr">
+                    <a:lnL w="6350" cap="flat" cmpd="sng" algn="ctr">
+                      <a:solidFill>
+                        <a:srgbClr val="D5DBE3"/>
+                      </a:solidFill>
+                      <a:prstDash val="solid"/>
+                      <a:round/>
+                      <a:headEnd type="none" w="med" len="med"/>
+                      <a:tailEnd type="none" w="med" len="med"/>
+                    </a:lnL>
+                    <a:lnR w="6350" cap="flat" cmpd="sng" algn="ctr">
+                      <a:solidFill>
+                        <a:srgbClr val="D5DBE3"/>
+                      </a:solidFill>
+                      <a:prstDash val="solid"/>
+                      <a:round/>
+                      <a:headEnd type="none" w="med" len="med"/>
+                      <a:tailEnd type="none" w="med" len="med"/>
+                    </a:lnR>
+                    <a:lnT w="6350" cap="flat" cmpd="sng" algn="ctr">
+                      <a:solidFill>
+                        <a:srgbClr val="D5DBE3"/>
+                      </a:solidFill>
+                      <a:prstDash val="solid"/>
+                      <a:round/>
+                      <a:headEnd type="none" w="med" len="med"/>
+                      <a:tailEnd type="none" w="med" len="med"/>
+                    </a:lnT>
+                    <a:lnB w="6350" cap="flat" cmpd="sng" algn="ctr">
+                      <a:solidFill>
+                        <a:srgbClr val="D5DBE3"/>
+                      </a:solidFill>
+                      <a:prstDash val="solid"/>
+                      <a:round/>
+                      <a:headEnd type="none" w="med" len="med"/>
+                      <a:tailEnd type="none" w="med" len="med"/>
+                    </a:lnB>
+                  </a:tcPr>
+                </a:tc>
+                <a:tc>
+                  <a:txBody>
+                    <a:bodyPr/>
+                    <a:lstStyle/>
+                    <a:p>
+                      <a:pPr algn="r" indent="0" marL="0">
+                        <a:buNone/>
+                      </a:pPr>
+                      <a:r>
+                        <a:rPr lang="en-US" sz="850" b="1" dirty="0">
+                          <a:solidFill>
+                            <a:srgbClr val="5E9B7E"/>
+                          </a:solidFill>
+                          <a:latin typeface="Calibri" pitchFamily="34" charset="0"/>
+                          <a:ea typeface="Calibri" pitchFamily="34" charset="-122"/>
+                          <a:cs typeface="Calibri" pitchFamily="34" charset="-120"/>
+                        </a:rPr>
+                        <a:t>133,7</a:t>
+                      </a:r>
+                      <a:endParaRPr lang="en-US" sz="850" dirty="0">
+                        <a:latin typeface="Calibri" charset="0"/>
+                        <a:ea typeface="Calibri" charset="0"/>
+                        <a:cs typeface="Calibri" charset="0"/>
+                      </a:endParaRPr>
+                    </a:p>
+                  </a:txBody>
+                  <a:tcPr marL="64008" marR="64008" marT="0" marB="0" anchor="ctr">
+                    <a:lnL w="6350" cap="flat" cmpd="sng" algn="ctr">
+                      <a:solidFill>
+                        <a:srgbClr val="D5DBE3"/>
+                      </a:solidFill>
+                      <a:prstDash val="solid"/>
+                      <a:round/>
+                      <a:headEnd type="none" w="med" len="med"/>
+                      <a:tailEnd type="none" w="med" len="med"/>
+                    </a:lnL>
+                    <a:lnR w="6350" cap="flat" cmpd="sng" algn="ctr">
+                      <a:solidFill>
+                        <a:srgbClr val="D5DBE3"/>
+                      </a:solidFill>
+                      <a:prstDash val="solid"/>
+                      <a:round/>
+                      <a:headEnd type="none" w="med" len="med"/>
+                      <a:tailEnd type="none" w="med" len="med"/>
+                    </a:lnR>
+                    <a:lnT w="6350" cap="flat" cmpd="sng" algn="ctr">
+                      <a:solidFill>
+                        <a:srgbClr val="D5DBE3"/>
+                      </a:solidFill>
+                      <a:prstDash val="solid"/>
+                      <a:round/>
+                      <a:headEnd type="none" w="med" len="med"/>
+                      <a:tailEnd type="none" w="med" len="med"/>
+                    </a:lnT>
+                    <a:lnB w="6350" cap="flat" cmpd="sng" algn="ctr">
+                      <a:solidFill>
+                        <a:srgbClr val="D5DBE3"/>
+                      </a:solidFill>
+                      <a:prstDash val="solid"/>
+                      <a:round/>
+                      <a:headEnd type="none" w="med" len="med"/>
+                      <a:tailEnd type="none" w="med" len="med"/>
+                    </a:lnB>
+                  </a:tcPr>
+                </a:tc>
+                <a:tc>
+                  <a:txBody>
+                    <a:bodyPr/>
+                    <a:lstStyle/>
+                    <a:p>
+                      <a:pPr algn="r" indent="0" marL="0">
+                        <a:buNone/>
+                      </a:pPr>
+                      <a:r>
+                        <a:rPr lang="en-US" sz="850" dirty="0">
+                          <a:solidFill>
+                            <a:srgbClr val="1F2933"/>
+                          </a:solidFill>
+                          <a:latin typeface="Calibri" pitchFamily="34" charset="0"/>
+                          <a:ea typeface="Calibri" pitchFamily="34" charset="-122"/>
+                          <a:cs typeface="Calibri" pitchFamily="34" charset="-120"/>
+                        </a:rPr>
+                        <a:t>–</a:t>
+                      </a:r>
+                      <a:endParaRPr lang="en-US" sz="850" dirty="0">
+                        <a:latin typeface="Calibri" charset="0"/>
+                        <a:ea typeface="Calibri" charset="0"/>
+                        <a:cs typeface="Calibri" charset="0"/>
+                      </a:endParaRPr>
+                    </a:p>
+                  </a:txBody>
+                  <a:tcPr marL="64008" marR="64008" marT="0" marB="0" anchor="ctr">
+                    <a:lnL w="6350" cap="flat" cmpd="sng" algn="ctr">
+                      <a:solidFill>
+                        <a:srgbClr val="D5DBE3"/>
+                      </a:solidFill>
+                      <a:prstDash val="solid"/>
+                      <a:round/>
+                      <a:headEnd type="none" w="med" len="med"/>
+                      <a:tailEnd type="none" w="med" len="med"/>
+                    </a:lnL>
+                    <a:lnR w="6350" cap="flat" cmpd="sng" algn="ctr">
+                      <a:solidFill>
+                        <a:srgbClr val="D5DBE3"/>
+                      </a:solidFill>
+                      <a:prstDash val="solid"/>
+                      <a:round/>
+                      <a:headEnd type="none" w="med" len="med"/>
+                      <a:tailEnd type="none" w="med" len="med"/>
+                    </a:lnR>
+                    <a:lnT w="6350" cap="flat" cmpd="sng" algn="ctr">
+                      <a:solidFill>
+                        <a:srgbClr val="D5DBE3"/>
+                      </a:solidFill>
+                      <a:prstDash val="solid"/>
+                      <a:round/>
+                      <a:headEnd type="none" w="med" len="med"/>
+                      <a:tailEnd type="none" w="med" len="med"/>
+                    </a:lnT>
+                    <a:lnB w="6350" cap="flat" cmpd="sng" algn="ctr">
+                      <a:solidFill>
+                        <a:srgbClr val="D5DBE3"/>
+                      </a:solidFill>
+                      <a:prstDash val="solid"/>
+                      <a:round/>
+                      <a:headEnd type="none" w="med" len="med"/>
+                      <a:tailEnd type="none" w="med" len="med"/>
+                    </a:lnB>
+                  </a:tcPr>
+                </a:tc>
+              </a:tr>
+              <a:tr h="224028">
+                <a:tc>
+                  <a:txBody>
+                    <a:bodyPr/>
+                    <a:lstStyle/>
+                    <a:p>
+                      <a:pPr algn="l" indent="0" marL="0">
+                        <a:buNone/>
+                      </a:pPr>
+                      <a:r>
+                        <a:rPr lang="en-US" sz="850" b="1" dirty="0">
+                          <a:solidFill>
+                            <a:srgbClr val="1F2933"/>
+                          </a:solidFill>
+                          <a:latin typeface="Calibri" pitchFamily="34" charset="0"/>
+                          <a:ea typeface="Calibri" pitchFamily="34" charset="-122"/>
+                          <a:cs typeface="Calibri" pitchFamily="34" charset="-120"/>
+                        </a:rPr>
+                        <a:t>SCI FIRST – dette</a:t>
+                      </a:r>
+                      <a:endParaRPr lang="en-US" sz="850" dirty="0">
+                        <a:latin typeface="Calibri" charset="0"/>
+                        <a:ea typeface="Calibri" charset="0"/>
+                        <a:cs typeface="Calibri" charset="0"/>
+                      </a:endParaRPr>
+                    </a:p>
+                  </a:txBody>
+                  <a:tcPr marL="64008" marR="64008" marT="0" marB="0" anchor="ctr">
+                    <a:lnL w="6350" cap="flat" cmpd="sng" algn="ctr">
+                      <a:solidFill>
+                        <a:srgbClr val="D5DBE3"/>
+                      </a:solidFill>
+                      <a:prstDash val="solid"/>
+                      <a:round/>
+                      <a:headEnd type="none" w="med" len="med"/>
+                      <a:tailEnd type="none" w="med" len="med"/>
+                    </a:lnL>
+                    <a:lnR w="6350" cap="flat" cmpd="sng" algn="ctr">
+                      <a:solidFill>
+                        <a:srgbClr val="D5DBE3"/>
+                      </a:solidFill>
+                      <a:prstDash val="solid"/>
+                      <a:round/>
+                      <a:headEnd type="none" w="med" len="med"/>
+                      <a:tailEnd type="none" w="med" len="med"/>
+                    </a:lnR>
+                    <a:lnT w="6350" cap="flat" cmpd="sng" algn="ctr">
+                      <a:solidFill>
+                        <a:srgbClr val="D5DBE3"/>
+                      </a:solidFill>
+                      <a:prstDash val="solid"/>
+                      <a:round/>
+                      <a:headEnd type="none" w="med" len="med"/>
+                      <a:tailEnd type="none" w="med" len="med"/>
+                    </a:lnT>
+                    <a:lnB w="6350" cap="flat" cmpd="sng" algn="ctr">
+                      <a:solidFill>
+                        <a:srgbClr val="D5DBE3"/>
+                      </a:solidFill>
+                      <a:prstDash val="solid"/>
+                      <a:round/>
+                      <a:headEnd type="none" w="med" len="med"/>
+                      <a:tailEnd type="none" w="med" len="med"/>
+                    </a:lnB>
+                  </a:tcPr>
+                </a:tc>
+                <a:tc>
+                  <a:txBody>
+                    <a:bodyPr/>
+                    <a:lstStyle/>
+                    <a:p>
+                      <a:pPr algn="r" indent="0" marL="0">
+                        <a:buNone/>
+                      </a:pPr>
+                      <a:r>
+                        <a:rPr lang="en-US" sz="850" dirty="0">
+                          <a:solidFill>
+                            <a:srgbClr val="1F2933"/>
+                          </a:solidFill>
+                          <a:latin typeface="Calibri" pitchFamily="34" charset="0"/>
+                          <a:ea typeface="Calibri" pitchFamily="34" charset="-122"/>
+                          <a:cs typeface="Calibri" pitchFamily="34" charset="-120"/>
+                        </a:rPr>
+                        <a:t>350,7</a:t>
+                      </a:r>
+                      <a:endParaRPr lang="en-US" sz="850" dirty="0">
+                        <a:latin typeface="Calibri" charset="0"/>
+                        <a:ea typeface="Calibri" charset="0"/>
+                        <a:cs typeface="Calibri" charset="0"/>
+                      </a:endParaRPr>
+                    </a:p>
+                  </a:txBody>
+                  <a:tcPr marL="64008" marR="64008" marT="0" marB="0" anchor="ctr">
+                    <a:lnL w="6350" cap="flat" cmpd="sng" algn="ctr">
+                      <a:solidFill>
+                        <a:srgbClr val="D5DBE3"/>
+                      </a:solidFill>
+                      <a:prstDash val="solid"/>
+                      <a:round/>
+                      <a:headEnd type="none" w="med" len="med"/>
+                      <a:tailEnd type="none" w="med" len="med"/>
+                    </a:lnL>
+                    <a:lnR w="6350" cap="flat" cmpd="sng" algn="ctr">
+                      <a:solidFill>
+                        <a:srgbClr val="D5DBE3"/>
+                      </a:solidFill>
+                      <a:prstDash val="solid"/>
+                      <a:round/>
+                      <a:headEnd type="none" w="med" len="med"/>
+                      <a:tailEnd type="none" w="med" len="med"/>
+                    </a:lnR>
+                    <a:lnT w="6350" cap="flat" cmpd="sng" algn="ctr">
+                      <a:solidFill>
+                        <a:srgbClr val="D5DBE3"/>
+                      </a:solidFill>
+                      <a:prstDash val="solid"/>
+                      <a:round/>
+                      <a:headEnd type="none" w="med" len="med"/>
+                      <a:tailEnd type="none" w="med" len="med"/>
+                    </a:lnT>
+                    <a:lnB w="6350" cap="flat" cmpd="sng" algn="ctr">
+                      <a:solidFill>
+                        <a:srgbClr val="D5DBE3"/>
+                      </a:solidFill>
+                      <a:prstDash val="solid"/>
+                      <a:round/>
+                      <a:headEnd type="none" w="med" len="med"/>
+                      <a:tailEnd type="none" w="med" len="med"/>
+                    </a:lnB>
+                  </a:tcPr>
+                </a:tc>
+                <a:tc>
+                  <a:txBody>
+                    <a:bodyPr/>
+                    <a:lstStyle/>
+                    <a:p>
+                      <a:pPr algn="r" indent="0" marL="0">
+                        <a:buNone/>
+                      </a:pPr>
+                      <a:r>
+                        <a:rPr lang="en-US" sz="850" dirty="0">
+                          <a:solidFill>
+                            <a:srgbClr val="1F2933"/>
+                          </a:solidFill>
+                          <a:latin typeface="Calibri" pitchFamily="34" charset="0"/>
+                          <a:ea typeface="Calibri" pitchFamily="34" charset="-122"/>
+                          <a:cs typeface="Calibri" pitchFamily="34" charset="-120"/>
+                        </a:rPr>
+                        <a:t>-343,9</a:t>
+                      </a:r>
+                      <a:endParaRPr lang="en-US" sz="850" dirty="0">
+                        <a:latin typeface="Calibri" charset="0"/>
+                        <a:ea typeface="Calibri" charset="0"/>
+                        <a:cs typeface="Calibri" charset="0"/>
+                      </a:endParaRPr>
+                    </a:p>
+                  </a:txBody>
+                  <a:tcPr marL="64008" marR="64008" marT="0" marB="0" anchor="ctr">
+                    <a:lnL w="6350" cap="flat" cmpd="sng" algn="ctr">
+                      <a:solidFill>
+                        <a:srgbClr val="D5DBE3"/>
+                      </a:solidFill>
+                      <a:prstDash val="solid"/>
+                      <a:round/>
+                      <a:headEnd type="none" w="med" len="med"/>
+                      <a:tailEnd type="none" w="med" len="med"/>
+                    </a:lnL>
+                    <a:lnR w="6350" cap="flat" cmpd="sng" algn="ctr">
+                      <a:solidFill>
+                        <a:srgbClr val="D5DBE3"/>
+                      </a:solidFill>
+                      <a:prstDash val="solid"/>
+                      <a:round/>
+                      <a:headEnd type="none" w="med" len="med"/>
+                      <a:tailEnd type="none" w="med" len="med"/>
+                    </a:lnR>
+                    <a:lnT w="6350" cap="flat" cmpd="sng" algn="ctr">
+                      <a:solidFill>
+                        <a:srgbClr val="D5DBE3"/>
+                      </a:solidFill>
+                      <a:prstDash val="solid"/>
+                      <a:round/>
+                      <a:headEnd type="none" w="med" len="med"/>
+                      <a:tailEnd type="none" w="med" len="med"/>
+                    </a:lnT>
+                    <a:lnB w="6350" cap="flat" cmpd="sng" algn="ctr">
+                      <a:solidFill>
+                        <a:srgbClr val="D5DBE3"/>
+                      </a:solidFill>
+                      <a:prstDash val="solid"/>
+                      <a:round/>
+                      <a:headEnd type="none" w="med" len="med"/>
+                      <a:tailEnd type="none" w="med" len="med"/>
+                    </a:lnB>
+                  </a:tcPr>
+                </a:tc>
+                <a:tc>
+                  <a:txBody>
+                    <a:bodyPr/>
+                    <a:lstStyle/>
+                    <a:p>
+                      <a:pPr algn="r" indent="0" marL="0">
+                        <a:buNone/>
+                      </a:pPr>
+                      <a:r>
+                        <a:rPr lang="en-US" sz="850" dirty="0">
+                          <a:solidFill>
+                            <a:srgbClr val="1F2933"/>
+                          </a:solidFill>
+                          <a:latin typeface="Calibri" pitchFamily="34" charset="0"/>
+                          <a:ea typeface="Calibri" pitchFamily="34" charset="-122"/>
+                          <a:cs typeface="Calibri" pitchFamily="34" charset="-120"/>
+                        </a:rPr>
+                        <a:t>–</a:t>
+                      </a:r>
+                      <a:endParaRPr lang="en-US" sz="850" dirty="0">
+                        <a:latin typeface="Calibri" charset="0"/>
+                        <a:ea typeface="Calibri" charset="0"/>
+                        <a:cs typeface="Calibri" charset="0"/>
+                      </a:endParaRPr>
+                    </a:p>
+                  </a:txBody>
+                  <a:tcPr marL="64008" marR="64008" marT="0" marB="0" anchor="ctr">
+                    <a:lnL w="6350" cap="flat" cmpd="sng" algn="ctr">
+                      <a:solidFill>
+                        <a:srgbClr val="D5DBE3"/>
+                      </a:solidFill>
+                      <a:prstDash val="solid"/>
+                      <a:round/>
+                      <a:headEnd type="none" w="med" len="med"/>
+                      <a:tailEnd type="none" w="med" len="med"/>
+                    </a:lnL>
+                    <a:lnR w="6350" cap="flat" cmpd="sng" algn="ctr">
+                      <a:solidFill>
+                        <a:srgbClr val="D5DBE3"/>
+                      </a:solidFill>
+                      <a:prstDash val="solid"/>
+                      <a:round/>
+                      <a:headEnd type="none" w="med" len="med"/>
+                      <a:tailEnd type="none" w="med" len="med"/>
+                    </a:lnR>
+                    <a:lnT w="6350" cap="flat" cmpd="sng" algn="ctr">
+                      <a:solidFill>
+                        <a:srgbClr val="D5DBE3"/>
+                      </a:solidFill>
+                      <a:prstDash val="solid"/>
+                      <a:round/>
+                      <a:headEnd type="none" w="med" len="med"/>
+                      <a:tailEnd type="none" w="med" len="med"/>
+                    </a:lnT>
+                    <a:lnB w="6350" cap="flat" cmpd="sng" algn="ctr">
+                      <a:solidFill>
+                        <a:srgbClr val="D5DBE3"/>
+                      </a:solidFill>
+                      <a:prstDash val="solid"/>
+                      <a:round/>
+                      <a:headEnd type="none" w="med" len="med"/>
+                      <a:tailEnd type="none" w="med" len="med"/>
+                    </a:lnB>
+                  </a:tcPr>
+                </a:tc>
+                <a:tc>
+                  <a:txBody>
+                    <a:bodyPr/>
+                    <a:lstStyle/>
+                    <a:p>
+                      <a:pPr algn="r" indent="0" marL="0">
+                        <a:buNone/>
+                      </a:pPr>
+                      <a:r>
+                        <a:rPr lang="en-US" sz="850" b="1" dirty="0">
+                          <a:solidFill>
+                            <a:srgbClr val="5E9B7E"/>
+                          </a:solidFill>
+                          <a:latin typeface="Calibri" pitchFamily="34" charset="0"/>
+                          <a:ea typeface="Calibri" pitchFamily="34" charset="-122"/>
+                          <a:cs typeface="Calibri" pitchFamily="34" charset="-120"/>
+                        </a:rPr>
+                        <a:t>6,8</a:t>
+                      </a:r>
+                      <a:endParaRPr lang="en-US" sz="850" dirty="0">
+                        <a:latin typeface="Calibri" charset="0"/>
+                        <a:ea typeface="Calibri" charset="0"/>
+                        <a:cs typeface="Calibri" charset="0"/>
+                      </a:endParaRPr>
+                    </a:p>
+                  </a:txBody>
+                  <a:tcPr marL="64008" marR="64008" marT="0" marB="0" anchor="ctr">
+                    <a:lnL w="6350" cap="flat" cmpd="sng" algn="ctr">
+                      <a:solidFill>
+                        <a:srgbClr val="D5DBE3"/>
+                      </a:solidFill>
+                      <a:prstDash val="solid"/>
+                      <a:round/>
+                      <a:headEnd type="none" w="med" len="med"/>
+                      <a:tailEnd type="none" w="med" len="med"/>
+                    </a:lnL>
+                    <a:lnR w="6350" cap="flat" cmpd="sng" algn="ctr">
+                      <a:solidFill>
+                        <a:srgbClr val="D5DBE3"/>
+                      </a:solidFill>
+                      <a:prstDash val="solid"/>
+                      <a:round/>
+                      <a:headEnd type="none" w="med" len="med"/>
+                      <a:tailEnd type="none" w="med" len="med"/>
+                    </a:lnR>
+                    <a:lnT w="6350" cap="flat" cmpd="sng" algn="ctr">
+                      <a:solidFill>
+                        <a:srgbClr val="D5DBE3"/>
+                      </a:solidFill>
+                      <a:prstDash val="solid"/>
+                      <a:round/>
+                      <a:headEnd type="none" w="med" len="med"/>
+                      <a:tailEnd type="none" w="med" len="med"/>
+                    </a:lnT>
+                    <a:lnB w="6350" cap="flat" cmpd="sng" algn="ctr">
+                      <a:solidFill>
+                        <a:srgbClr val="D5DBE3"/>
+                      </a:solidFill>
+                      <a:prstDash val="solid"/>
+                      <a:round/>
+                      <a:headEnd type="none" w="med" len="med"/>
+                      <a:tailEnd type="none" w="med" len="med"/>
+                    </a:lnB>
+                  </a:tcPr>
+                </a:tc>
+                <a:tc>
+                  <a:txBody>
+                    <a:bodyPr/>
+                    <a:lstStyle/>
+                    <a:p>
+                      <a:pPr algn="r" indent="0" marL="0">
+                        <a:buNone/>
+                      </a:pPr>
+                      <a:r>
+                        <a:rPr lang="en-US" sz="850" dirty="0">
+                          <a:solidFill>
+                            <a:srgbClr val="1F2933"/>
+                          </a:solidFill>
+                          <a:latin typeface="Calibri" pitchFamily="34" charset="0"/>
+                          <a:ea typeface="Calibri" pitchFamily="34" charset="-122"/>
+                          <a:cs typeface="Calibri" pitchFamily="34" charset="-120"/>
+                        </a:rPr>
+                        <a:t>–</a:t>
+                      </a:r>
+                      <a:endParaRPr lang="en-US" sz="850" dirty="0">
+                        <a:latin typeface="Calibri" charset="0"/>
+                        <a:ea typeface="Calibri" charset="0"/>
+                        <a:cs typeface="Calibri" charset="0"/>
+                      </a:endParaRPr>
+                    </a:p>
+                  </a:txBody>
+                  <a:tcPr marL="64008" marR="64008" marT="0" marB="0" anchor="ctr">
+                    <a:lnL w="6350" cap="flat" cmpd="sng" algn="ctr">
+                      <a:solidFill>
+                        <a:srgbClr val="D5DBE3"/>
+                      </a:solidFill>
+                      <a:prstDash val="solid"/>
+                      <a:round/>
+                      <a:headEnd type="none" w="med" len="med"/>
+                      <a:tailEnd type="none" w="med" len="med"/>
+                    </a:lnL>
+                    <a:lnR w="6350" cap="flat" cmpd="sng" algn="ctr">
+                      <a:solidFill>
+                        <a:srgbClr val="D5DBE3"/>
+                      </a:solidFill>
+                      <a:prstDash val="solid"/>
+                      <a:round/>
+                      <a:headEnd type="none" w="med" len="med"/>
+                      <a:tailEnd type="none" w="med" len="med"/>
+                    </a:lnR>
+                    <a:lnT w="6350" cap="flat" cmpd="sng" algn="ctr">
+                      <a:solidFill>
+                        <a:srgbClr val="D5DBE3"/>
+                      </a:solidFill>
+                      <a:prstDash val="solid"/>
+                      <a:round/>
+                      <a:headEnd type="none" w="med" len="med"/>
+                      <a:tailEnd type="none" w="med" len="med"/>
+                    </a:lnT>
+                    <a:lnB w="6350" cap="flat" cmpd="sng" algn="ctr">
+                      <a:solidFill>
+                        <a:srgbClr val="D5DBE3"/>
+                      </a:solidFill>
+                      <a:prstDash val="solid"/>
+                      <a:round/>
+                      <a:headEnd type="none" w="med" len="med"/>
+                      <a:tailEnd type="none" w="med" len="med"/>
+                    </a:lnB>
+                  </a:tcPr>
+                </a:tc>
+              </a:tr>
+              <a:tr h="224028">
+                <a:tc>
+                  <a:txBody>
+                    <a:bodyPr/>
+                    <a:lstStyle/>
+                    <a:p>
+                      <a:pPr algn="l" indent="0" marL="0">
+                        <a:buNone/>
+                      </a:pPr>
+                      <a:r>
+                        <a:rPr lang="en-US" sz="850" b="1" dirty="0">
+                          <a:solidFill>
+                            <a:srgbClr val="1F2933"/>
+                          </a:solidFill>
+                          <a:latin typeface="Calibri" pitchFamily="34" charset="0"/>
+                          <a:ea typeface="Calibri" pitchFamily="34" charset="-122"/>
+                          <a:cs typeface="Calibri" pitchFamily="34" charset="-120"/>
+                        </a:rPr>
+                        <a:t>SCI FIRST</a:t>
+                      </a:r>
+                      <a:endParaRPr lang="en-US" sz="850" dirty="0">
+                        <a:latin typeface="Calibri" charset="0"/>
+                        <a:ea typeface="Calibri" charset="0"/>
+                        <a:cs typeface="Calibri" charset="0"/>
+                      </a:endParaRPr>
+                    </a:p>
+                  </a:txBody>
+                  <a:tcPr marL="64008" marR="64008" marT="0" marB="0" anchor="ctr">
+                    <a:lnL w="6350" cap="flat" cmpd="sng" algn="ctr">
+                      <a:solidFill>
+                        <a:srgbClr val="D5DBE3"/>
+                      </a:solidFill>
+                      <a:prstDash val="solid"/>
+                      <a:round/>
+                      <a:headEnd type="none" w="med" len="med"/>
+                      <a:tailEnd type="none" w="med" len="med"/>
+                    </a:lnL>
+                    <a:lnR w="6350" cap="flat" cmpd="sng" algn="ctr">
+                      <a:solidFill>
+                        <a:srgbClr val="D5DBE3"/>
+                      </a:solidFill>
+                      <a:prstDash val="solid"/>
+                      <a:round/>
+                      <a:headEnd type="none" w="med" len="med"/>
+                      <a:tailEnd type="none" w="med" len="med"/>
+                    </a:lnR>
+                    <a:lnT w="6350" cap="flat" cmpd="sng" algn="ctr">
+                      <a:solidFill>
+                        <a:srgbClr val="D5DBE3"/>
+                      </a:solidFill>
+                      <a:prstDash val="solid"/>
+                      <a:round/>
+                      <a:headEnd type="none" w="med" len="med"/>
+                      <a:tailEnd type="none" w="med" len="med"/>
+                    </a:lnT>
+                    <a:lnB w="6350" cap="flat" cmpd="sng" algn="ctr">
+                      <a:solidFill>
+                        <a:srgbClr val="D5DBE3"/>
+                      </a:solidFill>
+                      <a:prstDash val="solid"/>
+                      <a:round/>
+                      <a:headEnd type="none" w="med" len="med"/>
+                      <a:tailEnd type="none" w="med" len="med"/>
+                    </a:lnB>
+                  </a:tcPr>
+                </a:tc>
+                <a:tc>
+                  <a:txBody>
+                    <a:bodyPr/>
+                    <a:lstStyle/>
+                    <a:p>
+                      <a:pPr algn="r" indent="0" marL="0">
+                        <a:buNone/>
+                      </a:pPr>
+                      <a:r>
+                        <a:rPr lang="en-US" sz="850" dirty="0">
+                          <a:solidFill>
+                            <a:srgbClr val="1F2933"/>
+                          </a:solidFill>
+                          <a:latin typeface="Calibri" pitchFamily="34" charset="0"/>
+                          <a:ea typeface="Calibri" pitchFamily="34" charset="-122"/>
+                          <a:cs typeface="Calibri" pitchFamily="34" charset="-120"/>
+                        </a:rPr>
+                        <a:t>236,1</a:t>
+                      </a:r>
+                      <a:endParaRPr lang="en-US" sz="850" dirty="0">
+                        <a:latin typeface="Calibri" charset="0"/>
+                        <a:ea typeface="Calibri" charset="0"/>
+                        <a:cs typeface="Calibri" charset="0"/>
+                      </a:endParaRPr>
+                    </a:p>
+                  </a:txBody>
+                  <a:tcPr marL="64008" marR="64008" marT="0" marB="0" anchor="ctr">
+                    <a:lnL w="6350" cap="flat" cmpd="sng" algn="ctr">
+                      <a:solidFill>
+                        <a:srgbClr val="D5DBE3"/>
+                      </a:solidFill>
+                      <a:prstDash val="solid"/>
+                      <a:round/>
+                      <a:headEnd type="none" w="med" len="med"/>
+                      <a:tailEnd type="none" w="med" len="med"/>
+                    </a:lnL>
+                    <a:lnR w="6350" cap="flat" cmpd="sng" algn="ctr">
+                      <a:solidFill>
+                        <a:srgbClr val="D5DBE3"/>
+                      </a:solidFill>
+                      <a:prstDash val="solid"/>
+                      <a:round/>
+                      <a:headEnd type="none" w="med" len="med"/>
+                      <a:tailEnd type="none" w="med" len="med"/>
+                    </a:lnR>
+                    <a:lnT w="6350" cap="flat" cmpd="sng" algn="ctr">
+                      <a:solidFill>
+                        <a:srgbClr val="D5DBE3"/>
+                      </a:solidFill>
+                      <a:prstDash val="solid"/>
+                      <a:round/>
+                      <a:headEnd type="none" w="med" len="med"/>
+                      <a:tailEnd type="none" w="med" len="med"/>
+                    </a:lnT>
+                    <a:lnB w="6350" cap="flat" cmpd="sng" algn="ctr">
+                      <a:solidFill>
+                        <a:srgbClr val="D5DBE3"/>
+                      </a:solidFill>
+                      <a:prstDash val="solid"/>
+                      <a:round/>
+                      <a:headEnd type="none" w="med" len="med"/>
+                      <a:tailEnd type="none" w="med" len="med"/>
+                    </a:lnB>
+                  </a:tcPr>
+                </a:tc>
+                <a:tc>
+                  <a:txBody>
+                    <a:bodyPr/>
+                    <a:lstStyle/>
+                    <a:p>
+                      <a:pPr algn="r" indent="0" marL="0">
+                        <a:buNone/>
+                      </a:pPr>
+                      <a:r>
+                        <a:rPr lang="en-US" sz="850" dirty="0">
+                          <a:solidFill>
+                            <a:srgbClr val="1F2933"/>
+                          </a:solidFill>
+                          <a:latin typeface="Calibri" pitchFamily="34" charset="0"/>
+                          <a:ea typeface="Calibri" pitchFamily="34" charset="-122"/>
+                          <a:cs typeface="Calibri" pitchFamily="34" charset="-120"/>
+                        </a:rPr>
+                        <a:t>-64,0</a:t>
+                      </a:r>
+                      <a:endParaRPr lang="en-US" sz="850" dirty="0">
+                        <a:latin typeface="Calibri" charset="0"/>
+                        <a:ea typeface="Calibri" charset="0"/>
+                        <a:cs typeface="Calibri" charset="0"/>
+                      </a:endParaRPr>
+                    </a:p>
+                  </a:txBody>
+                  <a:tcPr marL="64008" marR="64008" marT="0" marB="0" anchor="ctr">
+                    <a:lnL w="6350" cap="flat" cmpd="sng" algn="ctr">
+                      <a:solidFill>
+                        <a:srgbClr val="D5DBE3"/>
+                      </a:solidFill>
+                      <a:prstDash val="solid"/>
+                      <a:round/>
+                      <a:headEnd type="none" w="med" len="med"/>
+                      <a:tailEnd type="none" w="med" len="med"/>
+                    </a:lnL>
+                    <a:lnR w="6350" cap="flat" cmpd="sng" algn="ctr">
+                      <a:solidFill>
+                        <a:srgbClr val="D5DBE3"/>
+                      </a:solidFill>
+                      <a:prstDash val="solid"/>
+                      <a:round/>
+                      <a:headEnd type="none" w="med" len="med"/>
+                      <a:tailEnd type="none" w="med" len="med"/>
+                    </a:lnR>
+                    <a:lnT w="6350" cap="flat" cmpd="sng" algn="ctr">
+                      <a:solidFill>
+                        <a:srgbClr val="D5DBE3"/>
+                      </a:solidFill>
+                      <a:prstDash val="solid"/>
+                      <a:round/>
+                      <a:headEnd type="none" w="med" len="med"/>
+                      <a:tailEnd type="none" w="med" len="med"/>
+                    </a:lnT>
+                    <a:lnB w="6350" cap="flat" cmpd="sng" algn="ctr">
+                      <a:solidFill>
+                        <a:srgbClr val="D5DBE3"/>
+                      </a:solidFill>
+                      <a:prstDash val="solid"/>
+                      <a:round/>
+                      <a:headEnd type="none" w="med" len="med"/>
+                      <a:tailEnd type="none" w="med" len="med"/>
+                    </a:lnB>
+                  </a:tcPr>
+                </a:tc>
+                <a:tc>
+                  <a:txBody>
+                    <a:bodyPr/>
+                    <a:lstStyle/>
+                    <a:p>
+                      <a:pPr algn="r" indent="0" marL="0">
+                        <a:buNone/>
+                      </a:pPr>
+                      <a:r>
+                        <a:rPr lang="en-US" sz="850" dirty="0">
+                          <a:solidFill>
+                            <a:srgbClr val="1F2933"/>
+                          </a:solidFill>
+                          <a:latin typeface="Calibri" pitchFamily="34" charset="0"/>
+                          <a:ea typeface="Calibri" pitchFamily="34" charset="-122"/>
+                          <a:cs typeface="Calibri" pitchFamily="34" charset="-120"/>
+                        </a:rPr>
+                        <a:t>–</a:t>
+                      </a:r>
+                      <a:endParaRPr lang="en-US" sz="850" dirty="0">
+                        <a:latin typeface="Calibri" charset="0"/>
+                        <a:ea typeface="Calibri" charset="0"/>
+                        <a:cs typeface="Calibri" charset="0"/>
+                      </a:endParaRPr>
+                    </a:p>
+                  </a:txBody>
+                  <a:tcPr marL="64008" marR="64008" marT="0" marB="0" anchor="ctr">
+                    <a:lnL w="6350" cap="flat" cmpd="sng" algn="ctr">
+                      <a:solidFill>
+                        <a:srgbClr val="D5DBE3"/>
+                      </a:solidFill>
+                      <a:prstDash val="solid"/>
+                      <a:round/>
+                      <a:headEnd type="none" w="med" len="med"/>
+                      <a:tailEnd type="none" w="med" len="med"/>
+                    </a:lnL>
+                    <a:lnR w="6350" cap="flat" cmpd="sng" algn="ctr">
+                      <a:solidFill>
+                        <a:srgbClr val="D5DBE3"/>
+                      </a:solidFill>
+                      <a:prstDash val="solid"/>
+                      <a:round/>
+                      <a:headEnd type="none" w="med" len="med"/>
+                      <a:tailEnd type="none" w="med" len="med"/>
+                    </a:lnR>
+                    <a:lnT w="6350" cap="flat" cmpd="sng" algn="ctr">
+                      <a:solidFill>
+                        <a:srgbClr val="D5DBE3"/>
+                      </a:solidFill>
+                      <a:prstDash val="solid"/>
+                      <a:round/>
+                      <a:headEnd type="none" w="med" len="med"/>
+                      <a:tailEnd type="none" w="med" len="med"/>
+                    </a:lnT>
+                    <a:lnB w="6350" cap="flat" cmpd="sng" algn="ctr">
+                      <a:solidFill>
+                        <a:srgbClr val="D5DBE3"/>
+                      </a:solidFill>
+                      <a:prstDash val="solid"/>
+                      <a:round/>
+                      <a:headEnd type="none" w="med" len="med"/>
+                      <a:tailEnd type="none" w="med" len="med"/>
+                    </a:lnB>
+                  </a:tcPr>
+                </a:tc>
+                <a:tc>
+                  <a:txBody>
+                    <a:bodyPr/>
+                    <a:lstStyle/>
+                    <a:p>
+                      <a:pPr algn="r" indent="0" marL="0">
+                        <a:buNone/>
+                      </a:pPr>
+                      <a:r>
+                        <a:rPr lang="en-US" sz="850" b="1" dirty="0">
+                          <a:solidFill>
+                            <a:srgbClr val="5E9B7E"/>
+                          </a:solidFill>
+                          <a:latin typeface="Calibri" pitchFamily="34" charset="0"/>
+                          <a:ea typeface="Calibri" pitchFamily="34" charset="-122"/>
+                          <a:cs typeface="Calibri" pitchFamily="34" charset="-120"/>
+                        </a:rPr>
+                        <a:t>172,1</a:t>
+                      </a:r>
+                      <a:endParaRPr lang="en-US" sz="850" dirty="0">
+                        <a:latin typeface="Calibri" charset="0"/>
+                        <a:ea typeface="Calibri" charset="0"/>
+                        <a:cs typeface="Calibri" charset="0"/>
+                      </a:endParaRPr>
+                    </a:p>
+                  </a:txBody>
+                  <a:tcPr marL="64008" marR="64008" marT="0" marB="0" anchor="ctr">
+                    <a:lnL w="6350" cap="flat" cmpd="sng" algn="ctr">
+                      <a:solidFill>
+                        <a:srgbClr val="D5DBE3"/>
+                      </a:solidFill>
+                      <a:prstDash val="solid"/>
+                      <a:round/>
+                      <a:headEnd type="none" w="med" len="med"/>
+                      <a:tailEnd type="none" w="med" len="med"/>
+                    </a:lnL>
+                    <a:lnR w="6350" cap="flat" cmpd="sng" algn="ctr">
+                      <a:solidFill>
+                        <a:srgbClr val="D5DBE3"/>
+                      </a:solidFill>
+                      <a:prstDash val="solid"/>
+                      <a:round/>
+                      <a:headEnd type="none" w="med" len="med"/>
+                      <a:tailEnd type="none" w="med" len="med"/>
+                    </a:lnR>
+                    <a:lnT w="6350" cap="flat" cmpd="sng" algn="ctr">
+                      <a:solidFill>
+                        <a:srgbClr val="D5DBE3"/>
+                      </a:solidFill>
+                      <a:prstDash val="solid"/>
+                      <a:round/>
+                      <a:headEnd type="none" w="med" len="med"/>
+                      <a:tailEnd type="none" w="med" len="med"/>
+                    </a:lnT>
+                    <a:lnB w="6350" cap="flat" cmpd="sng" algn="ctr">
+                      <a:solidFill>
+                        <a:srgbClr val="D5DBE3"/>
+                      </a:solidFill>
+                      <a:prstDash val="solid"/>
+                      <a:round/>
+                      <a:headEnd type="none" w="med" len="med"/>
+                      <a:tailEnd type="none" w="med" len="med"/>
+                    </a:lnB>
+                  </a:tcPr>
+                </a:tc>
+                <a:tc>
+                  <a:txBody>
+                    <a:bodyPr/>
+                    <a:lstStyle/>
+                    <a:p>
+                      <a:pPr algn="r" indent="0" marL="0">
+                        <a:buNone/>
+                      </a:pPr>
+                      <a:r>
+                        <a:rPr lang="en-US" sz="850" dirty="0">
+                          <a:solidFill>
+                            <a:srgbClr val="1F2933"/>
+                          </a:solidFill>
+                          <a:latin typeface="Calibri" pitchFamily="34" charset="0"/>
+                          <a:ea typeface="Calibri" pitchFamily="34" charset="-122"/>
+                          <a:cs typeface="Calibri" pitchFamily="34" charset="-120"/>
+                        </a:rPr>
+                        <a:t>–</a:t>
+                      </a:r>
+                      <a:endParaRPr lang="en-US" sz="850" dirty="0">
+                        <a:latin typeface="Calibri" charset="0"/>
+                        <a:ea typeface="Calibri" charset="0"/>
+                        <a:cs typeface="Calibri" charset="0"/>
+                      </a:endParaRPr>
+                    </a:p>
+                  </a:txBody>
+                  <a:tcPr marL="64008" marR="64008" marT="0" marB="0" anchor="ctr">
+                    <a:lnL w="6350" cap="flat" cmpd="sng" algn="ctr">
+                      <a:solidFill>
+                        <a:srgbClr val="D5DBE3"/>
+                      </a:solidFill>
+                      <a:prstDash val="solid"/>
+                      <a:round/>
+                      <a:headEnd type="none" w="med" len="med"/>
+                      <a:tailEnd type="none" w="med" len="med"/>
+                    </a:lnL>
+                    <a:lnR w="6350" cap="flat" cmpd="sng" algn="ctr">
+                      <a:solidFill>
+                        <a:srgbClr val="D5DBE3"/>
+                      </a:solidFill>
+                      <a:prstDash val="solid"/>
+                      <a:round/>
+                      <a:headEnd type="none" w="med" len="med"/>
+                      <a:tailEnd type="none" w="med" len="med"/>
+                    </a:lnR>
+                    <a:lnT w="6350" cap="flat" cmpd="sng" algn="ctr">
+                      <a:solidFill>
+                        <a:srgbClr val="D5DBE3"/>
+                      </a:solidFill>
+                      <a:prstDash val="solid"/>
+                      <a:round/>
+                      <a:headEnd type="none" w="med" len="med"/>
+                      <a:tailEnd type="none" w="med" len="med"/>
+                    </a:lnT>
+                    <a:lnB w="6350" cap="flat" cmpd="sng" algn="ctr">
+                      <a:solidFill>
+                        <a:srgbClr val="D5DBE3"/>
+                      </a:solidFill>
+                      <a:prstDash val="solid"/>
+                      <a:round/>
+                      <a:headEnd type="none" w="med" len="med"/>
+                      <a:tailEnd type="none" w="med" len="med"/>
+                    </a:lnB>
+                  </a:tcPr>
+                </a:tc>
+              </a:tr>
+              <a:tr h="224028">
+                <a:tc>
+                  <a:txBody>
+                    <a:bodyPr/>
+                    <a:lstStyle/>
+                    <a:p>
+                      <a:pPr algn="l" indent="0" marL="0">
+                        <a:buNone/>
+                      </a:pPr>
+                      <a:r>
+                        <a:rPr lang="en-US" sz="850" b="1" dirty="0">
+                          <a:solidFill>
+                            <a:srgbClr val="1F2933"/>
+                          </a:solidFill>
+                          <a:latin typeface="Calibri" pitchFamily="34" charset="0"/>
+                          <a:ea typeface="Calibri" pitchFamily="34" charset="-122"/>
+                          <a:cs typeface="Calibri" pitchFamily="34" charset="-120"/>
+                        </a:rPr>
+                        <a:t>RIVIERA PARK – projet</a:t>
+                      </a:r>
+                      <a:endParaRPr lang="en-US" sz="850" dirty="0">
+                        <a:latin typeface="Calibri" charset="0"/>
+                        <a:ea typeface="Calibri" charset="0"/>
+                        <a:cs typeface="Calibri" charset="0"/>
+                      </a:endParaRPr>
+                    </a:p>
+                  </a:txBody>
+                  <a:tcPr marL="64008" marR="64008" marT="0" marB="0" anchor="ctr">
+                    <a:lnL w="6350" cap="flat" cmpd="sng" algn="ctr">
+                      <a:solidFill>
+                        <a:srgbClr val="D5DBE3"/>
+                      </a:solidFill>
+                      <a:prstDash val="solid"/>
+                      <a:round/>
+                      <a:headEnd type="none" w="med" len="med"/>
+                      <a:tailEnd type="none" w="med" len="med"/>
+                    </a:lnL>
+                    <a:lnR w="6350" cap="flat" cmpd="sng" algn="ctr">
+                      <a:solidFill>
+                        <a:srgbClr val="D5DBE3"/>
+                      </a:solidFill>
+                      <a:prstDash val="solid"/>
+                      <a:round/>
+                      <a:headEnd type="none" w="med" len="med"/>
+                      <a:tailEnd type="none" w="med" len="med"/>
+                    </a:lnR>
+                    <a:lnT w="6350" cap="flat" cmpd="sng" algn="ctr">
+                      <a:solidFill>
+                        <a:srgbClr val="D5DBE3"/>
+                      </a:solidFill>
+                      <a:prstDash val="solid"/>
+                      <a:round/>
+                      <a:headEnd type="none" w="med" len="med"/>
+                      <a:tailEnd type="none" w="med" len="med"/>
+                    </a:lnT>
+                    <a:lnB w="6350" cap="flat" cmpd="sng" algn="ctr">
+                      <a:solidFill>
+                        <a:srgbClr val="D5DBE3"/>
+                      </a:solidFill>
+                      <a:prstDash val="solid"/>
+                      <a:round/>
+                      <a:headEnd type="none" w="med" len="med"/>
+                      <a:tailEnd type="none" w="med" len="med"/>
+                    </a:lnB>
+                  </a:tcPr>
+                </a:tc>
+                <a:tc>
+                  <a:txBody>
+                    <a:bodyPr/>
+                    <a:lstStyle/>
+                    <a:p>
+                      <a:pPr algn="r" indent="0" marL="0">
+                        <a:buNone/>
+                      </a:pPr>
+                      <a:r>
+                        <a:rPr lang="en-US" sz="850" dirty="0">
+                          <a:solidFill>
+                            <a:srgbClr val="1F2933"/>
+                          </a:solidFill>
+                          <a:latin typeface="Calibri" pitchFamily="34" charset="0"/>
+                          <a:ea typeface="Calibri" pitchFamily="34" charset="-122"/>
+                          <a:cs typeface="Calibri" pitchFamily="34" charset="-120"/>
+                        </a:rPr>
+                        <a:t>2 643,1</a:t>
+                      </a:r>
+                      <a:endParaRPr lang="en-US" sz="850" dirty="0">
+                        <a:latin typeface="Calibri" charset="0"/>
+                        <a:ea typeface="Calibri" charset="0"/>
+                        <a:cs typeface="Calibri" charset="0"/>
+                      </a:endParaRPr>
+                    </a:p>
+                  </a:txBody>
+                  <a:tcPr marL="64008" marR="64008" marT="0" marB="0" anchor="ctr">
+                    <a:lnL w="6350" cap="flat" cmpd="sng" algn="ctr">
+                      <a:solidFill>
+                        <a:srgbClr val="D5DBE3"/>
+                      </a:solidFill>
+                      <a:prstDash val="solid"/>
+                      <a:round/>
+                      <a:headEnd type="none" w="med" len="med"/>
+                      <a:tailEnd type="none" w="med" len="med"/>
+                    </a:lnL>
+                    <a:lnR w="6350" cap="flat" cmpd="sng" algn="ctr">
+                      <a:solidFill>
+                        <a:srgbClr val="D5DBE3"/>
+                      </a:solidFill>
+                      <a:prstDash val="solid"/>
+                      <a:round/>
+                      <a:headEnd type="none" w="med" len="med"/>
+                      <a:tailEnd type="none" w="med" len="med"/>
+                    </a:lnR>
+                    <a:lnT w="6350" cap="flat" cmpd="sng" algn="ctr">
+                      <a:solidFill>
+                        <a:srgbClr val="D5DBE3"/>
+                      </a:solidFill>
+                      <a:prstDash val="solid"/>
+                      <a:round/>
+                      <a:headEnd type="none" w="med" len="med"/>
+                      <a:tailEnd type="none" w="med" len="med"/>
+                    </a:lnT>
+                    <a:lnB w="6350" cap="flat" cmpd="sng" algn="ctr">
+                      <a:solidFill>
+                        <a:srgbClr val="D5DBE3"/>
+                      </a:solidFill>
+                      <a:prstDash val="solid"/>
+                      <a:round/>
+                      <a:headEnd type="none" w="med" len="med"/>
+                      <a:tailEnd type="none" w="med" len="med"/>
+                    </a:lnB>
+                  </a:tcPr>
+                </a:tc>
+                <a:tc>
+                  <a:txBody>
+                    <a:bodyPr/>
+                    <a:lstStyle/>
+                    <a:p>
+                      <a:pPr algn="r" indent="0" marL="0">
+                        <a:buNone/>
+                      </a:pPr>
+                      <a:r>
+                        <a:rPr lang="en-US" sz="850" dirty="0">
+                          <a:solidFill>
+                            <a:srgbClr val="1F2933"/>
+                          </a:solidFill>
+                          <a:latin typeface="Calibri" pitchFamily="34" charset="0"/>
+                          <a:ea typeface="Calibri" pitchFamily="34" charset="-122"/>
+                          <a:cs typeface="Calibri" pitchFamily="34" charset="-120"/>
+                        </a:rPr>
+                        <a:t>-1 988,4</a:t>
+                      </a:r>
+                      <a:endParaRPr lang="en-US" sz="850" dirty="0">
+                        <a:latin typeface="Calibri" charset="0"/>
+                        <a:ea typeface="Calibri" charset="0"/>
+                        <a:cs typeface="Calibri" charset="0"/>
+                      </a:endParaRPr>
+                    </a:p>
+                  </a:txBody>
+                  <a:tcPr marL="64008" marR="64008" marT="0" marB="0" anchor="ctr">
+                    <a:lnL w="6350" cap="flat" cmpd="sng" algn="ctr">
+                      <a:solidFill>
+                        <a:srgbClr val="D5DBE3"/>
+                      </a:solidFill>
+                      <a:prstDash val="solid"/>
+                      <a:round/>
+                      <a:headEnd type="none" w="med" len="med"/>
+                      <a:tailEnd type="none" w="med" len="med"/>
+                    </a:lnL>
+                    <a:lnR w="6350" cap="flat" cmpd="sng" algn="ctr">
+                      <a:solidFill>
+                        <a:srgbClr val="D5DBE3"/>
+                      </a:solidFill>
+                      <a:prstDash val="solid"/>
+                      <a:round/>
+                      <a:headEnd type="none" w="med" len="med"/>
+                      <a:tailEnd type="none" w="med" len="med"/>
+                    </a:lnR>
+                    <a:lnT w="6350" cap="flat" cmpd="sng" algn="ctr">
+                      <a:solidFill>
+                        <a:srgbClr val="D5DBE3"/>
+                      </a:solidFill>
+                      <a:prstDash val="solid"/>
+                      <a:round/>
+                      <a:headEnd type="none" w="med" len="med"/>
+                      <a:tailEnd type="none" w="med" len="med"/>
+                    </a:lnT>
+                    <a:lnB w="6350" cap="flat" cmpd="sng" algn="ctr">
+                      <a:solidFill>
+                        <a:srgbClr val="D5DBE3"/>
+                      </a:solidFill>
+                      <a:prstDash val="solid"/>
+                      <a:round/>
+                      <a:headEnd type="none" w="med" len="med"/>
+                      <a:tailEnd type="none" w="med" len="med"/>
+                    </a:lnB>
+                  </a:tcPr>
+                </a:tc>
+                <a:tc>
+                  <a:txBody>
+                    <a:bodyPr/>
+                    <a:lstStyle/>
+                    <a:p>
+                      <a:pPr algn="r" indent="0" marL="0">
+                        <a:buNone/>
+                      </a:pPr>
+                      <a:r>
+                        <a:rPr lang="en-US" sz="850" dirty="0">
+                          <a:solidFill>
+                            <a:srgbClr val="1F2933"/>
+                          </a:solidFill>
+                          <a:latin typeface="Calibri" pitchFamily="34" charset="0"/>
+                          <a:ea typeface="Calibri" pitchFamily="34" charset="-122"/>
+                          <a:cs typeface="Calibri" pitchFamily="34" charset="-120"/>
+                        </a:rPr>
+                        <a:t>–</a:t>
+                      </a:r>
+                      <a:endParaRPr lang="en-US" sz="850" dirty="0">
+                        <a:latin typeface="Calibri" charset="0"/>
+                        <a:ea typeface="Calibri" charset="0"/>
+                        <a:cs typeface="Calibri" charset="0"/>
+                      </a:endParaRPr>
+                    </a:p>
+                  </a:txBody>
+                  <a:tcPr marL="64008" marR="64008" marT="0" marB="0" anchor="ctr">
+                    <a:lnL w="6350" cap="flat" cmpd="sng" algn="ctr">
+                      <a:solidFill>
+                        <a:srgbClr val="D5DBE3"/>
+                      </a:solidFill>
+                      <a:prstDash val="solid"/>
+                      <a:round/>
+                      <a:headEnd type="none" w="med" len="med"/>
+                      <a:tailEnd type="none" w="med" len="med"/>
+                    </a:lnL>
+                    <a:lnR w="6350" cap="flat" cmpd="sng" algn="ctr">
+                      <a:solidFill>
+                        <a:srgbClr val="D5DBE3"/>
+                      </a:solidFill>
+                      <a:prstDash val="solid"/>
+                      <a:round/>
+                      <a:headEnd type="none" w="med" len="med"/>
+                      <a:tailEnd type="none" w="med" len="med"/>
+                    </a:lnR>
+                    <a:lnT w="6350" cap="flat" cmpd="sng" algn="ctr">
+                      <a:solidFill>
+                        <a:srgbClr val="D5DBE3"/>
+                      </a:solidFill>
+                      <a:prstDash val="solid"/>
+                      <a:round/>
+                      <a:headEnd type="none" w="med" len="med"/>
+                      <a:tailEnd type="none" w="med" len="med"/>
+                    </a:lnT>
+                    <a:lnB w="6350" cap="flat" cmpd="sng" algn="ctr">
+                      <a:solidFill>
+                        <a:srgbClr val="D5DBE3"/>
+                      </a:solidFill>
+                      <a:prstDash val="solid"/>
+                      <a:round/>
+                      <a:headEnd type="none" w="med" len="med"/>
+                      <a:tailEnd type="none" w="med" len="med"/>
+                    </a:lnB>
+                  </a:tcPr>
+                </a:tc>
+                <a:tc>
+                  <a:txBody>
+                    <a:bodyPr/>
+                    <a:lstStyle/>
+                    <a:p>
+                      <a:pPr algn="r" indent="0" marL="0">
+                        <a:buNone/>
+                      </a:pPr>
+                      <a:r>
+                        <a:rPr lang="en-US" sz="850" b="1" dirty="0">
+                          <a:solidFill>
+                            <a:srgbClr val="5E9B7E"/>
+                          </a:solidFill>
+                          <a:latin typeface="Calibri" pitchFamily="34" charset="0"/>
+                          <a:ea typeface="Calibri" pitchFamily="34" charset="-122"/>
+                          <a:cs typeface="Calibri" pitchFamily="34" charset="-120"/>
+                        </a:rPr>
+                        <a:t>654,7</a:t>
+                      </a:r>
+                      <a:endParaRPr lang="en-US" sz="850" dirty="0">
+                        <a:latin typeface="Calibri" charset="0"/>
+                        <a:ea typeface="Calibri" charset="0"/>
+                        <a:cs typeface="Calibri" charset="0"/>
+                      </a:endParaRPr>
+                    </a:p>
+                  </a:txBody>
+                  <a:tcPr marL="64008" marR="64008" marT="0" marB="0" anchor="ctr">
+                    <a:lnL w="6350" cap="flat" cmpd="sng" algn="ctr">
+                      <a:solidFill>
+                        <a:srgbClr val="D5DBE3"/>
+                      </a:solidFill>
+                      <a:prstDash val="solid"/>
+                      <a:round/>
+                      <a:headEnd type="none" w="med" len="med"/>
+                      <a:tailEnd type="none" w="med" len="med"/>
+                    </a:lnL>
+                    <a:lnR w="6350" cap="flat" cmpd="sng" algn="ctr">
+                      <a:solidFill>
+                        <a:srgbClr val="D5DBE3"/>
+                      </a:solidFill>
+                      <a:prstDash val="solid"/>
+                      <a:round/>
+                      <a:headEnd type="none" w="med" len="med"/>
+                      <a:tailEnd type="none" w="med" len="med"/>
+                    </a:lnR>
+                    <a:lnT w="6350" cap="flat" cmpd="sng" algn="ctr">
+                      <a:solidFill>
+                        <a:srgbClr val="D5DBE3"/>
+                      </a:solidFill>
+                      <a:prstDash val="solid"/>
+                      <a:round/>
+                      <a:headEnd type="none" w="med" len="med"/>
+                      <a:tailEnd type="none" w="med" len="med"/>
+                    </a:lnT>
+                    <a:lnB w="6350" cap="flat" cmpd="sng" algn="ctr">
+                      <a:solidFill>
+                        <a:srgbClr val="D5DBE3"/>
+                      </a:solidFill>
+                      <a:prstDash val="solid"/>
+                      <a:round/>
+                      <a:headEnd type="none" w="med" len="med"/>
+                      <a:tailEnd type="none" w="med" len="med"/>
+                    </a:lnB>
+                  </a:tcPr>
+                </a:tc>
+                <a:tc>
+                  <a:txBody>
+                    <a:bodyPr/>
+                    <a:lstStyle/>
+                    <a:p>
+                      <a:pPr algn="r" indent="0" marL="0">
+                        <a:buNone/>
+                      </a:pPr>
+                      <a:r>
+                        <a:rPr lang="en-US" sz="850" dirty="0">
+                          <a:solidFill>
+                            <a:srgbClr val="1F2933"/>
+                          </a:solidFill>
+                          <a:latin typeface="Calibri" pitchFamily="34" charset="0"/>
+                          <a:ea typeface="Calibri" pitchFamily="34" charset="-122"/>
+                          <a:cs typeface="Calibri" pitchFamily="34" charset="-120"/>
+                        </a:rPr>
+                        <a:t>–</a:t>
+                      </a:r>
+                      <a:endParaRPr lang="en-US" sz="850" dirty="0">
+                        <a:latin typeface="Calibri" charset="0"/>
+                        <a:ea typeface="Calibri" charset="0"/>
+                        <a:cs typeface="Calibri" charset="0"/>
+                      </a:endParaRPr>
+                    </a:p>
+                  </a:txBody>
+                  <a:tcPr marL="64008" marR="64008" marT="0" marB="0" anchor="ctr">
+                    <a:lnL w="6350" cap="flat" cmpd="sng" algn="ctr">
+                      <a:solidFill>
+                        <a:srgbClr val="D5DBE3"/>
+                      </a:solidFill>
+                      <a:prstDash val="solid"/>
+                      <a:round/>
+                      <a:headEnd type="none" w="med" len="med"/>
+                      <a:tailEnd type="none" w="med" len="med"/>
+                    </a:lnL>
+                    <a:lnR w="6350" cap="flat" cmpd="sng" algn="ctr">
+                      <a:solidFill>
+                        <a:srgbClr val="D5DBE3"/>
+                      </a:solidFill>
+                      <a:prstDash val="solid"/>
+                      <a:round/>
+                      <a:headEnd type="none" w="med" len="med"/>
+                      <a:tailEnd type="none" w="med" len="med"/>
+                    </a:lnR>
+                    <a:lnT w="6350" cap="flat" cmpd="sng" algn="ctr">
+                      <a:solidFill>
+                        <a:srgbClr val="D5DBE3"/>
+                      </a:solidFill>
+                      <a:prstDash val="solid"/>
+                      <a:round/>
+                      <a:headEnd type="none" w="med" len="med"/>
+                      <a:tailEnd type="none" w="med" len="med"/>
+                    </a:lnT>
+                    <a:lnB w="6350" cap="flat" cmpd="sng" algn="ctr">
+                      <a:solidFill>
+                        <a:srgbClr val="D5DBE3"/>
+                      </a:solidFill>
+                      <a:prstDash val="solid"/>
+                      <a:round/>
+                      <a:headEnd type="none" w="med" len="med"/>
+                      <a:tailEnd type="none" w="med" len="med"/>
+                    </a:lnB>
+                  </a:tcPr>
+                </a:tc>
+              </a:tr>
+              <a:tr h="224028">
+                <a:tc>
+                  <a:txBody>
+                    <a:bodyPr/>
+                    <a:lstStyle/>
+                    <a:p>
+                      <a:pPr algn="l" indent="0" marL="0">
+                        <a:buNone/>
+                      </a:pPr>
+                      <a:r>
+                        <a:rPr lang="en-US" sz="850" b="1" dirty="0">
+                          <a:solidFill>
+                            <a:srgbClr val="1F2933"/>
+                          </a:solidFill>
+                          <a:latin typeface="Calibri" pitchFamily="34" charset="0"/>
+                          <a:ea typeface="Calibri" pitchFamily="34" charset="-122"/>
+                          <a:cs typeface="Calibri" pitchFamily="34" charset="-120"/>
+                        </a:rPr>
+                        <a:t>RIVIERA PARK – BNI courant (à arbitrer)</a:t>
+                      </a:r>
+                      <a:endParaRPr lang="en-US" sz="850" dirty="0">
+                        <a:latin typeface="Calibri" charset="0"/>
+                        <a:ea typeface="Calibri" charset="0"/>
+                        <a:cs typeface="Calibri" charset="0"/>
+                      </a:endParaRPr>
+                    </a:p>
+                  </a:txBody>
+                  <a:tcPr marL="64008" marR="64008" marT="0" marB="0" anchor="ctr">
+                    <a:lnL w="6350" cap="flat" cmpd="sng" algn="ctr">
+                      <a:solidFill>
+                        <a:srgbClr val="D5DBE3"/>
+                      </a:solidFill>
+                      <a:prstDash val="solid"/>
+                      <a:round/>
+                      <a:headEnd type="none" w="med" len="med"/>
+                      <a:tailEnd type="none" w="med" len="med"/>
+                    </a:lnL>
+                    <a:lnR w="6350" cap="flat" cmpd="sng" algn="ctr">
+                      <a:solidFill>
+                        <a:srgbClr val="D5DBE3"/>
+                      </a:solidFill>
+                      <a:prstDash val="solid"/>
+                      <a:round/>
+                      <a:headEnd type="none" w="med" len="med"/>
+                      <a:tailEnd type="none" w="med" len="med"/>
+                    </a:lnR>
+                    <a:lnT w="6350" cap="flat" cmpd="sng" algn="ctr">
+                      <a:solidFill>
+                        <a:srgbClr val="D5DBE3"/>
+                      </a:solidFill>
+                      <a:prstDash val="solid"/>
+                      <a:round/>
+                      <a:headEnd type="none" w="med" len="med"/>
+                      <a:tailEnd type="none" w="med" len="med"/>
+                    </a:lnT>
+                    <a:lnB w="6350" cap="flat" cmpd="sng" algn="ctr">
+                      <a:solidFill>
+                        <a:srgbClr val="D5DBE3"/>
+                      </a:solidFill>
+                      <a:prstDash val="solid"/>
+                      <a:round/>
+                      <a:headEnd type="none" w="med" len="med"/>
+                      <a:tailEnd type="none" w="med" len="med"/>
+                    </a:lnB>
+                  </a:tcPr>
+                </a:tc>
+                <a:tc>
+                  <a:txBody>
+                    <a:bodyPr/>
+                    <a:lstStyle/>
+                    <a:p>
+                      <a:pPr algn="r" indent="0" marL="0">
+                        <a:buNone/>
+                      </a:pPr>
+                      <a:r>
+                        <a:rPr lang="en-US" sz="850" dirty="0">
+                          <a:solidFill>
+                            <a:srgbClr val="1F2933"/>
+                          </a:solidFill>
+                          <a:latin typeface="Calibri" pitchFamily="34" charset="0"/>
+                          <a:ea typeface="Calibri" pitchFamily="34" charset="-122"/>
+                          <a:cs typeface="Calibri" pitchFamily="34" charset="-120"/>
+                        </a:rPr>
+                        <a:t>1 772,0</a:t>
+                      </a:r>
+                      <a:endParaRPr lang="en-US" sz="850" dirty="0">
+                        <a:latin typeface="Calibri" charset="0"/>
+                        <a:ea typeface="Calibri" charset="0"/>
+                        <a:cs typeface="Calibri" charset="0"/>
+                      </a:endParaRPr>
+                    </a:p>
+                  </a:txBody>
+                  <a:tcPr marL="64008" marR="64008" marT="0" marB="0" anchor="ctr">
+                    <a:lnL w="6350" cap="flat" cmpd="sng" algn="ctr">
+                      <a:solidFill>
+                        <a:srgbClr val="D5DBE3"/>
+                      </a:solidFill>
+                      <a:prstDash val="solid"/>
+                      <a:round/>
+                      <a:headEnd type="none" w="med" len="med"/>
+                      <a:tailEnd type="none" w="med" len="med"/>
+                    </a:lnL>
+                    <a:lnR w="6350" cap="flat" cmpd="sng" algn="ctr">
+                      <a:solidFill>
+                        <a:srgbClr val="D5DBE3"/>
+                      </a:solidFill>
+                      <a:prstDash val="solid"/>
+                      <a:round/>
+                      <a:headEnd type="none" w="med" len="med"/>
+                      <a:tailEnd type="none" w="med" len="med"/>
+                    </a:lnR>
+                    <a:lnT w="6350" cap="flat" cmpd="sng" algn="ctr">
+                      <a:solidFill>
+                        <a:srgbClr val="D5DBE3"/>
+                      </a:solidFill>
+                      <a:prstDash val="solid"/>
+                      <a:round/>
+                      <a:headEnd type="none" w="med" len="med"/>
+                      <a:tailEnd type="none" w="med" len="med"/>
+                    </a:lnT>
+                    <a:lnB w="6350" cap="flat" cmpd="sng" algn="ctr">
+                      <a:solidFill>
+                        <a:srgbClr val="D5DBE3"/>
+                      </a:solidFill>
+                      <a:prstDash val="solid"/>
+                      <a:round/>
+                      <a:headEnd type="none" w="med" len="med"/>
+                      <a:tailEnd type="none" w="med" len="med"/>
+                    </a:lnB>
+                  </a:tcPr>
+                </a:tc>
+                <a:tc>
+                  <a:txBody>
+                    <a:bodyPr/>
+                    <a:lstStyle/>
+                    <a:p>
+                      <a:pPr algn="r" indent="0" marL="0">
+                        <a:buNone/>
+                      </a:pPr>
+                      <a:r>
+                        <a:rPr lang="en-US" sz="850" dirty="0">
+                          <a:solidFill>
+                            <a:srgbClr val="1F2933"/>
+                          </a:solidFill>
+                          <a:latin typeface="Calibri" pitchFamily="34" charset="0"/>
+                          <a:ea typeface="Calibri" pitchFamily="34" charset="-122"/>
+                          <a:cs typeface="Calibri" pitchFamily="34" charset="-120"/>
+                        </a:rPr>
+                        <a:t>–</a:t>
+                      </a:r>
+                      <a:endParaRPr lang="en-US" sz="850" dirty="0">
+                        <a:latin typeface="Calibri" charset="0"/>
+                        <a:ea typeface="Calibri" charset="0"/>
+                        <a:cs typeface="Calibri" charset="0"/>
+                      </a:endParaRPr>
+                    </a:p>
+                  </a:txBody>
+                  <a:tcPr marL="64008" marR="64008" marT="0" marB="0" anchor="ctr">
+                    <a:lnL w="6350" cap="flat" cmpd="sng" algn="ctr">
+                      <a:solidFill>
+                        <a:srgbClr val="D5DBE3"/>
+                      </a:solidFill>
+                      <a:prstDash val="solid"/>
+                      <a:round/>
+                      <a:headEnd type="none" w="med" len="med"/>
+                      <a:tailEnd type="none" w="med" len="med"/>
+                    </a:lnL>
+                    <a:lnR w="6350" cap="flat" cmpd="sng" algn="ctr">
+                      <a:solidFill>
+                        <a:srgbClr val="D5DBE3"/>
+                      </a:solidFill>
+                      <a:prstDash val="solid"/>
+                      <a:round/>
+                      <a:headEnd type="none" w="med" len="med"/>
+                      <a:tailEnd type="none" w="med" len="med"/>
+                    </a:lnR>
+                    <a:lnT w="6350" cap="flat" cmpd="sng" algn="ctr">
+                      <a:solidFill>
+                        <a:srgbClr val="D5DBE3"/>
+                      </a:solidFill>
+                      <a:prstDash val="solid"/>
+                      <a:round/>
+                      <a:headEnd type="none" w="med" len="med"/>
+                      <a:tailEnd type="none" w="med" len="med"/>
+                    </a:lnT>
+                    <a:lnB w="6350" cap="flat" cmpd="sng" algn="ctr">
+                      <a:solidFill>
+                        <a:srgbClr val="D5DBE3"/>
+                      </a:solidFill>
+                      <a:prstDash val="solid"/>
+                      <a:round/>
+                      <a:headEnd type="none" w="med" len="med"/>
+                      <a:tailEnd type="none" w="med" len="med"/>
+                    </a:lnB>
+                  </a:tcPr>
+                </a:tc>
+                <a:tc>
+                  <a:txBody>
+                    <a:bodyPr/>
+                    <a:lstStyle/>
+                    <a:p>
+                      <a:pPr algn="r" indent="0" marL="0">
+                        <a:buNone/>
+                      </a:pPr>
+                      <a:r>
+                        <a:rPr lang="en-US" sz="850" dirty="0">
+                          <a:solidFill>
+                            <a:srgbClr val="1F2933"/>
+                          </a:solidFill>
+                          <a:latin typeface="Calibri" pitchFamily="34" charset="0"/>
+                          <a:ea typeface="Calibri" pitchFamily="34" charset="-122"/>
+                          <a:cs typeface="Calibri" pitchFamily="34" charset="-120"/>
+                        </a:rPr>
+                        <a:t>–</a:t>
+                      </a:r>
+                      <a:endParaRPr lang="en-US" sz="850" dirty="0">
+                        <a:latin typeface="Calibri" charset="0"/>
+                        <a:ea typeface="Calibri" charset="0"/>
+                        <a:cs typeface="Calibri" charset="0"/>
+                      </a:endParaRPr>
+                    </a:p>
+                  </a:txBody>
+                  <a:tcPr marL="64008" marR="64008" marT="0" marB="0" anchor="ctr">
+                    <a:lnL w="6350" cap="flat" cmpd="sng" algn="ctr">
+                      <a:solidFill>
+                        <a:srgbClr val="D5DBE3"/>
+                      </a:solidFill>
+                      <a:prstDash val="solid"/>
+                      <a:round/>
+                      <a:headEnd type="none" w="med" len="med"/>
+                      <a:tailEnd type="none" w="med" len="med"/>
+                    </a:lnL>
+                    <a:lnR w="6350" cap="flat" cmpd="sng" algn="ctr">
+                      <a:solidFill>
+                        <a:srgbClr val="D5DBE3"/>
+                      </a:solidFill>
+                      <a:prstDash val="solid"/>
+                      <a:round/>
+                      <a:headEnd type="none" w="med" len="med"/>
+                      <a:tailEnd type="none" w="med" len="med"/>
+                    </a:lnR>
+                    <a:lnT w="6350" cap="flat" cmpd="sng" algn="ctr">
+                      <a:solidFill>
+                        <a:srgbClr val="D5DBE3"/>
+                      </a:solidFill>
+                      <a:prstDash val="solid"/>
+                      <a:round/>
+                      <a:headEnd type="none" w="med" len="med"/>
+                      <a:tailEnd type="none" w="med" len="med"/>
+                    </a:lnT>
+                    <a:lnB w="6350" cap="flat" cmpd="sng" algn="ctr">
+                      <a:solidFill>
+                        <a:srgbClr val="D5DBE3"/>
+                      </a:solidFill>
+                      <a:prstDash val="solid"/>
+                      <a:round/>
+                      <a:headEnd type="none" w="med" len="med"/>
+                      <a:tailEnd type="none" w="med" len="med"/>
+                    </a:lnB>
+                  </a:tcPr>
+                </a:tc>
+                <a:tc>
+                  <a:txBody>
+                    <a:bodyPr/>
+                    <a:lstStyle/>
+                    <a:p>
+                      <a:pPr algn="r" indent="0" marL="0">
+                        <a:buNone/>
+                      </a:pPr>
+                      <a:r>
+                        <a:rPr lang="en-US" sz="850" b="1" dirty="0">
+                          <a:solidFill>
+                            <a:srgbClr val="5E9B7E"/>
+                          </a:solidFill>
+                          <a:latin typeface="Calibri" pitchFamily="34" charset="0"/>
+                          <a:ea typeface="Calibri" pitchFamily="34" charset="-122"/>
+                          <a:cs typeface="Calibri" pitchFamily="34" charset="-120"/>
+                        </a:rPr>
+                        <a:t>1 772,0</a:t>
+                      </a:r>
+                      <a:endParaRPr lang="en-US" sz="850" dirty="0">
+                        <a:latin typeface="Calibri" charset="0"/>
+                        <a:ea typeface="Calibri" charset="0"/>
+                        <a:cs typeface="Calibri" charset="0"/>
+                      </a:endParaRPr>
+                    </a:p>
+                  </a:txBody>
+                  <a:tcPr marL="64008" marR="64008" marT="0" marB="0" anchor="ctr">
+                    <a:lnL w="6350" cap="flat" cmpd="sng" algn="ctr">
+                      <a:solidFill>
+                        <a:srgbClr val="D5DBE3"/>
+                      </a:solidFill>
+                      <a:prstDash val="solid"/>
+                      <a:round/>
+                      <a:headEnd type="none" w="med" len="med"/>
+                      <a:tailEnd type="none" w="med" len="med"/>
+                    </a:lnL>
+                    <a:lnR w="6350" cap="flat" cmpd="sng" algn="ctr">
+                      <a:solidFill>
+                        <a:srgbClr val="D5DBE3"/>
+                      </a:solidFill>
+                      <a:prstDash val="solid"/>
+                      <a:round/>
+                      <a:headEnd type="none" w="med" len="med"/>
+                      <a:tailEnd type="none" w="med" len="med"/>
+                    </a:lnR>
+                    <a:lnT w="6350" cap="flat" cmpd="sng" algn="ctr">
+                      <a:solidFill>
+                        <a:srgbClr val="D5DBE3"/>
+                      </a:solidFill>
+                      <a:prstDash val="solid"/>
+                      <a:round/>
+                      <a:headEnd type="none" w="med" len="med"/>
+                      <a:tailEnd type="none" w="med" len="med"/>
+                    </a:lnT>
+                    <a:lnB w="6350" cap="flat" cmpd="sng" algn="ctr">
+                      <a:solidFill>
+                        <a:srgbClr val="D5DBE3"/>
+                      </a:solidFill>
+                      <a:prstDash val="solid"/>
+                      <a:round/>
+                      <a:headEnd type="none" w="med" len="med"/>
+                      <a:tailEnd type="none" w="med" len="med"/>
+                    </a:lnB>
+                  </a:tcPr>
+                </a:tc>
+                <a:tc>
+                  <a:txBody>
+                    <a:bodyPr/>
+                    <a:lstStyle/>
+                    <a:p>
+                      <a:pPr algn="r" indent="0" marL="0">
+                        <a:buNone/>
+                      </a:pPr>
+                      <a:r>
+                        <a:rPr lang="en-US" sz="850" dirty="0">
+                          <a:solidFill>
+                            <a:srgbClr val="1F2933"/>
+                          </a:solidFill>
+                          <a:latin typeface="Calibri" pitchFamily="34" charset="0"/>
+                          <a:ea typeface="Calibri" pitchFamily="34" charset="-122"/>
+                          <a:cs typeface="Calibri" pitchFamily="34" charset="-120"/>
+                        </a:rPr>
+                        <a:t>–</a:t>
+                      </a:r>
+                      <a:endParaRPr lang="en-US" sz="850" dirty="0">
+                        <a:latin typeface="Calibri" charset="0"/>
+                        <a:ea typeface="Calibri" charset="0"/>
+                        <a:cs typeface="Calibri" charset="0"/>
+                      </a:endParaRPr>
+                    </a:p>
+                  </a:txBody>
+                  <a:tcPr marL="64008" marR="64008" marT="0" marB="0" anchor="ctr">
+                    <a:lnL w="6350" cap="flat" cmpd="sng" algn="ctr">
+                      <a:solidFill>
+                        <a:srgbClr val="D5DBE3"/>
+                      </a:solidFill>
+                      <a:prstDash val="solid"/>
+                      <a:round/>
+                      <a:headEnd type="none" w="med" len="med"/>
+                      <a:tailEnd type="none" w="med" len="med"/>
+                    </a:lnL>
+                    <a:lnR w="6350" cap="flat" cmpd="sng" algn="ctr">
+                      <a:solidFill>
+                        <a:srgbClr val="D5DBE3"/>
+                      </a:solidFill>
+                      <a:prstDash val="solid"/>
+                      <a:round/>
+                      <a:headEnd type="none" w="med" len="med"/>
+                      <a:tailEnd type="none" w="med" len="med"/>
+                    </a:lnR>
+                    <a:lnT w="6350" cap="flat" cmpd="sng" algn="ctr">
+                      <a:solidFill>
+                        <a:srgbClr val="D5DBE3"/>
+                      </a:solidFill>
+                      <a:prstDash val="solid"/>
+                      <a:round/>
+                      <a:headEnd type="none" w="med" len="med"/>
+                      <a:tailEnd type="none" w="med" len="med"/>
+                    </a:lnT>
+                    <a:lnB w="6350" cap="flat" cmpd="sng" algn="ctr">
+                      <a:solidFill>
+                        <a:srgbClr val="D5DBE3"/>
+                      </a:solidFill>
+                      <a:prstDash val="solid"/>
+                      <a:round/>
+                      <a:headEnd type="none" w="med" len="med"/>
+                      <a:tailEnd type="none" w="med" len="med"/>
+                    </a:lnB>
+                  </a:tcPr>
+                </a:tc>
+              </a:tr>
+              <a:tr h="224028">
+                <a:tc>
+                  <a:txBody>
+                    <a:bodyPr/>
+                    <a:lstStyle/>
+                    <a:p>
+                      <a:pPr algn="l" indent="0" marL="0">
+                        <a:buNone/>
+                      </a:pPr>
+                      <a:r>
+                        <a:rPr lang="en-US" sz="850" b="1" dirty="0">
+                          <a:solidFill>
+                            <a:srgbClr val="1F2933"/>
+                          </a:solidFill>
+                          <a:latin typeface="Calibri" pitchFamily="34" charset="0"/>
+                          <a:ea typeface="Calibri" pitchFamily="34" charset="-122"/>
+                          <a:cs typeface="Calibri" pitchFamily="34" charset="-120"/>
+                        </a:rPr>
+                        <a:t>RIVIERA PARK</a:t>
+                      </a:r>
+                      <a:endParaRPr lang="en-US" sz="850" dirty="0">
+                        <a:latin typeface="Calibri" charset="0"/>
+                        <a:ea typeface="Calibri" charset="0"/>
+                        <a:cs typeface="Calibri" charset="0"/>
+                      </a:endParaRPr>
+                    </a:p>
+                  </a:txBody>
+                  <a:tcPr marL="64008" marR="64008" marT="0" marB="0" anchor="ctr">
+                    <a:lnL w="6350" cap="flat" cmpd="sng" algn="ctr">
+                      <a:solidFill>
+                        <a:srgbClr val="D5DBE3"/>
+                      </a:solidFill>
+                      <a:prstDash val="solid"/>
+                      <a:round/>
+                      <a:headEnd type="none" w="med" len="med"/>
+                      <a:tailEnd type="none" w="med" len="med"/>
+                    </a:lnL>
+                    <a:lnR w="6350" cap="flat" cmpd="sng" algn="ctr">
+                      <a:solidFill>
+                        <a:srgbClr val="D5DBE3"/>
+                      </a:solidFill>
+                      <a:prstDash val="solid"/>
+                      <a:round/>
+                      <a:headEnd type="none" w="med" len="med"/>
+                      <a:tailEnd type="none" w="med" len="med"/>
+                    </a:lnR>
+                    <a:lnT w="6350" cap="flat" cmpd="sng" algn="ctr">
+                      <a:solidFill>
+                        <a:srgbClr val="D5DBE3"/>
+                      </a:solidFill>
+                      <a:prstDash val="solid"/>
+                      <a:round/>
+                      <a:headEnd type="none" w="med" len="med"/>
+                      <a:tailEnd type="none" w="med" len="med"/>
+                    </a:lnT>
+                    <a:lnB w="6350" cap="flat" cmpd="sng" algn="ctr">
+                      <a:solidFill>
+                        <a:srgbClr val="D5DBE3"/>
+                      </a:solidFill>
+                      <a:prstDash val="solid"/>
+                      <a:round/>
+                      <a:headEnd type="none" w="med" len="med"/>
+                      <a:tailEnd type="none" w="med" len="med"/>
+                    </a:lnB>
+                  </a:tcPr>
+                </a:tc>
+                <a:tc>
+                  <a:txBody>
+                    <a:bodyPr/>
+                    <a:lstStyle/>
+                    <a:p>
+                      <a:pPr algn="r" indent="0" marL="0">
+                        <a:buNone/>
+                      </a:pPr>
+                      <a:r>
+                        <a:rPr lang="en-US" sz="850" dirty="0">
+                          <a:solidFill>
+                            <a:srgbClr val="1F2933"/>
+                          </a:solidFill>
+                          <a:latin typeface="Calibri" pitchFamily="34" charset="0"/>
+                          <a:ea typeface="Calibri" pitchFamily="34" charset="-122"/>
+                          <a:cs typeface="Calibri" pitchFamily="34" charset="-120"/>
+                        </a:rPr>
+                        <a:t>1,5</a:t>
+                      </a:r>
+                      <a:endParaRPr lang="en-US" sz="850" dirty="0">
+                        <a:latin typeface="Calibri" charset="0"/>
+                        <a:ea typeface="Calibri" charset="0"/>
+                        <a:cs typeface="Calibri" charset="0"/>
+                      </a:endParaRPr>
+                    </a:p>
+                  </a:txBody>
+                  <a:tcPr marL="64008" marR="64008" marT="0" marB="0" anchor="ctr">
+                    <a:lnL w="6350" cap="flat" cmpd="sng" algn="ctr">
+                      <a:solidFill>
+                        <a:srgbClr val="D5DBE3"/>
+                      </a:solidFill>
+                      <a:prstDash val="solid"/>
+                      <a:round/>
+                      <a:headEnd type="none" w="med" len="med"/>
+                      <a:tailEnd type="none" w="med" len="med"/>
+                    </a:lnL>
+                    <a:lnR w="6350" cap="flat" cmpd="sng" algn="ctr">
+                      <a:solidFill>
+                        <a:srgbClr val="D5DBE3"/>
+                      </a:solidFill>
+                      <a:prstDash val="solid"/>
+                      <a:round/>
+                      <a:headEnd type="none" w="med" len="med"/>
+                      <a:tailEnd type="none" w="med" len="med"/>
+                    </a:lnR>
+                    <a:lnT w="6350" cap="flat" cmpd="sng" algn="ctr">
+                      <a:solidFill>
+                        <a:srgbClr val="D5DBE3"/>
+                      </a:solidFill>
+                      <a:prstDash val="solid"/>
+                      <a:round/>
+                      <a:headEnd type="none" w="med" len="med"/>
+                      <a:tailEnd type="none" w="med" len="med"/>
+                    </a:lnT>
+                    <a:lnB w="6350" cap="flat" cmpd="sng" algn="ctr">
+                      <a:solidFill>
+                        <a:srgbClr val="D5DBE3"/>
+                      </a:solidFill>
+                      <a:prstDash val="solid"/>
+                      <a:round/>
+                      <a:headEnd type="none" w="med" len="med"/>
+                      <a:tailEnd type="none" w="med" len="med"/>
+                    </a:lnB>
+                  </a:tcPr>
+                </a:tc>
+                <a:tc>
+                  <a:txBody>
+                    <a:bodyPr/>
+                    <a:lstStyle/>
+                    <a:p>
+                      <a:pPr algn="r" indent="0" marL="0">
+                        <a:buNone/>
+                      </a:pPr>
+                      <a:r>
+                        <a:rPr lang="en-US" sz="850" dirty="0">
+                          <a:solidFill>
+                            <a:srgbClr val="1F2933"/>
+                          </a:solidFill>
+                          <a:latin typeface="Calibri" pitchFamily="34" charset="0"/>
+                          <a:ea typeface="Calibri" pitchFamily="34" charset="-122"/>
+                          <a:cs typeface="Calibri" pitchFamily="34" charset="-120"/>
+                        </a:rPr>
+                        <a:t>-88,5</a:t>
+                      </a:r>
+                      <a:endParaRPr lang="en-US" sz="850" dirty="0">
+                        <a:latin typeface="Calibri" charset="0"/>
+                        <a:ea typeface="Calibri" charset="0"/>
+                        <a:cs typeface="Calibri" charset="0"/>
+                      </a:endParaRPr>
+                    </a:p>
+                  </a:txBody>
+                  <a:tcPr marL="64008" marR="64008" marT="0" marB="0" anchor="ctr">
+                    <a:lnL w="6350" cap="flat" cmpd="sng" algn="ctr">
+                      <a:solidFill>
+                        <a:srgbClr val="D5DBE3"/>
+                      </a:solidFill>
+                      <a:prstDash val="solid"/>
+                      <a:round/>
+                      <a:headEnd type="none" w="med" len="med"/>
+                      <a:tailEnd type="none" w="med" len="med"/>
+                    </a:lnL>
+                    <a:lnR w="6350" cap="flat" cmpd="sng" algn="ctr">
+                      <a:solidFill>
+                        <a:srgbClr val="D5DBE3"/>
+                      </a:solidFill>
+                      <a:prstDash val="solid"/>
+                      <a:round/>
+                      <a:headEnd type="none" w="med" len="med"/>
+                      <a:tailEnd type="none" w="med" len="med"/>
+                    </a:lnR>
+                    <a:lnT w="6350" cap="flat" cmpd="sng" algn="ctr">
+                      <a:solidFill>
+                        <a:srgbClr val="D5DBE3"/>
+                      </a:solidFill>
+                      <a:prstDash val="solid"/>
+                      <a:round/>
+                      <a:headEnd type="none" w="med" len="med"/>
+                      <a:tailEnd type="none" w="med" len="med"/>
+                    </a:lnT>
+                    <a:lnB w="6350" cap="flat" cmpd="sng" algn="ctr">
+                      <a:solidFill>
+                        <a:srgbClr val="D5DBE3"/>
+                      </a:solidFill>
+                      <a:prstDash val="solid"/>
+                      <a:round/>
+                      <a:headEnd type="none" w="med" len="med"/>
+                      <a:tailEnd type="none" w="med" len="med"/>
+                    </a:lnB>
+                  </a:tcPr>
+                </a:tc>
+                <a:tc>
+                  <a:txBody>
+                    <a:bodyPr/>
+                    <a:lstStyle/>
+                    <a:p>
+                      <a:pPr algn="r" indent="0" marL="0">
+                        <a:buNone/>
+                      </a:pPr>
+                      <a:r>
+                        <a:rPr lang="en-US" sz="850" dirty="0">
+                          <a:solidFill>
+                            <a:srgbClr val="1F2933"/>
+                          </a:solidFill>
+                          <a:latin typeface="Calibri" pitchFamily="34" charset="0"/>
+                          <a:ea typeface="Calibri" pitchFamily="34" charset="-122"/>
+                          <a:cs typeface="Calibri" pitchFamily="34" charset="-120"/>
+                        </a:rPr>
+                        <a:t>–</a:t>
+                      </a:r>
+                      <a:endParaRPr lang="en-US" sz="850" dirty="0">
+                        <a:latin typeface="Calibri" charset="0"/>
+                        <a:ea typeface="Calibri" charset="0"/>
+                        <a:cs typeface="Calibri" charset="0"/>
+                      </a:endParaRPr>
+                    </a:p>
+                  </a:txBody>
+                  <a:tcPr marL="64008" marR="64008" marT="0" marB="0" anchor="ctr">
+                    <a:lnL w="6350" cap="flat" cmpd="sng" algn="ctr">
+                      <a:solidFill>
+                        <a:srgbClr val="D5DBE3"/>
+                      </a:solidFill>
+                      <a:prstDash val="solid"/>
+                      <a:round/>
+                      <a:headEnd type="none" w="med" len="med"/>
+                      <a:tailEnd type="none" w="med" len="med"/>
+                    </a:lnL>
+                    <a:lnR w="6350" cap="flat" cmpd="sng" algn="ctr">
+                      <a:solidFill>
+                        <a:srgbClr val="D5DBE3"/>
+                      </a:solidFill>
+                      <a:prstDash val="solid"/>
+                      <a:round/>
+                      <a:headEnd type="none" w="med" len="med"/>
+                      <a:tailEnd type="none" w="med" len="med"/>
+                    </a:lnR>
+                    <a:lnT w="6350" cap="flat" cmpd="sng" algn="ctr">
+                      <a:solidFill>
+                        <a:srgbClr val="D5DBE3"/>
+                      </a:solidFill>
+                      <a:prstDash val="solid"/>
+                      <a:round/>
+                      <a:headEnd type="none" w="med" len="med"/>
+                      <a:tailEnd type="none" w="med" len="med"/>
+                    </a:lnT>
+                    <a:lnB w="6350" cap="flat" cmpd="sng" algn="ctr">
+                      <a:solidFill>
+                        <a:srgbClr val="D5DBE3"/>
+                      </a:solidFill>
+                      <a:prstDash val="solid"/>
+                      <a:round/>
+                      <a:headEnd type="none" w="med" len="med"/>
+                      <a:tailEnd type="none" w="med" len="med"/>
+                    </a:lnB>
+                  </a:tcPr>
+                </a:tc>
+                <a:tc>
+                  <a:txBody>
+                    <a:bodyPr/>
+                    <a:lstStyle/>
+                    <a:p>
+                      <a:pPr algn="r" indent="0" marL="0">
+                        <a:buNone/>
+                      </a:pPr>
+                      <a:r>
+                        <a:rPr lang="en-US" sz="850" b="1" dirty="0">
+                          <a:solidFill>
+                            <a:srgbClr val="B3261E"/>
+                          </a:solidFill>
+                          <a:latin typeface="Calibri" pitchFamily="34" charset="0"/>
+                          <a:ea typeface="Calibri" pitchFamily="34" charset="-122"/>
+                          <a:cs typeface="Calibri" pitchFamily="34" charset="-120"/>
+                        </a:rPr>
+                        <a:t>-87,1</a:t>
+                      </a:r>
+                      <a:endParaRPr lang="en-US" sz="850" dirty="0">
+                        <a:latin typeface="Calibri" charset="0"/>
+                        <a:ea typeface="Calibri" charset="0"/>
+                        <a:cs typeface="Calibri" charset="0"/>
+                      </a:endParaRPr>
+                    </a:p>
+                  </a:txBody>
+                  <a:tcPr marL="64008" marR="64008" marT="0" marB="0" anchor="ctr">
+                    <a:lnL w="6350" cap="flat" cmpd="sng" algn="ctr">
+                      <a:solidFill>
+                        <a:srgbClr val="D5DBE3"/>
+                      </a:solidFill>
+                      <a:prstDash val="solid"/>
+                      <a:round/>
+                      <a:headEnd type="none" w="med" len="med"/>
+                      <a:tailEnd type="none" w="med" len="med"/>
+                    </a:lnL>
+                    <a:lnR w="6350" cap="flat" cmpd="sng" algn="ctr">
+                      <a:solidFill>
+                        <a:srgbClr val="D5DBE3"/>
+                      </a:solidFill>
+                      <a:prstDash val="solid"/>
+                      <a:round/>
+                      <a:headEnd type="none" w="med" len="med"/>
+                      <a:tailEnd type="none" w="med" len="med"/>
+                    </a:lnR>
+                    <a:lnT w="6350" cap="flat" cmpd="sng" algn="ctr">
+                      <a:solidFill>
+                        <a:srgbClr val="D5DBE3"/>
+                      </a:solidFill>
+                      <a:prstDash val="solid"/>
+                      <a:round/>
+                      <a:headEnd type="none" w="med" len="med"/>
+                      <a:tailEnd type="none" w="med" len="med"/>
+                    </a:lnT>
+                    <a:lnB w="6350" cap="flat" cmpd="sng" algn="ctr">
+                      <a:solidFill>
+                        <a:srgbClr val="D5DBE3"/>
+                      </a:solidFill>
+                      <a:prstDash val="solid"/>
+                      <a:round/>
+                      <a:headEnd type="none" w="med" len="med"/>
+                      <a:tailEnd type="none" w="med" len="med"/>
+                    </a:lnB>
+                    <a:solidFill>
+                      <a:srgbClr val="F7E7E5"/>
+                    </a:solidFill>
+                  </a:tcPr>
+                </a:tc>
+                <a:tc>
+                  <a:txBody>
+                    <a:bodyPr/>
+                    <a:lstStyle/>
+                    <a:p>
+                      <a:pPr algn="r" indent="0" marL="0">
+                        <a:buNone/>
+                      </a:pPr>
+                      <a:r>
+                        <a:rPr lang="en-US" sz="850" b="1" dirty="0">
+                          <a:solidFill>
+                            <a:srgbClr val="B3261E"/>
+                          </a:solidFill>
+                          <a:latin typeface="Calibri" pitchFamily="34" charset="0"/>
+                          <a:ea typeface="Calibri" pitchFamily="34" charset="-122"/>
+                          <a:cs typeface="Calibri" pitchFamily="34" charset="-120"/>
+                        </a:rPr>
+                        <a:t>87,1</a:t>
+                      </a:r>
+                      <a:endParaRPr lang="en-US" sz="850" dirty="0">
+                        <a:latin typeface="Calibri" charset="0"/>
+                        <a:ea typeface="Calibri" charset="0"/>
+                        <a:cs typeface="Calibri" charset="0"/>
+                      </a:endParaRPr>
+                    </a:p>
+                  </a:txBody>
+                  <a:tcPr marL="64008" marR="64008" marT="0" marB="0" anchor="ctr">
+                    <a:lnL w="6350" cap="flat" cmpd="sng" algn="ctr">
+                      <a:solidFill>
+                        <a:srgbClr val="D5DBE3"/>
+                      </a:solidFill>
+                      <a:prstDash val="solid"/>
+                      <a:round/>
+                      <a:headEnd type="none" w="med" len="med"/>
+                      <a:tailEnd type="none" w="med" len="med"/>
+                    </a:lnL>
+                    <a:lnR w="6350" cap="flat" cmpd="sng" algn="ctr">
+                      <a:solidFill>
+                        <a:srgbClr val="D5DBE3"/>
+                      </a:solidFill>
+                      <a:prstDash val="solid"/>
+                      <a:round/>
+                      <a:headEnd type="none" w="med" len="med"/>
+                      <a:tailEnd type="none" w="med" len="med"/>
+                    </a:lnR>
+                    <a:lnT w="6350" cap="flat" cmpd="sng" algn="ctr">
+                      <a:solidFill>
+                        <a:srgbClr val="D5DBE3"/>
+                      </a:solidFill>
+                      <a:prstDash val="solid"/>
+                      <a:round/>
+                      <a:headEnd type="none" w="med" len="med"/>
+                      <a:tailEnd type="none" w="med" len="med"/>
+                    </a:lnT>
+                    <a:lnB w="6350" cap="flat" cmpd="sng" algn="ctr">
+                      <a:solidFill>
+                        <a:srgbClr val="D5DBE3"/>
+                      </a:solidFill>
+                      <a:prstDash val="solid"/>
+                      <a:round/>
+                      <a:headEnd type="none" w="med" len="med"/>
+                      <a:tailEnd type="none" w="med" len="med"/>
+                    </a:lnB>
+                    <a:solidFill>
+                      <a:srgbClr val="F7E7E5"/>
+                    </a:solidFill>
+                  </a:tcPr>
+                </a:tc>
+              </a:tr>
+              <a:tr h="224028">
+                <a:tc>
+                  <a:txBody>
+                    <a:bodyPr/>
+                    <a:lstStyle/>
+                    <a:p>
+                      <a:pPr algn="l" indent="0" marL="0">
+                        <a:buNone/>
+                      </a:pPr>
+                      <a:r>
+                        <a:rPr lang="en-US" sz="850" b="1" dirty="0">
+                          <a:solidFill>
+                            <a:srgbClr val="1F2933"/>
+                          </a:solidFill>
+                          <a:latin typeface="Calibri" pitchFamily="34" charset="0"/>
+                          <a:ea typeface="Calibri" pitchFamily="34" charset="-122"/>
+                          <a:cs typeface="Calibri" pitchFamily="34" charset="-120"/>
+                        </a:rPr>
+                        <a:t>SCO AO</a:t>
+                      </a:r>
+                      <a:endParaRPr lang="en-US" sz="850" dirty="0">
+                        <a:latin typeface="Calibri" charset="0"/>
+                        <a:ea typeface="Calibri" charset="0"/>
+                        <a:cs typeface="Calibri" charset="0"/>
+                      </a:endParaRPr>
+                    </a:p>
+                  </a:txBody>
+                  <a:tcPr marL="64008" marR="64008" marT="0" marB="0" anchor="ctr">
+                    <a:lnL w="6350" cap="flat" cmpd="sng" algn="ctr">
+                      <a:solidFill>
+                        <a:srgbClr val="D5DBE3"/>
+                      </a:solidFill>
+                      <a:prstDash val="solid"/>
+                      <a:round/>
+                      <a:headEnd type="none" w="med" len="med"/>
+                      <a:tailEnd type="none" w="med" len="med"/>
+                    </a:lnL>
+                    <a:lnR w="6350" cap="flat" cmpd="sng" algn="ctr">
+                      <a:solidFill>
+                        <a:srgbClr val="D5DBE3"/>
+                      </a:solidFill>
+                      <a:prstDash val="solid"/>
+                      <a:round/>
+                      <a:headEnd type="none" w="med" len="med"/>
+                      <a:tailEnd type="none" w="med" len="med"/>
+                    </a:lnR>
+                    <a:lnT w="6350" cap="flat" cmpd="sng" algn="ctr">
+                      <a:solidFill>
+                        <a:srgbClr val="D5DBE3"/>
+                      </a:solidFill>
+                      <a:prstDash val="solid"/>
+                      <a:round/>
+                      <a:headEnd type="none" w="med" len="med"/>
+                      <a:tailEnd type="none" w="med" len="med"/>
+                    </a:lnT>
+                    <a:lnB w="6350" cap="flat" cmpd="sng" algn="ctr">
+                      <a:solidFill>
+                        <a:srgbClr val="D5DBE3"/>
+                      </a:solidFill>
+                      <a:prstDash val="solid"/>
+                      <a:round/>
+                      <a:headEnd type="none" w="med" len="med"/>
+                      <a:tailEnd type="none" w="med" len="med"/>
+                    </a:lnB>
+                  </a:tcPr>
+                </a:tc>
+                <a:tc>
+                  <a:txBody>
+                    <a:bodyPr/>
+                    <a:lstStyle/>
+                    <a:p>
+                      <a:pPr algn="r" indent="0" marL="0">
+                        <a:buNone/>
+                      </a:pPr>
+                      <a:r>
+                        <a:rPr lang="en-US" sz="850" dirty="0">
+                          <a:solidFill>
+                            <a:srgbClr val="1F2933"/>
+                          </a:solidFill>
+                          <a:latin typeface="Calibri" pitchFamily="34" charset="0"/>
+                          <a:ea typeface="Calibri" pitchFamily="34" charset="-122"/>
+                          <a:cs typeface="Calibri" pitchFamily="34" charset="-120"/>
+                        </a:rPr>
+                        <a:t>29,1</a:t>
+                      </a:r>
+                      <a:endParaRPr lang="en-US" sz="850" dirty="0">
+                        <a:latin typeface="Calibri" charset="0"/>
+                        <a:ea typeface="Calibri" charset="0"/>
+                        <a:cs typeface="Calibri" charset="0"/>
+                      </a:endParaRPr>
+                    </a:p>
+                  </a:txBody>
+                  <a:tcPr marL="64008" marR="64008" marT="0" marB="0" anchor="ctr">
+                    <a:lnL w="6350" cap="flat" cmpd="sng" algn="ctr">
+                      <a:solidFill>
+                        <a:srgbClr val="D5DBE3"/>
+                      </a:solidFill>
+                      <a:prstDash val="solid"/>
+                      <a:round/>
+                      <a:headEnd type="none" w="med" len="med"/>
+                      <a:tailEnd type="none" w="med" len="med"/>
+                    </a:lnL>
+                    <a:lnR w="6350" cap="flat" cmpd="sng" algn="ctr">
+                      <a:solidFill>
+                        <a:srgbClr val="D5DBE3"/>
+                      </a:solidFill>
+                      <a:prstDash val="solid"/>
+                      <a:round/>
+                      <a:headEnd type="none" w="med" len="med"/>
+                      <a:tailEnd type="none" w="med" len="med"/>
+                    </a:lnR>
+                    <a:lnT w="6350" cap="flat" cmpd="sng" algn="ctr">
+                      <a:solidFill>
+                        <a:srgbClr val="D5DBE3"/>
+                      </a:solidFill>
+                      <a:prstDash val="solid"/>
+                      <a:round/>
+                      <a:headEnd type="none" w="med" len="med"/>
+                      <a:tailEnd type="none" w="med" len="med"/>
+                    </a:lnT>
+                    <a:lnB w="6350" cap="flat" cmpd="sng" algn="ctr">
+                      <a:solidFill>
+                        <a:srgbClr val="D5DBE3"/>
+                      </a:solidFill>
+                      <a:prstDash val="solid"/>
+                      <a:round/>
+                      <a:headEnd type="none" w="med" len="med"/>
+                      <a:tailEnd type="none" w="med" len="med"/>
+                    </a:lnB>
+                  </a:tcPr>
+                </a:tc>
+                <a:tc>
+                  <a:txBody>
+                    <a:bodyPr/>
+                    <a:lstStyle/>
+                    <a:p>
+                      <a:pPr algn="r" indent="0" marL="0">
+                        <a:buNone/>
+                      </a:pPr>
+                      <a:r>
+                        <a:rPr lang="en-US" sz="850" dirty="0">
+                          <a:solidFill>
+                            <a:srgbClr val="1F2933"/>
+                          </a:solidFill>
+                          <a:latin typeface="Calibri" pitchFamily="34" charset="0"/>
+                          <a:ea typeface="Calibri" pitchFamily="34" charset="-122"/>
+                          <a:cs typeface="Calibri" pitchFamily="34" charset="-120"/>
+                        </a:rPr>
+                        <a:t>-180,9</a:t>
+                      </a:r>
+                      <a:endParaRPr lang="en-US" sz="850" dirty="0">
+                        <a:latin typeface="Calibri" charset="0"/>
+                        <a:ea typeface="Calibri" charset="0"/>
+                        <a:cs typeface="Calibri" charset="0"/>
+                      </a:endParaRPr>
+                    </a:p>
+                  </a:txBody>
+                  <a:tcPr marL="64008" marR="64008" marT="0" marB="0" anchor="ctr">
+                    <a:lnL w="6350" cap="flat" cmpd="sng" algn="ctr">
+                      <a:solidFill>
+                        <a:srgbClr val="D5DBE3"/>
+                      </a:solidFill>
+                      <a:prstDash val="solid"/>
+                      <a:round/>
+                      <a:headEnd type="none" w="med" len="med"/>
+                      <a:tailEnd type="none" w="med" len="med"/>
+                    </a:lnL>
+                    <a:lnR w="6350" cap="flat" cmpd="sng" algn="ctr">
+                      <a:solidFill>
+                        <a:srgbClr val="D5DBE3"/>
+                      </a:solidFill>
+                      <a:prstDash val="solid"/>
+                      <a:round/>
+                      <a:headEnd type="none" w="med" len="med"/>
+                      <a:tailEnd type="none" w="med" len="med"/>
+                    </a:lnR>
+                    <a:lnT w="6350" cap="flat" cmpd="sng" algn="ctr">
+                      <a:solidFill>
+                        <a:srgbClr val="D5DBE3"/>
+                      </a:solidFill>
+                      <a:prstDash val="solid"/>
+                      <a:round/>
+                      <a:headEnd type="none" w="med" len="med"/>
+                      <a:tailEnd type="none" w="med" len="med"/>
+                    </a:lnT>
+                    <a:lnB w="6350" cap="flat" cmpd="sng" algn="ctr">
+                      <a:solidFill>
+                        <a:srgbClr val="D5DBE3"/>
+                      </a:solidFill>
+                      <a:prstDash val="solid"/>
+                      <a:round/>
+                      <a:headEnd type="none" w="med" len="med"/>
+                      <a:tailEnd type="none" w="med" len="med"/>
+                    </a:lnB>
+                  </a:tcPr>
+                </a:tc>
+                <a:tc>
+                  <a:txBody>
+                    <a:bodyPr/>
+                    <a:lstStyle/>
+                    <a:p>
+                      <a:pPr algn="r" indent="0" marL="0">
+                        <a:buNone/>
+                      </a:pPr>
+                      <a:r>
+                        <a:rPr lang="en-US" sz="850" dirty="0">
+                          <a:solidFill>
+                            <a:srgbClr val="1F2933"/>
+                          </a:solidFill>
+                          <a:latin typeface="Calibri" pitchFamily="34" charset="0"/>
+                          <a:ea typeface="Calibri" pitchFamily="34" charset="-122"/>
+                          <a:cs typeface="Calibri" pitchFamily="34" charset="-120"/>
+                        </a:rPr>
+                        <a:t>–</a:t>
+                      </a:r>
+                      <a:endParaRPr lang="en-US" sz="850" dirty="0">
+                        <a:latin typeface="Calibri" charset="0"/>
+                        <a:ea typeface="Calibri" charset="0"/>
+                        <a:cs typeface="Calibri" charset="0"/>
+                      </a:endParaRPr>
+                    </a:p>
+                  </a:txBody>
+                  <a:tcPr marL="64008" marR="64008" marT="0" marB="0" anchor="ctr">
+                    <a:lnL w="6350" cap="flat" cmpd="sng" algn="ctr">
+                      <a:solidFill>
+                        <a:srgbClr val="D5DBE3"/>
+                      </a:solidFill>
+                      <a:prstDash val="solid"/>
+                      <a:round/>
+                      <a:headEnd type="none" w="med" len="med"/>
+                      <a:tailEnd type="none" w="med" len="med"/>
+                    </a:lnL>
+                    <a:lnR w="6350" cap="flat" cmpd="sng" algn="ctr">
+                      <a:solidFill>
+                        <a:srgbClr val="D5DBE3"/>
+                      </a:solidFill>
+                      <a:prstDash val="solid"/>
+                      <a:round/>
+                      <a:headEnd type="none" w="med" len="med"/>
+                      <a:tailEnd type="none" w="med" len="med"/>
+                    </a:lnR>
+                    <a:lnT w="6350" cap="flat" cmpd="sng" algn="ctr">
+                      <a:solidFill>
+                        <a:srgbClr val="D5DBE3"/>
+                      </a:solidFill>
+                      <a:prstDash val="solid"/>
+                      <a:round/>
+                      <a:headEnd type="none" w="med" len="med"/>
+                      <a:tailEnd type="none" w="med" len="med"/>
+                    </a:lnT>
+                    <a:lnB w="6350" cap="flat" cmpd="sng" algn="ctr">
+                      <a:solidFill>
+                        <a:srgbClr val="D5DBE3"/>
+                      </a:solidFill>
+                      <a:prstDash val="solid"/>
+                      <a:round/>
+                      <a:headEnd type="none" w="med" len="med"/>
+                      <a:tailEnd type="none" w="med" len="med"/>
+                    </a:lnB>
+                  </a:tcPr>
+                </a:tc>
+                <a:tc>
+                  <a:txBody>
+                    <a:bodyPr/>
+                    <a:lstStyle/>
+                    <a:p>
+                      <a:pPr algn="r" indent="0" marL="0">
+                        <a:buNone/>
+                      </a:pPr>
+                      <a:r>
+                        <a:rPr lang="en-US" sz="850" b="1" dirty="0">
+                          <a:solidFill>
+                            <a:srgbClr val="B3261E"/>
+                          </a:solidFill>
+                          <a:latin typeface="Calibri" pitchFamily="34" charset="0"/>
+                          <a:ea typeface="Calibri" pitchFamily="34" charset="-122"/>
+                          <a:cs typeface="Calibri" pitchFamily="34" charset="-120"/>
+                        </a:rPr>
+                        <a:t>-151,7</a:t>
+                      </a:r>
+                      <a:endParaRPr lang="en-US" sz="850" dirty="0">
+                        <a:latin typeface="Calibri" charset="0"/>
+                        <a:ea typeface="Calibri" charset="0"/>
+                        <a:cs typeface="Calibri" charset="0"/>
+                      </a:endParaRPr>
+                    </a:p>
+                  </a:txBody>
+                  <a:tcPr marL="64008" marR="64008" marT="0" marB="0" anchor="ctr">
+                    <a:lnL w="6350" cap="flat" cmpd="sng" algn="ctr">
+                      <a:solidFill>
+                        <a:srgbClr val="D5DBE3"/>
+                      </a:solidFill>
+                      <a:prstDash val="solid"/>
+                      <a:round/>
+                      <a:headEnd type="none" w="med" len="med"/>
+                      <a:tailEnd type="none" w="med" len="med"/>
+                    </a:lnL>
+                    <a:lnR w="6350" cap="flat" cmpd="sng" algn="ctr">
+                      <a:solidFill>
+                        <a:srgbClr val="D5DBE3"/>
+                      </a:solidFill>
+                      <a:prstDash val="solid"/>
+                      <a:round/>
+                      <a:headEnd type="none" w="med" len="med"/>
+                      <a:tailEnd type="none" w="med" len="med"/>
+                    </a:lnR>
+                    <a:lnT w="6350" cap="flat" cmpd="sng" algn="ctr">
+                      <a:solidFill>
+                        <a:srgbClr val="D5DBE3"/>
+                      </a:solidFill>
+                      <a:prstDash val="solid"/>
+                      <a:round/>
+                      <a:headEnd type="none" w="med" len="med"/>
+                      <a:tailEnd type="none" w="med" len="med"/>
+                    </a:lnT>
+                    <a:lnB w="6350" cap="flat" cmpd="sng" algn="ctr">
+                      <a:solidFill>
+                        <a:srgbClr val="D5DBE3"/>
+                      </a:solidFill>
+                      <a:prstDash val="solid"/>
+                      <a:round/>
+                      <a:headEnd type="none" w="med" len="med"/>
+                      <a:tailEnd type="none" w="med" len="med"/>
+                    </a:lnB>
+                    <a:solidFill>
+                      <a:srgbClr val="F7E7E5"/>
+                    </a:solidFill>
+                  </a:tcPr>
+                </a:tc>
+                <a:tc>
+                  <a:txBody>
+                    <a:bodyPr/>
+                    <a:lstStyle/>
+                    <a:p>
+                      <a:pPr algn="r" indent="0" marL="0">
+                        <a:buNone/>
+                      </a:pPr>
+                      <a:r>
+                        <a:rPr lang="en-US" sz="850" b="1" dirty="0">
+                          <a:solidFill>
+                            <a:srgbClr val="B3261E"/>
+                          </a:solidFill>
+                          <a:latin typeface="Calibri" pitchFamily="34" charset="0"/>
+                          <a:ea typeface="Calibri" pitchFamily="34" charset="-122"/>
+                          <a:cs typeface="Calibri" pitchFamily="34" charset="-120"/>
+                        </a:rPr>
+                        <a:t>152,9</a:t>
+                      </a:r>
+                      <a:endParaRPr lang="en-US" sz="850" dirty="0">
+                        <a:latin typeface="Calibri" charset="0"/>
+                        <a:ea typeface="Calibri" charset="0"/>
+                        <a:cs typeface="Calibri" charset="0"/>
+                      </a:endParaRPr>
+                    </a:p>
+                  </a:txBody>
+                  <a:tcPr marL="64008" marR="64008" marT="0" marB="0" anchor="ctr">
+                    <a:lnL w="6350" cap="flat" cmpd="sng" algn="ctr">
+                      <a:solidFill>
+                        <a:srgbClr val="D5DBE3"/>
+                      </a:solidFill>
+                      <a:prstDash val="solid"/>
+                      <a:round/>
+                      <a:headEnd type="none" w="med" len="med"/>
+                      <a:tailEnd type="none" w="med" len="med"/>
+                    </a:lnL>
+                    <a:lnR w="6350" cap="flat" cmpd="sng" algn="ctr">
+                      <a:solidFill>
+                        <a:srgbClr val="D5DBE3"/>
+                      </a:solidFill>
+                      <a:prstDash val="solid"/>
+                      <a:round/>
+                      <a:headEnd type="none" w="med" len="med"/>
+                      <a:tailEnd type="none" w="med" len="med"/>
+                    </a:lnR>
+                    <a:lnT w="6350" cap="flat" cmpd="sng" algn="ctr">
+                      <a:solidFill>
+                        <a:srgbClr val="D5DBE3"/>
+                      </a:solidFill>
+                      <a:prstDash val="solid"/>
+                      <a:round/>
+                      <a:headEnd type="none" w="med" len="med"/>
+                      <a:tailEnd type="none" w="med" len="med"/>
+                    </a:lnT>
+                    <a:lnB w="6350" cap="flat" cmpd="sng" algn="ctr">
+                      <a:solidFill>
+                        <a:srgbClr val="D5DBE3"/>
+                      </a:solidFill>
+                      <a:prstDash val="solid"/>
+                      <a:round/>
+                      <a:headEnd type="none" w="med" len="med"/>
+                      <a:tailEnd type="none" w="med" len="med"/>
+                    </a:lnB>
+                    <a:solidFill>
+                      <a:srgbClr val="F7E7E5"/>
+                    </a:solidFill>
+                  </a:tcPr>
+                </a:tc>
+              </a:tr>
+              <a:tr h="224028">
+                <a:tc>
+                  <a:txBody>
+                    <a:bodyPr/>
+                    <a:lstStyle/>
+                    <a:p>
+                      <a:pPr algn="l" indent="0" marL="0">
+                        <a:buNone/>
+                      </a:pPr>
+                      <a:r>
+                        <a:rPr lang="en-US" sz="850" b="1" dirty="0">
+                          <a:solidFill>
+                            <a:srgbClr val="1F2933"/>
+                          </a:solidFill>
+                          <a:latin typeface="Calibri" pitchFamily="34" charset="0"/>
+                          <a:ea typeface="Calibri" pitchFamily="34" charset="-122"/>
+                          <a:cs typeface="Calibri" pitchFamily="34" charset="-120"/>
+                        </a:rPr>
+                        <a:t>IMMONEUF</a:t>
+                      </a:r>
+                      <a:endParaRPr lang="en-US" sz="850" dirty="0">
+                        <a:latin typeface="Calibri" charset="0"/>
+                        <a:ea typeface="Calibri" charset="0"/>
+                        <a:cs typeface="Calibri" charset="0"/>
+                      </a:endParaRPr>
+                    </a:p>
+                  </a:txBody>
+                  <a:tcPr marL="64008" marR="64008" marT="0" marB="0" anchor="ctr">
+                    <a:lnL w="6350" cap="flat" cmpd="sng" algn="ctr">
+                      <a:solidFill>
+                        <a:srgbClr val="D5DBE3"/>
+                      </a:solidFill>
+                      <a:prstDash val="solid"/>
+                      <a:round/>
+                      <a:headEnd type="none" w="med" len="med"/>
+                      <a:tailEnd type="none" w="med" len="med"/>
+                    </a:lnL>
+                    <a:lnR w="6350" cap="flat" cmpd="sng" algn="ctr">
+                      <a:solidFill>
+                        <a:srgbClr val="D5DBE3"/>
+                      </a:solidFill>
+                      <a:prstDash val="solid"/>
+                      <a:round/>
+                      <a:headEnd type="none" w="med" len="med"/>
+                      <a:tailEnd type="none" w="med" len="med"/>
+                    </a:lnR>
+                    <a:lnT w="6350" cap="flat" cmpd="sng" algn="ctr">
+                      <a:solidFill>
+                        <a:srgbClr val="D5DBE3"/>
+                      </a:solidFill>
+                      <a:prstDash val="solid"/>
+                      <a:round/>
+                      <a:headEnd type="none" w="med" len="med"/>
+                      <a:tailEnd type="none" w="med" len="med"/>
+                    </a:lnT>
+                    <a:lnB w="6350" cap="flat" cmpd="sng" algn="ctr">
+                      <a:solidFill>
+                        <a:srgbClr val="D5DBE3"/>
+                      </a:solidFill>
+                      <a:prstDash val="solid"/>
+                      <a:round/>
+                      <a:headEnd type="none" w="med" len="med"/>
+                      <a:tailEnd type="none" w="med" len="med"/>
+                    </a:lnB>
+                  </a:tcPr>
+                </a:tc>
+                <a:tc>
+                  <a:txBody>
+                    <a:bodyPr/>
+                    <a:lstStyle/>
+                    <a:p>
+                      <a:pPr algn="r" indent="0" marL="0">
+                        <a:buNone/>
+                      </a:pPr>
+                      <a:r>
+                        <a:rPr lang="en-US" sz="850" dirty="0">
+                          <a:solidFill>
+                            <a:srgbClr val="1F2933"/>
+                          </a:solidFill>
+                          <a:latin typeface="Calibri" pitchFamily="34" charset="0"/>
+                          <a:ea typeface="Calibri" pitchFamily="34" charset="-122"/>
+                          <a:cs typeface="Calibri" pitchFamily="34" charset="-120"/>
+                        </a:rPr>
+                        <a:t>11,8</a:t>
+                      </a:r>
+                      <a:endParaRPr lang="en-US" sz="850" dirty="0">
+                        <a:latin typeface="Calibri" charset="0"/>
+                        <a:ea typeface="Calibri" charset="0"/>
+                        <a:cs typeface="Calibri" charset="0"/>
+                      </a:endParaRPr>
+                    </a:p>
+                  </a:txBody>
+                  <a:tcPr marL="64008" marR="64008" marT="0" marB="0" anchor="ctr">
+                    <a:lnL w="6350" cap="flat" cmpd="sng" algn="ctr">
+                      <a:solidFill>
+                        <a:srgbClr val="D5DBE3"/>
+                      </a:solidFill>
+                      <a:prstDash val="solid"/>
+                      <a:round/>
+                      <a:headEnd type="none" w="med" len="med"/>
+                      <a:tailEnd type="none" w="med" len="med"/>
+                    </a:lnL>
+                    <a:lnR w="6350" cap="flat" cmpd="sng" algn="ctr">
+                      <a:solidFill>
+                        <a:srgbClr val="D5DBE3"/>
+                      </a:solidFill>
+                      <a:prstDash val="solid"/>
+                      <a:round/>
+                      <a:headEnd type="none" w="med" len="med"/>
+                      <a:tailEnd type="none" w="med" len="med"/>
+                    </a:lnR>
+                    <a:lnT w="6350" cap="flat" cmpd="sng" algn="ctr">
+                      <a:solidFill>
+                        <a:srgbClr val="D5DBE3"/>
+                      </a:solidFill>
+                      <a:prstDash val="solid"/>
+                      <a:round/>
+                      <a:headEnd type="none" w="med" len="med"/>
+                      <a:tailEnd type="none" w="med" len="med"/>
+                    </a:lnT>
+                    <a:lnB w="6350" cap="flat" cmpd="sng" algn="ctr">
+                      <a:solidFill>
+                        <a:srgbClr val="D5DBE3"/>
+                      </a:solidFill>
+                      <a:prstDash val="solid"/>
+                      <a:round/>
+                      <a:headEnd type="none" w="med" len="med"/>
+                      <a:tailEnd type="none" w="med" len="med"/>
+                    </a:lnB>
+                  </a:tcPr>
+                </a:tc>
+                <a:tc>
+                  <a:txBody>
+                    <a:bodyPr/>
+                    <a:lstStyle/>
+                    <a:p>
+                      <a:pPr algn="r" indent="0" marL="0">
+                        <a:buNone/>
+                      </a:pPr>
+                      <a:r>
+                        <a:rPr lang="en-US" sz="850" dirty="0">
+                          <a:solidFill>
+                            <a:srgbClr val="1F2933"/>
+                          </a:solidFill>
+                          <a:latin typeface="Calibri" pitchFamily="34" charset="0"/>
+                          <a:ea typeface="Calibri" pitchFamily="34" charset="-122"/>
+                          <a:cs typeface="Calibri" pitchFamily="34" charset="-120"/>
+                        </a:rPr>
+                        <a:t>-37,3</a:t>
+                      </a:r>
+                      <a:endParaRPr lang="en-US" sz="850" dirty="0">
+                        <a:latin typeface="Calibri" charset="0"/>
+                        <a:ea typeface="Calibri" charset="0"/>
+                        <a:cs typeface="Calibri" charset="0"/>
+                      </a:endParaRPr>
+                    </a:p>
+                  </a:txBody>
+                  <a:tcPr marL="64008" marR="64008" marT="0" marB="0" anchor="ctr">
+                    <a:lnL w="6350" cap="flat" cmpd="sng" algn="ctr">
+                      <a:solidFill>
+                        <a:srgbClr val="D5DBE3"/>
+                      </a:solidFill>
+                      <a:prstDash val="solid"/>
+                      <a:round/>
+                      <a:headEnd type="none" w="med" len="med"/>
+                      <a:tailEnd type="none" w="med" len="med"/>
+                    </a:lnL>
+                    <a:lnR w="6350" cap="flat" cmpd="sng" algn="ctr">
+                      <a:solidFill>
+                        <a:srgbClr val="D5DBE3"/>
+                      </a:solidFill>
+                      <a:prstDash val="solid"/>
+                      <a:round/>
+                      <a:headEnd type="none" w="med" len="med"/>
+                      <a:tailEnd type="none" w="med" len="med"/>
+                    </a:lnR>
+                    <a:lnT w="6350" cap="flat" cmpd="sng" algn="ctr">
+                      <a:solidFill>
+                        <a:srgbClr val="D5DBE3"/>
+                      </a:solidFill>
+                      <a:prstDash val="solid"/>
+                      <a:round/>
+                      <a:headEnd type="none" w="med" len="med"/>
+                      <a:tailEnd type="none" w="med" len="med"/>
+                    </a:lnT>
+                    <a:lnB w="6350" cap="flat" cmpd="sng" algn="ctr">
+                      <a:solidFill>
+                        <a:srgbClr val="D5DBE3"/>
+                      </a:solidFill>
+                      <a:prstDash val="solid"/>
+                      <a:round/>
+                      <a:headEnd type="none" w="med" len="med"/>
+                      <a:tailEnd type="none" w="med" len="med"/>
+                    </a:lnB>
+                  </a:tcPr>
+                </a:tc>
+                <a:tc>
+                  <a:txBody>
+                    <a:bodyPr/>
+                    <a:lstStyle/>
+                    <a:p>
+                      <a:pPr algn="r" indent="0" marL="0">
+                        <a:buNone/>
+                      </a:pPr>
+                      <a:r>
+                        <a:rPr lang="en-US" sz="850" dirty="0">
+                          <a:solidFill>
+                            <a:srgbClr val="1F2933"/>
+                          </a:solidFill>
+                          <a:latin typeface="Calibri" pitchFamily="34" charset="0"/>
+                          <a:ea typeface="Calibri" pitchFamily="34" charset="-122"/>
+                          <a:cs typeface="Calibri" pitchFamily="34" charset="-120"/>
+                        </a:rPr>
+                        <a:t>–</a:t>
+                      </a:r>
+                      <a:endParaRPr lang="en-US" sz="850" dirty="0">
+                        <a:latin typeface="Calibri" charset="0"/>
+                        <a:ea typeface="Calibri" charset="0"/>
+                        <a:cs typeface="Calibri" charset="0"/>
+                      </a:endParaRPr>
+                    </a:p>
+                  </a:txBody>
+                  <a:tcPr marL="64008" marR="64008" marT="0" marB="0" anchor="ctr">
+                    <a:lnL w="6350" cap="flat" cmpd="sng" algn="ctr">
+                      <a:solidFill>
+                        <a:srgbClr val="D5DBE3"/>
+                      </a:solidFill>
+                      <a:prstDash val="solid"/>
+                      <a:round/>
+                      <a:headEnd type="none" w="med" len="med"/>
+                      <a:tailEnd type="none" w="med" len="med"/>
+                    </a:lnL>
+                    <a:lnR w="6350" cap="flat" cmpd="sng" algn="ctr">
+                      <a:solidFill>
+                        <a:srgbClr val="D5DBE3"/>
+                      </a:solidFill>
+                      <a:prstDash val="solid"/>
+                      <a:round/>
+                      <a:headEnd type="none" w="med" len="med"/>
+                      <a:tailEnd type="none" w="med" len="med"/>
+                    </a:lnR>
+                    <a:lnT w="6350" cap="flat" cmpd="sng" algn="ctr">
+                      <a:solidFill>
+                        <a:srgbClr val="D5DBE3"/>
+                      </a:solidFill>
+                      <a:prstDash val="solid"/>
+                      <a:round/>
+                      <a:headEnd type="none" w="med" len="med"/>
+                      <a:tailEnd type="none" w="med" len="med"/>
+                    </a:lnT>
+                    <a:lnB w="6350" cap="flat" cmpd="sng" algn="ctr">
+                      <a:solidFill>
+                        <a:srgbClr val="D5DBE3"/>
+                      </a:solidFill>
+                      <a:prstDash val="solid"/>
+                      <a:round/>
+                      <a:headEnd type="none" w="med" len="med"/>
+                      <a:tailEnd type="none" w="med" len="med"/>
+                    </a:lnB>
+                  </a:tcPr>
+                </a:tc>
+                <a:tc>
+                  <a:txBody>
+                    <a:bodyPr/>
+                    <a:lstStyle/>
+                    <a:p>
+                      <a:pPr algn="r" indent="0" marL="0">
+                        <a:buNone/>
+                      </a:pPr>
+                      <a:r>
+                        <a:rPr lang="en-US" sz="850" b="1" dirty="0">
+                          <a:solidFill>
+                            <a:srgbClr val="B3261E"/>
+                          </a:solidFill>
+                          <a:latin typeface="Calibri" pitchFamily="34" charset="0"/>
+                          <a:ea typeface="Calibri" pitchFamily="34" charset="-122"/>
+                          <a:cs typeface="Calibri" pitchFamily="34" charset="-120"/>
+                        </a:rPr>
+                        <a:t>-25,6</a:t>
+                      </a:r>
+                      <a:endParaRPr lang="en-US" sz="850" dirty="0">
+                        <a:latin typeface="Calibri" charset="0"/>
+                        <a:ea typeface="Calibri" charset="0"/>
+                        <a:cs typeface="Calibri" charset="0"/>
+                      </a:endParaRPr>
+                    </a:p>
+                  </a:txBody>
+                  <a:tcPr marL="64008" marR="64008" marT="0" marB="0" anchor="ctr">
+                    <a:lnL w="6350" cap="flat" cmpd="sng" algn="ctr">
+                      <a:solidFill>
+                        <a:srgbClr val="D5DBE3"/>
+                      </a:solidFill>
+                      <a:prstDash val="solid"/>
+                      <a:round/>
+                      <a:headEnd type="none" w="med" len="med"/>
+                      <a:tailEnd type="none" w="med" len="med"/>
+                    </a:lnL>
+                    <a:lnR w="6350" cap="flat" cmpd="sng" algn="ctr">
+                      <a:solidFill>
+                        <a:srgbClr val="D5DBE3"/>
+                      </a:solidFill>
+                      <a:prstDash val="solid"/>
+                      <a:round/>
+                      <a:headEnd type="none" w="med" len="med"/>
+                      <a:tailEnd type="none" w="med" len="med"/>
+                    </a:lnR>
+                    <a:lnT w="6350" cap="flat" cmpd="sng" algn="ctr">
+                      <a:solidFill>
+                        <a:srgbClr val="D5DBE3"/>
+                      </a:solidFill>
+                      <a:prstDash val="solid"/>
+                      <a:round/>
+                      <a:headEnd type="none" w="med" len="med"/>
+                      <a:tailEnd type="none" w="med" len="med"/>
+                    </a:lnT>
+                    <a:lnB w="6350" cap="flat" cmpd="sng" algn="ctr">
+                      <a:solidFill>
+                        <a:srgbClr val="D5DBE3"/>
+                      </a:solidFill>
+                      <a:prstDash val="solid"/>
+                      <a:round/>
+                      <a:headEnd type="none" w="med" len="med"/>
+                      <a:tailEnd type="none" w="med" len="med"/>
+                    </a:lnB>
+                    <a:solidFill>
+                      <a:srgbClr val="F7E7E5"/>
+                    </a:solidFill>
+                  </a:tcPr>
+                </a:tc>
+                <a:tc>
+                  <a:txBody>
+                    <a:bodyPr/>
+                    <a:lstStyle/>
+                    <a:p>
+                      <a:pPr algn="r" indent="0" marL="0">
+                        <a:buNone/>
+                      </a:pPr>
+                      <a:r>
+                        <a:rPr lang="en-US" sz="850" b="1" dirty="0">
+                          <a:solidFill>
+                            <a:srgbClr val="B3261E"/>
+                          </a:solidFill>
+                          <a:latin typeface="Calibri" pitchFamily="34" charset="0"/>
+                          <a:ea typeface="Calibri" pitchFamily="34" charset="-122"/>
+                          <a:cs typeface="Calibri" pitchFamily="34" charset="-120"/>
+                        </a:rPr>
+                        <a:t>25,6</a:t>
+                      </a:r>
+                      <a:endParaRPr lang="en-US" sz="850" dirty="0">
+                        <a:latin typeface="Calibri" charset="0"/>
+                        <a:ea typeface="Calibri" charset="0"/>
+                        <a:cs typeface="Calibri" charset="0"/>
+                      </a:endParaRPr>
+                    </a:p>
+                  </a:txBody>
+                  <a:tcPr marL="64008" marR="64008" marT="0" marB="0" anchor="ctr">
+                    <a:lnL w="6350" cap="flat" cmpd="sng" algn="ctr">
+                      <a:solidFill>
+                        <a:srgbClr val="D5DBE3"/>
+                      </a:solidFill>
+                      <a:prstDash val="solid"/>
+                      <a:round/>
+                      <a:headEnd type="none" w="med" len="med"/>
+                      <a:tailEnd type="none" w="med" len="med"/>
+                    </a:lnL>
+                    <a:lnR w="6350" cap="flat" cmpd="sng" algn="ctr">
+                      <a:solidFill>
+                        <a:srgbClr val="D5DBE3"/>
+                      </a:solidFill>
+                      <a:prstDash val="solid"/>
+                      <a:round/>
+                      <a:headEnd type="none" w="med" len="med"/>
+                      <a:tailEnd type="none" w="med" len="med"/>
+                    </a:lnR>
+                    <a:lnT w="6350" cap="flat" cmpd="sng" algn="ctr">
+                      <a:solidFill>
+                        <a:srgbClr val="D5DBE3"/>
+                      </a:solidFill>
+                      <a:prstDash val="solid"/>
+                      <a:round/>
+                      <a:headEnd type="none" w="med" len="med"/>
+                      <a:tailEnd type="none" w="med" len="med"/>
+                    </a:lnT>
+                    <a:lnB w="6350" cap="flat" cmpd="sng" algn="ctr">
+                      <a:solidFill>
+                        <a:srgbClr val="D5DBE3"/>
+                      </a:solidFill>
+                      <a:prstDash val="solid"/>
+                      <a:round/>
+                      <a:headEnd type="none" w="med" len="med"/>
+                      <a:tailEnd type="none" w="med" len="med"/>
+                    </a:lnB>
+                    <a:solidFill>
+                      <a:srgbClr val="F7E7E5"/>
+                    </a:solidFill>
+                  </a:tcPr>
+                </a:tc>
+              </a:tr>
+              <a:tr h="224028">
+                <a:tc>
+                  <a:txBody>
+                    <a:bodyPr/>
+                    <a:lstStyle/>
+                    <a:p>
+                      <a:pPr algn="l" indent="0" marL="0">
+                        <a:buNone/>
+                      </a:pPr>
+                      <a:r>
+                        <a:rPr lang="en-US" sz="850" b="1" dirty="0">
+                          <a:solidFill>
+                            <a:srgbClr val="1F2933"/>
+                          </a:solidFill>
+                          <a:latin typeface="Calibri" pitchFamily="34" charset="0"/>
+                          <a:ea typeface="Calibri" pitchFamily="34" charset="-122"/>
+                          <a:cs typeface="Calibri" pitchFamily="34" charset="-120"/>
+                        </a:rPr>
+                        <a:t>FINAFRICA</a:t>
+                      </a:r>
+                      <a:endParaRPr lang="en-US" sz="850" dirty="0">
+                        <a:latin typeface="Calibri" charset="0"/>
+                        <a:ea typeface="Calibri" charset="0"/>
+                        <a:cs typeface="Calibri" charset="0"/>
+                      </a:endParaRPr>
+                    </a:p>
+                  </a:txBody>
+                  <a:tcPr marL="64008" marR="64008" marT="0" marB="0" anchor="ctr">
+                    <a:lnL w="6350" cap="flat" cmpd="sng" algn="ctr">
+                      <a:solidFill>
+                        <a:srgbClr val="D5DBE3"/>
+                      </a:solidFill>
+                      <a:prstDash val="solid"/>
+                      <a:round/>
+                      <a:headEnd type="none" w="med" len="med"/>
+                      <a:tailEnd type="none" w="med" len="med"/>
+                    </a:lnL>
+                    <a:lnR w="6350" cap="flat" cmpd="sng" algn="ctr">
+                      <a:solidFill>
+                        <a:srgbClr val="D5DBE3"/>
+                      </a:solidFill>
+                      <a:prstDash val="solid"/>
+                      <a:round/>
+                      <a:headEnd type="none" w="med" len="med"/>
+                      <a:tailEnd type="none" w="med" len="med"/>
+                    </a:lnR>
+                    <a:lnT w="6350" cap="flat" cmpd="sng" algn="ctr">
+                      <a:solidFill>
+                        <a:srgbClr val="D5DBE3"/>
+                      </a:solidFill>
+                      <a:prstDash val="solid"/>
+                      <a:round/>
+                      <a:headEnd type="none" w="med" len="med"/>
+                      <a:tailEnd type="none" w="med" len="med"/>
+                    </a:lnT>
+                    <a:lnB w="6350" cap="flat" cmpd="sng" algn="ctr">
+                      <a:solidFill>
+                        <a:srgbClr val="D5DBE3"/>
+                      </a:solidFill>
+                      <a:prstDash val="solid"/>
+                      <a:round/>
+                      <a:headEnd type="none" w="med" len="med"/>
+                      <a:tailEnd type="none" w="med" len="med"/>
+                    </a:lnB>
+                  </a:tcPr>
+                </a:tc>
+                <a:tc>
+                  <a:txBody>
+                    <a:bodyPr/>
+                    <a:lstStyle/>
+                    <a:p>
+                      <a:pPr algn="r" indent="0" marL="0">
+                        <a:buNone/>
+                      </a:pPr>
+                      <a:r>
+                        <a:rPr lang="en-US" sz="850" dirty="0">
+                          <a:solidFill>
+                            <a:srgbClr val="1F2933"/>
+                          </a:solidFill>
+                          <a:latin typeface="Calibri" pitchFamily="34" charset="0"/>
+                          <a:ea typeface="Calibri" pitchFamily="34" charset="-122"/>
+                          <a:cs typeface="Calibri" pitchFamily="34" charset="-120"/>
+                        </a:rPr>
+                        <a:t>35,1</a:t>
+                      </a:r>
+                      <a:endParaRPr lang="en-US" sz="850" dirty="0">
+                        <a:latin typeface="Calibri" charset="0"/>
+                        <a:ea typeface="Calibri" charset="0"/>
+                        <a:cs typeface="Calibri" charset="0"/>
+                      </a:endParaRPr>
+                    </a:p>
+                  </a:txBody>
+                  <a:tcPr marL="64008" marR="64008" marT="0" marB="0" anchor="ctr">
+                    <a:lnL w="6350" cap="flat" cmpd="sng" algn="ctr">
+                      <a:solidFill>
+                        <a:srgbClr val="D5DBE3"/>
+                      </a:solidFill>
+                      <a:prstDash val="solid"/>
+                      <a:round/>
+                      <a:headEnd type="none" w="med" len="med"/>
+                      <a:tailEnd type="none" w="med" len="med"/>
+                    </a:lnL>
+                    <a:lnR w="6350" cap="flat" cmpd="sng" algn="ctr">
+                      <a:solidFill>
+                        <a:srgbClr val="D5DBE3"/>
+                      </a:solidFill>
+                      <a:prstDash val="solid"/>
+                      <a:round/>
+                      <a:headEnd type="none" w="med" len="med"/>
+                      <a:tailEnd type="none" w="med" len="med"/>
+                    </a:lnR>
+                    <a:lnT w="6350" cap="flat" cmpd="sng" algn="ctr">
+                      <a:solidFill>
+                        <a:srgbClr val="D5DBE3"/>
+                      </a:solidFill>
+                      <a:prstDash val="solid"/>
+                      <a:round/>
+                      <a:headEnd type="none" w="med" len="med"/>
+                      <a:tailEnd type="none" w="med" len="med"/>
+                    </a:lnT>
+                    <a:lnB w="6350" cap="flat" cmpd="sng" algn="ctr">
+                      <a:solidFill>
+                        <a:srgbClr val="D5DBE3"/>
+                      </a:solidFill>
+                      <a:prstDash val="solid"/>
+                      <a:round/>
+                      <a:headEnd type="none" w="med" len="med"/>
+                      <a:tailEnd type="none" w="med" len="med"/>
+                    </a:lnB>
+                  </a:tcPr>
+                </a:tc>
+                <a:tc>
+                  <a:txBody>
+                    <a:bodyPr/>
+                    <a:lstStyle/>
+                    <a:p>
+                      <a:pPr algn="r" indent="0" marL="0">
+                        <a:buNone/>
+                      </a:pPr>
+                      <a:r>
+                        <a:rPr lang="en-US" sz="850" dirty="0">
+                          <a:solidFill>
+                            <a:srgbClr val="1F2933"/>
+                          </a:solidFill>
+                          <a:latin typeface="Calibri" pitchFamily="34" charset="0"/>
+                          <a:ea typeface="Calibri" pitchFamily="34" charset="-122"/>
+                          <a:cs typeface="Calibri" pitchFamily="34" charset="-120"/>
+                        </a:rPr>
+                        <a:t>-175,2</a:t>
+                      </a:r>
+                      <a:endParaRPr lang="en-US" sz="850" dirty="0">
+                        <a:latin typeface="Calibri" charset="0"/>
+                        <a:ea typeface="Calibri" charset="0"/>
+                        <a:cs typeface="Calibri" charset="0"/>
+                      </a:endParaRPr>
+                    </a:p>
+                  </a:txBody>
+                  <a:tcPr marL="64008" marR="64008" marT="0" marB="0" anchor="ctr">
+                    <a:lnL w="6350" cap="flat" cmpd="sng" algn="ctr">
+                      <a:solidFill>
+                        <a:srgbClr val="D5DBE3"/>
+                      </a:solidFill>
+                      <a:prstDash val="solid"/>
+                      <a:round/>
+                      <a:headEnd type="none" w="med" len="med"/>
+                      <a:tailEnd type="none" w="med" len="med"/>
+                    </a:lnL>
+                    <a:lnR w="6350" cap="flat" cmpd="sng" algn="ctr">
+                      <a:solidFill>
+                        <a:srgbClr val="D5DBE3"/>
+                      </a:solidFill>
+                      <a:prstDash val="solid"/>
+                      <a:round/>
+                      <a:headEnd type="none" w="med" len="med"/>
+                      <a:tailEnd type="none" w="med" len="med"/>
+                    </a:lnR>
+                    <a:lnT w="6350" cap="flat" cmpd="sng" algn="ctr">
+                      <a:solidFill>
+                        <a:srgbClr val="D5DBE3"/>
+                      </a:solidFill>
+                      <a:prstDash val="solid"/>
+                      <a:round/>
+                      <a:headEnd type="none" w="med" len="med"/>
+                      <a:tailEnd type="none" w="med" len="med"/>
+                    </a:lnT>
+                    <a:lnB w="6350" cap="flat" cmpd="sng" algn="ctr">
+                      <a:solidFill>
+                        <a:srgbClr val="D5DBE3"/>
+                      </a:solidFill>
+                      <a:prstDash val="solid"/>
+                      <a:round/>
+                      <a:headEnd type="none" w="med" len="med"/>
+                      <a:tailEnd type="none" w="med" len="med"/>
+                    </a:lnB>
+                  </a:tcPr>
+                </a:tc>
+                <a:tc>
+                  <a:txBody>
+                    <a:bodyPr/>
+                    <a:lstStyle/>
+                    <a:p>
+                      <a:pPr algn="r" indent="0" marL="0">
+                        <a:buNone/>
+                      </a:pPr>
+                      <a:r>
+                        <a:rPr lang="en-US" sz="850" dirty="0">
+                          <a:solidFill>
+                            <a:srgbClr val="1F2933"/>
+                          </a:solidFill>
+                          <a:latin typeface="Calibri" pitchFamily="34" charset="0"/>
+                          <a:ea typeface="Calibri" pitchFamily="34" charset="-122"/>
+                          <a:cs typeface="Calibri" pitchFamily="34" charset="-120"/>
+                        </a:rPr>
+                        <a:t>–</a:t>
+                      </a:r>
+                      <a:endParaRPr lang="en-US" sz="850" dirty="0">
+                        <a:latin typeface="Calibri" charset="0"/>
+                        <a:ea typeface="Calibri" charset="0"/>
+                        <a:cs typeface="Calibri" charset="0"/>
+                      </a:endParaRPr>
+                    </a:p>
+                  </a:txBody>
+                  <a:tcPr marL="64008" marR="64008" marT="0" marB="0" anchor="ctr">
+                    <a:lnL w="6350" cap="flat" cmpd="sng" algn="ctr">
+                      <a:solidFill>
+                        <a:srgbClr val="D5DBE3"/>
+                      </a:solidFill>
+                      <a:prstDash val="solid"/>
+                      <a:round/>
+                      <a:headEnd type="none" w="med" len="med"/>
+                      <a:tailEnd type="none" w="med" len="med"/>
+                    </a:lnL>
+                    <a:lnR w="6350" cap="flat" cmpd="sng" algn="ctr">
+                      <a:solidFill>
+                        <a:srgbClr val="D5DBE3"/>
+                      </a:solidFill>
+                      <a:prstDash val="solid"/>
+                      <a:round/>
+                      <a:headEnd type="none" w="med" len="med"/>
+                      <a:tailEnd type="none" w="med" len="med"/>
+                    </a:lnR>
+                    <a:lnT w="6350" cap="flat" cmpd="sng" algn="ctr">
+                      <a:solidFill>
+                        <a:srgbClr val="D5DBE3"/>
+                      </a:solidFill>
+                      <a:prstDash val="solid"/>
+                      <a:round/>
+                      <a:headEnd type="none" w="med" len="med"/>
+                      <a:tailEnd type="none" w="med" len="med"/>
+                    </a:lnT>
+                    <a:lnB w="6350" cap="flat" cmpd="sng" algn="ctr">
+                      <a:solidFill>
+                        <a:srgbClr val="D5DBE3"/>
+                      </a:solidFill>
+                      <a:prstDash val="solid"/>
+                      <a:round/>
+                      <a:headEnd type="none" w="med" len="med"/>
+                      <a:tailEnd type="none" w="med" len="med"/>
+                    </a:lnB>
+                  </a:tcPr>
+                </a:tc>
+                <a:tc>
+                  <a:txBody>
+                    <a:bodyPr/>
+                    <a:lstStyle/>
+                    <a:p>
+                      <a:pPr algn="r" indent="0" marL="0">
+                        <a:buNone/>
+                      </a:pPr>
+                      <a:r>
+                        <a:rPr lang="en-US" sz="850" b="1" dirty="0">
+                          <a:solidFill>
+                            <a:srgbClr val="B3261E"/>
+                          </a:solidFill>
+                          <a:latin typeface="Calibri" pitchFamily="34" charset="0"/>
+                          <a:ea typeface="Calibri" pitchFamily="34" charset="-122"/>
+                          <a:cs typeface="Calibri" pitchFamily="34" charset="-120"/>
+                        </a:rPr>
+                        <a:t>-140,1</a:t>
+                      </a:r>
+                      <a:endParaRPr lang="en-US" sz="850" dirty="0">
+                        <a:latin typeface="Calibri" charset="0"/>
+                        <a:ea typeface="Calibri" charset="0"/>
+                        <a:cs typeface="Calibri" charset="0"/>
+                      </a:endParaRPr>
+                    </a:p>
+                  </a:txBody>
+                  <a:tcPr marL="64008" marR="64008" marT="0" marB="0" anchor="ctr">
+                    <a:lnL w="6350" cap="flat" cmpd="sng" algn="ctr">
+                      <a:solidFill>
+                        <a:srgbClr val="D5DBE3"/>
+                      </a:solidFill>
+                      <a:prstDash val="solid"/>
+                      <a:round/>
+                      <a:headEnd type="none" w="med" len="med"/>
+                      <a:tailEnd type="none" w="med" len="med"/>
+                    </a:lnL>
+                    <a:lnR w="6350" cap="flat" cmpd="sng" algn="ctr">
+                      <a:solidFill>
+                        <a:srgbClr val="D5DBE3"/>
+                      </a:solidFill>
+                      <a:prstDash val="solid"/>
+                      <a:round/>
+                      <a:headEnd type="none" w="med" len="med"/>
+                      <a:tailEnd type="none" w="med" len="med"/>
+                    </a:lnR>
+                    <a:lnT w="6350" cap="flat" cmpd="sng" algn="ctr">
+                      <a:solidFill>
+                        <a:srgbClr val="D5DBE3"/>
+                      </a:solidFill>
+                      <a:prstDash val="solid"/>
+                      <a:round/>
+                      <a:headEnd type="none" w="med" len="med"/>
+                      <a:tailEnd type="none" w="med" len="med"/>
+                    </a:lnT>
+                    <a:lnB w="6350" cap="flat" cmpd="sng" algn="ctr">
+                      <a:solidFill>
+                        <a:srgbClr val="D5DBE3"/>
+                      </a:solidFill>
+                      <a:prstDash val="solid"/>
+                      <a:round/>
+                      <a:headEnd type="none" w="med" len="med"/>
+                      <a:tailEnd type="none" w="med" len="med"/>
+                    </a:lnB>
+                    <a:solidFill>
+                      <a:srgbClr val="F7E7E5"/>
+                    </a:solidFill>
+                  </a:tcPr>
+                </a:tc>
+                <a:tc>
+                  <a:txBody>
+                    <a:bodyPr/>
+                    <a:lstStyle/>
+                    <a:p>
+                      <a:pPr algn="r" indent="0" marL="0">
+                        <a:buNone/>
+                      </a:pPr>
+                      <a:r>
+                        <a:rPr lang="en-US" sz="850" b="1" dirty="0">
+                          <a:solidFill>
+                            <a:srgbClr val="B3261E"/>
+                          </a:solidFill>
+                          <a:latin typeface="Calibri" pitchFamily="34" charset="0"/>
+                          <a:ea typeface="Calibri" pitchFamily="34" charset="-122"/>
+                          <a:cs typeface="Calibri" pitchFamily="34" charset="-120"/>
+                        </a:rPr>
+                        <a:t>140,2</a:t>
+                      </a:r>
+                      <a:endParaRPr lang="en-US" sz="850" dirty="0">
+                        <a:latin typeface="Calibri" charset="0"/>
+                        <a:ea typeface="Calibri" charset="0"/>
+                        <a:cs typeface="Calibri" charset="0"/>
+                      </a:endParaRPr>
+                    </a:p>
+                  </a:txBody>
+                  <a:tcPr marL="64008" marR="64008" marT="0" marB="0" anchor="ctr">
+                    <a:lnL w="6350" cap="flat" cmpd="sng" algn="ctr">
+                      <a:solidFill>
+                        <a:srgbClr val="D5DBE3"/>
+                      </a:solidFill>
+                      <a:prstDash val="solid"/>
+                      <a:round/>
+                      <a:headEnd type="none" w="med" len="med"/>
+                      <a:tailEnd type="none" w="med" len="med"/>
+                    </a:lnL>
+                    <a:lnR w="6350" cap="flat" cmpd="sng" algn="ctr">
+                      <a:solidFill>
+                        <a:srgbClr val="D5DBE3"/>
+                      </a:solidFill>
+                      <a:prstDash val="solid"/>
+                      <a:round/>
+                      <a:headEnd type="none" w="med" len="med"/>
+                      <a:tailEnd type="none" w="med" len="med"/>
+                    </a:lnR>
+                    <a:lnT w="6350" cap="flat" cmpd="sng" algn="ctr">
+                      <a:solidFill>
+                        <a:srgbClr val="D5DBE3"/>
+                      </a:solidFill>
+                      <a:prstDash val="solid"/>
+                      <a:round/>
+                      <a:headEnd type="none" w="med" len="med"/>
+                      <a:tailEnd type="none" w="med" len="med"/>
+                    </a:lnT>
+                    <a:lnB w="6350" cap="flat" cmpd="sng" algn="ctr">
+                      <a:solidFill>
+                        <a:srgbClr val="D5DBE3"/>
+                      </a:solidFill>
+                      <a:prstDash val="solid"/>
+                      <a:round/>
+                      <a:headEnd type="none" w="med" len="med"/>
+                      <a:tailEnd type="none" w="med" len="med"/>
+                    </a:lnB>
+                    <a:solidFill>
+                      <a:srgbClr val="F7E7E5"/>
+                    </a:solidFill>
+                  </a:tcPr>
+                </a:tc>
+              </a:tr>
+              <a:tr h="224028">
+                <a:tc>
+                  <a:txBody>
+                    <a:bodyPr/>
+                    <a:lstStyle/>
+                    <a:p>
+                      <a:pPr algn="l" indent="0" marL="0">
+                        <a:buNone/>
+                      </a:pPr>
+                      <a:r>
+                        <a:rPr lang="en-US" sz="850" b="1" dirty="0">
+                          <a:solidFill>
+                            <a:srgbClr val="1F2933"/>
+                          </a:solidFill>
+                          <a:latin typeface="Calibri" pitchFamily="34" charset="0"/>
+                          <a:ea typeface="Calibri" pitchFamily="34" charset="-122"/>
+                          <a:cs typeface="Calibri" pitchFamily="34" charset="-120"/>
+                        </a:rPr>
+                        <a:t>INFI</a:t>
+                      </a:r>
+                      <a:endParaRPr lang="en-US" sz="850" dirty="0">
+                        <a:latin typeface="Calibri" charset="0"/>
+                        <a:ea typeface="Calibri" charset="0"/>
+                        <a:cs typeface="Calibri" charset="0"/>
+                      </a:endParaRPr>
+                    </a:p>
+                  </a:txBody>
+                  <a:tcPr marL="64008" marR="64008" marT="0" marB="0" anchor="ctr">
+                    <a:lnL w="6350" cap="flat" cmpd="sng" algn="ctr">
+                      <a:solidFill>
+                        <a:srgbClr val="D5DBE3"/>
+                      </a:solidFill>
+                      <a:prstDash val="solid"/>
+                      <a:round/>
+                      <a:headEnd type="none" w="med" len="med"/>
+                      <a:tailEnd type="none" w="med" len="med"/>
+                    </a:lnL>
+                    <a:lnR w="6350" cap="flat" cmpd="sng" algn="ctr">
+                      <a:solidFill>
+                        <a:srgbClr val="D5DBE3"/>
+                      </a:solidFill>
+                      <a:prstDash val="solid"/>
+                      <a:round/>
+                      <a:headEnd type="none" w="med" len="med"/>
+                      <a:tailEnd type="none" w="med" len="med"/>
+                    </a:lnR>
+                    <a:lnT w="6350" cap="flat" cmpd="sng" algn="ctr">
+                      <a:solidFill>
+                        <a:srgbClr val="D5DBE3"/>
+                      </a:solidFill>
+                      <a:prstDash val="solid"/>
+                      <a:round/>
+                      <a:headEnd type="none" w="med" len="med"/>
+                      <a:tailEnd type="none" w="med" len="med"/>
+                    </a:lnT>
+                    <a:lnB w="6350" cap="flat" cmpd="sng" algn="ctr">
+                      <a:solidFill>
+                        <a:srgbClr val="D5DBE3"/>
+                      </a:solidFill>
+                      <a:prstDash val="solid"/>
+                      <a:round/>
+                      <a:headEnd type="none" w="med" len="med"/>
+                      <a:tailEnd type="none" w="med" len="med"/>
+                    </a:lnB>
+                  </a:tcPr>
+                </a:tc>
+                <a:tc>
+                  <a:txBody>
+                    <a:bodyPr/>
+                    <a:lstStyle/>
+                    <a:p>
+                      <a:pPr algn="r" indent="0" marL="0">
+                        <a:buNone/>
+                      </a:pPr>
+                      <a:r>
+                        <a:rPr lang="en-US" sz="850" dirty="0">
+                          <a:solidFill>
+                            <a:srgbClr val="1F2933"/>
+                          </a:solidFill>
+                          <a:latin typeface="Calibri" pitchFamily="34" charset="0"/>
+                          <a:ea typeface="Calibri" pitchFamily="34" charset="-122"/>
+                          <a:cs typeface="Calibri" pitchFamily="34" charset="-120"/>
+                        </a:rPr>
+                        <a:t>2,8</a:t>
+                      </a:r>
+                      <a:endParaRPr lang="en-US" sz="850" dirty="0">
+                        <a:latin typeface="Calibri" charset="0"/>
+                        <a:ea typeface="Calibri" charset="0"/>
+                        <a:cs typeface="Calibri" charset="0"/>
+                      </a:endParaRPr>
+                    </a:p>
+                  </a:txBody>
+                  <a:tcPr marL="64008" marR="64008" marT="0" marB="0" anchor="ctr">
+                    <a:lnL w="6350" cap="flat" cmpd="sng" algn="ctr">
+                      <a:solidFill>
+                        <a:srgbClr val="D5DBE3"/>
+                      </a:solidFill>
+                      <a:prstDash val="solid"/>
+                      <a:round/>
+                      <a:headEnd type="none" w="med" len="med"/>
+                      <a:tailEnd type="none" w="med" len="med"/>
+                    </a:lnL>
+                    <a:lnR w="6350" cap="flat" cmpd="sng" algn="ctr">
+                      <a:solidFill>
+                        <a:srgbClr val="D5DBE3"/>
+                      </a:solidFill>
+                      <a:prstDash val="solid"/>
+                      <a:round/>
+                      <a:headEnd type="none" w="med" len="med"/>
+                      <a:tailEnd type="none" w="med" len="med"/>
+                    </a:lnR>
+                    <a:lnT w="6350" cap="flat" cmpd="sng" algn="ctr">
+                      <a:solidFill>
+                        <a:srgbClr val="D5DBE3"/>
+                      </a:solidFill>
+                      <a:prstDash val="solid"/>
+                      <a:round/>
+                      <a:headEnd type="none" w="med" len="med"/>
+                      <a:tailEnd type="none" w="med" len="med"/>
+                    </a:lnT>
+                    <a:lnB w="6350" cap="flat" cmpd="sng" algn="ctr">
+                      <a:solidFill>
+                        <a:srgbClr val="D5DBE3"/>
+                      </a:solidFill>
+                      <a:prstDash val="solid"/>
+                      <a:round/>
+                      <a:headEnd type="none" w="med" len="med"/>
+                      <a:tailEnd type="none" w="med" len="med"/>
+                    </a:lnB>
+                  </a:tcPr>
+                </a:tc>
+                <a:tc>
+                  <a:txBody>
+                    <a:bodyPr/>
+                    <a:lstStyle/>
+                    <a:p>
+                      <a:pPr algn="r" indent="0" marL="0">
+                        <a:buNone/>
+                      </a:pPr>
+                      <a:r>
+                        <a:rPr lang="en-US" sz="850" dirty="0">
+                          <a:solidFill>
+                            <a:srgbClr val="1F2933"/>
+                          </a:solidFill>
+                          <a:latin typeface="Calibri" pitchFamily="34" charset="0"/>
+                          <a:ea typeface="Calibri" pitchFamily="34" charset="-122"/>
+                          <a:cs typeface="Calibri" pitchFamily="34" charset="-120"/>
+                        </a:rPr>
+                        <a:t>–</a:t>
+                      </a:r>
+                      <a:endParaRPr lang="en-US" sz="850" dirty="0">
+                        <a:latin typeface="Calibri" charset="0"/>
+                        <a:ea typeface="Calibri" charset="0"/>
+                        <a:cs typeface="Calibri" charset="0"/>
+                      </a:endParaRPr>
+                    </a:p>
+                  </a:txBody>
+                  <a:tcPr marL="64008" marR="64008" marT="0" marB="0" anchor="ctr">
+                    <a:lnL w="6350" cap="flat" cmpd="sng" algn="ctr">
+                      <a:solidFill>
+                        <a:srgbClr val="D5DBE3"/>
+                      </a:solidFill>
+                      <a:prstDash val="solid"/>
+                      <a:round/>
+                      <a:headEnd type="none" w="med" len="med"/>
+                      <a:tailEnd type="none" w="med" len="med"/>
+                    </a:lnL>
+                    <a:lnR w="6350" cap="flat" cmpd="sng" algn="ctr">
+                      <a:solidFill>
+                        <a:srgbClr val="D5DBE3"/>
+                      </a:solidFill>
+                      <a:prstDash val="solid"/>
+                      <a:round/>
+                      <a:headEnd type="none" w="med" len="med"/>
+                      <a:tailEnd type="none" w="med" len="med"/>
+                    </a:lnR>
+                    <a:lnT w="6350" cap="flat" cmpd="sng" algn="ctr">
+                      <a:solidFill>
+                        <a:srgbClr val="D5DBE3"/>
+                      </a:solidFill>
+                      <a:prstDash val="solid"/>
+                      <a:round/>
+                      <a:headEnd type="none" w="med" len="med"/>
+                      <a:tailEnd type="none" w="med" len="med"/>
+                    </a:lnT>
+                    <a:lnB w="6350" cap="flat" cmpd="sng" algn="ctr">
+                      <a:solidFill>
+                        <a:srgbClr val="D5DBE3"/>
+                      </a:solidFill>
+                      <a:prstDash val="solid"/>
+                      <a:round/>
+                      <a:headEnd type="none" w="med" len="med"/>
+                      <a:tailEnd type="none" w="med" len="med"/>
+                    </a:lnB>
+                  </a:tcPr>
+                </a:tc>
+                <a:tc>
+                  <a:txBody>
+                    <a:bodyPr/>
+                    <a:lstStyle/>
+                    <a:p>
+                      <a:pPr algn="r" indent="0" marL="0">
+                        <a:buNone/>
+                      </a:pPr>
+                      <a:r>
+                        <a:rPr lang="en-US" sz="850" dirty="0">
+                          <a:solidFill>
+                            <a:srgbClr val="1F2933"/>
+                          </a:solidFill>
+                          <a:latin typeface="Calibri" pitchFamily="34" charset="0"/>
+                          <a:ea typeface="Calibri" pitchFamily="34" charset="-122"/>
+                          <a:cs typeface="Calibri" pitchFamily="34" charset="-120"/>
+                        </a:rPr>
+                        <a:t>–</a:t>
+                      </a:r>
+                      <a:endParaRPr lang="en-US" sz="850" dirty="0">
+                        <a:latin typeface="Calibri" charset="0"/>
+                        <a:ea typeface="Calibri" charset="0"/>
+                        <a:cs typeface="Calibri" charset="0"/>
+                      </a:endParaRPr>
+                    </a:p>
+                  </a:txBody>
+                  <a:tcPr marL="64008" marR="64008" marT="0" marB="0" anchor="ctr">
+                    <a:lnL w="6350" cap="flat" cmpd="sng" algn="ctr">
+                      <a:solidFill>
+                        <a:srgbClr val="D5DBE3"/>
+                      </a:solidFill>
+                      <a:prstDash val="solid"/>
+                      <a:round/>
+                      <a:headEnd type="none" w="med" len="med"/>
+                      <a:tailEnd type="none" w="med" len="med"/>
+                    </a:lnL>
+                    <a:lnR w="6350" cap="flat" cmpd="sng" algn="ctr">
+                      <a:solidFill>
+                        <a:srgbClr val="D5DBE3"/>
+                      </a:solidFill>
+                      <a:prstDash val="solid"/>
+                      <a:round/>
+                      <a:headEnd type="none" w="med" len="med"/>
+                      <a:tailEnd type="none" w="med" len="med"/>
+                    </a:lnR>
+                    <a:lnT w="6350" cap="flat" cmpd="sng" algn="ctr">
+                      <a:solidFill>
+                        <a:srgbClr val="D5DBE3"/>
+                      </a:solidFill>
+                      <a:prstDash val="solid"/>
+                      <a:round/>
+                      <a:headEnd type="none" w="med" len="med"/>
+                      <a:tailEnd type="none" w="med" len="med"/>
+                    </a:lnT>
+                    <a:lnB w="6350" cap="flat" cmpd="sng" algn="ctr">
+                      <a:solidFill>
+                        <a:srgbClr val="D5DBE3"/>
+                      </a:solidFill>
+                      <a:prstDash val="solid"/>
+                      <a:round/>
+                      <a:headEnd type="none" w="med" len="med"/>
+                      <a:tailEnd type="none" w="med" len="med"/>
+                    </a:lnB>
+                  </a:tcPr>
+                </a:tc>
+                <a:tc>
+                  <a:txBody>
+                    <a:bodyPr/>
+                    <a:lstStyle/>
+                    <a:p>
+                      <a:pPr algn="r" indent="0" marL="0">
+                        <a:buNone/>
+                      </a:pPr>
+                      <a:r>
+                        <a:rPr lang="en-US" sz="850" b="1" dirty="0">
+                          <a:solidFill>
+                            <a:srgbClr val="5E9B7E"/>
+                          </a:solidFill>
+                          <a:latin typeface="Calibri" pitchFamily="34" charset="0"/>
+                          <a:ea typeface="Calibri" pitchFamily="34" charset="-122"/>
+                          <a:cs typeface="Calibri" pitchFamily="34" charset="-120"/>
+                        </a:rPr>
+                        <a:t>2,8</a:t>
+                      </a:r>
+                      <a:endParaRPr lang="en-US" sz="850" dirty="0">
+                        <a:latin typeface="Calibri" charset="0"/>
+                        <a:ea typeface="Calibri" charset="0"/>
+                        <a:cs typeface="Calibri" charset="0"/>
+                      </a:endParaRPr>
+                    </a:p>
+                  </a:txBody>
+                  <a:tcPr marL="64008" marR="64008" marT="0" marB="0" anchor="ctr">
+                    <a:lnL w="6350" cap="flat" cmpd="sng" algn="ctr">
+                      <a:solidFill>
+                        <a:srgbClr val="D5DBE3"/>
+                      </a:solidFill>
+                      <a:prstDash val="solid"/>
+                      <a:round/>
+                      <a:headEnd type="none" w="med" len="med"/>
+                      <a:tailEnd type="none" w="med" len="med"/>
+                    </a:lnL>
+                    <a:lnR w="6350" cap="flat" cmpd="sng" algn="ctr">
+                      <a:solidFill>
+                        <a:srgbClr val="D5DBE3"/>
+                      </a:solidFill>
+                      <a:prstDash val="solid"/>
+                      <a:round/>
+                      <a:headEnd type="none" w="med" len="med"/>
+                      <a:tailEnd type="none" w="med" len="med"/>
+                    </a:lnR>
+                    <a:lnT w="6350" cap="flat" cmpd="sng" algn="ctr">
+                      <a:solidFill>
+                        <a:srgbClr val="D5DBE3"/>
+                      </a:solidFill>
+                      <a:prstDash val="solid"/>
+                      <a:round/>
+                      <a:headEnd type="none" w="med" len="med"/>
+                      <a:tailEnd type="none" w="med" len="med"/>
+                    </a:lnT>
+                    <a:lnB w="6350" cap="flat" cmpd="sng" algn="ctr">
+                      <a:solidFill>
+                        <a:srgbClr val="D5DBE3"/>
+                      </a:solidFill>
+                      <a:prstDash val="solid"/>
+                      <a:round/>
+                      <a:headEnd type="none" w="med" len="med"/>
+                      <a:tailEnd type="none" w="med" len="med"/>
+                    </a:lnB>
+                  </a:tcPr>
+                </a:tc>
+                <a:tc>
+                  <a:txBody>
+                    <a:bodyPr/>
+                    <a:lstStyle/>
+                    <a:p>
+                      <a:pPr algn="r" indent="0" marL="0">
+                        <a:buNone/>
+                      </a:pPr>
+                      <a:r>
+                        <a:rPr lang="en-US" sz="850" dirty="0">
+                          <a:solidFill>
+                            <a:srgbClr val="1F2933"/>
+                          </a:solidFill>
+                          <a:latin typeface="Calibri" pitchFamily="34" charset="0"/>
+                          <a:ea typeface="Calibri" pitchFamily="34" charset="-122"/>
+                          <a:cs typeface="Calibri" pitchFamily="34" charset="-120"/>
+                        </a:rPr>
+                        <a:t>–</a:t>
+                      </a:r>
+                      <a:endParaRPr lang="en-US" sz="850" dirty="0">
+                        <a:latin typeface="Calibri" charset="0"/>
+                        <a:ea typeface="Calibri" charset="0"/>
+                        <a:cs typeface="Calibri" charset="0"/>
+                      </a:endParaRPr>
+                    </a:p>
+                  </a:txBody>
+                  <a:tcPr marL="64008" marR="64008" marT="0" marB="0" anchor="ctr">
+                    <a:lnL w="6350" cap="flat" cmpd="sng" algn="ctr">
+                      <a:solidFill>
+                        <a:srgbClr val="D5DBE3"/>
+                      </a:solidFill>
+                      <a:prstDash val="solid"/>
+                      <a:round/>
+                      <a:headEnd type="none" w="med" len="med"/>
+                      <a:tailEnd type="none" w="med" len="med"/>
+                    </a:lnL>
+                    <a:lnR w="6350" cap="flat" cmpd="sng" algn="ctr">
+                      <a:solidFill>
+                        <a:srgbClr val="D5DBE3"/>
+                      </a:solidFill>
+                      <a:prstDash val="solid"/>
+                      <a:round/>
+                      <a:headEnd type="none" w="med" len="med"/>
+                      <a:tailEnd type="none" w="med" len="med"/>
+                    </a:lnR>
+                    <a:lnT w="6350" cap="flat" cmpd="sng" algn="ctr">
+                      <a:solidFill>
+                        <a:srgbClr val="D5DBE3"/>
+                      </a:solidFill>
+                      <a:prstDash val="solid"/>
+                      <a:round/>
+                      <a:headEnd type="none" w="med" len="med"/>
+                      <a:tailEnd type="none" w="med" len="med"/>
+                    </a:lnT>
+                    <a:lnB w="6350" cap="flat" cmpd="sng" algn="ctr">
+                      <a:solidFill>
+                        <a:srgbClr val="D5DBE3"/>
+                      </a:solidFill>
+                      <a:prstDash val="solid"/>
+                      <a:round/>
+                      <a:headEnd type="none" w="med" len="med"/>
+                      <a:tailEnd type="none" w="med" len="med"/>
+                    </a:lnB>
+                  </a:tcPr>
+                </a:tc>
+              </a:tr>
+              <a:tr h="224028">
+                <a:tc>
+                  <a:txBody>
+                    <a:bodyPr/>
+                    <a:lstStyle/>
+                    <a:p>
+                      <a:pPr algn="l" indent="0" marL="0">
+                        <a:buNone/>
+                      </a:pPr>
+                      <a:r>
+                        <a:rPr lang="en-US" sz="850" b="1" dirty="0">
+                          <a:solidFill>
+                            <a:srgbClr val="1F2933"/>
+                          </a:solidFill>
+                          <a:latin typeface="Calibri" pitchFamily="34" charset="0"/>
+                          <a:ea typeface="Calibri" pitchFamily="34" charset="-122"/>
+                          <a:cs typeface="Calibri" pitchFamily="34" charset="-120"/>
+                        </a:rPr>
+                        <a:t>ODALYS CI</a:t>
+                      </a:r>
+                      <a:endParaRPr lang="en-US" sz="850" dirty="0">
+                        <a:latin typeface="Calibri" charset="0"/>
+                        <a:ea typeface="Calibri" charset="0"/>
+                        <a:cs typeface="Calibri" charset="0"/>
+                      </a:endParaRPr>
+                    </a:p>
+                  </a:txBody>
+                  <a:tcPr marL="64008" marR="64008" marT="0" marB="0" anchor="ctr">
+                    <a:lnL w="6350" cap="flat" cmpd="sng" algn="ctr">
+                      <a:solidFill>
+                        <a:srgbClr val="D5DBE3"/>
+                      </a:solidFill>
+                      <a:prstDash val="solid"/>
+                      <a:round/>
+                      <a:headEnd type="none" w="med" len="med"/>
+                      <a:tailEnd type="none" w="med" len="med"/>
+                    </a:lnL>
+                    <a:lnR w="6350" cap="flat" cmpd="sng" algn="ctr">
+                      <a:solidFill>
+                        <a:srgbClr val="D5DBE3"/>
+                      </a:solidFill>
+                      <a:prstDash val="solid"/>
+                      <a:round/>
+                      <a:headEnd type="none" w="med" len="med"/>
+                      <a:tailEnd type="none" w="med" len="med"/>
+                    </a:lnR>
+                    <a:lnT w="6350" cap="flat" cmpd="sng" algn="ctr">
+                      <a:solidFill>
+                        <a:srgbClr val="D5DBE3"/>
+                      </a:solidFill>
+                      <a:prstDash val="solid"/>
+                      <a:round/>
+                      <a:headEnd type="none" w="med" len="med"/>
+                      <a:tailEnd type="none" w="med" len="med"/>
+                    </a:lnT>
+                    <a:lnB w="6350" cap="flat" cmpd="sng" algn="ctr">
+                      <a:solidFill>
+                        <a:srgbClr val="D5DBE3"/>
+                      </a:solidFill>
+                      <a:prstDash val="solid"/>
+                      <a:round/>
+                      <a:headEnd type="none" w="med" len="med"/>
+                      <a:tailEnd type="none" w="med" len="med"/>
+                    </a:lnB>
+                  </a:tcPr>
+                </a:tc>
+                <a:tc>
+                  <a:txBody>
+                    <a:bodyPr/>
+                    <a:lstStyle/>
+                    <a:p>
+                      <a:pPr algn="r" indent="0" marL="0">
+                        <a:buNone/>
+                      </a:pPr>
+                      <a:r>
+                        <a:rPr lang="en-US" sz="850" dirty="0">
+                          <a:solidFill>
+                            <a:srgbClr val="1F2933"/>
+                          </a:solidFill>
+                          <a:latin typeface="Calibri" pitchFamily="34" charset="0"/>
+                          <a:ea typeface="Calibri" pitchFamily="34" charset="-122"/>
+                          <a:cs typeface="Calibri" pitchFamily="34" charset="-120"/>
+                        </a:rPr>
+                        <a:t>6,1</a:t>
+                      </a:r>
+                      <a:endParaRPr lang="en-US" sz="850" dirty="0">
+                        <a:latin typeface="Calibri" charset="0"/>
+                        <a:ea typeface="Calibri" charset="0"/>
+                        <a:cs typeface="Calibri" charset="0"/>
+                      </a:endParaRPr>
+                    </a:p>
+                  </a:txBody>
+                  <a:tcPr marL="64008" marR="64008" marT="0" marB="0" anchor="ctr">
+                    <a:lnL w="6350" cap="flat" cmpd="sng" algn="ctr">
+                      <a:solidFill>
+                        <a:srgbClr val="D5DBE3"/>
+                      </a:solidFill>
+                      <a:prstDash val="solid"/>
+                      <a:round/>
+                      <a:headEnd type="none" w="med" len="med"/>
+                      <a:tailEnd type="none" w="med" len="med"/>
+                    </a:lnL>
+                    <a:lnR w="6350" cap="flat" cmpd="sng" algn="ctr">
+                      <a:solidFill>
+                        <a:srgbClr val="D5DBE3"/>
+                      </a:solidFill>
+                      <a:prstDash val="solid"/>
+                      <a:round/>
+                      <a:headEnd type="none" w="med" len="med"/>
+                      <a:tailEnd type="none" w="med" len="med"/>
+                    </a:lnR>
+                    <a:lnT w="6350" cap="flat" cmpd="sng" algn="ctr">
+                      <a:solidFill>
+                        <a:srgbClr val="D5DBE3"/>
+                      </a:solidFill>
+                      <a:prstDash val="solid"/>
+                      <a:round/>
+                      <a:headEnd type="none" w="med" len="med"/>
+                      <a:tailEnd type="none" w="med" len="med"/>
+                    </a:lnT>
+                    <a:lnB w="6350" cap="flat" cmpd="sng" algn="ctr">
+                      <a:solidFill>
+                        <a:srgbClr val="D5DBE3"/>
+                      </a:solidFill>
+                      <a:prstDash val="solid"/>
+                      <a:round/>
+                      <a:headEnd type="none" w="med" len="med"/>
+                      <a:tailEnd type="none" w="med" len="med"/>
+                    </a:lnB>
+                  </a:tcPr>
+                </a:tc>
+                <a:tc>
+                  <a:txBody>
+                    <a:bodyPr/>
+                    <a:lstStyle/>
+                    <a:p>
+                      <a:pPr algn="r" indent="0" marL="0">
+                        <a:buNone/>
+                      </a:pPr>
+                      <a:r>
+                        <a:rPr lang="en-US" sz="850" dirty="0">
+                          <a:solidFill>
+                            <a:srgbClr val="1F2933"/>
+                          </a:solidFill>
+                          <a:latin typeface="Calibri" pitchFamily="34" charset="0"/>
+                          <a:ea typeface="Calibri" pitchFamily="34" charset="-122"/>
+                          <a:cs typeface="Calibri" pitchFamily="34" charset="-120"/>
+                        </a:rPr>
+                        <a:t>-9,6</a:t>
+                      </a:r>
+                      <a:endParaRPr lang="en-US" sz="850" dirty="0">
+                        <a:latin typeface="Calibri" charset="0"/>
+                        <a:ea typeface="Calibri" charset="0"/>
+                        <a:cs typeface="Calibri" charset="0"/>
+                      </a:endParaRPr>
+                    </a:p>
+                  </a:txBody>
+                  <a:tcPr marL="64008" marR="64008" marT="0" marB="0" anchor="ctr">
+                    <a:lnL w="6350" cap="flat" cmpd="sng" algn="ctr">
+                      <a:solidFill>
+                        <a:srgbClr val="D5DBE3"/>
+                      </a:solidFill>
+                      <a:prstDash val="solid"/>
+                      <a:round/>
+                      <a:headEnd type="none" w="med" len="med"/>
+                      <a:tailEnd type="none" w="med" len="med"/>
+                    </a:lnL>
+                    <a:lnR w="6350" cap="flat" cmpd="sng" algn="ctr">
+                      <a:solidFill>
+                        <a:srgbClr val="D5DBE3"/>
+                      </a:solidFill>
+                      <a:prstDash val="solid"/>
+                      <a:round/>
+                      <a:headEnd type="none" w="med" len="med"/>
+                      <a:tailEnd type="none" w="med" len="med"/>
+                    </a:lnR>
+                    <a:lnT w="6350" cap="flat" cmpd="sng" algn="ctr">
+                      <a:solidFill>
+                        <a:srgbClr val="D5DBE3"/>
+                      </a:solidFill>
+                      <a:prstDash val="solid"/>
+                      <a:round/>
+                      <a:headEnd type="none" w="med" len="med"/>
+                      <a:tailEnd type="none" w="med" len="med"/>
+                    </a:lnT>
+                    <a:lnB w="6350" cap="flat" cmpd="sng" algn="ctr">
+                      <a:solidFill>
+                        <a:srgbClr val="D5DBE3"/>
+                      </a:solidFill>
+                      <a:prstDash val="solid"/>
+                      <a:round/>
+                      <a:headEnd type="none" w="med" len="med"/>
+                      <a:tailEnd type="none" w="med" len="med"/>
+                    </a:lnB>
+                  </a:tcPr>
+                </a:tc>
+                <a:tc>
+                  <a:txBody>
+                    <a:bodyPr/>
+                    <a:lstStyle/>
+                    <a:p>
+                      <a:pPr algn="r" indent="0" marL="0">
+                        <a:buNone/>
+                      </a:pPr>
+                      <a:r>
+                        <a:rPr lang="en-US" sz="850" dirty="0">
+                          <a:solidFill>
+                            <a:srgbClr val="1F2933"/>
+                          </a:solidFill>
+                          <a:latin typeface="Calibri" pitchFamily="34" charset="0"/>
+                          <a:ea typeface="Calibri" pitchFamily="34" charset="-122"/>
+                          <a:cs typeface="Calibri" pitchFamily="34" charset="-120"/>
+                        </a:rPr>
+                        <a:t>–</a:t>
+                      </a:r>
+                      <a:endParaRPr lang="en-US" sz="850" dirty="0">
+                        <a:latin typeface="Calibri" charset="0"/>
+                        <a:ea typeface="Calibri" charset="0"/>
+                        <a:cs typeface="Calibri" charset="0"/>
+                      </a:endParaRPr>
+                    </a:p>
+                  </a:txBody>
+                  <a:tcPr marL="64008" marR="64008" marT="0" marB="0" anchor="ctr">
+                    <a:lnL w="6350" cap="flat" cmpd="sng" algn="ctr">
+                      <a:solidFill>
+                        <a:srgbClr val="D5DBE3"/>
+                      </a:solidFill>
+                      <a:prstDash val="solid"/>
+                      <a:round/>
+                      <a:headEnd type="none" w="med" len="med"/>
+                      <a:tailEnd type="none" w="med" len="med"/>
+                    </a:lnL>
+                    <a:lnR w="6350" cap="flat" cmpd="sng" algn="ctr">
+                      <a:solidFill>
+                        <a:srgbClr val="D5DBE3"/>
+                      </a:solidFill>
+                      <a:prstDash val="solid"/>
+                      <a:round/>
+                      <a:headEnd type="none" w="med" len="med"/>
+                      <a:tailEnd type="none" w="med" len="med"/>
+                    </a:lnR>
+                    <a:lnT w="6350" cap="flat" cmpd="sng" algn="ctr">
+                      <a:solidFill>
+                        <a:srgbClr val="D5DBE3"/>
+                      </a:solidFill>
+                      <a:prstDash val="solid"/>
+                      <a:round/>
+                      <a:headEnd type="none" w="med" len="med"/>
+                      <a:tailEnd type="none" w="med" len="med"/>
+                    </a:lnT>
+                    <a:lnB w="6350" cap="flat" cmpd="sng" algn="ctr">
+                      <a:solidFill>
+                        <a:srgbClr val="D5DBE3"/>
+                      </a:solidFill>
+                      <a:prstDash val="solid"/>
+                      <a:round/>
+                      <a:headEnd type="none" w="med" len="med"/>
+                      <a:tailEnd type="none" w="med" len="med"/>
+                    </a:lnB>
+                  </a:tcPr>
+                </a:tc>
+                <a:tc>
+                  <a:txBody>
+                    <a:bodyPr/>
+                    <a:lstStyle/>
+                    <a:p>
+                      <a:pPr algn="r" indent="0" marL="0">
+                        <a:buNone/>
+                      </a:pPr>
+                      <a:r>
+                        <a:rPr lang="en-US" sz="850" b="1" dirty="0">
+                          <a:solidFill>
+                            <a:srgbClr val="B3261E"/>
+                          </a:solidFill>
+                          <a:latin typeface="Calibri" pitchFamily="34" charset="0"/>
+                          <a:ea typeface="Calibri" pitchFamily="34" charset="-122"/>
+                          <a:cs typeface="Calibri" pitchFamily="34" charset="-120"/>
+                        </a:rPr>
+                        <a:t>-3,5</a:t>
+                      </a:r>
+                      <a:endParaRPr lang="en-US" sz="850" dirty="0">
+                        <a:latin typeface="Calibri" charset="0"/>
+                        <a:ea typeface="Calibri" charset="0"/>
+                        <a:cs typeface="Calibri" charset="0"/>
+                      </a:endParaRPr>
+                    </a:p>
+                  </a:txBody>
+                  <a:tcPr marL="64008" marR="64008" marT="0" marB="0" anchor="ctr">
+                    <a:lnL w="6350" cap="flat" cmpd="sng" algn="ctr">
+                      <a:solidFill>
+                        <a:srgbClr val="D5DBE3"/>
+                      </a:solidFill>
+                      <a:prstDash val="solid"/>
+                      <a:round/>
+                      <a:headEnd type="none" w="med" len="med"/>
+                      <a:tailEnd type="none" w="med" len="med"/>
+                    </a:lnL>
+                    <a:lnR w="6350" cap="flat" cmpd="sng" algn="ctr">
+                      <a:solidFill>
+                        <a:srgbClr val="D5DBE3"/>
+                      </a:solidFill>
+                      <a:prstDash val="solid"/>
+                      <a:round/>
+                      <a:headEnd type="none" w="med" len="med"/>
+                      <a:tailEnd type="none" w="med" len="med"/>
+                    </a:lnR>
+                    <a:lnT w="6350" cap="flat" cmpd="sng" algn="ctr">
+                      <a:solidFill>
+                        <a:srgbClr val="D5DBE3"/>
+                      </a:solidFill>
+                      <a:prstDash val="solid"/>
+                      <a:round/>
+                      <a:headEnd type="none" w="med" len="med"/>
+                      <a:tailEnd type="none" w="med" len="med"/>
+                    </a:lnT>
+                    <a:lnB w="6350" cap="flat" cmpd="sng" algn="ctr">
+                      <a:solidFill>
+                        <a:srgbClr val="D5DBE3"/>
+                      </a:solidFill>
+                      <a:prstDash val="solid"/>
+                      <a:round/>
+                      <a:headEnd type="none" w="med" len="med"/>
+                      <a:tailEnd type="none" w="med" len="med"/>
+                    </a:lnB>
+                    <a:solidFill>
+                      <a:srgbClr val="F7E7E5"/>
+                    </a:solidFill>
+                  </a:tcPr>
+                </a:tc>
+                <a:tc>
+                  <a:txBody>
+                    <a:bodyPr/>
+                    <a:lstStyle/>
+                    <a:p>
+                      <a:pPr algn="r" indent="0" marL="0">
+                        <a:buNone/>
+                      </a:pPr>
+                      <a:r>
+                        <a:rPr lang="en-US" sz="850" b="1" dirty="0">
+                          <a:solidFill>
+                            <a:srgbClr val="B3261E"/>
+                          </a:solidFill>
+                          <a:latin typeface="Calibri" pitchFamily="34" charset="0"/>
+                          <a:ea typeface="Calibri" pitchFamily="34" charset="-122"/>
+                          <a:cs typeface="Calibri" pitchFamily="34" charset="-120"/>
+                        </a:rPr>
+                        <a:t>3,5</a:t>
+                      </a:r>
+                      <a:endParaRPr lang="en-US" sz="850" dirty="0">
+                        <a:latin typeface="Calibri" charset="0"/>
+                        <a:ea typeface="Calibri" charset="0"/>
+                        <a:cs typeface="Calibri" charset="0"/>
+                      </a:endParaRPr>
+                    </a:p>
+                  </a:txBody>
+                  <a:tcPr marL="64008" marR="64008" marT="0" marB="0" anchor="ctr">
+                    <a:lnL w="6350" cap="flat" cmpd="sng" algn="ctr">
+                      <a:solidFill>
+                        <a:srgbClr val="D5DBE3"/>
+                      </a:solidFill>
+                      <a:prstDash val="solid"/>
+                      <a:round/>
+                      <a:headEnd type="none" w="med" len="med"/>
+                      <a:tailEnd type="none" w="med" len="med"/>
+                    </a:lnL>
+                    <a:lnR w="6350" cap="flat" cmpd="sng" algn="ctr">
+                      <a:solidFill>
+                        <a:srgbClr val="D5DBE3"/>
+                      </a:solidFill>
+                      <a:prstDash val="solid"/>
+                      <a:round/>
+                      <a:headEnd type="none" w="med" len="med"/>
+                      <a:tailEnd type="none" w="med" len="med"/>
+                    </a:lnR>
+                    <a:lnT w="6350" cap="flat" cmpd="sng" algn="ctr">
+                      <a:solidFill>
+                        <a:srgbClr val="D5DBE3"/>
+                      </a:solidFill>
+                      <a:prstDash val="solid"/>
+                      <a:round/>
+                      <a:headEnd type="none" w="med" len="med"/>
+                      <a:tailEnd type="none" w="med" len="med"/>
+                    </a:lnT>
+                    <a:lnB w="6350" cap="flat" cmpd="sng" algn="ctr">
+                      <a:solidFill>
+                        <a:srgbClr val="D5DBE3"/>
+                      </a:solidFill>
+                      <a:prstDash val="solid"/>
+                      <a:round/>
+                      <a:headEnd type="none" w="med" len="med"/>
+                      <a:tailEnd type="none" w="med" len="med"/>
+                    </a:lnB>
+                    <a:solidFill>
+                      <a:srgbClr val="F7E7E5"/>
+                    </a:solidFill>
+                  </a:tcPr>
+                </a:tc>
+              </a:tr>
+              <a:tr h="224028">
+                <a:tc>
+                  <a:txBody>
+                    <a:bodyPr/>
+                    <a:lstStyle/>
+                    <a:p>
+                      <a:pPr algn="l" indent="0" marL="0">
+                        <a:buNone/>
+                      </a:pPr>
+                      <a:r>
+                        <a:rPr lang="en-US" sz="850" b="1" dirty="0">
+                          <a:solidFill>
+                            <a:srgbClr val="1F2933"/>
+                          </a:solidFill>
+                          <a:latin typeface="Calibri" pitchFamily="34" charset="0"/>
+                          <a:ea typeface="Calibri" pitchFamily="34" charset="-122"/>
+                          <a:cs typeface="Calibri" pitchFamily="34" charset="-120"/>
+                        </a:rPr>
+                        <a:t>AB CENTER</a:t>
+                      </a:r>
+                      <a:endParaRPr lang="en-US" sz="850" dirty="0">
+                        <a:latin typeface="Calibri" charset="0"/>
+                        <a:ea typeface="Calibri" charset="0"/>
+                        <a:cs typeface="Calibri" charset="0"/>
+                      </a:endParaRPr>
+                    </a:p>
+                  </a:txBody>
+                  <a:tcPr marL="64008" marR="64008" marT="0" marB="0" anchor="ctr">
+                    <a:lnL w="6350" cap="flat" cmpd="sng" algn="ctr">
+                      <a:solidFill>
+                        <a:srgbClr val="D5DBE3"/>
+                      </a:solidFill>
+                      <a:prstDash val="solid"/>
+                      <a:round/>
+                      <a:headEnd type="none" w="med" len="med"/>
+                      <a:tailEnd type="none" w="med" len="med"/>
+                    </a:lnL>
+                    <a:lnR w="6350" cap="flat" cmpd="sng" algn="ctr">
+                      <a:solidFill>
+                        <a:srgbClr val="D5DBE3"/>
+                      </a:solidFill>
+                      <a:prstDash val="solid"/>
+                      <a:round/>
+                      <a:headEnd type="none" w="med" len="med"/>
+                      <a:tailEnd type="none" w="med" len="med"/>
+                    </a:lnR>
+                    <a:lnT w="6350" cap="flat" cmpd="sng" algn="ctr">
+                      <a:solidFill>
+                        <a:srgbClr val="D5DBE3"/>
+                      </a:solidFill>
+                      <a:prstDash val="solid"/>
+                      <a:round/>
+                      <a:headEnd type="none" w="med" len="med"/>
+                      <a:tailEnd type="none" w="med" len="med"/>
+                    </a:lnT>
+                    <a:lnB w="6350" cap="flat" cmpd="sng" algn="ctr">
+                      <a:solidFill>
+                        <a:srgbClr val="D5DBE3"/>
+                      </a:solidFill>
+                      <a:prstDash val="solid"/>
+                      <a:round/>
+                      <a:headEnd type="none" w="med" len="med"/>
+                      <a:tailEnd type="none" w="med" len="med"/>
+                    </a:lnB>
+                  </a:tcPr>
+                </a:tc>
+                <a:tc>
+                  <a:txBody>
+                    <a:bodyPr/>
+                    <a:lstStyle/>
+                    <a:p>
+                      <a:pPr algn="r" indent="0" marL="0">
+                        <a:buNone/>
+                      </a:pPr>
+                      <a:r>
+                        <a:rPr lang="en-US" sz="850" dirty="0">
+                          <a:solidFill>
+                            <a:srgbClr val="1F2933"/>
+                          </a:solidFill>
+                          <a:latin typeface="Calibri" pitchFamily="34" charset="0"/>
+                          <a:ea typeface="Calibri" pitchFamily="34" charset="-122"/>
+                          <a:cs typeface="Calibri" pitchFamily="34" charset="-120"/>
+                        </a:rPr>
+                        <a:t>–</a:t>
+                      </a:r>
+                      <a:endParaRPr lang="en-US" sz="850" dirty="0">
+                        <a:latin typeface="Calibri" charset="0"/>
+                        <a:ea typeface="Calibri" charset="0"/>
+                        <a:cs typeface="Calibri" charset="0"/>
+                      </a:endParaRPr>
+                    </a:p>
+                  </a:txBody>
+                  <a:tcPr marL="64008" marR="64008" marT="0" marB="0" anchor="ctr">
+                    <a:lnL w="6350" cap="flat" cmpd="sng" algn="ctr">
+                      <a:solidFill>
+                        <a:srgbClr val="D5DBE3"/>
+                      </a:solidFill>
+                      <a:prstDash val="solid"/>
+                      <a:round/>
+                      <a:headEnd type="none" w="med" len="med"/>
+                      <a:tailEnd type="none" w="med" len="med"/>
+                    </a:lnL>
+                    <a:lnR w="6350" cap="flat" cmpd="sng" algn="ctr">
+                      <a:solidFill>
+                        <a:srgbClr val="D5DBE3"/>
+                      </a:solidFill>
+                      <a:prstDash val="solid"/>
+                      <a:round/>
+                      <a:headEnd type="none" w="med" len="med"/>
+                      <a:tailEnd type="none" w="med" len="med"/>
+                    </a:lnR>
+                    <a:lnT w="6350" cap="flat" cmpd="sng" algn="ctr">
+                      <a:solidFill>
+                        <a:srgbClr val="D5DBE3"/>
+                      </a:solidFill>
+                      <a:prstDash val="solid"/>
+                      <a:round/>
+                      <a:headEnd type="none" w="med" len="med"/>
+                      <a:tailEnd type="none" w="med" len="med"/>
+                    </a:lnT>
+                    <a:lnB w="6350" cap="flat" cmpd="sng" algn="ctr">
+                      <a:solidFill>
+                        <a:srgbClr val="D5DBE3"/>
+                      </a:solidFill>
+                      <a:prstDash val="solid"/>
+                      <a:round/>
+                      <a:headEnd type="none" w="med" len="med"/>
+                      <a:tailEnd type="none" w="med" len="med"/>
+                    </a:lnB>
+                  </a:tcPr>
+                </a:tc>
+                <a:tc>
+                  <a:txBody>
+                    <a:bodyPr/>
+                    <a:lstStyle/>
+                    <a:p>
+                      <a:pPr algn="r" indent="0" marL="0">
+                        <a:buNone/>
+                      </a:pPr>
+                      <a:r>
+                        <a:rPr lang="en-US" sz="850" dirty="0">
+                          <a:solidFill>
+                            <a:srgbClr val="1F2933"/>
+                          </a:solidFill>
+                          <a:latin typeface="Calibri" pitchFamily="34" charset="0"/>
+                          <a:ea typeface="Calibri" pitchFamily="34" charset="-122"/>
+                          <a:cs typeface="Calibri" pitchFamily="34" charset="-120"/>
+                        </a:rPr>
+                        <a:t>-6,3</a:t>
+                      </a:r>
+                      <a:endParaRPr lang="en-US" sz="850" dirty="0">
+                        <a:latin typeface="Calibri" charset="0"/>
+                        <a:ea typeface="Calibri" charset="0"/>
+                        <a:cs typeface="Calibri" charset="0"/>
+                      </a:endParaRPr>
+                    </a:p>
+                  </a:txBody>
+                  <a:tcPr marL="64008" marR="64008" marT="0" marB="0" anchor="ctr">
+                    <a:lnL w="6350" cap="flat" cmpd="sng" algn="ctr">
+                      <a:solidFill>
+                        <a:srgbClr val="D5DBE3"/>
+                      </a:solidFill>
+                      <a:prstDash val="solid"/>
+                      <a:round/>
+                      <a:headEnd type="none" w="med" len="med"/>
+                      <a:tailEnd type="none" w="med" len="med"/>
+                    </a:lnL>
+                    <a:lnR w="6350" cap="flat" cmpd="sng" algn="ctr">
+                      <a:solidFill>
+                        <a:srgbClr val="D5DBE3"/>
+                      </a:solidFill>
+                      <a:prstDash val="solid"/>
+                      <a:round/>
+                      <a:headEnd type="none" w="med" len="med"/>
+                      <a:tailEnd type="none" w="med" len="med"/>
+                    </a:lnR>
+                    <a:lnT w="6350" cap="flat" cmpd="sng" algn="ctr">
+                      <a:solidFill>
+                        <a:srgbClr val="D5DBE3"/>
+                      </a:solidFill>
+                      <a:prstDash val="solid"/>
+                      <a:round/>
+                      <a:headEnd type="none" w="med" len="med"/>
+                      <a:tailEnd type="none" w="med" len="med"/>
+                    </a:lnT>
+                    <a:lnB w="6350" cap="flat" cmpd="sng" algn="ctr">
+                      <a:solidFill>
+                        <a:srgbClr val="D5DBE3"/>
+                      </a:solidFill>
+                      <a:prstDash val="solid"/>
+                      <a:round/>
+                      <a:headEnd type="none" w="med" len="med"/>
+                      <a:tailEnd type="none" w="med" len="med"/>
+                    </a:lnB>
+                  </a:tcPr>
+                </a:tc>
+                <a:tc>
+                  <a:txBody>
+                    <a:bodyPr/>
+                    <a:lstStyle/>
+                    <a:p>
+                      <a:pPr algn="r" indent="0" marL="0">
+                        <a:buNone/>
+                      </a:pPr>
+                      <a:r>
+                        <a:rPr lang="en-US" sz="850" dirty="0">
+                          <a:solidFill>
+                            <a:srgbClr val="1F2933"/>
+                          </a:solidFill>
+                          <a:latin typeface="Calibri" pitchFamily="34" charset="0"/>
+                          <a:ea typeface="Calibri" pitchFamily="34" charset="-122"/>
+                          <a:cs typeface="Calibri" pitchFamily="34" charset="-120"/>
+                        </a:rPr>
+                        <a:t>–</a:t>
+                      </a:r>
+                      <a:endParaRPr lang="en-US" sz="850" dirty="0">
+                        <a:latin typeface="Calibri" charset="0"/>
+                        <a:ea typeface="Calibri" charset="0"/>
+                        <a:cs typeface="Calibri" charset="0"/>
+                      </a:endParaRPr>
+                    </a:p>
+                  </a:txBody>
+                  <a:tcPr marL="64008" marR="64008" marT="0" marB="0" anchor="ctr">
+                    <a:lnL w="6350" cap="flat" cmpd="sng" algn="ctr">
+                      <a:solidFill>
+                        <a:srgbClr val="D5DBE3"/>
+                      </a:solidFill>
+                      <a:prstDash val="solid"/>
+                      <a:round/>
+                      <a:headEnd type="none" w="med" len="med"/>
+                      <a:tailEnd type="none" w="med" len="med"/>
+                    </a:lnL>
+                    <a:lnR w="6350" cap="flat" cmpd="sng" algn="ctr">
+                      <a:solidFill>
+                        <a:srgbClr val="D5DBE3"/>
+                      </a:solidFill>
+                      <a:prstDash val="solid"/>
+                      <a:round/>
+                      <a:headEnd type="none" w="med" len="med"/>
+                      <a:tailEnd type="none" w="med" len="med"/>
+                    </a:lnR>
+                    <a:lnT w="6350" cap="flat" cmpd="sng" algn="ctr">
+                      <a:solidFill>
+                        <a:srgbClr val="D5DBE3"/>
+                      </a:solidFill>
+                      <a:prstDash val="solid"/>
+                      <a:round/>
+                      <a:headEnd type="none" w="med" len="med"/>
+                      <a:tailEnd type="none" w="med" len="med"/>
+                    </a:lnT>
+                    <a:lnB w="6350" cap="flat" cmpd="sng" algn="ctr">
+                      <a:solidFill>
+                        <a:srgbClr val="D5DBE3"/>
+                      </a:solidFill>
+                      <a:prstDash val="solid"/>
+                      <a:round/>
+                      <a:headEnd type="none" w="med" len="med"/>
+                      <a:tailEnd type="none" w="med" len="med"/>
+                    </a:lnB>
+                  </a:tcPr>
+                </a:tc>
+                <a:tc>
+                  <a:txBody>
+                    <a:bodyPr/>
+                    <a:lstStyle/>
+                    <a:p>
+                      <a:pPr algn="r" indent="0" marL="0">
+                        <a:buNone/>
+                      </a:pPr>
+                      <a:r>
+                        <a:rPr lang="en-US" sz="850" b="1" dirty="0">
+                          <a:solidFill>
+                            <a:srgbClr val="B3261E"/>
+                          </a:solidFill>
+                          <a:latin typeface="Calibri" pitchFamily="34" charset="0"/>
+                          <a:ea typeface="Calibri" pitchFamily="34" charset="-122"/>
+                          <a:cs typeface="Calibri" pitchFamily="34" charset="-120"/>
+                        </a:rPr>
+                        <a:t>-6,3</a:t>
+                      </a:r>
+                      <a:endParaRPr lang="en-US" sz="850" dirty="0">
+                        <a:latin typeface="Calibri" charset="0"/>
+                        <a:ea typeface="Calibri" charset="0"/>
+                        <a:cs typeface="Calibri" charset="0"/>
+                      </a:endParaRPr>
+                    </a:p>
+                  </a:txBody>
+                  <a:tcPr marL="64008" marR="64008" marT="0" marB="0" anchor="ctr">
+                    <a:lnL w="6350" cap="flat" cmpd="sng" algn="ctr">
+                      <a:solidFill>
+                        <a:srgbClr val="D5DBE3"/>
+                      </a:solidFill>
+                      <a:prstDash val="solid"/>
+                      <a:round/>
+                      <a:headEnd type="none" w="med" len="med"/>
+                      <a:tailEnd type="none" w="med" len="med"/>
+                    </a:lnL>
+                    <a:lnR w="6350" cap="flat" cmpd="sng" algn="ctr">
+                      <a:solidFill>
+                        <a:srgbClr val="D5DBE3"/>
+                      </a:solidFill>
+                      <a:prstDash val="solid"/>
+                      <a:round/>
+                      <a:headEnd type="none" w="med" len="med"/>
+                      <a:tailEnd type="none" w="med" len="med"/>
+                    </a:lnR>
+                    <a:lnT w="6350" cap="flat" cmpd="sng" algn="ctr">
+                      <a:solidFill>
+                        <a:srgbClr val="D5DBE3"/>
+                      </a:solidFill>
+                      <a:prstDash val="solid"/>
+                      <a:round/>
+                      <a:headEnd type="none" w="med" len="med"/>
+                      <a:tailEnd type="none" w="med" len="med"/>
+                    </a:lnT>
+                    <a:lnB w="6350" cap="flat" cmpd="sng" algn="ctr">
+                      <a:solidFill>
+                        <a:srgbClr val="D5DBE3"/>
+                      </a:solidFill>
+                      <a:prstDash val="solid"/>
+                      <a:round/>
+                      <a:headEnd type="none" w="med" len="med"/>
+                      <a:tailEnd type="none" w="med" len="med"/>
+                    </a:lnB>
+                    <a:solidFill>
+                      <a:srgbClr val="F7E7E5"/>
+                    </a:solidFill>
+                  </a:tcPr>
+                </a:tc>
+                <a:tc>
+                  <a:txBody>
+                    <a:bodyPr/>
+                    <a:lstStyle/>
+                    <a:p>
+                      <a:pPr algn="r" indent="0" marL="0">
+                        <a:buNone/>
+                      </a:pPr>
+                      <a:r>
+                        <a:rPr lang="en-US" sz="850" b="1" dirty="0">
+                          <a:solidFill>
+                            <a:srgbClr val="B3261E"/>
+                          </a:solidFill>
+                          <a:latin typeface="Calibri" pitchFamily="34" charset="0"/>
+                          <a:ea typeface="Calibri" pitchFamily="34" charset="-122"/>
+                          <a:cs typeface="Calibri" pitchFamily="34" charset="-120"/>
+                        </a:rPr>
+                        <a:t>6,3</a:t>
+                      </a:r>
+                      <a:endParaRPr lang="en-US" sz="850" dirty="0">
+                        <a:latin typeface="Calibri" charset="0"/>
+                        <a:ea typeface="Calibri" charset="0"/>
+                        <a:cs typeface="Calibri" charset="0"/>
+                      </a:endParaRPr>
+                    </a:p>
+                  </a:txBody>
+                  <a:tcPr marL="64008" marR="64008" marT="0" marB="0" anchor="ctr">
+                    <a:lnL w="6350" cap="flat" cmpd="sng" algn="ctr">
+                      <a:solidFill>
+                        <a:srgbClr val="D5DBE3"/>
+                      </a:solidFill>
+                      <a:prstDash val="solid"/>
+                      <a:round/>
+                      <a:headEnd type="none" w="med" len="med"/>
+                      <a:tailEnd type="none" w="med" len="med"/>
+                    </a:lnL>
+                    <a:lnR w="6350" cap="flat" cmpd="sng" algn="ctr">
+                      <a:solidFill>
+                        <a:srgbClr val="D5DBE3"/>
+                      </a:solidFill>
+                      <a:prstDash val="solid"/>
+                      <a:round/>
+                      <a:headEnd type="none" w="med" len="med"/>
+                      <a:tailEnd type="none" w="med" len="med"/>
+                    </a:lnR>
+                    <a:lnT w="6350" cap="flat" cmpd="sng" algn="ctr">
+                      <a:solidFill>
+                        <a:srgbClr val="D5DBE3"/>
+                      </a:solidFill>
+                      <a:prstDash val="solid"/>
+                      <a:round/>
+                      <a:headEnd type="none" w="med" len="med"/>
+                      <a:tailEnd type="none" w="med" len="med"/>
+                    </a:lnT>
+                    <a:lnB w="6350" cap="flat" cmpd="sng" algn="ctr">
+                      <a:solidFill>
+                        <a:srgbClr val="D5DBE3"/>
+                      </a:solidFill>
+                      <a:prstDash val="solid"/>
+                      <a:round/>
+                      <a:headEnd type="none" w="med" len="med"/>
+                      <a:tailEnd type="none" w="med" len="med"/>
+                    </a:lnB>
+                    <a:solidFill>
+                      <a:srgbClr val="F7E7E5"/>
+                    </a:solidFill>
+                  </a:tcPr>
+                </a:tc>
+              </a:tr>
+              <a:tr h="224028">
+                <a:tc>
+                  <a:txBody>
+                    <a:bodyPr/>
+                    <a:lstStyle/>
+                    <a:p>
+                      <a:pPr algn="l" indent="0" marL="0">
+                        <a:buNone/>
+                      </a:pPr>
+                      <a:r>
+                        <a:rPr lang="en-US" sz="850" b="1" dirty="0">
+                          <a:solidFill>
+                            <a:srgbClr val="1F2933"/>
+                          </a:solidFill>
+                          <a:latin typeface="Calibri" pitchFamily="34" charset="0"/>
+                          <a:ea typeface="Calibri" pitchFamily="34" charset="-122"/>
+                          <a:cs typeface="Calibri" pitchFamily="34" charset="-120"/>
+                        </a:rPr>
+                        <a:t>RHD CI</a:t>
+                      </a:r>
+                      <a:endParaRPr lang="en-US" sz="850" dirty="0">
+                        <a:latin typeface="Calibri" charset="0"/>
+                        <a:ea typeface="Calibri" charset="0"/>
+                        <a:cs typeface="Calibri" charset="0"/>
+                      </a:endParaRPr>
+                    </a:p>
+                  </a:txBody>
+                  <a:tcPr marL="64008" marR="64008" marT="0" marB="0" anchor="ctr">
+                    <a:lnL w="6350" cap="flat" cmpd="sng" algn="ctr">
+                      <a:solidFill>
+                        <a:srgbClr val="D5DBE3"/>
+                      </a:solidFill>
+                      <a:prstDash val="solid"/>
+                      <a:round/>
+                      <a:headEnd type="none" w="med" len="med"/>
+                      <a:tailEnd type="none" w="med" len="med"/>
+                    </a:lnL>
+                    <a:lnR w="6350" cap="flat" cmpd="sng" algn="ctr">
+                      <a:solidFill>
+                        <a:srgbClr val="D5DBE3"/>
+                      </a:solidFill>
+                      <a:prstDash val="solid"/>
+                      <a:round/>
+                      <a:headEnd type="none" w="med" len="med"/>
+                      <a:tailEnd type="none" w="med" len="med"/>
+                    </a:lnR>
+                    <a:lnT w="6350" cap="flat" cmpd="sng" algn="ctr">
+                      <a:solidFill>
+                        <a:srgbClr val="D5DBE3"/>
+                      </a:solidFill>
+                      <a:prstDash val="solid"/>
+                      <a:round/>
+                      <a:headEnd type="none" w="med" len="med"/>
+                      <a:tailEnd type="none" w="med" len="med"/>
+                    </a:lnT>
+                    <a:lnB w="6350" cap="flat" cmpd="sng" algn="ctr">
+                      <a:solidFill>
+                        <a:srgbClr val="D5DBE3"/>
+                      </a:solidFill>
+                      <a:prstDash val="solid"/>
+                      <a:round/>
+                      <a:headEnd type="none" w="med" len="med"/>
+                      <a:tailEnd type="none" w="med" len="med"/>
+                    </a:lnB>
+                  </a:tcPr>
+                </a:tc>
+                <a:tc>
+                  <a:txBody>
+                    <a:bodyPr/>
+                    <a:lstStyle/>
+                    <a:p>
+                      <a:pPr algn="r" indent="0" marL="0">
+                        <a:buNone/>
+                      </a:pPr>
+                      <a:r>
+                        <a:rPr lang="en-US" sz="850" dirty="0">
+                          <a:solidFill>
+                            <a:srgbClr val="1F2933"/>
+                          </a:solidFill>
+                          <a:latin typeface="Calibri" pitchFamily="34" charset="0"/>
+                          <a:ea typeface="Calibri" pitchFamily="34" charset="-122"/>
+                          <a:cs typeface="Calibri" pitchFamily="34" charset="-120"/>
+                        </a:rPr>
+                        <a:t>–</a:t>
+                      </a:r>
+                      <a:endParaRPr lang="en-US" sz="850" dirty="0">
+                        <a:latin typeface="Calibri" charset="0"/>
+                        <a:ea typeface="Calibri" charset="0"/>
+                        <a:cs typeface="Calibri" charset="0"/>
+                      </a:endParaRPr>
+                    </a:p>
+                  </a:txBody>
+                  <a:tcPr marL="64008" marR="64008" marT="0" marB="0" anchor="ctr">
+                    <a:lnL w="6350" cap="flat" cmpd="sng" algn="ctr">
+                      <a:solidFill>
+                        <a:srgbClr val="D5DBE3"/>
+                      </a:solidFill>
+                      <a:prstDash val="solid"/>
+                      <a:round/>
+                      <a:headEnd type="none" w="med" len="med"/>
+                      <a:tailEnd type="none" w="med" len="med"/>
+                    </a:lnL>
+                    <a:lnR w="6350" cap="flat" cmpd="sng" algn="ctr">
+                      <a:solidFill>
+                        <a:srgbClr val="D5DBE3"/>
+                      </a:solidFill>
+                      <a:prstDash val="solid"/>
+                      <a:round/>
+                      <a:headEnd type="none" w="med" len="med"/>
+                      <a:tailEnd type="none" w="med" len="med"/>
+                    </a:lnR>
+                    <a:lnT w="6350" cap="flat" cmpd="sng" algn="ctr">
+                      <a:solidFill>
+                        <a:srgbClr val="D5DBE3"/>
+                      </a:solidFill>
+                      <a:prstDash val="solid"/>
+                      <a:round/>
+                      <a:headEnd type="none" w="med" len="med"/>
+                      <a:tailEnd type="none" w="med" len="med"/>
+                    </a:lnT>
+                    <a:lnB w="6350" cap="flat" cmpd="sng" algn="ctr">
+                      <a:solidFill>
+                        <a:srgbClr val="D5DBE3"/>
+                      </a:solidFill>
+                      <a:prstDash val="solid"/>
+                      <a:round/>
+                      <a:headEnd type="none" w="med" len="med"/>
+                      <a:tailEnd type="none" w="med" len="med"/>
+                    </a:lnB>
+                  </a:tcPr>
+                </a:tc>
+                <a:tc>
+                  <a:txBody>
+                    <a:bodyPr/>
+                    <a:lstStyle/>
+                    <a:p>
+                      <a:pPr algn="r" indent="0" marL="0">
+                        <a:buNone/>
+                      </a:pPr>
+                      <a:r>
+                        <a:rPr lang="en-US" sz="850" dirty="0">
+                          <a:solidFill>
+                            <a:srgbClr val="1F2933"/>
+                          </a:solidFill>
+                          <a:latin typeface="Calibri" pitchFamily="34" charset="0"/>
+                          <a:ea typeface="Calibri" pitchFamily="34" charset="-122"/>
+                          <a:cs typeface="Calibri" pitchFamily="34" charset="-120"/>
+                        </a:rPr>
+                        <a:t>-45,1</a:t>
+                      </a:r>
+                      <a:endParaRPr lang="en-US" sz="850" dirty="0">
+                        <a:latin typeface="Calibri" charset="0"/>
+                        <a:ea typeface="Calibri" charset="0"/>
+                        <a:cs typeface="Calibri" charset="0"/>
+                      </a:endParaRPr>
+                    </a:p>
+                  </a:txBody>
+                  <a:tcPr marL="64008" marR="64008" marT="0" marB="0" anchor="ctr">
+                    <a:lnL w="6350" cap="flat" cmpd="sng" algn="ctr">
+                      <a:solidFill>
+                        <a:srgbClr val="D5DBE3"/>
+                      </a:solidFill>
+                      <a:prstDash val="solid"/>
+                      <a:round/>
+                      <a:headEnd type="none" w="med" len="med"/>
+                      <a:tailEnd type="none" w="med" len="med"/>
+                    </a:lnL>
+                    <a:lnR w="6350" cap="flat" cmpd="sng" algn="ctr">
+                      <a:solidFill>
+                        <a:srgbClr val="D5DBE3"/>
+                      </a:solidFill>
+                      <a:prstDash val="solid"/>
+                      <a:round/>
+                      <a:headEnd type="none" w="med" len="med"/>
+                      <a:tailEnd type="none" w="med" len="med"/>
+                    </a:lnR>
+                    <a:lnT w="6350" cap="flat" cmpd="sng" algn="ctr">
+                      <a:solidFill>
+                        <a:srgbClr val="D5DBE3"/>
+                      </a:solidFill>
+                      <a:prstDash val="solid"/>
+                      <a:round/>
+                      <a:headEnd type="none" w="med" len="med"/>
+                      <a:tailEnd type="none" w="med" len="med"/>
+                    </a:lnT>
+                    <a:lnB w="6350" cap="flat" cmpd="sng" algn="ctr">
+                      <a:solidFill>
+                        <a:srgbClr val="D5DBE3"/>
+                      </a:solidFill>
+                      <a:prstDash val="solid"/>
+                      <a:round/>
+                      <a:headEnd type="none" w="med" len="med"/>
+                      <a:tailEnd type="none" w="med" len="med"/>
+                    </a:lnB>
+                  </a:tcPr>
+                </a:tc>
+                <a:tc>
+                  <a:txBody>
+                    <a:bodyPr/>
+                    <a:lstStyle/>
+                    <a:p>
+                      <a:pPr algn="r" indent="0" marL="0">
+                        <a:buNone/>
+                      </a:pPr>
+                      <a:r>
+                        <a:rPr lang="en-US" sz="850" dirty="0">
+                          <a:solidFill>
+                            <a:srgbClr val="1F2933"/>
+                          </a:solidFill>
+                          <a:latin typeface="Calibri" pitchFamily="34" charset="0"/>
+                          <a:ea typeface="Calibri" pitchFamily="34" charset="-122"/>
+                          <a:cs typeface="Calibri" pitchFamily="34" charset="-120"/>
+                        </a:rPr>
+                        <a:t>–</a:t>
+                      </a:r>
+                      <a:endParaRPr lang="en-US" sz="850" dirty="0">
+                        <a:latin typeface="Calibri" charset="0"/>
+                        <a:ea typeface="Calibri" charset="0"/>
+                        <a:cs typeface="Calibri" charset="0"/>
+                      </a:endParaRPr>
+                    </a:p>
+                  </a:txBody>
+                  <a:tcPr marL="64008" marR="64008" marT="0" marB="0" anchor="ctr">
+                    <a:lnL w="6350" cap="flat" cmpd="sng" algn="ctr">
+                      <a:solidFill>
+                        <a:srgbClr val="D5DBE3"/>
+                      </a:solidFill>
+                      <a:prstDash val="solid"/>
+                      <a:round/>
+                      <a:headEnd type="none" w="med" len="med"/>
+                      <a:tailEnd type="none" w="med" len="med"/>
+                    </a:lnL>
+                    <a:lnR w="6350" cap="flat" cmpd="sng" algn="ctr">
+                      <a:solidFill>
+                        <a:srgbClr val="D5DBE3"/>
+                      </a:solidFill>
+                      <a:prstDash val="solid"/>
+                      <a:round/>
+                      <a:headEnd type="none" w="med" len="med"/>
+                      <a:tailEnd type="none" w="med" len="med"/>
+                    </a:lnR>
+                    <a:lnT w="6350" cap="flat" cmpd="sng" algn="ctr">
+                      <a:solidFill>
+                        <a:srgbClr val="D5DBE3"/>
+                      </a:solidFill>
+                      <a:prstDash val="solid"/>
+                      <a:round/>
+                      <a:headEnd type="none" w="med" len="med"/>
+                      <a:tailEnd type="none" w="med" len="med"/>
+                    </a:lnT>
+                    <a:lnB w="6350" cap="flat" cmpd="sng" algn="ctr">
+                      <a:solidFill>
+                        <a:srgbClr val="D5DBE3"/>
+                      </a:solidFill>
+                      <a:prstDash val="solid"/>
+                      <a:round/>
+                      <a:headEnd type="none" w="med" len="med"/>
+                      <a:tailEnd type="none" w="med" len="med"/>
+                    </a:lnB>
+                  </a:tcPr>
+                </a:tc>
+                <a:tc>
+                  <a:txBody>
+                    <a:bodyPr/>
+                    <a:lstStyle/>
+                    <a:p>
+                      <a:pPr algn="r" indent="0" marL="0">
+                        <a:buNone/>
+                      </a:pPr>
+                      <a:r>
+                        <a:rPr lang="en-US" sz="850" b="1" dirty="0">
+                          <a:solidFill>
+                            <a:srgbClr val="B3261E"/>
+                          </a:solidFill>
+                          <a:latin typeface="Calibri" pitchFamily="34" charset="0"/>
+                          <a:ea typeface="Calibri" pitchFamily="34" charset="-122"/>
+                          <a:cs typeface="Calibri" pitchFamily="34" charset="-120"/>
+                        </a:rPr>
+                        <a:t>-45,1</a:t>
+                      </a:r>
+                      <a:endParaRPr lang="en-US" sz="850" dirty="0">
+                        <a:latin typeface="Calibri" charset="0"/>
+                        <a:ea typeface="Calibri" charset="0"/>
+                        <a:cs typeface="Calibri" charset="0"/>
+                      </a:endParaRPr>
+                    </a:p>
+                  </a:txBody>
+                  <a:tcPr marL="64008" marR="64008" marT="0" marB="0" anchor="ctr">
+                    <a:lnL w="6350" cap="flat" cmpd="sng" algn="ctr">
+                      <a:solidFill>
+                        <a:srgbClr val="D5DBE3"/>
+                      </a:solidFill>
+                      <a:prstDash val="solid"/>
+                      <a:round/>
+                      <a:headEnd type="none" w="med" len="med"/>
+                      <a:tailEnd type="none" w="med" len="med"/>
+                    </a:lnL>
+                    <a:lnR w="6350" cap="flat" cmpd="sng" algn="ctr">
+                      <a:solidFill>
+                        <a:srgbClr val="D5DBE3"/>
+                      </a:solidFill>
+                      <a:prstDash val="solid"/>
+                      <a:round/>
+                      <a:headEnd type="none" w="med" len="med"/>
+                      <a:tailEnd type="none" w="med" len="med"/>
+                    </a:lnR>
+                    <a:lnT w="6350" cap="flat" cmpd="sng" algn="ctr">
+                      <a:solidFill>
+                        <a:srgbClr val="D5DBE3"/>
+                      </a:solidFill>
+                      <a:prstDash val="solid"/>
+                      <a:round/>
+                      <a:headEnd type="none" w="med" len="med"/>
+                      <a:tailEnd type="none" w="med" len="med"/>
+                    </a:lnT>
+                    <a:lnB w="6350" cap="flat" cmpd="sng" algn="ctr">
+                      <a:solidFill>
+                        <a:srgbClr val="D5DBE3"/>
+                      </a:solidFill>
+                      <a:prstDash val="solid"/>
+                      <a:round/>
+                      <a:headEnd type="none" w="med" len="med"/>
+                      <a:tailEnd type="none" w="med" len="med"/>
+                    </a:lnB>
+                    <a:solidFill>
+                      <a:srgbClr val="F7E7E5"/>
+                    </a:solidFill>
+                  </a:tcPr>
+                </a:tc>
+                <a:tc>
+                  <a:txBody>
+                    <a:bodyPr/>
+                    <a:lstStyle/>
+                    <a:p>
+                      <a:pPr algn="r" indent="0" marL="0">
+                        <a:buNone/>
+                      </a:pPr>
+                      <a:r>
+                        <a:rPr lang="en-US" sz="850" b="1" dirty="0">
+                          <a:solidFill>
+                            <a:srgbClr val="B3261E"/>
+                          </a:solidFill>
+                          <a:latin typeface="Calibri" pitchFamily="34" charset="0"/>
+                          <a:ea typeface="Calibri" pitchFamily="34" charset="-122"/>
+                          <a:cs typeface="Calibri" pitchFamily="34" charset="-120"/>
+                        </a:rPr>
+                        <a:t>45,1</a:t>
+                      </a:r>
+                      <a:endParaRPr lang="en-US" sz="850" dirty="0">
+                        <a:latin typeface="Calibri" charset="0"/>
+                        <a:ea typeface="Calibri" charset="0"/>
+                        <a:cs typeface="Calibri" charset="0"/>
+                      </a:endParaRPr>
+                    </a:p>
+                  </a:txBody>
+                  <a:tcPr marL="64008" marR="64008" marT="0" marB="0" anchor="ctr">
+                    <a:lnL w="6350" cap="flat" cmpd="sng" algn="ctr">
+                      <a:solidFill>
+                        <a:srgbClr val="D5DBE3"/>
+                      </a:solidFill>
+                      <a:prstDash val="solid"/>
+                      <a:round/>
+                      <a:headEnd type="none" w="med" len="med"/>
+                      <a:tailEnd type="none" w="med" len="med"/>
+                    </a:lnL>
+                    <a:lnR w="6350" cap="flat" cmpd="sng" algn="ctr">
+                      <a:solidFill>
+                        <a:srgbClr val="D5DBE3"/>
+                      </a:solidFill>
+                      <a:prstDash val="solid"/>
+                      <a:round/>
+                      <a:headEnd type="none" w="med" len="med"/>
+                      <a:tailEnd type="none" w="med" len="med"/>
+                    </a:lnR>
+                    <a:lnT w="6350" cap="flat" cmpd="sng" algn="ctr">
+                      <a:solidFill>
+                        <a:srgbClr val="D5DBE3"/>
+                      </a:solidFill>
+                      <a:prstDash val="solid"/>
+                      <a:round/>
+                      <a:headEnd type="none" w="med" len="med"/>
+                      <a:tailEnd type="none" w="med" len="med"/>
+                    </a:lnT>
+                    <a:lnB w="6350" cap="flat" cmpd="sng" algn="ctr">
+                      <a:solidFill>
+                        <a:srgbClr val="D5DBE3"/>
+                      </a:solidFill>
+                      <a:prstDash val="solid"/>
+                      <a:round/>
+                      <a:headEnd type="none" w="med" len="med"/>
+                      <a:tailEnd type="none" w="med" len="med"/>
+                    </a:lnB>
+                    <a:solidFill>
+                      <a:srgbClr val="F7E7E5"/>
+                    </a:solidFill>
+                  </a:tcPr>
+                </a:tc>
+              </a:tr>
+              <a:tr h="224028">
+                <a:tc>
+                  <a:txBody>
+                    <a:bodyPr/>
+                    <a:lstStyle/>
+                    <a:p>
+                      <a:pPr algn="l" indent="0" marL="0">
+                        <a:buNone/>
+                      </a:pPr>
+                      <a:r>
+                        <a:rPr lang="en-US" sz="850" b="1" dirty="0">
+                          <a:solidFill>
+                            <a:srgbClr val="FFFFFF"/>
+                          </a:solidFill>
+                          <a:latin typeface="Calibri" pitchFamily="34" charset="0"/>
+                          <a:ea typeface="Calibri" pitchFamily="34" charset="-122"/>
+                          <a:cs typeface="Calibri" pitchFamily="34" charset="-120"/>
+                        </a:rPr>
+                        <a:t>Total</a:t>
+                      </a:r>
+                      <a:endParaRPr lang="en-US" sz="850" dirty="0">
+                        <a:latin typeface="Calibri" charset="0"/>
+                        <a:ea typeface="Calibri" charset="0"/>
+                        <a:cs typeface="Calibri" charset="0"/>
+                      </a:endParaRPr>
+                    </a:p>
+                  </a:txBody>
+                  <a:tcPr marL="64008" marR="64008" marT="0" marB="0" anchor="ctr">
+                    <a:lnL w="6350" cap="flat" cmpd="sng" algn="ctr">
+                      <a:solidFill>
+                        <a:srgbClr val="D5DBE3"/>
+                      </a:solidFill>
+                      <a:prstDash val="solid"/>
+                      <a:round/>
+                      <a:headEnd type="none" w="med" len="med"/>
+                      <a:tailEnd type="none" w="med" len="med"/>
+                    </a:lnL>
+                    <a:lnR w="6350" cap="flat" cmpd="sng" algn="ctr">
+                      <a:solidFill>
+                        <a:srgbClr val="D5DBE3"/>
+                      </a:solidFill>
+                      <a:prstDash val="solid"/>
+                      <a:round/>
+                      <a:headEnd type="none" w="med" len="med"/>
+                      <a:tailEnd type="none" w="med" len="med"/>
+                    </a:lnR>
+                    <a:lnT w="6350" cap="flat" cmpd="sng" algn="ctr">
+                      <a:solidFill>
+                        <a:srgbClr val="D5DBE3"/>
+                      </a:solidFill>
+                      <a:prstDash val="solid"/>
+                      <a:round/>
+                      <a:headEnd type="none" w="med" len="med"/>
+                      <a:tailEnd type="none" w="med" len="med"/>
+                    </a:lnT>
+                    <a:lnB w="6350" cap="flat" cmpd="sng" algn="ctr">
+                      <a:solidFill>
+                        <a:srgbClr val="D5DBE3"/>
+                      </a:solidFill>
+                      <a:prstDash val="solid"/>
+                      <a:round/>
+                      <a:headEnd type="none" w="med" len="med"/>
+                      <a:tailEnd type="none" w="med" len="med"/>
+                    </a:lnB>
+                    <a:solidFill>
+                      <a:srgbClr val="002C50"/>
+                    </a:solidFill>
+                  </a:tcPr>
+                </a:tc>
+                <a:tc>
+                  <a:txBody>
+                    <a:bodyPr/>
+                    <a:lstStyle/>
+                    <a:p>
+                      <a:pPr algn="r" indent="0" marL="0">
+                        <a:buNone/>
+                      </a:pPr>
+                      <a:r>
+                        <a:rPr lang="en-US" sz="850" b="1" dirty="0">
+                          <a:solidFill>
+                            <a:srgbClr val="FFFFFF"/>
+                          </a:solidFill>
+                          <a:latin typeface="Calibri" pitchFamily="34" charset="0"/>
+                          <a:ea typeface="Calibri" pitchFamily="34" charset="-122"/>
+                          <a:cs typeface="Calibri" pitchFamily="34" charset="-120"/>
+                        </a:rPr>
+                        <a:t>7 024,9</a:t>
+                      </a:r>
+                      <a:endParaRPr lang="en-US" sz="850" dirty="0">
+                        <a:latin typeface="Calibri" charset="0"/>
+                        <a:ea typeface="Calibri" charset="0"/>
+                        <a:cs typeface="Calibri" charset="0"/>
+                      </a:endParaRPr>
+                    </a:p>
+                  </a:txBody>
+                  <a:tcPr marL="64008" marR="64008" marT="0" marB="0" anchor="ctr">
+                    <a:lnL w="6350" cap="flat" cmpd="sng" algn="ctr">
+                      <a:solidFill>
+                        <a:srgbClr val="D5DBE3"/>
+                      </a:solidFill>
+                      <a:prstDash val="solid"/>
+                      <a:round/>
+                      <a:headEnd type="none" w="med" len="med"/>
+                      <a:tailEnd type="none" w="med" len="med"/>
+                    </a:lnL>
+                    <a:lnR w="6350" cap="flat" cmpd="sng" algn="ctr">
+                      <a:solidFill>
+                        <a:srgbClr val="D5DBE3"/>
+                      </a:solidFill>
+                      <a:prstDash val="solid"/>
+                      <a:round/>
+                      <a:headEnd type="none" w="med" len="med"/>
+                      <a:tailEnd type="none" w="med" len="med"/>
+                    </a:lnR>
+                    <a:lnT w="6350" cap="flat" cmpd="sng" algn="ctr">
+                      <a:solidFill>
+                        <a:srgbClr val="D5DBE3"/>
+                      </a:solidFill>
+                      <a:prstDash val="solid"/>
+                      <a:round/>
+                      <a:headEnd type="none" w="med" len="med"/>
+                      <a:tailEnd type="none" w="med" len="med"/>
+                    </a:lnT>
+                    <a:lnB w="6350" cap="flat" cmpd="sng" algn="ctr">
+                      <a:solidFill>
+                        <a:srgbClr val="D5DBE3"/>
+                      </a:solidFill>
+                      <a:prstDash val="solid"/>
+                      <a:round/>
+                      <a:headEnd type="none" w="med" len="med"/>
+                      <a:tailEnd type="none" w="med" len="med"/>
+                    </a:lnB>
+                    <a:solidFill>
+                      <a:srgbClr val="002C50"/>
+                    </a:solidFill>
+                  </a:tcPr>
+                </a:tc>
+                <a:tc>
+                  <a:txBody>
+                    <a:bodyPr/>
+                    <a:lstStyle/>
+                    <a:p>
+                      <a:pPr algn="r" indent="0" marL="0">
+                        <a:buNone/>
+                      </a:pPr>
+                      <a:r>
+                        <a:rPr lang="en-US" sz="850" b="1" dirty="0">
+                          <a:solidFill>
+                            <a:srgbClr val="FFFFFF"/>
+                          </a:solidFill>
+                          <a:latin typeface="Calibri" pitchFamily="34" charset="0"/>
+                          <a:ea typeface="Calibri" pitchFamily="34" charset="-122"/>
+                          <a:cs typeface="Calibri" pitchFamily="34" charset="-120"/>
+                        </a:rPr>
+                        <a:t>-5 668,8</a:t>
+                      </a:r>
+                      <a:endParaRPr lang="en-US" sz="850" dirty="0">
+                        <a:latin typeface="Calibri" charset="0"/>
+                        <a:ea typeface="Calibri" charset="0"/>
+                        <a:cs typeface="Calibri" charset="0"/>
+                      </a:endParaRPr>
+                    </a:p>
+                  </a:txBody>
+                  <a:tcPr marL="64008" marR="64008" marT="0" marB="0" anchor="ctr">
+                    <a:lnL w="6350" cap="flat" cmpd="sng" algn="ctr">
+                      <a:solidFill>
+                        <a:srgbClr val="D5DBE3"/>
+                      </a:solidFill>
+                      <a:prstDash val="solid"/>
+                      <a:round/>
+                      <a:headEnd type="none" w="med" len="med"/>
+                      <a:tailEnd type="none" w="med" len="med"/>
+                    </a:lnL>
+                    <a:lnR w="6350" cap="flat" cmpd="sng" algn="ctr">
+                      <a:solidFill>
+                        <a:srgbClr val="D5DBE3"/>
+                      </a:solidFill>
+                      <a:prstDash val="solid"/>
+                      <a:round/>
+                      <a:headEnd type="none" w="med" len="med"/>
+                      <a:tailEnd type="none" w="med" len="med"/>
+                    </a:lnR>
+                    <a:lnT w="6350" cap="flat" cmpd="sng" algn="ctr">
+                      <a:solidFill>
+                        <a:srgbClr val="D5DBE3"/>
+                      </a:solidFill>
+                      <a:prstDash val="solid"/>
+                      <a:round/>
+                      <a:headEnd type="none" w="med" len="med"/>
+                      <a:tailEnd type="none" w="med" len="med"/>
+                    </a:lnT>
+                    <a:lnB w="6350" cap="flat" cmpd="sng" algn="ctr">
+                      <a:solidFill>
+                        <a:srgbClr val="D5DBE3"/>
+                      </a:solidFill>
+                      <a:prstDash val="solid"/>
+                      <a:round/>
+                      <a:headEnd type="none" w="med" len="med"/>
+                      <a:tailEnd type="none" w="med" len="med"/>
+                    </a:lnB>
+                    <a:solidFill>
+                      <a:srgbClr val="002C50"/>
+                    </a:solidFill>
+                  </a:tcPr>
+                </a:tc>
+                <a:tc>
+                  <a:txBody>
+                    <a:bodyPr/>
+                    <a:lstStyle/>
+                    <a:p>
+                      <a:pPr algn="r" indent="0" marL="0">
+                        <a:buNone/>
+                      </a:pPr>
+                      <a:r>
+                        <a:rPr lang="en-US" sz="850" b="1" dirty="0">
+                          <a:solidFill>
+                            <a:srgbClr val="FFFFFF"/>
+                          </a:solidFill>
+                          <a:latin typeface="Calibri" pitchFamily="34" charset="0"/>
+                          <a:ea typeface="Calibri" pitchFamily="34" charset="-122"/>
+                          <a:cs typeface="Calibri" pitchFamily="34" charset="-120"/>
+                        </a:rPr>
+                        <a:t>–</a:t>
+                      </a:r>
+                      <a:endParaRPr lang="en-US" sz="850" dirty="0">
+                        <a:latin typeface="Calibri" charset="0"/>
+                        <a:ea typeface="Calibri" charset="0"/>
+                        <a:cs typeface="Calibri" charset="0"/>
+                      </a:endParaRPr>
+                    </a:p>
+                  </a:txBody>
+                  <a:tcPr marL="64008" marR="64008" marT="0" marB="0" anchor="ctr">
+                    <a:lnL w="6350" cap="flat" cmpd="sng" algn="ctr">
+                      <a:solidFill>
+                        <a:srgbClr val="D5DBE3"/>
+                      </a:solidFill>
+                      <a:prstDash val="solid"/>
+                      <a:round/>
+                      <a:headEnd type="none" w="med" len="med"/>
+                      <a:tailEnd type="none" w="med" len="med"/>
+                    </a:lnL>
+                    <a:lnR w="6350" cap="flat" cmpd="sng" algn="ctr">
+                      <a:solidFill>
+                        <a:srgbClr val="D5DBE3"/>
+                      </a:solidFill>
+                      <a:prstDash val="solid"/>
+                      <a:round/>
+                      <a:headEnd type="none" w="med" len="med"/>
+                      <a:tailEnd type="none" w="med" len="med"/>
+                    </a:lnR>
+                    <a:lnT w="6350" cap="flat" cmpd="sng" algn="ctr">
+                      <a:solidFill>
+                        <a:srgbClr val="D5DBE3"/>
+                      </a:solidFill>
+                      <a:prstDash val="solid"/>
+                      <a:round/>
+                      <a:headEnd type="none" w="med" len="med"/>
+                      <a:tailEnd type="none" w="med" len="med"/>
+                    </a:lnT>
+                    <a:lnB w="6350" cap="flat" cmpd="sng" algn="ctr">
+                      <a:solidFill>
+                        <a:srgbClr val="D5DBE3"/>
+                      </a:solidFill>
+                      <a:prstDash val="solid"/>
+                      <a:round/>
+                      <a:headEnd type="none" w="med" len="med"/>
+                      <a:tailEnd type="none" w="med" len="med"/>
+                    </a:lnB>
+                    <a:solidFill>
+                      <a:srgbClr val="002C50"/>
+                    </a:solidFill>
+                  </a:tcPr>
+                </a:tc>
+                <a:tc>
+                  <a:txBody>
+                    <a:bodyPr/>
+                    <a:lstStyle/>
+                    <a:p>
+                      <a:pPr algn="r" indent="0" marL="0">
+                        <a:buNone/>
+                      </a:pPr>
+                      <a:r>
+                        <a:rPr lang="en-US" sz="850" b="1" dirty="0">
+                          <a:solidFill>
+                            <a:srgbClr val="FFFFFF"/>
+                          </a:solidFill>
+                          <a:latin typeface="Calibri" pitchFamily="34" charset="0"/>
+                          <a:ea typeface="Calibri" pitchFamily="34" charset="-122"/>
+                          <a:cs typeface="Calibri" pitchFamily="34" charset="-120"/>
+                        </a:rPr>
+                        <a:t>1 356,2</a:t>
+                      </a:r>
+                      <a:endParaRPr lang="en-US" sz="850" dirty="0">
+                        <a:latin typeface="Calibri" charset="0"/>
+                        <a:ea typeface="Calibri" charset="0"/>
+                        <a:cs typeface="Calibri" charset="0"/>
+                      </a:endParaRPr>
+                    </a:p>
+                  </a:txBody>
+                  <a:tcPr marL="64008" marR="64008" marT="0" marB="0" anchor="ctr">
+                    <a:lnL w="6350" cap="flat" cmpd="sng" algn="ctr">
+                      <a:solidFill>
+                        <a:srgbClr val="D5DBE3"/>
+                      </a:solidFill>
+                      <a:prstDash val="solid"/>
+                      <a:round/>
+                      <a:headEnd type="none" w="med" len="med"/>
+                      <a:tailEnd type="none" w="med" len="med"/>
+                    </a:lnL>
+                    <a:lnR w="6350" cap="flat" cmpd="sng" algn="ctr">
+                      <a:solidFill>
+                        <a:srgbClr val="D5DBE3"/>
+                      </a:solidFill>
+                      <a:prstDash val="solid"/>
+                      <a:round/>
+                      <a:headEnd type="none" w="med" len="med"/>
+                      <a:tailEnd type="none" w="med" len="med"/>
+                    </a:lnR>
+                    <a:lnT w="6350" cap="flat" cmpd="sng" algn="ctr">
+                      <a:solidFill>
+                        <a:srgbClr val="D5DBE3"/>
+                      </a:solidFill>
+                      <a:prstDash val="solid"/>
+                      <a:round/>
+                      <a:headEnd type="none" w="med" len="med"/>
+                      <a:tailEnd type="none" w="med" len="med"/>
+                    </a:lnT>
+                    <a:lnB w="6350" cap="flat" cmpd="sng" algn="ctr">
+                      <a:solidFill>
+                        <a:srgbClr val="D5DBE3"/>
+                      </a:solidFill>
+                      <a:prstDash val="solid"/>
+                      <a:round/>
+                      <a:headEnd type="none" w="med" len="med"/>
+                      <a:tailEnd type="none" w="med" len="med"/>
+                    </a:lnB>
+                    <a:solidFill>
+                      <a:srgbClr val="002C50"/>
+                    </a:solidFill>
+                  </a:tcPr>
+                </a:tc>
+                <a:tc>
+                  <a:txBody>
+                    <a:bodyPr/>
+                    <a:lstStyle/>
+                    <a:p>
+                      <a:pPr algn="r" indent="0" marL="0">
+                        <a:buNone/>
+                      </a:pPr>
+                      <a:r>
+                        <a:rPr lang="en-US" sz="850" b="1" dirty="0">
+                          <a:solidFill>
+                            <a:srgbClr val="FFFFFF"/>
+                          </a:solidFill>
+                          <a:latin typeface="Calibri" pitchFamily="34" charset="0"/>
+                          <a:ea typeface="Calibri" pitchFamily="34" charset="-122"/>
+                          <a:cs typeface="Calibri" pitchFamily="34" charset="-120"/>
+                        </a:rPr>
+                        <a:t>1 387,3</a:t>
+                      </a:r>
+                      <a:endParaRPr lang="en-US" sz="850" dirty="0">
+                        <a:latin typeface="Calibri" charset="0"/>
+                        <a:ea typeface="Calibri" charset="0"/>
+                        <a:cs typeface="Calibri" charset="0"/>
+                      </a:endParaRPr>
+                    </a:p>
+                  </a:txBody>
+                  <a:tcPr marL="64008" marR="64008" marT="0" marB="0" anchor="ctr">
+                    <a:lnL w="6350" cap="flat" cmpd="sng" algn="ctr">
+                      <a:solidFill>
+                        <a:srgbClr val="D5DBE3"/>
+                      </a:solidFill>
+                      <a:prstDash val="solid"/>
+                      <a:round/>
+                      <a:headEnd type="none" w="med" len="med"/>
+                      <a:tailEnd type="none" w="med" len="med"/>
+                    </a:lnL>
+                    <a:lnR w="6350" cap="flat" cmpd="sng" algn="ctr">
+                      <a:solidFill>
+                        <a:srgbClr val="D5DBE3"/>
+                      </a:solidFill>
+                      <a:prstDash val="solid"/>
+                      <a:round/>
+                      <a:headEnd type="none" w="med" len="med"/>
+                      <a:tailEnd type="none" w="med" len="med"/>
+                    </a:lnR>
+                    <a:lnT w="6350" cap="flat" cmpd="sng" algn="ctr">
+                      <a:solidFill>
+                        <a:srgbClr val="D5DBE3"/>
+                      </a:solidFill>
+                      <a:prstDash val="solid"/>
+                      <a:round/>
+                      <a:headEnd type="none" w="med" len="med"/>
+                      <a:tailEnd type="none" w="med" len="med"/>
+                    </a:lnT>
+                    <a:lnB w="6350" cap="flat" cmpd="sng" algn="ctr">
+                      <a:solidFill>
+                        <a:srgbClr val="D5DBE3"/>
+                      </a:solidFill>
+                      <a:prstDash val="solid"/>
+                      <a:round/>
+                      <a:headEnd type="none" w="med" len="med"/>
+                      <a:tailEnd type="none" w="med" len="med"/>
+                    </a:lnB>
+                    <a:solidFill>
+                      <a:srgbClr val="002C50"/>
+                    </a:solidFill>
+                  </a:tcPr>
+                </a:tc>
+              </a:tr>
+            </a:tbl>
+          </a:graphicData>
+        </a:graphic>
+      </p:graphicFrame>
+      <p:sp>
+        <p:nvSpPr>
+          <p:cNvPr id="17" name="Shape 14"/>
+          <p:cNvSpPr/>
+          <p:nvPr/>
+        </p:nvSpPr>
+        <p:spPr>
+          <a:xfrm>
+            <a:off x="7589520" y="2212848"/>
+            <a:ext cx="4142232" cy="1874520"/>
+          </a:xfrm>
+          <a:prstGeom prst="rect">
+            <a:avLst/>
+          </a:prstGeom>
+          <a:solidFill>
+            <a:srgbClr val="EEF2F6"/>
+          </a:solidFill>
+          <a:ln w="12700">
+            <a:solidFill>
+              <a:srgbClr val="EEF2F6"/>
+            </a:solidFill>
+            <a:prstDash val="solid"/>
+          </a:ln>
+        </p:spPr>
+      </p:sp>
+      <p:sp>
+        <p:nvSpPr>
+          <p:cNvPr id="18" name="Text 15"/>
+          <p:cNvSpPr txBox="1"/>
+          <p:nvPr/>
+        </p:nvSpPr>
+        <p:spPr>
+          <a:xfrm>
+            <a:off x="7754112" y="2286000"/>
+            <a:ext cx="3867912" cy="1737360"/>
+          </a:xfrm>
+          <a:prstGeom prst="rect">
+            <a:avLst/>
+          </a:prstGeom>
+          <a:noFill/>
+          <a:ln/>
+        </p:spPr>
+        <p:txBody>
+          <a:bodyPr wrap="square" lIns="0" tIns="0" rIns="0" bIns="0" rtlCol="0" anchor="t"/>
+          <a:lstStyle/>
+          <a:p>
+            <a:pPr indent="0" marL="0">
+              <a:spcAft>
+                <a:spcPts val="400"/>
+              </a:spcAft>
+              <a:buNone/>
+            </a:pPr>
+            <a:r>
+              <a:rPr lang="en-US" sz="1200" b="1" dirty="0">
+                <a:solidFill>
+                  <a:srgbClr val="002C50"/>
+                </a:solidFill>
+                <a:latin typeface="Calibri" pitchFamily="34" charset="0"/>
+                <a:ea typeface="Calibri" pitchFamily="34" charset="-122"/>
+                <a:cs typeface="Calibri" pitchFamily="34" charset="-120"/>
+              </a:rPr>
+              <a:t>Disponible pour le nivellement</a:t>
+            </a:r>
+            <a:endParaRPr lang="en-US" sz="1200" dirty="0"/>
+          </a:p>
+          <a:p>
+            <a:pPr marL="127000" indent="-127000">
+              <a:buSzPct val="100000"/>
+              <a:buChar char="•"/>
+            </a:pPr>
+            <a:r>
+              <a:rPr lang="en-US" sz="1000" dirty="0">
+                <a:solidFill>
+                  <a:srgbClr val="1F2933"/>
+                </a:solidFill>
+                <a:latin typeface="Calibri" pitchFamily="34" charset="0"/>
+                <a:ea typeface="Calibri" pitchFamily="34" charset="-122"/>
+                <a:cs typeface="Calibri" pitchFamily="34" charset="-120"/>
+              </a:rPr>
+              <a:t>RIVIERA PARK – BNI courant : 1 772,0 (à arbitrer)</a:t>
+            </a:r>
+            <a:endParaRPr lang="en-US" sz="1200" dirty="0"/>
+          </a:p>
+          <a:p>
+            <a:pPr marL="127000" indent="-127000">
+              <a:buSzPct val="100000"/>
+              <a:buChar char="•"/>
+            </a:pPr>
+            <a:r>
+              <a:rPr lang="en-US" sz="1000" dirty="0">
+                <a:solidFill>
+                  <a:srgbClr val="1F2933"/>
+                </a:solidFill>
+                <a:latin typeface="Calibri" pitchFamily="34" charset="0"/>
+                <a:ea typeface="Calibri" pitchFamily="34" charset="-122"/>
+                <a:cs typeface="Calibri" pitchFamily="34" charset="-120"/>
+              </a:rPr>
+              <a:t>SCI FIRST – STB : 163,7</a:t>
+            </a:r>
+            <a:endParaRPr lang="en-US" sz="1200" dirty="0"/>
+          </a:p>
+          <a:p>
+            <a:pPr marL="127000" indent="-127000">
+              <a:buSzPct val="100000"/>
+              <a:buChar char="•"/>
+            </a:pPr>
+            <a:r>
+              <a:rPr lang="en-US" sz="1000" dirty="0">
+                <a:solidFill>
+                  <a:srgbClr val="1F2933"/>
+                </a:solidFill>
+                <a:latin typeface="Calibri" pitchFamily="34" charset="0"/>
+                <a:ea typeface="Calibri" pitchFamily="34" charset="-122"/>
+                <a:cs typeface="Calibri" pitchFamily="34" charset="-120"/>
+              </a:rPr>
+              <a:t>PICI – ECO : 105,3</a:t>
+            </a:r>
+            <a:endParaRPr lang="en-US" sz="1200" dirty="0"/>
+          </a:p>
+          <a:p>
+            <a:pPr marL="127000" indent="-127000">
+              <a:buSzPct val="100000"/>
+              <a:buChar char="•"/>
+            </a:pPr>
+            <a:r>
+              <a:rPr lang="en-US" sz="1000" dirty="0">
+                <a:solidFill>
+                  <a:srgbClr val="1F2933"/>
+                </a:solidFill>
+                <a:latin typeface="Calibri" pitchFamily="34" charset="0"/>
+                <a:ea typeface="Calibri" pitchFamily="34" charset="-122"/>
+                <a:cs typeface="Calibri" pitchFamily="34" charset="-120"/>
+              </a:rPr>
+              <a:t>PICI – STB : 24,8</a:t>
+            </a:r>
+            <a:endParaRPr lang="en-US" sz="1200" dirty="0"/>
+          </a:p>
+          <a:p>
+            <a:pPr marL="127000" indent="-127000">
+              <a:buSzPct val="100000"/>
+              <a:buChar char="•"/>
+            </a:pPr>
+            <a:r>
+              <a:rPr lang="en-US" sz="1000" dirty="0">
+                <a:solidFill>
+                  <a:srgbClr val="1F2933"/>
+                </a:solidFill>
+                <a:latin typeface="Calibri" pitchFamily="34" charset="0"/>
+                <a:ea typeface="Calibri" pitchFamily="34" charset="-122"/>
+                <a:cs typeface="Calibri" pitchFamily="34" charset="-120"/>
+              </a:rPr>
+              <a:t>SCI FIRST – SG : 8,4</a:t>
+            </a:r>
+            <a:endParaRPr lang="en-US" sz="1200" dirty="0"/>
+          </a:p>
+          <a:p>
+            <a:pPr marL="127000" indent="-127000">
+              <a:buSzPct val="100000"/>
+              <a:buChar char="•"/>
+            </a:pPr>
+            <a:r>
+              <a:rPr lang="en-US" sz="1000" dirty="0">
+                <a:solidFill>
+                  <a:srgbClr val="1F2933"/>
+                </a:solidFill>
+                <a:latin typeface="Calibri" pitchFamily="34" charset="0"/>
+                <a:ea typeface="Calibri" pitchFamily="34" charset="-122"/>
+                <a:cs typeface="Calibri" pitchFamily="34" charset="-120"/>
+              </a:rPr>
+              <a:t>PICI – SG : 3,6</a:t>
+            </a:r>
+            <a:endParaRPr lang="en-US" sz="1200" dirty="0"/>
+          </a:p>
+        </p:txBody>
+      </p:sp>
+      <p:sp>
+        <p:nvSpPr>
+          <p:cNvPr id="19" name="Shape 16"/>
+          <p:cNvSpPr/>
+          <p:nvPr/>
+        </p:nvSpPr>
+        <p:spPr>
+          <a:xfrm>
+            <a:off x="7589520" y="4206240"/>
+            <a:ext cx="4142232" cy="2103120"/>
+          </a:xfrm>
+          <a:prstGeom prst="rect">
+            <a:avLst/>
+          </a:prstGeom>
+          <a:solidFill>
+            <a:srgbClr val="002C50"/>
+          </a:solidFill>
+          <a:ln w="12700">
+            <a:solidFill>
+              <a:srgbClr val="002C50"/>
+            </a:solidFill>
+            <a:prstDash val="solid"/>
+          </a:ln>
+        </p:spPr>
+      </p:sp>
+      <p:sp>
+        <p:nvSpPr>
+          <p:cNvPr id="20" name="Text 17"/>
+          <p:cNvSpPr txBox="1"/>
+          <p:nvPr/>
+        </p:nvSpPr>
+        <p:spPr>
+          <a:xfrm>
+            <a:off x="7754112" y="4297680"/>
+            <a:ext cx="3867912" cy="1938528"/>
+          </a:xfrm>
+          <a:prstGeom prst="rect">
+            <a:avLst/>
+          </a:prstGeom>
+          <a:noFill/>
+          <a:ln/>
+        </p:spPr>
+        <p:txBody>
+          <a:bodyPr wrap="square" lIns="0" tIns="0" rIns="0" bIns="0" rtlCol="0" anchor="t"/>
+          <a:lstStyle/>
+          <a:p>
+            <a:pPr indent="0" marL="0">
+              <a:spcAft>
+                <a:spcPts val="500"/>
+              </a:spcAft>
+              <a:buNone/>
+            </a:pPr>
+            <a:r>
+              <a:rPr lang="en-US" sz="1250" b="1" dirty="0">
+                <a:solidFill>
+                  <a:srgbClr val="D4B483"/>
+                </a:solidFill>
+                <a:latin typeface="Calibri" pitchFamily="34" charset="0"/>
+                <a:ea typeface="Calibri" pitchFamily="34" charset="-122"/>
+                <a:cs typeface="Calibri" pitchFamily="34" charset="-120"/>
+              </a:rPr>
+              <a:t>Décisions attendues</a:t>
+            </a:r>
+            <a:endParaRPr lang="en-US" sz="1250" dirty="0"/>
+          </a:p>
+          <a:p>
+            <a:pPr marL="127000" indent="-127000">
+              <a:spcAft>
+                <a:spcPts val="300"/>
+              </a:spcAft>
+              <a:buSzPct val="100000"/>
+              <a:buChar char="•"/>
+            </a:pPr>
+            <a:r>
+              <a:rPr lang="en-US" sz="1000" dirty="0">
+                <a:solidFill>
+                  <a:srgbClr val="FFFFFF"/>
+                </a:solidFill>
+                <a:latin typeface="Calibri" pitchFamily="34" charset="0"/>
+                <a:ea typeface="Calibri" pitchFamily="34" charset="-122"/>
+                <a:cs typeface="Calibri" pitchFamily="34" charset="-120"/>
+              </a:rPr>
+              <a:t>Fixer les virements de nivellement (PICI, SCI FIRST, compte à arbitrer) : le reporting les recalcule.</a:t>
+            </a:r>
+            <a:endParaRPr lang="en-US" sz="1250" dirty="0"/>
+          </a:p>
+          <a:p>
+            <a:pPr marL="127000" indent="-127000">
+              <a:spcAft>
+                <a:spcPts val="300"/>
+              </a:spcAft>
+              <a:buSzPct val="100000"/>
+              <a:buChar char="•"/>
+            </a:pPr>
+            <a:r>
+              <a:rPr lang="en-US" sz="1000" dirty="0">
+                <a:solidFill>
+                  <a:srgbClr val="FFFFFF"/>
+                </a:solidFill>
+                <a:latin typeface="Calibri" pitchFamily="34" charset="0"/>
+                <a:ea typeface="Calibri" pitchFamily="34" charset="-122"/>
+                <a:cs typeface="Calibri" pitchFamily="34" charset="-120"/>
+              </a:rPr>
+              <a:t>Financer le reste de 1 387,3 M, dont TERASSON – BNI fonds projet 720,2, TERASSON – SG 206,4, FINAFRICA – SG 140,2.</a:t>
+            </a:r>
+            <a:endParaRPr lang="en-US" sz="1250" dirty="0"/>
+          </a:p>
+          <a:p>
+            <a:pPr marL="127000" indent="-127000">
+              <a:spcAft>
+                <a:spcPts val="300"/>
+              </a:spcAft>
+              <a:buSzPct val="100000"/>
+              <a:buChar char="•"/>
+            </a:pPr>
+            <a:r>
+              <a:rPr lang="en-US" sz="1000" dirty="0">
+                <a:solidFill>
+                  <a:srgbClr val="FFFFFF"/>
+                </a:solidFill>
+                <a:latin typeface="Calibri" pitchFamily="34" charset="0"/>
+                <a:ea typeface="Calibri" pitchFamily="34" charset="-122"/>
+                <a:cs typeface="Calibri" pitchFamily="34" charset="-120"/>
+              </a:rPr>
+              <a:t>Décalages appliqués : salaires SCO AO 24,3 M en S3.</a:t>
+            </a:r>
+            <a:endParaRPr lang="en-US" sz="1250" dirty="0"/>
+          </a:p>
+          <a:p>
+            <a:pPr marL="127000" indent="-127000">
+              <a:spcAft>
+                <a:spcPts val="300"/>
+              </a:spcAft>
+              <a:buSzPct val="100000"/>
+              <a:buChar char="•"/>
+            </a:pPr>
+            <a:r>
+              <a:rPr lang="en-US" sz="1000" dirty="0">
+                <a:solidFill>
+                  <a:srgbClr val="FFFFFF"/>
+                </a:solidFill>
+                <a:latin typeface="Calibri" pitchFamily="34" charset="0"/>
+                <a:ea typeface="Calibri" pitchFamily="34" charset="-122"/>
+                <a:cs typeface="Calibri" pitchFamily="34" charset="-120"/>
+              </a:rPr>
+              <a:t>Prioriser impôts, cotisations et salaires si le financement est partiel.</a:t>
+            </a:r>
+            <a:endParaRPr lang="en-US" sz="1250" dirty="0"/>
+          </a:p>
+        </p:txBody>
+      </p:sp>
+      <p:sp>
+        <p:nvSpPr>
+          <p:cNvPr id="21" name="Text 18"/>
+          <p:cNvSpPr txBox="1"/>
+          <p:nvPr/>
+        </p:nvSpPr>
+        <p:spPr>
+          <a:xfrm>
+            <a:off x="457200" y="6382512"/>
+            <a:ext cx="10424160" cy="201168"/>
+          </a:xfrm>
+          <a:prstGeom prst="rect">
+            <a:avLst/>
+          </a:prstGeom>
+          <a:noFill/>
+          <a:ln/>
+        </p:spPr>
+        <p:txBody>
+          <a:bodyPr wrap="square" lIns="0" tIns="0" rIns="0" bIns="0" rtlCol="0" anchor="ctr"/>
+          <a:lstStyle/>
+          <a:p>
+            <a:pPr indent="0" marL="0">
+              <a:buNone/>
+            </a:pPr>
+            <a:r>
+              <a:rPr lang="en-US" sz="950" i="1" dirty="0">
+                <a:solidFill>
+                  <a:srgbClr val="6B7280"/>
+                </a:solidFill>
+                <a:latin typeface="Calibri" pitchFamily="34" charset="0"/>
+                <a:ea typeface="Calibri" pitchFamily="34" charset="-122"/>
+                <a:cs typeface="Calibri" pitchFamily="34" charset="-120"/>
+              </a:rPr>
+              <a:t>Reste à financer = somme des soldes théoriques négatifs, compte par compte (détail dans l'onglet « Équilibrage S1 » du reporting).</a:t>
+            </a:r>
+            <a:endParaRPr lang="en-US" sz="950" dirty="0"/>
+          </a:p>
+        </p:txBody>
+      </p:sp>
+      <p:pic>
+        <p:nvPicPr>
+          <p:cNvPr id="22" name="Image 0" descr="preencoded.png">    </p:cNvPr>
+          <p:cNvPicPr>
+            <a:picLocks noChangeAspect="1"/>
+          </p:cNvPicPr>
+          <p:nvPr/>
+        </p:nvPicPr>
+        <p:blipFill>
+          <a:blip r:embed="rId1"/>
+          <a:stretch>
+            <a:fillRect/>
+          </a:stretch>
+        </p:blipFill>
+        <p:spPr>
+          <a:xfrm>
+            <a:off x="11018520" y="6382512"/>
+            <a:ext cx="530352" cy="329184"/>
+          </a:xfrm>
+          <a:prstGeom prst="rect">
+            <a:avLst/>
+          </a:prstGeom>
+        </p:spPr>
+      </p:pic>
+      <p:sp>
+        <p:nvSpPr>
+          <p:cNvPr id="23" name="Text 19"/>
+          <p:cNvSpPr txBox="1"/>
+          <p:nvPr/>
+        </p:nvSpPr>
+        <p:spPr>
+          <a:xfrm>
+            <a:off x="11612880" y="6400800"/>
+            <a:ext cx="365760" cy="274320"/>
+          </a:xfrm>
+          <a:prstGeom prst="rect">
+            <a:avLst/>
+          </a:prstGeom>
+          <a:noFill/>
+          <a:ln/>
+        </p:spPr>
+        <p:txBody>
+          <a:bodyPr wrap="square" lIns="0" tIns="0" rIns="0" bIns="0" rtlCol="0" anchor="ctr"/>
+          <a:lstStyle/>
+          <a:p>
+            <a:pPr indent="0" marL="0">
+              <a:buNone/>
+            </a:pPr>
+            <a:r>
+              <a:rPr lang="en-US" sz="900" dirty="0">
+                <a:solidFill>
+                  <a:srgbClr val="6B7280"/>
+                </a:solidFill>
+                <a:latin typeface="Calibri" pitchFamily="34" charset="0"/>
+                <a:ea typeface="Calibri" pitchFamily="34" charset="-122"/>
+                <a:cs typeface="Calibri" pitchFamily="34" charset="-120"/>
+              </a:rPr>
+              <a:t>6</a:t>
+            </a:r>
+            <a:endParaRPr lang="en-US" sz="900" dirty="0"/>
+          </a:p>
+        </p:txBody>
+      </p:sp>
+    </p:spTree>
+  </p:cSld>
+  <p:clrMapOvr>
+    <a:masterClrMapping/>
+  </p:clrMapOvr>
+</p:sld>
+</file>
+
 <file path=ppt/theme/theme1.xml><?xml version="1.0" encoding="utf-8"?>
 <a:theme xmlns:a="http://schemas.openxmlformats.org/drawingml/2006/main" name="Office Theme">
   <a:themeElements>

--- a/RCI_Besoins_Tresorerie_Comptes_Paiement_30-09-2026.pptx
+++ b/RCI_Besoins_Tresorerie_Comptes_Paiement_30-09-2026.pptx
@@ -1851,7 +1851,7 @@
                 <a:ea typeface="Calibri" pitchFamily="34" charset="-122"/>
                 <a:cs typeface="Calibri" pitchFamily="34" charset="-120"/>
               </a:rPr>
-              <a:t>7 709,5 M à payer de S1 à S5, dont 5 672,4 M dès S1 ; 2 601,5 M de déficits</a:t>
+              <a:t>7 709,5 M à payer de S1 à S5, dont 5 672,4 M dès S1 ; 2 776,8 M de déficits</a:t>
             </a:r>
             <a:endParaRPr lang="en-US" sz="1400" dirty="0"/>
           </a:p>
@@ -1890,7 +1890,7 @@
                 <a:ea typeface="Calibri" pitchFamily="34" charset="-122"/>
                 <a:cs typeface="Calibri" pitchFamily="34" charset="-120"/>
               </a:rPr>
-              <a:t>Fournisseurs, impôts, cotisations et salaires des sociétés ; cash plans des projets ; service de la dette</a:t>
+              <a:t>Fournisseurs, impôts, cotisations, salaires et échéances de prêts des sociétés ; cash plans des projets</a:t>
             </a:r>
             <a:endParaRPr lang="en-US" sz="1050" dirty="0"/>
           </a:p>
@@ -2382,7 +2382,7 @@
                 <a:ea typeface="Calibri" pitchFamily="34" charset="-122"/>
                 <a:cs typeface="Calibri" pitchFamily="34" charset="-120"/>
               </a:rPr>
-              <a:t>Comptes « Dédié besoin de fonctionnement » des sociétés, comptes « Dédié paiement CPI » des projets, service de la dette</a:t>
+              <a:t>Comptes « Dédié besoin de fonctionnement » des sociétés et comptes « Dédié paiement CPI » des projets ; comptes indisponibles exclus</a:t>
             </a:r>
             <a:endParaRPr lang="en-US" sz="1050" dirty="0"/>
           </a:p>
@@ -2831,7 +2831,7 @@
                 <a:ea typeface="Calibri" pitchFamily="34" charset="-122"/>
                 <a:cs typeface="Calibri" pitchFamily="34" charset="-120"/>
               </a:rPr>
-              <a:t>7 946,1 M</a:t>
+              <a:t>6 750,5 M</a:t>
             </a:r>
             <a:endParaRPr lang="en-US" sz="2200" dirty="0"/>
           </a:p>
@@ -2870,7 +2870,7 @@
                 <a:ea typeface="Calibri" pitchFamily="34" charset="-122"/>
                 <a:cs typeface="Calibri" pitchFamily="34" charset="-120"/>
               </a:rPr>
-              <a:t>Trésorerie au 30/09 ; 921,2 M bloqués, 1 772,0 M à arbitrer</a:t>
+              <a:t>Trésorerie au 30/09 ; 76,3 M bloqués, 1 772,0 M à arbitrer</a:t>
             </a:r>
             <a:endParaRPr lang="en-US" sz="1050" dirty="0"/>
           </a:p>
@@ -2936,7 +2936,7 @@
                 <a:ea typeface="Calibri" pitchFamily="34" charset="-122"/>
                 <a:cs typeface="Calibri" pitchFamily="34" charset="-120"/>
               </a:rPr>
-              <a:t>2 601,5 M</a:t>
+              <a:t>2 776,8 M</a:t>
             </a:r>
             <a:endParaRPr lang="en-US" sz="2200" dirty="0"/>
           </a:p>
@@ -2975,7 +2975,7 @@
                 <a:ea typeface="Calibri" pitchFamily="34" charset="-122"/>
                 <a:cs typeface="Calibri" pitchFamily="34" charset="-120"/>
               </a:rPr>
-              <a:t>Déficits à couvrir : 2 projet(s) et 8 société(s)</a:t>
+              <a:t>Déficits à couvrir : 2 projet(s) et 9 société(s)</a:t>
             </a:r>
             <a:endParaRPr lang="en-US" sz="1050" dirty="0"/>
           </a:p>
@@ -3711,7 +3711,7 @@
                           <a:ea typeface="Calibri" pitchFamily="34" charset="-122"/>
                           <a:cs typeface="Calibri" pitchFamily="34" charset="-120"/>
                         </a:rPr>
-                        <a:t>1 137,9</a:t>
+                        <a:t>1 481,9</a:t>
                       </a:r>
                       <a:endParaRPr lang="en-US" sz="950" dirty="0">
                         <a:latin typeface="Calibri" charset="0"/>
@@ -3841,7 +3841,7 @@
                           <a:ea typeface="Calibri" pitchFamily="34" charset="-122"/>
                           <a:cs typeface="Calibri" pitchFamily="34" charset="-120"/>
                         </a:rPr>
-                        <a:t>121,5</a:t>
+                        <a:t>225,7</a:t>
                       </a:r>
                       <a:endParaRPr lang="en-US" sz="950" dirty="0">
                         <a:latin typeface="Calibri" charset="0"/>
@@ -4036,7 +4036,7 @@
                           <a:ea typeface="Calibri" pitchFamily="34" charset="-122"/>
                           <a:cs typeface="Calibri" pitchFamily="34" charset="-120"/>
                         </a:rPr>
-                        <a:t>1 329,0</a:t>
+                        <a:t>1 777,1</a:t>
                       </a:r>
                       <a:endParaRPr lang="en-US" sz="950" dirty="0">
                         <a:latin typeface="Calibri" charset="0"/>
@@ -4169,7 +4169,7 @@
                           <a:ea typeface="Calibri" pitchFamily="34" charset="-122"/>
                           <a:cs typeface="Calibri" pitchFamily="34" charset="-120"/>
                         </a:rPr>
-                        <a:t>794,2</a:t>
+                        <a:t>969,5</a:t>
                       </a:r>
                       <a:endParaRPr lang="en-US" sz="950" dirty="0">
                         <a:latin typeface="Calibri" charset="0"/>
@@ -5419,596 +5419,6 @@
                       <a:r>
                         <a:rPr lang="en-US" sz="950" b="1" dirty="0">
                           <a:solidFill>
-                            <a:srgbClr val="1F2933"/>
-                          </a:solidFill>
-                          <a:latin typeface="Calibri" pitchFamily="34" charset="0"/>
-                          <a:ea typeface="Calibri" pitchFamily="34" charset="-122"/>
-                          <a:cs typeface="Calibri" pitchFamily="34" charset="-120"/>
-                        </a:rPr>
-                        <a:t>Dette FIRST (service de la dette)</a:t>
-                      </a:r>
-                      <a:endParaRPr lang="en-US" sz="950" dirty="0">
-                        <a:latin typeface="Calibri" charset="0"/>
-                        <a:ea typeface="Calibri" charset="0"/>
-                        <a:cs typeface="Calibri" charset="0"/>
-                      </a:endParaRPr>
-                    </a:p>
-                  </a:txBody>
-                  <a:tcPr marL="64008" marR="64008" marT="0" marB="0" anchor="ctr">
-                    <a:lnL w="6350" cap="flat" cmpd="sng" algn="ctr">
-                      <a:solidFill>
-                        <a:srgbClr val="D5DBE3"/>
-                      </a:solidFill>
-                      <a:prstDash val="solid"/>
-                      <a:round/>
-                      <a:headEnd type="none" w="med" len="med"/>
-                      <a:tailEnd type="none" w="med" len="med"/>
-                    </a:lnL>
-                    <a:lnR w="6350" cap="flat" cmpd="sng" algn="ctr">
-                      <a:solidFill>
-                        <a:srgbClr val="D5DBE3"/>
-                      </a:solidFill>
-                      <a:prstDash val="solid"/>
-                      <a:round/>
-                      <a:headEnd type="none" w="med" len="med"/>
-                      <a:tailEnd type="none" w="med" len="med"/>
-                    </a:lnR>
-                    <a:lnT w="6350" cap="flat" cmpd="sng" algn="ctr">
-                      <a:solidFill>
-                        <a:srgbClr val="D5DBE3"/>
-                      </a:solidFill>
-                      <a:prstDash val="solid"/>
-                      <a:round/>
-                      <a:headEnd type="none" w="med" len="med"/>
-                      <a:tailEnd type="none" w="med" len="med"/>
-                    </a:lnT>
-                    <a:lnB w="6350" cap="flat" cmpd="sng" algn="ctr">
-                      <a:solidFill>
-                        <a:srgbClr val="D5DBE3"/>
-                      </a:solidFill>
-                      <a:prstDash val="solid"/>
-                      <a:round/>
-                      <a:headEnd type="none" w="med" len="med"/>
-                      <a:tailEnd type="none" w="med" len="med"/>
-                    </a:lnB>
-                  </a:tcPr>
-                </a:tc>
-                <a:tc>
-                  <a:txBody>
-                    <a:bodyPr/>
-                    <a:lstStyle/>
-                    <a:p>
-                      <a:pPr algn="r" indent="0" marL="0">
-                        <a:buNone/>
-                      </a:pPr>
-                      <a:r>
-                        <a:rPr lang="en-US" sz="950" dirty="0">
-                          <a:solidFill>
-                            <a:srgbClr val="1F2933"/>
-                          </a:solidFill>
-                          <a:latin typeface="Calibri" pitchFamily="34" charset="0"/>
-                          <a:ea typeface="Calibri" pitchFamily="34" charset="-122"/>
-                          <a:cs typeface="Calibri" pitchFamily="34" charset="-120"/>
-                        </a:rPr>
-                        <a:t>343,9</a:t>
-                      </a:r>
-                      <a:endParaRPr lang="en-US" sz="950" dirty="0">
-                        <a:latin typeface="Calibri" charset="0"/>
-                        <a:ea typeface="Calibri" charset="0"/>
-                        <a:cs typeface="Calibri" charset="0"/>
-                      </a:endParaRPr>
-                    </a:p>
-                  </a:txBody>
-                  <a:tcPr marL="64008" marR="64008" marT="0" marB="0" anchor="ctr">
-                    <a:lnL w="6350" cap="flat" cmpd="sng" algn="ctr">
-                      <a:solidFill>
-                        <a:srgbClr val="D5DBE3"/>
-                      </a:solidFill>
-                      <a:prstDash val="solid"/>
-                      <a:round/>
-                      <a:headEnd type="none" w="med" len="med"/>
-                      <a:tailEnd type="none" w="med" len="med"/>
-                    </a:lnL>
-                    <a:lnR w="6350" cap="flat" cmpd="sng" algn="ctr">
-                      <a:solidFill>
-                        <a:srgbClr val="D5DBE3"/>
-                      </a:solidFill>
-                      <a:prstDash val="solid"/>
-                      <a:round/>
-                      <a:headEnd type="none" w="med" len="med"/>
-                      <a:tailEnd type="none" w="med" len="med"/>
-                    </a:lnR>
-                    <a:lnT w="6350" cap="flat" cmpd="sng" algn="ctr">
-                      <a:solidFill>
-                        <a:srgbClr val="D5DBE3"/>
-                      </a:solidFill>
-                      <a:prstDash val="solid"/>
-                      <a:round/>
-                      <a:headEnd type="none" w="med" len="med"/>
-                      <a:tailEnd type="none" w="med" len="med"/>
-                    </a:lnT>
-                    <a:lnB w="6350" cap="flat" cmpd="sng" algn="ctr">
-                      <a:solidFill>
-                        <a:srgbClr val="D5DBE3"/>
-                      </a:solidFill>
-                      <a:prstDash val="solid"/>
-                      <a:round/>
-                      <a:headEnd type="none" w="med" len="med"/>
-                      <a:tailEnd type="none" w="med" len="med"/>
-                    </a:lnB>
-                  </a:tcPr>
-                </a:tc>
-                <a:tc>
-                  <a:txBody>
-                    <a:bodyPr/>
-                    <a:lstStyle/>
-                    <a:p>
-                      <a:pPr algn="r" indent="0" marL="0">
-                        <a:buNone/>
-                      </a:pPr>
-                      <a:r>
-                        <a:rPr lang="en-US" sz="950" dirty="0">
-                          <a:solidFill>
-                            <a:srgbClr val="1F2933"/>
-                          </a:solidFill>
-                          <a:latin typeface="Calibri" pitchFamily="34" charset="0"/>
-                          <a:ea typeface="Calibri" pitchFamily="34" charset="-122"/>
-                          <a:cs typeface="Calibri" pitchFamily="34" charset="-120"/>
-                        </a:rPr>
-                        <a:t>–</a:t>
-                      </a:r>
-                      <a:endParaRPr lang="en-US" sz="950" dirty="0">
-                        <a:latin typeface="Calibri" charset="0"/>
-                        <a:ea typeface="Calibri" charset="0"/>
-                        <a:cs typeface="Calibri" charset="0"/>
-                      </a:endParaRPr>
-                    </a:p>
-                  </a:txBody>
-                  <a:tcPr marL="64008" marR="64008" marT="0" marB="0" anchor="ctr">
-                    <a:lnL w="6350" cap="flat" cmpd="sng" algn="ctr">
-                      <a:solidFill>
-                        <a:srgbClr val="D5DBE3"/>
-                      </a:solidFill>
-                      <a:prstDash val="solid"/>
-                      <a:round/>
-                      <a:headEnd type="none" w="med" len="med"/>
-                      <a:tailEnd type="none" w="med" len="med"/>
-                    </a:lnL>
-                    <a:lnR w="6350" cap="flat" cmpd="sng" algn="ctr">
-                      <a:solidFill>
-                        <a:srgbClr val="D5DBE3"/>
-                      </a:solidFill>
-                      <a:prstDash val="solid"/>
-                      <a:round/>
-                      <a:headEnd type="none" w="med" len="med"/>
-                      <a:tailEnd type="none" w="med" len="med"/>
-                    </a:lnR>
-                    <a:lnT w="6350" cap="flat" cmpd="sng" algn="ctr">
-                      <a:solidFill>
-                        <a:srgbClr val="D5DBE3"/>
-                      </a:solidFill>
-                      <a:prstDash val="solid"/>
-                      <a:round/>
-                      <a:headEnd type="none" w="med" len="med"/>
-                      <a:tailEnd type="none" w="med" len="med"/>
-                    </a:lnT>
-                    <a:lnB w="6350" cap="flat" cmpd="sng" algn="ctr">
-                      <a:solidFill>
-                        <a:srgbClr val="D5DBE3"/>
-                      </a:solidFill>
-                      <a:prstDash val="solid"/>
-                      <a:round/>
-                      <a:headEnd type="none" w="med" len="med"/>
-                      <a:tailEnd type="none" w="med" len="med"/>
-                    </a:lnB>
-                  </a:tcPr>
-                </a:tc>
-                <a:tc>
-                  <a:txBody>
-                    <a:bodyPr/>
-                    <a:lstStyle/>
-                    <a:p>
-                      <a:pPr algn="r" indent="0" marL="0">
-                        <a:buNone/>
-                      </a:pPr>
-                      <a:r>
-                        <a:rPr lang="en-US" sz="950" dirty="0">
-                          <a:solidFill>
-                            <a:srgbClr val="1F2933"/>
-                          </a:solidFill>
-                          <a:latin typeface="Calibri" pitchFamily="34" charset="0"/>
-                          <a:ea typeface="Calibri" pitchFamily="34" charset="-122"/>
-                          <a:cs typeface="Calibri" pitchFamily="34" charset="-120"/>
-                        </a:rPr>
-                        <a:t>104,2</a:t>
-                      </a:r>
-                      <a:endParaRPr lang="en-US" sz="950" dirty="0">
-                        <a:latin typeface="Calibri" charset="0"/>
-                        <a:ea typeface="Calibri" charset="0"/>
-                        <a:cs typeface="Calibri" charset="0"/>
-                      </a:endParaRPr>
-                    </a:p>
-                  </a:txBody>
-                  <a:tcPr marL="64008" marR="64008" marT="0" marB="0" anchor="ctr">
-                    <a:lnL w="6350" cap="flat" cmpd="sng" algn="ctr">
-                      <a:solidFill>
-                        <a:srgbClr val="D5DBE3"/>
-                      </a:solidFill>
-                      <a:prstDash val="solid"/>
-                      <a:round/>
-                      <a:headEnd type="none" w="med" len="med"/>
-                      <a:tailEnd type="none" w="med" len="med"/>
-                    </a:lnL>
-                    <a:lnR w="6350" cap="flat" cmpd="sng" algn="ctr">
-                      <a:solidFill>
-                        <a:srgbClr val="D5DBE3"/>
-                      </a:solidFill>
-                      <a:prstDash val="solid"/>
-                      <a:round/>
-                      <a:headEnd type="none" w="med" len="med"/>
-                      <a:tailEnd type="none" w="med" len="med"/>
-                    </a:lnR>
-                    <a:lnT w="6350" cap="flat" cmpd="sng" algn="ctr">
-                      <a:solidFill>
-                        <a:srgbClr val="D5DBE3"/>
-                      </a:solidFill>
-                      <a:prstDash val="solid"/>
-                      <a:round/>
-                      <a:headEnd type="none" w="med" len="med"/>
-                      <a:tailEnd type="none" w="med" len="med"/>
-                    </a:lnT>
-                    <a:lnB w="6350" cap="flat" cmpd="sng" algn="ctr">
-                      <a:solidFill>
-                        <a:srgbClr val="D5DBE3"/>
-                      </a:solidFill>
-                      <a:prstDash val="solid"/>
-                      <a:round/>
-                      <a:headEnd type="none" w="med" len="med"/>
-                      <a:tailEnd type="none" w="med" len="med"/>
-                    </a:lnB>
-                  </a:tcPr>
-                </a:tc>
-                <a:tc>
-                  <a:txBody>
-                    <a:bodyPr/>
-                    <a:lstStyle/>
-                    <a:p>
-                      <a:pPr algn="r" indent="0" marL="0">
-                        <a:buNone/>
-                      </a:pPr>
-                      <a:r>
-                        <a:rPr lang="en-US" sz="950" dirty="0">
-                          <a:solidFill>
-                            <a:srgbClr val="1F2933"/>
-                          </a:solidFill>
-                          <a:latin typeface="Calibri" pitchFamily="34" charset="0"/>
-                          <a:ea typeface="Calibri" pitchFamily="34" charset="-122"/>
-                          <a:cs typeface="Calibri" pitchFamily="34" charset="-120"/>
-                        </a:rPr>
-                        <a:t>–</a:t>
-                      </a:r>
-                      <a:endParaRPr lang="en-US" sz="950" dirty="0">
-                        <a:latin typeface="Calibri" charset="0"/>
-                        <a:ea typeface="Calibri" charset="0"/>
-                        <a:cs typeface="Calibri" charset="0"/>
-                      </a:endParaRPr>
-                    </a:p>
-                  </a:txBody>
-                  <a:tcPr marL="64008" marR="64008" marT="0" marB="0" anchor="ctr">
-                    <a:lnL w="6350" cap="flat" cmpd="sng" algn="ctr">
-                      <a:solidFill>
-                        <a:srgbClr val="D5DBE3"/>
-                      </a:solidFill>
-                      <a:prstDash val="solid"/>
-                      <a:round/>
-                      <a:headEnd type="none" w="med" len="med"/>
-                      <a:tailEnd type="none" w="med" len="med"/>
-                    </a:lnL>
-                    <a:lnR w="6350" cap="flat" cmpd="sng" algn="ctr">
-                      <a:solidFill>
-                        <a:srgbClr val="D5DBE3"/>
-                      </a:solidFill>
-                      <a:prstDash val="solid"/>
-                      <a:round/>
-                      <a:headEnd type="none" w="med" len="med"/>
-                      <a:tailEnd type="none" w="med" len="med"/>
-                    </a:lnR>
-                    <a:lnT w="6350" cap="flat" cmpd="sng" algn="ctr">
-                      <a:solidFill>
-                        <a:srgbClr val="D5DBE3"/>
-                      </a:solidFill>
-                      <a:prstDash val="solid"/>
-                      <a:round/>
-                      <a:headEnd type="none" w="med" len="med"/>
-                      <a:tailEnd type="none" w="med" len="med"/>
-                    </a:lnT>
-                    <a:lnB w="6350" cap="flat" cmpd="sng" algn="ctr">
-                      <a:solidFill>
-                        <a:srgbClr val="D5DBE3"/>
-                      </a:solidFill>
-                      <a:prstDash val="solid"/>
-                      <a:round/>
-                      <a:headEnd type="none" w="med" len="med"/>
-                      <a:tailEnd type="none" w="med" len="med"/>
-                    </a:lnB>
-                  </a:tcPr>
-                </a:tc>
-                <a:tc>
-                  <a:txBody>
-                    <a:bodyPr/>
-                    <a:lstStyle/>
-                    <a:p>
-                      <a:pPr algn="r" indent="0" marL="0">
-                        <a:buNone/>
-                      </a:pPr>
-                      <a:r>
-                        <a:rPr lang="en-US" sz="950" dirty="0">
-                          <a:solidFill>
-                            <a:srgbClr val="1F2933"/>
-                          </a:solidFill>
-                          <a:latin typeface="Calibri" pitchFamily="34" charset="0"/>
-                          <a:ea typeface="Calibri" pitchFamily="34" charset="-122"/>
-                          <a:cs typeface="Calibri" pitchFamily="34" charset="-120"/>
-                        </a:rPr>
-                        <a:t>–</a:t>
-                      </a:r>
-                      <a:endParaRPr lang="en-US" sz="950" dirty="0">
-                        <a:latin typeface="Calibri" charset="0"/>
-                        <a:ea typeface="Calibri" charset="0"/>
-                        <a:cs typeface="Calibri" charset="0"/>
-                      </a:endParaRPr>
-                    </a:p>
-                  </a:txBody>
-                  <a:tcPr marL="64008" marR="64008" marT="0" marB="0" anchor="ctr">
-                    <a:lnL w="6350" cap="flat" cmpd="sng" algn="ctr">
-                      <a:solidFill>
-                        <a:srgbClr val="D5DBE3"/>
-                      </a:solidFill>
-                      <a:prstDash val="solid"/>
-                      <a:round/>
-                      <a:headEnd type="none" w="med" len="med"/>
-                      <a:tailEnd type="none" w="med" len="med"/>
-                    </a:lnL>
-                    <a:lnR w="6350" cap="flat" cmpd="sng" algn="ctr">
-                      <a:solidFill>
-                        <a:srgbClr val="D5DBE3"/>
-                      </a:solidFill>
-                      <a:prstDash val="solid"/>
-                      <a:round/>
-                      <a:headEnd type="none" w="med" len="med"/>
-                      <a:tailEnd type="none" w="med" len="med"/>
-                    </a:lnR>
-                    <a:lnT w="6350" cap="flat" cmpd="sng" algn="ctr">
-                      <a:solidFill>
-                        <a:srgbClr val="D5DBE3"/>
-                      </a:solidFill>
-                      <a:prstDash val="solid"/>
-                      <a:round/>
-                      <a:headEnd type="none" w="med" len="med"/>
-                      <a:tailEnd type="none" w="med" len="med"/>
-                    </a:lnT>
-                    <a:lnB w="6350" cap="flat" cmpd="sng" algn="ctr">
-                      <a:solidFill>
-                        <a:srgbClr val="D5DBE3"/>
-                      </a:solidFill>
-                      <a:prstDash val="solid"/>
-                      <a:round/>
-                      <a:headEnd type="none" w="med" len="med"/>
-                      <a:tailEnd type="none" w="med" len="med"/>
-                    </a:lnB>
-                  </a:tcPr>
-                </a:tc>
-                <a:tc>
-                  <a:txBody>
-                    <a:bodyPr/>
-                    <a:lstStyle/>
-                    <a:p>
-                      <a:pPr algn="r" indent="0" marL="0">
-                        <a:buNone/>
-                      </a:pPr>
-                      <a:r>
-                        <a:rPr lang="en-US" sz="950" b="1" dirty="0">
-                          <a:solidFill>
-                            <a:srgbClr val="1F2933"/>
-                          </a:solidFill>
-                          <a:latin typeface="Calibri" pitchFamily="34" charset="0"/>
-                          <a:ea typeface="Calibri" pitchFamily="34" charset="-122"/>
-                          <a:cs typeface="Calibri" pitchFamily="34" charset="-120"/>
-                        </a:rPr>
-                        <a:t>448,1</a:t>
-                      </a:r>
-                      <a:endParaRPr lang="en-US" sz="950" dirty="0">
-                        <a:latin typeface="Calibri" charset="0"/>
-                        <a:ea typeface="Calibri" charset="0"/>
-                        <a:cs typeface="Calibri" charset="0"/>
-                      </a:endParaRPr>
-                    </a:p>
-                  </a:txBody>
-                  <a:tcPr marL="64008" marR="64008" marT="0" marB="0" anchor="ctr">
-                    <a:lnL w="6350" cap="flat" cmpd="sng" algn="ctr">
-                      <a:solidFill>
-                        <a:srgbClr val="D5DBE3"/>
-                      </a:solidFill>
-                      <a:prstDash val="solid"/>
-                      <a:round/>
-                      <a:headEnd type="none" w="med" len="med"/>
-                      <a:tailEnd type="none" w="med" len="med"/>
-                    </a:lnL>
-                    <a:lnR w="6350" cap="flat" cmpd="sng" algn="ctr">
-                      <a:solidFill>
-                        <a:srgbClr val="D5DBE3"/>
-                      </a:solidFill>
-                      <a:prstDash val="solid"/>
-                      <a:round/>
-                      <a:headEnd type="none" w="med" len="med"/>
-                      <a:tailEnd type="none" w="med" len="med"/>
-                    </a:lnR>
-                    <a:lnT w="6350" cap="flat" cmpd="sng" algn="ctr">
-                      <a:solidFill>
-                        <a:srgbClr val="D5DBE3"/>
-                      </a:solidFill>
-                      <a:prstDash val="solid"/>
-                      <a:round/>
-                      <a:headEnd type="none" w="med" len="med"/>
-                      <a:tailEnd type="none" w="med" len="med"/>
-                    </a:lnT>
-                    <a:lnB w="6350" cap="flat" cmpd="sng" algn="ctr">
-                      <a:solidFill>
-                        <a:srgbClr val="D5DBE3"/>
-                      </a:solidFill>
-                      <a:prstDash val="solid"/>
-                      <a:round/>
-                      <a:headEnd type="none" w="med" len="med"/>
-                      <a:tailEnd type="none" w="med" len="med"/>
-                    </a:lnB>
-                    <a:solidFill>
-                      <a:srgbClr val="EEF2F6"/>
-                    </a:solidFill>
-                  </a:tcPr>
-                </a:tc>
-                <a:tc>
-                  <a:txBody>
-                    <a:bodyPr/>
-                    <a:lstStyle/>
-                    <a:p>
-                      <a:pPr algn="r" indent="0" marL="0">
-                        <a:buNone/>
-                      </a:pPr>
-                      <a:r>
-                        <a:rPr lang="en-US" sz="950" dirty="0">
-                          <a:solidFill>
-                            <a:srgbClr val="1F2933"/>
-                          </a:solidFill>
-                          <a:latin typeface="Calibri" pitchFamily="34" charset="0"/>
-                          <a:ea typeface="Calibri" pitchFamily="34" charset="-122"/>
-                          <a:cs typeface="Calibri" pitchFamily="34" charset="-120"/>
-                        </a:rPr>
-                        <a:t>350,7</a:t>
-                      </a:r>
-                      <a:endParaRPr lang="en-US" sz="950" dirty="0">
-                        <a:latin typeface="Calibri" charset="0"/>
-                        <a:ea typeface="Calibri" charset="0"/>
-                        <a:cs typeface="Calibri" charset="0"/>
-                      </a:endParaRPr>
-                    </a:p>
-                  </a:txBody>
-                  <a:tcPr marL="64008" marR="64008" marT="0" marB="0" anchor="ctr">
-                    <a:lnL w="6350" cap="flat" cmpd="sng" algn="ctr">
-                      <a:solidFill>
-                        <a:srgbClr val="D5DBE3"/>
-                      </a:solidFill>
-                      <a:prstDash val="solid"/>
-                      <a:round/>
-                      <a:headEnd type="none" w="med" len="med"/>
-                      <a:tailEnd type="none" w="med" len="med"/>
-                    </a:lnL>
-                    <a:lnR w="6350" cap="flat" cmpd="sng" algn="ctr">
-                      <a:solidFill>
-                        <a:srgbClr val="D5DBE3"/>
-                      </a:solidFill>
-                      <a:prstDash val="solid"/>
-                      <a:round/>
-                      <a:headEnd type="none" w="med" len="med"/>
-                      <a:tailEnd type="none" w="med" len="med"/>
-                    </a:lnR>
-                    <a:lnT w="6350" cap="flat" cmpd="sng" algn="ctr">
-                      <a:solidFill>
-                        <a:srgbClr val="D5DBE3"/>
-                      </a:solidFill>
-                      <a:prstDash val="solid"/>
-                      <a:round/>
-                      <a:headEnd type="none" w="med" len="med"/>
-                      <a:tailEnd type="none" w="med" len="med"/>
-                    </a:lnT>
-                    <a:lnB w="6350" cap="flat" cmpd="sng" algn="ctr">
-                      <a:solidFill>
-                        <a:srgbClr val="D5DBE3"/>
-                      </a:solidFill>
-                      <a:prstDash val="solid"/>
-                      <a:round/>
-                      <a:headEnd type="none" w="med" len="med"/>
-                      <a:tailEnd type="none" w="med" len="med"/>
-                    </a:lnB>
-                  </a:tcPr>
-                </a:tc>
-                <a:tc>
-                  <a:txBody>
-                    <a:bodyPr/>
-                    <a:lstStyle/>
-                    <a:p>
-                      <a:pPr algn="r" indent="0" marL="0">
-                        <a:buNone/>
-                      </a:pPr>
-                      <a:r>
-                        <a:rPr lang="en-US" sz="950" dirty="0">
-                          <a:solidFill>
-                            <a:srgbClr val="1F2933"/>
-                          </a:solidFill>
-                          <a:latin typeface="Calibri" pitchFamily="34" charset="0"/>
-                          <a:ea typeface="Calibri" pitchFamily="34" charset="-122"/>
-                          <a:cs typeface="Calibri" pitchFamily="34" charset="-120"/>
-                        </a:rPr>
-                        <a:t>–</a:t>
-                      </a:r>
-                      <a:endParaRPr lang="en-US" sz="950" dirty="0">
-                        <a:latin typeface="Calibri" charset="0"/>
-                        <a:ea typeface="Calibri" charset="0"/>
-                        <a:cs typeface="Calibri" charset="0"/>
-                      </a:endParaRPr>
-                    </a:p>
-                  </a:txBody>
-                  <a:tcPr marL="64008" marR="64008" marT="0" marB="0" anchor="ctr">
-                    <a:lnL w="6350" cap="flat" cmpd="sng" algn="ctr">
-                      <a:solidFill>
-                        <a:srgbClr val="D5DBE3"/>
-                      </a:solidFill>
-                      <a:prstDash val="solid"/>
-                      <a:round/>
-                      <a:headEnd type="none" w="med" len="med"/>
-                      <a:tailEnd type="none" w="med" len="med"/>
-                    </a:lnL>
-                    <a:lnR w="6350" cap="flat" cmpd="sng" algn="ctr">
-                      <a:solidFill>
-                        <a:srgbClr val="D5DBE3"/>
-                      </a:solidFill>
-                      <a:prstDash val="solid"/>
-                      <a:round/>
-                      <a:headEnd type="none" w="med" len="med"/>
-                      <a:tailEnd type="none" w="med" len="med"/>
-                    </a:lnR>
-                    <a:lnT w="6350" cap="flat" cmpd="sng" algn="ctr">
-                      <a:solidFill>
-                        <a:srgbClr val="D5DBE3"/>
-                      </a:solidFill>
-                      <a:prstDash val="solid"/>
-                      <a:round/>
-                      <a:headEnd type="none" w="med" len="med"/>
-                      <a:tailEnd type="none" w="med" len="med"/>
-                    </a:lnT>
-                    <a:lnB w="6350" cap="flat" cmpd="sng" algn="ctr">
-                      <a:solidFill>
-                        <a:srgbClr val="D5DBE3"/>
-                      </a:solidFill>
-                      <a:prstDash val="solid"/>
-                      <a:round/>
-                      <a:headEnd type="none" w="med" len="med"/>
-                      <a:tailEnd type="none" w="med" len="med"/>
-                    </a:lnB>
-                  </a:tcPr>
-                </a:tc>
-              </a:tr>
-              <a:tr h="274320">
-                <a:tc>
-                  <a:txBody>
-                    <a:bodyPr/>
-                    <a:lstStyle/>
-                    <a:p>
-                      <a:pPr algn="l" indent="0" marL="0">
-                        <a:buNone/>
-                      </a:pPr>
-                      <a:r>
-                        <a:rPr lang="en-US" sz="950" b="1" dirty="0">
-                          <a:solidFill>
                             <a:srgbClr val="FFFFFF"/>
                           </a:solidFill>
                           <a:latin typeface="Calibri" pitchFamily="34" charset="0"/>
@@ -6491,7 +5901,7 @@
                           <a:ea typeface="Calibri" pitchFamily="34" charset="-122"/>
                           <a:cs typeface="Calibri" pitchFamily="34" charset="-120"/>
                         </a:rPr>
-                        <a:t>5 253,0</a:t>
+                        <a:t>4 902,2</a:t>
                       </a:r>
                       <a:endParaRPr lang="en-US" sz="950" dirty="0">
                         <a:latin typeface="Calibri" charset="0"/>
@@ -6559,7 +5969,7 @@
                           <a:ea typeface="Calibri" pitchFamily="34" charset="-122"/>
                           <a:cs typeface="Calibri" pitchFamily="34" charset="-120"/>
                         </a:rPr>
-                        <a:t>2 601,5</a:t>
+                        <a:t>2 776,8</a:t>
                       </a:r>
                       <a:endParaRPr lang="en-US" sz="950" dirty="0">
                         <a:latin typeface="Calibri" charset="0"/>
@@ -7301,7 +6711,7 @@
                 <a:ea typeface="Calibri" pitchFamily="34" charset="-122"/>
                 <a:cs typeface="Calibri" pitchFamily="34" charset="-120"/>
               </a:rPr>
-              <a:t>déficits TERASSON 206,4 M, FINAFRICA 198,7 M, SCO AO 176,0 M, RIVIERA 87,3 M, IMMONEUF 66,0 M, RHD CI 50,0 M ; excédents FIRST 143,3 M, PICI 100,0 M, INFI SOFT 2,8 M.</a:t>
+              <a:t>déficits TERASSON 206,4 M, FINAFRICA 198,7 M, SCO AO 176,0 M, FIRST 175,3 M, RIVIERA 87,3 M, IMMONEUF 66,0 M ; excédents PICI 100,0 M, INFI SOFT 2,8 M.</a:t>
             </a:r>
             <a:endParaRPr lang="en-US" sz="1150" dirty="0"/>
           </a:p>
@@ -7340,7 +6750,7 @@
                 <a:ea typeface="Calibri" pitchFamily="34" charset="-122"/>
                 <a:cs typeface="Calibri" pitchFamily="34" charset="-120"/>
               </a:rPr>
-              <a:t>Non mobilisables : STANBIC-FIRST_LL 42,5, STANBIC-FIRST_Disbursement 26,3, BNI-RIVIERA(DSRA) / Placement 776,1, BACI-AGORA/COMPTE BLOQU. TVA 76,3. À arbitrer : BNI-RIVIERA(Courant) 1 772,0. Projets en € HT à 655,957.</a:t>
+              <a:t>Hors position (indisponibles) : 1 195,6 M. Non mobilisables : BACI-AGORA/COMPTE BLOQU. TVA 76,3. À arbitrer : BNI-RIVIERA(Courant) 1 772,0. Projets en € HT à 655,957.</a:t>
             </a:r>
             <a:endParaRPr lang="en-US" sz="950" dirty="0"/>
           </a:p>
@@ -8372,401 +7782,6 @@
                           <a:ea typeface="Calibri" pitchFamily="34" charset="-122"/>
                           <a:cs typeface="Calibri" pitchFamily="34" charset="-120"/>
                         </a:rPr>
-                        <a:t>FIRST</a:t>
-                      </a:r>
-                      <a:endParaRPr lang="en-US" sz="950" dirty="0">
-                        <a:latin typeface="Calibri" charset="0"/>
-                        <a:ea typeface="Calibri" charset="0"/>
-                        <a:cs typeface="Calibri" charset="0"/>
-                      </a:endParaRPr>
-                    </a:p>
-                  </a:txBody>
-                  <a:tcPr marL="64008" marR="64008" marT="0" marB="0" anchor="ctr">
-                    <a:lnL w="6350" cap="flat" cmpd="sng" algn="ctr">
-                      <a:solidFill>
-                        <a:srgbClr val="D5DBE3"/>
-                      </a:solidFill>
-                      <a:prstDash val="solid"/>
-                      <a:round/>
-                      <a:headEnd type="none" w="med" len="med"/>
-                      <a:tailEnd type="none" w="med" len="med"/>
-                    </a:lnL>
-                    <a:lnR w="6350" cap="flat" cmpd="sng" algn="ctr">
-                      <a:solidFill>
-                        <a:srgbClr val="D5DBE3"/>
-                      </a:solidFill>
-                      <a:prstDash val="solid"/>
-                      <a:round/>
-                      <a:headEnd type="none" w="med" len="med"/>
-                      <a:tailEnd type="none" w="med" len="med"/>
-                    </a:lnR>
-                    <a:lnT w="6350" cap="flat" cmpd="sng" algn="ctr">
-                      <a:solidFill>
-                        <a:srgbClr val="D5DBE3"/>
-                      </a:solidFill>
-                      <a:prstDash val="solid"/>
-                      <a:round/>
-                      <a:headEnd type="none" w="med" len="med"/>
-                      <a:tailEnd type="none" w="med" len="med"/>
-                    </a:lnT>
-                    <a:lnB w="6350" cap="flat" cmpd="sng" algn="ctr">
-                      <a:solidFill>
-                        <a:srgbClr val="D5DBE3"/>
-                      </a:solidFill>
-                      <a:prstDash val="solid"/>
-                      <a:round/>
-                      <a:headEnd type="none" w="med" len="med"/>
-                      <a:tailEnd type="none" w="med" len="med"/>
-                    </a:lnB>
-                    <a:solidFill>
-                      <a:srgbClr val="E6F0EA"/>
-                    </a:solidFill>
-                  </a:tcPr>
-                </a:tc>
-                <a:tc>
-                  <a:txBody>
-                    <a:bodyPr/>
-                    <a:lstStyle/>
-                    <a:p>
-                      <a:pPr algn="l" indent="0" marL="0">
-                        <a:buNone/>
-                      </a:pPr>
-                      <a:r>
-                        <a:rPr lang="en-US" sz="950" dirty="0">
-                          <a:solidFill>
-                            <a:srgbClr val="1F2933"/>
-                          </a:solidFill>
-                          <a:latin typeface="Calibri" pitchFamily="34" charset="0"/>
-                          <a:ea typeface="Calibri" pitchFamily="34" charset="-122"/>
-                          <a:cs typeface="Calibri" pitchFamily="34" charset="-120"/>
-                        </a:rPr>
-                        <a:t>Fournisseurs 91,3 · impôts 1,6</a:t>
-                      </a:r>
-                      <a:endParaRPr lang="en-US" sz="950" dirty="0">
-                        <a:latin typeface="Calibri" charset="0"/>
-                        <a:ea typeface="Calibri" charset="0"/>
-                        <a:cs typeface="Calibri" charset="0"/>
-                      </a:endParaRPr>
-                    </a:p>
-                  </a:txBody>
-                  <a:tcPr marL="64008" marR="64008" marT="0" marB="0" anchor="ctr">
-                    <a:lnL w="6350" cap="flat" cmpd="sng" algn="ctr">
-                      <a:solidFill>
-                        <a:srgbClr val="D5DBE3"/>
-                      </a:solidFill>
-                      <a:prstDash val="solid"/>
-                      <a:round/>
-                      <a:headEnd type="none" w="med" len="med"/>
-                      <a:tailEnd type="none" w="med" len="med"/>
-                    </a:lnL>
-                    <a:lnR w="6350" cap="flat" cmpd="sng" algn="ctr">
-                      <a:solidFill>
-                        <a:srgbClr val="D5DBE3"/>
-                      </a:solidFill>
-                      <a:prstDash val="solid"/>
-                      <a:round/>
-                      <a:headEnd type="none" w="med" len="med"/>
-                      <a:tailEnd type="none" w="med" len="med"/>
-                    </a:lnR>
-                    <a:lnT w="6350" cap="flat" cmpd="sng" algn="ctr">
-                      <a:solidFill>
-                        <a:srgbClr val="D5DBE3"/>
-                      </a:solidFill>
-                      <a:prstDash val="solid"/>
-                      <a:round/>
-                      <a:headEnd type="none" w="med" len="med"/>
-                      <a:tailEnd type="none" w="med" len="med"/>
-                    </a:lnT>
-                    <a:lnB w="6350" cap="flat" cmpd="sng" algn="ctr">
-                      <a:solidFill>
-                        <a:srgbClr val="D5DBE3"/>
-                      </a:solidFill>
-                      <a:prstDash val="solid"/>
-                      <a:round/>
-                      <a:headEnd type="none" w="med" len="med"/>
-                      <a:tailEnd type="none" w="med" len="med"/>
-                    </a:lnB>
-                  </a:tcPr>
-                </a:tc>
-                <a:tc>
-                  <a:txBody>
-                    <a:bodyPr/>
-                    <a:lstStyle/>
-                    <a:p>
-                      <a:pPr algn="r" indent="0" marL="0">
-                        <a:buNone/>
-                      </a:pPr>
-                      <a:r>
-                        <a:rPr lang="en-US" sz="950" dirty="0">
-                          <a:solidFill>
-                            <a:srgbClr val="1F2933"/>
-                          </a:solidFill>
-                          <a:latin typeface="Calibri" pitchFamily="34" charset="0"/>
-                          <a:ea typeface="Calibri" pitchFamily="34" charset="-122"/>
-                          <a:cs typeface="Calibri" pitchFamily="34" charset="-120"/>
-                        </a:rPr>
-                        <a:t>92,8</a:t>
-                      </a:r>
-                      <a:endParaRPr lang="en-US" sz="950" dirty="0">
-                        <a:latin typeface="Calibri" charset="0"/>
-                        <a:ea typeface="Calibri" charset="0"/>
-                        <a:cs typeface="Calibri" charset="0"/>
-                      </a:endParaRPr>
-                    </a:p>
-                  </a:txBody>
-                  <a:tcPr marL="64008" marR="64008" marT="0" marB="0" anchor="ctr">
-                    <a:lnL w="6350" cap="flat" cmpd="sng" algn="ctr">
-                      <a:solidFill>
-                        <a:srgbClr val="D5DBE3"/>
-                      </a:solidFill>
-                      <a:prstDash val="solid"/>
-                      <a:round/>
-                      <a:headEnd type="none" w="med" len="med"/>
-                      <a:tailEnd type="none" w="med" len="med"/>
-                    </a:lnL>
-                    <a:lnR w="6350" cap="flat" cmpd="sng" algn="ctr">
-                      <a:solidFill>
-                        <a:srgbClr val="D5DBE3"/>
-                      </a:solidFill>
-                      <a:prstDash val="solid"/>
-                      <a:round/>
-                      <a:headEnd type="none" w="med" len="med"/>
-                      <a:tailEnd type="none" w="med" len="med"/>
-                    </a:lnR>
-                    <a:lnT w="6350" cap="flat" cmpd="sng" algn="ctr">
-                      <a:solidFill>
-                        <a:srgbClr val="D5DBE3"/>
-                      </a:solidFill>
-                      <a:prstDash val="solid"/>
-                      <a:round/>
-                      <a:headEnd type="none" w="med" len="med"/>
-                      <a:tailEnd type="none" w="med" len="med"/>
-                    </a:lnT>
-                    <a:lnB w="6350" cap="flat" cmpd="sng" algn="ctr">
-                      <a:solidFill>
-                        <a:srgbClr val="D5DBE3"/>
-                      </a:solidFill>
-                      <a:prstDash val="solid"/>
-                      <a:round/>
-                      <a:headEnd type="none" w="med" len="med"/>
-                      <a:tailEnd type="none" w="med" len="med"/>
-                    </a:lnB>
-                  </a:tcPr>
-                </a:tc>
-                <a:tc>
-                  <a:txBody>
-                    <a:bodyPr/>
-                    <a:lstStyle/>
-                    <a:p>
-                      <a:pPr algn="l" indent="0" marL="0">
-                        <a:buNone/>
-                      </a:pPr>
-                      <a:r>
-                        <a:rPr lang="en-US" sz="950" dirty="0">
-                          <a:solidFill>
-                            <a:srgbClr val="1F2933"/>
-                          </a:solidFill>
-                          <a:latin typeface="Calibri" pitchFamily="34" charset="0"/>
-                          <a:ea typeface="Calibri" pitchFamily="34" charset="-122"/>
-                          <a:cs typeface="Calibri" pitchFamily="34" charset="-120"/>
-                        </a:rPr>
-                        <a:t>STANBIC-FIRST, puis SOCIETE GENERALE-FIRST</a:t>
-                      </a:r>
-                      <a:endParaRPr lang="en-US" sz="950" dirty="0">
-                        <a:latin typeface="Calibri" charset="0"/>
-                        <a:ea typeface="Calibri" charset="0"/>
-                        <a:cs typeface="Calibri" charset="0"/>
-                      </a:endParaRPr>
-                    </a:p>
-                  </a:txBody>
-                  <a:tcPr marL="64008" marR="64008" marT="0" marB="0" anchor="ctr">
-                    <a:lnL w="6350" cap="flat" cmpd="sng" algn="ctr">
-                      <a:solidFill>
-                        <a:srgbClr val="D5DBE3"/>
-                      </a:solidFill>
-                      <a:prstDash val="solid"/>
-                      <a:round/>
-                      <a:headEnd type="none" w="med" len="med"/>
-                      <a:tailEnd type="none" w="med" len="med"/>
-                    </a:lnL>
-                    <a:lnR w="6350" cap="flat" cmpd="sng" algn="ctr">
-                      <a:solidFill>
-                        <a:srgbClr val="D5DBE3"/>
-                      </a:solidFill>
-                      <a:prstDash val="solid"/>
-                      <a:round/>
-                      <a:headEnd type="none" w="med" len="med"/>
-                      <a:tailEnd type="none" w="med" len="med"/>
-                    </a:lnR>
-                    <a:lnT w="6350" cap="flat" cmpd="sng" algn="ctr">
-                      <a:solidFill>
-                        <a:srgbClr val="D5DBE3"/>
-                      </a:solidFill>
-                      <a:prstDash val="solid"/>
-                      <a:round/>
-                      <a:headEnd type="none" w="med" len="med"/>
-                      <a:tailEnd type="none" w="med" len="med"/>
-                    </a:lnT>
-                    <a:lnB w="6350" cap="flat" cmpd="sng" algn="ctr">
-                      <a:solidFill>
-                        <a:srgbClr val="D5DBE3"/>
-                      </a:solidFill>
-                      <a:prstDash val="solid"/>
-                      <a:round/>
-                      <a:headEnd type="none" w="med" len="med"/>
-                      <a:tailEnd type="none" w="med" len="med"/>
-                    </a:lnB>
-                  </a:tcPr>
-                </a:tc>
-                <a:tc>
-                  <a:txBody>
-                    <a:bodyPr/>
-                    <a:lstStyle/>
-                    <a:p>
-                      <a:pPr algn="r" indent="0" marL="0">
-                        <a:buNone/>
-                      </a:pPr>
-                      <a:r>
-                        <a:rPr lang="en-US" sz="950" dirty="0">
-                          <a:solidFill>
-                            <a:srgbClr val="1F2933"/>
-                          </a:solidFill>
-                          <a:latin typeface="Calibri" pitchFamily="34" charset="0"/>
-                          <a:ea typeface="Calibri" pitchFamily="34" charset="-122"/>
-                          <a:cs typeface="Calibri" pitchFamily="34" charset="-120"/>
-                        </a:rPr>
-                        <a:t>236,1</a:t>
-                      </a:r>
-                      <a:endParaRPr lang="en-US" sz="950" dirty="0">
-                        <a:latin typeface="Calibri" charset="0"/>
-                        <a:ea typeface="Calibri" charset="0"/>
-                        <a:cs typeface="Calibri" charset="0"/>
-                      </a:endParaRPr>
-                    </a:p>
-                  </a:txBody>
-                  <a:tcPr marL="64008" marR="64008" marT="0" marB="0" anchor="ctr">
-                    <a:lnL w="6350" cap="flat" cmpd="sng" algn="ctr">
-                      <a:solidFill>
-                        <a:srgbClr val="D5DBE3"/>
-                      </a:solidFill>
-                      <a:prstDash val="solid"/>
-                      <a:round/>
-                      <a:headEnd type="none" w="med" len="med"/>
-                      <a:tailEnd type="none" w="med" len="med"/>
-                    </a:lnL>
-                    <a:lnR w="6350" cap="flat" cmpd="sng" algn="ctr">
-                      <a:solidFill>
-                        <a:srgbClr val="D5DBE3"/>
-                      </a:solidFill>
-                      <a:prstDash val="solid"/>
-                      <a:round/>
-                      <a:headEnd type="none" w="med" len="med"/>
-                      <a:tailEnd type="none" w="med" len="med"/>
-                    </a:lnR>
-                    <a:lnT w="6350" cap="flat" cmpd="sng" algn="ctr">
-                      <a:solidFill>
-                        <a:srgbClr val="D5DBE3"/>
-                      </a:solidFill>
-                      <a:prstDash val="solid"/>
-                      <a:round/>
-                      <a:headEnd type="none" w="med" len="med"/>
-                      <a:tailEnd type="none" w="med" len="med"/>
-                    </a:lnT>
-                    <a:lnB w="6350" cap="flat" cmpd="sng" algn="ctr">
-                      <a:solidFill>
-                        <a:srgbClr val="D5DBE3"/>
-                      </a:solidFill>
-                      <a:prstDash val="solid"/>
-                      <a:round/>
-                      <a:headEnd type="none" w="med" len="med"/>
-                      <a:tailEnd type="none" w="med" len="med"/>
-                    </a:lnB>
-                  </a:tcPr>
-                </a:tc>
-                <a:tc>
-                  <a:txBody>
-                    <a:bodyPr/>
-                    <a:lstStyle/>
-                    <a:p>
-                      <a:pPr algn="r" indent="0" marL="0">
-                        <a:buNone/>
-                      </a:pPr>
-                      <a:r>
-                        <a:rPr lang="en-US" sz="950" b="1" dirty="0">
-                          <a:solidFill>
-                            <a:srgbClr val="5E9B7E"/>
-                          </a:solidFill>
-                          <a:latin typeface="Calibri" pitchFamily="34" charset="0"/>
-                          <a:ea typeface="Calibri" pitchFamily="34" charset="-122"/>
-                          <a:cs typeface="Calibri" pitchFamily="34" charset="-120"/>
-                        </a:rPr>
-                        <a:t>+143,3</a:t>
-                      </a:r>
-                      <a:endParaRPr lang="en-US" sz="950" dirty="0">
-                        <a:latin typeface="Calibri" charset="0"/>
-                        <a:ea typeface="Calibri" charset="0"/>
-                        <a:cs typeface="Calibri" charset="0"/>
-                      </a:endParaRPr>
-                    </a:p>
-                  </a:txBody>
-                  <a:tcPr marL="64008" marR="64008" marT="0" marB="0" anchor="ctr">
-                    <a:lnL w="6350" cap="flat" cmpd="sng" algn="ctr">
-                      <a:solidFill>
-                        <a:srgbClr val="D5DBE3"/>
-                      </a:solidFill>
-                      <a:prstDash val="solid"/>
-                      <a:round/>
-                      <a:headEnd type="none" w="med" len="med"/>
-                      <a:tailEnd type="none" w="med" len="med"/>
-                    </a:lnL>
-                    <a:lnR w="6350" cap="flat" cmpd="sng" algn="ctr">
-                      <a:solidFill>
-                        <a:srgbClr val="D5DBE3"/>
-                      </a:solidFill>
-                      <a:prstDash val="solid"/>
-                      <a:round/>
-                      <a:headEnd type="none" w="med" len="med"/>
-                      <a:tailEnd type="none" w="med" len="med"/>
-                    </a:lnR>
-                    <a:lnT w="6350" cap="flat" cmpd="sng" algn="ctr">
-                      <a:solidFill>
-                        <a:srgbClr val="D5DBE3"/>
-                      </a:solidFill>
-                      <a:prstDash val="solid"/>
-                      <a:round/>
-                      <a:headEnd type="none" w="med" len="med"/>
-                      <a:tailEnd type="none" w="med" len="med"/>
-                    </a:lnT>
-                    <a:lnB w="6350" cap="flat" cmpd="sng" algn="ctr">
-                      <a:solidFill>
-                        <a:srgbClr val="D5DBE3"/>
-                      </a:solidFill>
-                      <a:prstDash val="solid"/>
-                      <a:round/>
-                      <a:headEnd type="none" w="med" len="med"/>
-                      <a:tailEnd type="none" w="med" len="med"/>
-                    </a:lnB>
-                  </a:tcPr>
-                </a:tc>
-              </a:tr>
-              <a:tr h="274320">
-                <a:tc>
-                  <a:txBody>
-                    <a:bodyPr/>
-                    <a:lstStyle/>
-                    <a:p>
-                      <a:pPr algn="l" indent="0" marL="0">
-                        <a:buNone/>
-                      </a:pPr>
-                      <a:r>
-                        <a:rPr lang="en-US" sz="950" b="1" dirty="0">
-                          <a:solidFill>
-                            <a:srgbClr val="1F2933"/>
-                          </a:solidFill>
-                          <a:latin typeface="Calibri" pitchFamily="34" charset="0"/>
-                          <a:ea typeface="Calibri" pitchFamily="34" charset="-122"/>
-                          <a:cs typeface="Calibri" pitchFamily="34" charset="-120"/>
-                        </a:rPr>
                         <a:t>TERASSON</a:t>
                       </a:r>
                       <a:endParaRPr lang="en-US" sz="950" dirty="0">
@@ -9961,7 +8976,7 @@
                           <a:ea typeface="Calibri" pitchFamily="34" charset="-122"/>
                           <a:cs typeface="Calibri" pitchFamily="34" charset="-120"/>
                         </a:rPr>
-                        <a:t>RIVIERA</a:t>
+                        <a:t>FIRST</a:t>
                       </a:r>
                       <a:endParaRPr lang="en-US" sz="950" dirty="0">
                         <a:latin typeface="Calibri" charset="0"/>
@@ -10029,7 +9044,7 @@
                           <a:ea typeface="Calibri" pitchFamily="34" charset="-122"/>
                           <a:cs typeface="Calibri" pitchFamily="34" charset="-120"/>
                         </a:rPr>
-                        <a:t>Fournisseurs 17,6 · impôts 70,8 · cotisations 0,3</a:t>
+                        <a:t>Fournisseurs 91,3 · impôts 1,6 · prêts 448,1 · encaissements −129,6</a:t>
                       </a:r>
                       <a:endParaRPr lang="en-US" sz="950" dirty="0">
                         <a:latin typeface="Calibri" charset="0"/>
@@ -10094,7 +9109,7 @@
                           <a:ea typeface="Calibri" pitchFamily="34" charset="-122"/>
                           <a:cs typeface="Calibri" pitchFamily="34" charset="-120"/>
                         </a:rPr>
-                        <a:t>88,8</a:t>
+                        <a:t>541,0</a:t>
                       </a:r>
                       <a:endParaRPr lang="en-US" sz="950" dirty="0">
                         <a:latin typeface="Calibri" charset="0"/>
@@ -10159,7 +9174,7 @@
                           <a:ea typeface="Calibri" pitchFamily="34" charset="-122"/>
                           <a:cs typeface="Calibri" pitchFamily="34" charset="-120"/>
                         </a:rPr>
-                        <a:t>SOCIETE GENERALE-RIVIERA</a:t>
+                        <a:t>STANBIC-FIRST, puis SOCIETE GENERALE-FIRST</a:t>
                       </a:r>
                       <a:endParaRPr lang="en-US" sz="950" dirty="0">
                         <a:latin typeface="Calibri" charset="0"/>
@@ -10224,7 +9239,7 @@
                           <a:ea typeface="Calibri" pitchFamily="34" charset="-122"/>
                           <a:cs typeface="Calibri" pitchFamily="34" charset="-120"/>
                         </a:rPr>
-                        <a:t>1,5</a:t>
+                        <a:t>236,1</a:t>
                       </a:r>
                       <a:endParaRPr lang="en-US" sz="950" dirty="0">
                         <a:latin typeface="Calibri" charset="0"/>
@@ -10289,7 +9304,7 @@
                           <a:ea typeface="Calibri" pitchFamily="34" charset="-122"/>
                           <a:cs typeface="Calibri" pitchFamily="34" charset="-120"/>
                         </a:rPr>
-                        <a:t>-87,3</a:t>
+                        <a:t>-175,3</a:t>
                       </a:r>
                       <a:endParaRPr lang="en-US" sz="950" dirty="0">
                         <a:latin typeface="Calibri" charset="0"/>
@@ -10359,7 +9374,7 @@
                           <a:ea typeface="Calibri" pitchFamily="34" charset="-122"/>
                           <a:cs typeface="Calibri" pitchFamily="34" charset="-120"/>
                         </a:rPr>
-                        <a:t>IMMONEUF</a:t>
+                        <a:t>RIVIERA</a:t>
                       </a:r>
                       <a:endParaRPr lang="en-US" sz="950" dirty="0">
                         <a:latin typeface="Calibri" charset="0"/>
@@ -10427,7 +9442,7 @@
                           <a:ea typeface="Calibri" pitchFamily="34" charset="-122"/>
                           <a:cs typeface="Calibri" pitchFamily="34" charset="-120"/>
                         </a:rPr>
-                        <a:t>Fournisseurs 6,2 · impôts 17,1 · cotisations 28,4 · salaires 26,0</a:t>
+                        <a:t>Fournisseurs 17,6 · impôts 70,8 · cotisations 0,3</a:t>
                       </a:r>
                       <a:endParaRPr lang="en-US" sz="950" dirty="0">
                         <a:latin typeface="Calibri" charset="0"/>
@@ -10492,7 +9507,7 @@
                           <a:ea typeface="Calibri" pitchFamily="34" charset="-122"/>
                           <a:cs typeface="Calibri" pitchFamily="34" charset="-120"/>
                         </a:rPr>
-                        <a:t>77,8</a:t>
+                        <a:t>88,8</a:t>
                       </a:r>
                       <a:endParaRPr lang="en-US" sz="950" dirty="0">
                         <a:latin typeface="Calibri" charset="0"/>
@@ -10557,7 +9572,7 @@
                           <a:ea typeface="Calibri" pitchFamily="34" charset="-122"/>
                           <a:cs typeface="Calibri" pitchFamily="34" charset="-120"/>
                         </a:rPr>
-                        <a:t>SOCIETE GENERALE-IMMONEUF, puis BACI - IMMONEUF</a:t>
+                        <a:t>SOCIETE GENERALE-RIVIERA</a:t>
                       </a:r>
                       <a:endParaRPr lang="en-US" sz="950" dirty="0">
                         <a:latin typeface="Calibri" charset="0"/>
@@ -10622,7 +9637,7 @@
                           <a:ea typeface="Calibri" pitchFamily="34" charset="-122"/>
                           <a:cs typeface="Calibri" pitchFamily="34" charset="-120"/>
                         </a:rPr>
-                        <a:t>11,8</a:t>
+                        <a:t>1,5</a:t>
                       </a:r>
                       <a:endParaRPr lang="en-US" sz="950" dirty="0">
                         <a:latin typeface="Calibri" charset="0"/>
@@ -10687,7 +9702,7 @@
                           <a:ea typeface="Calibri" pitchFamily="34" charset="-122"/>
                           <a:cs typeface="Calibri" pitchFamily="34" charset="-120"/>
                         </a:rPr>
-                        <a:t>-66,0</a:t>
+                        <a:t>-87,3</a:t>
                       </a:r>
                       <a:endParaRPr lang="en-US" sz="950" dirty="0">
                         <a:latin typeface="Calibri" charset="0"/>
@@ -10757,7 +9772,7 @@
                           <a:ea typeface="Calibri" pitchFamily="34" charset="-122"/>
                           <a:cs typeface="Calibri" pitchFamily="34" charset="-120"/>
                         </a:rPr>
-                        <a:t>RHD CI</a:t>
+                        <a:t>IMMONEUF</a:t>
                       </a:r>
                       <a:endParaRPr lang="en-US" sz="950" dirty="0">
                         <a:latin typeface="Calibri" charset="0"/>
@@ -10825,7 +9840,7 @@
                           <a:ea typeface="Calibri" pitchFamily="34" charset="-122"/>
                           <a:cs typeface="Calibri" pitchFamily="34" charset="-120"/>
                         </a:rPr>
-                        <a:t>Impôts 38,9 · cotisations 11,1</a:t>
+                        <a:t>Fournisseurs 6,2 · impôts 17,1 · cotisations 28,4 · salaires 26,0</a:t>
                       </a:r>
                       <a:endParaRPr lang="en-US" sz="950" dirty="0">
                         <a:latin typeface="Calibri" charset="0"/>
@@ -10890,7 +9905,7 @@
                           <a:ea typeface="Calibri" pitchFamily="34" charset="-122"/>
                           <a:cs typeface="Calibri" pitchFamily="34" charset="-120"/>
                         </a:rPr>
-                        <a:t>50,0</a:t>
+                        <a:t>77,8</a:t>
                       </a:r>
                       <a:endParaRPr lang="en-US" sz="950" dirty="0">
                         <a:latin typeface="Calibri" charset="0"/>
@@ -10955,7 +9970,7 @@
                           <a:ea typeface="Calibri" pitchFamily="34" charset="-122"/>
                           <a:cs typeface="Calibri" pitchFamily="34" charset="-120"/>
                         </a:rPr>
-                        <a:t>Aucun compte : paiement pour son compte par une autre société</a:t>
+                        <a:t>SOCIETE GENERALE-IMMONEUF, puis BACI - IMMONEUF</a:t>
                       </a:r>
                       <a:endParaRPr lang="en-US" sz="950" dirty="0">
                         <a:latin typeface="Calibri" charset="0"/>
@@ -11020,7 +10035,7 @@
                           <a:ea typeface="Calibri" pitchFamily="34" charset="-122"/>
                           <a:cs typeface="Calibri" pitchFamily="34" charset="-120"/>
                         </a:rPr>
-                        <a:t>–</a:t>
+                        <a:t>11,8</a:t>
                       </a:r>
                       <a:endParaRPr lang="en-US" sz="950" dirty="0">
                         <a:latin typeface="Calibri" charset="0"/>
@@ -11085,7 +10100,7 @@
                           <a:ea typeface="Calibri" pitchFamily="34" charset="-122"/>
                           <a:cs typeface="Calibri" pitchFamily="34" charset="-120"/>
                         </a:rPr>
-                        <a:t>-50,0</a:t>
+                        <a:t>-66,0</a:t>
                       </a:r>
                       <a:endParaRPr lang="en-US" sz="950" dirty="0">
                         <a:latin typeface="Calibri" charset="0"/>
@@ -11155,7 +10170,7 @@
                           <a:ea typeface="Calibri" pitchFamily="34" charset="-122"/>
                           <a:cs typeface="Calibri" pitchFamily="34" charset="-120"/>
                         </a:rPr>
-                        <a:t>AB CENTER</a:t>
+                        <a:t>RHD CI</a:t>
                       </a:r>
                       <a:endParaRPr lang="en-US" sz="950" dirty="0">
                         <a:latin typeface="Calibri" charset="0"/>
@@ -11223,7 +10238,7 @@
                           <a:ea typeface="Calibri" pitchFamily="34" charset="-122"/>
                           <a:cs typeface="Calibri" pitchFamily="34" charset="-120"/>
                         </a:rPr>
-                        <a:t>Fournisseurs 2,5 · impôts 3,8</a:t>
+                        <a:t>Impôts 38,9 · cotisations 11,1</a:t>
                       </a:r>
                       <a:endParaRPr lang="en-US" sz="950" dirty="0">
                         <a:latin typeface="Calibri" charset="0"/>
@@ -11288,7 +10303,7 @@
                           <a:ea typeface="Calibri" pitchFamily="34" charset="-122"/>
                           <a:cs typeface="Calibri" pitchFamily="34" charset="-120"/>
                         </a:rPr>
-                        <a:t>6,3</a:t>
+                        <a:t>50,0</a:t>
                       </a:r>
                       <a:endParaRPr lang="en-US" sz="950" dirty="0">
                         <a:latin typeface="Calibri" charset="0"/>
@@ -11353,7 +10368,7 @@
                           <a:ea typeface="Calibri" pitchFamily="34" charset="-122"/>
                           <a:cs typeface="Calibri" pitchFamily="34" charset="-120"/>
                         </a:rPr>
-                        <a:t>ECOBANK- AB CENTER</a:t>
+                        <a:t>Aucun compte : paiement pour son compte par une autre société</a:t>
                       </a:r>
                       <a:endParaRPr lang="en-US" sz="950" dirty="0">
                         <a:latin typeface="Calibri" charset="0"/>
@@ -11483,7 +10498,7 @@
                           <a:ea typeface="Calibri" pitchFamily="34" charset="-122"/>
                           <a:cs typeface="Calibri" pitchFamily="34" charset="-120"/>
                         </a:rPr>
-                        <a:t>-6,3</a:t>
+                        <a:t>-50,0</a:t>
                       </a:r>
                       <a:endParaRPr lang="en-US" sz="950" dirty="0">
                         <a:latin typeface="Calibri" charset="0"/>
@@ -11553,7 +10568,7 @@
                           <a:ea typeface="Calibri" pitchFamily="34" charset="-122"/>
                           <a:cs typeface="Calibri" pitchFamily="34" charset="-120"/>
                         </a:rPr>
-                        <a:t>ODALYS CI</a:t>
+                        <a:t>AB CENTER</a:t>
                       </a:r>
                       <a:endParaRPr lang="en-US" sz="950" dirty="0">
                         <a:latin typeface="Calibri" charset="0"/>
@@ -11621,7 +10636,7 @@
                           <a:ea typeface="Calibri" pitchFamily="34" charset="-122"/>
                           <a:cs typeface="Calibri" pitchFamily="34" charset="-120"/>
                         </a:rPr>
-                        <a:t>Fournisseurs 1,6 · impôts 8,0</a:t>
+                        <a:t>Fournisseurs 2,5 · impôts 3,8</a:t>
                       </a:r>
                       <a:endParaRPr lang="en-US" sz="950" dirty="0">
                         <a:latin typeface="Calibri" charset="0"/>
@@ -11686,7 +10701,7 @@
                           <a:ea typeface="Calibri" pitchFamily="34" charset="-122"/>
                           <a:cs typeface="Calibri" pitchFamily="34" charset="-120"/>
                         </a:rPr>
-                        <a:t>9,6</a:t>
+                        <a:t>6,3</a:t>
                       </a:r>
                       <a:endParaRPr lang="en-US" sz="950" dirty="0">
                         <a:latin typeface="Calibri" charset="0"/>
@@ -11751,7 +10766,7 @@
                           <a:ea typeface="Calibri" pitchFamily="34" charset="-122"/>
                           <a:cs typeface="Calibri" pitchFamily="34" charset="-120"/>
                         </a:rPr>
-                        <a:t>SOCIETE GENERALE-ODALYS</a:t>
+                        <a:t>ECOBANK- AB CENTER</a:t>
                       </a:r>
                       <a:endParaRPr lang="en-US" sz="950" dirty="0">
                         <a:latin typeface="Calibri" charset="0"/>
@@ -11816,7 +10831,7 @@
                           <a:ea typeface="Calibri" pitchFamily="34" charset="-122"/>
                           <a:cs typeface="Calibri" pitchFamily="34" charset="-120"/>
                         </a:rPr>
-                        <a:t>6,1</a:t>
+                        <a:t>–</a:t>
                       </a:r>
                       <a:endParaRPr lang="en-US" sz="950" dirty="0">
                         <a:latin typeface="Calibri" charset="0"/>
@@ -11881,7 +10896,7 @@
                           <a:ea typeface="Calibri" pitchFamily="34" charset="-122"/>
                           <a:cs typeface="Calibri" pitchFamily="34" charset="-120"/>
                         </a:rPr>
-                        <a:t>-3,5</a:t>
+                        <a:t>-6,3</a:t>
                       </a:r>
                       <a:endParaRPr lang="en-US" sz="950" dirty="0">
                         <a:latin typeface="Calibri" charset="0"/>
@@ -11951,6 +10966,404 @@
                           <a:ea typeface="Calibri" pitchFamily="34" charset="-122"/>
                           <a:cs typeface="Calibri" pitchFamily="34" charset="-120"/>
                         </a:rPr>
+                        <a:t>ODALYS CI</a:t>
+                      </a:r>
+                      <a:endParaRPr lang="en-US" sz="950" dirty="0">
+                        <a:latin typeface="Calibri" charset="0"/>
+                        <a:ea typeface="Calibri" charset="0"/>
+                        <a:cs typeface="Calibri" charset="0"/>
+                      </a:endParaRPr>
+                    </a:p>
+                  </a:txBody>
+                  <a:tcPr marL="64008" marR="64008" marT="0" marB="0" anchor="ctr">
+                    <a:lnL w="6350" cap="flat" cmpd="sng" algn="ctr">
+                      <a:solidFill>
+                        <a:srgbClr val="D5DBE3"/>
+                      </a:solidFill>
+                      <a:prstDash val="solid"/>
+                      <a:round/>
+                      <a:headEnd type="none" w="med" len="med"/>
+                      <a:tailEnd type="none" w="med" len="med"/>
+                    </a:lnL>
+                    <a:lnR w="6350" cap="flat" cmpd="sng" algn="ctr">
+                      <a:solidFill>
+                        <a:srgbClr val="D5DBE3"/>
+                      </a:solidFill>
+                      <a:prstDash val="solid"/>
+                      <a:round/>
+                      <a:headEnd type="none" w="med" len="med"/>
+                      <a:tailEnd type="none" w="med" len="med"/>
+                    </a:lnR>
+                    <a:lnT w="6350" cap="flat" cmpd="sng" algn="ctr">
+                      <a:solidFill>
+                        <a:srgbClr val="D5DBE3"/>
+                      </a:solidFill>
+                      <a:prstDash val="solid"/>
+                      <a:round/>
+                      <a:headEnd type="none" w="med" len="med"/>
+                      <a:tailEnd type="none" w="med" len="med"/>
+                    </a:lnT>
+                    <a:lnB w="6350" cap="flat" cmpd="sng" algn="ctr">
+                      <a:solidFill>
+                        <a:srgbClr val="D5DBE3"/>
+                      </a:solidFill>
+                      <a:prstDash val="solid"/>
+                      <a:round/>
+                      <a:headEnd type="none" w="med" len="med"/>
+                      <a:tailEnd type="none" w="med" len="med"/>
+                    </a:lnB>
+                    <a:solidFill>
+                      <a:srgbClr val="F7E7E5"/>
+                    </a:solidFill>
+                  </a:tcPr>
+                </a:tc>
+                <a:tc>
+                  <a:txBody>
+                    <a:bodyPr/>
+                    <a:lstStyle/>
+                    <a:p>
+                      <a:pPr algn="l" indent="0" marL="0">
+                        <a:buNone/>
+                      </a:pPr>
+                      <a:r>
+                        <a:rPr lang="en-US" sz="950" dirty="0">
+                          <a:solidFill>
+                            <a:srgbClr val="1F2933"/>
+                          </a:solidFill>
+                          <a:latin typeface="Calibri" pitchFamily="34" charset="0"/>
+                          <a:ea typeface="Calibri" pitchFamily="34" charset="-122"/>
+                          <a:cs typeface="Calibri" pitchFamily="34" charset="-120"/>
+                        </a:rPr>
+                        <a:t>Fournisseurs 1,6 · impôts 8,0</a:t>
+                      </a:r>
+                      <a:endParaRPr lang="en-US" sz="950" dirty="0">
+                        <a:latin typeface="Calibri" charset="0"/>
+                        <a:ea typeface="Calibri" charset="0"/>
+                        <a:cs typeface="Calibri" charset="0"/>
+                      </a:endParaRPr>
+                    </a:p>
+                  </a:txBody>
+                  <a:tcPr marL="64008" marR="64008" marT="0" marB="0" anchor="ctr">
+                    <a:lnL w="6350" cap="flat" cmpd="sng" algn="ctr">
+                      <a:solidFill>
+                        <a:srgbClr val="D5DBE3"/>
+                      </a:solidFill>
+                      <a:prstDash val="solid"/>
+                      <a:round/>
+                      <a:headEnd type="none" w="med" len="med"/>
+                      <a:tailEnd type="none" w="med" len="med"/>
+                    </a:lnL>
+                    <a:lnR w="6350" cap="flat" cmpd="sng" algn="ctr">
+                      <a:solidFill>
+                        <a:srgbClr val="D5DBE3"/>
+                      </a:solidFill>
+                      <a:prstDash val="solid"/>
+                      <a:round/>
+                      <a:headEnd type="none" w="med" len="med"/>
+                      <a:tailEnd type="none" w="med" len="med"/>
+                    </a:lnR>
+                    <a:lnT w="6350" cap="flat" cmpd="sng" algn="ctr">
+                      <a:solidFill>
+                        <a:srgbClr val="D5DBE3"/>
+                      </a:solidFill>
+                      <a:prstDash val="solid"/>
+                      <a:round/>
+                      <a:headEnd type="none" w="med" len="med"/>
+                      <a:tailEnd type="none" w="med" len="med"/>
+                    </a:lnT>
+                    <a:lnB w="6350" cap="flat" cmpd="sng" algn="ctr">
+                      <a:solidFill>
+                        <a:srgbClr val="D5DBE3"/>
+                      </a:solidFill>
+                      <a:prstDash val="solid"/>
+                      <a:round/>
+                      <a:headEnd type="none" w="med" len="med"/>
+                      <a:tailEnd type="none" w="med" len="med"/>
+                    </a:lnB>
+                  </a:tcPr>
+                </a:tc>
+                <a:tc>
+                  <a:txBody>
+                    <a:bodyPr/>
+                    <a:lstStyle/>
+                    <a:p>
+                      <a:pPr algn="r" indent="0" marL="0">
+                        <a:buNone/>
+                      </a:pPr>
+                      <a:r>
+                        <a:rPr lang="en-US" sz="950" dirty="0">
+                          <a:solidFill>
+                            <a:srgbClr val="1F2933"/>
+                          </a:solidFill>
+                          <a:latin typeface="Calibri" pitchFamily="34" charset="0"/>
+                          <a:ea typeface="Calibri" pitchFamily="34" charset="-122"/>
+                          <a:cs typeface="Calibri" pitchFamily="34" charset="-120"/>
+                        </a:rPr>
+                        <a:t>9,6</a:t>
+                      </a:r>
+                      <a:endParaRPr lang="en-US" sz="950" dirty="0">
+                        <a:latin typeface="Calibri" charset="0"/>
+                        <a:ea typeface="Calibri" charset="0"/>
+                        <a:cs typeface="Calibri" charset="0"/>
+                      </a:endParaRPr>
+                    </a:p>
+                  </a:txBody>
+                  <a:tcPr marL="64008" marR="64008" marT="0" marB="0" anchor="ctr">
+                    <a:lnL w="6350" cap="flat" cmpd="sng" algn="ctr">
+                      <a:solidFill>
+                        <a:srgbClr val="D5DBE3"/>
+                      </a:solidFill>
+                      <a:prstDash val="solid"/>
+                      <a:round/>
+                      <a:headEnd type="none" w="med" len="med"/>
+                      <a:tailEnd type="none" w="med" len="med"/>
+                    </a:lnL>
+                    <a:lnR w="6350" cap="flat" cmpd="sng" algn="ctr">
+                      <a:solidFill>
+                        <a:srgbClr val="D5DBE3"/>
+                      </a:solidFill>
+                      <a:prstDash val="solid"/>
+                      <a:round/>
+                      <a:headEnd type="none" w="med" len="med"/>
+                      <a:tailEnd type="none" w="med" len="med"/>
+                    </a:lnR>
+                    <a:lnT w="6350" cap="flat" cmpd="sng" algn="ctr">
+                      <a:solidFill>
+                        <a:srgbClr val="D5DBE3"/>
+                      </a:solidFill>
+                      <a:prstDash val="solid"/>
+                      <a:round/>
+                      <a:headEnd type="none" w="med" len="med"/>
+                      <a:tailEnd type="none" w="med" len="med"/>
+                    </a:lnT>
+                    <a:lnB w="6350" cap="flat" cmpd="sng" algn="ctr">
+                      <a:solidFill>
+                        <a:srgbClr val="D5DBE3"/>
+                      </a:solidFill>
+                      <a:prstDash val="solid"/>
+                      <a:round/>
+                      <a:headEnd type="none" w="med" len="med"/>
+                      <a:tailEnd type="none" w="med" len="med"/>
+                    </a:lnB>
+                  </a:tcPr>
+                </a:tc>
+                <a:tc>
+                  <a:txBody>
+                    <a:bodyPr/>
+                    <a:lstStyle/>
+                    <a:p>
+                      <a:pPr algn="l" indent="0" marL="0">
+                        <a:buNone/>
+                      </a:pPr>
+                      <a:r>
+                        <a:rPr lang="en-US" sz="950" dirty="0">
+                          <a:solidFill>
+                            <a:srgbClr val="1F2933"/>
+                          </a:solidFill>
+                          <a:latin typeface="Calibri" pitchFamily="34" charset="0"/>
+                          <a:ea typeface="Calibri" pitchFamily="34" charset="-122"/>
+                          <a:cs typeface="Calibri" pitchFamily="34" charset="-120"/>
+                        </a:rPr>
+                        <a:t>SOCIETE GENERALE-ODALYS</a:t>
+                      </a:r>
+                      <a:endParaRPr lang="en-US" sz="950" dirty="0">
+                        <a:latin typeface="Calibri" charset="0"/>
+                        <a:ea typeface="Calibri" charset="0"/>
+                        <a:cs typeface="Calibri" charset="0"/>
+                      </a:endParaRPr>
+                    </a:p>
+                  </a:txBody>
+                  <a:tcPr marL="64008" marR="64008" marT="0" marB="0" anchor="ctr">
+                    <a:lnL w="6350" cap="flat" cmpd="sng" algn="ctr">
+                      <a:solidFill>
+                        <a:srgbClr val="D5DBE3"/>
+                      </a:solidFill>
+                      <a:prstDash val="solid"/>
+                      <a:round/>
+                      <a:headEnd type="none" w="med" len="med"/>
+                      <a:tailEnd type="none" w="med" len="med"/>
+                    </a:lnL>
+                    <a:lnR w="6350" cap="flat" cmpd="sng" algn="ctr">
+                      <a:solidFill>
+                        <a:srgbClr val="D5DBE3"/>
+                      </a:solidFill>
+                      <a:prstDash val="solid"/>
+                      <a:round/>
+                      <a:headEnd type="none" w="med" len="med"/>
+                      <a:tailEnd type="none" w="med" len="med"/>
+                    </a:lnR>
+                    <a:lnT w="6350" cap="flat" cmpd="sng" algn="ctr">
+                      <a:solidFill>
+                        <a:srgbClr val="D5DBE3"/>
+                      </a:solidFill>
+                      <a:prstDash val="solid"/>
+                      <a:round/>
+                      <a:headEnd type="none" w="med" len="med"/>
+                      <a:tailEnd type="none" w="med" len="med"/>
+                    </a:lnT>
+                    <a:lnB w="6350" cap="flat" cmpd="sng" algn="ctr">
+                      <a:solidFill>
+                        <a:srgbClr val="D5DBE3"/>
+                      </a:solidFill>
+                      <a:prstDash val="solid"/>
+                      <a:round/>
+                      <a:headEnd type="none" w="med" len="med"/>
+                      <a:tailEnd type="none" w="med" len="med"/>
+                    </a:lnB>
+                  </a:tcPr>
+                </a:tc>
+                <a:tc>
+                  <a:txBody>
+                    <a:bodyPr/>
+                    <a:lstStyle/>
+                    <a:p>
+                      <a:pPr algn="r" indent="0" marL="0">
+                        <a:buNone/>
+                      </a:pPr>
+                      <a:r>
+                        <a:rPr lang="en-US" sz="950" dirty="0">
+                          <a:solidFill>
+                            <a:srgbClr val="1F2933"/>
+                          </a:solidFill>
+                          <a:latin typeface="Calibri" pitchFamily="34" charset="0"/>
+                          <a:ea typeface="Calibri" pitchFamily="34" charset="-122"/>
+                          <a:cs typeface="Calibri" pitchFamily="34" charset="-120"/>
+                        </a:rPr>
+                        <a:t>6,1</a:t>
+                      </a:r>
+                      <a:endParaRPr lang="en-US" sz="950" dirty="0">
+                        <a:latin typeface="Calibri" charset="0"/>
+                        <a:ea typeface="Calibri" charset="0"/>
+                        <a:cs typeface="Calibri" charset="0"/>
+                      </a:endParaRPr>
+                    </a:p>
+                  </a:txBody>
+                  <a:tcPr marL="64008" marR="64008" marT="0" marB="0" anchor="ctr">
+                    <a:lnL w="6350" cap="flat" cmpd="sng" algn="ctr">
+                      <a:solidFill>
+                        <a:srgbClr val="D5DBE3"/>
+                      </a:solidFill>
+                      <a:prstDash val="solid"/>
+                      <a:round/>
+                      <a:headEnd type="none" w="med" len="med"/>
+                      <a:tailEnd type="none" w="med" len="med"/>
+                    </a:lnL>
+                    <a:lnR w="6350" cap="flat" cmpd="sng" algn="ctr">
+                      <a:solidFill>
+                        <a:srgbClr val="D5DBE3"/>
+                      </a:solidFill>
+                      <a:prstDash val="solid"/>
+                      <a:round/>
+                      <a:headEnd type="none" w="med" len="med"/>
+                      <a:tailEnd type="none" w="med" len="med"/>
+                    </a:lnR>
+                    <a:lnT w="6350" cap="flat" cmpd="sng" algn="ctr">
+                      <a:solidFill>
+                        <a:srgbClr val="D5DBE3"/>
+                      </a:solidFill>
+                      <a:prstDash val="solid"/>
+                      <a:round/>
+                      <a:headEnd type="none" w="med" len="med"/>
+                      <a:tailEnd type="none" w="med" len="med"/>
+                    </a:lnT>
+                    <a:lnB w="6350" cap="flat" cmpd="sng" algn="ctr">
+                      <a:solidFill>
+                        <a:srgbClr val="D5DBE3"/>
+                      </a:solidFill>
+                      <a:prstDash val="solid"/>
+                      <a:round/>
+                      <a:headEnd type="none" w="med" len="med"/>
+                      <a:tailEnd type="none" w="med" len="med"/>
+                    </a:lnB>
+                  </a:tcPr>
+                </a:tc>
+                <a:tc>
+                  <a:txBody>
+                    <a:bodyPr/>
+                    <a:lstStyle/>
+                    <a:p>
+                      <a:pPr algn="r" indent="0" marL="0">
+                        <a:buNone/>
+                      </a:pPr>
+                      <a:r>
+                        <a:rPr lang="en-US" sz="950" b="1" dirty="0">
+                          <a:solidFill>
+                            <a:srgbClr val="B3261E"/>
+                          </a:solidFill>
+                          <a:latin typeface="Calibri" pitchFamily="34" charset="0"/>
+                          <a:ea typeface="Calibri" pitchFamily="34" charset="-122"/>
+                          <a:cs typeface="Calibri" pitchFamily="34" charset="-120"/>
+                        </a:rPr>
+                        <a:t>-3,5</a:t>
+                      </a:r>
+                      <a:endParaRPr lang="en-US" sz="950" dirty="0">
+                        <a:latin typeface="Calibri" charset="0"/>
+                        <a:ea typeface="Calibri" charset="0"/>
+                        <a:cs typeface="Calibri" charset="0"/>
+                      </a:endParaRPr>
+                    </a:p>
+                  </a:txBody>
+                  <a:tcPr marL="64008" marR="64008" marT="0" marB="0" anchor="ctr">
+                    <a:lnL w="6350" cap="flat" cmpd="sng" algn="ctr">
+                      <a:solidFill>
+                        <a:srgbClr val="D5DBE3"/>
+                      </a:solidFill>
+                      <a:prstDash val="solid"/>
+                      <a:round/>
+                      <a:headEnd type="none" w="med" len="med"/>
+                      <a:tailEnd type="none" w="med" len="med"/>
+                    </a:lnL>
+                    <a:lnR w="6350" cap="flat" cmpd="sng" algn="ctr">
+                      <a:solidFill>
+                        <a:srgbClr val="D5DBE3"/>
+                      </a:solidFill>
+                      <a:prstDash val="solid"/>
+                      <a:round/>
+                      <a:headEnd type="none" w="med" len="med"/>
+                      <a:tailEnd type="none" w="med" len="med"/>
+                    </a:lnR>
+                    <a:lnT w="6350" cap="flat" cmpd="sng" algn="ctr">
+                      <a:solidFill>
+                        <a:srgbClr val="D5DBE3"/>
+                      </a:solidFill>
+                      <a:prstDash val="solid"/>
+                      <a:round/>
+                      <a:headEnd type="none" w="med" len="med"/>
+                      <a:tailEnd type="none" w="med" len="med"/>
+                    </a:lnT>
+                    <a:lnB w="6350" cap="flat" cmpd="sng" algn="ctr">
+                      <a:solidFill>
+                        <a:srgbClr val="D5DBE3"/>
+                      </a:solidFill>
+                      <a:prstDash val="solid"/>
+                      <a:round/>
+                      <a:headEnd type="none" w="med" len="med"/>
+                      <a:tailEnd type="none" w="med" len="med"/>
+                    </a:lnB>
+                    <a:solidFill>
+                      <a:srgbClr val="F7E7E5"/>
+                    </a:solidFill>
+                  </a:tcPr>
+                </a:tc>
+              </a:tr>
+              <a:tr h="274320">
+                <a:tc>
+                  <a:txBody>
+                    <a:bodyPr/>
+                    <a:lstStyle/>
+                    <a:p>
+                      <a:pPr algn="l" indent="0" marL="0">
+                        <a:buNone/>
+                      </a:pPr>
+                      <a:r>
+                        <a:rPr lang="en-US" sz="950" b="1" dirty="0">
+                          <a:solidFill>
+                            <a:srgbClr val="1F2933"/>
+                          </a:solidFill>
+                          <a:latin typeface="Calibri" pitchFamily="34" charset="0"/>
+                          <a:ea typeface="Calibri" pitchFamily="34" charset="-122"/>
+                          <a:cs typeface="Calibri" pitchFamily="34" charset="-120"/>
+                        </a:rPr>
                         <a:t>RIVIERA – projet</a:t>
                       </a:r>
                       <a:endParaRPr lang="en-US" sz="950" dirty="0">
@@ -12726,401 +12139,6 @@
                     <a:solidFill>
                       <a:srgbClr val="F7E7E5"/>
                     </a:solidFill>
-                  </a:tcPr>
-                </a:tc>
-              </a:tr>
-              <a:tr h="274320">
-                <a:tc>
-                  <a:txBody>
-                    <a:bodyPr/>
-                    <a:lstStyle/>
-                    <a:p>
-                      <a:pPr algn="l" indent="0" marL="0">
-                        <a:buNone/>
-                      </a:pPr>
-                      <a:r>
-                        <a:rPr lang="en-US" sz="950" b="1" dirty="0">
-                          <a:solidFill>
-                            <a:srgbClr val="1F2933"/>
-                          </a:solidFill>
-                          <a:latin typeface="Calibri" pitchFamily="34" charset="0"/>
-                          <a:ea typeface="Calibri" pitchFamily="34" charset="-122"/>
-                          <a:cs typeface="Calibri" pitchFamily="34" charset="-120"/>
-                        </a:rPr>
-                        <a:t>FIRST – dette</a:t>
-                      </a:r>
-                      <a:endParaRPr lang="en-US" sz="950" dirty="0">
-                        <a:latin typeface="Calibri" charset="0"/>
-                        <a:ea typeface="Calibri" charset="0"/>
-                        <a:cs typeface="Calibri" charset="0"/>
-                      </a:endParaRPr>
-                    </a:p>
-                  </a:txBody>
-                  <a:tcPr marL="64008" marR="64008" marT="0" marB="0" anchor="ctr">
-                    <a:lnL w="6350" cap="flat" cmpd="sng" algn="ctr">
-                      <a:solidFill>
-                        <a:srgbClr val="D5DBE3"/>
-                      </a:solidFill>
-                      <a:prstDash val="solid"/>
-                      <a:round/>
-                      <a:headEnd type="none" w="med" len="med"/>
-                      <a:tailEnd type="none" w="med" len="med"/>
-                    </a:lnL>
-                    <a:lnR w="6350" cap="flat" cmpd="sng" algn="ctr">
-                      <a:solidFill>
-                        <a:srgbClr val="D5DBE3"/>
-                      </a:solidFill>
-                      <a:prstDash val="solid"/>
-                      <a:round/>
-                      <a:headEnd type="none" w="med" len="med"/>
-                      <a:tailEnd type="none" w="med" len="med"/>
-                    </a:lnR>
-                    <a:lnT w="6350" cap="flat" cmpd="sng" algn="ctr">
-                      <a:solidFill>
-                        <a:srgbClr val="D5DBE3"/>
-                      </a:solidFill>
-                      <a:prstDash val="solid"/>
-                      <a:round/>
-                      <a:headEnd type="none" w="med" len="med"/>
-                      <a:tailEnd type="none" w="med" len="med"/>
-                    </a:lnT>
-                    <a:lnB w="6350" cap="flat" cmpd="sng" algn="ctr">
-                      <a:solidFill>
-                        <a:srgbClr val="D5DBE3"/>
-                      </a:solidFill>
-                      <a:prstDash val="solid"/>
-                      <a:round/>
-                      <a:headEnd type="none" w="med" len="med"/>
-                      <a:tailEnd type="none" w="med" len="med"/>
-                    </a:lnB>
-                    <a:solidFill>
-                      <a:srgbClr val="EEF2F6"/>
-                    </a:solidFill>
-                  </a:tcPr>
-                </a:tc>
-                <a:tc>
-                  <a:txBody>
-                    <a:bodyPr/>
-                    <a:lstStyle/>
-                    <a:p>
-                      <a:pPr algn="l" indent="0" marL="0">
-                        <a:buNone/>
-                      </a:pPr>
-                      <a:r>
-                        <a:rPr lang="en-US" sz="950" dirty="0">
-                          <a:solidFill>
-                            <a:srgbClr val="1F2933"/>
-                          </a:solidFill>
-                          <a:latin typeface="Calibri" pitchFamily="34" charset="0"/>
-                          <a:ea typeface="Calibri" pitchFamily="34" charset="-122"/>
-                          <a:cs typeface="Calibri" pitchFamily="34" charset="-120"/>
-                        </a:rPr>
-                        <a:t>Échéances 448,1 · loyers +129,6</a:t>
-                      </a:r>
-                      <a:endParaRPr lang="en-US" sz="950" dirty="0">
-                        <a:latin typeface="Calibri" charset="0"/>
-                        <a:ea typeface="Calibri" charset="0"/>
-                        <a:cs typeface="Calibri" charset="0"/>
-                      </a:endParaRPr>
-                    </a:p>
-                  </a:txBody>
-                  <a:tcPr marL="64008" marR="64008" marT="0" marB="0" anchor="ctr">
-                    <a:lnL w="6350" cap="flat" cmpd="sng" algn="ctr">
-                      <a:solidFill>
-                        <a:srgbClr val="D5DBE3"/>
-                      </a:solidFill>
-                      <a:prstDash val="solid"/>
-                      <a:round/>
-                      <a:headEnd type="none" w="med" len="med"/>
-                      <a:tailEnd type="none" w="med" len="med"/>
-                    </a:lnL>
-                    <a:lnR w="6350" cap="flat" cmpd="sng" algn="ctr">
-                      <a:solidFill>
-                        <a:srgbClr val="D5DBE3"/>
-                      </a:solidFill>
-                      <a:prstDash val="solid"/>
-                      <a:round/>
-                      <a:headEnd type="none" w="med" len="med"/>
-                      <a:tailEnd type="none" w="med" len="med"/>
-                    </a:lnR>
-                    <a:lnT w="6350" cap="flat" cmpd="sng" algn="ctr">
-                      <a:solidFill>
-                        <a:srgbClr val="D5DBE3"/>
-                      </a:solidFill>
-                      <a:prstDash val="solid"/>
-                      <a:round/>
-                      <a:headEnd type="none" w="med" len="med"/>
-                      <a:tailEnd type="none" w="med" len="med"/>
-                    </a:lnT>
-                    <a:lnB w="6350" cap="flat" cmpd="sng" algn="ctr">
-                      <a:solidFill>
-                        <a:srgbClr val="D5DBE3"/>
-                      </a:solidFill>
-                      <a:prstDash val="solid"/>
-                      <a:round/>
-                      <a:headEnd type="none" w="med" len="med"/>
-                      <a:tailEnd type="none" w="med" len="med"/>
-                    </a:lnB>
-                  </a:tcPr>
-                </a:tc>
-                <a:tc>
-                  <a:txBody>
-                    <a:bodyPr/>
-                    <a:lstStyle/>
-                    <a:p>
-                      <a:pPr algn="r" indent="0" marL="0">
-                        <a:buNone/>
-                      </a:pPr>
-                      <a:r>
-                        <a:rPr lang="en-US" sz="950" dirty="0">
-                          <a:solidFill>
-                            <a:srgbClr val="1F2933"/>
-                          </a:solidFill>
-                          <a:latin typeface="Calibri" pitchFamily="34" charset="0"/>
-                          <a:ea typeface="Calibri" pitchFamily="34" charset="-122"/>
-                          <a:cs typeface="Calibri" pitchFamily="34" charset="-120"/>
-                        </a:rPr>
-                        <a:t>448,1</a:t>
-                      </a:r>
-                      <a:endParaRPr lang="en-US" sz="950" dirty="0">
-                        <a:latin typeface="Calibri" charset="0"/>
-                        <a:ea typeface="Calibri" charset="0"/>
-                        <a:cs typeface="Calibri" charset="0"/>
-                      </a:endParaRPr>
-                    </a:p>
-                  </a:txBody>
-                  <a:tcPr marL="64008" marR="64008" marT="0" marB="0" anchor="ctr">
-                    <a:lnL w="6350" cap="flat" cmpd="sng" algn="ctr">
-                      <a:solidFill>
-                        <a:srgbClr val="D5DBE3"/>
-                      </a:solidFill>
-                      <a:prstDash val="solid"/>
-                      <a:round/>
-                      <a:headEnd type="none" w="med" len="med"/>
-                      <a:tailEnd type="none" w="med" len="med"/>
-                    </a:lnL>
-                    <a:lnR w="6350" cap="flat" cmpd="sng" algn="ctr">
-                      <a:solidFill>
-                        <a:srgbClr val="D5DBE3"/>
-                      </a:solidFill>
-                      <a:prstDash val="solid"/>
-                      <a:round/>
-                      <a:headEnd type="none" w="med" len="med"/>
-                      <a:tailEnd type="none" w="med" len="med"/>
-                    </a:lnR>
-                    <a:lnT w="6350" cap="flat" cmpd="sng" algn="ctr">
-                      <a:solidFill>
-                        <a:srgbClr val="D5DBE3"/>
-                      </a:solidFill>
-                      <a:prstDash val="solid"/>
-                      <a:round/>
-                      <a:headEnd type="none" w="med" len="med"/>
-                      <a:tailEnd type="none" w="med" len="med"/>
-                    </a:lnT>
-                    <a:lnB w="6350" cap="flat" cmpd="sng" algn="ctr">
-                      <a:solidFill>
-                        <a:srgbClr val="D5DBE3"/>
-                      </a:solidFill>
-                      <a:prstDash val="solid"/>
-                      <a:round/>
-                      <a:headEnd type="none" w="med" len="med"/>
-                      <a:tailEnd type="none" w="med" len="med"/>
-                    </a:lnB>
-                  </a:tcPr>
-                </a:tc>
-                <a:tc>
-                  <a:txBody>
-                    <a:bodyPr/>
-                    <a:lstStyle/>
-                    <a:p>
-                      <a:pPr algn="l" indent="0" marL="0">
-                        <a:buNone/>
-                      </a:pPr>
-                      <a:r>
-                        <a:rPr lang="en-US" sz="950" dirty="0">
-                          <a:solidFill>
-                            <a:srgbClr val="1F2933"/>
-                          </a:solidFill>
-                          <a:latin typeface="Calibri" pitchFamily="34" charset="0"/>
-                          <a:ea typeface="Calibri" pitchFamily="34" charset="-122"/>
-                          <a:cs typeface="Calibri" pitchFamily="34" charset="-120"/>
-                        </a:rPr>
-                        <a:t>STANBIC-FIRST _ Debt Service</a:t>
-                      </a:r>
-                      <a:endParaRPr lang="en-US" sz="950" dirty="0">
-                        <a:latin typeface="Calibri" charset="0"/>
-                        <a:ea typeface="Calibri" charset="0"/>
-                        <a:cs typeface="Calibri" charset="0"/>
-                      </a:endParaRPr>
-                    </a:p>
-                  </a:txBody>
-                  <a:tcPr marL="64008" marR="64008" marT="0" marB="0" anchor="ctr">
-                    <a:lnL w="6350" cap="flat" cmpd="sng" algn="ctr">
-                      <a:solidFill>
-                        <a:srgbClr val="D5DBE3"/>
-                      </a:solidFill>
-                      <a:prstDash val="solid"/>
-                      <a:round/>
-                      <a:headEnd type="none" w="med" len="med"/>
-                      <a:tailEnd type="none" w="med" len="med"/>
-                    </a:lnL>
-                    <a:lnR w="6350" cap="flat" cmpd="sng" algn="ctr">
-                      <a:solidFill>
-                        <a:srgbClr val="D5DBE3"/>
-                      </a:solidFill>
-                      <a:prstDash val="solid"/>
-                      <a:round/>
-                      <a:headEnd type="none" w="med" len="med"/>
-                      <a:tailEnd type="none" w="med" len="med"/>
-                    </a:lnR>
-                    <a:lnT w="6350" cap="flat" cmpd="sng" algn="ctr">
-                      <a:solidFill>
-                        <a:srgbClr val="D5DBE3"/>
-                      </a:solidFill>
-                      <a:prstDash val="solid"/>
-                      <a:round/>
-                      <a:headEnd type="none" w="med" len="med"/>
-                      <a:tailEnd type="none" w="med" len="med"/>
-                    </a:lnT>
-                    <a:lnB w="6350" cap="flat" cmpd="sng" algn="ctr">
-                      <a:solidFill>
-                        <a:srgbClr val="D5DBE3"/>
-                      </a:solidFill>
-                      <a:prstDash val="solid"/>
-                      <a:round/>
-                      <a:headEnd type="none" w="med" len="med"/>
-                      <a:tailEnd type="none" w="med" len="med"/>
-                    </a:lnB>
-                  </a:tcPr>
-                </a:tc>
-                <a:tc>
-                  <a:txBody>
-                    <a:bodyPr/>
-                    <a:lstStyle/>
-                    <a:p>
-                      <a:pPr algn="r" indent="0" marL="0">
-                        <a:buNone/>
-                      </a:pPr>
-                      <a:r>
-                        <a:rPr lang="en-US" sz="950" dirty="0">
-                          <a:solidFill>
-                            <a:srgbClr val="1F2933"/>
-                          </a:solidFill>
-                          <a:latin typeface="Calibri" pitchFamily="34" charset="0"/>
-                          <a:ea typeface="Calibri" pitchFamily="34" charset="-122"/>
-                          <a:cs typeface="Calibri" pitchFamily="34" charset="-120"/>
-                        </a:rPr>
-                        <a:t>350,7</a:t>
-                      </a:r>
-                      <a:endParaRPr lang="en-US" sz="950" dirty="0">
-                        <a:latin typeface="Calibri" charset="0"/>
-                        <a:ea typeface="Calibri" charset="0"/>
-                        <a:cs typeface="Calibri" charset="0"/>
-                      </a:endParaRPr>
-                    </a:p>
-                  </a:txBody>
-                  <a:tcPr marL="64008" marR="64008" marT="0" marB="0" anchor="ctr">
-                    <a:lnL w="6350" cap="flat" cmpd="sng" algn="ctr">
-                      <a:solidFill>
-                        <a:srgbClr val="D5DBE3"/>
-                      </a:solidFill>
-                      <a:prstDash val="solid"/>
-                      <a:round/>
-                      <a:headEnd type="none" w="med" len="med"/>
-                      <a:tailEnd type="none" w="med" len="med"/>
-                    </a:lnL>
-                    <a:lnR w="6350" cap="flat" cmpd="sng" algn="ctr">
-                      <a:solidFill>
-                        <a:srgbClr val="D5DBE3"/>
-                      </a:solidFill>
-                      <a:prstDash val="solid"/>
-                      <a:round/>
-                      <a:headEnd type="none" w="med" len="med"/>
-                      <a:tailEnd type="none" w="med" len="med"/>
-                    </a:lnR>
-                    <a:lnT w="6350" cap="flat" cmpd="sng" algn="ctr">
-                      <a:solidFill>
-                        <a:srgbClr val="D5DBE3"/>
-                      </a:solidFill>
-                      <a:prstDash val="solid"/>
-                      <a:round/>
-                      <a:headEnd type="none" w="med" len="med"/>
-                      <a:tailEnd type="none" w="med" len="med"/>
-                    </a:lnT>
-                    <a:lnB w="6350" cap="flat" cmpd="sng" algn="ctr">
-                      <a:solidFill>
-                        <a:srgbClr val="D5DBE3"/>
-                      </a:solidFill>
-                      <a:prstDash val="solid"/>
-                      <a:round/>
-                      <a:headEnd type="none" w="med" len="med"/>
-                      <a:tailEnd type="none" w="med" len="med"/>
-                    </a:lnB>
-                  </a:tcPr>
-                </a:tc>
-                <a:tc>
-                  <a:txBody>
-                    <a:bodyPr/>
-                    <a:lstStyle/>
-                    <a:p>
-                      <a:pPr algn="r" indent="0" marL="0">
-                        <a:buNone/>
-                      </a:pPr>
-                      <a:r>
-                        <a:rPr lang="en-US" sz="950" b="1" dirty="0">
-                          <a:solidFill>
-                            <a:srgbClr val="5E9B7E"/>
-                          </a:solidFill>
-                          <a:latin typeface="Calibri" pitchFamily="34" charset="0"/>
-                          <a:ea typeface="Calibri" pitchFamily="34" charset="-122"/>
-                          <a:cs typeface="Calibri" pitchFamily="34" charset="-120"/>
-                        </a:rPr>
-                        <a:t>+32,2</a:t>
-                      </a:r>
-                      <a:endParaRPr lang="en-US" sz="950" dirty="0">
-                        <a:latin typeface="Calibri" charset="0"/>
-                        <a:ea typeface="Calibri" charset="0"/>
-                        <a:cs typeface="Calibri" charset="0"/>
-                      </a:endParaRPr>
-                    </a:p>
-                  </a:txBody>
-                  <a:tcPr marL="64008" marR="64008" marT="0" marB="0" anchor="ctr">
-                    <a:lnL w="6350" cap="flat" cmpd="sng" algn="ctr">
-                      <a:solidFill>
-                        <a:srgbClr val="D5DBE3"/>
-                      </a:solidFill>
-                      <a:prstDash val="solid"/>
-                      <a:round/>
-                      <a:headEnd type="none" w="med" len="med"/>
-                      <a:tailEnd type="none" w="med" len="med"/>
-                    </a:lnL>
-                    <a:lnR w="6350" cap="flat" cmpd="sng" algn="ctr">
-                      <a:solidFill>
-                        <a:srgbClr val="D5DBE3"/>
-                      </a:solidFill>
-                      <a:prstDash val="solid"/>
-                      <a:round/>
-                      <a:headEnd type="none" w="med" len="med"/>
-                      <a:tailEnd type="none" w="med" len="med"/>
-                    </a:lnR>
-                    <a:lnT w="6350" cap="flat" cmpd="sng" algn="ctr">
-                      <a:solidFill>
-                        <a:srgbClr val="D5DBE3"/>
-                      </a:solidFill>
-                      <a:prstDash val="solid"/>
-                      <a:round/>
-                      <a:headEnd type="none" w="med" len="med"/>
-                      <a:tailEnd type="none" w="med" len="med"/>
-                    </a:lnT>
-                    <a:lnB w="6350" cap="flat" cmpd="sng" algn="ctr">
-                      <a:solidFill>
-                        <a:srgbClr val="D5DBE3"/>
-                      </a:solidFill>
-                      <a:prstDash val="solid"/>
-                      <a:round/>
-                      <a:headEnd type="none" w="med" len="med"/>
-                      <a:tailEnd type="none" w="med" len="med"/>
-                    </a:lnB>
                   </a:tcPr>
                 </a:tc>
               </a:tr>
@@ -13136,7 +12154,7 @@
         </p:nvSpPr>
         <p:spPr>
           <a:xfrm>
-            <a:off x="457200" y="5303520"/>
+            <a:off x="457200" y="5029200"/>
             <a:ext cx="201168" cy="146304"/>
           </a:xfrm>
           <a:prstGeom prst="rect">
@@ -13161,7 +12179,7 @@
         </p:nvSpPr>
         <p:spPr>
           <a:xfrm>
-            <a:off x="731520" y="5276088"/>
+            <a:off x="731520" y="5001768"/>
             <a:ext cx="2011680" cy="201168"/>
           </a:xfrm>
           <a:prstGeom prst="rect">
@@ -13200,7 +12218,7 @@
         </p:nvSpPr>
         <p:spPr>
           <a:xfrm>
-            <a:off x="2834640" y="5303520"/>
+            <a:off x="2834640" y="5029200"/>
             <a:ext cx="201168" cy="146304"/>
           </a:xfrm>
           <a:prstGeom prst="rect">
@@ -13225,7 +12243,7 @@
         </p:nvSpPr>
         <p:spPr>
           <a:xfrm>
-            <a:off x="3108960" y="5276088"/>
+            <a:off x="3108960" y="5001768"/>
             <a:ext cx="2011680" cy="201168"/>
           </a:xfrm>
           <a:prstGeom prst="rect">
@@ -13264,7 +12282,7 @@
         </p:nvSpPr>
         <p:spPr>
           <a:xfrm>
-            <a:off x="5212080" y="5303520"/>
+            <a:off x="5212080" y="5029200"/>
             <a:ext cx="201168" cy="146304"/>
           </a:xfrm>
           <a:prstGeom prst="rect">
@@ -13289,7 +12307,7 @@
         </p:nvSpPr>
         <p:spPr>
           <a:xfrm>
-            <a:off x="5486400" y="5276088"/>
+            <a:off x="5486400" y="5001768"/>
             <a:ext cx="2011680" cy="201168"/>
           </a:xfrm>
           <a:prstGeom prst="rect">
@@ -13328,7 +12346,7 @@
         </p:nvSpPr>
         <p:spPr>
           <a:xfrm>
-            <a:off x="457200" y="5513832"/>
+            <a:off x="457200" y="5239512"/>
             <a:ext cx="11247120" cy="384048"/>
           </a:xfrm>
           <a:prstGeom prst="rect">
@@ -13371,7 +12389,7 @@
                 <a:ea typeface="Calibri" pitchFamily="34" charset="-122"/>
                 <a:cs typeface="Calibri" pitchFamily="34" charset="-120"/>
               </a:rPr>
-              <a:t>chaque société paie depuis ses comptes « Dédié besoin de fonctionnement », impôts et cotisations en premier ; chaque projet paie depuis son compte « Dédié paiement CPI » ; les échéances de prêts passent par le compte de service de la dette.</a:t>
+              <a:t>chaque société paie depuis ses comptes « Dédié besoin de fonctionnement », impôts et cotisations en premier ; chaque projet paie depuis son compte « Dédié paiement CPI » ; les échéances de prêts FIRST sont payées en fonctionnement ; les comptes indisponibles sont exclus.</a:t>
             </a:r>
             <a:endParaRPr lang="en-US" sz="1100" dirty="0"/>
           </a:p>
@@ -13583,7 +12601,7 @@
                 <a:ea typeface="Calibri" pitchFamily="34" charset="-122"/>
                 <a:cs typeface="Calibri" pitchFamily="34" charset="-120"/>
               </a:rPr>
-              <a:t>Déficits à couvrir d'ici S5 : 2 601,5 M – MFCFA</a:t>
+              <a:t>Déficits à couvrir d'ici S5 : 2 776,8 M – MFCFA</a:t>
             </a:r>
             <a:endParaRPr lang="en-US" sz="1300" dirty="0"/>
           </a:p>
@@ -14704,7 +13722,7 @@
                           <a:ea typeface="Calibri" pitchFamily="34" charset="-122"/>
                           <a:cs typeface="Calibri" pitchFamily="34" charset="-120"/>
                         </a:rPr>
-                        <a:t>RIVIERA</a:t>
+                        <a:t>FIRST</a:t>
                       </a:r>
                       <a:endParaRPr lang="en-US" sz="950" dirty="0">
                         <a:latin typeface="Calibri" charset="0"/>
@@ -14769,7 +13787,7 @@
                           <a:ea typeface="Calibri" pitchFamily="34" charset="-122"/>
                           <a:cs typeface="Calibri" pitchFamily="34" charset="-120"/>
                         </a:rPr>
-                        <a:t>87,3</a:t>
+                        <a:t>175,3</a:t>
                       </a:r>
                       <a:endParaRPr lang="en-US" sz="950" dirty="0">
                         <a:latin typeface="Calibri" charset="0"/>
@@ -14969,7 +13987,7 @@
                           <a:ea typeface="Calibri" pitchFamily="34" charset="-122"/>
                           <a:cs typeface="Calibri" pitchFamily="34" charset="-120"/>
                         </a:rPr>
-                        <a:t>IMMONEUF</a:t>
+                        <a:t>RIVIERA</a:t>
                       </a:r>
                       <a:endParaRPr lang="en-US" sz="950" dirty="0">
                         <a:latin typeface="Calibri" charset="0"/>
@@ -15034,7 +14052,7 @@
                           <a:ea typeface="Calibri" pitchFamily="34" charset="-122"/>
                           <a:cs typeface="Calibri" pitchFamily="34" charset="-120"/>
                         </a:rPr>
-                        <a:t>66,0</a:t>
+                        <a:t>87,3</a:t>
                       </a:r>
                       <a:endParaRPr lang="en-US" sz="950" dirty="0">
                         <a:latin typeface="Calibri" charset="0"/>
@@ -15234,7 +14252,7 @@
                           <a:ea typeface="Calibri" pitchFamily="34" charset="-122"/>
                           <a:cs typeface="Calibri" pitchFamily="34" charset="-120"/>
                         </a:rPr>
-                        <a:t>RHD CI</a:t>
+                        <a:t>IMMONEUF</a:t>
                       </a:r>
                       <a:endParaRPr lang="en-US" sz="950" dirty="0">
                         <a:latin typeface="Calibri" charset="0"/>
@@ -15299,7 +14317,7 @@
                           <a:ea typeface="Calibri" pitchFamily="34" charset="-122"/>
                           <a:cs typeface="Calibri" pitchFamily="34" charset="-120"/>
                         </a:rPr>
-                        <a:t>50,0</a:t>
+                        <a:t>66,0</a:t>
                       </a:r>
                       <a:endParaRPr lang="en-US" sz="950" dirty="0">
                         <a:latin typeface="Calibri" charset="0"/>
@@ -15499,7 +14517,7 @@
                           <a:ea typeface="Calibri" pitchFamily="34" charset="-122"/>
                           <a:cs typeface="Calibri" pitchFamily="34" charset="-120"/>
                         </a:rPr>
-                        <a:t>AB CENTER</a:t>
+                        <a:t>RHD CI</a:t>
                       </a:r>
                       <a:endParaRPr lang="en-US" sz="950" dirty="0">
                         <a:latin typeface="Calibri" charset="0"/>
@@ -15564,7 +14582,7 @@
                           <a:ea typeface="Calibri" pitchFamily="34" charset="-122"/>
                           <a:cs typeface="Calibri" pitchFamily="34" charset="-120"/>
                         </a:rPr>
-                        <a:t>6,3</a:t>
+                        <a:t>50,0</a:t>
                       </a:r>
                       <a:endParaRPr lang="en-US" sz="950" dirty="0">
                         <a:latin typeface="Calibri" charset="0"/>
@@ -15764,7 +14782,7 @@
                           <a:ea typeface="Calibri" pitchFamily="34" charset="-122"/>
                           <a:cs typeface="Calibri" pitchFamily="34" charset="-120"/>
                         </a:rPr>
-                        <a:t>ODALYS CI</a:t>
+                        <a:t>AB CENTER</a:t>
                       </a:r>
                       <a:endParaRPr lang="en-US" sz="950" dirty="0">
                         <a:latin typeface="Calibri" charset="0"/>
@@ -15829,7 +14847,7 @@
                           <a:ea typeface="Calibri" pitchFamily="34" charset="-122"/>
                           <a:cs typeface="Calibri" pitchFamily="34" charset="-120"/>
                         </a:rPr>
-                        <a:t>3,5</a:t>
+                        <a:t>6,3</a:t>
                       </a:r>
                       <a:endParaRPr lang="en-US" sz="950" dirty="0">
                         <a:latin typeface="Calibri" charset="0"/>
@@ -16029,7 +15047,7 @@
                           <a:ea typeface="Calibri" pitchFamily="34" charset="-122"/>
                           <a:cs typeface="Calibri" pitchFamily="34" charset="-120"/>
                         </a:rPr>
-                        <a:t>RIVIERA – fonds projet</a:t>
+                        <a:t>ODALYS CI</a:t>
                       </a:r>
                       <a:endParaRPr lang="en-US" sz="950" dirty="0">
                         <a:latin typeface="Calibri" charset="0"/>
@@ -16094,7 +15112,7 @@
                           <a:ea typeface="Calibri" pitchFamily="34" charset="-122"/>
                           <a:cs typeface="Calibri" pitchFamily="34" charset="-120"/>
                         </a:rPr>
-                        <a:t>601,4</a:t>
+                        <a:t>3,5</a:t>
                       </a:r>
                       <a:endParaRPr lang="en-US" sz="950" dirty="0">
                         <a:latin typeface="Calibri" charset="0"/>
@@ -16162,7 +15180,7 @@
                           <a:ea typeface="Calibri" pitchFamily="34" charset="-122"/>
                           <a:cs typeface="Calibri" pitchFamily="34" charset="-120"/>
                         </a:rPr>
-                        <a:t>Compte à arbitrer (C) ou prêts</a:t>
+                        <a:t>Spot (A) ou avance (B)</a:t>
                       </a:r>
                       <a:endParaRPr lang="en-US" sz="950" dirty="0">
                         <a:latin typeface="Calibri" charset="0"/>
@@ -16227,7 +15245,7 @@
                           <a:ea typeface="Calibri" pitchFamily="34" charset="-122"/>
                           <a:cs typeface="Calibri" pitchFamily="34" charset="-120"/>
                         </a:rPr>
-                        <a:t>S2</a:t>
+                        <a:t>S1</a:t>
                       </a:r>
                       <a:endParaRPr lang="en-US" sz="950" dirty="0">
                         <a:latin typeface="Calibri" charset="0"/>
@@ -16294,7 +15312,7 @@
                           <a:ea typeface="Calibri" pitchFamily="34" charset="-122"/>
                           <a:cs typeface="Calibri" pitchFamily="34" charset="-120"/>
                         </a:rPr>
-                        <a:t>TERASSON – fonds projet</a:t>
+                        <a:t>RIVIERA – fonds projet</a:t>
                       </a:r>
                       <a:endParaRPr lang="en-US" sz="950" dirty="0">
                         <a:latin typeface="Calibri" charset="0"/>
@@ -16359,7 +15377,7 @@
                           <a:ea typeface="Calibri" pitchFamily="34" charset="-122"/>
                           <a:cs typeface="Calibri" pitchFamily="34" charset="-120"/>
                         </a:rPr>
-                        <a:t>1 205,9</a:t>
+                        <a:t>601,4</a:t>
                       </a:r>
                       <a:endParaRPr lang="en-US" sz="950" dirty="0">
                         <a:latin typeface="Calibri" charset="0"/>
@@ -16492,6 +15510,271 @@
                           <a:ea typeface="Calibri" pitchFamily="34" charset="-122"/>
                           <a:cs typeface="Calibri" pitchFamily="34" charset="-120"/>
                         </a:rPr>
+                        <a:t>S2</a:t>
+                      </a:r>
+                      <a:endParaRPr lang="en-US" sz="950" dirty="0">
+                        <a:latin typeface="Calibri" charset="0"/>
+                        <a:ea typeface="Calibri" charset="0"/>
+                        <a:cs typeface="Calibri" charset="0"/>
+                      </a:endParaRPr>
+                    </a:p>
+                  </a:txBody>
+                  <a:tcPr marL="64008" marR="64008" marT="0" marB="0" anchor="ctr">
+                    <a:lnL w="6350" cap="flat" cmpd="sng" algn="ctr">
+                      <a:solidFill>
+                        <a:srgbClr val="D5DBE3"/>
+                      </a:solidFill>
+                      <a:prstDash val="solid"/>
+                      <a:round/>
+                      <a:headEnd type="none" w="med" len="med"/>
+                      <a:tailEnd type="none" w="med" len="med"/>
+                    </a:lnL>
+                    <a:lnR w="6350" cap="flat" cmpd="sng" algn="ctr">
+                      <a:solidFill>
+                        <a:srgbClr val="D5DBE3"/>
+                      </a:solidFill>
+                      <a:prstDash val="solid"/>
+                      <a:round/>
+                      <a:headEnd type="none" w="med" len="med"/>
+                      <a:tailEnd type="none" w="med" len="med"/>
+                    </a:lnR>
+                    <a:lnT w="6350" cap="flat" cmpd="sng" algn="ctr">
+                      <a:solidFill>
+                        <a:srgbClr val="D5DBE3"/>
+                      </a:solidFill>
+                      <a:prstDash val="solid"/>
+                      <a:round/>
+                      <a:headEnd type="none" w="med" len="med"/>
+                      <a:tailEnd type="none" w="med" len="med"/>
+                    </a:lnT>
+                    <a:lnB w="6350" cap="flat" cmpd="sng" algn="ctr">
+                      <a:solidFill>
+                        <a:srgbClr val="D5DBE3"/>
+                      </a:solidFill>
+                      <a:prstDash val="solid"/>
+                      <a:round/>
+                      <a:headEnd type="none" w="med" len="med"/>
+                      <a:tailEnd type="none" w="med" len="med"/>
+                    </a:lnB>
+                  </a:tcPr>
+                </a:tc>
+              </a:tr>
+              <a:tr h="237744">
+                <a:tc>
+                  <a:txBody>
+                    <a:bodyPr/>
+                    <a:lstStyle/>
+                    <a:p>
+                      <a:pPr algn="l" indent="0" marL="0">
+                        <a:buNone/>
+                      </a:pPr>
+                      <a:r>
+                        <a:rPr lang="en-US" sz="950" b="1" dirty="0">
+                          <a:solidFill>
+                            <a:srgbClr val="1F2933"/>
+                          </a:solidFill>
+                          <a:latin typeface="Calibri" pitchFamily="34" charset="0"/>
+                          <a:ea typeface="Calibri" pitchFamily="34" charset="-122"/>
+                          <a:cs typeface="Calibri" pitchFamily="34" charset="-120"/>
+                        </a:rPr>
+                        <a:t>TERASSON – fonds projet</a:t>
+                      </a:r>
+                      <a:endParaRPr lang="en-US" sz="950" dirty="0">
+                        <a:latin typeface="Calibri" charset="0"/>
+                        <a:ea typeface="Calibri" charset="0"/>
+                        <a:cs typeface="Calibri" charset="0"/>
+                      </a:endParaRPr>
+                    </a:p>
+                  </a:txBody>
+                  <a:tcPr marL="64008" marR="64008" marT="0" marB="0" anchor="ctr">
+                    <a:lnL w="6350" cap="flat" cmpd="sng" algn="ctr">
+                      <a:solidFill>
+                        <a:srgbClr val="D5DBE3"/>
+                      </a:solidFill>
+                      <a:prstDash val="solid"/>
+                      <a:round/>
+                      <a:headEnd type="none" w="med" len="med"/>
+                      <a:tailEnd type="none" w="med" len="med"/>
+                    </a:lnL>
+                    <a:lnR w="6350" cap="flat" cmpd="sng" algn="ctr">
+                      <a:solidFill>
+                        <a:srgbClr val="D5DBE3"/>
+                      </a:solidFill>
+                      <a:prstDash val="solid"/>
+                      <a:round/>
+                      <a:headEnd type="none" w="med" len="med"/>
+                      <a:tailEnd type="none" w="med" len="med"/>
+                    </a:lnR>
+                    <a:lnT w="6350" cap="flat" cmpd="sng" algn="ctr">
+                      <a:solidFill>
+                        <a:srgbClr val="D5DBE3"/>
+                      </a:solidFill>
+                      <a:prstDash val="solid"/>
+                      <a:round/>
+                      <a:headEnd type="none" w="med" len="med"/>
+                      <a:tailEnd type="none" w="med" len="med"/>
+                    </a:lnT>
+                    <a:lnB w="6350" cap="flat" cmpd="sng" algn="ctr">
+                      <a:solidFill>
+                        <a:srgbClr val="D5DBE3"/>
+                      </a:solidFill>
+                      <a:prstDash val="solid"/>
+                      <a:round/>
+                      <a:headEnd type="none" w="med" len="med"/>
+                      <a:tailEnd type="none" w="med" len="med"/>
+                    </a:lnB>
+                  </a:tcPr>
+                </a:tc>
+                <a:tc>
+                  <a:txBody>
+                    <a:bodyPr/>
+                    <a:lstStyle/>
+                    <a:p>
+                      <a:pPr algn="r" indent="0" marL="0">
+                        <a:buNone/>
+                      </a:pPr>
+                      <a:r>
+                        <a:rPr lang="en-US" sz="950" b="1" dirty="0">
+                          <a:solidFill>
+                            <a:srgbClr val="B3261E"/>
+                          </a:solidFill>
+                          <a:latin typeface="Calibri" pitchFamily="34" charset="0"/>
+                          <a:ea typeface="Calibri" pitchFamily="34" charset="-122"/>
+                          <a:cs typeface="Calibri" pitchFamily="34" charset="-120"/>
+                        </a:rPr>
+                        <a:t>1 205,9</a:t>
+                      </a:r>
+                      <a:endParaRPr lang="en-US" sz="950" dirty="0">
+                        <a:latin typeface="Calibri" charset="0"/>
+                        <a:ea typeface="Calibri" charset="0"/>
+                        <a:cs typeface="Calibri" charset="0"/>
+                      </a:endParaRPr>
+                    </a:p>
+                  </a:txBody>
+                  <a:tcPr marL="64008" marR="64008" marT="0" marB="0" anchor="ctr">
+                    <a:lnL w="6350" cap="flat" cmpd="sng" algn="ctr">
+                      <a:solidFill>
+                        <a:srgbClr val="D5DBE3"/>
+                      </a:solidFill>
+                      <a:prstDash val="solid"/>
+                      <a:round/>
+                      <a:headEnd type="none" w="med" len="med"/>
+                      <a:tailEnd type="none" w="med" len="med"/>
+                    </a:lnL>
+                    <a:lnR w="6350" cap="flat" cmpd="sng" algn="ctr">
+                      <a:solidFill>
+                        <a:srgbClr val="D5DBE3"/>
+                      </a:solidFill>
+                      <a:prstDash val="solid"/>
+                      <a:round/>
+                      <a:headEnd type="none" w="med" len="med"/>
+                      <a:tailEnd type="none" w="med" len="med"/>
+                    </a:lnR>
+                    <a:lnT w="6350" cap="flat" cmpd="sng" algn="ctr">
+                      <a:solidFill>
+                        <a:srgbClr val="D5DBE3"/>
+                      </a:solidFill>
+                      <a:prstDash val="solid"/>
+                      <a:round/>
+                      <a:headEnd type="none" w="med" len="med"/>
+                      <a:tailEnd type="none" w="med" len="med"/>
+                    </a:lnT>
+                    <a:lnB w="6350" cap="flat" cmpd="sng" algn="ctr">
+                      <a:solidFill>
+                        <a:srgbClr val="D5DBE3"/>
+                      </a:solidFill>
+                      <a:prstDash val="solid"/>
+                      <a:round/>
+                      <a:headEnd type="none" w="med" len="med"/>
+                      <a:tailEnd type="none" w="med" len="med"/>
+                    </a:lnB>
+                    <a:solidFill>
+                      <a:srgbClr val="F7E7E5"/>
+                    </a:solidFill>
+                  </a:tcPr>
+                </a:tc>
+                <a:tc>
+                  <a:txBody>
+                    <a:bodyPr/>
+                    <a:lstStyle/>
+                    <a:p>
+                      <a:pPr algn="l" indent="0" marL="0">
+                        <a:buNone/>
+                      </a:pPr>
+                      <a:r>
+                        <a:rPr lang="en-US" sz="950" dirty="0">
+                          <a:solidFill>
+                            <a:srgbClr val="1F2933"/>
+                          </a:solidFill>
+                          <a:latin typeface="Calibri" pitchFamily="34" charset="0"/>
+                          <a:ea typeface="Calibri" pitchFamily="34" charset="-122"/>
+                          <a:cs typeface="Calibri" pitchFamily="34" charset="-120"/>
+                        </a:rPr>
+                        <a:t>Compte à arbitrer (C) ou prêts</a:t>
+                      </a:r>
+                      <a:endParaRPr lang="en-US" sz="950" dirty="0">
+                        <a:latin typeface="Calibri" charset="0"/>
+                        <a:ea typeface="Calibri" charset="0"/>
+                        <a:cs typeface="Calibri" charset="0"/>
+                      </a:endParaRPr>
+                    </a:p>
+                  </a:txBody>
+                  <a:tcPr marL="64008" marR="64008" marT="0" marB="0" anchor="ctr">
+                    <a:lnL w="6350" cap="flat" cmpd="sng" algn="ctr">
+                      <a:solidFill>
+                        <a:srgbClr val="D5DBE3"/>
+                      </a:solidFill>
+                      <a:prstDash val="solid"/>
+                      <a:round/>
+                      <a:headEnd type="none" w="med" len="med"/>
+                      <a:tailEnd type="none" w="med" len="med"/>
+                    </a:lnL>
+                    <a:lnR w="6350" cap="flat" cmpd="sng" algn="ctr">
+                      <a:solidFill>
+                        <a:srgbClr val="D5DBE3"/>
+                      </a:solidFill>
+                      <a:prstDash val="solid"/>
+                      <a:round/>
+                      <a:headEnd type="none" w="med" len="med"/>
+                      <a:tailEnd type="none" w="med" len="med"/>
+                    </a:lnR>
+                    <a:lnT w="6350" cap="flat" cmpd="sng" algn="ctr">
+                      <a:solidFill>
+                        <a:srgbClr val="D5DBE3"/>
+                      </a:solidFill>
+                      <a:prstDash val="solid"/>
+                      <a:round/>
+                      <a:headEnd type="none" w="med" len="med"/>
+                      <a:tailEnd type="none" w="med" len="med"/>
+                    </a:lnT>
+                    <a:lnB w="6350" cap="flat" cmpd="sng" algn="ctr">
+                      <a:solidFill>
+                        <a:srgbClr val="D5DBE3"/>
+                      </a:solidFill>
+                      <a:prstDash val="solid"/>
+                      <a:round/>
+                      <a:headEnd type="none" w="med" len="med"/>
+                      <a:tailEnd type="none" w="med" len="med"/>
+                    </a:lnB>
+                  </a:tcPr>
+                </a:tc>
+                <a:tc>
+                  <a:txBody>
+                    <a:bodyPr/>
+                    <a:lstStyle/>
+                    <a:p>
+                      <a:pPr algn="ctr" indent="0" marL="0">
+                        <a:buNone/>
+                      </a:pPr>
+                      <a:r>
+                        <a:rPr lang="en-US" sz="950" dirty="0">
+                          <a:solidFill>
+                            <a:srgbClr val="1F2933"/>
+                          </a:solidFill>
+                          <a:latin typeface="Calibri" pitchFamily="34" charset="0"/>
+                          <a:ea typeface="Calibri" pitchFamily="34" charset="-122"/>
+                          <a:cs typeface="Calibri" pitchFamily="34" charset="-120"/>
+                        </a:rPr>
                         <a:t>S1</a:t>
                       </a:r>
                       <a:endParaRPr lang="en-US" sz="950" dirty="0">
@@ -16627,7 +15910,7 @@
                           <a:ea typeface="Calibri" pitchFamily="34" charset="-122"/>
                           <a:cs typeface="Calibri" pitchFamily="34" charset="-120"/>
                         </a:rPr>
-                        <a:t>2 601,5</a:t>
+                        <a:t>2 776,8</a:t>
                       </a:r>
                       <a:endParaRPr lang="en-US" sz="950" dirty="0">
                         <a:latin typeface="Calibri" charset="0"/>
@@ -16894,7 +16177,7 @@
                 <a:ea typeface="Calibri" pitchFamily="34" charset="-122"/>
                 <a:cs typeface="Calibri" pitchFamily="34" charset="-120"/>
               </a:rPr>
-              <a:t>794,2 M</a:t>
+              <a:t>969,5 M</a:t>
             </a:r>
             <a:endParaRPr lang="en-US" sz="1400" dirty="0"/>
           </a:p>
@@ -16933,7 +16216,7 @@
                 <a:ea typeface="Calibri" pitchFamily="34" charset="-122"/>
                 <a:cs typeface="Calibri" pitchFamily="34" charset="-120"/>
               </a:rPr>
-              <a:t>Un dossier par société en déficit (8), tiré par tranche : 665,7 M pour S1, le solde à l'échéance. Remboursement à la mise en place des financements.</a:t>
+              <a:t>Un dossier par société en déficit (9), tiré par tranche : 837,5 M pour S1, le solde à l'échéance. Remboursement à la mise en place des financements.</a:t>
             </a:r>
             <a:endParaRPr lang="en-US" sz="1100" dirty="0"/>
           </a:p>
@@ -17036,7 +16319,7 @@
                 <a:ea typeface="Calibri" pitchFamily="34" charset="-122"/>
                 <a:cs typeface="Calibri" pitchFamily="34" charset="-120"/>
               </a:rPr>
-              <a:t>246,0 M</a:t>
+              <a:t>102,7 M</a:t>
             </a:r>
             <a:endParaRPr lang="en-US" sz="1400" dirty="0"/>
           </a:p>
@@ -17075,7 +16358,7 @@
                 <a:ea typeface="Calibri" pitchFamily="34" charset="-122"/>
                 <a:cs typeface="Calibri" pitchFamily="34" charset="-120"/>
               </a:rPr>
-              <a:t>Excédents en fin S5 : FIRST 143,3 M, PICI 100,0 M, INFI SOFT 2,8 M. Ils couvriraient 31 % des déficits des sociétés, avec conventions de compte courant.</a:t>
+              <a:t>Excédents en fin S5 : PICI 100,0 M, INFI SOFT 2,8 M. Ils couvriraient 11 % des déficits des sociétés, avec conventions de compte courant.</a:t>
             </a:r>
             <a:endParaRPr lang="en-US" sz="1100" dirty="0"/>
           </a:p>
@@ -17231,8 +16514,8 @@
         </p:nvSpPr>
         <p:spPr>
           <a:xfrm>
-            <a:off x="457200" y="4590288"/>
-            <a:ext cx="5760720" cy="1719072"/>
+            <a:off x="457200" y="4850892"/>
+            <a:ext cx="5760720" cy="1458468"/>
           </a:xfrm>
           <a:prstGeom prst="rect">
             <a:avLst/>
@@ -17256,8 +16539,8 @@
         </p:nvSpPr>
         <p:spPr>
           <a:xfrm>
-            <a:off x="640080" y="4681728"/>
-            <a:ext cx="5394960" cy="1554480"/>
+            <a:off x="640080" y="4942332"/>
+            <a:ext cx="5394960" cy="1293876"/>
           </a:xfrm>
           <a:prstGeom prst="rect">
             <a:avLst/>
@@ -17305,7 +16588,7 @@
                 <a:ea typeface="Calibri" pitchFamily="34" charset="-122"/>
                 <a:cs typeface="Calibri" pitchFamily="34" charset="-120"/>
               </a:rPr>
-              <a:t>Choisir la solution des sociétés en déficit (794,2 M) : crédit spot, avances intragroupe ou combinaison.</a:t>
+              <a:t>Choisir la solution des sociétés en déficit (969,5 M) : crédit spot, avances intragroupe ou combinaison.</a:t>
             </a:r>
             <a:endParaRPr lang="en-US" sz="1300" dirty="0"/>
           </a:p>
@@ -17347,7 +16630,7 @@
                 <a:ea typeface="Calibri" pitchFamily="34" charset="-122"/>
                 <a:cs typeface="Calibri" pitchFamily="34" charset="-120"/>
               </a:rPr>
-              <a:t>Confirmer les encaissements prévus (3,6 M), dont CLIENT.</a:t>
+              <a:t>Confirmer les encaissements prévus (133,2 M), dont Loyer octobre 2026 – DC/BR.</a:t>
             </a:r>
             <a:endParaRPr lang="en-US" sz="1300" dirty="0"/>
           </a:p>
@@ -17368,7 +16651,7 @@
                 <a:ea typeface="Calibri" pitchFamily="34" charset="-122"/>
                 <a:cs typeface="Calibri" pitchFamily="34" charset="-120"/>
               </a:rPr>
-              <a:t>Affecter les loyers de octobre 2026 (129,6 M) au service de la dette.</a:t>
+              <a:t>Confirmer les loyers de octobre 2026 (129,6 M), encaissés en fonctionnement de FIRST.</a:t>
             </a:r>
             <a:endParaRPr lang="en-US" sz="1300" dirty="0"/>
           </a:p>
@@ -17733,7 +17016,7 @@
                 <a:ea typeface="Calibri" pitchFamily="34" charset="-122"/>
                 <a:cs typeface="Calibri" pitchFamily="34" charset="-120"/>
               </a:rPr>
-              <a:t>7 024,9 M</a:t>
+              <a:t>6 674,2 M</a:t>
             </a:r>
             <a:endParaRPr lang="en-US" sz="2200" dirty="0"/>
           </a:p>
@@ -17838,7 +17121,7 @@
                 <a:ea typeface="Calibri" pitchFamily="34" charset="-122"/>
                 <a:cs typeface="Calibri" pitchFamily="34" charset="-120"/>
               </a:rPr>
-              <a:t>À décider</a:t>
+              <a:t>500,0 M</a:t>
             </a:r>
             <a:endParaRPr lang="en-US" sz="2200" dirty="0"/>
           </a:p>
@@ -17877,7 +17160,7 @@
                 <a:ea typeface="Calibri" pitchFamily="34" charset="-122"/>
                 <a:cs typeface="Calibri" pitchFamily="34" charset="-120"/>
               </a:rPr>
-              <a:t>Aucun virement de nivellement saisi</a:t>
+              <a:t>1 virement(s) de nivellement saisi(s)</a:t>
             </a:r>
             <a:endParaRPr lang="en-US" sz="1050" dirty="0"/>
           </a:p>
@@ -17943,7 +17226,7 @@
                 <a:ea typeface="Calibri" pitchFamily="34" charset="-122"/>
                 <a:cs typeface="Calibri" pitchFamily="34" charset="-120"/>
               </a:rPr>
-              <a:t>1 387,3 M</a:t>
+              <a:t>1 480,5 M</a:t>
             </a:r>
             <a:endParaRPr lang="en-US" sz="2200" dirty="0"/>
           </a:p>
@@ -17982,7 +17265,7 @@
                 <a:ea typeface="Calibri" pitchFamily="34" charset="-122"/>
                 <a:cs typeface="Calibri" pitchFamily="34" charset="-120"/>
               </a:rPr>
-              <a:t>Reste à financer en S1 avant nivellement</a:t>
+              <a:t>Reste à financer en S1 après virements</a:t>
             </a:r>
             <a:endParaRPr lang="en-US" sz="1050" dirty="0"/>
           </a:p>
@@ -19634,7 +18917,7 @@
                           <a:ea typeface="Calibri" pitchFamily="34" charset="-122"/>
                           <a:cs typeface="Calibri" pitchFamily="34" charset="-120"/>
                         </a:rPr>
-                        <a:t>SCI FIRST – dette</a:t>
+                        <a:t>SCI FIRST</a:t>
                       </a:r>
                       <a:endParaRPr lang="en-US" sz="850" dirty="0">
                         <a:latin typeface="Calibri" charset="0"/>
@@ -19699,7 +18982,7 @@
                           <a:ea typeface="Calibri" pitchFamily="34" charset="-122"/>
                           <a:cs typeface="Calibri" pitchFamily="34" charset="-120"/>
                         </a:rPr>
-                        <a:t>350,7</a:t>
+                        <a:t>236,1</a:t>
                       </a:r>
                       <a:endParaRPr lang="en-US" sz="850" dirty="0">
                         <a:latin typeface="Calibri" charset="0"/>
@@ -19764,7 +19047,7 @@
                           <a:ea typeface="Calibri" pitchFamily="34" charset="-122"/>
                           <a:cs typeface="Calibri" pitchFamily="34" charset="-120"/>
                         </a:rPr>
-                        <a:t>-343,9</a:t>
+                        <a:t>-407,9</a:t>
                       </a:r>
                       <a:endParaRPr lang="en-US" sz="850" dirty="0">
                         <a:latin typeface="Calibri" charset="0"/>
@@ -19888,1581 +19171,13 @@
                       <a:r>
                         <a:rPr lang="en-US" sz="850" b="1" dirty="0">
                           <a:solidFill>
-                            <a:srgbClr val="5E9B7E"/>
-                          </a:solidFill>
-                          <a:latin typeface="Calibri" pitchFamily="34" charset="0"/>
-                          <a:ea typeface="Calibri" pitchFamily="34" charset="-122"/>
-                          <a:cs typeface="Calibri" pitchFamily="34" charset="-120"/>
-                        </a:rPr>
-                        <a:t>6,8</a:t>
-                      </a:r>
-                      <a:endParaRPr lang="en-US" sz="850" dirty="0">
-                        <a:latin typeface="Calibri" charset="0"/>
-                        <a:ea typeface="Calibri" charset="0"/>
-                        <a:cs typeface="Calibri" charset="0"/>
-                      </a:endParaRPr>
-                    </a:p>
-                  </a:txBody>
-                  <a:tcPr marL="64008" marR="64008" marT="0" marB="0" anchor="ctr">
-                    <a:lnL w="6350" cap="flat" cmpd="sng" algn="ctr">
-                      <a:solidFill>
-                        <a:srgbClr val="D5DBE3"/>
-                      </a:solidFill>
-                      <a:prstDash val="solid"/>
-                      <a:round/>
-                      <a:headEnd type="none" w="med" len="med"/>
-                      <a:tailEnd type="none" w="med" len="med"/>
-                    </a:lnL>
-                    <a:lnR w="6350" cap="flat" cmpd="sng" algn="ctr">
-                      <a:solidFill>
-                        <a:srgbClr val="D5DBE3"/>
-                      </a:solidFill>
-                      <a:prstDash val="solid"/>
-                      <a:round/>
-                      <a:headEnd type="none" w="med" len="med"/>
-                      <a:tailEnd type="none" w="med" len="med"/>
-                    </a:lnR>
-                    <a:lnT w="6350" cap="flat" cmpd="sng" algn="ctr">
-                      <a:solidFill>
-                        <a:srgbClr val="D5DBE3"/>
-                      </a:solidFill>
-                      <a:prstDash val="solid"/>
-                      <a:round/>
-                      <a:headEnd type="none" w="med" len="med"/>
-                      <a:tailEnd type="none" w="med" len="med"/>
-                    </a:lnT>
-                    <a:lnB w="6350" cap="flat" cmpd="sng" algn="ctr">
-                      <a:solidFill>
-                        <a:srgbClr val="D5DBE3"/>
-                      </a:solidFill>
-                      <a:prstDash val="solid"/>
-                      <a:round/>
-                      <a:headEnd type="none" w="med" len="med"/>
-                      <a:tailEnd type="none" w="med" len="med"/>
-                    </a:lnB>
-                  </a:tcPr>
-                </a:tc>
-                <a:tc>
-                  <a:txBody>
-                    <a:bodyPr/>
-                    <a:lstStyle/>
-                    <a:p>
-                      <a:pPr algn="r" indent="0" marL="0">
-                        <a:buNone/>
-                      </a:pPr>
-                      <a:r>
-                        <a:rPr lang="en-US" sz="850" dirty="0">
-                          <a:solidFill>
-                            <a:srgbClr val="1F2933"/>
-                          </a:solidFill>
-                          <a:latin typeface="Calibri" pitchFamily="34" charset="0"/>
-                          <a:ea typeface="Calibri" pitchFamily="34" charset="-122"/>
-                          <a:cs typeface="Calibri" pitchFamily="34" charset="-120"/>
-                        </a:rPr>
-                        <a:t>–</a:t>
-                      </a:r>
-                      <a:endParaRPr lang="en-US" sz="850" dirty="0">
-                        <a:latin typeface="Calibri" charset="0"/>
-                        <a:ea typeface="Calibri" charset="0"/>
-                        <a:cs typeface="Calibri" charset="0"/>
-                      </a:endParaRPr>
-                    </a:p>
-                  </a:txBody>
-                  <a:tcPr marL="64008" marR="64008" marT="0" marB="0" anchor="ctr">
-                    <a:lnL w="6350" cap="flat" cmpd="sng" algn="ctr">
-                      <a:solidFill>
-                        <a:srgbClr val="D5DBE3"/>
-                      </a:solidFill>
-                      <a:prstDash val="solid"/>
-                      <a:round/>
-                      <a:headEnd type="none" w="med" len="med"/>
-                      <a:tailEnd type="none" w="med" len="med"/>
-                    </a:lnL>
-                    <a:lnR w="6350" cap="flat" cmpd="sng" algn="ctr">
-                      <a:solidFill>
-                        <a:srgbClr val="D5DBE3"/>
-                      </a:solidFill>
-                      <a:prstDash val="solid"/>
-                      <a:round/>
-                      <a:headEnd type="none" w="med" len="med"/>
-                      <a:tailEnd type="none" w="med" len="med"/>
-                    </a:lnR>
-                    <a:lnT w="6350" cap="flat" cmpd="sng" algn="ctr">
-                      <a:solidFill>
-                        <a:srgbClr val="D5DBE3"/>
-                      </a:solidFill>
-                      <a:prstDash val="solid"/>
-                      <a:round/>
-                      <a:headEnd type="none" w="med" len="med"/>
-                      <a:tailEnd type="none" w="med" len="med"/>
-                    </a:lnT>
-                    <a:lnB w="6350" cap="flat" cmpd="sng" algn="ctr">
-                      <a:solidFill>
-                        <a:srgbClr val="D5DBE3"/>
-                      </a:solidFill>
-                      <a:prstDash val="solid"/>
-                      <a:round/>
-                      <a:headEnd type="none" w="med" len="med"/>
-                      <a:tailEnd type="none" w="med" len="med"/>
-                    </a:lnB>
-                  </a:tcPr>
-                </a:tc>
-              </a:tr>
-              <a:tr h="224028">
-                <a:tc>
-                  <a:txBody>
-                    <a:bodyPr/>
-                    <a:lstStyle/>
-                    <a:p>
-                      <a:pPr algn="l" indent="0" marL="0">
-                        <a:buNone/>
-                      </a:pPr>
-                      <a:r>
-                        <a:rPr lang="en-US" sz="850" b="1" dirty="0">
-                          <a:solidFill>
-                            <a:srgbClr val="1F2933"/>
-                          </a:solidFill>
-                          <a:latin typeface="Calibri" pitchFamily="34" charset="0"/>
-                          <a:ea typeface="Calibri" pitchFamily="34" charset="-122"/>
-                          <a:cs typeface="Calibri" pitchFamily="34" charset="-120"/>
-                        </a:rPr>
-                        <a:t>SCI FIRST</a:t>
-                      </a:r>
-                      <a:endParaRPr lang="en-US" sz="850" dirty="0">
-                        <a:latin typeface="Calibri" charset="0"/>
-                        <a:ea typeface="Calibri" charset="0"/>
-                        <a:cs typeface="Calibri" charset="0"/>
-                      </a:endParaRPr>
-                    </a:p>
-                  </a:txBody>
-                  <a:tcPr marL="64008" marR="64008" marT="0" marB="0" anchor="ctr">
-                    <a:lnL w="6350" cap="flat" cmpd="sng" algn="ctr">
-                      <a:solidFill>
-                        <a:srgbClr val="D5DBE3"/>
-                      </a:solidFill>
-                      <a:prstDash val="solid"/>
-                      <a:round/>
-                      <a:headEnd type="none" w="med" len="med"/>
-                      <a:tailEnd type="none" w="med" len="med"/>
-                    </a:lnL>
-                    <a:lnR w="6350" cap="flat" cmpd="sng" algn="ctr">
-                      <a:solidFill>
-                        <a:srgbClr val="D5DBE3"/>
-                      </a:solidFill>
-                      <a:prstDash val="solid"/>
-                      <a:round/>
-                      <a:headEnd type="none" w="med" len="med"/>
-                      <a:tailEnd type="none" w="med" len="med"/>
-                    </a:lnR>
-                    <a:lnT w="6350" cap="flat" cmpd="sng" algn="ctr">
-                      <a:solidFill>
-                        <a:srgbClr val="D5DBE3"/>
-                      </a:solidFill>
-                      <a:prstDash val="solid"/>
-                      <a:round/>
-                      <a:headEnd type="none" w="med" len="med"/>
-                      <a:tailEnd type="none" w="med" len="med"/>
-                    </a:lnT>
-                    <a:lnB w="6350" cap="flat" cmpd="sng" algn="ctr">
-                      <a:solidFill>
-                        <a:srgbClr val="D5DBE3"/>
-                      </a:solidFill>
-                      <a:prstDash val="solid"/>
-                      <a:round/>
-                      <a:headEnd type="none" w="med" len="med"/>
-                      <a:tailEnd type="none" w="med" len="med"/>
-                    </a:lnB>
-                  </a:tcPr>
-                </a:tc>
-                <a:tc>
-                  <a:txBody>
-                    <a:bodyPr/>
-                    <a:lstStyle/>
-                    <a:p>
-                      <a:pPr algn="r" indent="0" marL="0">
-                        <a:buNone/>
-                      </a:pPr>
-                      <a:r>
-                        <a:rPr lang="en-US" sz="850" dirty="0">
-                          <a:solidFill>
-                            <a:srgbClr val="1F2933"/>
-                          </a:solidFill>
-                          <a:latin typeface="Calibri" pitchFamily="34" charset="0"/>
-                          <a:ea typeface="Calibri" pitchFamily="34" charset="-122"/>
-                          <a:cs typeface="Calibri" pitchFamily="34" charset="-120"/>
-                        </a:rPr>
-                        <a:t>236,1</a:t>
-                      </a:r>
-                      <a:endParaRPr lang="en-US" sz="850" dirty="0">
-                        <a:latin typeface="Calibri" charset="0"/>
-                        <a:ea typeface="Calibri" charset="0"/>
-                        <a:cs typeface="Calibri" charset="0"/>
-                      </a:endParaRPr>
-                    </a:p>
-                  </a:txBody>
-                  <a:tcPr marL="64008" marR="64008" marT="0" marB="0" anchor="ctr">
-                    <a:lnL w="6350" cap="flat" cmpd="sng" algn="ctr">
-                      <a:solidFill>
-                        <a:srgbClr val="D5DBE3"/>
-                      </a:solidFill>
-                      <a:prstDash val="solid"/>
-                      <a:round/>
-                      <a:headEnd type="none" w="med" len="med"/>
-                      <a:tailEnd type="none" w="med" len="med"/>
-                    </a:lnL>
-                    <a:lnR w="6350" cap="flat" cmpd="sng" algn="ctr">
-                      <a:solidFill>
-                        <a:srgbClr val="D5DBE3"/>
-                      </a:solidFill>
-                      <a:prstDash val="solid"/>
-                      <a:round/>
-                      <a:headEnd type="none" w="med" len="med"/>
-                      <a:tailEnd type="none" w="med" len="med"/>
-                    </a:lnR>
-                    <a:lnT w="6350" cap="flat" cmpd="sng" algn="ctr">
-                      <a:solidFill>
-                        <a:srgbClr val="D5DBE3"/>
-                      </a:solidFill>
-                      <a:prstDash val="solid"/>
-                      <a:round/>
-                      <a:headEnd type="none" w="med" len="med"/>
-                      <a:tailEnd type="none" w="med" len="med"/>
-                    </a:lnT>
-                    <a:lnB w="6350" cap="flat" cmpd="sng" algn="ctr">
-                      <a:solidFill>
-                        <a:srgbClr val="D5DBE3"/>
-                      </a:solidFill>
-                      <a:prstDash val="solid"/>
-                      <a:round/>
-                      <a:headEnd type="none" w="med" len="med"/>
-                      <a:tailEnd type="none" w="med" len="med"/>
-                    </a:lnB>
-                  </a:tcPr>
-                </a:tc>
-                <a:tc>
-                  <a:txBody>
-                    <a:bodyPr/>
-                    <a:lstStyle/>
-                    <a:p>
-                      <a:pPr algn="r" indent="0" marL="0">
-                        <a:buNone/>
-                      </a:pPr>
-                      <a:r>
-                        <a:rPr lang="en-US" sz="850" dirty="0">
-                          <a:solidFill>
-                            <a:srgbClr val="1F2933"/>
-                          </a:solidFill>
-                          <a:latin typeface="Calibri" pitchFamily="34" charset="0"/>
-                          <a:ea typeface="Calibri" pitchFamily="34" charset="-122"/>
-                          <a:cs typeface="Calibri" pitchFamily="34" charset="-120"/>
-                        </a:rPr>
-                        <a:t>-64,0</a:t>
-                      </a:r>
-                      <a:endParaRPr lang="en-US" sz="850" dirty="0">
-                        <a:latin typeface="Calibri" charset="0"/>
-                        <a:ea typeface="Calibri" charset="0"/>
-                        <a:cs typeface="Calibri" charset="0"/>
-                      </a:endParaRPr>
-                    </a:p>
-                  </a:txBody>
-                  <a:tcPr marL="64008" marR="64008" marT="0" marB="0" anchor="ctr">
-                    <a:lnL w="6350" cap="flat" cmpd="sng" algn="ctr">
-                      <a:solidFill>
-                        <a:srgbClr val="D5DBE3"/>
-                      </a:solidFill>
-                      <a:prstDash val="solid"/>
-                      <a:round/>
-                      <a:headEnd type="none" w="med" len="med"/>
-                      <a:tailEnd type="none" w="med" len="med"/>
-                    </a:lnL>
-                    <a:lnR w="6350" cap="flat" cmpd="sng" algn="ctr">
-                      <a:solidFill>
-                        <a:srgbClr val="D5DBE3"/>
-                      </a:solidFill>
-                      <a:prstDash val="solid"/>
-                      <a:round/>
-                      <a:headEnd type="none" w="med" len="med"/>
-                      <a:tailEnd type="none" w="med" len="med"/>
-                    </a:lnR>
-                    <a:lnT w="6350" cap="flat" cmpd="sng" algn="ctr">
-                      <a:solidFill>
-                        <a:srgbClr val="D5DBE3"/>
-                      </a:solidFill>
-                      <a:prstDash val="solid"/>
-                      <a:round/>
-                      <a:headEnd type="none" w="med" len="med"/>
-                      <a:tailEnd type="none" w="med" len="med"/>
-                    </a:lnT>
-                    <a:lnB w="6350" cap="flat" cmpd="sng" algn="ctr">
-                      <a:solidFill>
-                        <a:srgbClr val="D5DBE3"/>
-                      </a:solidFill>
-                      <a:prstDash val="solid"/>
-                      <a:round/>
-                      <a:headEnd type="none" w="med" len="med"/>
-                      <a:tailEnd type="none" w="med" len="med"/>
-                    </a:lnB>
-                  </a:tcPr>
-                </a:tc>
-                <a:tc>
-                  <a:txBody>
-                    <a:bodyPr/>
-                    <a:lstStyle/>
-                    <a:p>
-                      <a:pPr algn="r" indent="0" marL="0">
-                        <a:buNone/>
-                      </a:pPr>
-                      <a:r>
-                        <a:rPr lang="en-US" sz="850" dirty="0">
-                          <a:solidFill>
-                            <a:srgbClr val="1F2933"/>
-                          </a:solidFill>
-                          <a:latin typeface="Calibri" pitchFamily="34" charset="0"/>
-                          <a:ea typeface="Calibri" pitchFamily="34" charset="-122"/>
-                          <a:cs typeface="Calibri" pitchFamily="34" charset="-120"/>
-                        </a:rPr>
-                        <a:t>–</a:t>
-                      </a:r>
-                      <a:endParaRPr lang="en-US" sz="850" dirty="0">
-                        <a:latin typeface="Calibri" charset="0"/>
-                        <a:ea typeface="Calibri" charset="0"/>
-                        <a:cs typeface="Calibri" charset="0"/>
-                      </a:endParaRPr>
-                    </a:p>
-                  </a:txBody>
-                  <a:tcPr marL="64008" marR="64008" marT="0" marB="0" anchor="ctr">
-                    <a:lnL w="6350" cap="flat" cmpd="sng" algn="ctr">
-                      <a:solidFill>
-                        <a:srgbClr val="D5DBE3"/>
-                      </a:solidFill>
-                      <a:prstDash val="solid"/>
-                      <a:round/>
-                      <a:headEnd type="none" w="med" len="med"/>
-                      <a:tailEnd type="none" w="med" len="med"/>
-                    </a:lnL>
-                    <a:lnR w="6350" cap="flat" cmpd="sng" algn="ctr">
-                      <a:solidFill>
-                        <a:srgbClr val="D5DBE3"/>
-                      </a:solidFill>
-                      <a:prstDash val="solid"/>
-                      <a:round/>
-                      <a:headEnd type="none" w="med" len="med"/>
-                      <a:tailEnd type="none" w="med" len="med"/>
-                    </a:lnR>
-                    <a:lnT w="6350" cap="flat" cmpd="sng" algn="ctr">
-                      <a:solidFill>
-                        <a:srgbClr val="D5DBE3"/>
-                      </a:solidFill>
-                      <a:prstDash val="solid"/>
-                      <a:round/>
-                      <a:headEnd type="none" w="med" len="med"/>
-                      <a:tailEnd type="none" w="med" len="med"/>
-                    </a:lnT>
-                    <a:lnB w="6350" cap="flat" cmpd="sng" algn="ctr">
-                      <a:solidFill>
-                        <a:srgbClr val="D5DBE3"/>
-                      </a:solidFill>
-                      <a:prstDash val="solid"/>
-                      <a:round/>
-                      <a:headEnd type="none" w="med" len="med"/>
-                      <a:tailEnd type="none" w="med" len="med"/>
-                    </a:lnB>
-                  </a:tcPr>
-                </a:tc>
-                <a:tc>
-                  <a:txBody>
-                    <a:bodyPr/>
-                    <a:lstStyle/>
-                    <a:p>
-                      <a:pPr algn="r" indent="0" marL="0">
-                        <a:buNone/>
-                      </a:pPr>
-                      <a:r>
-                        <a:rPr lang="en-US" sz="850" b="1" dirty="0">
-                          <a:solidFill>
-                            <a:srgbClr val="5E9B7E"/>
-                          </a:solidFill>
-                          <a:latin typeface="Calibri" pitchFamily="34" charset="0"/>
-                          <a:ea typeface="Calibri" pitchFamily="34" charset="-122"/>
-                          <a:cs typeface="Calibri" pitchFamily="34" charset="-120"/>
-                        </a:rPr>
-                        <a:t>172,1</a:t>
-                      </a:r>
-                      <a:endParaRPr lang="en-US" sz="850" dirty="0">
-                        <a:latin typeface="Calibri" charset="0"/>
-                        <a:ea typeface="Calibri" charset="0"/>
-                        <a:cs typeface="Calibri" charset="0"/>
-                      </a:endParaRPr>
-                    </a:p>
-                  </a:txBody>
-                  <a:tcPr marL="64008" marR="64008" marT="0" marB="0" anchor="ctr">
-                    <a:lnL w="6350" cap="flat" cmpd="sng" algn="ctr">
-                      <a:solidFill>
-                        <a:srgbClr val="D5DBE3"/>
-                      </a:solidFill>
-                      <a:prstDash val="solid"/>
-                      <a:round/>
-                      <a:headEnd type="none" w="med" len="med"/>
-                      <a:tailEnd type="none" w="med" len="med"/>
-                    </a:lnL>
-                    <a:lnR w="6350" cap="flat" cmpd="sng" algn="ctr">
-                      <a:solidFill>
-                        <a:srgbClr val="D5DBE3"/>
-                      </a:solidFill>
-                      <a:prstDash val="solid"/>
-                      <a:round/>
-                      <a:headEnd type="none" w="med" len="med"/>
-                      <a:tailEnd type="none" w="med" len="med"/>
-                    </a:lnR>
-                    <a:lnT w="6350" cap="flat" cmpd="sng" algn="ctr">
-                      <a:solidFill>
-                        <a:srgbClr val="D5DBE3"/>
-                      </a:solidFill>
-                      <a:prstDash val="solid"/>
-                      <a:round/>
-                      <a:headEnd type="none" w="med" len="med"/>
-                      <a:tailEnd type="none" w="med" len="med"/>
-                    </a:lnT>
-                    <a:lnB w="6350" cap="flat" cmpd="sng" algn="ctr">
-                      <a:solidFill>
-                        <a:srgbClr val="D5DBE3"/>
-                      </a:solidFill>
-                      <a:prstDash val="solid"/>
-                      <a:round/>
-                      <a:headEnd type="none" w="med" len="med"/>
-                      <a:tailEnd type="none" w="med" len="med"/>
-                    </a:lnB>
-                  </a:tcPr>
-                </a:tc>
-                <a:tc>
-                  <a:txBody>
-                    <a:bodyPr/>
-                    <a:lstStyle/>
-                    <a:p>
-                      <a:pPr algn="r" indent="0" marL="0">
-                        <a:buNone/>
-                      </a:pPr>
-                      <a:r>
-                        <a:rPr lang="en-US" sz="850" dirty="0">
-                          <a:solidFill>
-                            <a:srgbClr val="1F2933"/>
-                          </a:solidFill>
-                          <a:latin typeface="Calibri" pitchFamily="34" charset="0"/>
-                          <a:ea typeface="Calibri" pitchFamily="34" charset="-122"/>
-                          <a:cs typeface="Calibri" pitchFamily="34" charset="-120"/>
-                        </a:rPr>
-                        <a:t>–</a:t>
-                      </a:r>
-                      <a:endParaRPr lang="en-US" sz="850" dirty="0">
-                        <a:latin typeface="Calibri" charset="0"/>
-                        <a:ea typeface="Calibri" charset="0"/>
-                        <a:cs typeface="Calibri" charset="0"/>
-                      </a:endParaRPr>
-                    </a:p>
-                  </a:txBody>
-                  <a:tcPr marL="64008" marR="64008" marT="0" marB="0" anchor="ctr">
-                    <a:lnL w="6350" cap="flat" cmpd="sng" algn="ctr">
-                      <a:solidFill>
-                        <a:srgbClr val="D5DBE3"/>
-                      </a:solidFill>
-                      <a:prstDash val="solid"/>
-                      <a:round/>
-                      <a:headEnd type="none" w="med" len="med"/>
-                      <a:tailEnd type="none" w="med" len="med"/>
-                    </a:lnL>
-                    <a:lnR w="6350" cap="flat" cmpd="sng" algn="ctr">
-                      <a:solidFill>
-                        <a:srgbClr val="D5DBE3"/>
-                      </a:solidFill>
-                      <a:prstDash val="solid"/>
-                      <a:round/>
-                      <a:headEnd type="none" w="med" len="med"/>
-                      <a:tailEnd type="none" w="med" len="med"/>
-                    </a:lnR>
-                    <a:lnT w="6350" cap="flat" cmpd="sng" algn="ctr">
-                      <a:solidFill>
-                        <a:srgbClr val="D5DBE3"/>
-                      </a:solidFill>
-                      <a:prstDash val="solid"/>
-                      <a:round/>
-                      <a:headEnd type="none" w="med" len="med"/>
-                      <a:tailEnd type="none" w="med" len="med"/>
-                    </a:lnT>
-                    <a:lnB w="6350" cap="flat" cmpd="sng" algn="ctr">
-                      <a:solidFill>
-                        <a:srgbClr val="D5DBE3"/>
-                      </a:solidFill>
-                      <a:prstDash val="solid"/>
-                      <a:round/>
-                      <a:headEnd type="none" w="med" len="med"/>
-                      <a:tailEnd type="none" w="med" len="med"/>
-                    </a:lnB>
-                  </a:tcPr>
-                </a:tc>
-              </a:tr>
-              <a:tr h="224028">
-                <a:tc>
-                  <a:txBody>
-                    <a:bodyPr/>
-                    <a:lstStyle/>
-                    <a:p>
-                      <a:pPr algn="l" indent="0" marL="0">
-                        <a:buNone/>
-                      </a:pPr>
-                      <a:r>
-                        <a:rPr lang="en-US" sz="850" b="1" dirty="0">
-                          <a:solidFill>
-                            <a:srgbClr val="1F2933"/>
-                          </a:solidFill>
-                          <a:latin typeface="Calibri" pitchFamily="34" charset="0"/>
-                          <a:ea typeface="Calibri" pitchFamily="34" charset="-122"/>
-                          <a:cs typeface="Calibri" pitchFamily="34" charset="-120"/>
-                        </a:rPr>
-                        <a:t>RIVIERA PARK – projet</a:t>
-                      </a:r>
-                      <a:endParaRPr lang="en-US" sz="850" dirty="0">
-                        <a:latin typeface="Calibri" charset="0"/>
-                        <a:ea typeface="Calibri" charset="0"/>
-                        <a:cs typeface="Calibri" charset="0"/>
-                      </a:endParaRPr>
-                    </a:p>
-                  </a:txBody>
-                  <a:tcPr marL="64008" marR="64008" marT="0" marB="0" anchor="ctr">
-                    <a:lnL w="6350" cap="flat" cmpd="sng" algn="ctr">
-                      <a:solidFill>
-                        <a:srgbClr val="D5DBE3"/>
-                      </a:solidFill>
-                      <a:prstDash val="solid"/>
-                      <a:round/>
-                      <a:headEnd type="none" w="med" len="med"/>
-                      <a:tailEnd type="none" w="med" len="med"/>
-                    </a:lnL>
-                    <a:lnR w="6350" cap="flat" cmpd="sng" algn="ctr">
-                      <a:solidFill>
-                        <a:srgbClr val="D5DBE3"/>
-                      </a:solidFill>
-                      <a:prstDash val="solid"/>
-                      <a:round/>
-                      <a:headEnd type="none" w="med" len="med"/>
-                      <a:tailEnd type="none" w="med" len="med"/>
-                    </a:lnR>
-                    <a:lnT w="6350" cap="flat" cmpd="sng" algn="ctr">
-                      <a:solidFill>
-                        <a:srgbClr val="D5DBE3"/>
-                      </a:solidFill>
-                      <a:prstDash val="solid"/>
-                      <a:round/>
-                      <a:headEnd type="none" w="med" len="med"/>
-                      <a:tailEnd type="none" w="med" len="med"/>
-                    </a:lnT>
-                    <a:lnB w="6350" cap="flat" cmpd="sng" algn="ctr">
-                      <a:solidFill>
-                        <a:srgbClr val="D5DBE3"/>
-                      </a:solidFill>
-                      <a:prstDash val="solid"/>
-                      <a:round/>
-                      <a:headEnd type="none" w="med" len="med"/>
-                      <a:tailEnd type="none" w="med" len="med"/>
-                    </a:lnB>
-                  </a:tcPr>
-                </a:tc>
-                <a:tc>
-                  <a:txBody>
-                    <a:bodyPr/>
-                    <a:lstStyle/>
-                    <a:p>
-                      <a:pPr algn="r" indent="0" marL="0">
-                        <a:buNone/>
-                      </a:pPr>
-                      <a:r>
-                        <a:rPr lang="en-US" sz="850" dirty="0">
-                          <a:solidFill>
-                            <a:srgbClr val="1F2933"/>
-                          </a:solidFill>
-                          <a:latin typeface="Calibri" pitchFamily="34" charset="0"/>
-                          <a:ea typeface="Calibri" pitchFamily="34" charset="-122"/>
-                          <a:cs typeface="Calibri" pitchFamily="34" charset="-120"/>
-                        </a:rPr>
-                        <a:t>2 643,1</a:t>
-                      </a:r>
-                      <a:endParaRPr lang="en-US" sz="850" dirty="0">
-                        <a:latin typeface="Calibri" charset="0"/>
-                        <a:ea typeface="Calibri" charset="0"/>
-                        <a:cs typeface="Calibri" charset="0"/>
-                      </a:endParaRPr>
-                    </a:p>
-                  </a:txBody>
-                  <a:tcPr marL="64008" marR="64008" marT="0" marB="0" anchor="ctr">
-                    <a:lnL w="6350" cap="flat" cmpd="sng" algn="ctr">
-                      <a:solidFill>
-                        <a:srgbClr val="D5DBE3"/>
-                      </a:solidFill>
-                      <a:prstDash val="solid"/>
-                      <a:round/>
-                      <a:headEnd type="none" w="med" len="med"/>
-                      <a:tailEnd type="none" w="med" len="med"/>
-                    </a:lnL>
-                    <a:lnR w="6350" cap="flat" cmpd="sng" algn="ctr">
-                      <a:solidFill>
-                        <a:srgbClr val="D5DBE3"/>
-                      </a:solidFill>
-                      <a:prstDash val="solid"/>
-                      <a:round/>
-                      <a:headEnd type="none" w="med" len="med"/>
-                      <a:tailEnd type="none" w="med" len="med"/>
-                    </a:lnR>
-                    <a:lnT w="6350" cap="flat" cmpd="sng" algn="ctr">
-                      <a:solidFill>
-                        <a:srgbClr val="D5DBE3"/>
-                      </a:solidFill>
-                      <a:prstDash val="solid"/>
-                      <a:round/>
-                      <a:headEnd type="none" w="med" len="med"/>
-                      <a:tailEnd type="none" w="med" len="med"/>
-                    </a:lnT>
-                    <a:lnB w="6350" cap="flat" cmpd="sng" algn="ctr">
-                      <a:solidFill>
-                        <a:srgbClr val="D5DBE3"/>
-                      </a:solidFill>
-                      <a:prstDash val="solid"/>
-                      <a:round/>
-                      <a:headEnd type="none" w="med" len="med"/>
-                      <a:tailEnd type="none" w="med" len="med"/>
-                    </a:lnB>
-                  </a:tcPr>
-                </a:tc>
-                <a:tc>
-                  <a:txBody>
-                    <a:bodyPr/>
-                    <a:lstStyle/>
-                    <a:p>
-                      <a:pPr algn="r" indent="0" marL="0">
-                        <a:buNone/>
-                      </a:pPr>
-                      <a:r>
-                        <a:rPr lang="en-US" sz="850" dirty="0">
-                          <a:solidFill>
-                            <a:srgbClr val="1F2933"/>
-                          </a:solidFill>
-                          <a:latin typeface="Calibri" pitchFamily="34" charset="0"/>
-                          <a:ea typeface="Calibri" pitchFamily="34" charset="-122"/>
-                          <a:cs typeface="Calibri" pitchFamily="34" charset="-120"/>
-                        </a:rPr>
-                        <a:t>-1 988,4</a:t>
-                      </a:r>
-                      <a:endParaRPr lang="en-US" sz="850" dirty="0">
-                        <a:latin typeface="Calibri" charset="0"/>
-                        <a:ea typeface="Calibri" charset="0"/>
-                        <a:cs typeface="Calibri" charset="0"/>
-                      </a:endParaRPr>
-                    </a:p>
-                  </a:txBody>
-                  <a:tcPr marL="64008" marR="64008" marT="0" marB="0" anchor="ctr">
-                    <a:lnL w="6350" cap="flat" cmpd="sng" algn="ctr">
-                      <a:solidFill>
-                        <a:srgbClr val="D5DBE3"/>
-                      </a:solidFill>
-                      <a:prstDash val="solid"/>
-                      <a:round/>
-                      <a:headEnd type="none" w="med" len="med"/>
-                      <a:tailEnd type="none" w="med" len="med"/>
-                    </a:lnL>
-                    <a:lnR w="6350" cap="flat" cmpd="sng" algn="ctr">
-                      <a:solidFill>
-                        <a:srgbClr val="D5DBE3"/>
-                      </a:solidFill>
-                      <a:prstDash val="solid"/>
-                      <a:round/>
-                      <a:headEnd type="none" w="med" len="med"/>
-                      <a:tailEnd type="none" w="med" len="med"/>
-                    </a:lnR>
-                    <a:lnT w="6350" cap="flat" cmpd="sng" algn="ctr">
-                      <a:solidFill>
-                        <a:srgbClr val="D5DBE3"/>
-                      </a:solidFill>
-                      <a:prstDash val="solid"/>
-                      <a:round/>
-                      <a:headEnd type="none" w="med" len="med"/>
-                      <a:tailEnd type="none" w="med" len="med"/>
-                    </a:lnT>
-                    <a:lnB w="6350" cap="flat" cmpd="sng" algn="ctr">
-                      <a:solidFill>
-                        <a:srgbClr val="D5DBE3"/>
-                      </a:solidFill>
-                      <a:prstDash val="solid"/>
-                      <a:round/>
-                      <a:headEnd type="none" w="med" len="med"/>
-                      <a:tailEnd type="none" w="med" len="med"/>
-                    </a:lnB>
-                  </a:tcPr>
-                </a:tc>
-                <a:tc>
-                  <a:txBody>
-                    <a:bodyPr/>
-                    <a:lstStyle/>
-                    <a:p>
-                      <a:pPr algn="r" indent="0" marL="0">
-                        <a:buNone/>
-                      </a:pPr>
-                      <a:r>
-                        <a:rPr lang="en-US" sz="850" dirty="0">
-                          <a:solidFill>
-                            <a:srgbClr val="1F2933"/>
-                          </a:solidFill>
-                          <a:latin typeface="Calibri" pitchFamily="34" charset="0"/>
-                          <a:ea typeface="Calibri" pitchFamily="34" charset="-122"/>
-                          <a:cs typeface="Calibri" pitchFamily="34" charset="-120"/>
-                        </a:rPr>
-                        <a:t>–</a:t>
-                      </a:r>
-                      <a:endParaRPr lang="en-US" sz="850" dirty="0">
-                        <a:latin typeface="Calibri" charset="0"/>
-                        <a:ea typeface="Calibri" charset="0"/>
-                        <a:cs typeface="Calibri" charset="0"/>
-                      </a:endParaRPr>
-                    </a:p>
-                  </a:txBody>
-                  <a:tcPr marL="64008" marR="64008" marT="0" marB="0" anchor="ctr">
-                    <a:lnL w="6350" cap="flat" cmpd="sng" algn="ctr">
-                      <a:solidFill>
-                        <a:srgbClr val="D5DBE3"/>
-                      </a:solidFill>
-                      <a:prstDash val="solid"/>
-                      <a:round/>
-                      <a:headEnd type="none" w="med" len="med"/>
-                      <a:tailEnd type="none" w="med" len="med"/>
-                    </a:lnL>
-                    <a:lnR w="6350" cap="flat" cmpd="sng" algn="ctr">
-                      <a:solidFill>
-                        <a:srgbClr val="D5DBE3"/>
-                      </a:solidFill>
-                      <a:prstDash val="solid"/>
-                      <a:round/>
-                      <a:headEnd type="none" w="med" len="med"/>
-                      <a:tailEnd type="none" w="med" len="med"/>
-                    </a:lnR>
-                    <a:lnT w="6350" cap="flat" cmpd="sng" algn="ctr">
-                      <a:solidFill>
-                        <a:srgbClr val="D5DBE3"/>
-                      </a:solidFill>
-                      <a:prstDash val="solid"/>
-                      <a:round/>
-                      <a:headEnd type="none" w="med" len="med"/>
-                      <a:tailEnd type="none" w="med" len="med"/>
-                    </a:lnT>
-                    <a:lnB w="6350" cap="flat" cmpd="sng" algn="ctr">
-                      <a:solidFill>
-                        <a:srgbClr val="D5DBE3"/>
-                      </a:solidFill>
-                      <a:prstDash val="solid"/>
-                      <a:round/>
-                      <a:headEnd type="none" w="med" len="med"/>
-                      <a:tailEnd type="none" w="med" len="med"/>
-                    </a:lnB>
-                  </a:tcPr>
-                </a:tc>
-                <a:tc>
-                  <a:txBody>
-                    <a:bodyPr/>
-                    <a:lstStyle/>
-                    <a:p>
-                      <a:pPr algn="r" indent="0" marL="0">
-                        <a:buNone/>
-                      </a:pPr>
-                      <a:r>
-                        <a:rPr lang="en-US" sz="850" b="1" dirty="0">
-                          <a:solidFill>
-                            <a:srgbClr val="5E9B7E"/>
-                          </a:solidFill>
-                          <a:latin typeface="Calibri" pitchFamily="34" charset="0"/>
-                          <a:ea typeface="Calibri" pitchFamily="34" charset="-122"/>
-                          <a:cs typeface="Calibri" pitchFamily="34" charset="-120"/>
-                        </a:rPr>
-                        <a:t>654,7</a:t>
-                      </a:r>
-                      <a:endParaRPr lang="en-US" sz="850" dirty="0">
-                        <a:latin typeface="Calibri" charset="0"/>
-                        <a:ea typeface="Calibri" charset="0"/>
-                        <a:cs typeface="Calibri" charset="0"/>
-                      </a:endParaRPr>
-                    </a:p>
-                  </a:txBody>
-                  <a:tcPr marL="64008" marR="64008" marT="0" marB="0" anchor="ctr">
-                    <a:lnL w="6350" cap="flat" cmpd="sng" algn="ctr">
-                      <a:solidFill>
-                        <a:srgbClr val="D5DBE3"/>
-                      </a:solidFill>
-                      <a:prstDash val="solid"/>
-                      <a:round/>
-                      <a:headEnd type="none" w="med" len="med"/>
-                      <a:tailEnd type="none" w="med" len="med"/>
-                    </a:lnL>
-                    <a:lnR w="6350" cap="flat" cmpd="sng" algn="ctr">
-                      <a:solidFill>
-                        <a:srgbClr val="D5DBE3"/>
-                      </a:solidFill>
-                      <a:prstDash val="solid"/>
-                      <a:round/>
-                      <a:headEnd type="none" w="med" len="med"/>
-                      <a:tailEnd type="none" w="med" len="med"/>
-                    </a:lnR>
-                    <a:lnT w="6350" cap="flat" cmpd="sng" algn="ctr">
-                      <a:solidFill>
-                        <a:srgbClr val="D5DBE3"/>
-                      </a:solidFill>
-                      <a:prstDash val="solid"/>
-                      <a:round/>
-                      <a:headEnd type="none" w="med" len="med"/>
-                      <a:tailEnd type="none" w="med" len="med"/>
-                    </a:lnT>
-                    <a:lnB w="6350" cap="flat" cmpd="sng" algn="ctr">
-                      <a:solidFill>
-                        <a:srgbClr val="D5DBE3"/>
-                      </a:solidFill>
-                      <a:prstDash val="solid"/>
-                      <a:round/>
-                      <a:headEnd type="none" w="med" len="med"/>
-                      <a:tailEnd type="none" w="med" len="med"/>
-                    </a:lnB>
-                  </a:tcPr>
-                </a:tc>
-                <a:tc>
-                  <a:txBody>
-                    <a:bodyPr/>
-                    <a:lstStyle/>
-                    <a:p>
-                      <a:pPr algn="r" indent="0" marL="0">
-                        <a:buNone/>
-                      </a:pPr>
-                      <a:r>
-                        <a:rPr lang="en-US" sz="850" dirty="0">
-                          <a:solidFill>
-                            <a:srgbClr val="1F2933"/>
-                          </a:solidFill>
-                          <a:latin typeface="Calibri" pitchFamily="34" charset="0"/>
-                          <a:ea typeface="Calibri" pitchFamily="34" charset="-122"/>
-                          <a:cs typeface="Calibri" pitchFamily="34" charset="-120"/>
-                        </a:rPr>
-                        <a:t>–</a:t>
-                      </a:r>
-                      <a:endParaRPr lang="en-US" sz="850" dirty="0">
-                        <a:latin typeface="Calibri" charset="0"/>
-                        <a:ea typeface="Calibri" charset="0"/>
-                        <a:cs typeface="Calibri" charset="0"/>
-                      </a:endParaRPr>
-                    </a:p>
-                  </a:txBody>
-                  <a:tcPr marL="64008" marR="64008" marT="0" marB="0" anchor="ctr">
-                    <a:lnL w="6350" cap="flat" cmpd="sng" algn="ctr">
-                      <a:solidFill>
-                        <a:srgbClr val="D5DBE3"/>
-                      </a:solidFill>
-                      <a:prstDash val="solid"/>
-                      <a:round/>
-                      <a:headEnd type="none" w="med" len="med"/>
-                      <a:tailEnd type="none" w="med" len="med"/>
-                    </a:lnL>
-                    <a:lnR w="6350" cap="flat" cmpd="sng" algn="ctr">
-                      <a:solidFill>
-                        <a:srgbClr val="D5DBE3"/>
-                      </a:solidFill>
-                      <a:prstDash val="solid"/>
-                      <a:round/>
-                      <a:headEnd type="none" w="med" len="med"/>
-                      <a:tailEnd type="none" w="med" len="med"/>
-                    </a:lnR>
-                    <a:lnT w="6350" cap="flat" cmpd="sng" algn="ctr">
-                      <a:solidFill>
-                        <a:srgbClr val="D5DBE3"/>
-                      </a:solidFill>
-                      <a:prstDash val="solid"/>
-                      <a:round/>
-                      <a:headEnd type="none" w="med" len="med"/>
-                      <a:tailEnd type="none" w="med" len="med"/>
-                    </a:lnT>
-                    <a:lnB w="6350" cap="flat" cmpd="sng" algn="ctr">
-                      <a:solidFill>
-                        <a:srgbClr val="D5DBE3"/>
-                      </a:solidFill>
-                      <a:prstDash val="solid"/>
-                      <a:round/>
-                      <a:headEnd type="none" w="med" len="med"/>
-                      <a:tailEnd type="none" w="med" len="med"/>
-                    </a:lnB>
-                  </a:tcPr>
-                </a:tc>
-              </a:tr>
-              <a:tr h="224028">
-                <a:tc>
-                  <a:txBody>
-                    <a:bodyPr/>
-                    <a:lstStyle/>
-                    <a:p>
-                      <a:pPr algn="l" indent="0" marL="0">
-                        <a:buNone/>
-                      </a:pPr>
-                      <a:r>
-                        <a:rPr lang="en-US" sz="850" b="1" dirty="0">
-                          <a:solidFill>
-                            <a:srgbClr val="1F2933"/>
-                          </a:solidFill>
-                          <a:latin typeface="Calibri" pitchFamily="34" charset="0"/>
-                          <a:ea typeface="Calibri" pitchFamily="34" charset="-122"/>
-                          <a:cs typeface="Calibri" pitchFamily="34" charset="-120"/>
-                        </a:rPr>
-                        <a:t>RIVIERA PARK – BNI courant (à arbitrer)</a:t>
-                      </a:r>
-                      <a:endParaRPr lang="en-US" sz="850" dirty="0">
-                        <a:latin typeface="Calibri" charset="0"/>
-                        <a:ea typeface="Calibri" charset="0"/>
-                        <a:cs typeface="Calibri" charset="0"/>
-                      </a:endParaRPr>
-                    </a:p>
-                  </a:txBody>
-                  <a:tcPr marL="64008" marR="64008" marT="0" marB="0" anchor="ctr">
-                    <a:lnL w="6350" cap="flat" cmpd="sng" algn="ctr">
-                      <a:solidFill>
-                        <a:srgbClr val="D5DBE3"/>
-                      </a:solidFill>
-                      <a:prstDash val="solid"/>
-                      <a:round/>
-                      <a:headEnd type="none" w="med" len="med"/>
-                      <a:tailEnd type="none" w="med" len="med"/>
-                    </a:lnL>
-                    <a:lnR w="6350" cap="flat" cmpd="sng" algn="ctr">
-                      <a:solidFill>
-                        <a:srgbClr val="D5DBE3"/>
-                      </a:solidFill>
-                      <a:prstDash val="solid"/>
-                      <a:round/>
-                      <a:headEnd type="none" w="med" len="med"/>
-                      <a:tailEnd type="none" w="med" len="med"/>
-                    </a:lnR>
-                    <a:lnT w="6350" cap="flat" cmpd="sng" algn="ctr">
-                      <a:solidFill>
-                        <a:srgbClr val="D5DBE3"/>
-                      </a:solidFill>
-                      <a:prstDash val="solid"/>
-                      <a:round/>
-                      <a:headEnd type="none" w="med" len="med"/>
-                      <a:tailEnd type="none" w="med" len="med"/>
-                    </a:lnT>
-                    <a:lnB w="6350" cap="flat" cmpd="sng" algn="ctr">
-                      <a:solidFill>
-                        <a:srgbClr val="D5DBE3"/>
-                      </a:solidFill>
-                      <a:prstDash val="solid"/>
-                      <a:round/>
-                      <a:headEnd type="none" w="med" len="med"/>
-                      <a:tailEnd type="none" w="med" len="med"/>
-                    </a:lnB>
-                  </a:tcPr>
-                </a:tc>
-                <a:tc>
-                  <a:txBody>
-                    <a:bodyPr/>
-                    <a:lstStyle/>
-                    <a:p>
-                      <a:pPr algn="r" indent="0" marL="0">
-                        <a:buNone/>
-                      </a:pPr>
-                      <a:r>
-                        <a:rPr lang="en-US" sz="850" dirty="0">
-                          <a:solidFill>
-                            <a:srgbClr val="1F2933"/>
-                          </a:solidFill>
-                          <a:latin typeface="Calibri" pitchFamily="34" charset="0"/>
-                          <a:ea typeface="Calibri" pitchFamily="34" charset="-122"/>
-                          <a:cs typeface="Calibri" pitchFamily="34" charset="-120"/>
-                        </a:rPr>
-                        <a:t>1 772,0</a:t>
-                      </a:r>
-                      <a:endParaRPr lang="en-US" sz="850" dirty="0">
-                        <a:latin typeface="Calibri" charset="0"/>
-                        <a:ea typeface="Calibri" charset="0"/>
-                        <a:cs typeface="Calibri" charset="0"/>
-                      </a:endParaRPr>
-                    </a:p>
-                  </a:txBody>
-                  <a:tcPr marL="64008" marR="64008" marT="0" marB="0" anchor="ctr">
-                    <a:lnL w="6350" cap="flat" cmpd="sng" algn="ctr">
-                      <a:solidFill>
-                        <a:srgbClr val="D5DBE3"/>
-                      </a:solidFill>
-                      <a:prstDash val="solid"/>
-                      <a:round/>
-                      <a:headEnd type="none" w="med" len="med"/>
-                      <a:tailEnd type="none" w="med" len="med"/>
-                    </a:lnL>
-                    <a:lnR w="6350" cap="flat" cmpd="sng" algn="ctr">
-                      <a:solidFill>
-                        <a:srgbClr val="D5DBE3"/>
-                      </a:solidFill>
-                      <a:prstDash val="solid"/>
-                      <a:round/>
-                      <a:headEnd type="none" w="med" len="med"/>
-                      <a:tailEnd type="none" w="med" len="med"/>
-                    </a:lnR>
-                    <a:lnT w="6350" cap="flat" cmpd="sng" algn="ctr">
-                      <a:solidFill>
-                        <a:srgbClr val="D5DBE3"/>
-                      </a:solidFill>
-                      <a:prstDash val="solid"/>
-                      <a:round/>
-                      <a:headEnd type="none" w="med" len="med"/>
-                      <a:tailEnd type="none" w="med" len="med"/>
-                    </a:lnT>
-                    <a:lnB w="6350" cap="flat" cmpd="sng" algn="ctr">
-                      <a:solidFill>
-                        <a:srgbClr val="D5DBE3"/>
-                      </a:solidFill>
-                      <a:prstDash val="solid"/>
-                      <a:round/>
-                      <a:headEnd type="none" w="med" len="med"/>
-                      <a:tailEnd type="none" w="med" len="med"/>
-                    </a:lnB>
-                  </a:tcPr>
-                </a:tc>
-                <a:tc>
-                  <a:txBody>
-                    <a:bodyPr/>
-                    <a:lstStyle/>
-                    <a:p>
-                      <a:pPr algn="r" indent="0" marL="0">
-                        <a:buNone/>
-                      </a:pPr>
-                      <a:r>
-                        <a:rPr lang="en-US" sz="850" dirty="0">
-                          <a:solidFill>
-                            <a:srgbClr val="1F2933"/>
-                          </a:solidFill>
-                          <a:latin typeface="Calibri" pitchFamily="34" charset="0"/>
-                          <a:ea typeface="Calibri" pitchFamily="34" charset="-122"/>
-                          <a:cs typeface="Calibri" pitchFamily="34" charset="-120"/>
-                        </a:rPr>
-                        <a:t>–</a:t>
-                      </a:r>
-                      <a:endParaRPr lang="en-US" sz="850" dirty="0">
-                        <a:latin typeface="Calibri" charset="0"/>
-                        <a:ea typeface="Calibri" charset="0"/>
-                        <a:cs typeface="Calibri" charset="0"/>
-                      </a:endParaRPr>
-                    </a:p>
-                  </a:txBody>
-                  <a:tcPr marL="64008" marR="64008" marT="0" marB="0" anchor="ctr">
-                    <a:lnL w="6350" cap="flat" cmpd="sng" algn="ctr">
-                      <a:solidFill>
-                        <a:srgbClr val="D5DBE3"/>
-                      </a:solidFill>
-                      <a:prstDash val="solid"/>
-                      <a:round/>
-                      <a:headEnd type="none" w="med" len="med"/>
-                      <a:tailEnd type="none" w="med" len="med"/>
-                    </a:lnL>
-                    <a:lnR w="6350" cap="flat" cmpd="sng" algn="ctr">
-                      <a:solidFill>
-                        <a:srgbClr val="D5DBE3"/>
-                      </a:solidFill>
-                      <a:prstDash val="solid"/>
-                      <a:round/>
-                      <a:headEnd type="none" w="med" len="med"/>
-                      <a:tailEnd type="none" w="med" len="med"/>
-                    </a:lnR>
-                    <a:lnT w="6350" cap="flat" cmpd="sng" algn="ctr">
-                      <a:solidFill>
-                        <a:srgbClr val="D5DBE3"/>
-                      </a:solidFill>
-                      <a:prstDash val="solid"/>
-                      <a:round/>
-                      <a:headEnd type="none" w="med" len="med"/>
-                      <a:tailEnd type="none" w="med" len="med"/>
-                    </a:lnT>
-                    <a:lnB w="6350" cap="flat" cmpd="sng" algn="ctr">
-                      <a:solidFill>
-                        <a:srgbClr val="D5DBE3"/>
-                      </a:solidFill>
-                      <a:prstDash val="solid"/>
-                      <a:round/>
-                      <a:headEnd type="none" w="med" len="med"/>
-                      <a:tailEnd type="none" w="med" len="med"/>
-                    </a:lnB>
-                  </a:tcPr>
-                </a:tc>
-                <a:tc>
-                  <a:txBody>
-                    <a:bodyPr/>
-                    <a:lstStyle/>
-                    <a:p>
-                      <a:pPr algn="r" indent="0" marL="0">
-                        <a:buNone/>
-                      </a:pPr>
-                      <a:r>
-                        <a:rPr lang="en-US" sz="850" dirty="0">
-                          <a:solidFill>
-                            <a:srgbClr val="1F2933"/>
-                          </a:solidFill>
-                          <a:latin typeface="Calibri" pitchFamily="34" charset="0"/>
-                          <a:ea typeface="Calibri" pitchFamily="34" charset="-122"/>
-                          <a:cs typeface="Calibri" pitchFamily="34" charset="-120"/>
-                        </a:rPr>
-                        <a:t>–</a:t>
-                      </a:r>
-                      <a:endParaRPr lang="en-US" sz="850" dirty="0">
-                        <a:latin typeface="Calibri" charset="0"/>
-                        <a:ea typeface="Calibri" charset="0"/>
-                        <a:cs typeface="Calibri" charset="0"/>
-                      </a:endParaRPr>
-                    </a:p>
-                  </a:txBody>
-                  <a:tcPr marL="64008" marR="64008" marT="0" marB="0" anchor="ctr">
-                    <a:lnL w="6350" cap="flat" cmpd="sng" algn="ctr">
-                      <a:solidFill>
-                        <a:srgbClr val="D5DBE3"/>
-                      </a:solidFill>
-                      <a:prstDash val="solid"/>
-                      <a:round/>
-                      <a:headEnd type="none" w="med" len="med"/>
-                      <a:tailEnd type="none" w="med" len="med"/>
-                    </a:lnL>
-                    <a:lnR w="6350" cap="flat" cmpd="sng" algn="ctr">
-                      <a:solidFill>
-                        <a:srgbClr val="D5DBE3"/>
-                      </a:solidFill>
-                      <a:prstDash val="solid"/>
-                      <a:round/>
-                      <a:headEnd type="none" w="med" len="med"/>
-                      <a:tailEnd type="none" w="med" len="med"/>
-                    </a:lnR>
-                    <a:lnT w="6350" cap="flat" cmpd="sng" algn="ctr">
-                      <a:solidFill>
-                        <a:srgbClr val="D5DBE3"/>
-                      </a:solidFill>
-                      <a:prstDash val="solid"/>
-                      <a:round/>
-                      <a:headEnd type="none" w="med" len="med"/>
-                      <a:tailEnd type="none" w="med" len="med"/>
-                    </a:lnT>
-                    <a:lnB w="6350" cap="flat" cmpd="sng" algn="ctr">
-                      <a:solidFill>
-                        <a:srgbClr val="D5DBE3"/>
-                      </a:solidFill>
-                      <a:prstDash val="solid"/>
-                      <a:round/>
-                      <a:headEnd type="none" w="med" len="med"/>
-                      <a:tailEnd type="none" w="med" len="med"/>
-                    </a:lnB>
-                  </a:tcPr>
-                </a:tc>
-                <a:tc>
-                  <a:txBody>
-                    <a:bodyPr/>
-                    <a:lstStyle/>
-                    <a:p>
-                      <a:pPr algn="r" indent="0" marL="0">
-                        <a:buNone/>
-                      </a:pPr>
-                      <a:r>
-                        <a:rPr lang="en-US" sz="850" b="1" dirty="0">
-                          <a:solidFill>
-                            <a:srgbClr val="5E9B7E"/>
-                          </a:solidFill>
-                          <a:latin typeface="Calibri" pitchFamily="34" charset="0"/>
-                          <a:ea typeface="Calibri" pitchFamily="34" charset="-122"/>
-                          <a:cs typeface="Calibri" pitchFamily="34" charset="-120"/>
-                        </a:rPr>
-                        <a:t>1 772,0</a:t>
-                      </a:r>
-                      <a:endParaRPr lang="en-US" sz="850" dirty="0">
-                        <a:latin typeface="Calibri" charset="0"/>
-                        <a:ea typeface="Calibri" charset="0"/>
-                        <a:cs typeface="Calibri" charset="0"/>
-                      </a:endParaRPr>
-                    </a:p>
-                  </a:txBody>
-                  <a:tcPr marL="64008" marR="64008" marT="0" marB="0" anchor="ctr">
-                    <a:lnL w="6350" cap="flat" cmpd="sng" algn="ctr">
-                      <a:solidFill>
-                        <a:srgbClr val="D5DBE3"/>
-                      </a:solidFill>
-                      <a:prstDash val="solid"/>
-                      <a:round/>
-                      <a:headEnd type="none" w="med" len="med"/>
-                      <a:tailEnd type="none" w="med" len="med"/>
-                    </a:lnL>
-                    <a:lnR w="6350" cap="flat" cmpd="sng" algn="ctr">
-                      <a:solidFill>
-                        <a:srgbClr val="D5DBE3"/>
-                      </a:solidFill>
-                      <a:prstDash val="solid"/>
-                      <a:round/>
-                      <a:headEnd type="none" w="med" len="med"/>
-                      <a:tailEnd type="none" w="med" len="med"/>
-                    </a:lnR>
-                    <a:lnT w="6350" cap="flat" cmpd="sng" algn="ctr">
-                      <a:solidFill>
-                        <a:srgbClr val="D5DBE3"/>
-                      </a:solidFill>
-                      <a:prstDash val="solid"/>
-                      <a:round/>
-                      <a:headEnd type="none" w="med" len="med"/>
-                      <a:tailEnd type="none" w="med" len="med"/>
-                    </a:lnT>
-                    <a:lnB w="6350" cap="flat" cmpd="sng" algn="ctr">
-                      <a:solidFill>
-                        <a:srgbClr val="D5DBE3"/>
-                      </a:solidFill>
-                      <a:prstDash val="solid"/>
-                      <a:round/>
-                      <a:headEnd type="none" w="med" len="med"/>
-                      <a:tailEnd type="none" w="med" len="med"/>
-                    </a:lnB>
-                  </a:tcPr>
-                </a:tc>
-                <a:tc>
-                  <a:txBody>
-                    <a:bodyPr/>
-                    <a:lstStyle/>
-                    <a:p>
-                      <a:pPr algn="r" indent="0" marL="0">
-                        <a:buNone/>
-                      </a:pPr>
-                      <a:r>
-                        <a:rPr lang="en-US" sz="850" dirty="0">
-                          <a:solidFill>
-                            <a:srgbClr val="1F2933"/>
-                          </a:solidFill>
-                          <a:latin typeface="Calibri" pitchFamily="34" charset="0"/>
-                          <a:ea typeface="Calibri" pitchFamily="34" charset="-122"/>
-                          <a:cs typeface="Calibri" pitchFamily="34" charset="-120"/>
-                        </a:rPr>
-                        <a:t>–</a:t>
-                      </a:r>
-                      <a:endParaRPr lang="en-US" sz="850" dirty="0">
-                        <a:latin typeface="Calibri" charset="0"/>
-                        <a:ea typeface="Calibri" charset="0"/>
-                        <a:cs typeface="Calibri" charset="0"/>
-                      </a:endParaRPr>
-                    </a:p>
-                  </a:txBody>
-                  <a:tcPr marL="64008" marR="64008" marT="0" marB="0" anchor="ctr">
-                    <a:lnL w="6350" cap="flat" cmpd="sng" algn="ctr">
-                      <a:solidFill>
-                        <a:srgbClr val="D5DBE3"/>
-                      </a:solidFill>
-                      <a:prstDash val="solid"/>
-                      <a:round/>
-                      <a:headEnd type="none" w="med" len="med"/>
-                      <a:tailEnd type="none" w="med" len="med"/>
-                    </a:lnL>
-                    <a:lnR w="6350" cap="flat" cmpd="sng" algn="ctr">
-                      <a:solidFill>
-                        <a:srgbClr val="D5DBE3"/>
-                      </a:solidFill>
-                      <a:prstDash val="solid"/>
-                      <a:round/>
-                      <a:headEnd type="none" w="med" len="med"/>
-                      <a:tailEnd type="none" w="med" len="med"/>
-                    </a:lnR>
-                    <a:lnT w="6350" cap="flat" cmpd="sng" algn="ctr">
-                      <a:solidFill>
-                        <a:srgbClr val="D5DBE3"/>
-                      </a:solidFill>
-                      <a:prstDash val="solid"/>
-                      <a:round/>
-                      <a:headEnd type="none" w="med" len="med"/>
-                      <a:tailEnd type="none" w="med" len="med"/>
-                    </a:lnT>
-                    <a:lnB w="6350" cap="flat" cmpd="sng" algn="ctr">
-                      <a:solidFill>
-                        <a:srgbClr val="D5DBE3"/>
-                      </a:solidFill>
-                      <a:prstDash val="solid"/>
-                      <a:round/>
-                      <a:headEnd type="none" w="med" len="med"/>
-                      <a:tailEnd type="none" w="med" len="med"/>
-                    </a:lnB>
-                  </a:tcPr>
-                </a:tc>
-              </a:tr>
-              <a:tr h="224028">
-                <a:tc>
-                  <a:txBody>
-                    <a:bodyPr/>
-                    <a:lstStyle/>
-                    <a:p>
-                      <a:pPr algn="l" indent="0" marL="0">
-                        <a:buNone/>
-                      </a:pPr>
-                      <a:r>
-                        <a:rPr lang="en-US" sz="850" b="1" dirty="0">
-                          <a:solidFill>
-                            <a:srgbClr val="1F2933"/>
-                          </a:solidFill>
-                          <a:latin typeface="Calibri" pitchFamily="34" charset="0"/>
-                          <a:ea typeface="Calibri" pitchFamily="34" charset="-122"/>
-                          <a:cs typeface="Calibri" pitchFamily="34" charset="-120"/>
-                        </a:rPr>
-                        <a:t>RIVIERA PARK</a:t>
-                      </a:r>
-                      <a:endParaRPr lang="en-US" sz="850" dirty="0">
-                        <a:latin typeface="Calibri" charset="0"/>
-                        <a:ea typeface="Calibri" charset="0"/>
-                        <a:cs typeface="Calibri" charset="0"/>
-                      </a:endParaRPr>
-                    </a:p>
-                  </a:txBody>
-                  <a:tcPr marL="64008" marR="64008" marT="0" marB="0" anchor="ctr">
-                    <a:lnL w="6350" cap="flat" cmpd="sng" algn="ctr">
-                      <a:solidFill>
-                        <a:srgbClr val="D5DBE3"/>
-                      </a:solidFill>
-                      <a:prstDash val="solid"/>
-                      <a:round/>
-                      <a:headEnd type="none" w="med" len="med"/>
-                      <a:tailEnd type="none" w="med" len="med"/>
-                    </a:lnL>
-                    <a:lnR w="6350" cap="flat" cmpd="sng" algn="ctr">
-                      <a:solidFill>
-                        <a:srgbClr val="D5DBE3"/>
-                      </a:solidFill>
-                      <a:prstDash val="solid"/>
-                      <a:round/>
-                      <a:headEnd type="none" w="med" len="med"/>
-                      <a:tailEnd type="none" w="med" len="med"/>
-                    </a:lnR>
-                    <a:lnT w="6350" cap="flat" cmpd="sng" algn="ctr">
-                      <a:solidFill>
-                        <a:srgbClr val="D5DBE3"/>
-                      </a:solidFill>
-                      <a:prstDash val="solid"/>
-                      <a:round/>
-                      <a:headEnd type="none" w="med" len="med"/>
-                      <a:tailEnd type="none" w="med" len="med"/>
-                    </a:lnT>
-                    <a:lnB w="6350" cap="flat" cmpd="sng" algn="ctr">
-                      <a:solidFill>
-                        <a:srgbClr val="D5DBE3"/>
-                      </a:solidFill>
-                      <a:prstDash val="solid"/>
-                      <a:round/>
-                      <a:headEnd type="none" w="med" len="med"/>
-                      <a:tailEnd type="none" w="med" len="med"/>
-                    </a:lnB>
-                  </a:tcPr>
-                </a:tc>
-                <a:tc>
-                  <a:txBody>
-                    <a:bodyPr/>
-                    <a:lstStyle/>
-                    <a:p>
-                      <a:pPr algn="r" indent="0" marL="0">
-                        <a:buNone/>
-                      </a:pPr>
-                      <a:r>
-                        <a:rPr lang="en-US" sz="850" dirty="0">
-                          <a:solidFill>
-                            <a:srgbClr val="1F2933"/>
-                          </a:solidFill>
-                          <a:latin typeface="Calibri" pitchFamily="34" charset="0"/>
-                          <a:ea typeface="Calibri" pitchFamily="34" charset="-122"/>
-                          <a:cs typeface="Calibri" pitchFamily="34" charset="-120"/>
-                        </a:rPr>
-                        <a:t>1,5</a:t>
-                      </a:r>
-                      <a:endParaRPr lang="en-US" sz="850" dirty="0">
-                        <a:latin typeface="Calibri" charset="0"/>
-                        <a:ea typeface="Calibri" charset="0"/>
-                        <a:cs typeface="Calibri" charset="0"/>
-                      </a:endParaRPr>
-                    </a:p>
-                  </a:txBody>
-                  <a:tcPr marL="64008" marR="64008" marT="0" marB="0" anchor="ctr">
-                    <a:lnL w="6350" cap="flat" cmpd="sng" algn="ctr">
-                      <a:solidFill>
-                        <a:srgbClr val="D5DBE3"/>
-                      </a:solidFill>
-                      <a:prstDash val="solid"/>
-                      <a:round/>
-                      <a:headEnd type="none" w="med" len="med"/>
-                      <a:tailEnd type="none" w="med" len="med"/>
-                    </a:lnL>
-                    <a:lnR w="6350" cap="flat" cmpd="sng" algn="ctr">
-                      <a:solidFill>
-                        <a:srgbClr val="D5DBE3"/>
-                      </a:solidFill>
-                      <a:prstDash val="solid"/>
-                      <a:round/>
-                      <a:headEnd type="none" w="med" len="med"/>
-                      <a:tailEnd type="none" w="med" len="med"/>
-                    </a:lnR>
-                    <a:lnT w="6350" cap="flat" cmpd="sng" algn="ctr">
-                      <a:solidFill>
-                        <a:srgbClr val="D5DBE3"/>
-                      </a:solidFill>
-                      <a:prstDash val="solid"/>
-                      <a:round/>
-                      <a:headEnd type="none" w="med" len="med"/>
-                      <a:tailEnd type="none" w="med" len="med"/>
-                    </a:lnT>
-                    <a:lnB w="6350" cap="flat" cmpd="sng" algn="ctr">
-                      <a:solidFill>
-                        <a:srgbClr val="D5DBE3"/>
-                      </a:solidFill>
-                      <a:prstDash val="solid"/>
-                      <a:round/>
-                      <a:headEnd type="none" w="med" len="med"/>
-                      <a:tailEnd type="none" w="med" len="med"/>
-                    </a:lnB>
-                  </a:tcPr>
-                </a:tc>
-                <a:tc>
-                  <a:txBody>
-                    <a:bodyPr/>
-                    <a:lstStyle/>
-                    <a:p>
-                      <a:pPr algn="r" indent="0" marL="0">
-                        <a:buNone/>
-                      </a:pPr>
-                      <a:r>
-                        <a:rPr lang="en-US" sz="850" dirty="0">
-                          <a:solidFill>
-                            <a:srgbClr val="1F2933"/>
-                          </a:solidFill>
-                          <a:latin typeface="Calibri" pitchFamily="34" charset="0"/>
-                          <a:ea typeface="Calibri" pitchFamily="34" charset="-122"/>
-                          <a:cs typeface="Calibri" pitchFamily="34" charset="-120"/>
-                        </a:rPr>
-                        <a:t>-88,5</a:t>
-                      </a:r>
-                      <a:endParaRPr lang="en-US" sz="850" dirty="0">
-                        <a:latin typeface="Calibri" charset="0"/>
-                        <a:ea typeface="Calibri" charset="0"/>
-                        <a:cs typeface="Calibri" charset="0"/>
-                      </a:endParaRPr>
-                    </a:p>
-                  </a:txBody>
-                  <a:tcPr marL="64008" marR="64008" marT="0" marB="0" anchor="ctr">
-                    <a:lnL w="6350" cap="flat" cmpd="sng" algn="ctr">
-                      <a:solidFill>
-                        <a:srgbClr val="D5DBE3"/>
-                      </a:solidFill>
-                      <a:prstDash val="solid"/>
-                      <a:round/>
-                      <a:headEnd type="none" w="med" len="med"/>
-                      <a:tailEnd type="none" w="med" len="med"/>
-                    </a:lnL>
-                    <a:lnR w="6350" cap="flat" cmpd="sng" algn="ctr">
-                      <a:solidFill>
-                        <a:srgbClr val="D5DBE3"/>
-                      </a:solidFill>
-                      <a:prstDash val="solid"/>
-                      <a:round/>
-                      <a:headEnd type="none" w="med" len="med"/>
-                      <a:tailEnd type="none" w="med" len="med"/>
-                    </a:lnR>
-                    <a:lnT w="6350" cap="flat" cmpd="sng" algn="ctr">
-                      <a:solidFill>
-                        <a:srgbClr val="D5DBE3"/>
-                      </a:solidFill>
-                      <a:prstDash val="solid"/>
-                      <a:round/>
-                      <a:headEnd type="none" w="med" len="med"/>
-                      <a:tailEnd type="none" w="med" len="med"/>
-                    </a:lnT>
-                    <a:lnB w="6350" cap="flat" cmpd="sng" algn="ctr">
-                      <a:solidFill>
-                        <a:srgbClr val="D5DBE3"/>
-                      </a:solidFill>
-                      <a:prstDash val="solid"/>
-                      <a:round/>
-                      <a:headEnd type="none" w="med" len="med"/>
-                      <a:tailEnd type="none" w="med" len="med"/>
-                    </a:lnB>
-                  </a:tcPr>
-                </a:tc>
-                <a:tc>
-                  <a:txBody>
-                    <a:bodyPr/>
-                    <a:lstStyle/>
-                    <a:p>
-                      <a:pPr algn="r" indent="0" marL="0">
-                        <a:buNone/>
-                      </a:pPr>
-                      <a:r>
-                        <a:rPr lang="en-US" sz="850" dirty="0">
-                          <a:solidFill>
-                            <a:srgbClr val="1F2933"/>
-                          </a:solidFill>
-                          <a:latin typeface="Calibri" pitchFamily="34" charset="0"/>
-                          <a:ea typeface="Calibri" pitchFamily="34" charset="-122"/>
-                          <a:cs typeface="Calibri" pitchFamily="34" charset="-120"/>
-                        </a:rPr>
-                        <a:t>–</a:t>
-                      </a:r>
-                      <a:endParaRPr lang="en-US" sz="850" dirty="0">
-                        <a:latin typeface="Calibri" charset="0"/>
-                        <a:ea typeface="Calibri" charset="0"/>
-                        <a:cs typeface="Calibri" charset="0"/>
-                      </a:endParaRPr>
-                    </a:p>
-                  </a:txBody>
-                  <a:tcPr marL="64008" marR="64008" marT="0" marB="0" anchor="ctr">
-                    <a:lnL w="6350" cap="flat" cmpd="sng" algn="ctr">
-                      <a:solidFill>
-                        <a:srgbClr val="D5DBE3"/>
-                      </a:solidFill>
-                      <a:prstDash val="solid"/>
-                      <a:round/>
-                      <a:headEnd type="none" w="med" len="med"/>
-                      <a:tailEnd type="none" w="med" len="med"/>
-                    </a:lnL>
-                    <a:lnR w="6350" cap="flat" cmpd="sng" algn="ctr">
-                      <a:solidFill>
-                        <a:srgbClr val="D5DBE3"/>
-                      </a:solidFill>
-                      <a:prstDash val="solid"/>
-                      <a:round/>
-                      <a:headEnd type="none" w="med" len="med"/>
-                      <a:tailEnd type="none" w="med" len="med"/>
-                    </a:lnR>
-                    <a:lnT w="6350" cap="flat" cmpd="sng" algn="ctr">
-                      <a:solidFill>
-                        <a:srgbClr val="D5DBE3"/>
-                      </a:solidFill>
-                      <a:prstDash val="solid"/>
-                      <a:round/>
-                      <a:headEnd type="none" w="med" len="med"/>
-                      <a:tailEnd type="none" w="med" len="med"/>
-                    </a:lnT>
-                    <a:lnB w="6350" cap="flat" cmpd="sng" algn="ctr">
-                      <a:solidFill>
-                        <a:srgbClr val="D5DBE3"/>
-                      </a:solidFill>
-                      <a:prstDash val="solid"/>
-                      <a:round/>
-                      <a:headEnd type="none" w="med" len="med"/>
-                      <a:tailEnd type="none" w="med" len="med"/>
-                    </a:lnB>
-                  </a:tcPr>
-                </a:tc>
-                <a:tc>
-                  <a:txBody>
-                    <a:bodyPr/>
-                    <a:lstStyle/>
-                    <a:p>
-                      <a:pPr algn="r" indent="0" marL="0">
-                        <a:buNone/>
-                      </a:pPr>
-                      <a:r>
-                        <a:rPr lang="en-US" sz="850" b="1" dirty="0">
-                          <a:solidFill>
                             <a:srgbClr val="B3261E"/>
                           </a:solidFill>
                           <a:latin typeface="Calibri" pitchFamily="34" charset="0"/>
                           <a:ea typeface="Calibri" pitchFamily="34" charset="-122"/>
                           <a:cs typeface="Calibri" pitchFamily="34" charset="-120"/>
                         </a:rPr>
-                        <a:t>-87,1</a:t>
+                        <a:t>-171,8</a:t>
                       </a:r>
                       <a:endParaRPr lang="en-US" sz="850" dirty="0">
                         <a:latin typeface="Calibri" charset="0"/>
@@ -21530,7 +19245,7 @@
                           <a:ea typeface="Calibri" pitchFamily="34" charset="-122"/>
                           <a:cs typeface="Calibri" pitchFamily="34" charset="-120"/>
                         </a:rPr>
-                        <a:t>87,1</a:t>
+                        <a:t>180,2</a:t>
                       </a:r>
                       <a:endParaRPr lang="en-US" sz="850" dirty="0">
                         <a:latin typeface="Calibri" charset="0"/>
@@ -21600,6 +19315,1182 @@
                           <a:ea typeface="Calibri" pitchFamily="34" charset="-122"/>
                           <a:cs typeface="Calibri" pitchFamily="34" charset="-120"/>
                         </a:rPr>
+                        <a:t>RIVIERA PARK – projet</a:t>
+                      </a:r>
+                      <a:endParaRPr lang="en-US" sz="850" dirty="0">
+                        <a:latin typeface="Calibri" charset="0"/>
+                        <a:ea typeface="Calibri" charset="0"/>
+                        <a:cs typeface="Calibri" charset="0"/>
+                      </a:endParaRPr>
+                    </a:p>
+                  </a:txBody>
+                  <a:tcPr marL="64008" marR="64008" marT="0" marB="0" anchor="ctr">
+                    <a:lnL w="6350" cap="flat" cmpd="sng" algn="ctr">
+                      <a:solidFill>
+                        <a:srgbClr val="D5DBE3"/>
+                      </a:solidFill>
+                      <a:prstDash val="solid"/>
+                      <a:round/>
+                      <a:headEnd type="none" w="med" len="med"/>
+                      <a:tailEnd type="none" w="med" len="med"/>
+                    </a:lnL>
+                    <a:lnR w="6350" cap="flat" cmpd="sng" algn="ctr">
+                      <a:solidFill>
+                        <a:srgbClr val="D5DBE3"/>
+                      </a:solidFill>
+                      <a:prstDash val="solid"/>
+                      <a:round/>
+                      <a:headEnd type="none" w="med" len="med"/>
+                      <a:tailEnd type="none" w="med" len="med"/>
+                    </a:lnR>
+                    <a:lnT w="6350" cap="flat" cmpd="sng" algn="ctr">
+                      <a:solidFill>
+                        <a:srgbClr val="D5DBE3"/>
+                      </a:solidFill>
+                      <a:prstDash val="solid"/>
+                      <a:round/>
+                      <a:headEnd type="none" w="med" len="med"/>
+                      <a:tailEnd type="none" w="med" len="med"/>
+                    </a:lnT>
+                    <a:lnB w="6350" cap="flat" cmpd="sng" algn="ctr">
+                      <a:solidFill>
+                        <a:srgbClr val="D5DBE3"/>
+                      </a:solidFill>
+                      <a:prstDash val="solid"/>
+                      <a:round/>
+                      <a:headEnd type="none" w="med" len="med"/>
+                      <a:tailEnd type="none" w="med" len="med"/>
+                    </a:lnB>
+                  </a:tcPr>
+                </a:tc>
+                <a:tc>
+                  <a:txBody>
+                    <a:bodyPr/>
+                    <a:lstStyle/>
+                    <a:p>
+                      <a:pPr algn="r" indent="0" marL="0">
+                        <a:buNone/>
+                      </a:pPr>
+                      <a:r>
+                        <a:rPr lang="en-US" sz="850" dirty="0">
+                          <a:solidFill>
+                            <a:srgbClr val="1F2933"/>
+                          </a:solidFill>
+                          <a:latin typeface="Calibri" pitchFamily="34" charset="0"/>
+                          <a:ea typeface="Calibri" pitchFamily="34" charset="-122"/>
+                          <a:cs typeface="Calibri" pitchFamily="34" charset="-120"/>
+                        </a:rPr>
+                        <a:t>2 643,1</a:t>
+                      </a:r>
+                      <a:endParaRPr lang="en-US" sz="850" dirty="0">
+                        <a:latin typeface="Calibri" charset="0"/>
+                        <a:ea typeface="Calibri" charset="0"/>
+                        <a:cs typeface="Calibri" charset="0"/>
+                      </a:endParaRPr>
+                    </a:p>
+                  </a:txBody>
+                  <a:tcPr marL="64008" marR="64008" marT="0" marB="0" anchor="ctr">
+                    <a:lnL w="6350" cap="flat" cmpd="sng" algn="ctr">
+                      <a:solidFill>
+                        <a:srgbClr val="D5DBE3"/>
+                      </a:solidFill>
+                      <a:prstDash val="solid"/>
+                      <a:round/>
+                      <a:headEnd type="none" w="med" len="med"/>
+                      <a:tailEnd type="none" w="med" len="med"/>
+                    </a:lnL>
+                    <a:lnR w="6350" cap="flat" cmpd="sng" algn="ctr">
+                      <a:solidFill>
+                        <a:srgbClr val="D5DBE3"/>
+                      </a:solidFill>
+                      <a:prstDash val="solid"/>
+                      <a:round/>
+                      <a:headEnd type="none" w="med" len="med"/>
+                      <a:tailEnd type="none" w="med" len="med"/>
+                    </a:lnR>
+                    <a:lnT w="6350" cap="flat" cmpd="sng" algn="ctr">
+                      <a:solidFill>
+                        <a:srgbClr val="D5DBE3"/>
+                      </a:solidFill>
+                      <a:prstDash val="solid"/>
+                      <a:round/>
+                      <a:headEnd type="none" w="med" len="med"/>
+                      <a:tailEnd type="none" w="med" len="med"/>
+                    </a:lnT>
+                    <a:lnB w="6350" cap="flat" cmpd="sng" algn="ctr">
+                      <a:solidFill>
+                        <a:srgbClr val="D5DBE3"/>
+                      </a:solidFill>
+                      <a:prstDash val="solid"/>
+                      <a:round/>
+                      <a:headEnd type="none" w="med" len="med"/>
+                      <a:tailEnd type="none" w="med" len="med"/>
+                    </a:lnB>
+                  </a:tcPr>
+                </a:tc>
+                <a:tc>
+                  <a:txBody>
+                    <a:bodyPr/>
+                    <a:lstStyle/>
+                    <a:p>
+                      <a:pPr algn="r" indent="0" marL="0">
+                        <a:buNone/>
+                      </a:pPr>
+                      <a:r>
+                        <a:rPr lang="en-US" sz="850" dirty="0">
+                          <a:solidFill>
+                            <a:srgbClr val="1F2933"/>
+                          </a:solidFill>
+                          <a:latin typeface="Calibri" pitchFamily="34" charset="0"/>
+                          <a:ea typeface="Calibri" pitchFamily="34" charset="-122"/>
+                          <a:cs typeface="Calibri" pitchFamily="34" charset="-120"/>
+                        </a:rPr>
+                        <a:t>-1 988,4</a:t>
+                      </a:r>
+                      <a:endParaRPr lang="en-US" sz="850" dirty="0">
+                        <a:latin typeface="Calibri" charset="0"/>
+                        <a:ea typeface="Calibri" charset="0"/>
+                        <a:cs typeface="Calibri" charset="0"/>
+                      </a:endParaRPr>
+                    </a:p>
+                  </a:txBody>
+                  <a:tcPr marL="64008" marR="64008" marT="0" marB="0" anchor="ctr">
+                    <a:lnL w="6350" cap="flat" cmpd="sng" algn="ctr">
+                      <a:solidFill>
+                        <a:srgbClr val="D5DBE3"/>
+                      </a:solidFill>
+                      <a:prstDash val="solid"/>
+                      <a:round/>
+                      <a:headEnd type="none" w="med" len="med"/>
+                      <a:tailEnd type="none" w="med" len="med"/>
+                    </a:lnL>
+                    <a:lnR w="6350" cap="flat" cmpd="sng" algn="ctr">
+                      <a:solidFill>
+                        <a:srgbClr val="D5DBE3"/>
+                      </a:solidFill>
+                      <a:prstDash val="solid"/>
+                      <a:round/>
+                      <a:headEnd type="none" w="med" len="med"/>
+                      <a:tailEnd type="none" w="med" len="med"/>
+                    </a:lnR>
+                    <a:lnT w="6350" cap="flat" cmpd="sng" algn="ctr">
+                      <a:solidFill>
+                        <a:srgbClr val="D5DBE3"/>
+                      </a:solidFill>
+                      <a:prstDash val="solid"/>
+                      <a:round/>
+                      <a:headEnd type="none" w="med" len="med"/>
+                      <a:tailEnd type="none" w="med" len="med"/>
+                    </a:lnT>
+                    <a:lnB w="6350" cap="flat" cmpd="sng" algn="ctr">
+                      <a:solidFill>
+                        <a:srgbClr val="D5DBE3"/>
+                      </a:solidFill>
+                      <a:prstDash val="solid"/>
+                      <a:round/>
+                      <a:headEnd type="none" w="med" len="med"/>
+                      <a:tailEnd type="none" w="med" len="med"/>
+                    </a:lnB>
+                  </a:tcPr>
+                </a:tc>
+                <a:tc>
+                  <a:txBody>
+                    <a:bodyPr/>
+                    <a:lstStyle/>
+                    <a:p>
+                      <a:pPr algn="r" indent="0" marL="0">
+                        <a:buNone/>
+                      </a:pPr>
+                      <a:r>
+                        <a:rPr lang="en-US" sz="850" dirty="0">
+                          <a:solidFill>
+                            <a:srgbClr val="1F2933"/>
+                          </a:solidFill>
+                          <a:latin typeface="Calibri" pitchFamily="34" charset="0"/>
+                          <a:ea typeface="Calibri" pitchFamily="34" charset="-122"/>
+                          <a:cs typeface="Calibri" pitchFamily="34" charset="-120"/>
+                        </a:rPr>
+                        <a:t>–</a:t>
+                      </a:r>
+                      <a:endParaRPr lang="en-US" sz="850" dirty="0">
+                        <a:latin typeface="Calibri" charset="0"/>
+                        <a:ea typeface="Calibri" charset="0"/>
+                        <a:cs typeface="Calibri" charset="0"/>
+                      </a:endParaRPr>
+                    </a:p>
+                  </a:txBody>
+                  <a:tcPr marL="64008" marR="64008" marT="0" marB="0" anchor="ctr">
+                    <a:lnL w="6350" cap="flat" cmpd="sng" algn="ctr">
+                      <a:solidFill>
+                        <a:srgbClr val="D5DBE3"/>
+                      </a:solidFill>
+                      <a:prstDash val="solid"/>
+                      <a:round/>
+                      <a:headEnd type="none" w="med" len="med"/>
+                      <a:tailEnd type="none" w="med" len="med"/>
+                    </a:lnL>
+                    <a:lnR w="6350" cap="flat" cmpd="sng" algn="ctr">
+                      <a:solidFill>
+                        <a:srgbClr val="D5DBE3"/>
+                      </a:solidFill>
+                      <a:prstDash val="solid"/>
+                      <a:round/>
+                      <a:headEnd type="none" w="med" len="med"/>
+                      <a:tailEnd type="none" w="med" len="med"/>
+                    </a:lnR>
+                    <a:lnT w="6350" cap="flat" cmpd="sng" algn="ctr">
+                      <a:solidFill>
+                        <a:srgbClr val="D5DBE3"/>
+                      </a:solidFill>
+                      <a:prstDash val="solid"/>
+                      <a:round/>
+                      <a:headEnd type="none" w="med" len="med"/>
+                      <a:tailEnd type="none" w="med" len="med"/>
+                    </a:lnT>
+                    <a:lnB w="6350" cap="flat" cmpd="sng" algn="ctr">
+                      <a:solidFill>
+                        <a:srgbClr val="D5DBE3"/>
+                      </a:solidFill>
+                      <a:prstDash val="solid"/>
+                      <a:round/>
+                      <a:headEnd type="none" w="med" len="med"/>
+                      <a:tailEnd type="none" w="med" len="med"/>
+                    </a:lnB>
+                  </a:tcPr>
+                </a:tc>
+                <a:tc>
+                  <a:txBody>
+                    <a:bodyPr/>
+                    <a:lstStyle/>
+                    <a:p>
+                      <a:pPr algn="r" indent="0" marL="0">
+                        <a:buNone/>
+                      </a:pPr>
+                      <a:r>
+                        <a:rPr lang="en-US" sz="850" b="1" dirty="0">
+                          <a:solidFill>
+                            <a:srgbClr val="5E9B7E"/>
+                          </a:solidFill>
+                          <a:latin typeface="Calibri" pitchFamily="34" charset="0"/>
+                          <a:ea typeface="Calibri" pitchFamily="34" charset="-122"/>
+                          <a:cs typeface="Calibri" pitchFamily="34" charset="-120"/>
+                        </a:rPr>
+                        <a:t>654,7</a:t>
+                      </a:r>
+                      <a:endParaRPr lang="en-US" sz="850" dirty="0">
+                        <a:latin typeface="Calibri" charset="0"/>
+                        <a:ea typeface="Calibri" charset="0"/>
+                        <a:cs typeface="Calibri" charset="0"/>
+                      </a:endParaRPr>
+                    </a:p>
+                  </a:txBody>
+                  <a:tcPr marL="64008" marR="64008" marT="0" marB="0" anchor="ctr">
+                    <a:lnL w="6350" cap="flat" cmpd="sng" algn="ctr">
+                      <a:solidFill>
+                        <a:srgbClr val="D5DBE3"/>
+                      </a:solidFill>
+                      <a:prstDash val="solid"/>
+                      <a:round/>
+                      <a:headEnd type="none" w="med" len="med"/>
+                      <a:tailEnd type="none" w="med" len="med"/>
+                    </a:lnL>
+                    <a:lnR w="6350" cap="flat" cmpd="sng" algn="ctr">
+                      <a:solidFill>
+                        <a:srgbClr val="D5DBE3"/>
+                      </a:solidFill>
+                      <a:prstDash val="solid"/>
+                      <a:round/>
+                      <a:headEnd type="none" w="med" len="med"/>
+                      <a:tailEnd type="none" w="med" len="med"/>
+                    </a:lnR>
+                    <a:lnT w="6350" cap="flat" cmpd="sng" algn="ctr">
+                      <a:solidFill>
+                        <a:srgbClr val="D5DBE3"/>
+                      </a:solidFill>
+                      <a:prstDash val="solid"/>
+                      <a:round/>
+                      <a:headEnd type="none" w="med" len="med"/>
+                      <a:tailEnd type="none" w="med" len="med"/>
+                    </a:lnT>
+                    <a:lnB w="6350" cap="flat" cmpd="sng" algn="ctr">
+                      <a:solidFill>
+                        <a:srgbClr val="D5DBE3"/>
+                      </a:solidFill>
+                      <a:prstDash val="solid"/>
+                      <a:round/>
+                      <a:headEnd type="none" w="med" len="med"/>
+                      <a:tailEnd type="none" w="med" len="med"/>
+                    </a:lnB>
+                  </a:tcPr>
+                </a:tc>
+                <a:tc>
+                  <a:txBody>
+                    <a:bodyPr/>
+                    <a:lstStyle/>
+                    <a:p>
+                      <a:pPr algn="r" indent="0" marL="0">
+                        <a:buNone/>
+                      </a:pPr>
+                      <a:r>
+                        <a:rPr lang="en-US" sz="850" dirty="0">
+                          <a:solidFill>
+                            <a:srgbClr val="1F2933"/>
+                          </a:solidFill>
+                          <a:latin typeface="Calibri" pitchFamily="34" charset="0"/>
+                          <a:ea typeface="Calibri" pitchFamily="34" charset="-122"/>
+                          <a:cs typeface="Calibri" pitchFamily="34" charset="-120"/>
+                        </a:rPr>
+                        <a:t>–</a:t>
+                      </a:r>
+                      <a:endParaRPr lang="en-US" sz="850" dirty="0">
+                        <a:latin typeface="Calibri" charset="0"/>
+                        <a:ea typeface="Calibri" charset="0"/>
+                        <a:cs typeface="Calibri" charset="0"/>
+                      </a:endParaRPr>
+                    </a:p>
+                  </a:txBody>
+                  <a:tcPr marL="64008" marR="64008" marT="0" marB="0" anchor="ctr">
+                    <a:lnL w="6350" cap="flat" cmpd="sng" algn="ctr">
+                      <a:solidFill>
+                        <a:srgbClr val="D5DBE3"/>
+                      </a:solidFill>
+                      <a:prstDash val="solid"/>
+                      <a:round/>
+                      <a:headEnd type="none" w="med" len="med"/>
+                      <a:tailEnd type="none" w="med" len="med"/>
+                    </a:lnL>
+                    <a:lnR w="6350" cap="flat" cmpd="sng" algn="ctr">
+                      <a:solidFill>
+                        <a:srgbClr val="D5DBE3"/>
+                      </a:solidFill>
+                      <a:prstDash val="solid"/>
+                      <a:round/>
+                      <a:headEnd type="none" w="med" len="med"/>
+                      <a:tailEnd type="none" w="med" len="med"/>
+                    </a:lnR>
+                    <a:lnT w="6350" cap="flat" cmpd="sng" algn="ctr">
+                      <a:solidFill>
+                        <a:srgbClr val="D5DBE3"/>
+                      </a:solidFill>
+                      <a:prstDash val="solid"/>
+                      <a:round/>
+                      <a:headEnd type="none" w="med" len="med"/>
+                      <a:tailEnd type="none" w="med" len="med"/>
+                    </a:lnT>
+                    <a:lnB w="6350" cap="flat" cmpd="sng" algn="ctr">
+                      <a:solidFill>
+                        <a:srgbClr val="D5DBE3"/>
+                      </a:solidFill>
+                      <a:prstDash val="solid"/>
+                      <a:round/>
+                      <a:headEnd type="none" w="med" len="med"/>
+                      <a:tailEnd type="none" w="med" len="med"/>
+                    </a:lnB>
+                  </a:tcPr>
+                </a:tc>
+              </a:tr>
+              <a:tr h="224028">
+                <a:tc>
+                  <a:txBody>
+                    <a:bodyPr/>
+                    <a:lstStyle/>
+                    <a:p>
+                      <a:pPr algn="l" indent="0" marL="0">
+                        <a:buNone/>
+                      </a:pPr>
+                      <a:r>
+                        <a:rPr lang="en-US" sz="850" b="1" dirty="0">
+                          <a:solidFill>
+                            <a:srgbClr val="1F2933"/>
+                          </a:solidFill>
+                          <a:latin typeface="Calibri" pitchFamily="34" charset="0"/>
+                          <a:ea typeface="Calibri" pitchFamily="34" charset="-122"/>
+                          <a:cs typeface="Calibri" pitchFamily="34" charset="-120"/>
+                        </a:rPr>
+                        <a:t>RIVIERA PARK – BNI courant (à arbitrer)</a:t>
+                      </a:r>
+                      <a:endParaRPr lang="en-US" sz="850" dirty="0">
+                        <a:latin typeface="Calibri" charset="0"/>
+                        <a:ea typeface="Calibri" charset="0"/>
+                        <a:cs typeface="Calibri" charset="0"/>
+                      </a:endParaRPr>
+                    </a:p>
+                  </a:txBody>
+                  <a:tcPr marL="64008" marR="64008" marT="0" marB="0" anchor="ctr">
+                    <a:lnL w="6350" cap="flat" cmpd="sng" algn="ctr">
+                      <a:solidFill>
+                        <a:srgbClr val="D5DBE3"/>
+                      </a:solidFill>
+                      <a:prstDash val="solid"/>
+                      <a:round/>
+                      <a:headEnd type="none" w="med" len="med"/>
+                      <a:tailEnd type="none" w="med" len="med"/>
+                    </a:lnL>
+                    <a:lnR w="6350" cap="flat" cmpd="sng" algn="ctr">
+                      <a:solidFill>
+                        <a:srgbClr val="D5DBE3"/>
+                      </a:solidFill>
+                      <a:prstDash val="solid"/>
+                      <a:round/>
+                      <a:headEnd type="none" w="med" len="med"/>
+                      <a:tailEnd type="none" w="med" len="med"/>
+                    </a:lnR>
+                    <a:lnT w="6350" cap="flat" cmpd="sng" algn="ctr">
+                      <a:solidFill>
+                        <a:srgbClr val="D5DBE3"/>
+                      </a:solidFill>
+                      <a:prstDash val="solid"/>
+                      <a:round/>
+                      <a:headEnd type="none" w="med" len="med"/>
+                      <a:tailEnd type="none" w="med" len="med"/>
+                    </a:lnT>
+                    <a:lnB w="6350" cap="flat" cmpd="sng" algn="ctr">
+                      <a:solidFill>
+                        <a:srgbClr val="D5DBE3"/>
+                      </a:solidFill>
+                      <a:prstDash val="solid"/>
+                      <a:round/>
+                      <a:headEnd type="none" w="med" len="med"/>
+                      <a:tailEnd type="none" w="med" len="med"/>
+                    </a:lnB>
+                  </a:tcPr>
+                </a:tc>
+                <a:tc>
+                  <a:txBody>
+                    <a:bodyPr/>
+                    <a:lstStyle/>
+                    <a:p>
+                      <a:pPr algn="r" indent="0" marL="0">
+                        <a:buNone/>
+                      </a:pPr>
+                      <a:r>
+                        <a:rPr lang="en-US" sz="850" dirty="0">
+                          <a:solidFill>
+                            <a:srgbClr val="1F2933"/>
+                          </a:solidFill>
+                          <a:latin typeface="Calibri" pitchFamily="34" charset="0"/>
+                          <a:ea typeface="Calibri" pitchFamily="34" charset="-122"/>
+                          <a:cs typeface="Calibri" pitchFamily="34" charset="-120"/>
+                        </a:rPr>
+                        <a:t>1 772,0</a:t>
+                      </a:r>
+                      <a:endParaRPr lang="en-US" sz="850" dirty="0">
+                        <a:latin typeface="Calibri" charset="0"/>
+                        <a:ea typeface="Calibri" charset="0"/>
+                        <a:cs typeface="Calibri" charset="0"/>
+                      </a:endParaRPr>
+                    </a:p>
+                  </a:txBody>
+                  <a:tcPr marL="64008" marR="64008" marT="0" marB="0" anchor="ctr">
+                    <a:lnL w="6350" cap="flat" cmpd="sng" algn="ctr">
+                      <a:solidFill>
+                        <a:srgbClr val="D5DBE3"/>
+                      </a:solidFill>
+                      <a:prstDash val="solid"/>
+                      <a:round/>
+                      <a:headEnd type="none" w="med" len="med"/>
+                      <a:tailEnd type="none" w="med" len="med"/>
+                    </a:lnL>
+                    <a:lnR w="6350" cap="flat" cmpd="sng" algn="ctr">
+                      <a:solidFill>
+                        <a:srgbClr val="D5DBE3"/>
+                      </a:solidFill>
+                      <a:prstDash val="solid"/>
+                      <a:round/>
+                      <a:headEnd type="none" w="med" len="med"/>
+                      <a:tailEnd type="none" w="med" len="med"/>
+                    </a:lnR>
+                    <a:lnT w="6350" cap="flat" cmpd="sng" algn="ctr">
+                      <a:solidFill>
+                        <a:srgbClr val="D5DBE3"/>
+                      </a:solidFill>
+                      <a:prstDash val="solid"/>
+                      <a:round/>
+                      <a:headEnd type="none" w="med" len="med"/>
+                      <a:tailEnd type="none" w="med" len="med"/>
+                    </a:lnT>
+                    <a:lnB w="6350" cap="flat" cmpd="sng" algn="ctr">
+                      <a:solidFill>
+                        <a:srgbClr val="D5DBE3"/>
+                      </a:solidFill>
+                      <a:prstDash val="solid"/>
+                      <a:round/>
+                      <a:headEnd type="none" w="med" len="med"/>
+                      <a:tailEnd type="none" w="med" len="med"/>
+                    </a:lnB>
+                  </a:tcPr>
+                </a:tc>
+                <a:tc>
+                  <a:txBody>
+                    <a:bodyPr/>
+                    <a:lstStyle/>
+                    <a:p>
+                      <a:pPr algn="r" indent="0" marL="0">
+                        <a:buNone/>
+                      </a:pPr>
+                      <a:r>
+                        <a:rPr lang="en-US" sz="850" dirty="0">
+                          <a:solidFill>
+                            <a:srgbClr val="1F2933"/>
+                          </a:solidFill>
+                          <a:latin typeface="Calibri" pitchFamily="34" charset="0"/>
+                          <a:ea typeface="Calibri" pitchFamily="34" charset="-122"/>
+                          <a:cs typeface="Calibri" pitchFamily="34" charset="-120"/>
+                        </a:rPr>
+                        <a:t>–</a:t>
+                      </a:r>
+                      <a:endParaRPr lang="en-US" sz="850" dirty="0">
+                        <a:latin typeface="Calibri" charset="0"/>
+                        <a:ea typeface="Calibri" charset="0"/>
+                        <a:cs typeface="Calibri" charset="0"/>
+                      </a:endParaRPr>
+                    </a:p>
+                  </a:txBody>
+                  <a:tcPr marL="64008" marR="64008" marT="0" marB="0" anchor="ctr">
+                    <a:lnL w="6350" cap="flat" cmpd="sng" algn="ctr">
+                      <a:solidFill>
+                        <a:srgbClr val="D5DBE3"/>
+                      </a:solidFill>
+                      <a:prstDash val="solid"/>
+                      <a:round/>
+                      <a:headEnd type="none" w="med" len="med"/>
+                      <a:tailEnd type="none" w="med" len="med"/>
+                    </a:lnL>
+                    <a:lnR w="6350" cap="flat" cmpd="sng" algn="ctr">
+                      <a:solidFill>
+                        <a:srgbClr val="D5DBE3"/>
+                      </a:solidFill>
+                      <a:prstDash val="solid"/>
+                      <a:round/>
+                      <a:headEnd type="none" w="med" len="med"/>
+                      <a:tailEnd type="none" w="med" len="med"/>
+                    </a:lnR>
+                    <a:lnT w="6350" cap="flat" cmpd="sng" algn="ctr">
+                      <a:solidFill>
+                        <a:srgbClr val="D5DBE3"/>
+                      </a:solidFill>
+                      <a:prstDash val="solid"/>
+                      <a:round/>
+                      <a:headEnd type="none" w="med" len="med"/>
+                      <a:tailEnd type="none" w="med" len="med"/>
+                    </a:lnT>
+                    <a:lnB w="6350" cap="flat" cmpd="sng" algn="ctr">
+                      <a:solidFill>
+                        <a:srgbClr val="D5DBE3"/>
+                      </a:solidFill>
+                      <a:prstDash val="solid"/>
+                      <a:round/>
+                      <a:headEnd type="none" w="med" len="med"/>
+                      <a:tailEnd type="none" w="med" len="med"/>
+                    </a:lnB>
+                  </a:tcPr>
+                </a:tc>
+                <a:tc>
+                  <a:txBody>
+                    <a:bodyPr/>
+                    <a:lstStyle/>
+                    <a:p>
+                      <a:pPr algn="r" indent="0" marL="0">
+                        <a:buNone/>
+                      </a:pPr>
+                      <a:r>
+                        <a:rPr lang="en-US" sz="850" dirty="0">
+                          <a:solidFill>
+                            <a:srgbClr val="1F2933"/>
+                          </a:solidFill>
+                          <a:latin typeface="Calibri" pitchFamily="34" charset="0"/>
+                          <a:ea typeface="Calibri" pitchFamily="34" charset="-122"/>
+                          <a:cs typeface="Calibri" pitchFamily="34" charset="-120"/>
+                        </a:rPr>
+                        <a:t>-500,0</a:t>
+                      </a:r>
+                      <a:endParaRPr lang="en-US" sz="850" dirty="0">
+                        <a:latin typeface="Calibri" charset="0"/>
+                        <a:ea typeface="Calibri" charset="0"/>
+                        <a:cs typeface="Calibri" charset="0"/>
+                      </a:endParaRPr>
+                    </a:p>
+                  </a:txBody>
+                  <a:tcPr marL="64008" marR="64008" marT="0" marB="0" anchor="ctr">
+                    <a:lnL w="6350" cap="flat" cmpd="sng" algn="ctr">
+                      <a:solidFill>
+                        <a:srgbClr val="D5DBE3"/>
+                      </a:solidFill>
+                      <a:prstDash val="solid"/>
+                      <a:round/>
+                      <a:headEnd type="none" w="med" len="med"/>
+                      <a:tailEnd type="none" w="med" len="med"/>
+                    </a:lnL>
+                    <a:lnR w="6350" cap="flat" cmpd="sng" algn="ctr">
+                      <a:solidFill>
+                        <a:srgbClr val="D5DBE3"/>
+                      </a:solidFill>
+                      <a:prstDash val="solid"/>
+                      <a:round/>
+                      <a:headEnd type="none" w="med" len="med"/>
+                      <a:tailEnd type="none" w="med" len="med"/>
+                    </a:lnR>
+                    <a:lnT w="6350" cap="flat" cmpd="sng" algn="ctr">
+                      <a:solidFill>
+                        <a:srgbClr val="D5DBE3"/>
+                      </a:solidFill>
+                      <a:prstDash val="solid"/>
+                      <a:round/>
+                      <a:headEnd type="none" w="med" len="med"/>
+                      <a:tailEnd type="none" w="med" len="med"/>
+                    </a:lnT>
+                    <a:lnB w="6350" cap="flat" cmpd="sng" algn="ctr">
+                      <a:solidFill>
+                        <a:srgbClr val="D5DBE3"/>
+                      </a:solidFill>
+                      <a:prstDash val="solid"/>
+                      <a:round/>
+                      <a:headEnd type="none" w="med" len="med"/>
+                      <a:tailEnd type="none" w="med" len="med"/>
+                    </a:lnB>
+                  </a:tcPr>
+                </a:tc>
+                <a:tc>
+                  <a:txBody>
+                    <a:bodyPr/>
+                    <a:lstStyle/>
+                    <a:p>
+                      <a:pPr algn="r" indent="0" marL="0">
+                        <a:buNone/>
+                      </a:pPr>
+                      <a:r>
+                        <a:rPr lang="en-US" sz="850" b="1" dirty="0">
+                          <a:solidFill>
+                            <a:srgbClr val="5E9B7E"/>
+                          </a:solidFill>
+                          <a:latin typeface="Calibri" pitchFamily="34" charset="0"/>
+                          <a:ea typeface="Calibri" pitchFamily="34" charset="-122"/>
+                          <a:cs typeface="Calibri" pitchFamily="34" charset="-120"/>
+                        </a:rPr>
+                        <a:t>1 272,0</a:t>
+                      </a:r>
+                      <a:endParaRPr lang="en-US" sz="850" dirty="0">
+                        <a:latin typeface="Calibri" charset="0"/>
+                        <a:ea typeface="Calibri" charset="0"/>
+                        <a:cs typeface="Calibri" charset="0"/>
+                      </a:endParaRPr>
+                    </a:p>
+                  </a:txBody>
+                  <a:tcPr marL="64008" marR="64008" marT="0" marB="0" anchor="ctr">
+                    <a:lnL w="6350" cap="flat" cmpd="sng" algn="ctr">
+                      <a:solidFill>
+                        <a:srgbClr val="D5DBE3"/>
+                      </a:solidFill>
+                      <a:prstDash val="solid"/>
+                      <a:round/>
+                      <a:headEnd type="none" w="med" len="med"/>
+                      <a:tailEnd type="none" w="med" len="med"/>
+                    </a:lnL>
+                    <a:lnR w="6350" cap="flat" cmpd="sng" algn="ctr">
+                      <a:solidFill>
+                        <a:srgbClr val="D5DBE3"/>
+                      </a:solidFill>
+                      <a:prstDash val="solid"/>
+                      <a:round/>
+                      <a:headEnd type="none" w="med" len="med"/>
+                      <a:tailEnd type="none" w="med" len="med"/>
+                    </a:lnR>
+                    <a:lnT w="6350" cap="flat" cmpd="sng" algn="ctr">
+                      <a:solidFill>
+                        <a:srgbClr val="D5DBE3"/>
+                      </a:solidFill>
+                      <a:prstDash val="solid"/>
+                      <a:round/>
+                      <a:headEnd type="none" w="med" len="med"/>
+                      <a:tailEnd type="none" w="med" len="med"/>
+                    </a:lnT>
+                    <a:lnB w="6350" cap="flat" cmpd="sng" algn="ctr">
+                      <a:solidFill>
+                        <a:srgbClr val="D5DBE3"/>
+                      </a:solidFill>
+                      <a:prstDash val="solid"/>
+                      <a:round/>
+                      <a:headEnd type="none" w="med" len="med"/>
+                      <a:tailEnd type="none" w="med" len="med"/>
+                    </a:lnB>
+                  </a:tcPr>
+                </a:tc>
+                <a:tc>
+                  <a:txBody>
+                    <a:bodyPr/>
+                    <a:lstStyle/>
+                    <a:p>
+                      <a:pPr algn="r" indent="0" marL="0">
+                        <a:buNone/>
+                      </a:pPr>
+                      <a:r>
+                        <a:rPr lang="en-US" sz="850" dirty="0">
+                          <a:solidFill>
+                            <a:srgbClr val="1F2933"/>
+                          </a:solidFill>
+                          <a:latin typeface="Calibri" pitchFamily="34" charset="0"/>
+                          <a:ea typeface="Calibri" pitchFamily="34" charset="-122"/>
+                          <a:cs typeface="Calibri" pitchFamily="34" charset="-120"/>
+                        </a:rPr>
+                        <a:t>–</a:t>
+                      </a:r>
+                      <a:endParaRPr lang="en-US" sz="850" dirty="0">
+                        <a:latin typeface="Calibri" charset="0"/>
+                        <a:ea typeface="Calibri" charset="0"/>
+                        <a:cs typeface="Calibri" charset="0"/>
+                      </a:endParaRPr>
+                    </a:p>
+                  </a:txBody>
+                  <a:tcPr marL="64008" marR="64008" marT="0" marB="0" anchor="ctr">
+                    <a:lnL w="6350" cap="flat" cmpd="sng" algn="ctr">
+                      <a:solidFill>
+                        <a:srgbClr val="D5DBE3"/>
+                      </a:solidFill>
+                      <a:prstDash val="solid"/>
+                      <a:round/>
+                      <a:headEnd type="none" w="med" len="med"/>
+                      <a:tailEnd type="none" w="med" len="med"/>
+                    </a:lnL>
+                    <a:lnR w="6350" cap="flat" cmpd="sng" algn="ctr">
+                      <a:solidFill>
+                        <a:srgbClr val="D5DBE3"/>
+                      </a:solidFill>
+                      <a:prstDash val="solid"/>
+                      <a:round/>
+                      <a:headEnd type="none" w="med" len="med"/>
+                      <a:tailEnd type="none" w="med" len="med"/>
+                    </a:lnR>
+                    <a:lnT w="6350" cap="flat" cmpd="sng" algn="ctr">
+                      <a:solidFill>
+                        <a:srgbClr val="D5DBE3"/>
+                      </a:solidFill>
+                      <a:prstDash val="solid"/>
+                      <a:round/>
+                      <a:headEnd type="none" w="med" len="med"/>
+                      <a:tailEnd type="none" w="med" len="med"/>
+                    </a:lnT>
+                    <a:lnB w="6350" cap="flat" cmpd="sng" algn="ctr">
+                      <a:solidFill>
+                        <a:srgbClr val="D5DBE3"/>
+                      </a:solidFill>
+                      <a:prstDash val="solid"/>
+                      <a:round/>
+                      <a:headEnd type="none" w="med" len="med"/>
+                      <a:tailEnd type="none" w="med" len="med"/>
+                    </a:lnB>
+                  </a:tcPr>
+                </a:tc>
+              </a:tr>
+              <a:tr h="224028">
+                <a:tc>
+                  <a:txBody>
+                    <a:bodyPr/>
+                    <a:lstStyle/>
+                    <a:p>
+                      <a:pPr algn="l" indent="0" marL="0">
+                        <a:buNone/>
+                      </a:pPr>
+                      <a:r>
+                        <a:rPr lang="en-US" sz="850" b="1" dirty="0">
+                          <a:solidFill>
+                            <a:srgbClr val="1F2933"/>
+                          </a:solidFill>
+                          <a:latin typeface="Calibri" pitchFamily="34" charset="0"/>
+                          <a:ea typeface="Calibri" pitchFamily="34" charset="-122"/>
+                          <a:cs typeface="Calibri" pitchFamily="34" charset="-120"/>
+                        </a:rPr>
+                        <a:t>RIVIERA PARK</a:t>
+                      </a:r>
+                      <a:endParaRPr lang="en-US" sz="850" dirty="0">
+                        <a:latin typeface="Calibri" charset="0"/>
+                        <a:ea typeface="Calibri" charset="0"/>
+                        <a:cs typeface="Calibri" charset="0"/>
+                      </a:endParaRPr>
+                    </a:p>
+                  </a:txBody>
+                  <a:tcPr marL="64008" marR="64008" marT="0" marB="0" anchor="ctr">
+                    <a:lnL w="6350" cap="flat" cmpd="sng" algn="ctr">
+                      <a:solidFill>
+                        <a:srgbClr val="D5DBE3"/>
+                      </a:solidFill>
+                      <a:prstDash val="solid"/>
+                      <a:round/>
+                      <a:headEnd type="none" w="med" len="med"/>
+                      <a:tailEnd type="none" w="med" len="med"/>
+                    </a:lnL>
+                    <a:lnR w="6350" cap="flat" cmpd="sng" algn="ctr">
+                      <a:solidFill>
+                        <a:srgbClr val="D5DBE3"/>
+                      </a:solidFill>
+                      <a:prstDash val="solid"/>
+                      <a:round/>
+                      <a:headEnd type="none" w="med" len="med"/>
+                      <a:tailEnd type="none" w="med" len="med"/>
+                    </a:lnR>
+                    <a:lnT w="6350" cap="flat" cmpd="sng" algn="ctr">
+                      <a:solidFill>
+                        <a:srgbClr val="D5DBE3"/>
+                      </a:solidFill>
+                      <a:prstDash val="solid"/>
+                      <a:round/>
+                      <a:headEnd type="none" w="med" len="med"/>
+                      <a:tailEnd type="none" w="med" len="med"/>
+                    </a:lnT>
+                    <a:lnB w="6350" cap="flat" cmpd="sng" algn="ctr">
+                      <a:solidFill>
+                        <a:srgbClr val="D5DBE3"/>
+                      </a:solidFill>
+                      <a:prstDash val="solid"/>
+                      <a:round/>
+                      <a:headEnd type="none" w="med" len="med"/>
+                      <a:tailEnd type="none" w="med" len="med"/>
+                    </a:lnB>
+                  </a:tcPr>
+                </a:tc>
+                <a:tc>
+                  <a:txBody>
+                    <a:bodyPr/>
+                    <a:lstStyle/>
+                    <a:p>
+                      <a:pPr algn="r" indent="0" marL="0">
+                        <a:buNone/>
+                      </a:pPr>
+                      <a:r>
+                        <a:rPr lang="en-US" sz="850" dirty="0">
+                          <a:solidFill>
+                            <a:srgbClr val="1F2933"/>
+                          </a:solidFill>
+                          <a:latin typeface="Calibri" pitchFamily="34" charset="0"/>
+                          <a:ea typeface="Calibri" pitchFamily="34" charset="-122"/>
+                          <a:cs typeface="Calibri" pitchFamily="34" charset="-120"/>
+                        </a:rPr>
+                        <a:t>1,5</a:t>
+                      </a:r>
+                      <a:endParaRPr lang="en-US" sz="850" dirty="0">
+                        <a:latin typeface="Calibri" charset="0"/>
+                        <a:ea typeface="Calibri" charset="0"/>
+                        <a:cs typeface="Calibri" charset="0"/>
+                      </a:endParaRPr>
+                    </a:p>
+                  </a:txBody>
+                  <a:tcPr marL="64008" marR="64008" marT="0" marB="0" anchor="ctr">
+                    <a:lnL w="6350" cap="flat" cmpd="sng" algn="ctr">
+                      <a:solidFill>
+                        <a:srgbClr val="D5DBE3"/>
+                      </a:solidFill>
+                      <a:prstDash val="solid"/>
+                      <a:round/>
+                      <a:headEnd type="none" w="med" len="med"/>
+                      <a:tailEnd type="none" w="med" len="med"/>
+                    </a:lnL>
+                    <a:lnR w="6350" cap="flat" cmpd="sng" algn="ctr">
+                      <a:solidFill>
+                        <a:srgbClr val="D5DBE3"/>
+                      </a:solidFill>
+                      <a:prstDash val="solid"/>
+                      <a:round/>
+                      <a:headEnd type="none" w="med" len="med"/>
+                      <a:tailEnd type="none" w="med" len="med"/>
+                    </a:lnR>
+                    <a:lnT w="6350" cap="flat" cmpd="sng" algn="ctr">
+                      <a:solidFill>
+                        <a:srgbClr val="D5DBE3"/>
+                      </a:solidFill>
+                      <a:prstDash val="solid"/>
+                      <a:round/>
+                      <a:headEnd type="none" w="med" len="med"/>
+                      <a:tailEnd type="none" w="med" len="med"/>
+                    </a:lnT>
+                    <a:lnB w="6350" cap="flat" cmpd="sng" algn="ctr">
+                      <a:solidFill>
+                        <a:srgbClr val="D5DBE3"/>
+                      </a:solidFill>
+                      <a:prstDash val="solid"/>
+                      <a:round/>
+                      <a:headEnd type="none" w="med" len="med"/>
+                      <a:tailEnd type="none" w="med" len="med"/>
+                    </a:lnB>
+                  </a:tcPr>
+                </a:tc>
+                <a:tc>
+                  <a:txBody>
+                    <a:bodyPr/>
+                    <a:lstStyle/>
+                    <a:p>
+                      <a:pPr algn="r" indent="0" marL="0">
+                        <a:buNone/>
+                      </a:pPr>
+                      <a:r>
+                        <a:rPr lang="en-US" sz="850" dirty="0">
+                          <a:solidFill>
+                            <a:srgbClr val="1F2933"/>
+                          </a:solidFill>
+                          <a:latin typeface="Calibri" pitchFamily="34" charset="0"/>
+                          <a:ea typeface="Calibri" pitchFamily="34" charset="-122"/>
+                          <a:cs typeface="Calibri" pitchFamily="34" charset="-120"/>
+                        </a:rPr>
+                        <a:t>-88,5</a:t>
+                      </a:r>
+                      <a:endParaRPr lang="en-US" sz="850" dirty="0">
+                        <a:latin typeface="Calibri" charset="0"/>
+                        <a:ea typeface="Calibri" charset="0"/>
+                        <a:cs typeface="Calibri" charset="0"/>
+                      </a:endParaRPr>
+                    </a:p>
+                  </a:txBody>
+                  <a:tcPr marL="64008" marR="64008" marT="0" marB="0" anchor="ctr">
+                    <a:lnL w="6350" cap="flat" cmpd="sng" algn="ctr">
+                      <a:solidFill>
+                        <a:srgbClr val="D5DBE3"/>
+                      </a:solidFill>
+                      <a:prstDash val="solid"/>
+                      <a:round/>
+                      <a:headEnd type="none" w="med" len="med"/>
+                      <a:tailEnd type="none" w="med" len="med"/>
+                    </a:lnL>
+                    <a:lnR w="6350" cap="flat" cmpd="sng" algn="ctr">
+                      <a:solidFill>
+                        <a:srgbClr val="D5DBE3"/>
+                      </a:solidFill>
+                      <a:prstDash val="solid"/>
+                      <a:round/>
+                      <a:headEnd type="none" w="med" len="med"/>
+                      <a:tailEnd type="none" w="med" len="med"/>
+                    </a:lnR>
+                    <a:lnT w="6350" cap="flat" cmpd="sng" algn="ctr">
+                      <a:solidFill>
+                        <a:srgbClr val="D5DBE3"/>
+                      </a:solidFill>
+                      <a:prstDash val="solid"/>
+                      <a:round/>
+                      <a:headEnd type="none" w="med" len="med"/>
+                      <a:tailEnd type="none" w="med" len="med"/>
+                    </a:lnT>
+                    <a:lnB w="6350" cap="flat" cmpd="sng" algn="ctr">
+                      <a:solidFill>
+                        <a:srgbClr val="D5DBE3"/>
+                      </a:solidFill>
+                      <a:prstDash val="solid"/>
+                      <a:round/>
+                      <a:headEnd type="none" w="med" len="med"/>
+                      <a:tailEnd type="none" w="med" len="med"/>
+                    </a:lnB>
+                  </a:tcPr>
+                </a:tc>
+                <a:tc>
+                  <a:txBody>
+                    <a:bodyPr/>
+                    <a:lstStyle/>
+                    <a:p>
+                      <a:pPr algn="r" indent="0" marL="0">
+                        <a:buNone/>
+                      </a:pPr>
+                      <a:r>
+                        <a:rPr lang="en-US" sz="850" dirty="0">
+                          <a:solidFill>
+                            <a:srgbClr val="1F2933"/>
+                          </a:solidFill>
+                          <a:latin typeface="Calibri" pitchFamily="34" charset="0"/>
+                          <a:ea typeface="Calibri" pitchFamily="34" charset="-122"/>
+                          <a:cs typeface="Calibri" pitchFamily="34" charset="-120"/>
+                        </a:rPr>
+                        <a:t>500,0</a:t>
+                      </a:r>
+                      <a:endParaRPr lang="en-US" sz="850" dirty="0">
+                        <a:latin typeface="Calibri" charset="0"/>
+                        <a:ea typeface="Calibri" charset="0"/>
+                        <a:cs typeface="Calibri" charset="0"/>
+                      </a:endParaRPr>
+                    </a:p>
+                  </a:txBody>
+                  <a:tcPr marL="64008" marR="64008" marT="0" marB="0" anchor="ctr">
+                    <a:lnL w="6350" cap="flat" cmpd="sng" algn="ctr">
+                      <a:solidFill>
+                        <a:srgbClr val="D5DBE3"/>
+                      </a:solidFill>
+                      <a:prstDash val="solid"/>
+                      <a:round/>
+                      <a:headEnd type="none" w="med" len="med"/>
+                      <a:tailEnd type="none" w="med" len="med"/>
+                    </a:lnL>
+                    <a:lnR w="6350" cap="flat" cmpd="sng" algn="ctr">
+                      <a:solidFill>
+                        <a:srgbClr val="D5DBE3"/>
+                      </a:solidFill>
+                      <a:prstDash val="solid"/>
+                      <a:round/>
+                      <a:headEnd type="none" w="med" len="med"/>
+                      <a:tailEnd type="none" w="med" len="med"/>
+                    </a:lnR>
+                    <a:lnT w="6350" cap="flat" cmpd="sng" algn="ctr">
+                      <a:solidFill>
+                        <a:srgbClr val="D5DBE3"/>
+                      </a:solidFill>
+                      <a:prstDash val="solid"/>
+                      <a:round/>
+                      <a:headEnd type="none" w="med" len="med"/>
+                      <a:tailEnd type="none" w="med" len="med"/>
+                    </a:lnT>
+                    <a:lnB w="6350" cap="flat" cmpd="sng" algn="ctr">
+                      <a:solidFill>
+                        <a:srgbClr val="D5DBE3"/>
+                      </a:solidFill>
+                      <a:prstDash val="solid"/>
+                      <a:round/>
+                      <a:headEnd type="none" w="med" len="med"/>
+                      <a:tailEnd type="none" w="med" len="med"/>
+                    </a:lnB>
+                  </a:tcPr>
+                </a:tc>
+                <a:tc>
+                  <a:txBody>
+                    <a:bodyPr/>
+                    <a:lstStyle/>
+                    <a:p>
+                      <a:pPr algn="r" indent="0" marL="0">
+                        <a:buNone/>
+                      </a:pPr>
+                      <a:r>
+                        <a:rPr lang="en-US" sz="850" b="1" dirty="0">
+                          <a:solidFill>
+                            <a:srgbClr val="5E9B7E"/>
+                          </a:solidFill>
+                          <a:latin typeface="Calibri" pitchFamily="34" charset="0"/>
+                          <a:ea typeface="Calibri" pitchFamily="34" charset="-122"/>
+                          <a:cs typeface="Calibri" pitchFamily="34" charset="-120"/>
+                        </a:rPr>
+                        <a:t>412,9</a:t>
+                      </a:r>
+                      <a:endParaRPr lang="en-US" sz="850" dirty="0">
+                        <a:latin typeface="Calibri" charset="0"/>
+                        <a:ea typeface="Calibri" charset="0"/>
+                        <a:cs typeface="Calibri" charset="0"/>
+                      </a:endParaRPr>
+                    </a:p>
+                  </a:txBody>
+                  <a:tcPr marL="64008" marR="64008" marT="0" marB="0" anchor="ctr">
+                    <a:lnL w="6350" cap="flat" cmpd="sng" algn="ctr">
+                      <a:solidFill>
+                        <a:srgbClr val="D5DBE3"/>
+                      </a:solidFill>
+                      <a:prstDash val="solid"/>
+                      <a:round/>
+                      <a:headEnd type="none" w="med" len="med"/>
+                      <a:tailEnd type="none" w="med" len="med"/>
+                    </a:lnL>
+                    <a:lnR w="6350" cap="flat" cmpd="sng" algn="ctr">
+                      <a:solidFill>
+                        <a:srgbClr val="D5DBE3"/>
+                      </a:solidFill>
+                      <a:prstDash val="solid"/>
+                      <a:round/>
+                      <a:headEnd type="none" w="med" len="med"/>
+                      <a:tailEnd type="none" w="med" len="med"/>
+                    </a:lnR>
+                    <a:lnT w="6350" cap="flat" cmpd="sng" algn="ctr">
+                      <a:solidFill>
+                        <a:srgbClr val="D5DBE3"/>
+                      </a:solidFill>
+                      <a:prstDash val="solid"/>
+                      <a:round/>
+                      <a:headEnd type="none" w="med" len="med"/>
+                      <a:tailEnd type="none" w="med" len="med"/>
+                    </a:lnT>
+                    <a:lnB w="6350" cap="flat" cmpd="sng" algn="ctr">
+                      <a:solidFill>
+                        <a:srgbClr val="D5DBE3"/>
+                      </a:solidFill>
+                      <a:prstDash val="solid"/>
+                      <a:round/>
+                      <a:headEnd type="none" w="med" len="med"/>
+                      <a:tailEnd type="none" w="med" len="med"/>
+                    </a:lnB>
+                  </a:tcPr>
+                </a:tc>
+                <a:tc>
+                  <a:txBody>
+                    <a:bodyPr/>
+                    <a:lstStyle/>
+                    <a:p>
+                      <a:pPr algn="r" indent="0" marL="0">
+                        <a:buNone/>
+                      </a:pPr>
+                      <a:r>
+                        <a:rPr lang="en-US" sz="850" dirty="0">
+                          <a:solidFill>
+                            <a:srgbClr val="1F2933"/>
+                          </a:solidFill>
+                          <a:latin typeface="Calibri" pitchFamily="34" charset="0"/>
+                          <a:ea typeface="Calibri" pitchFamily="34" charset="-122"/>
+                          <a:cs typeface="Calibri" pitchFamily="34" charset="-120"/>
+                        </a:rPr>
+                        <a:t>–</a:t>
+                      </a:r>
+                      <a:endParaRPr lang="en-US" sz="850" dirty="0">
+                        <a:latin typeface="Calibri" charset="0"/>
+                        <a:ea typeface="Calibri" charset="0"/>
+                        <a:cs typeface="Calibri" charset="0"/>
+                      </a:endParaRPr>
+                    </a:p>
+                  </a:txBody>
+                  <a:tcPr marL="64008" marR="64008" marT="0" marB="0" anchor="ctr">
+                    <a:lnL w="6350" cap="flat" cmpd="sng" algn="ctr">
+                      <a:solidFill>
+                        <a:srgbClr val="D5DBE3"/>
+                      </a:solidFill>
+                      <a:prstDash val="solid"/>
+                      <a:round/>
+                      <a:headEnd type="none" w="med" len="med"/>
+                      <a:tailEnd type="none" w="med" len="med"/>
+                    </a:lnL>
+                    <a:lnR w="6350" cap="flat" cmpd="sng" algn="ctr">
+                      <a:solidFill>
+                        <a:srgbClr val="D5DBE3"/>
+                      </a:solidFill>
+                      <a:prstDash val="solid"/>
+                      <a:round/>
+                      <a:headEnd type="none" w="med" len="med"/>
+                      <a:tailEnd type="none" w="med" len="med"/>
+                    </a:lnR>
+                    <a:lnT w="6350" cap="flat" cmpd="sng" algn="ctr">
+                      <a:solidFill>
+                        <a:srgbClr val="D5DBE3"/>
+                      </a:solidFill>
+                      <a:prstDash val="solid"/>
+                      <a:round/>
+                      <a:headEnd type="none" w="med" len="med"/>
+                      <a:tailEnd type="none" w="med" len="med"/>
+                    </a:lnT>
+                    <a:lnB w="6350" cap="flat" cmpd="sng" algn="ctr">
+                      <a:solidFill>
+                        <a:srgbClr val="D5DBE3"/>
+                      </a:solidFill>
+                      <a:prstDash val="solid"/>
+                      <a:round/>
+                      <a:headEnd type="none" w="med" len="med"/>
+                      <a:tailEnd type="none" w="med" len="med"/>
+                    </a:lnB>
+                  </a:tcPr>
+                </a:tc>
+              </a:tr>
+              <a:tr h="224028">
+                <a:tc>
+                  <a:txBody>
+                    <a:bodyPr/>
+                    <a:lstStyle/>
+                    <a:p>
+                      <a:pPr algn="l" indent="0" marL="0">
+                        <a:buNone/>
+                      </a:pPr>
+                      <a:r>
+                        <a:rPr lang="en-US" sz="850" b="1" dirty="0">
+                          <a:solidFill>
+                            <a:srgbClr val="1F2933"/>
+                          </a:solidFill>
+                          <a:latin typeface="Calibri" pitchFamily="34" charset="0"/>
+                          <a:ea typeface="Calibri" pitchFamily="34" charset="-122"/>
+                          <a:cs typeface="Calibri" pitchFamily="34" charset="-120"/>
+                        </a:rPr>
                         <a:t>SCO AO</a:t>
                       </a:r>
                       <a:endParaRPr lang="en-US" sz="850" dirty="0">
@@ -24448,7 +23339,7 @@
                           <a:ea typeface="Calibri" pitchFamily="34" charset="-122"/>
                           <a:cs typeface="Calibri" pitchFamily="34" charset="-120"/>
                         </a:rPr>
-                        <a:t>7 024,9</a:t>
+                        <a:t>6 674,2</a:t>
                       </a:r>
                       <a:endParaRPr lang="en-US" sz="850" dirty="0">
                         <a:latin typeface="Calibri" charset="0"/>
@@ -24652,7 +23543,7 @@
                           <a:ea typeface="Calibri" pitchFamily="34" charset="-122"/>
                           <a:cs typeface="Calibri" pitchFamily="34" charset="-120"/>
                         </a:rPr>
-                        <a:t>1 356,2</a:t>
+                        <a:t>1 005,4</a:t>
                       </a:r>
                       <a:endParaRPr lang="en-US" sz="850" dirty="0">
                         <a:latin typeface="Calibri" charset="0"/>
@@ -24720,7 +23611,7 @@
                           <a:ea typeface="Calibri" pitchFamily="34" charset="-122"/>
                           <a:cs typeface="Calibri" pitchFamily="34" charset="-120"/>
                         </a:rPr>
-                        <a:t>1 387,3</a:t>
+                        <a:t>1 480,5</a:t>
                       </a:r>
                       <a:endParaRPr lang="en-US" sz="850" dirty="0">
                         <a:latin typeface="Calibri" charset="0"/>
@@ -24837,7 +23728,7 @@
                 <a:ea typeface="Calibri" pitchFamily="34" charset="-122"/>
                 <a:cs typeface="Calibri" pitchFamily="34" charset="-120"/>
               </a:rPr>
-              <a:t>Disponible pour le nivellement</a:t>
+              <a:t>Virements saisis</a:t>
             </a:r>
             <a:endParaRPr lang="en-US" sz="1200" dirty="0"/>
           </a:p>
@@ -24847,7 +23738,7 @@
               <a:buChar char="•"/>
             </a:pPr>
             <a:r>
-              <a:rPr lang="en-US" sz="1000" dirty="0">
+              <a:rPr lang="en-US" sz="950" dirty="0">
                 <a:solidFill>
                   <a:srgbClr val="1F2933"/>
                 </a:solidFill>
@@ -24855,97 +23746,7 @@
                 <a:ea typeface="Calibri" pitchFamily="34" charset="-122"/>
                 <a:cs typeface="Calibri" pitchFamily="34" charset="-120"/>
               </a:rPr>
-              <a:t>RIVIERA PARK – BNI courant : 1 772,0 (à arbitrer)</a:t>
-            </a:r>
-            <a:endParaRPr lang="en-US" sz="1200" dirty="0"/>
-          </a:p>
-          <a:p>
-            <a:pPr marL="127000" indent="-127000">
-              <a:buSzPct val="100000"/>
-              <a:buChar char="•"/>
-            </a:pPr>
-            <a:r>
-              <a:rPr lang="en-US" sz="1000" dirty="0">
-                <a:solidFill>
-                  <a:srgbClr val="1F2933"/>
-                </a:solidFill>
-                <a:latin typeface="Calibri" pitchFamily="34" charset="0"/>
-                <a:ea typeface="Calibri" pitchFamily="34" charset="-122"/>
-                <a:cs typeface="Calibri" pitchFamily="34" charset="-120"/>
-              </a:rPr>
-              <a:t>SCI FIRST – STB : 163,7</a:t>
-            </a:r>
-            <a:endParaRPr lang="en-US" sz="1200" dirty="0"/>
-          </a:p>
-          <a:p>
-            <a:pPr marL="127000" indent="-127000">
-              <a:buSzPct val="100000"/>
-              <a:buChar char="•"/>
-            </a:pPr>
-            <a:r>
-              <a:rPr lang="en-US" sz="1000" dirty="0">
-                <a:solidFill>
-                  <a:srgbClr val="1F2933"/>
-                </a:solidFill>
-                <a:latin typeface="Calibri" pitchFamily="34" charset="0"/>
-                <a:ea typeface="Calibri" pitchFamily="34" charset="-122"/>
-                <a:cs typeface="Calibri" pitchFamily="34" charset="-120"/>
-              </a:rPr>
-              <a:t>PICI – ECO : 105,3</a:t>
-            </a:r>
-            <a:endParaRPr lang="en-US" sz="1200" dirty="0"/>
-          </a:p>
-          <a:p>
-            <a:pPr marL="127000" indent="-127000">
-              <a:buSzPct val="100000"/>
-              <a:buChar char="•"/>
-            </a:pPr>
-            <a:r>
-              <a:rPr lang="en-US" sz="1000" dirty="0">
-                <a:solidFill>
-                  <a:srgbClr val="1F2933"/>
-                </a:solidFill>
-                <a:latin typeface="Calibri" pitchFamily="34" charset="0"/>
-                <a:ea typeface="Calibri" pitchFamily="34" charset="-122"/>
-                <a:cs typeface="Calibri" pitchFamily="34" charset="-120"/>
-              </a:rPr>
-              <a:t>PICI – STB : 24,8</a:t>
-            </a:r>
-            <a:endParaRPr lang="en-US" sz="1200" dirty="0"/>
-          </a:p>
-          <a:p>
-            <a:pPr marL="127000" indent="-127000">
-              <a:buSzPct val="100000"/>
-              <a:buChar char="•"/>
-            </a:pPr>
-            <a:r>
-              <a:rPr lang="en-US" sz="1000" dirty="0">
-                <a:solidFill>
-                  <a:srgbClr val="1F2933"/>
-                </a:solidFill>
-                <a:latin typeface="Calibri" pitchFamily="34" charset="0"/>
-                <a:ea typeface="Calibri" pitchFamily="34" charset="-122"/>
-                <a:cs typeface="Calibri" pitchFamily="34" charset="-120"/>
-              </a:rPr>
-              <a:t>SCI FIRST – SG : 8,4</a:t>
-            </a:r>
-            <a:endParaRPr lang="en-US" sz="1200" dirty="0"/>
-          </a:p>
-          <a:p>
-            <a:pPr marL="127000" indent="-127000">
-              <a:buSzPct val="100000"/>
-              <a:buChar char="•"/>
-            </a:pPr>
-            <a:r>
-              <a:rPr lang="en-US" sz="1000" dirty="0">
-                <a:solidFill>
-                  <a:srgbClr val="1F2933"/>
-                </a:solidFill>
-                <a:latin typeface="Calibri" pitchFamily="34" charset="0"/>
-                <a:ea typeface="Calibri" pitchFamily="34" charset="-122"/>
-                <a:cs typeface="Calibri" pitchFamily="34" charset="-120"/>
-              </a:rPr>
-              <a:t>PICI – SG : 3,6</a:t>
+              <a:t>RIVIERA PARK – BNI courant → RIVIERA PARK – SG : 500,0</a:t>
             </a:r>
             <a:endParaRPr lang="en-US" sz="1200" dirty="0"/>
           </a:p>
@@ -25033,7 +23834,7 @@
                 <a:ea typeface="Calibri" pitchFamily="34" charset="-122"/>
                 <a:cs typeface="Calibri" pitchFamily="34" charset="-120"/>
               </a:rPr>
-              <a:t>Fixer les virements de nivellement (PICI, SCI FIRST, compte à arbitrer) : le reporting les recalcule.</a:t>
+              <a:t>Valider les 1 virements saisis (500,0 M).</a:t>
             </a:r>
             <a:endParaRPr lang="en-US" sz="1250" dirty="0"/>
           </a:p>
@@ -25054,7 +23855,7 @@
                 <a:ea typeface="Calibri" pitchFamily="34" charset="-122"/>
                 <a:cs typeface="Calibri" pitchFamily="34" charset="-120"/>
               </a:rPr>
-              <a:t>Financer le reste de 1 387,3 M, dont TERASSON – BNI fonds projet 720,2, TERASSON – SG 206,4, FINAFRICA – SG 140,2.</a:t>
+              <a:t>Financer le reste de 1 480,5 M, dont TERASSON – BNI fonds projet 720,2, TERASSON – SG 206,4, SCI FIRST – STB 180,2.</a:t>
             </a:r>
             <a:endParaRPr lang="en-US" sz="1250" dirty="0"/>
           </a:p>

--- a/RCI_Besoins_Tresorerie_Comptes_Paiement_30-09-2026.pptx
+++ b/RCI_Besoins_Tresorerie_Comptes_Paiement_30-09-2026.pptx
@@ -2936,7 +2936,7 @@
                 <a:ea typeface="Calibri" pitchFamily="34" charset="-122"/>
                 <a:cs typeface="Calibri" pitchFamily="34" charset="-120"/>
               </a:rPr>
-              <a:t>2 776,8 M</a:t>
+              <a:t>-866,8 M</a:t>
             </a:r>
             <a:endParaRPr lang="en-US" sz="2200" dirty="0"/>
           </a:p>
@@ -2975,7 +2975,7 @@
                 <a:ea typeface="Calibri" pitchFamily="34" charset="-122"/>
                 <a:cs typeface="Calibri" pitchFamily="34" charset="-120"/>
               </a:rPr>
-              <a:t>Déficits à couvrir : 2 projet(s) et 9 société(s)</a:t>
+              <a:t>Besoin fin S5 – comptes de sociétés ; comptes dédiés +41,0 M</a:t>
             </a:r>
             <a:endParaRPr lang="en-US" sz="1050" dirty="0"/>
           </a:p>
@@ -2996,7 +2996,7 @@
           </p:nvPr>
         </p:nvGraphicFramePr>
         <p:xfrm>
-          <a:off x="457200" y="2286000"/>
+          <a:off x="457200" y="2240280"/>
           <a:ext cx="11274552" cy="914400"/>
         </p:xfrm>
         <a:graphic>
@@ -3014,7 +3014,7 @@
                 <a:gridCol w="1737360"/>
                 <a:gridCol w="1280160"/>
               </a:tblGrid>
-              <a:tr h="274320">
+              <a:tr h="224028">
                 <a:tc>
                   <a:txBody>
                     <a:bodyPr/>
@@ -3024,7 +3024,7 @@
                         <a:buNone/>
                       </a:pPr>
                       <a:r>
-                        <a:rPr lang="en-US" sz="950" b="1" dirty="0">
+                        <a:rPr lang="en-US" sz="900" b="1" dirty="0">
                           <a:solidFill>
                             <a:srgbClr val="FFFFFF"/>
                           </a:solidFill>
@@ -3034,7 +3034,7 @@
                         </a:rPr>
                         <a:t>Décaissements</a:t>
                       </a:r>
-                      <a:endParaRPr lang="en-US" sz="950" dirty="0">
+                      <a:endParaRPr lang="en-US" sz="900" dirty="0">
                         <a:latin typeface="Calibri" charset="0"/>
                         <a:ea typeface="Calibri" charset="0"/>
                         <a:cs typeface="Calibri" charset="0"/>
@@ -3092,7 +3092,7 @@
                         <a:buNone/>
                       </a:pPr>
                       <a:r>
-                        <a:rPr lang="en-US" sz="950" b="1" dirty="0">
+                        <a:rPr lang="en-US" sz="900" b="1" dirty="0">
                           <a:solidFill>
                             <a:srgbClr val="FFFFFF"/>
                           </a:solidFill>
@@ -3102,7 +3102,7 @@
                         </a:rPr>
                         <a:t>S1 05/10</a:t>
                       </a:r>
-                      <a:endParaRPr lang="en-US" sz="950" dirty="0">
+                      <a:endParaRPr lang="en-US" sz="900" dirty="0">
                         <a:latin typeface="Calibri" charset="0"/>
                         <a:ea typeface="Calibri" charset="0"/>
                         <a:cs typeface="Calibri" charset="0"/>
@@ -3160,7 +3160,7 @@
                         <a:buNone/>
                       </a:pPr>
                       <a:r>
-                        <a:rPr lang="en-US" sz="950" b="1" dirty="0">
+                        <a:rPr lang="en-US" sz="900" b="1" dirty="0">
                           <a:solidFill>
                             <a:srgbClr val="FFFFFF"/>
                           </a:solidFill>
@@ -3170,7 +3170,7 @@
                         </a:rPr>
                         <a:t>S2 12/10</a:t>
                       </a:r>
-                      <a:endParaRPr lang="en-US" sz="950" dirty="0">
+                      <a:endParaRPr lang="en-US" sz="900" dirty="0">
                         <a:latin typeface="Calibri" charset="0"/>
                         <a:ea typeface="Calibri" charset="0"/>
                         <a:cs typeface="Calibri" charset="0"/>
@@ -3228,7 +3228,7 @@
                         <a:buNone/>
                       </a:pPr>
                       <a:r>
-                        <a:rPr lang="en-US" sz="950" b="1" dirty="0">
+                        <a:rPr lang="en-US" sz="900" b="1" dirty="0">
                           <a:solidFill>
                             <a:srgbClr val="FFFFFF"/>
                           </a:solidFill>
@@ -3238,7 +3238,7 @@
                         </a:rPr>
                         <a:t>S3 19/10</a:t>
                       </a:r>
-                      <a:endParaRPr lang="en-US" sz="950" dirty="0">
+                      <a:endParaRPr lang="en-US" sz="900" dirty="0">
                         <a:latin typeface="Calibri" charset="0"/>
                         <a:ea typeface="Calibri" charset="0"/>
                         <a:cs typeface="Calibri" charset="0"/>
@@ -3296,7 +3296,7 @@
                         <a:buNone/>
                       </a:pPr>
                       <a:r>
-                        <a:rPr lang="en-US" sz="950" b="1" dirty="0">
+                        <a:rPr lang="en-US" sz="900" b="1" dirty="0">
                           <a:solidFill>
                             <a:srgbClr val="FFFFFF"/>
                           </a:solidFill>
@@ -3306,7 +3306,7 @@
                         </a:rPr>
                         <a:t>S4 26/10</a:t>
                       </a:r>
-                      <a:endParaRPr lang="en-US" sz="950" dirty="0">
+                      <a:endParaRPr lang="en-US" sz="900" dirty="0">
                         <a:latin typeface="Calibri" charset="0"/>
                         <a:ea typeface="Calibri" charset="0"/>
                         <a:cs typeface="Calibri" charset="0"/>
@@ -3364,7 +3364,7 @@
                         <a:buNone/>
                       </a:pPr>
                       <a:r>
-                        <a:rPr lang="en-US" sz="950" b="1" dirty="0">
+                        <a:rPr lang="en-US" sz="900" b="1" dirty="0">
                           <a:solidFill>
                             <a:srgbClr val="FFFFFF"/>
                           </a:solidFill>
@@ -3374,7 +3374,7 @@
                         </a:rPr>
                         <a:t>S5 02/11</a:t>
                       </a:r>
-                      <a:endParaRPr lang="en-US" sz="950" dirty="0">
+                      <a:endParaRPr lang="en-US" sz="900" dirty="0">
                         <a:latin typeface="Calibri" charset="0"/>
                         <a:ea typeface="Calibri" charset="0"/>
                         <a:cs typeface="Calibri" charset="0"/>
@@ -3432,7 +3432,7 @@
                         <a:buNone/>
                       </a:pPr>
                       <a:r>
-                        <a:rPr lang="en-US" sz="950" b="1" dirty="0">
+                        <a:rPr lang="en-US" sz="900" b="1" dirty="0">
                           <a:solidFill>
                             <a:srgbClr val="FFFFFF"/>
                           </a:solidFill>
@@ -3442,7 +3442,7 @@
                         </a:rPr>
                         <a:t>Total S1 à S5</a:t>
                       </a:r>
-                      <a:endParaRPr lang="en-US" sz="950" dirty="0">
+                      <a:endParaRPr lang="en-US" sz="900" dirty="0">
                         <a:latin typeface="Calibri" charset="0"/>
                         <a:ea typeface="Calibri" charset="0"/>
                         <a:cs typeface="Calibri" charset="0"/>
@@ -3500,7 +3500,7 @@
                         <a:buNone/>
                       </a:pPr>
                       <a:r>
-                        <a:rPr lang="en-US" sz="950" b="1" dirty="0">
+                        <a:rPr lang="en-US" sz="900" b="1" dirty="0">
                           <a:solidFill>
                             <a:srgbClr val="FFFFFF"/>
                           </a:solidFill>
@@ -3510,7 +3510,7 @@
                         </a:rPr>
                         <a:t>Comptes payeurs au 30/09</a:t>
                       </a:r>
-                      <a:endParaRPr lang="en-US" sz="950" dirty="0">
+                      <a:endParaRPr lang="en-US" sz="900" dirty="0">
                         <a:latin typeface="Calibri" charset="0"/>
                         <a:ea typeface="Calibri" charset="0"/>
                         <a:cs typeface="Calibri" charset="0"/>
@@ -3568,7 +3568,7 @@
                         <a:buNone/>
                       </a:pPr>
                       <a:r>
-                        <a:rPr lang="en-US" sz="950" b="1" dirty="0">
+                        <a:rPr lang="en-US" sz="900" b="1" dirty="0">
                           <a:solidFill>
                             <a:srgbClr val="FFFFFF"/>
                           </a:solidFill>
@@ -3578,7 +3578,7 @@
                         </a:rPr>
                         <a:t>Déficit fin S5</a:t>
                       </a:r>
-                      <a:endParaRPr lang="en-US" sz="950" dirty="0">
+                      <a:endParaRPr lang="en-US" sz="900" dirty="0">
                         <a:latin typeface="Calibri" charset="0"/>
                         <a:ea typeface="Calibri" charset="0"/>
                         <a:cs typeface="Calibri" charset="0"/>
@@ -3628,7 +3628,7 @@
                   </a:tcPr>
                 </a:tc>
               </a:tr>
-              <a:tr h="274320">
+              <a:tr h="224028">
                 <a:tc>
                   <a:txBody>
                     <a:bodyPr/>
@@ -3638,7 +3638,7 @@
                         <a:buNone/>
                       </a:pPr>
                       <a:r>
-                        <a:rPr lang="en-US" sz="950" b="1" dirty="0">
+                        <a:rPr lang="en-US" sz="900" b="1" dirty="0">
                           <a:solidFill>
                             <a:srgbClr val="1F2933"/>
                           </a:solidFill>
@@ -3648,7 +3648,7 @@
                         </a:rPr>
                         <a:t>Fonctionnement des sociétés</a:t>
                       </a:r>
-                      <a:endParaRPr lang="en-US" sz="950" dirty="0">
+                      <a:endParaRPr lang="en-US" sz="900" dirty="0">
                         <a:latin typeface="Calibri" charset="0"/>
                         <a:ea typeface="Calibri" charset="0"/>
                         <a:cs typeface="Calibri" charset="0"/>
@@ -3703,7 +3703,7 @@
                         <a:buNone/>
                       </a:pPr>
                       <a:r>
-                        <a:rPr lang="en-US" sz="950" dirty="0">
+                        <a:rPr lang="en-US" sz="900" dirty="0">
                           <a:solidFill>
                             <a:srgbClr val="1F2933"/>
                           </a:solidFill>
@@ -3713,7 +3713,7 @@
                         </a:rPr>
                         <a:t>1 481,9</a:t>
                       </a:r>
-                      <a:endParaRPr lang="en-US" sz="950" dirty="0">
+                      <a:endParaRPr lang="en-US" sz="900" dirty="0">
                         <a:latin typeface="Calibri" charset="0"/>
                         <a:ea typeface="Calibri" charset="0"/>
                         <a:cs typeface="Calibri" charset="0"/>
@@ -3768,7 +3768,7 @@
                         <a:buNone/>
                       </a:pPr>
                       <a:r>
-                        <a:rPr lang="en-US" sz="950" dirty="0">
+                        <a:rPr lang="en-US" sz="900" dirty="0">
                           <a:solidFill>
                             <a:srgbClr val="1F2933"/>
                           </a:solidFill>
@@ -3778,7 +3778,7 @@
                         </a:rPr>
                         <a:t>69,6</a:t>
                       </a:r>
-                      <a:endParaRPr lang="en-US" sz="950" dirty="0">
+                      <a:endParaRPr lang="en-US" sz="900" dirty="0">
                         <a:latin typeface="Calibri" charset="0"/>
                         <a:ea typeface="Calibri" charset="0"/>
                         <a:cs typeface="Calibri" charset="0"/>
@@ -3833,7 +3833,7 @@
                         <a:buNone/>
                       </a:pPr>
                       <a:r>
-                        <a:rPr lang="en-US" sz="950" dirty="0">
+                        <a:rPr lang="en-US" sz="900" dirty="0">
                           <a:solidFill>
                             <a:srgbClr val="1F2933"/>
                           </a:solidFill>
@@ -3843,7 +3843,7 @@
                         </a:rPr>
                         <a:t>225,7</a:t>
                       </a:r>
-                      <a:endParaRPr lang="en-US" sz="950" dirty="0">
+                      <a:endParaRPr lang="en-US" sz="900" dirty="0">
                         <a:latin typeface="Calibri" charset="0"/>
                         <a:ea typeface="Calibri" charset="0"/>
                         <a:cs typeface="Calibri" charset="0"/>
@@ -3898,7 +3898,7 @@
                         <a:buNone/>
                       </a:pPr>
                       <a:r>
-                        <a:rPr lang="en-US" sz="950" dirty="0">
+                        <a:rPr lang="en-US" sz="900" dirty="0">
                           <a:solidFill>
                             <a:srgbClr val="1F2933"/>
                           </a:solidFill>
@@ -3908,7 +3908,7 @@
                         </a:rPr>
                         <a:t>–</a:t>
                       </a:r>
-                      <a:endParaRPr lang="en-US" sz="950" dirty="0">
+                      <a:endParaRPr lang="en-US" sz="900" dirty="0">
                         <a:latin typeface="Calibri" charset="0"/>
                         <a:ea typeface="Calibri" charset="0"/>
                         <a:cs typeface="Calibri" charset="0"/>
@@ -3963,7 +3963,7 @@
                         <a:buNone/>
                       </a:pPr>
                       <a:r>
-                        <a:rPr lang="en-US" sz="950" dirty="0">
+                        <a:rPr lang="en-US" sz="900" dirty="0">
                           <a:solidFill>
                             <a:srgbClr val="1F2933"/>
                           </a:solidFill>
@@ -3973,7 +3973,7 @@
                         </a:rPr>
                         <a:t>–</a:t>
                       </a:r>
-                      <a:endParaRPr lang="en-US" sz="950" dirty="0">
+                      <a:endParaRPr lang="en-US" sz="900" dirty="0">
                         <a:latin typeface="Calibri" charset="0"/>
                         <a:ea typeface="Calibri" charset="0"/>
                         <a:cs typeface="Calibri" charset="0"/>
@@ -4028,7 +4028,7 @@
                         <a:buNone/>
                       </a:pPr>
                       <a:r>
-                        <a:rPr lang="en-US" sz="950" b="1" dirty="0">
+                        <a:rPr lang="en-US" sz="900" b="1" dirty="0">
                           <a:solidFill>
                             <a:srgbClr val="1F2933"/>
                           </a:solidFill>
@@ -4038,7 +4038,7 @@
                         </a:rPr>
                         <a:t>1 777,1</a:t>
                       </a:r>
-                      <a:endParaRPr lang="en-US" sz="950" dirty="0">
+                      <a:endParaRPr lang="en-US" sz="900" dirty="0">
                         <a:latin typeface="Calibri" charset="0"/>
                         <a:ea typeface="Calibri" charset="0"/>
                         <a:cs typeface="Calibri" charset="0"/>
@@ -4096,7 +4096,7 @@
                         <a:buNone/>
                       </a:pPr>
                       <a:r>
-                        <a:rPr lang="en-US" sz="950" dirty="0">
+                        <a:rPr lang="en-US" sz="900" dirty="0">
                           <a:solidFill>
                             <a:srgbClr val="1F2933"/>
                           </a:solidFill>
@@ -4106,7 +4106,7 @@
                         </a:rPr>
                         <a:t>777,2</a:t>
                       </a:r>
-                      <a:endParaRPr lang="en-US" sz="950" dirty="0">
+                      <a:endParaRPr lang="en-US" sz="900" dirty="0">
                         <a:latin typeface="Calibri" charset="0"/>
                         <a:ea typeface="Calibri" charset="0"/>
                         <a:cs typeface="Calibri" charset="0"/>
@@ -4161,7 +4161,7 @@
                         <a:buNone/>
                       </a:pPr>
                       <a:r>
-                        <a:rPr lang="en-US" sz="950" b="1" dirty="0">
+                        <a:rPr lang="en-US" sz="900" b="1" dirty="0">
                           <a:solidFill>
                             <a:srgbClr val="B3261E"/>
                           </a:solidFill>
@@ -4171,7 +4171,7 @@
                         </a:rPr>
                         <a:t>969,5</a:t>
                       </a:r>
-                      <a:endParaRPr lang="en-US" sz="950" dirty="0">
+                      <a:endParaRPr lang="en-US" sz="900" dirty="0">
                         <a:latin typeface="Calibri" charset="0"/>
                         <a:ea typeface="Calibri" charset="0"/>
                         <a:cs typeface="Calibri" charset="0"/>
@@ -4221,7 +4221,7 @@
                   </a:tcPr>
                 </a:tc>
               </a:tr>
-              <a:tr h="274320">
+              <a:tr h="224028">
                 <a:tc>
                   <a:txBody>
                     <a:bodyPr/>
@@ -4231,7 +4231,7 @@
                         <a:buNone/>
                       </a:pPr>
                       <a:r>
-                        <a:rPr lang="en-US" sz="950" b="1" dirty="0">
+                        <a:rPr lang="en-US" sz="900" b="1" dirty="0">
                           <a:solidFill>
                             <a:srgbClr val="1F2933"/>
                           </a:solidFill>
@@ -4241,7 +4241,7 @@
                         </a:rPr>
                         <a:t>Projet RIVIERA (cash plan)</a:t>
                       </a:r>
-                      <a:endParaRPr lang="en-US" sz="950" dirty="0">
+                      <a:endParaRPr lang="en-US" sz="900" dirty="0">
                         <a:latin typeface="Calibri" charset="0"/>
                         <a:ea typeface="Calibri" charset="0"/>
                         <a:cs typeface="Calibri" charset="0"/>
@@ -4296,7 +4296,7 @@
                         <a:buNone/>
                       </a:pPr>
                       <a:r>
-                        <a:rPr lang="en-US" sz="950" dirty="0">
+                        <a:rPr lang="en-US" sz="900" dirty="0">
                           <a:solidFill>
                             <a:srgbClr val="1F2933"/>
                           </a:solidFill>
@@ -4306,7 +4306,7 @@
                         </a:rPr>
                         <a:t>1 988,4</a:t>
                       </a:r>
-                      <a:endParaRPr lang="en-US" sz="950" dirty="0">
+                      <a:endParaRPr lang="en-US" sz="900" dirty="0">
                         <a:latin typeface="Calibri" charset="0"/>
                         <a:ea typeface="Calibri" charset="0"/>
                         <a:cs typeface="Calibri" charset="0"/>
@@ -4361,7 +4361,7 @@
                         <a:buNone/>
                       </a:pPr>
                       <a:r>
-                        <a:rPr lang="en-US" sz="950" dirty="0">
+                        <a:rPr lang="en-US" sz="900" dirty="0">
                           <a:solidFill>
                             <a:srgbClr val="1F2933"/>
                           </a:solidFill>
@@ -4371,7 +4371,7 @@
                         </a:rPr>
                         <a:t>1 242,5</a:t>
                       </a:r>
-                      <a:endParaRPr lang="en-US" sz="950" dirty="0">
+                      <a:endParaRPr lang="en-US" sz="900" dirty="0">
                         <a:latin typeface="Calibri" charset="0"/>
                         <a:ea typeface="Calibri" charset="0"/>
                         <a:cs typeface="Calibri" charset="0"/>
@@ -4426,7 +4426,7 @@
                         <a:buNone/>
                       </a:pPr>
                       <a:r>
-                        <a:rPr lang="en-US" sz="950" dirty="0">
+                        <a:rPr lang="en-US" sz="900" dirty="0">
                           <a:solidFill>
                             <a:srgbClr val="1F2933"/>
                           </a:solidFill>
@@ -4436,7 +4436,7 @@
                         </a:rPr>
                         <a:t>–</a:t>
                       </a:r>
-                      <a:endParaRPr lang="en-US" sz="950" dirty="0">
+                      <a:endParaRPr lang="en-US" sz="900" dirty="0">
                         <a:latin typeface="Calibri" charset="0"/>
                         <a:ea typeface="Calibri" charset="0"/>
                         <a:cs typeface="Calibri" charset="0"/>
@@ -4491,7 +4491,7 @@
                         <a:buNone/>
                       </a:pPr>
                       <a:r>
-                        <a:rPr lang="en-US" sz="950" dirty="0">
+                        <a:rPr lang="en-US" sz="900" dirty="0">
                           <a:solidFill>
                             <a:srgbClr val="1F2933"/>
                           </a:solidFill>
@@ -4501,7 +4501,7 @@
                         </a:rPr>
                         <a:t>13,6</a:t>
                       </a:r>
-                      <a:endParaRPr lang="en-US" sz="950" dirty="0">
+                      <a:endParaRPr lang="en-US" sz="900" dirty="0">
                         <a:latin typeface="Calibri" charset="0"/>
                         <a:ea typeface="Calibri" charset="0"/>
                         <a:cs typeface="Calibri" charset="0"/>
@@ -4556,7 +4556,7 @@
                         <a:buNone/>
                       </a:pPr>
                       <a:r>
-                        <a:rPr lang="en-US" sz="950" dirty="0">
+                        <a:rPr lang="en-US" sz="900" dirty="0">
                           <a:solidFill>
                             <a:srgbClr val="1F2933"/>
                           </a:solidFill>
@@ -4566,7 +4566,7 @@
                         </a:rPr>
                         <a:t>–</a:t>
                       </a:r>
-                      <a:endParaRPr lang="en-US" sz="950" dirty="0">
+                      <a:endParaRPr lang="en-US" sz="900" dirty="0">
                         <a:latin typeface="Calibri" charset="0"/>
                         <a:ea typeface="Calibri" charset="0"/>
                         <a:cs typeface="Calibri" charset="0"/>
@@ -4621,7 +4621,7 @@
                         <a:buNone/>
                       </a:pPr>
                       <a:r>
-                        <a:rPr lang="en-US" sz="950" b="1" dirty="0">
+                        <a:rPr lang="en-US" sz="900" b="1" dirty="0">
                           <a:solidFill>
                             <a:srgbClr val="1F2933"/>
                           </a:solidFill>
@@ -4631,7 +4631,7 @@
                         </a:rPr>
                         <a:t>3 244,5</a:t>
                       </a:r>
-                      <a:endParaRPr lang="en-US" sz="950" dirty="0">
+                      <a:endParaRPr lang="en-US" sz="900" dirty="0">
                         <a:latin typeface="Calibri" charset="0"/>
                         <a:ea typeface="Calibri" charset="0"/>
                         <a:cs typeface="Calibri" charset="0"/>
@@ -4689,7 +4689,7 @@
                         <a:buNone/>
                       </a:pPr>
                       <a:r>
-                        <a:rPr lang="en-US" sz="950" dirty="0">
+                        <a:rPr lang="en-US" sz="900" dirty="0">
                           <a:solidFill>
                             <a:srgbClr val="1F2933"/>
                           </a:solidFill>
@@ -4699,7 +4699,7 @@
                         </a:rPr>
                         <a:t>2 643,1</a:t>
                       </a:r>
-                      <a:endParaRPr lang="en-US" sz="950" dirty="0">
+                      <a:endParaRPr lang="en-US" sz="900" dirty="0">
                         <a:latin typeface="Calibri" charset="0"/>
                         <a:ea typeface="Calibri" charset="0"/>
                         <a:cs typeface="Calibri" charset="0"/>
@@ -4754,7 +4754,7 @@
                         <a:buNone/>
                       </a:pPr>
                       <a:r>
-                        <a:rPr lang="en-US" sz="950" b="1" dirty="0">
+                        <a:rPr lang="en-US" sz="900" b="1" dirty="0">
                           <a:solidFill>
                             <a:srgbClr val="B3261E"/>
                           </a:solidFill>
@@ -4764,7 +4764,7 @@
                         </a:rPr>
                         <a:t>601,4</a:t>
                       </a:r>
-                      <a:endParaRPr lang="en-US" sz="950" dirty="0">
+                      <a:endParaRPr lang="en-US" sz="900" dirty="0">
                         <a:latin typeface="Calibri" charset="0"/>
                         <a:ea typeface="Calibri" charset="0"/>
                         <a:cs typeface="Calibri" charset="0"/>
@@ -4814,7 +4814,7 @@
                   </a:tcPr>
                 </a:tc>
               </a:tr>
-              <a:tr h="274320">
+              <a:tr h="224028">
                 <a:tc>
                   <a:txBody>
                     <a:bodyPr/>
@@ -4824,7 +4824,7 @@
                         <a:buNone/>
                       </a:pPr>
                       <a:r>
-                        <a:rPr lang="en-US" sz="950" b="1" dirty="0">
+                        <a:rPr lang="en-US" sz="900" b="1" dirty="0">
                           <a:solidFill>
                             <a:srgbClr val="1F2933"/>
                           </a:solidFill>
@@ -4834,7 +4834,7 @@
                         </a:rPr>
                         <a:t>Projet TERASSON (cash plan)</a:t>
                       </a:r>
-                      <a:endParaRPr lang="en-US" sz="950" dirty="0">
+                      <a:endParaRPr lang="en-US" sz="900" dirty="0">
                         <a:latin typeface="Calibri" charset="0"/>
                         <a:ea typeface="Calibri" charset="0"/>
                         <a:cs typeface="Calibri" charset="0"/>
@@ -4889,7 +4889,7 @@
                         <a:buNone/>
                       </a:pPr>
                       <a:r>
-                        <a:rPr lang="en-US" sz="950" dirty="0">
+                        <a:rPr lang="en-US" sz="900" dirty="0">
                           <a:solidFill>
                             <a:srgbClr val="1F2933"/>
                           </a:solidFill>
@@ -4899,7 +4899,7 @@
                         </a:rPr>
                         <a:t>2 202,1</a:t>
                       </a:r>
-                      <a:endParaRPr lang="en-US" sz="950" dirty="0">
+                      <a:endParaRPr lang="en-US" sz="900" dirty="0">
                         <a:latin typeface="Calibri" charset="0"/>
                         <a:ea typeface="Calibri" charset="0"/>
                         <a:cs typeface="Calibri" charset="0"/>
@@ -4954,7 +4954,7 @@
                         <a:buNone/>
                       </a:pPr>
                       <a:r>
-                        <a:rPr lang="en-US" sz="950" dirty="0">
+                        <a:rPr lang="en-US" sz="900" dirty="0">
                           <a:solidFill>
                             <a:srgbClr val="1F2933"/>
                           </a:solidFill>
@@ -4964,7 +4964,7 @@
                         </a:rPr>
                         <a:t>472,2</a:t>
                       </a:r>
-                      <a:endParaRPr lang="en-US" sz="950" dirty="0">
+                      <a:endParaRPr lang="en-US" sz="900" dirty="0">
                         <a:latin typeface="Calibri" charset="0"/>
                         <a:ea typeface="Calibri" charset="0"/>
                         <a:cs typeface="Calibri" charset="0"/>
@@ -5019,7 +5019,7 @@
                         <a:buNone/>
                       </a:pPr>
                       <a:r>
-                        <a:rPr lang="en-US" sz="950" dirty="0">
+                        <a:rPr lang="en-US" sz="900" dirty="0">
                           <a:solidFill>
                             <a:srgbClr val="1F2933"/>
                           </a:solidFill>
@@ -5029,7 +5029,7 @@
                         </a:rPr>
                         <a:t>–</a:t>
                       </a:r>
-                      <a:endParaRPr lang="en-US" sz="950" dirty="0">
+                      <a:endParaRPr lang="en-US" sz="900" dirty="0">
                         <a:latin typeface="Calibri" charset="0"/>
                         <a:ea typeface="Calibri" charset="0"/>
                         <a:cs typeface="Calibri" charset="0"/>
@@ -5084,7 +5084,7 @@
                         <a:buNone/>
                       </a:pPr>
                       <a:r>
-                        <a:rPr lang="en-US" sz="950" dirty="0">
+                        <a:rPr lang="en-US" sz="900" dirty="0">
                           <a:solidFill>
                             <a:srgbClr val="1F2933"/>
                           </a:solidFill>
@@ -5094,7 +5094,7 @@
                         </a:rPr>
                         <a:t>13,5</a:t>
                       </a:r>
-                      <a:endParaRPr lang="en-US" sz="950" dirty="0">
+                      <a:endParaRPr lang="en-US" sz="900" dirty="0">
                         <a:latin typeface="Calibri" charset="0"/>
                         <a:ea typeface="Calibri" charset="0"/>
                         <a:cs typeface="Calibri" charset="0"/>
@@ -5149,7 +5149,7 @@
                         <a:buNone/>
                       </a:pPr>
                       <a:r>
-                        <a:rPr lang="en-US" sz="950" dirty="0">
+                        <a:rPr lang="en-US" sz="900" dirty="0">
                           <a:solidFill>
                             <a:srgbClr val="1F2933"/>
                           </a:solidFill>
@@ -5159,7 +5159,7 @@
                         </a:rPr>
                         <a:t>–</a:t>
                       </a:r>
-                      <a:endParaRPr lang="en-US" sz="950" dirty="0">
+                      <a:endParaRPr lang="en-US" sz="900" dirty="0">
                         <a:latin typeface="Calibri" charset="0"/>
                         <a:ea typeface="Calibri" charset="0"/>
                         <a:cs typeface="Calibri" charset="0"/>
@@ -5214,7 +5214,7 @@
                         <a:buNone/>
                       </a:pPr>
                       <a:r>
-                        <a:rPr lang="en-US" sz="950" b="1" dirty="0">
+                        <a:rPr lang="en-US" sz="900" b="1" dirty="0">
                           <a:solidFill>
                             <a:srgbClr val="1F2933"/>
                           </a:solidFill>
@@ -5224,7 +5224,7 @@
                         </a:rPr>
                         <a:t>2 687,8</a:t>
                       </a:r>
-                      <a:endParaRPr lang="en-US" sz="950" dirty="0">
+                      <a:endParaRPr lang="en-US" sz="900" dirty="0">
                         <a:latin typeface="Calibri" charset="0"/>
                         <a:ea typeface="Calibri" charset="0"/>
                         <a:cs typeface="Calibri" charset="0"/>
@@ -5282,7 +5282,7 @@
                         <a:buNone/>
                       </a:pPr>
                       <a:r>
-                        <a:rPr lang="en-US" sz="950" dirty="0">
+                        <a:rPr lang="en-US" sz="900" dirty="0">
                           <a:solidFill>
                             <a:srgbClr val="1F2933"/>
                           </a:solidFill>
@@ -5292,7 +5292,7 @@
                         </a:rPr>
                         <a:t>1 481,9</a:t>
                       </a:r>
-                      <a:endParaRPr lang="en-US" sz="950" dirty="0">
+                      <a:endParaRPr lang="en-US" sz="900" dirty="0">
                         <a:latin typeface="Calibri" charset="0"/>
                         <a:ea typeface="Calibri" charset="0"/>
                         <a:cs typeface="Calibri" charset="0"/>
@@ -5347,7 +5347,7 @@
                         <a:buNone/>
                       </a:pPr>
                       <a:r>
-                        <a:rPr lang="en-US" sz="950" b="1" dirty="0">
+                        <a:rPr lang="en-US" sz="900" b="1" dirty="0">
                           <a:solidFill>
                             <a:srgbClr val="B3261E"/>
                           </a:solidFill>
@@ -5357,7 +5357,7 @@
                         </a:rPr>
                         <a:t>1 205,9</a:t>
                       </a:r>
-                      <a:endParaRPr lang="en-US" sz="950" dirty="0">
+                      <a:endParaRPr lang="en-US" sz="900" dirty="0">
                         <a:latin typeface="Calibri" charset="0"/>
                         <a:ea typeface="Calibri" charset="0"/>
                         <a:cs typeface="Calibri" charset="0"/>
@@ -5407,7 +5407,7 @@
                   </a:tcPr>
                 </a:tc>
               </a:tr>
-              <a:tr h="274320">
+              <a:tr h="224028">
                 <a:tc>
                   <a:txBody>
                     <a:bodyPr/>
@@ -5417,7 +5417,7 @@
                         <a:buNone/>
                       </a:pPr>
                       <a:r>
-                        <a:rPr lang="en-US" sz="950" b="1" dirty="0">
+                        <a:rPr lang="en-US" sz="900" b="1" dirty="0">
                           <a:solidFill>
                             <a:srgbClr val="FFFFFF"/>
                           </a:solidFill>
@@ -5427,7 +5427,7 @@
                         </a:rPr>
                         <a:t>Total des décaissements</a:t>
                       </a:r>
-                      <a:endParaRPr lang="en-US" sz="950" dirty="0">
+                      <a:endParaRPr lang="en-US" sz="900" dirty="0">
                         <a:latin typeface="Calibri" charset="0"/>
                         <a:ea typeface="Calibri" charset="0"/>
                         <a:cs typeface="Calibri" charset="0"/>
@@ -5485,7 +5485,7 @@
                         <a:buNone/>
                       </a:pPr>
                       <a:r>
-                        <a:rPr lang="en-US" sz="950" b="1" dirty="0">
+                        <a:rPr lang="en-US" sz="900" b="1" dirty="0">
                           <a:solidFill>
                             <a:srgbClr val="FFFFFF"/>
                           </a:solidFill>
@@ -5495,7 +5495,7 @@
                         </a:rPr>
                         <a:t>5 672,4</a:t>
                       </a:r>
-                      <a:endParaRPr lang="en-US" sz="950" dirty="0">
+                      <a:endParaRPr lang="en-US" sz="900" dirty="0">
                         <a:latin typeface="Calibri" charset="0"/>
                         <a:ea typeface="Calibri" charset="0"/>
                         <a:cs typeface="Calibri" charset="0"/>
@@ -5553,7 +5553,7 @@
                         <a:buNone/>
                       </a:pPr>
                       <a:r>
-                        <a:rPr lang="en-US" sz="950" b="1" dirty="0">
+                        <a:rPr lang="en-US" sz="900" b="1" dirty="0">
                           <a:solidFill>
                             <a:srgbClr val="FFFFFF"/>
                           </a:solidFill>
@@ -5563,7 +5563,7 @@
                         </a:rPr>
                         <a:t>1 784,3</a:t>
                       </a:r>
-                      <a:endParaRPr lang="en-US" sz="950" dirty="0">
+                      <a:endParaRPr lang="en-US" sz="900" dirty="0">
                         <a:latin typeface="Calibri" charset="0"/>
                         <a:ea typeface="Calibri" charset="0"/>
                         <a:cs typeface="Calibri" charset="0"/>
@@ -5621,7 +5621,7 @@
                         <a:buNone/>
                       </a:pPr>
                       <a:r>
-                        <a:rPr lang="en-US" sz="950" b="1" dirty="0">
+                        <a:rPr lang="en-US" sz="900" b="1" dirty="0">
                           <a:solidFill>
                             <a:srgbClr val="FFFFFF"/>
                           </a:solidFill>
@@ -5631,7 +5631,7 @@
                         </a:rPr>
                         <a:t>225,7</a:t>
                       </a:r>
-                      <a:endParaRPr lang="en-US" sz="950" dirty="0">
+                      <a:endParaRPr lang="en-US" sz="900" dirty="0">
                         <a:latin typeface="Calibri" charset="0"/>
                         <a:ea typeface="Calibri" charset="0"/>
                         <a:cs typeface="Calibri" charset="0"/>
@@ -5689,7 +5689,7 @@
                         <a:buNone/>
                       </a:pPr>
                       <a:r>
-                        <a:rPr lang="en-US" sz="950" b="1" dirty="0">
+                        <a:rPr lang="en-US" sz="900" b="1" dirty="0">
                           <a:solidFill>
                             <a:srgbClr val="FFFFFF"/>
                           </a:solidFill>
@@ -5699,7 +5699,7 @@
                         </a:rPr>
                         <a:t>27,1</a:t>
                       </a:r>
-                      <a:endParaRPr lang="en-US" sz="950" dirty="0">
+                      <a:endParaRPr lang="en-US" sz="900" dirty="0">
                         <a:latin typeface="Calibri" charset="0"/>
                         <a:ea typeface="Calibri" charset="0"/>
                         <a:cs typeface="Calibri" charset="0"/>
@@ -5757,7 +5757,7 @@
                         <a:buNone/>
                       </a:pPr>
                       <a:r>
-                        <a:rPr lang="en-US" sz="950" b="1" dirty="0">
+                        <a:rPr lang="en-US" sz="900" b="1" dirty="0">
                           <a:solidFill>
                             <a:srgbClr val="FFFFFF"/>
                           </a:solidFill>
@@ -5767,7 +5767,7 @@
                         </a:rPr>
                         <a:t>–</a:t>
                       </a:r>
-                      <a:endParaRPr lang="en-US" sz="950" dirty="0">
+                      <a:endParaRPr lang="en-US" sz="900" dirty="0">
                         <a:latin typeface="Calibri" charset="0"/>
                         <a:ea typeface="Calibri" charset="0"/>
                         <a:cs typeface="Calibri" charset="0"/>
@@ -5825,7 +5825,7 @@
                         <a:buNone/>
                       </a:pPr>
                       <a:r>
-                        <a:rPr lang="en-US" sz="950" b="1" dirty="0">
+                        <a:rPr lang="en-US" sz="900" b="1" dirty="0">
                           <a:solidFill>
                             <a:srgbClr val="FFFFFF"/>
                           </a:solidFill>
@@ -5835,7 +5835,7 @@
                         </a:rPr>
                         <a:t>7 709,5</a:t>
                       </a:r>
-                      <a:endParaRPr lang="en-US" sz="950" dirty="0">
+                      <a:endParaRPr lang="en-US" sz="900" dirty="0">
                         <a:latin typeface="Calibri" charset="0"/>
                         <a:ea typeface="Calibri" charset="0"/>
                         <a:cs typeface="Calibri" charset="0"/>
@@ -5893,7 +5893,7 @@
                         <a:buNone/>
                       </a:pPr>
                       <a:r>
-                        <a:rPr lang="en-US" sz="950" b="1" dirty="0">
+                        <a:rPr lang="en-US" sz="900" b="1" dirty="0">
                           <a:solidFill>
                             <a:srgbClr val="FFFFFF"/>
                           </a:solidFill>
@@ -5903,7 +5903,7 @@
                         </a:rPr>
                         <a:t>4 902,2</a:t>
                       </a:r>
-                      <a:endParaRPr lang="en-US" sz="950" dirty="0">
+                      <a:endParaRPr lang="en-US" sz="900" dirty="0">
                         <a:latin typeface="Calibri" charset="0"/>
                         <a:ea typeface="Calibri" charset="0"/>
                         <a:cs typeface="Calibri" charset="0"/>
@@ -5961,7 +5961,7 @@
                         <a:buNone/>
                       </a:pPr>
                       <a:r>
-                        <a:rPr lang="en-US" sz="950" b="1" dirty="0">
+                        <a:rPr lang="en-US" sz="900" b="1" dirty="0">
                           <a:solidFill>
                             <a:srgbClr val="FFFFFF"/>
                           </a:solidFill>
@@ -5971,7 +5971,7 @@
                         </a:rPr>
                         <a:t>2 776,8</a:t>
                       </a:r>
-                      <a:endParaRPr lang="en-US" sz="950" dirty="0">
+                      <a:endParaRPr lang="en-US" sz="900" dirty="0">
                         <a:latin typeface="Calibri" charset="0"/>
                         <a:ea typeface="Calibri" charset="0"/>
                         <a:cs typeface="Calibri" charset="0"/>
@@ -6021,7 +6021,7 @@
                   </a:tcPr>
                 </a:tc>
               </a:tr>
-              <a:tr h="274320">
+              <a:tr h="224028">
                 <a:tc>
                   <a:txBody>
                     <a:bodyPr/>
@@ -6031,7 +6031,7 @@
                         <a:buNone/>
                       </a:pPr>
                       <a:r>
-                        <a:rPr lang="en-US" sz="950" i="1" dirty="0">
+                        <a:rPr lang="en-US" sz="900" i="1" dirty="0">
                           <a:solidFill>
                             <a:srgbClr val="6B7280"/>
                           </a:solidFill>
@@ -6041,7 +6041,7 @@
                         </a:rPr>
                         <a:t>Encaissements prévus</a:t>
                       </a:r>
-                      <a:endParaRPr lang="en-US" sz="950" dirty="0">
+                      <a:endParaRPr lang="en-US" sz="900" dirty="0">
                         <a:latin typeface="Calibri" charset="0"/>
                         <a:ea typeface="Calibri" charset="0"/>
                         <a:cs typeface="Calibri" charset="0"/>
@@ -6096,7 +6096,7 @@
                         <a:buNone/>
                       </a:pPr>
                       <a:r>
-                        <a:rPr lang="en-US" sz="950" i="1" dirty="0">
+                        <a:rPr lang="en-US" sz="900" i="1" dirty="0">
                           <a:solidFill>
                             <a:srgbClr val="6B7280"/>
                           </a:solidFill>
@@ -6106,7 +6106,7 @@
                         </a:rPr>
                         <a:t>3,6</a:t>
                       </a:r>
-                      <a:endParaRPr lang="en-US" sz="950" dirty="0">
+                      <a:endParaRPr lang="en-US" sz="900" dirty="0">
                         <a:latin typeface="Calibri" charset="0"/>
                         <a:ea typeface="Calibri" charset="0"/>
                         <a:cs typeface="Calibri" charset="0"/>
@@ -6161,7 +6161,7 @@
                         <a:buNone/>
                       </a:pPr>
                       <a:r>
-                        <a:rPr lang="en-US" sz="950" i="1" dirty="0">
+                        <a:rPr lang="en-US" sz="900" i="1" dirty="0">
                           <a:solidFill>
                             <a:srgbClr val="6B7280"/>
                           </a:solidFill>
@@ -6171,7 +6171,7 @@
                         </a:rPr>
                         <a:t>129,6</a:t>
                       </a:r>
-                      <a:endParaRPr lang="en-US" sz="950" dirty="0">
+                      <a:endParaRPr lang="en-US" sz="900" dirty="0">
                         <a:latin typeface="Calibri" charset="0"/>
                         <a:ea typeface="Calibri" charset="0"/>
                         <a:cs typeface="Calibri" charset="0"/>
@@ -6226,7 +6226,7 @@
                         <a:buNone/>
                       </a:pPr>
                       <a:r>
-                        <a:rPr lang="en-US" sz="950" i="1" dirty="0">
+                        <a:rPr lang="en-US" sz="900" i="1" dirty="0">
                           <a:solidFill>
                             <a:srgbClr val="6B7280"/>
                           </a:solidFill>
@@ -6236,7 +6236,7 @@
                         </a:rPr>
                         <a:t>–</a:t>
                       </a:r>
-                      <a:endParaRPr lang="en-US" sz="950" dirty="0">
+                      <a:endParaRPr lang="en-US" sz="900" dirty="0">
                         <a:latin typeface="Calibri" charset="0"/>
                         <a:ea typeface="Calibri" charset="0"/>
                         <a:cs typeface="Calibri" charset="0"/>
@@ -6291,7 +6291,7 @@
                         <a:buNone/>
                       </a:pPr>
                       <a:r>
-                        <a:rPr lang="en-US" sz="950" i="1" dirty="0">
+                        <a:rPr lang="en-US" sz="900" i="1" dirty="0">
                           <a:solidFill>
                             <a:srgbClr val="6B7280"/>
                           </a:solidFill>
@@ -6301,7 +6301,7 @@
                         </a:rPr>
                         <a:t>–</a:t>
                       </a:r>
-                      <a:endParaRPr lang="en-US" sz="950" dirty="0">
+                      <a:endParaRPr lang="en-US" sz="900" dirty="0">
                         <a:latin typeface="Calibri" charset="0"/>
                         <a:ea typeface="Calibri" charset="0"/>
                         <a:cs typeface="Calibri" charset="0"/>
@@ -6356,7 +6356,7 @@
                         <a:buNone/>
                       </a:pPr>
                       <a:r>
-                        <a:rPr lang="en-US" sz="950" i="1" dirty="0">
+                        <a:rPr lang="en-US" sz="900" i="1" dirty="0">
                           <a:solidFill>
                             <a:srgbClr val="6B7280"/>
                           </a:solidFill>
@@ -6366,7 +6366,7 @@
                         </a:rPr>
                         <a:t>–</a:t>
                       </a:r>
-                      <a:endParaRPr lang="en-US" sz="950" dirty="0">
+                      <a:endParaRPr lang="en-US" sz="900" dirty="0">
                         <a:latin typeface="Calibri" charset="0"/>
                         <a:ea typeface="Calibri" charset="0"/>
                         <a:cs typeface="Calibri" charset="0"/>
@@ -6421,7 +6421,7 @@
                         <a:buNone/>
                       </a:pPr>
                       <a:r>
-                        <a:rPr lang="en-US" sz="950" i="1" dirty="0">
+                        <a:rPr lang="en-US" sz="900" i="1" dirty="0">
                           <a:solidFill>
                             <a:srgbClr val="6B7280"/>
                           </a:solidFill>
@@ -6431,7 +6431,7 @@
                         </a:rPr>
                         <a:t>133,2</a:t>
                       </a:r>
-                      <a:endParaRPr lang="en-US" sz="950" dirty="0">
+                      <a:endParaRPr lang="en-US" sz="900" dirty="0">
                         <a:latin typeface="Calibri" charset="0"/>
                         <a:ea typeface="Calibri" charset="0"/>
                         <a:cs typeface="Calibri" charset="0"/>
@@ -6485,7 +6485,7 @@
                       <a:pPr algn="r" indent="0" marL="0">
                         <a:buNone/>
                       </a:pPr>
-                      <a:endParaRPr lang="en-US" sz="950" dirty="0">
+                      <a:endParaRPr lang="en-US" sz="900" dirty="0">
                         <a:latin typeface="Calibri" charset="0"/>
                         <a:ea typeface="Calibri" charset="0"/>
                         <a:cs typeface="Calibri" charset="0"/>
@@ -6539,7 +6539,3479 @@
                       <a:pPr algn="r" indent="0" marL="0">
                         <a:buNone/>
                       </a:pPr>
-                      <a:endParaRPr lang="en-US" sz="950" dirty="0">
+                      <a:endParaRPr lang="en-US" sz="900" dirty="0">
+                        <a:latin typeface="Calibri" charset="0"/>
+                        <a:ea typeface="Calibri" charset="0"/>
+                        <a:cs typeface="Calibri" charset="0"/>
+                      </a:endParaRPr>
+                    </a:p>
+                  </a:txBody>
+                  <a:tcPr marL="64008" marR="64008" marT="0" marB="0" anchor="ctr">
+                    <a:lnL w="6350" cap="flat" cmpd="sng" algn="ctr">
+                      <a:solidFill>
+                        <a:srgbClr val="D5DBE3"/>
+                      </a:solidFill>
+                      <a:prstDash val="solid"/>
+                      <a:round/>
+                      <a:headEnd type="none" w="med" len="med"/>
+                      <a:tailEnd type="none" w="med" len="med"/>
+                    </a:lnL>
+                    <a:lnR w="6350" cap="flat" cmpd="sng" algn="ctr">
+                      <a:solidFill>
+                        <a:srgbClr val="D5DBE3"/>
+                      </a:solidFill>
+                      <a:prstDash val="solid"/>
+                      <a:round/>
+                      <a:headEnd type="none" w="med" len="med"/>
+                      <a:tailEnd type="none" w="med" len="med"/>
+                    </a:lnR>
+                    <a:lnT w="6350" cap="flat" cmpd="sng" algn="ctr">
+                      <a:solidFill>
+                        <a:srgbClr val="D5DBE3"/>
+                      </a:solidFill>
+                      <a:prstDash val="solid"/>
+                      <a:round/>
+                      <a:headEnd type="none" w="med" len="med"/>
+                      <a:tailEnd type="none" w="med" len="med"/>
+                    </a:lnT>
+                    <a:lnB w="6350" cap="flat" cmpd="sng" algn="ctr">
+                      <a:solidFill>
+                        <a:srgbClr val="D5DBE3"/>
+                      </a:solidFill>
+                      <a:prstDash val="solid"/>
+                      <a:round/>
+                      <a:headEnd type="none" w="med" len="med"/>
+                      <a:tailEnd type="none" w="med" len="med"/>
+                    </a:lnB>
+                  </a:tcPr>
+                </a:tc>
+              </a:tr>
+              <a:tr h="224028">
+                <a:tc gridSpan="9">
+                  <a:txBody>
+                    <a:bodyPr/>
+                    <a:lstStyle/>
+                    <a:p>
+                      <a:pPr algn="l" indent="0" marL="0">
+                        <a:buNone/>
+                      </a:pPr>
+                      <a:r>
+                        <a:rPr lang="en-US" sz="900" b="1" dirty="0">
+                          <a:solidFill>
+                            <a:srgbClr val="FFFFFF"/>
+                          </a:solidFill>
+                          <a:latin typeface="Calibri" pitchFamily="34" charset="0"/>
+                          <a:ea typeface="Calibri" pitchFamily="34" charset="-122"/>
+                          <a:cs typeface="Calibri" pitchFamily="34" charset="-120"/>
+                        </a:rPr>
+                        <a:t>Besoin (–) ou surplus (+) de trésorerie – soldes théoriques</a:t>
+                      </a:r>
+                      <a:endParaRPr lang="en-US" sz="900" dirty="0">
+                        <a:latin typeface="Calibri" charset="0"/>
+                        <a:ea typeface="Calibri" charset="0"/>
+                        <a:cs typeface="Calibri" charset="0"/>
+                      </a:endParaRPr>
+                    </a:p>
+                  </a:txBody>
+                  <a:tcPr marL="64008" marR="64008" marT="0" marB="0" anchor="ctr">
+                    <a:lnL w="6350" cap="flat" cmpd="sng" algn="ctr">
+                      <a:solidFill>
+                        <a:srgbClr val="D5DBE3"/>
+                      </a:solidFill>
+                      <a:prstDash val="solid"/>
+                      <a:round/>
+                      <a:headEnd type="none" w="med" len="med"/>
+                      <a:tailEnd type="none" w="med" len="med"/>
+                    </a:lnL>
+                    <a:lnR w="6350" cap="flat" cmpd="sng" algn="ctr">
+                      <a:solidFill>
+                        <a:srgbClr val="D5DBE3"/>
+                      </a:solidFill>
+                      <a:prstDash val="solid"/>
+                      <a:round/>
+                      <a:headEnd type="none" w="med" len="med"/>
+                      <a:tailEnd type="none" w="med" len="med"/>
+                    </a:lnR>
+                    <a:lnT w="6350" cap="flat" cmpd="sng" algn="ctr">
+                      <a:solidFill>
+                        <a:srgbClr val="D5DBE3"/>
+                      </a:solidFill>
+                      <a:prstDash val="solid"/>
+                      <a:round/>
+                      <a:headEnd type="none" w="med" len="med"/>
+                      <a:tailEnd type="none" w="med" len="med"/>
+                    </a:lnT>
+                    <a:lnB w="6350" cap="flat" cmpd="sng" algn="ctr">
+                      <a:solidFill>
+                        <a:srgbClr val="D5DBE3"/>
+                      </a:solidFill>
+                      <a:prstDash val="solid"/>
+                      <a:round/>
+                      <a:headEnd type="none" w="med" len="med"/>
+                      <a:tailEnd type="none" w="med" len="med"/>
+                    </a:lnB>
+                    <a:solidFill>
+                      <a:srgbClr val="002C50"/>
+                    </a:solidFill>
+                  </a:tcPr>
+                </a:tc>
+                <a:tc hMerge="1">
+                  <a:tcPr/>
+                </a:tc>
+                <a:tc hMerge="1">
+                  <a:tcPr/>
+                </a:tc>
+                <a:tc hMerge="1">
+                  <a:tcPr/>
+                </a:tc>
+                <a:tc hMerge="1">
+                  <a:tcPr/>
+                </a:tc>
+                <a:tc hMerge="1">
+                  <a:tcPr/>
+                </a:tc>
+                <a:tc hMerge="1">
+                  <a:tcPr/>
+                </a:tc>
+                <a:tc hMerge="1">
+                  <a:tcPr/>
+                </a:tc>
+                <a:tc hMerge="1">
+                  <a:tcPr/>
+                </a:tc>
+              </a:tr>
+              <a:tr h="224028">
+                <a:tc>
+                  <a:txBody>
+                    <a:bodyPr/>
+                    <a:lstStyle/>
+                    <a:p>
+                      <a:pPr algn="l" indent="0" marL="0">
+                        <a:buNone/>
+                      </a:pPr>
+                      <a:r>
+                        <a:rPr lang="en-US" sz="900" b="1" dirty="0">
+                          <a:solidFill>
+                            <a:srgbClr val="1F2933"/>
+                          </a:solidFill>
+                          <a:latin typeface="Calibri" pitchFamily="34" charset="0"/>
+                          <a:ea typeface="Calibri" pitchFamily="34" charset="-122"/>
+                          <a:cs typeface="Calibri" pitchFamily="34" charset="-120"/>
+                        </a:rPr>
+                        <a:t>Comptes de sociétés</a:t>
+                      </a:r>
+                      <a:endParaRPr lang="en-US" sz="900" dirty="0">
+                        <a:latin typeface="Calibri" charset="0"/>
+                        <a:ea typeface="Calibri" charset="0"/>
+                        <a:cs typeface="Calibri" charset="0"/>
+                      </a:endParaRPr>
+                    </a:p>
+                  </a:txBody>
+                  <a:tcPr marL="64008" marR="64008" marT="0" marB="0" anchor="ctr">
+                    <a:lnL w="6350" cap="flat" cmpd="sng" algn="ctr">
+                      <a:solidFill>
+                        <a:srgbClr val="D5DBE3"/>
+                      </a:solidFill>
+                      <a:prstDash val="solid"/>
+                      <a:round/>
+                      <a:headEnd type="none" w="med" len="med"/>
+                      <a:tailEnd type="none" w="med" len="med"/>
+                    </a:lnL>
+                    <a:lnR w="6350" cap="flat" cmpd="sng" algn="ctr">
+                      <a:solidFill>
+                        <a:srgbClr val="D5DBE3"/>
+                      </a:solidFill>
+                      <a:prstDash val="solid"/>
+                      <a:round/>
+                      <a:headEnd type="none" w="med" len="med"/>
+                      <a:tailEnd type="none" w="med" len="med"/>
+                    </a:lnR>
+                    <a:lnT w="6350" cap="flat" cmpd="sng" algn="ctr">
+                      <a:solidFill>
+                        <a:srgbClr val="D5DBE3"/>
+                      </a:solidFill>
+                      <a:prstDash val="solid"/>
+                      <a:round/>
+                      <a:headEnd type="none" w="med" len="med"/>
+                      <a:tailEnd type="none" w="med" len="med"/>
+                    </a:lnT>
+                    <a:lnB w="6350" cap="flat" cmpd="sng" algn="ctr">
+                      <a:solidFill>
+                        <a:srgbClr val="D5DBE3"/>
+                      </a:solidFill>
+                      <a:prstDash val="solid"/>
+                      <a:round/>
+                      <a:headEnd type="none" w="med" len="med"/>
+                      <a:tailEnd type="none" w="med" len="med"/>
+                    </a:lnB>
+                    <a:solidFill>
+                      <a:srgbClr val="EEF2F6"/>
+                    </a:solidFill>
+                  </a:tcPr>
+                </a:tc>
+                <a:tc>
+                  <a:txBody>
+                    <a:bodyPr/>
+                    <a:lstStyle/>
+                    <a:p>
+                      <a:pPr algn="r" indent="0" marL="0">
+                        <a:buNone/>
+                      </a:pPr>
+                      <a:r>
+                        <a:rPr lang="en-US" sz="900" b="1" dirty="0">
+                          <a:solidFill>
+                            <a:srgbClr val="B3261E"/>
+                          </a:solidFill>
+                          <a:latin typeface="Calibri" pitchFamily="34" charset="0"/>
+                          <a:ea typeface="Calibri" pitchFamily="34" charset="-122"/>
+                          <a:cs typeface="Calibri" pitchFamily="34" charset="-120"/>
+                        </a:rPr>
+                        <a:t>-701,1</a:t>
+                      </a:r>
+                      <a:endParaRPr lang="en-US" sz="900" dirty="0">
+                        <a:latin typeface="Calibri" charset="0"/>
+                        <a:ea typeface="Calibri" charset="0"/>
+                        <a:cs typeface="Calibri" charset="0"/>
+                      </a:endParaRPr>
+                    </a:p>
+                  </a:txBody>
+                  <a:tcPr marL="64008" marR="64008" marT="0" marB="0" anchor="ctr">
+                    <a:lnL w="6350" cap="flat" cmpd="sng" algn="ctr">
+                      <a:solidFill>
+                        <a:srgbClr val="D5DBE3"/>
+                      </a:solidFill>
+                      <a:prstDash val="solid"/>
+                      <a:round/>
+                      <a:headEnd type="none" w="med" len="med"/>
+                      <a:tailEnd type="none" w="med" len="med"/>
+                    </a:lnL>
+                    <a:lnR w="6350" cap="flat" cmpd="sng" algn="ctr">
+                      <a:solidFill>
+                        <a:srgbClr val="D5DBE3"/>
+                      </a:solidFill>
+                      <a:prstDash val="solid"/>
+                      <a:round/>
+                      <a:headEnd type="none" w="med" len="med"/>
+                      <a:tailEnd type="none" w="med" len="med"/>
+                    </a:lnR>
+                    <a:lnT w="6350" cap="flat" cmpd="sng" algn="ctr">
+                      <a:solidFill>
+                        <a:srgbClr val="D5DBE3"/>
+                      </a:solidFill>
+                      <a:prstDash val="solid"/>
+                      <a:round/>
+                      <a:headEnd type="none" w="med" len="med"/>
+                      <a:tailEnd type="none" w="med" len="med"/>
+                    </a:lnT>
+                    <a:lnB w="6350" cap="flat" cmpd="sng" algn="ctr">
+                      <a:solidFill>
+                        <a:srgbClr val="D5DBE3"/>
+                      </a:solidFill>
+                      <a:prstDash val="solid"/>
+                      <a:round/>
+                      <a:headEnd type="none" w="med" len="med"/>
+                      <a:tailEnd type="none" w="med" len="med"/>
+                    </a:lnB>
+                    <a:solidFill>
+                      <a:srgbClr val="EEF2F6"/>
+                    </a:solidFill>
+                  </a:tcPr>
+                </a:tc>
+                <a:tc>
+                  <a:txBody>
+                    <a:bodyPr/>
+                    <a:lstStyle/>
+                    <a:p>
+                      <a:pPr algn="r" indent="0" marL="0">
+                        <a:buNone/>
+                      </a:pPr>
+                      <a:r>
+                        <a:rPr lang="en-US" sz="900" b="1" dirty="0">
+                          <a:solidFill>
+                            <a:srgbClr val="B3261E"/>
+                          </a:solidFill>
+                          <a:latin typeface="Calibri" pitchFamily="34" charset="0"/>
+                          <a:ea typeface="Calibri" pitchFamily="34" charset="-122"/>
+                          <a:cs typeface="Calibri" pitchFamily="34" charset="-120"/>
+                        </a:rPr>
+                        <a:t>-641,1</a:t>
+                      </a:r>
+                      <a:endParaRPr lang="en-US" sz="900" dirty="0">
+                        <a:latin typeface="Calibri" charset="0"/>
+                        <a:ea typeface="Calibri" charset="0"/>
+                        <a:cs typeface="Calibri" charset="0"/>
+                      </a:endParaRPr>
+                    </a:p>
+                  </a:txBody>
+                  <a:tcPr marL="64008" marR="64008" marT="0" marB="0" anchor="ctr">
+                    <a:lnL w="6350" cap="flat" cmpd="sng" algn="ctr">
+                      <a:solidFill>
+                        <a:srgbClr val="D5DBE3"/>
+                      </a:solidFill>
+                      <a:prstDash val="solid"/>
+                      <a:round/>
+                      <a:headEnd type="none" w="med" len="med"/>
+                      <a:tailEnd type="none" w="med" len="med"/>
+                    </a:lnL>
+                    <a:lnR w="6350" cap="flat" cmpd="sng" algn="ctr">
+                      <a:solidFill>
+                        <a:srgbClr val="D5DBE3"/>
+                      </a:solidFill>
+                      <a:prstDash val="solid"/>
+                      <a:round/>
+                      <a:headEnd type="none" w="med" len="med"/>
+                      <a:tailEnd type="none" w="med" len="med"/>
+                    </a:lnR>
+                    <a:lnT w="6350" cap="flat" cmpd="sng" algn="ctr">
+                      <a:solidFill>
+                        <a:srgbClr val="D5DBE3"/>
+                      </a:solidFill>
+                      <a:prstDash val="solid"/>
+                      <a:round/>
+                      <a:headEnd type="none" w="med" len="med"/>
+                      <a:tailEnd type="none" w="med" len="med"/>
+                    </a:lnT>
+                    <a:lnB w="6350" cap="flat" cmpd="sng" algn="ctr">
+                      <a:solidFill>
+                        <a:srgbClr val="D5DBE3"/>
+                      </a:solidFill>
+                      <a:prstDash val="solid"/>
+                      <a:round/>
+                      <a:headEnd type="none" w="med" len="med"/>
+                      <a:tailEnd type="none" w="med" len="med"/>
+                    </a:lnB>
+                    <a:solidFill>
+                      <a:srgbClr val="EEF2F6"/>
+                    </a:solidFill>
+                  </a:tcPr>
+                </a:tc>
+                <a:tc>
+                  <a:txBody>
+                    <a:bodyPr/>
+                    <a:lstStyle/>
+                    <a:p>
+                      <a:pPr algn="r" indent="0" marL="0">
+                        <a:buNone/>
+                      </a:pPr>
+                      <a:r>
+                        <a:rPr lang="en-US" sz="900" b="1" dirty="0">
+                          <a:solidFill>
+                            <a:srgbClr val="B3261E"/>
+                          </a:solidFill>
+                          <a:latin typeface="Calibri" pitchFamily="34" charset="0"/>
+                          <a:ea typeface="Calibri" pitchFamily="34" charset="-122"/>
+                          <a:cs typeface="Calibri" pitchFamily="34" charset="-120"/>
+                        </a:rPr>
+                        <a:t>-866,8</a:t>
+                      </a:r>
+                      <a:endParaRPr lang="en-US" sz="900" dirty="0">
+                        <a:latin typeface="Calibri" charset="0"/>
+                        <a:ea typeface="Calibri" charset="0"/>
+                        <a:cs typeface="Calibri" charset="0"/>
+                      </a:endParaRPr>
+                    </a:p>
+                  </a:txBody>
+                  <a:tcPr marL="64008" marR="64008" marT="0" marB="0" anchor="ctr">
+                    <a:lnL w="6350" cap="flat" cmpd="sng" algn="ctr">
+                      <a:solidFill>
+                        <a:srgbClr val="D5DBE3"/>
+                      </a:solidFill>
+                      <a:prstDash val="solid"/>
+                      <a:round/>
+                      <a:headEnd type="none" w="med" len="med"/>
+                      <a:tailEnd type="none" w="med" len="med"/>
+                    </a:lnL>
+                    <a:lnR w="6350" cap="flat" cmpd="sng" algn="ctr">
+                      <a:solidFill>
+                        <a:srgbClr val="D5DBE3"/>
+                      </a:solidFill>
+                      <a:prstDash val="solid"/>
+                      <a:round/>
+                      <a:headEnd type="none" w="med" len="med"/>
+                      <a:tailEnd type="none" w="med" len="med"/>
+                    </a:lnR>
+                    <a:lnT w="6350" cap="flat" cmpd="sng" algn="ctr">
+                      <a:solidFill>
+                        <a:srgbClr val="D5DBE3"/>
+                      </a:solidFill>
+                      <a:prstDash val="solid"/>
+                      <a:round/>
+                      <a:headEnd type="none" w="med" len="med"/>
+                      <a:tailEnd type="none" w="med" len="med"/>
+                    </a:lnT>
+                    <a:lnB w="6350" cap="flat" cmpd="sng" algn="ctr">
+                      <a:solidFill>
+                        <a:srgbClr val="D5DBE3"/>
+                      </a:solidFill>
+                      <a:prstDash val="solid"/>
+                      <a:round/>
+                      <a:headEnd type="none" w="med" len="med"/>
+                      <a:tailEnd type="none" w="med" len="med"/>
+                    </a:lnB>
+                    <a:solidFill>
+                      <a:srgbClr val="EEF2F6"/>
+                    </a:solidFill>
+                  </a:tcPr>
+                </a:tc>
+                <a:tc>
+                  <a:txBody>
+                    <a:bodyPr/>
+                    <a:lstStyle/>
+                    <a:p>
+                      <a:pPr algn="r" indent="0" marL="0">
+                        <a:buNone/>
+                      </a:pPr>
+                      <a:r>
+                        <a:rPr lang="en-US" sz="900" b="1" dirty="0">
+                          <a:solidFill>
+                            <a:srgbClr val="B3261E"/>
+                          </a:solidFill>
+                          <a:latin typeface="Calibri" pitchFamily="34" charset="0"/>
+                          <a:ea typeface="Calibri" pitchFamily="34" charset="-122"/>
+                          <a:cs typeface="Calibri" pitchFamily="34" charset="-120"/>
+                        </a:rPr>
+                        <a:t>-866,8</a:t>
+                      </a:r>
+                      <a:endParaRPr lang="en-US" sz="900" dirty="0">
+                        <a:latin typeface="Calibri" charset="0"/>
+                        <a:ea typeface="Calibri" charset="0"/>
+                        <a:cs typeface="Calibri" charset="0"/>
+                      </a:endParaRPr>
+                    </a:p>
+                  </a:txBody>
+                  <a:tcPr marL="64008" marR="64008" marT="0" marB="0" anchor="ctr">
+                    <a:lnL w="6350" cap="flat" cmpd="sng" algn="ctr">
+                      <a:solidFill>
+                        <a:srgbClr val="D5DBE3"/>
+                      </a:solidFill>
+                      <a:prstDash val="solid"/>
+                      <a:round/>
+                      <a:headEnd type="none" w="med" len="med"/>
+                      <a:tailEnd type="none" w="med" len="med"/>
+                    </a:lnL>
+                    <a:lnR w="6350" cap="flat" cmpd="sng" algn="ctr">
+                      <a:solidFill>
+                        <a:srgbClr val="D5DBE3"/>
+                      </a:solidFill>
+                      <a:prstDash val="solid"/>
+                      <a:round/>
+                      <a:headEnd type="none" w="med" len="med"/>
+                      <a:tailEnd type="none" w="med" len="med"/>
+                    </a:lnR>
+                    <a:lnT w="6350" cap="flat" cmpd="sng" algn="ctr">
+                      <a:solidFill>
+                        <a:srgbClr val="D5DBE3"/>
+                      </a:solidFill>
+                      <a:prstDash val="solid"/>
+                      <a:round/>
+                      <a:headEnd type="none" w="med" len="med"/>
+                      <a:tailEnd type="none" w="med" len="med"/>
+                    </a:lnT>
+                    <a:lnB w="6350" cap="flat" cmpd="sng" algn="ctr">
+                      <a:solidFill>
+                        <a:srgbClr val="D5DBE3"/>
+                      </a:solidFill>
+                      <a:prstDash val="solid"/>
+                      <a:round/>
+                      <a:headEnd type="none" w="med" len="med"/>
+                      <a:tailEnd type="none" w="med" len="med"/>
+                    </a:lnB>
+                    <a:solidFill>
+                      <a:srgbClr val="EEF2F6"/>
+                    </a:solidFill>
+                  </a:tcPr>
+                </a:tc>
+                <a:tc>
+                  <a:txBody>
+                    <a:bodyPr/>
+                    <a:lstStyle/>
+                    <a:p>
+                      <a:pPr algn="r" indent="0" marL="0">
+                        <a:buNone/>
+                      </a:pPr>
+                      <a:r>
+                        <a:rPr lang="en-US" sz="900" b="1" dirty="0">
+                          <a:solidFill>
+                            <a:srgbClr val="B3261E"/>
+                          </a:solidFill>
+                          <a:latin typeface="Calibri" pitchFamily="34" charset="0"/>
+                          <a:ea typeface="Calibri" pitchFamily="34" charset="-122"/>
+                          <a:cs typeface="Calibri" pitchFamily="34" charset="-120"/>
+                        </a:rPr>
+                        <a:t>-866,8</a:t>
+                      </a:r>
+                      <a:endParaRPr lang="en-US" sz="900" dirty="0">
+                        <a:latin typeface="Calibri" charset="0"/>
+                        <a:ea typeface="Calibri" charset="0"/>
+                        <a:cs typeface="Calibri" charset="0"/>
+                      </a:endParaRPr>
+                    </a:p>
+                  </a:txBody>
+                  <a:tcPr marL="64008" marR="64008" marT="0" marB="0" anchor="ctr">
+                    <a:lnL w="6350" cap="flat" cmpd="sng" algn="ctr">
+                      <a:solidFill>
+                        <a:srgbClr val="D5DBE3"/>
+                      </a:solidFill>
+                      <a:prstDash val="solid"/>
+                      <a:round/>
+                      <a:headEnd type="none" w="med" len="med"/>
+                      <a:tailEnd type="none" w="med" len="med"/>
+                    </a:lnL>
+                    <a:lnR w="6350" cap="flat" cmpd="sng" algn="ctr">
+                      <a:solidFill>
+                        <a:srgbClr val="D5DBE3"/>
+                      </a:solidFill>
+                      <a:prstDash val="solid"/>
+                      <a:round/>
+                      <a:headEnd type="none" w="med" len="med"/>
+                      <a:tailEnd type="none" w="med" len="med"/>
+                    </a:lnR>
+                    <a:lnT w="6350" cap="flat" cmpd="sng" algn="ctr">
+                      <a:solidFill>
+                        <a:srgbClr val="D5DBE3"/>
+                      </a:solidFill>
+                      <a:prstDash val="solid"/>
+                      <a:round/>
+                      <a:headEnd type="none" w="med" len="med"/>
+                      <a:tailEnd type="none" w="med" len="med"/>
+                    </a:lnT>
+                    <a:lnB w="6350" cap="flat" cmpd="sng" algn="ctr">
+                      <a:solidFill>
+                        <a:srgbClr val="D5DBE3"/>
+                      </a:solidFill>
+                      <a:prstDash val="solid"/>
+                      <a:round/>
+                      <a:headEnd type="none" w="med" len="med"/>
+                      <a:tailEnd type="none" w="med" len="med"/>
+                    </a:lnB>
+                    <a:solidFill>
+                      <a:srgbClr val="EEF2F6"/>
+                    </a:solidFill>
+                  </a:tcPr>
+                </a:tc>
+                <a:tc>
+                  <a:txBody>
+                    <a:bodyPr/>
+                    <a:lstStyle/>
+                    <a:p>
+                      <a:pPr algn="r" indent="0" marL="0">
+                        <a:buNone/>
+                      </a:pPr>
+                      <a:endParaRPr lang="en-US" sz="900" dirty="0">
+                        <a:latin typeface="Calibri" charset="0"/>
+                        <a:ea typeface="Calibri" charset="0"/>
+                        <a:cs typeface="Calibri" charset="0"/>
+                      </a:endParaRPr>
+                    </a:p>
+                  </a:txBody>
+                  <a:tcPr marL="64008" marR="64008" marT="0" marB="0" anchor="ctr">
+                    <a:lnL w="6350" cap="flat" cmpd="sng" algn="ctr">
+                      <a:solidFill>
+                        <a:srgbClr val="D5DBE3"/>
+                      </a:solidFill>
+                      <a:prstDash val="solid"/>
+                      <a:round/>
+                      <a:headEnd type="none" w="med" len="med"/>
+                      <a:tailEnd type="none" w="med" len="med"/>
+                    </a:lnL>
+                    <a:lnR w="6350" cap="flat" cmpd="sng" algn="ctr">
+                      <a:solidFill>
+                        <a:srgbClr val="D5DBE3"/>
+                      </a:solidFill>
+                      <a:prstDash val="solid"/>
+                      <a:round/>
+                      <a:headEnd type="none" w="med" len="med"/>
+                      <a:tailEnd type="none" w="med" len="med"/>
+                    </a:lnR>
+                    <a:lnT w="6350" cap="flat" cmpd="sng" algn="ctr">
+                      <a:solidFill>
+                        <a:srgbClr val="D5DBE3"/>
+                      </a:solidFill>
+                      <a:prstDash val="solid"/>
+                      <a:round/>
+                      <a:headEnd type="none" w="med" len="med"/>
+                      <a:tailEnd type="none" w="med" len="med"/>
+                    </a:lnT>
+                    <a:lnB w="6350" cap="flat" cmpd="sng" algn="ctr">
+                      <a:solidFill>
+                        <a:srgbClr val="D5DBE3"/>
+                      </a:solidFill>
+                      <a:prstDash val="solid"/>
+                      <a:round/>
+                      <a:headEnd type="none" w="med" len="med"/>
+                      <a:tailEnd type="none" w="med" len="med"/>
+                    </a:lnB>
+                    <a:solidFill>
+                      <a:srgbClr val="EEF2F6"/>
+                    </a:solidFill>
+                  </a:tcPr>
+                </a:tc>
+                <a:tc>
+                  <a:txBody>
+                    <a:bodyPr/>
+                    <a:lstStyle/>
+                    <a:p>
+                      <a:pPr algn="r" indent="0" marL="0">
+                        <a:buNone/>
+                      </a:pPr>
+                      <a:endParaRPr lang="en-US" sz="900" dirty="0">
+                        <a:latin typeface="Calibri" charset="0"/>
+                        <a:ea typeface="Calibri" charset="0"/>
+                        <a:cs typeface="Calibri" charset="0"/>
+                      </a:endParaRPr>
+                    </a:p>
+                  </a:txBody>
+                  <a:tcPr marL="64008" marR="64008" marT="0" marB="0" anchor="ctr">
+                    <a:lnL w="6350" cap="flat" cmpd="sng" algn="ctr">
+                      <a:solidFill>
+                        <a:srgbClr val="D5DBE3"/>
+                      </a:solidFill>
+                      <a:prstDash val="solid"/>
+                      <a:round/>
+                      <a:headEnd type="none" w="med" len="med"/>
+                      <a:tailEnd type="none" w="med" len="med"/>
+                    </a:lnL>
+                    <a:lnR w="6350" cap="flat" cmpd="sng" algn="ctr">
+                      <a:solidFill>
+                        <a:srgbClr val="D5DBE3"/>
+                      </a:solidFill>
+                      <a:prstDash val="solid"/>
+                      <a:round/>
+                      <a:headEnd type="none" w="med" len="med"/>
+                      <a:tailEnd type="none" w="med" len="med"/>
+                    </a:lnR>
+                    <a:lnT w="6350" cap="flat" cmpd="sng" algn="ctr">
+                      <a:solidFill>
+                        <a:srgbClr val="D5DBE3"/>
+                      </a:solidFill>
+                      <a:prstDash val="solid"/>
+                      <a:round/>
+                      <a:headEnd type="none" w="med" len="med"/>
+                      <a:tailEnd type="none" w="med" len="med"/>
+                    </a:lnT>
+                    <a:lnB w="6350" cap="flat" cmpd="sng" algn="ctr">
+                      <a:solidFill>
+                        <a:srgbClr val="D5DBE3"/>
+                      </a:solidFill>
+                      <a:prstDash val="solid"/>
+                      <a:round/>
+                      <a:headEnd type="none" w="med" len="med"/>
+                      <a:tailEnd type="none" w="med" len="med"/>
+                    </a:lnB>
+                    <a:solidFill>
+                      <a:srgbClr val="EEF2F6"/>
+                    </a:solidFill>
+                  </a:tcPr>
+                </a:tc>
+                <a:tc>
+                  <a:txBody>
+                    <a:bodyPr/>
+                    <a:lstStyle/>
+                    <a:p>
+                      <a:pPr algn="r" indent="0" marL="0">
+                        <a:buNone/>
+                      </a:pPr>
+                      <a:endParaRPr lang="en-US" sz="900" dirty="0">
+                        <a:latin typeface="Calibri" charset="0"/>
+                        <a:ea typeface="Calibri" charset="0"/>
+                        <a:cs typeface="Calibri" charset="0"/>
+                      </a:endParaRPr>
+                    </a:p>
+                  </a:txBody>
+                  <a:tcPr marL="64008" marR="64008" marT="0" marB="0" anchor="ctr">
+                    <a:lnL w="6350" cap="flat" cmpd="sng" algn="ctr">
+                      <a:solidFill>
+                        <a:srgbClr val="D5DBE3"/>
+                      </a:solidFill>
+                      <a:prstDash val="solid"/>
+                      <a:round/>
+                      <a:headEnd type="none" w="med" len="med"/>
+                      <a:tailEnd type="none" w="med" len="med"/>
+                    </a:lnL>
+                    <a:lnR w="6350" cap="flat" cmpd="sng" algn="ctr">
+                      <a:solidFill>
+                        <a:srgbClr val="D5DBE3"/>
+                      </a:solidFill>
+                      <a:prstDash val="solid"/>
+                      <a:round/>
+                      <a:headEnd type="none" w="med" len="med"/>
+                      <a:tailEnd type="none" w="med" len="med"/>
+                    </a:lnR>
+                    <a:lnT w="6350" cap="flat" cmpd="sng" algn="ctr">
+                      <a:solidFill>
+                        <a:srgbClr val="D5DBE3"/>
+                      </a:solidFill>
+                      <a:prstDash val="solid"/>
+                      <a:round/>
+                      <a:headEnd type="none" w="med" len="med"/>
+                      <a:tailEnd type="none" w="med" len="med"/>
+                    </a:lnT>
+                    <a:lnB w="6350" cap="flat" cmpd="sng" algn="ctr">
+                      <a:solidFill>
+                        <a:srgbClr val="D5DBE3"/>
+                      </a:solidFill>
+                      <a:prstDash val="solid"/>
+                      <a:round/>
+                      <a:headEnd type="none" w="med" len="med"/>
+                      <a:tailEnd type="none" w="med" len="med"/>
+                    </a:lnB>
+                    <a:solidFill>
+                      <a:srgbClr val="EEF2F6"/>
+                    </a:solidFill>
+                  </a:tcPr>
+                </a:tc>
+              </a:tr>
+              <a:tr h="224028">
+                <a:tc>
+                  <a:txBody>
+                    <a:bodyPr/>
+                    <a:lstStyle/>
+                    <a:p>
+                      <a:pPr algn="l" indent="0" marL="0">
+                        <a:buNone/>
+                      </a:pPr>
+                      <a:r>
+                        <a:rPr lang="en-US" sz="900" i="1" dirty="0">
+                          <a:solidFill>
+                            <a:srgbClr val="1F2933"/>
+                          </a:solidFill>
+                          <a:latin typeface="Calibri" pitchFamily="34" charset="0"/>
+                          <a:ea typeface="Calibri" pitchFamily="34" charset="-122"/>
+                          <a:cs typeface="Calibri" pitchFamily="34" charset="-120"/>
+                        </a:rPr>
+                        <a:t>   dont PICI</a:t>
+                      </a:r>
+                      <a:endParaRPr lang="en-US" sz="900" dirty="0">
+                        <a:latin typeface="Calibri" charset="0"/>
+                        <a:ea typeface="Calibri" charset="0"/>
+                        <a:cs typeface="Calibri" charset="0"/>
+                      </a:endParaRPr>
+                    </a:p>
+                  </a:txBody>
+                  <a:tcPr marL="64008" marR="64008" marT="0" marB="0" anchor="ctr">
+                    <a:lnL w="6350" cap="flat" cmpd="sng" algn="ctr">
+                      <a:solidFill>
+                        <a:srgbClr val="D5DBE3"/>
+                      </a:solidFill>
+                      <a:prstDash val="solid"/>
+                      <a:round/>
+                      <a:headEnd type="none" w="med" len="med"/>
+                      <a:tailEnd type="none" w="med" len="med"/>
+                    </a:lnL>
+                    <a:lnR w="6350" cap="flat" cmpd="sng" algn="ctr">
+                      <a:solidFill>
+                        <a:srgbClr val="D5DBE3"/>
+                      </a:solidFill>
+                      <a:prstDash val="solid"/>
+                      <a:round/>
+                      <a:headEnd type="none" w="med" len="med"/>
+                      <a:tailEnd type="none" w="med" len="med"/>
+                    </a:lnR>
+                    <a:lnT w="6350" cap="flat" cmpd="sng" algn="ctr">
+                      <a:solidFill>
+                        <a:srgbClr val="D5DBE3"/>
+                      </a:solidFill>
+                      <a:prstDash val="solid"/>
+                      <a:round/>
+                      <a:headEnd type="none" w="med" len="med"/>
+                      <a:tailEnd type="none" w="med" len="med"/>
+                    </a:lnT>
+                    <a:lnB w="6350" cap="flat" cmpd="sng" algn="ctr">
+                      <a:solidFill>
+                        <a:srgbClr val="D5DBE3"/>
+                      </a:solidFill>
+                      <a:prstDash val="solid"/>
+                      <a:round/>
+                      <a:headEnd type="none" w="med" len="med"/>
+                      <a:tailEnd type="none" w="med" len="med"/>
+                    </a:lnB>
+                  </a:tcPr>
+                </a:tc>
+                <a:tc>
+                  <a:txBody>
+                    <a:bodyPr/>
+                    <a:lstStyle/>
+                    <a:p>
+                      <a:pPr algn="r" indent="0" marL="0">
+                        <a:buNone/>
+                      </a:pPr>
+                      <a:r>
+                        <a:rPr lang="en-US" sz="900" dirty="0">
+                          <a:solidFill>
+                            <a:srgbClr val="5E9B7E"/>
+                          </a:solidFill>
+                          <a:latin typeface="Calibri" pitchFamily="34" charset="0"/>
+                          <a:ea typeface="Calibri" pitchFamily="34" charset="-122"/>
+                          <a:cs typeface="Calibri" pitchFamily="34" charset="-120"/>
+                        </a:rPr>
+                        <a:t>+133,7</a:t>
+                      </a:r>
+                      <a:endParaRPr lang="en-US" sz="900" dirty="0">
+                        <a:latin typeface="Calibri" charset="0"/>
+                        <a:ea typeface="Calibri" charset="0"/>
+                        <a:cs typeface="Calibri" charset="0"/>
+                      </a:endParaRPr>
+                    </a:p>
+                  </a:txBody>
+                  <a:tcPr marL="64008" marR="64008" marT="0" marB="0" anchor="ctr">
+                    <a:lnL w="6350" cap="flat" cmpd="sng" algn="ctr">
+                      <a:solidFill>
+                        <a:srgbClr val="D5DBE3"/>
+                      </a:solidFill>
+                      <a:prstDash val="solid"/>
+                      <a:round/>
+                      <a:headEnd type="none" w="med" len="med"/>
+                      <a:tailEnd type="none" w="med" len="med"/>
+                    </a:lnL>
+                    <a:lnR w="6350" cap="flat" cmpd="sng" algn="ctr">
+                      <a:solidFill>
+                        <a:srgbClr val="D5DBE3"/>
+                      </a:solidFill>
+                      <a:prstDash val="solid"/>
+                      <a:round/>
+                      <a:headEnd type="none" w="med" len="med"/>
+                      <a:tailEnd type="none" w="med" len="med"/>
+                    </a:lnR>
+                    <a:lnT w="6350" cap="flat" cmpd="sng" algn="ctr">
+                      <a:solidFill>
+                        <a:srgbClr val="D5DBE3"/>
+                      </a:solidFill>
+                      <a:prstDash val="solid"/>
+                      <a:round/>
+                      <a:headEnd type="none" w="med" len="med"/>
+                      <a:tailEnd type="none" w="med" len="med"/>
+                    </a:lnT>
+                    <a:lnB w="6350" cap="flat" cmpd="sng" algn="ctr">
+                      <a:solidFill>
+                        <a:srgbClr val="D5DBE3"/>
+                      </a:solidFill>
+                      <a:prstDash val="solid"/>
+                      <a:round/>
+                      <a:headEnd type="none" w="med" len="med"/>
+                      <a:tailEnd type="none" w="med" len="med"/>
+                    </a:lnB>
+                  </a:tcPr>
+                </a:tc>
+                <a:tc>
+                  <a:txBody>
+                    <a:bodyPr/>
+                    <a:lstStyle/>
+                    <a:p>
+                      <a:pPr algn="r" indent="0" marL="0">
+                        <a:buNone/>
+                      </a:pPr>
+                      <a:r>
+                        <a:rPr lang="en-US" sz="900" dirty="0">
+                          <a:solidFill>
+                            <a:srgbClr val="5E9B7E"/>
+                          </a:solidFill>
+                          <a:latin typeface="Calibri" pitchFamily="34" charset="0"/>
+                          <a:ea typeface="Calibri" pitchFamily="34" charset="-122"/>
+                          <a:cs typeface="Calibri" pitchFamily="34" charset="-120"/>
+                        </a:rPr>
+                        <a:t>+124,3</a:t>
+                      </a:r>
+                      <a:endParaRPr lang="en-US" sz="900" dirty="0">
+                        <a:latin typeface="Calibri" charset="0"/>
+                        <a:ea typeface="Calibri" charset="0"/>
+                        <a:cs typeface="Calibri" charset="0"/>
+                      </a:endParaRPr>
+                    </a:p>
+                  </a:txBody>
+                  <a:tcPr marL="64008" marR="64008" marT="0" marB="0" anchor="ctr">
+                    <a:lnL w="6350" cap="flat" cmpd="sng" algn="ctr">
+                      <a:solidFill>
+                        <a:srgbClr val="D5DBE3"/>
+                      </a:solidFill>
+                      <a:prstDash val="solid"/>
+                      <a:round/>
+                      <a:headEnd type="none" w="med" len="med"/>
+                      <a:tailEnd type="none" w="med" len="med"/>
+                    </a:lnL>
+                    <a:lnR w="6350" cap="flat" cmpd="sng" algn="ctr">
+                      <a:solidFill>
+                        <a:srgbClr val="D5DBE3"/>
+                      </a:solidFill>
+                      <a:prstDash val="solid"/>
+                      <a:round/>
+                      <a:headEnd type="none" w="med" len="med"/>
+                      <a:tailEnd type="none" w="med" len="med"/>
+                    </a:lnR>
+                    <a:lnT w="6350" cap="flat" cmpd="sng" algn="ctr">
+                      <a:solidFill>
+                        <a:srgbClr val="D5DBE3"/>
+                      </a:solidFill>
+                      <a:prstDash val="solid"/>
+                      <a:round/>
+                      <a:headEnd type="none" w="med" len="med"/>
+                      <a:tailEnd type="none" w="med" len="med"/>
+                    </a:lnT>
+                    <a:lnB w="6350" cap="flat" cmpd="sng" algn="ctr">
+                      <a:solidFill>
+                        <a:srgbClr val="D5DBE3"/>
+                      </a:solidFill>
+                      <a:prstDash val="solid"/>
+                      <a:round/>
+                      <a:headEnd type="none" w="med" len="med"/>
+                      <a:tailEnd type="none" w="med" len="med"/>
+                    </a:lnB>
+                  </a:tcPr>
+                </a:tc>
+                <a:tc>
+                  <a:txBody>
+                    <a:bodyPr/>
+                    <a:lstStyle/>
+                    <a:p>
+                      <a:pPr algn="r" indent="0" marL="0">
+                        <a:buNone/>
+                      </a:pPr>
+                      <a:r>
+                        <a:rPr lang="en-US" sz="900" dirty="0">
+                          <a:solidFill>
+                            <a:srgbClr val="5E9B7E"/>
+                          </a:solidFill>
+                          <a:latin typeface="Calibri" pitchFamily="34" charset="0"/>
+                          <a:ea typeface="Calibri" pitchFamily="34" charset="-122"/>
+                          <a:cs typeface="Calibri" pitchFamily="34" charset="-120"/>
+                        </a:rPr>
+                        <a:t>+100,0</a:t>
+                      </a:r>
+                      <a:endParaRPr lang="en-US" sz="900" dirty="0">
+                        <a:latin typeface="Calibri" charset="0"/>
+                        <a:ea typeface="Calibri" charset="0"/>
+                        <a:cs typeface="Calibri" charset="0"/>
+                      </a:endParaRPr>
+                    </a:p>
+                  </a:txBody>
+                  <a:tcPr marL="64008" marR="64008" marT="0" marB="0" anchor="ctr">
+                    <a:lnL w="6350" cap="flat" cmpd="sng" algn="ctr">
+                      <a:solidFill>
+                        <a:srgbClr val="D5DBE3"/>
+                      </a:solidFill>
+                      <a:prstDash val="solid"/>
+                      <a:round/>
+                      <a:headEnd type="none" w="med" len="med"/>
+                      <a:tailEnd type="none" w="med" len="med"/>
+                    </a:lnL>
+                    <a:lnR w="6350" cap="flat" cmpd="sng" algn="ctr">
+                      <a:solidFill>
+                        <a:srgbClr val="D5DBE3"/>
+                      </a:solidFill>
+                      <a:prstDash val="solid"/>
+                      <a:round/>
+                      <a:headEnd type="none" w="med" len="med"/>
+                      <a:tailEnd type="none" w="med" len="med"/>
+                    </a:lnR>
+                    <a:lnT w="6350" cap="flat" cmpd="sng" algn="ctr">
+                      <a:solidFill>
+                        <a:srgbClr val="D5DBE3"/>
+                      </a:solidFill>
+                      <a:prstDash val="solid"/>
+                      <a:round/>
+                      <a:headEnd type="none" w="med" len="med"/>
+                      <a:tailEnd type="none" w="med" len="med"/>
+                    </a:lnT>
+                    <a:lnB w="6350" cap="flat" cmpd="sng" algn="ctr">
+                      <a:solidFill>
+                        <a:srgbClr val="D5DBE3"/>
+                      </a:solidFill>
+                      <a:prstDash val="solid"/>
+                      <a:round/>
+                      <a:headEnd type="none" w="med" len="med"/>
+                      <a:tailEnd type="none" w="med" len="med"/>
+                    </a:lnB>
+                  </a:tcPr>
+                </a:tc>
+                <a:tc>
+                  <a:txBody>
+                    <a:bodyPr/>
+                    <a:lstStyle/>
+                    <a:p>
+                      <a:pPr algn="r" indent="0" marL="0">
+                        <a:buNone/>
+                      </a:pPr>
+                      <a:r>
+                        <a:rPr lang="en-US" sz="900" dirty="0">
+                          <a:solidFill>
+                            <a:srgbClr val="5E9B7E"/>
+                          </a:solidFill>
+                          <a:latin typeface="Calibri" pitchFamily="34" charset="0"/>
+                          <a:ea typeface="Calibri" pitchFamily="34" charset="-122"/>
+                          <a:cs typeface="Calibri" pitchFamily="34" charset="-120"/>
+                        </a:rPr>
+                        <a:t>+100,0</a:t>
+                      </a:r>
+                      <a:endParaRPr lang="en-US" sz="900" dirty="0">
+                        <a:latin typeface="Calibri" charset="0"/>
+                        <a:ea typeface="Calibri" charset="0"/>
+                        <a:cs typeface="Calibri" charset="0"/>
+                      </a:endParaRPr>
+                    </a:p>
+                  </a:txBody>
+                  <a:tcPr marL="64008" marR="64008" marT="0" marB="0" anchor="ctr">
+                    <a:lnL w="6350" cap="flat" cmpd="sng" algn="ctr">
+                      <a:solidFill>
+                        <a:srgbClr val="D5DBE3"/>
+                      </a:solidFill>
+                      <a:prstDash val="solid"/>
+                      <a:round/>
+                      <a:headEnd type="none" w="med" len="med"/>
+                      <a:tailEnd type="none" w="med" len="med"/>
+                    </a:lnL>
+                    <a:lnR w="6350" cap="flat" cmpd="sng" algn="ctr">
+                      <a:solidFill>
+                        <a:srgbClr val="D5DBE3"/>
+                      </a:solidFill>
+                      <a:prstDash val="solid"/>
+                      <a:round/>
+                      <a:headEnd type="none" w="med" len="med"/>
+                      <a:tailEnd type="none" w="med" len="med"/>
+                    </a:lnR>
+                    <a:lnT w="6350" cap="flat" cmpd="sng" algn="ctr">
+                      <a:solidFill>
+                        <a:srgbClr val="D5DBE3"/>
+                      </a:solidFill>
+                      <a:prstDash val="solid"/>
+                      <a:round/>
+                      <a:headEnd type="none" w="med" len="med"/>
+                      <a:tailEnd type="none" w="med" len="med"/>
+                    </a:lnT>
+                    <a:lnB w="6350" cap="flat" cmpd="sng" algn="ctr">
+                      <a:solidFill>
+                        <a:srgbClr val="D5DBE3"/>
+                      </a:solidFill>
+                      <a:prstDash val="solid"/>
+                      <a:round/>
+                      <a:headEnd type="none" w="med" len="med"/>
+                      <a:tailEnd type="none" w="med" len="med"/>
+                    </a:lnB>
+                  </a:tcPr>
+                </a:tc>
+                <a:tc>
+                  <a:txBody>
+                    <a:bodyPr/>
+                    <a:lstStyle/>
+                    <a:p>
+                      <a:pPr algn="r" indent="0" marL="0">
+                        <a:buNone/>
+                      </a:pPr>
+                      <a:r>
+                        <a:rPr lang="en-US" sz="900" dirty="0">
+                          <a:solidFill>
+                            <a:srgbClr val="5E9B7E"/>
+                          </a:solidFill>
+                          <a:latin typeface="Calibri" pitchFamily="34" charset="0"/>
+                          <a:ea typeface="Calibri" pitchFamily="34" charset="-122"/>
+                          <a:cs typeface="Calibri" pitchFamily="34" charset="-120"/>
+                        </a:rPr>
+                        <a:t>+100,0</a:t>
+                      </a:r>
+                      <a:endParaRPr lang="en-US" sz="900" dirty="0">
+                        <a:latin typeface="Calibri" charset="0"/>
+                        <a:ea typeface="Calibri" charset="0"/>
+                        <a:cs typeface="Calibri" charset="0"/>
+                      </a:endParaRPr>
+                    </a:p>
+                  </a:txBody>
+                  <a:tcPr marL="64008" marR="64008" marT="0" marB="0" anchor="ctr">
+                    <a:lnL w="6350" cap="flat" cmpd="sng" algn="ctr">
+                      <a:solidFill>
+                        <a:srgbClr val="D5DBE3"/>
+                      </a:solidFill>
+                      <a:prstDash val="solid"/>
+                      <a:round/>
+                      <a:headEnd type="none" w="med" len="med"/>
+                      <a:tailEnd type="none" w="med" len="med"/>
+                    </a:lnL>
+                    <a:lnR w="6350" cap="flat" cmpd="sng" algn="ctr">
+                      <a:solidFill>
+                        <a:srgbClr val="D5DBE3"/>
+                      </a:solidFill>
+                      <a:prstDash val="solid"/>
+                      <a:round/>
+                      <a:headEnd type="none" w="med" len="med"/>
+                      <a:tailEnd type="none" w="med" len="med"/>
+                    </a:lnR>
+                    <a:lnT w="6350" cap="flat" cmpd="sng" algn="ctr">
+                      <a:solidFill>
+                        <a:srgbClr val="D5DBE3"/>
+                      </a:solidFill>
+                      <a:prstDash val="solid"/>
+                      <a:round/>
+                      <a:headEnd type="none" w="med" len="med"/>
+                      <a:tailEnd type="none" w="med" len="med"/>
+                    </a:lnT>
+                    <a:lnB w="6350" cap="flat" cmpd="sng" algn="ctr">
+                      <a:solidFill>
+                        <a:srgbClr val="D5DBE3"/>
+                      </a:solidFill>
+                      <a:prstDash val="solid"/>
+                      <a:round/>
+                      <a:headEnd type="none" w="med" len="med"/>
+                      <a:tailEnd type="none" w="med" len="med"/>
+                    </a:lnB>
+                  </a:tcPr>
+                </a:tc>
+                <a:tc>
+                  <a:txBody>
+                    <a:bodyPr/>
+                    <a:lstStyle/>
+                    <a:p>
+                      <a:pPr algn="r" indent="0" marL="0">
+                        <a:buNone/>
+                      </a:pPr>
+                      <a:endParaRPr lang="en-US" sz="900" dirty="0">
+                        <a:latin typeface="Calibri" charset="0"/>
+                        <a:ea typeface="Calibri" charset="0"/>
+                        <a:cs typeface="Calibri" charset="0"/>
+                      </a:endParaRPr>
+                    </a:p>
+                  </a:txBody>
+                  <a:tcPr marL="64008" marR="64008" marT="0" marB="0" anchor="ctr">
+                    <a:lnL w="6350" cap="flat" cmpd="sng" algn="ctr">
+                      <a:solidFill>
+                        <a:srgbClr val="D5DBE3"/>
+                      </a:solidFill>
+                      <a:prstDash val="solid"/>
+                      <a:round/>
+                      <a:headEnd type="none" w="med" len="med"/>
+                      <a:tailEnd type="none" w="med" len="med"/>
+                    </a:lnL>
+                    <a:lnR w="6350" cap="flat" cmpd="sng" algn="ctr">
+                      <a:solidFill>
+                        <a:srgbClr val="D5DBE3"/>
+                      </a:solidFill>
+                      <a:prstDash val="solid"/>
+                      <a:round/>
+                      <a:headEnd type="none" w="med" len="med"/>
+                      <a:tailEnd type="none" w="med" len="med"/>
+                    </a:lnR>
+                    <a:lnT w="6350" cap="flat" cmpd="sng" algn="ctr">
+                      <a:solidFill>
+                        <a:srgbClr val="D5DBE3"/>
+                      </a:solidFill>
+                      <a:prstDash val="solid"/>
+                      <a:round/>
+                      <a:headEnd type="none" w="med" len="med"/>
+                      <a:tailEnd type="none" w="med" len="med"/>
+                    </a:lnT>
+                    <a:lnB w="6350" cap="flat" cmpd="sng" algn="ctr">
+                      <a:solidFill>
+                        <a:srgbClr val="D5DBE3"/>
+                      </a:solidFill>
+                      <a:prstDash val="solid"/>
+                      <a:round/>
+                      <a:headEnd type="none" w="med" len="med"/>
+                      <a:tailEnd type="none" w="med" len="med"/>
+                    </a:lnB>
+                  </a:tcPr>
+                </a:tc>
+                <a:tc>
+                  <a:txBody>
+                    <a:bodyPr/>
+                    <a:lstStyle/>
+                    <a:p>
+                      <a:pPr algn="r" indent="0" marL="0">
+                        <a:buNone/>
+                      </a:pPr>
+                      <a:endParaRPr lang="en-US" sz="900" dirty="0">
+                        <a:latin typeface="Calibri" charset="0"/>
+                        <a:ea typeface="Calibri" charset="0"/>
+                        <a:cs typeface="Calibri" charset="0"/>
+                      </a:endParaRPr>
+                    </a:p>
+                  </a:txBody>
+                  <a:tcPr marL="64008" marR="64008" marT="0" marB="0" anchor="ctr">
+                    <a:lnL w="6350" cap="flat" cmpd="sng" algn="ctr">
+                      <a:solidFill>
+                        <a:srgbClr val="D5DBE3"/>
+                      </a:solidFill>
+                      <a:prstDash val="solid"/>
+                      <a:round/>
+                      <a:headEnd type="none" w="med" len="med"/>
+                      <a:tailEnd type="none" w="med" len="med"/>
+                    </a:lnL>
+                    <a:lnR w="6350" cap="flat" cmpd="sng" algn="ctr">
+                      <a:solidFill>
+                        <a:srgbClr val="D5DBE3"/>
+                      </a:solidFill>
+                      <a:prstDash val="solid"/>
+                      <a:round/>
+                      <a:headEnd type="none" w="med" len="med"/>
+                      <a:tailEnd type="none" w="med" len="med"/>
+                    </a:lnR>
+                    <a:lnT w="6350" cap="flat" cmpd="sng" algn="ctr">
+                      <a:solidFill>
+                        <a:srgbClr val="D5DBE3"/>
+                      </a:solidFill>
+                      <a:prstDash val="solid"/>
+                      <a:round/>
+                      <a:headEnd type="none" w="med" len="med"/>
+                      <a:tailEnd type="none" w="med" len="med"/>
+                    </a:lnT>
+                    <a:lnB w="6350" cap="flat" cmpd="sng" algn="ctr">
+                      <a:solidFill>
+                        <a:srgbClr val="D5DBE3"/>
+                      </a:solidFill>
+                      <a:prstDash val="solid"/>
+                      <a:round/>
+                      <a:headEnd type="none" w="med" len="med"/>
+                      <a:tailEnd type="none" w="med" len="med"/>
+                    </a:lnB>
+                  </a:tcPr>
+                </a:tc>
+                <a:tc>
+                  <a:txBody>
+                    <a:bodyPr/>
+                    <a:lstStyle/>
+                    <a:p>
+                      <a:pPr algn="r" indent="0" marL="0">
+                        <a:buNone/>
+                      </a:pPr>
+                      <a:endParaRPr lang="en-US" sz="900" dirty="0">
+                        <a:latin typeface="Calibri" charset="0"/>
+                        <a:ea typeface="Calibri" charset="0"/>
+                        <a:cs typeface="Calibri" charset="0"/>
+                      </a:endParaRPr>
+                    </a:p>
+                  </a:txBody>
+                  <a:tcPr marL="64008" marR="64008" marT="0" marB="0" anchor="ctr">
+                    <a:lnL w="6350" cap="flat" cmpd="sng" algn="ctr">
+                      <a:solidFill>
+                        <a:srgbClr val="D5DBE3"/>
+                      </a:solidFill>
+                      <a:prstDash val="solid"/>
+                      <a:round/>
+                      <a:headEnd type="none" w="med" len="med"/>
+                      <a:tailEnd type="none" w="med" len="med"/>
+                    </a:lnL>
+                    <a:lnR w="6350" cap="flat" cmpd="sng" algn="ctr">
+                      <a:solidFill>
+                        <a:srgbClr val="D5DBE3"/>
+                      </a:solidFill>
+                      <a:prstDash val="solid"/>
+                      <a:round/>
+                      <a:headEnd type="none" w="med" len="med"/>
+                      <a:tailEnd type="none" w="med" len="med"/>
+                    </a:lnR>
+                    <a:lnT w="6350" cap="flat" cmpd="sng" algn="ctr">
+                      <a:solidFill>
+                        <a:srgbClr val="D5DBE3"/>
+                      </a:solidFill>
+                      <a:prstDash val="solid"/>
+                      <a:round/>
+                      <a:headEnd type="none" w="med" len="med"/>
+                      <a:tailEnd type="none" w="med" len="med"/>
+                    </a:lnT>
+                    <a:lnB w="6350" cap="flat" cmpd="sng" algn="ctr">
+                      <a:solidFill>
+                        <a:srgbClr val="D5DBE3"/>
+                      </a:solidFill>
+                      <a:prstDash val="solid"/>
+                      <a:round/>
+                      <a:headEnd type="none" w="med" len="med"/>
+                      <a:tailEnd type="none" w="med" len="med"/>
+                    </a:lnB>
+                  </a:tcPr>
+                </a:tc>
+              </a:tr>
+              <a:tr h="224028">
+                <a:tc>
+                  <a:txBody>
+                    <a:bodyPr/>
+                    <a:lstStyle/>
+                    <a:p>
+                      <a:pPr algn="l" indent="0" marL="0">
+                        <a:buNone/>
+                      </a:pPr>
+                      <a:r>
+                        <a:rPr lang="en-US" sz="900" i="1" dirty="0">
+                          <a:solidFill>
+                            <a:srgbClr val="1F2933"/>
+                          </a:solidFill>
+                          <a:latin typeface="Calibri" pitchFamily="34" charset="0"/>
+                          <a:ea typeface="Calibri" pitchFamily="34" charset="-122"/>
+                          <a:cs typeface="Calibri" pitchFamily="34" charset="-120"/>
+                        </a:rPr>
+                        <a:t>   dont FIRST</a:t>
+                      </a:r>
+                      <a:endParaRPr lang="en-US" sz="900" dirty="0">
+                        <a:latin typeface="Calibri" charset="0"/>
+                        <a:ea typeface="Calibri" charset="0"/>
+                        <a:cs typeface="Calibri" charset="0"/>
+                      </a:endParaRPr>
+                    </a:p>
+                  </a:txBody>
+                  <a:tcPr marL="64008" marR="64008" marT="0" marB="0" anchor="ctr">
+                    <a:lnL w="6350" cap="flat" cmpd="sng" algn="ctr">
+                      <a:solidFill>
+                        <a:srgbClr val="D5DBE3"/>
+                      </a:solidFill>
+                      <a:prstDash val="solid"/>
+                      <a:round/>
+                      <a:headEnd type="none" w="med" len="med"/>
+                      <a:tailEnd type="none" w="med" len="med"/>
+                    </a:lnL>
+                    <a:lnR w="6350" cap="flat" cmpd="sng" algn="ctr">
+                      <a:solidFill>
+                        <a:srgbClr val="D5DBE3"/>
+                      </a:solidFill>
+                      <a:prstDash val="solid"/>
+                      <a:round/>
+                      <a:headEnd type="none" w="med" len="med"/>
+                      <a:tailEnd type="none" w="med" len="med"/>
+                    </a:lnR>
+                    <a:lnT w="6350" cap="flat" cmpd="sng" algn="ctr">
+                      <a:solidFill>
+                        <a:srgbClr val="D5DBE3"/>
+                      </a:solidFill>
+                      <a:prstDash val="solid"/>
+                      <a:round/>
+                      <a:headEnd type="none" w="med" len="med"/>
+                      <a:tailEnd type="none" w="med" len="med"/>
+                    </a:lnT>
+                    <a:lnB w="6350" cap="flat" cmpd="sng" algn="ctr">
+                      <a:solidFill>
+                        <a:srgbClr val="D5DBE3"/>
+                      </a:solidFill>
+                      <a:prstDash val="solid"/>
+                      <a:round/>
+                      <a:headEnd type="none" w="med" len="med"/>
+                      <a:tailEnd type="none" w="med" len="med"/>
+                    </a:lnB>
+                  </a:tcPr>
+                </a:tc>
+                <a:tc>
+                  <a:txBody>
+                    <a:bodyPr/>
+                    <a:lstStyle/>
+                    <a:p>
+                      <a:pPr algn="r" indent="0" marL="0">
+                        <a:buNone/>
+                      </a:pPr>
+                      <a:r>
+                        <a:rPr lang="en-US" sz="900" dirty="0">
+                          <a:solidFill>
+                            <a:srgbClr val="B3261E"/>
+                          </a:solidFill>
+                          <a:latin typeface="Calibri" pitchFamily="34" charset="0"/>
+                          <a:ea typeface="Calibri" pitchFamily="34" charset="-122"/>
+                          <a:cs typeface="Calibri" pitchFamily="34" charset="-120"/>
+                        </a:rPr>
+                        <a:t>-171,8</a:t>
+                      </a:r>
+                      <a:endParaRPr lang="en-US" sz="900" dirty="0">
+                        <a:latin typeface="Calibri" charset="0"/>
+                        <a:ea typeface="Calibri" charset="0"/>
+                        <a:cs typeface="Calibri" charset="0"/>
+                      </a:endParaRPr>
+                    </a:p>
+                  </a:txBody>
+                  <a:tcPr marL="64008" marR="64008" marT="0" marB="0" anchor="ctr">
+                    <a:lnL w="6350" cap="flat" cmpd="sng" algn="ctr">
+                      <a:solidFill>
+                        <a:srgbClr val="D5DBE3"/>
+                      </a:solidFill>
+                      <a:prstDash val="solid"/>
+                      <a:round/>
+                      <a:headEnd type="none" w="med" len="med"/>
+                      <a:tailEnd type="none" w="med" len="med"/>
+                    </a:lnL>
+                    <a:lnR w="6350" cap="flat" cmpd="sng" algn="ctr">
+                      <a:solidFill>
+                        <a:srgbClr val="D5DBE3"/>
+                      </a:solidFill>
+                      <a:prstDash val="solid"/>
+                      <a:round/>
+                      <a:headEnd type="none" w="med" len="med"/>
+                      <a:tailEnd type="none" w="med" len="med"/>
+                    </a:lnR>
+                    <a:lnT w="6350" cap="flat" cmpd="sng" algn="ctr">
+                      <a:solidFill>
+                        <a:srgbClr val="D5DBE3"/>
+                      </a:solidFill>
+                      <a:prstDash val="solid"/>
+                      <a:round/>
+                      <a:headEnd type="none" w="med" len="med"/>
+                      <a:tailEnd type="none" w="med" len="med"/>
+                    </a:lnT>
+                    <a:lnB w="6350" cap="flat" cmpd="sng" algn="ctr">
+                      <a:solidFill>
+                        <a:srgbClr val="D5DBE3"/>
+                      </a:solidFill>
+                      <a:prstDash val="solid"/>
+                      <a:round/>
+                      <a:headEnd type="none" w="med" len="med"/>
+                      <a:tailEnd type="none" w="med" len="med"/>
+                    </a:lnB>
+                  </a:tcPr>
+                </a:tc>
+                <a:tc>
+                  <a:txBody>
+                    <a:bodyPr/>
+                    <a:lstStyle/>
+                    <a:p>
+                      <a:pPr algn="r" indent="0" marL="0">
+                        <a:buNone/>
+                      </a:pPr>
+                      <a:r>
+                        <a:rPr lang="en-US" sz="900" dirty="0">
+                          <a:solidFill>
+                            <a:srgbClr val="B3261E"/>
+                          </a:solidFill>
+                          <a:latin typeface="Calibri" pitchFamily="34" charset="0"/>
+                          <a:ea typeface="Calibri" pitchFamily="34" charset="-122"/>
+                          <a:cs typeface="Calibri" pitchFamily="34" charset="-120"/>
+                        </a:rPr>
+                        <a:t>-71,1</a:t>
+                      </a:r>
+                      <a:endParaRPr lang="en-US" sz="900" dirty="0">
+                        <a:latin typeface="Calibri" charset="0"/>
+                        <a:ea typeface="Calibri" charset="0"/>
+                        <a:cs typeface="Calibri" charset="0"/>
+                      </a:endParaRPr>
+                    </a:p>
+                  </a:txBody>
+                  <a:tcPr marL="64008" marR="64008" marT="0" marB="0" anchor="ctr">
+                    <a:lnL w="6350" cap="flat" cmpd="sng" algn="ctr">
+                      <a:solidFill>
+                        <a:srgbClr val="D5DBE3"/>
+                      </a:solidFill>
+                      <a:prstDash val="solid"/>
+                      <a:round/>
+                      <a:headEnd type="none" w="med" len="med"/>
+                      <a:tailEnd type="none" w="med" len="med"/>
+                    </a:lnL>
+                    <a:lnR w="6350" cap="flat" cmpd="sng" algn="ctr">
+                      <a:solidFill>
+                        <a:srgbClr val="D5DBE3"/>
+                      </a:solidFill>
+                      <a:prstDash val="solid"/>
+                      <a:round/>
+                      <a:headEnd type="none" w="med" len="med"/>
+                      <a:tailEnd type="none" w="med" len="med"/>
+                    </a:lnR>
+                    <a:lnT w="6350" cap="flat" cmpd="sng" algn="ctr">
+                      <a:solidFill>
+                        <a:srgbClr val="D5DBE3"/>
+                      </a:solidFill>
+                      <a:prstDash val="solid"/>
+                      <a:round/>
+                      <a:headEnd type="none" w="med" len="med"/>
+                      <a:tailEnd type="none" w="med" len="med"/>
+                    </a:lnT>
+                    <a:lnB w="6350" cap="flat" cmpd="sng" algn="ctr">
+                      <a:solidFill>
+                        <a:srgbClr val="D5DBE3"/>
+                      </a:solidFill>
+                      <a:prstDash val="solid"/>
+                      <a:round/>
+                      <a:headEnd type="none" w="med" len="med"/>
+                      <a:tailEnd type="none" w="med" len="med"/>
+                    </a:lnB>
+                  </a:tcPr>
+                </a:tc>
+                <a:tc>
+                  <a:txBody>
+                    <a:bodyPr/>
+                    <a:lstStyle/>
+                    <a:p>
+                      <a:pPr algn="r" indent="0" marL="0">
+                        <a:buNone/>
+                      </a:pPr>
+                      <a:r>
+                        <a:rPr lang="en-US" sz="900" dirty="0">
+                          <a:solidFill>
+                            <a:srgbClr val="B3261E"/>
+                          </a:solidFill>
+                          <a:latin typeface="Calibri" pitchFamily="34" charset="0"/>
+                          <a:ea typeface="Calibri" pitchFamily="34" charset="-122"/>
+                          <a:cs typeface="Calibri" pitchFamily="34" charset="-120"/>
+                        </a:rPr>
+                        <a:t>-175,3</a:t>
+                      </a:r>
+                      <a:endParaRPr lang="en-US" sz="900" dirty="0">
+                        <a:latin typeface="Calibri" charset="0"/>
+                        <a:ea typeface="Calibri" charset="0"/>
+                        <a:cs typeface="Calibri" charset="0"/>
+                      </a:endParaRPr>
+                    </a:p>
+                  </a:txBody>
+                  <a:tcPr marL="64008" marR="64008" marT="0" marB="0" anchor="ctr">
+                    <a:lnL w="6350" cap="flat" cmpd="sng" algn="ctr">
+                      <a:solidFill>
+                        <a:srgbClr val="D5DBE3"/>
+                      </a:solidFill>
+                      <a:prstDash val="solid"/>
+                      <a:round/>
+                      <a:headEnd type="none" w="med" len="med"/>
+                      <a:tailEnd type="none" w="med" len="med"/>
+                    </a:lnL>
+                    <a:lnR w="6350" cap="flat" cmpd="sng" algn="ctr">
+                      <a:solidFill>
+                        <a:srgbClr val="D5DBE3"/>
+                      </a:solidFill>
+                      <a:prstDash val="solid"/>
+                      <a:round/>
+                      <a:headEnd type="none" w="med" len="med"/>
+                      <a:tailEnd type="none" w="med" len="med"/>
+                    </a:lnR>
+                    <a:lnT w="6350" cap="flat" cmpd="sng" algn="ctr">
+                      <a:solidFill>
+                        <a:srgbClr val="D5DBE3"/>
+                      </a:solidFill>
+                      <a:prstDash val="solid"/>
+                      <a:round/>
+                      <a:headEnd type="none" w="med" len="med"/>
+                      <a:tailEnd type="none" w="med" len="med"/>
+                    </a:lnT>
+                    <a:lnB w="6350" cap="flat" cmpd="sng" algn="ctr">
+                      <a:solidFill>
+                        <a:srgbClr val="D5DBE3"/>
+                      </a:solidFill>
+                      <a:prstDash val="solid"/>
+                      <a:round/>
+                      <a:headEnd type="none" w="med" len="med"/>
+                      <a:tailEnd type="none" w="med" len="med"/>
+                    </a:lnB>
+                  </a:tcPr>
+                </a:tc>
+                <a:tc>
+                  <a:txBody>
+                    <a:bodyPr/>
+                    <a:lstStyle/>
+                    <a:p>
+                      <a:pPr algn="r" indent="0" marL="0">
+                        <a:buNone/>
+                      </a:pPr>
+                      <a:r>
+                        <a:rPr lang="en-US" sz="900" dirty="0">
+                          <a:solidFill>
+                            <a:srgbClr val="B3261E"/>
+                          </a:solidFill>
+                          <a:latin typeface="Calibri" pitchFamily="34" charset="0"/>
+                          <a:ea typeface="Calibri" pitchFamily="34" charset="-122"/>
+                          <a:cs typeface="Calibri" pitchFamily="34" charset="-120"/>
+                        </a:rPr>
+                        <a:t>-175,3</a:t>
+                      </a:r>
+                      <a:endParaRPr lang="en-US" sz="900" dirty="0">
+                        <a:latin typeface="Calibri" charset="0"/>
+                        <a:ea typeface="Calibri" charset="0"/>
+                        <a:cs typeface="Calibri" charset="0"/>
+                      </a:endParaRPr>
+                    </a:p>
+                  </a:txBody>
+                  <a:tcPr marL="64008" marR="64008" marT="0" marB="0" anchor="ctr">
+                    <a:lnL w="6350" cap="flat" cmpd="sng" algn="ctr">
+                      <a:solidFill>
+                        <a:srgbClr val="D5DBE3"/>
+                      </a:solidFill>
+                      <a:prstDash val="solid"/>
+                      <a:round/>
+                      <a:headEnd type="none" w="med" len="med"/>
+                      <a:tailEnd type="none" w="med" len="med"/>
+                    </a:lnL>
+                    <a:lnR w="6350" cap="flat" cmpd="sng" algn="ctr">
+                      <a:solidFill>
+                        <a:srgbClr val="D5DBE3"/>
+                      </a:solidFill>
+                      <a:prstDash val="solid"/>
+                      <a:round/>
+                      <a:headEnd type="none" w="med" len="med"/>
+                      <a:tailEnd type="none" w="med" len="med"/>
+                    </a:lnR>
+                    <a:lnT w="6350" cap="flat" cmpd="sng" algn="ctr">
+                      <a:solidFill>
+                        <a:srgbClr val="D5DBE3"/>
+                      </a:solidFill>
+                      <a:prstDash val="solid"/>
+                      <a:round/>
+                      <a:headEnd type="none" w="med" len="med"/>
+                      <a:tailEnd type="none" w="med" len="med"/>
+                    </a:lnT>
+                    <a:lnB w="6350" cap="flat" cmpd="sng" algn="ctr">
+                      <a:solidFill>
+                        <a:srgbClr val="D5DBE3"/>
+                      </a:solidFill>
+                      <a:prstDash val="solid"/>
+                      <a:round/>
+                      <a:headEnd type="none" w="med" len="med"/>
+                      <a:tailEnd type="none" w="med" len="med"/>
+                    </a:lnB>
+                  </a:tcPr>
+                </a:tc>
+                <a:tc>
+                  <a:txBody>
+                    <a:bodyPr/>
+                    <a:lstStyle/>
+                    <a:p>
+                      <a:pPr algn="r" indent="0" marL="0">
+                        <a:buNone/>
+                      </a:pPr>
+                      <a:r>
+                        <a:rPr lang="en-US" sz="900" dirty="0">
+                          <a:solidFill>
+                            <a:srgbClr val="B3261E"/>
+                          </a:solidFill>
+                          <a:latin typeface="Calibri" pitchFamily="34" charset="0"/>
+                          <a:ea typeface="Calibri" pitchFamily="34" charset="-122"/>
+                          <a:cs typeface="Calibri" pitchFamily="34" charset="-120"/>
+                        </a:rPr>
+                        <a:t>-175,3</a:t>
+                      </a:r>
+                      <a:endParaRPr lang="en-US" sz="900" dirty="0">
+                        <a:latin typeface="Calibri" charset="0"/>
+                        <a:ea typeface="Calibri" charset="0"/>
+                        <a:cs typeface="Calibri" charset="0"/>
+                      </a:endParaRPr>
+                    </a:p>
+                  </a:txBody>
+                  <a:tcPr marL="64008" marR="64008" marT="0" marB="0" anchor="ctr">
+                    <a:lnL w="6350" cap="flat" cmpd="sng" algn="ctr">
+                      <a:solidFill>
+                        <a:srgbClr val="D5DBE3"/>
+                      </a:solidFill>
+                      <a:prstDash val="solid"/>
+                      <a:round/>
+                      <a:headEnd type="none" w="med" len="med"/>
+                      <a:tailEnd type="none" w="med" len="med"/>
+                    </a:lnL>
+                    <a:lnR w="6350" cap="flat" cmpd="sng" algn="ctr">
+                      <a:solidFill>
+                        <a:srgbClr val="D5DBE3"/>
+                      </a:solidFill>
+                      <a:prstDash val="solid"/>
+                      <a:round/>
+                      <a:headEnd type="none" w="med" len="med"/>
+                      <a:tailEnd type="none" w="med" len="med"/>
+                    </a:lnR>
+                    <a:lnT w="6350" cap="flat" cmpd="sng" algn="ctr">
+                      <a:solidFill>
+                        <a:srgbClr val="D5DBE3"/>
+                      </a:solidFill>
+                      <a:prstDash val="solid"/>
+                      <a:round/>
+                      <a:headEnd type="none" w="med" len="med"/>
+                      <a:tailEnd type="none" w="med" len="med"/>
+                    </a:lnT>
+                    <a:lnB w="6350" cap="flat" cmpd="sng" algn="ctr">
+                      <a:solidFill>
+                        <a:srgbClr val="D5DBE3"/>
+                      </a:solidFill>
+                      <a:prstDash val="solid"/>
+                      <a:round/>
+                      <a:headEnd type="none" w="med" len="med"/>
+                      <a:tailEnd type="none" w="med" len="med"/>
+                    </a:lnB>
+                  </a:tcPr>
+                </a:tc>
+                <a:tc>
+                  <a:txBody>
+                    <a:bodyPr/>
+                    <a:lstStyle/>
+                    <a:p>
+                      <a:pPr algn="r" indent="0" marL="0">
+                        <a:buNone/>
+                      </a:pPr>
+                      <a:endParaRPr lang="en-US" sz="900" dirty="0">
+                        <a:latin typeface="Calibri" charset="0"/>
+                        <a:ea typeface="Calibri" charset="0"/>
+                        <a:cs typeface="Calibri" charset="0"/>
+                      </a:endParaRPr>
+                    </a:p>
+                  </a:txBody>
+                  <a:tcPr marL="64008" marR="64008" marT="0" marB="0" anchor="ctr">
+                    <a:lnL w="6350" cap="flat" cmpd="sng" algn="ctr">
+                      <a:solidFill>
+                        <a:srgbClr val="D5DBE3"/>
+                      </a:solidFill>
+                      <a:prstDash val="solid"/>
+                      <a:round/>
+                      <a:headEnd type="none" w="med" len="med"/>
+                      <a:tailEnd type="none" w="med" len="med"/>
+                    </a:lnL>
+                    <a:lnR w="6350" cap="flat" cmpd="sng" algn="ctr">
+                      <a:solidFill>
+                        <a:srgbClr val="D5DBE3"/>
+                      </a:solidFill>
+                      <a:prstDash val="solid"/>
+                      <a:round/>
+                      <a:headEnd type="none" w="med" len="med"/>
+                      <a:tailEnd type="none" w="med" len="med"/>
+                    </a:lnR>
+                    <a:lnT w="6350" cap="flat" cmpd="sng" algn="ctr">
+                      <a:solidFill>
+                        <a:srgbClr val="D5DBE3"/>
+                      </a:solidFill>
+                      <a:prstDash val="solid"/>
+                      <a:round/>
+                      <a:headEnd type="none" w="med" len="med"/>
+                      <a:tailEnd type="none" w="med" len="med"/>
+                    </a:lnT>
+                    <a:lnB w="6350" cap="flat" cmpd="sng" algn="ctr">
+                      <a:solidFill>
+                        <a:srgbClr val="D5DBE3"/>
+                      </a:solidFill>
+                      <a:prstDash val="solid"/>
+                      <a:round/>
+                      <a:headEnd type="none" w="med" len="med"/>
+                      <a:tailEnd type="none" w="med" len="med"/>
+                    </a:lnB>
+                  </a:tcPr>
+                </a:tc>
+                <a:tc>
+                  <a:txBody>
+                    <a:bodyPr/>
+                    <a:lstStyle/>
+                    <a:p>
+                      <a:pPr algn="r" indent="0" marL="0">
+                        <a:buNone/>
+                      </a:pPr>
+                      <a:endParaRPr lang="en-US" sz="900" dirty="0">
+                        <a:latin typeface="Calibri" charset="0"/>
+                        <a:ea typeface="Calibri" charset="0"/>
+                        <a:cs typeface="Calibri" charset="0"/>
+                      </a:endParaRPr>
+                    </a:p>
+                  </a:txBody>
+                  <a:tcPr marL="64008" marR="64008" marT="0" marB="0" anchor="ctr">
+                    <a:lnL w="6350" cap="flat" cmpd="sng" algn="ctr">
+                      <a:solidFill>
+                        <a:srgbClr val="D5DBE3"/>
+                      </a:solidFill>
+                      <a:prstDash val="solid"/>
+                      <a:round/>
+                      <a:headEnd type="none" w="med" len="med"/>
+                      <a:tailEnd type="none" w="med" len="med"/>
+                    </a:lnL>
+                    <a:lnR w="6350" cap="flat" cmpd="sng" algn="ctr">
+                      <a:solidFill>
+                        <a:srgbClr val="D5DBE3"/>
+                      </a:solidFill>
+                      <a:prstDash val="solid"/>
+                      <a:round/>
+                      <a:headEnd type="none" w="med" len="med"/>
+                      <a:tailEnd type="none" w="med" len="med"/>
+                    </a:lnR>
+                    <a:lnT w="6350" cap="flat" cmpd="sng" algn="ctr">
+                      <a:solidFill>
+                        <a:srgbClr val="D5DBE3"/>
+                      </a:solidFill>
+                      <a:prstDash val="solid"/>
+                      <a:round/>
+                      <a:headEnd type="none" w="med" len="med"/>
+                      <a:tailEnd type="none" w="med" len="med"/>
+                    </a:lnT>
+                    <a:lnB w="6350" cap="flat" cmpd="sng" algn="ctr">
+                      <a:solidFill>
+                        <a:srgbClr val="D5DBE3"/>
+                      </a:solidFill>
+                      <a:prstDash val="solid"/>
+                      <a:round/>
+                      <a:headEnd type="none" w="med" len="med"/>
+                      <a:tailEnd type="none" w="med" len="med"/>
+                    </a:lnB>
+                  </a:tcPr>
+                </a:tc>
+                <a:tc>
+                  <a:txBody>
+                    <a:bodyPr/>
+                    <a:lstStyle/>
+                    <a:p>
+                      <a:pPr algn="r" indent="0" marL="0">
+                        <a:buNone/>
+                      </a:pPr>
+                      <a:endParaRPr lang="en-US" sz="900" dirty="0">
+                        <a:latin typeface="Calibri" charset="0"/>
+                        <a:ea typeface="Calibri" charset="0"/>
+                        <a:cs typeface="Calibri" charset="0"/>
+                      </a:endParaRPr>
+                    </a:p>
+                  </a:txBody>
+                  <a:tcPr marL="64008" marR="64008" marT="0" marB="0" anchor="ctr">
+                    <a:lnL w="6350" cap="flat" cmpd="sng" algn="ctr">
+                      <a:solidFill>
+                        <a:srgbClr val="D5DBE3"/>
+                      </a:solidFill>
+                      <a:prstDash val="solid"/>
+                      <a:round/>
+                      <a:headEnd type="none" w="med" len="med"/>
+                      <a:tailEnd type="none" w="med" len="med"/>
+                    </a:lnL>
+                    <a:lnR w="6350" cap="flat" cmpd="sng" algn="ctr">
+                      <a:solidFill>
+                        <a:srgbClr val="D5DBE3"/>
+                      </a:solidFill>
+                      <a:prstDash val="solid"/>
+                      <a:round/>
+                      <a:headEnd type="none" w="med" len="med"/>
+                      <a:tailEnd type="none" w="med" len="med"/>
+                    </a:lnR>
+                    <a:lnT w="6350" cap="flat" cmpd="sng" algn="ctr">
+                      <a:solidFill>
+                        <a:srgbClr val="D5DBE3"/>
+                      </a:solidFill>
+                      <a:prstDash val="solid"/>
+                      <a:round/>
+                      <a:headEnd type="none" w="med" len="med"/>
+                      <a:tailEnd type="none" w="med" len="med"/>
+                    </a:lnT>
+                    <a:lnB w="6350" cap="flat" cmpd="sng" algn="ctr">
+                      <a:solidFill>
+                        <a:srgbClr val="D5DBE3"/>
+                      </a:solidFill>
+                      <a:prstDash val="solid"/>
+                      <a:round/>
+                      <a:headEnd type="none" w="med" len="med"/>
+                      <a:tailEnd type="none" w="med" len="med"/>
+                    </a:lnB>
+                  </a:tcPr>
+                </a:tc>
+              </a:tr>
+              <a:tr h="224028">
+                <a:tc>
+                  <a:txBody>
+                    <a:bodyPr/>
+                    <a:lstStyle/>
+                    <a:p>
+                      <a:pPr algn="l" indent="0" marL="0">
+                        <a:buNone/>
+                      </a:pPr>
+                      <a:r>
+                        <a:rPr lang="en-US" sz="900" b="1" dirty="0">
+                          <a:solidFill>
+                            <a:srgbClr val="1F2933"/>
+                          </a:solidFill>
+                          <a:latin typeface="Calibri" pitchFamily="34" charset="0"/>
+                          <a:ea typeface="Calibri" pitchFamily="34" charset="-122"/>
+                          <a:cs typeface="Calibri" pitchFamily="34" charset="-120"/>
+                        </a:rPr>
+                        <a:t>Comptes dédiés</a:t>
+                      </a:r>
+                      <a:endParaRPr lang="en-US" sz="900" dirty="0">
+                        <a:latin typeface="Calibri" charset="0"/>
+                        <a:ea typeface="Calibri" charset="0"/>
+                        <a:cs typeface="Calibri" charset="0"/>
+                      </a:endParaRPr>
+                    </a:p>
+                  </a:txBody>
+                  <a:tcPr marL="64008" marR="64008" marT="0" marB="0" anchor="ctr">
+                    <a:lnL w="6350" cap="flat" cmpd="sng" algn="ctr">
+                      <a:solidFill>
+                        <a:srgbClr val="D5DBE3"/>
+                      </a:solidFill>
+                      <a:prstDash val="solid"/>
+                      <a:round/>
+                      <a:headEnd type="none" w="med" len="med"/>
+                      <a:tailEnd type="none" w="med" len="med"/>
+                    </a:lnL>
+                    <a:lnR w="6350" cap="flat" cmpd="sng" algn="ctr">
+                      <a:solidFill>
+                        <a:srgbClr val="D5DBE3"/>
+                      </a:solidFill>
+                      <a:prstDash val="solid"/>
+                      <a:round/>
+                      <a:headEnd type="none" w="med" len="med"/>
+                      <a:tailEnd type="none" w="med" len="med"/>
+                    </a:lnR>
+                    <a:lnT w="6350" cap="flat" cmpd="sng" algn="ctr">
+                      <a:solidFill>
+                        <a:srgbClr val="D5DBE3"/>
+                      </a:solidFill>
+                      <a:prstDash val="solid"/>
+                      <a:round/>
+                      <a:headEnd type="none" w="med" len="med"/>
+                      <a:tailEnd type="none" w="med" len="med"/>
+                    </a:lnT>
+                    <a:lnB w="6350" cap="flat" cmpd="sng" algn="ctr">
+                      <a:solidFill>
+                        <a:srgbClr val="D5DBE3"/>
+                      </a:solidFill>
+                      <a:prstDash val="solid"/>
+                      <a:round/>
+                      <a:headEnd type="none" w="med" len="med"/>
+                      <a:tailEnd type="none" w="med" len="med"/>
+                    </a:lnB>
+                    <a:solidFill>
+                      <a:srgbClr val="EEF2F6"/>
+                    </a:solidFill>
+                  </a:tcPr>
+                </a:tc>
+                <a:tc>
+                  <a:txBody>
+                    <a:bodyPr/>
+                    <a:lstStyle/>
+                    <a:p>
+                      <a:pPr algn="r" indent="0" marL="0">
+                        <a:buNone/>
+                      </a:pPr>
+                      <a:r>
+                        <a:rPr lang="en-US" sz="900" b="1" dirty="0">
+                          <a:solidFill>
+                            <a:srgbClr val="5E9B7E"/>
+                          </a:solidFill>
+                          <a:latin typeface="Calibri" pitchFamily="34" charset="0"/>
+                          <a:ea typeface="Calibri" pitchFamily="34" charset="-122"/>
+                          <a:cs typeface="Calibri" pitchFamily="34" charset="-120"/>
+                        </a:rPr>
+                        <a:t>+1 782,8</a:t>
+                      </a:r>
+                      <a:endParaRPr lang="en-US" sz="900" dirty="0">
+                        <a:latin typeface="Calibri" charset="0"/>
+                        <a:ea typeface="Calibri" charset="0"/>
+                        <a:cs typeface="Calibri" charset="0"/>
+                      </a:endParaRPr>
+                    </a:p>
+                  </a:txBody>
+                  <a:tcPr marL="64008" marR="64008" marT="0" marB="0" anchor="ctr">
+                    <a:lnL w="6350" cap="flat" cmpd="sng" algn="ctr">
+                      <a:solidFill>
+                        <a:srgbClr val="D5DBE3"/>
+                      </a:solidFill>
+                      <a:prstDash val="solid"/>
+                      <a:round/>
+                      <a:headEnd type="none" w="med" len="med"/>
+                      <a:tailEnd type="none" w="med" len="med"/>
+                    </a:lnL>
+                    <a:lnR w="6350" cap="flat" cmpd="sng" algn="ctr">
+                      <a:solidFill>
+                        <a:srgbClr val="D5DBE3"/>
+                      </a:solidFill>
+                      <a:prstDash val="solid"/>
+                      <a:round/>
+                      <a:headEnd type="none" w="med" len="med"/>
+                      <a:tailEnd type="none" w="med" len="med"/>
+                    </a:lnR>
+                    <a:lnT w="6350" cap="flat" cmpd="sng" algn="ctr">
+                      <a:solidFill>
+                        <a:srgbClr val="D5DBE3"/>
+                      </a:solidFill>
+                      <a:prstDash val="solid"/>
+                      <a:round/>
+                      <a:headEnd type="none" w="med" len="med"/>
+                      <a:tailEnd type="none" w="med" len="med"/>
+                    </a:lnT>
+                    <a:lnB w="6350" cap="flat" cmpd="sng" algn="ctr">
+                      <a:solidFill>
+                        <a:srgbClr val="D5DBE3"/>
+                      </a:solidFill>
+                      <a:prstDash val="solid"/>
+                      <a:round/>
+                      <a:headEnd type="none" w="med" len="med"/>
+                      <a:tailEnd type="none" w="med" len="med"/>
+                    </a:lnB>
+                    <a:solidFill>
+                      <a:srgbClr val="EEF2F6"/>
+                    </a:solidFill>
+                  </a:tcPr>
+                </a:tc>
+                <a:tc>
+                  <a:txBody>
+                    <a:bodyPr/>
+                    <a:lstStyle/>
+                    <a:p>
+                      <a:pPr algn="r" indent="0" marL="0">
+                        <a:buNone/>
+                      </a:pPr>
+                      <a:r>
+                        <a:rPr lang="en-US" sz="900" b="1" dirty="0">
+                          <a:solidFill>
+                            <a:srgbClr val="5E9B7E"/>
+                          </a:solidFill>
+                          <a:latin typeface="Calibri" pitchFamily="34" charset="0"/>
+                          <a:ea typeface="Calibri" pitchFamily="34" charset="-122"/>
+                          <a:cs typeface="Calibri" pitchFamily="34" charset="-120"/>
+                        </a:rPr>
+                        <a:t>+68,1</a:t>
+                      </a:r>
+                      <a:endParaRPr lang="en-US" sz="900" dirty="0">
+                        <a:latin typeface="Calibri" charset="0"/>
+                        <a:ea typeface="Calibri" charset="0"/>
+                        <a:cs typeface="Calibri" charset="0"/>
+                      </a:endParaRPr>
+                    </a:p>
+                  </a:txBody>
+                  <a:tcPr marL="64008" marR="64008" marT="0" marB="0" anchor="ctr">
+                    <a:lnL w="6350" cap="flat" cmpd="sng" algn="ctr">
+                      <a:solidFill>
+                        <a:srgbClr val="D5DBE3"/>
+                      </a:solidFill>
+                      <a:prstDash val="solid"/>
+                      <a:round/>
+                      <a:headEnd type="none" w="med" len="med"/>
+                      <a:tailEnd type="none" w="med" len="med"/>
+                    </a:lnL>
+                    <a:lnR w="6350" cap="flat" cmpd="sng" algn="ctr">
+                      <a:solidFill>
+                        <a:srgbClr val="D5DBE3"/>
+                      </a:solidFill>
+                      <a:prstDash val="solid"/>
+                      <a:round/>
+                      <a:headEnd type="none" w="med" len="med"/>
+                      <a:tailEnd type="none" w="med" len="med"/>
+                    </a:lnR>
+                    <a:lnT w="6350" cap="flat" cmpd="sng" algn="ctr">
+                      <a:solidFill>
+                        <a:srgbClr val="D5DBE3"/>
+                      </a:solidFill>
+                      <a:prstDash val="solid"/>
+                      <a:round/>
+                      <a:headEnd type="none" w="med" len="med"/>
+                      <a:tailEnd type="none" w="med" len="med"/>
+                    </a:lnT>
+                    <a:lnB w="6350" cap="flat" cmpd="sng" algn="ctr">
+                      <a:solidFill>
+                        <a:srgbClr val="D5DBE3"/>
+                      </a:solidFill>
+                      <a:prstDash val="solid"/>
+                      <a:round/>
+                      <a:headEnd type="none" w="med" len="med"/>
+                      <a:tailEnd type="none" w="med" len="med"/>
+                    </a:lnB>
+                    <a:solidFill>
+                      <a:srgbClr val="EEF2F6"/>
+                    </a:solidFill>
+                  </a:tcPr>
+                </a:tc>
+                <a:tc>
+                  <a:txBody>
+                    <a:bodyPr/>
+                    <a:lstStyle/>
+                    <a:p>
+                      <a:pPr algn="r" indent="0" marL="0">
+                        <a:buNone/>
+                      </a:pPr>
+                      <a:r>
+                        <a:rPr lang="en-US" sz="900" b="1" dirty="0">
+                          <a:solidFill>
+                            <a:srgbClr val="5E9B7E"/>
+                          </a:solidFill>
+                          <a:latin typeface="Calibri" pitchFamily="34" charset="0"/>
+                          <a:ea typeface="Calibri" pitchFamily="34" charset="-122"/>
+                          <a:cs typeface="Calibri" pitchFamily="34" charset="-120"/>
+                        </a:rPr>
+                        <a:t>+68,1</a:t>
+                      </a:r>
+                      <a:endParaRPr lang="en-US" sz="900" dirty="0">
+                        <a:latin typeface="Calibri" charset="0"/>
+                        <a:ea typeface="Calibri" charset="0"/>
+                        <a:cs typeface="Calibri" charset="0"/>
+                      </a:endParaRPr>
+                    </a:p>
+                  </a:txBody>
+                  <a:tcPr marL="64008" marR="64008" marT="0" marB="0" anchor="ctr">
+                    <a:lnL w="6350" cap="flat" cmpd="sng" algn="ctr">
+                      <a:solidFill>
+                        <a:srgbClr val="D5DBE3"/>
+                      </a:solidFill>
+                      <a:prstDash val="solid"/>
+                      <a:round/>
+                      <a:headEnd type="none" w="med" len="med"/>
+                      <a:tailEnd type="none" w="med" len="med"/>
+                    </a:lnL>
+                    <a:lnR w="6350" cap="flat" cmpd="sng" algn="ctr">
+                      <a:solidFill>
+                        <a:srgbClr val="D5DBE3"/>
+                      </a:solidFill>
+                      <a:prstDash val="solid"/>
+                      <a:round/>
+                      <a:headEnd type="none" w="med" len="med"/>
+                      <a:tailEnd type="none" w="med" len="med"/>
+                    </a:lnR>
+                    <a:lnT w="6350" cap="flat" cmpd="sng" algn="ctr">
+                      <a:solidFill>
+                        <a:srgbClr val="D5DBE3"/>
+                      </a:solidFill>
+                      <a:prstDash val="solid"/>
+                      <a:round/>
+                      <a:headEnd type="none" w="med" len="med"/>
+                      <a:tailEnd type="none" w="med" len="med"/>
+                    </a:lnT>
+                    <a:lnB w="6350" cap="flat" cmpd="sng" algn="ctr">
+                      <a:solidFill>
+                        <a:srgbClr val="D5DBE3"/>
+                      </a:solidFill>
+                      <a:prstDash val="solid"/>
+                      <a:round/>
+                      <a:headEnd type="none" w="med" len="med"/>
+                      <a:tailEnd type="none" w="med" len="med"/>
+                    </a:lnB>
+                    <a:solidFill>
+                      <a:srgbClr val="EEF2F6"/>
+                    </a:solidFill>
+                  </a:tcPr>
+                </a:tc>
+                <a:tc>
+                  <a:txBody>
+                    <a:bodyPr/>
+                    <a:lstStyle/>
+                    <a:p>
+                      <a:pPr algn="r" indent="0" marL="0">
+                        <a:buNone/>
+                      </a:pPr>
+                      <a:r>
+                        <a:rPr lang="en-US" sz="900" b="1" dirty="0">
+                          <a:solidFill>
+                            <a:srgbClr val="5E9B7E"/>
+                          </a:solidFill>
+                          <a:latin typeface="Calibri" pitchFamily="34" charset="0"/>
+                          <a:ea typeface="Calibri" pitchFamily="34" charset="-122"/>
+                          <a:cs typeface="Calibri" pitchFamily="34" charset="-120"/>
+                        </a:rPr>
+                        <a:t>+41,0</a:t>
+                      </a:r>
+                      <a:endParaRPr lang="en-US" sz="900" dirty="0">
+                        <a:latin typeface="Calibri" charset="0"/>
+                        <a:ea typeface="Calibri" charset="0"/>
+                        <a:cs typeface="Calibri" charset="0"/>
+                      </a:endParaRPr>
+                    </a:p>
+                  </a:txBody>
+                  <a:tcPr marL="64008" marR="64008" marT="0" marB="0" anchor="ctr">
+                    <a:lnL w="6350" cap="flat" cmpd="sng" algn="ctr">
+                      <a:solidFill>
+                        <a:srgbClr val="D5DBE3"/>
+                      </a:solidFill>
+                      <a:prstDash val="solid"/>
+                      <a:round/>
+                      <a:headEnd type="none" w="med" len="med"/>
+                      <a:tailEnd type="none" w="med" len="med"/>
+                    </a:lnL>
+                    <a:lnR w="6350" cap="flat" cmpd="sng" algn="ctr">
+                      <a:solidFill>
+                        <a:srgbClr val="D5DBE3"/>
+                      </a:solidFill>
+                      <a:prstDash val="solid"/>
+                      <a:round/>
+                      <a:headEnd type="none" w="med" len="med"/>
+                      <a:tailEnd type="none" w="med" len="med"/>
+                    </a:lnR>
+                    <a:lnT w="6350" cap="flat" cmpd="sng" algn="ctr">
+                      <a:solidFill>
+                        <a:srgbClr val="D5DBE3"/>
+                      </a:solidFill>
+                      <a:prstDash val="solid"/>
+                      <a:round/>
+                      <a:headEnd type="none" w="med" len="med"/>
+                      <a:tailEnd type="none" w="med" len="med"/>
+                    </a:lnT>
+                    <a:lnB w="6350" cap="flat" cmpd="sng" algn="ctr">
+                      <a:solidFill>
+                        <a:srgbClr val="D5DBE3"/>
+                      </a:solidFill>
+                      <a:prstDash val="solid"/>
+                      <a:round/>
+                      <a:headEnd type="none" w="med" len="med"/>
+                      <a:tailEnd type="none" w="med" len="med"/>
+                    </a:lnB>
+                    <a:solidFill>
+                      <a:srgbClr val="EEF2F6"/>
+                    </a:solidFill>
+                  </a:tcPr>
+                </a:tc>
+                <a:tc>
+                  <a:txBody>
+                    <a:bodyPr/>
+                    <a:lstStyle/>
+                    <a:p>
+                      <a:pPr algn="r" indent="0" marL="0">
+                        <a:buNone/>
+                      </a:pPr>
+                      <a:r>
+                        <a:rPr lang="en-US" sz="900" b="1" dirty="0">
+                          <a:solidFill>
+                            <a:srgbClr val="5E9B7E"/>
+                          </a:solidFill>
+                          <a:latin typeface="Calibri" pitchFamily="34" charset="0"/>
+                          <a:ea typeface="Calibri" pitchFamily="34" charset="-122"/>
+                          <a:cs typeface="Calibri" pitchFamily="34" charset="-120"/>
+                        </a:rPr>
+                        <a:t>+41,0</a:t>
+                      </a:r>
+                      <a:endParaRPr lang="en-US" sz="900" dirty="0">
+                        <a:latin typeface="Calibri" charset="0"/>
+                        <a:ea typeface="Calibri" charset="0"/>
+                        <a:cs typeface="Calibri" charset="0"/>
+                      </a:endParaRPr>
+                    </a:p>
+                  </a:txBody>
+                  <a:tcPr marL="64008" marR="64008" marT="0" marB="0" anchor="ctr">
+                    <a:lnL w="6350" cap="flat" cmpd="sng" algn="ctr">
+                      <a:solidFill>
+                        <a:srgbClr val="D5DBE3"/>
+                      </a:solidFill>
+                      <a:prstDash val="solid"/>
+                      <a:round/>
+                      <a:headEnd type="none" w="med" len="med"/>
+                      <a:tailEnd type="none" w="med" len="med"/>
+                    </a:lnL>
+                    <a:lnR w="6350" cap="flat" cmpd="sng" algn="ctr">
+                      <a:solidFill>
+                        <a:srgbClr val="D5DBE3"/>
+                      </a:solidFill>
+                      <a:prstDash val="solid"/>
+                      <a:round/>
+                      <a:headEnd type="none" w="med" len="med"/>
+                      <a:tailEnd type="none" w="med" len="med"/>
+                    </a:lnR>
+                    <a:lnT w="6350" cap="flat" cmpd="sng" algn="ctr">
+                      <a:solidFill>
+                        <a:srgbClr val="D5DBE3"/>
+                      </a:solidFill>
+                      <a:prstDash val="solid"/>
+                      <a:round/>
+                      <a:headEnd type="none" w="med" len="med"/>
+                      <a:tailEnd type="none" w="med" len="med"/>
+                    </a:lnT>
+                    <a:lnB w="6350" cap="flat" cmpd="sng" algn="ctr">
+                      <a:solidFill>
+                        <a:srgbClr val="D5DBE3"/>
+                      </a:solidFill>
+                      <a:prstDash val="solid"/>
+                      <a:round/>
+                      <a:headEnd type="none" w="med" len="med"/>
+                      <a:tailEnd type="none" w="med" len="med"/>
+                    </a:lnB>
+                    <a:solidFill>
+                      <a:srgbClr val="EEF2F6"/>
+                    </a:solidFill>
+                  </a:tcPr>
+                </a:tc>
+                <a:tc>
+                  <a:txBody>
+                    <a:bodyPr/>
+                    <a:lstStyle/>
+                    <a:p>
+                      <a:pPr algn="r" indent="0" marL="0">
+                        <a:buNone/>
+                      </a:pPr>
+                      <a:endParaRPr lang="en-US" sz="900" dirty="0">
+                        <a:latin typeface="Calibri" charset="0"/>
+                        <a:ea typeface="Calibri" charset="0"/>
+                        <a:cs typeface="Calibri" charset="0"/>
+                      </a:endParaRPr>
+                    </a:p>
+                  </a:txBody>
+                  <a:tcPr marL="64008" marR="64008" marT="0" marB="0" anchor="ctr">
+                    <a:lnL w="6350" cap="flat" cmpd="sng" algn="ctr">
+                      <a:solidFill>
+                        <a:srgbClr val="D5DBE3"/>
+                      </a:solidFill>
+                      <a:prstDash val="solid"/>
+                      <a:round/>
+                      <a:headEnd type="none" w="med" len="med"/>
+                      <a:tailEnd type="none" w="med" len="med"/>
+                    </a:lnL>
+                    <a:lnR w="6350" cap="flat" cmpd="sng" algn="ctr">
+                      <a:solidFill>
+                        <a:srgbClr val="D5DBE3"/>
+                      </a:solidFill>
+                      <a:prstDash val="solid"/>
+                      <a:round/>
+                      <a:headEnd type="none" w="med" len="med"/>
+                      <a:tailEnd type="none" w="med" len="med"/>
+                    </a:lnR>
+                    <a:lnT w="6350" cap="flat" cmpd="sng" algn="ctr">
+                      <a:solidFill>
+                        <a:srgbClr val="D5DBE3"/>
+                      </a:solidFill>
+                      <a:prstDash val="solid"/>
+                      <a:round/>
+                      <a:headEnd type="none" w="med" len="med"/>
+                      <a:tailEnd type="none" w="med" len="med"/>
+                    </a:lnT>
+                    <a:lnB w="6350" cap="flat" cmpd="sng" algn="ctr">
+                      <a:solidFill>
+                        <a:srgbClr val="D5DBE3"/>
+                      </a:solidFill>
+                      <a:prstDash val="solid"/>
+                      <a:round/>
+                      <a:headEnd type="none" w="med" len="med"/>
+                      <a:tailEnd type="none" w="med" len="med"/>
+                    </a:lnB>
+                    <a:solidFill>
+                      <a:srgbClr val="EEF2F6"/>
+                    </a:solidFill>
+                  </a:tcPr>
+                </a:tc>
+                <a:tc>
+                  <a:txBody>
+                    <a:bodyPr/>
+                    <a:lstStyle/>
+                    <a:p>
+                      <a:pPr algn="r" indent="0" marL="0">
+                        <a:buNone/>
+                      </a:pPr>
+                      <a:endParaRPr lang="en-US" sz="900" dirty="0">
+                        <a:latin typeface="Calibri" charset="0"/>
+                        <a:ea typeface="Calibri" charset="0"/>
+                        <a:cs typeface="Calibri" charset="0"/>
+                      </a:endParaRPr>
+                    </a:p>
+                  </a:txBody>
+                  <a:tcPr marL="64008" marR="64008" marT="0" marB="0" anchor="ctr">
+                    <a:lnL w="6350" cap="flat" cmpd="sng" algn="ctr">
+                      <a:solidFill>
+                        <a:srgbClr val="D5DBE3"/>
+                      </a:solidFill>
+                      <a:prstDash val="solid"/>
+                      <a:round/>
+                      <a:headEnd type="none" w="med" len="med"/>
+                      <a:tailEnd type="none" w="med" len="med"/>
+                    </a:lnL>
+                    <a:lnR w="6350" cap="flat" cmpd="sng" algn="ctr">
+                      <a:solidFill>
+                        <a:srgbClr val="D5DBE3"/>
+                      </a:solidFill>
+                      <a:prstDash val="solid"/>
+                      <a:round/>
+                      <a:headEnd type="none" w="med" len="med"/>
+                      <a:tailEnd type="none" w="med" len="med"/>
+                    </a:lnR>
+                    <a:lnT w="6350" cap="flat" cmpd="sng" algn="ctr">
+                      <a:solidFill>
+                        <a:srgbClr val="D5DBE3"/>
+                      </a:solidFill>
+                      <a:prstDash val="solid"/>
+                      <a:round/>
+                      <a:headEnd type="none" w="med" len="med"/>
+                      <a:tailEnd type="none" w="med" len="med"/>
+                    </a:lnT>
+                    <a:lnB w="6350" cap="flat" cmpd="sng" algn="ctr">
+                      <a:solidFill>
+                        <a:srgbClr val="D5DBE3"/>
+                      </a:solidFill>
+                      <a:prstDash val="solid"/>
+                      <a:round/>
+                      <a:headEnd type="none" w="med" len="med"/>
+                      <a:tailEnd type="none" w="med" len="med"/>
+                    </a:lnB>
+                    <a:solidFill>
+                      <a:srgbClr val="EEF2F6"/>
+                    </a:solidFill>
+                  </a:tcPr>
+                </a:tc>
+                <a:tc>
+                  <a:txBody>
+                    <a:bodyPr/>
+                    <a:lstStyle/>
+                    <a:p>
+                      <a:pPr algn="r" indent="0" marL="0">
+                        <a:buNone/>
+                      </a:pPr>
+                      <a:endParaRPr lang="en-US" sz="900" dirty="0">
+                        <a:latin typeface="Calibri" charset="0"/>
+                        <a:ea typeface="Calibri" charset="0"/>
+                        <a:cs typeface="Calibri" charset="0"/>
+                      </a:endParaRPr>
+                    </a:p>
+                  </a:txBody>
+                  <a:tcPr marL="64008" marR="64008" marT="0" marB="0" anchor="ctr">
+                    <a:lnL w="6350" cap="flat" cmpd="sng" algn="ctr">
+                      <a:solidFill>
+                        <a:srgbClr val="D5DBE3"/>
+                      </a:solidFill>
+                      <a:prstDash val="solid"/>
+                      <a:round/>
+                      <a:headEnd type="none" w="med" len="med"/>
+                      <a:tailEnd type="none" w="med" len="med"/>
+                    </a:lnL>
+                    <a:lnR w="6350" cap="flat" cmpd="sng" algn="ctr">
+                      <a:solidFill>
+                        <a:srgbClr val="D5DBE3"/>
+                      </a:solidFill>
+                      <a:prstDash val="solid"/>
+                      <a:round/>
+                      <a:headEnd type="none" w="med" len="med"/>
+                      <a:tailEnd type="none" w="med" len="med"/>
+                    </a:lnR>
+                    <a:lnT w="6350" cap="flat" cmpd="sng" algn="ctr">
+                      <a:solidFill>
+                        <a:srgbClr val="D5DBE3"/>
+                      </a:solidFill>
+                      <a:prstDash val="solid"/>
+                      <a:round/>
+                      <a:headEnd type="none" w="med" len="med"/>
+                      <a:tailEnd type="none" w="med" len="med"/>
+                    </a:lnT>
+                    <a:lnB w="6350" cap="flat" cmpd="sng" algn="ctr">
+                      <a:solidFill>
+                        <a:srgbClr val="D5DBE3"/>
+                      </a:solidFill>
+                      <a:prstDash val="solid"/>
+                      <a:round/>
+                      <a:headEnd type="none" w="med" len="med"/>
+                      <a:tailEnd type="none" w="med" len="med"/>
+                    </a:lnB>
+                    <a:solidFill>
+                      <a:srgbClr val="EEF2F6"/>
+                    </a:solidFill>
+                  </a:tcPr>
+                </a:tc>
+              </a:tr>
+              <a:tr h="224028">
+                <a:tc>
+                  <a:txBody>
+                    <a:bodyPr/>
+                    <a:lstStyle/>
+                    <a:p>
+                      <a:pPr algn="l" indent="0" marL="0">
+                        <a:buNone/>
+                      </a:pPr>
+                      <a:r>
+                        <a:rPr lang="en-US" sz="900" i="1" dirty="0">
+                          <a:solidFill>
+                            <a:srgbClr val="1F2933"/>
+                          </a:solidFill>
+                          <a:latin typeface="Calibri" pitchFamily="34" charset="0"/>
+                          <a:ea typeface="Calibri" pitchFamily="34" charset="-122"/>
+                          <a:cs typeface="Calibri" pitchFamily="34" charset="-120"/>
+                        </a:rPr>
+                        <a:t>   dont RIVIERA</a:t>
+                      </a:r>
+                      <a:endParaRPr lang="en-US" sz="900" dirty="0">
+                        <a:latin typeface="Calibri" charset="0"/>
+                        <a:ea typeface="Calibri" charset="0"/>
+                        <a:cs typeface="Calibri" charset="0"/>
+                      </a:endParaRPr>
+                    </a:p>
+                  </a:txBody>
+                  <a:tcPr marL="64008" marR="64008" marT="0" marB="0" anchor="ctr">
+                    <a:lnL w="6350" cap="flat" cmpd="sng" algn="ctr">
+                      <a:solidFill>
+                        <a:srgbClr val="D5DBE3"/>
+                      </a:solidFill>
+                      <a:prstDash val="solid"/>
+                      <a:round/>
+                      <a:headEnd type="none" w="med" len="med"/>
+                      <a:tailEnd type="none" w="med" len="med"/>
+                    </a:lnL>
+                    <a:lnR w="6350" cap="flat" cmpd="sng" algn="ctr">
+                      <a:solidFill>
+                        <a:srgbClr val="D5DBE3"/>
+                      </a:solidFill>
+                      <a:prstDash val="solid"/>
+                      <a:round/>
+                      <a:headEnd type="none" w="med" len="med"/>
+                      <a:tailEnd type="none" w="med" len="med"/>
+                    </a:lnR>
+                    <a:lnT w="6350" cap="flat" cmpd="sng" algn="ctr">
+                      <a:solidFill>
+                        <a:srgbClr val="D5DBE3"/>
+                      </a:solidFill>
+                      <a:prstDash val="solid"/>
+                      <a:round/>
+                      <a:headEnd type="none" w="med" len="med"/>
+                      <a:tailEnd type="none" w="med" len="med"/>
+                    </a:lnT>
+                    <a:lnB w="6350" cap="flat" cmpd="sng" algn="ctr">
+                      <a:solidFill>
+                        <a:srgbClr val="D5DBE3"/>
+                      </a:solidFill>
+                      <a:prstDash val="solid"/>
+                      <a:round/>
+                      <a:headEnd type="none" w="med" len="med"/>
+                      <a:tailEnd type="none" w="med" len="med"/>
+                    </a:lnB>
+                  </a:tcPr>
+                </a:tc>
+                <a:tc>
+                  <a:txBody>
+                    <a:bodyPr/>
+                    <a:lstStyle/>
+                    <a:p>
+                      <a:pPr algn="r" indent="0" marL="0">
+                        <a:buNone/>
+                      </a:pPr>
+                      <a:r>
+                        <a:rPr lang="en-US" sz="900" dirty="0">
+                          <a:solidFill>
+                            <a:srgbClr val="5E9B7E"/>
+                          </a:solidFill>
+                          <a:latin typeface="Calibri" pitchFamily="34" charset="0"/>
+                          <a:ea typeface="Calibri" pitchFamily="34" charset="-122"/>
+                          <a:cs typeface="Calibri" pitchFamily="34" charset="-120"/>
+                        </a:rPr>
+                        <a:t>+2 426,7</a:t>
+                      </a:r>
+                      <a:endParaRPr lang="en-US" sz="900" dirty="0">
+                        <a:latin typeface="Calibri" charset="0"/>
+                        <a:ea typeface="Calibri" charset="0"/>
+                        <a:cs typeface="Calibri" charset="0"/>
+                      </a:endParaRPr>
+                    </a:p>
+                  </a:txBody>
+                  <a:tcPr marL="64008" marR="64008" marT="0" marB="0" anchor="ctr">
+                    <a:lnL w="6350" cap="flat" cmpd="sng" algn="ctr">
+                      <a:solidFill>
+                        <a:srgbClr val="D5DBE3"/>
+                      </a:solidFill>
+                      <a:prstDash val="solid"/>
+                      <a:round/>
+                      <a:headEnd type="none" w="med" len="med"/>
+                      <a:tailEnd type="none" w="med" len="med"/>
+                    </a:lnL>
+                    <a:lnR w="6350" cap="flat" cmpd="sng" algn="ctr">
+                      <a:solidFill>
+                        <a:srgbClr val="D5DBE3"/>
+                      </a:solidFill>
+                      <a:prstDash val="solid"/>
+                      <a:round/>
+                      <a:headEnd type="none" w="med" len="med"/>
+                      <a:tailEnd type="none" w="med" len="med"/>
+                    </a:lnR>
+                    <a:lnT w="6350" cap="flat" cmpd="sng" algn="ctr">
+                      <a:solidFill>
+                        <a:srgbClr val="D5DBE3"/>
+                      </a:solidFill>
+                      <a:prstDash val="solid"/>
+                      <a:round/>
+                      <a:headEnd type="none" w="med" len="med"/>
+                      <a:tailEnd type="none" w="med" len="med"/>
+                    </a:lnT>
+                    <a:lnB w="6350" cap="flat" cmpd="sng" algn="ctr">
+                      <a:solidFill>
+                        <a:srgbClr val="D5DBE3"/>
+                      </a:solidFill>
+                      <a:prstDash val="solid"/>
+                      <a:round/>
+                      <a:headEnd type="none" w="med" len="med"/>
+                      <a:tailEnd type="none" w="med" len="med"/>
+                    </a:lnB>
+                  </a:tcPr>
+                </a:tc>
+                <a:tc>
+                  <a:txBody>
+                    <a:bodyPr/>
+                    <a:lstStyle/>
+                    <a:p>
+                      <a:pPr algn="r" indent="0" marL="0">
+                        <a:buNone/>
+                      </a:pPr>
+                      <a:r>
+                        <a:rPr lang="en-US" sz="900" dirty="0">
+                          <a:solidFill>
+                            <a:srgbClr val="5E9B7E"/>
+                          </a:solidFill>
+                          <a:latin typeface="Calibri" pitchFamily="34" charset="0"/>
+                          <a:ea typeface="Calibri" pitchFamily="34" charset="-122"/>
+                          <a:cs typeface="Calibri" pitchFamily="34" charset="-120"/>
+                        </a:rPr>
+                        <a:t>+1 184,2</a:t>
+                      </a:r>
+                      <a:endParaRPr lang="en-US" sz="900" dirty="0">
+                        <a:latin typeface="Calibri" charset="0"/>
+                        <a:ea typeface="Calibri" charset="0"/>
+                        <a:cs typeface="Calibri" charset="0"/>
+                      </a:endParaRPr>
+                    </a:p>
+                  </a:txBody>
+                  <a:tcPr marL="64008" marR="64008" marT="0" marB="0" anchor="ctr">
+                    <a:lnL w="6350" cap="flat" cmpd="sng" algn="ctr">
+                      <a:solidFill>
+                        <a:srgbClr val="D5DBE3"/>
+                      </a:solidFill>
+                      <a:prstDash val="solid"/>
+                      <a:round/>
+                      <a:headEnd type="none" w="med" len="med"/>
+                      <a:tailEnd type="none" w="med" len="med"/>
+                    </a:lnL>
+                    <a:lnR w="6350" cap="flat" cmpd="sng" algn="ctr">
+                      <a:solidFill>
+                        <a:srgbClr val="D5DBE3"/>
+                      </a:solidFill>
+                      <a:prstDash val="solid"/>
+                      <a:round/>
+                      <a:headEnd type="none" w="med" len="med"/>
+                      <a:tailEnd type="none" w="med" len="med"/>
+                    </a:lnR>
+                    <a:lnT w="6350" cap="flat" cmpd="sng" algn="ctr">
+                      <a:solidFill>
+                        <a:srgbClr val="D5DBE3"/>
+                      </a:solidFill>
+                      <a:prstDash val="solid"/>
+                      <a:round/>
+                      <a:headEnd type="none" w="med" len="med"/>
+                      <a:tailEnd type="none" w="med" len="med"/>
+                    </a:lnT>
+                    <a:lnB w="6350" cap="flat" cmpd="sng" algn="ctr">
+                      <a:solidFill>
+                        <a:srgbClr val="D5DBE3"/>
+                      </a:solidFill>
+                      <a:prstDash val="solid"/>
+                      <a:round/>
+                      <a:headEnd type="none" w="med" len="med"/>
+                      <a:tailEnd type="none" w="med" len="med"/>
+                    </a:lnB>
+                  </a:tcPr>
+                </a:tc>
+                <a:tc>
+                  <a:txBody>
+                    <a:bodyPr/>
+                    <a:lstStyle/>
+                    <a:p>
+                      <a:pPr algn="r" indent="0" marL="0">
+                        <a:buNone/>
+                      </a:pPr>
+                      <a:r>
+                        <a:rPr lang="en-US" sz="900" dirty="0">
+                          <a:solidFill>
+                            <a:srgbClr val="5E9B7E"/>
+                          </a:solidFill>
+                          <a:latin typeface="Calibri" pitchFamily="34" charset="0"/>
+                          <a:ea typeface="Calibri" pitchFamily="34" charset="-122"/>
+                          <a:cs typeface="Calibri" pitchFamily="34" charset="-120"/>
+                        </a:rPr>
+                        <a:t>+1 184,2</a:t>
+                      </a:r>
+                      <a:endParaRPr lang="en-US" sz="900" dirty="0">
+                        <a:latin typeface="Calibri" charset="0"/>
+                        <a:ea typeface="Calibri" charset="0"/>
+                        <a:cs typeface="Calibri" charset="0"/>
+                      </a:endParaRPr>
+                    </a:p>
+                  </a:txBody>
+                  <a:tcPr marL="64008" marR="64008" marT="0" marB="0" anchor="ctr">
+                    <a:lnL w="6350" cap="flat" cmpd="sng" algn="ctr">
+                      <a:solidFill>
+                        <a:srgbClr val="D5DBE3"/>
+                      </a:solidFill>
+                      <a:prstDash val="solid"/>
+                      <a:round/>
+                      <a:headEnd type="none" w="med" len="med"/>
+                      <a:tailEnd type="none" w="med" len="med"/>
+                    </a:lnL>
+                    <a:lnR w="6350" cap="flat" cmpd="sng" algn="ctr">
+                      <a:solidFill>
+                        <a:srgbClr val="D5DBE3"/>
+                      </a:solidFill>
+                      <a:prstDash val="solid"/>
+                      <a:round/>
+                      <a:headEnd type="none" w="med" len="med"/>
+                      <a:tailEnd type="none" w="med" len="med"/>
+                    </a:lnR>
+                    <a:lnT w="6350" cap="flat" cmpd="sng" algn="ctr">
+                      <a:solidFill>
+                        <a:srgbClr val="D5DBE3"/>
+                      </a:solidFill>
+                      <a:prstDash val="solid"/>
+                      <a:round/>
+                      <a:headEnd type="none" w="med" len="med"/>
+                      <a:tailEnd type="none" w="med" len="med"/>
+                    </a:lnT>
+                    <a:lnB w="6350" cap="flat" cmpd="sng" algn="ctr">
+                      <a:solidFill>
+                        <a:srgbClr val="D5DBE3"/>
+                      </a:solidFill>
+                      <a:prstDash val="solid"/>
+                      <a:round/>
+                      <a:headEnd type="none" w="med" len="med"/>
+                      <a:tailEnd type="none" w="med" len="med"/>
+                    </a:lnB>
+                  </a:tcPr>
+                </a:tc>
+                <a:tc>
+                  <a:txBody>
+                    <a:bodyPr/>
+                    <a:lstStyle/>
+                    <a:p>
+                      <a:pPr algn="r" indent="0" marL="0">
+                        <a:buNone/>
+                      </a:pPr>
+                      <a:r>
+                        <a:rPr lang="en-US" sz="900" dirty="0">
+                          <a:solidFill>
+                            <a:srgbClr val="5E9B7E"/>
+                          </a:solidFill>
+                          <a:latin typeface="Calibri" pitchFamily="34" charset="0"/>
+                          <a:ea typeface="Calibri" pitchFamily="34" charset="-122"/>
+                          <a:cs typeface="Calibri" pitchFamily="34" charset="-120"/>
+                        </a:rPr>
+                        <a:t>+1 170,6</a:t>
+                      </a:r>
+                      <a:endParaRPr lang="en-US" sz="900" dirty="0">
+                        <a:latin typeface="Calibri" charset="0"/>
+                        <a:ea typeface="Calibri" charset="0"/>
+                        <a:cs typeface="Calibri" charset="0"/>
+                      </a:endParaRPr>
+                    </a:p>
+                  </a:txBody>
+                  <a:tcPr marL="64008" marR="64008" marT="0" marB="0" anchor="ctr">
+                    <a:lnL w="6350" cap="flat" cmpd="sng" algn="ctr">
+                      <a:solidFill>
+                        <a:srgbClr val="D5DBE3"/>
+                      </a:solidFill>
+                      <a:prstDash val="solid"/>
+                      <a:round/>
+                      <a:headEnd type="none" w="med" len="med"/>
+                      <a:tailEnd type="none" w="med" len="med"/>
+                    </a:lnL>
+                    <a:lnR w="6350" cap="flat" cmpd="sng" algn="ctr">
+                      <a:solidFill>
+                        <a:srgbClr val="D5DBE3"/>
+                      </a:solidFill>
+                      <a:prstDash val="solid"/>
+                      <a:round/>
+                      <a:headEnd type="none" w="med" len="med"/>
+                      <a:tailEnd type="none" w="med" len="med"/>
+                    </a:lnR>
+                    <a:lnT w="6350" cap="flat" cmpd="sng" algn="ctr">
+                      <a:solidFill>
+                        <a:srgbClr val="D5DBE3"/>
+                      </a:solidFill>
+                      <a:prstDash val="solid"/>
+                      <a:round/>
+                      <a:headEnd type="none" w="med" len="med"/>
+                      <a:tailEnd type="none" w="med" len="med"/>
+                    </a:lnT>
+                    <a:lnB w="6350" cap="flat" cmpd="sng" algn="ctr">
+                      <a:solidFill>
+                        <a:srgbClr val="D5DBE3"/>
+                      </a:solidFill>
+                      <a:prstDash val="solid"/>
+                      <a:round/>
+                      <a:headEnd type="none" w="med" len="med"/>
+                      <a:tailEnd type="none" w="med" len="med"/>
+                    </a:lnB>
+                  </a:tcPr>
+                </a:tc>
+                <a:tc>
+                  <a:txBody>
+                    <a:bodyPr/>
+                    <a:lstStyle/>
+                    <a:p>
+                      <a:pPr algn="r" indent="0" marL="0">
+                        <a:buNone/>
+                      </a:pPr>
+                      <a:r>
+                        <a:rPr lang="en-US" sz="900" dirty="0">
+                          <a:solidFill>
+                            <a:srgbClr val="5E9B7E"/>
+                          </a:solidFill>
+                          <a:latin typeface="Calibri" pitchFamily="34" charset="0"/>
+                          <a:ea typeface="Calibri" pitchFamily="34" charset="-122"/>
+                          <a:cs typeface="Calibri" pitchFamily="34" charset="-120"/>
+                        </a:rPr>
+                        <a:t>+1 170,6</a:t>
+                      </a:r>
+                      <a:endParaRPr lang="en-US" sz="900" dirty="0">
+                        <a:latin typeface="Calibri" charset="0"/>
+                        <a:ea typeface="Calibri" charset="0"/>
+                        <a:cs typeface="Calibri" charset="0"/>
+                      </a:endParaRPr>
+                    </a:p>
+                  </a:txBody>
+                  <a:tcPr marL="64008" marR="64008" marT="0" marB="0" anchor="ctr">
+                    <a:lnL w="6350" cap="flat" cmpd="sng" algn="ctr">
+                      <a:solidFill>
+                        <a:srgbClr val="D5DBE3"/>
+                      </a:solidFill>
+                      <a:prstDash val="solid"/>
+                      <a:round/>
+                      <a:headEnd type="none" w="med" len="med"/>
+                      <a:tailEnd type="none" w="med" len="med"/>
+                    </a:lnL>
+                    <a:lnR w="6350" cap="flat" cmpd="sng" algn="ctr">
+                      <a:solidFill>
+                        <a:srgbClr val="D5DBE3"/>
+                      </a:solidFill>
+                      <a:prstDash val="solid"/>
+                      <a:round/>
+                      <a:headEnd type="none" w="med" len="med"/>
+                      <a:tailEnd type="none" w="med" len="med"/>
+                    </a:lnR>
+                    <a:lnT w="6350" cap="flat" cmpd="sng" algn="ctr">
+                      <a:solidFill>
+                        <a:srgbClr val="D5DBE3"/>
+                      </a:solidFill>
+                      <a:prstDash val="solid"/>
+                      <a:round/>
+                      <a:headEnd type="none" w="med" len="med"/>
+                      <a:tailEnd type="none" w="med" len="med"/>
+                    </a:lnT>
+                    <a:lnB w="6350" cap="flat" cmpd="sng" algn="ctr">
+                      <a:solidFill>
+                        <a:srgbClr val="D5DBE3"/>
+                      </a:solidFill>
+                      <a:prstDash val="solid"/>
+                      <a:round/>
+                      <a:headEnd type="none" w="med" len="med"/>
+                      <a:tailEnd type="none" w="med" len="med"/>
+                    </a:lnB>
+                  </a:tcPr>
+                </a:tc>
+                <a:tc>
+                  <a:txBody>
+                    <a:bodyPr/>
+                    <a:lstStyle/>
+                    <a:p>
+                      <a:pPr algn="r" indent="0" marL="0">
+                        <a:buNone/>
+                      </a:pPr>
+                      <a:endParaRPr lang="en-US" sz="900" dirty="0">
+                        <a:latin typeface="Calibri" charset="0"/>
+                        <a:ea typeface="Calibri" charset="0"/>
+                        <a:cs typeface="Calibri" charset="0"/>
+                      </a:endParaRPr>
+                    </a:p>
+                  </a:txBody>
+                  <a:tcPr marL="64008" marR="64008" marT="0" marB="0" anchor="ctr">
+                    <a:lnL w="6350" cap="flat" cmpd="sng" algn="ctr">
+                      <a:solidFill>
+                        <a:srgbClr val="D5DBE3"/>
+                      </a:solidFill>
+                      <a:prstDash val="solid"/>
+                      <a:round/>
+                      <a:headEnd type="none" w="med" len="med"/>
+                      <a:tailEnd type="none" w="med" len="med"/>
+                    </a:lnL>
+                    <a:lnR w="6350" cap="flat" cmpd="sng" algn="ctr">
+                      <a:solidFill>
+                        <a:srgbClr val="D5DBE3"/>
+                      </a:solidFill>
+                      <a:prstDash val="solid"/>
+                      <a:round/>
+                      <a:headEnd type="none" w="med" len="med"/>
+                      <a:tailEnd type="none" w="med" len="med"/>
+                    </a:lnR>
+                    <a:lnT w="6350" cap="flat" cmpd="sng" algn="ctr">
+                      <a:solidFill>
+                        <a:srgbClr val="D5DBE3"/>
+                      </a:solidFill>
+                      <a:prstDash val="solid"/>
+                      <a:round/>
+                      <a:headEnd type="none" w="med" len="med"/>
+                      <a:tailEnd type="none" w="med" len="med"/>
+                    </a:lnT>
+                    <a:lnB w="6350" cap="flat" cmpd="sng" algn="ctr">
+                      <a:solidFill>
+                        <a:srgbClr val="D5DBE3"/>
+                      </a:solidFill>
+                      <a:prstDash val="solid"/>
+                      <a:round/>
+                      <a:headEnd type="none" w="med" len="med"/>
+                      <a:tailEnd type="none" w="med" len="med"/>
+                    </a:lnB>
+                  </a:tcPr>
+                </a:tc>
+                <a:tc>
+                  <a:txBody>
+                    <a:bodyPr/>
+                    <a:lstStyle/>
+                    <a:p>
+                      <a:pPr algn="r" indent="0" marL="0">
+                        <a:buNone/>
+                      </a:pPr>
+                      <a:endParaRPr lang="en-US" sz="900" dirty="0">
+                        <a:latin typeface="Calibri" charset="0"/>
+                        <a:ea typeface="Calibri" charset="0"/>
+                        <a:cs typeface="Calibri" charset="0"/>
+                      </a:endParaRPr>
+                    </a:p>
+                  </a:txBody>
+                  <a:tcPr marL="64008" marR="64008" marT="0" marB="0" anchor="ctr">
+                    <a:lnL w="6350" cap="flat" cmpd="sng" algn="ctr">
+                      <a:solidFill>
+                        <a:srgbClr val="D5DBE3"/>
+                      </a:solidFill>
+                      <a:prstDash val="solid"/>
+                      <a:round/>
+                      <a:headEnd type="none" w="med" len="med"/>
+                      <a:tailEnd type="none" w="med" len="med"/>
+                    </a:lnL>
+                    <a:lnR w="6350" cap="flat" cmpd="sng" algn="ctr">
+                      <a:solidFill>
+                        <a:srgbClr val="D5DBE3"/>
+                      </a:solidFill>
+                      <a:prstDash val="solid"/>
+                      <a:round/>
+                      <a:headEnd type="none" w="med" len="med"/>
+                      <a:tailEnd type="none" w="med" len="med"/>
+                    </a:lnR>
+                    <a:lnT w="6350" cap="flat" cmpd="sng" algn="ctr">
+                      <a:solidFill>
+                        <a:srgbClr val="D5DBE3"/>
+                      </a:solidFill>
+                      <a:prstDash val="solid"/>
+                      <a:round/>
+                      <a:headEnd type="none" w="med" len="med"/>
+                      <a:tailEnd type="none" w="med" len="med"/>
+                    </a:lnT>
+                    <a:lnB w="6350" cap="flat" cmpd="sng" algn="ctr">
+                      <a:solidFill>
+                        <a:srgbClr val="D5DBE3"/>
+                      </a:solidFill>
+                      <a:prstDash val="solid"/>
+                      <a:round/>
+                      <a:headEnd type="none" w="med" len="med"/>
+                      <a:tailEnd type="none" w="med" len="med"/>
+                    </a:lnB>
+                  </a:tcPr>
+                </a:tc>
+                <a:tc>
+                  <a:txBody>
+                    <a:bodyPr/>
+                    <a:lstStyle/>
+                    <a:p>
+                      <a:pPr algn="r" indent="0" marL="0">
+                        <a:buNone/>
+                      </a:pPr>
+                      <a:endParaRPr lang="en-US" sz="900" dirty="0">
+                        <a:latin typeface="Calibri" charset="0"/>
+                        <a:ea typeface="Calibri" charset="0"/>
+                        <a:cs typeface="Calibri" charset="0"/>
+                      </a:endParaRPr>
+                    </a:p>
+                  </a:txBody>
+                  <a:tcPr marL="64008" marR="64008" marT="0" marB="0" anchor="ctr">
+                    <a:lnL w="6350" cap="flat" cmpd="sng" algn="ctr">
+                      <a:solidFill>
+                        <a:srgbClr val="D5DBE3"/>
+                      </a:solidFill>
+                      <a:prstDash val="solid"/>
+                      <a:round/>
+                      <a:headEnd type="none" w="med" len="med"/>
+                      <a:tailEnd type="none" w="med" len="med"/>
+                    </a:lnL>
+                    <a:lnR w="6350" cap="flat" cmpd="sng" algn="ctr">
+                      <a:solidFill>
+                        <a:srgbClr val="D5DBE3"/>
+                      </a:solidFill>
+                      <a:prstDash val="solid"/>
+                      <a:round/>
+                      <a:headEnd type="none" w="med" len="med"/>
+                      <a:tailEnd type="none" w="med" len="med"/>
+                    </a:lnR>
+                    <a:lnT w="6350" cap="flat" cmpd="sng" algn="ctr">
+                      <a:solidFill>
+                        <a:srgbClr val="D5DBE3"/>
+                      </a:solidFill>
+                      <a:prstDash val="solid"/>
+                      <a:round/>
+                      <a:headEnd type="none" w="med" len="med"/>
+                      <a:tailEnd type="none" w="med" len="med"/>
+                    </a:lnT>
+                    <a:lnB w="6350" cap="flat" cmpd="sng" algn="ctr">
+                      <a:solidFill>
+                        <a:srgbClr val="D5DBE3"/>
+                      </a:solidFill>
+                      <a:prstDash val="solid"/>
+                      <a:round/>
+                      <a:headEnd type="none" w="med" len="med"/>
+                      <a:tailEnd type="none" w="med" len="med"/>
+                    </a:lnB>
+                  </a:tcPr>
+                </a:tc>
+              </a:tr>
+              <a:tr h="224028">
+                <a:tc>
+                  <a:txBody>
+                    <a:bodyPr/>
+                    <a:lstStyle/>
+                    <a:p>
+                      <a:pPr algn="l" indent="0" marL="0">
+                        <a:buNone/>
+                      </a:pPr>
+                      <a:r>
+                        <a:rPr lang="en-US" sz="900" i="1" dirty="0">
+                          <a:solidFill>
+                            <a:srgbClr val="1F2933"/>
+                          </a:solidFill>
+                          <a:latin typeface="Calibri" pitchFamily="34" charset="0"/>
+                          <a:ea typeface="Calibri" pitchFamily="34" charset="-122"/>
+                          <a:cs typeface="Calibri" pitchFamily="34" charset="-120"/>
+                        </a:rPr>
+                        <a:t>   dont TERASSON</a:t>
+                      </a:r>
+                      <a:endParaRPr lang="en-US" sz="900" dirty="0">
+                        <a:latin typeface="Calibri" charset="0"/>
+                        <a:ea typeface="Calibri" charset="0"/>
+                        <a:cs typeface="Calibri" charset="0"/>
+                      </a:endParaRPr>
+                    </a:p>
+                  </a:txBody>
+                  <a:tcPr marL="64008" marR="64008" marT="0" marB="0" anchor="ctr">
+                    <a:lnL w="6350" cap="flat" cmpd="sng" algn="ctr">
+                      <a:solidFill>
+                        <a:srgbClr val="D5DBE3"/>
+                      </a:solidFill>
+                      <a:prstDash val="solid"/>
+                      <a:round/>
+                      <a:headEnd type="none" w="med" len="med"/>
+                      <a:tailEnd type="none" w="med" len="med"/>
+                    </a:lnL>
+                    <a:lnR w="6350" cap="flat" cmpd="sng" algn="ctr">
+                      <a:solidFill>
+                        <a:srgbClr val="D5DBE3"/>
+                      </a:solidFill>
+                      <a:prstDash val="solid"/>
+                      <a:round/>
+                      <a:headEnd type="none" w="med" len="med"/>
+                      <a:tailEnd type="none" w="med" len="med"/>
+                    </a:lnR>
+                    <a:lnT w="6350" cap="flat" cmpd="sng" algn="ctr">
+                      <a:solidFill>
+                        <a:srgbClr val="D5DBE3"/>
+                      </a:solidFill>
+                      <a:prstDash val="solid"/>
+                      <a:round/>
+                      <a:headEnd type="none" w="med" len="med"/>
+                      <a:tailEnd type="none" w="med" len="med"/>
+                    </a:lnT>
+                    <a:lnB w="6350" cap="flat" cmpd="sng" algn="ctr">
+                      <a:solidFill>
+                        <a:srgbClr val="D5DBE3"/>
+                      </a:solidFill>
+                      <a:prstDash val="solid"/>
+                      <a:round/>
+                      <a:headEnd type="none" w="med" len="med"/>
+                      <a:tailEnd type="none" w="med" len="med"/>
+                    </a:lnB>
+                  </a:tcPr>
+                </a:tc>
+                <a:tc>
+                  <a:txBody>
+                    <a:bodyPr/>
+                    <a:lstStyle/>
+                    <a:p>
+                      <a:pPr algn="r" indent="0" marL="0">
+                        <a:buNone/>
+                      </a:pPr>
+                      <a:r>
+                        <a:rPr lang="en-US" sz="900" dirty="0">
+                          <a:solidFill>
+                            <a:srgbClr val="B3261E"/>
+                          </a:solidFill>
+                          <a:latin typeface="Calibri" pitchFamily="34" charset="0"/>
+                          <a:ea typeface="Calibri" pitchFamily="34" charset="-122"/>
+                          <a:cs typeface="Calibri" pitchFamily="34" charset="-120"/>
+                        </a:rPr>
+                        <a:t>-720,2</a:t>
+                      </a:r>
+                      <a:endParaRPr lang="en-US" sz="900" dirty="0">
+                        <a:latin typeface="Calibri" charset="0"/>
+                        <a:ea typeface="Calibri" charset="0"/>
+                        <a:cs typeface="Calibri" charset="0"/>
+                      </a:endParaRPr>
+                    </a:p>
+                  </a:txBody>
+                  <a:tcPr marL="64008" marR="64008" marT="0" marB="0" anchor="ctr">
+                    <a:lnL w="6350" cap="flat" cmpd="sng" algn="ctr">
+                      <a:solidFill>
+                        <a:srgbClr val="D5DBE3"/>
+                      </a:solidFill>
+                      <a:prstDash val="solid"/>
+                      <a:round/>
+                      <a:headEnd type="none" w="med" len="med"/>
+                      <a:tailEnd type="none" w="med" len="med"/>
+                    </a:lnL>
+                    <a:lnR w="6350" cap="flat" cmpd="sng" algn="ctr">
+                      <a:solidFill>
+                        <a:srgbClr val="D5DBE3"/>
+                      </a:solidFill>
+                      <a:prstDash val="solid"/>
+                      <a:round/>
+                      <a:headEnd type="none" w="med" len="med"/>
+                      <a:tailEnd type="none" w="med" len="med"/>
+                    </a:lnR>
+                    <a:lnT w="6350" cap="flat" cmpd="sng" algn="ctr">
+                      <a:solidFill>
+                        <a:srgbClr val="D5DBE3"/>
+                      </a:solidFill>
+                      <a:prstDash val="solid"/>
+                      <a:round/>
+                      <a:headEnd type="none" w="med" len="med"/>
+                      <a:tailEnd type="none" w="med" len="med"/>
+                    </a:lnT>
+                    <a:lnB w="6350" cap="flat" cmpd="sng" algn="ctr">
+                      <a:solidFill>
+                        <a:srgbClr val="D5DBE3"/>
+                      </a:solidFill>
+                      <a:prstDash val="solid"/>
+                      <a:round/>
+                      <a:headEnd type="none" w="med" len="med"/>
+                      <a:tailEnd type="none" w="med" len="med"/>
+                    </a:lnB>
+                  </a:tcPr>
+                </a:tc>
+                <a:tc>
+                  <a:txBody>
+                    <a:bodyPr/>
+                    <a:lstStyle/>
+                    <a:p>
+                      <a:pPr algn="r" indent="0" marL="0">
+                        <a:buNone/>
+                      </a:pPr>
+                      <a:r>
+                        <a:rPr lang="en-US" sz="900" dirty="0">
+                          <a:solidFill>
+                            <a:srgbClr val="B3261E"/>
+                          </a:solidFill>
+                          <a:latin typeface="Calibri" pitchFamily="34" charset="0"/>
+                          <a:ea typeface="Calibri" pitchFamily="34" charset="-122"/>
+                          <a:cs typeface="Calibri" pitchFamily="34" charset="-120"/>
+                        </a:rPr>
+                        <a:t>-1 192,4</a:t>
+                      </a:r>
+                      <a:endParaRPr lang="en-US" sz="900" dirty="0">
+                        <a:latin typeface="Calibri" charset="0"/>
+                        <a:ea typeface="Calibri" charset="0"/>
+                        <a:cs typeface="Calibri" charset="0"/>
+                      </a:endParaRPr>
+                    </a:p>
+                  </a:txBody>
+                  <a:tcPr marL="64008" marR="64008" marT="0" marB="0" anchor="ctr">
+                    <a:lnL w="6350" cap="flat" cmpd="sng" algn="ctr">
+                      <a:solidFill>
+                        <a:srgbClr val="D5DBE3"/>
+                      </a:solidFill>
+                      <a:prstDash val="solid"/>
+                      <a:round/>
+                      <a:headEnd type="none" w="med" len="med"/>
+                      <a:tailEnd type="none" w="med" len="med"/>
+                    </a:lnL>
+                    <a:lnR w="6350" cap="flat" cmpd="sng" algn="ctr">
+                      <a:solidFill>
+                        <a:srgbClr val="D5DBE3"/>
+                      </a:solidFill>
+                      <a:prstDash val="solid"/>
+                      <a:round/>
+                      <a:headEnd type="none" w="med" len="med"/>
+                      <a:tailEnd type="none" w="med" len="med"/>
+                    </a:lnR>
+                    <a:lnT w="6350" cap="flat" cmpd="sng" algn="ctr">
+                      <a:solidFill>
+                        <a:srgbClr val="D5DBE3"/>
+                      </a:solidFill>
+                      <a:prstDash val="solid"/>
+                      <a:round/>
+                      <a:headEnd type="none" w="med" len="med"/>
+                      <a:tailEnd type="none" w="med" len="med"/>
+                    </a:lnT>
+                    <a:lnB w="6350" cap="flat" cmpd="sng" algn="ctr">
+                      <a:solidFill>
+                        <a:srgbClr val="D5DBE3"/>
+                      </a:solidFill>
+                      <a:prstDash val="solid"/>
+                      <a:round/>
+                      <a:headEnd type="none" w="med" len="med"/>
+                      <a:tailEnd type="none" w="med" len="med"/>
+                    </a:lnB>
+                  </a:tcPr>
+                </a:tc>
+                <a:tc>
+                  <a:txBody>
+                    <a:bodyPr/>
+                    <a:lstStyle/>
+                    <a:p>
+                      <a:pPr algn="r" indent="0" marL="0">
+                        <a:buNone/>
+                      </a:pPr>
+                      <a:r>
+                        <a:rPr lang="en-US" sz="900" dirty="0">
+                          <a:solidFill>
+                            <a:srgbClr val="B3261E"/>
+                          </a:solidFill>
+                          <a:latin typeface="Calibri" pitchFamily="34" charset="0"/>
+                          <a:ea typeface="Calibri" pitchFamily="34" charset="-122"/>
+                          <a:cs typeface="Calibri" pitchFamily="34" charset="-120"/>
+                        </a:rPr>
+                        <a:t>-1 192,4</a:t>
+                      </a:r>
+                      <a:endParaRPr lang="en-US" sz="900" dirty="0">
+                        <a:latin typeface="Calibri" charset="0"/>
+                        <a:ea typeface="Calibri" charset="0"/>
+                        <a:cs typeface="Calibri" charset="0"/>
+                      </a:endParaRPr>
+                    </a:p>
+                  </a:txBody>
+                  <a:tcPr marL="64008" marR="64008" marT="0" marB="0" anchor="ctr">
+                    <a:lnL w="6350" cap="flat" cmpd="sng" algn="ctr">
+                      <a:solidFill>
+                        <a:srgbClr val="D5DBE3"/>
+                      </a:solidFill>
+                      <a:prstDash val="solid"/>
+                      <a:round/>
+                      <a:headEnd type="none" w="med" len="med"/>
+                      <a:tailEnd type="none" w="med" len="med"/>
+                    </a:lnL>
+                    <a:lnR w="6350" cap="flat" cmpd="sng" algn="ctr">
+                      <a:solidFill>
+                        <a:srgbClr val="D5DBE3"/>
+                      </a:solidFill>
+                      <a:prstDash val="solid"/>
+                      <a:round/>
+                      <a:headEnd type="none" w="med" len="med"/>
+                      <a:tailEnd type="none" w="med" len="med"/>
+                    </a:lnR>
+                    <a:lnT w="6350" cap="flat" cmpd="sng" algn="ctr">
+                      <a:solidFill>
+                        <a:srgbClr val="D5DBE3"/>
+                      </a:solidFill>
+                      <a:prstDash val="solid"/>
+                      <a:round/>
+                      <a:headEnd type="none" w="med" len="med"/>
+                      <a:tailEnd type="none" w="med" len="med"/>
+                    </a:lnT>
+                    <a:lnB w="6350" cap="flat" cmpd="sng" algn="ctr">
+                      <a:solidFill>
+                        <a:srgbClr val="D5DBE3"/>
+                      </a:solidFill>
+                      <a:prstDash val="solid"/>
+                      <a:round/>
+                      <a:headEnd type="none" w="med" len="med"/>
+                      <a:tailEnd type="none" w="med" len="med"/>
+                    </a:lnB>
+                  </a:tcPr>
+                </a:tc>
+                <a:tc>
+                  <a:txBody>
+                    <a:bodyPr/>
+                    <a:lstStyle/>
+                    <a:p>
+                      <a:pPr algn="r" indent="0" marL="0">
+                        <a:buNone/>
+                      </a:pPr>
+                      <a:r>
+                        <a:rPr lang="en-US" sz="900" dirty="0">
+                          <a:solidFill>
+                            <a:srgbClr val="B3261E"/>
+                          </a:solidFill>
+                          <a:latin typeface="Calibri" pitchFamily="34" charset="0"/>
+                          <a:ea typeface="Calibri" pitchFamily="34" charset="-122"/>
+                          <a:cs typeface="Calibri" pitchFamily="34" charset="-120"/>
+                        </a:rPr>
+                        <a:t>-1 205,9</a:t>
+                      </a:r>
+                      <a:endParaRPr lang="en-US" sz="900" dirty="0">
+                        <a:latin typeface="Calibri" charset="0"/>
+                        <a:ea typeface="Calibri" charset="0"/>
+                        <a:cs typeface="Calibri" charset="0"/>
+                      </a:endParaRPr>
+                    </a:p>
+                  </a:txBody>
+                  <a:tcPr marL="64008" marR="64008" marT="0" marB="0" anchor="ctr">
+                    <a:lnL w="6350" cap="flat" cmpd="sng" algn="ctr">
+                      <a:solidFill>
+                        <a:srgbClr val="D5DBE3"/>
+                      </a:solidFill>
+                      <a:prstDash val="solid"/>
+                      <a:round/>
+                      <a:headEnd type="none" w="med" len="med"/>
+                      <a:tailEnd type="none" w="med" len="med"/>
+                    </a:lnL>
+                    <a:lnR w="6350" cap="flat" cmpd="sng" algn="ctr">
+                      <a:solidFill>
+                        <a:srgbClr val="D5DBE3"/>
+                      </a:solidFill>
+                      <a:prstDash val="solid"/>
+                      <a:round/>
+                      <a:headEnd type="none" w="med" len="med"/>
+                      <a:tailEnd type="none" w="med" len="med"/>
+                    </a:lnR>
+                    <a:lnT w="6350" cap="flat" cmpd="sng" algn="ctr">
+                      <a:solidFill>
+                        <a:srgbClr val="D5DBE3"/>
+                      </a:solidFill>
+                      <a:prstDash val="solid"/>
+                      <a:round/>
+                      <a:headEnd type="none" w="med" len="med"/>
+                      <a:tailEnd type="none" w="med" len="med"/>
+                    </a:lnT>
+                    <a:lnB w="6350" cap="flat" cmpd="sng" algn="ctr">
+                      <a:solidFill>
+                        <a:srgbClr val="D5DBE3"/>
+                      </a:solidFill>
+                      <a:prstDash val="solid"/>
+                      <a:round/>
+                      <a:headEnd type="none" w="med" len="med"/>
+                      <a:tailEnd type="none" w="med" len="med"/>
+                    </a:lnB>
+                  </a:tcPr>
+                </a:tc>
+                <a:tc>
+                  <a:txBody>
+                    <a:bodyPr/>
+                    <a:lstStyle/>
+                    <a:p>
+                      <a:pPr algn="r" indent="0" marL="0">
+                        <a:buNone/>
+                      </a:pPr>
+                      <a:r>
+                        <a:rPr lang="en-US" sz="900" dirty="0">
+                          <a:solidFill>
+                            <a:srgbClr val="B3261E"/>
+                          </a:solidFill>
+                          <a:latin typeface="Calibri" pitchFamily="34" charset="0"/>
+                          <a:ea typeface="Calibri" pitchFamily="34" charset="-122"/>
+                          <a:cs typeface="Calibri" pitchFamily="34" charset="-120"/>
+                        </a:rPr>
+                        <a:t>-1 205,9</a:t>
+                      </a:r>
+                      <a:endParaRPr lang="en-US" sz="900" dirty="0">
+                        <a:latin typeface="Calibri" charset="0"/>
+                        <a:ea typeface="Calibri" charset="0"/>
+                        <a:cs typeface="Calibri" charset="0"/>
+                      </a:endParaRPr>
+                    </a:p>
+                  </a:txBody>
+                  <a:tcPr marL="64008" marR="64008" marT="0" marB="0" anchor="ctr">
+                    <a:lnL w="6350" cap="flat" cmpd="sng" algn="ctr">
+                      <a:solidFill>
+                        <a:srgbClr val="D5DBE3"/>
+                      </a:solidFill>
+                      <a:prstDash val="solid"/>
+                      <a:round/>
+                      <a:headEnd type="none" w="med" len="med"/>
+                      <a:tailEnd type="none" w="med" len="med"/>
+                    </a:lnL>
+                    <a:lnR w="6350" cap="flat" cmpd="sng" algn="ctr">
+                      <a:solidFill>
+                        <a:srgbClr val="D5DBE3"/>
+                      </a:solidFill>
+                      <a:prstDash val="solid"/>
+                      <a:round/>
+                      <a:headEnd type="none" w="med" len="med"/>
+                      <a:tailEnd type="none" w="med" len="med"/>
+                    </a:lnR>
+                    <a:lnT w="6350" cap="flat" cmpd="sng" algn="ctr">
+                      <a:solidFill>
+                        <a:srgbClr val="D5DBE3"/>
+                      </a:solidFill>
+                      <a:prstDash val="solid"/>
+                      <a:round/>
+                      <a:headEnd type="none" w="med" len="med"/>
+                      <a:tailEnd type="none" w="med" len="med"/>
+                    </a:lnT>
+                    <a:lnB w="6350" cap="flat" cmpd="sng" algn="ctr">
+                      <a:solidFill>
+                        <a:srgbClr val="D5DBE3"/>
+                      </a:solidFill>
+                      <a:prstDash val="solid"/>
+                      <a:round/>
+                      <a:headEnd type="none" w="med" len="med"/>
+                      <a:tailEnd type="none" w="med" len="med"/>
+                    </a:lnB>
+                  </a:tcPr>
+                </a:tc>
+                <a:tc>
+                  <a:txBody>
+                    <a:bodyPr/>
+                    <a:lstStyle/>
+                    <a:p>
+                      <a:pPr algn="r" indent="0" marL="0">
+                        <a:buNone/>
+                      </a:pPr>
+                      <a:endParaRPr lang="en-US" sz="900" dirty="0">
+                        <a:latin typeface="Calibri" charset="0"/>
+                        <a:ea typeface="Calibri" charset="0"/>
+                        <a:cs typeface="Calibri" charset="0"/>
+                      </a:endParaRPr>
+                    </a:p>
+                  </a:txBody>
+                  <a:tcPr marL="64008" marR="64008" marT="0" marB="0" anchor="ctr">
+                    <a:lnL w="6350" cap="flat" cmpd="sng" algn="ctr">
+                      <a:solidFill>
+                        <a:srgbClr val="D5DBE3"/>
+                      </a:solidFill>
+                      <a:prstDash val="solid"/>
+                      <a:round/>
+                      <a:headEnd type="none" w="med" len="med"/>
+                      <a:tailEnd type="none" w="med" len="med"/>
+                    </a:lnL>
+                    <a:lnR w="6350" cap="flat" cmpd="sng" algn="ctr">
+                      <a:solidFill>
+                        <a:srgbClr val="D5DBE3"/>
+                      </a:solidFill>
+                      <a:prstDash val="solid"/>
+                      <a:round/>
+                      <a:headEnd type="none" w="med" len="med"/>
+                      <a:tailEnd type="none" w="med" len="med"/>
+                    </a:lnR>
+                    <a:lnT w="6350" cap="flat" cmpd="sng" algn="ctr">
+                      <a:solidFill>
+                        <a:srgbClr val="D5DBE3"/>
+                      </a:solidFill>
+                      <a:prstDash val="solid"/>
+                      <a:round/>
+                      <a:headEnd type="none" w="med" len="med"/>
+                      <a:tailEnd type="none" w="med" len="med"/>
+                    </a:lnT>
+                    <a:lnB w="6350" cap="flat" cmpd="sng" algn="ctr">
+                      <a:solidFill>
+                        <a:srgbClr val="D5DBE3"/>
+                      </a:solidFill>
+                      <a:prstDash val="solid"/>
+                      <a:round/>
+                      <a:headEnd type="none" w="med" len="med"/>
+                      <a:tailEnd type="none" w="med" len="med"/>
+                    </a:lnB>
+                  </a:tcPr>
+                </a:tc>
+                <a:tc>
+                  <a:txBody>
+                    <a:bodyPr/>
+                    <a:lstStyle/>
+                    <a:p>
+                      <a:pPr algn="r" indent="0" marL="0">
+                        <a:buNone/>
+                      </a:pPr>
+                      <a:endParaRPr lang="en-US" sz="900" dirty="0">
+                        <a:latin typeface="Calibri" charset="0"/>
+                        <a:ea typeface="Calibri" charset="0"/>
+                        <a:cs typeface="Calibri" charset="0"/>
+                      </a:endParaRPr>
+                    </a:p>
+                  </a:txBody>
+                  <a:tcPr marL="64008" marR="64008" marT="0" marB="0" anchor="ctr">
+                    <a:lnL w="6350" cap="flat" cmpd="sng" algn="ctr">
+                      <a:solidFill>
+                        <a:srgbClr val="D5DBE3"/>
+                      </a:solidFill>
+                      <a:prstDash val="solid"/>
+                      <a:round/>
+                      <a:headEnd type="none" w="med" len="med"/>
+                      <a:tailEnd type="none" w="med" len="med"/>
+                    </a:lnL>
+                    <a:lnR w="6350" cap="flat" cmpd="sng" algn="ctr">
+                      <a:solidFill>
+                        <a:srgbClr val="D5DBE3"/>
+                      </a:solidFill>
+                      <a:prstDash val="solid"/>
+                      <a:round/>
+                      <a:headEnd type="none" w="med" len="med"/>
+                      <a:tailEnd type="none" w="med" len="med"/>
+                    </a:lnR>
+                    <a:lnT w="6350" cap="flat" cmpd="sng" algn="ctr">
+                      <a:solidFill>
+                        <a:srgbClr val="D5DBE3"/>
+                      </a:solidFill>
+                      <a:prstDash val="solid"/>
+                      <a:round/>
+                      <a:headEnd type="none" w="med" len="med"/>
+                      <a:tailEnd type="none" w="med" len="med"/>
+                    </a:lnT>
+                    <a:lnB w="6350" cap="flat" cmpd="sng" algn="ctr">
+                      <a:solidFill>
+                        <a:srgbClr val="D5DBE3"/>
+                      </a:solidFill>
+                      <a:prstDash val="solid"/>
+                      <a:round/>
+                      <a:headEnd type="none" w="med" len="med"/>
+                      <a:tailEnd type="none" w="med" len="med"/>
+                    </a:lnB>
+                  </a:tcPr>
+                </a:tc>
+                <a:tc>
+                  <a:txBody>
+                    <a:bodyPr/>
+                    <a:lstStyle/>
+                    <a:p>
+                      <a:pPr algn="r" indent="0" marL="0">
+                        <a:buNone/>
+                      </a:pPr>
+                      <a:endParaRPr lang="en-US" sz="900" dirty="0">
                         <a:latin typeface="Calibri" charset="0"/>
                         <a:ea typeface="Calibri" charset="0"/>
                         <a:cs typeface="Calibri" charset="0"/>
@@ -6598,8 +10070,8 @@
         </p:nvSpPr>
         <p:spPr>
           <a:xfrm>
-            <a:off x="457200" y="4434840"/>
-            <a:ext cx="11247120" cy="1554480"/>
+            <a:off x="457200" y="5262372"/>
+            <a:ext cx="11247120" cy="845820"/>
           </a:xfrm>
           <a:prstGeom prst="rect">
             <a:avLst/>
@@ -6619,42 +10091,7 @@
               <a:buChar char="•"/>
             </a:pPr>
             <a:r>
-              <a:rPr lang="en-US" sz="1150" b="1" dirty="0">
-                <a:solidFill>
-                  <a:srgbClr val="002C50"/>
-                </a:solidFill>
-                <a:latin typeface="Calibri" pitchFamily="34" charset="0"/>
-                <a:ea typeface="Calibri" pitchFamily="34" charset="-122"/>
-                <a:cs typeface="Calibri" pitchFamily="34" charset="-120"/>
-              </a:rPr>
-              <a:t>S1 concentre 74 % du besoin : </a:t>
-            </a:r>
-            <a:pPr indent="0" marL="0">
-              <a:buNone/>
-            </a:pPr>
-            <a:r>
-              <a:rPr lang="en-US" sz="1150" dirty="0">
-                <a:solidFill>
-                  <a:srgbClr val="1F2933"/>
-                </a:solidFill>
-                <a:latin typeface="Calibri" pitchFamily="34" charset="0"/>
-                <a:ea typeface="Calibri" pitchFamily="34" charset="-122"/>
-                <a:cs typeface="Calibri" pitchFamily="34" charset="-120"/>
-              </a:rPr>
-              <a:t>factures échues et arriérés d'impôts et de cotisations de l'audit, semaine en cours, cash plans non réglés jusqu'au mois de la situation, échéance de la dette.</a:t>
-            </a:r>
-            <a:endParaRPr lang="en-US" sz="1150" dirty="0"/>
-          </a:p>
-          <a:p>
-            <a:pPr marL="177800" indent="-177800">
-              <a:spcAft>
-                <a:spcPts val="400"/>
-              </a:spcAft>
-              <a:buSzPct val="100000"/>
-              <a:buChar char="•"/>
-            </a:pPr>
-            <a:r>
-              <a:rPr lang="en-US" sz="1150" b="1" dirty="0">
+              <a:rPr lang="en-US" sz="1000" b="1" dirty="0">
                 <a:solidFill>
                   <a:srgbClr val="002C50"/>
                 </a:solidFill>
@@ -6668,7 +10105,7 @@
               <a:buNone/>
             </a:pPr>
             <a:r>
-              <a:rPr lang="en-US" sz="1150" dirty="0">
+              <a:rPr lang="en-US" sz="1000" dirty="0">
                 <a:solidFill>
                   <a:srgbClr val="1F2933"/>
                 </a:solidFill>
@@ -6678,7 +10115,7 @@
               </a:rPr>
               <a:t>5 932,3 M. RIVIERA en déficit de 601,4 M dès S2 ; TERASSON en déficit de 1 205,9 M dès S1.</a:t>
             </a:r>
-            <a:endParaRPr lang="en-US" sz="1150" dirty="0"/>
+            <a:endParaRPr lang="en-US" sz="1000" dirty="0"/>
           </a:p>
           <a:p>
             <a:pPr marL="177800" indent="-177800">
@@ -6689,7 +10126,7 @@
               <a:buChar char="•"/>
             </a:pPr>
             <a:r>
-              <a:rPr lang="en-US" sz="1150" b="1" dirty="0">
+              <a:rPr lang="en-US" sz="1000" b="1" dirty="0">
                 <a:solidFill>
                   <a:srgbClr val="002C50"/>
                 </a:solidFill>
@@ -6703,7 +10140,7 @@
               <a:buNone/>
             </a:pPr>
             <a:r>
-              <a:rPr lang="en-US" sz="1150" dirty="0">
+              <a:rPr lang="en-US" sz="1000" dirty="0">
                 <a:solidFill>
                   <a:srgbClr val="1F2933"/>
                 </a:solidFill>
@@ -6713,7 +10150,7 @@
               </a:rPr>
               <a:t>déficits TERASSON 206,4 M, FINAFRICA 198,7 M, SCO AO 176,0 M, FIRST 175,3 M, RIVIERA 87,3 M, IMMONEUF 66,0 M ; excédents PICI 100,0 M, INFI SOFT 2,8 M.</a:t>
             </a:r>
-            <a:endParaRPr lang="en-US" sz="1150" dirty="0"/>
+            <a:endParaRPr lang="en-US" sz="1000" dirty="0"/>
           </a:p>
         </p:txBody>
       </p:sp>

--- a/RCI_Besoins_Tresorerie_Comptes_Paiement_30-09-2026.pptx
+++ b/RCI_Besoins_Tresorerie_Comptes_Paiement_30-09-2026.pptx
@@ -1851,7 +1851,7 @@
                 <a:ea typeface="Calibri" pitchFamily="34" charset="-122"/>
                 <a:cs typeface="Calibri" pitchFamily="34" charset="-120"/>
               </a:rPr>
-              <a:t>7 004,8 M à payer de S1 à S5, dont 5 277,0 M dès S1 ; 2 676,8 M de déficits</a:t>
+              <a:t>6 974,1 M à payer de S1 à S5, dont 5 115,2 M dès S1 ; 2 530,3 M de déficits</a:t>
             </a:r>
             <a:endParaRPr lang="en-US" sz="1400" dirty="0"/>
           </a:p>
@@ -2621,7 +2621,7 @@
                 <a:ea typeface="Calibri" pitchFamily="34" charset="-122"/>
                 <a:cs typeface="Calibri" pitchFamily="34" charset="-120"/>
               </a:rPr>
-              <a:t>7 004,8 M</a:t>
+              <a:t>6 974,1 M</a:t>
             </a:r>
             <a:endParaRPr lang="en-US" sz="2200" dirty="0"/>
           </a:p>
@@ -2660,7 +2660,7 @@
                 <a:ea typeface="Calibri" pitchFamily="34" charset="-122"/>
                 <a:cs typeface="Calibri" pitchFamily="34" charset="-120"/>
               </a:rPr>
-              <a:t>Besoin S1 à S5 (10,7 M€) : fonctionnement, projets et dette</a:t>
+              <a:t>Besoin S1 à S5 (10,6 M€) : fonctionnement, projets et dette</a:t>
             </a:r>
             <a:endParaRPr lang="en-US" sz="1050" dirty="0"/>
           </a:p>
@@ -2726,7 +2726,7 @@
                 <a:ea typeface="Calibri" pitchFamily="34" charset="-122"/>
                 <a:cs typeface="Calibri" pitchFamily="34" charset="-120"/>
               </a:rPr>
-              <a:t>5 277,0 M</a:t>
+              <a:t>5 115,2 M</a:t>
             </a:r>
             <a:endParaRPr lang="en-US" sz="2200" dirty="0"/>
           </a:p>
@@ -2765,7 +2765,7 @@
                 <a:ea typeface="Calibri" pitchFamily="34" charset="-122"/>
                 <a:cs typeface="Calibri" pitchFamily="34" charset="-120"/>
               </a:rPr>
-              <a:t>À régler dès S1 (antériorités incluses), 75 % du besoin</a:t>
+              <a:t>À régler dès S1 (antériorités incluses), 73 % du besoin</a:t>
             </a:r>
             <a:endParaRPr lang="en-US" sz="1050" dirty="0"/>
           </a:p>
@@ -2936,7 +2936,7 @@
                 <a:ea typeface="Calibri" pitchFamily="34" charset="-122"/>
                 <a:cs typeface="Calibri" pitchFamily="34" charset="-120"/>
               </a:rPr>
-              <a:t>-1 571,4 M</a:t>
+              <a:t>-1 425,0 M</a:t>
             </a:r>
             <a:endParaRPr lang="en-US" sz="2200" dirty="0"/>
           </a:p>
@@ -3711,7 +3711,7 @@
                           <a:ea typeface="Calibri" pitchFamily="34" charset="-122"/>
                           <a:cs typeface="Calibri" pitchFamily="34" charset="-120"/>
                         </a:rPr>
-                        <a:t>1 481,9</a:t>
+                        <a:t>1 320,1</a:t>
                       </a:r>
                       <a:endParaRPr lang="en-US" sz="900" dirty="0">
                         <a:latin typeface="Calibri" charset="0"/>
@@ -3776,7 +3776,7 @@
                           <a:ea typeface="Calibri" pitchFamily="34" charset="-122"/>
                           <a:cs typeface="Calibri" pitchFamily="34" charset="-120"/>
                         </a:rPr>
-                        <a:t>69,6</a:t>
+                        <a:t>87,0</a:t>
                       </a:r>
                       <a:endParaRPr lang="en-US" sz="900" dirty="0">
                         <a:latin typeface="Calibri" charset="0"/>
@@ -3841,7 +3841,7 @@
                           <a:ea typeface="Calibri" pitchFamily="34" charset="-122"/>
                           <a:cs typeface="Calibri" pitchFamily="34" charset="-120"/>
                         </a:rPr>
-                        <a:t>225,7</a:t>
+                        <a:t>247,9</a:t>
                       </a:r>
                       <a:endParaRPr lang="en-US" sz="900" dirty="0">
                         <a:latin typeface="Calibri" charset="0"/>
@@ -3906,7 +3906,7 @@
                           <a:ea typeface="Calibri" pitchFamily="34" charset="-122"/>
                           <a:cs typeface="Calibri" pitchFamily="34" charset="-120"/>
                         </a:rPr>
-                        <a:t>–</a:t>
+                        <a:t>27,1</a:t>
                       </a:r>
                       <a:endParaRPr lang="en-US" sz="900" dirty="0">
                         <a:latin typeface="Calibri" charset="0"/>
@@ -3971,7 +3971,7 @@
                           <a:ea typeface="Calibri" pitchFamily="34" charset="-122"/>
                           <a:cs typeface="Calibri" pitchFamily="34" charset="-120"/>
                         </a:rPr>
-                        <a:t>–</a:t>
+                        <a:t>64,4</a:t>
                       </a:r>
                       <a:endParaRPr lang="en-US" sz="900" dirty="0">
                         <a:latin typeface="Calibri" charset="0"/>
@@ -4036,7 +4036,7 @@
                           <a:ea typeface="Calibri" pitchFamily="34" charset="-122"/>
                           <a:cs typeface="Calibri" pitchFamily="34" charset="-120"/>
                         </a:rPr>
-                        <a:t>1 777,1</a:t>
+                        <a:t>1 746,4</a:t>
                       </a:r>
                       <a:endParaRPr lang="en-US" sz="900" dirty="0">
                         <a:latin typeface="Calibri" charset="0"/>
@@ -4169,7 +4169,7 @@
                           <a:ea typeface="Calibri" pitchFamily="34" charset="-122"/>
                           <a:cs typeface="Calibri" pitchFamily="34" charset="-120"/>
                         </a:rPr>
-                        <a:t>1 574,2</a:t>
+                        <a:t>1 427,7</a:t>
                       </a:r>
                       <a:endParaRPr lang="en-US" sz="900" dirty="0">
                         <a:latin typeface="Calibri" charset="0"/>
@@ -5493,7 +5493,7 @@
                           <a:ea typeface="Calibri" pitchFamily="34" charset="-122"/>
                           <a:cs typeface="Calibri" pitchFamily="34" charset="-120"/>
                         </a:rPr>
-                        <a:t>5 277,0</a:t>
+                        <a:t>5 115,2</a:t>
                       </a:r>
                       <a:endParaRPr lang="en-US" sz="900" dirty="0">
                         <a:latin typeface="Calibri" charset="0"/>
@@ -5561,7 +5561,7 @@
                           <a:ea typeface="Calibri" pitchFamily="34" charset="-122"/>
                           <a:cs typeface="Calibri" pitchFamily="34" charset="-120"/>
                         </a:rPr>
-                        <a:t>1 475,0</a:t>
+                        <a:t>1 492,4</a:t>
                       </a:r>
                       <a:endParaRPr lang="en-US" sz="900" dirty="0">
                         <a:latin typeface="Calibri" charset="0"/>
@@ -5629,7 +5629,7 @@
                           <a:ea typeface="Calibri" pitchFamily="34" charset="-122"/>
                           <a:cs typeface="Calibri" pitchFamily="34" charset="-120"/>
                         </a:rPr>
-                        <a:t>225,7</a:t>
+                        <a:t>247,9</a:t>
                       </a:r>
                       <a:endParaRPr lang="en-US" sz="900" dirty="0">
                         <a:latin typeface="Calibri" charset="0"/>
@@ -5697,7 +5697,7 @@
                           <a:ea typeface="Calibri" pitchFamily="34" charset="-122"/>
                           <a:cs typeface="Calibri" pitchFamily="34" charset="-120"/>
                         </a:rPr>
-                        <a:t>27,1</a:t>
+                        <a:t>54,1</a:t>
                       </a:r>
                       <a:endParaRPr lang="en-US" sz="900" dirty="0">
                         <a:latin typeface="Calibri" charset="0"/>
@@ -5765,7 +5765,7 @@
                           <a:ea typeface="Calibri" pitchFamily="34" charset="-122"/>
                           <a:cs typeface="Calibri" pitchFamily="34" charset="-120"/>
                         </a:rPr>
-                        <a:t>–</a:t>
+                        <a:t>64,4</a:t>
                       </a:r>
                       <a:endParaRPr lang="en-US" sz="900" dirty="0">
                         <a:latin typeface="Calibri" charset="0"/>
@@ -5833,7 +5833,7 @@
                           <a:ea typeface="Calibri" pitchFamily="34" charset="-122"/>
                           <a:cs typeface="Calibri" pitchFamily="34" charset="-120"/>
                         </a:rPr>
-                        <a:t>7 004,8</a:t>
+                        <a:t>6 974,1</a:t>
                       </a:r>
                       <a:endParaRPr lang="en-US" sz="900" dirty="0">
                         <a:latin typeface="Calibri" charset="0"/>
@@ -5969,7 +5969,7 @@
                           <a:ea typeface="Calibri" pitchFamily="34" charset="-122"/>
                           <a:cs typeface="Calibri" pitchFamily="34" charset="-120"/>
                         </a:rPr>
-                        <a:t>2 676,8</a:t>
+                        <a:t>2 530,3</a:t>
                       </a:r>
                       <a:endParaRPr lang="en-US" sz="900" dirty="0">
                         <a:latin typeface="Calibri" charset="0"/>
@@ -6104,7 +6104,7 @@
                           <a:ea typeface="Calibri" pitchFamily="34" charset="-122"/>
                           <a:cs typeface="Calibri" pitchFamily="34" charset="-120"/>
                         </a:rPr>
-                        <a:t>3,6</a:t>
+                        <a:t>14,8</a:t>
                       </a:r>
                       <a:endParaRPr lang="en-US" sz="900" dirty="0">
                         <a:latin typeface="Calibri" charset="0"/>
@@ -6169,7 +6169,7 @@
                           <a:ea typeface="Calibri" pitchFamily="34" charset="-122"/>
                           <a:cs typeface="Calibri" pitchFamily="34" charset="-120"/>
                         </a:rPr>
-                        <a:t>129,6</a:t>
+                        <a:t>175,2</a:t>
                       </a:r>
                       <a:endParaRPr lang="en-US" sz="900" dirty="0">
                         <a:latin typeface="Calibri" charset="0"/>
@@ -6234,6 +6234,71 @@
                           <a:ea typeface="Calibri" pitchFamily="34" charset="-122"/>
                           <a:cs typeface="Calibri" pitchFamily="34" charset="-120"/>
                         </a:rPr>
+                        <a:t>59,0</a:t>
+                      </a:r>
+                      <a:endParaRPr lang="en-US" sz="900" dirty="0">
+                        <a:latin typeface="Calibri" charset="0"/>
+                        <a:ea typeface="Calibri" charset="0"/>
+                        <a:cs typeface="Calibri" charset="0"/>
+                      </a:endParaRPr>
+                    </a:p>
+                  </a:txBody>
+                  <a:tcPr marL="64008" marR="64008" marT="0" marB="0" anchor="ctr">
+                    <a:lnL w="6350" cap="flat" cmpd="sng" algn="ctr">
+                      <a:solidFill>
+                        <a:srgbClr val="D5DBE3"/>
+                      </a:solidFill>
+                      <a:prstDash val="solid"/>
+                      <a:round/>
+                      <a:headEnd type="none" w="med" len="med"/>
+                      <a:tailEnd type="none" w="med" len="med"/>
+                    </a:lnL>
+                    <a:lnR w="6350" cap="flat" cmpd="sng" algn="ctr">
+                      <a:solidFill>
+                        <a:srgbClr val="D5DBE3"/>
+                      </a:solidFill>
+                      <a:prstDash val="solid"/>
+                      <a:round/>
+                      <a:headEnd type="none" w="med" len="med"/>
+                      <a:tailEnd type="none" w="med" len="med"/>
+                    </a:lnR>
+                    <a:lnT w="6350" cap="flat" cmpd="sng" algn="ctr">
+                      <a:solidFill>
+                        <a:srgbClr val="D5DBE3"/>
+                      </a:solidFill>
+                      <a:prstDash val="solid"/>
+                      <a:round/>
+                      <a:headEnd type="none" w="med" len="med"/>
+                      <a:tailEnd type="none" w="med" len="med"/>
+                    </a:lnT>
+                    <a:lnB w="6350" cap="flat" cmpd="sng" algn="ctr">
+                      <a:solidFill>
+                        <a:srgbClr val="D5DBE3"/>
+                      </a:solidFill>
+                      <a:prstDash val="solid"/>
+                      <a:round/>
+                      <a:headEnd type="none" w="med" len="med"/>
+                      <a:tailEnd type="none" w="med" len="med"/>
+                    </a:lnB>
+                  </a:tcPr>
+                </a:tc>
+                <a:tc>
+                  <a:txBody>
+                    <a:bodyPr/>
+                    <a:lstStyle/>
+                    <a:p>
+                      <a:pPr algn="r" indent="0" marL="0">
+                        <a:buNone/>
+                      </a:pPr>
+                      <a:r>
+                        <a:rPr lang="en-US" sz="900" i="1" dirty="0">
+                          <a:solidFill>
+                            <a:srgbClr val="6B7280"/>
+                          </a:solidFill>
+                          <a:latin typeface="Calibri" pitchFamily="34" charset="0"/>
+                          <a:ea typeface="Calibri" pitchFamily="34" charset="-122"/>
+                          <a:cs typeface="Calibri" pitchFamily="34" charset="-120"/>
+                        </a:rPr>
                         <a:t>–</a:t>
                       </a:r>
                       <a:endParaRPr lang="en-US" sz="900" dirty="0">
@@ -6364,72 +6429,7 @@
                           <a:ea typeface="Calibri" pitchFamily="34" charset="-122"/>
                           <a:cs typeface="Calibri" pitchFamily="34" charset="-120"/>
                         </a:rPr>
-                        <a:t>–</a:t>
-                      </a:r>
-                      <a:endParaRPr lang="en-US" sz="900" dirty="0">
-                        <a:latin typeface="Calibri" charset="0"/>
-                        <a:ea typeface="Calibri" charset="0"/>
-                        <a:cs typeface="Calibri" charset="0"/>
-                      </a:endParaRPr>
-                    </a:p>
-                  </a:txBody>
-                  <a:tcPr marL="64008" marR="64008" marT="0" marB="0" anchor="ctr">
-                    <a:lnL w="6350" cap="flat" cmpd="sng" algn="ctr">
-                      <a:solidFill>
-                        <a:srgbClr val="D5DBE3"/>
-                      </a:solidFill>
-                      <a:prstDash val="solid"/>
-                      <a:round/>
-                      <a:headEnd type="none" w="med" len="med"/>
-                      <a:tailEnd type="none" w="med" len="med"/>
-                    </a:lnL>
-                    <a:lnR w="6350" cap="flat" cmpd="sng" algn="ctr">
-                      <a:solidFill>
-                        <a:srgbClr val="D5DBE3"/>
-                      </a:solidFill>
-                      <a:prstDash val="solid"/>
-                      <a:round/>
-                      <a:headEnd type="none" w="med" len="med"/>
-                      <a:tailEnd type="none" w="med" len="med"/>
-                    </a:lnR>
-                    <a:lnT w="6350" cap="flat" cmpd="sng" algn="ctr">
-                      <a:solidFill>
-                        <a:srgbClr val="D5DBE3"/>
-                      </a:solidFill>
-                      <a:prstDash val="solid"/>
-                      <a:round/>
-                      <a:headEnd type="none" w="med" len="med"/>
-                      <a:tailEnd type="none" w="med" len="med"/>
-                    </a:lnT>
-                    <a:lnB w="6350" cap="flat" cmpd="sng" algn="ctr">
-                      <a:solidFill>
-                        <a:srgbClr val="D5DBE3"/>
-                      </a:solidFill>
-                      <a:prstDash val="solid"/>
-                      <a:round/>
-                      <a:headEnd type="none" w="med" len="med"/>
-                      <a:tailEnd type="none" w="med" len="med"/>
-                    </a:lnB>
-                  </a:tcPr>
-                </a:tc>
-                <a:tc>
-                  <a:txBody>
-                    <a:bodyPr/>
-                    <a:lstStyle/>
-                    <a:p>
-                      <a:pPr algn="r" indent="0" marL="0">
-                        <a:buNone/>
-                      </a:pPr>
-                      <a:r>
-                        <a:rPr lang="en-US" sz="900" i="1" dirty="0">
-                          <a:solidFill>
-                            <a:srgbClr val="6B7280"/>
-                          </a:solidFill>
-                          <a:latin typeface="Calibri" pitchFamily="34" charset="0"/>
-                          <a:ea typeface="Calibri" pitchFamily="34" charset="-122"/>
-                          <a:cs typeface="Calibri" pitchFamily="34" charset="-120"/>
-                        </a:rPr>
-                        <a:t>133,2</a:t>
+                        <a:t>248,9</a:t>
                       </a:r>
                       <a:endParaRPr lang="en-US" sz="900" dirty="0">
                         <a:latin typeface="Calibri" charset="0"/>
@@ -6766,7 +6766,7 @@
                           <a:ea typeface="Calibri" pitchFamily="34" charset="-122"/>
                           <a:cs typeface="Calibri" pitchFamily="34" charset="-120"/>
                         </a:rPr>
-                        <a:t>-1 405,7</a:t>
+                        <a:t>-1 232,8</a:t>
                       </a:r>
                       <a:endParaRPr lang="en-US" sz="900" dirty="0">
                         <a:latin typeface="Calibri" charset="0"/>
@@ -6834,7 +6834,7 @@
                           <a:ea typeface="Calibri" pitchFamily="34" charset="-122"/>
                           <a:cs typeface="Calibri" pitchFamily="34" charset="-120"/>
                         </a:rPr>
-                        <a:t>-1 345,8</a:t>
+                        <a:t>-1 144,6</a:t>
                       </a:r>
                       <a:endParaRPr lang="en-US" sz="900" dirty="0">
                         <a:latin typeface="Calibri" charset="0"/>
@@ -6902,7 +6902,7 @@
                           <a:ea typeface="Calibri" pitchFamily="34" charset="-122"/>
                           <a:cs typeface="Calibri" pitchFamily="34" charset="-120"/>
                         </a:rPr>
-                        <a:t>-1 571,4</a:t>
+                        <a:t>-1 333,5</a:t>
                       </a:r>
                       <a:endParaRPr lang="en-US" sz="900" dirty="0">
                         <a:latin typeface="Calibri" charset="0"/>
@@ -6970,7 +6970,7 @@
                           <a:ea typeface="Calibri" pitchFamily="34" charset="-122"/>
                           <a:cs typeface="Calibri" pitchFamily="34" charset="-120"/>
                         </a:rPr>
-                        <a:t>-1 571,4</a:t>
+                        <a:t>-1 360,6</a:t>
                       </a:r>
                       <a:endParaRPr lang="en-US" sz="900" dirty="0">
                         <a:latin typeface="Calibri" charset="0"/>
@@ -7038,7 +7038,7 @@
                           <a:ea typeface="Calibri" pitchFamily="34" charset="-122"/>
                           <a:cs typeface="Calibri" pitchFamily="34" charset="-120"/>
                         </a:rPr>
-                        <a:t>-1 571,4</a:t>
+                        <a:t>-1 425,0</a:t>
                       </a:r>
                       <a:endParaRPr lang="en-US" sz="900" dirty="0">
                         <a:latin typeface="Calibri" charset="0"/>
@@ -10148,7 +10148,7 @@
                 <a:ea typeface="Calibri" pitchFamily="34" charset="-122"/>
                 <a:cs typeface="Calibri" pitchFamily="34" charset="-120"/>
               </a:rPr>
-              <a:t>déficits PICI 604,7 M, TERASSON 206,4 M, FINAFRICA 198,7 M, SCO AO 176,0 M, FIRST 175,3 M, RIVIERA 87,3 M ; excédents INFI SOFT 2,8 M.</a:t>
+              <a:t>déficits PICI 604,7 M, TERASSON 206,4 M, FINAFRICA 198,7 M, FIRST 175,3 M, RIVIERA 87,3 M, IMMONEUF 66,0 M ; excédents INFI SOFT 2,8 M.</a:t>
             </a:r>
             <a:endParaRPr lang="en-US" sz="1000" dirty="0"/>
           </a:p>
@@ -12018,7 +12018,7 @@
                           <a:ea typeface="Calibri" pitchFamily="34" charset="-122"/>
                           <a:cs typeface="Calibri" pitchFamily="34" charset="-120"/>
                         </a:rPr>
-                        <a:t>SCO AO</a:t>
+                        <a:t>FIRST</a:t>
                       </a:r>
                       <a:endParaRPr lang="en-US" sz="950" dirty="0">
                         <a:latin typeface="Calibri" charset="0"/>
@@ -12086,7 +12086,7 @@
                           <a:ea typeface="Calibri" pitchFamily="34" charset="-122"/>
                           <a:cs typeface="Calibri" pitchFamily="34" charset="-120"/>
                         </a:rPr>
-                        <a:t>Fournisseurs 131,2 · impôts 21,7 · cotisations 16,6 · salaires 24,3 · autres 15,0 · encaissements −3,6</a:t>
+                        <a:t>Fournisseurs 91,3 · impôts 1,6 · prêts 448,1 · encaissements −129,6</a:t>
                       </a:r>
                       <a:endParaRPr lang="en-US" sz="950" dirty="0">
                         <a:latin typeface="Calibri" charset="0"/>
@@ -12151,7 +12151,7 @@
                           <a:ea typeface="Calibri" pitchFamily="34" charset="-122"/>
                           <a:cs typeface="Calibri" pitchFamily="34" charset="-120"/>
                         </a:rPr>
-                        <a:t>208,7</a:t>
+                        <a:t>541,0</a:t>
                       </a:r>
                       <a:endParaRPr lang="en-US" sz="950" dirty="0">
                         <a:latin typeface="Calibri" charset="0"/>
@@ -12216,7 +12216,7 @@
                           <a:ea typeface="Calibri" pitchFamily="34" charset="-122"/>
                           <a:cs typeface="Calibri" pitchFamily="34" charset="-120"/>
                         </a:rPr>
-                        <a:t>BACI-Projet, puis BACI-CompteCourant</a:t>
+                        <a:t>STANBIC-FIRST, puis SOCIETE GENERALE-FIRST</a:t>
                       </a:r>
                       <a:endParaRPr lang="en-US" sz="950" dirty="0">
                         <a:latin typeface="Calibri" charset="0"/>
@@ -12281,7 +12281,7 @@
                           <a:ea typeface="Calibri" pitchFamily="34" charset="-122"/>
                           <a:cs typeface="Calibri" pitchFamily="34" charset="-120"/>
                         </a:rPr>
-                        <a:t>29,1</a:t>
+                        <a:t>236,1</a:t>
                       </a:r>
                       <a:endParaRPr lang="en-US" sz="950" dirty="0">
                         <a:latin typeface="Calibri" charset="0"/>
@@ -12346,7 +12346,7 @@
                           <a:ea typeface="Calibri" pitchFamily="34" charset="-122"/>
                           <a:cs typeface="Calibri" pitchFamily="34" charset="-120"/>
                         </a:rPr>
-                        <a:t>-176,0</a:t>
+                        <a:t>-175,3</a:t>
                       </a:r>
                       <a:endParaRPr lang="en-US" sz="950" dirty="0">
                         <a:latin typeface="Calibri" charset="0"/>
@@ -12416,7 +12416,7 @@
                           <a:ea typeface="Calibri" pitchFamily="34" charset="-122"/>
                           <a:cs typeface="Calibri" pitchFamily="34" charset="-120"/>
                         </a:rPr>
-                        <a:t>FIRST</a:t>
+                        <a:t>RIVIERA</a:t>
                       </a:r>
                       <a:endParaRPr lang="en-US" sz="950" dirty="0">
                         <a:latin typeface="Calibri" charset="0"/>
@@ -12484,7 +12484,7 @@
                           <a:ea typeface="Calibri" pitchFamily="34" charset="-122"/>
                           <a:cs typeface="Calibri" pitchFamily="34" charset="-120"/>
                         </a:rPr>
-                        <a:t>Fournisseurs 91,3 · impôts 1,6 · prêts 448,1 · encaissements −129,6</a:t>
+                        <a:t>Fournisseurs 17,6 · impôts 70,8 · cotisations 0,3</a:t>
                       </a:r>
                       <a:endParaRPr lang="en-US" sz="950" dirty="0">
                         <a:latin typeface="Calibri" charset="0"/>
@@ -12549,7 +12549,7 @@
                           <a:ea typeface="Calibri" pitchFamily="34" charset="-122"/>
                           <a:cs typeface="Calibri" pitchFamily="34" charset="-120"/>
                         </a:rPr>
-                        <a:t>541,0</a:t>
+                        <a:t>88,8</a:t>
                       </a:r>
                       <a:endParaRPr lang="en-US" sz="950" dirty="0">
                         <a:latin typeface="Calibri" charset="0"/>
@@ -12614,7 +12614,7 @@
                           <a:ea typeface="Calibri" pitchFamily="34" charset="-122"/>
                           <a:cs typeface="Calibri" pitchFamily="34" charset="-120"/>
                         </a:rPr>
-                        <a:t>STANBIC-FIRST, puis SOCIETE GENERALE-FIRST</a:t>
+                        <a:t>SOCIETE GENERALE-RIVIERA</a:t>
                       </a:r>
                       <a:endParaRPr lang="en-US" sz="950" dirty="0">
                         <a:latin typeface="Calibri" charset="0"/>
@@ -12679,7 +12679,7 @@
                           <a:ea typeface="Calibri" pitchFamily="34" charset="-122"/>
                           <a:cs typeface="Calibri" pitchFamily="34" charset="-120"/>
                         </a:rPr>
-                        <a:t>236,1</a:t>
+                        <a:t>1,5</a:t>
                       </a:r>
                       <a:endParaRPr lang="en-US" sz="950" dirty="0">
                         <a:latin typeface="Calibri" charset="0"/>
@@ -12744,7 +12744,7 @@
                           <a:ea typeface="Calibri" pitchFamily="34" charset="-122"/>
                           <a:cs typeface="Calibri" pitchFamily="34" charset="-120"/>
                         </a:rPr>
-                        <a:t>-175,3</a:t>
+                        <a:t>-87,3</a:t>
                       </a:r>
                       <a:endParaRPr lang="en-US" sz="950" dirty="0">
                         <a:latin typeface="Calibri" charset="0"/>
@@ -12814,7 +12814,7 @@
                           <a:ea typeface="Calibri" pitchFamily="34" charset="-122"/>
                           <a:cs typeface="Calibri" pitchFamily="34" charset="-120"/>
                         </a:rPr>
-                        <a:t>RIVIERA</a:t>
+                        <a:t>IMMONEUF</a:t>
                       </a:r>
                       <a:endParaRPr lang="en-US" sz="950" dirty="0">
                         <a:latin typeface="Calibri" charset="0"/>
@@ -12882,7 +12882,7 @@
                           <a:ea typeface="Calibri" pitchFamily="34" charset="-122"/>
                           <a:cs typeface="Calibri" pitchFamily="34" charset="-120"/>
                         </a:rPr>
-                        <a:t>Fournisseurs 17,6 · impôts 70,8 · cotisations 0,3</a:t>
+                        <a:t>Fournisseurs 6,2 · impôts 17,1 · cotisations 28,4 · salaires 26,0</a:t>
                       </a:r>
                       <a:endParaRPr lang="en-US" sz="950" dirty="0">
                         <a:latin typeface="Calibri" charset="0"/>
@@ -12947,7 +12947,7 @@
                           <a:ea typeface="Calibri" pitchFamily="34" charset="-122"/>
                           <a:cs typeface="Calibri" pitchFamily="34" charset="-120"/>
                         </a:rPr>
-                        <a:t>88,8</a:t>
+                        <a:t>77,8</a:t>
                       </a:r>
                       <a:endParaRPr lang="en-US" sz="950" dirty="0">
                         <a:latin typeface="Calibri" charset="0"/>
@@ -13012,7 +13012,7 @@
                           <a:ea typeface="Calibri" pitchFamily="34" charset="-122"/>
                           <a:cs typeface="Calibri" pitchFamily="34" charset="-120"/>
                         </a:rPr>
-                        <a:t>SOCIETE GENERALE-RIVIERA</a:t>
+                        <a:t>SOCIETE GENERALE-IMMONEUF, puis BACI - IMMONEUF</a:t>
                       </a:r>
                       <a:endParaRPr lang="en-US" sz="950" dirty="0">
                         <a:latin typeface="Calibri" charset="0"/>
@@ -13077,7 +13077,7 @@
                           <a:ea typeface="Calibri" pitchFamily="34" charset="-122"/>
                           <a:cs typeface="Calibri" pitchFamily="34" charset="-120"/>
                         </a:rPr>
-                        <a:t>1,5</a:t>
+                        <a:t>11,8</a:t>
                       </a:r>
                       <a:endParaRPr lang="en-US" sz="950" dirty="0">
                         <a:latin typeface="Calibri" charset="0"/>
@@ -13142,7 +13142,7 @@
                           <a:ea typeface="Calibri" pitchFamily="34" charset="-122"/>
                           <a:cs typeface="Calibri" pitchFamily="34" charset="-120"/>
                         </a:rPr>
-                        <a:t>-87,3</a:t>
+                        <a:t>-66,0</a:t>
                       </a:r>
                       <a:endParaRPr lang="en-US" sz="950" dirty="0">
                         <a:latin typeface="Calibri" charset="0"/>
@@ -13212,7 +13212,7 @@
                           <a:ea typeface="Calibri" pitchFamily="34" charset="-122"/>
                           <a:cs typeface="Calibri" pitchFamily="34" charset="-120"/>
                         </a:rPr>
-                        <a:t>IMMONEUF</a:t>
+                        <a:t>RHD CI</a:t>
                       </a:r>
                       <a:endParaRPr lang="en-US" sz="950" dirty="0">
                         <a:latin typeface="Calibri" charset="0"/>
@@ -13280,7 +13280,7 @@
                           <a:ea typeface="Calibri" pitchFamily="34" charset="-122"/>
                           <a:cs typeface="Calibri" pitchFamily="34" charset="-120"/>
                         </a:rPr>
-                        <a:t>Fournisseurs 6,2 · impôts 17,1 · cotisations 28,4 · salaires 26,0</a:t>
+                        <a:t>Impôts 38,9 · cotisations 11,1</a:t>
                       </a:r>
                       <a:endParaRPr lang="en-US" sz="950" dirty="0">
                         <a:latin typeface="Calibri" charset="0"/>
@@ -13345,7 +13345,7 @@
                           <a:ea typeface="Calibri" pitchFamily="34" charset="-122"/>
                           <a:cs typeface="Calibri" pitchFamily="34" charset="-120"/>
                         </a:rPr>
-                        <a:t>77,8</a:t>
+                        <a:t>50,0</a:t>
                       </a:r>
                       <a:endParaRPr lang="en-US" sz="950" dirty="0">
                         <a:latin typeface="Calibri" charset="0"/>
@@ -13410,7 +13410,7 @@
                           <a:ea typeface="Calibri" pitchFamily="34" charset="-122"/>
                           <a:cs typeface="Calibri" pitchFamily="34" charset="-120"/>
                         </a:rPr>
-                        <a:t>SOCIETE GENERALE-IMMONEUF, puis BACI - IMMONEUF</a:t>
+                        <a:t>Aucun compte : paiement pour son compte par une autre société</a:t>
                       </a:r>
                       <a:endParaRPr lang="en-US" sz="950" dirty="0">
                         <a:latin typeface="Calibri" charset="0"/>
@@ -13475,7 +13475,7 @@
                           <a:ea typeface="Calibri" pitchFamily="34" charset="-122"/>
                           <a:cs typeface="Calibri" pitchFamily="34" charset="-120"/>
                         </a:rPr>
-                        <a:t>11,8</a:t>
+                        <a:t>–</a:t>
                       </a:r>
                       <a:endParaRPr lang="en-US" sz="950" dirty="0">
                         <a:latin typeface="Calibri" charset="0"/>
@@ -13540,7 +13540,7 @@
                           <a:ea typeface="Calibri" pitchFamily="34" charset="-122"/>
                           <a:cs typeface="Calibri" pitchFamily="34" charset="-120"/>
                         </a:rPr>
-                        <a:t>-66,0</a:t>
+                        <a:t>-50,0</a:t>
                       </a:r>
                       <a:endParaRPr lang="en-US" sz="950" dirty="0">
                         <a:latin typeface="Calibri" charset="0"/>
@@ -13610,7 +13610,7 @@
                           <a:ea typeface="Calibri" pitchFamily="34" charset="-122"/>
                           <a:cs typeface="Calibri" pitchFamily="34" charset="-120"/>
                         </a:rPr>
-                        <a:t>RHD CI</a:t>
+                        <a:t>SCO AO</a:t>
                       </a:r>
                       <a:endParaRPr lang="en-US" sz="950" dirty="0">
                         <a:latin typeface="Calibri" charset="0"/>
@@ -13678,7 +13678,7 @@
                           <a:ea typeface="Calibri" pitchFamily="34" charset="-122"/>
                           <a:cs typeface="Calibri" pitchFamily="34" charset="-120"/>
                         </a:rPr>
-                        <a:t>Impôts 38,9 · cotisations 11,1</a:t>
+                        <a:t>Fournisseurs 145,7 · impôts 17,1 · cotisations 3,6 · salaires 11,6 · encaissements −119,4</a:t>
                       </a:r>
                       <a:endParaRPr lang="en-US" sz="950" dirty="0">
                         <a:latin typeface="Calibri" charset="0"/>
@@ -13743,7 +13743,7 @@
                           <a:ea typeface="Calibri" pitchFamily="34" charset="-122"/>
                           <a:cs typeface="Calibri" pitchFamily="34" charset="-120"/>
                         </a:rPr>
-                        <a:t>50,0</a:t>
+                        <a:t>178,0</a:t>
                       </a:r>
                       <a:endParaRPr lang="en-US" sz="950" dirty="0">
                         <a:latin typeface="Calibri" charset="0"/>
@@ -13808,7 +13808,7 @@
                           <a:ea typeface="Calibri" pitchFamily="34" charset="-122"/>
                           <a:cs typeface="Calibri" pitchFamily="34" charset="-120"/>
                         </a:rPr>
-                        <a:t>Aucun compte : paiement pour son compte par une autre société</a:t>
+                        <a:t>BACI-Projet, puis BACI-CompteCourant</a:t>
                       </a:r>
                       <a:endParaRPr lang="en-US" sz="950" dirty="0">
                         <a:latin typeface="Calibri" charset="0"/>
@@ -13873,7 +13873,7 @@
                           <a:ea typeface="Calibri" pitchFamily="34" charset="-122"/>
                           <a:cs typeface="Calibri" pitchFamily="34" charset="-120"/>
                         </a:rPr>
-                        <a:t>–</a:t>
+                        <a:t>29,1</a:t>
                       </a:r>
                       <a:endParaRPr lang="en-US" sz="950" dirty="0">
                         <a:latin typeface="Calibri" charset="0"/>
@@ -13938,7 +13938,7 @@
                           <a:ea typeface="Calibri" pitchFamily="34" charset="-122"/>
                           <a:cs typeface="Calibri" pitchFamily="34" charset="-120"/>
                         </a:rPr>
-                        <a:t>-50,0</a:t>
+                        <a:t>-29,5</a:t>
                       </a:r>
                       <a:endParaRPr lang="en-US" sz="950" dirty="0">
                         <a:latin typeface="Calibri" charset="0"/>
@@ -16041,7 +16041,7 @@
                 <a:ea typeface="Calibri" pitchFamily="34" charset="-122"/>
                 <a:cs typeface="Calibri" pitchFamily="34" charset="-120"/>
               </a:rPr>
-              <a:t>Déficits à couvrir d'ici S5 : 2 676,8 M – MFCFA</a:t>
+              <a:t>Déficits à couvrir d'ici S5 : 2 530,3 M – MFCFA</a:t>
             </a:r>
             <a:endParaRPr lang="en-US" sz="1300" dirty="0"/>
           </a:p>
@@ -17162,7 +17162,7 @@
                           <a:ea typeface="Calibri" pitchFamily="34" charset="-122"/>
                           <a:cs typeface="Calibri" pitchFamily="34" charset="-120"/>
                         </a:rPr>
-                        <a:t>SCO AO</a:t>
+                        <a:t>FIRST</a:t>
                       </a:r>
                       <a:endParaRPr lang="en-US" sz="950" dirty="0">
                         <a:latin typeface="Calibri" charset="0"/>
@@ -17227,7 +17227,7 @@
                           <a:ea typeface="Calibri" pitchFamily="34" charset="-122"/>
                           <a:cs typeface="Calibri" pitchFamily="34" charset="-120"/>
                         </a:rPr>
-                        <a:t>176,0</a:t>
+                        <a:t>175,3</a:t>
                       </a:r>
                       <a:endParaRPr lang="en-US" sz="950" dirty="0">
                         <a:latin typeface="Calibri" charset="0"/>
@@ -17427,7 +17427,7 @@
                           <a:ea typeface="Calibri" pitchFamily="34" charset="-122"/>
                           <a:cs typeface="Calibri" pitchFamily="34" charset="-120"/>
                         </a:rPr>
-                        <a:t>FIRST</a:t>
+                        <a:t>RIVIERA</a:t>
                       </a:r>
                       <a:endParaRPr lang="en-US" sz="950" dirty="0">
                         <a:latin typeface="Calibri" charset="0"/>
@@ -17492,7 +17492,7 @@
                           <a:ea typeface="Calibri" pitchFamily="34" charset="-122"/>
                           <a:cs typeface="Calibri" pitchFamily="34" charset="-120"/>
                         </a:rPr>
-                        <a:t>175,3</a:t>
+                        <a:t>87,3</a:t>
                       </a:r>
                       <a:endParaRPr lang="en-US" sz="950" dirty="0">
                         <a:latin typeface="Calibri" charset="0"/>
@@ -17692,7 +17692,7 @@
                           <a:ea typeface="Calibri" pitchFamily="34" charset="-122"/>
                           <a:cs typeface="Calibri" pitchFamily="34" charset="-120"/>
                         </a:rPr>
-                        <a:t>RIVIERA</a:t>
+                        <a:t>IMMONEUF</a:t>
                       </a:r>
                       <a:endParaRPr lang="en-US" sz="950" dirty="0">
                         <a:latin typeface="Calibri" charset="0"/>
@@ -17757,7 +17757,7 @@
                           <a:ea typeface="Calibri" pitchFamily="34" charset="-122"/>
                           <a:cs typeface="Calibri" pitchFamily="34" charset="-120"/>
                         </a:rPr>
-                        <a:t>87,3</a:t>
+                        <a:t>66,0</a:t>
                       </a:r>
                       <a:endParaRPr lang="en-US" sz="950" dirty="0">
                         <a:latin typeface="Calibri" charset="0"/>
@@ -17957,7 +17957,7 @@
                           <a:ea typeface="Calibri" pitchFamily="34" charset="-122"/>
                           <a:cs typeface="Calibri" pitchFamily="34" charset="-120"/>
                         </a:rPr>
-                        <a:t>IMMONEUF</a:t>
+                        <a:t>RHD CI</a:t>
                       </a:r>
                       <a:endParaRPr lang="en-US" sz="950" dirty="0">
                         <a:latin typeface="Calibri" charset="0"/>
@@ -18022,7 +18022,7 @@
                           <a:ea typeface="Calibri" pitchFamily="34" charset="-122"/>
                           <a:cs typeface="Calibri" pitchFamily="34" charset="-120"/>
                         </a:rPr>
-                        <a:t>66,0</a:t>
+                        <a:t>50,0</a:t>
                       </a:r>
                       <a:endParaRPr lang="en-US" sz="950" dirty="0">
                         <a:latin typeface="Calibri" charset="0"/>
@@ -18222,7 +18222,7 @@
                           <a:ea typeface="Calibri" pitchFamily="34" charset="-122"/>
                           <a:cs typeface="Calibri" pitchFamily="34" charset="-120"/>
                         </a:rPr>
-                        <a:t>RHD CI</a:t>
+                        <a:t>SCO AO</a:t>
                       </a:r>
                       <a:endParaRPr lang="en-US" sz="950" dirty="0">
                         <a:latin typeface="Calibri" charset="0"/>
@@ -18287,7 +18287,7 @@
                           <a:ea typeface="Calibri" pitchFamily="34" charset="-122"/>
                           <a:cs typeface="Calibri" pitchFamily="34" charset="-120"/>
                         </a:rPr>
-                        <a:t>50,0</a:t>
+                        <a:t>29,5</a:t>
                       </a:r>
                       <a:endParaRPr lang="en-US" sz="950" dirty="0">
                         <a:latin typeface="Calibri" charset="0"/>
@@ -18420,7 +18420,7 @@
                           <a:ea typeface="Calibri" pitchFamily="34" charset="-122"/>
                           <a:cs typeface="Calibri" pitchFamily="34" charset="-120"/>
                         </a:rPr>
-                        <a:t>S1</a:t>
+                        <a:t>S5</a:t>
                       </a:r>
                       <a:endParaRPr lang="en-US" sz="950" dirty="0">
                         <a:latin typeface="Calibri" charset="0"/>
@@ -19615,7 +19615,7 @@
                           <a:ea typeface="Calibri" pitchFamily="34" charset="-122"/>
                           <a:cs typeface="Calibri" pitchFamily="34" charset="-120"/>
                         </a:rPr>
-                        <a:t>2 676,8</a:t>
+                        <a:t>2 530,3</a:t>
                       </a:r>
                       <a:endParaRPr lang="en-US" sz="950" dirty="0">
                         <a:latin typeface="Calibri" charset="0"/>
@@ -19882,7 +19882,7 @@
                 <a:ea typeface="Calibri" pitchFamily="34" charset="-122"/>
                 <a:cs typeface="Calibri" pitchFamily="34" charset="-120"/>
               </a:rPr>
-              <a:t>1 574,2 M</a:t>
+              <a:t>1 427,7 M</a:t>
             </a:r>
             <a:endParaRPr lang="en-US" sz="1400" dirty="0"/>
           </a:p>
@@ -19921,7 +19921,7 @@
                 <a:ea typeface="Calibri" pitchFamily="34" charset="-122"/>
                 <a:cs typeface="Calibri" pitchFamily="34" charset="-120"/>
               </a:rPr>
-              <a:t>Un dossier par société en déficit (10), tiré par tranche : 1 408,5 M pour S1, le solde à l'échéance. Remboursement à la mise en place des financements.</a:t>
+              <a:t>Un dossier par société en déficit (10), tiré par tranche : 1 256,8 M pour S1, le solde à l'échéance. Remboursement à la mise en place des financements.</a:t>
             </a:r>
             <a:endParaRPr lang="en-US" sz="1100" dirty="0"/>
           </a:p>
@@ -20293,7 +20293,7 @@
                 <a:ea typeface="Calibri" pitchFamily="34" charset="-122"/>
                 <a:cs typeface="Calibri" pitchFamily="34" charset="-120"/>
               </a:rPr>
-              <a:t>Choisir la solution des sociétés en déficit (1 574,2 M) : crédit spot, avances intragroupe ou combinaison.</a:t>
+              <a:t>Choisir la solution des sociétés en déficit (1 427,7 M) : crédit spot, avances intragroupe ou combinaison.</a:t>
             </a:r>
             <a:endParaRPr lang="en-US" sz="1300" dirty="0"/>
           </a:p>
@@ -20335,7 +20335,7 @@
                 <a:ea typeface="Calibri" pitchFamily="34" charset="-122"/>
                 <a:cs typeface="Calibri" pitchFamily="34" charset="-120"/>
               </a:rPr>
-              <a:t>Confirmer les encaissements prévus (133,2 M), dont Loyer octobre 2026 – DC/BR.</a:t>
+              <a:t>Confirmer les encaissements prévus (248,9 M), dont SUD CONSTRUCTION – BCEAO (En attente … relance à effectuer).</a:t>
             </a:r>
             <a:endParaRPr lang="en-US" sz="1300" dirty="0"/>
           </a:p>
@@ -20616,7 +20616,7 @@
                 <a:ea typeface="Calibri" pitchFamily="34" charset="-122"/>
                 <a:cs typeface="Calibri" pitchFamily="34" charset="-120"/>
               </a:rPr>
-              <a:t>5 273,4 M</a:t>
+              <a:t>5 100,4 M</a:t>
             </a:r>
             <a:endParaRPr lang="en-US" sz="2200" dirty="0"/>
           </a:p>
@@ -20931,7 +20931,7 @@
                 <a:ea typeface="Calibri" pitchFamily="34" charset="-122"/>
                 <a:cs typeface="Calibri" pitchFamily="34" charset="-120"/>
               </a:rPr>
-              <a:t>1 659,6 M</a:t>
+              <a:t>1 509,2 M</a:t>
             </a:r>
             <a:endParaRPr lang="en-US" sz="2200" dirty="0"/>
           </a:p>
@@ -24332,7 +24332,7 @@
                           <a:ea typeface="Calibri" pitchFamily="34" charset="-122"/>
                           <a:cs typeface="Calibri" pitchFamily="34" charset="-120"/>
                         </a:rPr>
-                        <a:t>-180,9</a:t>
+                        <a:t>-7,9</a:t>
                       </a:r>
                       <a:endParaRPr lang="en-US" sz="850" dirty="0">
                         <a:latin typeface="Calibri" charset="0"/>
@@ -24456,13 +24456,78 @@
                       <a:r>
                         <a:rPr lang="en-US" sz="850" b="1" dirty="0">
                           <a:solidFill>
+                            <a:srgbClr val="5E9B7E"/>
+                          </a:solidFill>
+                          <a:latin typeface="Calibri" pitchFamily="34" charset="0"/>
+                          <a:ea typeface="Calibri" pitchFamily="34" charset="-122"/>
+                          <a:cs typeface="Calibri" pitchFamily="34" charset="-120"/>
+                        </a:rPr>
+                        <a:t>21,2</a:t>
+                      </a:r>
+                      <a:endParaRPr lang="en-US" sz="850" dirty="0">
+                        <a:latin typeface="Calibri" charset="0"/>
+                        <a:ea typeface="Calibri" charset="0"/>
+                        <a:cs typeface="Calibri" charset="0"/>
+                      </a:endParaRPr>
+                    </a:p>
+                  </a:txBody>
+                  <a:tcPr marL="64008" marR="64008" marT="0" marB="0" anchor="ctr">
+                    <a:lnL w="6350" cap="flat" cmpd="sng" algn="ctr">
+                      <a:solidFill>
+                        <a:srgbClr val="D5DBE3"/>
+                      </a:solidFill>
+                      <a:prstDash val="solid"/>
+                      <a:round/>
+                      <a:headEnd type="none" w="med" len="med"/>
+                      <a:tailEnd type="none" w="med" len="med"/>
+                    </a:lnL>
+                    <a:lnR w="6350" cap="flat" cmpd="sng" algn="ctr">
+                      <a:solidFill>
+                        <a:srgbClr val="D5DBE3"/>
+                      </a:solidFill>
+                      <a:prstDash val="solid"/>
+                      <a:round/>
+                      <a:headEnd type="none" w="med" len="med"/>
+                      <a:tailEnd type="none" w="med" len="med"/>
+                    </a:lnR>
+                    <a:lnT w="6350" cap="flat" cmpd="sng" algn="ctr">
+                      <a:solidFill>
+                        <a:srgbClr val="D5DBE3"/>
+                      </a:solidFill>
+                      <a:prstDash val="solid"/>
+                      <a:round/>
+                      <a:headEnd type="none" w="med" len="med"/>
+                      <a:tailEnd type="none" w="med" len="med"/>
+                    </a:lnT>
+                    <a:lnB w="6350" cap="flat" cmpd="sng" algn="ctr">
+                      <a:solidFill>
+                        <a:srgbClr val="D5DBE3"/>
+                      </a:solidFill>
+                      <a:prstDash val="solid"/>
+                      <a:round/>
+                      <a:headEnd type="none" w="med" len="med"/>
+                      <a:tailEnd type="none" w="med" len="med"/>
+                    </a:lnB>
+                  </a:tcPr>
+                </a:tc>
+                <a:tc>
+                  <a:txBody>
+                    <a:bodyPr/>
+                    <a:lstStyle/>
+                    <a:p>
+                      <a:pPr algn="r" indent="0" marL="0">
+                        <a:buNone/>
+                      </a:pPr>
+                      <a:r>
+                        <a:rPr lang="en-US" sz="850" b="1" dirty="0">
+                          <a:solidFill>
                             <a:srgbClr val="B3261E"/>
                           </a:solidFill>
                           <a:latin typeface="Calibri" pitchFamily="34" charset="0"/>
                           <a:ea typeface="Calibri" pitchFamily="34" charset="-122"/>
                           <a:cs typeface="Calibri" pitchFamily="34" charset="-120"/>
                         </a:rPr>
-                        <a:t>-151,7</a:t>
+                        <a:t>2,5</a:t>
                       </a:r>
                       <a:endParaRPr lang="en-US" sz="850" dirty="0">
                         <a:latin typeface="Calibri" charset="0"/>
@@ -24513,6 +24578,73 @@
                     </a:solidFill>
                   </a:tcPr>
                 </a:tc>
+              </a:tr>
+              <a:tr h="224028">
+                <a:tc>
+                  <a:txBody>
+                    <a:bodyPr/>
+                    <a:lstStyle/>
+                    <a:p>
+                      <a:pPr algn="l" indent="0" marL="0">
+                        <a:buNone/>
+                      </a:pPr>
+                      <a:r>
+                        <a:rPr lang="en-US" sz="850" b="1" dirty="0">
+                          <a:solidFill>
+                            <a:srgbClr val="1F2933"/>
+                          </a:solidFill>
+                          <a:latin typeface="Calibri" pitchFamily="34" charset="0"/>
+                          <a:ea typeface="Calibri" pitchFamily="34" charset="-122"/>
+                          <a:cs typeface="Calibri" pitchFamily="34" charset="-120"/>
+                        </a:rPr>
+                        <a:t>IMMONEUF</a:t>
+                      </a:r>
+                      <a:endParaRPr lang="en-US" sz="850" dirty="0">
+                        <a:latin typeface="Calibri" charset="0"/>
+                        <a:ea typeface="Calibri" charset="0"/>
+                        <a:cs typeface="Calibri" charset="0"/>
+                      </a:endParaRPr>
+                    </a:p>
+                  </a:txBody>
+                  <a:tcPr marL="64008" marR="64008" marT="0" marB="0" anchor="ctr">
+                    <a:lnL w="6350" cap="flat" cmpd="sng" algn="ctr">
+                      <a:solidFill>
+                        <a:srgbClr val="D5DBE3"/>
+                      </a:solidFill>
+                      <a:prstDash val="solid"/>
+                      <a:round/>
+                      <a:headEnd type="none" w="med" len="med"/>
+                      <a:tailEnd type="none" w="med" len="med"/>
+                    </a:lnL>
+                    <a:lnR w="6350" cap="flat" cmpd="sng" algn="ctr">
+                      <a:solidFill>
+                        <a:srgbClr val="D5DBE3"/>
+                      </a:solidFill>
+                      <a:prstDash val="solid"/>
+                      <a:round/>
+                      <a:headEnd type="none" w="med" len="med"/>
+                      <a:tailEnd type="none" w="med" len="med"/>
+                    </a:lnR>
+                    <a:lnT w="6350" cap="flat" cmpd="sng" algn="ctr">
+                      <a:solidFill>
+                        <a:srgbClr val="D5DBE3"/>
+                      </a:solidFill>
+                      <a:prstDash val="solid"/>
+                      <a:round/>
+                      <a:headEnd type="none" w="med" len="med"/>
+                      <a:tailEnd type="none" w="med" len="med"/>
+                    </a:lnT>
+                    <a:lnB w="6350" cap="flat" cmpd="sng" algn="ctr">
+                      <a:solidFill>
+                        <a:srgbClr val="D5DBE3"/>
+                      </a:solidFill>
+                      <a:prstDash val="solid"/>
+                      <a:round/>
+                      <a:headEnd type="none" w="med" len="med"/>
+                      <a:tailEnd type="none" w="med" len="med"/>
+                    </a:lnB>
+                  </a:tcPr>
+                </a:tc>
                 <a:tc>
                   <a:txBody>
                     <a:bodyPr/>
@@ -24522,6 +24654,201 @@
                         <a:buNone/>
                       </a:pPr>
                       <a:r>
+                        <a:rPr lang="en-US" sz="850" dirty="0">
+                          <a:solidFill>
+                            <a:srgbClr val="1F2933"/>
+                          </a:solidFill>
+                          <a:latin typeface="Calibri" pitchFamily="34" charset="0"/>
+                          <a:ea typeface="Calibri" pitchFamily="34" charset="-122"/>
+                          <a:cs typeface="Calibri" pitchFamily="34" charset="-120"/>
+                        </a:rPr>
+                        <a:t>11,8</a:t>
+                      </a:r>
+                      <a:endParaRPr lang="en-US" sz="850" dirty="0">
+                        <a:latin typeface="Calibri" charset="0"/>
+                        <a:ea typeface="Calibri" charset="0"/>
+                        <a:cs typeface="Calibri" charset="0"/>
+                      </a:endParaRPr>
+                    </a:p>
+                  </a:txBody>
+                  <a:tcPr marL="64008" marR="64008" marT="0" marB="0" anchor="ctr">
+                    <a:lnL w="6350" cap="flat" cmpd="sng" algn="ctr">
+                      <a:solidFill>
+                        <a:srgbClr val="D5DBE3"/>
+                      </a:solidFill>
+                      <a:prstDash val="solid"/>
+                      <a:round/>
+                      <a:headEnd type="none" w="med" len="med"/>
+                      <a:tailEnd type="none" w="med" len="med"/>
+                    </a:lnL>
+                    <a:lnR w="6350" cap="flat" cmpd="sng" algn="ctr">
+                      <a:solidFill>
+                        <a:srgbClr val="D5DBE3"/>
+                      </a:solidFill>
+                      <a:prstDash val="solid"/>
+                      <a:round/>
+                      <a:headEnd type="none" w="med" len="med"/>
+                      <a:tailEnd type="none" w="med" len="med"/>
+                    </a:lnR>
+                    <a:lnT w="6350" cap="flat" cmpd="sng" algn="ctr">
+                      <a:solidFill>
+                        <a:srgbClr val="D5DBE3"/>
+                      </a:solidFill>
+                      <a:prstDash val="solid"/>
+                      <a:round/>
+                      <a:headEnd type="none" w="med" len="med"/>
+                      <a:tailEnd type="none" w="med" len="med"/>
+                    </a:lnT>
+                    <a:lnB w="6350" cap="flat" cmpd="sng" algn="ctr">
+                      <a:solidFill>
+                        <a:srgbClr val="D5DBE3"/>
+                      </a:solidFill>
+                      <a:prstDash val="solid"/>
+                      <a:round/>
+                      <a:headEnd type="none" w="med" len="med"/>
+                      <a:tailEnd type="none" w="med" len="med"/>
+                    </a:lnB>
+                  </a:tcPr>
+                </a:tc>
+                <a:tc>
+                  <a:txBody>
+                    <a:bodyPr/>
+                    <a:lstStyle/>
+                    <a:p>
+                      <a:pPr algn="r" indent="0" marL="0">
+                        <a:buNone/>
+                      </a:pPr>
+                      <a:r>
+                        <a:rPr lang="en-US" sz="850" dirty="0">
+                          <a:solidFill>
+                            <a:srgbClr val="1F2933"/>
+                          </a:solidFill>
+                          <a:latin typeface="Calibri" pitchFamily="34" charset="0"/>
+                          <a:ea typeface="Calibri" pitchFamily="34" charset="-122"/>
+                          <a:cs typeface="Calibri" pitchFamily="34" charset="-120"/>
+                        </a:rPr>
+                        <a:t>-37,3</a:t>
+                      </a:r>
+                      <a:endParaRPr lang="en-US" sz="850" dirty="0">
+                        <a:latin typeface="Calibri" charset="0"/>
+                        <a:ea typeface="Calibri" charset="0"/>
+                        <a:cs typeface="Calibri" charset="0"/>
+                      </a:endParaRPr>
+                    </a:p>
+                  </a:txBody>
+                  <a:tcPr marL="64008" marR="64008" marT="0" marB="0" anchor="ctr">
+                    <a:lnL w="6350" cap="flat" cmpd="sng" algn="ctr">
+                      <a:solidFill>
+                        <a:srgbClr val="D5DBE3"/>
+                      </a:solidFill>
+                      <a:prstDash val="solid"/>
+                      <a:round/>
+                      <a:headEnd type="none" w="med" len="med"/>
+                      <a:tailEnd type="none" w="med" len="med"/>
+                    </a:lnL>
+                    <a:lnR w="6350" cap="flat" cmpd="sng" algn="ctr">
+                      <a:solidFill>
+                        <a:srgbClr val="D5DBE3"/>
+                      </a:solidFill>
+                      <a:prstDash val="solid"/>
+                      <a:round/>
+                      <a:headEnd type="none" w="med" len="med"/>
+                      <a:tailEnd type="none" w="med" len="med"/>
+                    </a:lnR>
+                    <a:lnT w="6350" cap="flat" cmpd="sng" algn="ctr">
+                      <a:solidFill>
+                        <a:srgbClr val="D5DBE3"/>
+                      </a:solidFill>
+                      <a:prstDash val="solid"/>
+                      <a:round/>
+                      <a:headEnd type="none" w="med" len="med"/>
+                      <a:tailEnd type="none" w="med" len="med"/>
+                    </a:lnT>
+                    <a:lnB w="6350" cap="flat" cmpd="sng" algn="ctr">
+                      <a:solidFill>
+                        <a:srgbClr val="D5DBE3"/>
+                      </a:solidFill>
+                      <a:prstDash val="solid"/>
+                      <a:round/>
+                      <a:headEnd type="none" w="med" len="med"/>
+                      <a:tailEnd type="none" w="med" len="med"/>
+                    </a:lnB>
+                  </a:tcPr>
+                </a:tc>
+                <a:tc>
+                  <a:txBody>
+                    <a:bodyPr/>
+                    <a:lstStyle/>
+                    <a:p>
+                      <a:pPr algn="r" indent="0" marL="0">
+                        <a:buNone/>
+                      </a:pPr>
+                      <a:r>
+                        <a:rPr lang="en-US" sz="850" dirty="0">
+                          <a:solidFill>
+                            <a:srgbClr val="1F2933"/>
+                          </a:solidFill>
+                          <a:latin typeface="Calibri" pitchFamily="34" charset="0"/>
+                          <a:ea typeface="Calibri" pitchFamily="34" charset="-122"/>
+                          <a:cs typeface="Calibri" pitchFamily="34" charset="-120"/>
+                        </a:rPr>
+                        <a:t>–</a:t>
+                      </a:r>
+                      <a:endParaRPr lang="en-US" sz="850" dirty="0">
+                        <a:latin typeface="Calibri" charset="0"/>
+                        <a:ea typeface="Calibri" charset="0"/>
+                        <a:cs typeface="Calibri" charset="0"/>
+                      </a:endParaRPr>
+                    </a:p>
+                  </a:txBody>
+                  <a:tcPr marL="64008" marR="64008" marT="0" marB="0" anchor="ctr">
+                    <a:lnL w="6350" cap="flat" cmpd="sng" algn="ctr">
+                      <a:solidFill>
+                        <a:srgbClr val="D5DBE3"/>
+                      </a:solidFill>
+                      <a:prstDash val="solid"/>
+                      <a:round/>
+                      <a:headEnd type="none" w="med" len="med"/>
+                      <a:tailEnd type="none" w="med" len="med"/>
+                    </a:lnL>
+                    <a:lnR w="6350" cap="flat" cmpd="sng" algn="ctr">
+                      <a:solidFill>
+                        <a:srgbClr val="D5DBE3"/>
+                      </a:solidFill>
+                      <a:prstDash val="solid"/>
+                      <a:round/>
+                      <a:headEnd type="none" w="med" len="med"/>
+                      <a:tailEnd type="none" w="med" len="med"/>
+                    </a:lnR>
+                    <a:lnT w="6350" cap="flat" cmpd="sng" algn="ctr">
+                      <a:solidFill>
+                        <a:srgbClr val="D5DBE3"/>
+                      </a:solidFill>
+                      <a:prstDash val="solid"/>
+                      <a:round/>
+                      <a:headEnd type="none" w="med" len="med"/>
+                      <a:tailEnd type="none" w="med" len="med"/>
+                    </a:lnT>
+                    <a:lnB w="6350" cap="flat" cmpd="sng" algn="ctr">
+                      <a:solidFill>
+                        <a:srgbClr val="D5DBE3"/>
+                      </a:solidFill>
+                      <a:prstDash val="solid"/>
+                      <a:round/>
+                      <a:headEnd type="none" w="med" len="med"/>
+                      <a:tailEnd type="none" w="med" len="med"/>
+                    </a:lnB>
+                  </a:tcPr>
+                </a:tc>
+                <a:tc>
+                  <a:txBody>
+                    <a:bodyPr/>
+                    <a:lstStyle/>
+                    <a:p>
+                      <a:pPr algn="r" indent="0" marL="0">
+                        <a:buNone/>
+                      </a:pPr>
+                      <a:r>
                         <a:rPr lang="en-US" sz="850" b="1" dirty="0">
                           <a:solidFill>
                             <a:srgbClr val="B3261E"/>
@@ -24530,7 +24857,7 @@
                           <a:ea typeface="Calibri" pitchFamily="34" charset="-122"/>
                           <a:cs typeface="Calibri" pitchFamily="34" charset="-120"/>
                         </a:rPr>
-                        <a:t>152,9</a:t>
+                        <a:t>-25,6</a:t>
                       </a:r>
                       <a:endParaRPr lang="en-US" sz="850" dirty="0">
                         <a:latin typeface="Calibri" charset="0"/>
@@ -24581,286 +24908,24 @@
                     </a:solidFill>
                   </a:tcPr>
                 </a:tc>
-              </a:tr>
-              <a:tr h="224028">
-                <a:tc>
-                  <a:txBody>
-                    <a:bodyPr/>
-                    <a:lstStyle/>
-                    <a:p>
-                      <a:pPr algn="l" indent="0" marL="0">
+                <a:tc>
+                  <a:txBody>
+                    <a:bodyPr/>
+                    <a:lstStyle/>
+                    <a:p>
+                      <a:pPr algn="r" indent="0" marL="0">
                         <a:buNone/>
                       </a:pPr>
                       <a:r>
                         <a:rPr lang="en-US" sz="850" b="1" dirty="0">
                           <a:solidFill>
-                            <a:srgbClr val="1F2933"/>
-                          </a:solidFill>
-                          <a:latin typeface="Calibri" pitchFamily="34" charset="0"/>
-                          <a:ea typeface="Calibri" pitchFamily="34" charset="-122"/>
-                          <a:cs typeface="Calibri" pitchFamily="34" charset="-120"/>
-                        </a:rPr>
-                        <a:t>IMMONEUF</a:t>
-                      </a:r>
-                      <a:endParaRPr lang="en-US" sz="850" dirty="0">
-                        <a:latin typeface="Calibri" charset="0"/>
-                        <a:ea typeface="Calibri" charset="0"/>
-                        <a:cs typeface="Calibri" charset="0"/>
-                      </a:endParaRPr>
-                    </a:p>
-                  </a:txBody>
-                  <a:tcPr marL="64008" marR="64008" marT="0" marB="0" anchor="ctr">
-                    <a:lnL w="6350" cap="flat" cmpd="sng" algn="ctr">
-                      <a:solidFill>
-                        <a:srgbClr val="D5DBE3"/>
-                      </a:solidFill>
-                      <a:prstDash val="solid"/>
-                      <a:round/>
-                      <a:headEnd type="none" w="med" len="med"/>
-                      <a:tailEnd type="none" w="med" len="med"/>
-                    </a:lnL>
-                    <a:lnR w="6350" cap="flat" cmpd="sng" algn="ctr">
-                      <a:solidFill>
-                        <a:srgbClr val="D5DBE3"/>
-                      </a:solidFill>
-                      <a:prstDash val="solid"/>
-                      <a:round/>
-                      <a:headEnd type="none" w="med" len="med"/>
-                      <a:tailEnd type="none" w="med" len="med"/>
-                    </a:lnR>
-                    <a:lnT w="6350" cap="flat" cmpd="sng" algn="ctr">
-                      <a:solidFill>
-                        <a:srgbClr val="D5DBE3"/>
-                      </a:solidFill>
-                      <a:prstDash val="solid"/>
-                      <a:round/>
-                      <a:headEnd type="none" w="med" len="med"/>
-                      <a:tailEnd type="none" w="med" len="med"/>
-                    </a:lnT>
-                    <a:lnB w="6350" cap="flat" cmpd="sng" algn="ctr">
-                      <a:solidFill>
-                        <a:srgbClr val="D5DBE3"/>
-                      </a:solidFill>
-                      <a:prstDash val="solid"/>
-                      <a:round/>
-                      <a:headEnd type="none" w="med" len="med"/>
-                      <a:tailEnd type="none" w="med" len="med"/>
-                    </a:lnB>
-                  </a:tcPr>
-                </a:tc>
-                <a:tc>
-                  <a:txBody>
-                    <a:bodyPr/>
-                    <a:lstStyle/>
-                    <a:p>
-                      <a:pPr algn="r" indent="0" marL="0">
-                        <a:buNone/>
-                      </a:pPr>
-                      <a:r>
-                        <a:rPr lang="en-US" sz="850" dirty="0">
-                          <a:solidFill>
-                            <a:srgbClr val="1F2933"/>
-                          </a:solidFill>
-                          <a:latin typeface="Calibri" pitchFamily="34" charset="0"/>
-                          <a:ea typeface="Calibri" pitchFamily="34" charset="-122"/>
-                          <a:cs typeface="Calibri" pitchFamily="34" charset="-120"/>
-                        </a:rPr>
-                        <a:t>11,8</a:t>
-                      </a:r>
-                      <a:endParaRPr lang="en-US" sz="850" dirty="0">
-                        <a:latin typeface="Calibri" charset="0"/>
-                        <a:ea typeface="Calibri" charset="0"/>
-                        <a:cs typeface="Calibri" charset="0"/>
-                      </a:endParaRPr>
-                    </a:p>
-                  </a:txBody>
-                  <a:tcPr marL="64008" marR="64008" marT="0" marB="0" anchor="ctr">
-                    <a:lnL w="6350" cap="flat" cmpd="sng" algn="ctr">
-                      <a:solidFill>
-                        <a:srgbClr val="D5DBE3"/>
-                      </a:solidFill>
-                      <a:prstDash val="solid"/>
-                      <a:round/>
-                      <a:headEnd type="none" w="med" len="med"/>
-                      <a:tailEnd type="none" w="med" len="med"/>
-                    </a:lnL>
-                    <a:lnR w="6350" cap="flat" cmpd="sng" algn="ctr">
-                      <a:solidFill>
-                        <a:srgbClr val="D5DBE3"/>
-                      </a:solidFill>
-                      <a:prstDash val="solid"/>
-                      <a:round/>
-                      <a:headEnd type="none" w="med" len="med"/>
-                      <a:tailEnd type="none" w="med" len="med"/>
-                    </a:lnR>
-                    <a:lnT w="6350" cap="flat" cmpd="sng" algn="ctr">
-                      <a:solidFill>
-                        <a:srgbClr val="D5DBE3"/>
-                      </a:solidFill>
-                      <a:prstDash val="solid"/>
-                      <a:round/>
-                      <a:headEnd type="none" w="med" len="med"/>
-                      <a:tailEnd type="none" w="med" len="med"/>
-                    </a:lnT>
-                    <a:lnB w="6350" cap="flat" cmpd="sng" algn="ctr">
-                      <a:solidFill>
-                        <a:srgbClr val="D5DBE3"/>
-                      </a:solidFill>
-                      <a:prstDash val="solid"/>
-                      <a:round/>
-                      <a:headEnd type="none" w="med" len="med"/>
-                      <a:tailEnd type="none" w="med" len="med"/>
-                    </a:lnB>
-                  </a:tcPr>
-                </a:tc>
-                <a:tc>
-                  <a:txBody>
-                    <a:bodyPr/>
-                    <a:lstStyle/>
-                    <a:p>
-                      <a:pPr algn="r" indent="0" marL="0">
-                        <a:buNone/>
-                      </a:pPr>
-                      <a:r>
-                        <a:rPr lang="en-US" sz="850" dirty="0">
-                          <a:solidFill>
-                            <a:srgbClr val="1F2933"/>
-                          </a:solidFill>
-                          <a:latin typeface="Calibri" pitchFamily="34" charset="0"/>
-                          <a:ea typeface="Calibri" pitchFamily="34" charset="-122"/>
-                          <a:cs typeface="Calibri" pitchFamily="34" charset="-120"/>
-                        </a:rPr>
-                        <a:t>-37,3</a:t>
-                      </a:r>
-                      <a:endParaRPr lang="en-US" sz="850" dirty="0">
-                        <a:latin typeface="Calibri" charset="0"/>
-                        <a:ea typeface="Calibri" charset="0"/>
-                        <a:cs typeface="Calibri" charset="0"/>
-                      </a:endParaRPr>
-                    </a:p>
-                  </a:txBody>
-                  <a:tcPr marL="64008" marR="64008" marT="0" marB="0" anchor="ctr">
-                    <a:lnL w="6350" cap="flat" cmpd="sng" algn="ctr">
-                      <a:solidFill>
-                        <a:srgbClr val="D5DBE3"/>
-                      </a:solidFill>
-                      <a:prstDash val="solid"/>
-                      <a:round/>
-                      <a:headEnd type="none" w="med" len="med"/>
-                      <a:tailEnd type="none" w="med" len="med"/>
-                    </a:lnL>
-                    <a:lnR w="6350" cap="flat" cmpd="sng" algn="ctr">
-                      <a:solidFill>
-                        <a:srgbClr val="D5DBE3"/>
-                      </a:solidFill>
-                      <a:prstDash val="solid"/>
-                      <a:round/>
-                      <a:headEnd type="none" w="med" len="med"/>
-                      <a:tailEnd type="none" w="med" len="med"/>
-                    </a:lnR>
-                    <a:lnT w="6350" cap="flat" cmpd="sng" algn="ctr">
-                      <a:solidFill>
-                        <a:srgbClr val="D5DBE3"/>
-                      </a:solidFill>
-                      <a:prstDash val="solid"/>
-                      <a:round/>
-                      <a:headEnd type="none" w="med" len="med"/>
-                      <a:tailEnd type="none" w="med" len="med"/>
-                    </a:lnT>
-                    <a:lnB w="6350" cap="flat" cmpd="sng" algn="ctr">
-                      <a:solidFill>
-                        <a:srgbClr val="D5DBE3"/>
-                      </a:solidFill>
-                      <a:prstDash val="solid"/>
-                      <a:round/>
-                      <a:headEnd type="none" w="med" len="med"/>
-                      <a:tailEnd type="none" w="med" len="med"/>
-                    </a:lnB>
-                  </a:tcPr>
-                </a:tc>
-                <a:tc>
-                  <a:txBody>
-                    <a:bodyPr/>
-                    <a:lstStyle/>
-                    <a:p>
-                      <a:pPr algn="r" indent="0" marL="0">
-                        <a:buNone/>
-                      </a:pPr>
-                      <a:r>
-                        <a:rPr lang="en-US" sz="850" dirty="0">
-                          <a:solidFill>
-                            <a:srgbClr val="1F2933"/>
-                          </a:solidFill>
-                          <a:latin typeface="Calibri" pitchFamily="34" charset="0"/>
-                          <a:ea typeface="Calibri" pitchFamily="34" charset="-122"/>
-                          <a:cs typeface="Calibri" pitchFamily="34" charset="-120"/>
-                        </a:rPr>
-                        <a:t>–</a:t>
-                      </a:r>
-                      <a:endParaRPr lang="en-US" sz="850" dirty="0">
-                        <a:latin typeface="Calibri" charset="0"/>
-                        <a:ea typeface="Calibri" charset="0"/>
-                        <a:cs typeface="Calibri" charset="0"/>
-                      </a:endParaRPr>
-                    </a:p>
-                  </a:txBody>
-                  <a:tcPr marL="64008" marR="64008" marT="0" marB="0" anchor="ctr">
-                    <a:lnL w="6350" cap="flat" cmpd="sng" algn="ctr">
-                      <a:solidFill>
-                        <a:srgbClr val="D5DBE3"/>
-                      </a:solidFill>
-                      <a:prstDash val="solid"/>
-                      <a:round/>
-                      <a:headEnd type="none" w="med" len="med"/>
-                      <a:tailEnd type="none" w="med" len="med"/>
-                    </a:lnL>
-                    <a:lnR w="6350" cap="flat" cmpd="sng" algn="ctr">
-                      <a:solidFill>
-                        <a:srgbClr val="D5DBE3"/>
-                      </a:solidFill>
-                      <a:prstDash val="solid"/>
-                      <a:round/>
-                      <a:headEnd type="none" w="med" len="med"/>
-                      <a:tailEnd type="none" w="med" len="med"/>
-                    </a:lnR>
-                    <a:lnT w="6350" cap="flat" cmpd="sng" algn="ctr">
-                      <a:solidFill>
-                        <a:srgbClr val="D5DBE3"/>
-                      </a:solidFill>
-                      <a:prstDash val="solid"/>
-                      <a:round/>
-                      <a:headEnd type="none" w="med" len="med"/>
-                      <a:tailEnd type="none" w="med" len="med"/>
-                    </a:lnT>
-                    <a:lnB w="6350" cap="flat" cmpd="sng" algn="ctr">
-                      <a:solidFill>
-                        <a:srgbClr val="D5DBE3"/>
-                      </a:solidFill>
-                      <a:prstDash val="solid"/>
-                      <a:round/>
-                      <a:headEnd type="none" w="med" len="med"/>
-                      <a:tailEnd type="none" w="med" len="med"/>
-                    </a:lnB>
-                  </a:tcPr>
-                </a:tc>
-                <a:tc>
-                  <a:txBody>
-                    <a:bodyPr/>
-                    <a:lstStyle/>
-                    <a:p>
-                      <a:pPr algn="r" indent="0" marL="0">
-                        <a:buNone/>
-                      </a:pPr>
-                      <a:r>
-                        <a:rPr lang="en-US" sz="850" b="1" dirty="0">
-                          <a:solidFill>
                             <a:srgbClr val="B3261E"/>
                           </a:solidFill>
                           <a:latin typeface="Calibri" pitchFamily="34" charset="0"/>
                           <a:ea typeface="Calibri" pitchFamily="34" charset="-122"/>
                           <a:cs typeface="Calibri" pitchFamily="34" charset="-120"/>
                         </a:rPr>
-                        <a:t>-25,6</a:t>
+                        <a:t>25,6</a:t>
                       </a:r>
                       <a:endParaRPr lang="en-US" sz="850" dirty="0">
                         <a:latin typeface="Calibri" charset="0"/>
@@ -24911,6 +24976,73 @@
                     </a:solidFill>
                   </a:tcPr>
                 </a:tc>
+              </a:tr>
+              <a:tr h="224028">
+                <a:tc>
+                  <a:txBody>
+                    <a:bodyPr/>
+                    <a:lstStyle/>
+                    <a:p>
+                      <a:pPr algn="l" indent="0" marL="0">
+                        <a:buNone/>
+                      </a:pPr>
+                      <a:r>
+                        <a:rPr lang="en-US" sz="850" b="1" dirty="0">
+                          <a:solidFill>
+                            <a:srgbClr val="1F2933"/>
+                          </a:solidFill>
+                          <a:latin typeface="Calibri" pitchFamily="34" charset="0"/>
+                          <a:ea typeface="Calibri" pitchFamily="34" charset="-122"/>
+                          <a:cs typeface="Calibri" pitchFamily="34" charset="-120"/>
+                        </a:rPr>
+                        <a:t>FINAFRICA</a:t>
+                      </a:r>
+                      <a:endParaRPr lang="en-US" sz="850" dirty="0">
+                        <a:latin typeface="Calibri" charset="0"/>
+                        <a:ea typeface="Calibri" charset="0"/>
+                        <a:cs typeface="Calibri" charset="0"/>
+                      </a:endParaRPr>
+                    </a:p>
+                  </a:txBody>
+                  <a:tcPr marL="64008" marR="64008" marT="0" marB="0" anchor="ctr">
+                    <a:lnL w="6350" cap="flat" cmpd="sng" algn="ctr">
+                      <a:solidFill>
+                        <a:srgbClr val="D5DBE3"/>
+                      </a:solidFill>
+                      <a:prstDash val="solid"/>
+                      <a:round/>
+                      <a:headEnd type="none" w="med" len="med"/>
+                      <a:tailEnd type="none" w="med" len="med"/>
+                    </a:lnL>
+                    <a:lnR w="6350" cap="flat" cmpd="sng" algn="ctr">
+                      <a:solidFill>
+                        <a:srgbClr val="D5DBE3"/>
+                      </a:solidFill>
+                      <a:prstDash val="solid"/>
+                      <a:round/>
+                      <a:headEnd type="none" w="med" len="med"/>
+                      <a:tailEnd type="none" w="med" len="med"/>
+                    </a:lnR>
+                    <a:lnT w="6350" cap="flat" cmpd="sng" algn="ctr">
+                      <a:solidFill>
+                        <a:srgbClr val="D5DBE3"/>
+                      </a:solidFill>
+                      <a:prstDash val="solid"/>
+                      <a:round/>
+                      <a:headEnd type="none" w="med" len="med"/>
+                      <a:tailEnd type="none" w="med" len="med"/>
+                    </a:lnT>
+                    <a:lnB w="6350" cap="flat" cmpd="sng" algn="ctr">
+                      <a:solidFill>
+                        <a:srgbClr val="D5DBE3"/>
+                      </a:solidFill>
+                      <a:prstDash val="solid"/>
+                      <a:round/>
+                      <a:headEnd type="none" w="med" len="med"/>
+                      <a:tailEnd type="none" w="med" len="med"/>
+                    </a:lnB>
+                  </a:tcPr>
+                </a:tc>
                 <a:tc>
                   <a:txBody>
                     <a:bodyPr/>
@@ -24920,6 +25052,201 @@
                         <a:buNone/>
                       </a:pPr>
                       <a:r>
+                        <a:rPr lang="en-US" sz="850" dirty="0">
+                          <a:solidFill>
+                            <a:srgbClr val="1F2933"/>
+                          </a:solidFill>
+                          <a:latin typeface="Calibri" pitchFamily="34" charset="0"/>
+                          <a:ea typeface="Calibri" pitchFamily="34" charset="-122"/>
+                          <a:cs typeface="Calibri" pitchFamily="34" charset="-120"/>
+                        </a:rPr>
+                        <a:t>35,1</a:t>
+                      </a:r>
+                      <a:endParaRPr lang="en-US" sz="850" dirty="0">
+                        <a:latin typeface="Calibri" charset="0"/>
+                        <a:ea typeface="Calibri" charset="0"/>
+                        <a:cs typeface="Calibri" charset="0"/>
+                      </a:endParaRPr>
+                    </a:p>
+                  </a:txBody>
+                  <a:tcPr marL="64008" marR="64008" marT="0" marB="0" anchor="ctr">
+                    <a:lnL w="6350" cap="flat" cmpd="sng" algn="ctr">
+                      <a:solidFill>
+                        <a:srgbClr val="D5DBE3"/>
+                      </a:solidFill>
+                      <a:prstDash val="solid"/>
+                      <a:round/>
+                      <a:headEnd type="none" w="med" len="med"/>
+                      <a:tailEnd type="none" w="med" len="med"/>
+                    </a:lnL>
+                    <a:lnR w="6350" cap="flat" cmpd="sng" algn="ctr">
+                      <a:solidFill>
+                        <a:srgbClr val="D5DBE3"/>
+                      </a:solidFill>
+                      <a:prstDash val="solid"/>
+                      <a:round/>
+                      <a:headEnd type="none" w="med" len="med"/>
+                      <a:tailEnd type="none" w="med" len="med"/>
+                    </a:lnR>
+                    <a:lnT w="6350" cap="flat" cmpd="sng" algn="ctr">
+                      <a:solidFill>
+                        <a:srgbClr val="D5DBE3"/>
+                      </a:solidFill>
+                      <a:prstDash val="solid"/>
+                      <a:round/>
+                      <a:headEnd type="none" w="med" len="med"/>
+                      <a:tailEnd type="none" w="med" len="med"/>
+                    </a:lnT>
+                    <a:lnB w="6350" cap="flat" cmpd="sng" algn="ctr">
+                      <a:solidFill>
+                        <a:srgbClr val="D5DBE3"/>
+                      </a:solidFill>
+                      <a:prstDash val="solid"/>
+                      <a:round/>
+                      <a:headEnd type="none" w="med" len="med"/>
+                      <a:tailEnd type="none" w="med" len="med"/>
+                    </a:lnB>
+                  </a:tcPr>
+                </a:tc>
+                <a:tc>
+                  <a:txBody>
+                    <a:bodyPr/>
+                    <a:lstStyle/>
+                    <a:p>
+                      <a:pPr algn="r" indent="0" marL="0">
+                        <a:buNone/>
+                      </a:pPr>
+                      <a:r>
+                        <a:rPr lang="en-US" sz="850" dirty="0">
+                          <a:solidFill>
+                            <a:srgbClr val="1F2933"/>
+                          </a:solidFill>
+                          <a:latin typeface="Calibri" pitchFamily="34" charset="0"/>
+                          <a:ea typeface="Calibri" pitchFamily="34" charset="-122"/>
+                          <a:cs typeface="Calibri" pitchFamily="34" charset="-120"/>
+                        </a:rPr>
+                        <a:t>-175,2</a:t>
+                      </a:r>
+                      <a:endParaRPr lang="en-US" sz="850" dirty="0">
+                        <a:latin typeface="Calibri" charset="0"/>
+                        <a:ea typeface="Calibri" charset="0"/>
+                        <a:cs typeface="Calibri" charset="0"/>
+                      </a:endParaRPr>
+                    </a:p>
+                  </a:txBody>
+                  <a:tcPr marL="64008" marR="64008" marT="0" marB="0" anchor="ctr">
+                    <a:lnL w="6350" cap="flat" cmpd="sng" algn="ctr">
+                      <a:solidFill>
+                        <a:srgbClr val="D5DBE3"/>
+                      </a:solidFill>
+                      <a:prstDash val="solid"/>
+                      <a:round/>
+                      <a:headEnd type="none" w="med" len="med"/>
+                      <a:tailEnd type="none" w="med" len="med"/>
+                    </a:lnL>
+                    <a:lnR w="6350" cap="flat" cmpd="sng" algn="ctr">
+                      <a:solidFill>
+                        <a:srgbClr val="D5DBE3"/>
+                      </a:solidFill>
+                      <a:prstDash val="solid"/>
+                      <a:round/>
+                      <a:headEnd type="none" w="med" len="med"/>
+                      <a:tailEnd type="none" w="med" len="med"/>
+                    </a:lnR>
+                    <a:lnT w="6350" cap="flat" cmpd="sng" algn="ctr">
+                      <a:solidFill>
+                        <a:srgbClr val="D5DBE3"/>
+                      </a:solidFill>
+                      <a:prstDash val="solid"/>
+                      <a:round/>
+                      <a:headEnd type="none" w="med" len="med"/>
+                      <a:tailEnd type="none" w="med" len="med"/>
+                    </a:lnT>
+                    <a:lnB w="6350" cap="flat" cmpd="sng" algn="ctr">
+                      <a:solidFill>
+                        <a:srgbClr val="D5DBE3"/>
+                      </a:solidFill>
+                      <a:prstDash val="solid"/>
+                      <a:round/>
+                      <a:headEnd type="none" w="med" len="med"/>
+                      <a:tailEnd type="none" w="med" len="med"/>
+                    </a:lnB>
+                  </a:tcPr>
+                </a:tc>
+                <a:tc>
+                  <a:txBody>
+                    <a:bodyPr/>
+                    <a:lstStyle/>
+                    <a:p>
+                      <a:pPr algn="r" indent="0" marL="0">
+                        <a:buNone/>
+                      </a:pPr>
+                      <a:r>
+                        <a:rPr lang="en-US" sz="850" dirty="0">
+                          <a:solidFill>
+                            <a:srgbClr val="1F2933"/>
+                          </a:solidFill>
+                          <a:latin typeface="Calibri" pitchFamily="34" charset="0"/>
+                          <a:ea typeface="Calibri" pitchFamily="34" charset="-122"/>
+                          <a:cs typeface="Calibri" pitchFamily="34" charset="-120"/>
+                        </a:rPr>
+                        <a:t>–</a:t>
+                      </a:r>
+                      <a:endParaRPr lang="en-US" sz="850" dirty="0">
+                        <a:latin typeface="Calibri" charset="0"/>
+                        <a:ea typeface="Calibri" charset="0"/>
+                        <a:cs typeface="Calibri" charset="0"/>
+                      </a:endParaRPr>
+                    </a:p>
+                  </a:txBody>
+                  <a:tcPr marL="64008" marR="64008" marT="0" marB="0" anchor="ctr">
+                    <a:lnL w="6350" cap="flat" cmpd="sng" algn="ctr">
+                      <a:solidFill>
+                        <a:srgbClr val="D5DBE3"/>
+                      </a:solidFill>
+                      <a:prstDash val="solid"/>
+                      <a:round/>
+                      <a:headEnd type="none" w="med" len="med"/>
+                      <a:tailEnd type="none" w="med" len="med"/>
+                    </a:lnL>
+                    <a:lnR w="6350" cap="flat" cmpd="sng" algn="ctr">
+                      <a:solidFill>
+                        <a:srgbClr val="D5DBE3"/>
+                      </a:solidFill>
+                      <a:prstDash val="solid"/>
+                      <a:round/>
+                      <a:headEnd type="none" w="med" len="med"/>
+                      <a:tailEnd type="none" w="med" len="med"/>
+                    </a:lnR>
+                    <a:lnT w="6350" cap="flat" cmpd="sng" algn="ctr">
+                      <a:solidFill>
+                        <a:srgbClr val="D5DBE3"/>
+                      </a:solidFill>
+                      <a:prstDash val="solid"/>
+                      <a:round/>
+                      <a:headEnd type="none" w="med" len="med"/>
+                      <a:tailEnd type="none" w="med" len="med"/>
+                    </a:lnT>
+                    <a:lnB w="6350" cap="flat" cmpd="sng" algn="ctr">
+                      <a:solidFill>
+                        <a:srgbClr val="D5DBE3"/>
+                      </a:solidFill>
+                      <a:prstDash val="solid"/>
+                      <a:round/>
+                      <a:headEnd type="none" w="med" len="med"/>
+                      <a:tailEnd type="none" w="med" len="med"/>
+                    </a:lnB>
+                  </a:tcPr>
+                </a:tc>
+                <a:tc>
+                  <a:txBody>
+                    <a:bodyPr/>
+                    <a:lstStyle/>
+                    <a:p>
+                      <a:pPr algn="r" indent="0" marL="0">
+                        <a:buNone/>
+                      </a:pPr>
+                      <a:r>
                         <a:rPr lang="en-US" sz="850" b="1" dirty="0">
                           <a:solidFill>
                             <a:srgbClr val="B3261E"/>
@@ -24928,7 +25255,7 @@
                           <a:ea typeface="Calibri" pitchFamily="34" charset="-122"/>
                           <a:cs typeface="Calibri" pitchFamily="34" charset="-120"/>
                         </a:rPr>
-                        <a:t>25,6</a:t>
+                        <a:t>-140,1</a:t>
                       </a:r>
                       <a:endParaRPr lang="en-US" sz="850" dirty="0">
                         <a:latin typeface="Calibri" charset="0"/>
@@ -24979,286 +25306,24 @@
                     </a:solidFill>
                   </a:tcPr>
                 </a:tc>
-              </a:tr>
-              <a:tr h="224028">
-                <a:tc>
-                  <a:txBody>
-                    <a:bodyPr/>
-                    <a:lstStyle/>
-                    <a:p>
-                      <a:pPr algn="l" indent="0" marL="0">
+                <a:tc>
+                  <a:txBody>
+                    <a:bodyPr/>
+                    <a:lstStyle/>
+                    <a:p>
+                      <a:pPr algn="r" indent="0" marL="0">
                         <a:buNone/>
                       </a:pPr>
                       <a:r>
                         <a:rPr lang="en-US" sz="850" b="1" dirty="0">
                           <a:solidFill>
-                            <a:srgbClr val="1F2933"/>
-                          </a:solidFill>
-                          <a:latin typeface="Calibri" pitchFamily="34" charset="0"/>
-                          <a:ea typeface="Calibri" pitchFamily="34" charset="-122"/>
-                          <a:cs typeface="Calibri" pitchFamily="34" charset="-120"/>
-                        </a:rPr>
-                        <a:t>FINAFRICA</a:t>
-                      </a:r>
-                      <a:endParaRPr lang="en-US" sz="850" dirty="0">
-                        <a:latin typeface="Calibri" charset="0"/>
-                        <a:ea typeface="Calibri" charset="0"/>
-                        <a:cs typeface="Calibri" charset="0"/>
-                      </a:endParaRPr>
-                    </a:p>
-                  </a:txBody>
-                  <a:tcPr marL="64008" marR="64008" marT="0" marB="0" anchor="ctr">
-                    <a:lnL w="6350" cap="flat" cmpd="sng" algn="ctr">
-                      <a:solidFill>
-                        <a:srgbClr val="D5DBE3"/>
-                      </a:solidFill>
-                      <a:prstDash val="solid"/>
-                      <a:round/>
-                      <a:headEnd type="none" w="med" len="med"/>
-                      <a:tailEnd type="none" w="med" len="med"/>
-                    </a:lnL>
-                    <a:lnR w="6350" cap="flat" cmpd="sng" algn="ctr">
-                      <a:solidFill>
-                        <a:srgbClr val="D5DBE3"/>
-                      </a:solidFill>
-                      <a:prstDash val="solid"/>
-                      <a:round/>
-                      <a:headEnd type="none" w="med" len="med"/>
-                      <a:tailEnd type="none" w="med" len="med"/>
-                    </a:lnR>
-                    <a:lnT w="6350" cap="flat" cmpd="sng" algn="ctr">
-                      <a:solidFill>
-                        <a:srgbClr val="D5DBE3"/>
-                      </a:solidFill>
-                      <a:prstDash val="solid"/>
-                      <a:round/>
-                      <a:headEnd type="none" w="med" len="med"/>
-                      <a:tailEnd type="none" w="med" len="med"/>
-                    </a:lnT>
-                    <a:lnB w="6350" cap="flat" cmpd="sng" algn="ctr">
-                      <a:solidFill>
-                        <a:srgbClr val="D5DBE3"/>
-                      </a:solidFill>
-                      <a:prstDash val="solid"/>
-                      <a:round/>
-                      <a:headEnd type="none" w="med" len="med"/>
-                      <a:tailEnd type="none" w="med" len="med"/>
-                    </a:lnB>
-                  </a:tcPr>
-                </a:tc>
-                <a:tc>
-                  <a:txBody>
-                    <a:bodyPr/>
-                    <a:lstStyle/>
-                    <a:p>
-                      <a:pPr algn="r" indent="0" marL="0">
-                        <a:buNone/>
-                      </a:pPr>
-                      <a:r>
-                        <a:rPr lang="en-US" sz="850" dirty="0">
-                          <a:solidFill>
-                            <a:srgbClr val="1F2933"/>
-                          </a:solidFill>
-                          <a:latin typeface="Calibri" pitchFamily="34" charset="0"/>
-                          <a:ea typeface="Calibri" pitchFamily="34" charset="-122"/>
-                          <a:cs typeface="Calibri" pitchFamily="34" charset="-120"/>
-                        </a:rPr>
-                        <a:t>35,1</a:t>
-                      </a:r>
-                      <a:endParaRPr lang="en-US" sz="850" dirty="0">
-                        <a:latin typeface="Calibri" charset="0"/>
-                        <a:ea typeface="Calibri" charset="0"/>
-                        <a:cs typeface="Calibri" charset="0"/>
-                      </a:endParaRPr>
-                    </a:p>
-                  </a:txBody>
-                  <a:tcPr marL="64008" marR="64008" marT="0" marB="0" anchor="ctr">
-                    <a:lnL w="6350" cap="flat" cmpd="sng" algn="ctr">
-                      <a:solidFill>
-                        <a:srgbClr val="D5DBE3"/>
-                      </a:solidFill>
-                      <a:prstDash val="solid"/>
-                      <a:round/>
-                      <a:headEnd type="none" w="med" len="med"/>
-                      <a:tailEnd type="none" w="med" len="med"/>
-                    </a:lnL>
-                    <a:lnR w="6350" cap="flat" cmpd="sng" algn="ctr">
-                      <a:solidFill>
-                        <a:srgbClr val="D5DBE3"/>
-                      </a:solidFill>
-                      <a:prstDash val="solid"/>
-                      <a:round/>
-                      <a:headEnd type="none" w="med" len="med"/>
-                      <a:tailEnd type="none" w="med" len="med"/>
-                    </a:lnR>
-                    <a:lnT w="6350" cap="flat" cmpd="sng" algn="ctr">
-                      <a:solidFill>
-                        <a:srgbClr val="D5DBE3"/>
-                      </a:solidFill>
-                      <a:prstDash val="solid"/>
-                      <a:round/>
-                      <a:headEnd type="none" w="med" len="med"/>
-                      <a:tailEnd type="none" w="med" len="med"/>
-                    </a:lnT>
-                    <a:lnB w="6350" cap="flat" cmpd="sng" algn="ctr">
-                      <a:solidFill>
-                        <a:srgbClr val="D5DBE3"/>
-                      </a:solidFill>
-                      <a:prstDash val="solid"/>
-                      <a:round/>
-                      <a:headEnd type="none" w="med" len="med"/>
-                      <a:tailEnd type="none" w="med" len="med"/>
-                    </a:lnB>
-                  </a:tcPr>
-                </a:tc>
-                <a:tc>
-                  <a:txBody>
-                    <a:bodyPr/>
-                    <a:lstStyle/>
-                    <a:p>
-                      <a:pPr algn="r" indent="0" marL="0">
-                        <a:buNone/>
-                      </a:pPr>
-                      <a:r>
-                        <a:rPr lang="en-US" sz="850" dirty="0">
-                          <a:solidFill>
-                            <a:srgbClr val="1F2933"/>
-                          </a:solidFill>
-                          <a:latin typeface="Calibri" pitchFamily="34" charset="0"/>
-                          <a:ea typeface="Calibri" pitchFamily="34" charset="-122"/>
-                          <a:cs typeface="Calibri" pitchFamily="34" charset="-120"/>
-                        </a:rPr>
-                        <a:t>-175,2</a:t>
-                      </a:r>
-                      <a:endParaRPr lang="en-US" sz="850" dirty="0">
-                        <a:latin typeface="Calibri" charset="0"/>
-                        <a:ea typeface="Calibri" charset="0"/>
-                        <a:cs typeface="Calibri" charset="0"/>
-                      </a:endParaRPr>
-                    </a:p>
-                  </a:txBody>
-                  <a:tcPr marL="64008" marR="64008" marT="0" marB="0" anchor="ctr">
-                    <a:lnL w="6350" cap="flat" cmpd="sng" algn="ctr">
-                      <a:solidFill>
-                        <a:srgbClr val="D5DBE3"/>
-                      </a:solidFill>
-                      <a:prstDash val="solid"/>
-                      <a:round/>
-                      <a:headEnd type="none" w="med" len="med"/>
-                      <a:tailEnd type="none" w="med" len="med"/>
-                    </a:lnL>
-                    <a:lnR w="6350" cap="flat" cmpd="sng" algn="ctr">
-                      <a:solidFill>
-                        <a:srgbClr val="D5DBE3"/>
-                      </a:solidFill>
-                      <a:prstDash val="solid"/>
-                      <a:round/>
-                      <a:headEnd type="none" w="med" len="med"/>
-                      <a:tailEnd type="none" w="med" len="med"/>
-                    </a:lnR>
-                    <a:lnT w="6350" cap="flat" cmpd="sng" algn="ctr">
-                      <a:solidFill>
-                        <a:srgbClr val="D5DBE3"/>
-                      </a:solidFill>
-                      <a:prstDash val="solid"/>
-                      <a:round/>
-                      <a:headEnd type="none" w="med" len="med"/>
-                      <a:tailEnd type="none" w="med" len="med"/>
-                    </a:lnT>
-                    <a:lnB w="6350" cap="flat" cmpd="sng" algn="ctr">
-                      <a:solidFill>
-                        <a:srgbClr val="D5DBE3"/>
-                      </a:solidFill>
-                      <a:prstDash val="solid"/>
-                      <a:round/>
-                      <a:headEnd type="none" w="med" len="med"/>
-                      <a:tailEnd type="none" w="med" len="med"/>
-                    </a:lnB>
-                  </a:tcPr>
-                </a:tc>
-                <a:tc>
-                  <a:txBody>
-                    <a:bodyPr/>
-                    <a:lstStyle/>
-                    <a:p>
-                      <a:pPr algn="r" indent="0" marL="0">
-                        <a:buNone/>
-                      </a:pPr>
-                      <a:r>
-                        <a:rPr lang="en-US" sz="850" dirty="0">
-                          <a:solidFill>
-                            <a:srgbClr val="1F2933"/>
-                          </a:solidFill>
-                          <a:latin typeface="Calibri" pitchFamily="34" charset="0"/>
-                          <a:ea typeface="Calibri" pitchFamily="34" charset="-122"/>
-                          <a:cs typeface="Calibri" pitchFamily="34" charset="-120"/>
-                        </a:rPr>
-                        <a:t>–</a:t>
-                      </a:r>
-                      <a:endParaRPr lang="en-US" sz="850" dirty="0">
-                        <a:latin typeface="Calibri" charset="0"/>
-                        <a:ea typeface="Calibri" charset="0"/>
-                        <a:cs typeface="Calibri" charset="0"/>
-                      </a:endParaRPr>
-                    </a:p>
-                  </a:txBody>
-                  <a:tcPr marL="64008" marR="64008" marT="0" marB="0" anchor="ctr">
-                    <a:lnL w="6350" cap="flat" cmpd="sng" algn="ctr">
-                      <a:solidFill>
-                        <a:srgbClr val="D5DBE3"/>
-                      </a:solidFill>
-                      <a:prstDash val="solid"/>
-                      <a:round/>
-                      <a:headEnd type="none" w="med" len="med"/>
-                      <a:tailEnd type="none" w="med" len="med"/>
-                    </a:lnL>
-                    <a:lnR w="6350" cap="flat" cmpd="sng" algn="ctr">
-                      <a:solidFill>
-                        <a:srgbClr val="D5DBE3"/>
-                      </a:solidFill>
-                      <a:prstDash val="solid"/>
-                      <a:round/>
-                      <a:headEnd type="none" w="med" len="med"/>
-                      <a:tailEnd type="none" w="med" len="med"/>
-                    </a:lnR>
-                    <a:lnT w="6350" cap="flat" cmpd="sng" algn="ctr">
-                      <a:solidFill>
-                        <a:srgbClr val="D5DBE3"/>
-                      </a:solidFill>
-                      <a:prstDash val="solid"/>
-                      <a:round/>
-                      <a:headEnd type="none" w="med" len="med"/>
-                      <a:tailEnd type="none" w="med" len="med"/>
-                    </a:lnT>
-                    <a:lnB w="6350" cap="flat" cmpd="sng" algn="ctr">
-                      <a:solidFill>
-                        <a:srgbClr val="D5DBE3"/>
-                      </a:solidFill>
-                      <a:prstDash val="solid"/>
-                      <a:round/>
-                      <a:headEnd type="none" w="med" len="med"/>
-                      <a:tailEnd type="none" w="med" len="med"/>
-                    </a:lnB>
-                  </a:tcPr>
-                </a:tc>
-                <a:tc>
-                  <a:txBody>
-                    <a:bodyPr/>
-                    <a:lstStyle/>
-                    <a:p>
-                      <a:pPr algn="r" indent="0" marL="0">
-                        <a:buNone/>
-                      </a:pPr>
-                      <a:r>
-                        <a:rPr lang="en-US" sz="850" b="1" dirty="0">
-                          <a:solidFill>
                             <a:srgbClr val="B3261E"/>
                           </a:solidFill>
                           <a:latin typeface="Calibri" pitchFamily="34" charset="0"/>
                           <a:ea typeface="Calibri" pitchFamily="34" charset="-122"/>
                           <a:cs typeface="Calibri" pitchFamily="34" charset="-120"/>
                         </a:rPr>
-                        <a:t>-140,1</a:t>
+                        <a:t>140,2</a:t>
                       </a:r>
                       <a:endParaRPr lang="en-US" sz="850" dirty="0">
                         <a:latin typeface="Calibri" charset="0"/>
@@ -25309,6 +25374,73 @@
                     </a:solidFill>
                   </a:tcPr>
                 </a:tc>
+              </a:tr>
+              <a:tr h="224028">
+                <a:tc>
+                  <a:txBody>
+                    <a:bodyPr/>
+                    <a:lstStyle/>
+                    <a:p>
+                      <a:pPr algn="l" indent="0" marL="0">
+                        <a:buNone/>
+                      </a:pPr>
+                      <a:r>
+                        <a:rPr lang="en-US" sz="850" b="1" dirty="0">
+                          <a:solidFill>
+                            <a:srgbClr val="1F2933"/>
+                          </a:solidFill>
+                          <a:latin typeface="Calibri" pitchFamily="34" charset="0"/>
+                          <a:ea typeface="Calibri" pitchFamily="34" charset="-122"/>
+                          <a:cs typeface="Calibri" pitchFamily="34" charset="-120"/>
+                        </a:rPr>
+                        <a:t>INFI</a:t>
+                      </a:r>
+                      <a:endParaRPr lang="en-US" sz="850" dirty="0">
+                        <a:latin typeface="Calibri" charset="0"/>
+                        <a:ea typeface="Calibri" charset="0"/>
+                        <a:cs typeface="Calibri" charset="0"/>
+                      </a:endParaRPr>
+                    </a:p>
+                  </a:txBody>
+                  <a:tcPr marL="64008" marR="64008" marT="0" marB="0" anchor="ctr">
+                    <a:lnL w="6350" cap="flat" cmpd="sng" algn="ctr">
+                      <a:solidFill>
+                        <a:srgbClr val="D5DBE3"/>
+                      </a:solidFill>
+                      <a:prstDash val="solid"/>
+                      <a:round/>
+                      <a:headEnd type="none" w="med" len="med"/>
+                      <a:tailEnd type="none" w="med" len="med"/>
+                    </a:lnL>
+                    <a:lnR w="6350" cap="flat" cmpd="sng" algn="ctr">
+                      <a:solidFill>
+                        <a:srgbClr val="D5DBE3"/>
+                      </a:solidFill>
+                      <a:prstDash val="solid"/>
+                      <a:round/>
+                      <a:headEnd type="none" w="med" len="med"/>
+                      <a:tailEnd type="none" w="med" len="med"/>
+                    </a:lnR>
+                    <a:lnT w="6350" cap="flat" cmpd="sng" algn="ctr">
+                      <a:solidFill>
+                        <a:srgbClr val="D5DBE3"/>
+                      </a:solidFill>
+                      <a:prstDash val="solid"/>
+                      <a:round/>
+                      <a:headEnd type="none" w="med" len="med"/>
+                      <a:tailEnd type="none" w="med" len="med"/>
+                    </a:lnT>
+                    <a:lnB w="6350" cap="flat" cmpd="sng" algn="ctr">
+                      <a:solidFill>
+                        <a:srgbClr val="D5DBE3"/>
+                      </a:solidFill>
+                      <a:prstDash val="solid"/>
+                      <a:round/>
+                      <a:headEnd type="none" w="med" len="med"/>
+                      <a:tailEnd type="none" w="med" len="med"/>
+                    </a:lnB>
+                  </a:tcPr>
+                </a:tc>
                 <a:tc>
                   <a:txBody>
                     <a:bodyPr/>
@@ -25318,15 +25450,602 @@
                         <a:buNone/>
                       </a:pPr>
                       <a:r>
+                        <a:rPr lang="en-US" sz="850" dirty="0">
+                          <a:solidFill>
+                            <a:srgbClr val="1F2933"/>
+                          </a:solidFill>
+                          <a:latin typeface="Calibri" pitchFamily="34" charset="0"/>
+                          <a:ea typeface="Calibri" pitchFamily="34" charset="-122"/>
+                          <a:cs typeface="Calibri" pitchFamily="34" charset="-120"/>
+                        </a:rPr>
+                        <a:t>2,8</a:t>
+                      </a:r>
+                      <a:endParaRPr lang="en-US" sz="850" dirty="0">
+                        <a:latin typeface="Calibri" charset="0"/>
+                        <a:ea typeface="Calibri" charset="0"/>
+                        <a:cs typeface="Calibri" charset="0"/>
+                      </a:endParaRPr>
+                    </a:p>
+                  </a:txBody>
+                  <a:tcPr marL="64008" marR="64008" marT="0" marB="0" anchor="ctr">
+                    <a:lnL w="6350" cap="flat" cmpd="sng" algn="ctr">
+                      <a:solidFill>
+                        <a:srgbClr val="D5DBE3"/>
+                      </a:solidFill>
+                      <a:prstDash val="solid"/>
+                      <a:round/>
+                      <a:headEnd type="none" w="med" len="med"/>
+                      <a:tailEnd type="none" w="med" len="med"/>
+                    </a:lnL>
+                    <a:lnR w="6350" cap="flat" cmpd="sng" algn="ctr">
+                      <a:solidFill>
+                        <a:srgbClr val="D5DBE3"/>
+                      </a:solidFill>
+                      <a:prstDash val="solid"/>
+                      <a:round/>
+                      <a:headEnd type="none" w="med" len="med"/>
+                      <a:tailEnd type="none" w="med" len="med"/>
+                    </a:lnR>
+                    <a:lnT w="6350" cap="flat" cmpd="sng" algn="ctr">
+                      <a:solidFill>
+                        <a:srgbClr val="D5DBE3"/>
+                      </a:solidFill>
+                      <a:prstDash val="solid"/>
+                      <a:round/>
+                      <a:headEnd type="none" w="med" len="med"/>
+                      <a:tailEnd type="none" w="med" len="med"/>
+                    </a:lnT>
+                    <a:lnB w="6350" cap="flat" cmpd="sng" algn="ctr">
+                      <a:solidFill>
+                        <a:srgbClr val="D5DBE3"/>
+                      </a:solidFill>
+                      <a:prstDash val="solid"/>
+                      <a:round/>
+                      <a:headEnd type="none" w="med" len="med"/>
+                      <a:tailEnd type="none" w="med" len="med"/>
+                    </a:lnB>
+                  </a:tcPr>
+                </a:tc>
+                <a:tc>
+                  <a:txBody>
+                    <a:bodyPr/>
+                    <a:lstStyle/>
+                    <a:p>
+                      <a:pPr algn="r" indent="0" marL="0">
+                        <a:buNone/>
+                      </a:pPr>
+                      <a:r>
+                        <a:rPr lang="en-US" sz="850" dirty="0">
+                          <a:solidFill>
+                            <a:srgbClr val="1F2933"/>
+                          </a:solidFill>
+                          <a:latin typeface="Calibri" pitchFamily="34" charset="0"/>
+                          <a:ea typeface="Calibri" pitchFamily="34" charset="-122"/>
+                          <a:cs typeface="Calibri" pitchFamily="34" charset="-120"/>
+                        </a:rPr>
+                        <a:t>–</a:t>
+                      </a:r>
+                      <a:endParaRPr lang="en-US" sz="850" dirty="0">
+                        <a:latin typeface="Calibri" charset="0"/>
+                        <a:ea typeface="Calibri" charset="0"/>
+                        <a:cs typeface="Calibri" charset="0"/>
+                      </a:endParaRPr>
+                    </a:p>
+                  </a:txBody>
+                  <a:tcPr marL="64008" marR="64008" marT="0" marB="0" anchor="ctr">
+                    <a:lnL w="6350" cap="flat" cmpd="sng" algn="ctr">
+                      <a:solidFill>
+                        <a:srgbClr val="D5DBE3"/>
+                      </a:solidFill>
+                      <a:prstDash val="solid"/>
+                      <a:round/>
+                      <a:headEnd type="none" w="med" len="med"/>
+                      <a:tailEnd type="none" w="med" len="med"/>
+                    </a:lnL>
+                    <a:lnR w="6350" cap="flat" cmpd="sng" algn="ctr">
+                      <a:solidFill>
+                        <a:srgbClr val="D5DBE3"/>
+                      </a:solidFill>
+                      <a:prstDash val="solid"/>
+                      <a:round/>
+                      <a:headEnd type="none" w="med" len="med"/>
+                      <a:tailEnd type="none" w="med" len="med"/>
+                    </a:lnR>
+                    <a:lnT w="6350" cap="flat" cmpd="sng" algn="ctr">
+                      <a:solidFill>
+                        <a:srgbClr val="D5DBE3"/>
+                      </a:solidFill>
+                      <a:prstDash val="solid"/>
+                      <a:round/>
+                      <a:headEnd type="none" w="med" len="med"/>
+                      <a:tailEnd type="none" w="med" len="med"/>
+                    </a:lnT>
+                    <a:lnB w="6350" cap="flat" cmpd="sng" algn="ctr">
+                      <a:solidFill>
+                        <a:srgbClr val="D5DBE3"/>
+                      </a:solidFill>
+                      <a:prstDash val="solid"/>
+                      <a:round/>
+                      <a:headEnd type="none" w="med" len="med"/>
+                      <a:tailEnd type="none" w="med" len="med"/>
+                    </a:lnB>
+                  </a:tcPr>
+                </a:tc>
+                <a:tc>
+                  <a:txBody>
+                    <a:bodyPr/>
+                    <a:lstStyle/>
+                    <a:p>
+                      <a:pPr algn="r" indent="0" marL="0">
+                        <a:buNone/>
+                      </a:pPr>
+                      <a:r>
+                        <a:rPr lang="en-US" sz="850" dirty="0">
+                          <a:solidFill>
+                            <a:srgbClr val="1F2933"/>
+                          </a:solidFill>
+                          <a:latin typeface="Calibri" pitchFamily="34" charset="0"/>
+                          <a:ea typeface="Calibri" pitchFamily="34" charset="-122"/>
+                          <a:cs typeface="Calibri" pitchFamily="34" charset="-120"/>
+                        </a:rPr>
+                        <a:t>–</a:t>
+                      </a:r>
+                      <a:endParaRPr lang="en-US" sz="850" dirty="0">
+                        <a:latin typeface="Calibri" charset="0"/>
+                        <a:ea typeface="Calibri" charset="0"/>
+                        <a:cs typeface="Calibri" charset="0"/>
+                      </a:endParaRPr>
+                    </a:p>
+                  </a:txBody>
+                  <a:tcPr marL="64008" marR="64008" marT="0" marB="0" anchor="ctr">
+                    <a:lnL w="6350" cap="flat" cmpd="sng" algn="ctr">
+                      <a:solidFill>
+                        <a:srgbClr val="D5DBE3"/>
+                      </a:solidFill>
+                      <a:prstDash val="solid"/>
+                      <a:round/>
+                      <a:headEnd type="none" w="med" len="med"/>
+                      <a:tailEnd type="none" w="med" len="med"/>
+                    </a:lnL>
+                    <a:lnR w="6350" cap="flat" cmpd="sng" algn="ctr">
+                      <a:solidFill>
+                        <a:srgbClr val="D5DBE3"/>
+                      </a:solidFill>
+                      <a:prstDash val="solid"/>
+                      <a:round/>
+                      <a:headEnd type="none" w="med" len="med"/>
+                      <a:tailEnd type="none" w="med" len="med"/>
+                    </a:lnR>
+                    <a:lnT w="6350" cap="flat" cmpd="sng" algn="ctr">
+                      <a:solidFill>
+                        <a:srgbClr val="D5DBE3"/>
+                      </a:solidFill>
+                      <a:prstDash val="solid"/>
+                      <a:round/>
+                      <a:headEnd type="none" w="med" len="med"/>
+                      <a:tailEnd type="none" w="med" len="med"/>
+                    </a:lnT>
+                    <a:lnB w="6350" cap="flat" cmpd="sng" algn="ctr">
+                      <a:solidFill>
+                        <a:srgbClr val="D5DBE3"/>
+                      </a:solidFill>
+                      <a:prstDash val="solid"/>
+                      <a:round/>
+                      <a:headEnd type="none" w="med" len="med"/>
+                      <a:tailEnd type="none" w="med" len="med"/>
+                    </a:lnB>
+                  </a:tcPr>
+                </a:tc>
+                <a:tc>
+                  <a:txBody>
+                    <a:bodyPr/>
+                    <a:lstStyle/>
+                    <a:p>
+                      <a:pPr algn="r" indent="0" marL="0">
+                        <a:buNone/>
+                      </a:pPr>
+                      <a:r>
                         <a:rPr lang="en-US" sz="850" b="1" dirty="0">
                           <a:solidFill>
+                            <a:srgbClr val="5E9B7E"/>
+                          </a:solidFill>
+                          <a:latin typeface="Calibri" pitchFamily="34" charset="0"/>
+                          <a:ea typeface="Calibri" pitchFamily="34" charset="-122"/>
+                          <a:cs typeface="Calibri" pitchFamily="34" charset="-120"/>
+                        </a:rPr>
+                        <a:t>2,8</a:t>
+                      </a:r>
+                      <a:endParaRPr lang="en-US" sz="850" dirty="0">
+                        <a:latin typeface="Calibri" charset="0"/>
+                        <a:ea typeface="Calibri" charset="0"/>
+                        <a:cs typeface="Calibri" charset="0"/>
+                      </a:endParaRPr>
+                    </a:p>
+                  </a:txBody>
+                  <a:tcPr marL="64008" marR="64008" marT="0" marB="0" anchor="ctr">
+                    <a:lnL w="6350" cap="flat" cmpd="sng" algn="ctr">
+                      <a:solidFill>
+                        <a:srgbClr val="D5DBE3"/>
+                      </a:solidFill>
+                      <a:prstDash val="solid"/>
+                      <a:round/>
+                      <a:headEnd type="none" w="med" len="med"/>
+                      <a:tailEnd type="none" w="med" len="med"/>
+                    </a:lnL>
+                    <a:lnR w="6350" cap="flat" cmpd="sng" algn="ctr">
+                      <a:solidFill>
+                        <a:srgbClr val="D5DBE3"/>
+                      </a:solidFill>
+                      <a:prstDash val="solid"/>
+                      <a:round/>
+                      <a:headEnd type="none" w="med" len="med"/>
+                      <a:tailEnd type="none" w="med" len="med"/>
+                    </a:lnR>
+                    <a:lnT w="6350" cap="flat" cmpd="sng" algn="ctr">
+                      <a:solidFill>
+                        <a:srgbClr val="D5DBE3"/>
+                      </a:solidFill>
+                      <a:prstDash val="solid"/>
+                      <a:round/>
+                      <a:headEnd type="none" w="med" len="med"/>
+                      <a:tailEnd type="none" w="med" len="med"/>
+                    </a:lnT>
+                    <a:lnB w="6350" cap="flat" cmpd="sng" algn="ctr">
+                      <a:solidFill>
+                        <a:srgbClr val="D5DBE3"/>
+                      </a:solidFill>
+                      <a:prstDash val="solid"/>
+                      <a:round/>
+                      <a:headEnd type="none" w="med" len="med"/>
+                      <a:tailEnd type="none" w="med" len="med"/>
+                    </a:lnB>
+                  </a:tcPr>
+                </a:tc>
+                <a:tc>
+                  <a:txBody>
+                    <a:bodyPr/>
+                    <a:lstStyle/>
+                    <a:p>
+                      <a:pPr algn="r" indent="0" marL="0">
+                        <a:buNone/>
+                      </a:pPr>
+                      <a:r>
+                        <a:rPr lang="en-US" sz="850" dirty="0">
+                          <a:solidFill>
+                            <a:srgbClr val="1F2933"/>
+                          </a:solidFill>
+                          <a:latin typeface="Calibri" pitchFamily="34" charset="0"/>
+                          <a:ea typeface="Calibri" pitchFamily="34" charset="-122"/>
+                          <a:cs typeface="Calibri" pitchFamily="34" charset="-120"/>
+                        </a:rPr>
+                        <a:t>–</a:t>
+                      </a:r>
+                      <a:endParaRPr lang="en-US" sz="850" dirty="0">
+                        <a:latin typeface="Calibri" charset="0"/>
+                        <a:ea typeface="Calibri" charset="0"/>
+                        <a:cs typeface="Calibri" charset="0"/>
+                      </a:endParaRPr>
+                    </a:p>
+                  </a:txBody>
+                  <a:tcPr marL="64008" marR="64008" marT="0" marB="0" anchor="ctr">
+                    <a:lnL w="6350" cap="flat" cmpd="sng" algn="ctr">
+                      <a:solidFill>
+                        <a:srgbClr val="D5DBE3"/>
+                      </a:solidFill>
+                      <a:prstDash val="solid"/>
+                      <a:round/>
+                      <a:headEnd type="none" w="med" len="med"/>
+                      <a:tailEnd type="none" w="med" len="med"/>
+                    </a:lnL>
+                    <a:lnR w="6350" cap="flat" cmpd="sng" algn="ctr">
+                      <a:solidFill>
+                        <a:srgbClr val="D5DBE3"/>
+                      </a:solidFill>
+                      <a:prstDash val="solid"/>
+                      <a:round/>
+                      <a:headEnd type="none" w="med" len="med"/>
+                      <a:tailEnd type="none" w="med" len="med"/>
+                    </a:lnR>
+                    <a:lnT w="6350" cap="flat" cmpd="sng" algn="ctr">
+                      <a:solidFill>
+                        <a:srgbClr val="D5DBE3"/>
+                      </a:solidFill>
+                      <a:prstDash val="solid"/>
+                      <a:round/>
+                      <a:headEnd type="none" w="med" len="med"/>
+                      <a:tailEnd type="none" w="med" len="med"/>
+                    </a:lnT>
+                    <a:lnB w="6350" cap="flat" cmpd="sng" algn="ctr">
+                      <a:solidFill>
+                        <a:srgbClr val="D5DBE3"/>
+                      </a:solidFill>
+                      <a:prstDash val="solid"/>
+                      <a:round/>
+                      <a:headEnd type="none" w="med" len="med"/>
+                      <a:tailEnd type="none" w="med" len="med"/>
+                    </a:lnB>
+                  </a:tcPr>
+                </a:tc>
+              </a:tr>
+              <a:tr h="224028">
+                <a:tc>
+                  <a:txBody>
+                    <a:bodyPr/>
+                    <a:lstStyle/>
+                    <a:p>
+                      <a:pPr algn="l" indent="0" marL="0">
+                        <a:buNone/>
+                      </a:pPr>
+                      <a:r>
+                        <a:rPr lang="en-US" sz="850" b="1" dirty="0">
+                          <a:solidFill>
+                            <a:srgbClr val="1F2933"/>
+                          </a:solidFill>
+                          <a:latin typeface="Calibri" pitchFamily="34" charset="0"/>
+                          <a:ea typeface="Calibri" pitchFamily="34" charset="-122"/>
+                          <a:cs typeface="Calibri" pitchFamily="34" charset="-120"/>
+                        </a:rPr>
+                        <a:t>ODALYS CI</a:t>
+                      </a:r>
+                      <a:endParaRPr lang="en-US" sz="850" dirty="0">
+                        <a:latin typeface="Calibri" charset="0"/>
+                        <a:ea typeface="Calibri" charset="0"/>
+                        <a:cs typeface="Calibri" charset="0"/>
+                      </a:endParaRPr>
+                    </a:p>
+                  </a:txBody>
+                  <a:tcPr marL="64008" marR="64008" marT="0" marB="0" anchor="ctr">
+                    <a:lnL w="6350" cap="flat" cmpd="sng" algn="ctr">
+                      <a:solidFill>
+                        <a:srgbClr val="D5DBE3"/>
+                      </a:solidFill>
+                      <a:prstDash val="solid"/>
+                      <a:round/>
+                      <a:headEnd type="none" w="med" len="med"/>
+                      <a:tailEnd type="none" w="med" len="med"/>
+                    </a:lnL>
+                    <a:lnR w="6350" cap="flat" cmpd="sng" algn="ctr">
+                      <a:solidFill>
+                        <a:srgbClr val="D5DBE3"/>
+                      </a:solidFill>
+                      <a:prstDash val="solid"/>
+                      <a:round/>
+                      <a:headEnd type="none" w="med" len="med"/>
+                      <a:tailEnd type="none" w="med" len="med"/>
+                    </a:lnR>
+                    <a:lnT w="6350" cap="flat" cmpd="sng" algn="ctr">
+                      <a:solidFill>
+                        <a:srgbClr val="D5DBE3"/>
+                      </a:solidFill>
+                      <a:prstDash val="solid"/>
+                      <a:round/>
+                      <a:headEnd type="none" w="med" len="med"/>
+                      <a:tailEnd type="none" w="med" len="med"/>
+                    </a:lnT>
+                    <a:lnB w="6350" cap="flat" cmpd="sng" algn="ctr">
+                      <a:solidFill>
+                        <a:srgbClr val="D5DBE3"/>
+                      </a:solidFill>
+                      <a:prstDash val="solid"/>
+                      <a:round/>
+                      <a:headEnd type="none" w="med" len="med"/>
+                      <a:tailEnd type="none" w="med" len="med"/>
+                    </a:lnB>
+                  </a:tcPr>
+                </a:tc>
+                <a:tc>
+                  <a:txBody>
+                    <a:bodyPr/>
+                    <a:lstStyle/>
+                    <a:p>
+                      <a:pPr algn="r" indent="0" marL="0">
+                        <a:buNone/>
+                      </a:pPr>
+                      <a:r>
+                        <a:rPr lang="en-US" sz="850" dirty="0">
+                          <a:solidFill>
+                            <a:srgbClr val="1F2933"/>
+                          </a:solidFill>
+                          <a:latin typeface="Calibri" pitchFamily="34" charset="0"/>
+                          <a:ea typeface="Calibri" pitchFamily="34" charset="-122"/>
+                          <a:cs typeface="Calibri" pitchFamily="34" charset="-120"/>
+                        </a:rPr>
+                        <a:t>6,1</a:t>
+                      </a:r>
+                      <a:endParaRPr lang="en-US" sz="850" dirty="0">
+                        <a:latin typeface="Calibri" charset="0"/>
+                        <a:ea typeface="Calibri" charset="0"/>
+                        <a:cs typeface="Calibri" charset="0"/>
+                      </a:endParaRPr>
+                    </a:p>
+                  </a:txBody>
+                  <a:tcPr marL="64008" marR="64008" marT="0" marB="0" anchor="ctr">
+                    <a:lnL w="6350" cap="flat" cmpd="sng" algn="ctr">
+                      <a:solidFill>
+                        <a:srgbClr val="D5DBE3"/>
+                      </a:solidFill>
+                      <a:prstDash val="solid"/>
+                      <a:round/>
+                      <a:headEnd type="none" w="med" len="med"/>
+                      <a:tailEnd type="none" w="med" len="med"/>
+                    </a:lnL>
+                    <a:lnR w="6350" cap="flat" cmpd="sng" algn="ctr">
+                      <a:solidFill>
+                        <a:srgbClr val="D5DBE3"/>
+                      </a:solidFill>
+                      <a:prstDash val="solid"/>
+                      <a:round/>
+                      <a:headEnd type="none" w="med" len="med"/>
+                      <a:tailEnd type="none" w="med" len="med"/>
+                    </a:lnR>
+                    <a:lnT w="6350" cap="flat" cmpd="sng" algn="ctr">
+                      <a:solidFill>
+                        <a:srgbClr val="D5DBE3"/>
+                      </a:solidFill>
+                      <a:prstDash val="solid"/>
+                      <a:round/>
+                      <a:headEnd type="none" w="med" len="med"/>
+                      <a:tailEnd type="none" w="med" len="med"/>
+                    </a:lnT>
+                    <a:lnB w="6350" cap="flat" cmpd="sng" algn="ctr">
+                      <a:solidFill>
+                        <a:srgbClr val="D5DBE3"/>
+                      </a:solidFill>
+                      <a:prstDash val="solid"/>
+                      <a:round/>
+                      <a:headEnd type="none" w="med" len="med"/>
+                      <a:tailEnd type="none" w="med" len="med"/>
+                    </a:lnB>
+                  </a:tcPr>
+                </a:tc>
+                <a:tc>
+                  <a:txBody>
+                    <a:bodyPr/>
+                    <a:lstStyle/>
+                    <a:p>
+                      <a:pPr algn="r" indent="0" marL="0">
+                        <a:buNone/>
+                      </a:pPr>
+                      <a:r>
+                        <a:rPr lang="en-US" sz="850" dirty="0">
+                          <a:solidFill>
+                            <a:srgbClr val="1F2933"/>
+                          </a:solidFill>
+                          <a:latin typeface="Calibri" pitchFamily="34" charset="0"/>
+                          <a:ea typeface="Calibri" pitchFamily="34" charset="-122"/>
+                          <a:cs typeface="Calibri" pitchFamily="34" charset="-120"/>
+                        </a:rPr>
+                        <a:t>-9,6</a:t>
+                      </a:r>
+                      <a:endParaRPr lang="en-US" sz="850" dirty="0">
+                        <a:latin typeface="Calibri" charset="0"/>
+                        <a:ea typeface="Calibri" charset="0"/>
+                        <a:cs typeface="Calibri" charset="0"/>
+                      </a:endParaRPr>
+                    </a:p>
+                  </a:txBody>
+                  <a:tcPr marL="64008" marR="64008" marT="0" marB="0" anchor="ctr">
+                    <a:lnL w="6350" cap="flat" cmpd="sng" algn="ctr">
+                      <a:solidFill>
+                        <a:srgbClr val="D5DBE3"/>
+                      </a:solidFill>
+                      <a:prstDash val="solid"/>
+                      <a:round/>
+                      <a:headEnd type="none" w="med" len="med"/>
+                      <a:tailEnd type="none" w="med" len="med"/>
+                    </a:lnL>
+                    <a:lnR w="6350" cap="flat" cmpd="sng" algn="ctr">
+                      <a:solidFill>
+                        <a:srgbClr val="D5DBE3"/>
+                      </a:solidFill>
+                      <a:prstDash val="solid"/>
+                      <a:round/>
+                      <a:headEnd type="none" w="med" len="med"/>
+                      <a:tailEnd type="none" w="med" len="med"/>
+                    </a:lnR>
+                    <a:lnT w="6350" cap="flat" cmpd="sng" algn="ctr">
+                      <a:solidFill>
+                        <a:srgbClr val="D5DBE3"/>
+                      </a:solidFill>
+                      <a:prstDash val="solid"/>
+                      <a:round/>
+                      <a:headEnd type="none" w="med" len="med"/>
+                      <a:tailEnd type="none" w="med" len="med"/>
+                    </a:lnT>
+                    <a:lnB w="6350" cap="flat" cmpd="sng" algn="ctr">
+                      <a:solidFill>
+                        <a:srgbClr val="D5DBE3"/>
+                      </a:solidFill>
+                      <a:prstDash val="solid"/>
+                      <a:round/>
+                      <a:headEnd type="none" w="med" len="med"/>
+                      <a:tailEnd type="none" w="med" len="med"/>
+                    </a:lnB>
+                  </a:tcPr>
+                </a:tc>
+                <a:tc>
+                  <a:txBody>
+                    <a:bodyPr/>
+                    <a:lstStyle/>
+                    <a:p>
+                      <a:pPr algn="r" indent="0" marL="0">
+                        <a:buNone/>
+                      </a:pPr>
+                      <a:r>
+                        <a:rPr lang="en-US" sz="850" dirty="0">
+                          <a:solidFill>
+                            <a:srgbClr val="1F2933"/>
+                          </a:solidFill>
+                          <a:latin typeface="Calibri" pitchFamily="34" charset="0"/>
+                          <a:ea typeface="Calibri" pitchFamily="34" charset="-122"/>
+                          <a:cs typeface="Calibri" pitchFamily="34" charset="-120"/>
+                        </a:rPr>
+                        <a:t>–</a:t>
+                      </a:r>
+                      <a:endParaRPr lang="en-US" sz="850" dirty="0">
+                        <a:latin typeface="Calibri" charset="0"/>
+                        <a:ea typeface="Calibri" charset="0"/>
+                        <a:cs typeface="Calibri" charset="0"/>
+                      </a:endParaRPr>
+                    </a:p>
+                  </a:txBody>
+                  <a:tcPr marL="64008" marR="64008" marT="0" marB="0" anchor="ctr">
+                    <a:lnL w="6350" cap="flat" cmpd="sng" algn="ctr">
+                      <a:solidFill>
+                        <a:srgbClr val="D5DBE3"/>
+                      </a:solidFill>
+                      <a:prstDash val="solid"/>
+                      <a:round/>
+                      <a:headEnd type="none" w="med" len="med"/>
+                      <a:tailEnd type="none" w="med" len="med"/>
+                    </a:lnL>
+                    <a:lnR w="6350" cap="flat" cmpd="sng" algn="ctr">
+                      <a:solidFill>
+                        <a:srgbClr val="D5DBE3"/>
+                      </a:solidFill>
+                      <a:prstDash val="solid"/>
+                      <a:round/>
+                      <a:headEnd type="none" w="med" len="med"/>
+                      <a:tailEnd type="none" w="med" len="med"/>
+                    </a:lnR>
+                    <a:lnT w="6350" cap="flat" cmpd="sng" algn="ctr">
+                      <a:solidFill>
+                        <a:srgbClr val="D5DBE3"/>
+                      </a:solidFill>
+                      <a:prstDash val="solid"/>
+                      <a:round/>
+                      <a:headEnd type="none" w="med" len="med"/>
+                      <a:tailEnd type="none" w="med" len="med"/>
+                    </a:lnT>
+                    <a:lnB w="6350" cap="flat" cmpd="sng" algn="ctr">
+                      <a:solidFill>
+                        <a:srgbClr val="D5DBE3"/>
+                      </a:solidFill>
+                      <a:prstDash val="solid"/>
+                      <a:round/>
+                      <a:headEnd type="none" w="med" len="med"/>
+                      <a:tailEnd type="none" w="med" len="med"/>
+                    </a:lnB>
+                  </a:tcPr>
+                </a:tc>
+                <a:tc>
+                  <a:txBody>
+                    <a:bodyPr/>
+                    <a:lstStyle/>
+                    <a:p>
+                      <a:pPr algn="r" indent="0" marL="0">
+                        <a:buNone/>
+                      </a:pPr>
+                      <a:r>
+                        <a:rPr lang="en-US" sz="850" b="1" dirty="0">
+                          <a:solidFill>
                             <a:srgbClr val="B3261E"/>
                           </a:solidFill>
                           <a:latin typeface="Calibri" pitchFamily="34" charset="0"/>
                           <a:ea typeface="Calibri" pitchFamily="34" charset="-122"/>
                           <a:cs typeface="Calibri" pitchFamily="34" charset="-120"/>
                         </a:rPr>
-                        <a:t>140,2</a:t>
+                        <a:t>-3,5</a:t>
                       </a:r>
                       <a:endParaRPr lang="en-US" sz="850" dirty="0">
                         <a:latin typeface="Calibri" charset="0"/>
@@ -25377,678 +26096,24 @@
                     </a:solidFill>
                   </a:tcPr>
                 </a:tc>
-              </a:tr>
-              <a:tr h="224028">
-                <a:tc>
-                  <a:txBody>
-                    <a:bodyPr/>
-                    <a:lstStyle/>
-                    <a:p>
-                      <a:pPr algn="l" indent="0" marL="0">
+                <a:tc>
+                  <a:txBody>
+                    <a:bodyPr/>
+                    <a:lstStyle/>
+                    <a:p>
+                      <a:pPr algn="r" indent="0" marL="0">
                         <a:buNone/>
                       </a:pPr>
                       <a:r>
                         <a:rPr lang="en-US" sz="850" b="1" dirty="0">
                           <a:solidFill>
-                            <a:srgbClr val="1F2933"/>
-                          </a:solidFill>
-                          <a:latin typeface="Calibri" pitchFamily="34" charset="0"/>
-                          <a:ea typeface="Calibri" pitchFamily="34" charset="-122"/>
-                          <a:cs typeface="Calibri" pitchFamily="34" charset="-120"/>
-                        </a:rPr>
-                        <a:t>INFI</a:t>
-                      </a:r>
-                      <a:endParaRPr lang="en-US" sz="850" dirty="0">
-                        <a:latin typeface="Calibri" charset="0"/>
-                        <a:ea typeface="Calibri" charset="0"/>
-                        <a:cs typeface="Calibri" charset="0"/>
-                      </a:endParaRPr>
-                    </a:p>
-                  </a:txBody>
-                  <a:tcPr marL="64008" marR="64008" marT="0" marB="0" anchor="ctr">
-                    <a:lnL w="6350" cap="flat" cmpd="sng" algn="ctr">
-                      <a:solidFill>
-                        <a:srgbClr val="D5DBE3"/>
-                      </a:solidFill>
-                      <a:prstDash val="solid"/>
-                      <a:round/>
-                      <a:headEnd type="none" w="med" len="med"/>
-                      <a:tailEnd type="none" w="med" len="med"/>
-                    </a:lnL>
-                    <a:lnR w="6350" cap="flat" cmpd="sng" algn="ctr">
-                      <a:solidFill>
-                        <a:srgbClr val="D5DBE3"/>
-                      </a:solidFill>
-                      <a:prstDash val="solid"/>
-                      <a:round/>
-                      <a:headEnd type="none" w="med" len="med"/>
-                      <a:tailEnd type="none" w="med" len="med"/>
-                    </a:lnR>
-                    <a:lnT w="6350" cap="flat" cmpd="sng" algn="ctr">
-                      <a:solidFill>
-                        <a:srgbClr val="D5DBE3"/>
-                      </a:solidFill>
-                      <a:prstDash val="solid"/>
-                      <a:round/>
-                      <a:headEnd type="none" w="med" len="med"/>
-                      <a:tailEnd type="none" w="med" len="med"/>
-                    </a:lnT>
-                    <a:lnB w="6350" cap="flat" cmpd="sng" algn="ctr">
-                      <a:solidFill>
-                        <a:srgbClr val="D5DBE3"/>
-                      </a:solidFill>
-                      <a:prstDash val="solid"/>
-                      <a:round/>
-                      <a:headEnd type="none" w="med" len="med"/>
-                      <a:tailEnd type="none" w="med" len="med"/>
-                    </a:lnB>
-                  </a:tcPr>
-                </a:tc>
-                <a:tc>
-                  <a:txBody>
-                    <a:bodyPr/>
-                    <a:lstStyle/>
-                    <a:p>
-                      <a:pPr algn="r" indent="0" marL="0">
-                        <a:buNone/>
-                      </a:pPr>
-                      <a:r>
-                        <a:rPr lang="en-US" sz="850" dirty="0">
-                          <a:solidFill>
-                            <a:srgbClr val="1F2933"/>
-                          </a:solidFill>
-                          <a:latin typeface="Calibri" pitchFamily="34" charset="0"/>
-                          <a:ea typeface="Calibri" pitchFamily="34" charset="-122"/>
-                          <a:cs typeface="Calibri" pitchFamily="34" charset="-120"/>
-                        </a:rPr>
-                        <a:t>2,8</a:t>
-                      </a:r>
-                      <a:endParaRPr lang="en-US" sz="850" dirty="0">
-                        <a:latin typeface="Calibri" charset="0"/>
-                        <a:ea typeface="Calibri" charset="0"/>
-                        <a:cs typeface="Calibri" charset="0"/>
-                      </a:endParaRPr>
-                    </a:p>
-                  </a:txBody>
-                  <a:tcPr marL="64008" marR="64008" marT="0" marB="0" anchor="ctr">
-                    <a:lnL w="6350" cap="flat" cmpd="sng" algn="ctr">
-                      <a:solidFill>
-                        <a:srgbClr val="D5DBE3"/>
-                      </a:solidFill>
-                      <a:prstDash val="solid"/>
-                      <a:round/>
-                      <a:headEnd type="none" w="med" len="med"/>
-                      <a:tailEnd type="none" w="med" len="med"/>
-                    </a:lnL>
-                    <a:lnR w="6350" cap="flat" cmpd="sng" algn="ctr">
-                      <a:solidFill>
-                        <a:srgbClr val="D5DBE3"/>
-                      </a:solidFill>
-                      <a:prstDash val="solid"/>
-                      <a:round/>
-                      <a:headEnd type="none" w="med" len="med"/>
-                      <a:tailEnd type="none" w="med" len="med"/>
-                    </a:lnR>
-                    <a:lnT w="6350" cap="flat" cmpd="sng" algn="ctr">
-                      <a:solidFill>
-                        <a:srgbClr val="D5DBE3"/>
-                      </a:solidFill>
-                      <a:prstDash val="solid"/>
-                      <a:round/>
-                      <a:headEnd type="none" w="med" len="med"/>
-                      <a:tailEnd type="none" w="med" len="med"/>
-                    </a:lnT>
-                    <a:lnB w="6350" cap="flat" cmpd="sng" algn="ctr">
-                      <a:solidFill>
-                        <a:srgbClr val="D5DBE3"/>
-                      </a:solidFill>
-                      <a:prstDash val="solid"/>
-                      <a:round/>
-                      <a:headEnd type="none" w="med" len="med"/>
-                      <a:tailEnd type="none" w="med" len="med"/>
-                    </a:lnB>
-                  </a:tcPr>
-                </a:tc>
-                <a:tc>
-                  <a:txBody>
-                    <a:bodyPr/>
-                    <a:lstStyle/>
-                    <a:p>
-                      <a:pPr algn="r" indent="0" marL="0">
-                        <a:buNone/>
-                      </a:pPr>
-                      <a:r>
-                        <a:rPr lang="en-US" sz="850" dirty="0">
-                          <a:solidFill>
-                            <a:srgbClr val="1F2933"/>
-                          </a:solidFill>
-                          <a:latin typeface="Calibri" pitchFamily="34" charset="0"/>
-                          <a:ea typeface="Calibri" pitchFamily="34" charset="-122"/>
-                          <a:cs typeface="Calibri" pitchFamily="34" charset="-120"/>
-                        </a:rPr>
-                        <a:t>–</a:t>
-                      </a:r>
-                      <a:endParaRPr lang="en-US" sz="850" dirty="0">
-                        <a:latin typeface="Calibri" charset="0"/>
-                        <a:ea typeface="Calibri" charset="0"/>
-                        <a:cs typeface="Calibri" charset="0"/>
-                      </a:endParaRPr>
-                    </a:p>
-                  </a:txBody>
-                  <a:tcPr marL="64008" marR="64008" marT="0" marB="0" anchor="ctr">
-                    <a:lnL w="6350" cap="flat" cmpd="sng" algn="ctr">
-                      <a:solidFill>
-                        <a:srgbClr val="D5DBE3"/>
-                      </a:solidFill>
-                      <a:prstDash val="solid"/>
-                      <a:round/>
-                      <a:headEnd type="none" w="med" len="med"/>
-                      <a:tailEnd type="none" w="med" len="med"/>
-                    </a:lnL>
-                    <a:lnR w="6350" cap="flat" cmpd="sng" algn="ctr">
-                      <a:solidFill>
-                        <a:srgbClr val="D5DBE3"/>
-                      </a:solidFill>
-                      <a:prstDash val="solid"/>
-                      <a:round/>
-                      <a:headEnd type="none" w="med" len="med"/>
-                      <a:tailEnd type="none" w="med" len="med"/>
-                    </a:lnR>
-                    <a:lnT w="6350" cap="flat" cmpd="sng" algn="ctr">
-                      <a:solidFill>
-                        <a:srgbClr val="D5DBE3"/>
-                      </a:solidFill>
-                      <a:prstDash val="solid"/>
-                      <a:round/>
-                      <a:headEnd type="none" w="med" len="med"/>
-                      <a:tailEnd type="none" w="med" len="med"/>
-                    </a:lnT>
-                    <a:lnB w="6350" cap="flat" cmpd="sng" algn="ctr">
-                      <a:solidFill>
-                        <a:srgbClr val="D5DBE3"/>
-                      </a:solidFill>
-                      <a:prstDash val="solid"/>
-                      <a:round/>
-                      <a:headEnd type="none" w="med" len="med"/>
-                      <a:tailEnd type="none" w="med" len="med"/>
-                    </a:lnB>
-                  </a:tcPr>
-                </a:tc>
-                <a:tc>
-                  <a:txBody>
-                    <a:bodyPr/>
-                    <a:lstStyle/>
-                    <a:p>
-                      <a:pPr algn="r" indent="0" marL="0">
-                        <a:buNone/>
-                      </a:pPr>
-                      <a:r>
-                        <a:rPr lang="en-US" sz="850" dirty="0">
-                          <a:solidFill>
-                            <a:srgbClr val="1F2933"/>
-                          </a:solidFill>
-                          <a:latin typeface="Calibri" pitchFamily="34" charset="0"/>
-                          <a:ea typeface="Calibri" pitchFamily="34" charset="-122"/>
-                          <a:cs typeface="Calibri" pitchFamily="34" charset="-120"/>
-                        </a:rPr>
-                        <a:t>–</a:t>
-                      </a:r>
-                      <a:endParaRPr lang="en-US" sz="850" dirty="0">
-                        <a:latin typeface="Calibri" charset="0"/>
-                        <a:ea typeface="Calibri" charset="0"/>
-                        <a:cs typeface="Calibri" charset="0"/>
-                      </a:endParaRPr>
-                    </a:p>
-                  </a:txBody>
-                  <a:tcPr marL="64008" marR="64008" marT="0" marB="0" anchor="ctr">
-                    <a:lnL w="6350" cap="flat" cmpd="sng" algn="ctr">
-                      <a:solidFill>
-                        <a:srgbClr val="D5DBE3"/>
-                      </a:solidFill>
-                      <a:prstDash val="solid"/>
-                      <a:round/>
-                      <a:headEnd type="none" w="med" len="med"/>
-                      <a:tailEnd type="none" w="med" len="med"/>
-                    </a:lnL>
-                    <a:lnR w="6350" cap="flat" cmpd="sng" algn="ctr">
-                      <a:solidFill>
-                        <a:srgbClr val="D5DBE3"/>
-                      </a:solidFill>
-                      <a:prstDash val="solid"/>
-                      <a:round/>
-                      <a:headEnd type="none" w="med" len="med"/>
-                      <a:tailEnd type="none" w="med" len="med"/>
-                    </a:lnR>
-                    <a:lnT w="6350" cap="flat" cmpd="sng" algn="ctr">
-                      <a:solidFill>
-                        <a:srgbClr val="D5DBE3"/>
-                      </a:solidFill>
-                      <a:prstDash val="solid"/>
-                      <a:round/>
-                      <a:headEnd type="none" w="med" len="med"/>
-                      <a:tailEnd type="none" w="med" len="med"/>
-                    </a:lnT>
-                    <a:lnB w="6350" cap="flat" cmpd="sng" algn="ctr">
-                      <a:solidFill>
-                        <a:srgbClr val="D5DBE3"/>
-                      </a:solidFill>
-                      <a:prstDash val="solid"/>
-                      <a:round/>
-                      <a:headEnd type="none" w="med" len="med"/>
-                      <a:tailEnd type="none" w="med" len="med"/>
-                    </a:lnB>
-                  </a:tcPr>
-                </a:tc>
-                <a:tc>
-                  <a:txBody>
-                    <a:bodyPr/>
-                    <a:lstStyle/>
-                    <a:p>
-                      <a:pPr algn="r" indent="0" marL="0">
-                        <a:buNone/>
-                      </a:pPr>
-                      <a:r>
-                        <a:rPr lang="en-US" sz="850" b="1" dirty="0">
-                          <a:solidFill>
-                            <a:srgbClr val="5E9B7E"/>
-                          </a:solidFill>
-                          <a:latin typeface="Calibri" pitchFamily="34" charset="0"/>
-                          <a:ea typeface="Calibri" pitchFamily="34" charset="-122"/>
-                          <a:cs typeface="Calibri" pitchFamily="34" charset="-120"/>
-                        </a:rPr>
-                        <a:t>2,8</a:t>
-                      </a:r>
-                      <a:endParaRPr lang="en-US" sz="850" dirty="0">
-                        <a:latin typeface="Calibri" charset="0"/>
-                        <a:ea typeface="Calibri" charset="0"/>
-                        <a:cs typeface="Calibri" charset="0"/>
-                      </a:endParaRPr>
-                    </a:p>
-                  </a:txBody>
-                  <a:tcPr marL="64008" marR="64008" marT="0" marB="0" anchor="ctr">
-                    <a:lnL w="6350" cap="flat" cmpd="sng" algn="ctr">
-                      <a:solidFill>
-                        <a:srgbClr val="D5DBE3"/>
-                      </a:solidFill>
-                      <a:prstDash val="solid"/>
-                      <a:round/>
-                      <a:headEnd type="none" w="med" len="med"/>
-                      <a:tailEnd type="none" w="med" len="med"/>
-                    </a:lnL>
-                    <a:lnR w="6350" cap="flat" cmpd="sng" algn="ctr">
-                      <a:solidFill>
-                        <a:srgbClr val="D5DBE3"/>
-                      </a:solidFill>
-                      <a:prstDash val="solid"/>
-                      <a:round/>
-                      <a:headEnd type="none" w="med" len="med"/>
-                      <a:tailEnd type="none" w="med" len="med"/>
-                    </a:lnR>
-                    <a:lnT w="6350" cap="flat" cmpd="sng" algn="ctr">
-                      <a:solidFill>
-                        <a:srgbClr val="D5DBE3"/>
-                      </a:solidFill>
-                      <a:prstDash val="solid"/>
-                      <a:round/>
-                      <a:headEnd type="none" w="med" len="med"/>
-                      <a:tailEnd type="none" w="med" len="med"/>
-                    </a:lnT>
-                    <a:lnB w="6350" cap="flat" cmpd="sng" algn="ctr">
-                      <a:solidFill>
-                        <a:srgbClr val="D5DBE3"/>
-                      </a:solidFill>
-                      <a:prstDash val="solid"/>
-                      <a:round/>
-                      <a:headEnd type="none" w="med" len="med"/>
-                      <a:tailEnd type="none" w="med" len="med"/>
-                    </a:lnB>
-                  </a:tcPr>
-                </a:tc>
-                <a:tc>
-                  <a:txBody>
-                    <a:bodyPr/>
-                    <a:lstStyle/>
-                    <a:p>
-                      <a:pPr algn="r" indent="0" marL="0">
-                        <a:buNone/>
-                      </a:pPr>
-                      <a:r>
-                        <a:rPr lang="en-US" sz="850" dirty="0">
-                          <a:solidFill>
-                            <a:srgbClr val="1F2933"/>
-                          </a:solidFill>
-                          <a:latin typeface="Calibri" pitchFamily="34" charset="0"/>
-                          <a:ea typeface="Calibri" pitchFamily="34" charset="-122"/>
-                          <a:cs typeface="Calibri" pitchFamily="34" charset="-120"/>
-                        </a:rPr>
-                        <a:t>–</a:t>
-                      </a:r>
-                      <a:endParaRPr lang="en-US" sz="850" dirty="0">
-                        <a:latin typeface="Calibri" charset="0"/>
-                        <a:ea typeface="Calibri" charset="0"/>
-                        <a:cs typeface="Calibri" charset="0"/>
-                      </a:endParaRPr>
-                    </a:p>
-                  </a:txBody>
-                  <a:tcPr marL="64008" marR="64008" marT="0" marB="0" anchor="ctr">
-                    <a:lnL w="6350" cap="flat" cmpd="sng" algn="ctr">
-                      <a:solidFill>
-                        <a:srgbClr val="D5DBE3"/>
-                      </a:solidFill>
-                      <a:prstDash val="solid"/>
-                      <a:round/>
-                      <a:headEnd type="none" w="med" len="med"/>
-                      <a:tailEnd type="none" w="med" len="med"/>
-                    </a:lnL>
-                    <a:lnR w="6350" cap="flat" cmpd="sng" algn="ctr">
-                      <a:solidFill>
-                        <a:srgbClr val="D5DBE3"/>
-                      </a:solidFill>
-                      <a:prstDash val="solid"/>
-                      <a:round/>
-                      <a:headEnd type="none" w="med" len="med"/>
-                      <a:tailEnd type="none" w="med" len="med"/>
-                    </a:lnR>
-                    <a:lnT w="6350" cap="flat" cmpd="sng" algn="ctr">
-                      <a:solidFill>
-                        <a:srgbClr val="D5DBE3"/>
-                      </a:solidFill>
-                      <a:prstDash val="solid"/>
-                      <a:round/>
-                      <a:headEnd type="none" w="med" len="med"/>
-                      <a:tailEnd type="none" w="med" len="med"/>
-                    </a:lnT>
-                    <a:lnB w="6350" cap="flat" cmpd="sng" algn="ctr">
-                      <a:solidFill>
-                        <a:srgbClr val="D5DBE3"/>
-                      </a:solidFill>
-                      <a:prstDash val="solid"/>
-                      <a:round/>
-                      <a:headEnd type="none" w="med" len="med"/>
-                      <a:tailEnd type="none" w="med" len="med"/>
-                    </a:lnB>
-                  </a:tcPr>
-                </a:tc>
-              </a:tr>
-              <a:tr h="224028">
-                <a:tc>
-                  <a:txBody>
-                    <a:bodyPr/>
-                    <a:lstStyle/>
-                    <a:p>
-                      <a:pPr algn="l" indent="0" marL="0">
-                        <a:buNone/>
-                      </a:pPr>
-                      <a:r>
-                        <a:rPr lang="en-US" sz="850" b="1" dirty="0">
-                          <a:solidFill>
-                            <a:srgbClr val="1F2933"/>
-                          </a:solidFill>
-                          <a:latin typeface="Calibri" pitchFamily="34" charset="0"/>
-                          <a:ea typeface="Calibri" pitchFamily="34" charset="-122"/>
-                          <a:cs typeface="Calibri" pitchFamily="34" charset="-120"/>
-                        </a:rPr>
-                        <a:t>ODALYS CI</a:t>
-                      </a:r>
-                      <a:endParaRPr lang="en-US" sz="850" dirty="0">
-                        <a:latin typeface="Calibri" charset="0"/>
-                        <a:ea typeface="Calibri" charset="0"/>
-                        <a:cs typeface="Calibri" charset="0"/>
-                      </a:endParaRPr>
-                    </a:p>
-                  </a:txBody>
-                  <a:tcPr marL="64008" marR="64008" marT="0" marB="0" anchor="ctr">
-                    <a:lnL w="6350" cap="flat" cmpd="sng" algn="ctr">
-                      <a:solidFill>
-                        <a:srgbClr val="D5DBE3"/>
-                      </a:solidFill>
-                      <a:prstDash val="solid"/>
-                      <a:round/>
-                      <a:headEnd type="none" w="med" len="med"/>
-                      <a:tailEnd type="none" w="med" len="med"/>
-                    </a:lnL>
-                    <a:lnR w="6350" cap="flat" cmpd="sng" algn="ctr">
-                      <a:solidFill>
-                        <a:srgbClr val="D5DBE3"/>
-                      </a:solidFill>
-                      <a:prstDash val="solid"/>
-                      <a:round/>
-                      <a:headEnd type="none" w="med" len="med"/>
-                      <a:tailEnd type="none" w="med" len="med"/>
-                    </a:lnR>
-                    <a:lnT w="6350" cap="flat" cmpd="sng" algn="ctr">
-                      <a:solidFill>
-                        <a:srgbClr val="D5DBE3"/>
-                      </a:solidFill>
-                      <a:prstDash val="solid"/>
-                      <a:round/>
-                      <a:headEnd type="none" w="med" len="med"/>
-                      <a:tailEnd type="none" w="med" len="med"/>
-                    </a:lnT>
-                    <a:lnB w="6350" cap="flat" cmpd="sng" algn="ctr">
-                      <a:solidFill>
-                        <a:srgbClr val="D5DBE3"/>
-                      </a:solidFill>
-                      <a:prstDash val="solid"/>
-                      <a:round/>
-                      <a:headEnd type="none" w="med" len="med"/>
-                      <a:tailEnd type="none" w="med" len="med"/>
-                    </a:lnB>
-                  </a:tcPr>
-                </a:tc>
-                <a:tc>
-                  <a:txBody>
-                    <a:bodyPr/>
-                    <a:lstStyle/>
-                    <a:p>
-                      <a:pPr algn="r" indent="0" marL="0">
-                        <a:buNone/>
-                      </a:pPr>
-                      <a:r>
-                        <a:rPr lang="en-US" sz="850" dirty="0">
-                          <a:solidFill>
-                            <a:srgbClr val="1F2933"/>
-                          </a:solidFill>
-                          <a:latin typeface="Calibri" pitchFamily="34" charset="0"/>
-                          <a:ea typeface="Calibri" pitchFamily="34" charset="-122"/>
-                          <a:cs typeface="Calibri" pitchFamily="34" charset="-120"/>
-                        </a:rPr>
-                        <a:t>6,1</a:t>
-                      </a:r>
-                      <a:endParaRPr lang="en-US" sz="850" dirty="0">
-                        <a:latin typeface="Calibri" charset="0"/>
-                        <a:ea typeface="Calibri" charset="0"/>
-                        <a:cs typeface="Calibri" charset="0"/>
-                      </a:endParaRPr>
-                    </a:p>
-                  </a:txBody>
-                  <a:tcPr marL="64008" marR="64008" marT="0" marB="0" anchor="ctr">
-                    <a:lnL w="6350" cap="flat" cmpd="sng" algn="ctr">
-                      <a:solidFill>
-                        <a:srgbClr val="D5DBE3"/>
-                      </a:solidFill>
-                      <a:prstDash val="solid"/>
-                      <a:round/>
-                      <a:headEnd type="none" w="med" len="med"/>
-                      <a:tailEnd type="none" w="med" len="med"/>
-                    </a:lnL>
-                    <a:lnR w="6350" cap="flat" cmpd="sng" algn="ctr">
-                      <a:solidFill>
-                        <a:srgbClr val="D5DBE3"/>
-                      </a:solidFill>
-                      <a:prstDash val="solid"/>
-                      <a:round/>
-                      <a:headEnd type="none" w="med" len="med"/>
-                      <a:tailEnd type="none" w="med" len="med"/>
-                    </a:lnR>
-                    <a:lnT w="6350" cap="flat" cmpd="sng" algn="ctr">
-                      <a:solidFill>
-                        <a:srgbClr val="D5DBE3"/>
-                      </a:solidFill>
-                      <a:prstDash val="solid"/>
-                      <a:round/>
-                      <a:headEnd type="none" w="med" len="med"/>
-                      <a:tailEnd type="none" w="med" len="med"/>
-                    </a:lnT>
-                    <a:lnB w="6350" cap="flat" cmpd="sng" algn="ctr">
-                      <a:solidFill>
-                        <a:srgbClr val="D5DBE3"/>
-                      </a:solidFill>
-                      <a:prstDash val="solid"/>
-                      <a:round/>
-                      <a:headEnd type="none" w="med" len="med"/>
-                      <a:tailEnd type="none" w="med" len="med"/>
-                    </a:lnB>
-                  </a:tcPr>
-                </a:tc>
-                <a:tc>
-                  <a:txBody>
-                    <a:bodyPr/>
-                    <a:lstStyle/>
-                    <a:p>
-                      <a:pPr algn="r" indent="0" marL="0">
-                        <a:buNone/>
-                      </a:pPr>
-                      <a:r>
-                        <a:rPr lang="en-US" sz="850" dirty="0">
-                          <a:solidFill>
-                            <a:srgbClr val="1F2933"/>
-                          </a:solidFill>
-                          <a:latin typeface="Calibri" pitchFamily="34" charset="0"/>
-                          <a:ea typeface="Calibri" pitchFamily="34" charset="-122"/>
-                          <a:cs typeface="Calibri" pitchFamily="34" charset="-120"/>
-                        </a:rPr>
-                        <a:t>-9,6</a:t>
-                      </a:r>
-                      <a:endParaRPr lang="en-US" sz="850" dirty="0">
-                        <a:latin typeface="Calibri" charset="0"/>
-                        <a:ea typeface="Calibri" charset="0"/>
-                        <a:cs typeface="Calibri" charset="0"/>
-                      </a:endParaRPr>
-                    </a:p>
-                  </a:txBody>
-                  <a:tcPr marL="64008" marR="64008" marT="0" marB="0" anchor="ctr">
-                    <a:lnL w="6350" cap="flat" cmpd="sng" algn="ctr">
-                      <a:solidFill>
-                        <a:srgbClr val="D5DBE3"/>
-                      </a:solidFill>
-                      <a:prstDash val="solid"/>
-                      <a:round/>
-                      <a:headEnd type="none" w="med" len="med"/>
-                      <a:tailEnd type="none" w="med" len="med"/>
-                    </a:lnL>
-                    <a:lnR w="6350" cap="flat" cmpd="sng" algn="ctr">
-                      <a:solidFill>
-                        <a:srgbClr val="D5DBE3"/>
-                      </a:solidFill>
-                      <a:prstDash val="solid"/>
-                      <a:round/>
-                      <a:headEnd type="none" w="med" len="med"/>
-                      <a:tailEnd type="none" w="med" len="med"/>
-                    </a:lnR>
-                    <a:lnT w="6350" cap="flat" cmpd="sng" algn="ctr">
-                      <a:solidFill>
-                        <a:srgbClr val="D5DBE3"/>
-                      </a:solidFill>
-                      <a:prstDash val="solid"/>
-                      <a:round/>
-                      <a:headEnd type="none" w="med" len="med"/>
-                      <a:tailEnd type="none" w="med" len="med"/>
-                    </a:lnT>
-                    <a:lnB w="6350" cap="flat" cmpd="sng" algn="ctr">
-                      <a:solidFill>
-                        <a:srgbClr val="D5DBE3"/>
-                      </a:solidFill>
-                      <a:prstDash val="solid"/>
-                      <a:round/>
-                      <a:headEnd type="none" w="med" len="med"/>
-                      <a:tailEnd type="none" w="med" len="med"/>
-                    </a:lnB>
-                  </a:tcPr>
-                </a:tc>
-                <a:tc>
-                  <a:txBody>
-                    <a:bodyPr/>
-                    <a:lstStyle/>
-                    <a:p>
-                      <a:pPr algn="r" indent="0" marL="0">
-                        <a:buNone/>
-                      </a:pPr>
-                      <a:r>
-                        <a:rPr lang="en-US" sz="850" dirty="0">
-                          <a:solidFill>
-                            <a:srgbClr val="1F2933"/>
-                          </a:solidFill>
-                          <a:latin typeface="Calibri" pitchFamily="34" charset="0"/>
-                          <a:ea typeface="Calibri" pitchFamily="34" charset="-122"/>
-                          <a:cs typeface="Calibri" pitchFamily="34" charset="-120"/>
-                        </a:rPr>
-                        <a:t>–</a:t>
-                      </a:r>
-                      <a:endParaRPr lang="en-US" sz="850" dirty="0">
-                        <a:latin typeface="Calibri" charset="0"/>
-                        <a:ea typeface="Calibri" charset="0"/>
-                        <a:cs typeface="Calibri" charset="0"/>
-                      </a:endParaRPr>
-                    </a:p>
-                  </a:txBody>
-                  <a:tcPr marL="64008" marR="64008" marT="0" marB="0" anchor="ctr">
-                    <a:lnL w="6350" cap="flat" cmpd="sng" algn="ctr">
-                      <a:solidFill>
-                        <a:srgbClr val="D5DBE3"/>
-                      </a:solidFill>
-                      <a:prstDash val="solid"/>
-                      <a:round/>
-                      <a:headEnd type="none" w="med" len="med"/>
-                      <a:tailEnd type="none" w="med" len="med"/>
-                    </a:lnL>
-                    <a:lnR w="6350" cap="flat" cmpd="sng" algn="ctr">
-                      <a:solidFill>
-                        <a:srgbClr val="D5DBE3"/>
-                      </a:solidFill>
-                      <a:prstDash val="solid"/>
-                      <a:round/>
-                      <a:headEnd type="none" w="med" len="med"/>
-                      <a:tailEnd type="none" w="med" len="med"/>
-                    </a:lnR>
-                    <a:lnT w="6350" cap="flat" cmpd="sng" algn="ctr">
-                      <a:solidFill>
-                        <a:srgbClr val="D5DBE3"/>
-                      </a:solidFill>
-                      <a:prstDash val="solid"/>
-                      <a:round/>
-                      <a:headEnd type="none" w="med" len="med"/>
-                      <a:tailEnd type="none" w="med" len="med"/>
-                    </a:lnT>
-                    <a:lnB w="6350" cap="flat" cmpd="sng" algn="ctr">
-                      <a:solidFill>
-                        <a:srgbClr val="D5DBE3"/>
-                      </a:solidFill>
-                      <a:prstDash val="solid"/>
-                      <a:round/>
-                      <a:headEnd type="none" w="med" len="med"/>
-                      <a:tailEnd type="none" w="med" len="med"/>
-                    </a:lnB>
-                  </a:tcPr>
-                </a:tc>
-                <a:tc>
-                  <a:txBody>
-                    <a:bodyPr/>
-                    <a:lstStyle/>
-                    <a:p>
-                      <a:pPr algn="r" indent="0" marL="0">
-                        <a:buNone/>
-                      </a:pPr>
-                      <a:r>
-                        <a:rPr lang="en-US" sz="850" b="1" dirty="0">
-                          <a:solidFill>
                             <a:srgbClr val="B3261E"/>
                           </a:solidFill>
                           <a:latin typeface="Calibri" pitchFamily="34" charset="0"/>
                           <a:ea typeface="Calibri" pitchFamily="34" charset="-122"/>
                           <a:cs typeface="Calibri" pitchFamily="34" charset="-120"/>
                         </a:rPr>
-                        <a:t>-3,5</a:t>
+                        <a:t>3,5</a:t>
                       </a:r>
                       <a:endParaRPr lang="en-US" sz="850" dirty="0">
                         <a:latin typeface="Calibri" charset="0"/>
@@ -26099,6 +26164,73 @@
                     </a:solidFill>
                   </a:tcPr>
                 </a:tc>
+              </a:tr>
+              <a:tr h="224028">
+                <a:tc>
+                  <a:txBody>
+                    <a:bodyPr/>
+                    <a:lstStyle/>
+                    <a:p>
+                      <a:pPr algn="l" indent="0" marL="0">
+                        <a:buNone/>
+                      </a:pPr>
+                      <a:r>
+                        <a:rPr lang="en-US" sz="850" b="1" dirty="0">
+                          <a:solidFill>
+                            <a:srgbClr val="1F2933"/>
+                          </a:solidFill>
+                          <a:latin typeface="Calibri" pitchFamily="34" charset="0"/>
+                          <a:ea typeface="Calibri" pitchFamily="34" charset="-122"/>
+                          <a:cs typeface="Calibri" pitchFamily="34" charset="-120"/>
+                        </a:rPr>
+                        <a:t>AB CENTER</a:t>
+                      </a:r>
+                      <a:endParaRPr lang="en-US" sz="850" dirty="0">
+                        <a:latin typeface="Calibri" charset="0"/>
+                        <a:ea typeface="Calibri" charset="0"/>
+                        <a:cs typeface="Calibri" charset="0"/>
+                      </a:endParaRPr>
+                    </a:p>
+                  </a:txBody>
+                  <a:tcPr marL="64008" marR="64008" marT="0" marB="0" anchor="ctr">
+                    <a:lnL w="6350" cap="flat" cmpd="sng" algn="ctr">
+                      <a:solidFill>
+                        <a:srgbClr val="D5DBE3"/>
+                      </a:solidFill>
+                      <a:prstDash val="solid"/>
+                      <a:round/>
+                      <a:headEnd type="none" w="med" len="med"/>
+                      <a:tailEnd type="none" w="med" len="med"/>
+                    </a:lnL>
+                    <a:lnR w="6350" cap="flat" cmpd="sng" algn="ctr">
+                      <a:solidFill>
+                        <a:srgbClr val="D5DBE3"/>
+                      </a:solidFill>
+                      <a:prstDash val="solid"/>
+                      <a:round/>
+                      <a:headEnd type="none" w="med" len="med"/>
+                      <a:tailEnd type="none" w="med" len="med"/>
+                    </a:lnR>
+                    <a:lnT w="6350" cap="flat" cmpd="sng" algn="ctr">
+                      <a:solidFill>
+                        <a:srgbClr val="D5DBE3"/>
+                      </a:solidFill>
+                      <a:prstDash val="solid"/>
+                      <a:round/>
+                      <a:headEnd type="none" w="med" len="med"/>
+                      <a:tailEnd type="none" w="med" len="med"/>
+                    </a:lnT>
+                    <a:lnB w="6350" cap="flat" cmpd="sng" algn="ctr">
+                      <a:solidFill>
+                        <a:srgbClr val="D5DBE3"/>
+                      </a:solidFill>
+                      <a:prstDash val="solid"/>
+                      <a:round/>
+                      <a:headEnd type="none" w="med" len="med"/>
+                      <a:tailEnd type="none" w="med" len="med"/>
+                    </a:lnB>
+                  </a:tcPr>
+                </a:tc>
                 <a:tc>
                   <a:txBody>
                     <a:bodyPr/>
@@ -26108,6 +26240,201 @@
                         <a:buNone/>
                       </a:pPr>
                       <a:r>
+                        <a:rPr lang="en-US" sz="850" dirty="0">
+                          <a:solidFill>
+                            <a:srgbClr val="1F2933"/>
+                          </a:solidFill>
+                          <a:latin typeface="Calibri" pitchFamily="34" charset="0"/>
+                          <a:ea typeface="Calibri" pitchFamily="34" charset="-122"/>
+                          <a:cs typeface="Calibri" pitchFamily="34" charset="-120"/>
+                        </a:rPr>
+                        <a:t>–</a:t>
+                      </a:r>
+                      <a:endParaRPr lang="en-US" sz="850" dirty="0">
+                        <a:latin typeface="Calibri" charset="0"/>
+                        <a:ea typeface="Calibri" charset="0"/>
+                        <a:cs typeface="Calibri" charset="0"/>
+                      </a:endParaRPr>
+                    </a:p>
+                  </a:txBody>
+                  <a:tcPr marL="64008" marR="64008" marT="0" marB="0" anchor="ctr">
+                    <a:lnL w="6350" cap="flat" cmpd="sng" algn="ctr">
+                      <a:solidFill>
+                        <a:srgbClr val="D5DBE3"/>
+                      </a:solidFill>
+                      <a:prstDash val="solid"/>
+                      <a:round/>
+                      <a:headEnd type="none" w="med" len="med"/>
+                      <a:tailEnd type="none" w="med" len="med"/>
+                    </a:lnL>
+                    <a:lnR w="6350" cap="flat" cmpd="sng" algn="ctr">
+                      <a:solidFill>
+                        <a:srgbClr val="D5DBE3"/>
+                      </a:solidFill>
+                      <a:prstDash val="solid"/>
+                      <a:round/>
+                      <a:headEnd type="none" w="med" len="med"/>
+                      <a:tailEnd type="none" w="med" len="med"/>
+                    </a:lnR>
+                    <a:lnT w="6350" cap="flat" cmpd="sng" algn="ctr">
+                      <a:solidFill>
+                        <a:srgbClr val="D5DBE3"/>
+                      </a:solidFill>
+                      <a:prstDash val="solid"/>
+                      <a:round/>
+                      <a:headEnd type="none" w="med" len="med"/>
+                      <a:tailEnd type="none" w="med" len="med"/>
+                    </a:lnT>
+                    <a:lnB w="6350" cap="flat" cmpd="sng" algn="ctr">
+                      <a:solidFill>
+                        <a:srgbClr val="D5DBE3"/>
+                      </a:solidFill>
+                      <a:prstDash val="solid"/>
+                      <a:round/>
+                      <a:headEnd type="none" w="med" len="med"/>
+                      <a:tailEnd type="none" w="med" len="med"/>
+                    </a:lnB>
+                  </a:tcPr>
+                </a:tc>
+                <a:tc>
+                  <a:txBody>
+                    <a:bodyPr/>
+                    <a:lstStyle/>
+                    <a:p>
+                      <a:pPr algn="r" indent="0" marL="0">
+                        <a:buNone/>
+                      </a:pPr>
+                      <a:r>
+                        <a:rPr lang="en-US" sz="850" dirty="0">
+                          <a:solidFill>
+                            <a:srgbClr val="1F2933"/>
+                          </a:solidFill>
+                          <a:latin typeface="Calibri" pitchFamily="34" charset="0"/>
+                          <a:ea typeface="Calibri" pitchFamily="34" charset="-122"/>
+                          <a:cs typeface="Calibri" pitchFamily="34" charset="-120"/>
+                        </a:rPr>
+                        <a:t>-6,3</a:t>
+                      </a:r>
+                      <a:endParaRPr lang="en-US" sz="850" dirty="0">
+                        <a:latin typeface="Calibri" charset="0"/>
+                        <a:ea typeface="Calibri" charset="0"/>
+                        <a:cs typeface="Calibri" charset="0"/>
+                      </a:endParaRPr>
+                    </a:p>
+                  </a:txBody>
+                  <a:tcPr marL="64008" marR="64008" marT="0" marB="0" anchor="ctr">
+                    <a:lnL w="6350" cap="flat" cmpd="sng" algn="ctr">
+                      <a:solidFill>
+                        <a:srgbClr val="D5DBE3"/>
+                      </a:solidFill>
+                      <a:prstDash val="solid"/>
+                      <a:round/>
+                      <a:headEnd type="none" w="med" len="med"/>
+                      <a:tailEnd type="none" w="med" len="med"/>
+                    </a:lnL>
+                    <a:lnR w="6350" cap="flat" cmpd="sng" algn="ctr">
+                      <a:solidFill>
+                        <a:srgbClr val="D5DBE3"/>
+                      </a:solidFill>
+                      <a:prstDash val="solid"/>
+                      <a:round/>
+                      <a:headEnd type="none" w="med" len="med"/>
+                      <a:tailEnd type="none" w="med" len="med"/>
+                    </a:lnR>
+                    <a:lnT w="6350" cap="flat" cmpd="sng" algn="ctr">
+                      <a:solidFill>
+                        <a:srgbClr val="D5DBE3"/>
+                      </a:solidFill>
+                      <a:prstDash val="solid"/>
+                      <a:round/>
+                      <a:headEnd type="none" w="med" len="med"/>
+                      <a:tailEnd type="none" w="med" len="med"/>
+                    </a:lnT>
+                    <a:lnB w="6350" cap="flat" cmpd="sng" algn="ctr">
+                      <a:solidFill>
+                        <a:srgbClr val="D5DBE3"/>
+                      </a:solidFill>
+                      <a:prstDash val="solid"/>
+                      <a:round/>
+                      <a:headEnd type="none" w="med" len="med"/>
+                      <a:tailEnd type="none" w="med" len="med"/>
+                    </a:lnB>
+                  </a:tcPr>
+                </a:tc>
+                <a:tc>
+                  <a:txBody>
+                    <a:bodyPr/>
+                    <a:lstStyle/>
+                    <a:p>
+                      <a:pPr algn="r" indent="0" marL="0">
+                        <a:buNone/>
+                      </a:pPr>
+                      <a:r>
+                        <a:rPr lang="en-US" sz="850" dirty="0">
+                          <a:solidFill>
+                            <a:srgbClr val="1F2933"/>
+                          </a:solidFill>
+                          <a:latin typeface="Calibri" pitchFamily="34" charset="0"/>
+                          <a:ea typeface="Calibri" pitchFamily="34" charset="-122"/>
+                          <a:cs typeface="Calibri" pitchFamily="34" charset="-120"/>
+                        </a:rPr>
+                        <a:t>–</a:t>
+                      </a:r>
+                      <a:endParaRPr lang="en-US" sz="850" dirty="0">
+                        <a:latin typeface="Calibri" charset="0"/>
+                        <a:ea typeface="Calibri" charset="0"/>
+                        <a:cs typeface="Calibri" charset="0"/>
+                      </a:endParaRPr>
+                    </a:p>
+                  </a:txBody>
+                  <a:tcPr marL="64008" marR="64008" marT="0" marB="0" anchor="ctr">
+                    <a:lnL w="6350" cap="flat" cmpd="sng" algn="ctr">
+                      <a:solidFill>
+                        <a:srgbClr val="D5DBE3"/>
+                      </a:solidFill>
+                      <a:prstDash val="solid"/>
+                      <a:round/>
+                      <a:headEnd type="none" w="med" len="med"/>
+                      <a:tailEnd type="none" w="med" len="med"/>
+                    </a:lnL>
+                    <a:lnR w="6350" cap="flat" cmpd="sng" algn="ctr">
+                      <a:solidFill>
+                        <a:srgbClr val="D5DBE3"/>
+                      </a:solidFill>
+                      <a:prstDash val="solid"/>
+                      <a:round/>
+                      <a:headEnd type="none" w="med" len="med"/>
+                      <a:tailEnd type="none" w="med" len="med"/>
+                    </a:lnR>
+                    <a:lnT w="6350" cap="flat" cmpd="sng" algn="ctr">
+                      <a:solidFill>
+                        <a:srgbClr val="D5DBE3"/>
+                      </a:solidFill>
+                      <a:prstDash val="solid"/>
+                      <a:round/>
+                      <a:headEnd type="none" w="med" len="med"/>
+                      <a:tailEnd type="none" w="med" len="med"/>
+                    </a:lnT>
+                    <a:lnB w="6350" cap="flat" cmpd="sng" algn="ctr">
+                      <a:solidFill>
+                        <a:srgbClr val="D5DBE3"/>
+                      </a:solidFill>
+                      <a:prstDash val="solid"/>
+                      <a:round/>
+                      <a:headEnd type="none" w="med" len="med"/>
+                      <a:tailEnd type="none" w="med" len="med"/>
+                    </a:lnB>
+                  </a:tcPr>
+                </a:tc>
+                <a:tc>
+                  <a:txBody>
+                    <a:bodyPr/>
+                    <a:lstStyle/>
+                    <a:p>
+                      <a:pPr algn="r" indent="0" marL="0">
+                        <a:buNone/>
+                      </a:pPr>
+                      <a:r>
                         <a:rPr lang="en-US" sz="850" b="1" dirty="0">
                           <a:solidFill>
                             <a:srgbClr val="B3261E"/>
@@ -26116,7 +26443,7 @@
                           <a:ea typeface="Calibri" pitchFamily="34" charset="-122"/>
                           <a:cs typeface="Calibri" pitchFamily="34" charset="-120"/>
                         </a:rPr>
-                        <a:t>3,5</a:t>
+                        <a:t>-6,3</a:t>
                       </a:r>
                       <a:endParaRPr lang="en-US" sz="850" dirty="0">
                         <a:latin typeface="Calibri" charset="0"/>
@@ -26167,286 +26494,24 @@
                     </a:solidFill>
                   </a:tcPr>
                 </a:tc>
-              </a:tr>
-              <a:tr h="224028">
-                <a:tc>
-                  <a:txBody>
-                    <a:bodyPr/>
-                    <a:lstStyle/>
-                    <a:p>
-                      <a:pPr algn="l" indent="0" marL="0">
+                <a:tc>
+                  <a:txBody>
+                    <a:bodyPr/>
+                    <a:lstStyle/>
+                    <a:p>
+                      <a:pPr algn="r" indent="0" marL="0">
                         <a:buNone/>
                       </a:pPr>
                       <a:r>
                         <a:rPr lang="en-US" sz="850" b="1" dirty="0">
                           <a:solidFill>
-                            <a:srgbClr val="1F2933"/>
-                          </a:solidFill>
-                          <a:latin typeface="Calibri" pitchFamily="34" charset="0"/>
-                          <a:ea typeface="Calibri" pitchFamily="34" charset="-122"/>
-                          <a:cs typeface="Calibri" pitchFamily="34" charset="-120"/>
-                        </a:rPr>
-                        <a:t>AB CENTER</a:t>
-                      </a:r>
-                      <a:endParaRPr lang="en-US" sz="850" dirty="0">
-                        <a:latin typeface="Calibri" charset="0"/>
-                        <a:ea typeface="Calibri" charset="0"/>
-                        <a:cs typeface="Calibri" charset="0"/>
-                      </a:endParaRPr>
-                    </a:p>
-                  </a:txBody>
-                  <a:tcPr marL="64008" marR="64008" marT="0" marB="0" anchor="ctr">
-                    <a:lnL w="6350" cap="flat" cmpd="sng" algn="ctr">
-                      <a:solidFill>
-                        <a:srgbClr val="D5DBE3"/>
-                      </a:solidFill>
-                      <a:prstDash val="solid"/>
-                      <a:round/>
-                      <a:headEnd type="none" w="med" len="med"/>
-                      <a:tailEnd type="none" w="med" len="med"/>
-                    </a:lnL>
-                    <a:lnR w="6350" cap="flat" cmpd="sng" algn="ctr">
-                      <a:solidFill>
-                        <a:srgbClr val="D5DBE3"/>
-                      </a:solidFill>
-                      <a:prstDash val="solid"/>
-                      <a:round/>
-                      <a:headEnd type="none" w="med" len="med"/>
-                      <a:tailEnd type="none" w="med" len="med"/>
-                    </a:lnR>
-                    <a:lnT w="6350" cap="flat" cmpd="sng" algn="ctr">
-                      <a:solidFill>
-                        <a:srgbClr val="D5DBE3"/>
-                      </a:solidFill>
-                      <a:prstDash val="solid"/>
-                      <a:round/>
-                      <a:headEnd type="none" w="med" len="med"/>
-                      <a:tailEnd type="none" w="med" len="med"/>
-                    </a:lnT>
-                    <a:lnB w="6350" cap="flat" cmpd="sng" algn="ctr">
-                      <a:solidFill>
-                        <a:srgbClr val="D5DBE3"/>
-                      </a:solidFill>
-                      <a:prstDash val="solid"/>
-                      <a:round/>
-                      <a:headEnd type="none" w="med" len="med"/>
-                      <a:tailEnd type="none" w="med" len="med"/>
-                    </a:lnB>
-                  </a:tcPr>
-                </a:tc>
-                <a:tc>
-                  <a:txBody>
-                    <a:bodyPr/>
-                    <a:lstStyle/>
-                    <a:p>
-                      <a:pPr algn="r" indent="0" marL="0">
-                        <a:buNone/>
-                      </a:pPr>
-                      <a:r>
-                        <a:rPr lang="en-US" sz="850" dirty="0">
-                          <a:solidFill>
-                            <a:srgbClr val="1F2933"/>
-                          </a:solidFill>
-                          <a:latin typeface="Calibri" pitchFamily="34" charset="0"/>
-                          <a:ea typeface="Calibri" pitchFamily="34" charset="-122"/>
-                          <a:cs typeface="Calibri" pitchFamily="34" charset="-120"/>
-                        </a:rPr>
-                        <a:t>–</a:t>
-                      </a:r>
-                      <a:endParaRPr lang="en-US" sz="850" dirty="0">
-                        <a:latin typeface="Calibri" charset="0"/>
-                        <a:ea typeface="Calibri" charset="0"/>
-                        <a:cs typeface="Calibri" charset="0"/>
-                      </a:endParaRPr>
-                    </a:p>
-                  </a:txBody>
-                  <a:tcPr marL="64008" marR="64008" marT="0" marB="0" anchor="ctr">
-                    <a:lnL w="6350" cap="flat" cmpd="sng" algn="ctr">
-                      <a:solidFill>
-                        <a:srgbClr val="D5DBE3"/>
-                      </a:solidFill>
-                      <a:prstDash val="solid"/>
-                      <a:round/>
-                      <a:headEnd type="none" w="med" len="med"/>
-                      <a:tailEnd type="none" w="med" len="med"/>
-                    </a:lnL>
-                    <a:lnR w="6350" cap="flat" cmpd="sng" algn="ctr">
-                      <a:solidFill>
-                        <a:srgbClr val="D5DBE3"/>
-                      </a:solidFill>
-                      <a:prstDash val="solid"/>
-                      <a:round/>
-                      <a:headEnd type="none" w="med" len="med"/>
-                      <a:tailEnd type="none" w="med" len="med"/>
-                    </a:lnR>
-                    <a:lnT w="6350" cap="flat" cmpd="sng" algn="ctr">
-                      <a:solidFill>
-                        <a:srgbClr val="D5DBE3"/>
-                      </a:solidFill>
-                      <a:prstDash val="solid"/>
-                      <a:round/>
-                      <a:headEnd type="none" w="med" len="med"/>
-                      <a:tailEnd type="none" w="med" len="med"/>
-                    </a:lnT>
-                    <a:lnB w="6350" cap="flat" cmpd="sng" algn="ctr">
-                      <a:solidFill>
-                        <a:srgbClr val="D5DBE3"/>
-                      </a:solidFill>
-                      <a:prstDash val="solid"/>
-                      <a:round/>
-                      <a:headEnd type="none" w="med" len="med"/>
-                      <a:tailEnd type="none" w="med" len="med"/>
-                    </a:lnB>
-                  </a:tcPr>
-                </a:tc>
-                <a:tc>
-                  <a:txBody>
-                    <a:bodyPr/>
-                    <a:lstStyle/>
-                    <a:p>
-                      <a:pPr algn="r" indent="0" marL="0">
-                        <a:buNone/>
-                      </a:pPr>
-                      <a:r>
-                        <a:rPr lang="en-US" sz="850" dirty="0">
-                          <a:solidFill>
-                            <a:srgbClr val="1F2933"/>
-                          </a:solidFill>
-                          <a:latin typeface="Calibri" pitchFamily="34" charset="0"/>
-                          <a:ea typeface="Calibri" pitchFamily="34" charset="-122"/>
-                          <a:cs typeface="Calibri" pitchFamily="34" charset="-120"/>
-                        </a:rPr>
-                        <a:t>-6,3</a:t>
-                      </a:r>
-                      <a:endParaRPr lang="en-US" sz="850" dirty="0">
-                        <a:latin typeface="Calibri" charset="0"/>
-                        <a:ea typeface="Calibri" charset="0"/>
-                        <a:cs typeface="Calibri" charset="0"/>
-                      </a:endParaRPr>
-                    </a:p>
-                  </a:txBody>
-                  <a:tcPr marL="64008" marR="64008" marT="0" marB="0" anchor="ctr">
-                    <a:lnL w="6350" cap="flat" cmpd="sng" algn="ctr">
-                      <a:solidFill>
-                        <a:srgbClr val="D5DBE3"/>
-                      </a:solidFill>
-                      <a:prstDash val="solid"/>
-                      <a:round/>
-                      <a:headEnd type="none" w="med" len="med"/>
-                      <a:tailEnd type="none" w="med" len="med"/>
-                    </a:lnL>
-                    <a:lnR w="6350" cap="flat" cmpd="sng" algn="ctr">
-                      <a:solidFill>
-                        <a:srgbClr val="D5DBE3"/>
-                      </a:solidFill>
-                      <a:prstDash val="solid"/>
-                      <a:round/>
-                      <a:headEnd type="none" w="med" len="med"/>
-                      <a:tailEnd type="none" w="med" len="med"/>
-                    </a:lnR>
-                    <a:lnT w="6350" cap="flat" cmpd="sng" algn="ctr">
-                      <a:solidFill>
-                        <a:srgbClr val="D5DBE3"/>
-                      </a:solidFill>
-                      <a:prstDash val="solid"/>
-                      <a:round/>
-                      <a:headEnd type="none" w="med" len="med"/>
-                      <a:tailEnd type="none" w="med" len="med"/>
-                    </a:lnT>
-                    <a:lnB w="6350" cap="flat" cmpd="sng" algn="ctr">
-                      <a:solidFill>
-                        <a:srgbClr val="D5DBE3"/>
-                      </a:solidFill>
-                      <a:prstDash val="solid"/>
-                      <a:round/>
-                      <a:headEnd type="none" w="med" len="med"/>
-                      <a:tailEnd type="none" w="med" len="med"/>
-                    </a:lnB>
-                  </a:tcPr>
-                </a:tc>
-                <a:tc>
-                  <a:txBody>
-                    <a:bodyPr/>
-                    <a:lstStyle/>
-                    <a:p>
-                      <a:pPr algn="r" indent="0" marL="0">
-                        <a:buNone/>
-                      </a:pPr>
-                      <a:r>
-                        <a:rPr lang="en-US" sz="850" dirty="0">
-                          <a:solidFill>
-                            <a:srgbClr val="1F2933"/>
-                          </a:solidFill>
-                          <a:latin typeface="Calibri" pitchFamily="34" charset="0"/>
-                          <a:ea typeface="Calibri" pitchFamily="34" charset="-122"/>
-                          <a:cs typeface="Calibri" pitchFamily="34" charset="-120"/>
-                        </a:rPr>
-                        <a:t>–</a:t>
-                      </a:r>
-                      <a:endParaRPr lang="en-US" sz="850" dirty="0">
-                        <a:latin typeface="Calibri" charset="0"/>
-                        <a:ea typeface="Calibri" charset="0"/>
-                        <a:cs typeface="Calibri" charset="0"/>
-                      </a:endParaRPr>
-                    </a:p>
-                  </a:txBody>
-                  <a:tcPr marL="64008" marR="64008" marT="0" marB="0" anchor="ctr">
-                    <a:lnL w="6350" cap="flat" cmpd="sng" algn="ctr">
-                      <a:solidFill>
-                        <a:srgbClr val="D5DBE3"/>
-                      </a:solidFill>
-                      <a:prstDash val="solid"/>
-                      <a:round/>
-                      <a:headEnd type="none" w="med" len="med"/>
-                      <a:tailEnd type="none" w="med" len="med"/>
-                    </a:lnL>
-                    <a:lnR w="6350" cap="flat" cmpd="sng" algn="ctr">
-                      <a:solidFill>
-                        <a:srgbClr val="D5DBE3"/>
-                      </a:solidFill>
-                      <a:prstDash val="solid"/>
-                      <a:round/>
-                      <a:headEnd type="none" w="med" len="med"/>
-                      <a:tailEnd type="none" w="med" len="med"/>
-                    </a:lnR>
-                    <a:lnT w="6350" cap="flat" cmpd="sng" algn="ctr">
-                      <a:solidFill>
-                        <a:srgbClr val="D5DBE3"/>
-                      </a:solidFill>
-                      <a:prstDash val="solid"/>
-                      <a:round/>
-                      <a:headEnd type="none" w="med" len="med"/>
-                      <a:tailEnd type="none" w="med" len="med"/>
-                    </a:lnT>
-                    <a:lnB w="6350" cap="flat" cmpd="sng" algn="ctr">
-                      <a:solidFill>
-                        <a:srgbClr val="D5DBE3"/>
-                      </a:solidFill>
-                      <a:prstDash val="solid"/>
-                      <a:round/>
-                      <a:headEnd type="none" w="med" len="med"/>
-                      <a:tailEnd type="none" w="med" len="med"/>
-                    </a:lnB>
-                  </a:tcPr>
-                </a:tc>
-                <a:tc>
-                  <a:txBody>
-                    <a:bodyPr/>
-                    <a:lstStyle/>
-                    <a:p>
-                      <a:pPr algn="r" indent="0" marL="0">
-                        <a:buNone/>
-                      </a:pPr>
-                      <a:r>
-                        <a:rPr lang="en-US" sz="850" b="1" dirty="0">
-                          <a:solidFill>
                             <a:srgbClr val="B3261E"/>
                           </a:solidFill>
                           <a:latin typeface="Calibri" pitchFamily="34" charset="0"/>
                           <a:ea typeface="Calibri" pitchFamily="34" charset="-122"/>
                           <a:cs typeface="Calibri" pitchFamily="34" charset="-120"/>
                         </a:rPr>
-                        <a:t>-6,3</a:t>
+                        <a:t>6,3</a:t>
                       </a:r>
                       <a:endParaRPr lang="en-US" sz="850" dirty="0">
                         <a:latin typeface="Calibri" charset="0"/>
@@ -26497,6 +26562,73 @@
                     </a:solidFill>
                   </a:tcPr>
                 </a:tc>
+              </a:tr>
+              <a:tr h="224028">
+                <a:tc>
+                  <a:txBody>
+                    <a:bodyPr/>
+                    <a:lstStyle/>
+                    <a:p>
+                      <a:pPr algn="l" indent="0" marL="0">
+                        <a:buNone/>
+                      </a:pPr>
+                      <a:r>
+                        <a:rPr lang="en-US" sz="850" b="1" dirty="0">
+                          <a:solidFill>
+                            <a:srgbClr val="1F2933"/>
+                          </a:solidFill>
+                          <a:latin typeface="Calibri" pitchFamily="34" charset="0"/>
+                          <a:ea typeface="Calibri" pitchFamily="34" charset="-122"/>
+                          <a:cs typeface="Calibri" pitchFamily="34" charset="-120"/>
+                        </a:rPr>
+                        <a:t>RHD CI</a:t>
+                      </a:r>
+                      <a:endParaRPr lang="en-US" sz="850" dirty="0">
+                        <a:latin typeface="Calibri" charset="0"/>
+                        <a:ea typeface="Calibri" charset="0"/>
+                        <a:cs typeface="Calibri" charset="0"/>
+                      </a:endParaRPr>
+                    </a:p>
+                  </a:txBody>
+                  <a:tcPr marL="64008" marR="64008" marT="0" marB="0" anchor="ctr">
+                    <a:lnL w="6350" cap="flat" cmpd="sng" algn="ctr">
+                      <a:solidFill>
+                        <a:srgbClr val="D5DBE3"/>
+                      </a:solidFill>
+                      <a:prstDash val="solid"/>
+                      <a:round/>
+                      <a:headEnd type="none" w="med" len="med"/>
+                      <a:tailEnd type="none" w="med" len="med"/>
+                    </a:lnL>
+                    <a:lnR w="6350" cap="flat" cmpd="sng" algn="ctr">
+                      <a:solidFill>
+                        <a:srgbClr val="D5DBE3"/>
+                      </a:solidFill>
+                      <a:prstDash val="solid"/>
+                      <a:round/>
+                      <a:headEnd type="none" w="med" len="med"/>
+                      <a:tailEnd type="none" w="med" len="med"/>
+                    </a:lnR>
+                    <a:lnT w="6350" cap="flat" cmpd="sng" algn="ctr">
+                      <a:solidFill>
+                        <a:srgbClr val="D5DBE3"/>
+                      </a:solidFill>
+                      <a:prstDash val="solid"/>
+                      <a:round/>
+                      <a:headEnd type="none" w="med" len="med"/>
+                      <a:tailEnd type="none" w="med" len="med"/>
+                    </a:lnT>
+                    <a:lnB w="6350" cap="flat" cmpd="sng" algn="ctr">
+                      <a:solidFill>
+                        <a:srgbClr val="D5DBE3"/>
+                      </a:solidFill>
+                      <a:prstDash val="solid"/>
+                      <a:round/>
+                      <a:headEnd type="none" w="med" len="med"/>
+                      <a:tailEnd type="none" w="med" len="med"/>
+                    </a:lnB>
+                  </a:tcPr>
+                </a:tc>
                 <a:tc>
                   <a:txBody>
                     <a:bodyPr/>
@@ -26506,6 +26638,201 @@
                         <a:buNone/>
                       </a:pPr>
                       <a:r>
+                        <a:rPr lang="en-US" sz="850" dirty="0">
+                          <a:solidFill>
+                            <a:srgbClr val="1F2933"/>
+                          </a:solidFill>
+                          <a:latin typeface="Calibri" pitchFamily="34" charset="0"/>
+                          <a:ea typeface="Calibri" pitchFamily="34" charset="-122"/>
+                          <a:cs typeface="Calibri" pitchFamily="34" charset="-120"/>
+                        </a:rPr>
+                        <a:t>–</a:t>
+                      </a:r>
+                      <a:endParaRPr lang="en-US" sz="850" dirty="0">
+                        <a:latin typeface="Calibri" charset="0"/>
+                        <a:ea typeface="Calibri" charset="0"/>
+                        <a:cs typeface="Calibri" charset="0"/>
+                      </a:endParaRPr>
+                    </a:p>
+                  </a:txBody>
+                  <a:tcPr marL="64008" marR="64008" marT="0" marB="0" anchor="ctr">
+                    <a:lnL w="6350" cap="flat" cmpd="sng" algn="ctr">
+                      <a:solidFill>
+                        <a:srgbClr val="D5DBE3"/>
+                      </a:solidFill>
+                      <a:prstDash val="solid"/>
+                      <a:round/>
+                      <a:headEnd type="none" w="med" len="med"/>
+                      <a:tailEnd type="none" w="med" len="med"/>
+                    </a:lnL>
+                    <a:lnR w="6350" cap="flat" cmpd="sng" algn="ctr">
+                      <a:solidFill>
+                        <a:srgbClr val="D5DBE3"/>
+                      </a:solidFill>
+                      <a:prstDash val="solid"/>
+                      <a:round/>
+                      <a:headEnd type="none" w="med" len="med"/>
+                      <a:tailEnd type="none" w="med" len="med"/>
+                    </a:lnR>
+                    <a:lnT w="6350" cap="flat" cmpd="sng" algn="ctr">
+                      <a:solidFill>
+                        <a:srgbClr val="D5DBE3"/>
+                      </a:solidFill>
+                      <a:prstDash val="solid"/>
+                      <a:round/>
+                      <a:headEnd type="none" w="med" len="med"/>
+                      <a:tailEnd type="none" w="med" len="med"/>
+                    </a:lnT>
+                    <a:lnB w="6350" cap="flat" cmpd="sng" algn="ctr">
+                      <a:solidFill>
+                        <a:srgbClr val="D5DBE3"/>
+                      </a:solidFill>
+                      <a:prstDash val="solid"/>
+                      <a:round/>
+                      <a:headEnd type="none" w="med" len="med"/>
+                      <a:tailEnd type="none" w="med" len="med"/>
+                    </a:lnB>
+                  </a:tcPr>
+                </a:tc>
+                <a:tc>
+                  <a:txBody>
+                    <a:bodyPr/>
+                    <a:lstStyle/>
+                    <a:p>
+                      <a:pPr algn="r" indent="0" marL="0">
+                        <a:buNone/>
+                      </a:pPr>
+                      <a:r>
+                        <a:rPr lang="en-US" sz="850" dirty="0">
+                          <a:solidFill>
+                            <a:srgbClr val="1F2933"/>
+                          </a:solidFill>
+                          <a:latin typeface="Calibri" pitchFamily="34" charset="0"/>
+                          <a:ea typeface="Calibri" pitchFamily="34" charset="-122"/>
+                          <a:cs typeface="Calibri" pitchFamily="34" charset="-120"/>
+                        </a:rPr>
+                        <a:t>-45,1</a:t>
+                      </a:r>
+                      <a:endParaRPr lang="en-US" sz="850" dirty="0">
+                        <a:latin typeface="Calibri" charset="0"/>
+                        <a:ea typeface="Calibri" charset="0"/>
+                        <a:cs typeface="Calibri" charset="0"/>
+                      </a:endParaRPr>
+                    </a:p>
+                  </a:txBody>
+                  <a:tcPr marL="64008" marR="64008" marT="0" marB="0" anchor="ctr">
+                    <a:lnL w="6350" cap="flat" cmpd="sng" algn="ctr">
+                      <a:solidFill>
+                        <a:srgbClr val="D5DBE3"/>
+                      </a:solidFill>
+                      <a:prstDash val="solid"/>
+                      <a:round/>
+                      <a:headEnd type="none" w="med" len="med"/>
+                      <a:tailEnd type="none" w="med" len="med"/>
+                    </a:lnL>
+                    <a:lnR w="6350" cap="flat" cmpd="sng" algn="ctr">
+                      <a:solidFill>
+                        <a:srgbClr val="D5DBE3"/>
+                      </a:solidFill>
+                      <a:prstDash val="solid"/>
+                      <a:round/>
+                      <a:headEnd type="none" w="med" len="med"/>
+                      <a:tailEnd type="none" w="med" len="med"/>
+                    </a:lnR>
+                    <a:lnT w="6350" cap="flat" cmpd="sng" algn="ctr">
+                      <a:solidFill>
+                        <a:srgbClr val="D5DBE3"/>
+                      </a:solidFill>
+                      <a:prstDash val="solid"/>
+                      <a:round/>
+                      <a:headEnd type="none" w="med" len="med"/>
+                      <a:tailEnd type="none" w="med" len="med"/>
+                    </a:lnT>
+                    <a:lnB w="6350" cap="flat" cmpd="sng" algn="ctr">
+                      <a:solidFill>
+                        <a:srgbClr val="D5DBE3"/>
+                      </a:solidFill>
+                      <a:prstDash val="solid"/>
+                      <a:round/>
+                      <a:headEnd type="none" w="med" len="med"/>
+                      <a:tailEnd type="none" w="med" len="med"/>
+                    </a:lnB>
+                  </a:tcPr>
+                </a:tc>
+                <a:tc>
+                  <a:txBody>
+                    <a:bodyPr/>
+                    <a:lstStyle/>
+                    <a:p>
+                      <a:pPr algn="r" indent="0" marL="0">
+                        <a:buNone/>
+                      </a:pPr>
+                      <a:r>
+                        <a:rPr lang="en-US" sz="850" dirty="0">
+                          <a:solidFill>
+                            <a:srgbClr val="1F2933"/>
+                          </a:solidFill>
+                          <a:latin typeface="Calibri" pitchFamily="34" charset="0"/>
+                          <a:ea typeface="Calibri" pitchFamily="34" charset="-122"/>
+                          <a:cs typeface="Calibri" pitchFamily="34" charset="-120"/>
+                        </a:rPr>
+                        <a:t>–</a:t>
+                      </a:r>
+                      <a:endParaRPr lang="en-US" sz="850" dirty="0">
+                        <a:latin typeface="Calibri" charset="0"/>
+                        <a:ea typeface="Calibri" charset="0"/>
+                        <a:cs typeface="Calibri" charset="0"/>
+                      </a:endParaRPr>
+                    </a:p>
+                  </a:txBody>
+                  <a:tcPr marL="64008" marR="64008" marT="0" marB="0" anchor="ctr">
+                    <a:lnL w="6350" cap="flat" cmpd="sng" algn="ctr">
+                      <a:solidFill>
+                        <a:srgbClr val="D5DBE3"/>
+                      </a:solidFill>
+                      <a:prstDash val="solid"/>
+                      <a:round/>
+                      <a:headEnd type="none" w="med" len="med"/>
+                      <a:tailEnd type="none" w="med" len="med"/>
+                    </a:lnL>
+                    <a:lnR w="6350" cap="flat" cmpd="sng" algn="ctr">
+                      <a:solidFill>
+                        <a:srgbClr val="D5DBE3"/>
+                      </a:solidFill>
+                      <a:prstDash val="solid"/>
+                      <a:round/>
+                      <a:headEnd type="none" w="med" len="med"/>
+                      <a:tailEnd type="none" w="med" len="med"/>
+                    </a:lnR>
+                    <a:lnT w="6350" cap="flat" cmpd="sng" algn="ctr">
+                      <a:solidFill>
+                        <a:srgbClr val="D5DBE3"/>
+                      </a:solidFill>
+                      <a:prstDash val="solid"/>
+                      <a:round/>
+                      <a:headEnd type="none" w="med" len="med"/>
+                      <a:tailEnd type="none" w="med" len="med"/>
+                    </a:lnT>
+                    <a:lnB w="6350" cap="flat" cmpd="sng" algn="ctr">
+                      <a:solidFill>
+                        <a:srgbClr val="D5DBE3"/>
+                      </a:solidFill>
+                      <a:prstDash val="solid"/>
+                      <a:round/>
+                      <a:headEnd type="none" w="med" len="med"/>
+                      <a:tailEnd type="none" w="med" len="med"/>
+                    </a:lnB>
+                  </a:tcPr>
+                </a:tc>
+                <a:tc>
+                  <a:txBody>
+                    <a:bodyPr/>
+                    <a:lstStyle/>
+                    <a:p>
+                      <a:pPr algn="r" indent="0" marL="0">
+                        <a:buNone/>
+                      </a:pPr>
+                      <a:r>
                         <a:rPr lang="en-US" sz="850" b="1" dirty="0">
                           <a:solidFill>
                             <a:srgbClr val="B3261E"/>
@@ -26514,7 +26841,7 @@
                           <a:ea typeface="Calibri" pitchFamily="34" charset="-122"/>
                           <a:cs typeface="Calibri" pitchFamily="34" charset="-120"/>
                         </a:rPr>
-                        <a:t>6,3</a:t>
+                        <a:t>-45,1</a:t>
                       </a:r>
                       <a:endParaRPr lang="en-US" sz="850" dirty="0">
                         <a:latin typeface="Calibri" charset="0"/>
@@ -26565,286 +26892,24 @@
                     </a:solidFill>
                   </a:tcPr>
                 </a:tc>
-              </a:tr>
-              <a:tr h="224028">
-                <a:tc>
-                  <a:txBody>
-                    <a:bodyPr/>
-                    <a:lstStyle/>
-                    <a:p>
-                      <a:pPr algn="l" indent="0" marL="0">
+                <a:tc>
+                  <a:txBody>
+                    <a:bodyPr/>
+                    <a:lstStyle/>
+                    <a:p>
+                      <a:pPr algn="r" indent="0" marL="0">
                         <a:buNone/>
                       </a:pPr>
                       <a:r>
                         <a:rPr lang="en-US" sz="850" b="1" dirty="0">
                           <a:solidFill>
-                            <a:srgbClr val="1F2933"/>
-                          </a:solidFill>
-                          <a:latin typeface="Calibri" pitchFamily="34" charset="0"/>
-                          <a:ea typeface="Calibri" pitchFamily="34" charset="-122"/>
-                          <a:cs typeface="Calibri" pitchFamily="34" charset="-120"/>
-                        </a:rPr>
-                        <a:t>RHD CI</a:t>
-                      </a:r>
-                      <a:endParaRPr lang="en-US" sz="850" dirty="0">
-                        <a:latin typeface="Calibri" charset="0"/>
-                        <a:ea typeface="Calibri" charset="0"/>
-                        <a:cs typeface="Calibri" charset="0"/>
-                      </a:endParaRPr>
-                    </a:p>
-                  </a:txBody>
-                  <a:tcPr marL="64008" marR="64008" marT="0" marB="0" anchor="ctr">
-                    <a:lnL w="6350" cap="flat" cmpd="sng" algn="ctr">
-                      <a:solidFill>
-                        <a:srgbClr val="D5DBE3"/>
-                      </a:solidFill>
-                      <a:prstDash val="solid"/>
-                      <a:round/>
-                      <a:headEnd type="none" w="med" len="med"/>
-                      <a:tailEnd type="none" w="med" len="med"/>
-                    </a:lnL>
-                    <a:lnR w="6350" cap="flat" cmpd="sng" algn="ctr">
-                      <a:solidFill>
-                        <a:srgbClr val="D5DBE3"/>
-                      </a:solidFill>
-                      <a:prstDash val="solid"/>
-                      <a:round/>
-                      <a:headEnd type="none" w="med" len="med"/>
-                      <a:tailEnd type="none" w="med" len="med"/>
-                    </a:lnR>
-                    <a:lnT w="6350" cap="flat" cmpd="sng" algn="ctr">
-                      <a:solidFill>
-                        <a:srgbClr val="D5DBE3"/>
-                      </a:solidFill>
-                      <a:prstDash val="solid"/>
-                      <a:round/>
-                      <a:headEnd type="none" w="med" len="med"/>
-                      <a:tailEnd type="none" w="med" len="med"/>
-                    </a:lnT>
-                    <a:lnB w="6350" cap="flat" cmpd="sng" algn="ctr">
-                      <a:solidFill>
-                        <a:srgbClr val="D5DBE3"/>
-                      </a:solidFill>
-                      <a:prstDash val="solid"/>
-                      <a:round/>
-                      <a:headEnd type="none" w="med" len="med"/>
-                      <a:tailEnd type="none" w="med" len="med"/>
-                    </a:lnB>
-                  </a:tcPr>
-                </a:tc>
-                <a:tc>
-                  <a:txBody>
-                    <a:bodyPr/>
-                    <a:lstStyle/>
-                    <a:p>
-                      <a:pPr algn="r" indent="0" marL="0">
-                        <a:buNone/>
-                      </a:pPr>
-                      <a:r>
-                        <a:rPr lang="en-US" sz="850" dirty="0">
-                          <a:solidFill>
-                            <a:srgbClr val="1F2933"/>
-                          </a:solidFill>
-                          <a:latin typeface="Calibri" pitchFamily="34" charset="0"/>
-                          <a:ea typeface="Calibri" pitchFamily="34" charset="-122"/>
-                          <a:cs typeface="Calibri" pitchFamily="34" charset="-120"/>
-                        </a:rPr>
-                        <a:t>–</a:t>
-                      </a:r>
-                      <a:endParaRPr lang="en-US" sz="850" dirty="0">
-                        <a:latin typeface="Calibri" charset="0"/>
-                        <a:ea typeface="Calibri" charset="0"/>
-                        <a:cs typeface="Calibri" charset="0"/>
-                      </a:endParaRPr>
-                    </a:p>
-                  </a:txBody>
-                  <a:tcPr marL="64008" marR="64008" marT="0" marB="0" anchor="ctr">
-                    <a:lnL w="6350" cap="flat" cmpd="sng" algn="ctr">
-                      <a:solidFill>
-                        <a:srgbClr val="D5DBE3"/>
-                      </a:solidFill>
-                      <a:prstDash val="solid"/>
-                      <a:round/>
-                      <a:headEnd type="none" w="med" len="med"/>
-                      <a:tailEnd type="none" w="med" len="med"/>
-                    </a:lnL>
-                    <a:lnR w="6350" cap="flat" cmpd="sng" algn="ctr">
-                      <a:solidFill>
-                        <a:srgbClr val="D5DBE3"/>
-                      </a:solidFill>
-                      <a:prstDash val="solid"/>
-                      <a:round/>
-                      <a:headEnd type="none" w="med" len="med"/>
-                      <a:tailEnd type="none" w="med" len="med"/>
-                    </a:lnR>
-                    <a:lnT w="6350" cap="flat" cmpd="sng" algn="ctr">
-                      <a:solidFill>
-                        <a:srgbClr val="D5DBE3"/>
-                      </a:solidFill>
-                      <a:prstDash val="solid"/>
-                      <a:round/>
-                      <a:headEnd type="none" w="med" len="med"/>
-                      <a:tailEnd type="none" w="med" len="med"/>
-                    </a:lnT>
-                    <a:lnB w="6350" cap="flat" cmpd="sng" algn="ctr">
-                      <a:solidFill>
-                        <a:srgbClr val="D5DBE3"/>
-                      </a:solidFill>
-                      <a:prstDash val="solid"/>
-                      <a:round/>
-                      <a:headEnd type="none" w="med" len="med"/>
-                      <a:tailEnd type="none" w="med" len="med"/>
-                    </a:lnB>
-                  </a:tcPr>
-                </a:tc>
-                <a:tc>
-                  <a:txBody>
-                    <a:bodyPr/>
-                    <a:lstStyle/>
-                    <a:p>
-                      <a:pPr algn="r" indent="0" marL="0">
-                        <a:buNone/>
-                      </a:pPr>
-                      <a:r>
-                        <a:rPr lang="en-US" sz="850" dirty="0">
-                          <a:solidFill>
-                            <a:srgbClr val="1F2933"/>
-                          </a:solidFill>
-                          <a:latin typeface="Calibri" pitchFamily="34" charset="0"/>
-                          <a:ea typeface="Calibri" pitchFamily="34" charset="-122"/>
-                          <a:cs typeface="Calibri" pitchFamily="34" charset="-120"/>
-                        </a:rPr>
-                        <a:t>-45,1</a:t>
-                      </a:r>
-                      <a:endParaRPr lang="en-US" sz="850" dirty="0">
-                        <a:latin typeface="Calibri" charset="0"/>
-                        <a:ea typeface="Calibri" charset="0"/>
-                        <a:cs typeface="Calibri" charset="0"/>
-                      </a:endParaRPr>
-                    </a:p>
-                  </a:txBody>
-                  <a:tcPr marL="64008" marR="64008" marT="0" marB="0" anchor="ctr">
-                    <a:lnL w="6350" cap="flat" cmpd="sng" algn="ctr">
-                      <a:solidFill>
-                        <a:srgbClr val="D5DBE3"/>
-                      </a:solidFill>
-                      <a:prstDash val="solid"/>
-                      <a:round/>
-                      <a:headEnd type="none" w="med" len="med"/>
-                      <a:tailEnd type="none" w="med" len="med"/>
-                    </a:lnL>
-                    <a:lnR w="6350" cap="flat" cmpd="sng" algn="ctr">
-                      <a:solidFill>
-                        <a:srgbClr val="D5DBE3"/>
-                      </a:solidFill>
-                      <a:prstDash val="solid"/>
-                      <a:round/>
-                      <a:headEnd type="none" w="med" len="med"/>
-                      <a:tailEnd type="none" w="med" len="med"/>
-                    </a:lnR>
-                    <a:lnT w="6350" cap="flat" cmpd="sng" algn="ctr">
-                      <a:solidFill>
-                        <a:srgbClr val="D5DBE3"/>
-                      </a:solidFill>
-                      <a:prstDash val="solid"/>
-                      <a:round/>
-                      <a:headEnd type="none" w="med" len="med"/>
-                      <a:tailEnd type="none" w="med" len="med"/>
-                    </a:lnT>
-                    <a:lnB w="6350" cap="flat" cmpd="sng" algn="ctr">
-                      <a:solidFill>
-                        <a:srgbClr val="D5DBE3"/>
-                      </a:solidFill>
-                      <a:prstDash val="solid"/>
-                      <a:round/>
-                      <a:headEnd type="none" w="med" len="med"/>
-                      <a:tailEnd type="none" w="med" len="med"/>
-                    </a:lnB>
-                  </a:tcPr>
-                </a:tc>
-                <a:tc>
-                  <a:txBody>
-                    <a:bodyPr/>
-                    <a:lstStyle/>
-                    <a:p>
-                      <a:pPr algn="r" indent="0" marL="0">
-                        <a:buNone/>
-                      </a:pPr>
-                      <a:r>
-                        <a:rPr lang="en-US" sz="850" dirty="0">
-                          <a:solidFill>
-                            <a:srgbClr val="1F2933"/>
-                          </a:solidFill>
-                          <a:latin typeface="Calibri" pitchFamily="34" charset="0"/>
-                          <a:ea typeface="Calibri" pitchFamily="34" charset="-122"/>
-                          <a:cs typeface="Calibri" pitchFamily="34" charset="-120"/>
-                        </a:rPr>
-                        <a:t>–</a:t>
-                      </a:r>
-                      <a:endParaRPr lang="en-US" sz="850" dirty="0">
-                        <a:latin typeface="Calibri" charset="0"/>
-                        <a:ea typeface="Calibri" charset="0"/>
-                        <a:cs typeface="Calibri" charset="0"/>
-                      </a:endParaRPr>
-                    </a:p>
-                  </a:txBody>
-                  <a:tcPr marL="64008" marR="64008" marT="0" marB="0" anchor="ctr">
-                    <a:lnL w="6350" cap="flat" cmpd="sng" algn="ctr">
-                      <a:solidFill>
-                        <a:srgbClr val="D5DBE3"/>
-                      </a:solidFill>
-                      <a:prstDash val="solid"/>
-                      <a:round/>
-                      <a:headEnd type="none" w="med" len="med"/>
-                      <a:tailEnd type="none" w="med" len="med"/>
-                    </a:lnL>
-                    <a:lnR w="6350" cap="flat" cmpd="sng" algn="ctr">
-                      <a:solidFill>
-                        <a:srgbClr val="D5DBE3"/>
-                      </a:solidFill>
-                      <a:prstDash val="solid"/>
-                      <a:round/>
-                      <a:headEnd type="none" w="med" len="med"/>
-                      <a:tailEnd type="none" w="med" len="med"/>
-                    </a:lnR>
-                    <a:lnT w="6350" cap="flat" cmpd="sng" algn="ctr">
-                      <a:solidFill>
-                        <a:srgbClr val="D5DBE3"/>
-                      </a:solidFill>
-                      <a:prstDash val="solid"/>
-                      <a:round/>
-                      <a:headEnd type="none" w="med" len="med"/>
-                      <a:tailEnd type="none" w="med" len="med"/>
-                    </a:lnT>
-                    <a:lnB w="6350" cap="flat" cmpd="sng" algn="ctr">
-                      <a:solidFill>
-                        <a:srgbClr val="D5DBE3"/>
-                      </a:solidFill>
-                      <a:prstDash val="solid"/>
-                      <a:round/>
-                      <a:headEnd type="none" w="med" len="med"/>
-                      <a:tailEnd type="none" w="med" len="med"/>
-                    </a:lnB>
-                  </a:tcPr>
-                </a:tc>
-                <a:tc>
-                  <a:txBody>
-                    <a:bodyPr/>
-                    <a:lstStyle/>
-                    <a:p>
-                      <a:pPr algn="r" indent="0" marL="0">
-                        <a:buNone/>
-                      </a:pPr>
-                      <a:r>
-                        <a:rPr lang="en-US" sz="850" b="1" dirty="0">
-                          <a:solidFill>
                             <a:srgbClr val="B3261E"/>
                           </a:solidFill>
                           <a:latin typeface="Calibri" pitchFamily="34" charset="0"/>
                           <a:ea typeface="Calibri" pitchFamily="34" charset="-122"/>
                           <a:cs typeface="Calibri" pitchFamily="34" charset="-120"/>
                         </a:rPr>
-                        <a:t>-45,1</a:t>
+                        <a:t>45,1</a:t>
                       </a:r>
                       <a:endParaRPr lang="en-US" sz="850" dirty="0">
                         <a:latin typeface="Calibri" charset="0"/>
@@ -26895,74 +26960,6 @@
                     </a:solidFill>
                   </a:tcPr>
                 </a:tc>
-                <a:tc>
-                  <a:txBody>
-                    <a:bodyPr/>
-                    <a:lstStyle/>
-                    <a:p>
-                      <a:pPr algn="r" indent="0" marL="0">
-                        <a:buNone/>
-                      </a:pPr>
-                      <a:r>
-                        <a:rPr lang="en-US" sz="850" b="1" dirty="0">
-                          <a:solidFill>
-                            <a:srgbClr val="B3261E"/>
-                          </a:solidFill>
-                          <a:latin typeface="Calibri" pitchFamily="34" charset="0"/>
-                          <a:ea typeface="Calibri" pitchFamily="34" charset="-122"/>
-                          <a:cs typeface="Calibri" pitchFamily="34" charset="-120"/>
-                        </a:rPr>
-                        <a:t>45,1</a:t>
-                      </a:r>
-                      <a:endParaRPr lang="en-US" sz="850" dirty="0">
-                        <a:latin typeface="Calibri" charset="0"/>
-                        <a:ea typeface="Calibri" charset="0"/>
-                        <a:cs typeface="Calibri" charset="0"/>
-                      </a:endParaRPr>
-                    </a:p>
-                  </a:txBody>
-                  <a:tcPr marL="64008" marR="64008" marT="0" marB="0" anchor="ctr">
-                    <a:lnL w="6350" cap="flat" cmpd="sng" algn="ctr">
-                      <a:solidFill>
-                        <a:srgbClr val="D5DBE3"/>
-                      </a:solidFill>
-                      <a:prstDash val="solid"/>
-                      <a:round/>
-                      <a:headEnd type="none" w="med" len="med"/>
-                      <a:tailEnd type="none" w="med" len="med"/>
-                    </a:lnL>
-                    <a:lnR w="6350" cap="flat" cmpd="sng" algn="ctr">
-                      <a:solidFill>
-                        <a:srgbClr val="D5DBE3"/>
-                      </a:solidFill>
-                      <a:prstDash val="solid"/>
-                      <a:round/>
-                      <a:headEnd type="none" w="med" len="med"/>
-                      <a:tailEnd type="none" w="med" len="med"/>
-                    </a:lnR>
-                    <a:lnT w="6350" cap="flat" cmpd="sng" algn="ctr">
-                      <a:solidFill>
-                        <a:srgbClr val="D5DBE3"/>
-                      </a:solidFill>
-                      <a:prstDash val="solid"/>
-                      <a:round/>
-                      <a:headEnd type="none" w="med" len="med"/>
-                      <a:tailEnd type="none" w="med" len="med"/>
-                    </a:lnT>
-                    <a:lnB w="6350" cap="flat" cmpd="sng" algn="ctr">
-                      <a:solidFill>
-                        <a:srgbClr val="D5DBE3"/>
-                      </a:solidFill>
-                      <a:prstDash val="solid"/>
-                      <a:round/>
-                      <a:headEnd type="none" w="med" len="med"/>
-                      <a:tailEnd type="none" w="med" len="med"/>
-                    </a:lnB>
-                    <a:solidFill>
-                      <a:srgbClr val="F7E7E5"/>
-                    </a:solidFill>
-                  </a:tcPr>
-                </a:tc>
               </a:tr>
               <a:tr h="224028">
                 <a:tc>
@@ -27118,7 +27115,7 @@
                           <a:ea typeface="Calibri" pitchFamily="34" charset="-122"/>
                           <a:cs typeface="Calibri" pitchFamily="34" charset="-120"/>
                         </a:rPr>
-                        <a:t>-5 273,4</a:t>
+                        <a:t>-5 100,4</a:t>
                       </a:r>
                       <a:endParaRPr lang="en-US" sz="850" dirty="0">
                         <a:latin typeface="Calibri" charset="0"/>
@@ -27254,7 +27251,7 @@
                           <a:ea typeface="Calibri" pitchFamily="34" charset="-122"/>
                           <a:cs typeface="Calibri" pitchFamily="34" charset="-120"/>
                         </a:rPr>
-                        <a:t>696,1</a:t>
+                        <a:t>869,1</a:t>
                       </a:r>
                       <a:endParaRPr lang="en-US" sz="850" dirty="0">
                         <a:latin typeface="Calibri" charset="0"/>
@@ -27322,7 +27319,7 @@
                           <a:ea typeface="Calibri" pitchFamily="34" charset="-122"/>
                           <a:cs typeface="Calibri" pitchFamily="34" charset="-120"/>
                         </a:rPr>
-                        <a:t>1 659,6</a:t>
+                        <a:t>1 509,2</a:t>
                       </a:r>
                       <a:endParaRPr lang="en-US" sz="850" dirty="0">
                         <a:latin typeface="Calibri" charset="0"/>
@@ -27566,28 +27563,7 @@
                 <a:ea typeface="Calibri" pitchFamily="34" charset="-122"/>
                 <a:cs typeface="Calibri" pitchFamily="34" charset="-120"/>
               </a:rPr>
-              <a:t>Financer le reste de 1 659,6 M, dont PICI – ECO 336,4, TERASSON – BNI fonds projet 324,8, PICI – STB 238,1.</a:t>
-            </a:r>
-            <a:endParaRPr lang="en-US" sz="1250" dirty="0"/>
-          </a:p>
-          <a:p>
-            <a:pPr marL="127000" indent="-127000">
-              <a:spcAft>
-                <a:spcPts val="300"/>
-              </a:spcAft>
-              <a:buSzPct val="100000"/>
-              <a:buChar char="•"/>
-            </a:pPr>
-            <a:r>
-              <a:rPr lang="en-US" sz="1000" dirty="0">
-                <a:solidFill>
-                  <a:srgbClr val="FFFFFF"/>
-                </a:solidFill>
-                <a:latin typeface="Calibri" pitchFamily="34" charset="0"/>
-                <a:ea typeface="Calibri" pitchFamily="34" charset="-122"/>
-                <a:cs typeface="Calibri" pitchFamily="34" charset="-120"/>
-              </a:rPr>
-              <a:t>Décalages appliqués : salaires SCO AO 24,3 M en S3.</a:t>
+              <a:t>Financer le reste de 1 509,2 M, dont PICI – ECO 336,4, TERASSON – BNI fonds projet 324,8, PICI – STB 238,1.</a:t>
             </a:r>
             <a:endParaRPr lang="en-US" sz="1250" dirty="0"/>
           </a:p>

--- a/RCI_Besoins_Tresorerie_Comptes_Paiement_30-09-2026.pptx
+++ b/RCI_Besoins_Tresorerie_Comptes_Paiement_30-09-2026.pptx
@@ -1851,7 +1851,7 @@
                 <a:ea typeface="Calibri" pitchFamily="34" charset="-122"/>
                 <a:cs typeface="Calibri" pitchFamily="34" charset="-120"/>
               </a:rPr>
-              <a:t>6 974,1 M à payer de S1 à S5, dont 5 115,2 M dès S1 ; 2 530,3 M de déficits</a:t>
+              <a:t>6 974,1 M à payer de S1 à S5, dont 5 115,2 M dès S1 ; 1 925,7 M de déficits</a:t>
             </a:r>
             <a:endParaRPr lang="en-US" sz="1400" dirty="0"/>
           </a:p>
@@ -2831,7 +2831,7 @@
                 <a:ea typeface="Calibri" pitchFamily="34" charset="-122"/>
                 <a:cs typeface="Calibri" pitchFamily="34" charset="-120"/>
               </a:rPr>
-              <a:t>6 045,8 M</a:t>
+              <a:t>6 750,5 M</a:t>
             </a:r>
             <a:endParaRPr lang="en-US" sz="2200" dirty="0"/>
           </a:p>
@@ -2936,7 +2936,7 @@
                 <a:ea typeface="Calibri" pitchFamily="34" charset="-122"/>
                 <a:cs typeface="Calibri" pitchFamily="34" charset="-120"/>
               </a:rPr>
-              <a:t>-1 425,0 M</a:t>
+              <a:t>-720,3 M</a:t>
             </a:r>
             <a:endParaRPr lang="en-US" sz="2200" dirty="0"/>
           </a:p>
@@ -4104,7 +4104,7 @@
                           <a:ea typeface="Calibri" pitchFamily="34" charset="-122"/>
                           <a:cs typeface="Calibri" pitchFamily="34" charset="-120"/>
                         </a:rPr>
-                        <a:t>72,5</a:t>
+                        <a:t>777,2</a:t>
                       </a:r>
                       <a:endParaRPr lang="en-US" sz="900" dirty="0">
                         <a:latin typeface="Calibri" charset="0"/>
@@ -4169,7 +4169,7 @@
                           <a:ea typeface="Calibri" pitchFamily="34" charset="-122"/>
                           <a:cs typeface="Calibri" pitchFamily="34" charset="-120"/>
                         </a:rPr>
-                        <a:t>1 427,7</a:t>
+                        <a:t>823,1</a:t>
                       </a:r>
                       <a:endParaRPr lang="en-US" sz="900" dirty="0">
                         <a:latin typeface="Calibri" charset="0"/>
@@ -5901,7 +5901,7 @@
                           <a:ea typeface="Calibri" pitchFamily="34" charset="-122"/>
                           <a:cs typeface="Calibri" pitchFamily="34" charset="-120"/>
                         </a:rPr>
-                        <a:t>4 197,6</a:t>
+                        <a:t>4 902,2</a:t>
                       </a:r>
                       <a:endParaRPr lang="en-US" sz="900" dirty="0">
                         <a:latin typeface="Calibri" charset="0"/>
@@ -5969,7 +5969,7 @@
                           <a:ea typeface="Calibri" pitchFamily="34" charset="-122"/>
                           <a:cs typeface="Calibri" pitchFamily="34" charset="-120"/>
                         </a:rPr>
-                        <a:t>2 530,3</a:t>
+                        <a:t>1 925,7</a:t>
                       </a:r>
                       <a:endParaRPr lang="en-US" sz="900" dirty="0">
                         <a:latin typeface="Calibri" charset="0"/>
@@ -6766,7 +6766,7 @@
                           <a:ea typeface="Calibri" pitchFamily="34" charset="-122"/>
                           <a:cs typeface="Calibri" pitchFamily="34" charset="-120"/>
                         </a:rPr>
-                        <a:t>-1 232,8</a:t>
+                        <a:t>-528,1</a:t>
                       </a:r>
                       <a:endParaRPr lang="en-US" sz="900" dirty="0">
                         <a:latin typeface="Calibri" charset="0"/>
@@ -6834,7 +6834,7 @@
                           <a:ea typeface="Calibri" pitchFamily="34" charset="-122"/>
                           <a:cs typeface="Calibri" pitchFamily="34" charset="-120"/>
                         </a:rPr>
-                        <a:t>-1 144,6</a:t>
+                        <a:t>-439,9</a:t>
                       </a:r>
                       <a:endParaRPr lang="en-US" sz="900" dirty="0">
                         <a:latin typeface="Calibri" charset="0"/>
@@ -6902,7 +6902,7 @@
                           <a:ea typeface="Calibri" pitchFamily="34" charset="-122"/>
                           <a:cs typeface="Calibri" pitchFamily="34" charset="-120"/>
                         </a:rPr>
-                        <a:t>-1 333,5</a:t>
+                        <a:t>-628,9</a:t>
                       </a:r>
                       <a:endParaRPr lang="en-US" sz="900" dirty="0">
                         <a:latin typeface="Calibri" charset="0"/>
@@ -6970,7 +6970,7 @@
                           <a:ea typeface="Calibri" pitchFamily="34" charset="-122"/>
                           <a:cs typeface="Calibri" pitchFamily="34" charset="-120"/>
                         </a:rPr>
-                        <a:t>-1 360,6</a:t>
+                        <a:t>-655,9</a:t>
                       </a:r>
                       <a:endParaRPr lang="en-US" sz="900" dirty="0">
                         <a:latin typeface="Calibri" charset="0"/>
@@ -7038,7 +7038,7 @@
                           <a:ea typeface="Calibri" pitchFamily="34" charset="-122"/>
                           <a:cs typeface="Calibri" pitchFamily="34" charset="-120"/>
                         </a:rPr>
-                        <a:t>-1 425,0</a:t>
+                        <a:t>-720,3</a:t>
                       </a:r>
                       <a:endParaRPr lang="en-US" sz="900" dirty="0">
                         <a:latin typeface="Calibri" charset="0"/>
@@ -7338,13 +7338,13 @@
                       <a:r>
                         <a:rPr lang="en-US" sz="900" dirty="0">
                           <a:solidFill>
-                            <a:srgbClr val="B3261E"/>
-                          </a:solidFill>
-                          <a:latin typeface="Calibri" pitchFamily="34" charset="0"/>
-                          <a:ea typeface="Calibri" pitchFamily="34" charset="-122"/>
-                          <a:cs typeface="Calibri" pitchFamily="34" charset="-120"/>
-                        </a:rPr>
-                        <a:t>-571,0</a:t>
+                            <a:srgbClr val="5E9B7E"/>
+                          </a:solidFill>
+                          <a:latin typeface="Calibri" pitchFamily="34" charset="0"/>
+                          <a:ea typeface="Calibri" pitchFamily="34" charset="-122"/>
+                          <a:cs typeface="Calibri" pitchFamily="34" charset="-120"/>
+                        </a:rPr>
+                        <a:t>+133,7</a:t>
                       </a:r>
                       <a:endParaRPr lang="en-US" sz="900" dirty="0">
                         <a:latin typeface="Calibri" charset="0"/>
@@ -7403,13 +7403,13 @@
                       <a:r>
                         <a:rPr lang="en-US" sz="900" dirty="0">
                           <a:solidFill>
-                            <a:srgbClr val="B3261E"/>
-                          </a:solidFill>
-                          <a:latin typeface="Calibri" pitchFamily="34" charset="0"/>
-                          <a:ea typeface="Calibri" pitchFamily="34" charset="-122"/>
-                          <a:cs typeface="Calibri" pitchFamily="34" charset="-120"/>
-                        </a:rPr>
-                        <a:t>-580,3</a:t>
+                            <a:srgbClr val="5E9B7E"/>
+                          </a:solidFill>
+                          <a:latin typeface="Calibri" pitchFamily="34" charset="0"/>
+                          <a:ea typeface="Calibri" pitchFamily="34" charset="-122"/>
+                          <a:cs typeface="Calibri" pitchFamily="34" charset="-120"/>
+                        </a:rPr>
+                        <a:t>+124,3</a:t>
                       </a:r>
                       <a:endParaRPr lang="en-US" sz="900" dirty="0">
                         <a:latin typeface="Calibri" charset="0"/>
@@ -7468,13 +7468,13 @@
                       <a:r>
                         <a:rPr lang="en-US" sz="900" dirty="0">
                           <a:solidFill>
-                            <a:srgbClr val="B3261E"/>
-                          </a:solidFill>
-                          <a:latin typeface="Calibri" pitchFamily="34" charset="0"/>
-                          <a:ea typeface="Calibri" pitchFamily="34" charset="-122"/>
-                          <a:cs typeface="Calibri" pitchFamily="34" charset="-120"/>
-                        </a:rPr>
-                        <a:t>-604,7</a:t>
+                            <a:srgbClr val="5E9B7E"/>
+                          </a:solidFill>
+                          <a:latin typeface="Calibri" pitchFamily="34" charset="0"/>
+                          <a:ea typeface="Calibri" pitchFamily="34" charset="-122"/>
+                          <a:cs typeface="Calibri" pitchFamily="34" charset="-120"/>
+                        </a:rPr>
+                        <a:t>+100,0</a:t>
                       </a:r>
                       <a:endParaRPr lang="en-US" sz="900" dirty="0">
                         <a:latin typeface="Calibri" charset="0"/>
@@ -7533,13 +7533,13 @@
                       <a:r>
                         <a:rPr lang="en-US" sz="900" dirty="0">
                           <a:solidFill>
-                            <a:srgbClr val="B3261E"/>
-                          </a:solidFill>
-                          <a:latin typeface="Calibri" pitchFamily="34" charset="0"/>
-                          <a:ea typeface="Calibri" pitchFamily="34" charset="-122"/>
-                          <a:cs typeface="Calibri" pitchFamily="34" charset="-120"/>
-                        </a:rPr>
-                        <a:t>-604,7</a:t>
+                            <a:srgbClr val="5E9B7E"/>
+                          </a:solidFill>
+                          <a:latin typeface="Calibri" pitchFamily="34" charset="0"/>
+                          <a:ea typeface="Calibri" pitchFamily="34" charset="-122"/>
+                          <a:cs typeface="Calibri" pitchFamily="34" charset="-120"/>
+                        </a:rPr>
+                        <a:t>+100,0</a:t>
                       </a:r>
                       <a:endParaRPr lang="en-US" sz="900" dirty="0">
                         <a:latin typeface="Calibri" charset="0"/>
@@ -7598,13 +7598,13 @@
                       <a:r>
                         <a:rPr lang="en-US" sz="900" dirty="0">
                           <a:solidFill>
-                            <a:srgbClr val="B3261E"/>
-                          </a:solidFill>
-                          <a:latin typeface="Calibri" pitchFamily="34" charset="0"/>
-                          <a:ea typeface="Calibri" pitchFamily="34" charset="-122"/>
-                          <a:cs typeface="Calibri" pitchFamily="34" charset="-120"/>
-                        </a:rPr>
-                        <a:t>-604,7</a:t>
+                            <a:srgbClr val="5E9B7E"/>
+                          </a:solidFill>
+                          <a:latin typeface="Calibri" pitchFamily="34" charset="0"/>
+                          <a:ea typeface="Calibri" pitchFamily="34" charset="-122"/>
+                          <a:cs typeface="Calibri" pitchFamily="34" charset="-120"/>
+                        </a:rPr>
+                        <a:t>+100,0</a:t>
                       </a:r>
                       <a:endParaRPr lang="en-US" sz="900" dirty="0">
                         <a:latin typeface="Calibri" charset="0"/>
@@ -10148,7 +10148,7 @@
                 <a:ea typeface="Calibri" pitchFamily="34" charset="-122"/>
                 <a:cs typeface="Calibri" pitchFamily="34" charset="-120"/>
               </a:rPr>
-              <a:t>déficits PICI 604,7 M, TERASSON 206,4 M, FINAFRICA 198,7 M, FIRST 175,3 M, RIVIERA 87,3 M, IMMONEUF 66,0 M ; excédents INFI SOFT 2,8 M.</a:t>
+              <a:t>déficits TERASSON 206,4 M, FINAFRICA 198,7 M, FIRST 175,3 M, RIVIERA 87,3 M, IMMONEUF 66,0 M, RHD CI 50,0 M ; excédents PICI 100,0 M, INFI SOFT 2,8 M.</a:t>
             </a:r>
             <a:endParaRPr lang="en-US" sz="1000" dirty="0"/>
           </a:p>
@@ -10871,7 +10871,7 @@
                       <a:tailEnd type="none" w="med" len="med"/>
                     </a:lnB>
                     <a:solidFill>
-                      <a:srgbClr val="F7E7E5"/>
+                      <a:srgbClr val="E6F0EA"/>
                     </a:solidFill>
                   </a:tcPr>
                 </a:tc>
@@ -11022,7 +11022,7 @@
                           <a:ea typeface="Calibri" pitchFamily="34" charset="-122"/>
                           <a:cs typeface="Calibri" pitchFamily="34" charset="-120"/>
                         </a:rPr>
-                        <a:t>STANBIC-PICI, puis SOCIETE GENERALE-PICI</a:t>
+                        <a:t>ECOBANK-PICI, puis STANBIC-PICI</a:t>
                       </a:r>
                       <a:endParaRPr lang="en-US" sz="950" dirty="0">
                         <a:latin typeface="Calibri" charset="0"/>
@@ -11087,7 +11087,7 @@
                           <a:ea typeface="Calibri" pitchFamily="34" charset="-122"/>
                           <a:cs typeface="Calibri" pitchFamily="34" charset="-120"/>
                         </a:rPr>
-                        <a:t>-308,1</a:t>
+                        <a:t>396,6</a:t>
                       </a:r>
                       <a:endParaRPr lang="en-US" sz="950" dirty="0">
                         <a:latin typeface="Calibri" charset="0"/>
@@ -11146,13 +11146,13 @@
                       <a:r>
                         <a:rPr lang="en-US" sz="950" b="1" dirty="0">
                           <a:solidFill>
-                            <a:srgbClr val="B3261E"/>
-                          </a:solidFill>
-                          <a:latin typeface="Calibri" pitchFamily="34" charset="0"/>
-                          <a:ea typeface="Calibri" pitchFamily="34" charset="-122"/>
-                          <a:cs typeface="Calibri" pitchFamily="34" charset="-120"/>
-                        </a:rPr>
-                        <a:t>-604,7</a:t>
+                            <a:srgbClr val="5E9B7E"/>
+                          </a:solidFill>
+                          <a:latin typeface="Calibri" pitchFamily="34" charset="0"/>
+                          <a:ea typeface="Calibri" pitchFamily="34" charset="-122"/>
+                          <a:cs typeface="Calibri" pitchFamily="34" charset="-120"/>
+                        </a:rPr>
+                        <a:t>+100,0</a:t>
                       </a:r>
                       <a:endParaRPr lang="en-US" sz="950" dirty="0">
                         <a:latin typeface="Calibri" charset="0"/>
@@ -11198,9 +11198,6 @@
                       <a:headEnd type="none" w="med" len="med"/>
                       <a:tailEnd type="none" w="med" len="med"/>
                     </a:lnB>
-                    <a:solidFill>
-                      <a:srgbClr val="F7E7E5"/>
-                    </a:solidFill>
                   </a:tcPr>
                 </a:tc>
               </a:tr>
@@ -16041,7 +16038,7 @@
                 <a:ea typeface="Calibri" pitchFamily="34" charset="-122"/>
                 <a:cs typeface="Calibri" pitchFamily="34" charset="-120"/>
               </a:rPr>
-              <a:t>Déficits à couvrir d'ici S5 : 2 530,3 M – MFCFA</a:t>
+              <a:t>Déficits à couvrir d'ici S5 : 1 925,7 M – MFCFA</a:t>
             </a:r>
             <a:endParaRPr lang="en-US" sz="1300" dirty="0"/>
           </a:p>
@@ -16367,7 +16364,7 @@
                           <a:ea typeface="Calibri" pitchFamily="34" charset="-122"/>
                           <a:cs typeface="Calibri" pitchFamily="34" charset="-120"/>
                         </a:rPr>
-                        <a:t>PICI</a:t>
+                        <a:t>TERASSON</a:t>
                       </a:r>
                       <a:endParaRPr lang="en-US" sz="950" dirty="0">
                         <a:latin typeface="Calibri" charset="0"/>
@@ -16432,7 +16429,7 @@
                           <a:ea typeface="Calibri" pitchFamily="34" charset="-122"/>
                           <a:cs typeface="Calibri" pitchFamily="34" charset="-120"/>
                         </a:rPr>
-                        <a:t>604,7</a:t>
+                        <a:t>206,4</a:t>
                       </a:r>
                       <a:endParaRPr lang="en-US" sz="950" dirty="0">
                         <a:latin typeface="Calibri" charset="0"/>
@@ -16632,7 +16629,7 @@
                           <a:ea typeface="Calibri" pitchFamily="34" charset="-122"/>
                           <a:cs typeface="Calibri" pitchFamily="34" charset="-120"/>
                         </a:rPr>
-                        <a:t>TERASSON</a:t>
+                        <a:t>FINAFRICA</a:t>
                       </a:r>
                       <a:endParaRPr lang="en-US" sz="950" dirty="0">
                         <a:latin typeface="Calibri" charset="0"/>
@@ -16697,7 +16694,7 @@
                           <a:ea typeface="Calibri" pitchFamily="34" charset="-122"/>
                           <a:cs typeface="Calibri" pitchFamily="34" charset="-120"/>
                         </a:rPr>
-                        <a:t>206,4</a:t>
+                        <a:t>198,7</a:t>
                       </a:r>
                       <a:endParaRPr lang="en-US" sz="950" dirty="0">
                         <a:latin typeface="Calibri" charset="0"/>
@@ -16897,7 +16894,7 @@
                           <a:ea typeface="Calibri" pitchFamily="34" charset="-122"/>
                           <a:cs typeface="Calibri" pitchFamily="34" charset="-120"/>
                         </a:rPr>
-                        <a:t>FINAFRICA</a:t>
+                        <a:t>FIRST</a:t>
                       </a:r>
                       <a:endParaRPr lang="en-US" sz="950" dirty="0">
                         <a:latin typeface="Calibri" charset="0"/>
@@ -16962,7 +16959,7 @@
                           <a:ea typeface="Calibri" pitchFamily="34" charset="-122"/>
                           <a:cs typeface="Calibri" pitchFamily="34" charset="-120"/>
                         </a:rPr>
-                        <a:t>198,7</a:t>
+                        <a:t>175,3</a:t>
                       </a:r>
                       <a:endParaRPr lang="en-US" sz="950" dirty="0">
                         <a:latin typeface="Calibri" charset="0"/>
@@ -17162,7 +17159,7 @@
                           <a:ea typeface="Calibri" pitchFamily="34" charset="-122"/>
                           <a:cs typeface="Calibri" pitchFamily="34" charset="-120"/>
                         </a:rPr>
-                        <a:t>FIRST</a:t>
+                        <a:t>RIVIERA</a:t>
                       </a:r>
                       <a:endParaRPr lang="en-US" sz="950" dirty="0">
                         <a:latin typeface="Calibri" charset="0"/>
@@ -17227,7 +17224,7 @@
                           <a:ea typeface="Calibri" pitchFamily="34" charset="-122"/>
                           <a:cs typeface="Calibri" pitchFamily="34" charset="-120"/>
                         </a:rPr>
-                        <a:t>175,3</a:t>
+                        <a:t>87,3</a:t>
                       </a:r>
                       <a:endParaRPr lang="en-US" sz="950" dirty="0">
                         <a:latin typeface="Calibri" charset="0"/>
@@ -17427,7 +17424,7 @@
                           <a:ea typeface="Calibri" pitchFamily="34" charset="-122"/>
                           <a:cs typeface="Calibri" pitchFamily="34" charset="-120"/>
                         </a:rPr>
-                        <a:t>RIVIERA</a:t>
+                        <a:t>IMMONEUF</a:t>
                       </a:r>
                       <a:endParaRPr lang="en-US" sz="950" dirty="0">
                         <a:latin typeface="Calibri" charset="0"/>
@@ -17492,7 +17489,7 @@
                           <a:ea typeface="Calibri" pitchFamily="34" charset="-122"/>
                           <a:cs typeface="Calibri" pitchFamily="34" charset="-120"/>
                         </a:rPr>
-                        <a:t>87,3</a:t>
+                        <a:t>66,0</a:t>
                       </a:r>
                       <a:endParaRPr lang="en-US" sz="950" dirty="0">
                         <a:latin typeface="Calibri" charset="0"/>
@@ -17692,7 +17689,7 @@
                           <a:ea typeface="Calibri" pitchFamily="34" charset="-122"/>
                           <a:cs typeface="Calibri" pitchFamily="34" charset="-120"/>
                         </a:rPr>
-                        <a:t>IMMONEUF</a:t>
+                        <a:t>RHD CI</a:t>
                       </a:r>
                       <a:endParaRPr lang="en-US" sz="950" dirty="0">
                         <a:latin typeface="Calibri" charset="0"/>
@@ -17757,7 +17754,7 @@
                           <a:ea typeface="Calibri" pitchFamily="34" charset="-122"/>
                           <a:cs typeface="Calibri" pitchFamily="34" charset="-120"/>
                         </a:rPr>
-                        <a:t>66,0</a:t>
+                        <a:t>50,0</a:t>
                       </a:r>
                       <a:endParaRPr lang="en-US" sz="950" dirty="0">
                         <a:latin typeface="Calibri" charset="0"/>
@@ -17957,7 +17954,7 @@
                           <a:ea typeface="Calibri" pitchFamily="34" charset="-122"/>
                           <a:cs typeface="Calibri" pitchFamily="34" charset="-120"/>
                         </a:rPr>
-                        <a:t>RHD CI</a:t>
+                        <a:t>SCO AO</a:t>
                       </a:r>
                       <a:endParaRPr lang="en-US" sz="950" dirty="0">
                         <a:latin typeface="Calibri" charset="0"/>
@@ -18022,7 +18019,7 @@
                           <a:ea typeface="Calibri" pitchFamily="34" charset="-122"/>
                           <a:cs typeface="Calibri" pitchFamily="34" charset="-120"/>
                         </a:rPr>
-                        <a:t>50,0</a:t>
+                        <a:t>29,5</a:t>
                       </a:r>
                       <a:endParaRPr lang="en-US" sz="950" dirty="0">
                         <a:latin typeface="Calibri" charset="0"/>
@@ -18155,7 +18152,7 @@
                           <a:ea typeface="Calibri" pitchFamily="34" charset="-122"/>
                           <a:cs typeface="Calibri" pitchFamily="34" charset="-120"/>
                         </a:rPr>
-                        <a:t>S1</a:t>
+                        <a:t>S5</a:t>
                       </a:r>
                       <a:endParaRPr lang="en-US" sz="950" dirty="0">
                         <a:latin typeface="Calibri" charset="0"/>
@@ -18222,7 +18219,7 @@
                           <a:ea typeface="Calibri" pitchFamily="34" charset="-122"/>
                           <a:cs typeface="Calibri" pitchFamily="34" charset="-120"/>
                         </a:rPr>
-                        <a:t>SCO AO</a:t>
+                        <a:t>AB CENTER</a:t>
                       </a:r>
                       <a:endParaRPr lang="en-US" sz="950" dirty="0">
                         <a:latin typeface="Calibri" charset="0"/>
@@ -18287,7 +18284,7 @@
                           <a:ea typeface="Calibri" pitchFamily="34" charset="-122"/>
                           <a:cs typeface="Calibri" pitchFamily="34" charset="-120"/>
                         </a:rPr>
-                        <a:t>29,5</a:t>
+                        <a:t>6,3</a:t>
                       </a:r>
                       <a:endParaRPr lang="en-US" sz="950" dirty="0">
                         <a:latin typeface="Calibri" charset="0"/>
@@ -18420,7 +18417,7 @@
                           <a:ea typeface="Calibri" pitchFamily="34" charset="-122"/>
                           <a:cs typeface="Calibri" pitchFamily="34" charset="-120"/>
                         </a:rPr>
-                        <a:t>S5</a:t>
+                        <a:t>S1</a:t>
                       </a:r>
                       <a:endParaRPr lang="en-US" sz="950" dirty="0">
                         <a:latin typeface="Calibri" charset="0"/>
@@ -18487,7 +18484,7 @@
                           <a:ea typeface="Calibri" pitchFamily="34" charset="-122"/>
                           <a:cs typeface="Calibri" pitchFamily="34" charset="-120"/>
                         </a:rPr>
-                        <a:t>AB CENTER</a:t>
+                        <a:t>ODALYS CI</a:t>
                       </a:r>
                       <a:endParaRPr lang="en-US" sz="950" dirty="0">
                         <a:latin typeface="Calibri" charset="0"/>
@@ -18552,7 +18549,7 @@
                           <a:ea typeface="Calibri" pitchFamily="34" charset="-122"/>
                           <a:cs typeface="Calibri" pitchFamily="34" charset="-120"/>
                         </a:rPr>
-                        <a:t>6,3</a:t>
+                        <a:t>3,5</a:t>
                       </a:r>
                       <a:endParaRPr lang="en-US" sz="950" dirty="0">
                         <a:latin typeface="Calibri" charset="0"/>
@@ -18752,7 +18749,7 @@
                           <a:ea typeface="Calibri" pitchFamily="34" charset="-122"/>
                           <a:cs typeface="Calibri" pitchFamily="34" charset="-120"/>
                         </a:rPr>
-                        <a:t>ODALYS CI</a:t>
+                        <a:t>RIVIERA – fonds projet</a:t>
                       </a:r>
                       <a:endParaRPr lang="en-US" sz="950" dirty="0">
                         <a:latin typeface="Calibri" charset="0"/>
@@ -18817,7 +18814,7 @@
                           <a:ea typeface="Calibri" pitchFamily="34" charset="-122"/>
                           <a:cs typeface="Calibri" pitchFamily="34" charset="-120"/>
                         </a:rPr>
-                        <a:t>3,5</a:t>
+                        <a:t>601,4</a:t>
                       </a:r>
                       <a:endParaRPr lang="en-US" sz="950" dirty="0">
                         <a:latin typeface="Calibri" charset="0"/>
@@ -18885,7 +18882,7 @@
                           <a:ea typeface="Calibri" pitchFamily="34" charset="-122"/>
                           <a:cs typeface="Calibri" pitchFamily="34" charset="-120"/>
                         </a:rPr>
-                        <a:t>Spot (A) ou avance (B)</a:t>
+                        <a:t>Compte à arbitrer (C) ou prêts</a:t>
                       </a:r>
                       <a:endParaRPr lang="en-US" sz="950" dirty="0">
                         <a:latin typeface="Calibri" charset="0"/>
@@ -18950,7 +18947,7 @@
                           <a:ea typeface="Calibri" pitchFamily="34" charset="-122"/>
                           <a:cs typeface="Calibri" pitchFamily="34" charset="-120"/>
                         </a:rPr>
-                        <a:t>S1</a:t>
+                        <a:t>S2</a:t>
                       </a:r>
                       <a:endParaRPr lang="en-US" sz="950" dirty="0">
                         <a:latin typeface="Calibri" charset="0"/>
@@ -19017,7 +19014,7 @@
                           <a:ea typeface="Calibri" pitchFamily="34" charset="-122"/>
                           <a:cs typeface="Calibri" pitchFamily="34" charset="-120"/>
                         </a:rPr>
-                        <a:t>RIVIERA – fonds projet</a:t>
+                        <a:t>TERASSON – fonds projet</a:t>
                       </a:r>
                       <a:endParaRPr lang="en-US" sz="950" dirty="0">
                         <a:latin typeface="Calibri" charset="0"/>
@@ -19082,7 +19079,7 @@
                           <a:ea typeface="Calibri" pitchFamily="34" charset="-122"/>
                           <a:cs typeface="Calibri" pitchFamily="34" charset="-120"/>
                         </a:rPr>
-                        <a:t>601,4</a:t>
+                        <a:t>501,3</a:t>
                       </a:r>
                       <a:endParaRPr lang="en-US" sz="950" dirty="0">
                         <a:latin typeface="Calibri" charset="0"/>
@@ -19215,271 +19212,6 @@
                           <a:ea typeface="Calibri" pitchFamily="34" charset="-122"/>
                           <a:cs typeface="Calibri" pitchFamily="34" charset="-120"/>
                         </a:rPr>
-                        <a:t>S2</a:t>
-                      </a:r>
-                      <a:endParaRPr lang="en-US" sz="950" dirty="0">
-                        <a:latin typeface="Calibri" charset="0"/>
-                        <a:ea typeface="Calibri" charset="0"/>
-                        <a:cs typeface="Calibri" charset="0"/>
-                      </a:endParaRPr>
-                    </a:p>
-                  </a:txBody>
-                  <a:tcPr marL="64008" marR="64008" marT="0" marB="0" anchor="ctr">
-                    <a:lnL w="6350" cap="flat" cmpd="sng" algn="ctr">
-                      <a:solidFill>
-                        <a:srgbClr val="D5DBE3"/>
-                      </a:solidFill>
-                      <a:prstDash val="solid"/>
-                      <a:round/>
-                      <a:headEnd type="none" w="med" len="med"/>
-                      <a:tailEnd type="none" w="med" len="med"/>
-                    </a:lnL>
-                    <a:lnR w="6350" cap="flat" cmpd="sng" algn="ctr">
-                      <a:solidFill>
-                        <a:srgbClr val="D5DBE3"/>
-                      </a:solidFill>
-                      <a:prstDash val="solid"/>
-                      <a:round/>
-                      <a:headEnd type="none" w="med" len="med"/>
-                      <a:tailEnd type="none" w="med" len="med"/>
-                    </a:lnR>
-                    <a:lnT w="6350" cap="flat" cmpd="sng" algn="ctr">
-                      <a:solidFill>
-                        <a:srgbClr val="D5DBE3"/>
-                      </a:solidFill>
-                      <a:prstDash val="solid"/>
-                      <a:round/>
-                      <a:headEnd type="none" w="med" len="med"/>
-                      <a:tailEnd type="none" w="med" len="med"/>
-                    </a:lnT>
-                    <a:lnB w="6350" cap="flat" cmpd="sng" algn="ctr">
-                      <a:solidFill>
-                        <a:srgbClr val="D5DBE3"/>
-                      </a:solidFill>
-                      <a:prstDash val="solid"/>
-                      <a:round/>
-                      <a:headEnd type="none" w="med" len="med"/>
-                      <a:tailEnd type="none" w="med" len="med"/>
-                    </a:lnB>
-                  </a:tcPr>
-                </a:tc>
-              </a:tr>
-              <a:tr h="237744">
-                <a:tc>
-                  <a:txBody>
-                    <a:bodyPr/>
-                    <a:lstStyle/>
-                    <a:p>
-                      <a:pPr algn="l" indent="0" marL="0">
-                        <a:buNone/>
-                      </a:pPr>
-                      <a:r>
-                        <a:rPr lang="en-US" sz="950" b="1" dirty="0">
-                          <a:solidFill>
-                            <a:srgbClr val="1F2933"/>
-                          </a:solidFill>
-                          <a:latin typeface="Calibri" pitchFamily="34" charset="0"/>
-                          <a:ea typeface="Calibri" pitchFamily="34" charset="-122"/>
-                          <a:cs typeface="Calibri" pitchFamily="34" charset="-120"/>
-                        </a:rPr>
-                        <a:t>TERASSON – fonds projet</a:t>
-                      </a:r>
-                      <a:endParaRPr lang="en-US" sz="950" dirty="0">
-                        <a:latin typeface="Calibri" charset="0"/>
-                        <a:ea typeface="Calibri" charset="0"/>
-                        <a:cs typeface="Calibri" charset="0"/>
-                      </a:endParaRPr>
-                    </a:p>
-                  </a:txBody>
-                  <a:tcPr marL="64008" marR="64008" marT="0" marB="0" anchor="ctr">
-                    <a:lnL w="6350" cap="flat" cmpd="sng" algn="ctr">
-                      <a:solidFill>
-                        <a:srgbClr val="D5DBE3"/>
-                      </a:solidFill>
-                      <a:prstDash val="solid"/>
-                      <a:round/>
-                      <a:headEnd type="none" w="med" len="med"/>
-                      <a:tailEnd type="none" w="med" len="med"/>
-                    </a:lnL>
-                    <a:lnR w="6350" cap="flat" cmpd="sng" algn="ctr">
-                      <a:solidFill>
-                        <a:srgbClr val="D5DBE3"/>
-                      </a:solidFill>
-                      <a:prstDash val="solid"/>
-                      <a:round/>
-                      <a:headEnd type="none" w="med" len="med"/>
-                      <a:tailEnd type="none" w="med" len="med"/>
-                    </a:lnR>
-                    <a:lnT w="6350" cap="flat" cmpd="sng" algn="ctr">
-                      <a:solidFill>
-                        <a:srgbClr val="D5DBE3"/>
-                      </a:solidFill>
-                      <a:prstDash val="solid"/>
-                      <a:round/>
-                      <a:headEnd type="none" w="med" len="med"/>
-                      <a:tailEnd type="none" w="med" len="med"/>
-                    </a:lnT>
-                    <a:lnB w="6350" cap="flat" cmpd="sng" algn="ctr">
-                      <a:solidFill>
-                        <a:srgbClr val="D5DBE3"/>
-                      </a:solidFill>
-                      <a:prstDash val="solid"/>
-                      <a:round/>
-                      <a:headEnd type="none" w="med" len="med"/>
-                      <a:tailEnd type="none" w="med" len="med"/>
-                    </a:lnB>
-                  </a:tcPr>
-                </a:tc>
-                <a:tc>
-                  <a:txBody>
-                    <a:bodyPr/>
-                    <a:lstStyle/>
-                    <a:p>
-                      <a:pPr algn="r" indent="0" marL="0">
-                        <a:buNone/>
-                      </a:pPr>
-                      <a:r>
-                        <a:rPr lang="en-US" sz="950" b="1" dirty="0">
-                          <a:solidFill>
-                            <a:srgbClr val="B3261E"/>
-                          </a:solidFill>
-                          <a:latin typeface="Calibri" pitchFamily="34" charset="0"/>
-                          <a:ea typeface="Calibri" pitchFamily="34" charset="-122"/>
-                          <a:cs typeface="Calibri" pitchFamily="34" charset="-120"/>
-                        </a:rPr>
-                        <a:t>501,3</a:t>
-                      </a:r>
-                      <a:endParaRPr lang="en-US" sz="950" dirty="0">
-                        <a:latin typeface="Calibri" charset="0"/>
-                        <a:ea typeface="Calibri" charset="0"/>
-                        <a:cs typeface="Calibri" charset="0"/>
-                      </a:endParaRPr>
-                    </a:p>
-                  </a:txBody>
-                  <a:tcPr marL="64008" marR="64008" marT="0" marB="0" anchor="ctr">
-                    <a:lnL w="6350" cap="flat" cmpd="sng" algn="ctr">
-                      <a:solidFill>
-                        <a:srgbClr val="D5DBE3"/>
-                      </a:solidFill>
-                      <a:prstDash val="solid"/>
-                      <a:round/>
-                      <a:headEnd type="none" w="med" len="med"/>
-                      <a:tailEnd type="none" w="med" len="med"/>
-                    </a:lnL>
-                    <a:lnR w="6350" cap="flat" cmpd="sng" algn="ctr">
-                      <a:solidFill>
-                        <a:srgbClr val="D5DBE3"/>
-                      </a:solidFill>
-                      <a:prstDash val="solid"/>
-                      <a:round/>
-                      <a:headEnd type="none" w="med" len="med"/>
-                      <a:tailEnd type="none" w="med" len="med"/>
-                    </a:lnR>
-                    <a:lnT w="6350" cap="flat" cmpd="sng" algn="ctr">
-                      <a:solidFill>
-                        <a:srgbClr val="D5DBE3"/>
-                      </a:solidFill>
-                      <a:prstDash val="solid"/>
-                      <a:round/>
-                      <a:headEnd type="none" w="med" len="med"/>
-                      <a:tailEnd type="none" w="med" len="med"/>
-                    </a:lnT>
-                    <a:lnB w="6350" cap="flat" cmpd="sng" algn="ctr">
-                      <a:solidFill>
-                        <a:srgbClr val="D5DBE3"/>
-                      </a:solidFill>
-                      <a:prstDash val="solid"/>
-                      <a:round/>
-                      <a:headEnd type="none" w="med" len="med"/>
-                      <a:tailEnd type="none" w="med" len="med"/>
-                    </a:lnB>
-                    <a:solidFill>
-                      <a:srgbClr val="F7E7E5"/>
-                    </a:solidFill>
-                  </a:tcPr>
-                </a:tc>
-                <a:tc>
-                  <a:txBody>
-                    <a:bodyPr/>
-                    <a:lstStyle/>
-                    <a:p>
-                      <a:pPr algn="l" indent="0" marL="0">
-                        <a:buNone/>
-                      </a:pPr>
-                      <a:r>
-                        <a:rPr lang="en-US" sz="950" dirty="0">
-                          <a:solidFill>
-                            <a:srgbClr val="1F2933"/>
-                          </a:solidFill>
-                          <a:latin typeface="Calibri" pitchFamily="34" charset="0"/>
-                          <a:ea typeface="Calibri" pitchFamily="34" charset="-122"/>
-                          <a:cs typeface="Calibri" pitchFamily="34" charset="-120"/>
-                        </a:rPr>
-                        <a:t>Compte à arbitrer (C) ou prêts</a:t>
-                      </a:r>
-                      <a:endParaRPr lang="en-US" sz="950" dirty="0">
-                        <a:latin typeface="Calibri" charset="0"/>
-                        <a:ea typeface="Calibri" charset="0"/>
-                        <a:cs typeface="Calibri" charset="0"/>
-                      </a:endParaRPr>
-                    </a:p>
-                  </a:txBody>
-                  <a:tcPr marL="64008" marR="64008" marT="0" marB="0" anchor="ctr">
-                    <a:lnL w="6350" cap="flat" cmpd="sng" algn="ctr">
-                      <a:solidFill>
-                        <a:srgbClr val="D5DBE3"/>
-                      </a:solidFill>
-                      <a:prstDash val="solid"/>
-                      <a:round/>
-                      <a:headEnd type="none" w="med" len="med"/>
-                      <a:tailEnd type="none" w="med" len="med"/>
-                    </a:lnL>
-                    <a:lnR w="6350" cap="flat" cmpd="sng" algn="ctr">
-                      <a:solidFill>
-                        <a:srgbClr val="D5DBE3"/>
-                      </a:solidFill>
-                      <a:prstDash val="solid"/>
-                      <a:round/>
-                      <a:headEnd type="none" w="med" len="med"/>
-                      <a:tailEnd type="none" w="med" len="med"/>
-                    </a:lnR>
-                    <a:lnT w="6350" cap="flat" cmpd="sng" algn="ctr">
-                      <a:solidFill>
-                        <a:srgbClr val="D5DBE3"/>
-                      </a:solidFill>
-                      <a:prstDash val="solid"/>
-                      <a:round/>
-                      <a:headEnd type="none" w="med" len="med"/>
-                      <a:tailEnd type="none" w="med" len="med"/>
-                    </a:lnT>
-                    <a:lnB w="6350" cap="flat" cmpd="sng" algn="ctr">
-                      <a:solidFill>
-                        <a:srgbClr val="D5DBE3"/>
-                      </a:solidFill>
-                      <a:prstDash val="solid"/>
-                      <a:round/>
-                      <a:headEnd type="none" w="med" len="med"/>
-                      <a:tailEnd type="none" w="med" len="med"/>
-                    </a:lnB>
-                  </a:tcPr>
-                </a:tc>
-                <a:tc>
-                  <a:txBody>
-                    <a:bodyPr/>
-                    <a:lstStyle/>
-                    <a:p>
-                      <a:pPr algn="ctr" indent="0" marL="0">
-                        <a:buNone/>
-                      </a:pPr>
-                      <a:r>
-                        <a:rPr lang="en-US" sz="950" dirty="0">
-                          <a:solidFill>
-                            <a:srgbClr val="1F2933"/>
-                          </a:solidFill>
-                          <a:latin typeface="Calibri" pitchFamily="34" charset="0"/>
-                          <a:ea typeface="Calibri" pitchFamily="34" charset="-122"/>
-                          <a:cs typeface="Calibri" pitchFamily="34" charset="-120"/>
-                        </a:rPr>
                         <a:t>S1</a:t>
                       </a:r>
                       <a:endParaRPr lang="en-US" sz="950" dirty="0">
@@ -19615,7 +19347,7 @@
                           <a:ea typeface="Calibri" pitchFamily="34" charset="-122"/>
                           <a:cs typeface="Calibri" pitchFamily="34" charset="-120"/>
                         </a:rPr>
-                        <a:t>2 530,3</a:t>
+                        <a:t>1 925,7</a:t>
                       </a:r>
                       <a:endParaRPr lang="en-US" sz="950" dirty="0">
                         <a:latin typeface="Calibri" charset="0"/>
@@ -19882,7 +19614,7 @@
                 <a:ea typeface="Calibri" pitchFamily="34" charset="-122"/>
                 <a:cs typeface="Calibri" pitchFamily="34" charset="-120"/>
               </a:rPr>
-              <a:t>1 427,7 M</a:t>
+              <a:t>823,1 M</a:t>
             </a:r>
             <a:endParaRPr lang="en-US" sz="1400" dirty="0"/>
           </a:p>
@@ -19921,7 +19653,7 @@
                 <a:ea typeface="Calibri" pitchFamily="34" charset="-122"/>
                 <a:cs typeface="Calibri" pitchFamily="34" charset="-120"/>
               </a:rPr>
-              <a:t>Un dossier par société en déficit (10), tiré par tranche : 1 256,8 M pour S1, le solde à l'échéance. Remboursement à la mise en place des financements.</a:t>
+              <a:t>Un dossier par société en déficit (9), tiré par tranche : 685,8 M pour S1, le solde à l'échéance. Remboursement à la mise en place des financements.</a:t>
             </a:r>
             <a:endParaRPr lang="en-US" sz="1100" dirty="0"/>
           </a:p>
@@ -20024,7 +19756,7 @@
                 <a:ea typeface="Calibri" pitchFamily="34" charset="-122"/>
                 <a:cs typeface="Calibri" pitchFamily="34" charset="-120"/>
               </a:rPr>
-              <a:t>2,8 M</a:t>
+              <a:t>102,7 M</a:t>
             </a:r>
             <a:endParaRPr lang="en-US" sz="1400" dirty="0"/>
           </a:p>
@@ -20063,7 +19795,7 @@
                 <a:ea typeface="Calibri" pitchFamily="34" charset="-122"/>
                 <a:cs typeface="Calibri" pitchFamily="34" charset="-120"/>
               </a:rPr>
-              <a:t>Excédents en fin S5 : INFI SOFT 2,8 M. Ils couvriraient 0 % des déficits des sociétés, avec conventions de compte courant.</a:t>
+              <a:t>Excédents en fin S5 : PICI 100,0 M, INFI SOFT 2,8 M. Ils couvriraient 12 % des déficits des sociétés, avec conventions de compte courant.</a:t>
             </a:r>
             <a:endParaRPr lang="en-US" sz="1100" dirty="0"/>
           </a:p>
@@ -20219,8 +19951,8 @@
         </p:nvSpPr>
         <p:spPr>
           <a:xfrm>
-            <a:off x="457200" y="5111496"/>
-            <a:ext cx="5760720" cy="1197864"/>
+            <a:off x="457200" y="4850892"/>
+            <a:ext cx="5760720" cy="1458468"/>
           </a:xfrm>
           <a:prstGeom prst="rect">
             <a:avLst/>
@@ -20244,8 +19976,8 @@
         </p:nvSpPr>
         <p:spPr>
           <a:xfrm>
-            <a:off x="640080" y="5202936"/>
-            <a:ext cx="5394960" cy="1033272"/>
+            <a:off x="640080" y="4942332"/>
+            <a:ext cx="5394960" cy="1293876"/>
           </a:xfrm>
           <a:prstGeom prst="rect">
             <a:avLst/>
@@ -20293,7 +20025,7 @@
                 <a:ea typeface="Calibri" pitchFamily="34" charset="-122"/>
                 <a:cs typeface="Calibri" pitchFamily="34" charset="-120"/>
               </a:rPr>
-              <a:t>Choisir la solution des sociétés en déficit (1 427,7 M) : crédit spot, avances intragroupe ou combinaison.</a:t>
+              <a:t>Choisir la solution des sociétés en déficit (823,1 M) : crédit spot, avances intragroupe ou combinaison.</a:t>
             </a:r>
             <a:endParaRPr lang="en-US" sz="1300" dirty="0"/>
           </a:p>
@@ -20721,7 +20453,7 @@
                 <a:ea typeface="Calibri" pitchFamily="34" charset="-122"/>
                 <a:cs typeface="Calibri" pitchFamily="34" charset="-120"/>
               </a:rPr>
-              <a:t>5 969,5 M</a:t>
+              <a:t>6 674,2 M</a:t>
             </a:r>
             <a:endParaRPr lang="en-US" sz="2200" dirty="0"/>
           </a:p>
@@ -20931,7 +20663,7 @@
                 <a:ea typeface="Calibri" pitchFamily="34" charset="-122"/>
                 <a:cs typeface="Calibri" pitchFamily="34" charset="-120"/>
               </a:rPr>
-              <a:t>1 509,2 M</a:t>
+              <a:t>934,7 M</a:t>
             </a:r>
             <a:endParaRPr lang="en-US" sz="2200" dirty="0"/>
           </a:p>
@@ -22295,7 +22027,7 @@
                           <a:ea typeface="Calibri" pitchFamily="34" charset="-122"/>
                           <a:cs typeface="Calibri" pitchFamily="34" charset="-120"/>
                         </a:rPr>
-                        <a:t>-308,1</a:t>
+                        <a:t>396,6</a:t>
                       </a:r>
                       <a:endParaRPr lang="en-US" sz="850" dirty="0">
                         <a:latin typeface="Calibri" charset="0"/>
@@ -22484,13 +22216,405 @@
                       <a:r>
                         <a:rPr lang="en-US" sz="850" b="1" dirty="0">
                           <a:solidFill>
+                            <a:srgbClr val="5E9B7E"/>
+                          </a:solidFill>
+                          <a:latin typeface="Calibri" pitchFamily="34" charset="0"/>
+                          <a:ea typeface="Calibri" pitchFamily="34" charset="-122"/>
+                          <a:cs typeface="Calibri" pitchFamily="34" charset="-120"/>
+                        </a:rPr>
+                        <a:t>133,7</a:t>
+                      </a:r>
+                      <a:endParaRPr lang="en-US" sz="850" dirty="0">
+                        <a:latin typeface="Calibri" charset="0"/>
+                        <a:ea typeface="Calibri" charset="0"/>
+                        <a:cs typeface="Calibri" charset="0"/>
+                      </a:endParaRPr>
+                    </a:p>
+                  </a:txBody>
+                  <a:tcPr marL="64008" marR="64008" marT="0" marB="0" anchor="ctr">
+                    <a:lnL w="6350" cap="flat" cmpd="sng" algn="ctr">
+                      <a:solidFill>
+                        <a:srgbClr val="D5DBE3"/>
+                      </a:solidFill>
+                      <a:prstDash val="solid"/>
+                      <a:round/>
+                      <a:headEnd type="none" w="med" len="med"/>
+                      <a:tailEnd type="none" w="med" len="med"/>
+                    </a:lnL>
+                    <a:lnR w="6350" cap="flat" cmpd="sng" algn="ctr">
+                      <a:solidFill>
+                        <a:srgbClr val="D5DBE3"/>
+                      </a:solidFill>
+                      <a:prstDash val="solid"/>
+                      <a:round/>
+                      <a:headEnd type="none" w="med" len="med"/>
+                      <a:tailEnd type="none" w="med" len="med"/>
+                    </a:lnR>
+                    <a:lnT w="6350" cap="flat" cmpd="sng" algn="ctr">
+                      <a:solidFill>
+                        <a:srgbClr val="D5DBE3"/>
+                      </a:solidFill>
+                      <a:prstDash val="solid"/>
+                      <a:round/>
+                      <a:headEnd type="none" w="med" len="med"/>
+                      <a:tailEnd type="none" w="med" len="med"/>
+                    </a:lnT>
+                    <a:lnB w="6350" cap="flat" cmpd="sng" algn="ctr">
+                      <a:solidFill>
+                        <a:srgbClr val="D5DBE3"/>
+                      </a:solidFill>
+                      <a:prstDash val="solid"/>
+                      <a:round/>
+                      <a:headEnd type="none" w="med" len="med"/>
+                      <a:tailEnd type="none" w="med" len="med"/>
+                    </a:lnB>
+                  </a:tcPr>
+                </a:tc>
+                <a:tc>
+                  <a:txBody>
+                    <a:bodyPr/>
+                    <a:lstStyle/>
+                    <a:p>
+                      <a:pPr algn="r" indent="0" marL="0">
+                        <a:buNone/>
+                      </a:pPr>
+                      <a:r>
+                        <a:rPr lang="en-US" sz="850" dirty="0">
+                          <a:solidFill>
+                            <a:srgbClr val="1F2933"/>
+                          </a:solidFill>
+                          <a:latin typeface="Calibri" pitchFamily="34" charset="0"/>
+                          <a:ea typeface="Calibri" pitchFamily="34" charset="-122"/>
+                          <a:cs typeface="Calibri" pitchFamily="34" charset="-120"/>
+                        </a:rPr>
+                        <a:t>–</a:t>
+                      </a:r>
+                      <a:endParaRPr lang="en-US" sz="850" dirty="0">
+                        <a:latin typeface="Calibri" charset="0"/>
+                        <a:ea typeface="Calibri" charset="0"/>
+                        <a:cs typeface="Calibri" charset="0"/>
+                      </a:endParaRPr>
+                    </a:p>
+                  </a:txBody>
+                  <a:tcPr marL="64008" marR="64008" marT="0" marB="0" anchor="ctr">
+                    <a:lnL w="6350" cap="flat" cmpd="sng" algn="ctr">
+                      <a:solidFill>
+                        <a:srgbClr val="D5DBE3"/>
+                      </a:solidFill>
+                      <a:prstDash val="solid"/>
+                      <a:round/>
+                      <a:headEnd type="none" w="med" len="med"/>
+                      <a:tailEnd type="none" w="med" len="med"/>
+                    </a:lnL>
+                    <a:lnR w="6350" cap="flat" cmpd="sng" algn="ctr">
+                      <a:solidFill>
+                        <a:srgbClr val="D5DBE3"/>
+                      </a:solidFill>
+                      <a:prstDash val="solid"/>
+                      <a:round/>
+                      <a:headEnd type="none" w="med" len="med"/>
+                      <a:tailEnd type="none" w="med" len="med"/>
+                    </a:lnR>
+                    <a:lnT w="6350" cap="flat" cmpd="sng" algn="ctr">
+                      <a:solidFill>
+                        <a:srgbClr val="D5DBE3"/>
+                      </a:solidFill>
+                      <a:prstDash val="solid"/>
+                      <a:round/>
+                      <a:headEnd type="none" w="med" len="med"/>
+                      <a:tailEnd type="none" w="med" len="med"/>
+                    </a:lnT>
+                    <a:lnB w="6350" cap="flat" cmpd="sng" algn="ctr">
+                      <a:solidFill>
+                        <a:srgbClr val="D5DBE3"/>
+                      </a:solidFill>
+                      <a:prstDash val="solid"/>
+                      <a:round/>
+                      <a:headEnd type="none" w="med" len="med"/>
+                      <a:tailEnd type="none" w="med" len="med"/>
+                    </a:lnB>
+                  </a:tcPr>
+                </a:tc>
+              </a:tr>
+              <a:tr h="224028">
+                <a:tc>
+                  <a:txBody>
+                    <a:bodyPr/>
+                    <a:lstStyle/>
+                    <a:p>
+                      <a:pPr algn="l" indent="0" marL="0">
+                        <a:buNone/>
+                      </a:pPr>
+                      <a:r>
+                        <a:rPr lang="en-US" sz="850" b="1" dirty="0">
+                          <a:solidFill>
+                            <a:srgbClr val="1F2933"/>
+                          </a:solidFill>
+                          <a:latin typeface="Calibri" pitchFamily="34" charset="0"/>
+                          <a:ea typeface="Calibri" pitchFamily="34" charset="-122"/>
+                          <a:cs typeface="Calibri" pitchFamily="34" charset="-120"/>
+                        </a:rPr>
+                        <a:t>SCI FIRST</a:t>
+                      </a:r>
+                      <a:endParaRPr lang="en-US" sz="850" dirty="0">
+                        <a:latin typeface="Calibri" charset="0"/>
+                        <a:ea typeface="Calibri" charset="0"/>
+                        <a:cs typeface="Calibri" charset="0"/>
+                      </a:endParaRPr>
+                    </a:p>
+                  </a:txBody>
+                  <a:tcPr marL="64008" marR="64008" marT="0" marB="0" anchor="ctr">
+                    <a:lnL w="6350" cap="flat" cmpd="sng" algn="ctr">
+                      <a:solidFill>
+                        <a:srgbClr val="D5DBE3"/>
+                      </a:solidFill>
+                      <a:prstDash val="solid"/>
+                      <a:round/>
+                      <a:headEnd type="none" w="med" len="med"/>
+                      <a:tailEnd type="none" w="med" len="med"/>
+                    </a:lnL>
+                    <a:lnR w="6350" cap="flat" cmpd="sng" algn="ctr">
+                      <a:solidFill>
+                        <a:srgbClr val="D5DBE3"/>
+                      </a:solidFill>
+                      <a:prstDash val="solid"/>
+                      <a:round/>
+                      <a:headEnd type="none" w="med" len="med"/>
+                      <a:tailEnd type="none" w="med" len="med"/>
+                    </a:lnR>
+                    <a:lnT w="6350" cap="flat" cmpd="sng" algn="ctr">
+                      <a:solidFill>
+                        <a:srgbClr val="D5DBE3"/>
+                      </a:solidFill>
+                      <a:prstDash val="solid"/>
+                      <a:round/>
+                      <a:headEnd type="none" w="med" len="med"/>
+                      <a:tailEnd type="none" w="med" len="med"/>
+                    </a:lnT>
+                    <a:lnB w="6350" cap="flat" cmpd="sng" algn="ctr">
+                      <a:solidFill>
+                        <a:srgbClr val="D5DBE3"/>
+                      </a:solidFill>
+                      <a:prstDash val="solid"/>
+                      <a:round/>
+                      <a:headEnd type="none" w="med" len="med"/>
+                      <a:tailEnd type="none" w="med" len="med"/>
+                    </a:lnB>
+                  </a:tcPr>
+                </a:tc>
+                <a:tc>
+                  <a:txBody>
+                    <a:bodyPr/>
+                    <a:lstStyle/>
+                    <a:p>
+                      <a:pPr algn="r" indent="0" marL="0">
+                        <a:buNone/>
+                      </a:pPr>
+                      <a:r>
+                        <a:rPr lang="en-US" sz="850" dirty="0">
+                          <a:solidFill>
+                            <a:srgbClr val="1F2933"/>
+                          </a:solidFill>
+                          <a:latin typeface="Calibri" pitchFamily="34" charset="0"/>
+                          <a:ea typeface="Calibri" pitchFamily="34" charset="-122"/>
+                          <a:cs typeface="Calibri" pitchFamily="34" charset="-120"/>
+                        </a:rPr>
+                        <a:t>236,1</a:t>
+                      </a:r>
+                      <a:endParaRPr lang="en-US" sz="850" dirty="0">
+                        <a:latin typeface="Calibri" charset="0"/>
+                        <a:ea typeface="Calibri" charset="0"/>
+                        <a:cs typeface="Calibri" charset="0"/>
+                      </a:endParaRPr>
+                    </a:p>
+                  </a:txBody>
+                  <a:tcPr marL="64008" marR="64008" marT="0" marB="0" anchor="ctr">
+                    <a:lnL w="6350" cap="flat" cmpd="sng" algn="ctr">
+                      <a:solidFill>
+                        <a:srgbClr val="D5DBE3"/>
+                      </a:solidFill>
+                      <a:prstDash val="solid"/>
+                      <a:round/>
+                      <a:headEnd type="none" w="med" len="med"/>
+                      <a:tailEnd type="none" w="med" len="med"/>
+                    </a:lnL>
+                    <a:lnR w="6350" cap="flat" cmpd="sng" algn="ctr">
+                      <a:solidFill>
+                        <a:srgbClr val="D5DBE3"/>
+                      </a:solidFill>
+                      <a:prstDash val="solid"/>
+                      <a:round/>
+                      <a:headEnd type="none" w="med" len="med"/>
+                      <a:tailEnd type="none" w="med" len="med"/>
+                    </a:lnR>
+                    <a:lnT w="6350" cap="flat" cmpd="sng" algn="ctr">
+                      <a:solidFill>
+                        <a:srgbClr val="D5DBE3"/>
+                      </a:solidFill>
+                      <a:prstDash val="solid"/>
+                      <a:round/>
+                      <a:headEnd type="none" w="med" len="med"/>
+                      <a:tailEnd type="none" w="med" len="med"/>
+                    </a:lnT>
+                    <a:lnB w="6350" cap="flat" cmpd="sng" algn="ctr">
+                      <a:solidFill>
+                        <a:srgbClr val="D5DBE3"/>
+                      </a:solidFill>
+                      <a:prstDash val="solid"/>
+                      <a:round/>
+                      <a:headEnd type="none" w="med" len="med"/>
+                      <a:tailEnd type="none" w="med" len="med"/>
+                    </a:lnB>
+                  </a:tcPr>
+                </a:tc>
+                <a:tc>
+                  <a:txBody>
+                    <a:bodyPr/>
+                    <a:lstStyle/>
+                    <a:p>
+                      <a:pPr algn="r" indent="0" marL="0">
+                        <a:buNone/>
+                      </a:pPr>
+                      <a:r>
+                        <a:rPr lang="en-US" sz="850" dirty="0">
+                          <a:solidFill>
+                            <a:srgbClr val="1F2933"/>
+                          </a:solidFill>
+                          <a:latin typeface="Calibri" pitchFamily="34" charset="0"/>
+                          <a:ea typeface="Calibri" pitchFamily="34" charset="-122"/>
+                          <a:cs typeface="Calibri" pitchFamily="34" charset="-120"/>
+                        </a:rPr>
+                        <a:t>-407,9</a:t>
+                      </a:r>
+                      <a:endParaRPr lang="en-US" sz="850" dirty="0">
+                        <a:latin typeface="Calibri" charset="0"/>
+                        <a:ea typeface="Calibri" charset="0"/>
+                        <a:cs typeface="Calibri" charset="0"/>
+                      </a:endParaRPr>
+                    </a:p>
+                  </a:txBody>
+                  <a:tcPr marL="64008" marR="64008" marT="0" marB="0" anchor="ctr">
+                    <a:lnL w="6350" cap="flat" cmpd="sng" algn="ctr">
+                      <a:solidFill>
+                        <a:srgbClr val="D5DBE3"/>
+                      </a:solidFill>
+                      <a:prstDash val="solid"/>
+                      <a:round/>
+                      <a:headEnd type="none" w="med" len="med"/>
+                      <a:tailEnd type="none" w="med" len="med"/>
+                    </a:lnL>
+                    <a:lnR w="6350" cap="flat" cmpd="sng" algn="ctr">
+                      <a:solidFill>
+                        <a:srgbClr val="D5DBE3"/>
+                      </a:solidFill>
+                      <a:prstDash val="solid"/>
+                      <a:round/>
+                      <a:headEnd type="none" w="med" len="med"/>
+                      <a:tailEnd type="none" w="med" len="med"/>
+                    </a:lnR>
+                    <a:lnT w="6350" cap="flat" cmpd="sng" algn="ctr">
+                      <a:solidFill>
+                        <a:srgbClr val="D5DBE3"/>
+                      </a:solidFill>
+                      <a:prstDash val="solid"/>
+                      <a:round/>
+                      <a:headEnd type="none" w="med" len="med"/>
+                      <a:tailEnd type="none" w="med" len="med"/>
+                    </a:lnT>
+                    <a:lnB w="6350" cap="flat" cmpd="sng" algn="ctr">
+                      <a:solidFill>
+                        <a:srgbClr val="D5DBE3"/>
+                      </a:solidFill>
+                      <a:prstDash val="solid"/>
+                      <a:round/>
+                      <a:headEnd type="none" w="med" len="med"/>
+                      <a:tailEnd type="none" w="med" len="med"/>
+                    </a:lnB>
+                  </a:tcPr>
+                </a:tc>
+                <a:tc>
+                  <a:txBody>
+                    <a:bodyPr/>
+                    <a:lstStyle/>
+                    <a:p>
+                      <a:pPr algn="r" indent="0" marL="0">
+                        <a:buNone/>
+                      </a:pPr>
+                      <a:r>
+                        <a:rPr lang="en-US" sz="850" dirty="0">
+                          <a:solidFill>
+                            <a:srgbClr val="1F2933"/>
+                          </a:solidFill>
+                          <a:latin typeface="Calibri" pitchFamily="34" charset="0"/>
+                          <a:ea typeface="Calibri" pitchFamily="34" charset="-122"/>
+                          <a:cs typeface="Calibri" pitchFamily="34" charset="-120"/>
+                        </a:rPr>
+                        <a:t>–</a:t>
+                      </a:r>
+                      <a:endParaRPr lang="en-US" sz="850" dirty="0">
+                        <a:latin typeface="Calibri" charset="0"/>
+                        <a:ea typeface="Calibri" charset="0"/>
+                        <a:cs typeface="Calibri" charset="0"/>
+                      </a:endParaRPr>
+                    </a:p>
+                  </a:txBody>
+                  <a:tcPr marL="64008" marR="64008" marT="0" marB="0" anchor="ctr">
+                    <a:lnL w="6350" cap="flat" cmpd="sng" algn="ctr">
+                      <a:solidFill>
+                        <a:srgbClr val="D5DBE3"/>
+                      </a:solidFill>
+                      <a:prstDash val="solid"/>
+                      <a:round/>
+                      <a:headEnd type="none" w="med" len="med"/>
+                      <a:tailEnd type="none" w="med" len="med"/>
+                    </a:lnL>
+                    <a:lnR w="6350" cap="flat" cmpd="sng" algn="ctr">
+                      <a:solidFill>
+                        <a:srgbClr val="D5DBE3"/>
+                      </a:solidFill>
+                      <a:prstDash val="solid"/>
+                      <a:round/>
+                      <a:headEnd type="none" w="med" len="med"/>
+                      <a:tailEnd type="none" w="med" len="med"/>
+                    </a:lnR>
+                    <a:lnT w="6350" cap="flat" cmpd="sng" algn="ctr">
+                      <a:solidFill>
+                        <a:srgbClr val="D5DBE3"/>
+                      </a:solidFill>
+                      <a:prstDash val="solid"/>
+                      <a:round/>
+                      <a:headEnd type="none" w="med" len="med"/>
+                      <a:tailEnd type="none" w="med" len="med"/>
+                    </a:lnT>
+                    <a:lnB w="6350" cap="flat" cmpd="sng" algn="ctr">
+                      <a:solidFill>
+                        <a:srgbClr val="D5DBE3"/>
+                      </a:solidFill>
+                      <a:prstDash val="solid"/>
+                      <a:round/>
+                      <a:headEnd type="none" w="med" len="med"/>
+                      <a:tailEnd type="none" w="med" len="med"/>
+                    </a:lnB>
+                  </a:tcPr>
+                </a:tc>
+                <a:tc>
+                  <a:txBody>
+                    <a:bodyPr/>
+                    <a:lstStyle/>
+                    <a:p>
+                      <a:pPr algn="r" indent="0" marL="0">
+                        <a:buNone/>
+                      </a:pPr>
+                      <a:r>
+                        <a:rPr lang="en-US" sz="850" b="1" dirty="0">
+                          <a:solidFill>
                             <a:srgbClr val="B3261E"/>
                           </a:solidFill>
                           <a:latin typeface="Calibri" pitchFamily="34" charset="0"/>
                           <a:ea typeface="Calibri" pitchFamily="34" charset="-122"/>
                           <a:cs typeface="Calibri" pitchFamily="34" charset="-120"/>
                         </a:rPr>
-                        <a:t>-571,0</a:t>
+                        <a:t>-171,8</a:t>
                       </a:r>
                       <a:endParaRPr lang="en-US" sz="850" dirty="0">
                         <a:latin typeface="Calibri" charset="0"/>
@@ -22558,7 +22682,7 @@
                           <a:ea typeface="Calibri" pitchFamily="34" charset="-122"/>
                           <a:cs typeface="Calibri" pitchFamily="34" charset="-120"/>
                         </a:rPr>
-                        <a:t>574,6</a:t>
+                        <a:t>180,2</a:t>
                       </a:r>
                       <a:endParaRPr lang="en-US" sz="850" dirty="0">
                         <a:latin typeface="Calibri" charset="0"/>
@@ -22628,7 +22752,7 @@
                           <a:ea typeface="Calibri" pitchFamily="34" charset="-122"/>
                           <a:cs typeface="Calibri" pitchFamily="34" charset="-120"/>
                         </a:rPr>
-                        <a:t>SCI FIRST</a:t>
+                        <a:t>RIVIERA PARK – projet</a:t>
                       </a:r>
                       <a:endParaRPr lang="en-US" sz="850" dirty="0">
                         <a:latin typeface="Calibri" charset="0"/>
@@ -22693,7 +22817,7 @@
                           <a:ea typeface="Calibri" pitchFamily="34" charset="-122"/>
                           <a:cs typeface="Calibri" pitchFamily="34" charset="-120"/>
                         </a:rPr>
-                        <a:t>236,1</a:t>
+                        <a:t>2 643,1</a:t>
                       </a:r>
                       <a:endParaRPr lang="en-US" sz="850" dirty="0">
                         <a:latin typeface="Calibri" charset="0"/>
@@ -22758,7 +22882,7 @@
                           <a:ea typeface="Calibri" pitchFamily="34" charset="-122"/>
                           <a:cs typeface="Calibri" pitchFamily="34" charset="-120"/>
                         </a:rPr>
-                        <a:t>-407,9</a:t>
+                        <a:t>-1 988,4</a:t>
                       </a:r>
                       <a:endParaRPr lang="en-US" sz="850" dirty="0">
                         <a:latin typeface="Calibri" charset="0"/>
@@ -22882,13 +23006,1254 @@
                       <a:r>
                         <a:rPr lang="en-US" sz="850" b="1" dirty="0">
                           <a:solidFill>
+                            <a:srgbClr val="5E9B7E"/>
+                          </a:solidFill>
+                          <a:latin typeface="Calibri" pitchFamily="34" charset="0"/>
+                          <a:ea typeface="Calibri" pitchFamily="34" charset="-122"/>
+                          <a:cs typeface="Calibri" pitchFamily="34" charset="-120"/>
+                        </a:rPr>
+                        <a:t>654,7</a:t>
+                      </a:r>
+                      <a:endParaRPr lang="en-US" sz="850" dirty="0">
+                        <a:latin typeface="Calibri" charset="0"/>
+                        <a:ea typeface="Calibri" charset="0"/>
+                        <a:cs typeface="Calibri" charset="0"/>
+                      </a:endParaRPr>
+                    </a:p>
+                  </a:txBody>
+                  <a:tcPr marL="64008" marR="64008" marT="0" marB="0" anchor="ctr">
+                    <a:lnL w="6350" cap="flat" cmpd="sng" algn="ctr">
+                      <a:solidFill>
+                        <a:srgbClr val="D5DBE3"/>
+                      </a:solidFill>
+                      <a:prstDash val="solid"/>
+                      <a:round/>
+                      <a:headEnd type="none" w="med" len="med"/>
+                      <a:tailEnd type="none" w="med" len="med"/>
+                    </a:lnL>
+                    <a:lnR w="6350" cap="flat" cmpd="sng" algn="ctr">
+                      <a:solidFill>
+                        <a:srgbClr val="D5DBE3"/>
+                      </a:solidFill>
+                      <a:prstDash val="solid"/>
+                      <a:round/>
+                      <a:headEnd type="none" w="med" len="med"/>
+                      <a:tailEnd type="none" w="med" len="med"/>
+                    </a:lnR>
+                    <a:lnT w="6350" cap="flat" cmpd="sng" algn="ctr">
+                      <a:solidFill>
+                        <a:srgbClr val="D5DBE3"/>
+                      </a:solidFill>
+                      <a:prstDash val="solid"/>
+                      <a:round/>
+                      <a:headEnd type="none" w="med" len="med"/>
+                      <a:tailEnd type="none" w="med" len="med"/>
+                    </a:lnT>
+                    <a:lnB w="6350" cap="flat" cmpd="sng" algn="ctr">
+                      <a:solidFill>
+                        <a:srgbClr val="D5DBE3"/>
+                      </a:solidFill>
+                      <a:prstDash val="solid"/>
+                      <a:round/>
+                      <a:headEnd type="none" w="med" len="med"/>
+                      <a:tailEnd type="none" w="med" len="med"/>
+                    </a:lnB>
+                  </a:tcPr>
+                </a:tc>
+                <a:tc>
+                  <a:txBody>
+                    <a:bodyPr/>
+                    <a:lstStyle/>
+                    <a:p>
+                      <a:pPr algn="r" indent="0" marL="0">
+                        <a:buNone/>
+                      </a:pPr>
+                      <a:r>
+                        <a:rPr lang="en-US" sz="850" dirty="0">
+                          <a:solidFill>
+                            <a:srgbClr val="1F2933"/>
+                          </a:solidFill>
+                          <a:latin typeface="Calibri" pitchFamily="34" charset="0"/>
+                          <a:ea typeface="Calibri" pitchFamily="34" charset="-122"/>
+                          <a:cs typeface="Calibri" pitchFamily="34" charset="-120"/>
+                        </a:rPr>
+                        <a:t>–</a:t>
+                      </a:r>
+                      <a:endParaRPr lang="en-US" sz="850" dirty="0">
+                        <a:latin typeface="Calibri" charset="0"/>
+                        <a:ea typeface="Calibri" charset="0"/>
+                        <a:cs typeface="Calibri" charset="0"/>
+                      </a:endParaRPr>
+                    </a:p>
+                  </a:txBody>
+                  <a:tcPr marL="64008" marR="64008" marT="0" marB="0" anchor="ctr">
+                    <a:lnL w="6350" cap="flat" cmpd="sng" algn="ctr">
+                      <a:solidFill>
+                        <a:srgbClr val="D5DBE3"/>
+                      </a:solidFill>
+                      <a:prstDash val="solid"/>
+                      <a:round/>
+                      <a:headEnd type="none" w="med" len="med"/>
+                      <a:tailEnd type="none" w="med" len="med"/>
+                    </a:lnL>
+                    <a:lnR w="6350" cap="flat" cmpd="sng" algn="ctr">
+                      <a:solidFill>
+                        <a:srgbClr val="D5DBE3"/>
+                      </a:solidFill>
+                      <a:prstDash val="solid"/>
+                      <a:round/>
+                      <a:headEnd type="none" w="med" len="med"/>
+                      <a:tailEnd type="none" w="med" len="med"/>
+                    </a:lnR>
+                    <a:lnT w="6350" cap="flat" cmpd="sng" algn="ctr">
+                      <a:solidFill>
+                        <a:srgbClr val="D5DBE3"/>
+                      </a:solidFill>
+                      <a:prstDash val="solid"/>
+                      <a:round/>
+                      <a:headEnd type="none" w="med" len="med"/>
+                      <a:tailEnd type="none" w="med" len="med"/>
+                    </a:lnT>
+                    <a:lnB w="6350" cap="flat" cmpd="sng" algn="ctr">
+                      <a:solidFill>
+                        <a:srgbClr val="D5DBE3"/>
+                      </a:solidFill>
+                      <a:prstDash val="solid"/>
+                      <a:round/>
+                      <a:headEnd type="none" w="med" len="med"/>
+                      <a:tailEnd type="none" w="med" len="med"/>
+                    </a:lnB>
+                  </a:tcPr>
+                </a:tc>
+              </a:tr>
+              <a:tr h="224028">
+                <a:tc>
+                  <a:txBody>
+                    <a:bodyPr/>
+                    <a:lstStyle/>
+                    <a:p>
+                      <a:pPr algn="l" indent="0" marL="0">
+                        <a:buNone/>
+                      </a:pPr>
+                      <a:r>
+                        <a:rPr lang="en-US" sz="850" b="1" dirty="0">
+                          <a:solidFill>
+                            <a:srgbClr val="1F2933"/>
+                          </a:solidFill>
+                          <a:latin typeface="Calibri" pitchFamily="34" charset="0"/>
+                          <a:ea typeface="Calibri" pitchFamily="34" charset="-122"/>
+                          <a:cs typeface="Calibri" pitchFamily="34" charset="-120"/>
+                        </a:rPr>
+                        <a:t>RIVIERA PARK – BNI courant (à arbitrer)</a:t>
+                      </a:r>
+                      <a:endParaRPr lang="en-US" sz="850" dirty="0">
+                        <a:latin typeface="Calibri" charset="0"/>
+                        <a:ea typeface="Calibri" charset="0"/>
+                        <a:cs typeface="Calibri" charset="0"/>
+                      </a:endParaRPr>
+                    </a:p>
+                  </a:txBody>
+                  <a:tcPr marL="64008" marR="64008" marT="0" marB="0" anchor="ctr">
+                    <a:lnL w="6350" cap="flat" cmpd="sng" algn="ctr">
+                      <a:solidFill>
+                        <a:srgbClr val="D5DBE3"/>
+                      </a:solidFill>
+                      <a:prstDash val="solid"/>
+                      <a:round/>
+                      <a:headEnd type="none" w="med" len="med"/>
+                      <a:tailEnd type="none" w="med" len="med"/>
+                    </a:lnL>
+                    <a:lnR w="6350" cap="flat" cmpd="sng" algn="ctr">
+                      <a:solidFill>
+                        <a:srgbClr val="D5DBE3"/>
+                      </a:solidFill>
+                      <a:prstDash val="solid"/>
+                      <a:round/>
+                      <a:headEnd type="none" w="med" len="med"/>
+                      <a:tailEnd type="none" w="med" len="med"/>
+                    </a:lnR>
+                    <a:lnT w="6350" cap="flat" cmpd="sng" algn="ctr">
+                      <a:solidFill>
+                        <a:srgbClr val="D5DBE3"/>
+                      </a:solidFill>
+                      <a:prstDash val="solid"/>
+                      <a:round/>
+                      <a:headEnd type="none" w="med" len="med"/>
+                      <a:tailEnd type="none" w="med" len="med"/>
+                    </a:lnT>
+                    <a:lnB w="6350" cap="flat" cmpd="sng" algn="ctr">
+                      <a:solidFill>
+                        <a:srgbClr val="D5DBE3"/>
+                      </a:solidFill>
+                      <a:prstDash val="solid"/>
+                      <a:round/>
+                      <a:headEnd type="none" w="med" len="med"/>
+                      <a:tailEnd type="none" w="med" len="med"/>
+                    </a:lnB>
+                  </a:tcPr>
+                </a:tc>
+                <a:tc>
+                  <a:txBody>
+                    <a:bodyPr/>
+                    <a:lstStyle/>
+                    <a:p>
+                      <a:pPr algn="r" indent="0" marL="0">
+                        <a:buNone/>
+                      </a:pPr>
+                      <a:r>
+                        <a:rPr lang="en-US" sz="850" dirty="0">
+                          <a:solidFill>
+                            <a:srgbClr val="1F2933"/>
+                          </a:solidFill>
+                          <a:latin typeface="Calibri" pitchFamily="34" charset="0"/>
+                          <a:ea typeface="Calibri" pitchFamily="34" charset="-122"/>
+                          <a:cs typeface="Calibri" pitchFamily="34" charset="-120"/>
+                        </a:rPr>
+                        <a:t>1 772,0</a:t>
+                      </a:r>
+                      <a:endParaRPr lang="en-US" sz="850" dirty="0">
+                        <a:latin typeface="Calibri" charset="0"/>
+                        <a:ea typeface="Calibri" charset="0"/>
+                        <a:cs typeface="Calibri" charset="0"/>
+                      </a:endParaRPr>
+                    </a:p>
+                  </a:txBody>
+                  <a:tcPr marL="64008" marR="64008" marT="0" marB="0" anchor="ctr">
+                    <a:lnL w="6350" cap="flat" cmpd="sng" algn="ctr">
+                      <a:solidFill>
+                        <a:srgbClr val="D5DBE3"/>
+                      </a:solidFill>
+                      <a:prstDash val="solid"/>
+                      <a:round/>
+                      <a:headEnd type="none" w="med" len="med"/>
+                      <a:tailEnd type="none" w="med" len="med"/>
+                    </a:lnL>
+                    <a:lnR w="6350" cap="flat" cmpd="sng" algn="ctr">
+                      <a:solidFill>
+                        <a:srgbClr val="D5DBE3"/>
+                      </a:solidFill>
+                      <a:prstDash val="solid"/>
+                      <a:round/>
+                      <a:headEnd type="none" w="med" len="med"/>
+                      <a:tailEnd type="none" w="med" len="med"/>
+                    </a:lnR>
+                    <a:lnT w="6350" cap="flat" cmpd="sng" algn="ctr">
+                      <a:solidFill>
+                        <a:srgbClr val="D5DBE3"/>
+                      </a:solidFill>
+                      <a:prstDash val="solid"/>
+                      <a:round/>
+                      <a:headEnd type="none" w="med" len="med"/>
+                      <a:tailEnd type="none" w="med" len="med"/>
+                    </a:lnT>
+                    <a:lnB w="6350" cap="flat" cmpd="sng" algn="ctr">
+                      <a:solidFill>
+                        <a:srgbClr val="D5DBE3"/>
+                      </a:solidFill>
+                      <a:prstDash val="solid"/>
+                      <a:round/>
+                      <a:headEnd type="none" w="med" len="med"/>
+                      <a:tailEnd type="none" w="med" len="med"/>
+                    </a:lnB>
+                  </a:tcPr>
+                </a:tc>
+                <a:tc>
+                  <a:txBody>
+                    <a:bodyPr/>
+                    <a:lstStyle/>
+                    <a:p>
+                      <a:pPr algn="r" indent="0" marL="0">
+                        <a:buNone/>
+                      </a:pPr>
+                      <a:r>
+                        <a:rPr lang="en-US" sz="850" dirty="0">
+                          <a:solidFill>
+                            <a:srgbClr val="1F2933"/>
+                          </a:solidFill>
+                          <a:latin typeface="Calibri" pitchFamily="34" charset="0"/>
+                          <a:ea typeface="Calibri" pitchFamily="34" charset="-122"/>
+                          <a:cs typeface="Calibri" pitchFamily="34" charset="-120"/>
+                        </a:rPr>
+                        <a:t>–</a:t>
+                      </a:r>
+                      <a:endParaRPr lang="en-US" sz="850" dirty="0">
+                        <a:latin typeface="Calibri" charset="0"/>
+                        <a:ea typeface="Calibri" charset="0"/>
+                        <a:cs typeface="Calibri" charset="0"/>
+                      </a:endParaRPr>
+                    </a:p>
+                  </a:txBody>
+                  <a:tcPr marL="64008" marR="64008" marT="0" marB="0" anchor="ctr">
+                    <a:lnL w="6350" cap="flat" cmpd="sng" algn="ctr">
+                      <a:solidFill>
+                        <a:srgbClr val="D5DBE3"/>
+                      </a:solidFill>
+                      <a:prstDash val="solid"/>
+                      <a:round/>
+                      <a:headEnd type="none" w="med" len="med"/>
+                      <a:tailEnd type="none" w="med" len="med"/>
+                    </a:lnL>
+                    <a:lnR w="6350" cap="flat" cmpd="sng" algn="ctr">
+                      <a:solidFill>
+                        <a:srgbClr val="D5DBE3"/>
+                      </a:solidFill>
+                      <a:prstDash val="solid"/>
+                      <a:round/>
+                      <a:headEnd type="none" w="med" len="med"/>
+                      <a:tailEnd type="none" w="med" len="med"/>
+                    </a:lnR>
+                    <a:lnT w="6350" cap="flat" cmpd="sng" algn="ctr">
+                      <a:solidFill>
+                        <a:srgbClr val="D5DBE3"/>
+                      </a:solidFill>
+                      <a:prstDash val="solid"/>
+                      <a:round/>
+                      <a:headEnd type="none" w="med" len="med"/>
+                      <a:tailEnd type="none" w="med" len="med"/>
+                    </a:lnT>
+                    <a:lnB w="6350" cap="flat" cmpd="sng" algn="ctr">
+                      <a:solidFill>
+                        <a:srgbClr val="D5DBE3"/>
+                      </a:solidFill>
+                      <a:prstDash val="solid"/>
+                      <a:round/>
+                      <a:headEnd type="none" w="med" len="med"/>
+                      <a:tailEnd type="none" w="med" len="med"/>
+                    </a:lnB>
+                  </a:tcPr>
+                </a:tc>
+                <a:tc>
+                  <a:txBody>
+                    <a:bodyPr/>
+                    <a:lstStyle/>
+                    <a:p>
+                      <a:pPr algn="r" indent="0" marL="0">
+                        <a:buNone/>
+                      </a:pPr>
+                      <a:r>
+                        <a:rPr lang="en-US" sz="850" dirty="0">
+                          <a:solidFill>
+                            <a:srgbClr val="1F2933"/>
+                          </a:solidFill>
+                          <a:latin typeface="Calibri" pitchFamily="34" charset="0"/>
+                          <a:ea typeface="Calibri" pitchFamily="34" charset="-122"/>
+                          <a:cs typeface="Calibri" pitchFamily="34" charset="-120"/>
+                        </a:rPr>
+                        <a:t>-500,0</a:t>
+                      </a:r>
+                      <a:endParaRPr lang="en-US" sz="850" dirty="0">
+                        <a:latin typeface="Calibri" charset="0"/>
+                        <a:ea typeface="Calibri" charset="0"/>
+                        <a:cs typeface="Calibri" charset="0"/>
+                      </a:endParaRPr>
+                    </a:p>
+                  </a:txBody>
+                  <a:tcPr marL="64008" marR="64008" marT="0" marB="0" anchor="ctr">
+                    <a:lnL w="6350" cap="flat" cmpd="sng" algn="ctr">
+                      <a:solidFill>
+                        <a:srgbClr val="D5DBE3"/>
+                      </a:solidFill>
+                      <a:prstDash val="solid"/>
+                      <a:round/>
+                      <a:headEnd type="none" w="med" len="med"/>
+                      <a:tailEnd type="none" w="med" len="med"/>
+                    </a:lnL>
+                    <a:lnR w="6350" cap="flat" cmpd="sng" algn="ctr">
+                      <a:solidFill>
+                        <a:srgbClr val="D5DBE3"/>
+                      </a:solidFill>
+                      <a:prstDash val="solid"/>
+                      <a:round/>
+                      <a:headEnd type="none" w="med" len="med"/>
+                      <a:tailEnd type="none" w="med" len="med"/>
+                    </a:lnR>
+                    <a:lnT w="6350" cap="flat" cmpd="sng" algn="ctr">
+                      <a:solidFill>
+                        <a:srgbClr val="D5DBE3"/>
+                      </a:solidFill>
+                      <a:prstDash val="solid"/>
+                      <a:round/>
+                      <a:headEnd type="none" w="med" len="med"/>
+                      <a:tailEnd type="none" w="med" len="med"/>
+                    </a:lnT>
+                    <a:lnB w="6350" cap="flat" cmpd="sng" algn="ctr">
+                      <a:solidFill>
+                        <a:srgbClr val="D5DBE3"/>
+                      </a:solidFill>
+                      <a:prstDash val="solid"/>
+                      <a:round/>
+                      <a:headEnd type="none" w="med" len="med"/>
+                      <a:tailEnd type="none" w="med" len="med"/>
+                    </a:lnB>
+                  </a:tcPr>
+                </a:tc>
+                <a:tc>
+                  <a:txBody>
+                    <a:bodyPr/>
+                    <a:lstStyle/>
+                    <a:p>
+                      <a:pPr algn="r" indent="0" marL="0">
+                        <a:buNone/>
+                      </a:pPr>
+                      <a:r>
+                        <a:rPr lang="en-US" sz="850" b="1" dirty="0">
+                          <a:solidFill>
+                            <a:srgbClr val="5E9B7E"/>
+                          </a:solidFill>
+                          <a:latin typeface="Calibri" pitchFamily="34" charset="0"/>
+                          <a:ea typeface="Calibri" pitchFamily="34" charset="-122"/>
+                          <a:cs typeface="Calibri" pitchFamily="34" charset="-120"/>
+                        </a:rPr>
+                        <a:t>1 272,0</a:t>
+                      </a:r>
+                      <a:endParaRPr lang="en-US" sz="850" dirty="0">
+                        <a:latin typeface="Calibri" charset="0"/>
+                        <a:ea typeface="Calibri" charset="0"/>
+                        <a:cs typeface="Calibri" charset="0"/>
+                      </a:endParaRPr>
+                    </a:p>
+                  </a:txBody>
+                  <a:tcPr marL="64008" marR="64008" marT="0" marB="0" anchor="ctr">
+                    <a:lnL w="6350" cap="flat" cmpd="sng" algn="ctr">
+                      <a:solidFill>
+                        <a:srgbClr val="D5DBE3"/>
+                      </a:solidFill>
+                      <a:prstDash val="solid"/>
+                      <a:round/>
+                      <a:headEnd type="none" w="med" len="med"/>
+                      <a:tailEnd type="none" w="med" len="med"/>
+                    </a:lnL>
+                    <a:lnR w="6350" cap="flat" cmpd="sng" algn="ctr">
+                      <a:solidFill>
+                        <a:srgbClr val="D5DBE3"/>
+                      </a:solidFill>
+                      <a:prstDash val="solid"/>
+                      <a:round/>
+                      <a:headEnd type="none" w="med" len="med"/>
+                      <a:tailEnd type="none" w="med" len="med"/>
+                    </a:lnR>
+                    <a:lnT w="6350" cap="flat" cmpd="sng" algn="ctr">
+                      <a:solidFill>
+                        <a:srgbClr val="D5DBE3"/>
+                      </a:solidFill>
+                      <a:prstDash val="solid"/>
+                      <a:round/>
+                      <a:headEnd type="none" w="med" len="med"/>
+                      <a:tailEnd type="none" w="med" len="med"/>
+                    </a:lnT>
+                    <a:lnB w="6350" cap="flat" cmpd="sng" algn="ctr">
+                      <a:solidFill>
+                        <a:srgbClr val="D5DBE3"/>
+                      </a:solidFill>
+                      <a:prstDash val="solid"/>
+                      <a:round/>
+                      <a:headEnd type="none" w="med" len="med"/>
+                      <a:tailEnd type="none" w="med" len="med"/>
+                    </a:lnB>
+                  </a:tcPr>
+                </a:tc>
+                <a:tc>
+                  <a:txBody>
+                    <a:bodyPr/>
+                    <a:lstStyle/>
+                    <a:p>
+                      <a:pPr algn="r" indent="0" marL="0">
+                        <a:buNone/>
+                      </a:pPr>
+                      <a:r>
+                        <a:rPr lang="en-US" sz="850" dirty="0">
+                          <a:solidFill>
+                            <a:srgbClr val="1F2933"/>
+                          </a:solidFill>
+                          <a:latin typeface="Calibri" pitchFamily="34" charset="0"/>
+                          <a:ea typeface="Calibri" pitchFamily="34" charset="-122"/>
+                          <a:cs typeface="Calibri" pitchFamily="34" charset="-120"/>
+                        </a:rPr>
+                        <a:t>–</a:t>
+                      </a:r>
+                      <a:endParaRPr lang="en-US" sz="850" dirty="0">
+                        <a:latin typeface="Calibri" charset="0"/>
+                        <a:ea typeface="Calibri" charset="0"/>
+                        <a:cs typeface="Calibri" charset="0"/>
+                      </a:endParaRPr>
+                    </a:p>
+                  </a:txBody>
+                  <a:tcPr marL="64008" marR="64008" marT="0" marB="0" anchor="ctr">
+                    <a:lnL w="6350" cap="flat" cmpd="sng" algn="ctr">
+                      <a:solidFill>
+                        <a:srgbClr val="D5DBE3"/>
+                      </a:solidFill>
+                      <a:prstDash val="solid"/>
+                      <a:round/>
+                      <a:headEnd type="none" w="med" len="med"/>
+                      <a:tailEnd type="none" w="med" len="med"/>
+                    </a:lnL>
+                    <a:lnR w="6350" cap="flat" cmpd="sng" algn="ctr">
+                      <a:solidFill>
+                        <a:srgbClr val="D5DBE3"/>
+                      </a:solidFill>
+                      <a:prstDash val="solid"/>
+                      <a:round/>
+                      <a:headEnd type="none" w="med" len="med"/>
+                      <a:tailEnd type="none" w="med" len="med"/>
+                    </a:lnR>
+                    <a:lnT w="6350" cap="flat" cmpd="sng" algn="ctr">
+                      <a:solidFill>
+                        <a:srgbClr val="D5DBE3"/>
+                      </a:solidFill>
+                      <a:prstDash val="solid"/>
+                      <a:round/>
+                      <a:headEnd type="none" w="med" len="med"/>
+                      <a:tailEnd type="none" w="med" len="med"/>
+                    </a:lnT>
+                    <a:lnB w="6350" cap="flat" cmpd="sng" algn="ctr">
+                      <a:solidFill>
+                        <a:srgbClr val="D5DBE3"/>
+                      </a:solidFill>
+                      <a:prstDash val="solid"/>
+                      <a:round/>
+                      <a:headEnd type="none" w="med" len="med"/>
+                      <a:tailEnd type="none" w="med" len="med"/>
+                    </a:lnB>
+                  </a:tcPr>
+                </a:tc>
+              </a:tr>
+              <a:tr h="224028">
+                <a:tc>
+                  <a:txBody>
+                    <a:bodyPr/>
+                    <a:lstStyle/>
+                    <a:p>
+                      <a:pPr algn="l" indent="0" marL="0">
+                        <a:buNone/>
+                      </a:pPr>
+                      <a:r>
+                        <a:rPr lang="en-US" sz="850" b="1" dirty="0">
+                          <a:solidFill>
+                            <a:srgbClr val="1F2933"/>
+                          </a:solidFill>
+                          <a:latin typeface="Calibri" pitchFamily="34" charset="0"/>
+                          <a:ea typeface="Calibri" pitchFamily="34" charset="-122"/>
+                          <a:cs typeface="Calibri" pitchFamily="34" charset="-120"/>
+                        </a:rPr>
+                        <a:t>RIVIERA PARK</a:t>
+                      </a:r>
+                      <a:endParaRPr lang="en-US" sz="850" dirty="0">
+                        <a:latin typeface="Calibri" charset="0"/>
+                        <a:ea typeface="Calibri" charset="0"/>
+                        <a:cs typeface="Calibri" charset="0"/>
+                      </a:endParaRPr>
+                    </a:p>
+                  </a:txBody>
+                  <a:tcPr marL="64008" marR="64008" marT="0" marB="0" anchor="ctr">
+                    <a:lnL w="6350" cap="flat" cmpd="sng" algn="ctr">
+                      <a:solidFill>
+                        <a:srgbClr val="D5DBE3"/>
+                      </a:solidFill>
+                      <a:prstDash val="solid"/>
+                      <a:round/>
+                      <a:headEnd type="none" w="med" len="med"/>
+                      <a:tailEnd type="none" w="med" len="med"/>
+                    </a:lnL>
+                    <a:lnR w="6350" cap="flat" cmpd="sng" algn="ctr">
+                      <a:solidFill>
+                        <a:srgbClr val="D5DBE3"/>
+                      </a:solidFill>
+                      <a:prstDash val="solid"/>
+                      <a:round/>
+                      <a:headEnd type="none" w="med" len="med"/>
+                      <a:tailEnd type="none" w="med" len="med"/>
+                    </a:lnR>
+                    <a:lnT w="6350" cap="flat" cmpd="sng" algn="ctr">
+                      <a:solidFill>
+                        <a:srgbClr val="D5DBE3"/>
+                      </a:solidFill>
+                      <a:prstDash val="solid"/>
+                      <a:round/>
+                      <a:headEnd type="none" w="med" len="med"/>
+                      <a:tailEnd type="none" w="med" len="med"/>
+                    </a:lnT>
+                    <a:lnB w="6350" cap="flat" cmpd="sng" algn="ctr">
+                      <a:solidFill>
+                        <a:srgbClr val="D5DBE3"/>
+                      </a:solidFill>
+                      <a:prstDash val="solid"/>
+                      <a:round/>
+                      <a:headEnd type="none" w="med" len="med"/>
+                      <a:tailEnd type="none" w="med" len="med"/>
+                    </a:lnB>
+                  </a:tcPr>
+                </a:tc>
+                <a:tc>
+                  <a:txBody>
+                    <a:bodyPr/>
+                    <a:lstStyle/>
+                    <a:p>
+                      <a:pPr algn="r" indent="0" marL="0">
+                        <a:buNone/>
+                      </a:pPr>
+                      <a:r>
+                        <a:rPr lang="en-US" sz="850" dirty="0">
+                          <a:solidFill>
+                            <a:srgbClr val="1F2933"/>
+                          </a:solidFill>
+                          <a:latin typeface="Calibri" pitchFamily="34" charset="0"/>
+                          <a:ea typeface="Calibri" pitchFamily="34" charset="-122"/>
+                          <a:cs typeface="Calibri" pitchFamily="34" charset="-120"/>
+                        </a:rPr>
+                        <a:t>1,5</a:t>
+                      </a:r>
+                      <a:endParaRPr lang="en-US" sz="850" dirty="0">
+                        <a:latin typeface="Calibri" charset="0"/>
+                        <a:ea typeface="Calibri" charset="0"/>
+                        <a:cs typeface="Calibri" charset="0"/>
+                      </a:endParaRPr>
+                    </a:p>
+                  </a:txBody>
+                  <a:tcPr marL="64008" marR="64008" marT="0" marB="0" anchor="ctr">
+                    <a:lnL w="6350" cap="flat" cmpd="sng" algn="ctr">
+                      <a:solidFill>
+                        <a:srgbClr val="D5DBE3"/>
+                      </a:solidFill>
+                      <a:prstDash val="solid"/>
+                      <a:round/>
+                      <a:headEnd type="none" w="med" len="med"/>
+                      <a:tailEnd type="none" w="med" len="med"/>
+                    </a:lnL>
+                    <a:lnR w="6350" cap="flat" cmpd="sng" algn="ctr">
+                      <a:solidFill>
+                        <a:srgbClr val="D5DBE3"/>
+                      </a:solidFill>
+                      <a:prstDash val="solid"/>
+                      <a:round/>
+                      <a:headEnd type="none" w="med" len="med"/>
+                      <a:tailEnd type="none" w="med" len="med"/>
+                    </a:lnR>
+                    <a:lnT w="6350" cap="flat" cmpd="sng" algn="ctr">
+                      <a:solidFill>
+                        <a:srgbClr val="D5DBE3"/>
+                      </a:solidFill>
+                      <a:prstDash val="solid"/>
+                      <a:round/>
+                      <a:headEnd type="none" w="med" len="med"/>
+                      <a:tailEnd type="none" w="med" len="med"/>
+                    </a:lnT>
+                    <a:lnB w="6350" cap="flat" cmpd="sng" algn="ctr">
+                      <a:solidFill>
+                        <a:srgbClr val="D5DBE3"/>
+                      </a:solidFill>
+                      <a:prstDash val="solid"/>
+                      <a:round/>
+                      <a:headEnd type="none" w="med" len="med"/>
+                      <a:tailEnd type="none" w="med" len="med"/>
+                    </a:lnB>
+                  </a:tcPr>
+                </a:tc>
+                <a:tc>
+                  <a:txBody>
+                    <a:bodyPr/>
+                    <a:lstStyle/>
+                    <a:p>
+                      <a:pPr algn="r" indent="0" marL="0">
+                        <a:buNone/>
+                      </a:pPr>
+                      <a:r>
+                        <a:rPr lang="en-US" sz="850" dirty="0">
+                          <a:solidFill>
+                            <a:srgbClr val="1F2933"/>
+                          </a:solidFill>
+                          <a:latin typeface="Calibri" pitchFamily="34" charset="0"/>
+                          <a:ea typeface="Calibri" pitchFamily="34" charset="-122"/>
+                          <a:cs typeface="Calibri" pitchFamily="34" charset="-120"/>
+                        </a:rPr>
+                        <a:t>-88,5</a:t>
+                      </a:r>
+                      <a:endParaRPr lang="en-US" sz="850" dirty="0">
+                        <a:latin typeface="Calibri" charset="0"/>
+                        <a:ea typeface="Calibri" charset="0"/>
+                        <a:cs typeface="Calibri" charset="0"/>
+                      </a:endParaRPr>
+                    </a:p>
+                  </a:txBody>
+                  <a:tcPr marL="64008" marR="64008" marT="0" marB="0" anchor="ctr">
+                    <a:lnL w="6350" cap="flat" cmpd="sng" algn="ctr">
+                      <a:solidFill>
+                        <a:srgbClr val="D5DBE3"/>
+                      </a:solidFill>
+                      <a:prstDash val="solid"/>
+                      <a:round/>
+                      <a:headEnd type="none" w="med" len="med"/>
+                      <a:tailEnd type="none" w="med" len="med"/>
+                    </a:lnL>
+                    <a:lnR w="6350" cap="flat" cmpd="sng" algn="ctr">
+                      <a:solidFill>
+                        <a:srgbClr val="D5DBE3"/>
+                      </a:solidFill>
+                      <a:prstDash val="solid"/>
+                      <a:round/>
+                      <a:headEnd type="none" w="med" len="med"/>
+                      <a:tailEnd type="none" w="med" len="med"/>
+                    </a:lnR>
+                    <a:lnT w="6350" cap="flat" cmpd="sng" algn="ctr">
+                      <a:solidFill>
+                        <a:srgbClr val="D5DBE3"/>
+                      </a:solidFill>
+                      <a:prstDash val="solid"/>
+                      <a:round/>
+                      <a:headEnd type="none" w="med" len="med"/>
+                      <a:tailEnd type="none" w="med" len="med"/>
+                    </a:lnT>
+                    <a:lnB w="6350" cap="flat" cmpd="sng" algn="ctr">
+                      <a:solidFill>
+                        <a:srgbClr val="D5DBE3"/>
+                      </a:solidFill>
+                      <a:prstDash val="solid"/>
+                      <a:round/>
+                      <a:headEnd type="none" w="med" len="med"/>
+                      <a:tailEnd type="none" w="med" len="med"/>
+                    </a:lnB>
+                  </a:tcPr>
+                </a:tc>
+                <a:tc>
+                  <a:txBody>
+                    <a:bodyPr/>
+                    <a:lstStyle/>
+                    <a:p>
+                      <a:pPr algn="r" indent="0" marL="0">
+                        <a:buNone/>
+                      </a:pPr>
+                      <a:r>
+                        <a:rPr lang="en-US" sz="850" dirty="0">
+                          <a:solidFill>
+                            <a:srgbClr val="1F2933"/>
+                          </a:solidFill>
+                          <a:latin typeface="Calibri" pitchFamily="34" charset="0"/>
+                          <a:ea typeface="Calibri" pitchFamily="34" charset="-122"/>
+                          <a:cs typeface="Calibri" pitchFamily="34" charset="-120"/>
+                        </a:rPr>
+                        <a:t>500,0</a:t>
+                      </a:r>
+                      <a:endParaRPr lang="en-US" sz="850" dirty="0">
+                        <a:latin typeface="Calibri" charset="0"/>
+                        <a:ea typeface="Calibri" charset="0"/>
+                        <a:cs typeface="Calibri" charset="0"/>
+                      </a:endParaRPr>
+                    </a:p>
+                  </a:txBody>
+                  <a:tcPr marL="64008" marR="64008" marT="0" marB="0" anchor="ctr">
+                    <a:lnL w="6350" cap="flat" cmpd="sng" algn="ctr">
+                      <a:solidFill>
+                        <a:srgbClr val="D5DBE3"/>
+                      </a:solidFill>
+                      <a:prstDash val="solid"/>
+                      <a:round/>
+                      <a:headEnd type="none" w="med" len="med"/>
+                      <a:tailEnd type="none" w="med" len="med"/>
+                    </a:lnL>
+                    <a:lnR w="6350" cap="flat" cmpd="sng" algn="ctr">
+                      <a:solidFill>
+                        <a:srgbClr val="D5DBE3"/>
+                      </a:solidFill>
+                      <a:prstDash val="solid"/>
+                      <a:round/>
+                      <a:headEnd type="none" w="med" len="med"/>
+                      <a:tailEnd type="none" w="med" len="med"/>
+                    </a:lnR>
+                    <a:lnT w="6350" cap="flat" cmpd="sng" algn="ctr">
+                      <a:solidFill>
+                        <a:srgbClr val="D5DBE3"/>
+                      </a:solidFill>
+                      <a:prstDash val="solid"/>
+                      <a:round/>
+                      <a:headEnd type="none" w="med" len="med"/>
+                      <a:tailEnd type="none" w="med" len="med"/>
+                    </a:lnT>
+                    <a:lnB w="6350" cap="flat" cmpd="sng" algn="ctr">
+                      <a:solidFill>
+                        <a:srgbClr val="D5DBE3"/>
+                      </a:solidFill>
+                      <a:prstDash val="solid"/>
+                      <a:round/>
+                      <a:headEnd type="none" w="med" len="med"/>
+                      <a:tailEnd type="none" w="med" len="med"/>
+                    </a:lnB>
+                  </a:tcPr>
+                </a:tc>
+                <a:tc>
+                  <a:txBody>
+                    <a:bodyPr/>
+                    <a:lstStyle/>
+                    <a:p>
+                      <a:pPr algn="r" indent="0" marL="0">
+                        <a:buNone/>
+                      </a:pPr>
+                      <a:r>
+                        <a:rPr lang="en-US" sz="850" b="1" dirty="0">
+                          <a:solidFill>
+                            <a:srgbClr val="5E9B7E"/>
+                          </a:solidFill>
+                          <a:latin typeface="Calibri" pitchFamily="34" charset="0"/>
+                          <a:ea typeface="Calibri" pitchFamily="34" charset="-122"/>
+                          <a:cs typeface="Calibri" pitchFamily="34" charset="-120"/>
+                        </a:rPr>
+                        <a:t>412,9</a:t>
+                      </a:r>
+                      <a:endParaRPr lang="en-US" sz="850" dirty="0">
+                        <a:latin typeface="Calibri" charset="0"/>
+                        <a:ea typeface="Calibri" charset="0"/>
+                        <a:cs typeface="Calibri" charset="0"/>
+                      </a:endParaRPr>
+                    </a:p>
+                  </a:txBody>
+                  <a:tcPr marL="64008" marR="64008" marT="0" marB="0" anchor="ctr">
+                    <a:lnL w="6350" cap="flat" cmpd="sng" algn="ctr">
+                      <a:solidFill>
+                        <a:srgbClr val="D5DBE3"/>
+                      </a:solidFill>
+                      <a:prstDash val="solid"/>
+                      <a:round/>
+                      <a:headEnd type="none" w="med" len="med"/>
+                      <a:tailEnd type="none" w="med" len="med"/>
+                    </a:lnL>
+                    <a:lnR w="6350" cap="flat" cmpd="sng" algn="ctr">
+                      <a:solidFill>
+                        <a:srgbClr val="D5DBE3"/>
+                      </a:solidFill>
+                      <a:prstDash val="solid"/>
+                      <a:round/>
+                      <a:headEnd type="none" w="med" len="med"/>
+                      <a:tailEnd type="none" w="med" len="med"/>
+                    </a:lnR>
+                    <a:lnT w="6350" cap="flat" cmpd="sng" algn="ctr">
+                      <a:solidFill>
+                        <a:srgbClr val="D5DBE3"/>
+                      </a:solidFill>
+                      <a:prstDash val="solid"/>
+                      <a:round/>
+                      <a:headEnd type="none" w="med" len="med"/>
+                      <a:tailEnd type="none" w="med" len="med"/>
+                    </a:lnT>
+                    <a:lnB w="6350" cap="flat" cmpd="sng" algn="ctr">
+                      <a:solidFill>
+                        <a:srgbClr val="D5DBE3"/>
+                      </a:solidFill>
+                      <a:prstDash val="solid"/>
+                      <a:round/>
+                      <a:headEnd type="none" w="med" len="med"/>
+                      <a:tailEnd type="none" w="med" len="med"/>
+                    </a:lnB>
+                  </a:tcPr>
+                </a:tc>
+                <a:tc>
+                  <a:txBody>
+                    <a:bodyPr/>
+                    <a:lstStyle/>
+                    <a:p>
+                      <a:pPr algn="r" indent="0" marL="0">
+                        <a:buNone/>
+                      </a:pPr>
+                      <a:r>
+                        <a:rPr lang="en-US" sz="850" dirty="0">
+                          <a:solidFill>
+                            <a:srgbClr val="1F2933"/>
+                          </a:solidFill>
+                          <a:latin typeface="Calibri" pitchFamily="34" charset="0"/>
+                          <a:ea typeface="Calibri" pitchFamily="34" charset="-122"/>
+                          <a:cs typeface="Calibri" pitchFamily="34" charset="-120"/>
+                        </a:rPr>
+                        <a:t>–</a:t>
+                      </a:r>
+                      <a:endParaRPr lang="en-US" sz="850" dirty="0">
+                        <a:latin typeface="Calibri" charset="0"/>
+                        <a:ea typeface="Calibri" charset="0"/>
+                        <a:cs typeface="Calibri" charset="0"/>
+                      </a:endParaRPr>
+                    </a:p>
+                  </a:txBody>
+                  <a:tcPr marL="64008" marR="64008" marT="0" marB="0" anchor="ctr">
+                    <a:lnL w="6350" cap="flat" cmpd="sng" algn="ctr">
+                      <a:solidFill>
+                        <a:srgbClr val="D5DBE3"/>
+                      </a:solidFill>
+                      <a:prstDash val="solid"/>
+                      <a:round/>
+                      <a:headEnd type="none" w="med" len="med"/>
+                      <a:tailEnd type="none" w="med" len="med"/>
+                    </a:lnL>
+                    <a:lnR w="6350" cap="flat" cmpd="sng" algn="ctr">
+                      <a:solidFill>
+                        <a:srgbClr val="D5DBE3"/>
+                      </a:solidFill>
+                      <a:prstDash val="solid"/>
+                      <a:round/>
+                      <a:headEnd type="none" w="med" len="med"/>
+                      <a:tailEnd type="none" w="med" len="med"/>
+                    </a:lnR>
+                    <a:lnT w="6350" cap="flat" cmpd="sng" algn="ctr">
+                      <a:solidFill>
+                        <a:srgbClr val="D5DBE3"/>
+                      </a:solidFill>
+                      <a:prstDash val="solid"/>
+                      <a:round/>
+                      <a:headEnd type="none" w="med" len="med"/>
+                      <a:tailEnd type="none" w="med" len="med"/>
+                    </a:lnT>
+                    <a:lnB w="6350" cap="flat" cmpd="sng" algn="ctr">
+                      <a:solidFill>
+                        <a:srgbClr val="D5DBE3"/>
+                      </a:solidFill>
+                      <a:prstDash val="solid"/>
+                      <a:round/>
+                      <a:headEnd type="none" w="med" len="med"/>
+                      <a:tailEnd type="none" w="med" len="med"/>
+                    </a:lnB>
+                  </a:tcPr>
+                </a:tc>
+              </a:tr>
+              <a:tr h="224028">
+                <a:tc>
+                  <a:txBody>
+                    <a:bodyPr/>
+                    <a:lstStyle/>
+                    <a:p>
+                      <a:pPr algn="l" indent="0" marL="0">
+                        <a:buNone/>
+                      </a:pPr>
+                      <a:r>
+                        <a:rPr lang="en-US" sz="850" b="1" dirty="0">
+                          <a:solidFill>
+                            <a:srgbClr val="1F2933"/>
+                          </a:solidFill>
+                          <a:latin typeface="Calibri" pitchFamily="34" charset="0"/>
+                          <a:ea typeface="Calibri" pitchFamily="34" charset="-122"/>
+                          <a:cs typeface="Calibri" pitchFamily="34" charset="-120"/>
+                        </a:rPr>
+                        <a:t>SCO AO</a:t>
+                      </a:r>
+                      <a:endParaRPr lang="en-US" sz="850" dirty="0">
+                        <a:latin typeface="Calibri" charset="0"/>
+                        <a:ea typeface="Calibri" charset="0"/>
+                        <a:cs typeface="Calibri" charset="0"/>
+                      </a:endParaRPr>
+                    </a:p>
+                  </a:txBody>
+                  <a:tcPr marL="64008" marR="64008" marT="0" marB="0" anchor="ctr">
+                    <a:lnL w="6350" cap="flat" cmpd="sng" algn="ctr">
+                      <a:solidFill>
+                        <a:srgbClr val="D5DBE3"/>
+                      </a:solidFill>
+                      <a:prstDash val="solid"/>
+                      <a:round/>
+                      <a:headEnd type="none" w="med" len="med"/>
+                      <a:tailEnd type="none" w="med" len="med"/>
+                    </a:lnL>
+                    <a:lnR w="6350" cap="flat" cmpd="sng" algn="ctr">
+                      <a:solidFill>
+                        <a:srgbClr val="D5DBE3"/>
+                      </a:solidFill>
+                      <a:prstDash val="solid"/>
+                      <a:round/>
+                      <a:headEnd type="none" w="med" len="med"/>
+                      <a:tailEnd type="none" w="med" len="med"/>
+                    </a:lnR>
+                    <a:lnT w="6350" cap="flat" cmpd="sng" algn="ctr">
+                      <a:solidFill>
+                        <a:srgbClr val="D5DBE3"/>
+                      </a:solidFill>
+                      <a:prstDash val="solid"/>
+                      <a:round/>
+                      <a:headEnd type="none" w="med" len="med"/>
+                      <a:tailEnd type="none" w="med" len="med"/>
+                    </a:lnT>
+                    <a:lnB w="6350" cap="flat" cmpd="sng" algn="ctr">
+                      <a:solidFill>
+                        <a:srgbClr val="D5DBE3"/>
+                      </a:solidFill>
+                      <a:prstDash val="solid"/>
+                      <a:round/>
+                      <a:headEnd type="none" w="med" len="med"/>
+                      <a:tailEnd type="none" w="med" len="med"/>
+                    </a:lnB>
+                  </a:tcPr>
+                </a:tc>
+                <a:tc>
+                  <a:txBody>
+                    <a:bodyPr/>
+                    <a:lstStyle/>
+                    <a:p>
+                      <a:pPr algn="r" indent="0" marL="0">
+                        <a:buNone/>
+                      </a:pPr>
+                      <a:r>
+                        <a:rPr lang="en-US" sz="850" dirty="0">
+                          <a:solidFill>
+                            <a:srgbClr val="1F2933"/>
+                          </a:solidFill>
+                          <a:latin typeface="Calibri" pitchFamily="34" charset="0"/>
+                          <a:ea typeface="Calibri" pitchFamily="34" charset="-122"/>
+                          <a:cs typeface="Calibri" pitchFamily="34" charset="-120"/>
+                        </a:rPr>
+                        <a:t>29,1</a:t>
+                      </a:r>
+                      <a:endParaRPr lang="en-US" sz="850" dirty="0">
+                        <a:latin typeface="Calibri" charset="0"/>
+                        <a:ea typeface="Calibri" charset="0"/>
+                        <a:cs typeface="Calibri" charset="0"/>
+                      </a:endParaRPr>
+                    </a:p>
+                  </a:txBody>
+                  <a:tcPr marL="64008" marR="64008" marT="0" marB="0" anchor="ctr">
+                    <a:lnL w="6350" cap="flat" cmpd="sng" algn="ctr">
+                      <a:solidFill>
+                        <a:srgbClr val="D5DBE3"/>
+                      </a:solidFill>
+                      <a:prstDash val="solid"/>
+                      <a:round/>
+                      <a:headEnd type="none" w="med" len="med"/>
+                      <a:tailEnd type="none" w="med" len="med"/>
+                    </a:lnL>
+                    <a:lnR w="6350" cap="flat" cmpd="sng" algn="ctr">
+                      <a:solidFill>
+                        <a:srgbClr val="D5DBE3"/>
+                      </a:solidFill>
+                      <a:prstDash val="solid"/>
+                      <a:round/>
+                      <a:headEnd type="none" w="med" len="med"/>
+                      <a:tailEnd type="none" w="med" len="med"/>
+                    </a:lnR>
+                    <a:lnT w="6350" cap="flat" cmpd="sng" algn="ctr">
+                      <a:solidFill>
+                        <a:srgbClr val="D5DBE3"/>
+                      </a:solidFill>
+                      <a:prstDash val="solid"/>
+                      <a:round/>
+                      <a:headEnd type="none" w="med" len="med"/>
+                      <a:tailEnd type="none" w="med" len="med"/>
+                    </a:lnT>
+                    <a:lnB w="6350" cap="flat" cmpd="sng" algn="ctr">
+                      <a:solidFill>
+                        <a:srgbClr val="D5DBE3"/>
+                      </a:solidFill>
+                      <a:prstDash val="solid"/>
+                      <a:round/>
+                      <a:headEnd type="none" w="med" len="med"/>
+                      <a:tailEnd type="none" w="med" len="med"/>
+                    </a:lnB>
+                  </a:tcPr>
+                </a:tc>
+                <a:tc>
+                  <a:txBody>
+                    <a:bodyPr/>
+                    <a:lstStyle/>
+                    <a:p>
+                      <a:pPr algn="r" indent="0" marL="0">
+                        <a:buNone/>
+                      </a:pPr>
+                      <a:r>
+                        <a:rPr lang="en-US" sz="850" dirty="0">
+                          <a:solidFill>
+                            <a:srgbClr val="1F2933"/>
+                          </a:solidFill>
+                          <a:latin typeface="Calibri" pitchFamily="34" charset="0"/>
+                          <a:ea typeface="Calibri" pitchFamily="34" charset="-122"/>
+                          <a:cs typeface="Calibri" pitchFamily="34" charset="-120"/>
+                        </a:rPr>
+                        <a:t>-7,9</a:t>
+                      </a:r>
+                      <a:endParaRPr lang="en-US" sz="850" dirty="0">
+                        <a:latin typeface="Calibri" charset="0"/>
+                        <a:ea typeface="Calibri" charset="0"/>
+                        <a:cs typeface="Calibri" charset="0"/>
+                      </a:endParaRPr>
+                    </a:p>
+                  </a:txBody>
+                  <a:tcPr marL="64008" marR="64008" marT="0" marB="0" anchor="ctr">
+                    <a:lnL w="6350" cap="flat" cmpd="sng" algn="ctr">
+                      <a:solidFill>
+                        <a:srgbClr val="D5DBE3"/>
+                      </a:solidFill>
+                      <a:prstDash val="solid"/>
+                      <a:round/>
+                      <a:headEnd type="none" w="med" len="med"/>
+                      <a:tailEnd type="none" w="med" len="med"/>
+                    </a:lnL>
+                    <a:lnR w="6350" cap="flat" cmpd="sng" algn="ctr">
+                      <a:solidFill>
+                        <a:srgbClr val="D5DBE3"/>
+                      </a:solidFill>
+                      <a:prstDash val="solid"/>
+                      <a:round/>
+                      <a:headEnd type="none" w="med" len="med"/>
+                      <a:tailEnd type="none" w="med" len="med"/>
+                    </a:lnR>
+                    <a:lnT w="6350" cap="flat" cmpd="sng" algn="ctr">
+                      <a:solidFill>
+                        <a:srgbClr val="D5DBE3"/>
+                      </a:solidFill>
+                      <a:prstDash val="solid"/>
+                      <a:round/>
+                      <a:headEnd type="none" w="med" len="med"/>
+                      <a:tailEnd type="none" w="med" len="med"/>
+                    </a:lnT>
+                    <a:lnB w="6350" cap="flat" cmpd="sng" algn="ctr">
+                      <a:solidFill>
+                        <a:srgbClr val="D5DBE3"/>
+                      </a:solidFill>
+                      <a:prstDash val="solid"/>
+                      <a:round/>
+                      <a:headEnd type="none" w="med" len="med"/>
+                      <a:tailEnd type="none" w="med" len="med"/>
+                    </a:lnB>
+                  </a:tcPr>
+                </a:tc>
+                <a:tc>
+                  <a:txBody>
+                    <a:bodyPr/>
+                    <a:lstStyle/>
+                    <a:p>
+                      <a:pPr algn="r" indent="0" marL="0">
+                        <a:buNone/>
+                      </a:pPr>
+                      <a:r>
+                        <a:rPr lang="en-US" sz="850" dirty="0">
+                          <a:solidFill>
+                            <a:srgbClr val="1F2933"/>
+                          </a:solidFill>
+                          <a:latin typeface="Calibri" pitchFamily="34" charset="0"/>
+                          <a:ea typeface="Calibri" pitchFamily="34" charset="-122"/>
+                          <a:cs typeface="Calibri" pitchFamily="34" charset="-120"/>
+                        </a:rPr>
+                        <a:t>–</a:t>
+                      </a:r>
+                      <a:endParaRPr lang="en-US" sz="850" dirty="0">
+                        <a:latin typeface="Calibri" charset="0"/>
+                        <a:ea typeface="Calibri" charset="0"/>
+                        <a:cs typeface="Calibri" charset="0"/>
+                      </a:endParaRPr>
+                    </a:p>
+                  </a:txBody>
+                  <a:tcPr marL="64008" marR="64008" marT="0" marB="0" anchor="ctr">
+                    <a:lnL w="6350" cap="flat" cmpd="sng" algn="ctr">
+                      <a:solidFill>
+                        <a:srgbClr val="D5DBE3"/>
+                      </a:solidFill>
+                      <a:prstDash val="solid"/>
+                      <a:round/>
+                      <a:headEnd type="none" w="med" len="med"/>
+                      <a:tailEnd type="none" w="med" len="med"/>
+                    </a:lnL>
+                    <a:lnR w="6350" cap="flat" cmpd="sng" algn="ctr">
+                      <a:solidFill>
+                        <a:srgbClr val="D5DBE3"/>
+                      </a:solidFill>
+                      <a:prstDash val="solid"/>
+                      <a:round/>
+                      <a:headEnd type="none" w="med" len="med"/>
+                      <a:tailEnd type="none" w="med" len="med"/>
+                    </a:lnR>
+                    <a:lnT w="6350" cap="flat" cmpd="sng" algn="ctr">
+                      <a:solidFill>
+                        <a:srgbClr val="D5DBE3"/>
+                      </a:solidFill>
+                      <a:prstDash val="solid"/>
+                      <a:round/>
+                      <a:headEnd type="none" w="med" len="med"/>
+                      <a:tailEnd type="none" w="med" len="med"/>
+                    </a:lnT>
+                    <a:lnB w="6350" cap="flat" cmpd="sng" algn="ctr">
+                      <a:solidFill>
+                        <a:srgbClr val="D5DBE3"/>
+                      </a:solidFill>
+                      <a:prstDash val="solid"/>
+                      <a:round/>
+                      <a:headEnd type="none" w="med" len="med"/>
+                      <a:tailEnd type="none" w="med" len="med"/>
+                    </a:lnB>
+                  </a:tcPr>
+                </a:tc>
+                <a:tc>
+                  <a:txBody>
+                    <a:bodyPr/>
+                    <a:lstStyle/>
+                    <a:p>
+                      <a:pPr algn="r" indent="0" marL="0">
+                        <a:buNone/>
+                      </a:pPr>
+                      <a:r>
+                        <a:rPr lang="en-US" sz="850" b="1" dirty="0">
+                          <a:solidFill>
+                            <a:srgbClr val="5E9B7E"/>
+                          </a:solidFill>
+                          <a:latin typeface="Calibri" pitchFamily="34" charset="0"/>
+                          <a:ea typeface="Calibri" pitchFamily="34" charset="-122"/>
+                          <a:cs typeface="Calibri" pitchFamily="34" charset="-120"/>
+                        </a:rPr>
+                        <a:t>21,2</a:t>
+                      </a:r>
+                      <a:endParaRPr lang="en-US" sz="850" dirty="0">
+                        <a:latin typeface="Calibri" charset="0"/>
+                        <a:ea typeface="Calibri" charset="0"/>
+                        <a:cs typeface="Calibri" charset="0"/>
+                      </a:endParaRPr>
+                    </a:p>
+                  </a:txBody>
+                  <a:tcPr marL="64008" marR="64008" marT="0" marB="0" anchor="ctr">
+                    <a:lnL w="6350" cap="flat" cmpd="sng" algn="ctr">
+                      <a:solidFill>
+                        <a:srgbClr val="D5DBE3"/>
+                      </a:solidFill>
+                      <a:prstDash val="solid"/>
+                      <a:round/>
+                      <a:headEnd type="none" w="med" len="med"/>
+                      <a:tailEnd type="none" w="med" len="med"/>
+                    </a:lnL>
+                    <a:lnR w="6350" cap="flat" cmpd="sng" algn="ctr">
+                      <a:solidFill>
+                        <a:srgbClr val="D5DBE3"/>
+                      </a:solidFill>
+                      <a:prstDash val="solid"/>
+                      <a:round/>
+                      <a:headEnd type="none" w="med" len="med"/>
+                      <a:tailEnd type="none" w="med" len="med"/>
+                    </a:lnR>
+                    <a:lnT w="6350" cap="flat" cmpd="sng" algn="ctr">
+                      <a:solidFill>
+                        <a:srgbClr val="D5DBE3"/>
+                      </a:solidFill>
+                      <a:prstDash val="solid"/>
+                      <a:round/>
+                      <a:headEnd type="none" w="med" len="med"/>
+                      <a:tailEnd type="none" w="med" len="med"/>
+                    </a:lnT>
+                    <a:lnB w="6350" cap="flat" cmpd="sng" algn="ctr">
+                      <a:solidFill>
+                        <a:srgbClr val="D5DBE3"/>
+                      </a:solidFill>
+                      <a:prstDash val="solid"/>
+                      <a:round/>
+                      <a:headEnd type="none" w="med" len="med"/>
+                      <a:tailEnd type="none" w="med" len="med"/>
+                    </a:lnB>
+                  </a:tcPr>
+                </a:tc>
+                <a:tc>
+                  <a:txBody>
+                    <a:bodyPr/>
+                    <a:lstStyle/>
+                    <a:p>
+                      <a:pPr algn="r" indent="0" marL="0">
+                        <a:buNone/>
+                      </a:pPr>
+                      <a:r>
+                        <a:rPr lang="en-US" sz="850" b="1" dirty="0">
+                          <a:solidFill>
                             <a:srgbClr val="B3261E"/>
                           </a:solidFill>
                           <a:latin typeface="Calibri" pitchFamily="34" charset="0"/>
                           <a:ea typeface="Calibri" pitchFamily="34" charset="-122"/>
                           <a:cs typeface="Calibri" pitchFamily="34" charset="-120"/>
                         </a:rPr>
-                        <a:t>-171,8</a:t>
+                        <a:t>2,5</a:t>
                       </a:r>
                       <a:endParaRPr lang="en-US" sz="850" dirty="0">
                         <a:latin typeface="Calibri" charset="0"/>
@@ -22939,6 +24304,73 @@
                     </a:solidFill>
                   </a:tcPr>
                 </a:tc>
+              </a:tr>
+              <a:tr h="224028">
+                <a:tc>
+                  <a:txBody>
+                    <a:bodyPr/>
+                    <a:lstStyle/>
+                    <a:p>
+                      <a:pPr algn="l" indent="0" marL="0">
+                        <a:buNone/>
+                      </a:pPr>
+                      <a:r>
+                        <a:rPr lang="en-US" sz="850" b="1" dirty="0">
+                          <a:solidFill>
+                            <a:srgbClr val="1F2933"/>
+                          </a:solidFill>
+                          <a:latin typeface="Calibri" pitchFamily="34" charset="0"/>
+                          <a:ea typeface="Calibri" pitchFamily="34" charset="-122"/>
+                          <a:cs typeface="Calibri" pitchFamily="34" charset="-120"/>
+                        </a:rPr>
+                        <a:t>IMMONEUF</a:t>
+                      </a:r>
+                      <a:endParaRPr lang="en-US" sz="850" dirty="0">
+                        <a:latin typeface="Calibri" charset="0"/>
+                        <a:ea typeface="Calibri" charset="0"/>
+                        <a:cs typeface="Calibri" charset="0"/>
+                      </a:endParaRPr>
+                    </a:p>
+                  </a:txBody>
+                  <a:tcPr marL="64008" marR="64008" marT="0" marB="0" anchor="ctr">
+                    <a:lnL w="6350" cap="flat" cmpd="sng" algn="ctr">
+                      <a:solidFill>
+                        <a:srgbClr val="D5DBE3"/>
+                      </a:solidFill>
+                      <a:prstDash val="solid"/>
+                      <a:round/>
+                      <a:headEnd type="none" w="med" len="med"/>
+                      <a:tailEnd type="none" w="med" len="med"/>
+                    </a:lnL>
+                    <a:lnR w="6350" cap="flat" cmpd="sng" algn="ctr">
+                      <a:solidFill>
+                        <a:srgbClr val="D5DBE3"/>
+                      </a:solidFill>
+                      <a:prstDash val="solid"/>
+                      <a:round/>
+                      <a:headEnd type="none" w="med" len="med"/>
+                      <a:tailEnd type="none" w="med" len="med"/>
+                    </a:lnR>
+                    <a:lnT w="6350" cap="flat" cmpd="sng" algn="ctr">
+                      <a:solidFill>
+                        <a:srgbClr val="D5DBE3"/>
+                      </a:solidFill>
+                      <a:prstDash val="solid"/>
+                      <a:round/>
+                      <a:headEnd type="none" w="med" len="med"/>
+                      <a:tailEnd type="none" w="med" len="med"/>
+                    </a:lnT>
+                    <a:lnB w="6350" cap="flat" cmpd="sng" algn="ctr">
+                      <a:solidFill>
+                        <a:srgbClr val="D5DBE3"/>
+                      </a:solidFill>
+                      <a:prstDash val="solid"/>
+                      <a:round/>
+                      <a:headEnd type="none" w="med" len="med"/>
+                      <a:tailEnd type="none" w="med" len="med"/>
+                    </a:lnB>
+                  </a:tcPr>
+                </a:tc>
                 <a:tc>
                   <a:txBody>
                     <a:bodyPr/>
@@ -22948,6 +24380,201 @@
                         <a:buNone/>
                       </a:pPr>
                       <a:r>
+                        <a:rPr lang="en-US" sz="850" dirty="0">
+                          <a:solidFill>
+                            <a:srgbClr val="1F2933"/>
+                          </a:solidFill>
+                          <a:latin typeface="Calibri" pitchFamily="34" charset="0"/>
+                          <a:ea typeface="Calibri" pitchFamily="34" charset="-122"/>
+                          <a:cs typeface="Calibri" pitchFamily="34" charset="-120"/>
+                        </a:rPr>
+                        <a:t>11,8</a:t>
+                      </a:r>
+                      <a:endParaRPr lang="en-US" sz="850" dirty="0">
+                        <a:latin typeface="Calibri" charset="0"/>
+                        <a:ea typeface="Calibri" charset="0"/>
+                        <a:cs typeface="Calibri" charset="0"/>
+                      </a:endParaRPr>
+                    </a:p>
+                  </a:txBody>
+                  <a:tcPr marL="64008" marR="64008" marT="0" marB="0" anchor="ctr">
+                    <a:lnL w="6350" cap="flat" cmpd="sng" algn="ctr">
+                      <a:solidFill>
+                        <a:srgbClr val="D5DBE3"/>
+                      </a:solidFill>
+                      <a:prstDash val="solid"/>
+                      <a:round/>
+                      <a:headEnd type="none" w="med" len="med"/>
+                      <a:tailEnd type="none" w="med" len="med"/>
+                    </a:lnL>
+                    <a:lnR w="6350" cap="flat" cmpd="sng" algn="ctr">
+                      <a:solidFill>
+                        <a:srgbClr val="D5DBE3"/>
+                      </a:solidFill>
+                      <a:prstDash val="solid"/>
+                      <a:round/>
+                      <a:headEnd type="none" w="med" len="med"/>
+                      <a:tailEnd type="none" w="med" len="med"/>
+                    </a:lnR>
+                    <a:lnT w="6350" cap="flat" cmpd="sng" algn="ctr">
+                      <a:solidFill>
+                        <a:srgbClr val="D5DBE3"/>
+                      </a:solidFill>
+                      <a:prstDash val="solid"/>
+                      <a:round/>
+                      <a:headEnd type="none" w="med" len="med"/>
+                      <a:tailEnd type="none" w="med" len="med"/>
+                    </a:lnT>
+                    <a:lnB w="6350" cap="flat" cmpd="sng" algn="ctr">
+                      <a:solidFill>
+                        <a:srgbClr val="D5DBE3"/>
+                      </a:solidFill>
+                      <a:prstDash val="solid"/>
+                      <a:round/>
+                      <a:headEnd type="none" w="med" len="med"/>
+                      <a:tailEnd type="none" w="med" len="med"/>
+                    </a:lnB>
+                  </a:tcPr>
+                </a:tc>
+                <a:tc>
+                  <a:txBody>
+                    <a:bodyPr/>
+                    <a:lstStyle/>
+                    <a:p>
+                      <a:pPr algn="r" indent="0" marL="0">
+                        <a:buNone/>
+                      </a:pPr>
+                      <a:r>
+                        <a:rPr lang="en-US" sz="850" dirty="0">
+                          <a:solidFill>
+                            <a:srgbClr val="1F2933"/>
+                          </a:solidFill>
+                          <a:latin typeface="Calibri" pitchFamily="34" charset="0"/>
+                          <a:ea typeface="Calibri" pitchFamily="34" charset="-122"/>
+                          <a:cs typeface="Calibri" pitchFamily="34" charset="-120"/>
+                        </a:rPr>
+                        <a:t>-37,3</a:t>
+                      </a:r>
+                      <a:endParaRPr lang="en-US" sz="850" dirty="0">
+                        <a:latin typeface="Calibri" charset="0"/>
+                        <a:ea typeface="Calibri" charset="0"/>
+                        <a:cs typeface="Calibri" charset="0"/>
+                      </a:endParaRPr>
+                    </a:p>
+                  </a:txBody>
+                  <a:tcPr marL="64008" marR="64008" marT="0" marB="0" anchor="ctr">
+                    <a:lnL w="6350" cap="flat" cmpd="sng" algn="ctr">
+                      <a:solidFill>
+                        <a:srgbClr val="D5DBE3"/>
+                      </a:solidFill>
+                      <a:prstDash val="solid"/>
+                      <a:round/>
+                      <a:headEnd type="none" w="med" len="med"/>
+                      <a:tailEnd type="none" w="med" len="med"/>
+                    </a:lnL>
+                    <a:lnR w="6350" cap="flat" cmpd="sng" algn="ctr">
+                      <a:solidFill>
+                        <a:srgbClr val="D5DBE3"/>
+                      </a:solidFill>
+                      <a:prstDash val="solid"/>
+                      <a:round/>
+                      <a:headEnd type="none" w="med" len="med"/>
+                      <a:tailEnd type="none" w="med" len="med"/>
+                    </a:lnR>
+                    <a:lnT w="6350" cap="flat" cmpd="sng" algn="ctr">
+                      <a:solidFill>
+                        <a:srgbClr val="D5DBE3"/>
+                      </a:solidFill>
+                      <a:prstDash val="solid"/>
+                      <a:round/>
+                      <a:headEnd type="none" w="med" len="med"/>
+                      <a:tailEnd type="none" w="med" len="med"/>
+                    </a:lnT>
+                    <a:lnB w="6350" cap="flat" cmpd="sng" algn="ctr">
+                      <a:solidFill>
+                        <a:srgbClr val="D5DBE3"/>
+                      </a:solidFill>
+                      <a:prstDash val="solid"/>
+                      <a:round/>
+                      <a:headEnd type="none" w="med" len="med"/>
+                      <a:tailEnd type="none" w="med" len="med"/>
+                    </a:lnB>
+                  </a:tcPr>
+                </a:tc>
+                <a:tc>
+                  <a:txBody>
+                    <a:bodyPr/>
+                    <a:lstStyle/>
+                    <a:p>
+                      <a:pPr algn="r" indent="0" marL="0">
+                        <a:buNone/>
+                      </a:pPr>
+                      <a:r>
+                        <a:rPr lang="en-US" sz="850" dirty="0">
+                          <a:solidFill>
+                            <a:srgbClr val="1F2933"/>
+                          </a:solidFill>
+                          <a:latin typeface="Calibri" pitchFamily="34" charset="0"/>
+                          <a:ea typeface="Calibri" pitchFamily="34" charset="-122"/>
+                          <a:cs typeface="Calibri" pitchFamily="34" charset="-120"/>
+                        </a:rPr>
+                        <a:t>–</a:t>
+                      </a:r>
+                      <a:endParaRPr lang="en-US" sz="850" dirty="0">
+                        <a:latin typeface="Calibri" charset="0"/>
+                        <a:ea typeface="Calibri" charset="0"/>
+                        <a:cs typeface="Calibri" charset="0"/>
+                      </a:endParaRPr>
+                    </a:p>
+                  </a:txBody>
+                  <a:tcPr marL="64008" marR="64008" marT="0" marB="0" anchor="ctr">
+                    <a:lnL w="6350" cap="flat" cmpd="sng" algn="ctr">
+                      <a:solidFill>
+                        <a:srgbClr val="D5DBE3"/>
+                      </a:solidFill>
+                      <a:prstDash val="solid"/>
+                      <a:round/>
+                      <a:headEnd type="none" w="med" len="med"/>
+                      <a:tailEnd type="none" w="med" len="med"/>
+                    </a:lnL>
+                    <a:lnR w="6350" cap="flat" cmpd="sng" algn="ctr">
+                      <a:solidFill>
+                        <a:srgbClr val="D5DBE3"/>
+                      </a:solidFill>
+                      <a:prstDash val="solid"/>
+                      <a:round/>
+                      <a:headEnd type="none" w="med" len="med"/>
+                      <a:tailEnd type="none" w="med" len="med"/>
+                    </a:lnR>
+                    <a:lnT w="6350" cap="flat" cmpd="sng" algn="ctr">
+                      <a:solidFill>
+                        <a:srgbClr val="D5DBE3"/>
+                      </a:solidFill>
+                      <a:prstDash val="solid"/>
+                      <a:round/>
+                      <a:headEnd type="none" w="med" len="med"/>
+                      <a:tailEnd type="none" w="med" len="med"/>
+                    </a:lnT>
+                    <a:lnB w="6350" cap="flat" cmpd="sng" algn="ctr">
+                      <a:solidFill>
+                        <a:srgbClr val="D5DBE3"/>
+                      </a:solidFill>
+                      <a:prstDash val="solid"/>
+                      <a:round/>
+                      <a:headEnd type="none" w="med" len="med"/>
+                      <a:tailEnd type="none" w="med" len="med"/>
+                    </a:lnB>
+                  </a:tcPr>
+                </a:tc>
+                <a:tc>
+                  <a:txBody>
+                    <a:bodyPr/>
+                    <a:lstStyle/>
+                    <a:p>
+                      <a:pPr algn="r" indent="0" marL="0">
+                        <a:buNone/>
+                      </a:pPr>
+                      <a:r>
                         <a:rPr lang="en-US" sz="850" b="1" dirty="0">
                           <a:solidFill>
                             <a:srgbClr val="B3261E"/>
@@ -22956,7 +24583,7 @@
                           <a:ea typeface="Calibri" pitchFamily="34" charset="-122"/>
                           <a:cs typeface="Calibri" pitchFamily="34" charset="-120"/>
                         </a:rPr>
-                        <a:t>180,2</a:t>
+                        <a:t>-25,6</a:t>
                       </a:r>
                       <a:endParaRPr lang="en-US" sz="850" dirty="0">
                         <a:latin typeface="Calibri" charset="0"/>
@@ -23007,1527 +24634,24 @@
                     </a:solidFill>
                   </a:tcPr>
                 </a:tc>
-              </a:tr>
-              <a:tr h="224028">
-                <a:tc>
-                  <a:txBody>
-                    <a:bodyPr/>
-                    <a:lstStyle/>
-                    <a:p>
-                      <a:pPr algn="l" indent="0" marL="0">
+                <a:tc>
+                  <a:txBody>
+                    <a:bodyPr/>
+                    <a:lstStyle/>
+                    <a:p>
+                      <a:pPr algn="r" indent="0" marL="0">
                         <a:buNone/>
                       </a:pPr>
                       <a:r>
                         <a:rPr lang="en-US" sz="850" b="1" dirty="0">
                           <a:solidFill>
-                            <a:srgbClr val="1F2933"/>
-                          </a:solidFill>
-                          <a:latin typeface="Calibri" pitchFamily="34" charset="0"/>
-                          <a:ea typeface="Calibri" pitchFamily="34" charset="-122"/>
-                          <a:cs typeface="Calibri" pitchFamily="34" charset="-120"/>
-                        </a:rPr>
-                        <a:t>RIVIERA PARK – projet</a:t>
-                      </a:r>
-                      <a:endParaRPr lang="en-US" sz="850" dirty="0">
-                        <a:latin typeface="Calibri" charset="0"/>
-                        <a:ea typeface="Calibri" charset="0"/>
-                        <a:cs typeface="Calibri" charset="0"/>
-                      </a:endParaRPr>
-                    </a:p>
-                  </a:txBody>
-                  <a:tcPr marL="64008" marR="64008" marT="0" marB="0" anchor="ctr">
-                    <a:lnL w="6350" cap="flat" cmpd="sng" algn="ctr">
-                      <a:solidFill>
-                        <a:srgbClr val="D5DBE3"/>
-                      </a:solidFill>
-                      <a:prstDash val="solid"/>
-                      <a:round/>
-                      <a:headEnd type="none" w="med" len="med"/>
-                      <a:tailEnd type="none" w="med" len="med"/>
-                    </a:lnL>
-                    <a:lnR w="6350" cap="flat" cmpd="sng" algn="ctr">
-                      <a:solidFill>
-                        <a:srgbClr val="D5DBE3"/>
-                      </a:solidFill>
-                      <a:prstDash val="solid"/>
-                      <a:round/>
-                      <a:headEnd type="none" w="med" len="med"/>
-                      <a:tailEnd type="none" w="med" len="med"/>
-                    </a:lnR>
-                    <a:lnT w="6350" cap="flat" cmpd="sng" algn="ctr">
-                      <a:solidFill>
-                        <a:srgbClr val="D5DBE3"/>
-                      </a:solidFill>
-                      <a:prstDash val="solid"/>
-                      <a:round/>
-                      <a:headEnd type="none" w="med" len="med"/>
-                      <a:tailEnd type="none" w="med" len="med"/>
-                    </a:lnT>
-                    <a:lnB w="6350" cap="flat" cmpd="sng" algn="ctr">
-                      <a:solidFill>
-                        <a:srgbClr val="D5DBE3"/>
-                      </a:solidFill>
-                      <a:prstDash val="solid"/>
-                      <a:round/>
-                      <a:headEnd type="none" w="med" len="med"/>
-                      <a:tailEnd type="none" w="med" len="med"/>
-                    </a:lnB>
-                  </a:tcPr>
-                </a:tc>
-                <a:tc>
-                  <a:txBody>
-                    <a:bodyPr/>
-                    <a:lstStyle/>
-                    <a:p>
-                      <a:pPr algn="r" indent="0" marL="0">
-                        <a:buNone/>
-                      </a:pPr>
-                      <a:r>
-                        <a:rPr lang="en-US" sz="850" dirty="0">
-                          <a:solidFill>
-                            <a:srgbClr val="1F2933"/>
-                          </a:solidFill>
-                          <a:latin typeface="Calibri" pitchFamily="34" charset="0"/>
-                          <a:ea typeface="Calibri" pitchFamily="34" charset="-122"/>
-                          <a:cs typeface="Calibri" pitchFamily="34" charset="-120"/>
-                        </a:rPr>
-                        <a:t>2 643,1</a:t>
-                      </a:r>
-                      <a:endParaRPr lang="en-US" sz="850" dirty="0">
-                        <a:latin typeface="Calibri" charset="0"/>
-                        <a:ea typeface="Calibri" charset="0"/>
-                        <a:cs typeface="Calibri" charset="0"/>
-                      </a:endParaRPr>
-                    </a:p>
-                  </a:txBody>
-                  <a:tcPr marL="64008" marR="64008" marT="0" marB="0" anchor="ctr">
-                    <a:lnL w="6350" cap="flat" cmpd="sng" algn="ctr">
-                      <a:solidFill>
-                        <a:srgbClr val="D5DBE3"/>
-                      </a:solidFill>
-                      <a:prstDash val="solid"/>
-                      <a:round/>
-                      <a:headEnd type="none" w="med" len="med"/>
-                      <a:tailEnd type="none" w="med" len="med"/>
-                    </a:lnL>
-                    <a:lnR w="6350" cap="flat" cmpd="sng" algn="ctr">
-                      <a:solidFill>
-                        <a:srgbClr val="D5DBE3"/>
-                      </a:solidFill>
-                      <a:prstDash val="solid"/>
-                      <a:round/>
-                      <a:headEnd type="none" w="med" len="med"/>
-                      <a:tailEnd type="none" w="med" len="med"/>
-                    </a:lnR>
-                    <a:lnT w="6350" cap="flat" cmpd="sng" algn="ctr">
-                      <a:solidFill>
-                        <a:srgbClr val="D5DBE3"/>
-                      </a:solidFill>
-                      <a:prstDash val="solid"/>
-                      <a:round/>
-                      <a:headEnd type="none" w="med" len="med"/>
-                      <a:tailEnd type="none" w="med" len="med"/>
-                    </a:lnT>
-                    <a:lnB w="6350" cap="flat" cmpd="sng" algn="ctr">
-                      <a:solidFill>
-                        <a:srgbClr val="D5DBE3"/>
-                      </a:solidFill>
-                      <a:prstDash val="solid"/>
-                      <a:round/>
-                      <a:headEnd type="none" w="med" len="med"/>
-                      <a:tailEnd type="none" w="med" len="med"/>
-                    </a:lnB>
-                  </a:tcPr>
-                </a:tc>
-                <a:tc>
-                  <a:txBody>
-                    <a:bodyPr/>
-                    <a:lstStyle/>
-                    <a:p>
-                      <a:pPr algn="r" indent="0" marL="0">
-                        <a:buNone/>
-                      </a:pPr>
-                      <a:r>
-                        <a:rPr lang="en-US" sz="850" dirty="0">
-                          <a:solidFill>
-                            <a:srgbClr val="1F2933"/>
-                          </a:solidFill>
-                          <a:latin typeface="Calibri" pitchFamily="34" charset="0"/>
-                          <a:ea typeface="Calibri" pitchFamily="34" charset="-122"/>
-                          <a:cs typeface="Calibri" pitchFamily="34" charset="-120"/>
-                        </a:rPr>
-                        <a:t>-1 988,4</a:t>
-                      </a:r>
-                      <a:endParaRPr lang="en-US" sz="850" dirty="0">
-                        <a:latin typeface="Calibri" charset="0"/>
-                        <a:ea typeface="Calibri" charset="0"/>
-                        <a:cs typeface="Calibri" charset="0"/>
-                      </a:endParaRPr>
-                    </a:p>
-                  </a:txBody>
-                  <a:tcPr marL="64008" marR="64008" marT="0" marB="0" anchor="ctr">
-                    <a:lnL w="6350" cap="flat" cmpd="sng" algn="ctr">
-                      <a:solidFill>
-                        <a:srgbClr val="D5DBE3"/>
-                      </a:solidFill>
-                      <a:prstDash val="solid"/>
-                      <a:round/>
-                      <a:headEnd type="none" w="med" len="med"/>
-                      <a:tailEnd type="none" w="med" len="med"/>
-                    </a:lnL>
-                    <a:lnR w="6350" cap="flat" cmpd="sng" algn="ctr">
-                      <a:solidFill>
-                        <a:srgbClr val="D5DBE3"/>
-                      </a:solidFill>
-                      <a:prstDash val="solid"/>
-                      <a:round/>
-                      <a:headEnd type="none" w="med" len="med"/>
-                      <a:tailEnd type="none" w="med" len="med"/>
-                    </a:lnR>
-                    <a:lnT w="6350" cap="flat" cmpd="sng" algn="ctr">
-                      <a:solidFill>
-                        <a:srgbClr val="D5DBE3"/>
-                      </a:solidFill>
-                      <a:prstDash val="solid"/>
-                      <a:round/>
-                      <a:headEnd type="none" w="med" len="med"/>
-                      <a:tailEnd type="none" w="med" len="med"/>
-                    </a:lnT>
-                    <a:lnB w="6350" cap="flat" cmpd="sng" algn="ctr">
-                      <a:solidFill>
-                        <a:srgbClr val="D5DBE3"/>
-                      </a:solidFill>
-                      <a:prstDash val="solid"/>
-                      <a:round/>
-                      <a:headEnd type="none" w="med" len="med"/>
-                      <a:tailEnd type="none" w="med" len="med"/>
-                    </a:lnB>
-                  </a:tcPr>
-                </a:tc>
-                <a:tc>
-                  <a:txBody>
-                    <a:bodyPr/>
-                    <a:lstStyle/>
-                    <a:p>
-                      <a:pPr algn="r" indent="0" marL="0">
-                        <a:buNone/>
-                      </a:pPr>
-                      <a:r>
-                        <a:rPr lang="en-US" sz="850" dirty="0">
-                          <a:solidFill>
-                            <a:srgbClr val="1F2933"/>
-                          </a:solidFill>
-                          <a:latin typeface="Calibri" pitchFamily="34" charset="0"/>
-                          <a:ea typeface="Calibri" pitchFamily="34" charset="-122"/>
-                          <a:cs typeface="Calibri" pitchFamily="34" charset="-120"/>
-                        </a:rPr>
-                        <a:t>–</a:t>
-                      </a:r>
-                      <a:endParaRPr lang="en-US" sz="850" dirty="0">
-                        <a:latin typeface="Calibri" charset="0"/>
-                        <a:ea typeface="Calibri" charset="0"/>
-                        <a:cs typeface="Calibri" charset="0"/>
-                      </a:endParaRPr>
-                    </a:p>
-                  </a:txBody>
-                  <a:tcPr marL="64008" marR="64008" marT="0" marB="0" anchor="ctr">
-                    <a:lnL w="6350" cap="flat" cmpd="sng" algn="ctr">
-                      <a:solidFill>
-                        <a:srgbClr val="D5DBE3"/>
-                      </a:solidFill>
-                      <a:prstDash val="solid"/>
-                      <a:round/>
-                      <a:headEnd type="none" w="med" len="med"/>
-                      <a:tailEnd type="none" w="med" len="med"/>
-                    </a:lnL>
-                    <a:lnR w="6350" cap="flat" cmpd="sng" algn="ctr">
-                      <a:solidFill>
-                        <a:srgbClr val="D5DBE3"/>
-                      </a:solidFill>
-                      <a:prstDash val="solid"/>
-                      <a:round/>
-                      <a:headEnd type="none" w="med" len="med"/>
-                      <a:tailEnd type="none" w="med" len="med"/>
-                    </a:lnR>
-                    <a:lnT w="6350" cap="flat" cmpd="sng" algn="ctr">
-                      <a:solidFill>
-                        <a:srgbClr val="D5DBE3"/>
-                      </a:solidFill>
-                      <a:prstDash val="solid"/>
-                      <a:round/>
-                      <a:headEnd type="none" w="med" len="med"/>
-                      <a:tailEnd type="none" w="med" len="med"/>
-                    </a:lnT>
-                    <a:lnB w="6350" cap="flat" cmpd="sng" algn="ctr">
-                      <a:solidFill>
-                        <a:srgbClr val="D5DBE3"/>
-                      </a:solidFill>
-                      <a:prstDash val="solid"/>
-                      <a:round/>
-                      <a:headEnd type="none" w="med" len="med"/>
-                      <a:tailEnd type="none" w="med" len="med"/>
-                    </a:lnB>
-                  </a:tcPr>
-                </a:tc>
-                <a:tc>
-                  <a:txBody>
-                    <a:bodyPr/>
-                    <a:lstStyle/>
-                    <a:p>
-                      <a:pPr algn="r" indent="0" marL="0">
-                        <a:buNone/>
-                      </a:pPr>
-                      <a:r>
-                        <a:rPr lang="en-US" sz="850" b="1" dirty="0">
-                          <a:solidFill>
-                            <a:srgbClr val="5E9B7E"/>
-                          </a:solidFill>
-                          <a:latin typeface="Calibri" pitchFamily="34" charset="0"/>
-                          <a:ea typeface="Calibri" pitchFamily="34" charset="-122"/>
-                          <a:cs typeface="Calibri" pitchFamily="34" charset="-120"/>
-                        </a:rPr>
-                        <a:t>654,7</a:t>
-                      </a:r>
-                      <a:endParaRPr lang="en-US" sz="850" dirty="0">
-                        <a:latin typeface="Calibri" charset="0"/>
-                        <a:ea typeface="Calibri" charset="0"/>
-                        <a:cs typeface="Calibri" charset="0"/>
-                      </a:endParaRPr>
-                    </a:p>
-                  </a:txBody>
-                  <a:tcPr marL="64008" marR="64008" marT="0" marB="0" anchor="ctr">
-                    <a:lnL w="6350" cap="flat" cmpd="sng" algn="ctr">
-                      <a:solidFill>
-                        <a:srgbClr val="D5DBE3"/>
-                      </a:solidFill>
-                      <a:prstDash val="solid"/>
-                      <a:round/>
-                      <a:headEnd type="none" w="med" len="med"/>
-                      <a:tailEnd type="none" w="med" len="med"/>
-                    </a:lnL>
-                    <a:lnR w="6350" cap="flat" cmpd="sng" algn="ctr">
-                      <a:solidFill>
-                        <a:srgbClr val="D5DBE3"/>
-                      </a:solidFill>
-                      <a:prstDash val="solid"/>
-                      <a:round/>
-                      <a:headEnd type="none" w="med" len="med"/>
-                      <a:tailEnd type="none" w="med" len="med"/>
-                    </a:lnR>
-                    <a:lnT w="6350" cap="flat" cmpd="sng" algn="ctr">
-                      <a:solidFill>
-                        <a:srgbClr val="D5DBE3"/>
-                      </a:solidFill>
-                      <a:prstDash val="solid"/>
-                      <a:round/>
-                      <a:headEnd type="none" w="med" len="med"/>
-                      <a:tailEnd type="none" w="med" len="med"/>
-                    </a:lnT>
-                    <a:lnB w="6350" cap="flat" cmpd="sng" algn="ctr">
-                      <a:solidFill>
-                        <a:srgbClr val="D5DBE3"/>
-                      </a:solidFill>
-                      <a:prstDash val="solid"/>
-                      <a:round/>
-                      <a:headEnd type="none" w="med" len="med"/>
-                      <a:tailEnd type="none" w="med" len="med"/>
-                    </a:lnB>
-                  </a:tcPr>
-                </a:tc>
-                <a:tc>
-                  <a:txBody>
-                    <a:bodyPr/>
-                    <a:lstStyle/>
-                    <a:p>
-                      <a:pPr algn="r" indent="0" marL="0">
-                        <a:buNone/>
-                      </a:pPr>
-                      <a:r>
-                        <a:rPr lang="en-US" sz="850" dirty="0">
-                          <a:solidFill>
-                            <a:srgbClr val="1F2933"/>
-                          </a:solidFill>
-                          <a:latin typeface="Calibri" pitchFamily="34" charset="0"/>
-                          <a:ea typeface="Calibri" pitchFamily="34" charset="-122"/>
-                          <a:cs typeface="Calibri" pitchFamily="34" charset="-120"/>
-                        </a:rPr>
-                        <a:t>–</a:t>
-                      </a:r>
-                      <a:endParaRPr lang="en-US" sz="850" dirty="0">
-                        <a:latin typeface="Calibri" charset="0"/>
-                        <a:ea typeface="Calibri" charset="0"/>
-                        <a:cs typeface="Calibri" charset="0"/>
-                      </a:endParaRPr>
-                    </a:p>
-                  </a:txBody>
-                  <a:tcPr marL="64008" marR="64008" marT="0" marB="0" anchor="ctr">
-                    <a:lnL w="6350" cap="flat" cmpd="sng" algn="ctr">
-                      <a:solidFill>
-                        <a:srgbClr val="D5DBE3"/>
-                      </a:solidFill>
-                      <a:prstDash val="solid"/>
-                      <a:round/>
-                      <a:headEnd type="none" w="med" len="med"/>
-                      <a:tailEnd type="none" w="med" len="med"/>
-                    </a:lnL>
-                    <a:lnR w="6350" cap="flat" cmpd="sng" algn="ctr">
-                      <a:solidFill>
-                        <a:srgbClr val="D5DBE3"/>
-                      </a:solidFill>
-                      <a:prstDash val="solid"/>
-                      <a:round/>
-                      <a:headEnd type="none" w="med" len="med"/>
-                      <a:tailEnd type="none" w="med" len="med"/>
-                    </a:lnR>
-                    <a:lnT w="6350" cap="flat" cmpd="sng" algn="ctr">
-                      <a:solidFill>
-                        <a:srgbClr val="D5DBE3"/>
-                      </a:solidFill>
-                      <a:prstDash val="solid"/>
-                      <a:round/>
-                      <a:headEnd type="none" w="med" len="med"/>
-                      <a:tailEnd type="none" w="med" len="med"/>
-                    </a:lnT>
-                    <a:lnB w="6350" cap="flat" cmpd="sng" algn="ctr">
-                      <a:solidFill>
-                        <a:srgbClr val="D5DBE3"/>
-                      </a:solidFill>
-                      <a:prstDash val="solid"/>
-                      <a:round/>
-                      <a:headEnd type="none" w="med" len="med"/>
-                      <a:tailEnd type="none" w="med" len="med"/>
-                    </a:lnB>
-                  </a:tcPr>
-                </a:tc>
-              </a:tr>
-              <a:tr h="224028">
-                <a:tc>
-                  <a:txBody>
-                    <a:bodyPr/>
-                    <a:lstStyle/>
-                    <a:p>
-                      <a:pPr algn="l" indent="0" marL="0">
-                        <a:buNone/>
-                      </a:pPr>
-                      <a:r>
-                        <a:rPr lang="en-US" sz="850" b="1" dirty="0">
-                          <a:solidFill>
-                            <a:srgbClr val="1F2933"/>
-                          </a:solidFill>
-                          <a:latin typeface="Calibri" pitchFamily="34" charset="0"/>
-                          <a:ea typeface="Calibri" pitchFamily="34" charset="-122"/>
-                          <a:cs typeface="Calibri" pitchFamily="34" charset="-120"/>
-                        </a:rPr>
-                        <a:t>RIVIERA PARK – BNI courant (à arbitrer)</a:t>
-                      </a:r>
-                      <a:endParaRPr lang="en-US" sz="850" dirty="0">
-                        <a:latin typeface="Calibri" charset="0"/>
-                        <a:ea typeface="Calibri" charset="0"/>
-                        <a:cs typeface="Calibri" charset="0"/>
-                      </a:endParaRPr>
-                    </a:p>
-                  </a:txBody>
-                  <a:tcPr marL="64008" marR="64008" marT="0" marB="0" anchor="ctr">
-                    <a:lnL w="6350" cap="flat" cmpd="sng" algn="ctr">
-                      <a:solidFill>
-                        <a:srgbClr val="D5DBE3"/>
-                      </a:solidFill>
-                      <a:prstDash val="solid"/>
-                      <a:round/>
-                      <a:headEnd type="none" w="med" len="med"/>
-                      <a:tailEnd type="none" w="med" len="med"/>
-                    </a:lnL>
-                    <a:lnR w="6350" cap="flat" cmpd="sng" algn="ctr">
-                      <a:solidFill>
-                        <a:srgbClr val="D5DBE3"/>
-                      </a:solidFill>
-                      <a:prstDash val="solid"/>
-                      <a:round/>
-                      <a:headEnd type="none" w="med" len="med"/>
-                      <a:tailEnd type="none" w="med" len="med"/>
-                    </a:lnR>
-                    <a:lnT w="6350" cap="flat" cmpd="sng" algn="ctr">
-                      <a:solidFill>
-                        <a:srgbClr val="D5DBE3"/>
-                      </a:solidFill>
-                      <a:prstDash val="solid"/>
-                      <a:round/>
-                      <a:headEnd type="none" w="med" len="med"/>
-                      <a:tailEnd type="none" w="med" len="med"/>
-                    </a:lnT>
-                    <a:lnB w="6350" cap="flat" cmpd="sng" algn="ctr">
-                      <a:solidFill>
-                        <a:srgbClr val="D5DBE3"/>
-                      </a:solidFill>
-                      <a:prstDash val="solid"/>
-                      <a:round/>
-                      <a:headEnd type="none" w="med" len="med"/>
-                      <a:tailEnd type="none" w="med" len="med"/>
-                    </a:lnB>
-                  </a:tcPr>
-                </a:tc>
-                <a:tc>
-                  <a:txBody>
-                    <a:bodyPr/>
-                    <a:lstStyle/>
-                    <a:p>
-                      <a:pPr algn="r" indent="0" marL="0">
-                        <a:buNone/>
-                      </a:pPr>
-                      <a:r>
-                        <a:rPr lang="en-US" sz="850" dirty="0">
-                          <a:solidFill>
-                            <a:srgbClr val="1F2933"/>
-                          </a:solidFill>
-                          <a:latin typeface="Calibri" pitchFamily="34" charset="0"/>
-                          <a:ea typeface="Calibri" pitchFamily="34" charset="-122"/>
-                          <a:cs typeface="Calibri" pitchFamily="34" charset="-120"/>
-                        </a:rPr>
-                        <a:t>1 772,0</a:t>
-                      </a:r>
-                      <a:endParaRPr lang="en-US" sz="850" dirty="0">
-                        <a:latin typeface="Calibri" charset="0"/>
-                        <a:ea typeface="Calibri" charset="0"/>
-                        <a:cs typeface="Calibri" charset="0"/>
-                      </a:endParaRPr>
-                    </a:p>
-                  </a:txBody>
-                  <a:tcPr marL="64008" marR="64008" marT="0" marB="0" anchor="ctr">
-                    <a:lnL w="6350" cap="flat" cmpd="sng" algn="ctr">
-                      <a:solidFill>
-                        <a:srgbClr val="D5DBE3"/>
-                      </a:solidFill>
-                      <a:prstDash val="solid"/>
-                      <a:round/>
-                      <a:headEnd type="none" w="med" len="med"/>
-                      <a:tailEnd type="none" w="med" len="med"/>
-                    </a:lnL>
-                    <a:lnR w="6350" cap="flat" cmpd="sng" algn="ctr">
-                      <a:solidFill>
-                        <a:srgbClr val="D5DBE3"/>
-                      </a:solidFill>
-                      <a:prstDash val="solid"/>
-                      <a:round/>
-                      <a:headEnd type="none" w="med" len="med"/>
-                      <a:tailEnd type="none" w="med" len="med"/>
-                    </a:lnR>
-                    <a:lnT w="6350" cap="flat" cmpd="sng" algn="ctr">
-                      <a:solidFill>
-                        <a:srgbClr val="D5DBE3"/>
-                      </a:solidFill>
-                      <a:prstDash val="solid"/>
-                      <a:round/>
-                      <a:headEnd type="none" w="med" len="med"/>
-                      <a:tailEnd type="none" w="med" len="med"/>
-                    </a:lnT>
-                    <a:lnB w="6350" cap="flat" cmpd="sng" algn="ctr">
-                      <a:solidFill>
-                        <a:srgbClr val="D5DBE3"/>
-                      </a:solidFill>
-                      <a:prstDash val="solid"/>
-                      <a:round/>
-                      <a:headEnd type="none" w="med" len="med"/>
-                      <a:tailEnd type="none" w="med" len="med"/>
-                    </a:lnB>
-                  </a:tcPr>
-                </a:tc>
-                <a:tc>
-                  <a:txBody>
-                    <a:bodyPr/>
-                    <a:lstStyle/>
-                    <a:p>
-                      <a:pPr algn="r" indent="0" marL="0">
-                        <a:buNone/>
-                      </a:pPr>
-                      <a:r>
-                        <a:rPr lang="en-US" sz="850" dirty="0">
-                          <a:solidFill>
-                            <a:srgbClr val="1F2933"/>
-                          </a:solidFill>
-                          <a:latin typeface="Calibri" pitchFamily="34" charset="0"/>
-                          <a:ea typeface="Calibri" pitchFamily="34" charset="-122"/>
-                          <a:cs typeface="Calibri" pitchFamily="34" charset="-120"/>
-                        </a:rPr>
-                        <a:t>–</a:t>
-                      </a:r>
-                      <a:endParaRPr lang="en-US" sz="850" dirty="0">
-                        <a:latin typeface="Calibri" charset="0"/>
-                        <a:ea typeface="Calibri" charset="0"/>
-                        <a:cs typeface="Calibri" charset="0"/>
-                      </a:endParaRPr>
-                    </a:p>
-                  </a:txBody>
-                  <a:tcPr marL="64008" marR="64008" marT="0" marB="0" anchor="ctr">
-                    <a:lnL w="6350" cap="flat" cmpd="sng" algn="ctr">
-                      <a:solidFill>
-                        <a:srgbClr val="D5DBE3"/>
-                      </a:solidFill>
-                      <a:prstDash val="solid"/>
-                      <a:round/>
-                      <a:headEnd type="none" w="med" len="med"/>
-                      <a:tailEnd type="none" w="med" len="med"/>
-                    </a:lnL>
-                    <a:lnR w="6350" cap="flat" cmpd="sng" algn="ctr">
-                      <a:solidFill>
-                        <a:srgbClr val="D5DBE3"/>
-                      </a:solidFill>
-                      <a:prstDash val="solid"/>
-                      <a:round/>
-                      <a:headEnd type="none" w="med" len="med"/>
-                      <a:tailEnd type="none" w="med" len="med"/>
-                    </a:lnR>
-                    <a:lnT w="6350" cap="flat" cmpd="sng" algn="ctr">
-                      <a:solidFill>
-                        <a:srgbClr val="D5DBE3"/>
-                      </a:solidFill>
-                      <a:prstDash val="solid"/>
-                      <a:round/>
-                      <a:headEnd type="none" w="med" len="med"/>
-                      <a:tailEnd type="none" w="med" len="med"/>
-                    </a:lnT>
-                    <a:lnB w="6350" cap="flat" cmpd="sng" algn="ctr">
-                      <a:solidFill>
-                        <a:srgbClr val="D5DBE3"/>
-                      </a:solidFill>
-                      <a:prstDash val="solid"/>
-                      <a:round/>
-                      <a:headEnd type="none" w="med" len="med"/>
-                      <a:tailEnd type="none" w="med" len="med"/>
-                    </a:lnB>
-                  </a:tcPr>
-                </a:tc>
-                <a:tc>
-                  <a:txBody>
-                    <a:bodyPr/>
-                    <a:lstStyle/>
-                    <a:p>
-                      <a:pPr algn="r" indent="0" marL="0">
-                        <a:buNone/>
-                      </a:pPr>
-                      <a:r>
-                        <a:rPr lang="en-US" sz="850" dirty="0">
-                          <a:solidFill>
-                            <a:srgbClr val="1F2933"/>
-                          </a:solidFill>
-                          <a:latin typeface="Calibri" pitchFamily="34" charset="0"/>
-                          <a:ea typeface="Calibri" pitchFamily="34" charset="-122"/>
-                          <a:cs typeface="Calibri" pitchFamily="34" charset="-120"/>
-                        </a:rPr>
-                        <a:t>-500,0</a:t>
-                      </a:r>
-                      <a:endParaRPr lang="en-US" sz="850" dirty="0">
-                        <a:latin typeface="Calibri" charset="0"/>
-                        <a:ea typeface="Calibri" charset="0"/>
-                        <a:cs typeface="Calibri" charset="0"/>
-                      </a:endParaRPr>
-                    </a:p>
-                  </a:txBody>
-                  <a:tcPr marL="64008" marR="64008" marT="0" marB="0" anchor="ctr">
-                    <a:lnL w="6350" cap="flat" cmpd="sng" algn="ctr">
-                      <a:solidFill>
-                        <a:srgbClr val="D5DBE3"/>
-                      </a:solidFill>
-                      <a:prstDash val="solid"/>
-                      <a:round/>
-                      <a:headEnd type="none" w="med" len="med"/>
-                      <a:tailEnd type="none" w="med" len="med"/>
-                    </a:lnL>
-                    <a:lnR w="6350" cap="flat" cmpd="sng" algn="ctr">
-                      <a:solidFill>
-                        <a:srgbClr val="D5DBE3"/>
-                      </a:solidFill>
-                      <a:prstDash val="solid"/>
-                      <a:round/>
-                      <a:headEnd type="none" w="med" len="med"/>
-                      <a:tailEnd type="none" w="med" len="med"/>
-                    </a:lnR>
-                    <a:lnT w="6350" cap="flat" cmpd="sng" algn="ctr">
-                      <a:solidFill>
-                        <a:srgbClr val="D5DBE3"/>
-                      </a:solidFill>
-                      <a:prstDash val="solid"/>
-                      <a:round/>
-                      <a:headEnd type="none" w="med" len="med"/>
-                      <a:tailEnd type="none" w="med" len="med"/>
-                    </a:lnT>
-                    <a:lnB w="6350" cap="flat" cmpd="sng" algn="ctr">
-                      <a:solidFill>
-                        <a:srgbClr val="D5DBE3"/>
-                      </a:solidFill>
-                      <a:prstDash val="solid"/>
-                      <a:round/>
-                      <a:headEnd type="none" w="med" len="med"/>
-                      <a:tailEnd type="none" w="med" len="med"/>
-                    </a:lnB>
-                  </a:tcPr>
-                </a:tc>
-                <a:tc>
-                  <a:txBody>
-                    <a:bodyPr/>
-                    <a:lstStyle/>
-                    <a:p>
-                      <a:pPr algn="r" indent="0" marL="0">
-                        <a:buNone/>
-                      </a:pPr>
-                      <a:r>
-                        <a:rPr lang="en-US" sz="850" b="1" dirty="0">
-                          <a:solidFill>
-                            <a:srgbClr val="5E9B7E"/>
-                          </a:solidFill>
-                          <a:latin typeface="Calibri" pitchFamily="34" charset="0"/>
-                          <a:ea typeface="Calibri" pitchFamily="34" charset="-122"/>
-                          <a:cs typeface="Calibri" pitchFamily="34" charset="-120"/>
-                        </a:rPr>
-                        <a:t>1 272,0</a:t>
-                      </a:r>
-                      <a:endParaRPr lang="en-US" sz="850" dirty="0">
-                        <a:latin typeface="Calibri" charset="0"/>
-                        <a:ea typeface="Calibri" charset="0"/>
-                        <a:cs typeface="Calibri" charset="0"/>
-                      </a:endParaRPr>
-                    </a:p>
-                  </a:txBody>
-                  <a:tcPr marL="64008" marR="64008" marT="0" marB="0" anchor="ctr">
-                    <a:lnL w="6350" cap="flat" cmpd="sng" algn="ctr">
-                      <a:solidFill>
-                        <a:srgbClr val="D5DBE3"/>
-                      </a:solidFill>
-                      <a:prstDash val="solid"/>
-                      <a:round/>
-                      <a:headEnd type="none" w="med" len="med"/>
-                      <a:tailEnd type="none" w="med" len="med"/>
-                    </a:lnL>
-                    <a:lnR w="6350" cap="flat" cmpd="sng" algn="ctr">
-                      <a:solidFill>
-                        <a:srgbClr val="D5DBE3"/>
-                      </a:solidFill>
-                      <a:prstDash val="solid"/>
-                      <a:round/>
-                      <a:headEnd type="none" w="med" len="med"/>
-                      <a:tailEnd type="none" w="med" len="med"/>
-                    </a:lnR>
-                    <a:lnT w="6350" cap="flat" cmpd="sng" algn="ctr">
-                      <a:solidFill>
-                        <a:srgbClr val="D5DBE3"/>
-                      </a:solidFill>
-                      <a:prstDash val="solid"/>
-                      <a:round/>
-                      <a:headEnd type="none" w="med" len="med"/>
-                      <a:tailEnd type="none" w="med" len="med"/>
-                    </a:lnT>
-                    <a:lnB w="6350" cap="flat" cmpd="sng" algn="ctr">
-                      <a:solidFill>
-                        <a:srgbClr val="D5DBE3"/>
-                      </a:solidFill>
-                      <a:prstDash val="solid"/>
-                      <a:round/>
-                      <a:headEnd type="none" w="med" len="med"/>
-                      <a:tailEnd type="none" w="med" len="med"/>
-                    </a:lnB>
-                  </a:tcPr>
-                </a:tc>
-                <a:tc>
-                  <a:txBody>
-                    <a:bodyPr/>
-                    <a:lstStyle/>
-                    <a:p>
-                      <a:pPr algn="r" indent="0" marL="0">
-                        <a:buNone/>
-                      </a:pPr>
-                      <a:r>
-                        <a:rPr lang="en-US" sz="850" dirty="0">
-                          <a:solidFill>
-                            <a:srgbClr val="1F2933"/>
-                          </a:solidFill>
-                          <a:latin typeface="Calibri" pitchFamily="34" charset="0"/>
-                          <a:ea typeface="Calibri" pitchFamily="34" charset="-122"/>
-                          <a:cs typeface="Calibri" pitchFamily="34" charset="-120"/>
-                        </a:rPr>
-                        <a:t>–</a:t>
-                      </a:r>
-                      <a:endParaRPr lang="en-US" sz="850" dirty="0">
-                        <a:latin typeface="Calibri" charset="0"/>
-                        <a:ea typeface="Calibri" charset="0"/>
-                        <a:cs typeface="Calibri" charset="0"/>
-                      </a:endParaRPr>
-                    </a:p>
-                  </a:txBody>
-                  <a:tcPr marL="64008" marR="64008" marT="0" marB="0" anchor="ctr">
-                    <a:lnL w="6350" cap="flat" cmpd="sng" algn="ctr">
-                      <a:solidFill>
-                        <a:srgbClr val="D5DBE3"/>
-                      </a:solidFill>
-                      <a:prstDash val="solid"/>
-                      <a:round/>
-                      <a:headEnd type="none" w="med" len="med"/>
-                      <a:tailEnd type="none" w="med" len="med"/>
-                    </a:lnL>
-                    <a:lnR w="6350" cap="flat" cmpd="sng" algn="ctr">
-                      <a:solidFill>
-                        <a:srgbClr val="D5DBE3"/>
-                      </a:solidFill>
-                      <a:prstDash val="solid"/>
-                      <a:round/>
-                      <a:headEnd type="none" w="med" len="med"/>
-                      <a:tailEnd type="none" w="med" len="med"/>
-                    </a:lnR>
-                    <a:lnT w="6350" cap="flat" cmpd="sng" algn="ctr">
-                      <a:solidFill>
-                        <a:srgbClr val="D5DBE3"/>
-                      </a:solidFill>
-                      <a:prstDash val="solid"/>
-                      <a:round/>
-                      <a:headEnd type="none" w="med" len="med"/>
-                      <a:tailEnd type="none" w="med" len="med"/>
-                    </a:lnT>
-                    <a:lnB w="6350" cap="flat" cmpd="sng" algn="ctr">
-                      <a:solidFill>
-                        <a:srgbClr val="D5DBE3"/>
-                      </a:solidFill>
-                      <a:prstDash val="solid"/>
-                      <a:round/>
-                      <a:headEnd type="none" w="med" len="med"/>
-                      <a:tailEnd type="none" w="med" len="med"/>
-                    </a:lnB>
-                  </a:tcPr>
-                </a:tc>
-              </a:tr>
-              <a:tr h="224028">
-                <a:tc>
-                  <a:txBody>
-                    <a:bodyPr/>
-                    <a:lstStyle/>
-                    <a:p>
-                      <a:pPr algn="l" indent="0" marL="0">
-                        <a:buNone/>
-                      </a:pPr>
-                      <a:r>
-                        <a:rPr lang="en-US" sz="850" b="1" dirty="0">
-                          <a:solidFill>
-                            <a:srgbClr val="1F2933"/>
-                          </a:solidFill>
-                          <a:latin typeface="Calibri" pitchFamily="34" charset="0"/>
-                          <a:ea typeface="Calibri" pitchFamily="34" charset="-122"/>
-                          <a:cs typeface="Calibri" pitchFamily="34" charset="-120"/>
-                        </a:rPr>
-                        <a:t>RIVIERA PARK</a:t>
-                      </a:r>
-                      <a:endParaRPr lang="en-US" sz="850" dirty="0">
-                        <a:latin typeface="Calibri" charset="0"/>
-                        <a:ea typeface="Calibri" charset="0"/>
-                        <a:cs typeface="Calibri" charset="0"/>
-                      </a:endParaRPr>
-                    </a:p>
-                  </a:txBody>
-                  <a:tcPr marL="64008" marR="64008" marT="0" marB="0" anchor="ctr">
-                    <a:lnL w="6350" cap="flat" cmpd="sng" algn="ctr">
-                      <a:solidFill>
-                        <a:srgbClr val="D5DBE3"/>
-                      </a:solidFill>
-                      <a:prstDash val="solid"/>
-                      <a:round/>
-                      <a:headEnd type="none" w="med" len="med"/>
-                      <a:tailEnd type="none" w="med" len="med"/>
-                    </a:lnL>
-                    <a:lnR w="6350" cap="flat" cmpd="sng" algn="ctr">
-                      <a:solidFill>
-                        <a:srgbClr val="D5DBE3"/>
-                      </a:solidFill>
-                      <a:prstDash val="solid"/>
-                      <a:round/>
-                      <a:headEnd type="none" w="med" len="med"/>
-                      <a:tailEnd type="none" w="med" len="med"/>
-                    </a:lnR>
-                    <a:lnT w="6350" cap="flat" cmpd="sng" algn="ctr">
-                      <a:solidFill>
-                        <a:srgbClr val="D5DBE3"/>
-                      </a:solidFill>
-                      <a:prstDash val="solid"/>
-                      <a:round/>
-                      <a:headEnd type="none" w="med" len="med"/>
-                      <a:tailEnd type="none" w="med" len="med"/>
-                    </a:lnT>
-                    <a:lnB w="6350" cap="flat" cmpd="sng" algn="ctr">
-                      <a:solidFill>
-                        <a:srgbClr val="D5DBE3"/>
-                      </a:solidFill>
-                      <a:prstDash val="solid"/>
-                      <a:round/>
-                      <a:headEnd type="none" w="med" len="med"/>
-                      <a:tailEnd type="none" w="med" len="med"/>
-                    </a:lnB>
-                  </a:tcPr>
-                </a:tc>
-                <a:tc>
-                  <a:txBody>
-                    <a:bodyPr/>
-                    <a:lstStyle/>
-                    <a:p>
-                      <a:pPr algn="r" indent="0" marL="0">
-                        <a:buNone/>
-                      </a:pPr>
-                      <a:r>
-                        <a:rPr lang="en-US" sz="850" dirty="0">
-                          <a:solidFill>
-                            <a:srgbClr val="1F2933"/>
-                          </a:solidFill>
-                          <a:latin typeface="Calibri" pitchFamily="34" charset="0"/>
-                          <a:ea typeface="Calibri" pitchFamily="34" charset="-122"/>
-                          <a:cs typeface="Calibri" pitchFamily="34" charset="-120"/>
-                        </a:rPr>
-                        <a:t>1,5</a:t>
-                      </a:r>
-                      <a:endParaRPr lang="en-US" sz="850" dirty="0">
-                        <a:latin typeface="Calibri" charset="0"/>
-                        <a:ea typeface="Calibri" charset="0"/>
-                        <a:cs typeface="Calibri" charset="0"/>
-                      </a:endParaRPr>
-                    </a:p>
-                  </a:txBody>
-                  <a:tcPr marL="64008" marR="64008" marT="0" marB="0" anchor="ctr">
-                    <a:lnL w="6350" cap="flat" cmpd="sng" algn="ctr">
-                      <a:solidFill>
-                        <a:srgbClr val="D5DBE3"/>
-                      </a:solidFill>
-                      <a:prstDash val="solid"/>
-                      <a:round/>
-                      <a:headEnd type="none" w="med" len="med"/>
-                      <a:tailEnd type="none" w="med" len="med"/>
-                    </a:lnL>
-                    <a:lnR w="6350" cap="flat" cmpd="sng" algn="ctr">
-                      <a:solidFill>
-                        <a:srgbClr val="D5DBE3"/>
-                      </a:solidFill>
-                      <a:prstDash val="solid"/>
-                      <a:round/>
-                      <a:headEnd type="none" w="med" len="med"/>
-                      <a:tailEnd type="none" w="med" len="med"/>
-                    </a:lnR>
-                    <a:lnT w="6350" cap="flat" cmpd="sng" algn="ctr">
-                      <a:solidFill>
-                        <a:srgbClr val="D5DBE3"/>
-                      </a:solidFill>
-                      <a:prstDash val="solid"/>
-                      <a:round/>
-                      <a:headEnd type="none" w="med" len="med"/>
-                      <a:tailEnd type="none" w="med" len="med"/>
-                    </a:lnT>
-                    <a:lnB w="6350" cap="flat" cmpd="sng" algn="ctr">
-                      <a:solidFill>
-                        <a:srgbClr val="D5DBE3"/>
-                      </a:solidFill>
-                      <a:prstDash val="solid"/>
-                      <a:round/>
-                      <a:headEnd type="none" w="med" len="med"/>
-                      <a:tailEnd type="none" w="med" len="med"/>
-                    </a:lnB>
-                  </a:tcPr>
-                </a:tc>
-                <a:tc>
-                  <a:txBody>
-                    <a:bodyPr/>
-                    <a:lstStyle/>
-                    <a:p>
-                      <a:pPr algn="r" indent="0" marL="0">
-                        <a:buNone/>
-                      </a:pPr>
-                      <a:r>
-                        <a:rPr lang="en-US" sz="850" dirty="0">
-                          <a:solidFill>
-                            <a:srgbClr val="1F2933"/>
-                          </a:solidFill>
-                          <a:latin typeface="Calibri" pitchFamily="34" charset="0"/>
-                          <a:ea typeface="Calibri" pitchFamily="34" charset="-122"/>
-                          <a:cs typeface="Calibri" pitchFamily="34" charset="-120"/>
-                        </a:rPr>
-                        <a:t>-88,5</a:t>
-                      </a:r>
-                      <a:endParaRPr lang="en-US" sz="850" dirty="0">
-                        <a:latin typeface="Calibri" charset="0"/>
-                        <a:ea typeface="Calibri" charset="0"/>
-                        <a:cs typeface="Calibri" charset="0"/>
-                      </a:endParaRPr>
-                    </a:p>
-                  </a:txBody>
-                  <a:tcPr marL="64008" marR="64008" marT="0" marB="0" anchor="ctr">
-                    <a:lnL w="6350" cap="flat" cmpd="sng" algn="ctr">
-                      <a:solidFill>
-                        <a:srgbClr val="D5DBE3"/>
-                      </a:solidFill>
-                      <a:prstDash val="solid"/>
-                      <a:round/>
-                      <a:headEnd type="none" w="med" len="med"/>
-                      <a:tailEnd type="none" w="med" len="med"/>
-                    </a:lnL>
-                    <a:lnR w="6350" cap="flat" cmpd="sng" algn="ctr">
-                      <a:solidFill>
-                        <a:srgbClr val="D5DBE3"/>
-                      </a:solidFill>
-                      <a:prstDash val="solid"/>
-                      <a:round/>
-                      <a:headEnd type="none" w="med" len="med"/>
-                      <a:tailEnd type="none" w="med" len="med"/>
-                    </a:lnR>
-                    <a:lnT w="6350" cap="flat" cmpd="sng" algn="ctr">
-                      <a:solidFill>
-                        <a:srgbClr val="D5DBE3"/>
-                      </a:solidFill>
-                      <a:prstDash val="solid"/>
-                      <a:round/>
-                      <a:headEnd type="none" w="med" len="med"/>
-                      <a:tailEnd type="none" w="med" len="med"/>
-                    </a:lnT>
-                    <a:lnB w="6350" cap="flat" cmpd="sng" algn="ctr">
-                      <a:solidFill>
-                        <a:srgbClr val="D5DBE3"/>
-                      </a:solidFill>
-                      <a:prstDash val="solid"/>
-                      <a:round/>
-                      <a:headEnd type="none" w="med" len="med"/>
-                      <a:tailEnd type="none" w="med" len="med"/>
-                    </a:lnB>
-                  </a:tcPr>
-                </a:tc>
-                <a:tc>
-                  <a:txBody>
-                    <a:bodyPr/>
-                    <a:lstStyle/>
-                    <a:p>
-                      <a:pPr algn="r" indent="0" marL="0">
-                        <a:buNone/>
-                      </a:pPr>
-                      <a:r>
-                        <a:rPr lang="en-US" sz="850" dirty="0">
-                          <a:solidFill>
-                            <a:srgbClr val="1F2933"/>
-                          </a:solidFill>
-                          <a:latin typeface="Calibri" pitchFamily="34" charset="0"/>
-                          <a:ea typeface="Calibri" pitchFamily="34" charset="-122"/>
-                          <a:cs typeface="Calibri" pitchFamily="34" charset="-120"/>
-                        </a:rPr>
-                        <a:t>500,0</a:t>
-                      </a:r>
-                      <a:endParaRPr lang="en-US" sz="850" dirty="0">
-                        <a:latin typeface="Calibri" charset="0"/>
-                        <a:ea typeface="Calibri" charset="0"/>
-                        <a:cs typeface="Calibri" charset="0"/>
-                      </a:endParaRPr>
-                    </a:p>
-                  </a:txBody>
-                  <a:tcPr marL="64008" marR="64008" marT="0" marB="0" anchor="ctr">
-                    <a:lnL w="6350" cap="flat" cmpd="sng" algn="ctr">
-                      <a:solidFill>
-                        <a:srgbClr val="D5DBE3"/>
-                      </a:solidFill>
-                      <a:prstDash val="solid"/>
-                      <a:round/>
-                      <a:headEnd type="none" w="med" len="med"/>
-                      <a:tailEnd type="none" w="med" len="med"/>
-                    </a:lnL>
-                    <a:lnR w="6350" cap="flat" cmpd="sng" algn="ctr">
-                      <a:solidFill>
-                        <a:srgbClr val="D5DBE3"/>
-                      </a:solidFill>
-                      <a:prstDash val="solid"/>
-                      <a:round/>
-                      <a:headEnd type="none" w="med" len="med"/>
-                      <a:tailEnd type="none" w="med" len="med"/>
-                    </a:lnR>
-                    <a:lnT w="6350" cap="flat" cmpd="sng" algn="ctr">
-                      <a:solidFill>
-                        <a:srgbClr val="D5DBE3"/>
-                      </a:solidFill>
-                      <a:prstDash val="solid"/>
-                      <a:round/>
-                      <a:headEnd type="none" w="med" len="med"/>
-                      <a:tailEnd type="none" w="med" len="med"/>
-                    </a:lnT>
-                    <a:lnB w="6350" cap="flat" cmpd="sng" algn="ctr">
-                      <a:solidFill>
-                        <a:srgbClr val="D5DBE3"/>
-                      </a:solidFill>
-                      <a:prstDash val="solid"/>
-                      <a:round/>
-                      <a:headEnd type="none" w="med" len="med"/>
-                      <a:tailEnd type="none" w="med" len="med"/>
-                    </a:lnB>
-                  </a:tcPr>
-                </a:tc>
-                <a:tc>
-                  <a:txBody>
-                    <a:bodyPr/>
-                    <a:lstStyle/>
-                    <a:p>
-                      <a:pPr algn="r" indent="0" marL="0">
-                        <a:buNone/>
-                      </a:pPr>
-                      <a:r>
-                        <a:rPr lang="en-US" sz="850" b="1" dirty="0">
-                          <a:solidFill>
-                            <a:srgbClr val="5E9B7E"/>
-                          </a:solidFill>
-                          <a:latin typeface="Calibri" pitchFamily="34" charset="0"/>
-                          <a:ea typeface="Calibri" pitchFamily="34" charset="-122"/>
-                          <a:cs typeface="Calibri" pitchFamily="34" charset="-120"/>
-                        </a:rPr>
-                        <a:t>412,9</a:t>
-                      </a:r>
-                      <a:endParaRPr lang="en-US" sz="850" dirty="0">
-                        <a:latin typeface="Calibri" charset="0"/>
-                        <a:ea typeface="Calibri" charset="0"/>
-                        <a:cs typeface="Calibri" charset="0"/>
-                      </a:endParaRPr>
-                    </a:p>
-                  </a:txBody>
-                  <a:tcPr marL="64008" marR="64008" marT="0" marB="0" anchor="ctr">
-                    <a:lnL w="6350" cap="flat" cmpd="sng" algn="ctr">
-                      <a:solidFill>
-                        <a:srgbClr val="D5DBE3"/>
-                      </a:solidFill>
-                      <a:prstDash val="solid"/>
-                      <a:round/>
-                      <a:headEnd type="none" w="med" len="med"/>
-                      <a:tailEnd type="none" w="med" len="med"/>
-                    </a:lnL>
-                    <a:lnR w="6350" cap="flat" cmpd="sng" algn="ctr">
-                      <a:solidFill>
-                        <a:srgbClr val="D5DBE3"/>
-                      </a:solidFill>
-                      <a:prstDash val="solid"/>
-                      <a:round/>
-                      <a:headEnd type="none" w="med" len="med"/>
-                      <a:tailEnd type="none" w="med" len="med"/>
-                    </a:lnR>
-                    <a:lnT w="6350" cap="flat" cmpd="sng" algn="ctr">
-                      <a:solidFill>
-                        <a:srgbClr val="D5DBE3"/>
-                      </a:solidFill>
-                      <a:prstDash val="solid"/>
-                      <a:round/>
-                      <a:headEnd type="none" w="med" len="med"/>
-                      <a:tailEnd type="none" w="med" len="med"/>
-                    </a:lnT>
-                    <a:lnB w="6350" cap="flat" cmpd="sng" algn="ctr">
-                      <a:solidFill>
-                        <a:srgbClr val="D5DBE3"/>
-                      </a:solidFill>
-                      <a:prstDash val="solid"/>
-                      <a:round/>
-                      <a:headEnd type="none" w="med" len="med"/>
-                      <a:tailEnd type="none" w="med" len="med"/>
-                    </a:lnB>
-                  </a:tcPr>
-                </a:tc>
-                <a:tc>
-                  <a:txBody>
-                    <a:bodyPr/>
-                    <a:lstStyle/>
-                    <a:p>
-                      <a:pPr algn="r" indent="0" marL="0">
-                        <a:buNone/>
-                      </a:pPr>
-                      <a:r>
-                        <a:rPr lang="en-US" sz="850" dirty="0">
-                          <a:solidFill>
-                            <a:srgbClr val="1F2933"/>
-                          </a:solidFill>
-                          <a:latin typeface="Calibri" pitchFamily="34" charset="0"/>
-                          <a:ea typeface="Calibri" pitchFamily="34" charset="-122"/>
-                          <a:cs typeface="Calibri" pitchFamily="34" charset="-120"/>
-                        </a:rPr>
-                        <a:t>–</a:t>
-                      </a:r>
-                      <a:endParaRPr lang="en-US" sz="850" dirty="0">
-                        <a:latin typeface="Calibri" charset="0"/>
-                        <a:ea typeface="Calibri" charset="0"/>
-                        <a:cs typeface="Calibri" charset="0"/>
-                      </a:endParaRPr>
-                    </a:p>
-                  </a:txBody>
-                  <a:tcPr marL="64008" marR="64008" marT="0" marB="0" anchor="ctr">
-                    <a:lnL w="6350" cap="flat" cmpd="sng" algn="ctr">
-                      <a:solidFill>
-                        <a:srgbClr val="D5DBE3"/>
-                      </a:solidFill>
-                      <a:prstDash val="solid"/>
-                      <a:round/>
-                      <a:headEnd type="none" w="med" len="med"/>
-                      <a:tailEnd type="none" w="med" len="med"/>
-                    </a:lnL>
-                    <a:lnR w="6350" cap="flat" cmpd="sng" algn="ctr">
-                      <a:solidFill>
-                        <a:srgbClr val="D5DBE3"/>
-                      </a:solidFill>
-                      <a:prstDash val="solid"/>
-                      <a:round/>
-                      <a:headEnd type="none" w="med" len="med"/>
-                      <a:tailEnd type="none" w="med" len="med"/>
-                    </a:lnR>
-                    <a:lnT w="6350" cap="flat" cmpd="sng" algn="ctr">
-                      <a:solidFill>
-                        <a:srgbClr val="D5DBE3"/>
-                      </a:solidFill>
-                      <a:prstDash val="solid"/>
-                      <a:round/>
-                      <a:headEnd type="none" w="med" len="med"/>
-                      <a:tailEnd type="none" w="med" len="med"/>
-                    </a:lnT>
-                    <a:lnB w="6350" cap="flat" cmpd="sng" algn="ctr">
-                      <a:solidFill>
-                        <a:srgbClr val="D5DBE3"/>
-                      </a:solidFill>
-                      <a:prstDash val="solid"/>
-                      <a:round/>
-                      <a:headEnd type="none" w="med" len="med"/>
-                      <a:tailEnd type="none" w="med" len="med"/>
-                    </a:lnB>
-                  </a:tcPr>
-                </a:tc>
-              </a:tr>
-              <a:tr h="224028">
-                <a:tc>
-                  <a:txBody>
-                    <a:bodyPr/>
-                    <a:lstStyle/>
-                    <a:p>
-                      <a:pPr algn="l" indent="0" marL="0">
-                        <a:buNone/>
-                      </a:pPr>
-                      <a:r>
-                        <a:rPr lang="en-US" sz="850" b="1" dirty="0">
-                          <a:solidFill>
-                            <a:srgbClr val="1F2933"/>
-                          </a:solidFill>
-                          <a:latin typeface="Calibri" pitchFamily="34" charset="0"/>
-                          <a:ea typeface="Calibri" pitchFamily="34" charset="-122"/>
-                          <a:cs typeface="Calibri" pitchFamily="34" charset="-120"/>
-                        </a:rPr>
-                        <a:t>SCO AO</a:t>
-                      </a:r>
-                      <a:endParaRPr lang="en-US" sz="850" dirty="0">
-                        <a:latin typeface="Calibri" charset="0"/>
-                        <a:ea typeface="Calibri" charset="0"/>
-                        <a:cs typeface="Calibri" charset="0"/>
-                      </a:endParaRPr>
-                    </a:p>
-                  </a:txBody>
-                  <a:tcPr marL="64008" marR="64008" marT="0" marB="0" anchor="ctr">
-                    <a:lnL w="6350" cap="flat" cmpd="sng" algn="ctr">
-                      <a:solidFill>
-                        <a:srgbClr val="D5DBE3"/>
-                      </a:solidFill>
-                      <a:prstDash val="solid"/>
-                      <a:round/>
-                      <a:headEnd type="none" w="med" len="med"/>
-                      <a:tailEnd type="none" w="med" len="med"/>
-                    </a:lnL>
-                    <a:lnR w="6350" cap="flat" cmpd="sng" algn="ctr">
-                      <a:solidFill>
-                        <a:srgbClr val="D5DBE3"/>
-                      </a:solidFill>
-                      <a:prstDash val="solid"/>
-                      <a:round/>
-                      <a:headEnd type="none" w="med" len="med"/>
-                      <a:tailEnd type="none" w="med" len="med"/>
-                    </a:lnR>
-                    <a:lnT w="6350" cap="flat" cmpd="sng" algn="ctr">
-                      <a:solidFill>
-                        <a:srgbClr val="D5DBE3"/>
-                      </a:solidFill>
-                      <a:prstDash val="solid"/>
-                      <a:round/>
-                      <a:headEnd type="none" w="med" len="med"/>
-                      <a:tailEnd type="none" w="med" len="med"/>
-                    </a:lnT>
-                    <a:lnB w="6350" cap="flat" cmpd="sng" algn="ctr">
-                      <a:solidFill>
-                        <a:srgbClr val="D5DBE3"/>
-                      </a:solidFill>
-                      <a:prstDash val="solid"/>
-                      <a:round/>
-                      <a:headEnd type="none" w="med" len="med"/>
-                      <a:tailEnd type="none" w="med" len="med"/>
-                    </a:lnB>
-                  </a:tcPr>
-                </a:tc>
-                <a:tc>
-                  <a:txBody>
-                    <a:bodyPr/>
-                    <a:lstStyle/>
-                    <a:p>
-                      <a:pPr algn="r" indent="0" marL="0">
-                        <a:buNone/>
-                      </a:pPr>
-                      <a:r>
-                        <a:rPr lang="en-US" sz="850" dirty="0">
-                          <a:solidFill>
-                            <a:srgbClr val="1F2933"/>
-                          </a:solidFill>
-                          <a:latin typeface="Calibri" pitchFamily="34" charset="0"/>
-                          <a:ea typeface="Calibri" pitchFamily="34" charset="-122"/>
-                          <a:cs typeface="Calibri" pitchFamily="34" charset="-120"/>
-                        </a:rPr>
-                        <a:t>29,1</a:t>
-                      </a:r>
-                      <a:endParaRPr lang="en-US" sz="850" dirty="0">
-                        <a:latin typeface="Calibri" charset="0"/>
-                        <a:ea typeface="Calibri" charset="0"/>
-                        <a:cs typeface="Calibri" charset="0"/>
-                      </a:endParaRPr>
-                    </a:p>
-                  </a:txBody>
-                  <a:tcPr marL="64008" marR="64008" marT="0" marB="0" anchor="ctr">
-                    <a:lnL w="6350" cap="flat" cmpd="sng" algn="ctr">
-                      <a:solidFill>
-                        <a:srgbClr val="D5DBE3"/>
-                      </a:solidFill>
-                      <a:prstDash val="solid"/>
-                      <a:round/>
-                      <a:headEnd type="none" w="med" len="med"/>
-                      <a:tailEnd type="none" w="med" len="med"/>
-                    </a:lnL>
-                    <a:lnR w="6350" cap="flat" cmpd="sng" algn="ctr">
-                      <a:solidFill>
-                        <a:srgbClr val="D5DBE3"/>
-                      </a:solidFill>
-                      <a:prstDash val="solid"/>
-                      <a:round/>
-                      <a:headEnd type="none" w="med" len="med"/>
-                      <a:tailEnd type="none" w="med" len="med"/>
-                    </a:lnR>
-                    <a:lnT w="6350" cap="flat" cmpd="sng" algn="ctr">
-                      <a:solidFill>
-                        <a:srgbClr val="D5DBE3"/>
-                      </a:solidFill>
-                      <a:prstDash val="solid"/>
-                      <a:round/>
-                      <a:headEnd type="none" w="med" len="med"/>
-                      <a:tailEnd type="none" w="med" len="med"/>
-                    </a:lnT>
-                    <a:lnB w="6350" cap="flat" cmpd="sng" algn="ctr">
-                      <a:solidFill>
-                        <a:srgbClr val="D5DBE3"/>
-                      </a:solidFill>
-                      <a:prstDash val="solid"/>
-                      <a:round/>
-                      <a:headEnd type="none" w="med" len="med"/>
-                      <a:tailEnd type="none" w="med" len="med"/>
-                    </a:lnB>
-                  </a:tcPr>
-                </a:tc>
-                <a:tc>
-                  <a:txBody>
-                    <a:bodyPr/>
-                    <a:lstStyle/>
-                    <a:p>
-                      <a:pPr algn="r" indent="0" marL="0">
-                        <a:buNone/>
-                      </a:pPr>
-                      <a:r>
-                        <a:rPr lang="en-US" sz="850" dirty="0">
-                          <a:solidFill>
-                            <a:srgbClr val="1F2933"/>
-                          </a:solidFill>
-                          <a:latin typeface="Calibri" pitchFamily="34" charset="0"/>
-                          <a:ea typeface="Calibri" pitchFamily="34" charset="-122"/>
-                          <a:cs typeface="Calibri" pitchFamily="34" charset="-120"/>
-                        </a:rPr>
-                        <a:t>-7,9</a:t>
-                      </a:r>
-                      <a:endParaRPr lang="en-US" sz="850" dirty="0">
-                        <a:latin typeface="Calibri" charset="0"/>
-                        <a:ea typeface="Calibri" charset="0"/>
-                        <a:cs typeface="Calibri" charset="0"/>
-                      </a:endParaRPr>
-                    </a:p>
-                  </a:txBody>
-                  <a:tcPr marL="64008" marR="64008" marT="0" marB="0" anchor="ctr">
-                    <a:lnL w="6350" cap="flat" cmpd="sng" algn="ctr">
-                      <a:solidFill>
-                        <a:srgbClr val="D5DBE3"/>
-                      </a:solidFill>
-                      <a:prstDash val="solid"/>
-                      <a:round/>
-                      <a:headEnd type="none" w="med" len="med"/>
-                      <a:tailEnd type="none" w="med" len="med"/>
-                    </a:lnL>
-                    <a:lnR w="6350" cap="flat" cmpd="sng" algn="ctr">
-                      <a:solidFill>
-                        <a:srgbClr val="D5DBE3"/>
-                      </a:solidFill>
-                      <a:prstDash val="solid"/>
-                      <a:round/>
-                      <a:headEnd type="none" w="med" len="med"/>
-                      <a:tailEnd type="none" w="med" len="med"/>
-                    </a:lnR>
-                    <a:lnT w="6350" cap="flat" cmpd="sng" algn="ctr">
-                      <a:solidFill>
-                        <a:srgbClr val="D5DBE3"/>
-                      </a:solidFill>
-                      <a:prstDash val="solid"/>
-                      <a:round/>
-                      <a:headEnd type="none" w="med" len="med"/>
-                      <a:tailEnd type="none" w="med" len="med"/>
-                    </a:lnT>
-                    <a:lnB w="6350" cap="flat" cmpd="sng" algn="ctr">
-                      <a:solidFill>
-                        <a:srgbClr val="D5DBE3"/>
-                      </a:solidFill>
-                      <a:prstDash val="solid"/>
-                      <a:round/>
-                      <a:headEnd type="none" w="med" len="med"/>
-                      <a:tailEnd type="none" w="med" len="med"/>
-                    </a:lnB>
-                  </a:tcPr>
-                </a:tc>
-                <a:tc>
-                  <a:txBody>
-                    <a:bodyPr/>
-                    <a:lstStyle/>
-                    <a:p>
-                      <a:pPr algn="r" indent="0" marL="0">
-                        <a:buNone/>
-                      </a:pPr>
-                      <a:r>
-                        <a:rPr lang="en-US" sz="850" dirty="0">
-                          <a:solidFill>
-                            <a:srgbClr val="1F2933"/>
-                          </a:solidFill>
-                          <a:latin typeface="Calibri" pitchFamily="34" charset="0"/>
-                          <a:ea typeface="Calibri" pitchFamily="34" charset="-122"/>
-                          <a:cs typeface="Calibri" pitchFamily="34" charset="-120"/>
-                        </a:rPr>
-                        <a:t>–</a:t>
-                      </a:r>
-                      <a:endParaRPr lang="en-US" sz="850" dirty="0">
-                        <a:latin typeface="Calibri" charset="0"/>
-                        <a:ea typeface="Calibri" charset="0"/>
-                        <a:cs typeface="Calibri" charset="0"/>
-                      </a:endParaRPr>
-                    </a:p>
-                  </a:txBody>
-                  <a:tcPr marL="64008" marR="64008" marT="0" marB="0" anchor="ctr">
-                    <a:lnL w="6350" cap="flat" cmpd="sng" algn="ctr">
-                      <a:solidFill>
-                        <a:srgbClr val="D5DBE3"/>
-                      </a:solidFill>
-                      <a:prstDash val="solid"/>
-                      <a:round/>
-                      <a:headEnd type="none" w="med" len="med"/>
-                      <a:tailEnd type="none" w="med" len="med"/>
-                    </a:lnL>
-                    <a:lnR w="6350" cap="flat" cmpd="sng" algn="ctr">
-                      <a:solidFill>
-                        <a:srgbClr val="D5DBE3"/>
-                      </a:solidFill>
-                      <a:prstDash val="solid"/>
-                      <a:round/>
-                      <a:headEnd type="none" w="med" len="med"/>
-                      <a:tailEnd type="none" w="med" len="med"/>
-                    </a:lnR>
-                    <a:lnT w="6350" cap="flat" cmpd="sng" algn="ctr">
-                      <a:solidFill>
-                        <a:srgbClr val="D5DBE3"/>
-                      </a:solidFill>
-                      <a:prstDash val="solid"/>
-                      <a:round/>
-                      <a:headEnd type="none" w="med" len="med"/>
-                      <a:tailEnd type="none" w="med" len="med"/>
-                    </a:lnT>
-                    <a:lnB w="6350" cap="flat" cmpd="sng" algn="ctr">
-                      <a:solidFill>
-                        <a:srgbClr val="D5DBE3"/>
-                      </a:solidFill>
-                      <a:prstDash val="solid"/>
-                      <a:round/>
-                      <a:headEnd type="none" w="med" len="med"/>
-                      <a:tailEnd type="none" w="med" len="med"/>
-                    </a:lnB>
-                  </a:tcPr>
-                </a:tc>
-                <a:tc>
-                  <a:txBody>
-                    <a:bodyPr/>
-                    <a:lstStyle/>
-                    <a:p>
-                      <a:pPr algn="r" indent="0" marL="0">
-                        <a:buNone/>
-                      </a:pPr>
-                      <a:r>
-                        <a:rPr lang="en-US" sz="850" b="1" dirty="0">
-                          <a:solidFill>
-                            <a:srgbClr val="5E9B7E"/>
-                          </a:solidFill>
-                          <a:latin typeface="Calibri" pitchFamily="34" charset="0"/>
-                          <a:ea typeface="Calibri" pitchFamily="34" charset="-122"/>
-                          <a:cs typeface="Calibri" pitchFamily="34" charset="-120"/>
-                        </a:rPr>
-                        <a:t>21,2</a:t>
-                      </a:r>
-                      <a:endParaRPr lang="en-US" sz="850" dirty="0">
-                        <a:latin typeface="Calibri" charset="0"/>
-                        <a:ea typeface="Calibri" charset="0"/>
-                        <a:cs typeface="Calibri" charset="0"/>
-                      </a:endParaRPr>
-                    </a:p>
-                  </a:txBody>
-                  <a:tcPr marL="64008" marR="64008" marT="0" marB="0" anchor="ctr">
-                    <a:lnL w="6350" cap="flat" cmpd="sng" algn="ctr">
-                      <a:solidFill>
-                        <a:srgbClr val="D5DBE3"/>
-                      </a:solidFill>
-                      <a:prstDash val="solid"/>
-                      <a:round/>
-                      <a:headEnd type="none" w="med" len="med"/>
-                      <a:tailEnd type="none" w="med" len="med"/>
-                    </a:lnL>
-                    <a:lnR w="6350" cap="flat" cmpd="sng" algn="ctr">
-                      <a:solidFill>
-                        <a:srgbClr val="D5DBE3"/>
-                      </a:solidFill>
-                      <a:prstDash val="solid"/>
-                      <a:round/>
-                      <a:headEnd type="none" w="med" len="med"/>
-                      <a:tailEnd type="none" w="med" len="med"/>
-                    </a:lnR>
-                    <a:lnT w="6350" cap="flat" cmpd="sng" algn="ctr">
-                      <a:solidFill>
-                        <a:srgbClr val="D5DBE3"/>
-                      </a:solidFill>
-                      <a:prstDash val="solid"/>
-                      <a:round/>
-                      <a:headEnd type="none" w="med" len="med"/>
-                      <a:tailEnd type="none" w="med" len="med"/>
-                    </a:lnT>
-                    <a:lnB w="6350" cap="flat" cmpd="sng" algn="ctr">
-                      <a:solidFill>
-                        <a:srgbClr val="D5DBE3"/>
-                      </a:solidFill>
-                      <a:prstDash val="solid"/>
-                      <a:round/>
-                      <a:headEnd type="none" w="med" len="med"/>
-                      <a:tailEnd type="none" w="med" len="med"/>
-                    </a:lnB>
-                  </a:tcPr>
-                </a:tc>
-                <a:tc>
-                  <a:txBody>
-                    <a:bodyPr/>
-                    <a:lstStyle/>
-                    <a:p>
-                      <a:pPr algn="r" indent="0" marL="0">
-                        <a:buNone/>
-                      </a:pPr>
-                      <a:r>
-                        <a:rPr lang="en-US" sz="850" b="1" dirty="0">
-                          <a:solidFill>
                             <a:srgbClr val="B3261E"/>
                           </a:solidFill>
                           <a:latin typeface="Calibri" pitchFamily="34" charset="0"/>
                           <a:ea typeface="Calibri" pitchFamily="34" charset="-122"/>
                           <a:cs typeface="Calibri" pitchFamily="34" charset="-120"/>
                         </a:rPr>
-                        <a:t>2,5</a:t>
+                        <a:t>25,6</a:t>
                       </a:r>
                       <a:endParaRPr lang="en-US" sz="850" dirty="0">
                         <a:latin typeface="Calibri" charset="0"/>
@@ -24597,7 +24721,7 @@
                           <a:ea typeface="Calibri" pitchFamily="34" charset="-122"/>
                           <a:cs typeface="Calibri" pitchFamily="34" charset="-120"/>
                         </a:rPr>
-                        <a:t>IMMONEUF</a:t>
+                        <a:t>FINAFRICA</a:t>
                       </a:r>
                       <a:endParaRPr lang="en-US" sz="850" dirty="0">
                         <a:latin typeface="Calibri" charset="0"/>
@@ -24662,7 +24786,7 @@
                           <a:ea typeface="Calibri" pitchFamily="34" charset="-122"/>
                           <a:cs typeface="Calibri" pitchFamily="34" charset="-120"/>
                         </a:rPr>
-                        <a:t>11,8</a:t>
+                        <a:t>35,1</a:t>
                       </a:r>
                       <a:endParaRPr lang="en-US" sz="850" dirty="0">
                         <a:latin typeface="Calibri" charset="0"/>
@@ -24727,7 +24851,7 @@
                           <a:ea typeface="Calibri" pitchFamily="34" charset="-122"/>
                           <a:cs typeface="Calibri" pitchFamily="34" charset="-120"/>
                         </a:rPr>
-                        <a:t>-37,3</a:t>
+                        <a:t>-175,2</a:t>
                       </a:r>
                       <a:endParaRPr lang="en-US" sz="850" dirty="0">
                         <a:latin typeface="Calibri" charset="0"/>
@@ -24857,7 +24981,7 @@
                           <a:ea typeface="Calibri" pitchFamily="34" charset="-122"/>
                           <a:cs typeface="Calibri" pitchFamily="34" charset="-120"/>
                         </a:rPr>
-                        <a:t>-25,6</a:t>
+                        <a:t>-140,1</a:t>
                       </a:r>
                       <a:endParaRPr lang="en-US" sz="850" dirty="0">
                         <a:latin typeface="Calibri" charset="0"/>
@@ -24925,7 +25049,7 @@
                           <a:ea typeface="Calibri" pitchFamily="34" charset="-122"/>
                           <a:cs typeface="Calibri" pitchFamily="34" charset="-120"/>
                         </a:rPr>
-                        <a:t>25,6</a:t>
+                        <a:t>140,2</a:t>
                       </a:r>
                       <a:endParaRPr lang="en-US" sz="850" dirty="0">
                         <a:latin typeface="Calibri" charset="0"/>
@@ -24995,7 +25119,7 @@
                           <a:ea typeface="Calibri" pitchFamily="34" charset="-122"/>
                           <a:cs typeface="Calibri" pitchFamily="34" charset="-120"/>
                         </a:rPr>
-                        <a:t>FINAFRICA</a:t>
+                        <a:t>INFI</a:t>
                       </a:r>
                       <a:endParaRPr lang="en-US" sz="850" dirty="0">
                         <a:latin typeface="Calibri" charset="0"/>
@@ -25060,7 +25184,7 @@
                           <a:ea typeface="Calibri" pitchFamily="34" charset="-122"/>
                           <a:cs typeface="Calibri" pitchFamily="34" charset="-120"/>
                         </a:rPr>
-                        <a:t>35,1</a:t>
+                        <a:t>2,8</a:t>
                       </a:r>
                       <a:endParaRPr lang="en-US" sz="850" dirty="0">
                         <a:latin typeface="Calibri" charset="0"/>
@@ -25125,7 +25249,7 @@
                           <a:ea typeface="Calibri" pitchFamily="34" charset="-122"/>
                           <a:cs typeface="Calibri" pitchFamily="34" charset="-120"/>
                         </a:rPr>
-                        <a:t>-175,2</a:t>
+                        <a:t>–</a:t>
                       </a:r>
                       <a:endParaRPr lang="en-US" sz="850" dirty="0">
                         <a:latin typeface="Calibri" charset="0"/>
@@ -25249,13 +25373,405 @@
                       <a:r>
                         <a:rPr lang="en-US" sz="850" b="1" dirty="0">
                           <a:solidFill>
+                            <a:srgbClr val="5E9B7E"/>
+                          </a:solidFill>
+                          <a:latin typeface="Calibri" pitchFamily="34" charset="0"/>
+                          <a:ea typeface="Calibri" pitchFamily="34" charset="-122"/>
+                          <a:cs typeface="Calibri" pitchFamily="34" charset="-120"/>
+                        </a:rPr>
+                        <a:t>2,8</a:t>
+                      </a:r>
+                      <a:endParaRPr lang="en-US" sz="850" dirty="0">
+                        <a:latin typeface="Calibri" charset="0"/>
+                        <a:ea typeface="Calibri" charset="0"/>
+                        <a:cs typeface="Calibri" charset="0"/>
+                      </a:endParaRPr>
+                    </a:p>
+                  </a:txBody>
+                  <a:tcPr marL="64008" marR="64008" marT="0" marB="0" anchor="ctr">
+                    <a:lnL w="6350" cap="flat" cmpd="sng" algn="ctr">
+                      <a:solidFill>
+                        <a:srgbClr val="D5DBE3"/>
+                      </a:solidFill>
+                      <a:prstDash val="solid"/>
+                      <a:round/>
+                      <a:headEnd type="none" w="med" len="med"/>
+                      <a:tailEnd type="none" w="med" len="med"/>
+                    </a:lnL>
+                    <a:lnR w="6350" cap="flat" cmpd="sng" algn="ctr">
+                      <a:solidFill>
+                        <a:srgbClr val="D5DBE3"/>
+                      </a:solidFill>
+                      <a:prstDash val="solid"/>
+                      <a:round/>
+                      <a:headEnd type="none" w="med" len="med"/>
+                      <a:tailEnd type="none" w="med" len="med"/>
+                    </a:lnR>
+                    <a:lnT w="6350" cap="flat" cmpd="sng" algn="ctr">
+                      <a:solidFill>
+                        <a:srgbClr val="D5DBE3"/>
+                      </a:solidFill>
+                      <a:prstDash val="solid"/>
+                      <a:round/>
+                      <a:headEnd type="none" w="med" len="med"/>
+                      <a:tailEnd type="none" w="med" len="med"/>
+                    </a:lnT>
+                    <a:lnB w="6350" cap="flat" cmpd="sng" algn="ctr">
+                      <a:solidFill>
+                        <a:srgbClr val="D5DBE3"/>
+                      </a:solidFill>
+                      <a:prstDash val="solid"/>
+                      <a:round/>
+                      <a:headEnd type="none" w="med" len="med"/>
+                      <a:tailEnd type="none" w="med" len="med"/>
+                    </a:lnB>
+                  </a:tcPr>
+                </a:tc>
+                <a:tc>
+                  <a:txBody>
+                    <a:bodyPr/>
+                    <a:lstStyle/>
+                    <a:p>
+                      <a:pPr algn="r" indent="0" marL="0">
+                        <a:buNone/>
+                      </a:pPr>
+                      <a:r>
+                        <a:rPr lang="en-US" sz="850" dirty="0">
+                          <a:solidFill>
+                            <a:srgbClr val="1F2933"/>
+                          </a:solidFill>
+                          <a:latin typeface="Calibri" pitchFamily="34" charset="0"/>
+                          <a:ea typeface="Calibri" pitchFamily="34" charset="-122"/>
+                          <a:cs typeface="Calibri" pitchFamily="34" charset="-120"/>
+                        </a:rPr>
+                        <a:t>–</a:t>
+                      </a:r>
+                      <a:endParaRPr lang="en-US" sz="850" dirty="0">
+                        <a:latin typeface="Calibri" charset="0"/>
+                        <a:ea typeface="Calibri" charset="0"/>
+                        <a:cs typeface="Calibri" charset="0"/>
+                      </a:endParaRPr>
+                    </a:p>
+                  </a:txBody>
+                  <a:tcPr marL="64008" marR="64008" marT="0" marB="0" anchor="ctr">
+                    <a:lnL w="6350" cap="flat" cmpd="sng" algn="ctr">
+                      <a:solidFill>
+                        <a:srgbClr val="D5DBE3"/>
+                      </a:solidFill>
+                      <a:prstDash val="solid"/>
+                      <a:round/>
+                      <a:headEnd type="none" w="med" len="med"/>
+                      <a:tailEnd type="none" w="med" len="med"/>
+                    </a:lnL>
+                    <a:lnR w="6350" cap="flat" cmpd="sng" algn="ctr">
+                      <a:solidFill>
+                        <a:srgbClr val="D5DBE3"/>
+                      </a:solidFill>
+                      <a:prstDash val="solid"/>
+                      <a:round/>
+                      <a:headEnd type="none" w="med" len="med"/>
+                      <a:tailEnd type="none" w="med" len="med"/>
+                    </a:lnR>
+                    <a:lnT w="6350" cap="flat" cmpd="sng" algn="ctr">
+                      <a:solidFill>
+                        <a:srgbClr val="D5DBE3"/>
+                      </a:solidFill>
+                      <a:prstDash val="solid"/>
+                      <a:round/>
+                      <a:headEnd type="none" w="med" len="med"/>
+                      <a:tailEnd type="none" w="med" len="med"/>
+                    </a:lnT>
+                    <a:lnB w="6350" cap="flat" cmpd="sng" algn="ctr">
+                      <a:solidFill>
+                        <a:srgbClr val="D5DBE3"/>
+                      </a:solidFill>
+                      <a:prstDash val="solid"/>
+                      <a:round/>
+                      <a:headEnd type="none" w="med" len="med"/>
+                      <a:tailEnd type="none" w="med" len="med"/>
+                    </a:lnB>
+                  </a:tcPr>
+                </a:tc>
+              </a:tr>
+              <a:tr h="224028">
+                <a:tc>
+                  <a:txBody>
+                    <a:bodyPr/>
+                    <a:lstStyle/>
+                    <a:p>
+                      <a:pPr algn="l" indent="0" marL="0">
+                        <a:buNone/>
+                      </a:pPr>
+                      <a:r>
+                        <a:rPr lang="en-US" sz="850" b="1" dirty="0">
+                          <a:solidFill>
+                            <a:srgbClr val="1F2933"/>
+                          </a:solidFill>
+                          <a:latin typeface="Calibri" pitchFamily="34" charset="0"/>
+                          <a:ea typeface="Calibri" pitchFamily="34" charset="-122"/>
+                          <a:cs typeface="Calibri" pitchFamily="34" charset="-120"/>
+                        </a:rPr>
+                        <a:t>ODALYS CI</a:t>
+                      </a:r>
+                      <a:endParaRPr lang="en-US" sz="850" dirty="0">
+                        <a:latin typeface="Calibri" charset="0"/>
+                        <a:ea typeface="Calibri" charset="0"/>
+                        <a:cs typeface="Calibri" charset="0"/>
+                      </a:endParaRPr>
+                    </a:p>
+                  </a:txBody>
+                  <a:tcPr marL="64008" marR="64008" marT="0" marB="0" anchor="ctr">
+                    <a:lnL w="6350" cap="flat" cmpd="sng" algn="ctr">
+                      <a:solidFill>
+                        <a:srgbClr val="D5DBE3"/>
+                      </a:solidFill>
+                      <a:prstDash val="solid"/>
+                      <a:round/>
+                      <a:headEnd type="none" w="med" len="med"/>
+                      <a:tailEnd type="none" w="med" len="med"/>
+                    </a:lnL>
+                    <a:lnR w="6350" cap="flat" cmpd="sng" algn="ctr">
+                      <a:solidFill>
+                        <a:srgbClr val="D5DBE3"/>
+                      </a:solidFill>
+                      <a:prstDash val="solid"/>
+                      <a:round/>
+                      <a:headEnd type="none" w="med" len="med"/>
+                      <a:tailEnd type="none" w="med" len="med"/>
+                    </a:lnR>
+                    <a:lnT w="6350" cap="flat" cmpd="sng" algn="ctr">
+                      <a:solidFill>
+                        <a:srgbClr val="D5DBE3"/>
+                      </a:solidFill>
+                      <a:prstDash val="solid"/>
+                      <a:round/>
+                      <a:headEnd type="none" w="med" len="med"/>
+                      <a:tailEnd type="none" w="med" len="med"/>
+                    </a:lnT>
+                    <a:lnB w="6350" cap="flat" cmpd="sng" algn="ctr">
+                      <a:solidFill>
+                        <a:srgbClr val="D5DBE3"/>
+                      </a:solidFill>
+                      <a:prstDash val="solid"/>
+                      <a:round/>
+                      <a:headEnd type="none" w="med" len="med"/>
+                      <a:tailEnd type="none" w="med" len="med"/>
+                    </a:lnB>
+                  </a:tcPr>
+                </a:tc>
+                <a:tc>
+                  <a:txBody>
+                    <a:bodyPr/>
+                    <a:lstStyle/>
+                    <a:p>
+                      <a:pPr algn="r" indent="0" marL="0">
+                        <a:buNone/>
+                      </a:pPr>
+                      <a:r>
+                        <a:rPr lang="en-US" sz="850" dirty="0">
+                          <a:solidFill>
+                            <a:srgbClr val="1F2933"/>
+                          </a:solidFill>
+                          <a:latin typeface="Calibri" pitchFamily="34" charset="0"/>
+                          <a:ea typeface="Calibri" pitchFamily="34" charset="-122"/>
+                          <a:cs typeface="Calibri" pitchFamily="34" charset="-120"/>
+                        </a:rPr>
+                        <a:t>6,1</a:t>
+                      </a:r>
+                      <a:endParaRPr lang="en-US" sz="850" dirty="0">
+                        <a:latin typeface="Calibri" charset="0"/>
+                        <a:ea typeface="Calibri" charset="0"/>
+                        <a:cs typeface="Calibri" charset="0"/>
+                      </a:endParaRPr>
+                    </a:p>
+                  </a:txBody>
+                  <a:tcPr marL="64008" marR="64008" marT="0" marB="0" anchor="ctr">
+                    <a:lnL w="6350" cap="flat" cmpd="sng" algn="ctr">
+                      <a:solidFill>
+                        <a:srgbClr val="D5DBE3"/>
+                      </a:solidFill>
+                      <a:prstDash val="solid"/>
+                      <a:round/>
+                      <a:headEnd type="none" w="med" len="med"/>
+                      <a:tailEnd type="none" w="med" len="med"/>
+                    </a:lnL>
+                    <a:lnR w="6350" cap="flat" cmpd="sng" algn="ctr">
+                      <a:solidFill>
+                        <a:srgbClr val="D5DBE3"/>
+                      </a:solidFill>
+                      <a:prstDash val="solid"/>
+                      <a:round/>
+                      <a:headEnd type="none" w="med" len="med"/>
+                      <a:tailEnd type="none" w="med" len="med"/>
+                    </a:lnR>
+                    <a:lnT w="6350" cap="flat" cmpd="sng" algn="ctr">
+                      <a:solidFill>
+                        <a:srgbClr val="D5DBE3"/>
+                      </a:solidFill>
+                      <a:prstDash val="solid"/>
+                      <a:round/>
+                      <a:headEnd type="none" w="med" len="med"/>
+                      <a:tailEnd type="none" w="med" len="med"/>
+                    </a:lnT>
+                    <a:lnB w="6350" cap="flat" cmpd="sng" algn="ctr">
+                      <a:solidFill>
+                        <a:srgbClr val="D5DBE3"/>
+                      </a:solidFill>
+                      <a:prstDash val="solid"/>
+                      <a:round/>
+                      <a:headEnd type="none" w="med" len="med"/>
+                      <a:tailEnd type="none" w="med" len="med"/>
+                    </a:lnB>
+                  </a:tcPr>
+                </a:tc>
+                <a:tc>
+                  <a:txBody>
+                    <a:bodyPr/>
+                    <a:lstStyle/>
+                    <a:p>
+                      <a:pPr algn="r" indent="0" marL="0">
+                        <a:buNone/>
+                      </a:pPr>
+                      <a:r>
+                        <a:rPr lang="en-US" sz="850" dirty="0">
+                          <a:solidFill>
+                            <a:srgbClr val="1F2933"/>
+                          </a:solidFill>
+                          <a:latin typeface="Calibri" pitchFamily="34" charset="0"/>
+                          <a:ea typeface="Calibri" pitchFamily="34" charset="-122"/>
+                          <a:cs typeface="Calibri" pitchFamily="34" charset="-120"/>
+                        </a:rPr>
+                        <a:t>-9,6</a:t>
+                      </a:r>
+                      <a:endParaRPr lang="en-US" sz="850" dirty="0">
+                        <a:latin typeface="Calibri" charset="0"/>
+                        <a:ea typeface="Calibri" charset="0"/>
+                        <a:cs typeface="Calibri" charset="0"/>
+                      </a:endParaRPr>
+                    </a:p>
+                  </a:txBody>
+                  <a:tcPr marL="64008" marR="64008" marT="0" marB="0" anchor="ctr">
+                    <a:lnL w="6350" cap="flat" cmpd="sng" algn="ctr">
+                      <a:solidFill>
+                        <a:srgbClr val="D5DBE3"/>
+                      </a:solidFill>
+                      <a:prstDash val="solid"/>
+                      <a:round/>
+                      <a:headEnd type="none" w="med" len="med"/>
+                      <a:tailEnd type="none" w="med" len="med"/>
+                    </a:lnL>
+                    <a:lnR w="6350" cap="flat" cmpd="sng" algn="ctr">
+                      <a:solidFill>
+                        <a:srgbClr val="D5DBE3"/>
+                      </a:solidFill>
+                      <a:prstDash val="solid"/>
+                      <a:round/>
+                      <a:headEnd type="none" w="med" len="med"/>
+                      <a:tailEnd type="none" w="med" len="med"/>
+                    </a:lnR>
+                    <a:lnT w="6350" cap="flat" cmpd="sng" algn="ctr">
+                      <a:solidFill>
+                        <a:srgbClr val="D5DBE3"/>
+                      </a:solidFill>
+                      <a:prstDash val="solid"/>
+                      <a:round/>
+                      <a:headEnd type="none" w="med" len="med"/>
+                      <a:tailEnd type="none" w="med" len="med"/>
+                    </a:lnT>
+                    <a:lnB w="6350" cap="flat" cmpd="sng" algn="ctr">
+                      <a:solidFill>
+                        <a:srgbClr val="D5DBE3"/>
+                      </a:solidFill>
+                      <a:prstDash val="solid"/>
+                      <a:round/>
+                      <a:headEnd type="none" w="med" len="med"/>
+                      <a:tailEnd type="none" w="med" len="med"/>
+                    </a:lnB>
+                  </a:tcPr>
+                </a:tc>
+                <a:tc>
+                  <a:txBody>
+                    <a:bodyPr/>
+                    <a:lstStyle/>
+                    <a:p>
+                      <a:pPr algn="r" indent="0" marL="0">
+                        <a:buNone/>
+                      </a:pPr>
+                      <a:r>
+                        <a:rPr lang="en-US" sz="850" dirty="0">
+                          <a:solidFill>
+                            <a:srgbClr val="1F2933"/>
+                          </a:solidFill>
+                          <a:latin typeface="Calibri" pitchFamily="34" charset="0"/>
+                          <a:ea typeface="Calibri" pitchFamily="34" charset="-122"/>
+                          <a:cs typeface="Calibri" pitchFamily="34" charset="-120"/>
+                        </a:rPr>
+                        <a:t>–</a:t>
+                      </a:r>
+                      <a:endParaRPr lang="en-US" sz="850" dirty="0">
+                        <a:latin typeface="Calibri" charset="0"/>
+                        <a:ea typeface="Calibri" charset="0"/>
+                        <a:cs typeface="Calibri" charset="0"/>
+                      </a:endParaRPr>
+                    </a:p>
+                  </a:txBody>
+                  <a:tcPr marL="64008" marR="64008" marT="0" marB="0" anchor="ctr">
+                    <a:lnL w="6350" cap="flat" cmpd="sng" algn="ctr">
+                      <a:solidFill>
+                        <a:srgbClr val="D5DBE3"/>
+                      </a:solidFill>
+                      <a:prstDash val="solid"/>
+                      <a:round/>
+                      <a:headEnd type="none" w="med" len="med"/>
+                      <a:tailEnd type="none" w="med" len="med"/>
+                    </a:lnL>
+                    <a:lnR w="6350" cap="flat" cmpd="sng" algn="ctr">
+                      <a:solidFill>
+                        <a:srgbClr val="D5DBE3"/>
+                      </a:solidFill>
+                      <a:prstDash val="solid"/>
+                      <a:round/>
+                      <a:headEnd type="none" w="med" len="med"/>
+                      <a:tailEnd type="none" w="med" len="med"/>
+                    </a:lnR>
+                    <a:lnT w="6350" cap="flat" cmpd="sng" algn="ctr">
+                      <a:solidFill>
+                        <a:srgbClr val="D5DBE3"/>
+                      </a:solidFill>
+                      <a:prstDash val="solid"/>
+                      <a:round/>
+                      <a:headEnd type="none" w="med" len="med"/>
+                      <a:tailEnd type="none" w="med" len="med"/>
+                    </a:lnT>
+                    <a:lnB w="6350" cap="flat" cmpd="sng" algn="ctr">
+                      <a:solidFill>
+                        <a:srgbClr val="D5DBE3"/>
+                      </a:solidFill>
+                      <a:prstDash val="solid"/>
+                      <a:round/>
+                      <a:headEnd type="none" w="med" len="med"/>
+                      <a:tailEnd type="none" w="med" len="med"/>
+                    </a:lnB>
+                  </a:tcPr>
+                </a:tc>
+                <a:tc>
+                  <a:txBody>
+                    <a:bodyPr/>
+                    <a:lstStyle/>
+                    <a:p>
+                      <a:pPr algn="r" indent="0" marL="0">
+                        <a:buNone/>
+                      </a:pPr>
+                      <a:r>
+                        <a:rPr lang="en-US" sz="850" b="1" dirty="0">
+                          <a:solidFill>
                             <a:srgbClr val="B3261E"/>
                           </a:solidFill>
                           <a:latin typeface="Calibri" pitchFamily="34" charset="0"/>
                           <a:ea typeface="Calibri" pitchFamily="34" charset="-122"/>
                           <a:cs typeface="Calibri" pitchFamily="34" charset="-120"/>
                         </a:rPr>
-                        <a:t>-140,1</a:t>
+                        <a:t>-3,5</a:t>
                       </a:r>
                       <a:endParaRPr lang="en-US" sz="850" dirty="0">
                         <a:latin typeface="Calibri" charset="0"/>
@@ -25323,7 +25839,7 @@
                           <a:ea typeface="Calibri" pitchFamily="34" charset="-122"/>
                           <a:cs typeface="Calibri" pitchFamily="34" charset="-120"/>
                         </a:rPr>
-                        <a:t>140,2</a:t>
+                        <a:t>3,5</a:t>
                       </a:r>
                       <a:endParaRPr lang="en-US" sz="850" dirty="0">
                         <a:latin typeface="Calibri" charset="0"/>
@@ -25393,7 +25909,7 @@
                           <a:ea typeface="Calibri" pitchFamily="34" charset="-122"/>
                           <a:cs typeface="Calibri" pitchFamily="34" charset="-120"/>
                         </a:rPr>
-                        <a:t>INFI</a:t>
+                        <a:t>AB CENTER</a:t>
                       </a:r>
                       <a:endParaRPr lang="en-US" sz="850" dirty="0">
                         <a:latin typeface="Calibri" charset="0"/>
@@ -25458,7 +25974,7 @@
                           <a:ea typeface="Calibri" pitchFamily="34" charset="-122"/>
                           <a:cs typeface="Calibri" pitchFamily="34" charset="-120"/>
                         </a:rPr>
-                        <a:t>2,8</a:t>
+                        <a:t>–</a:t>
                       </a:r>
                       <a:endParaRPr lang="en-US" sz="850" dirty="0">
                         <a:latin typeface="Calibri" charset="0"/>
@@ -25523,6 +26039,71 @@
                           <a:ea typeface="Calibri" pitchFamily="34" charset="-122"/>
                           <a:cs typeface="Calibri" pitchFamily="34" charset="-120"/>
                         </a:rPr>
+                        <a:t>-6,3</a:t>
+                      </a:r>
+                      <a:endParaRPr lang="en-US" sz="850" dirty="0">
+                        <a:latin typeface="Calibri" charset="0"/>
+                        <a:ea typeface="Calibri" charset="0"/>
+                        <a:cs typeface="Calibri" charset="0"/>
+                      </a:endParaRPr>
+                    </a:p>
+                  </a:txBody>
+                  <a:tcPr marL="64008" marR="64008" marT="0" marB="0" anchor="ctr">
+                    <a:lnL w="6350" cap="flat" cmpd="sng" algn="ctr">
+                      <a:solidFill>
+                        <a:srgbClr val="D5DBE3"/>
+                      </a:solidFill>
+                      <a:prstDash val="solid"/>
+                      <a:round/>
+                      <a:headEnd type="none" w="med" len="med"/>
+                      <a:tailEnd type="none" w="med" len="med"/>
+                    </a:lnL>
+                    <a:lnR w="6350" cap="flat" cmpd="sng" algn="ctr">
+                      <a:solidFill>
+                        <a:srgbClr val="D5DBE3"/>
+                      </a:solidFill>
+                      <a:prstDash val="solid"/>
+                      <a:round/>
+                      <a:headEnd type="none" w="med" len="med"/>
+                      <a:tailEnd type="none" w="med" len="med"/>
+                    </a:lnR>
+                    <a:lnT w="6350" cap="flat" cmpd="sng" algn="ctr">
+                      <a:solidFill>
+                        <a:srgbClr val="D5DBE3"/>
+                      </a:solidFill>
+                      <a:prstDash val="solid"/>
+                      <a:round/>
+                      <a:headEnd type="none" w="med" len="med"/>
+                      <a:tailEnd type="none" w="med" len="med"/>
+                    </a:lnT>
+                    <a:lnB w="6350" cap="flat" cmpd="sng" algn="ctr">
+                      <a:solidFill>
+                        <a:srgbClr val="D5DBE3"/>
+                      </a:solidFill>
+                      <a:prstDash val="solid"/>
+                      <a:round/>
+                      <a:headEnd type="none" w="med" len="med"/>
+                      <a:tailEnd type="none" w="med" len="med"/>
+                    </a:lnB>
+                  </a:tcPr>
+                </a:tc>
+                <a:tc>
+                  <a:txBody>
+                    <a:bodyPr/>
+                    <a:lstStyle/>
+                    <a:p>
+                      <a:pPr algn="r" indent="0" marL="0">
+                        <a:buNone/>
+                      </a:pPr>
+                      <a:r>
+                        <a:rPr lang="en-US" sz="850" dirty="0">
+                          <a:solidFill>
+                            <a:srgbClr val="1F2933"/>
+                          </a:solidFill>
+                          <a:latin typeface="Calibri" pitchFamily="34" charset="0"/>
+                          <a:ea typeface="Calibri" pitchFamily="34" charset="-122"/>
+                          <a:cs typeface="Calibri" pitchFamily="34" charset="-120"/>
+                        </a:rPr>
                         <a:t>–</a:t>
                       </a:r>
                       <a:endParaRPr lang="en-US" sz="850" dirty="0">
@@ -25580,472 +26161,15 @@
                         <a:buNone/>
                       </a:pPr>
                       <a:r>
-                        <a:rPr lang="en-US" sz="850" dirty="0">
-                          <a:solidFill>
-                            <a:srgbClr val="1F2933"/>
-                          </a:solidFill>
-                          <a:latin typeface="Calibri" pitchFamily="34" charset="0"/>
-                          <a:ea typeface="Calibri" pitchFamily="34" charset="-122"/>
-                          <a:cs typeface="Calibri" pitchFamily="34" charset="-120"/>
-                        </a:rPr>
-                        <a:t>–</a:t>
-                      </a:r>
-                      <a:endParaRPr lang="en-US" sz="850" dirty="0">
-                        <a:latin typeface="Calibri" charset="0"/>
-                        <a:ea typeface="Calibri" charset="0"/>
-                        <a:cs typeface="Calibri" charset="0"/>
-                      </a:endParaRPr>
-                    </a:p>
-                  </a:txBody>
-                  <a:tcPr marL="64008" marR="64008" marT="0" marB="0" anchor="ctr">
-                    <a:lnL w="6350" cap="flat" cmpd="sng" algn="ctr">
-                      <a:solidFill>
-                        <a:srgbClr val="D5DBE3"/>
-                      </a:solidFill>
-                      <a:prstDash val="solid"/>
-                      <a:round/>
-                      <a:headEnd type="none" w="med" len="med"/>
-                      <a:tailEnd type="none" w="med" len="med"/>
-                    </a:lnL>
-                    <a:lnR w="6350" cap="flat" cmpd="sng" algn="ctr">
-                      <a:solidFill>
-                        <a:srgbClr val="D5DBE3"/>
-                      </a:solidFill>
-                      <a:prstDash val="solid"/>
-                      <a:round/>
-                      <a:headEnd type="none" w="med" len="med"/>
-                      <a:tailEnd type="none" w="med" len="med"/>
-                    </a:lnR>
-                    <a:lnT w="6350" cap="flat" cmpd="sng" algn="ctr">
-                      <a:solidFill>
-                        <a:srgbClr val="D5DBE3"/>
-                      </a:solidFill>
-                      <a:prstDash val="solid"/>
-                      <a:round/>
-                      <a:headEnd type="none" w="med" len="med"/>
-                      <a:tailEnd type="none" w="med" len="med"/>
-                    </a:lnT>
-                    <a:lnB w="6350" cap="flat" cmpd="sng" algn="ctr">
-                      <a:solidFill>
-                        <a:srgbClr val="D5DBE3"/>
-                      </a:solidFill>
-                      <a:prstDash val="solid"/>
-                      <a:round/>
-                      <a:headEnd type="none" w="med" len="med"/>
-                      <a:tailEnd type="none" w="med" len="med"/>
-                    </a:lnB>
-                  </a:tcPr>
-                </a:tc>
-                <a:tc>
-                  <a:txBody>
-                    <a:bodyPr/>
-                    <a:lstStyle/>
-                    <a:p>
-                      <a:pPr algn="r" indent="0" marL="0">
-                        <a:buNone/>
-                      </a:pPr>
-                      <a:r>
                         <a:rPr lang="en-US" sz="850" b="1" dirty="0">
                           <a:solidFill>
-                            <a:srgbClr val="5E9B7E"/>
-                          </a:solidFill>
-                          <a:latin typeface="Calibri" pitchFamily="34" charset="0"/>
-                          <a:ea typeface="Calibri" pitchFamily="34" charset="-122"/>
-                          <a:cs typeface="Calibri" pitchFamily="34" charset="-120"/>
-                        </a:rPr>
-                        <a:t>2,8</a:t>
-                      </a:r>
-                      <a:endParaRPr lang="en-US" sz="850" dirty="0">
-                        <a:latin typeface="Calibri" charset="0"/>
-                        <a:ea typeface="Calibri" charset="0"/>
-                        <a:cs typeface="Calibri" charset="0"/>
-                      </a:endParaRPr>
-                    </a:p>
-                  </a:txBody>
-                  <a:tcPr marL="64008" marR="64008" marT="0" marB="0" anchor="ctr">
-                    <a:lnL w="6350" cap="flat" cmpd="sng" algn="ctr">
-                      <a:solidFill>
-                        <a:srgbClr val="D5DBE3"/>
-                      </a:solidFill>
-                      <a:prstDash val="solid"/>
-                      <a:round/>
-                      <a:headEnd type="none" w="med" len="med"/>
-                      <a:tailEnd type="none" w="med" len="med"/>
-                    </a:lnL>
-                    <a:lnR w="6350" cap="flat" cmpd="sng" algn="ctr">
-                      <a:solidFill>
-                        <a:srgbClr val="D5DBE3"/>
-                      </a:solidFill>
-                      <a:prstDash val="solid"/>
-                      <a:round/>
-                      <a:headEnd type="none" w="med" len="med"/>
-                      <a:tailEnd type="none" w="med" len="med"/>
-                    </a:lnR>
-                    <a:lnT w="6350" cap="flat" cmpd="sng" algn="ctr">
-                      <a:solidFill>
-                        <a:srgbClr val="D5DBE3"/>
-                      </a:solidFill>
-                      <a:prstDash val="solid"/>
-                      <a:round/>
-                      <a:headEnd type="none" w="med" len="med"/>
-                      <a:tailEnd type="none" w="med" len="med"/>
-                    </a:lnT>
-                    <a:lnB w="6350" cap="flat" cmpd="sng" algn="ctr">
-                      <a:solidFill>
-                        <a:srgbClr val="D5DBE3"/>
-                      </a:solidFill>
-                      <a:prstDash val="solid"/>
-                      <a:round/>
-                      <a:headEnd type="none" w="med" len="med"/>
-                      <a:tailEnd type="none" w="med" len="med"/>
-                    </a:lnB>
-                  </a:tcPr>
-                </a:tc>
-                <a:tc>
-                  <a:txBody>
-                    <a:bodyPr/>
-                    <a:lstStyle/>
-                    <a:p>
-                      <a:pPr algn="r" indent="0" marL="0">
-                        <a:buNone/>
-                      </a:pPr>
-                      <a:r>
-                        <a:rPr lang="en-US" sz="850" dirty="0">
-                          <a:solidFill>
-                            <a:srgbClr val="1F2933"/>
-                          </a:solidFill>
-                          <a:latin typeface="Calibri" pitchFamily="34" charset="0"/>
-                          <a:ea typeface="Calibri" pitchFamily="34" charset="-122"/>
-                          <a:cs typeface="Calibri" pitchFamily="34" charset="-120"/>
-                        </a:rPr>
-                        <a:t>–</a:t>
-                      </a:r>
-                      <a:endParaRPr lang="en-US" sz="850" dirty="0">
-                        <a:latin typeface="Calibri" charset="0"/>
-                        <a:ea typeface="Calibri" charset="0"/>
-                        <a:cs typeface="Calibri" charset="0"/>
-                      </a:endParaRPr>
-                    </a:p>
-                  </a:txBody>
-                  <a:tcPr marL="64008" marR="64008" marT="0" marB="0" anchor="ctr">
-                    <a:lnL w="6350" cap="flat" cmpd="sng" algn="ctr">
-                      <a:solidFill>
-                        <a:srgbClr val="D5DBE3"/>
-                      </a:solidFill>
-                      <a:prstDash val="solid"/>
-                      <a:round/>
-                      <a:headEnd type="none" w="med" len="med"/>
-                      <a:tailEnd type="none" w="med" len="med"/>
-                    </a:lnL>
-                    <a:lnR w="6350" cap="flat" cmpd="sng" algn="ctr">
-                      <a:solidFill>
-                        <a:srgbClr val="D5DBE3"/>
-                      </a:solidFill>
-                      <a:prstDash val="solid"/>
-                      <a:round/>
-                      <a:headEnd type="none" w="med" len="med"/>
-                      <a:tailEnd type="none" w="med" len="med"/>
-                    </a:lnR>
-                    <a:lnT w="6350" cap="flat" cmpd="sng" algn="ctr">
-                      <a:solidFill>
-                        <a:srgbClr val="D5DBE3"/>
-                      </a:solidFill>
-                      <a:prstDash val="solid"/>
-                      <a:round/>
-                      <a:headEnd type="none" w="med" len="med"/>
-                      <a:tailEnd type="none" w="med" len="med"/>
-                    </a:lnT>
-                    <a:lnB w="6350" cap="flat" cmpd="sng" algn="ctr">
-                      <a:solidFill>
-                        <a:srgbClr val="D5DBE3"/>
-                      </a:solidFill>
-                      <a:prstDash val="solid"/>
-                      <a:round/>
-                      <a:headEnd type="none" w="med" len="med"/>
-                      <a:tailEnd type="none" w="med" len="med"/>
-                    </a:lnB>
-                  </a:tcPr>
-                </a:tc>
-              </a:tr>
-              <a:tr h="224028">
-                <a:tc>
-                  <a:txBody>
-                    <a:bodyPr/>
-                    <a:lstStyle/>
-                    <a:p>
-                      <a:pPr algn="l" indent="0" marL="0">
-                        <a:buNone/>
-                      </a:pPr>
-                      <a:r>
-                        <a:rPr lang="en-US" sz="850" b="1" dirty="0">
-                          <a:solidFill>
-                            <a:srgbClr val="1F2933"/>
-                          </a:solidFill>
-                          <a:latin typeface="Calibri" pitchFamily="34" charset="0"/>
-                          <a:ea typeface="Calibri" pitchFamily="34" charset="-122"/>
-                          <a:cs typeface="Calibri" pitchFamily="34" charset="-120"/>
-                        </a:rPr>
-                        <a:t>ODALYS CI</a:t>
-                      </a:r>
-                      <a:endParaRPr lang="en-US" sz="850" dirty="0">
-                        <a:latin typeface="Calibri" charset="0"/>
-                        <a:ea typeface="Calibri" charset="0"/>
-                        <a:cs typeface="Calibri" charset="0"/>
-                      </a:endParaRPr>
-                    </a:p>
-                  </a:txBody>
-                  <a:tcPr marL="64008" marR="64008" marT="0" marB="0" anchor="ctr">
-                    <a:lnL w="6350" cap="flat" cmpd="sng" algn="ctr">
-                      <a:solidFill>
-                        <a:srgbClr val="D5DBE3"/>
-                      </a:solidFill>
-                      <a:prstDash val="solid"/>
-                      <a:round/>
-                      <a:headEnd type="none" w="med" len="med"/>
-                      <a:tailEnd type="none" w="med" len="med"/>
-                    </a:lnL>
-                    <a:lnR w="6350" cap="flat" cmpd="sng" algn="ctr">
-                      <a:solidFill>
-                        <a:srgbClr val="D5DBE3"/>
-                      </a:solidFill>
-                      <a:prstDash val="solid"/>
-                      <a:round/>
-                      <a:headEnd type="none" w="med" len="med"/>
-                      <a:tailEnd type="none" w="med" len="med"/>
-                    </a:lnR>
-                    <a:lnT w="6350" cap="flat" cmpd="sng" algn="ctr">
-                      <a:solidFill>
-                        <a:srgbClr val="D5DBE3"/>
-                      </a:solidFill>
-                      <a:prstDash val="solid"/>
-                      <a:round/>
-                      <a:headEnd type="none" w="med" len="med"/>
-                      <a:tailEnd type="none" w="med" len="med"/>
-                    </a:lnT>
-                    <a:lnB w="6350" cap="flat" cmpd="sng" algn="ctr">
-                      <a:solidFill>
-                        <a:srgbClr val="D5DBE3"/>
-                      </a:solidFill>
-                      <a:prstDash val="solid"/>
-                      <a:round/>
-                      <a:headEnd type="none" w="med" len="med"/>
-                      <a:tailEnd type="none" w="med" len="med"/>
-                    </a:lnB>
-                  </a:tcPr>
-                </a:tc>
-                <a:tc>
-                  <a:txBody>
-                    <a:bodyPr/>
-                    <a:lstStyle/>
-                    <a:p>
-                      <a:pPr algn="r" indent="0" marL="0">
-                        <a:buNone/>
-                      </a:pPr>
-                      <a:r>
-                        <a:rPr lang="en-US" sz="850" dirty="0">
-                          <a:solidFill>
-                            <a:srgbClr val="1F2933"/>
-                          </a:solidFill>
-                          <a:latin typeface="Calibri" pitchFamily="34" charset="0"/>
-                          <a:ea typeface="Calibri" pitchFamily="34" charset="-122"/>
-                          <a:cs typeface="Calibri" pitchFamily="34" charset="-120"/>
-                        </a:rPr>
-                        <a:t>6,1</a:t>
-                      </a:r>
-                      <a:endParaRPr lang="en-US" sz="850" dirty="0">
-                        <a:latin typeface="Calibri" charset="0"/>
-                        <a:ea typeface="Calibri" charset="0"/>
-                        <a:cs typeface="Calibri" charset="0"/>
-                      </a:endParaRPr>
-                    </a:p>
-                  </a:txBody>
-                  <a:tcPr marL="64008" marR="64008" marT="0" marB="0" anchor="ctr">
-                    <a:lnL w="6350" cap="flat" cmpd="sng" algn="ctr">
-                      <a:solidFill>
-                        <a:srgbClr val="D5DBE3"/>
-                      </a:solidFill>
-                      <a:prstDash val="solid"/>
-                      <a:round/>
-                      <a:headEnd type="none" w="med" len="med"/>
-                      <a:tailEnd type="none" w="med" len="med"/>
-                    </a:lnL>
-                    <a:lnR w="6350" cap="flat" cmpd="sng" algn="ctr">
-                      <a:solidFill>
-                        <a:srgbClr val="D5DBE3"/>
-                      </a:solidFill>
-                      <a:prstDash val="solid"/>
-                      <a:round/>
-                      <a:headEnd type="none" w="med" len="med"/>
-                      <a:tailEnd type="none" w="med" len="med"/>
-                    </a:lnR>
-                    <a:lnT w="6350" cap="flat" cmpd="sng" algn="ctr">
-                      <a:solidFill>
-                        <a:srgbClr val="D5DBE3"/>
-                      </a:solidFill>
-                      <a:prstDash val="solid"/>
-                      <a:round/>
-                      <a:headEnd type="none" w="med" len="med"/>
-                      <a:tailEnd type="none" w="med" len="med"/>
-                    </a:lnT>
-                    <a:lnB w="6350" cap="flat" cmpd="sng" algn="ctr">
-                      <a:solidFill>
-                        <a:srgbClr val="D5DBE3"/>
-                      </a:solidFill>
-                      <a:prstDash val="solid"/>
-                      <a:round/>
-                      <a:headEnd type="none" w="med" len="med"/>
-                      <a:tailEnd type="none" w="med" len="med"/>
-                    </a:lnB>
-                  </a:tcPr>
-                </a:tc>
-                <a:tc>
-                  <a:txBody>
-                    <a:bodyPr/>
-                    <a:lstStyle/>
-                    <a:p>
-                      <a:pPr algn="r" indent="0" marL="0">
-                        <a:buNone/>
-                      </a:pPr>
-                      <a:r>
-                        <a:rPr lang="en-US" sz="850" dirty="0">
-                          <a:solidFill>
-                            <a:srgbClr val="1F2933"/>
-                          </a:solidFill>
-                          <a:latin typeface="Calibri" pitchFamily="34" charset="0"/>
-                          <a:ea typeface="Calibri" pitchFamily="34" charset="-122"/>
-                          <a:cs typeface="Calibri" pitchFamily="34" charset="-120"/>
-                        </a:rPr>
-                        <a:t>-9,6</a:t>
-                      </a:r>
-                      <a:endParaRPr lang="en-US" sz="850" dirty="0">
-                        <a:latin typeface="Calibri" charset="0"/>
-                        <a:ea typeface="Calibri" charset="0"/>
-                        <a:cs typeface="Calibri" charset="0"/>
-                      </a:endParaRPr>
-                    </a:p>
-                  </a:txBody>
-                  <a:tcPr marL="64008" marR="64008" marT="0" marB="0" anchor="ctr">
-                    <a:lnL w="6350" cap="flat" cmpd="sng" algn="ctr">
-                      <a:solidFill>
-                        <a:srgbClr val="D5DBE3"/>
-                      </a:solidFill>
-                      <a:prstDash val="solid"/>
-                      <a:round/>
-                      <a:headEnd type="none" w="med" len="med"/>
-                      <a:tailEnd type="none" w="med" len="med"/>
-                    </a:lnL>
-                    <a:lnR w="6350" cap="flat" cmpd="sng" algn="ctr">
-                      <a:solidFill>
-                        <a:srgbClr val="D5DBE3"/>
-                      </a:solidFill>
-                      <a:prstDash val="solid"/>
-                      <a:round/>
-                      <a:headEnd type="none" w="med" len="med"/>
-                      <a:tailEnd type="none" w="med" len="med"/>
-                    </a:lnR>
-                    <a:lnT w="6350" cap="flat" cmpd="sng" algn="ctr">
-                      <a:solidFill>
-                        <a:srgbClr val="D5DBE3"/>
-                      </a:solidFill>
-                      <a:prstDash val="solid"/>
-                      <a:round/>
-                      <a:headEnd type="none" w="med" len="med"/>
-                      <a:tailEnd type="none" w="med" len="med"/>
-                    </a:lnT>
-                    <a:lnB w="6350" cap="flat" cmpd="sng" algn="ctr">
-                      <a:solidFill>
-                        <a:srgbClr val="D5DBE3"/>
-                      </a:solidFill>
-                      <a:prstDash val="solid"/>
-                      <a:round/>
-                      <a:headEnd type="none" w="med" len="med"/>
-                      <a:tailEnd type="none" w="med" len="med"/>
-                    </a:lnB>
-                  </a:tcPr>
-                </a:tc>
-                <a:tc>
-                  <a:txBody>
-                    <a:bodyPr/>
-                    <a:lstStyle/>
-                    <a:p>
-                      <a:pPr algn="r" indent="0" marL="0">
-                        <a:buNone/>
-                      </a:pPr>
-                      <a:r>
-                        <a:rPr lang="en-US" sz="850" dirty="0">
-                          <a:solidFill>
-                            <a:srgbClr val="1F2933"/>
-                          </a:solidFill>
-                          <a:latin typeface="Calibri" pitchFamily="34" charset="0"/>
-                          <a:ea typeface="Calibri" pitchFamily="34" charset="-122"/>
-                          <a:cs typeface="Calibri" pitchFamily="34" charset="-120"/>
-                        </a:rPr>
-                        <a:t>–</a:t>
-                      </a:r>
-                      <a:endParaRPr lang="en-US" sz="850" dirty="0">
-                        <a:latin typeface="Calibri" charset="0"/>
-                        <a:ea typeface="Calibri" charset="0"/>
-                        <a:cs typeface="Calibri" charset="0"/>
-                      </a:endParaRPr>
-                    </a:p>
-                  </a:txBody>
-                  <a:tcPr marL="64008" marR="64008" marT="0" marB="0" anchor="ctr">
-                    <a:lnL w="6350" cap="flat" cmpd="sng" algn="ctr">
-                      <a:solidFill>
-                        <a:srgbClr val="D5DBE3"/>
-                      </a:solidFill>
-                      <a:prstDash val="solid"/>
-                      <a:round/>
-                      <a:headEnd type="none" w="med" len="med"/>
-                      <a:tailEnd type="none" w="med" len="med"/>
-                    </a:lnL>
-                    <a:lnR w="6350" cap="flat" cmpd="sng" algn="ctr">
-                      <a:solidFill>
-                        <a:srgbClr val="D5DBE3"/>
-                      </a:solidFill>
-                      <a:prstDash val="solid"/>
-                      <a:round/>
-                      <a:headEnd type="none" w="med" len="med"/>
-                      <a:tailEnd type="none" w="med" len="med"/>
-                    </a:lnR>
-                    <a:lnT w="6350" cap="flat" cmpd="sng" algn="ctr">
-                      <a:solidFill>
-                        <a:srgbClr val="D5DBE3"/>
-                      </a:solidFill>
-                      <a:prstDash val="solid"/>
-                      <a:round/>
-                      <a:headEnd type="none" w="med" len="med"/>
-                      <a:tailEnd type="none" w="med" len="med"/>
-                    </a:lnT>
-                    <a:lnB w="6350" cap="flat" cmpd="sng" algn="ctr">
-                      <a:solidFill>
-                        <a:srgbClr val="D5DBE3"/>
-                      </a:solidFill>
-                      <a:prstDash val="solid"/>
-                      <a:round/>
-                      <a:headEnd type="none" w="med" len="med"/>
-                      <a:tailEnd type="none" w="med" len="med"/>
-                    </a:lnB>
-                  </a:tcPr>
-                </a:tc>
-                <a:tc>
-                  <a:txBody>
-                    <a:bodyPr/>
-                    <a:lstStyle/>
-                    <a:p>
-                      <a:pPr algn="r" indent="0" marL="0">
-                        <a:buNone/>
-                      </a:pPr>
-                      <a:r>
-                        <a:rPr lang="en-US" sz="850" b="1" dirty="0">
-                          <a:solidFill>
                             <a:srgbClr val="B3261E"/>
                           </a:solidFill>
                           <a:latin typeface="Calibri" pitchFamily="34" charset="0"/>
                           <a:ea typeface="Calibri" pitchFamily="34" charset="-122"/>
                           <a:cs typeface="Calibri" pitchFamily="34" charset="-120"/>
                         </a:rPr>
-                        <a:t>-3,5</a:t>
+                        <a:t>-6,3</a:t>
                       </a:r>
                       <a:endParaRPr lang="en-US" sz="850" dirty="0">
                         <a:latin typeface="Calibri" charset="0"/>
@@ -26113,7 +26237,7 @@
                           <a:ea typeface="Calibri" pitchFamily="34" charset="-122"/>
                           <a:cs typeface="Calibri" pitchFamily="34" charset="-120"/>
                         </a:rPr>
-                        <a:t>3,5</a:t>
+                        <a:t>6,3</a:t>
                       </a:r>
                       <a:endParaRPr lang="en-US" sz="850" dirty="0">
                         <a:latin typeface="Calibri" charset="0"/>
@@ -26183,7 +26307,7 @@
                           <a:ea typeface="Calibri" pitchFamily="34" charset="-122"/>
                           <a:cs typeface="Calibri" pitchFamily="34" charset="-120"/>
                         </a:rPr>
-                        <a:t>AB CENTER</a:t>
+                        <a:t>RHD CI</a:t>
                       </a:r>
                       <a:endParaRPr lang="en-US" sz="850" dirty="0">
                         <a:latin typeface="Calibri" charset="0"/>
@@ -26313,7 +26437,7 @@
                           <a:ea typeface="Calibri" pitchFamily="34" charset="-122"/>
                           <a:cs typeface="Calibri" pitchFamily="34" charset="-120"/>
                         </a:rPr>
-                        <a:t>-6,3</a:t>
+                        <a:t>-45,1</a:t>
                       </a:r>
                       <a:endParaRPr lang="en-US" sz="850" dirty="0">
                         <a:latin typeface="Calibri" charset="0"/>
@@ -26443,7 +26567,7 @@
                           <a:ea typeface="Calibri" pitchFamily="34" charset="-122"/>
                           <a:cs typeface="Calibri" pitchFamily="34" charset="-120"/>
                         </a:rPr>
-                        <a:t>-6,3</a:t>
+                        <a:t>-45,1</a:t>
                       </a:r>
                       <a:endParaRPr lang="en-US" sz="850" dirty="0">
                         <a:latin typeface="Calibri" charset="0"/>
@@ -26511,7 +26635,7 @@
                           <a:ea typeface="Calibri" pitchFamily="34" charset="-122"/>
                           <a:cs typeface="Calibri" pitchFamily="34" charset="-120"/>
                         </a:rPr>
-                        <a:t>6,3</a:t>
+                        <a:t>45,1</a:t>
                       </a:r>
                       <a:endParaRPr lang="en-US" sz="850" dirty="0">
                         <a:latin typeface="Calibri" charset="0"/>
@@ -26575,404 +26699,6 @@
                       <a:r>
                         <a:rPr lang="en-US" sz="850" b="1" dirty="0">
                           <a:solidFill>
-                            <a:srgbClr val="1F2933"/>
-                          </a:solidFill>
-                          <a:latin typeface="Calibri" pitchFamily="34" charset="0"/>
-                          <a:ea typeface="Calibri" pitchFamily="34" charset="-122"/>
-                          <a:cs typeface="Calibri" pitchFamily="34" charset="-120"/>
-                        </a:rPr>
-                        <a:t>RHD CI</a:t>
-                      </a:r>
-                      <a:endParaRPr lang="en-US" sz="850" dirty="0">
-                        <a:latin typeface="Calibri" charset="0"/>
-                        <a:ea typeface="Calibri" charset="0"/>
-                        <a:cs typeface="Calibri" charset="0"/>
-                      </a:endParaRPr>
-                    </a:p>
-                  </a:txBody>
-                  <a:tcPr marL="64008" marR="64008" marT="0" marB="0" anchor="ctr">
-                    <a:lnL w="6350" cap="flat" cmpd="sng" algn="ctr">
-                      <a:solidFill>
-                        <a:srgbClr val="D5DBE3"/>
-                      </a:solidFill>
-                      <a:prstDash val="solid"/>
-                      <a:round/>
-                      <a:headEnd type="none" w="med" len="med"/>
-                      <a:tailEnd type="none" w="med" len="med"/>
-                    </a:lnL>
-                    <a:lnR w="6350" cap="flat" cmpd="sng" algn="ctr">
-                      <a:solidFill>
-                        <a:srgbClr val="D5DBE3"/>
-                      </a:solidFill>
-                      <a:prstDash val="solid"/>
-                      <a:round/>
-                      <a:headEnd type="none" w="med" len="med"/>
-                      <a:tailEnd type="none" w="med" len="med"/>
-                    </a:lnR>
-                    <a:lnT w="6350" cap="flat" cmpd="sng" algn="ctr">
-                      <a:solidFill>
-                        <a:srgbClr val="D5DBE3"/>
-                      </a:solidFill>
-                      <a:prstDash val="solid"/>
-                      <a:round/>
-                      <a:headEnd type="none" w="med" len="med"/>
-                      <a:tailEnd type="none" w="med" len="med"/>
-                    </a:lnT>
-                    <a:lnB w="6350" cap="flat" cmpd="sng" algn="ctr">
-                      <a:solidFill>
-                        <a:srgbClr val="D5DBE3"/>
-                      </a:solidFill>
-                      <a:prstDash val="solid"/>
-                      <a:round/>
-                      <a:headEnd type="none" w="med" len="med"/>
-                      <a:tailEnd type="none" w="med" len="med"/>
-                    </a:lnB>
-                  </a:tcPr>
-                </a:tc>
-                <a:tc>
-                  <a:txBody>
-                    <a:bodyPr/>
-                    <a:lstStyle/>
-                    <a:p>
-                      <a:pPr algn="r" indent="0" marL="0">
-                        <a:buNone/>
-                      </a:pPr>
-                      <a:r>
-                        <a:rPr lang="en-US" sz="850" dirty="0">
-                          <a:solidFill>
-                            <a:srgbClr val="1F2933"/>
-                          </a:solidFill>
-                          <a:latin typeface="Calibri" pitchFamily="34" charset="0"/>
-                          <a:ea typeface="Calibri" pitchFamily="34" charset="-122"/>
-                          <a:cs typeface="Calibri" pitchFamily="34" charset="-120"/>
-                        </a:rPr>
-                        <a:t>–</a:t>
-                      </a:r>
-                      <a:endParaRPr lang="en-US" sz="850" dirty="0">
-                        <a:latin typeface="Calibri" charset="0"/>
-                        <a:ea typeface="Calibri" charset="0"/>
-                        <a:cs typeface="Calibri" charset="0"/>
-                      </a:endParaRPr>
-                    </a:p>
-                  </a:txBody>
-                  <a:tcPr marL="64008" marR="64008" marT="0" marB="0" anchor="ctr">
-                    <a:lnL w="6350" cap="flat" cmpd="sng" algn="ctr">
-                      <a:solidFill>
-                        <a:srgbClr val="D5DBE3"/>
-                      </a:solidFill>
-                      <a:prstDash val="solid"/>
-                      <a:round/>
-                      <a:headEnd type="none" w="med" len="med"/>
-                      <a:tailEnd type="none" w="med" len="med"/>
-                    </a:lnL>
-                    <a:lnR w="6350" cap="flat" cmpd="sng" algn="ctr">
-                      <a:solidFill>
-                        <a:srgbClr val="D5DBE3"/>
-                      </a:solidFill>
-                      <a:prstDash val="solid"/>
-                      <a:round/>
-                      <a:headEnd type="none" w="med" len="med"/>
-                      <a:tailEnd type="none" w="med" len="med"/>
-                    </a:lnR>
-                    <a:lnT w="6350" cap="flat" cmpd="sng" algn="ctr">
-                      <a:solidFill>
-                        <a:srgbClr val="D5DBE3"/>
-                      </a:solidFill>
-                      <a:prstDash val="solid"/>
-                      <a:round/>
-                      <a:headEnd type="none" w="med" len="med"/>
-                      <a:tailEnd type="none" w="med" len="med"/>
-                    </a:lnT>
-                    <a:lnB w="6350" cap="flat" cmpd="sng" algn="ctr">
-                      <a:solidFill>
-                        <a:srgbClr val="D5DBE3"/>
-                      </a:solidFill>
-                      <a:prstDash val="solid"/>
-                      <a:round/>
-                      <a:headEnd type="none" w="med" len="med"/>
-                      <a:tailEnd type="none" w="med" len="med"/>
-                    </a:lnB>
-                  </a:tcPr>
-                </a:tc>
-                <a:tc>
-                  <a:txBody>
-                    <a:bodyPr/>
-                    <a:lstStyle/>
-                    <a:p>
-                      <a:pPr algn="r" indent="0" marL="0">
-                        <a:buNone/>
-                      </a:pPr>
-                      <a:r>
-                        <a:rPr lang="en-US" sz="850" dirty="0">
-                          <a:solidFill>
-                            <a:srgbClr val="1F2933"/>
-                          </a:solidFill>
-                          <a:latin typeface="Calibri" pitchFamily="34" charset="0"/>
-                          <a:ea typeface="Calibri" pitchFamily="34" charset="-122"/>
-                          <a:cs typeface="Calibri" pitchFamily="34" charset="-120"/>
-                        </a:rPr>
-                        <a:t>-45,1</a:t>
-                      </a:r>
-                      <a:endParaRPr lang="en-US" sz="850" dirty="0">
-                        <a:latin typeface="Calibri" charset="0"/>
-                        <a:ea typeface="Calibri" charset="0"/>
-                        <a:cs typeface="Calibri" charset="0"/>
-                      </a:endParaRPr>
-                    </a:p>
-                  </a:txBody>
-                  <a:tcPr marL="64008" marR="64008" marT="0" marB="0" anchor="ctr">
-                    <a:lnL w="6350" cap="flat" cmpd="sng" algn="ctr">
-                      <a:solidFill>
-                        <a:srgbClr val="D5DBE3"/>
-                      </a:solidFill>
-                      <a:prstDash val="solid"/>
-                      <a:round/>
-                      <a:headEnd type="none" w="med" len="med"/>
-                      <a:tailEnd type="none" w="med" len="med"/>
-                    </a:lnL>
-                    <a:lnR w="6350" cap="flat" cmpd="sng" algn="ctr">
-                      <a:solidFill>
-                        <a:srgbClr val="D5DBE3"/>
-                      </a:solidFill>
-                      <a:prstDash val="solid"/>
-                      <a:round/>
-                      <a:headEnd type="none" w="med" len="med"/>
-                      <a:tailEnd type="none" w="med" len="med"/>
-                    </a:lnR>
-                    <a:lnT w="6350" cap="flat" cmpd="sng" algn="ctr">
-                      <a:solidFill>
-                        <a:srgbClr val="D5DBE3"/>
-                      </a:solidFill>
-                      <a:prstDash val="solid"/>
-                      <a:round/>
-                      <a:headEnd type="none" w="med" len="med"/>
-                      <a:tailEnd type="none" w="med" len="med"/>
-                    </a:lnT>
-                    <a:lnB w="6350" cap="flat" cmpd="sng" algn="ctr">
-                      <a:solidFill>
-                        <a:srgbClr val="D5DBE3"/>
-                      </a:solidFill>
-                      <a:prstDash val="solid"/>
-                      <a:round/>
-                      <a:headEnd type="none" w="med" len="med"/>
-                      <a:tailEnd type="none" w="med" len="med"/>
-                    </a:lnB>
-                  </a:tcPr>
-                </a:tc>
-                <a:tc>
-                  <a:txBody>
-                    <a:bodyPr/>
-                    <a:lstStyle/>
-                    <a:p>
-                      <a:pPr algn="r" indent="0" marL="0">
-                        <a:buNone/>
-                      </a:pPr>
-                      <a:r>
-                        <a:rPr lang="en-US" sz="850" dirty="0">
-                          <a:solidFill>
-                            <a:srgbClr val="1F2933"/>
-                          </a:solidFill>
-                          <a:latin typeface="Calibri" pitchFamily="34" charset="0"/>
-                          <a:ea typeface="Calibri" pitchFamily="34" charset="-122"/>
-                          <a:cs typeface="Calibri" pitchFamily="34" charset="-120"/>
-                        </a:rPr>
-                        <a:t>–</a:t>
-                      </a:r>
-                      <a:endParaRPr lang="en-US" sz="850" dirty="0">
-                        <a:latin typeface="Calibri" charset="0"/>
-                        <a:ea typeface="Calibri" charset="0"/>
-                        <a:cs typeface="Calibri" charset="0"/>
-                      </a:endParaRPr>
-                    </a:p>
-                  </a:txBody>
-                  <a:tcPr marL="64008" marR="64008" marT="0" marB="0" anchor="ctr">
-                    <a:lnL w="6350" cap="flat" cmpd="sng" algn="ctr">
-                      <a:solidFill>
-                        <a:srgbClr val="D5DBE3"/>
-                      </a:solidFill>
-                      <a:prstDash val="solid"/>
-                      <a:round/>
-                      <a:headEnd type="none" w="med" len="med"/>
-                      <a:tailEnd type="none" w="med" len="med"/>
-                    </a:lnL>
-                    <a:lnR w="6350" cap="flat" cmpd="sng" algn="ctr">
-                      <a:solidFill>
-                        <a:srgbClr val="D5DBE3"/>
-                      </a:solidFill>
-                      <a:prstDash val="solid"/>
-                      <a:round/>
-                      <a:headEnd type="none" w="med" len="med"/>
-                      <a:tailEnd type="none" w="med" len="med"/>
-                    </a:lnR>
-                    <a:lnT w="6350" cap="flat" cmpd="sng" algn="ctr">
-                      <a:solidFill>
-                        <a:srgbClr val="D5DBE3"/>
-                      </a:solidFill>
-                      <a:prstDash val="solid"/>
-                      <a:round/>
-                      <a:headEnd type="none" w="med" len="med"/>
-                      <a:tailEnd type="none" w="med" len="med"/>
-                    </a:lnT>
-                    <a:lnB w="6350" cap="flat" cmpd="sng" algn="ctr">
-                      <a:solidFill>
-                        <a:srgbClr val="D5DBE3"/>
-                      </a:solidFill>
-                      <a:prstDash val="solid"/>
-                      <a:round/>
-                      <a:headEnd type="none" w="med" len="med"/>
-                      <a:tailEnd type="none" w="med" len="med"/>
-                    </a:lnB>
-                  </a:tcPr>
-                </a:tc>
-                <a:tc>
-                  <a:txBody>
-                    <a:bodyPr/>
-                    <a:lstStyle/>
-                    <a:p>
-                      <a:pPr algn="r" indent="0" marL="0">
-                        <a:buNone/>
-                      </a:pPr>
-                      <a:r>
-                        <a:rPr lang="en-US" sz="850" b="1" dirty="0">
-                          <a:solidFill>
-                            <a:srgbClr val="B3261E"/>
-                          </a:solidFill>
-                          <a:latin typeface="Calibri" pitchFamily="34" charset="0"/>
-                          <a:ea typeface="Calibri" pitchFamily="34" charset="-122"/>
-                          <a:cs typeface="Calibri" pitchFamily="34" charset="-120"/>
-                        </a:rPr>
-                        <a:t>-45,1</a:t>
-                      </a:r>
-                      <a:endParaRPr lang="en-US" sz="850" dirty="0">
-                        <a:latin typeface="Calibri" charset="0"/>
-                        <a:ea typeface="Calibri" charset="0"/>
-                        <a:cs typeface="Calibri" charset="0"/>
-                      </a:endParaRPr>
-                    </a:p>
-                  </a:txBody>
-                  <a:tcPr marL="64008" marR="64008" marT="0" marB="0" anchor="ctr">
-                    <a:lnL w="6350" cap="flat" cmpd="sng" algn="ctr">
-                      <a:solidFill>
-                        <a:srgbClr val="D5DBE3"/>
-                      </a:solidFill>
-                      <a:prstDash val="solid"/>
-                      <a:round/>
-                      <a:headEnd type="none" w="med" len="med"/>
-                      <a:tailEnd type="none" w="med" len="med"/>
-                    </a:lnL>
-                    <a:lnR w="6350" cap="flat" cmpd="sng" algn="ctr">
-                      <a:solidFill>
-                        <a:srgbClr val="D5DBE3"/>
-                      </a:solidFill>
-                      <a:prstDash val="solid"/>
-                      <a:round/>
-                      <a:headEnd type="none" w="med" len="med"/>
-                      <a:tailEnd type="none" w="med" len="med"/>
-                    </a:lnR>
-                    <a:lnT w="6350" cap="flat" cmpd="sng" algn="ctr">
-                      <a:solidFill>
-                        <a:srgbClr val="D5DBE3"/>
-                      </a:solidFill>
-                      <a:prstDash val="solid"/>
-                      <a:round/>
-                      <a:headEnd type="none" w="med" len="med"/>
-                      <a:tailEnd type="none" w="med" len="med"/>
-                    </a:lnT>
-                    <a:lnB w="6350" cap="flat" cmpd="sng" algn="ctr">
-                      <a:solidFill>
-                        <a:srgbClr val="D5DBE3"/>
-                      </a:solidFill>
-                      <a:prstDash val="solid"/>
-                      <a:round/>
-                      <a:headEnd type="none" w="med" len="med"/>
-                      <a:tailEnd type="none" w="med" len="med"/>
-                    </a:lnB>
-                    <a:solidFill>
-                      <a:srgbClr val="F7E7E5"/>
-                    </a:solidFill>
-                  </a:tcPr>
-                </a:tc>
-                <a:tc>
-                  <a:txBody>
-                    <a:bodyPr/>
-                    <a:lstStyle/>
-                    <a:p>
-                      <a:pPr algn="r" indent="0" marL="0">
-                        <a:buNone/>
-                      </a:pPr>
-                      <a:r>
-                        <a:rPr lang="en-US" sz="850" b="1" dirty="0">
-                          <a:solidFill>
-                            <a:srgbClr val="B3261E"/>
-                          </a:solidFill>
-                          <a:latin typeface="Calibri" pitchFamily="34" charset="0"/>
-                          <a:ea typeface="Calibri" pitchFamily="34" charset="-122"/>
-                          <a:cs typeface="Calibri" pitchFamily="34" charset="-120"/>
-                        </a:rPr>
-                        <a:t>45,1</a:t>
-                      </a:r>
-                      <a:endParaRPr lang="en-US" sz="850" dirty="0">
-                        <a:latin typeface="Calibri" charset="0"/>
-                        <a:ea typeface="Calibri" charset="0"/>
-                        <a:cs typeface="Calibri" charset="0"/>
-                      </a:endParaRPr>
-                    </a:p>
-                  </a:txBody>
-                  <a:tcPr marL="64008" marR="64008" marT="0" marB="0" anchor="ctr">
-                    <a:lnL w="6350" cap="flat" cmpd="sng" algn="ctr">
-                      <a:solidFill>
-                        <a:srgbClr val="D5DBE3"/>
-                      </a:solidFill>
-                      <a:prstDash val="solid"/>
-                      <a:round/>
-                      <a:headEnd type="none" w="med" len="med"/>
-                      <a:tailEnd type="none" w="med" len="med"/>
-                    </a:lnL>
-                    <a:lnR w="6350" cap="flat" cmpd="sng" algn="ctr">
-                      <a:solidFill>
-                        <a:srgbClr val="D5DBE3"/>
-                      </a:solidFill>
-                      <a:prstDash val="solid"/>
-                      <a:round/>
-                      <a:headEnd type="none" w="med" len="med"/>
-                      <a:tailEnd type="none" w="med" len="med"/>
-                    </a:lnR>
-                    <a:lnT w="6350" cap="flat" cmpd="sng" algn="ctr">
-                      <a:solidFill>
-                        <a:srgbClr val="D5DBE3"/>
-                      </a:solidFill>
-                      <a:prstDash val="solid"/>
-                      <a:round/>
-                      <a:headEnd type="none" w="med" len="med"/>
-                      <a:tailEnd type="none" w="med" len="med"/>
-                    </a:lnT>
-                    <a:lnB w="6350" cap="flat" cmpd="sng" algn="ctr">
-                      <a:solidFill>
-                        <a:srgbClr val="D5DBE3"/>
-                      </a:solidFill>
-                      <a:prstDash val="solid"/>
-                      <a:round/>
-                      <a:headEnd type="none" w="med" len="med"/>
-                      <a:tailEnd type="none" w="med" len="med"/>
-                    </a:lnB>
-                    <a:solidFill>
-                      <a:srgbClr val="F7E7E5"/>
-                    </a:solidFill>
-                  </a:tcPr>
-                </a:tc>
-              </a:tr>
-              <a:tr h="224028">
-                <a:tc>
-                  <a:txBody>
-                    <a:bodyPr/>
-                    <a:lstStyle/>
-                    <a:p>
-                      <a:pPr algn="l" indent="0" marL="0">
-                        <a:buNone/>
-                      </a:pPr>
-                      <a:r>
-                        <a:rPr lang="en-US" sz="850" b="1" dirty="0">
-                          <a:solidFill>
                             <a:srgbClr val="FFFFFF"/>
                           </a:solidFill>
                           <a:latin typeface="Calibri" pitchFamily="34" charset="0"/>
@@ -27047,7 +26773,7 @@
                           <a:ea typeface="Calibri" pitchFamily="34" charset="-122"/>
                           <a:cs typeface="Calibri" pitchFamily="34" charset="-120"/>
                         </a:rPr>
-                        <a:t>5 969,5</a:t>
+                        <a:t>6 674,2</a:t>
                       </a:r>
                       <a:endParaRPr lang="en-US" sz="850" dirty="0">
                         <a:latin typeface="Calibri" charset="0"/>
@@ -27251,7 +26977,7 @@
                           <a:ea typeface="Calibri" pitchFamily="34" charset="-122"/>
                           <a:cs typeface="Calibri" pitchFamily="34" charset="-120"/>
                         </a:rPr>
-                        <a:t>869,1</a:t>
+                        <a:t>1 573,8</a:t>
                       </a:r>
                       <a:endParaRPr lang="en-US" sz="850" dirty="0">
                         <a:latin typeface="Calibri" charset="0"/>
@@ -27319,7 +27045,7 @@
                           <a:ea typeface="Calibri" pitchFamily="34" charset="-122"/>
                           <a:cs typeface="Calibri" pitchFamily="34" charset="-120"/>
                         </a:rPr>
-                        <a:t>1 509,2</a:t>
+                        <a:t>934,7</a:t>
                       </a:r>
                       <a:endParaRPr lang="en-US" sz="850" dirty="0">
                         <a:latin typeface="Calibri" charset="0"/>
@@ -27563,7 +27289,7 @@
                 <a:ea typeface="Calibri" pitchFamily="34" charset="-122"/>
                 <a:cs typeface="Calibri" pitchFamily="34" charset="-120"/>
               </a:rPr>
-              <a:t>Financer le reste de 1 509,2 M, dont PICI – ECO 336,4, TERASSON – BNI fonds projet 324,8, PICI – STB 238,1.</a:t>
+              <a:t>Financer le reste de 934,7 M, dont TERASSON – BNI fonds projet 324,8, TERASSON – SG 206,4, SCI FIRST – STB 180,2.</a:t>
             </a:r>
             <a:endParaRPr lang="en-US" sz="1250" dirty="0"/>
           </a:p>

--- a/RCI_Besoins_Tresorerie_Comptes_Paiement_30-09-2026.pptx
+++ b/RCI_Besoins_Tresorerie_Comptes_Paiement_30-09-2026.pptx
@@ -10,10 +10,9 @@
     <p:sldId id="258" r:id="rId4"/>
     <p:sldId id="259" r:id="rId5"/>
     <p:sldId id="260" r:id="rId6"/>
-    <p:sldId id="261" r:id="rId7"/>
   </p:sldIdLst>
   <p:notesMasterIdLst>
-    <p:notesMasterId r:id="rId8"/>
+    <p:notesMasterId r:id="rId7"/>
   </p:notesMasterIdLst>
   <p:sldSz cx="12192000" cy="6858000"/>
   <p:notesSz cx="6858000" cy="12192000"/>
@@ -901,94 +900,6 @@
 </p:notes>
 </file>
 
-<file path=ppt/notesSlides/notesSlide6.xml><?xml version="1.0" encoding="utf-8"?>
-<p:notes xmlns:a="http://schemas.openxmlformats.org/drawingml/2006/main" xmlns:r="http://schemas.openxmlformats.org/officeDocument/2006/relationships" xmlns:p="http://schemas.openxmlformats.org/presentationml/2006/main">
-  <p:cSld>
-    <p:spTree>
-      <p:nvGrpSpPr>
-        <p:cNvPr id="1" name=""/>
-        <p:cNvGrpSpPr/>
-        <p:nvPr/>
-      </p:nvGrpSpPr>
-      <p:grpSpPr>
-        <a:xfrm>
-          <a:off x="0" y="0"/>
-          <a:ext cx="0" cy="0"/>
-          <a:chOff x="0" y="0"/>
-          <a:chExt cx="0" cy="0"/>
-        </a:xfrm>
-      </p:grpSpPr>
-      <p:sp>
-        <p:nvSpPr>
-          <p:cNvPr id="2" name="Slide Image Placeholder 1"/>
-          <p:cNvSpPr>
-            <a:spLocks noGrp="1" noRot="1" noChangeAspect="1"/>
-          </p:cNvSpPr>
-          <p:nvPr>
-            <p:ph type="sldImg"/>
-          </p:nvPr>
-        </p:nvSpPr>
-        <p:spPr/>
-      </p:sp>
-      <p:sp>
-        <p:nvSpPr>
-          <p:cNvPr id="3" name="Notes Placeholder 2"/>
-          <p:cNvSpPr>
-            <a:spLocks noGrp="1"/>
-          </p:cNvSpPr>
-          <p:nvPr>
-            <p:ph type="body" idx="1"/>
-          </p:nvPr>
-        </p:nvSpPr>
-        <p:spPr/>
-        <p:txBody>
-          <a:bodyPr/>
-          <a:lstStyle/>
-          <a:p>
-            <a:r>
-              <a:rPr lang="en-US" dirty="0"/>
-              <a:t/>
-            </a:r>
-            <a:endParaRPr lang="en-US" dirty="0"/>
-          </a:p>
-        </p:txBody>
-      </p:sp>
-      <p:sp>
-        <p:nvSpPr>
-          <p:cNvPr id="4" name="Slide Number Placeholder 3"/>
-          <p:cNvSpPr>
-            <a:spLocks noGrp="1"/>
-          </p:cNvSpPr>
-          <p:nvPr>
-            <p:ph type="sldNum" sz="quarter" idx="10"/>
-          </p:nvPr>
-        </p:nvSpPr>
-        <p:spPr/>
-        <p:txBody>
-          <a:bodyPr/>
-          <a:lstStyle/>
-          <a:p>
-            <a:fld id="{F7021451-1387-4CA6-816F-3879F97B5CBC}" type="slidenum">
-              <a:rPr lang="en-US"/>
-              <a:t>6</a:t>
-            </a:fld>
-            <a:endParaRPr lang="en-US"/>
-          </a:p>
-        </p:txBody>
-      </p:sp>
-    </p:spTree>
-    <p:extLst>
-      <p:ext uri="{BB962C8B-B14F-4D97-AF65-F5344CB8AC3E}">
-        <p14:creationId xmlns:p14="http://schemas.microsoft.com/office/powerpoint/2010/main" val="1024086991"/>
-      </p:ext>
-    </p:extLst>
-  </p:cSld>
-  <p:clrMapOvr>
-    <a:masterClrMapping/>
-  </p:clrMapOvr>
-</p:notes>
-</file>
-
 <file path=ppt/slideLayouts/slideLayout1.xml><?xml version="1.0" encoding="utf-8"?>
 <p:sldLayout xmlns:a="http://schemas.openxmlformats.org/drawingml/2006/main" xmlns:r="http://schemas.openxmlformats.org/officeDocument/2006/relationships" xmlns:p="http://schemas.openxmlformats.org/presentationml/2006/main" preserve="1">
   <p:cSld name="DEFAULT">
@@ -1455,7 +1366,7 @@
                 <a:ea typeface="Calibri" pitchFamily="34" charset="-122"/>
                 <a:cs typeface="Calibri" pitchFamily="34" charset="-120"/>
               </a:rPr>
-              <a:t>Situation au 30/09/2026 – échéancier S1 à S5 (05/10 → 08/11/2026)</a:t>
+              <a:t>Situation au 30/09/2026 – échéancier Semaines 1 à 5 (05/10 → 08/11/2026)</a:t>
             </a:r>
             <a:endParaRPr lang="en-US" sz="1500" dirty="0"/>
           </a:p>
@@ -1494,7 +1405,7 @@
                 <a:ea typeface="Calibri" pitchFamily="34" charset="-122"/>
                 <a:cs typeface="Calibri" pitchFamily="34" charset="-120"/>
               </a:rPr>
-              <a:t>Direction Trésorerie &amp; Financement – Groupe Duval Afrique  |  Octobre 2026</a:t>
+              <a:t>Trésorerie &amp; Financement – Groupe Duval Afrique  |  Octobre 2026</a:t>
             </a:r>
             <a:endParaRPr lang="en-US" sz="1100" dirty="0"/>
           </a:p>
@@ -1604,7 +1515,7 @@
                 <a:ea typeface="Calibri" pitchFamily="34" charset="-122"/>
                 <a:cs typeface="Calibri" pitchFamily="34" charset="-120"/>
               </a:rPr>
-              <a:t>Position de trésorerie au 30/09/2026 – échéancier S1 à S5 (05/10 → 08/11/2026), antériorités en S1 – montants en MFCFA</a:t>
+              <a:t>Position au 30/09/2026 – Semaines 1 à 5 (05/10 → 08/11/2026), antériorités en Semaine 1 – MFCFA</a:t>
             </a:r>
             <a:endParaRPr lang="en-US" sz="1300" dirty="0"/>
           </a:p>
@@ -1851,7 +1762,7 @@
                 <a:ea typeface="Calibri" pitchFamily="34" charset="-122"/>
                 <a:cs typeface="Calibri" pitchFamily="34" charset="-120"/>
               </a:rPr>
-              <a:t>6 974,1 M à payer de S1 à S5, dont 5 115,2 M dès S1 ; 1 925,7 M de déficits</a:t>
+              <a:t>6 974,1 M à payer de Semaines 1 à 5, dont 5 115,2 M dès Semaine 1 ; 1 925,7 M de déficits</a:t>
             </a:r>
             <a:endParaRPr lang="en-US" sz="1400" dirty="0"/>
           </a:p>
@@ -2201,7 +2112,7 @@
                 <a:ea typeface="Calibri" pitchFamily="34" charset="-122"/>
                 <a:cs typeface="Calibri" pitchFamily="34" charset="-120"/>
               </a:rPr>
-              <a:t>Options de couverture et décisions</a:t>
+              <a:t>Équilibrage Semaine 1 : virements et reste à financer</a:t>
             </a:r>
             <a:endParaRPr lang="en-US" sz="1500" dirty="0"/>
           </a:p>
@@ -2209,110 +2120,7 @@
       </p:sp>
       <p:sp>
         <p:nvSpPr>
-          <p:cNvPr id="21" name="Shape 19"/>
-          <p:cNvSpPr/>
-          <p:nvPr/>
-        </p:nvSpPr>
-        <p:spPr>
-          <a:xfrm>
-            <a:off x="6583680" y="4032504"/>
-            <a:ext cx="420624" cy="420624"/>
-          </a:xfrm>
-          <a:prstGeom prst="ellipse">
-            <a:avLst/>
-          </a:prstGeom>
-          <a:solidFill>
-            <a:srgbClr val="002C50"/>
-          </a:solidFill>
-          <a:ln w="12700">
-            <a:solidFill>
-              <a:srgbClr val="002C50"/>
-            </a:solidFill>
-            <a:prstDash val="solid"/>
-          </a:ln>
-        </p:spPr>
-      </p:sp>
-      <p:sp>
-        <p:nvSpPr>
-          <p:cNvPr id="22" name="Text 20"/>
-          <p:cNvSpPr txBox="1"/>
-          <p:nvPr/>
-        </p:nvSpPr>
-        <p:spPr>
-          <a:xfrm>
-            <a:off x="6583680" y="4032504"/>
-            <a:ext cx="420624" cy="420624"/>
-          </a:xfrm>
-          <a:prstGeom prst="rect">
-            <a:avLst/>
-          </a:prstGeom>
-          <a:noFill/>
-          <a:ln/>
-        </p:spPr>
-        <p:txBody>
-          <a:bodyPr wrap="square" lIns="0" tIns="0" rIns="0" bIns="0" rtlCol="0" anchor="ctr"/>
-          <a:lstStyle/>
-          <a:p>
-            <a:pPr algn="ctr" indent="0" marL="0">
-              <a:buNone/>
-            </a:pPr>
-            <a:r>
-              <a:rPr lang="en-US" sz="1300" b="1" dirty="0">
-                <a:solidFill>
-                  <a:srgbClr val="FFFFFF"/>
-                </a:solidFill>
-                <a:latin typeface="Calibri" pitchFamily="34" charset="0"/>
-                <a:ea typeface="Calibri" pitchFamily="34" charset="-122"/>
-                <a:cs typeface="Calibri" pitchFamily="34" charset="-120"/>
-              </a:rPr>
-              <a:t>6</a:t>
-            </a:r>
-            <a:endParaRPr lang="en-US" sz="1300" dirty="0"/>
-          </a:p>
-        </p:txBody>
-      </p:sp>
-      <p:sp>
-        <p:nvSpPr>
-          <p:cNvPr id="23" name="Text 21"/>
-          <p:cNvSpPr txBox="1"/>
-          <p:nvPr/>
-        </p:nvSpPr>
-        <p:spPr>
-          <a:xfrm>
-            <a:off x="7178040" y="4032504"/>
-            <a:ext cx="4297680" cy="420624"/>
-          </a:xfrm>
-          <a:prstGeom prst="rect">
-            <a:avLst/>
-          </a:prstGeom>
-          <a:noFill/>
-          <a:ln/>
-        </p:spPr>
-        <p:txBody>
-          <a:bodyPr wrap="square" lIns="0" tIns="0" rIns="0" bIns="0" rtlCol="0" anchor="ctr"/>
-          <a:lstStyle/>
-          <a:p>
-            <a:pPr indent="0" marL="0">
-              <a:buNone/>
-            </a:pPr>
-            <a:r>
-              <a:rPr lang="en-US" sz="1500" dirty="0">
-                <a:solidFill>
-                  <a:srgbClr val="1F2933"/>
-                </a:solidFill>
-                <a:latin typeface="Calibri" pitchFamily="34" charset="0"/>
-                <a:ea typeface="Calibri" pitchFamily="34" charset="-122"/>
-                <a:cs typeface="Calibri" pitchFamily="34" charset="-120"/>
-              </a:rPr>
-              <a:t>Équilibrage S1 : virements et reste à financer</a:t>
-            </a:r>
-            <a:endParaRPr lang="en-US" sz="1500" dirty="0"/>
-          </a:p>
-        </p:txBody>
-      </p:sp>
-      <p:sp>
-        <p:nvSpPr>
-          <p:cNvPr id="24" name="Text 22"/>
+          <p:cNvPr id="21" name="Text 19"/>
           <p:cNvSpPr txBox="1"/>
           <p:nvPr/>
         </p:nvSpPr>
@@ -2343,7 +2151,7 @@
                 <a:ea typeface="Calibri" pitchFamily="34" charset="-122"/>
                 <a:cs typeface="Calibri" pitchFamily="34" charset="-120"/>
               </a:rPr>
-              <a:t>Couverture des déficits : crédit spot, avances intragroupe ou comptes à arbitrer</a:t>
+              <a:t>Équilibrage de la Semaine 1 : virements entre comptes et reste à financer</a:t>
             </a:r>
             <a:endParaRPr lang="en-US" sz="1400" dirty="0"/>
           </a:p>
@@ -2351,7 +2159,7 @@
       </p:sp>
       <p:sp>
         <p:nvSpPr>
-          <p:cNvPr id="25" name="Text 23"/>
+          <p:cNvPr id="22" name="Text 20"/>
           <p:cNvSpPr txBox="1"/>
           <p:nvPr/>
         </p:nvSpPr>
@@ -2390,7 +2198,7 @@
       </p:sp>
       <p:pic>
         <p:nvPicPr>
-          <p:cNvPr id="26" name="Image 0" descr="preencoded.png">    </p:cNvPr>
+          <p:cNvPr id="23" name="Image 0" descr="preencoded.png">    </p:cNvPr>
           <p:cNvPicPr>
             <a:picLocks noChangeAspect="1"/>
           </p:cNvPicPr>
@@ -2414,7 +2222,7 @@
       </p:pic>
       <p:sp>
         <p:nvSpPr>
-          <p:cNvPr id="27" name="Text 24"/>
+          <p:cNvPr id="24" name="Text 21"/>
           <p:cNvSpPr txBox="1"/>
           <p:nvPr/>
         </p:nvSpPr>
@@ -2555,7 +2363,7 @@
                 <a:ea typeface="Calibri" pitchFamily="34" charset="-122"/>
                 <a:cs typeface="Calibri" pitchFamily="34" charset="-120"/>
               </a:rPr>
-              <a:t>Soldes au 30/09/2026, échéancier S1 à S5 (05/10 → 08/11/2026), antériorités reportées en S1 – MFCFA</a:t>
+              <a:t>Soldes au 30/09/2026, échéancier Semaines 1 à 5 (05/10 → 08/11/2026), antériorités reportées en Semaine 1 – MFCFA</a:t>
             </a:r>
             <a:endParaRPr lang="en-US" sz="1300" dirty="0"/>
           </a:p>
@@ -2660,7 +2468,7 @@
                 <a:ea typeface="Calibri" pitchFamily="34" charset="-122"/>
                 <a:cs typeface="Calibri" pitchFamily="34" charset="-120"/>
               </a:rPr>
-              <a:t>Besoin S1 à S5 (10,6 M€) : fonctionnement, projets et dette</a:t>
+              <a:t>Besoin Semaines 1 à 5 (10,6 M€) : fonctionnement, projets et dette</a:t>
             </a:r>
             <a:endParaRPr lang="en-US" sz="1050" dirty="0"/>
           </a:p>
@@ -2765,7 +2573,7 @@
                 <a:ea typeface="Calibri" pitchFamily="34" charset="-122"/>
                 <a:cs typeface="Calibri" pitchFamily="34" charset="-120"/>
               </a:rPr>
-              <a:t>À régler dès S1 (antériorités incluses), 73 % du besoin</a:t>
+              <a:t>Dès Semaine 1, antériorités incluses (73 % du besoin)</a:t>
             </a:r>
             <a:endParaRPr lang="en-US" sz="1050" dirty="0"/>
           </a:p>
@@ -2975,7 +2783,7 @@
                 <a:ea typeface="Calibri" pitchFamily="34" charset="-122"/>
                 <a:cs typeface="Calibri" pitchFamily="34" charset="-120"/>
               </a:rPr>
-              <a:t>Besoin fin S5 – comptes de sociétés ; comptes dédiés +745,6 M</a:t>
+              <a:t>Besoin fin Semaine 5 des sociétés ; comptes dédiés +745,6 M</a:t>
             </a:r>
             <a:endParaRPr lang="en-US" sz="1050" dirty="0"/>
           </a:p>
@@ -3100,7 +2908,7 @@
                           <a:ea typeface="Calibri" pitchFamily="34" charset="-122"/>
                           <a:cs typeface="Calibri" pitchFamily="34" charset="-120"/>
                         </a:rPr>
-                        <a:t>S1 05/10</a:t>
+                        <a:t>Semaine 1 05/10</a:t>
                       </a:r>
                       <a:endParaRPr lang="en-US" sz="900" dirty="0">
                         <a:latin typeface="Calibri" charset="0"/>
@@ -3168,7 +2976,7 @@
                           <a:ea typeface="Calibri" pitchFamily="34" charset="-122"/>
                           <a:cs typeface="Calibri" pitchFamily="34" charset="-120"/>
                         </a:rPr>
-                        <a:t>S2 12/10</a:t>
+                        <a:t>Semaine 2 12/10</a:t>
                       </a:r>
                       <a:endParaRPr lang="en-US" sz="900" dirty="0">
                         <a:latin typeface="Calibri" charset="0"/>
@@ -3236,7 +3044,7 @@
                           <a:ea typeface="Calibri" pitchFamily="34" charset="-122"/>
                           <a:cs typeface="Calibri" pitchFamily="34" charset="-120"/>
                         </a:rPr>
-                        <a:t>S3 19/10</a:t>
+                        <a:t>Semaine 3 19/10</a:t>
                       </a:r>
                       <a:endParaRPr lang="en-US" sz="900" dirty="0">
                         <a:latin typeface="Calibri" charset="0"/>
@@ -3304,7 +3112,7 @@
                           <a:ea typeface="Calibri" pitchFamily="34" charset="-122"/>
                           <a:cs typeface="Calibri" pitchFamily="34" charset="-120"/>
                         </a:rPr>
-                        <a:t>S4 26/10</a:t>
+                        <a:t>Semaine 4 26/10</a:t>
                       </a:r>
                       <a:endParaRPr lang="en-US" sz="900" dirty="0">
                         <a:latin typeface="Calibri" charset="0"/>
@@ -3372,7 +3180,7 @@
                           <a:ea typeface="Calibri" pitchFamily="34" charset="-122"/>
                           <a:cs typeface="Calibri" pitchFamily="34" charset="-120"/>
                         </a:rPr>
-                        <a:t>S5 02/11</a:t>
+                        <a:t>Semaine 5 02/11</a:t>
                       </a:r>
                       <a:endParaRPr lang="en-US" sz="900" dirty="0">
                         <a:latin typeface="Calibri" charset="0"/>
@@ -3440,7 +3248,7 @@
                           <a:ea typeface="Calibri" pitchFamily="34" charset="-122"/>
                           <a:cs typeface="Calibri" pitchFamily="34" charset="-120"/>
                         </a:rPr>
-                        <a:t>Total S1 à S5</a:t>
+                        <a:t>Total Semaines 1 à 5</a:t>
                       </a:r>
                       <a:endParaRPr lang="en-US" sz="900" dirty="0">
                         <a:latin typeface="Calibri" charset="0"/>
@@ -3576,7 +3384,7 @@
                           <a:ea typeface="Calibri" pitchFamily="34" charset="-122"/>
                           <a:cs typeface="Calibri" pitchFamily="34" charset="-120"/>
                         </a:rPr>
-                        <a:t>Déficit fin S5</a:t>
+                        <a:t>Déficit fin Semaine 5</a:t>
                       </a:r>
                       <a:endParaRPr lang="en-US" sz="900" dirty="0">
                         <a:latin typeface="Calibri" charset="0"/>
@@ -10113,7 +9921,7 @@
                 <a:ea typeface="Calibri" pitchFamily="34" charset="-122"/>
                 <a:cs typeface="Calibri" pitchFamily="34" charset="-120"/>
               </a:rPr>
-              <a:t>5 227,7 M. RIVIERA en déficit de 601,4 M dès S2 ; TERASSON en déficit de 501,3 M dès S1.</a:t>
+              <a:t>5 227,7 M. RIVIERA en déficit de 601,4 M dès Semaine 2 ; TERASSON en déficit de 501,3 M dès Semaine 1.</a:t>
             </a:r>
             <a:endParaRPr lang="en-US" sz="1000" dirty="0"/>
           </a:p>
@@ -10360,7 +10168,7 @@
                 <a:ea typeface="Calibri" pitchFamily="34" charset="-122"/>
                 <a:cs typeface="Calibri" pitchFamily="34" charset="-120"/>
               </a:rPr>
-              <a:t>Compte payeur par entité et nature d'opération, trésorerie au 30/09/2026 et solde théorique fin S5 – MFCFA</a:t>
+              <a:t>Compte payeur par entité et nature d'opération, trésorerie au 30/09/2026 et solde théorique fin Semaine 5 – MFCFA</a:t>
             </a:r>
             <a:endParaRPr lang="en-US" sz="1300" dirty="0"/>
           </a:p>
@@ -10550,7 +10358,7 @@
                           <a:ea typeface="Calibri" pitchFamily="34" charset="-122"/>
                           <a:cs typeface="Calibri" pitchFamily="34" charset="-120"/>
                         </a:rPr>
-                        <a:t>Montant S1 à S5</a:t>
+                        <a:t>Montant Semaines 1 à 5</a:t>
                       </a:r>
                       <a:endParaRPr lang="en-US" sz="950" dirty="0">
                         <a:latin typeface="Calibri" charset="0"/>
@@ -10754,7 +10562,7 @@
                           <a:ea typeface="Calibri" pitchFamily="34" charset="-122"/>
                           <a:cs typeface="Calibri" pitchFamily="34" charset="-120"/>
                         </a:rPr>
-                        <a:t>Solde fin S5</a:t>
+                        <a:t>Solde fin Semaine 5</a:t>
                       </a:r>
                       <a:endParaRPr lang="en-US" sz="950" dirty="0">
                         <a:latin typeface="Calibri" charset="0"/>
@@ -15865,7 +15673,7 @@
                 <a:ea typeface="Calibri" pitchFamily="34" charset="-122"/>
                 <a:cs typeface="Calibri" pitchFamily="34" charset="-120"/>
               </a:rPr>
-              <a:t>Solde fin S5 = trésorerie au 30/09 + flux prévus de S1 à S5 (encaissements compris).</a:t>
+              <a:t>Solde fin Semaine 5 = trésorerie au 30/09 + flux prévus de Semaines 1 à 5 (encaissements compris).</a:t>
             </a:r>
             <a:endParaRPr lang="en-US" sz="950" dirty="0"/>
           </a:p>
@@ -15999,4251 +15807,7 @@
                 <a:ea typeface="Calibri" pitchFamily="34" charset="-122"/>
                 <a:cs typeface="Calibri" pitchFamily="34" charset="-120"/>
               </a:rPr>
-              <a:t>B. Paiement – 2. Options de couverture</a:t>
-            </a:r>
-            <a:endParaRPr lang="en-US" sz="2600" dirty="0"/>
-          </a:p>
-        </p:txBody>
-      </p:sp>
-      <p:sp>
-        <p:nvSpPr>
-          <p:cNvPr id="3" name="Text 1"/>
-          <p:cNvSpPr txBox="1"/>
-          <p:nvPr/>
-        </p:nvSpPr>
-        <p:spPr>
-          <a:xfrm>
-            <a:off x="457200" y="822960"/>
-            <a:ext cx="11247120" cy="320040"/>
-          </a:xfrm>
-          <a:prstGeom prst="rect">
-            <a:avLst/>
-          </a:prstGeom>
-          <a:noFill/>
-          <a:ln/>
-        </p:spPr>
-        <p:txBody>
-          <a:bodyPr wrap="square" lIns="0" tIns="0" rIns="0" bIns="0" rtlCol="0" anchor="ctr"/>
-          <a:lstStyle/>
-          <a:p>
-            <a:pPr indent="0" marL="0">
-              <a:buNone/>
-            </a:pPr>
-            <a:r>
-              <a:rPr lang="en-US" sz="1300" dirty="0">
-                <a:solidFill>
-                  <a:srgbClr val="9D8C74"/>
-                </a:solidFill>
-                <a:latin typeface="Calibri" pitchFamily="34" charset="0"/>
-                <a:ea typeface="Calibri" pitchFamily="34" charset="-122"/>
-                <a:cs typeface="Calibri" pitchFamily="34" charset="-120"/>
-              </a:rPr>
-              <a:t>Déficits à couvrir d'ici S5 : 1 925,7 M – MFCFA</a:t>
-            </a:r>
-            <a:endParaRPr lang="en-US" sz="1300" dirty="0"/>
-          </a:p>
-        </p:txBody>
-      </p:sp>
-      <p:graphicFrame>
-        <p:nvGraphicFramePr>
-          <p:cNvPr id="6" name="Table 0"/>
-          <p:cNvGraphicFramePr>
-            <a:graphicFrameLocks noGrp="1"/>
-          </p:cNvGraphicFramePr>
-          <p:nvPr>
-            <p:extLst>
-              <p:ext uri="{D42A27DB-BD31-4B8C-83A1-F6EECF244321}">
-                <p14:modId xmlns:p14="http://schemas.microsoft.com/office/powerpoint/2010/main" val="1579011935"/>
-              </p:ext>
-            </p:extLst>
-          </p:nvPr>
-        </p:nvGraphicFramePr>
-        <p:xfrm>
-          <a:off x="457200" y="1325880"/>
-          <a:ext cx="5760720" cy="914400"/>
-        </p:xfrm>
-        <a:graphic>
-          <a:graphicData uri="http://schemas.openxmlformats.org/drawingml/2006/table">
-            <a:tbl>
-              <a:tblPr/>
-              <a:tblGrid>
-                <a:gridCol w="2103120"/>
-                <a:gridCol w="868680"/>
-                <a:gridCol w="2194560"/>
-                <a:gridCol w="594360"/>
-              </a:tblGrid>
-              <a:tr h="237744">
-                <a:tc>
-                  <a:txBody>
-                    <a:bodyPr/>
-                    <a:lstStyle/>
-                    <a:p>
-                      <a:pPr algn="l" indent="0" marL="0">
-                        <a:buNone/>
-                      </a:pPr>
-                      <a:r>
-                        <a:rPr lang="en-US" sz="950" b="1" dirty="0">
-                          <a:solidFill>
-                            <a:srgbClr val="FFFFFF"/>
-                          </a:solidFill>
-                          <a:latin typeface="Calibri" pitchFamily="34" charset="0"/>
-                          <a:ea typeface="Calibri" pitchFamily="34" charset="-122"/>
-                          <a:cs typeface="Calibri" pitchFamily="34" charset="-120"/>
-                        </a:rPr>
-                        <a:t>Déficit à couvrir</a:t>
-                      </a:r>
-                      <a:endParaRPr lang="en-US" sz="950" dirty="0">
-                        <a:latin typeface="Calibri" charset="0"/>
-                        <a:ea typeface="Calibri" charset="0"/>
-                        <a:cs typeface="Calibri" charset="0"/>
-                      </a:endParaRPr>
-                    </a:p>
-                  </a:txBody>
-                  <a:tcPr marL="64008" marR="64008" marT="0" marB="0" anchor="ctr">
-                    <a:lnL w="6350" cap="flat" cmpd="sng" algn="ctr">
-                      <a:solidFill>
-                        <a:srgbClr val="D5DBE3"/>
-                      </a:solidFill>
-                      <a:prstDash val="solid"/>
-                      <a:round/>
-                      <a:headEnd type="none" w="med" len="med"/>
-                      <a:tailEnd type="none" w="med" len="med"/>
-                    </a:lnL>
-                    <a:lnR w="6350" cap="flat" cmpd="sng" algn="ctr">
-                      <a:solidFill>
-                        <a:srgbClr val="D5DBE3"/>
-                      </a:solidFill>
-                      <a:prstDash val="solid"/>
-                      <a:round/>
-                      <a:headEnd type="none" w="med" len="med"/>
-                      <a:tailEnd type="none" w="med" len="med"/>
-                    </a:lnR>
-                    <a:lnT w="6350" cap="flat" cmpd="sng" algn="ctr">
-                      <a:solidFill>
-                        <a:srgbClr val="D5DBE3"/>
-                      </a:solidFill>
-                      <a:prstDash val="solid"/>
-                      <a:round/>
-                      <a:headEnd type="none" w="med" len="med"/>
-                      <a:tailEnd type="none" w="med" len="med"/>
-                    </a:lnT>
-                    <a:lnB w="6350" cap="flat" cmpd="sng" algn="ctr">
-                      <a:solidFill>
-                        <a:srgbClr val="D5DBE3"/>
-                      </a:solidFill>
-                      <a:prstDash val="solid"/>
-                      <a:round/>
-                      <a:headEnd type="none" w="med" len="med"/>
-                      <a:tailEnd type="none" w="med" len="med"/>
-                    </a:lnB>
-                    <a:solidFill>
-                      <a:srgbClr val="002C50"/>
-                    </a:solidFill>
-                  </a:tcPr>
-                </a:tc>
-                <a:tc>
-                  <a:txBody>
-                    <a:bodyPr/>
-                    <a:lstStyle/>
-                    <a:p>
-                      <a:pPr algn="ctr" indent="0" marL="0">
-                        <a:buNone/>
-                      </a:pPr>
-                      <a:r>
-                        <a:rPr lang="en-US" sz="950" b="1" dirty="0">
-                          <a:solidFill>
-                            <a:srgbClr val="FFFFFF"/>
-                          </a:solidFill>
-                          <a:latin typeface="Calibri" pitchFamily="34" charset="0"/>
-                          <a:ea typeface="Calibri" pitchFamily="34" charset="-122"/>
-                          <a:cs typeface="Calibri" pitchFamily="34" charset="-120"/>
-                        </a:rPr>
-                        <a:t>Montant</a:t>
-                      </a:r>
-                      <a:endParaRPr lang="en-US" sz="950" dirty="0">
-                        <a:latin typeface="Calibri" charset="0"/>
-                        <a:ea typeface="Calibri" charset="0"/>
-                        <a:cs typeface="Calibri" charset="0"/>
-                      </a:endParaRPr>
-                    </a:p>
-                  </a:txBody>
-                  <a:tcPr marL="64008" marR="64008" marT="0" marB="0" anchor="ctr">
-                    <a:lnL w="6350" cap="flat" cmpd="sng" algn="ctr">
-                      <a:solidFill>
-                        <a:srgbClr val="D5DBE3"/>
-                      </a:solidFill>
-                      <a:prstDash val="solid"/>
-                      <a:round/>
-                      <a:headEnd type="none" w="med" len="med"/>
-                      <a:tailEnd type="none" w="med" len="med"/>
-                    </a:lnL>
-                    <a:lnR w="6350" cap="flat" cmpd="sng" algn="ctr">
-                      <a:solidFill>
-                        <a:srgbClr val="D5DBE3"/>
-                      </a:solidFill>
-                      <a:prstDash val="solid"/>
-                      <a:round/>
-                      <a:headEnd type="none" w="med" len="med"/>
-                      <a:tailEnd type="none" w="med" len="med"/>
-                    </a:lnR>
-                    <a:lnT w="6350" cap="flat" cmpd="sng" algn="ctr">
-                      <a:solidFill>
-                        <a:srgbClr val="D5DBE3"/>
-                      </a:solidFill>
-                      <a:prstDash val="solid"/>
-                      <a:round/>
-                      <a:headEnd type="none" w="med" len="med"/>
-                      <a:tailEnd type="none" w="med" len="med"/>
-                    </a:lnT>
-                    <a:lnB w="6350" cap="flat" cmpd="sng" algn="ctr">
-                      <a:solidFill>
-                        <a:srgbClr val="D5DBE3"/>
-                      </a:solidFill>
-                      <a:prstDash val="solid"/>
-                      <a:round/>
-                      <a:headEnd type="none" w="med" len="med"/>
-                      <a:tailEnd type="none" w="med" len="med"/>
-                    </a:lnB>
-                    <a:solidFill>
-                      <a:srgbClr val="002C50"/>
-                    </a:solidFill>
-                  </a:tcPr>
-                </a:tc>
-                <a:tc>
-                  <a:txBody>
-                    <a:bodyPr/>
-                    <a:lstStyle/>
-                    <a:p>
-                      <a:pPr algn="l" indent="0" marL="0">
-                        <a:buNone/>
-                      </a:pPr>
-                      <a:r>
-                        <a:rPr lang="en-US" sz="950" b="1" dirty="0">
-                          <a:solidFill>
-                            <a:srgbClr val="FFFFFF"/>
-                          </a:solidFill>
-                          <a:latin typeface="Calibri" pitchFamily="34" charset="0"/>
-                          <a:ea typeface="Calibri" pitchFamily="34" charset="-122"/>
-                          <a:cs typeface="Calibri" pitchFamily="34" charset="-120"/>
-                        </a:rPr>
-                        <a:t>Options</a:t>
-                      </a:r>
-                      <a:endParaRPr lang="en-US" sz="950" dirty="0">
-                        <a:latin typeface="Calibri" charset="0"/>
-                        <a:ea typeface="Calibri" charset="0"/>
-                        <a:cs typeface="Calibri" charset="0"/>
-                      </a:endParaRPr>
-                    </a:p>
-                  </a:txBody>
-                  <a:tcPr marL="64008" marR="64008" marT="0" marB="0" anchor="ctr">
-                    <a:lnL w="6350" cap="flat" cmpd="sng" algn="ctr">
-                      <a:solidFill>
-                        <a:srgbClr val="D5DBE3"/>
-                      </a:solidFill>
-                      <a:prstDash val="solid"/>
-                      <a:round/>
-                      <a:headEnd type="none" w="med" len="med"/>
-                      <a:tailEnd type="none" w="med" len="med"/>
-                    </a:lnL>
-                    <a:lnR w="6350" cap="flat" cmpd="sng" algn="ctr">
-                      <a:solidFill>
-                        <a:srgbClr val="D5DBE3"/>
-                      </a:solidFill>
-                      <a:prstDash val="solid"/>
-                      <a:round/>
-                      <a:headEnd type="none" w="med" len="med"/>
-                      <a:tailEnd type="none" w="med" len="med"/>
-                    </a:lnR>
-                    <a:lnT w="6350" cap="flat" cmpd="sng" algn="ctr">
-                      <a:solidFill>
-                        <a:srgbClr val="D5DBE3"/>
-                      </a:solidFill>
-                      <a:prstDash val="solid"/>
-                      <a:round/>
-                      <a:headEnd type="none" w="med" len="med"/>
-                      <a:tailEnd type="none" w="med" len="med"/>
-                    </a:lnT>
-                    <a:lnB w="6350" cap="flat" cmpd="sng" algn="ctr">
-                      <a:solidFill>
-                        <a:srgbClr val="D5DBE3"/>
-                      </a:solidFill>
-                      <a:prstDash val="solid"/>
-                      <a:round/>
-                      <a:headEnd type="none" w="med" len="med"/>
-                      <a:tailEnd type="none" w="med" len="med"/>
-                    </a:lnB>
-                    <a:solidFill>
-                      <a:srgbClr val="002C50"/>
-                    </a:solidFill>
-                  </a:tcPr>
-                </a:tc>
-                <a:tc>
-                  <a:txBody>
-                    <a:bodyPr/>
-                    <a:lstStyle/>
-                    <a:p>
-                      <a:pPr algn="ctr" indent="0" marL="0">
-                        <a:buNone/>
-                      </a:pPr>
-                      <a:r>
-                        <a:rPr lang="en-US" sz="950" b="1" dirty="0">
-                          <a:solidFill>
-                            <a:srgbClr val="FFFFFF"/>
-                          </a:solidFill>
-                          <a:latin typeface="Calibri" pitchFamily="34" charset="0"/>
-                          <a:ea typeface="Calibri" pitchFamily="34" charset="-122"/>
-                          <a:cs typeface="Calibri" pitchFamily="34" charset="-120"/>
-                        </a:rPr>
-                        <a:t>Dès</a:t>
-                      </a:r>
-                      <a:endParaRPr lang="en-US" sz="950" dirty="0">
-                        <a:latin typeface="Calibri" charset="0"/>
-                        <a:ea typeface="Calibri" charset="0"/>
-                        <a:cs typeface="Calibri" charset="0"/>
-                      </a:endParaRPr>
-                    </a:p>
-                  </a:txBody>
-                  <a:tcPr marL="64008" marR="64008" marT="0" marB="0" anchor="ctr">
-                    <a:lnL w="6350" cap="flat" cmpd="sng" algn="ctr">
-                      <a:solidFill>
-                        <a:srgbClr val="D5DBE3"/>
-                      </a:solidFill>
-                      <a:prstDash val="solid"/>
-                      <a:round/>
-                      <a:headEnd type="none" w="med" len="med"/>
-                      <a:tailEnd type="none" w="med" len="med"/>
-                    </a:lnL>
-                    <a:lnR w="6350" cap="flat" cmpd="sng" algn="ctr">
-                      <a:solidFill>
-                        <a:srgbClr val="D5DBE3"/>
-                      </a:solidFill>
-                      <a:prstDash val="solid"/>
-                      <a:round/>
-                      <a:headEnd type="none" w="med" len="med"/>
-                      <a:tailEnd type="none" w="med" len="med"/>
-                    </a:lnR>
-                    <a:lnT w="6350" cap="flat" cmpd="sng" algn="ctr">
-                      <a:solidFill>
-                        <a:srgbClr val="D5DBE3"/>
-                      </a:solidFill>
-                      <a:prstDash val="solid"/>
-                      <a:round/>
-                      <a:headEnd type="none" w="med" len="med"/>
-                      <a:tailEnd type="none" w="med" len="med"/>
-                    </a:lnT>
-                    <a:lnB w="6350" cap="flat" cmpd="sng" algn="ctr">
-                      <a:solidFill>
-                        <a:srgbClr val="D5DBE3"/>
-                      </a:solidFill>
-                      <a:prstDash val="solid"/>
-                      <a:round/>
-                      <a:headEnd type="none" w="med" len="med"/>
-                      <a:tailEnd type="none" w="med" len="med"/>
-                    </a:lnB>
-                    <a:solidFill>
-                      <a:srgbClr val="002C50"/>
-                    </a:solidFill>
-                  </a:tcPr>
-                </a:tc>
-              </a:tr>
-              <a:tr h="237744">
-                <a:tc>
-                  <a:txBody>
-                    <a:bodyPr/>
-                    <a:lstStyle/>
-                    <a:p>
-                      <a:pPr algn="l" indent="0" marL="0">
-                        <a:buNone/>
-                      </a:pPr>
-                      <a:r>
-                        <a:rPr lang="en-US" sz="950" b="1" dirty="0">
-                          <a:solidFill>
-                            <a:srgbClr val="1F2933"/>
-                          </a:solidFill>
-                          <a:latin typeface="Calibri" pitchFamily="34" charset="0"/>
-                          <a:ea typeface="Calibri" pitchFamily="34" charset="-122"/>
-                          <a:cs typeface="Calibri" pitchFamily="34" charset="-120"/>
-                        </a:rPr>
-                        <a:t>TERASSON</a:t>
-                      </a:r>
-                      <a:endParaRPr lang="en-US" sz="950" dirty="0">
-                        <a:latin typeface="Calibri" charset="0"/>
-                        <a:ea typeface="Calibri" charset="0"/>
-                        <a:cs typeface="Calibri" charset="0"/>
-                      </a:endParaRPr>
-                    </a:p>
-                  </a:txBody>
-                  <a:tcPr marL="64008" marR="64008" marT="0" marB="0" anchor="ctr">
-                    <a:lnL w="6350" cap="flat" cmpd="sng" algn="ctr">
-                      <a:solidFill>
-                        <a:srgbClr val="D5DBE3"/>
-                      </a:solidFill>
-                      <a:prstDash val="solid"/>
-                      <a:round/>
-                      <a:headEnd type="none" w="med" len="med"/>
-                      <a:tailEnd type="none" w="med" len="med"/>
-                    </a:lnL>
-                    <a:lnR w="6350" cap="flat" cmpd="sng" algn="ctr">
-                      <a:solidFill>
-                        <a:srgbClr val="D5DBE3"/>
-                      </a:solidFill>
-                      <a:prstDash val="solid"/>
-                      <a:round/>
-                      <a:headEnd type="none" w="med" len="med"/>
-                      <a:tailEnd type="none" w="med" len="med"/>
-                    </a:lnR>
-                    <a:lnT w="6350" cap="flat" cmpd="sng" algn="ctr">
-                      <a:solidFill>
-                        <a:srgbClr val="D5DBE3"/>
-                      </a:solidFill>
-                      <a:prstDash val="solid"/>
-                      <a:round/>
-                      <a:headEnd type="none" w="med" len="med"/>
-                      <a:tailEnd type="none" w="med" len="med"/>
-                    </a:lnT>
-                    <a:lnB w="6350" cap="flat" cmpd="sng" algn="ctr">
-                      <a:solidFill>
-                        <a:srgbClr val="D5DBE3"/>
-                      </a:solidFill>
-                      <a:prstDash val="solid"/>
-                      <a:round/>
-                      <a:headEnd type="none" w="med" len="med"/>
-                      <a:tailEnd type="none" w="med" len="med"/>
-                    </a:lnB>
-                  </a:tcPr>
-                </a:tc>
-                <a:tc>
-                  <a:txBody>
-                    <a:bodyPr/>
-                    <a:lstStyle/>
-                    <a:p>
-                      <a:pPr algn="r" indent="0" marL="0">
-                        <a:buNone/>
-                      </a:pPr>
-                      <a:r>
-                        <a:rPr lang="en-US" sz="950" b="1" dirty="0">
-                          <a:solidFill>
-                            <a:srgbClr val="B3261E"/>
-                          </a:solidFill>
-                          <a:latin typeface="Calibri" pitchFamily="34" charset="0"/>
-                          <a:ea typeface="Calibri" pitchFamily="34" charset="-122"/>
-                          <a:cs typeface="Calibri" pitchFamily="34" charset="-120"/>
-                        </a:rPr>
-                        <a:t>206,4</a:t>
-                      </a:r>
-                      <a:endParaRPr lang="en-US" sz="950" dirty="0">
-                        <a:latin typeface="Calibri" charset="0"/>
-                        <a:ea typeface="Calibri" charset="0"/>
-                        <a:cs typeface="Calibri" charset="0"/>
-                      </a:endParaRPr>
-                    </a:p>
-                  </a:txBody>
-                  <a:tcPr marL="64008" marR="64008" marT="0" marB="0" anchor="ctr">
-                    <a:lnL w="6350" cap="flat" cmpd="sng" algn="ctr">
-                      <a:solidFill>
-                        <a:srgbClr val="D5DBE3"/>
-                      </a:solidFill>
-                      <a:prstDash val="solid"/>
-                      <a:round/>
-                      <a:headEnd type="none" w="med" len="med"/>
-                      <a:tailEnd type="none" w="med" len="med"/>
-                    </a:lnL>
-                    <a:lnR w="6350" cap="flat" cmpd="sng" algn="ctr">
-                      <a:solidFill>
-                        <a:srgbClr val="D5DBE3"/>
-                      </a:solidFill>
-                      <a:prstDash val="solid"/>
-                      <a:round/>
-                      <a:headEnd type="none" w="med" len="med"/>
-                      <a:tailEnd type="none" w="med" len="med"/>
-                    </a:lnR>
-                    <a:lnT w="6350" cap="flat" cmpd="sng" algn="ctr">
-                      <a:solidFill>
-                        <a:srgbClr val="D5DBE3"/>
-                      </a:solidFill>
-                      <a:prstDash val="solid"/>
-                      <a:round/>
-                      <a:headEnd type="none" w="med" len="med"/>
-                      <a:tailEnd type="none" w="med" len="med"/>
-                    </a:lnT>
-                    <a:lnB w="6350" cap="flat" cmpd="sng" algn="ctr">
-                      <a:solidFill>
-                        <a:srgbClr val="D5DBE3"/>
-                      </a:solidFill>
-                      <a:prstDash val="solid"/>
-                      <a:round/>
-                      <a:headEnd type="none" w="med" len="med"/>
-                      <a:tailEnd type="none" w="med" len="med"/>
-                    </a:lnB>
-                    <a:solidFill>
-                      <a:srgbClr val="F7E7E5"/>
-                    </a:solidFill>
-                  </a:tcPr>
-                </a:tc>
-                <a:tc>
-                  <a:txBody>
-                    <a:bodyPr/>
-                    <a:lstStyle/>
-                    <a:p>
-                      <a:pPr algn="l" indent="0" marL="0">
-                        <a:buNone/>
-                      </a:pPr>
-                      <a:r>
-                        <a:rPr lang="en-US" sz="950" dirty="0">
-                          <a:solidFill>
-                            <a:srgbClr val="1F2933"/>
-                          </a:solidFill>
-                          <a:latin typeface="Calibri" pitchFamily="34" charset="0"/>
-                          <a:ea typeface="Calibri" pitchFamily="34" charset="-122"/>
-                          <a:cs typeface="Calibri" pitchFamily="34" charset="-120"/>
-                        </a:rPr>
-                        <a:t>Spot (A) ou avance (B)</a:t>
-                      </a:r>
-                      <a:endParaRPr lang="en-US" sz="950" dirty="0">
-                        <a:latin typeface="Calibri" charset="0"/>
-                        <a:ea typeface="Calibri" charset="0"/>
-                        <a:cs typeface="Calibri" charset="0"/>
-                      </a:endParaRPr>
-                    </a:p>
-                  </a:txBody>
-                  <a:tcPr marL="64008" marR="64008" marT="0" marB="0" anchor="ctr">
-                    <a:lnL w="6350" cap="flat" cmpd="sng" algn="ctr">
-                      <a:solidFill>
-                        <a:srgbClr val="D5DBE3"/>
-                      </a:solidFill>
-                      <a:prstDash val="solid"/>
-                      <a:round/>
-                      <a:headEnd type="none" w="med" len="med"/>
-                      <a:tailEnd type="none" w="med" len="med"/>
-                    </a:lnL>
-                    <a:lnR w="6350" cap="flat" cmpd="sng" algn="ctr">
-                      <a:solidFill>
-                        <a:srgbClr val="D5DBE3"/>
-                      </a:solidFill>
-                      <a:prstDash val="solid"/>
-                      <a:round/>
-                      <a:headEnd type="none" w="med" len="med"/>
-                      <a:tailEnd type="none" w="med" len="med"/>
-                    </a:lnR>
-                    <a:lnT w="6350" cap="flat" cmpd="sng" algn="ctr">
-                      <a:solidFill>
-                        <a:srgbClr val="D5DBE3"/>
-                      </a:solidFill>
-                      <a:prstDash val="solid"/>
-                      <a:round/>
-                      <a:headEnd type="none" w="med" len="med"/>
-                      <a:tailEnd type="none" w="med" len="med"/>
-                    </a:lnT>
-                    <a:lnB w="6350" cap="flat" cmpd="sng" algn="ctr">
-                      <a:solidFill>
-                        <a:srgbClr val="D5DBE3"/>
-                      </a:solidFill>
-                      <a:prstDash val="solid"/>
-                      <a:round/>
-                      <a:headEnd type="none" w="med" len="med"/>
-                      <a:tailEnd type="none" w="med" len="med"/>
-                    </a:lnB>
-                  </a:tcPr>
-                </a:tc>
-                <a:tc>
-                  <a:txBody>
-                    <a:bodyPr/>
-                    <a:lstStyle/>
-                    <a:p>
-                      <a:pPr algn="ctr" indent="0" marL="0">
-                        <a:buNone/>
-                      </a:pPr>
-                      <a:r>
-                        <a:rPr lang="en-US" sz="950" dirty="0">
-                          <a:solidFill>
-                            <a:srgbClr val="1F2933"/>
-                          </a:solidFill>
-                          <a:latin typeface="Calibri" pitchFamily="34" charset="0"/>
-                          <a:ea typeface="Calibri" pitchFamily="34" charset="-122"/>
-                          <a:cs typeface="Calibri" pitchFamily="34" charset="-120"/>
-                        </a:rPr>
-                        <a:t>S1</a:t>
-                      </a:r>
-                      <a:endParaRPr lang="en-US" sz="950" dirty="0">
-                        <a:latin typeface="Calibri" charset="0"/>
-                        <a:ea typeface="Calibri" charset="0"/>
-                        <a:cs typeface="Calibri" charset="0"/>
-                      </a:endParaRPr>
-                    </a:p>
-                  </a:txBody>
-                  <a:tcPr marL="64008" marR="64008" marT="0" marB="0" anchor="ctr">
-                    <a:lnL w="6350" cap="flat" cmpd="sng" algn="ctr">
-                      <a:solidFill>
-                        <a:srgbClr val="D5DBE3"/>
-                      </a:solidFill>
-                      <a:prstDash val="solid"/>
-                      <a:round/>
-                      <a:headEnd type="none" w="med" len="med"/>
-                      <a:tailEnd type="none" w="med" len="med"/>
-                    </a:lnL>
-                    <a:lnR w="6350" cap="flat" cmpd="sng" algn="ctr">
-                      <a:solidFill>
-                        <a:srgbClr val="D5DBE3"/>
-                      </a:solidFill>
-                      <a:prstDash val="solid"/>
-                      <a:round/>
-                      <a:headEnd type="none" w="med" len="med"/>
-                      <a:tailEnd type="none" w="med" len="med"/>
-                    </a:lnR>
-                    <a:lnT w="6350" cap="flat" cmpd="sng" algn="ctr">
-                      <a:solidFill>
-                        <a:srgbClr val="D5DBE3"/>
-                      </a:solidFill>
-                      <a:prstDash val="solid"/>
-                      <a:round/>
-                      <a:headEnd type="none" w="med" len="med"/>
-                      <a:tailEnd type="none" w="med" len="med"/>
-                    </a:lnT>
-                    <a:lnB w="6350" cap="flat" cmpd="sng" algn="ctr">
-                      <a:solidFill>
-                        <a:srgbClr val="D5DBE3"/>
-                      </a:solidFill>
-                      <a:prstDash val="solid"/>
-                      <a:round/>
-                      <a:headEnd type="none" w="med" len="med"/>
-                      <a:tailEnd type="none" w="med" len="med"/>
-                    </a:lnB>
-                  </a:tcPr>
-                </a:tc>
-              </a:tr>
-              <a:tr h="237744">
-                <a:tc>
-                  <a:txBody>
-                    <a:bodyPr/>
-                    <a:lstStyle/>
-                    <a:p>
-                      <a:pPr algn="l" indent="0" marL="0">
-                        <a:buNone/>
-                      </a:pPr>
-                      <a:r>
-                        <a:rPr lang="en-US" sz="950" b="1" dirty="0">
-                          <a:solidFill>
-                            <a:srgbClr val="1F2933"/>
-                          </a:solidFill>
-                          <a:latin typeface="Calibri" pitchFamily="34" charset="0"/>
-                          <a:ea typeface="Calibri" pitchFamily="34" charset="-122"/>
-                          <a:cs typeface="Calibri" pitchFamily="34" charset="-120"/>
-                        </a:rPr>
-                        <a:t>FINAFRICA</a:t>
-                      </a:r>
-                      <a:endParaRPr lang="en-US" sz="950" dirty="0">
-                        <a:latin typeface="Calibri" charset="0"/>
-                        <a:ea typeface="Calibri" charset="0"/>
-                        <a:cs typeface="Calibri" charset="0"/>
-                      </a:endParaRPr>
-                    </a:p>
-                  </a:txBody>
-                  <a:tcPr marL="64008" marR="64008" marT="0" marB="0" anchor="ctr">
-                    <a:lnL w="6350" cap="flat" cmpd="sng" algn="ctr">
-                      <a:solidFill>
-                        <a:srgbClr val="D5DBE3"/>
-                      </a:solidFill>
-                      <a:prstDash val="solid"/>
-                      <a:round/>
-                      <a:headEnd type="none" w="med" len="med"/>
-                      <a:tailEnd type="none" w="med" len="med"/>
-                    </a:lnL>
-                    <a:lnR w="6350" cap="flat" cmpd="sng" algn="ctr">
-                      <a:solidFill>
-                        <a:srgbClr val="D5DBE3"/>
-                      </a:solidFill>
-                      <a:prstDash val="solid"/>
-                      <a:round/>
-                      <a:headEnd type="none" w="med" len="med"/>
-                      <a:tailEnd type="none" w="med" len="med"/>
-                    </a:lnR>
-                    <a:lnT w="6350" cap="flat" cmpd="sng" algn="ctr">
-                      <a:solidFill>
-                        <a:srgbClr val="D5DBE3"/>
-                      </a:solidFill>
-                      <a:prstDash val="solid"/>
-                      <a:round/>
-                      <a:headEnd type="none" w="med" len="med"/>
-                      <a:tailEnd type="none" w="med" len="med"/>
-                    </a:lnT>
-                    <a:lnB w="6350" cap="flat" cmpd="sng" algn="ctr">
-                      <a:solidFill>
-                        <a:srgbClr val="D5DBE3"/>
-                      </a:solidFill>
-                      <a:prstDash val="solid"/>
-                      <a:round/>
-                      <a:headEnd type="none" w="med" len="med"/>
-                      <a:tailEnd type="none" w="med" len="med"/>
-                    </a:lnB>
-                  </a:tcPr>
-                </a:tc>
-                <a:tc>
-                  <a:txBody>
-                    <a:bodyPr/>
-                    <a:lstStyle/>
-                    <a:p>
-                      <a:pPr algn="r" indent="0" marL="0">
-                        <a:buNone/>
-                      </a:pPr>
-                      <a:r>
-                        <a:rPr lang="en-US" sz="950" b="1" dirty="0">
-                          <a:solidFill>
-                            <a:srgbClr val="B3261E"/>
-                          </a:solidFill>
-                          <a:latin typeface="Calibri" pitchFamily="34" charset="0"/>
-                          <a:ea typeface="Calibri" pitchFamily="34" charset="-122"/>
-                          <a:cs typeface="Calibri" pitchFamily="34" charset="-120"/>
-                        </a:rPr>
-                        <a:t>198,7</a:t>
-                      </a:r>
-                      <a:endParaRPr lang="en-US" sz="950" dirty="0">
-                        <a:latin typeface="Calibri" charset="0"/>
-                        <a:ea typeface="Calibri" charset="0"/>
-                        <a:cs typeface="Calibri" charset="0"/>
-                      </a:endParaRPr>
-                    </a:p>
-                  </a:txBody>
-                  <a:tcPr marL="64008" marR="64008" marT="0" marB="0" anchor="ctr">
-                    <a:lnL w="6350" cap="flat" cmpd="sng" algn="ctr">
-                      <a:solidFill>
-                        <a:srgbClr val="D5DBE3"/>
-                      </a:solidFill>
-                      <a:prstDash val="solid"/>
-                      <a:round/>
-                      <a:headEnd type="none" w="med" len="med"/>
-                      <a:tailEnd type="none" w="med" len="med"/>
-                    </a:lnL>
-                    <a:lnR w="6350" cap="flat" cmpd="sng" algn="ctr">
-                      <a:solidFill>
-                        <a:srgbClr val="D5DBE3"/>
-                      </a:solidFill>
-                      <a:prstDash val="solid"/>
-                      <a:round/>
-                      <a:headEnd type="none" w="med" len="med"/>
-                      <a:tailEnd type="none" w="med" len="med"/>
-                    </a:lnR>
-                    <a:lnT w="6350" cap="flat" cmpd="sng" algn="ctr">
-                      <a:solidFill>
-                        <a:srgbClr val="D5DBE3"/>
-                      </a:solidFill>
-                      <a:prstDash val="solid"/>
-                      <a:round/>
-                      <a:headEnd type="none" w="med" len="med"/>
-                      <a:tailEnd type="none" w="med" len="med"/>
-                    </a:lnT>
-                    <a:lnB w="6350" cap="flat" cmpd="sng" algn="ctr">
-                      <a:solidFill>
-                        <a:srgbClr val="D5DBE3"/>
-                      </a:solidFill>
-                      <a:prstDash val="solid"/>
-                      <a:round/>
-                      <a:headEnd type="none" w="med" len="med"/>
-                      <a:tailEnd type="none" w="med" len="med"/>
-                    </a:lnB>
-                    <a:solidFill>
-                      <a:srgbClr val="F7E7E5"/>
-                    </a:solidFill>
-                  </a:tcPr>
-                </a:tc>
-                <a:tc>
-                  <a:txBody>
-                    <a:bodyPr/>
-                    <a:lstStyle/>
-                    <a:p>
-                      <a:pPr algn="l" indent="0" marL="0">
-                        <a:buNone/>
-                      </a:pPr>
-                      <a:r>
-                        <a:rPr lang="en-US" sz="950" dirty="0">
-                          <a:solidFill>
-                            <a:srgbClr val="1F2933"/>
-                          </a:solidFill>
-                          <a:latin typeface="Calibri" pitchFamily="34" charset="0"/>
-                          <a:ea typeface="Calibri" pitchFamily="34" charset="-122"/>
-                          <a:cs typeface="Calibri" pitchFamily="34" charset="-120"/>
-                        </a:rPr>
-                        <a:t>Spot (A) ou avance (B)</a:t>
-                      </a:r>
-                      <a:endParaRPr lang="en-US" sz="950" dirty="0">
-                        <a:latin typeface="Calibri" charset="0"/>
-                        <a:ea typeface="Calibri" charset="0"/>
-                        <a:cs typeface="Calibri" charset="0"/>
-                      </a:endParaRPr>
-                    </a:p>
-                  </a:txBody>
-                  <a:tcPr marL="64008" marR="64008" marT="0" marB="0" anchor="ctr">
-                    <a:lnL w="6350" cap="flat" cmpd="sng" algn="ctr">
-                      <a:solidFill>
-                        <a:srgbClr val="D5DBE3"/>
-                      </a:solidFill>
-                      <a:prstDash val="solid"/>
-                      <a:round/>
-                      <a:headEnd type="none" w="med" len="med"/>
-                      <a:tailEnd type="none" w="med" len="med"/>
-                    </a:lnL>
-                    <a:lnR w="6350" cap="flat" cmpd="sng" algn="ctr">
-                      <a:solidFill>
-                        <a:srgbClr val="D5DBE3"/>
-                      </a:solidFill>
-                      <a:prstDash val="solid"/>
-                      <a:round/>
-                      <a:headEnd type="none" w="med" len="med"/>
-                      <a:tailEnd type="none" w="med" len="med"/>
-                    </a:lnR>
-                    <a:lnT w="6350" cap="flat" cmpd="sng" algn="ctr">
-                      <a:solidFill>
-                        <a:srgbClr val="D5DBE3"/>
-                      </a:solidFill>
-                      <a:prstDash val="solid"/>
-                      <a:round/>
-                      <a:headEnd type="none" w="med" len="med"/>
-                      <a:tailEnd type="none" w="med" len="med"/>
-                    </a:lnT>
-                    <a:lnB w="6350" cap="flat" cmpd="sng" algn="ctr">
-                      <a:solidFill>
-                        <a:srgbClr val="D5DBE3"/>
-                      </a:solidFill>
-                      <a:prstDash val="solid"/>
-                      <a:round/>
-                      <a:headEnd type="none" w="med" len="med"/>
-                      <a:tailEnd type="none" w="med" len="med"/>
-                    </a:lnB>
-                  </a:tcPr>
-                </a:tc>
-                <a:tc>
-                  <a:txBody>
-                    <a:bodyPr/>
-                    <a:lstStyle/>
-                    <a:p>
-                      <a:pPr algn="ctr" indent="0" marL="0">
-                        <a:buNone/>
-                      </a:pPr>
-                      <a:r>
-                        <a:rPr lang="en-US" sz="950" dirty="0">
-                          <a:solidFill>
-                            <a:srgbClr val="1F2933"/>
-                          </a:solidFill>
-                          <a:latin typeface="Calibri" pitchFamily="34" charset="0"/>
-                          <a:ea typeface="Calibri" pitchFamily="34" charset="-122"/>
-                          <a:cs typeface="Calibri" pitchFamily="34" charset="-120"/>
-                        </a:rPr>
-                        <a:t>S1</a:t>
-                      </a:r>
-                      <a:endParaRPr lang="en-US" sz="950" dirty="0">
-                        <a:latin typeface="Calibri" charset="0"/>
-                        <a:ea typeface="Calibri" charset="0"/>
-                        <a:cs typeface="Calibri" charset="0"/>
-                      </a:endParaRPr>
-                    </a:p>
-                  </a:txBody>
-                  <a:tcPr marL="64008" marR="64008" marT="0" marB="0" anchor="ctr">
-                    <a:lnL w="6350" cap="flat" cmpd="sng" algn="ctr">
-                      <a:solidFill>
-                        <a:srgbClr val="D5DBE3"/>
-                      </a:solidFill>
-                      <a:prstDash val="solid"/>
-                      <a:round/>
-                      <a:headEnd type="none" w="med" len="med"/>
-                      <a:tailEnd type="none" w="med" len="med"/>
-                    </a:lnL>
-                    <a:lnR w="6350" cap="flat" cmpd="sng" algn="ctr">
-                      <a:solidFill>
-                        <a:srgbClr val="D5DBE3"/>
-                      </a:solidFill>
-                      <a:prstDash val="solid"/>
-                      <a:round/>
-                      <a:headEnd type="none" w="med" len="med"/>
-                      <a:tailEnd type="none" w="med" len="med"/>
-                    </a:lnR>
-                    <a:lnT w="6350" cap="flat" cmpd="sng" algn="ctr">
-                      <a:solidFill>
-                        <a:srgbClr val="D5DBE3"/>
-                      </a:solidFill>
-                      <a:prstDash val="solid"/>
-                      <a:round/>
-                      <a:headEnd type="none" w="med" len="med"/>
-                      <a:tailEnd type="none" w="med" len="med"/>
-                    </a:lnT>
-                    <a:lnB w="6350" cap="flat" cmpd="sng" algn="ctr">
-                      <a:solidFill>
-                        <a:srgbClr val="D5DBE3"/>
-                      </a:solidFill>
-                      <a:prstDash val="solid"/>
-                      <a:round/>
-                      <a:headEnd type="none" w="med" len="med"/>
-                      <a:tailEnd type="none" w="med" len="med"/>
-                    </a:lnB>
-                  </a:tcPr>
-                </a:tc>
-              </a:tr>
-              <a:tr h="237744">
-                <a:tc>
-                  <a:txBody>
-                    <a:bodyPr/>
-                    <a:lstStyle/>
-                    <a:p>
-                      <a:pPr algn="l" indent="0" marL="0">
-                        <a:buNone/>
-                      </a:pPr>
-                      <a:r>
-                        <a:rPr lang="en-US" sz="950" b="1" dirty="0">
-                          <a:solidFill>
-                            <a:srgbClr val="1F2933"/>
-                          </a:solidFill>
-                          <a:latin typeface="Calibri" pitchFamily="34" charset="0"/>
-                          <a:ea typeface="Calibri" pitchFamily="34" charset="-122"/>
-                          <a:cs typeface="Calibri" pitchFamily="34" charset="-120"/>
-                        </a:rPr>
-                        <a:t>FIRST</a:t>
-                      </a:r>
-                      <a:endParaRPr lang="en-US" sz="950" dirty="0">
-                        <a:latin typeface="Calibri" charset="0"/>
-                        <a:ea typeface="Calibri" charset="0"/>
-                        <a:cs typeface="Calibri" charset="0"/>
-                      </a:endParaRPr>
-                    </a:p>
-                  </a:txBody>
-                  <a:tcPr marL="64008" marR="64008" marT="0" marB="0" anchor="ctr">
-                    <a:lnL w="6350" cap="flat" cmpd="sng" algn="ctr">
-                      <a:solidFill>
-                        <a:srgbClr val="D5DBE3"/>
-                      </a:solidFill>
-                      <a:prstDash val="solid"/>
-                      <a:round/>
-                      <a:headEnd type="none" w="med" len="med"/>
-                      <a:tailEnd type="none" w="med" len="med"/>
-                    </a:lnL>
-                    <a:lnR w="6350" cap="flat" cmpd="sng" algn="ctr">
-                      <a:solidFill>
-                        <a:srgbClr val="D5DBE3"/>
-                      </a:solidFill>
-                      <a:prstDash val="solid"/>
-                      <a:round/>
-                      <a:headEnd type="none" w="med" len="med"/>
-                      <a:tailEnd type="none" w="med" len="med"/>
-                    </a:lnR>
-                    <a:lnT w="6350" cap="flat" cmpd="sng" algn="ctr">
-                      <a:solidFill>
-                        <a:srgbClr val="D5DBE3"/>
-                      </a:solidFill>
-                      <a:prstDash val="solid"/>
-                      <a:round/>
-                      <a:headEnd type="none" w="med" len="med"/>
-                      <a:tailEnd type="none" w="med" len="med"/>
-                    </a:lnT>
-                    <a:lnB w="6350" cap="flat" cmpd="sng" algn="ctr">
-                      <a:solidFill>
-                        <a:srgbClr val="D5DBE3"/>
-                      </a:solidFill>
-                      <a:prstDash val="solid"/>
-                      <a:round/>
-                      <a:headEnd type="none" w="med" len="med"/>
-                      <a:tailEnd type="none" w="med" len="med"/>
-                    </a:lnB>
-                  </a:tcPr>
-                </a:tc>
-                <a:tc>
-                  <a:txBody>
-                    <a:bodyPr/>
-                    <a:lstStyle/>
-                    <a:p>
-                      <a:pPr algn="r" indent="0" marL="0">
-                        <a:buNone/>
-                      </a:pPr>
-                      <a:r>
-                        <a:rPr lang="en-US" sz="950" b="1" dirty="0">
-                          <a:solidFill>
-                            <a:srgbClr val="B3261E"/>
-                          </a:solidFill>
-                          <a:latin typeface="Calibri" pitchFamily="34" charset="0"/>
-                          <a:ea typeface="Calibri" pitchFamily="34" charset="-122"/>
-                          <a:cs typeface="Calibri" pitchFamily="34" charset="-120"/>
-                        </a:rPr>
-                        <a:t>175,3</a:t>
-                      </a:r>
-                      <a:endParaRPr lang="en-US" sz="950" dirty="0">
-                        <a:latin typeface="Calibri" charset="0"/>
-                        <a:ea typeface="Calibri" charset="0"/>
-                        <a:cs typeface="Calibri" charset="0"/>
-                      </a:endParaRPr>
-                    </a:p>
-                  </a:txBody>
-                  <a:tcPr marL="64008" marR="64008" marT="0" marB="0" anchor="ctr">
-                    <a:lnL w="6350" cap="flat" cmpd="sng" algn="ctr">
-                      <a:solidFill>
-                        <a:srgbClr val="D5DBE3"/>
-                      </a:solidFill>
-                      <a:prstDash val="solid"/>
-                      <a:round/>
-                      <a:headEnd type="none" w="med" len="med"/>
-                      <a:tailEnd type="none" w="med" len="med"/>
-                    </a:lnL>
-                    <a:lnR w="6350" cap="flat" cmpd="sng" algn="ctr">
-                      <a:solidFill>
-                        <a:srgbClr val="D5DBE3"/>
-                      </a:solidFill>
-                      <a:prstDash val="solid"/>
-                      <a:round/>
-                      <a:headEnd type="none" w="med" len="med"/>
-                      <a:tailEnd type="none" w="med" len="med"/>
-                    </a:lnR>
-                    <a:lnT w="6350" cap="flat" cmpd="sng" algn="ctr">
-                      <a:solidFill>
-                        <a:srgbClr val="D5DBE3"/>
-                      </a:solidFill>
-                      <a:prstDash val="solid"/>
-                      <a:round/>
-                      <a:headEnd type="none" w="med" len="med"/>
-                      <a:tailEnd type="none" w="med" len="med"/>
-                    </a:lnT>
-                    <a:lnB w="6350" cap="flat" cmpd="sng" algn="ctr">
-                      <a:solidFill>
-                        <a:srgbClr val="D5DBE3"/>
-                      </a:solidFill>
-                      <a:prstDash val="solid"/>
-                      <a:round/>
-                      <a:headEnd type="none" w="med" len="med"/>
-                      <a:tailEnd type="none" w="med" len="med"/>
-                    </a:lnB>
-                    <a:solidFill>
-                      <a:srgbClr val="F7E7E5"/>
-                    </a:solidFill>
-                  </a:tcPr>
-                </a:tc>
-                <a:tc>
-                  <a:txBody>
-                    <a:bodyPr/>
-                    <a:lstStyle/>
-                    <a:p>
-                      <a:pPr algn="l" indent="0" marL="0">
-                        <a:buNone/>
-                      </a:pPr>
-                      <a:r>
-                        <a:rPr lang="en-US" sz="950" dirty="0">
-                          <a:solidFill>
-                            <a:srgbClr val="1F2933"/>
-                          </a:solidFill>
-                          <a:latin typeface="Calibri" pitchFamily="34" charset="0"/>
-                          <a:ea typeface="Calibri" pitchFamily="34" charset="-122"/>
-                          <a:cs typeface="Calibri" pitchFamily="34" charset="-120"/>
-                        </a:rPr>
-                        <a:t>Spot (A) ou avance (B)</a:t>
-                      </a:r>
-                      <a:endParaRPr lang="en-US" sz="950" dirty="0">
-                        <a:latin typeface="Calibri" charset="0"/>
-                        <a:ea typeface="Calibri" charset="0"/>
-                        <a:cs typeface="Calibri" charset="0"/>
-                      </a:endParaRPr>
-                    </a:p>
-                  </a:txBody>
-                  <a:tcPr marL="64008" marR="64008" marT="0" marB="0" anchor="ctr">
-                    <a:lnL w="6350" cap="flat" cmpd="sng" algn="ctr">
-                      <a:solidFill>
-                        <a:srgbClr val="D5DBE3"/>
-                      </a:solidFill>
-                      <a:prstDash val="solid"/>
-                      <a:round/>
-                      <a:headEnd type="none" w="med" len="med"/>
-                      <a:tailEnd type="none" w="med" len="med"/>
-                    </a:lnL>
-                    <a:lnR w="6350" cap="flat" cmpd="sng" algn="ctr">
-                      <a:solidFill>
-                        <a:srgbClr val="D5DBE3"/>
-                      </a:solidFill>
-                      <a:prstDash val="solid"/>
-                      <a:round/>
-                      <a:headEnd type="none" w="med" len="med"/>
-                      <a:tailEnd type="none" w="med" len="med"/>
-                    </a:lnR>
-                    <a:lnT w="6350" cap="flat" cmpd="sng" algn="ctr">
-                      <a:solidFill>
-                        <a:srgbClr val="D5DBE3"/>
-                      </a:solidFill>
-                      <a:prstDash val="solid"/>
-                      <a:round/>
-                      <a:headEnd type="none" w="med" len="med"/>
-                      <a:tailEnd type="none" w="med" len="med"/>
-                    </a:lnT>
-                    <a:lnB w="6350" cap="flat" cmpd="sng" algn="ctr">
-                      <a:solidFill>
-                        <a:srgbClr val="D5DBE3"/>
-                      </a:solidFill>
-                      <a:prstDash val="solid"/>
-                      <a:round/>
-                      <a:headEnd type="none" w="med" len="med"/>
-                      <a:tailEnd type="none" w="med" len="med"/>
-                    </a:lnB>
-                  </a:tcPr>
-                </a:tc>
-                <a:tc>
-                  <a:txBody>
-                    <a:bodyPr/>
-                    <a:lstStyle/>
-                    <a:p>
-                      <a:pPr algn="ctr" indent="0" marL="0">
-                        <a:buNone/>
-                      </a:pPr>
-                      <a:r>
-                        <a:rPr lang="en-US" sz="950" dirty="0">
-                          <a:solidFill>
-                            <a:srgbClr val="1F2933"/>
-                          </a:solidFill>
-                          <a:latin typeface="Calibri" pitchFamily="34" charset="0"/>
-                          <a:ea typeface="Calibri" pitchFamily="34" charset="-122"/>
-                          <a:cs typeface="Calibri" pitchFamily="34" charset="-120"/>
-                        </a:rPr>
-                        <a:t>S1</a:t>
-                      </a:r>
-                      <a:endParaRPr lang="en-US" sz="950" dirty="0">
-                        <a:latin typeface="Calibri" charset="0"/>
-                        <a:ea typeface="Calibri" charset="0"/>
-                        <a:cs typeface="Calibri" charset="0"/>
-                      </a:endParaRPr>
-                    </a:p>
-                  </a:txBody>
-                  <a:tcPr marL="64008" marR="64008" marT="0" marB="0" anchor="ctr">
-                    <a:lnL w="6350" cap="flat" cmpd="sng" algn="ctr">
-                      <a:solidFill>
-                        <a:srgbClr val="D5DBE3"/>
-                      </a:solidFill>
-                      <a:prstDash val="solid"/>
-                      <a:round/>
-                      <a:headEnd type="none" w="med" len="med"/>
-                      <a:tailEnd type="none" w="med" len="med"/>
-                    </a:lnL>
-                    <a:lnR w="6350" cap="flat" cmpd="sng" algn="ctr">
-                      <a:solidFill>
-                        <a:srgbClr val="D5DBE3"/>
-                      </a:solidFill>
-                      <a:prstDash val="solid"/>
-                      <a:round/>
-                      <a:headEnd type="none" w="med" len="med"/>
-                      <a:tailEnd type="none" w="med" len="med"/>
-                    </a:lnR>
-                    <a:lnT w="6350" cap="flat" cmpd="sng" algn="ctr">
-                      <a:solidFill>
-                        <a:srgbClr val="D5DBE3"/>
-                      </a:solidFill>
-                      <a:prstDash val="solid"/>
-                      <a:round/>
-                      <a:headEnd type="none" w="med" len="med"/>
-                      <a:tailEnd type="none" w="med" len="med"/>
-                    </a:lnT>
-                    <a:lnB w="6350" cap="flat" cmpd="sng" algn="ctr">
-                      <a:solidFill>
-                        <a:srgbClr val="D5DBE3"/>
-                      </a:solidFill>
-                      <a:prstDash val="solid"/>
-                      <a:round/>
-                      <a:headEnd type="none" w="med" len="med"/>
-                      <a:tailEnd type="none" w="med" len="med"/>
-                    </a:lnB>
-                  </a:tcPr>
-                </a:tc>
-              </a:tr>
-              <a:tr h="237744">
-                <a:tc>
-                  <a:txBody>
-                    <a:bodyPr/>
-                    <a:lstStyle/>
-                    <a:p>
-                      <a:pPr algn="l" indent="0" marL="0">
-                        <a:buNone/>
-                      </a:pPr>
-                      <a:r>
-                        <a:rPr lang="en-US" sz="950" b="1" dirty="0">
-                          <a:solidFill>
-                            <a:srgbClr val="1F2933"/>
-                          </a:solidFill>
-                          <a:latin typeface="Calibri" pitchFamily="34" charset="0"/>
-                          <a:ea typeface="Calibri" pitchFamily="34" charset="-122"/>
-                          <a:cs typeface="Calibri" pitchFamily="34" charset="-120"/>
-                        </a:rPr>
-                        <a:t>RIVIERA</a:t>
-                      </a:r>
-                      <a:endParaRPr lang="en-US" sz="950" dirty="0">
-                        <a:latin typeface="Calibri" charset="0"/>
-                        <a:ea typeface="Calibri" charset="0"/>
-                        <a:cs typeface="Calibri" charset="0"/>
-                      </a:endParaRPr>
-                    </a:p>
-                  </a:txBody>
-                  <a:tcPr marL="64008" marR="64008" marT="0" marB="0" anchor="ctr">
-                    <a:lnL w="6350" cap="flat" cmpd="sng" algn="ctr">
-                      <a:solidFill>
-                        <a:srgbClr val="D5DBE3"/>
-                      </a:solidFill>
-                      <a:prstDash val="solid"/>
-                      <a:round/>
-                      <a:headEnd type="none" w="med" len="med"/>
-                      <a:tailEnd type="none" w="med" len="med"/>
-                    </a:lnL>
-                    <a:lnR w="6350" cap="flat" cmpd="sng" algn="ctr">
-                      <a:solidFill>
-                        <a:srgbClr val="D5DBE3"/>
-                      </a:solidFill>
-                      <a:prstDash val="solid"/>
-                      <a:round/>
-                      <a:headEnd type="none" w="med" len="med"/>
-                      <a:tailEnd type="none" w="med" len="med"/>
-                    </a:lnR>
-                    <a:lnT w="6350" cap="flat" cmpd="sng" algn="ctr">
-                      <a:solidFill>
-                        <a:srgbClr val="D5DBE3"/>
-                      </a:solidFill>
-                      <a:prstDash val="solid"/>
-                      <a:round/>
-                      <a:headEnd type="none" w="med" len="med"/>
-                      <a:tailEnd type="none" w="med" len="med"/>
-                    </a:lnT>
-                    <a:lnB w="6350" cap="flat" cmpd="sng" algn="ctr">
-                      <a:solidFill>
-                        <a:srgbClr val="D5DBE3"/>
-                      </a:solidFill>
-                      <a:prstDash val="solid"/>
-                      <a:round/>
-                      <a:headEnd type="none" w="med" len="med"/>
-                      <a:tailEnd type="none" w="med" len="med"/>
-                    </a:lnB>
-                  </a:tcPr>
-                </a:tc>
-                <a:tc>
-                  <a:txBody>
-                    <a:bodyPr/>
-                    <a:lstStyle/>
-                    <a:p>
-                      <a:pPr algn="r" indent="0" marL="0">
-                        <a:buNone/>
-                      </a:pPr>
-                      <a:r>
-                        <a:rPr lang="en-US" sz="950" b="1" dirty="0">
-                          <a:solidFill>
-                            <a:srgbClr val="B3261E"/>
-                          </a:solidFill>
-                          <a:latin typeface="Calibri" pitchFamily="34" charset="0"/>
-                          <a:ea typeface="Calibri" pitchFamily="34" charset="-122"/>
-                          <a:cs typeface="Calibri" pitchFamily="34" charset="-120"/>
-                        </a:rPr>
-                        <a:t>87,3</a:t>
-                      </a:r>
-                      <a:endParaRPr lang="en-US" sz="950" dirty="0">
-                        <a:latin typeface="Calibri" charset="0"/>
-                        <a:ea typeface="Calibri" charset="0"/>
-                        <a:cs typeface="Calibri" charset="0"/>
-                      </a:endParaRPr>
-                    </a:p>
-                  </a:txBody>
-                  <a:tcPr marL="64008" marR="64008" marT="0" marB="0" anchor="ctr">
-                    <a:lnL w="6350" cap="flat" cmpd="sng" algn="ctr">
-                      <a:solidFill>
-                        <a:srgbClr val="D5DBE3"/>
-                      </a:solidFill>
-                      <a:prstDash val="solid"/>
-                      <a:round/>
-                      <a:headEnd type="none" w="med" len="med"/>
-                      <a:tailEnd type="none" w="med" len="med"/>
-                    </a:lnL>
-                    <a:lnR w="6350" cap="flat" cmpd="sng" algn="ctr">
-                      <a:solidFill>
-                        <a:srgbClr val="D5DBE3"/>
-                      </a:solidFill>
-                      <a:prstDash val="solid"/>
-                      <a:round/>
-                      <a:headEnd type="none" w="med" len="med"/>
-                      <a:tailEnd type="none" w="med" len="med"/>
-                    </a:lnR>
-                    <a:lnT w="6350" cap="flat" cmpd="sng" algn="ctr">
-                      <a:solidFill>
-                        <a:srgbClr val="D5DBE3"/>
-                      </a:solidFill>
-                      <a:prstDash val="solid"/>
-                      <a:round/>
-                      <a:headEnd type="none" w="med" len="med"/>
-                      <a:tailEnd type="none" w="med" len="med"/>
-                    </a:lnT>
-                    <a:lnB w="6350" cap="flat" cmpd="sng" algn="ctr">
-                      <a:solidFill>
-                        <a:srgbClr val="D5DBE3"/>
-                      </a:solidFill>
-                      <a:prstDash val="solid"/>
-                      <a:round/>
-                      <a:headEnd type="none" w="med" len="med"/>
-                      <a:tailEnd type="none" w="med" len="med"/>
-                    </a:lnB>
-                    <a:solidFill>
-                      <a:srgbClr val="F7E7E5"/>
-                    </a:solidFill>
-                  </a:tcPr>
-                </a:tc>
-                <a:tc>
-                  <a:txBody>
-                    <a:bodyPr/>
-                    <a:lstStyle/>
-                    <a:p>
-                      <a:pPr algn="l" indent="0" marL="0">
-                        <a:buNone/>
-                      </a:pPr>
-                      <a:r>
-                        <a:rPr lang="en-US" sz="950" dirty="0">
-                          <a:solidFill>
-                            <a:srgbClr val="1F2933"/>
-                          </a:solidFill>
-                          <a:latin typeface="Calibri" pitchFamily="34" charset="0"/>
-                          <a:ea typeface="Calibri" pitchFamily="34" charset="-122"/>
-                          <a:cs typeface="Calibri" pitchFamily="34" charset="-120"/>
-                        </a:rPr>
-                        <a:t>Spot (A) ou avance (B)</a:t>
-                      </a:r>
-                      <a:endParaRPr lang="en-US" sz="950" dirty="0">
-                        <a:latin typeface="Calibri" charset="0"/>
-                        <a:ea typeface="Calibri" charset="0"/>
-                        <a:cs typeface="Calibri" charset="0"/>
-                      </a:endParaRPr>
-                    </a:p>
-                  </a:txBody>
-                  <a:tcPr marL="64008" marR="64008" marT="0" marB="0" anchor="ctr">
-                    <a:lnL w="6350" cap="flat" cmpd="sng" algn="ctr">
-                      <a:solidFill>
-                        <a:srgbClr val="D5DBE3"/>
-                      </a:solidFill>
-                      <a:prstDash val="solid"/>
-                      <a:round/>
-                      <a:headEnd type="none" w="med" len="med"/>
-                      <a:tailEnd type="none" w="med" len="med"/>
-                    </a:lnL>
-                    <a:lnR w="6350" cap="flat" cmpd="sng" algn="ctr">
-                      <a:solidFill>
-                        <a:srgbClr val="D5DBE3"/>
-                      </a:solidFill>
-                      <a:prstDash val="solid"/>
-                      <a:round/>
-                      <a:headEnd type="none" w="med" len="med"/>
-                      <a:tailEnd type="none" w="med" len="med"/>
-                    </a:lnR>
-                    <a:lnT w="6350" cap="flat" cmpd="sng" algn="ctr">
-                      <a:solidFill>
-                        <a:srgbClr val="D5DBE3"/>
-                      </a:solidFill>
-                      <a:prstDash val="solid"/>
-                      <a:round/>
-                      <a:headEnd type="none" w="med" len="med"/>
-                      <a:tailEnd type="none" w="med" len="med"/>
-                    </a:lnT>
-                    <a:lnB w="6350" cap="flat" cmpd="sng" algn="ctr">
-                      <a:solidFill>
-                        <a:srgbClr val="D5DBE3"/>
-                      </a:solidFill>
-                      <a:prstDash val="solid"/>
-                      <a:round/>
-                      <a:headEnd type="none" w="med" len="med"/>
-                      <a:tailEnd type="none" w="med" len="med"/>
-                    </a:lnB>
-                  </a:tcPr>
-                </a:tc>
-                <a:tc>
-                  <a:txBody>
-                    <a:bodyPr/>
-                    <a:lstStyle/>
-                    <a:p>
-                      <a:pPr algn="ctr" indent="0" marL="0">
-                        <a:buNone/>
-                      </a:pPr>
-                      <a:r>
-                        <a:rPr lang="en-US" sz="950" dirty="0">
-                          <a:solidFill>
-                            <a:srgbClr val="1F2933"/>
-                          </a:solidFill>
-                          <a:latin typeface="Calibri" pitchFamily="34" charset="0"/>
-                          <a:ea typeface="Calibri" pitchFamily="34" charset="-122"/>
-                          <a:cs typeface="Calibri" pitchFamily="34" charset="-120"/>
-                        </a:rPr>
-                        <a:t>S1</a:t>
-                      </a:r>
-                      <a:endParaRPr lang="en-US" sz="950" dirty="0">
-                        <a:latin typeface="Calibri" charset="0"/>
-                        <a:ea typeface="Calibri" charset="0"/>
-                        <a:cs typeface="Calibri" charset="0"/>
-                      </a:endParaRPr>
-                    </a:p>
-                  </a:txBody>
-                  <a:tcPr marL="64008" marR="64008" marT="0" marB="0" anchor="ctr">
-                    <a:lnL w="6350" cap="flat" cmpd="sng" algn="ctr">
-                      <a:solidFill>
-                        <a:srgbClr val="D5DBE3"/>
-                      </a:solidFill>
-                      <a:prstDash val="solid"/>
-                      <a:round/>
-                      <a:headEnd type="none" w="med" len="med"/>
-                      <a:tailEnd type="none" w="med" len="med"/>
-                    </a:lnL>
-                    <a:lnR w="6350" cap="flat" cmpd="sng" algn="ctr">
-                      <a:solidFill>
-                        <a:srgbClr val="D5DBE3"/>
-                      </a:solidFill>
-                      <a:prstDash val="solid"/>
-                      <a:round/>
-                      <a:headEnd type="none" w="med" len="med"/>
-                      <a:tailEnd type="none" w="med" len="med"/>
-                    </a:lnR>
-                    <a:lnT w="6350" cap="flat" cmpd="sng" algn="ctr">
-                      <a:solidFill>
-                        <a:srgbClr val="D5DBE3"/>
-                      </a:solidFill>
-                      <a:prstDash val="solid"/>
-                      <a:round/>
-                      <a:headEnd type="none" w="med" len="med"/>
-                      <a:tailEnd type="none" w="med" len="med"/>
-                    </a:lnT>
-                    <a:lnB w="6350" cap="flat" cmpd="sng" algn="ctr">
-                      <a:solidFill>
-                        <a:srgbClr val="D5DBE3"/>
-                      </a:solidFill>
-                      <a:prstDash val="solid"/>
-                      <a:round/>
-                      <a:headEnd type="none" w="med" len="med"/>
-                      <a:tailEnd type="none" w="med" len="med"/>
-                    </a:lnB>
-                  </a:tcPr>
-                </a:tc>
-              </a:tr>
-              <a:tr h="237744">
-                <a:tc>
-                  <a:txBody>
-                    <a:bodyPr/>
-                    <a:lstStyle/>
-                    <a:p>
-                      <a:pPr algn="l" indent="0" marL="0">
-                        <a:buNone/>
-                      </a:pPr>
-                      <a:r>
-                        <a:rPr lang="en-US" sz="950" b="1" dirty="0">
-                          <a:solidFill>
-                            <a:srgbClr val="1F2933"/>
-                          </a:solidFill>
-                          <a:latin typeface="Calibri" pitchFamily="34" charset="0"/>
-                          <a:ea typeface="Calibri" pitchFamily="34" charset="-122"/>
-                          <a:cs typeface="Calibri" pitchFamily="34" charset="-120"/>
-                        </a:rPr>
-                        <a:t>IMMONEUF</a:t>
-                      </a:r>
-                      <a:endParaRPr lang="en-US" sz="950" dirty="0">
-                        <a:latin typeface="Calibri" charset="0"/>
-                        <a:ea typeface="Calibri" charset="0"/>
-                        <a:cs typeface="Calibri" charset="0"/>
-                      </a:endParaRPr>
-                    </a:p>
-                  </a:txBody>
-                  <a:tcPr marL="64008" marR="64008" marT="0" marB="0" anchor="ctr">
-                    <a:lnL w="6350" cap="flat" cmpd="sng" algn="ctr">
-                      <a:solidFill>
-                        <a:srgbClr val="D5DBE3"/>
-                      </a:solidFill>
-                      <a:prstDash val="solid"/>
-                      <a:round/>
-                      <a:headEnd type="none" w="med" len="med"/>
-                      <a:tailEnd type="none" w="med" len="med"/>
-                    </a:lnL>
-                    <a:lnR w="6350" cap="flat" cmpd="sng" algn="ctr">
-                      <a:solidFill>
-                        <a:srgbClr val="D5DBE3"/>
-                      </a:solidFill>
-                      <a:prstDash val="solid"/>
-                      <a:round/>
-                      <a:headEnd type="none" w="med" len="med"/>
-                      <a:tailEnd type="none" w="med" len="med"/>
-                    </a:lnR>
-                    <a:lnT w="6350" cap="flat" cmpd="sng" algn="ctr">
-                      <a:solidFill>
-                        <a:srgbClr val="D5DBE3"/>
-                      </a:solidFill>
-                      <a:prstDash val="solid"/>
-                      <a:round/>
-                      <a:headEnd type="none" w="med" len="med"/>
-                      <a:tailEnd type="none" w="med" len="med"/>
-                    </a:lnT>
-                    <a:lnB w="6350" cap="flat" cmpd="sng" algn="ctr">
-                      <a:solidFill>
-                        <a:srgbClr val="D5DBE3"/>
-                      </a:solidFill>
-                      <a:prstDash val="solid"/>
-                      <a:round/>
-                      <a:headEnd type="none" w="med" len="med"/>
-                      <a:tailEnd type="none" w="med" len="med"/>
-                    </a:lnB>
-                  </a:tcPr>
-                </a:tc>
-                <a:tc>
-                  <a:txBody>
-                    <a:bodyPr/>
-                    <a:lstStyle/>
-                    <a:p>
-                      <a:pPr algn="r" indent="0" marL="0">
-                        <a:buNone/>
-                      </a:pPr>
-                      <a:r>
-                        <a:rPr lang="en-US" sz="950" b="1" dirty="0">
-                          <a:solidFill>
-                            <a:srgbClr val="B3261E"/>
-                          </a:solidFill>
-                          <a:latin typeface="Calibri" pitchFamily="34" charset="0"/>
-                          <a:ea typeface="Calibri" pitchFamily="34" charset="-122"/>
-                          <a:cs typeface="Calibri" pitchFamily="34" charset="-120"/>
-                        </a:rPr>
-                        <a:t>66,0</a:t>
-                      </a:r>
-                      <a:endParaRPr lang="en-US" sz="950" dirty="0">
-                        <a:latin typeface="Calibri" charset="0"/>
-                        <a:ea typeface="Calibri" charset="0"/>
-                        <a:cs typeface="Calibri" charset="0"/>
-                      </a:endParaRPr>
-                    </a:p>
-                  </a:txBody>
-                  <a:tcPr marL="64008" marR="64008" marT="0" marB="0" anchor="ctr">
-                    <a:lnL w="6350" cap="flat" cmpd="sng" algn="ctr">
-                      <a:solidFill>
-                        <a:srgbClr val="D5DBE3"/>
-                      </a:solidFill>
-                      <a:prstDash val="solid"/>
-                      <a:round/>
-                      <a:headEnd type="none" w="med" len="med"/>
-                      <a:tailEnd type="none" w="med" len="med"/>
-                    </a:lnL>
-                    <a:lnR w="6350" cap="flat" cmpd="sng" algn="ctr">
-                      <a:solidFill>
-                        <a:srgbClr val="D5DBE3"/>
-                      </a:solidFill>
-                      <a:prstDash val="solid"/>
-                      <a:round/>
-                      <a:headEnd type="none" w="med" len="med"/>
-                      <a:tailEnd type="none" w="med" len="med"/>
-                    </a:lnR>
-                    <a:lnT w="6350" cap="flat" cmpd="sng" algn="ctr">
-                      <a:solidFill>
-                        <a:srgbClr val="D5DBE3"/>
-                      </a:solidFill>
-                      <a:prstDash val="solid"/>
-                      <a:round/>
-                      <a:headEnd type="none" w="med" len="med"/>
-                      <a:tailEnd type="none" w="med" len="med"/>
-                    </a:lnT>
-                    <a:lnB w="6350" cap="flat" cmpd="sng" algn="ctr">
-                      <a:solidFill>
-                        <a:srgbClr val="D5DBE3"/>
-                      </a:solidFill>
-                      <a:prstDash val="solid"/>
-                      <a:round/>
-                      <a:headEnd type="none" w="med" len="med"/>
-                      <a:tailEnd type="none" w="med" len="med"/>
-                    </a:lnB>
-                    <a:solidFill>
-                      <a:srgbClr val="F7E7E5"/>
-                    </a:solidFill>
-                  </a:tcPr>
-                </a:tc>
-                <a:tc>
-                  <a:txBody>
-                    <a:bodyPr/>
-                    <a:lstStyle/>
-                    <a:p>
-                      <a:pPr algn="l" indent="0" marL="0">
-                        <a:buNone/>
-                      </a:pPr>
-                      <a:r>
-                        <a:rPr lang="en-US" sz="950" dirty="0">
-                          <a:solidFill>
-                            <a:srgbClr val="1F2933"/>
-                          </a:solidFill>
-                          <a:latin typeface="Calibri" pitchFamily="34" charset="0"/>
-                          <a:ea typeface="Calibri" pitchFamily="34" charset="-122"/>
-                          <a:cs typeface="Calibri" pitchFamily="34" charset="-120"/>
-                        </a:rPr>
-                        <a:t>Spot (A) ou avance (B)</a:t>
-                      </a:r>
-                      <a:endParaRPr lang="en-US" sz="950" dirty="0">
-                        <a:latin typeface="Calibri" charset="0"/>
-                        <a:ea typeface="Calibri" charset="0"/>
-                        <a:cs typeface="Calibri" charset="0"/>
-                      </a:endParaRPr>
-                    </a:p>
-                  </a:txBody>
-                  <a:tcPr marL="64008" marR="64008" marT="0" marB="0" anchor="ctr">
-                    <a:lnL w="6350" cap="flat" cmpd="sng" algn="ctr">
-                      <a:solidFill>
-                        <a:srgbClr val="D5DBE3"/>
-                      </a:solidFill>
-                      <a:prstDash val="solid"/>
-                      <a:round/>
-                      <a:headEnd type="none" w="med" len="med"/>
-                      <a:tailEnd type="none" w="med" len="med"/>
-                    </a:lnL>
-                    <a:lnR w="6350" cap="flat" cmpd="sng" algn="ctr">
-                      <a:solidFill>
-                        <a:srgbClr val="D5DBE3"/>
-                      </a:solidFill>
-                      <a:prstDash val="solid"/>
-                      <a:round/>
-                      <a:headEnd type="none" w="med" len="med"/>
-                      <a:tailEnd type="none" w="med" len="med"/>
-                    </a:lnR>
-                    <a:lnT w="6350" cap="flat" cmpd="sng" algn="ctr">
-                      <a:solidFill>
-                        <a:srgbClr val="D5DBE3"/>
-                      </a:solidFill>
-                      <a:prstDash val="solid"/>
-                      <a:round/>
-                      <a:headEnd type="none" w="med" len="med"/>
-                      <a:tailEnd type="none" w="med" len="med"/>
-                    </a:lnT>
-                    <a:lnB w="6350" cap="flat" cmpd="sng" algn="ctr">
-                      <a:solidFill>
-                        <a:srgbClr val="D5DBE3"/>
-                      </a:solidFill>
-                      <a:prstDash val="solid"/>
-                      <a:round/>
-                      <a:headEnd type="none" w="med" len="med"/>
-                      <a:tailEnd type="none" w="med" len="med"/>
-                    </a:lnB>
-                  </a:tcPr>
-                </a:tc>
-                <a:tc>
-                  <a:txBody>
-                    <a:bodyPr/>
-                    <a:lstStyle/>
-                    <a:p>
-                      <a:pPr algn="ctr" indent="0" marL="0">
-                        <a:buNone/>
-                      </a:pPr>
-                      <a:r>
-                        <a:rPr lang="en-US" sz="950" dirty="0">
-                          <a:solidFill>
-                            <a:srgbClr val="1F2933"/>
-                          </a:solidFill>
-                          <a:latin typeface="Calibri" pitchFamily="34" charset="0"/>
-                          <a:ea typeface="Calibri" pitchFamily="34" charset="-122"/>
-                          <a:cs typeface="Calibri" pitchFamily="34" charset="-120"/>
-                        </a:rPr>
-                        <a:t>S1</a:t>
-                      </a:r>
-                      <a:endParaRPr lang="en-US" sz="950" dirty="0">
-                        <a:latin typeface="Calibri" charset="0"/>
-                        <a:ea typeface="Calibri" charset="0"/>
-                        <a:cs typeface="Calibri" charset="0"/>
-                      </a:endParaRPr>
-                    </a:p>
-                  </a:txBody>
-                  <a:tcPr marL="64008" marR="64008" marT="0" marB="0" anchor="ctr">
-                    <a:lnL w="6350" cap="flat" cmpd="sng" algn="ctr">
-                      <a:solidFill>
-                        <a:srgbClr val="D5DBE3"/>
-                      </a:solidFill>
-                      <a:prstDash val="solid"/>
-                      <a:round/>
-                      <a:headEnd type="none" w="med" len="med"/>
-                      <a:tailEnd type="none" w="med" len="med"/>
-                    </a:lnL>
-                    <a:lnR w="6350" cap="flat" cmpd="sng" algn="ctr">
-                      <a:solidFill>
-                        <a:srgbClr val="D5DBE3"/>
-                      </a:solidFill>
-                      <a:prstDash val="solid"/>
-                      <a:round/>
-                      <a:headEnd type="none" w="med" len="med"/>
-                      <a:tailEnd type="none" w="med" len="med"/>
-                    </a:lnR>
-                    <a:lnT w="6350" cap="flat" cmpd="sng" algn="ctr">
-                      <a:solidFill>
-                        <a:srgbClr val="D5DBE3"/>
-                      </a:solidFill>
-                      <a:prstDash val="solid"/>
-                      <a:round/>
-                      <a:headEnd type="none" w="med" len="med"/>
-                      <a:tailEnd type="none" w="med" len="med"/>
-                    </a:lnT>
-                    <a:lnB w="6350" cap="flat" cmpd="sng" algn="ctr">
-                      <a:solidFill>
-                        <a:srgbClr val="D5DBE3"/>
-                      </a:solidFill>
-                      <a:prstDash val="solid"/>
-                      <a:round/>
-                      <a:headEnd type="none" w="med" len="med"/>
-                      <a:tailEnd type="none" w="med" len="med"/>
-                    </a:lnB>
-                  </a:tcPr>
-                </a:tc>
-              </a:tr>
-              <a:tr h="237744">
-                <a:tc>
-                  <a:txBody>
-                    <a:bodyPr/>
-                    <a:lstStyle/>
-                    <a:p>
-                      <a:pPr algn="l" indent="0" marL="0">
-                        <a:buNone/>
-                      </a:pPr>
-                      <a:r>
-                        <a:rPr lang="en-US" sz="950" b="1" dirty="0">
-                          <a:solidFill>
-                            <a:srgbClr val="1F2933"/>
-                          </a:solidFill>
-                          <a:latin typeface="Calibri" pitchFamily="34" charset="0"/>
-                          <a:ea typeface="Calibri" pitchFamily="34" charset="-122"/>
-                          <a:cs typeface="Calibri" pitchFamily="34" charset="-120"/>
-                        </a:rPr>
-                        <a:t>RHD CI</a:t>
-                      </a:r>
-                      <a:endParaRPr lang="en-US" sz="950" dirty="0">
-                        <a:latin typeface="Calibri" charset="0"/>
-                        <a:ea typeface="Calibri" charset="0"/>
-                        <a:cs typeface="Calibri" charset="0"/>
-                      </a:endParaRPr>
-                    </a:p>
-                  </a:txBody>
-                  <a:tcPr marL="64008" marR="64008" marT="0" marB="0" anchor="ctr">
-                    <a:lnL w="6350" cap="flat" cmpd="sng" algn="ctr">
-                      <a:solidFill>
-                        <a:srgbClr val="D5DBE3"/>
-                      </a:solidFill>
-                      <a:prstDash val="solid"/>
-                      <a:round/>
-                      <a:headEnd type="none" w="med" len="med"/>
-                      <a:tailEnd type="none" w="med" len="med"/>
-                    </a:lnL>
-                    <a:lnR w="6350" cap="flat" cmpd="sng" algn="ctr">
-                      <a:solidFill>
-                        <a:srgbClr val="D5DBE3"/>
-                      </a:solidFill>
-                      <a:prstDash val="solid"/>
-                      <a:round/>
-                      <a:headEnd type="none" w="med" len="med"/>
-                      <a:tailEnd type="none" w="med" len="med"/>
-                    </a:lnR>
-                    <a:lnT w="6350" cap="flat" cmpd="sng" algn="ctr">
-                      <a:solidFill>
-                        <a:srgbClr val="D5DBE3"/>
-                      </a:solidFill>
-                      <a:prstDash val="solid"/>
-                      <a:round/>
-                      <a:headEnd type="none" w="med" len="med"/>
-                      <a:tailEnd type="none" w="med" len="med"/>
-                    </a:lnT>
-                    <a:lnB w="6350" cap="flat" cmpd="sng" algn="ctr">
-                      <a:solidFill>
-                        <a:srgbClr val="D5DBE3"/>
-                      </a:solidFill>
-                      <a:prstDash val="solid"/>
-                      <a:round/>
-                      <a:headEnd type="none" w="med" len="med"/>
-                      <a:tailEnd type="none" w="med" len="med"/>
-                    </a:lnB>
-                  </a:tcPr>
-                </a:tc>
-                <a:tc>
-                  <a:txBody>
-                    <a:bodyPr/>
-                    <a:lstStyle/>
-                    <a:p>
-                      <a:pPr algn="r" indent="0" marL="0">
-                        <a:buNone/>
-                      </a:pPr>
-                      <a:r>
-                        <a:rPr lang="en-US" sz="950" b="1" dirty="0">
-                          <a:solidFill>
-                            <a:srgbClr val="B3261E"/>
-                          </a:solidFill>
-                          <a:latin typeface="Calibri" pitchFamily="34" charset="0"/>
-                          <a:ea typeface="Calibri" pitchFamily="34" charset="-122"/>
-                          <a:cs typeface="Calibri" pitchFamily="34" charset="-120"/>
-                        </a:rPr>
-                        <a:t>50,0</a:t>
-                      </a:r>
-                      <a:endParaRPr lang="en-US" sz="950" dirty="0">
-                        <a:latin typeface="Calibri" charset="0"/>
-                        <a:ea typeface="Calibri" charset="0"/>
-                        <a:cs typeface="Calibri" charset="0"/>
-                      </a:endParaRPr>
-                    </a:p>
-                  </a:txBody>
-                  <a:tcPr marL="64008" marR="64008" marT="0" marB="0" anchor="ctr">
-                    <a:lnL w="6350" cap="flat" cmpd="sng" algn="ctr">
-                      <a:solidFill>
-                        <a:srgbClr val="D5DBE3"/>
-                      </a:solidFill>
-                      <a:prstDash val="solid"/>
-                      <a:round/>
-                      <a:headEnd type="none" w="med" len="med"/>
-                      <a:tailEnd type="none" w="med" len="med"/>
-                    </a:lnL>
-                    <a:lnR w="6350" cap="flat" cmpd="sng" algn="ctr">
-                      <a:solidFill>
-                        <a:srgbClr val="D5DBE3"/>
-                      </a:solidFill>
-                      <a:prstDash val="solid"/>
-                      <a:round/>
-                      <a:headEnd type="none" w="med" len="med"/>
-                      <a:tailEnd type="none" w="med" len="med"/>
-                    </a:lnR>
-                    <a:lnT w="6350" cap="flat" cmpd="sng" algn="ctr">
-                      <a:solidFill>
-                        <a:srgbClr val="D5DBE3"/>
-                      </a:solidFill>
-                      <a:prstDash val="solid"/>
-                      <a:round/>
-                      <a:headEnd type="none" w="med" len="med"/>
-                      <a:tailEnd type="none" w="med" len="med"/>
-                    </a:lnT>
-                    <a:lnB w="6350" cap="flat" cmpd="sng" algn="ctr">
-                      <a:solidFill>
-                        <a:srgbClr val="D5DBE3"/>
-                      </a:solidFill>
-                      <a:prstDash val="solid"/>
-                      <a:round/>
-                      <a:headEnd type="none" w="med" len="med"/>
-                      <a:tailEnd type="none" w="med" len="med"/>
-                    </a:lnB>
-                    <a:solidFill>
-                      <a:srgbClr val="F7E7E5"/>
-                    </a:solidFill>
-                  </a:tcPr>
-                </a:tc>
-                <a:tc>
-                  <a:txBody>
-                    <a:bodyPr/>
-                    <a:lstStyle/>
-                    <a:p>
-                      <a:pPr algn="l" indent="0" marL="0">
-                        <a:buNone/>
-                      </a:pPr>
-                      <a:r>
-                        <a:rPr lang="en-US" sz="950" dirty="0">
-                          <a:solidFill>
-                            <a:srgbClr val="1F2933"/>
-                          </a:solidFill>
-                          <a:latin typeface="Calibri" pitchFamily="34" charset="0"/>
-                          <a:ea typeface="Calibri" pitchFamily="34" charset="-122"/>
-                          <a:cs typeface="Calibri" pitchFamily="34" charset="-120"/>
-                        </a:rPr>
-                        <a:t>Spot (A) ou avance (B)</a:t>
-                      </a:r>
-                      <a:endParaRPr lang="en-US" sz="950" dirty="0">
-                        <a:latin typeface="Calibri" charset="0"/>
-                        <a:ea typeface="Calibri" charset="0"/>
-                        <a:cs typeface="Calibri" charset="0"/>
-                      </a:endParaRPr>
-                    </a:p>
-                  </a:txBody>
-                  <a:tcPr marL="64008" marR="64008" marT="0" marB="0" anchor="ctr">
-                    <a:lnL w="6350" cap="flat" cmpd="sng" algn="ctr">
-                      <a:solidFill>
-                        <a:srgbClr val="D5DBE3"/>
-                      </a:solidFill>
-                      <a:prstDash val="solid"/>
-                      <a:round/>
-                      <a:headEnd type="none" w="med" len="med"/>
-                      <a:tailEnd type="none" w="med" len="med"/>
-                    </a:lnL>
-                    <a:lnR w="6350" cap="flat" cmpd="sng" algn="ctr">
-                      <a:solidFill>
-                        <a:srgbClr val="D5DBE3"/>
-                      </a:solidFill>
-                      <a:prstDash val="solid"/>
-                      <a:round/>
-                      <a:headEnd type="none" w="med" len="med"/>
-                      <a:tailEnd type="none" w="med" len="med"/>
-                    </a:lnR>
-                    <a:lnT w="6350" cap="flat" cmpd="sng" algn="ctr">
-                      <a:solidFill>
-                        <a:srgbClr val="D5DBE3"/>
-                      </a:solidFill>
-                      <a:prstDash val="solid"/>
-                      <a:round/>
-                      <a:headEnd type="none" w="med" len="med"/>
-                      <a:tailEnd type="none" w="med" len="med"/>
-                    </a:lnT>
-                    <a:lnB w="6350" cap="flat" cmpd="sng" algn="ctr">
-                      <a:solidFill>
-                        <a:srgbClr val="D5DBE3"/>
-                      </a:solidFill>
-                      <a:prstDash val="solid"/>
-                      <a:round/>
-                      <a:headEnd type="none" w="med" len="med"/>
-                      <a:tailEnd type="none" w="med" len="med"/>
-                    </a:lnB>
-                  </a:tcPr>
-                </a:tc>
-                <a:tc>
-                  <a:txBody>
-                    <a:bodyPr/>
-                    <a:lstStyle/>
-                    <a:p>
-                      <a:pPr algn="ctr" indent="0" marL="0">
-                        <a:buNone/>
-                      </a:pPr>
-                      <a:r>
-                        <a:rPr lang="en-US" sz="950" dirty="0">
-                          <a:solidFill>
-                            <a:srgbClr val="1F2933"/>
-                          </a:solidFill>
-                          <a:latin typeface="Calibri" pitchFamily="34" charset="0"/>
-                          <a:ea typeface="Calibri" pitchFamily="34" charset="-122"/>
-                          <a:cs typeface="Calibri" pitchFamily="34" charset="-120"/>
-                        </a:rPr>
-                        <a:t>S1</a:t>
-                      </a:r>
-                      <a:endParaRPr lang="en-US" sz="950" dirty="0">
-                        <a:latin typeface="Calibri" charset="0"/>
-                        <a:ea typeface="Calibri" charset="0"/>
-                        <a:cs typeface="Calibri" charset="0"/>
-                      </a:endParaRPr>
-                    </a:p>
-                  </a:txBody>
-                  <a:tcPr marL="64008" marR="64008" marT="0" marB="0" anchor="ctr">
-                    <a:lnL w="6350" cap="flat" cmpd="sng" algn="ctr">
-                      <a:solidFill>
-                        <a:srgbClr val="D5DBE3"/>
-                      </a:solidFill>
-                      <a:prstDash val="solid"/>
-                      <a:round/>
-                      <a:headEnd type="none" w="med" len="med"/>
-                      <a:tailEnd type="none" w="med" len="med"/>
-                    </a:lnL>
-                    <a:lnR w="6350" cap="flat" cmpd="sng" algn="ctr">
-                      <a:solidFill>
-                        <a:srgbClr val="D5DBE3"/>
-                      </a:solidFill>
-                      <a:prstDash val="solid"/>
-                      <a:round/>
-                      <a:headEnd type="none" w="med" len="med"/>
-                      <a:tailEnd type="none" w="med" len="med"/>
-                    </a:lnR>
-                    <a:lnT w="6350" cap="flat" cmpd="sng" algn="ctr">
-                      <a:solidFill>
-                        <a:srgbClr val="D5DBE3"/>
-                      </a:solidFill>
-                      <a:prstDash val="solid"/>
-                      <a:round/>
-                      <a:headEnd type="none" w="med" len="med"/>
-                      <a:tailEnd type="none" w="med" len="med"/>
-                    </a:lnT>
-                    <a:lnB w="6350" cap="flat" cmpd="sng" algn="ctr">
-                      <a:solidFill>
-                        <a:srgbClr val="D5DBE3"/>
-                      </a:solidFill>
-                      <a:prstDash val="solid"/>
-                      <a:round/>
-                      <a:headEnd type="none" w="med" len="med"/>
-                      <a:tailEnd type="none" w="med" len="med"/>
-                    </a:lnB>
-                  </a:tcPr>
-                </a:tc>
-              </a:tr>
-              <a:tr h="237744">
-                <a:tc>
-                  <a:txBody>
-                    <a:bodyPr/>
-                    <a:lstStyle/>
-                    <a:p>
-                      <a:pPr algn="l" indent="0" marL="0">
-                        <a:buNone/>
-                      </a:pPr>
-                      <a:r>
-                        <a:rPr lang="en-US" sz="950" b="1" dirty="0">
-                          <a:solidFill>
-                            <a:srgbClr val="1F2933"/>
-                          </a:solidFill>
-                          <a:latin typeface="Calibri" pitchFamily="34" charset="0"/>
-                          <a:ea typeface="Calibri" pitchFamily="34" charset="-122"/>
-                          <a:cs typeface="Calibri" pitchFamily="34" charset="-120"/>
-                        </a:rPr>
-                        <a:t>SCO AO</a:t>
-                      </a:r>
-                      <a:endParaRPr lang="en-US" sz="950" dirty="0">
-                        <a:latin typeface="Calibri" charset="0"/>
-                        <a:ea typeface="Calibri" charset="0"/>
-                        <a:cs typeface="Calibri" charset="0"/>
-                      </a:endParaRPr>
-                    </a:p>
-                  </a:txBody>
-                  <a:tcPr marL="64008" marR="64008" marT="0" marB="0" anchor="ctr">
-                    <a:lnL w="6350" cap="flat" cmpd="sng" algn="ctr">
-                      <a:solidFill>
-                        <a:srgbClr val="D5DBE3"/>
-                      </a:solidFill>
-                      <a:prstDash val="solid"/>
-                      <a:round/>
-                      <a:headEnd type="none" w="med" len="med"/>
-                      <a:tailEnd type="none" w="med" len="med"/>
-                    </a:lnL>
-                    <a:lnR w="6350" cap="flat" cmpd="sng" algn="ctr">
-                      <a:solidFill>
-                        <a:srgbClr val="D5DBE3"/>
-                      </a:solidFill>
-                      <a:prstDash val="solid"/>
-                      <a:round/>
-                      <a:headEnd type="none" w="med" len="med"/>
-                      <a:tailEnd type="none" w="med" len="med"/>
-                    </a:lnR>
-                    <a:lnT w="6350" cap="flat" cmpd="sng" algn="ctr">
-                      <a:solidFill>
-                        <a:srgbClr val="D5DBE3"/>
-                      </a:solidFill>
-                      <a:prstDash val="solid"/>
-                      <a:round/>
-                      <a:headEnd type="none" w="med" len="med"/>
-                      <a:tailEnd type="none" w="med" len="med"/>
-                    </a:lnT>
-                    <a:lnB w="6350" cap="flat" cmpd="sng" algn="ctr">
-                      <a:solidFill>
-                        <a:srgbClr val="D5DBE3"/>
-                      </a:solidFill>
-                      <a:prstDash val="solid"/>
-                      <a:round/>
-                      <a:headEnd type="none" w="med" len="med"/>
-                      <a:tailEnd type="none" w="med" len="med"/>
-                    </a:lnB>
-                  </a:tcPr>
-                </a:tc>
-                <a:tc>
-                  <a:txBody>
-                    <a:bodyPr/>
-                    <a:lstStyle/>
-                    <a:p>
-                      <a:pPr algn="r" indent="0" marL="0">
-                        <a:buNone/>
-                      </a:pPr>
-                      <a:r>
-                        <a:rPr lang="en-US" sz="950" b="1" dirty="0">
-                          <a:solidFill>
-                            <a:srgbClr val="B3261E"/>
-                          </a:solidFill>
-                          <a:latin typeface="Calibri" pitchFamily="34" charset="0"/>
-                          <a:ea typeface="Calibri" pitchFamily="34" charset="-122"/>
-                          <a:cs typeface="Calibri" pitchFamily="34" charset="-120"/>
-                        </a:rPr>
-                        <a:t>29,5</a:t>
-                      </a:r>
-                      <a:endParaRPr lang="en-US" sz="950" dirty="0">
-                        <a:latin typeface="Calibri" charset="0"/>
-                        <a:ea typeface="Calibri" charset="0"/>
-                        <a:cs typeface="Calibri" charset="0"/>
-                      </a:endParaRPr>
-                    </a:p>
-                  </a:txBody>
-                  <a:tcPr marL="64008" marR="64008" marT="0" marB="0" anchor="ctr">
-                    <a:lnL w="6350" cap="flat" cmpd="sng" algn="ctr">
-                      <a:solidFill>
-                        <a:srgbClr val="D5DBE3"/>
-                      </a:solidFill>
-                      <a:prstDash val="solid"/>
-                      <a:round/>
-                      <a:headEnd type="none" w="med" len="med"/>
-                      <a:tailEnd type="none" w="med" len="med"/>
-                    </a:lnL>
-                    <a:lnR w="6350" cap="flat" cmpd="sng" algn="ctr">
-                      <a:solidFill>
-                        <a:srgbClr val="D5DBE3"/>
-                      </a:solidFill>
-                      <a:prstDash val="solid"/>
-                      <a:round/>
-                      <a:headEnd type="none" w="med" len="med"/>
-                      <a:tailEnd type="none" w="med" len="med"/>
-                    </a:lnR>
-                    <a:lnT w="6350" cap="flat" cmpd="sng" algn="ctr">
-                      <a:solidFill>
-                        <a:srgbClr val="D5DBE3"/>
-                      </a:solidFill>
-                      <a:prstDash val="solid"/>
-                      <a:round/>
-                      <a:headEnd type="none" w="med" len="med"/>
-                      <a:tailEnd type="none" w="med" len="med"/>
-                    </a:lnT>
-                    <a:lnB w="6350" cap="flat" cmpd="sng" algn="ctr">
-                      <a:solidFill>
-                        <a:srgbClr val="D5DBE3"/>
-                      </a:solidFill>
-                      <a:prstDash val="solid"/>
-                      <a:round/>
-                      <a:headEnd type="none" w="med" len="med"/>
-                      <a:tailEnd type="none" w="med" len="med"/>
-                    </a:lnB>
-                    <a:solidFill>
-                      <a:srgbClr val="F7E7E5"/>
-                    </a:solidFill>
-                  </a:tcPr>
-                </a:tc>
-                <a:tc>
-                  <a:txBody>
-                    <a:bodyPr/>
-                    <a:lstStyle/>
-                    <a:p>
-                      <a:pPr algn="l" indent="0" marL="0">
-                        <a:buNone/>
-                      </a:pPr>
-                      <a:r>
-                        <a:rPr lang="en-US" sz="950" dirty="0">
-                          <a:solidFill>
-                            <a:srgbClr val="1F2933"/>
-                          </a:solidFill>
-                          <a:latin typeface="Calibri" pitchFamily="34" charset="0"/>
-                          <a:ea typeface="Calibri" pitchFamily="34" charset="-122"/>
-                          <a:cs typeface="Calibri" pitchFamily="34" charset="-120"/>
-                        </a:rPr>
-                        <a:t>Spot (A) ou avance (B)</a:t>
-                      </a:r>
-                      <a:endParaRPr lang="en-US" sz="950" dirty="0">
-                        <a:latin typeface="Calibri" charset="0"/>
-                        <a:ea typeface="Calibri" charset="0"/>
-                        <a:cs typeface="Calibri" charset="0"/>
-                      </a:endParaRPr>
-                    </a:p>
-                  </a:txBody>
-                  <a:tcPr marL="64008" marR="64008" marT="0" marB="0" anchor="ctr">
-                    <a:lnL w="6350" cap="flat" cmpd="sng" algn="ctr">
-                      <a:solidFill>
-                        <a:srgbClr val="D5DBE3"/>
-                      </a:solidFill>
-                      <a:prstDash val="solid"/>
-                      <a:round/>
-                      <a:headEnd type="none" w="med" len="med"/>
-                      <a:tailEnd type="none" w="med" len="med"/>
-                    </a:lnL>
-                    <a:lnR w="6350" cap="flat" cmpd="sng" algn="ctr">
-                      <a:solidFill>
-                        <a:srgbClr val="D5DBE3"/>
-                      </a:solidFill>
-                      <a:prstDash val="solid"/>
-                      <a:round/>
-                      <a:headEnd type="none" w="med" len="med"/>
-                      <a:tailEnd type="none" w="med" len="med"/>
-                    </a:lnR>
-                    <a:lnT w="6350" cap="flat" cmpd="sng" algn="ctr">
-                      <a:solidFill>
-                        <a:srgbClr val="D5DBE3"/>
-                      </a:solidFill>
-                      <a:prstDash val="solid"/>
-                      <a:round/>
-                      <a:headEnd type="none" w="med" len="med"/>
-                      <a:tailEnd type="none" w="med" len="med"/>
-                    </a:lnT>
-                    <a:lnB w="6350" cap="flat" cmpd="sng" algn="ctr">
-                      <a:solidFill>
-                        <a:srgbClr val="D5DBE3"/>
-                      </a:solidFill>
-                      <a:prstDash val="solid"/>
-                      <a:round/>
-                      <a:headEnd type="none" w="med" len="med"/>
-                      <a:tailEnd type="none" w="med" len="med"/>
-                    </a:lnB>
-                  </a:tcPr>
-                </a:tc>
-                <a:tc>
-                  <a:txBody>
-                    <a:bodyPr/>
-                    <a:lstStyle/>
-                    <a:p>
-                      <a:pPr algn="ctr" indent="0" marL="0">
-                        <a:buNone/>
-                      </a:pPr>
-                      <a:r>
-                        <a:rPr lang="en-US" sz="950" dirty="0">
-                          <a:solidFill>
-                            <a:srgbClr val="1F2933"/>
-                          </a:solidFill>
-                          <a:latin typeface="Calibri" pitchFamily="34" charset="0"/>
-                          <a:ea typeface="Calibri" pitchFamily="34" charset="-122"/>
-                          <a:cs typeface="Calibri" pitchFamily="34" charset="-120"/>
-                        </a:rPr>
-                        <a:t>S5</a:t>
-                      </a:r>
-                      <a:endParaRPr lang="en-US" sz="950" dirty="0">
-                        <a:latin typeface="Calibri" charset="0"/>
-                        <a:ea typeface="Calibri" charset="0"/>
-                        <a:cs typeface="Calibri" charset="0"/>
-                      </a:endParaRPr>
-                    </a:p>
-                  </a:txBody>
-                  <a:tcPr marL="64008" marR="64008" marT="0" marB="0" anchor="ctr">
-                    <a:lnL w="6350" cap="flat" cmpd="sng" algn="ctr">
-                      <a:solidFill>
-                        <a:srgbClr val="D5DBE3"/>
-                      </a:solidFill>
-                      <a:prstDash val="solid"/>
-                      <a:round/>
-                      <a:headEnd type="none" w="med" len="med"/>
-                      <a:tailEnd type="none" w="med" len="med"/>
-                    </a:lnL>
-                    <a:lnR w="6350" cap="flat" cmpd="sng" algn="ctr">
-                      <a:solidFill>
-                        <a:srgbClr val="D5DBE3"/>
-                      </a:solidFill>
-                      <a:prstDash val="solid"/>
-                      <a:round/>
-                      <a:headEnd type="none" w="med" len="med"/>
-                      <a:tailEnd type="none" w="med" len="med"/>
-                    </a:lnR>
-                    <a:lnT w="6350" cap="flat" cmpd="sng" algn="ctr">
-                      <a:solidFill>
-                        <a:srgbClr val="D5DBE3"/>
-                      </a:solidFill>
-                      <a:prstDash val="solid"/>
-                      <a:round/>
-                      <a:headEnd type="none" w="med" len="med"/>
-                      <a:tailEnd type="none" w="med" len="med"/>
-                    </a:lnT>
-                    <a:lnB w="6350" cap="flat" cmpd="sng" algn="ctr">
-                      <a:solidFill>
-                        <a:srgbClr val="D5DBE3"/>
-                      </a:solidFill>
-                      <a:prstDash val="solid"/>
-                      <a:round/>
-                      <a:headEnd type="none" w="med" len="med"/>
-                      <a:tailEnd type="none" w="med" len="med"/>
-                    </a:lnB>
-                  </a:tcPr>
-                </a:tc>
-              </a:tr>
-              <a:tr h="237744">
-                <a:tc>
-                  <a:txBody>
-                    <a:bodyPr/>
-                    <a:lstStyle/>
-                    <a:p>
-                      <a:pPr algn="l" indent="0" marL="0">
-                        <a:buNone/>
-                      </a:pPr>
-                      <a:r>
-                        <a:rPr lang="en-US" sz="950" b="1" dirty="0">
-                          <a:solidFill>
-                            <a:srgbClr val="1F2933"/>
-                          </a:solidFill>
-                          <a:latin typeface="Calibri" pitchFamily="34" charset="0"/>
-                          <a:ea typeface="Calibri" pitchFamily="34" charset="-122"/>
-                          <a:cs typeface="Calibri" pitchFamily="34" charset="-120"/>
-                        </a:rPr>
-                        <a:t>AB CENTER</a:t>
-                      </a:r>
-                      <a:endParaRPr lang="en-US" sz="950" dirty="0">
-                        <a:latin typeface="Calibri" charset="0"/>
-                        <a:ea typeface="Calibri" charset="0"/>
-                        <a:cs typeface="Calibri" charset="0"/>
-                      </a:endParaRPr>
-                    </a:p>
-                  </a:txBody>
-                  <a:tcPr marL="64008" marR="64008" marT="0" marB="0" anchor="ctr">
-                    <a:lnL w="6350" cap="flat" cmpd="sng" algn="ctr">
-                      <a:solidFill>
-                        <a:srgbClr val="D5DBE3"/>
-                      </a:solidFill>
-                      <a:prstDash val="solid"/>
-                      <a:round/>
-                      <a:headEnd type="none" w="med" len="med"/>
-                      <a:tailEnd type="none" w="med" len="med"/>
-                    </a:lnL>
-                    <a:lnR w="6350" cap="flat" cmpd="sng" algn="ctr">
-                      <a:solidFill>
-                        <a:srgbClr val="D5DBE3"/>
-                      </a:solidFill>
-                      <a:prstDash val="solid"/>
-                      <a:round/>
-                      <a:headEnd type="none" w="med" len="med"/>
-                      <a:tailEnd type="none" w="med" len="med"/>
-                    </a:lnR>
-                    <a:lnT w="6350" cap="flat" cmpd="sng" algn="ctr">
-                      <a:solidFill>
-                        <a:srgbClr val="D5DBE3"/>
-                      </a:solidFill>
-                      <a:prstDash val="solid"/>
-                      <a:round/>
-                      <a:headEnd type="none" w="med" len="med"/>
-                      <a:tailEnd type="none" w="med" len="med"/>
-                    </a:lnT>
-                    <a:lnB w="6350" cap="flat" cmpd="sng" algn="ctr">
-                      <a:solidFill>
-                        <a:srgbClr val="D5DBE3"/>
-                      </a:solidFill>
-                      <a:prstDash val="solid"/>
-                      <a:round/>
-                      <a:headEnd type="none" w="med" len="med"/>
-                      <a:tailEnd type="none" w="med" len="med"/>
-                    </a:lnB>
-                  </a:tcPr>
-                </a:tc>
-                <a:tc>
-                  <a:txBody>
-                    <a:bodyPr/>
-                    <a:lstStyle/>
-                    <a:p>
-                      <a:pPr algn="r" indent="0" marL="0">
-                        <a:buNone/>
-                      </a:pPr>
-                      <a:r>
-                        <a:rPr lang="en-US" sz="950" b="1" dirty="0">
-                          <a:solidFill>
-                            <a:srgbClr val="B3261E"/>
-                          </a:solidFill>
-                          <a:latin typeface="Calibri" pitchFamily="34" charset="0"/>
-                          <a:ea typeface="Calibri" pitchFamily="34" charset="-122"/>
-                          <a:cs typeface="Calibri" pitchFamily="34" charset="-120"/>
-                        </a:rPr>
-                        <a:t>6,3</a:t>
-                      </a:r>
-                      <a:endParaRPr lang="en-US" sz="950" dirty="0">
-                        <a:latin typeface="Calibri" charset="0"/>
-                        <a:ea typeface="Calibri" charset="0"/>
-                        <a:cs typeface="Calibri" charset="0"/>
-                      </a:endParaRPr>
-                    </a:p>
-                  </a:txBody>
-                  <a:tcPr marL="64008" marR="64008" marT="0" marB="0" anchor="ctr">
-                    <a:lnL w="6350" cap="flat" cmpd="sng" algn="ctr">
-                      <a:solidFill>
-                        <a:srgbClr val="D5DBE3"/>
-                      </a:solidFill>
-                      <a:prstDash val="solid"/>
-                      <a:round/>
-                      <a:headEnd type="none" w="med" len="med"/>
-                      <a:tailEnd type="none" w="med" len="med"/>
-                    </a:lnL>
-                    <a:lnR w="6350" cap="flat" cmpd="sng" algn="ctr">
-                      <a:solidFill>
-                        <a:srgbClr val="D5DBE3"/>
-                      </a:solidFill>
-                      <a:prstDash val="solid"/>
-                      <a:round/>
-                      <a:headEnd type="none" w="med" len="med"/>
-                      <a:tailEnd type="none" w="med" len="med"/>
-                    </a:lnR>
-                    <a:lnT w="6350" cap="flat" cmpd="sng" algn="ctr">
-                      <a:solidFill>
-                        <a:srgbClr val="D5DBE3"/>
-                      </a:solidFill>
-                      <a:prstDash val="solid"/>
-                      <a:round/>
-                      <a:headEnd type="none" w="med" len="med"/>
-                      <a:tailEnd type="none" w="med" len="med"/>
-                    </a:lnT>
-                    <a:lnB w="6350" cap="flat" cmpd="sng" algn="ctr">
-                      <a:solidFill>
-                        <a:srgbClr val="D5DBE3"/>
-                      </a:solidFill>
-                      <a:prstDash val="solid"/>
-                      <a:round/>
-                      <a:headEnd type="none" w="med" len="med"/>
-                      <a:tailEnd type="none" w="med" len="med"/>
-                    </a:lnB>
-                    <a:solidFill>
-                      <a:srgbClr val="F7E7E5"/>
-                    </a:solidFill>
-                  </a:tcPr>
-                </a:tc>
-                <a:tc>
-                  <a:txBody>
-                    <a:bodyPr/>
-                    <a:lstStyle/>
-                    <a:p>
-                      <a:pPr algn="l" indent="0" marL="0">
-                        <a:buNone/>
-                      </a:pPr>
-                      <a:r>
-                        <a:rPr lang="en-US" sz="950" dirty="0">
-                          <a:solidFill>
-                            <a:srgbClr val="1F2933"/>
-                          </a:solidFill>
-                          <a:latin typeface="Calibri" pitchFamily="34" charset="0"/>
-                          <a:ea typeface="Calibri" pitchFamily="34" charset="-122"/>
-                          <a:cs typeface="Calibri" pitchFamily="34" charset="-120"/>
-                        </a:rPr>
-                        <a:t>Spot (A) ou avance (B)</a:t>
-                      </a:r>
-                      <a:endParaRPr lang="en-US" sz="950" dirty="0">
-                        <a:latin typeface="Calibri" charset="0"/>
-                        <a:ea typeface="Calibri" charset="0"/>
-                        <a:cs typeface="Calibri" charset="0"/>
-                      </a:endParaRPr>
-                    </a:p>
-                  </a:txBody>
-                  <a:tcPr marL="64008" marR="64008" marT="0" marB="0" anchor="ctr">
-                    <a:lnL w="6350" cap="flat" cmpd="sng" algn="ctr">
-                      <a:solidFill>
-                        <a:srgbClr val="D5DBE3"/>
-                      </a:solidFill>
-                      <a:prstDash val="solid"/>
-                      <a:round/>
-                      <a:headEnd type="none" w="med" len="med"/>
-                      <a:tailEnd type="none" w="med" len="med"/>
-                    </a:lnL>
-                    <a:lnR w="6350" cap="flat" cmpd="sng" algn="ctr">
-                      <a:solidFill>
-                        <a:srgbClr val="D5DBE3"/>
-                      </a:solidFill>
-                      <a:prstDash val="solid"/>
-                      <a:round/>
-                      <a:headEnd type="none" w="med" len="med"/>
-                      <a:tailEnd type="none" w="med" len="med"/>
-                    </a:lnR>
-                    <a:lnT w="6350" cap="flat" cmpd="sng" algn="ctr">
-                      <a:solidFill>
-                        <a:srgbClr val="D5DBE3"/>
-                      </a:solidFill>
-                      <a:prstDash val="solid"/>
-                      <a:round/>
-                      <a:headEnd type="none" w="med" len="med"/>
-                      <a:tailEnd type="none" w="med" len="med"/>
-                    </a:lnT>
-                    <a:lnB w="6350" cap="flat" cmpd="sng" algn="ctr">
-                      <a:solidFill>
-                        <a:srgbClr val="D5DBE3"/>
-                      </a:solidFill>
-                      <a:prstDash val="solid"/>
-                      <a:round/>
-                      <a:headEnd type="none" w="med" len="med"/>
-                      <a:tailEnd type="none" w="med" len="med"/>
-                    </a:lnB>
-                  </a:tcPr>
-                </a:tc>
-                <a:tc>
-                  <a:txBody>
-                    <a:bodyPr/>
-                    <a:lstStyle/>
-                    <a:p>
-                      <a:pPr algn="ctr" indent="0" marL="0">
-                        <a:buNone/>
-                      </a:pPr>
-                      <a:r>
-                        <a:rPr lang="en-US" sz="950" dirty="0">
-                          <a:solidFill>
-                            <a:srgbClr val="1F2933"/>
-                          </a:solidFill>
-                          <a:latin typeface="Calibri" pitchFamily="34" charset="0"/>
-                          <a:ea typeface="Calibri" pitchFamily="34" charset="-122"/>
-                          <a:cs typeface="Calibri" pitchFamily="34" charset="-120"/>
-                        </a:rPr>
-                        <a:t>S1</a:t>
-                      </a:r>
-                      <a:endParaRPr lang="en-US" sz="950" dirty="0">
-                        <a:latin typeface="Calibri" charset="0"/>
-                        <a:ea typeface="Calibri" charset="0"/>
-                        <a:cs typeface="Calibri" charset="0"/>
-                      </a:endParaRPr>
-                    </a:p>
-                  </a:txBody>
-                  <a:tcPr marL="64008" marR="64008" marT="0" marB="0" anchor="ctr">
-                    <a:lnL w="6350" cap="flat" cmpd="sng" algn="ctr">
-                      <a:solidFill>
-                        <a:srgbClr val="D5DBE3"/>
-                      </a:solidFill>
-                      <a:prstDash val="solid"/>
-                      <a:round/>
-                      <a:headEnd type="none" w="med" len="med"/>
-                      <a:tailEnd type="none" w="med" len="med"/>
-                    </a:lnL>
-                    <a:lnR w="6350" cap="flat" cmpd="sng" algn="ctr">
-                      <a:solidFill>
-                        <a:srgbClr val="D5DBE3"/>
-                      </a:solidFill>
-                      <a:prstDash val="solid"/>
-                      <a:round/>
-                      <a:headEnd type="none" w="med" len="med"/>
-                      <a:tailEnd type="none" w="med" len="med"/>
-                    </a:lnR>
-                    <a:lnT w="6350" cap="flat" cmpd="sng" algn="ctr">
-                      <a:solidFill>
-                        <a:srgbClr val="D5DBE3"/>
-                      </a:solidFill>
-                      <a:prstDash val="solid"/>
-                      <a:round/>
-                      <a:headEnd type="none" w="med" len="med"/>
-                      <a:tailEnd type="none" w="med" len="med"/>
-                    </a:lnT>
-                    <a:lnB w="6350" cap="flat" cmpd="sng" algn="ctr">
-                      <a:solidFill>
-                        <a:srgbClr val="D5DBE3"/>
-                      </a:solidFill>
-                      <a:prstDash val="solid"/>
-                      <a:round/>
-                      <a:headEnd type="none" w="med" len="med"/>
-                      <a:tailEnd type="none" w="med" len="med"/>
-                    </a:lnB>
-                  </a:tcPr>
-                </a:tc>
-              </a:tr>
-              <a:tr h="237744">
-                <a:tc>
-                  <a:txBody>
-                    <a:bodyPr/>
-                    <a:lstStyle/>
-                    <a:p>
-                      <a:pPr algn="l" indent="0" marL="0">
-                        <a:buNone/>
-                      </a:pPr>
-                      <a:r>
-                        <a:rPr lang="en-US" sz="950" b="1" dirty="0">
-                          <a:solidFill>
-                            <a:srgbClr val="1F2933"/>
-                          </a:solidFill>
-                          <a:latin typeface="Calibri" pitchFamily="34" charset="0"/>
-                          <a:ea typeface="Calibri" pitchFamily="34" charset="-122"/>
-                          <a:cs typeface="Calibri" pitchFamily="34" charset="-120"/>
-                        </a:rPr>
-                        <a:t>ODALYS CI</a:t>
-                      </a:r>
-                      <a:endParaRPr lang="en-US" sz="950" dirty="0">
-                        <a:latin typeface="Calibri" charset="0"/>
-                        <a:ea typeface="Calibri" charset="0"/>
-                        <a:cs typeface="Calibri" charset="0"/>
-                      </a:endParaRPr>
-                    </a:p>
-                  </a:txBody>
-                  <a:tcPr marL="64008" marR="64008" marT="0" marB="0" anchor="ctr">
-                    <a:lnL w="6350" cap="flat" cmpd="sng" algn="ctr">
-                      <a:solidFill>
-                        <a:srgbClr val="D5DBE3"/>
-                      </a:solidFill>
-                      <a:prstDash val="solid"/>
-                      <a:round/>
-                      <a:headEnd type="none" w="med" len="med"/>
-                      <a:tailEnd type="none" w="med" len="med"/>
-                    </a:lnL>
-                    <a:lnR w="6350" cap="flat" cmpd="sng" algn="ctr">
-                      <a:solidFill>
-                        <a:srgbClr val="D5DBE3"/>
-                      </a:solidFill>
-                      <a:prstDash val="solid"/>
-                      <a:round/>
-                      <a:headEnd type="none" w="med" len="med"/>
-                      <a:tailEnd type="none" w="med" len="med"/>
-                    </a:lnR>
-                    <a:lnT w="6350" cap="flat" cmpd="sng" algn="ctr">
-                      <a:solidFill>
-                        <a:srgbClr val="D5DBE3"/>
-                      </a:solidFill>
-                      <a:prstDash val="solid"/>
-                      <a:round/>
-                      <a:headEnd type="none" w="med" len="med"/>
-                      <a:tailEnd type="none" w="med" len="med"/>
-                    </a:lnT>
-                    <a:lnB w="6350" cap="flat" cmpd="sng" algn="ctr">
-                      <a:solidFill>
-                        <a:srgbClr val="D5DBE3"/>
-                      </a:solidFill>
-                      <a:prstDash val="solid"/>
-                      <a:round/>
-                      <a:headEnd type="none" w="med" len="med"/>
-                      <a:tailEnd type="none" w="med" len="med"/>
-                    </a:lnB>
-                  </a:tcPr>
-                </a:tc>
-                <a:tc>
-                  <a:txBody>
-                    <a:bodyPr/>
-                    <a:lstStyle/>
-                    <a:p>
-                      <a:pPr algn="r" indent="0" marL="0">
-                        <a:buNone/>
-                      </a:pPr>
-                      <a:r>
-                        <a:rPr lang="en-US" sz="950" b="1" dirty="0">
-                          <a:solidFill>
-                            <a:srgbClr val="B3261E"/>
-                          </a:solidFill>
-                          <a:latin typeface="Calibri" pitchFamily="34" charset="0"/>
-                          <a:ea typeface="Calibri" pitchFamily="34" charset="-122"/>
-                          <a:cs typeface="Calibri" pitchFamily="34" charset="-120"/>
-                        </a:rPr>
-                        <a:t>3,5</a:t>
-                      </a:r>
-                      <a:endParaRPr lang="en-US" sz="950" dirty="0">
-                        <a:latin typeface="Calibri" charset="0"/>
-                        <a:ea typeface="Calibri" charset="0"/>
-                        <a:cs typeface="Calibri" charset="0"/>
-                      </a:endParaRPr>
-                    </a:p>
-                  </a:txBody>
-                  <a:tcPr marL="64008" marR="64008" marT="0" marB="0" anchor="ctr">
-                    <a:lnL w="6350" cap="flat" cmpd="sng" algn="ctr">
-                      <a:solidFill>
-                        <a:srgbClr val="D5DBE3"/>
-                      </a:solidFill>
-                      <a:prstDash val="solid"/>
-                      <a:round/>
-                      <a:headEnd type="none" w="med" len="med"/>
-                      <a:tailEnd type="none" w="med" len="med"/>
-                    </a:lnL>
-                    <a:lnR w="6350" cap="flat" cmpd="sng" algn="ctr">
-                      <a:solidFill>
-                        <a:srgbClr val="D5DBE3"/>
-                      </a:solidFill>
-                      <a:prstDash val="solid"/>
-                      <a:round/>
-                      <a:headEnd type="none" w="med" len="med"/>
-                      <a:tailEnd type="none" w="med" len="med"/>
-                    </a:lnR>
-                    <a:lnT w="6350" cap="flat" cmpd="sng" algn="ctr">
-                      <a:solidFill>
-                        <a:srgbClr val="D5DBE3"/>
-                      </a:solidFill>
-                      <a:prstDash val="solid"/>
-                      <a:round/>
-                      <a:headEnd type="none" w="med" len="med"/>
-                      <a:tailEnd type="none" w="med" len="med"/>
-                    </a:lnT>
-                    <a:lnB w="6350" cap="flat" cmpd="sng" algn="ctr">
-                      <a:solidFill>
-                        <a:srgbClr val="D5DBE3"/>
-                      </a:solidFill>
-                      <a:prstDash val="solid"/>
-                      <a:round/>
-                      <a:headEnd type="none" w="med" len="med"/>
-                      <a:tailEnd type="none" w="med" len="med"/>
-                    </a:lnB>
-                    <a:solidFill>
-                      <a:srgbClr val="F7E7E5"/>
-                    </a:solidFill>
-                  </a:tcPr>
-                </a:tc>
-                <a:tc>
-                  <a:txBody>
-                    <a:bodyPr/>
-                    <a:lstStyle/>
-                    <a:p>
-                      <a:pPr algn="l" indent="0" marL="0">
-                        <a:buNone/>
-                      </a:pPr>
-                      <a:r>
-                        <a:rPr lang="en-US" sz="950" dirty="0">
-                          <a:solidFill>
-                            <a:srgbClr val="1F2933"/>
-                          </a:solidFill>
-                          <a:latin typeface="Calibri" pitchFamily="34" charset="0"/>
-                          <a:ea typeface="Calibri" pitchFamily="34" charset="-122"/>
-                          <a:cs typeface="Calibri" pitchFamily="34" charset="-120"/>
-                        </a:rPr>
-                        <a:t>Spot (A) ou avance (B)</a:t>
-                      </a:r>
-                      <a:endParaRPr lang="en-US" sz="950" dirty="0">
-                        <a:latin typeface="Calibri" charset="0"/>
-                        <a:ea typeface="Calibri" charset="0"/>
-                        <a:cs typeface="Calibri" charset="0"/>
-                      </a:endParaRPr>
-                    </a:p>
-                  </a:txBody>
-                  <a:tcPr marL="64008" marR="64008" marT="0" marB="0" anchor="ctr">
-                    <a:lnL w="6350" cap="flat" cmpd="sng" algn="ctr">
-                      <a:solidFill>
-                        <a:srgbClr val="D5DBE3"/>
-                      </a:solidFill>
-                      <a:prstDash val="solid"/>
-                      <a:round/>
-                      <a:headEnd type="none" w="med" len="med"/>
-                      <a:tailEnd type="none" w="med" len="med"/>
-                    </a:lnL>
-                    <a:lnR w="6350" cap="flat" cmpd="sng" algn="ctr">
-                      <a:solidFill>
-                        <a:srgbClr val="D5DBE3"/>
-                      </a:solidFill>
-                      <a:prstDash val="solid"/>
-                      <a:round/>
-                      <a:headEnd type="none" w="med" len="med"/>
-                      <a:tailEnd type="none" w="med" len="med"/>
-                    </a:lnR>
-                    <a:lnT w="6350" cap="flat" cmpd="sng" algn="ctr">
-                      <a:solidFill>
-                        <a:srgbClr val="D5DBE3"/>
-                      </a:solidFill>
-                      <a:prstDash val="solid"/>
-                      <a:round/>
-                      <a:headEnd type="none" w="med" len="med"/>
-                      <a:tailEnd type="none" w="med" len="med"/>
-                    </a:lnT>
-                    <a:lnB w="6350" cap="flat" cmpd="sng" algn="ctr">
-                      <a:solidFill>
-                        <a:srgbClr val="D5DBE3"/>
-                      </a:solidFill>
-                      <a:prstDash val="solid"/>
-                      <a:round/>
-                      <a:headEnd type="none" w="med" len="med"/>
-                      <a:tailEnd type="none" w="med" len="med"/>
-                    </a:lnB>
-                  </a:tcPr>
-                </a:tc>
-                <a:tc>
-                  <a:txBody>
-                    <a:bodyPr/>
-                    <a:lstStyle/>
-                    <a:p>
-                      <a:pPr algn="ctr" indent="0" marL="0">
-                        <a:buNone/>
-                      </a:pPr>
-                      <a:r>
-                        <a:rPr lang="en-US" sz="950" dirty="0">
-                          <a:solidFill>
-                            <a:srgbClr val="1F2933"/>
-                          </a:solidFill>
-                          <a:latin typeface="Calibri" pitchFamily="34" charset="0"/>
-                          <a:ea typeface="Calibri" pitchFamily="34" charset="-122"/>
-                          <a:cs typeface="Calibri" pitchFamily="34" charset="-120"/>
-                        </a:rPr>
-                        <a:t>S1</a:t>
-                      </a:r>
-                      <a:endParaRPr lang="en-US" sz="950" dirty="0">
-                        <a:latin typeface="Calibri" charset="0"/>
-                        <a:ea typeface="Calibri" charset="0"/>
-                        <a:cs typeface="Calibri" charset="0"/>
-                      </a:endParaRPr>
-                    </a:p>
-                  </a:txBody>
-                  <a:tcPr marL="64008" marR="64008" marT="0" marB="0" anchor="ctr">
-                    <a:lnL w="6350" cap="flat" cmpd="sng" algn="ctr">
-                      <a:solidFill>
-                        <a:srgbClr val="D5DBE3"/>
-                      </a:solidFill>
-                      <a:prstDash val="solid"/>
-                      <a:round/>
-                      <a:headEnd type="none" w="med" len="med"/>
-                      <a:tailEnd type="none" w="med" len="med"/>
-                    </a:lnL>
-                    <a:lnR w="6350" cap="flat" cmpd="sng" algn="ctr">
-                      <a:solidFill>
-                        <a:srgbClr val="D5DBE3"/>
-                      </a:solidFill>
-                      <a:prstDash val="solid"/>
-                      <a:round/>
-                      <a:headEnd type="none" w="med" len="med"/>
-                      <a:tailEnd type="none" w="med" len="med"/>
-                    </a:lnR>
-                    <a:lnT w="6350" cap="flat" cmpd="sng" algn="ctr">
-                      <a:solidFill>
-                        <a:srgbClr val="D5DBE3"/>
-                      </a:solidFill>
-                      <a:prstDash val="solid"/>
-                      <a:round/>
-                      <a:headEnd type="none" w="med" len="med"/>
-                      <a:tailEnd type="none" w="med" len="med"/>
-                    </a:lnT>
-                    <a:lnB w="6350" cap="flat" cmpd="sng" algn="ctr">
-                      <a:solidFill>
-                        <a:srgbClr val="D5DBE3"/>
-                      </a:solidFill>
-                      <a:prstDash val="solid"/>
-                      <a:round/>
-                      <a:headEnd type="none" w="med" len="med"/>
-                      <a:tailEnd type="none" w="med" len="med"/>
-                    </a:lnB>
-                  </a:tcPr>
-                </a:tc>
-              </a:tr>
-              <a:tr h="237744">
-                <a:tc>
-                  <a:txBody>
-                    <a:bodyPr/>
-                    <a:lstStyle/>
-                    <a:p>
-                      <a:pPr algn="l" indent="0" marL="0">
-                        <a:buNone/>
-                      </a:pPr>
-                      <a:r>
-                        <a:rPr lang="en-US" sz="950" b="1" dirty="0">
-                          <a:solidFill>
-                            <a:srgbClr val="1F2933"/>
-                          </a:solidFill>
-                          <a:latin typeface="Calibri" pitchFamily="34" charset="0"/>
-                          <a:ea typeface="Calibri" pitchFamily="34" charset="-122"/>
-                          <a:cs typeface="Calibri" pitchFamily="34" charset="-120"/>
-                        </a:rPr>
-                        <a:t>RIVIERA – fonds projet</a:t>
-                      </a:r>
-                      <a:endParaRPr lang="en-US" sz="950" dirty="0">
-                        <a:latin typeface="Calibri" charset="0"/>
-                        <a:ea typeface="Calibri" charset="0"/>
-                        <a:cs typeface="Calibri" charset="0"/>
-                      </a:endParaRPr>
-                    </a:p>
-                  </a:txBody>
-                  <a:tcPr marL="64008" marR="64008" marT="0" marB="0" anchor="ctr">
-                    <a:lnL w="6350" cap="flat" cmpd="sng" algn="ctr">
-                      <a:solidFill>
-                        <a:srgbClr val="D5DBE3"/>
-                      </a:solidFill>
-                      <a:prstDash val="solid"/>
-                      <a:round/>
-                      <a:headEnd type="none" w="med" len="med"/>
-                      <a:tailEnd type="none" w="med" len="med"/>
-                    </a:lnL>
-                    <a:lnR w="6350" cap="flat" cmpd="sng" algn="ctr">
-                      <a:solidFill>
-                        <a:srgbClr val="D5DBE3"/>
-                      </a:solidFill>
-                      <a:prstDash val="solid"/>
-                      <a:round/>
-                      <a:headEnd type="none" w="med" len="med"/>
-                      <a:tailEnd type="none" w="med" len="med"/>
-                    </a:lnR>
-                    <a:lnT w="6350" cap="flat" cmpd="sng" algn="ctr">
-                      <a:solidFill>
-                        <a:srgbClr val="D5DBE3"/>
-                      </a:solidFill>
-                      <a:prstDash val="solid"/>
-                      <a:round/>
-                      <a:headEnd type="none" w="med" len="med"/>
-                      <a:tailEnd type="none" w="med" len="med"/>
-                    </a:lnT>
-                    <a:lnB w="6350" cap="flat" cmpd="sng" algn="ctr">
-                      <a:solidFill>
-                        <a:srgbClr val="D5DBE3"/>
-                      </a:solidFill>
-                      <a:prstDash val="solid"/>
-                      <a:round/>
-                      <a:headEnd type="none" w="med" len="med"/>
-                      <a:tailEnd type="none" w="med" len="med"/>
-                    </a:lnB>
-                  </a:tcPr>
-                </a:tc>
-                <a:tc>
-                  <a:txBody>
-                    <a:bodyPr/>
-                    <a:lstStyle/>
-                    <a:p>
-                      <a:pPr algn="r" indent="0" marL="0">
-                        <a:buNone/>
-                      </a:pPr>
-                      <a:r>
-                        <a:rPr lang="en-US" sz="950" b="1" dirty="0">
-                          <a:solidFill>
-                            <a:srgbClr val="B3261E"/>
-                          </a:solidFill>
-                          <a:latin typeface="Calibri" pitchFamily="34" charset="0"/>
-                          <a:ea typeface="Calibri" pitchFamily="34" charset="-122"/>
-                          <a:cs typeface="Calibri" pitchFamily="34" charset="-120"/>
-                        </a:rPr>
-                        <a:t>601,4</a:t>
-                      </a:r>
-                      <a:endParaRPr lang="en-US" sz="950" dirty="0">
-                        <a:latin typeface="Calibri" charset="0"/>
-                        <a:ea typeface="Calibri" charset="0"/>
-                        <a:cs typeface="Calibri" charset="0"/>
-                      </a:endParaRPr>
-                    </a:p>
-                  </a:txBody>
-                  <a:tcPr marL="64008" marR="64008" marT="0" marB="0" anchor="ctr">
-                    <a:lnL w="6350" cap="flat" cmpd="sng" algn="ctr">
-                      <a:solidFill>
-                        <a:srgbClr val="D5DBE3"/>
-                      </a:solidFill>
-                      <a:prstDash val="solid"/>
-                      <a:round/>
-                      <a:headEnd type="none" w="med" len="med"/>
-                      <a:tailEnd type="none" w="med" len="med"/>
-                    </a:lnL>
-                    <a:lnR w="6350" cap="flat" cmpd="sng" algn="ctr">
-                      <a:solidFill>
-                        <a:srgbClr val="D5DBE3"/>
-                      </a:solidFill>
-                      <a:prstDash val="solid"/>
-                      <a:round/>
-                      <a:headEnd type="none" w="med" len="med"/>
-                      <a:tailEnd type="none" w="med" len="med"/>
-                    </a:lnR>
-                    <a:lnT w="6350" cap="flat" cmpd="sng" algn="ctr">
-                      <a:solidFill>
-                        <a:srgbClr val="D5DBE3"/>
-                      </a:solidFill>
-                      <a:prstDash val="solid"/>
-                      <a:round/>
-                      <a:headEnd type="none" w="med" len="med"/>
-                      <a:tailEnd type="none" w="med" len="med"/>
-                    </a:lnT>
-                    <a:lnB w="6350" cap="flat" cmpd="sng" algn="ctr">
-                      <a:solidFill>
-                        <a:srgbClr val="D5DBE3"/>
-                      </a:solidFill>
-                      <a:prstDash val="solid"/>
-                      <a:round/>
-                      <a:headEnd type="none" w="med" len="med"/>
-                      <a:tailEnd type="none" w="med" len="med"/>
-                    </a:lnB>
-                    <a:solidFill>
-                      <a:srgbClr val="F7E7E5"/>
-                    </a:solidFill>
-                  </a:tcPr>
-                </a:tc>
-                <a:tc>
-                  <a:txBody>
-                    <a:bodyPr/>
-                    <a:lstStyle/>
-                    <a:p>
-                      <a:pPr algn="l" indent="0" marL="0">
-                        <a:buNone/>
-                      </a:pPr>
-                      <a:r>
-                        <a:rPr lang="en-US" sz="950" dirty="0">
-                          <a:solidFill>
-                            <a:srgbClr val="1F2933"/>
-                          </a:solidFill>
-                          <a:latin typeface="Calibri" pitchFamily="34" charset="0"/>
-                          <a:ea typeface="Calibri" pitchFamily="34" charset="-122"/>
-                          <a:cs typeface="Calibri" pitchFamily="34" charset="-120"/>
-                        </a:rPr>
-                        <a:t>Compte à arbitrer (C) ou prêts</a:t>
-                      </a:r>
-                      <a:endParaRPr lang="en-US" sz="950" dirty="0">
-                        <a:latin typeface="Calibri" charset="0"/>
-                        <a:ea typeface="Calibri" charset="0"/>
-                        <a:cs typeface="Calibri" charset="0"/>
-                      </a:endParaRPr>
-                    </a:p>
-                  </a:txBody>
-                  <a:tcPr marL="64008" marR="64008" marT="0" marB="0" anchor="ctr">
-                    <a:lnL w="6350" cap="flat" cmpd="sng" algn="ctr">
-                      <a:solidFill>
-                        <a:srgbClr val="D5DBE3"/>
-                      </a:solidFill>
-                      <a:prstDash val="solid"/>
-                      <a:round/>
-                      <a:headEnd type="none" w="med" len="med"/>
-                      <a:tailEnd type="none" w="med" len="med"/>
-                    </a:lnL>
-                    <a:lnR w="6350" cap="flat" cmpd="sng" algn="ctr">
-                      <a:solidFill>
-                        <a:srgbClr val="D5DBE3"/>
-                      </a:solidFill>
-                      <a:prstDash val="solid"/>
-                      <a:round/>
-                      <a:headEnd type="none" w="med" len="med"/>
-                      <a:tailEnd type="none" w="med" len="med"/>
-                    </a:lnR>
-                    <a:lnT w="6350" cap="flat" cmpd="sng" algn="ctr">
-                      <a:solidFill>
-                        <a:srgbClr val="D5DBE3"/>
-                      </a:solidFill>
-                      <a:prstDash val="solid"/>
-                      <a:round/>
-                      <a:headEnd type="none" w="med" len="med"/>
-                      <a:tailEnd type="none" w="med" len="med"/>
-                    </a:lnT>
-                    <a:lnB w="6350" cap="flat" cmpd="sng" algn="ctr">
-                      <a:solidFill>
-                        <a:srgbClr val="D5DBE3"/>
-                      </a:solidFill>
-                      <a:prstDash val="solid"/>
-                      <a:round/>
-                      <a:headEnd type="none" w="med" len="med"/>
-                      <a:tailEnd type="none" w="med" len="med"/>
-                    </a:lnB>
-                  </a:tcPr>
-                </a:tc>
-                <a:tc>
-                  <a:txBody>
-                    <a:bodyPr/>
-                    <a:lstStyle/>
-                    <a:p>
-                      <a:pPr algn="ctr" indent="0" marL="0">
-                        <a:buNone/>
-                      </a:pPr>
-                      <a:r>
-                        <a:rPr lang="en-US" sz="950" dirty="0">
-                          <a:solidFill>
-                            <a:srgbClr val="1F2933"/>
-                          </a:solidFill>
-                          <a:latin typeface="Calibri" pitchFamily="34" charset="0"/>
-                          <a:ea typeface="Calibri" pitchFamily="34" charset="-122"/>
-                          <a:cs typeface="Calibri" pitchFamily="34" charset="-120"/>
-                        </a:rPr>
-                        <a:t>S2</a:t>
-                      </a:r>
-                      <a:endParaRPr lang="en-US" sz="950" dirty="0">
-                        <a:latin typeface="Calibri" charset="0"/>
-                        <a:ea typeface="Calibri" charset="0"/>
-                        <a:cs typeface="Calibri" charset="0"/>
-                      </a:endParaRPr>
-                    </a:p>
-                  </a:txBody>
-                  <a:tcPr marL="64008" marR="64008" marT="0" marB="0" anchor="ctr">
-                    <a:lnL w="6350" cap="flat" cmpd="sng" algn="ctr">
-                      <a:solidFill>
-                        <a:srgbClr val="D5DBE3"/>
-                      </a:solidFill>
-                      <a:prstDash val="solid"/>
-                      <a:round/>
-                      <a:headEnd type="none" w="med" len="med"/>
-                      <a:tailEnd type="none" w="med" len="med"/>
-                    </a:lnL>
-                    <a:lnR w="6350" cap="flat" cmpd="sng" algn="ctr">
-                      <a:solidFill>
-                        <a:srgbClr val="D5DBE3"/>
-                      </a:solidFill>
-                      <a:prstDash val="solid"/>
-                      <a:round/>
-                      <a:headEnd type="none" w="med" len="med"/>
-                      <a:tailEnd type="none" w="med" len="med"/>
-                    </a:lnR>
-                    <a:lnT w="6350" cap="flat" cmpd="sng" algn="ctr">
-                      <a:solidFill>
-                        <a:srgbClr val="D5DBE3"/>
-                      </a:solidFill>
-                      <a:prstDash val="solid"/>
-                      <a:round/>
-                      <a:headEnd type="none" w="med" len="med"/>
-                      <a:tailEnd type="none" w="med" len="med"/>
-                    </a:lnT>
-                    <a:lnB w="6350" cap="flat" cmpd="sng" algn="ctr">
-                      <a:solidFill>
-                        <a:srgbClr val="D5DBE3"/>
-                      </a:solidFill>
-                      <a:prstDash val="solid"/>
-                      <a:round/>
-                      <a:headEnd type="none" w="med" len="med"/>
-                      <a:tailEnd type="none" w="med" len="med"/>
-                    </a:lnB>
-                  </a:tcPr>
-                </a:tc>
-              </a:tr>
-              <a:tr h="237744">
-                <a:tc>
-                  <a:txBody>
-                    <a:bodyPr/>
-                    <a:lstStyle/>
-                    <a:p>
-                      <a:pPr algn="l" indent="0" marL="0">
-                        <a:buNone/>
-                      </a:pPr>
-                      <a:r>
-                        <a:rPr lang="en-US" sz="950" b="1" dirty="0">
-                          <a:solidFill>
-                            <a:srgbClr val="1F2933"/>
-                          </a:solidFill>
-                          <a:latin typeface="Calibri" pitchFamily="34" charset="0"/>
-                          <a:ea typeface="Calibri" pitchFamily="34" charset="-122"/>
-                          <a:cs typeface="Calibri" pitchFamily="34" charset="-120"/>
-                        </a:rPr>
-                        <a:t>TERASSON – fonds projet</a:t>
-                      </a:r>
-                      <a:endParaRPr lang="en-US" sz="950" dirty="0">
-                        <a:latin typeface="Calibri" charset="0"/>
-                        <a:ea typeface="Calibri" charset="0"/>
-                        <a:cs typeface="Calibri" charset="0"/>
-                      </a:endParaRPr>
-                    </a:p>
-                  </a:txBody>
-                  <a:tcPr marL="64008" marR="64008" marT="0" marB="0" anchor="ctr">
-                    <a:lnL w="6350" cap="flat" cmpd="sng" algn="ctr">
-                      <a:solidFill>
-                        <a:srgbClr val="D5DBE3"/>
-                      </a:solidFill>
-                      <a:prstDash val="solid"/>
-                      <a:round/>
-                      <a:headEnd type="none" w="med" len="med"/>
-                      <a:tailEnd type="none" w="med" len="med"/>
-                    </a:lnL>
-                    <a:lnR w="6350" cap="flat" cmpd="sng" algn="ctr">
-                      <a:solidFill>
-                        <a:srgbClr val="D5DBE3"/>
-                      </a:solidFill>
-                      <a:prstDash val="solid"/>
-                      <a:round/>
-                      <a:headEnd type="none" w="med" len="med"/>
-                      <a:tailEnd type="none" w="med" len="med"/>
-                    </a:lnR>
-                    <a:lnT w="6350" cap="flat" cmpd="sng" algn="ctr">
-                      <a:solidFill>
-                        <a:srgbClr val="D5DBE3"/>
-                      </a:solidFill>
-                      <a:prstDash val="solid"/>
-                      <a:round/>
-                      <a:headEnd type="none" w="med" len="med"/>
-                      <a:tailEnd type="none" w="med" len="med"/>
-                    </a:lnT>
-                    <a:lnB w="6350" cap="flat" cmpd="sng" algn="ctr">
-                      <a:solidFill>
-                        <a:srgbClr val="D5DBE3"/>
-                      </a:solidFill>
-                      <a:prstDash val="solid"/>
-                      <a:round/>
-                      <a:headEnd type="none" w="med" len="med"/>
-                      <a:tailEnd type="none" w="med" len="med"/>
-                    </a:lnB>
-                  </a:tcPr>
-                </a:tc>
-                <a:tc>
-                  <a:txBody>
-                    <a:bodyPr/>
-                    <a:lstStyle/>
-                    <a:p>
-                      <a:pPr algn="r" indent="0" marL="0">
-                        <a:buNone/>
-                      </a:pPr>
-                      <a:r>
-                        <a:rPr lang="en-US" sz="950" b="1" dirty="0">
-                          <a:solidFill>
-                            <a:srgbClr val="B3261E"/>
-                          </a:solidFill>
-                          <a:latin typeface="Calibri" pitchFamily="34" charset="0"/>
-                          <a:ea typeface="Calibri" pitchFamily="34" charset="-122"/>
-                          <a:cs typeface="Calibri" pitchFamily="34" charset="-120"/>
-                        </a:rPr>
-                        <a:t>501,3</a:t>
-                      </a:r>
-                      <a:endParaRPr lang="en-US" sz="950" dirty="0">
-                        <a:latin typeface="Calibri" charset="0"/>
-                        <a:ea typeface="Calibri" charset="0"/>
-                        <a:cs typeface="Calibri" charset="0"/>
-                      </a:endParaRPr>
-                    </a:p>
-                  </a:txBody>
-                  <a:tcPr marL="64008" marR="64008" marT="0" marB="0" anchor="ctr">
-                    <a:lnL w="6350" cap="flat" cmpd="sng" algn="ctr">
-                      <a:solidFill>
-                        <a:srgbClr val="D5DBE3"/>
-                      </a:solidFill>
-                      <a:prstDash val="solid"/>
-                      <a:round/>
-                      <a:headEnd type="none" w="med" len="med"/>
-                      <a:tailEnd type="none" w="med" len="med"/>
-                    </a:lnL>
-                    <a:lnR w="6350" cap="flat" cmpd="sng" algn="ctr">
-                      <a:solidFill>
-                        <a:srgbClr val="D5DBE3"/>
-                      </a:solidFill>
-                      <a:prstDash val="solid"/>
-                      <a:round/>
-                      <a:headEnd type="none" w="med" len="med"/>
-                      <a:tailEnd type="none" w="med" len="med"/>
-                    </a:lnR>
-                    <a:lnT w="6350" cap="flat" cmpd="sng" algn="ctr">
-                      <a:solidFill>
-                        <a:srgbClr val="D5DBE3"/>
-                      </a:solidFill>
-                      <a:prstDash val="solid"/>
-                      <a:round/>
-                      <a:headEnd type="none" w="med" len="med"/>
-                      <a:tailEnd type="none" w="med" len="med"/>
-                    </a:lnT>
-                    <a:lnB w="6350" cap="flat" cmpd="sng" algn="ctr">
-                      <a:solidFill>
-                        <a:srgbClr val="D5DBE3"/>
-                      </a:solidFill>
-                      <a:prstDash val="solid"/>
-                      <a:round/>
-                      <a:headEnd type="none" w="med" len="med"/>
-                      <a:tailEnd type="none" w="med" len="med"/>
-                    </a:lnB>
-                    <a:solidFill>
-                      <a:srgbClr val="F7E7E5"/>
-                    </a:solidFill>
-                  </a:tcPr>
-                </a:tc>
-                <a:tc>
-                  <a:txBody>
-                    <a:bodyPr/>
-                    <a:lstStyle/>
-                    <a:p>
-                      <a:pPr algn="l" indent="0" marL="0">
-                        <a:buNone/>
-                      </a:pPr>
-                      <a:r>
-                        <a:rPr lang="en-US" sz="950" dirty="0">
-                          <a:solidFill>
-                            <a:srgbClr val="1F2933"/>
-                          </a:solidFill>
-                          <a:latin typeface="Calibri" pitchFamily="34" charset="0"/>
-                          <a:ea typeface="Calibri" pitchFamily="34" charset="-122"/>
-                          <a:cs typeface="Calibri" pitchFamily="34" charset="-120"/>
-                        </a:rPr>
-                        <a:t>Compte à arbitrer (C) ou prêts</a:t>
-                      </a:r>
-                      <a:endParaRPr lang="en-US" sz="950" dirty="0">
-                        <a:latin typeface="Calibri" charset="0"/>
-                        <a:ea typeface="Calibri" charset="0"/>
-                        <a:cs typeface="Calibri" charset="0"/>
-                      </a:endParaRPr>
-                    </a:p>
-                  </a:txBody>
-                  <a:tcPr marL="64008" marR="64008" marT="0" marB="0" anchor="ctr">
-                    <a:lnL w="6350" cap="flat" cmpd="sng" algn="ctr">
-                      <a:solidFill>
-                        <a:srgbClr val="D5DBE3"/>
-                      </a:solidFill>
-                      <a:prstDash val="solid"/>
-                      <a:round/>
-                      <a:headEnd type="none" w="med" len="med"/>
-                      <a:tailEnd type="none" w="med" len="med"/>
-                    </a:lnL>
-                    <a:lnR w="6350" cap="flat" cmpd="sng" algn="ctr">
-                      <a:solidFill>
-                        <a:srgbClr val="D5DBE3"/>
-                      </a:solidFill>
-                      <a:prstDash val="solid"/>
-                      <a:round/>
-                      <a:headEnd type="none" w="med" len="med"/>
-                      <a:tailEnd type="none" w="med" len="med"/>
-                    </a:lnR>
-                    <a:lnT w="6350" cap="flat" cmpd="sng" algn="ctr">
-                      <a:solidFill>
-                        <a:srgbClr val="D5DBE3"/>
-                      </a:solidFill>
-                      <a:prstDash val="solid"/>
-                      <a:round/>
-                      <a:headEnd type="none" w="med" len="med"/>
-                      <a:tailEnd type="none" w="med" len="med"/>
-                    </a:lnT>
-                    <a:lnB w="6350" cap="flat" cmpd="sng" algn="ctr">
-                      <a:solidFill>
-                        <a:srgbClr val="D5DBE3"/>
-                      </a:solidFill>
-                      <a:prstDash val="solid"/>
-                      <a:round/>
-                      <a:headEnd type="none" w="med" len="med"/>
-                      <a:tailEnd type="none" w="med" len="med"/>
-                    </a:lnB>
-                  </a:tcPr>
-                </a:tc>
-                <a:tc>
-                  <a:txBody>
-                    <a:bodyPr/>
-                    <a:lstStyle/>
-                    <a:p>
-                      <a:pPr algn="ctr" indent="0" marL="0">
-                        <a:buNone/>
-                      </a:pPr>
-                      <a:r>
-                        <a:rPr lang="en-US" sz="950" dirty="0">
-                          <a:solidFill>
-                            <a:srgbClr val="1F2933"/>
-                          </a:solidFill>
-                          <a:latin typeface="Calibri" pitchFamily="34" charset="0"/>
-                          <a:ea typeface="Calibri" pitchFamily="34" charset="-122"/>
-                          <a:cs typeface="Calibri" pitchFamily="34" charset="-120"/>
-                        </a:rPr>
-                        <a:t>S1</a:t>
-                      </a:r>
-                      <a:endParaRPr lang="en-US" sz="950" dirty="0">
-                        <a:latin typeface="Calibri" charset="0"/>
-                        <a:ea typeface="Calibri" charset="0"/>
-                        <a:cs typeface="Calibri" charset="0"/>
-                      </a:endParaRPr>
-                    </a:p>
-                  </a:txBody>
-                  <a:tcPr marL="64008" marR="64008" marT="0" marB="0" anchor="ctr">
-                    <a:lnL w="6350" cap="flat" cmpd="sng" algn="ctr">
-                      <a:solidFill>
-                        <a:srgbClr val="D5DBE3"/>
-                      </a:solidFill>
-                      <a:prstDash val="solid"/>
-                      <a:round/>
-                      <a:headEnd type="none" w="med" len="med"/>
-                      <a:tailEnd type="none" w="med" len="med"/>
-                    </a:lnL>
-                    <a:lnR w="6350" cap="flat" cmpd="sng" algn="ctr">
-                      <a:solidFill>
-                        <a:srgbClr val="D5DBE3"/>
-                      </a:solidFill>
-                      <a:prstDash val="solid"/>
-                      <a:round/>
-                      <a:headEnd type="none" w="med" len="med"/>
-                      <a:tailEnd type="none" w="med" len="med"/>
-                    </a:lnR>
-                    <a:lnT w="6350" cap="flat" cmpd="sng" algn="ctr">
-                      <a:solidFill>
-                        <a:srgbClr val="D5DBE3"/>
-                      </a:solidFill>
-                      <a:prstDash val="solid"/>
-                      <a:round/>
-                      <a:headEnd type="none" w="med" len="med"/>
-                      <a:tailEnd type="none" w="med" len="med"/>
-                    </a:lnT>
-                    <a:lnB w="6350" cap="flat" cmpd="sng" algn="ctr">
-                      <a:solidFill>
-                        <a:srgbClr val="D5DBE3"/>
-                      </a:solidFill>
-                      <a:prstDash val="solid"/>
-                      <a:round/>
-                      <a:headEnd type="none" w="med" len="med"/>
-                      <a:tailEnd type="none" w="med" len="med"/>
-                    </a:lnB>
-                  </a:tcPr>
-                </a:tc>
-              </a:tr>
-              <a:tr h="237744">
-                <a:tc>
-                  <a:txBody>
-                    <a:bodyPr/>
-                    <a:lstStyle/>
-                    <a:p>
-                      <a:pPr algn="l" indent="0" marL="0">
-                        <a:buNone/>
-                      </a:pPr>
-                      <a:r>
-                        <a:rPr lang="en-US" sz="950" b="1" dirty="0">
-                          <a:solidFill>
-                            <a:srgbClr val="FFFFFF"/>
-                          </a:solidFill>
-                          <a:latin typeface="Calibri" pitchFamily="34" charset="0"/>
-                          <a:ea typeface="Calibri" pitchFamily="34" charset="-122"/>
-                          <a:cs typeface="Calibri" pitchFamily="34" charset="-120"/>
-                        </a:rPr>
-                        <a:t>Total</a:t>
-                      </a:r>
-                      <a:endParaRPr lang="en-US" sz="950" dirty="0">
-                        <a:latin typeface="Calibri" charset="0"/>
-                        <a:ea typeface="Calibri" charset="0"/>
-                        <a:cs typeface="Calibri" charset="0"/>
-                      </a:endParaRPr>
-                    </a:p>
-                  </a:txBody>
-                  <a:tcPr marL="64008" marR="64008" marT="0" marB="0" anchor="ctr">
-                    <a:lnL w="6350" cap="flat" cmpd="sng" algn="ctr">
-                      <a:solidFill>
-                        <a:srgbClr val="D5DBE3"/>
-                      </a:solidFill>
-                      <a:prstDash val="solid"/>
-                      <a:round/>
-                      <a:headEnd type="none" w="med" len="med"/>
-                      <a:tailEnd type="none" w="med" len="med"/>
-                    </a:lnL>
-                    <a:lnR w="6350" cap="flat" cmpd="sng" algn="ctr">
-                      <a:solidFill>
-                        <a:srgbClr val="D5DBE3"/>
-                      </a:solidFill>
-                      <a:prstDash val="solid"/>
-                      <a:round/>
-                      <a:headEnd type="none" w="med" len="med"/>
-                      <a:tailEnd type="none" w="med" len="med"/>
-                    </a:lnR>
-                    <a:lnT w="6350" cap="flat" cmpd="sng" algn="ctr">
-                      <a:solidFill>
-                        <a:srgbClr val="D5DBE3"/>
-                      </a:solidFill>
-                      <a:prstDash val="solid"/>
-                      <a:round/>
-                      <a:headEnd type="none" w="med" len="med"/>
-                      <a:tailEnd type="none" w="med" len="med"/>
-                    </a:lnT>
-                    <a:lnB w="6350" cap="flat" cmpd="sng" algn="ctr">
-                      <a:solidFill>
-                        <a:srgbClr val="D5DBE3"/>
-                      </a:solidFill>
-                      <a:prstDash val="solid"/>
-                      <a:round/>
-                      <a:headEnd type="none" w="med" len="med"/>
-                      <a:tailEnd type="none" w="med" len="med"/>
-                    </a:lnB>
-                    <a:solidFill>
-                      <a:srgbClr val="002C50"/>
-                    </a:solidFill>
-                  </a:tcPr>
-                </a:tc>
-                <a:tc>
-                  <a:txBody>
-                    <a:bodyPr/>
-                    <a:lstStyle/>
-                    <a:p>
-                      <a:pPr algn="r" indent="0" marL="0">
-                        <a:buNone/>
-                      </a:pPr>
-                      <a:r>
-                        <a:rPr lang="en-US" sz="950" b="1" dirty="0">
-                          <a:solidFill>
-                            <a:srgbClr val="FFFFFF"/>
-                          </a:solidFill>
-                          <a:latin typeface="Calibri" pitchFamily="34" charset="0"/>
-                          <a:ea typeface="Calibri" pitchFamily="34" charset="-122"/>
-                          <a:cs typeface="Calibri" pitchFamily="34" charset="-120"/>
-                        </a:rPr>
-                        <a:t>1 925,7</a:t>
-                      </a:r>
-                      <a:endParaRPr lang="en-US" sz="950" dirty="0">
-                        <a:latin typeface="Calibri" charset="0"/>
-                        <a:ea typeface="Calibri" charset="0"/>
-                        <a:cs typeface="Calibri" charset="0"/>
-                      </a:endParaRPr>
-                    </a:p>
-                  </a:txBody>
-                  <a:tcPr marL="64008" marR="64008" marT="0" marB="0" anchor="ctr">
-                    <a:lnL w="6350" cap="flat" cmpd="sng" algn="ctr">
-                      <a:solidFill>
-                        <a:srgbClr val="D5DBE3"/>
-                      </a:solidFill>
-                      <a:prstDash val="solid"/>
-                      <a:round/>
-                      <a:headEnd type="none" w="med" len="med"/>
-                      <a:tailEnd type="none" w="med" len="med"/>
-                    </a:lnL>
-                    <a:lnR w="6350" cap="flat" cmpd="sng" algn="ctr">
-                      <a:solidFill>
-                        <a:srgbClr val="D5DBE3"/>
-                      </a:solidFill>
-                      <a:prstDash val="solid"/>
-                      <a:round/>
-                      <a:headEnd type="none" w="med" len="med"/>
-                      <a:tailEnd type="none" w="med" len="med"/>
-                    </a:lnR>
-                    <a:lnT w="6350" cap="flat" cmpd="sng" algn="ctr">
-                      <a:solidFill>
-                        <a:srgbClr val="D5DBE3"/>
-                      </a:solidFill>
-                      <a:prstDash val="solid"/>
-                      <a:round/>
-                      <a:headEnd type="none" w="med" len="med"/>
-                      <a:tailEnd type="none" w="med" len="med"/>
-                    </a:lnT>
-                    <a:lnB w="6350" cap="flat" cmpd="sng" algn="ctr">
-                      <a:solidFill>
-                        <a:srgbClr val="D5DBE3"/>
-                      </a:solidFill>
-                      <a:prstDash val="solid"/>
-                      <a:round/>
-                      <a:headEnd type="none" w="med" len="med"/>
-                      <a:tailEnd type="none" w="med" len="med"/>
-                    </a:lnB>
-                    <a:solidFill>
-                      <a:srgbClr val="002C50"/>
-                    </a:solidFill>
-                  </a:tcPr>
-                </a:tc>
-                <a:tc>
-                  <a:txBody>
-                    <a:bodyPr/>
-                    <a:lstStyle/>
-                    <a:p>
-                      <a:pPr algn="l" indent="0" marL="0">
-                        <a:buNone/>
-                      </a:pPr>
-                      <a:endParaRPr lang="en-US" sz="950" dirty="0">
-                        <a:latin typeface="Calibri" charset="0"/>
-                        <a:ea typeface="Calibri" charset="0"/>
-                        <a:cs typeface="Calibri" charset="0"/>
-                      </a:endParaRPr>
-                    </a:p>
-                  </a:txBody>
-                  <a:tcPr marL="64008" marR="64008" marT="0" marB="0" anchor="ctr">
-                    <a:lnL w="6350" cap="flat" cmpd="sng" algn="ctr">
-                      <a:solidFill>
-                        <a:srgbClr val="D5DBE3"/>
-                      </a:solidFill>
-                      <a:prstDash val="solid"/>
-                      <a:round/>
-                      <a:headEnd type="none" w="med" len="med"/>
-                      <a:tailEnd type="none" w="med" len="med"/>
-                    </a:lnL>
-                    <a:lnR w="6350" cap="flat" cmpd="sng" algn="ctr">
-                      <a:solidFill>
-                        <a:srgbClr val="D5DBE3"/>
-                      </a:solidFill>
-                      <a:prstDash val="solid"/>
-                      <a:round/>
-                      <a:headEnd type="none" w="med" len="med"/>
-                      <a:tailEnd type="none" w="med" len="med"/>
-                    </a:lnR>
-                    <a:lnT w="6350" cap="flat" cmpd="sng" algn="ctr">
-                      <a:solidFill>
-                        <a:srgbClr val="D5DBE3"/>
-                      </a:solidFill>
-                      <a:prstDash val="solid"/>
-                      <a:round/>
-                      <a:headEnd type="none" w="med" len="med"/>
-                      <a:tailEnd type="none" w="med" len="med"/>
-                    </a:lnT>
-                    <a:lnB w="6350" cap="flat" cmpd="sng" algn="ctr">
-                      <a:solidFill>
-                        <a:srgbClr val="D5DBE3"/>
-                      </a:solidFill>
-                      <a:prstDash val="solid"/>
-                      <a:round/>
-                      <a:headEnd type="none" w="med" len="med"/>
-                      <a:tailEnd type="none" w="med" len="med"/>
-                    </a:lnB>
-                    <a:solidFill>
-                      <a:srgbClr val="002C50"/>
-                    </a:solidFill>
-                  </a:tcPr>
-                </a:tc>
-                <a:tc>
-                  <a:txBody>
-                    <a:bodyPr/>
-                    <a:lstStyle/>
-                    <a:p>
-                      <a:pPr algn="r" indent="0" marL="0">
-                        <a:buNone/>
-                      </a:pPr>
-                      <a:endParaRPr lang="en-US" sz="950" dirty="0">
-                        <a:latin typeface="Calibri" charset="0"/>
-                        <a:ea typeface="Calibri" charset="0"/>
-                        <a:cs typeface="Calibri" charset="0"/>
-                      </a:endParaRPr>
-                    </a:p>
-                  </a:txBody>
-                  <a:tcPr marL="64008" marR="64008" marT="0" marB="0" anchor="ctr">
-                    <a:lnL w="6350" cap="flat" cmpd="sng" algn="ctr">
-                      <a:solidFill>
-                        <a:srgbClr val="D5DBE3"/>
-                      </a:solidFill>
-                      <a:prstDash val="solid"/>
-                      <a:round/>
-                      <a:headEnd type="none" w="med" len="med"/>
-                      <a:tailEnd type="none" w="med" len="med"/>
-                    </a:lnL>
-                    <a:lnR w="6350" cap="flat" cmpd="sng" algn="ctr">
-                      <a:solidFill>
-                        <a:srgbClr val="D5DBE3"/>
-                      </a:solidFill>
-                      <a:prstDash val="solid"/>
-                      <a:round/>
-                      <a:headEnd type="none" w="med" len="med"/>
-                      <a:tailEnd type="none" w="med" len="med"/>
-                    </a:lnR>
-                    <a:lnT w="6350" cap="flat" cmpd="sng" algn="ctr">
-                      <a:solidFill>
-                        <a:srgbClr val="D5DBE3"/>
-                      </a:solidFill>
-                      <a:prstDash val="solid"/>
-                      <a:round/>
-                      <a:headEnd type="none" w="med" len="med"/>
-                      <a:tailEnd type="none" w="med" len="med"/>
-                    </a:lnT>
-                    <a:lnB w="6350" cap="flat" cmpd="sng" algn="ctr">
-                      <a:solidFill>
-                        <a:srgbClr val="D5DBE3"/>
-                      </a:solidFill>
-                      <a:prstDash val="solid"/>
-                      <a:round/>
-                      <a:headEnd type="none" w="med" len="med"/>
-                      <a:tailEnd type="none" w="med" len="med"/>
-                    </a:lnB>
-                    <a:solidFill>
-                      <a:srgbClr val="002C50"/>
-                    </a:solidFill>
-                  </a:tcPr>
-                </a:tc>
-              </a:tr>
-            </a:tbl>
-          </a:graphicData>
-        </a:graphic>
-      </p:graphicFrame>
-      <p:sp>
-        <p:nvSpPr>
-          <p:cNvPr id="5" name="Shape 2"/>
-          <p:cNvSpPr/>
-          <p:nvPr/>
-        </p:nvSpPr>
-        <p:spPr>
-          <a:xfrm>
-            <a:off x="6446520" y="1325880"/>
-            <a:ext cx="5285232" cy="1508760"/>
-          </a:xfrm>
-          <a:prstGeom prst="rect">
-            <a:avLst/>
-          </a:prstGeom>
-          <a:solidFill>
-            <a:srgbClr val="E6F0EA"/>
-          </a:solidFill>
-          <a:ln w="12700">
-            <a:solidFill>
-              <a:srgbClr val="E6F0EA"/>
-            </a:solidFill>
-            <a:prstDash val="solid"/>
-          </a:ln>
-        </p:spPr>
-      </p:sp>
-      <p:sp>
-        <p:nvSpPr>
-          <p:cNvPr id="6" name="Text 3"/>
-          <p:cNvSpPr txBox="1"/>
-          <p:nvPr/>
-        </p:nvSpPr>
-        <p:spPr>
-          <a:xfrm>
-            <a:off x="6629400" y="1417320"/>
-            <a:ext cx="3566160" cy="292608"/>
-          </a:xfrm>
-          <a:prstGeom prst="rect">
-            <a:avLst/>
-          </a:prstGeom>
-          <a:noFill/>
-          <a:ln/>
-        </p:spPr>
-        <p:txBody>
-          <a:bodyPr wrap="square" lIns="0" tIns="0" rIns="0" bIns="0" rtlCol="0" anchor="ctr"/>
-          <a:lstStyle/>
-          <a:p>
-            <a:pPr indent="0" marL="0">
-              <a:buNone/>
-            </a:pPr>
-            <a:r>
-              <a:rPr lang="en-US" sz="1200" b="1" dirty="0">
-                <a:solidFill>
-                  <a:srgbClr val="5E9B7E"/>
-                </a:solidFill>
-                <a:latin typeface="Calibri" pitchFamily="34" charset="0"/>
-                <a:ea typeface="Calibri" pitchFamily="34" charset="-122"/>
-                <a:cs typeface="Calibri" pitchFamily="34" charset="-120"/>
-              </a:rPr>
-              <a:t>A – Crédit spot bancaire, par société</a:t>
-            </a:r>
-            <a:endParaRPr lang="en-US" sz="1200" dirty="0"/>
-          </a:p>
-        </p:txBody>
-      </p:sp>
-      <p:sp>
-        <p:nvSpPr>
-          <p:cNvPr id="7" name="Text 4"/>
-          <p:cNvSpPr txBox="1"/>
-          <p:nvPr/>
-        </p:nvSpPr>
-        <p:spPr>
-          <a:xfrm>
-            <a:off x="10058400" y="1399032"/>
-            <a:ext cx="1508760" cy="329184"/>
-          </a:xfrm>
-          <a:prstGeom prst="rect">
-            <a:avLst/>
-          </a:prstGeom>
-          <a:noFill/>
-          <a:ln/>
-        </p:spPr>
-        <p:txBody>
-          <a:bodyPr wrap="square" lIns="0" tIns="0" rIns="0" bIns="0" rtlCol="0" anchor="ctr"/>
-          <a:lstStyle/>
-          <a:p>
-            <a:pPr algn="r" indent="0" marL="0">
-              <a:buNone/>
-            </a:pPr>
-            <a:r>
-              <a:rPr lang="en-US" sz="1400" b="1" dirty="0">
-                <a:solidFill>
-                  <a:srgbClr val="5E9B7E"/>
-                </a:solidFill>
-                <a:latin typeface="Calibri" pitchFamily="34" charset="0"/>
-                <a:ea typeface="Calibri" pitchFamily="34" charset="-122"/>
-                <a:cs typeface="Calibri" pitchFamily="34" charset="-120"/>
-              </a:rPr>
-              <a:t>823,1 M</a:t>
-            </a:r>
-            <a:endParaRPr lang="en-US" sz="1400" dirty="0"/>
-          </a:p>
-        </p:txBody>
-      </p:sp>
-      <p:sp>
-        <p:nvSpPr>
-          <p:cNvPr id="8" name="Text 5"/>
-          <p:cNvSpPr txBox="1"/>
-          <p:nvPr/>
-        </p:nvSpPr>
-        <p:spPr>
-          <a:xfrm>
-            <a:off x="6629400" y="1764792"/>
-            <a:ext cx="4937760" cy="978408"/>
-          </a:xfrm>
-          <a:prstGeom prst="rect">
-            <a:avLst/>
-          </a:prstGeom>
-          <a:noFill/>
-          <a:ln/>
-        </p:spPr>
-        <p:txBody>
-          <a:bodyPr wrap="square" lIns="0" tIns="0" rIns="0" bIns="0" rtlCol="0" anchor="t"/>
-          <a:lstStyle/>
-          <a:p>
-            <a:pPr indent="0" marL="0">
-              <a:buNone/>
-            </a:pPr>
-            <a:r>
-              <a:rPr lang="en-US" sz="1100" dirty="0">
-                <a:solidFill>
-                  <a:srgbClr val="1F2933"/>
-                </a:solidFill>
-                <a:latin typeface="Calibri" pitchFamily="34" charset="0"/>
-                <a:ea typeface="Calibri" pitchFamily="34" charset="-122"/>
-                <a:cs typeface="Calibri" pitchFamily="34" charset="-120"/>
-              </a:rPr>
-              <a:t>Un dossier par société en déficit (9), tiré par tranche : 685,8 M pour S1, le solde à l'échéance. Remboursement à la mise en place des financements.</a:t>
-            </a:r>
-            <a:endParaRPr lang="en-US" sz="1100" dirty="0"/>
-          </a:p>
-        </p:txBody>
-      </p:sp>
-      <p:sp>
-        <p:nvSpPr>
-          <p:cNvPr id="9" name="Shape 6"/>
-          <p:cNvSpPr/>
-          <p:nvPr/>
-        </p:nvSpPr>
-        <p:spPr>
-          <a:xfrm>
-            <a:off x="6446520" y="2971800"/>
-            <a:ext cx="5285232" cy="1463040"/>
-          </a:xfrm>
-          <a:prstGeom prst="rect">
-            <a:avLst/>
-          </a:prstGeom>
-          <a:solidFill>
-            <a:srgbClr val="EEF2F6"/>
-          </a:solidFill>
-          <a:ln w="12700">
-            <a:solidFill>
-              <a:srgbClr val="EEF2F6"/>
-            </a:solidFill>
-            <a:prstDash val="solid"/>
-          </a:ln>
-        </p:spPr>
-      </p:sp>
-      <p:sp>
-        <p:nvSpPr>
-          <p:cNvPr id="10" name="Text 7"/>
-          <p:cNvSpPr txBox="1"/>
-          <p:nvPr/>
-        </p:nvSpPr>
-        <p:spPr>
-          <a:xfrm>
-            <a:off x="6629400" y="3063240"/>
-            <a:ext cx="3566160" cy="292608"/>
-          </a:xfrm>
-          <a:prstGeom prst="rect">
-            <a:avLst/>
-          </a:prstGeom>
-          <a:noFill/>
-          <a:ln/>
-        </p:spPr>
-        <p:txBody>
-          <a:bodyPr wrap="square" lIns="0" tIns="0" rIns="0" bIns="0" rtlCol="0" anchor="ctr"/>
-          <a:lstStyle/>
-          <a:p>
-            <a:pPr indent="0" marL="0">
-              <a:buNone/>
-            </a:pPr>
-            <a:r>
-              <a:rPr lang="en-US" sz="1200" b="1" dirty="0">
-                <a:solidFill>
-                  <a:srgbClr val="002C50"/>
-                </a:solidFill>
-                <a:latin typeface="Calibri" pitchFamily="34" charset="0"/>
-                <a:ea typeface="Calibri" pitchFamily="34" charset="-122"/>
-                <a:cs typeface="Calibri" pitchFamily="34" charset="-120"/>
-              </a:rPr>
-              <a:t>B – Avances intragroupe</a:t>
-            </a:r>
-            <a:endParaRPr lang="en-US" sz="1200" dirty="0"/>
-          </a:p>
-        </p:txBody>
-      </p:sp>
-      <p:sp>
-        <p:nvSpPr>
-          <p:cNvPr id="11" name="Text 8"/>
-          <p:cNvSpPr txBox="1"/>
-          <p:nvPr/>
-        </p:nvSpPr>
-        <p:spPr>
-          <a:xfrm>
-            <a:off x="10058400" y="3044952"/>
-            <a:ext cx="1508760" cy="329184"/>
-          </a:xfrm>
-          <a:prstGeom prst="rect">
-            <a:avLst/>
-          </a:prstGeom>
-          <a:noFill/>
-          <a:ln/>
-        </p:spPr>
-        <p:txBody>
-          <a:bodyPr wrap="square" lIns="0" tIns="0" rIns="0" bIns="0" rtlCol="0" anchor="ctr"/>
-          <a:lstStyle/>
-          <a:p>
-            <a:pPr algn="r" indent="0" marL="0">
-              <a:buNone/>
-            </a:pPr>
-            <a:r>
-              <a:rPr lang="en-US" sz="1400" b="1" dirty="0">
-                <a:solidFill>
-                  <a:srgbClr val="002C50"/>
-                </a:solidFill>
-                <a:latin typeface="Calibri" pitchFamily="34" charset="0"/>
-                <a:ea typeface="Calibri" pitchFamily="34" charset="-122"/>
-                <a:cs typeface="Calibri" pitchFamily="34" charset="-120"/>
-              </a:rPr>
-              <a:t>102,7 M</a:t>
-            </a:r>
-            <a:endParaRPr lang="en-US" sz="1400" dirty="0"/>
-          </a:p>
-        </p:txBody>
-      </p:sp>
-      <p:sp>
-        <p:nvSpPr>
-          <p:cNvPr id="12" name="Text 9"/>
-          <p:cNvSpPr txBox="1"/>
-          <p:nvPr/>
-        </p:nvSpPr>
-        <p:spPr>
-          <a:xfrm>
-            <a:off x="6629400" y="3410712"/>
-            <a:ext cx="4937760" cy="932688"/>
-          </a:xfrm>
-          <a:prstGeom prst="rect">
-            <a:avLst/>
-          </a:prstGeom>
-          <a:noFill/>
-          <a:ln/>
-        </p:spPr>
-        <p:txBody>
-          <a:bodyPr wrap="square" lIns="0" tIns="0" rIns="0" bIns="0" rtlCol="0" anchor="t"/>
-          <a:lstStyle/>
-          <a:p>
-            <a:pPr indent="0" marL="0">
-              <a:buNone/>
-            </a:pPr>
-            <a:r>
-              <a:rPr lang="en-US" sz="1100" dirty="0">
-                <a:solidFill>
-                  <a:srgbClr val="1F2933"/>
-                </a:solidFill>
-                <a:latin typeface="Calibri" pitchFamily="34" charset="0"/>
-                <a:ea typeface="Calibri" pitchFamily="34" charset="-122"/>
-                <a:cs typeface="Calibri" pitchFamily="34" charset="-120"/>
-              </a:rPr>
-              <a:t>Excédents en fin S5 : PICI 100,0 M, INFI SOFT 2,8 M. Ils couvriraient 12 % des déficits des sociétés, avec conventions de compte courant.</a:t>
-            </a:r>
-            <a:endParaRPr lang="en-US" sz="1100" dirty="0"/>
-          </a:p>
-        </p:txBody>
-      </p:sp>
-      <p:sp>
-        <p:nvSpPr>
-          <p:cNvPr id="13" name="Shape 10"/>
-          <p:cNvSpPr/>
-          <p:nvPr/>
-        </p:nvSpPr>
-        <p:spPr>
-          <a:xfrm>
-            <a:off x="6446520" y="4572000"/>
-            <a:ext cx="5285232" cy="1691640"/>
-          </a:xfrm>
-          <a:prstGeom prst="rect">
-            <a:avLst/>
-          </a:prstGeom>
-          <a:solidFill>
-            <a:srgbClr val="EEF2F6"/>
-          </a:solidFill>
-          <a:ln w="12700">
-            <a:solidFill>
-              <a:srgbClr val="EEF2F6"/>
-            </a:solidFill>
-            <a:prstDash val="solid"/>
-          </a:ln>
-        </p:spPr>
-      </p:sp>
-      <p:sp>
-        <p:nvSpPr>
-          <p:cNvPr id="14" name="Text 11"/>
-          <p:cNvSpPr txBox="1"/>
-          <p:nvPr/>
-        </p:nvSpPr>
-        <p:spPr>
-          <a:xfrm>
-            <a:off x="6629400" y="4663440"/>
-            <a:ext cx="3566160" cy="292608"/>
-          </a:xfrm>
-          <a:prstGeom prst="rect">
-            <a:avLst/>
-          </a:prstGeom>
-          <a:noFill/>
-          <a:ln/>
-        </p:spPr>
-        <p:txBody>
-          <a:bodyPr wrap="square" lIns="0" tIns="0" rIns="0" bIns="0" rtlCol="0" anchor="ctr"/>
-          <a:lstStyle/>
-          <a:p>
-            <a:pPr indent="0" marL="0">
-              <a:buNone/>
-            </a:pPr>
-            <a:r>
-              <a:rPr lang="en-US" sz="1200" b="1" dirty="0">
-                <a:solidFill>
-                  <a:srgbClr val="002C50"/>
-                </a:solidFill>
-                <a:latin typeface="Calibri" pitchFamily="34" charset="0"/>
-                <a:ea typeface="Calibri" pitchFamily="34" charset="-122"/>
-                <a:cs typeface="Calibri" pitchFamily="34" charset="-120"/>
-              </a:rPr>
-              <a:t>C – Projets</a:t>
-            </a:r>
-            <a:endParaRPr lang="en-US" sz="1200" dirty="0"/>
-          </a:p>
-        </p:txBody>
-      </p:sp>
-      <p:sp>
-        <p:nvSpPr>
-          <p:cNvPr id="15" name="Text 12"/>
-          <p:cNvSpPr txBox="1"/>
-          <p:nvPr/>
-        </p:nvSpPr>
-        <p:spPr>
-          <a:xfrm>
-            <a:off x="10058400" y="4645152"/>
-            <a:ext cx="1508760" cy="329184"/>
-          </a:xfrm>
-          <a:prstGeom prst="rect">
-            <a:avLst/>
-          </a:prstGeom>
-          <a:noFill/>
-          <a:ln/>
-        </p:spPr>
-        <p:txBody>
-          <a:bodyPr wrap="square" lIns="0" tIns="0" rIns="0" bIns="0" rtlCol="0" anchor="ctr"/>
-          <a:lstStyle/>
-          <a:p>
-            <a:pPr algn="r" indent="0" marL="0">
-              <a:buNone/>
-            </a:pPr>
-            <a:r>
-              <a:rPr lang="en-US" sz="1400" b="1" dirty="0">
-                <a:solidFill>
-                  <a:srgbClr val="002C50"/>
-                </a:solidFill>
-                <a:latin typeface="Calibri" pitchFamily="34" charset="0"/>
-                <a:ea typeface="Calibri" pitchFamily="34" charset="-122"/>
-                <a:cs typeface="Calibri" pitchFamily="34" charset="-120"/>
-              </a:rPr>
-              <a:t>1 102,6 M</a:t>
-            </a:r>
-            <a:endParaRPr lang="en-US" sz="1400" dirty="0"/>
-          </a:p>
-        </p:txBody>
-      </p:sp>
-      <p:sp>
-        <p:nvSpPr>
-          <p:cNvPr id="16" name="Text 13"/>
-          <p:cNvSpPr txBox="1"/>
-          <p:nvPr/>
-        </p:nvSpPr>
-        <p:spPr>
-          <a:xfrm>
-            <a:off x="6629400" y="5010912"/>
-            <a:ext cx="4937760" cy="1161288"/>
-          </a:xfrm>
-          <a:prstGeom prst="rect">
-            <a:avLst/>
-          </a:prstGeom>
-          <a:noFill/>
-          <a:ln/>
-        </p:spPr>
-        <p:txBody>
-          <a:bodyPr wrap="square" lIns="0" tIns="0" rIns="0" bIns="0" rtlCol="0" anchor="t"/>
-          <a:lstStyle/>
-          <a:p>
-            <a:pPr indent="0" marL="0">
-              <a:buNone/>
-            </a:pPr>
-            <a:r>
-              <a:rPr lang="en-US" sz="1100" dirty="0">
-                <a:solidFill>
-                  <a:srgbClr val="1F2933"/>
-                </a:solidFill>
-                <a:latin typeface="Calibri" pitchFamily="34" charset="0"/>
-                <a:ea typeface="Calibri" pitchFamily="34" charset="-122"/>
-                <a:cs typeface="Calibri" pitchFamily="34" charset="-120"/>
-              </a:rPr>
-              <a:t>Comptes à arbitrer : BNI-RIVIERA(Courant) 1 772,0 M ; affectés aux projets, ils couvriraient 100 % du déficit. À défaut : tirage des prêts des projets ou apport des actionnaires.</a:t>
-            </a:r>
-            <a:endParaRPr lang="en-US" sz="1100" dirty="0"/>
-          </a:p>
-        </p:txBody>
-      </p:sp>
-      <p:sp>
-        <p:nvSpPr>
-          <p:cNvPr id="17" name="Shape 14"/>
-          <p:cNvSpPr/>
-          <p:nvPr/>
-        </p:nvSpPr>
-        <p:spPr>
-          <a:xfrm>
-            <a:off x="457200" y="4850892"/>
-            <a:ext cx="5760720" cy="1458468"/>
-          </a:xfrm>
-          <a:prstGeom prst="rect">
-            <a:avLst/>
-          </a:prstGeom>
-          <a:solidFill>
-            <a:srgbClr val="002C50"/>
-          </a:solidFill>
-          <a:ln w="12700">
-            <a:solidFill>
-              <a:srgbClr val="002C50"/>
-            </a:solidFill>
-            <a:prstDash val="solid"/>
-          </a:ln>
-        </p:spPr>
-      </p:sp>
-      <p:sp>
-        <p:nvSpPr>
-          <p:cNvPr id="18" name="Text 15"/>
-          <p:cNvSpPr txBox="1"/>
-          <p:nvPr/>
-        </p:nvSpPr>
-        <p:spPr>
-          <a:xfrm>
-            <a:off x="640080" y="4942332"/>
-            <a:ext cx="5394960" cy="1293876"/>
-          </a:xfrm>
-          <a:prstGeom prst="rect">
-            <a:avLst/>
-          </a:prstGeom>
-          <a:noFill/>
-          <a:ln/>
-        </p:spPr>
-        <p:txBody>
-          <a:bodyPr wrap="square" lIns="0" tIns="0" rIns="0" bIns="0" rtlCol="0" anchor="t"/>
-          <a:lstStyle/>
-          <a:p>
-            <a:pPr indent="0" marL="0">
-              <a:spcAft>
-                <a:spcPts val="600"/>
-              </a:spcAft>
-              <a:buNone/>
-            </a:pPr>
-            <a:r>
-              <a:rPr lang="en-US" sz="1300" b="1" dirty="0">
-                <a:solidFill>
-                  <a:srgbClr val="D4B483"/>
-                </a:solidFill>
-                <a:latin typeface="Calibri" pitchFamily="34" charset="0"/>
-                <a:ea typeface="Calibri" pitchFamily="34" charset="-122"/>
-                <a:cs typeface="Calibri" pitchFamily="34" charset="-120"/>
-              </a:rPr>
-              <a:t>Décisions attendues</a:t>
-            </a:r>
-            <a:endParaRPr lang="en-US" sz="1300" dirty="0"/>
-          </a:p>
-          <a:p>
-            <a:pPr marL="152400" indent="-152400">
-              <a:spcAft>
-                <a:spcPts val="300"/>
-              </a:spcAft>
-              <a:buSzPct val="100000"/>
-              <a:buChar char="•"/>
-            </a:pPr>
-            <a:r>
-              <a:rPr lang="en-US" sz="900" dirty="0">
-                <a:solidFill>
-                  <a:srgbClr val="FFFFFF"/>
-                </a:solidFill>
-                <a:latin typeface="Calibri" pitchFamily="34" charset="0"/>
-                <a:ea typeface="Calibri" pitchFamily="34" charset="-122"/>
-                <a:cs typeface="Calibri" pitchFamily="34" charset="-120"/>
-              </a:rPr>
-              <a:t>Choisir la solution des sociétés en déficit (823,1 M) : crédit spot, avances intragroupe ou combinaison.</a:t>
-            </a:r>
-            <a:endParaRPr lang="en-US" sz="1300" dirty="0"/>
-          </a:p>
-          <a:p>
-            <a:pPr marL="152400" indent="-152400">
-              <a:spcAft>
-                <a:spcPts val="300"/>
-              </a:spcAft>
-              <a:buSzPct val="100000"/>
-              <a:buChar char="•"/>
-            </a:pPr>
-            <a:r>
-              <a:rPr lang="en-US" sz="900" dirty="0">
-                <a:solidFill>
-                  <a:srgbClr val="FFFFFF"/>
-                </a:solidFill>
-                <a:latin typeface="Calibri" pitchFamily="34" charset="0"/>
-                <a:ea typeface="Calibri" pitchFamily="34" charset="-122"/>
-                <a:cs typeface="Calibri" pitchFamily="34" charset="-120"/>
-              </a:rPr>
-              <a:t>Trancher l'affectation de BNI-RIVIERA(Courant) (1 772,0 M) : elle conditionne l'option C.</a:t>
-            </a:r>
-            <a:endParaRPr lang="en-US" sz="1300" dirty="0"/>
-          </a:p>
-          <a:p>
-            <a:pPr marL="152400" indent="-152400">
-              <a:spcAft>
-                <a:spcPts val="300"/>
-              </a:spcAft>
-              <a:buSzPct val="100000"/>
-              <a:buChar char="•"/>
-            </a:pPr>
-            <a:r>
-              <a:rPr lang="en-US" sz="900" dirty="0">
-                <a:solidFill>
-                  <a:srgbClr val="FFFFFF"/>
-                </a:solidFill>
-                <a:latin typeface="Calibri" pitchFamily="34" charset="0"/>
-                <a:ea typeface="Calibri" pitchFamily="34" charset="-122"/>
-                <a:cs typeface="Calibri" pitchFamily="34" charset="-120"/>
-              </a:rPr>
-              <a:t>Confirmer les encaissements prévus (248,9 M), dont SUD CONSTRUCTION – BCEAO (En attente … relance à effectuer).</a:t>
-            </a:r>
-            <a:endParaRPr lang="en-US" sz="1300" dirty="0"/>
-          </a:p>
-          <a:p>
-            <a:pPr marL="152400" indent="-152400">
-              <a:spcAft>
-                <a:spcPts val="300"/>
-              </a:spcAft>
-              <a:buSzPct val="100000"/>
-              <a:buChar char="•"/>
-            </a:pPr>
-            <a:r>
-              <a:rPr lang="en-US" sz="900" dirty="0">
-                <a:solidFill>
-                  <a:srgbClr val="FFFFFF"/>
-                </a:solidFill>
-                <a:latin typeface="Calibri" pitchFamily="34" charset="0"/>
-                <a:ea typeface="Calibri" pitchFamily="34" charset="-122"/>
-                <a:cs typeface="Calibri" pitchFamily="34" charset="-120"/>
-              </a:rPr>
-              <a:t>Confirmer les loyers de octobre 2026 (129,6 M), encaissés en fonctionnement de FIRST.</a:t>
-            </a:r>
-            <a:endParaRPr lang="en-US" sz="1300" dirty="0"/>
-          </a:p>
-          <a:p>
-            <a:pPr marL="152400" indent="-152400">
-              <a:spcAft>
-                <a:spcPts val="300"/>
-              </a:spcAft>
-              <a:buSzPct val="100000"/>
-              <a:buChar char="•"/>
-            </a:pPr>
-            <a:r>
-              <a:rPr lang="en-US" sz="900" dirty="0">
-                <a:solidFill>
-                  <a:srgbClr val="FFFFFF"/>
-                </a:solidFill>
-                <a:latin typeface="Calibri" pitchFamily="34" charset="0"/>
-                <a:ea typeface="Calibri" pitchFamily="34" charset="-122"/>
-                <a:cs typeface="Calibri" pitchFamily="34" charset="-120"/>
-              </a:rPr>
-              <a:t>Revoir les 25 lignes non retenues du reporting (intragroupe, droits d'enregistrement, loyers encaissés).</a:t>
-            </a:r>
-            <a:endParaRPr lang="en-US" sz="1300" dirty="0"/>
-          </a:p>
-        </p:txBody>
-      </p:sp>
-      <p:pic>
-        <p:nvPicPr>
-          <p:cNvPr id="19" name="Image 0" descr="preencoded.png">    </p:cNvPr>
-          <p:cNvPicPr>
-            <a:picLocks noChangeAspect="1"/>
-          </p:cNvPicPr>
-          <p:nvPr/>
-        </p:nvPicPr>
-        <p:blipFill>
-          <a:blip r:embed="rId1"/>
-          <a:stretch>
-            <a:fillRect/>
-          </a:stretch>
-        </p:blipFill>
-        <p:spPr>
-          <a:xfrm>
-            <a:off x="11018520" y="6382512"/>
-            <a:ext cx="530352" cy="329184"/>
-          </a:xfrm>
-          <a:prstGeom prst="rect">
-            <a:avLst/>
-          </a:prstGeom>
-        </p:spPr>
-      </p:pic>
-      <p:sp>
-        <p:nvSpPr>
-          <p:cNvPr id="20" name="Text 16"/>
-          <p:cNvSpPr txBox="1"/>
-          <p:nvPr/>
-        </p:nvSpPr>
-        <p:spPr>
-          <a:xfrm>
-            <a:off x="11612880" y="6400800"/>
-            <a:ext cx="365760" cy="274320"/>
-          </a:xfrm>
-          <a:prstGeom prst="rect">
-            <a:avLst/>
-          </a:prstGeom>
-          <a:noFill/>
-          <a:ln/>
-        </p:spPr>
-        <p:txBody>
-          <a:bodyPr wrap="square" lIns="0" tIns="0" rIns="0" bIns="0" rtlCol="0" anchor="ctr"/>
-          <a:lstStyle/>
-          <a:p>
-            <a:pPr indent="0" marL="0">
-              <a:buNone/>
-            </a:pPr>
-            <a:r>
-              <a:rPr lang="en-US" sz="900" dirty="0">
-                <a:solidFill>
-                  <a:srgbClr val="6B7280"/>
-                </a:solidFill>
-                <a:latin typeface="Calibri" pitchFamily="34" charset="0"/>
-                <a:ea typeface="Calibri" pitchFamily="34" charset="-122"/>
-                <a:cs typeface="Calibri" pitchFamily="34" charset="-120"/>
-              </a:rPr>
-              <a:t>5</a:t>
-            </a:r>
-            <a:endParaRPr lang="en-US" sz="900" dirty="0"/>
-          </a:p>
-        </p:txBody>
-      </p:sp>
-    </p:spTree>
-  </p:cSld>
-  <p:clrMapOvr>
-    <a:masterClrMapping/>
-  </p:clrMapOvr>
-</p:sld>
-</file>
-
-<file path=ppt/slides/slide6.xml><?xml version="1.0" encoding="utf-8"?>
-<p:sld xmlns:a="http://schemas.openxmlformats.org/drawingml/2006/main" xmlns:r="http://schemas.openxmlformats.org/officeDocument/2006/relationships" xmlns:p="http://schemas.openxmlformats.org/presentationml/2006/main">
-  <p:cSld name="Slide 6">
-    <p:bg>
-      <p:bgPr>
-        <a:solidFill>
-          <a:srgbClr val="FFFFFF"/>
-        </a:solidFill>
-      </p:bgPr>
-    </p:bg>
-    <p:spTree>
-      <p:nvGrpSpPr>
-        <p:cNvPr id="1" name=""/>
-        <p:cNvGrpSpPr/>
-        <p:nvPr/>
-      </p:nvGrpSpPr>
-      <p:grpSpPr>
-        <a:xfrm>
-          <a:off x="0" y="0"/>
-          <a:ext cx="0" cy="0"/>
-          <a:chOff x="0" y="0"/>
-          <a:chExt cx="0" cy="0"/>
-        </a:xfrm>
-      </p:grpSpPr>
-      <p:sp>
-        <p:nvSpPr>
-          <p:cNvPr id="2" name="Text 0"/>
-          <p:cNvSpPr txBox="1"/>
-          <p:nvPr/>
-        </p:nvSpPr>
-        <p:spPr>
-          <a:xfrm>
-            <a:off x="457200" y="274320"/>
-            <a:ext cx="11247120" cy="548640"/>
-          </a:xfrm>
-          <a:prstGeom prst="rect">
-            <a:avLst/>
-          </a:prstGeom>
-          <a:noFill/>
-          <a:ln/>
-        </p:spPr>
-        <p:txBody>
-          <a:bodyPr wrap="square" lIns="0" tIns="0" rIns="0" bIns="0" rtlCol="0" anchor="ctr"/>
-          <a:lstStyle/>
-          <a:p>
-            <a:pPr indent="0" marL="0">
-              <a:buNone/>
-            </a:pPr>
-            <a:r>
-              <a:rPr lang="en-US" sz="2600" b="1" dirty="0">
-                <a:solidFill>
-                  <a:srgbClr val="002C50"/>
-                </a:solidFill>
-                <a:latin typeface="Calibri" pitchFamily="34" charset="0"/>
-                <a:ea typeface="Calibri" pitchFamily="34" charset="-122"/>
-                <a:cs typeface="Calibri" pitchFamily="34" charset="-120"/>
-              </a:rPr>
-              <a:t>B. Paiement – 3. Équilibrage S1</a:t>
+              <a:t>B. Paiement – 2. Équilibrage Semaine 1</a:t>
             </a:r>
             <a:endParaRPr lang="en-US" sz="2600" dirty="0"/>
           </a:p>
@@ -20387,7 +15951,7 @@
                 <a:ea typeface="Calibri" pitchFamily="34" charset="-122"/>
                 <a:cs typeface="Calibri" pitchFamily="34" charset="-120"/>
               </a:rPr>
-              <a:t>À payer en S1 (fonctionnement, projets, échéances)</a:t>
+              <a:t>À payer en Semaine 1 (sociétés et projets)</a:t>
             </a:r>
             <a:endParaRPr lang="en-US" sz="1050" dirty="0"/>
           </a:p>
@@ -20702,7 +16266,7 @@
                 <a:ea typeface="Calibri" pitchFamily="34" charset="-122"/>
                 <a:cs typeface="Calibri" pitchFamily="34" charset="-120"/>
               </a:rPr>
-              <a:t>Reste à financer en S1 après virements</a:t>
+              <a:t>Reste à financer en Semaine 1 après virements</a:t>
             </a:r>
             <a:endParaRPr lang="en-US" sz="1050" dirty="0"/>
           </a:p>
@@ -20710,7 +16274,7 @@
       </p:sp>
       <p:graphicFrame>
         <p:nvGraphicFramePr>
-          <p:cNvPr id="7" name="Table 0"/>
+          <p:cNvPr id="6" name="Table 0"/>
           <p:cNvGraphicFramePr>
             <a:graphicFrameLocks noGrp="1"/>
           </p:cNvGraphicFramePr>
@@ -20892,7 +16456,7 @@
                           <a:ea typeface="Calibri" pitchFamily="34" charset="-122"/>
                           <a:cs typeface="Calibri" pitchFamily="34" charset="-120"/>
                         </a:rPr>
-                        <a:t>Flux S1</a:t>
+                        <a:t>Flux Semaine 1</a:t>
                       </a:r>
                       <a:endParaRPr lang="en-US" sz="850" dirty="0">
                         <a:latin typeface="Calibri" charset="0"/>
@@ -27349,7 +22913,7 @@
                 <a:ea typeface="Calibri" pitchFamily="34" charset="-122"/>
                 <a:cs typeface="Calibri" pitchFamily="34" charset="-120"/>
               </a:rPr>
-              <a:t>Reste à financer = somme des soldes théoriques négatifs, compte par compte (détail dans l'onglet « Équilibrage S1 » du reporting).</a:t>
+              <a:t>Reste à financer = somme des soldes théoriques négatifs, compte par compte (détail dans l'onglet d'équilibrage du reporting).</a:t>
             </a:r>
             <a:endParaRPr lang="en-US" sz="950" dirty="0"/>
           </a:p>
@@ -27412,7 +22976,7 @@
                 <a:ea typeface="Calibri" pitchFamily="34" charset="-122"/>
                 <a:cs typeface="Calibri" pitchFamily="34" charset="-120"/>
               </a:rPr>
-              <a:t>6</a:t>
+              <a:t>5</a:t>
             </a:r>
             <a:endParaRPr lang="en-US" sz="900" dirty="0"/>
           </a:p>
